--- a/docs/mavra-system.pptx
+++ b/docs/mavra-system.pptx
@@ -11,9 +11,13 @@
     <p:sldId id="259" r:id="rId5"/>
     <p:sldId id="260" r:id="rId6"/>
     <p:sldId id="261" r:id="rId7"/>
+    <p:sldId id="262" r:id="rId8"/>
+    <p:sldId id="263" r:id="rId9"/>
+    <p:sldId id="264" r:id="rId10"/>
+    <p:sldId id="265" r:id="rId11"/>
   </p:sldIdLst>
   <p:notesMasterIdLst>
-    <p:notesMasterId r:id="rId8"/>
+    <p:notesMasterId r:id="rId12"/>
   </p:notesMasterIdLst>
   <p:sldSz cx="12192000" cy="6858000"/>
   <p:notesSz cx="6858000" cy="12192000"/>
@@ -112,26 +116,30 @@
   <p:extLst>
     <p:ext uri="{521415D9-36F7-43E2-AB2F-B90AF26B5E84}">
       <p14:sectionLst xmlns:p14="http://schemas.microsoft.com/office/powerpoint/2010/main">
-        <p14:section name="开场" id="{a0825a03-b6d3-470f-883b-3050e231b7c7}">
+        <p14:section name="开场" id="{cf0377aa-7372-28be-78f3-9fc83703f0c1}">
           <p14:sldIdLst>
             <p14:sldId id="256"/>
+            <p14:sldId id="257"/>
           </p14:sldIdLst>
         </p14:section>
-        <p14:section name="功能与结构" id="{ce010cf9-0cae-d3a0-498d-76784731c973}">
+        <p14:section name="结构与功能" id="{1d1490c8-87ed-4bbb-7fda-a6ab209c457c}">
           <p14:sldIdLst>
-            <p14:sldId id="257"/>
             <p14:sldId id="258"/>
+            <p14:sldId id="259"/>
           </p14:sldIdLst>
         </p14:section>
-        <p14:section name="工作流" id="{1b2ec995-24fa-730d-dca8-3dd9eef07257}">
+        <p14:section name="工作流" id="{e3f55606-be7b-032b-ebeb-4081bf9a985a}">
           <p14:sldIdLst>
-            <p14:sldId id="259"/>
             <p14:sldId id="260"/>
+            <p14:sldId id="261"/>
+            <p14:sldId id="262"/>
+            <p14:sldId id="263"/>
+            <p14:sldId id="264"/>
           </p14:sldIdLst>
         </p14:section>
-        <p14:section name="小结" id="{f87f79ae-74e0-9f52-10aa-ade3c527674d}">
+        <p14:section name="小结" id="{2c3396e8-5e8a-e153-9de2-1b0f97557451}">
           <p14:sldIdLst>
-            <p14:sldId id="261"/>
+            <p14:sldId id="265"/>
           </p14:sldIdLst>
         </p14:section>
       </p14:sectionLst>
@@ -538,7 +546,7 @@
           <a:p>
             <a:r>
               <a:rPr lang="en-US" dirty="0"/>
-              <a:t>这次只讲系统本身：它由哪几部分组成、各做什么、一个请求怎么走、口径怎么维护。三张图讲的是同一个例子：门店退货金额。</a:t>
+              <a:t>这次只讲系统：它要解决什么问题、由哪几部分组成、各做什么、请求怎么走、口径坏了怎么办。全程用一个例子：门店退货金额。</a:t>
             </a:r>
             <a:endParaRPr lang="en-US" dirty="0"/>
           </a:p>
@@ -562,6 +570,94 @@
             <a:fld id="{F7021451-1387-4CA6-816F-3879F97B5CBC}" type="slidenum">
               <a:rPr lang="en-US"/>
               <a:t>1</a:t>
+            </a:fld>
+            <a:endParaRPr lang="en-US"/>
+          </a:p>
+        </p:txBody>
+      </p:sp>
+    </p:spTree>
+    <p:extLst>
+      <p:ext uri="{BB962C8B-B14F-4D97-AF65-F5344CB8AC3E}">
+        <p14:creationId xmlns:p14="http://schemas.microsoft.com/office/powerpoint/2010/main" val="1024086991"/>
+      </p:ext>
+    </p:extLst>
+  </p:cSld>
+  <p:clrMapOvr>
+    <a:masterClrMapping/>
+  </p:clrMapOvr>
+</p:notes>
+</file>
+
+<file path=ppt/notesSlides/notesSlide10.xml><?xml version="1.0" encoding="utf-8"?>
+<p:notes xmlns:a="http://schemas.openxmlformats.org/drawingml/2006/main" xmlns:r="http://schemas.openxmlformats.org/officeDocument/2006/relationships" xmlns:p="http://schemas.openxmlformats.org/presentationml/2006/main">
+  <p:cSld>
+    <p:spTree>
+      <p:nvGrpSpPr>
+        <p:cNvPr id="1" name=""/>
+        <p:cNvGrpSpPr/>
+        <p:nvPr/>
+      </p:nvGrpSpPr>
+      <p:grpSpPr>
+        <a:xfrm>
+          <a:off x="0" y="0"/>
+          <a:ext cx="0" cy="0"/>
+          <a:chOff x="0" y="0"/>
+          <a:chExt cx="0" cy="0"/>
+        </a:xfrm>
+      </p:grpSpPr>
+      <p:sp>
+        <p:nvSpPr>
+          <p:cNvPr id="2" name="Slide Image Placeholder 1"/>
+          <p:cNvSpPr>
+            <a:spLocks noGrp="1" noRot="1" noChangeAspect="1"/>
+          </p:cNvSpPr>
+          <p:nvPr>
+            <p:ph type="sldImg"/>
+          </p:nvPr>
+        </p:nvSpPr>
+        <p:spPr/>
+      </p:sp>
+      <p:sp>
+        <p:nvSpPr>
+          <p:cNvPr id="3" name="Notes Placeholder 2"/>
+          <p:cNvSpPr>
+            <a:spLocks noGrp="1"/>
+          </p:cNvSpPr>
+          <p:nvPr>
+            <p:ph type="body" idx="1"/>
+          </p:nvPr>
+        </p:nvSpPr>
+        <p:spPr/>
+        <p:txBody>
+          <a:bodyPr/>
+          <a:lstStyle/>
+          <a:p>
+            <a:r>
+              <a:rPr lang="en-US" dirty="0"/>
+              <a:t>三句话收尾：结构是智能体和数据库之间的三个模块；功能是学、存、查口径，数据变了检查，用之前核对；工作流是查口径、执行 SQL，以及口径坏了以后检查、修复或停用、重新学习。</a:t>
+            </a:r>
+            <a:endParaRPr lang="en-US" dirty="0"/>
+          </a:p>
+        </p:txBody>
+      </p:sp>
+      <p:sp>
+        <p:nvSpPr>
+          <p:cNvPr id="4" name="Slide Number Placeholder 3"/>
+          <p:cNvSpPr>
+            <a:spLocks noGrp="1"/>
+          </p:cNvSpPr>
+          <p:nvPr>
+            <p:ph type="sldNum" sz="quarter" idx="10"/>
+          </p:nvPr>
+        </p:nvSpPr>
+        <p:spPr/>
+        <p:txBody>
+          <a:bodyPr/>
+          <a:lstStyle/>
+          <a:p>
+            <a:fld id="{F7021451-1387-4CA6-816F-3879F97B5CBC}" type="slidenum">
+              <a:rPr lang="en-US"/>
+              <a:t>10</a:t>
             </a:fld>
             <a:endParaRPr lang="en-US"/>
           </a:p>
@@ -626,7 +722,7 @@
           <a:p>
             <a:r>
               <a:rPr lang="en-US" dirty="0"/>
-              <a:t>先用一句话说清问题：口径被共享，数据会变，口径可能悄悄算错。MAVRA 就做三件事：学到口径并共享（紫色）、数据变了就维护（蓝色）、使用时把关（橙色）。后面三张图里用的是同一套颜色。</a:t>
+              <a:t>先讲清楚问题。智能体 A 花了很多步学会“门店退货金额”怎么算，口径被存下来给别的智能体用。后来 ETL 改了写法，每笔退货多写一行“申请”状态，表结构没变，SQL 还能跑，但同一笔退货被算了两次，5 月的答案翻倍。用口径的智能体没有标准答案，发现不了。MAVRA 就是来管这件事的。</a:t>
             </a:r>
             <a:endParaRPr lang="en-US" dirty="0"/>
           </a:p>
@@ -714,7 +810,7 @@
           <a:p>
             <a:r>
               <a:rPr lang="en-US" dirty="0"/>
-              <a:t>左边是用户端智能体，它发两种请求。蓝色 1–5 是文本请求：智能体只说“退货金额”，查找从共享知识库读出定义；如果某个条件在当前表版本上还没有检查结果，就交给维护去查，查完存回去，再把有效定义返回。橙色 6–8 是 SQL 请求：智能体写好 SQL 并声明用了修订 2，同快照验证复用已有的检查结果，在同一快照上执行查询。紫色是学习：分析优化器学到的定义经准入检查后发布进来。</a:t>
+              <a:t>智能体不直接碰数据库：问口径、发 SQL 都经过 MAVRA。MAVRA 里面三块：请求处理负责接待；共享知识库存口径和检查结果；学习与维护负责学新口径、在数据变化后管好旧口径。数据库那边，ETL 一直在写新数据，这就是口径会过期的原因。</a:t>
             </a:r>
             <a:endParaRPr lang="en-US" dirty="0"/>
           </a:p>
@@ -802,7 +898,7 @@
           <a:p>
             <a:r>
               <a:rPr lang="en-US" dirty="0"/>
-              <a:t>上面一行是查找：先按名称匹配，再比较定义读过的表有没有变（store_returns 从 14 变成 15），然后逐个条件查检查结果：“每笔退货一行”退货率已经查过，直接复用；date_dim 没变，复用；“日期不丢失”在 15 上没有结果，现在查并存进去。最后返回有效的修订 2。下面一行是执行：智能体按返回的字段写 SQL，声明修订 2；先核对这个修订能不能用，再在查询的快照上核对条件——这期间又有一次写入，表版本变成 16，所以两个条件在快照里重查并存入；最后在同一快照上执行，得到 3,294,349.93。中间的表就是检查结果，列出谁存的、哪一步复用了它。</a:t>
+              <a:t>三个模块的分工。请求处理是前台；共享知识库是记忆，除了口径本身，还存每个条件的检查结果；学习与维护是后台：内置的分析优化器（一个大模型智能体）负责学新口径，维护负责在数据变化后检查、修复或停用。</a:t>
             </a:r>
             <a:endParaRPr lang="en-US" dirty="0"/>
           </a:p>
@@ -890,7 +986,7 @@
           <a:p>
             <a:r>
               <a:rPr lang="en-US" dirty="0"/>
-              <a:t>跟着退货金额这个定义走一遍。分析优化器回答“4 月门店退货金额”，答案判对、通过准入，发布修订 1。之后追加迟到的退货，这是正常写入：条件仍成立，没变的表直接复用结果，还是修订 1。再之后每笔退货多了一行申请状态，这是破坏性写入：“每笔退货一行”不成立，修订 1 失效，不维护的话 5 月的答案会翻倍。修复时在取值很少的列上逐个试过滤，只有 sr_status = 完成 能恢复每笔退货一行，而且在学习时刻的数据上和智能体当初的 SQL 答案相同，于是发布修订 2。红框是另一种情况：追加整份备份副本后有两个过滤都能用，无法判断哪个对，就宁可失效，等重新学习。</a:t>
+              <a:t>智能体只说“退货金额”。第一步按名字或别名找到口径；第二步看这个口径用到的表有没有被写过；写过就进入第三步，重新确认它依赖的条件——这里能复用就复用，下一页专门讲；最后把口径和参考 SQL 返回。数据没变就直接返回；口径已经停用就明确告诉智能体。</a:t>
             </a:r>
             <a:endParaRPr lang="en-US" dirty="0"/>
           </a:p>
@@ -978,7 +1074,7 @@
           <a:p>
             <a:r>
               <a:rPr lang="en-US" dirty="0"/>
-              <a:t>最后用三句话收尾：结构是三个模块；功能是学习、维护、把关；工作流是先查有效定义、再在快照上验证执行，检查结果能复用就复用。</a:t>
+              <a:t>这是 MAVRA 省工作量的地方。很多口径依赖同一个条件，比如退货金额和退货率都要求“每笔退货只有一行”。检查结果按“条件 + 数据版本”保存：退货率先查过，退货金额再来就直接用。表一被写入，版本号就变，旧结果对新数据不再算数，下次用到时重查一次，再存起来。</a:t>
             </a:r>
             <a:endParaRPr lang="en-US" dirty="0"/>
           </a:p>
@@ -1002,6 +1098,270 @@
             <a:fld id="{F7021451-1387-4CA6-816F-3879F97B5CBC}" type="slidenum">
               <a:rPr lang="en-US"/>
               <a:t>6</a:t>
+            </a:fld>
+            <a:endParaRPr lang="en-US"/>
+          </a:p>
+        </p:txBody>
+      </p:sp>
+    </p:spTree>
+    <p:extLst>
+      <p:ext uri="{BB962C8B-B14F-4D97-AF65-F5344CB8AC3E}">
+        <p14:creationId xmlns:p14="http://schemas.microsoft.com/office/powerpoint/2010/main" val="1024086991"/>
+      </p:ext>
+    </p:extLst>
+  </p:cSld>
+  <p:clrMapOvr>
+    <a:masterClrMapping/>
+  </p:clrMapOvr>
+</p:notes>
+</file>
+
+<file path=ppt/notesSlides/notesSlide7.xml><?xml version="1.0" encoding="utf-8"?>
+<p:notes xmlns:a="http://schemas.openxmlformats.org/drawingml/2006/main" xmlns:r="http://schemas.openxmlformats.org/officeDocument/2006/relationships" xmlns:p="http://schemas.openxmlformats.org/presentationml/2006/main">
+  <p:cSld>
+    <p:spTree>
+      <p:nvGrpSpPr>
+        <p:cNvPr id="1" name=""/>
+        <p:cNvGrpSpPr/>
+        <p:nvPr/>
+      </p:nvGrpSpPr>
+      <p:grpSpPr>
+        <a:xfrm>
+          <a:off x="0" y="0"/>
+          <a:ext cx="0" cy="0"/>
+          <a:chOff x="0" y="0"/>
+          <a:chExt cx="0" cy="0"/>
+        </a:xfrm>
+      </p:grpSpPr>
+      <p:sp>
+        <p:nvSpPr>
+          <p:cNvPr id="2" name="Slide Image Placeholder 1"/>
+          <p:cNvSpPr>
+            <a:spLocks noGrp="1" noRot="1" noChangeAspect="1"/>
+          </p:cNvSpPr>
+          <p:nvPr>
+            <p:ph type="sldImg"/>
+          </p:nvPr>
+        </p:nvSpPr>
+        <p:spPr/>
+      </p:sp>
+      <p:sp>
+        <p:nvSpPr>
+          <p:cNvPr id="3" name="Notes Placeholder 2"/>
+          <p:cNvSpPr>
+            <a:spLocks noGrp="1"/>
+          </p:cNvSpPr>
+          <p:nvPr>
+            <p:ph type="body" idx="1"/>
+          </p:nvPr>
+        </p:nvSpPr>
+        <p:spPr/>
+        <p:txBody>
+          <a:bodyPr/>
+          <a:lstStyle/>
+          <a:p>
+            <a:r>
+              <a:rPr lang="en-US" dirty="0"/>
+              <a:t>智能体拿到口径后写 SQL，并在请求里声明用的是哪个口径的哪一版。MAVRA 先核对：这一版有没有被替换或停用；再在这条查询要读的那份数据上确认条件成立，能复用的检查结果直接用。核对和执行用同一个数据库快照，所以中间即使有写入，也不会出现“核对时对、执行时错”。</a:t>
+            </a:r>
+            <a:endParaRPr lang="en-US" dirty="0"/>
+          </a:p>
+        </p:txBody>
+      </p:sp>
+      <p:sp>
+        <p:nvSpPr>
+          <p:cNvPr id="4" name="Slide Number Placeholder 3"/>
+          <p:cNvSpPr>
+            <a:spLocks noGrp="1"/>
+          </p:cNvSpPr>
+          <p:nvPr>
+            <p:ph type="sldNum" sz="quarter" idx="10"/>
+          </p:nvPr>
+        </p:nvSpPr>
+        <p:spPr/>
+        <p:txBody>
+          <a:bodyPr/>
+          <a:lstStyle/>
+          <a:p>
+            <a:fld id="{F7021451-1387-4CA6-816F-3879F97B5CBC}" type="slidenum">
+              <a:rPr lang="en-US"/>
+              <a:t>7</a:t>
+            </a:fld>
+            <a:endParaRPr lang="en-US"/>
+          </a:p>
+        </p:txBody>
+      </p:sp>
+    </p:spTree>
+    <p:extLst>
+      <p:ext uri="{BB962C8B-B14F-4D97-AF65-F5344CB8AC3E}">
+        <p14:creationId xmlns:p14="http://schemas.microsoft.com/office/powerpoint/2010/main" val="1024086991"/>
+      </p:ext>
+    </p:extLst>
+  </p:cSld>
+  <p:clrMapOvr>
+    <a:masterClrMapping/>
+  </p:clrMapOvr>
+</p:notes>
+</file>
+
+<file path=ppt/notesSlides/notesSlide8.xml><?xml version="1.0" encoding="utf-8"?>
+<p:notes xmlns:a="http://schemas.openxmlformats.org/drawingml/2006/main" xmlns:r="http://schemas.openxmlformats.org/officeDocument/2006/relationships" xmlns:p="http://schemas.openxmlformats.org/presentationml/2006/main">
+  <p:cSld>
+    <p:spTree>
+      <p:nvGrpSpPr>
+        <p:cNvPr id="1" name=""/>
+        <p:cNvGrpSpPr/>
+        <p:nvPr/>
+      </p:nvGrpSpPr>
+      <p:grpSpPr>
+        <a:xfrm>
+          <a:off x="0" y="0"/>
+          <a:ext cx="0" cy="0"/>
+          <a:chOff x="0" y="0"/>
+          <a:chExt cx="0" cy="0"/>
+        </a:xfrm>
+      </p:grpSpPr>
+      <p:sp>
+        <p:nvSpPr>
+          <p:cNvPr id="2" name="Slide Image Placeholder 1"/>
+          <p:cNvSpPr>
+            <a:spLocks noGrp="1" noRot="1" noChangeAspect="1"/>
+          </p:cNvSpPr>
+          <p:nvPr>
+            <p:ph type="sldImg"/>
+          </p:nvPr>
+        </p:nvSpPr>
+        <p:spPr/>
+      </p:sp>
+      <p:sp>
+        <p:nvSpPr>
+          <p:cNvPr id="3" name="Notes Placeholder 2"/>
+          <p:cNvSpPr>
+            <a:spLocks noGrp="1"/>
+          </p:cNvSpPr>
+          <p:nvPr>
+            <p:ph type="body" idx="1"/>
+          </p:nvPr>
+        </p:nvSpPr>
+        <p:spPr/>
+        <p:txBody>
+          <a:bodyPr/>
+          <a:lstStyle/>
+          <a:p>
+            <a:r>
+              <a:rPr lang="en-US" dirty="0"/>
+              <a:t>把一个口径从生到死串起来。内置的大模型智能体答题学会口径，通过检查后发布第 1 版，各个智能体使用。数据被写入后，MAVRA 检查它依赖的条件：成立就继续用；不成立就先停用，再看能不能修。有唯一的修复，就发布第 2 版，回到使用；没有，就保持停用，等以后重新学习。下一页看具体怎么修。</a:t>
+            </a:r>
+            <a:endParaRPr lang="en-US" dirty="0"/>
+          </a:p>
+        </p:txBody>
+      </p:sp>
+      <p:sp>
+        <p:nvSpPr>
+          <p:cNvPr id="4" name="Slide Number Placeholder 3"/>
+          <p:cNvSpPr>
+            <a:spLocks noGrp="1"/>
+          </p:cNvSpPr>
+          <p:nvPr>
+            <p:ph type="sldNum" sz="quarter" idx="10"/>
+          </p:nvPr>
+        </p:nvSpPr>
+        <p:spPr/>
+        <p:txBody>
+          <a:bodyPr/>
+          <a:lstStyle/>
+          <a:p>
+            <a:fld id="{F7021451-1387-4CA6-816F-3879F97B5CBC}" type="slidenum">
+              <a:rPr lang="en-US"/>
+              <a:t>8</a:t>
+            </a:fld>
+            <a:endParaRPr lang="en-US"/>
+          </a:p>
+        </p:txBody>
+      </p:sp>
+    </p:spTree>
+    <p:extLst>
+      <p:ext uri="{BB962C8B-B14F-4D97-AF65-F5344CB8AC3E}">
+        <p14:creationId xmlns:p14="http://schemas.microsoft.com/office/powerpoint/2010/main" val="1024086991"/>
+      </p:ext>
+    </p:extLst>
+  </p:cSld>
+  <p:clrMapOvr>
+    <a:masterClrMapping/>
+  </p:clrMapOvr>
+</p:notes>
+</file>
+
+<file path=ppt/notesSlides/notesSlide9.xml><?xml version="1.0" encoding="utf-8"?>
+<p:notes xmlns:a="http://schemas.openxmlformats.org/drawingml/2006/main" xmlns:r="http://schemas.openxmlformats.org/officeDocument/2006/relationships" xmlns:p="http://schemas.openxmlformats.org/presentationml/2006/main">
+  <p:cSld>
+    <p:spTree>
+      <p:nvGrpSpPr>
+        <p:cNvPr id="1" name=""/>
+        <p:cNvGrpSpPr/>
+        <p:nvPr/>
+      </p:nvGrpSpPr>
+      <p:grpSpPr>
+        <a:xfrm>
+          <a:off x="0" y="0"/>
+          <a:ext cx="0" cy="0"/>
+          <a:chOff x="0" y="0"/>
+          <a:chExt cx="0" cy="0"/>
+        </a:xfrm>
+      </p:grpSpPr>
+      <p:sp>
+        <p:nvSpPr>
+          <p:cNvPr id="2" name="Slide Image Placeholder 1"/>
+          <p:cNvSpPr>
+            <a:spLocks noGrp="1" noRot="1" noChangeAspect="1"/>
+          </p:cNvSpPr>
+          <p:nvPr>
+            <p:ph type="sldImg"/>
+          </p:nvPr>
+        </p:nvSpPr>
+        <p:spPr/>
+      </p:sp>
+      <p:sp>
+        <p:nvSpPr>
+          <p:cNvPr id="3" name="Notes Placeholder 2"/>
+          <p:cNvSpPr>
+            <a:spLocks noGrp="1"/>
+          </p:cNvSpPr>
+          <p:nvPr>
+            <p:ph type="body" idx="1"/>
+          </p:nvPr>
+        </p:nvSpPr>
+        <p:spPr/>
+        <p:txBody>
+          <a:bodyPr/>
+          <a:lstStyle/>
+          <a:p>
+            <a:r>
+              <a:rPr lang="en-US" dirty="0"/>
+              <a:t>具体看怎么修。新写进来的“申请”行让同一笔退货出现两行，“每笔退货只有一行”不成立，第 1 版先停用。修复时在取值很少的列上逐个试过滤：只算“完成”能做到每笔一行、一笔不少；只算“申请”会丢掉早期退货。只有一个能用，再用学习时的数据核对，新口径算出的 4 月答案和当初一样，就发布第 2 版。如果有两个过滤都能用，比如追加了整份备份，就没法判断，宁可停用。</a:t>
+            </a:r>
+            <a:endParaRPr lang="en-US" dirty="0"/>
+          </a:p>
+        </p:txBody>
+      </p:sp>
+      <p:sp>
+        <p:nvSpPr>
+          <p:cNvPr id="4" name="Slide Number Placeholder 3"/>
+          <p:cNvSpPr>
+            <a:spLocks noGrp="1"/>
+          </p:cNvSpPr>
+          <p:nvPr>
+            <p:ph type="sldNum" sz="quarter" idx="10"/>
+          </p:nvPr>
+        </p:nvSpPr>
+        <p:spPr/>
+        <p:txBody>
+          <a:bodyPr/>
+          <a:lstStyle/>
+          <a:p>
+            <a:fld id="{F7021451-1387-4CA6-816F-3879F97B5CBC}" type="slidenum">
+              <a:rPr lang="en-US"/>
+              <a:t>9</a:t>
             </a:fld>
             <a:endParaRPr lang="en-US"/>
           </a:p>
@@ -1084,8 +1444,8 @@
         </p:nvSpPr>
         <p:spPr>
           <a:xfrm>
-            <a:off x="731520" y="2011680"/>
-            <a:ext cx="10698480" cy="1645920"/>
+            <a:off x="548640" y="1920240"/>
+            <a:ext cx="11094415" cy="1737360"/>
           </a:xfrm>
           <a:prstGeom prst="rect">
             <a:avLst/>
@@ -1126,8 +1486,8 @@
         </p:nvSpPr>
         <p:spPr>
           <a:xfrm>
-            <a:off x="731520" y="3931920"/>
-            <a:ext cx="10698480" cy="640080"/>
+            <a:off x="548640" y="3931920"/>
+            <a:ext cx="11094415" cy="640080"/>
           </a:xfrm>
           <a:prstGeom prst="rect">
             <a:avLst/>
@@ -1138,7 +1498,7 @@
         <p:txBody>
           <a:bodyPr wrap="square" rtlCol="0"/>
           <a:lstStyle>
-            <a:lvl1pPr indent="0" marL="0">
+            <a:lvl1pPr algn="l" indent="0" marL="0">
               <a:buNone/>
               <a:defRPr lang="en-US" sz="2200" dirty="0">
                 <a:solidFill>
@@ -1151,7 +1511,7 @@
             </a:lvl1pPr>
           </a:lstStyle>
           <a:p>
-            <a:pPr indent="0" marL="0">
+            <a:pPr algn="l" indent="0" marL="0">
               <a:buNone/>
             </a:pPr>
             <a:endParaRPr lang="en-US" sz="2200" dirty="0"/>
@@ -1322,8 +1682,8 @@
         </p:nvSpPr>
         <p:spPr>
           <a:xfrm>
-            <a:off x="731520" y="548640"/>
-            <a:ext cx="10698480" cy="822960"/>
+            <a:off x="548640" y="548640"/>
+            <a:ext cx="11094415" cy="822960"/>
           </a:xfrm>
           <a:prstGeom prst="rect">
             <a:avLst/>
@@ -1765,8 +2125,8 @@
         </p:nvSpPr>
         <p:spPr>
           <a:xfrm>
-            <a:off x="731520" y="2011680"/>
-            <a:ext cx="10698480" cy="1645920"/>
+            <a:off x="548640" y="1920240"/>
+            <a:ext cx="11094415" cy="1737360"/>
           </a:xfrm>
           <a:prstGeom prst="rect">
             <a:avLst/>
@@ -1790,7 +2150,7 @@
                 <a:ea typeface="Microsoft YaHei" pitchFamily="34" charset="-122"/>
                 <a:cs typeface="Microsoft YaHei" pitchFamily="34" charset="-120"/>
               </a:rPr>
-              <a:t>MAVRA：让共享的指标口径</a:t>
+              <a:t>MAVRA：让智能体共享的指标口径，</a:t>
             </a:r>
             <a:endParaRPr lang="en-US" sz="4000" dirty="0"/>
           </a:p>
@@ -1807,7 +2167,7 @@
                 <a:ea typeface="Microsoft YaHei" pitchFamily="34" charset="-122"/>
                 <a:cs typeface="Microsoft YaHei" pitchFamily="34" charset="-120"/>
               </a:rPr>
-              <a:t>在数据变化后仍然可靠</a:t>
+              <a:t>数据变了也不出错</a:t>
             </a:r>
             <a:endParaRPr lang="en-US" sz="4000" dirty="0"/>
           </a:p>
@@ -1823,8 +2183,8 @@
         </p:nvSpPr>
         <p:spPr>
           <a:xfrm>
-            <a:off x="731520" y="3931920"/>
-            <a:ext cx="10698480" cy="640080"/>
+            <a:off x="548640" y="3931920"/>
+            <a:ext cx="11094415" cy="640080"/>
           </a:xfrm>
           <a:prstGeom prst="rect">
             <a:avLst/>
@@ -1836,21 +2196,402 @@
           <a:bodyPr wrap="square" lIns="0" tIns="0" rIns="0" bIns="0" rtlCol="0" anchor="t"/>
           <a:lstStyle/>
           <a:p>
+            <a:pPr algn="l" indent="0" marL="0">
+              <a:buNone/>
+            </a:pPr>
+            <a:r>
+              <a:rPr lang="en-US" sz="2200" dirty="0">
+                <a:solidFill>
+                  <a:srgbClr val="CADCFC"/>
+                </a:solidFill>
+                <a:latin typeface="Microsoft YaHei" pitchFamily="34" charset="0"/>
+                <a:ea typeface="Microsoft YaHei" pitchFamily="34" charset="-122"/>
+                <a:cs typeface="Microsoft YaHei" pitchFamily="34" charset="-120"/>
+              </a:rPr>
+              <a:t>系统结构 · 功能 · 工作流</a:t>
+            </a:r>
+            <a:endParaRPr lang="en-US" sz="2200" dirty="0"/>
+          </a:p>
+        </p:txBody>
+      </p:sp>
+    </p:spTree>
+  </p:cSld>
+  <p:clrMapOvr>
+    <a:masterClrMapping/>
+  </p:clrMapOvr>
+</p:sld>
+</file>
+
+<file path=ppt/slides/slide10.xml><?xml version="1.0" encoding="utf-8"?>
+<p:sld xmlns:a="http://schemas.openxmlformats.org/drawingml/2006/main" xmlns:r="http://schemas.openxmlformats.org/officeDocument/2006/relationships" xmlns:p="http://schemas.openxmlformats.org/presentationml/2006/main">
+  <p:cSld name="Slide 10">
+    <p:spTree>
+      <p:nvGrpSpPr>
+        <p:cNvPr id="1" name=""/>
+        <p:cNvGrpSpPr/>
+        <p:nvPr/>
+      </p:nvGrpSpPr>
+      <p:grpSpPr>
+        <a:xfrm>
+          <a:off x="0" y="0"/>
+          <a:ext cx="0" cy="0"/>
+          <a:chOff x="0" y="0"/>
+          <a:chExt cx="0" cy="0"/>
+        </a:xfrm>
+      </p:grpSpPr>
+      <p:sp>
+        <p:nvSpPr>
+          <p:cNvPr id="2" name="Text 0"/>
+          <p:cNvSpPr/>
+          <p:nvPr>
+            <p:ph idx="100" type="title" hasCustomPrompt="1"/>
+          </p:nvPr>
+        </p:nvSpPr>
+        <p:spPr>
+          <a:xfrm>
+            <a:off x="548640" y="548640"/>
+            <a:ext cx="11094415" cy="822960"/>
+          </a:xfrm>
+          <a:prstGeom prst="rect">
+            <a:avLst/>
+          </a:prstGeom>
+          <a:noFill/>
+          <a:ln/>
+        </p:spPr>
+        <p:txBody>
+          <a:bodyPr wrap="square" lIns="0" tIns="0" rIns="0" bIns="0" rtlCol="0" anchor="ctr"/>
+          <a:lstStyle/>
+          <a:p>
+            <a:pPr algn="l" indent="0" marL="0">
+              <a:buNone/>
+            </a:pPr>
+            <a:r>
+              <a:rPr lang="en-US" sz="3200" b="1" dirty="0">
+                <a:solidFill>
+                  <a:srgbClr val="FFFFFF"/>
+                </a:solidFill>
+                <a:latin typeface="Microsoft YaHei" pitchFamily="34" charset="0"/>
+                <a:ea typeface="Microsoft YaHei" pitchFamily="34" charset="-122"/>
+                <a:cs typeface="Microsoft YaHei" pitchFamily="34" charset="-120"/>
+              </a:rPr>
+              <a:t>小结</a:t>
+            </a:r>
+            <a:endParaRPr lang="en-US" sz="3200" dirty="0"/>
+          </a:p>
+        </p:txBody>
+      </p:sp>
+      <p:sp>
+        <p:nvSpPr>
+          <p:cNvPr id="3" name="Text 1"/>
+          <p:cNvSpPr/>
+          <p:nvPr/>
+        </p:nvSpPr>
+        <p:spPr>
+          <a:xfrm>
+            <a:off x="548640" y="1737360"/>
+            <a:ext cx="1463040" cy="640080"/>
+          </a:xfrm>
+          <a:prstGeom prst="roundRect">
+            <a:avLst>
+              <a:gd name="adj" fmla="val 14286"/>
+            </a:avLst>
+          </a:prstGeom>
+          <a:solidFill>
+            <a:srgbClr val="1D5BA6"/>
+          </a:solidFill>
+          <a:ln w="12700">
+            <a:solidFill>
+              <a:srgbClr val="1D5BA6"/>
+            </a:solidFill>
+          </a:ln>
+        </p:spPr>
+        <p:txBody>
+          <a:bodyPr wrap="square" lIns="109728" tIns="109728" rIns="109728" bIns="109728" rtlCol="0" anchor="ctr"/>
+          <a:lstStyle/>
+          <a:p>
+            <a:pPr algn="ctr" indent="0" marL="0">
+              <a:lnSpc>
+                <a:spcPct val="110000"/>
+              </a:lnSpc>
+              <a:buNone/>
+            </a:pPr>
+            <a:r>
+              <a:rPr lang="en-US" sz="2000" b="1" dirty="0">
+                <a:solidFill>
+                  <a:srgbClr val="FFFFFF"/>
+                </a:solidFill>
+                <a:latin typeface="Microsoft YaHei" pitchFamily="34" charset="0"/>
+                <a:ea typeface="Microsoft YaHei" pitchFamily="34" charset="-122"/>
+                <a:cs typeface="Microsoft YaHei" pitchFamily="34" charset="-120"/>
+              </a:rPr>
+              <a:t>结构</a:t>
+            </a:r>
+            <a:endParaRPr lang="en-US" sz="2000" dirty="0"/>
+          </a:p>
+        </p:txBody>
+      </p:sp>
+      <p:sp>
+        <p:nvSpPr>
+          <p:cNvPr id="4" name="Text 2"/>
+          <p:cNvSpPr txBox="1"/>
+          <p:nvPr/>
+        </p:nvSpPr>
+        <p:spPr>
+          <a:xfrm>
+            <a:off x="2377440" y="1645920"/>
+            <a:ext cx="9265615" cy="822960"/>
+          </a:xfrm>
+          <a:prstGeom prst="rect">
+            <a:avLst/>
+          </a:prstGeom>
+          <a:noFill/>
+          <a:ln/>
+        </p:spPr>
+        <p:txBody>
+          <a:bodyPr wrap="square" lIns="0" tIns="0" rIns="0" bIns="0" rtlCol="0" anchor="ctr"/>
+          <a:lstStyle/>
+          <a:p>
             <a:pPr indent="0" marL="0">
               <a:buNone/>
             </a:pPr>
             <a:r>
-              <a:rPr lang="en-US" sz="2200" dirty="0">
+              <a:rPr lang="en-US" sz="2000" dirty="0">
+                <a:solidFill>
+                  <a:srgbClr val="FFFFFF"/>
+                </a:solidFill>
+                <a:latin typeface="Microsoft YaHei" pitchFamily="34" charset="0"/>
+                <a:ea typeface="Microsoft YaHei" pitchFamily="34" charset="-122"/>
+                <a:cs typeface="Microsoft YaHei" pitchFamily="34" charset="-120"/>
+              </a:rPr>
+              <a:t>智能体 ↔ MAVRA（请求处理、共享知识库、学习与维护）↔ 数据库</a:t>
+            </a:r>
+            <a:endParaRPr lang="en-US" sz="2000" dirty="0"/>
+          </a:p>
+        </p:txBody>
+      </p:sp>
+      <p:sp>
+        <p:nvSpPr>
+          <p:cNvPr id="5" name="Text 3"/>
+          <p:cNvSpPr/>
+          <p:nvPr/>
+        </p:nvSpPr>
+        <p:spPr>
+          <a:xfrm>
+            <a:off x="548640" y="3108960"/>
+            <a:ext cx="1463040" cy="640080"/>
+          </a:xfrm>
+          <a:prstGeom prst="roundRect">
+            <a:avLst>
+              <a:gd name="adj" fmla="val 14286"/>
+            </a:avLst>
+          </a:prstGeom>
+          <a:solidFill>
+            <a:srgbClr val="1D5BA6"/>
+          </a:solidFill>
+          <a:ln w="12700">
+            <a:solidFill>
+              <a:srgbClr val="1D5BA6"/>
+            </a:solidFill>
+          </a:ln>
+        </p:spPr>
+        <p:txBody>
+          <a:bodyPr wrap="square" lIns="109728" tIns="109728" rIns="109728" bIns="109728" rtlCol="0" anchor="ctr"/>
+          <a:lstStyle/>
+          <a:p>
+            <a:pPr algn="ctr" indent="0" marL="0">
+              <a:lnSpc>
+                <a:spcPct val="110000"/>
+              </a:lnSpc>
+              <a:buNone/>
+            </a:pPr>
+            <a:r>
+              <a:rPr lang="en-US" sz="2000" b="1" dirty="0">
+                <a:solidFill>
+                  <a:srgbClr val="FFFFFF"/>
+                </a:solidFill>
+                <a:latin typeface="Microsoft YaHei" pitchFamily="34" charset="0"/>
+                <a:ea typeface="Microsoft YaHei" pitchFamily="34" charset="-122"/>
+                <a:cs typeface="Microsoft YaHei" pitchFamily="34" charset="-120"/>
+              </a:rPr>
+              <a:t>功能</a:t>
+            </a:r>
+            <a:endParaRPr lang="en-US" sz="2000" dirty="0"/>
+          </a:p>
+        </p:txBody>
+      </p:sp>
+      <p:sp>
+        <p:nvSpPr>
+          <p:cNvPr id="6" name="Text 4"/>
+          <p:cNvSpPr txBox="1"/>
+          <p:nvPr/>
+        </p:nvSpPr>
+        <p:spPr>
+          <a:xfrm>
+            <a:off x="2377440" y="3017520"/>
+            <a:ext cx="9265615" cy="822960"/>
+          </a:xfrm>
+          <a:prstGeom prst="rect">
+            <a:avLst/>
+          </a:prstGeom>
+          <a:noFill/>
+          <a:ln/>
+        </p:spPr>
+        <p:txBody>
+          <a:bodyPr wrap="square" lIns="0" tIns="0" rIns="0" bIns="0" rtlCol="0" anchor="ctr"/>
+          <a:lstStyle/>
+          <a:p>
+            <a:pPr indent="0" marL="0">
+              <a:buNone/>
+            </a:pPr>
+            <a:r>
+              <a:rPr lang="en-US" sz="2000" dirty="0">
+                <a:solidFill>
+                  <a:srgbClr val="FFFFFF"/>
+                </a:solidFill>
+                <a:latin typeface="Microsoft YaHei" pitchFamily="34" charset="0"/>
+                <a:ea typeface="Microsoft YaHei" pitchFamily="34" charset="-122"/>
+                <a:cs typeface="Microsoft YaHei" pitchFamily="34" charset="-120"/>
+              </a:rPr>
+              <a:t>学口径、存口径、查口径；数据变了就检查；用之前再核对</a:t>
+            </a:r>
+            <a:endParaRPr lang="en-US" sz="2000" dirty="0"/>
+          </a:p>
+        </p:txBody>
+      </p:sp>
+      <p:sp>
+        <p:nvSpPr>
+          <p:cNvPr id="7" name="Text 5"/>
+          <p:cNvSpPr/>
+          <p:nvPr/>
+        </p:nvSpPr>
+        <p:spPr>
+          <a:xfrm>
+            <a:off x="548640" y="4480560"/>
+            <a:ext cx="1463040" cy="640080"/>
+          </a:xfrm>
+          <a:prstGeom prst="roundRect">
+            <a:avLst>
+              <a:gd name="adj" fmla="val 14286"/>
+            </a:avLst>
+          </a:prstGeom>
+          <a:solidFill>
+            <a:srgbClr val="1D5BA6"/>
+          </a:solidFill>
+          <a:ln w="12700">
+            <a:solidFill>
+              <a:srgbClr val="1D5BA6"/>
+            </a:solidFill>
+          </a:ln>
+        </p:spPr>
+        <p:txBody>
+          <a:bodyPr wrap="square" lIns="109728" tIns="109728" rIns="109728" bIns="109728" rtlCol="0" anchor="ctr"/>
+          <a:lstStyle/>
+          <a:p>
+            <a:pPr algn="ctr" indent="0" marL="0">
+              <a:lnSpc>
+                <a:spcPct val="110000"/>
+              </a:lnSpc>
+              <a:buNone/>
+            </a:pPr>
+            <a:r>
+              <a:rPr lang="en-US" sz="2000" b="1" dirty="0">
+                <a:solidFill>
+                  <a:srgbClr val="FFFFFF"/>
+                </a:solidFill>
+                <a:latin typeface="Microsoft YaHei" pitchFamily="34" charset="0"/>
+                <a:ea typeface="Microsoft YaHei" pitchFamily="34" charset="-122"/>
+                <a:cs typeface="Microsoft YaHei" pitchFamily="34" charset="-120"/>
+              </a:rPr>
+              <a:t>工作流</a:t>
+            </a:r>
+            <a:endParaRPr lang="en-US" sz="2000" dirty="0"/>
+          </a:p>
+        </p:txBody>
+      </p:sp>
+      <p:sp>
+        <p:nvSpPr>
+          <p:cNvPr id="8" name="Text 6"/>
+          <p:cNvSpPr txBox="1"/>
+          <p:nvPr/>
+        </p:nvSpPr>
+        <p:spPr>
+          <a:xfrm>
+            <a:off x="2377440" y="4389120"/>
+            <a:ext cx="9265615" cy="822960"/>
+          </a:xfrm>
+          <a:prstGeom prst="rect">
+            <a:avLst/>
+          </a:prstGeom>
+          <a:noFill/>
+          <a:ln/>
+        </p:spPr>
+        <p:txBody>
+          <a:bodyPr wrap="square" lIns="0" tIns="0" rIns="0" bIns="0" rtlCol="0" anchor="ctr"/>
+          <a:lstStyle/>
+          <a:p>
+            <a:pPr indent="0" marL="0">
+              <a:buNone/>
+            </a:pPr>
+            <a:r>
+              <a:rPr lang="en-US" sz="2000" dirty="0">
+                <a:solidFill>
+                  <a:srgbClr val="FFFFFF"/>
+                </a:solidFill>
+                <a:latin typeface="Microsoft YaHei" pitchFamily="34" charset="0"/>
+                <a:ea typeface="Microsoft YaHei" pitchFamily="34" charset="-122"/>
+                <a:cs typeface="Microsoft YaHei" pitchFamily="34" charset="-120"/>
+              </a:rPr>
+              <a:t>查口径 → 执行 SQL；数据变了 → 检查 → 修复或停用 → 重新学习</a:t>
+            </a:r>
+            <a:endParaRPr lang="en-US" sz="2000" dirty="0"/>
+          </a:p>
+        </p:txBody>
+      </p:sp>
+      <p:sp>
+        <p:nvSpPr>
+          <p:cNvPr id="25" name="Slide Number Placeholder 0"/>
+          <p:cNvSpPr>
+            <a:spLocks noGrp="1"/>
+          </p:cNvSpPr>
+          <p:nvPr>
+            <p:ph type="sldNum" sz="quarter" idx="4294967295"/>
+          </p:nvPr>
+        </p:nvSpPr>
+        <p:spPr>
+          <a:xfrm>
+            <a:off x="11185855" y="6400800"/>
+            <a:ext cx="457200" cy="274320"/>
+          </a:xfrm>
+          <a:prstGeom prst="rect">
+            <a:avLst/>
+          </a:prstGeom>
+          <a:extLst>
+            <a:ext uri="{C572A759-6A51-4108-AA02-DFA0A04FC94B}">
+              <ma14:wrappingTextBoxFlag xmlns:ma14="http://schemas.microsoft.com/office/mac/drawingml/2011/main" val="0"/>
+            </a:ext>
+          </a:extLst>
+        </p:spPr>
+        <p:txBody>
+          <a:bodyPr/>
+          <a:lstStyle>
+            <a:lvl1pPr>
+              <a:defRPr sz="1000">
                 <a:solidFill>
                   <a:srgbClr val="CADCFC"/>
                 </a:solidFill>
-                <a:latin typeface="Microsoft YaHei" pitchFamily="34" charset="0"/>
-                <a:ea typeface="Microsoft YaHei" pitchFamily="34" charset="-122"/>
-                <a:cs typeface="Microsoft YaHei" pitchFamily="34" charset="-120"/>
-              </a:rPr>
-              <a:t>系统结构 · 功能 · 工作流</a:t>
-            </a:r>
-            <a:endParaRPr lang="en-US" sz="2200" dirty="0"/>
+                <a:latin typeface="Microsoft YaHei"/>
+                <a:ea typeface="Microsoft YaHei"/>
+                <a:cs typeface="Microsoft YaHei"/>
+              </a:defRPr>
+            </a:lvl1pPr>
+          </a:lstStyle>
+          <a:p>
+            <a:pPr algn="r"/>
+            <a:fld id="{F7021451-1387-4CA6-816F-3879F97B5CBC}" type="slidenum">
+              <a:rPr b="0" lang="en-US"/>
+              <a:t>10</a:t>
+            </a:fld>
+            <a:endParaRPr lang="en-US"/>
           </a:p>
         </p:txBody>
       </p:sp>
@@ -1914,7 +2655,7 @@
                 <a:ea typeface="Microsoft YaHei" pitchFamily="34" charset="-122"/>
                 <a:cs typeface="Microsoft YaHei" pitchFamily="34" charset="-120"/>
               </a:rPr>
-              <a:t>MAVRA 做三件事</a:t>
+              <a:t>问题：共享的口径会悄悄过期</a:t>
             </a:r>
             <a:endParaRPr lang="en-US" sz="3000" dirty="0"/>
           </a:p>
@@ -1923,56 +2664,17 @@
       <p:sp>
         <p:nvSpPr>
           <p:cNvPr id="3" name="Text 1"/>
-          <p:cNvSpPr txBox="1"/>
-          <p:nvPr/>
-        </p:nvSpPr>
-        <p:spPr>
-          <a:xfrm>
-            <a:off x="548640" y="1188720"/>
-            <a:ext cx="11094415" cy="777240"/>
-          </a:xfrm>
-          <a:prstGeom prst="rect">
-            <a:avLst/>
-          </a:prstGeom>
-          <a:noFill/>
-          <a:ln/>
-        </p:spPr>
-        <p:txBody>
-          <a:bodyPr wrap="square" lIns="0" tIns="0" rIns="0" bIns="0" rtlCol="0" anchor="t"/>
-          <a:lstStyle/>
-          <a:p>
-            <a:pPr indent="0" marL="0">
-              <a:buNone/>
-            </a:pPr>
-            <a:r>
-              <a:rPr lang="en-US" sz="1600" dirty="0">
-                <a:solidFill>
-                  <a:srgbClr val="5B6573"/>
-                </a:solidFill>
-                <a:latin typeface="Microsoft YaHei" pitchFamily="34" charset="0"/>
-                <a:ea typeface="Microsoft YaHei" pitchFamily="34" charset="-122"/>
-                <a:cs typeface="Microsoft YaHei" pitchFamily="34" charset="-120"/>
-              </a:rPr>
-              <a:t>数据智能体学到的指标口径（例如“门店退货金额怎么算”）会被很多智能体共享；数据一变，口径可能悄悄算错。MAVRA 是位于智能体和数据库之间的中间件，负责：</a:t>
-            </a:r>
-            <a:endParaRPr lang="en-US" sz="1600" dirty="0"/>
-          </a:p>
-        </p:txBody>
-      </p:sp>
-      <p:sp>
-        <p:nvSpPr>
-          <p:cNvPr id="4" name="card 学习并共享口径"/>
           <p:cNvSpPr/>
           <p:nvPr/>
         </p:nvSpPr>
         <p:spPr>
           <a:xfrm>
-            <a:off x="548640" y="2286000"/>
-            <a:ext cx="3515258" cy="3566160"/>
+            <a:off x="548640" y="1600200"/>
+            <a:ext cx="2464994" cy="2377440"/>
           </a:xfrm>
           <a:prstGeom prst="roundRect">
             <a:avLst>
-              <a:gd name="adj" fmla="val 3121"/>
+              <a:gd name="adj" fmla="val 3846"/>
             </a:avLst>
           </a:prstGeom>
           <a:solidFill>
@@ -1982,169 +2684,131 @@
             <a:solidFill>
               <a:srgbClr val="EFECF7"/>
             </a:solidFill>
-            <a:prstDash val="solid"/>
           </a:ln>
         </p:spPr>
-      </p:sp>
-      <p:sp>
-        <p:nvSpPr>
-          <p:cNvPr id="5" name="Shape 3"/>
+        <p:txBody>
+          <a:bodyPr wrap="square" lIns="109728" tIns="109728" rIns="109728" bIns="109728" rtlCol="0" anchor="ctr"/>
+          <a:lstStyle/>
+          <a:p>
+            <a:pPr algn="ctr" indent="0" marL="0">
+              <a:lnSpc>
+                <a:spcPct val="110000"/>
+              </a:lnSpc>
+              <a:buNone/>
+            </a:pPr>
+            <a:r>
+              <a:rPr lang="en-US" sz="2200" b="1" dirty="0">
+                <a:solidFill>
+                  <a:srgbClr val="6A58A3"/>
+                </a:solidFill>
+                <a:latin typeface="Microsoft YaHei" pitchFamily="34" charset="0"/>
+                <a:ea typeface="Microsoft YaHei" pitchFamily="34" charset="-122"/>
+                <a:cs typeface="Microsoft YaHei" pitchFamily="34" charset="-120"/>
+              </a:rPr>
+              <a:t>① 学会</a:t>
+            </a:r>
+            <a:endParaRPr lang="en-US" sz="1600" dirty="0"/>
+          </a:p>
+          <a:p>
+            <a:pPr algn="ctr" indent="0" marL="0">
+              <a:lnSpc>
+                <a:spcPct val="110000"/>
+              </a:lnSpc>
+              <a:buNone/>
+            </a:pPr>
+            <a:r>
+              <a:rPr lang="en-US" sz="1700" dirty="0">
+                <a:solidFill>
+                  <a:srgbClr val="1F2A37"/>
+                </a:solidFill>
+                <a:latin typeface="Microsoft YaHei" pitchFamily="34" charset="0"/>
+                <a:ea typeface="Microsoft YaHei" pitchFamily="34" charset="-122"/>
+                <a:cs typeface="Microsoft YaHei" pitchFamily="34" charset="-120"/>
+              </a:rPr>
+              <a:t>智能体 A 学会：</a:t>
+            </a:r>
+            <a:endParaRPr lang="en-US" sz="1600" dirty="0"/>
+          </a:p>
+          <a:p>
+            <a:pPr algn="ctr" indent="0" marL="0">
+              <a:lnSpc>
+                <a:spcPct val="110000"/>
+              </a:lnSpc>
+              <a:buNone/>
+            </a:pPr>
+            <a:r>
+              <a:rPr lang="en-US" sz="1700" dirty="0">
+                <a:solidFill>
+                  <a:srgbClr val="1F2A37"/>
+                </a:solidFill>
+                <a:latin typeface="Microsoft YaHei" pitchFamily="34" charset="0"/>
+                <a:ea typeface="Microsoft YaHei" pitchFamily="34" charset="-122"/>
+                <a:cs typeface="Microsoft YaHei" pitchFamily="34" charset="-120"/>
+              </a:rPr>
+              <a:t>退货金额 =</a:t>
+            </a:r>
+            <a:endParaRPr lang="en-US" sz="1600" dirty="0"/>
+          </a:p>
+          <a:p>
+            <a:pPr algn="ctr" indent="0" marL="0">
+              <a:lnSpc>
+                <a:spcPct val="110000"/>
+              </a:lnSpc>
+              <a:buNone/>
+            </a:pPr>
+            <a:r>
+              <a:rPr lang="en-US" sz="1700" dirty="0">
+                <a:solidFill>
+                  <a:srgbClr val="1F2A37"/>
+                </a:solidFill>
+                <a:latin typeface="Microsoft YaHei" pitchFamily="34" charset="0"/>
+                <a:ea typeface="Microsoft YaHei" pitchFamily="34" charset="-122"/>
+                <a:cs typeface="Microsoft YaHei" pitchFamily="34" charset="-120"/>
+              </a:rPr>
+              <a:t>退货表金额加起来</a:t>
+            </a:r>
+            <a:endParaRPr lang="en-US" sz="1600" dirty="0"/>
+          </a:p>
+        </p:txBody>
+      </p:sp>
+      <p:sp>
+        <p:nvSpPr>
+          <p:cNvPr id="4" name="Shape 2"/>
           <p:cNvSpPr/>
           <p:nvPr/>
         </p:nvSpPr>
         <p:spPr>
           <a:xfrm>
-            <a:off x="822960" y="2560320"/>
-            <a:ext cx="502920" cy="502920"/>
-          </a:xfrm>
-          <a:prstGeom prst="ellipse">
+            <a:off x="3077642" y="2788920"/>
+            <a:ext cx="283464" cy="0"/>
+          </a:xfrm>
+          <a:prstGeom prst="line">
             <a:avLst/>
           </a:prstGeom>
-          <a:solidFill>
-            <a:srgbClr val="6A58A3"/>
-          </a:solidFill>
-          <a:ln w="12700">
+          <a:noFill/>
+          <a:ln w="31750">
             <a:solidFill>
-              <a:srgbClr val="6A58A3"/>
+              <a:srgbClr val="5B6573"/>
             </a:solidFill>
             <a:prstDash val="solid"/>
+            <a:tailEnd type="triangle"/>
           </a:ln>
         </p:spPr>
       </p:sp>
       <p:sp>
         <p:nvSpPr>
-          <p:cNvPr id="6" name="Text 4"/>
-          <p:cNvSpPr txBox="1"/>
-          <p:nvPr/>
-        </p:nvSpPr>
-        <p:spPr>
-          <a:xfrm>
-            <a:off x="822960" y="2560320"/>
-            <a:ext cx="502920" cy="502920"/>
-          </a:xfrm>
-          <a:prstGeom prst="rect">
-            <a:avLst/>
-          </a:prstGeom>
-          <a:noFill/>
-          <a:ln/>
-        </p:spPr>
-        <p:txBody>
-          <a:bodyPr wrap="square" lIns="0" tIns="0" rIns="0" bIns="0" rtlCol="0" anchor="ctr"/>
-          <a:lstStyle/>
-          <a:p>
-            <a:pPr algn="ctr" indent="0" marL="0">
-              <a:buNone/>
-            </a:pPr>
-            <a:r>
-              <a:rPr lang="en-US" sz="2000" b="1" dirty="0">
-                <a:solidFill>
-                  <a:srgbClr val="FFFFFF"/>
-                </a:solidFill>
-                <a:latin typeface="Microsoft YaHei" pitchFamily="34" charset="0"/>
-                <a:ea typeface="Microsoft YaHei" pitchFamily="34" charset="-122"/>
-                <a:cs typeface="Microsoft YaHei" pitchFamily="34" charset="-120"/>
-              </a:rPr>
-              <a:t>1</a:t>
-            </a:r>
-            <a:endParaRPr lang="en-US" sz="2000" dirty="0"/>
-          </a:p>
-        </p:txBody>
-      </p:sp>
-      <p:sp>
-        <p:nvSpPr>
-          <p:cNvPr id="7" name="Text 5"/>
-          <p:cNvSpPr txBox="1"/>
-          <p:nvPr/>
-        </p:nvSpPr>
-        <p:spPr>
-          <a:xfrm>
-            <a:off x="822960" y="3246120"/>
-            <a:ext cx="2966618" cy="411480"/>
-          </a:xfrm>
-          <a:prstGeom prst="rect">
-            <a:avLst/>
-          </a:prstGeom>
-          <a:noFill/>
-          <a:ln/>
-        </p:spPr>
-        <p:txBody>
-          <a:bodyPr wrap="square" lIns="0" tIns="0" rIns="0" bIns="0" rtlCol="0" anchor="ctr"/>
-          <a:lstStyle/>
-          <a:p>
-            <a:pPr indent="0" marL="0">
-              <a:buNone/>
-            </a:pPr>
-            <a:r>
-              <a:rPr lang="en-US" sz="2000" b="1" dirty="0">
-                <a:solidFill>
-                  <a:srgbClr val="6A58A3"/>
-                </a:solidFill>
-                <a:latin typeface="Microsoft YaHei" pitchFamily="34" charset="0"/>
-                <a:ea typeface="Microsoft YaHei" pitchFamily="34" charset="-122"/>
-                <a:cs typeface="Microsoft YaHei" pitchFamily="34" charset="-120"/>
-              </a:rPr>
-              <a:t>学习并共享口径</a:t>
-            </a:r>
-            <a:endParaRPr lang="en-US" sz="2000" dirty="0"/>
-          </a:p>
-        </p:txBody>
-      </p:sp>
-      <p:sp>
-        <p:nvSpPr>
-          <p:cNvPr id="8" name="Text 6"/>
-          <p:cNvSpPr txBox="1"/>
-          <p:nvPr/>
-        </p:nvSpPr>
-        <p:spPr>
-          <a:xfrm>
-            <a:off x="822960" y="3749040"/>
-            <a:ext cx="2966618" cy="1920240"/>
-          </a:xfrm>
-          <a:prstGeom prst="rect">
-            <a:avLst/>
-          </a:prstGeom>
-          <a:noFill/>
-          <a:ln/>
-        </p:spPr>
-        <p:txBody>
-          <a:bodyPr wrap="square" lIns="0" tIns="0" rIns="0" bIns="0" rtlCol="0" anchor="t"/>
-          <a:lstStyle/>
-          <a:p>
-            <a:pPr indent="0" marL="0">
-              <a:lnSpc>
-                <a:spcPct val="115000"/>
-              </a:lnSpc>
-              <a:buNone/>
-            </a:pPr>
-            <a:r>
-              <a:rPr lang="en-US" sz="1600" dirty="0">
-                <a:solidFill>
-                  <a:srgbClr val="1F2A37"/>
-                </a:solidFill>
-                <a:latin typeface="Microsoft YaHei" pitchFamily="34" charset="0"/>
-                <a:ea typeface="Microsoft YaHei" pitchFamily="34" charset="-122"/>
-                <a:cs typeface="Microsoft YaHei" pitchFamily="34" charset="-120"/>
-              </a:rPr>
-              <a:t>内置分析优化器（一个大模型智能体）回答给出口径的学习题；判题正确后提取成定义，通过准入检查才发布，所有用户端智能体共用。</a:t>
-            </a:r>
-            <a:endParaRPr lang="en-US" sz="1600" dirty="0"/>
-          </a:p>
-        </p:txBody>
-      </p:sp>
-      <p:sp>
-        <p:nvSpPr>
-          <p:cNvPr id="9" name="card 数据变了就维护"/>
+          <p:cNvPr id="5" name="Text 3"/>
           <p:cNvSpPr/>
           <p:nvPr/>
         </p:nvSpPr>
         <p:spPr>
           <a:xfrm>
-            <a:off x="4338218" y="2286000"/>
-            <a:ext cx="3515258" cy="3566160"/>
+            <a:off x="3425114" y="1600200"/>
+            <a:ext cx="2464994" cy="2377440"/>
           </a:xfrm>
           <a:prstGeom prst="roundRect">
             <a:avLst>
-              <a:gd name="adj" fmla="val 3121"/>
+              <a:gd name="adj" fmla="val 3846"/>
             </a:avLst>
           </a:prstGeom>
           <a:solidFill>
@@ -2154,169 +2818,131 @@
             <a:solidFill>
               <a:srgbClr val="E8F0FA"/>
             </a:solidFill>
-            <a:prstDash val="solid"/>
           </a:ln>
         </p:spPr>
-      </p:sp>
-      <p:sp>
-        <p:nvSpPr>
-          <p:cNvPr id="10" name="Shape 8"/>
+        <p:txBody>
+          <a:bodyPr wrap="square" lIns="109728" tIns="109728" rIns="109728" bIns="109728" rtlCol="0" anchor="ctr"/>
+          <a:lstStyle/>
+          <a:p>
+            <a:pPr algn="ctr" indent="0" marL="0">
+              <a:lnSpc>
+                <a:spcPct val="110000"/>
+              </a:lnSpc>
+              <a:buNone/>
+            </a:pPr>
+            <a:r>
+              <a:rPr lang="en-US" sz="2200" b="1" dirty="0">
+                <a:solidFill>
+                  <a:srgbClr val="1D5BA6"/>
+                </a:solidFill>
+                <a:latin typeface="Microsoft YaHei" pitchFamily="34" charset="0"/>
+                <a:ea typeface="Microsoft YaHei" pitchFamily="34" charset="-122"/>
+                <a:cs typeface="Microsoft YaHei" pitchFamily="34" charset="-120"/>
+              </a:rPr>
+              <a:t>② 共享</a:t>
+            </a:r>
+            <a:endParaRPr lang="en-US" sz="1600" dirty="0"/>
+          </a:p>
+          <a:p>
+            <a:pPr algn="ctr" indent="0" marL="0">
+              <a:lnSpc>
+                <a:spcPct val="110000"/>
+              </a:lnSpc>
+              <a:buNone/>
+            </a:pPr>
+            <a:r>
+              <a:rPr lang="en-US" sz="1700" dirty="0">
+                <a:solidFill>
+                  <a:srgbClr val="1F2A37"/>
+                </a:solidFill>
+                <a:latin typeface="Microsoft YaHei" pitchFamily="34" charset="0"/>
+                <a:ea typeface="Microsoft YaHei" pitchFamily="34" charset="-122"/>
+                <a:cs typeface="Microsoft YaHei" pitchFamily="34" charset="-120"/>
+              </a:rPr>
+              <a:t>口径存起来，</a:t>
+            </a:r>
+            <a:endParaRPr lang="en-US" sz="1600" dirty="0"/>
+          </a:p>
+          <a:p>
+            <a:pPr algn="ctr" indent="0" marL="0">
+              <a:lnSpc>
+                <a:spcPct val="110000"/>
+              </a:lnSpc>
+              <a:buNone/>
+            </a:pPr>
+            <a:r>
+              <a:rPr lang="en-US" sz="1700" dirty="0">
+                <a:solidFill>
+                  <a:srgbClr val="1F2A37"/>
+                </a:solidFill>
+                <a:latin typeface="Microsoft YaHei" pitchFamily="34" charset="0"/>
+                <a:ea typeface="Microsoft YaHei" pitchFamily="34" charset="-122"/>
+                <a:cs typeface="Microsoft YaHei" pitchFamily="34" charset="-120"/>
+              </a:rPr>
+              <a:t>智能体 B、C</a:t>
+            </a:r>
+            <a:endParaRPr lang="en-US" sz="1600" dirty="0"/>
+          </a:p>
+          <a:p>
+            <a:pPr algn="ctr" indent="0" marL="0">
+              <a:lnSpc>
+                <a:spcPct val="110000"/>
+              </a:lnSpc>
+              <a:buNone/>
+            </a:pPr>
+            <a:r>
+              <a:rPr lang="en-US" sz="1700" dirty="0">
+                <a:solidFill>
+                  <a:srgbClr val="1F2A37"/>
+                </a:solidFill>
+                <a:latin typeface="Microsoft YaHei" pitchFamily="34" charset="0"/>
+                <a:ea typeface="Microsoft YaHei" pitchFamily="34" charset="-122"/>
+                <a:cs typeface="Microsoft YaHei" pitchFamily="34" charset="-120"/>
+              </a:rPr>
+              <a:t>直接拿来用</a:t>
+            </a:r>
+            <a:endParaRPr lang="en-US" sz="1600" dirty="0"/>
+          </a:p>
+        </p:txBody>
+      </p:sp>
+      <p:sp>
+        <p:nvSpPr>
+          <p:cNvPr id="6" name="Shape 4"/>
           <p:cNvSpPr/>
           <p:nvPr/>
         </p:nvSpPr>
         <p:spPr>
           <a:xfrm>
-            <a:off x="4612538" y="2560320"/>
-            <a:ext cx="502920" cy="502920"/>
-          </a:xfrm>
-          <a:prstGeom prst="ellipse">
+            <a:off x="5954116" y="2788920"/>
+            <a:ext cx="283464" cy="0"/>
+          </a:xfrm>
+          <a:prstGeom prst="line">
             <a:avLst/>
           </a:prstGeom>
-          <a:solidFill>
-            <a:srgbClr val="1D5BA6"/>
-          </a:solidFill>
-          <a:ln w="12700">
+          <a:noFill/>
+          <a:ln w="31750">
             <a:solidFill>
-              <a:srgbClr val="1D5BA6"/>
+              <a:srgbClr val="5B6573"/>
             </a:solidFill>
             <a:prstDash val="solid"/>
+            <a:tailEnd type="triangle"/>
           </a:ln>
         </p:spPr>
       </p:sp>
       <p:sp>
         <p:nvSpPr>
-          <p:cNvPr id="11" name="Text 9"/>
-          <p:cNvSpPr txBox="1"/>
-          <p:nvPr/>
-        </p:nvSpPr>
-        <p:spPr>
-          <a:xfrm>
-            <a:off x="4612538" y="2560320"/>
-            <a:ext cx="502920" cy="502920"/>
-          </a:xfrm>
-          <a:prstGeom prst="rect">
-            <a:avLst/>
-          </a:prstGeom>
-          <a:noFill/>
-          <a:ln/>
-        </p:spPr>
-        <p:txBody>
-          <a:bodyPr wrap="square" lIns="0" tIns="0" rIns="0" bIns="0" rtlCol="0" anchor="ctr"/>
-          <a:lstStyle/>
-          <a:p>
-            <a:pPr algn="ctr" indent="0" marL="0">
-              <a:buNone/>
-            </a:pPr>
-            <a:r>
-              <a:rPr lang="en-US" sz="2000" b="1" dirty="0">
-                <a:solidFill>
-                  <a:srgbClr val="FFFFFF"/>
-                </a:solidFill>
-                <a:latin typeface="Microsoft YaHei" pitchFamily="34" charset="0"/>
-                <a:ea typeface="Microsoft YaHei" pitchFamily="34" charset="-122"/>
-                <a:cs typeface="Microsoft YaHei" pitchFamily="34" charset="-120"/>
-              </a:rPr>
-              <a:t>2</a:t>
-            </a:r>
-            <a:endParaRPr lang="en-US" sz="2000" dirty="0"/>
-          </a:p>
-        </p:txBody>
-      </p:sp>
-      <p:sp>
-        <p:nvSpPr>
-          <p:cNvPr id="12" name="Text 10"/>
-          <p:cNvSpPr txBox="1"/>
-          <p:nvPr/>
-        </p:nvSpPr>
-        <p:spPr>
-          <a:xfrm>
-            <a:off x="4612538" y="3246120"/>
-            <a:ext cx="2966618" cy="411480"/>
-          </a:xfrm>
-          <a:prstGeom prst="rect">
-            <a:avLst/>
-          </a:prstGeom>
-          <a:noFill/>
-          <a:ln/>
-        </p:spPr>
-        <p:txBody>
-          <a:bodyPr wrap="square" lIns="0" tIns="0" rIns="0" bIns="0" rtlCol="0" anchor="ctr"/>
-          <a:lstStyle/>
-          <a:p>
-            <a:pPr indent="0" marL="0">
-              <a:buNone/>
-            </a:pPr>
-            <a:r>
-              <a:rPr lang="en-US" sz="2000" b="1" dirty="0">
-                <a:solidFill>
-                  <a:srgbClr val="1D5BA6"/>
-                </a:solidFill>
-                <a:latin typeface="Microsoft YaHei" pitchFamily="34" charset="0"/>
-                <a:ea typeface="Microsoft YaHei" pitchFamily="34" charset="-122"/>
-                <a:cs typeface="Microsoft YaHei" pitchFamily="34" charset="-120"/>
-              </a:rPr>
-              <a:t>数据变了就维护</a:t>
-            </a:r>
-            <a:endParaRPr lang="en-US" sz="2000" dirty="0"/>
-          </a:p>
-        </p:txBody>
-      </p:sp>
-      <p:sp>
-        <p:nvSpPr>
-          <p:cNvPr id="13" name="Text 11"/>
-          <p:cNvSpPr txBox="1"/>
-          <p:nvPr/>
-        </p:nvSpPr>
-        <p:spPr>
-          <a:xfrm>
-            <a:off x="4612538" y="3749040"/>
-            <a:ext cx="2966618" cy="1920240"/>
-          </a:xfrm>
-          <a:prstGeom prst="rect">
-            <a:avLst/>
-          </a:prstGeom>
-          <a:noFill/>
-          <a:ln/>
-        </p:spPr>
-        <p:txBody>
-          <a:bodyPr wrap="square" lIns="0" tIns="0" rIns="0" bIns="0" rtlCol="0" anchor="t"/>
-          <a:lstStyle/>
-          <a:p>
-            <a:pPr indent="0" marL="0">
-              <a:lnSpc>
-                <a:spcPct val="115000"/>
-              </a:lnSpc>
-              <a:buNone/>
-            </a:pPr>
-            <a:r>
-              <a:rPr lang="en-US" sz="1600" dirty="0">
-                <a:solidFill>
-                  <a:srgbClr val="1F2A37"/>
-                </a:solidFill>
-                <a:latin typeface="Microsoft YaHei" pitchFamily="34" charset="0"/>
-                <a:ea typeface="Microsoft YaHei" pitchFamily="34" charset="-122"/>
-                <a:cs typeface="Microsoft YaHei" pitchFamily="34" charset="-120"/>
-              </a:rPr>
-              <a:t>记录每个定义依赖的条件，例如“每笔退货一行”。表一变，只重查受影响的条件；检查结果按“条件 + 表版本”保存，跨定义、跨智能体复用。条件失败就修复，修不了就失效。</a:t>
-            </a:r>
-            <a:endParaRPr lang="en-US" sz="1600" dirty="0"/>
-          </a:p>
-        </p:txBody>
-      </p:sp>
-      <p:sp>
-        <p:nvSpPr>
-          <p:cNvPr id="14" name="card 使用时把关"/>
+          <p:cNvPr id="7" name="Text 5"/>
           <p:cNvSpPr/>
           <p:nvPr/>
         </p:nvSpPr>
         <p:spPr>
           <a:xfrm>
-            <a:off x="8127797" y="2286000"/>
-            <a:ext cx="3515258" cy="3566160"/>
+            <a:off x="6301588" y="1600200"/>
+            <a:ext cx="2464994" cy="2377440"/>
           </a:xfrm>
           <a:prstGeom prst="roundRect">
             <a:avLst>
-              <a:gd name="adj" fmla="val 3121"/>
+              <a:gd name="adj" fmla="val 3846"/>
             </a:avLst>
           </a:prstGeom>
           <a:solidFill>
@@ -2326,152 +2952,294 @@
             <a:solidFill>
               <a:srgbClr val="FBF0E2"/>
             </a:solidFill>
-            <a:prstDash val="solid"/>
           </a:ln>
         </p:spPr>
-      </p:sp>
-      <p:sp>
-        <p:nvSpPr>
-          <p:cNvPr id="15" name="Shape 13"/>
+        <p:txBody>
+          <a:bodyPr wrap="square" lIns="109728" tIns="109728" rIns="109728" bIns="109728" rtlCol="0" anchor="ctr"/>
+          <a:lstStyle/>
+          <a:p>
+            <a:pPr algn="ctr" indent="0" marL="0">
+              <a:lnSpc>
+                <a:spcPct val="110000"/>
+              </a:lnSpc>
+              <a:buNone/>
+            </a:pPr>
+            <a:r>
+              <a:rPr lang="en-US" sz="2200" b="1" dirty="0">
+                <a:solidFill>
+                  <a:srgbClr val="B5671A"/>
+                </a:solidFill>
+                <a:latin typeface="Microsoft YaHei" pitchFamily="34" charset="0"/>
+                <a:ea typeface="Microsoft YaHei" pitchFamily="34" charset="-122"/>
+                <a:cs typeface="Microsoft YaHei" pitchFamily="34" charset="-120"/>
+              </a:rPr>
+              <a:t>③ 数据变了</a:t>
+            </a:r>
+            <a:endParaRPr lang="en-US" sz="1600" dirty="0"/>
+          </a:p>
+          <a:p>
+            <a:pPr algn="ctr" indent="0" marL="0">
+              <a:lnSpc>
+                <a:spcPct val="110000"/>
+              </a:lnSpc>
+              <a:buNone/>
+            </a:pPr>
+            <a:r>
+              <a:rPr lang="en-US" sz="1700" dirty="0">
+                <a:solidFill>
+                  <a:srgbClr val="1F2A37"/>
+                </a:solidFill>
+                <a:latin typeface="Microsoft YaHei" pitchFamily="34" charset="0"/>
+                <a:ea typeface="Microsoft YaHei" pitchFamily="34" charset="-122"/>
+                <a:cs typeface="Microsoft YaHei" pitchFamily="34" charset="-120"/>
+              </a:rPr>
+              <a:t>ETL 给每笔退货</a:t>
+            </a:r>
+            <a:endParaRPr lang="en-US" sz="1600" dirty="0"/>
+          </a:p>
+          <a:p>
+            <a:pPr algn="ctr" indent="0" marL="0">
+              <a:lnSpc>
+                <a:spcPct val="110000"/>
+              </a:lnSpc>
+              <a:buNone/>
+            </a:pPr>
+            <a:r>
+              <a:rPr lang="en-US" sz="1700" dirty="0">
+                <a:solidFill>
+                  <a:srgbClr val="1F2A37"/>
+                </a:solidFill>
+                <a:latin typeface="Microsoft YaHei" pitchFamily="34" charset="0"/>
+                <a:ea typeface="Microsoft YaHei" pitchFamily="34" charset="-122"/>
+                <a:cs typeface="Microsoft YaHei" pitchFamily="34" charset="-120"/>
+              </a:rPr>
+              <a:t>多写一行“申请”</a:t>
+            </a:r>
+            <a:endParaRPr lang="en-US" sz="1600" dirty="0"/>
+          </a:p>
+          <a:p>
+            <a:pPr algn="ctr" indent="0" marL="0">
+              <a:lnSpc>
+                <a:spcPct val="110000"/>
+              </a:lnSpc>
+              <a:buNone/>
+            </a:pPr>
+            <a:r>
+              <a:rPr lang="en-US" sz="1700" dirty="0">
+                <a:solidFill>
+                  <a:srgbClr val="1F2A37"/>
+                </a:solidFill>
+                <a:latin typeface="Microsoft YaHei" pitchFamily="34" charset="0"/>
+                <a:ea typeface="Microsoft YaHei" pitchFamily="34" charset="-122"/>
+                <a:cs typeface="Microsoft YaHei" pitchFamily="34" charset="-120"/>
+              </a:rPr>
+              <a:t>表结构没变</a:t>
+            </a:r>
+            <a:endParaRPr lang="en-US" sz="1600" dirty="0"/>
+          </a:p>
+        </p:txBody>
+      </p:sp>
+      <p:sp>
+        <p:nvSpPr>
+          <p:cNvPr id="8" name="Shape 6"/>
           <p:cNvSpPr/>
           <p:nvPr/>
         </p:nvSpPr>
         <p:spPr>
           <a:xfrm>
-            <a:off x="8402117" y="2560320"/>
-            <a:ext cx="502920" cy="502920"/>
-          </a:xfrm>
-          <a:prstGeom prst="ellipse">
+            <a:off x="8830589" y="2788920"/>
+            <a:ext cx="283464" cy="0"/>
+          </a:xfrm>
+          <a:prstGeom prst="line">
             <a:avLst/>
           </a:prstGeom>
+          <a:noFill/>
+          <a:ln w="31750">
+            <a:solidFill>
+              <a:srgbClr val="5B6573"/>
+            </a:solidFill>
+            <a:prstDash val="solid"/>
+            <a:tailEnd type="triangle"/>
+          </a:ln>
+        </p:spPr>
+      </p:sp>
+      <p:sp>
+        <p:nvSpPr>
+          <p:cNvPr id="9" name="Text 7"/>
+          <p:cNvSpPr/>
+          <p:nvPr/>
+        </p:nvSpPr>
+        <p:spPr>
+          <a:xfrm>
+            <a:off x="9178061" y="1600200"/>
+            <a:ext cx="2464994" cy="2377440"/>
+          </a:xfrm>
+          <a:prstGeom prst="roundRect">
+            <a:avLst>
+              <a:gd name="adj" fmla="val 3846"/>
+            </a:avLst>
+          </a:prstGeom>
           <a:solidFill>
-            <a:srgbClr val="B5671A"/>
+            <a:srgbClr val="FBEAE7"/>
           </a:solidFill>
           <a:ln w="12700">
             <a:solidFill>
-              <a:srgbClr val="B5671A"/>
+              <a:srgbClr val="FBEAE7"/>
             </a:solidFill>
-            <a:prstDash val="solid"/>
           </a:ln>
         </p:spPr>
-      </p:sp>
-      <p:sp>
-        <p:nvSpPr>
-          <p:cNvPr id="16" name="Text 14"/>
-          <p:cNvSpPr txBox="1"/>
+        <p:txBody>
+          <a:bodyPr wrap="square" lIns="109728" tIns="109728" rIns="109728" bIns="109728" rtlCol="0" anchor="ctr"/>
+          <a:lstStyle/>
+          <a:p>
+            <a:pPr algn="ctr" indent="0" marL="0">
+              <a:lnSpc>
+                <a:spcPct val="110000"/>
+              </a:lnSpc>
+              <a:buNone/>
+            </a:pPr>
+            <a:r>
+              <a:rPr lang="en-US" sz="2200" b="1" dirty="0">
+                <a:solidFill>
+                  <a:srgbClr val="B5392A"/>
+                </a:solidFill>
+                <a:latin typeface="Microsoft YaHei" pitchFamily="34" charset="0"/>
+                <a:ea typeface="Microsoft YaHei" pitchFamily="34" charset="-122"/>
+                <a:cs typeface="Microsoft YaHei" pitchFamily="34" charset="-120"/>
+              </a:rPr>
+              <a:t>④ 悄悄算错</a:t>
+            </a:r>
+            <a:endParaRPr lang="en-US" sz="1600" dirty="0"/>
+          </a:p>
+          <a:p>
+            <a:pPr algn="ctr" indent="0" marL="0">
+              <a:lnSpc>
+                <a:spcPct val="110000"/>
+              </a:lnSpc>
+              <a:buNone/>
+            </a:pPr>
+            <a:r>
+              <a:rPr lang="en-US" sz="1700" dirty="0">
+                <a:solidFill>
+                  <a:srgbClr val="1F2A37"/>
+                </a:solidFill>
+                <a:latin typeface="Microsoft YaHei" pitchFamily="34" charset="0"/>
+                <a:ea typeface="Microsoft YaHei" pitchFamily="34" charset="-122"/>
+                <a:cs typeface="Microsoft YaHei" pitchFamily="34" charset="-120"/>
+              </a:rPr>
+              <a:t>B 算 5 月退货：</a:t>
+            </a:r>
+            <a:endParaRPr lang="en-US" sz="1600" dirty="0"/>
+          </a:p>
+          <a:p>
+            <a:pPr algn="ctr" indent="0" marL="0">
+              <a:lnSpc>
+                <a:spcPct val="110000"/>
+              </a:lnSpc>
+              <a:buNone/>
+            </a:pPr>
+            <a:r>
+              <a:rPr lang="en-US" sz="1700" dirty="0">
+                <a:solidFill>
+                  <a:srgbClr val="1F2A37"/>
+                </a:solidFill>
+                <a:latin typeface="Microsoft YaHei" pitchFamily="34" charset="0"/>
+                <a:ea typeface="Microsoft YaHei" pitchFamily="34" charset="-122"/>
+                <a:cs typeface="Microsoft YaHei" pitchFamily="34" charset="-120"/>
+              </a:rPr>
+              <a:t>658.9 万</a:t>
+            </a:r>
+            <a:endParaRPr lang="en-US" sz="1600" dirty="0"/>
+          </a:p>
+          <a:p>
+            <a:pPr algn="ctr" indent="0" marL="0">
+              <a:lnSpc>
+                <a:spcPct val="110000"/>
+              </a:lnSpc>
+              <a:buNone/>
+            </a:pPr>
+            <a:r>
+              <a:rPr lang="en-US" sz="1700" dirty="0">
+                <a:solidFill>
+                  <a:srgbClr val="1F2A37"/>
+                </a:solidFill>
+                <a:latin typeface="Microsoft YaHei" pitchFamily="34" charset="0"/>
+                <a:ea typeface="Microsoft YaHei" pitchFamily="34" charset="-122"/>
+                <a:cs typeface="Microsoft YaHei" pitchFamily="34" charset="-120"/>
+              </a:rPr>
+              <a:t>实际 329.4 万</a:t>
+            </a:r>
+            <a:endParaRPr lang="en-US" sz="1600" dirty="0"/>
+          </a:p>
+        </p:txBody>
+      </p:sp>
+      <p:sp>
+        <p:nvSpPr>
+          <p:cNvPr id="10" name="Text 8"/>
+          <p:cNvSpPr/>
           <p:nvPr/>
         </p:nvSpPr>
         <p:spPr>
           <a:xfrm>
-            <a:off x="8402117" y="2560320"/>
-            <a:ext cx="502920" cy="502920"/>
-          </a:xfrm>
-          <a:prstGeom prst="rect">
-            <a:avLst/>
-          </a:prstGeom>
-          <a:noFill/>
-          <a:ln/>
-        </p:spPr>
-        <p:txBody>
-          <a:bodyPr wrap="square" lIns="0" tIns="0" rIns="0" bIns="0" rtlCol="0" anchor="ctr"/>
+            <a:off x="548640" y="4480560"/>
+            <a:ext cx="11094415" cy="1280160"/>
+          </a:xfrm>
+          <a:prstGeom prst="roundRect">
+            <a:avLst>
+              <a:gd name="adj" fmla="val 7143"/>
+            </a:avLst>
+          </a:prstGeom>
+          <a:solidFill>
+            <a:srgbClr val="F1F3F6"/>
+          </a:solidFill>
+          <a:ln w="12700">
+            <a:solidFill>
+              <a:srgbClr val="F1F3F6"/>
+            </a:solidFill>
+          </a:ln>
+        </p:spPr>
+        <p:txBody>
+          <a:bodyPr wrap="square" lIns="274320" tIns="274320" rIns="274320" bIns="274320" rtlCol="0" anchor="ctr"/>
           <a:lstStyle/>
           <a:p>
-            <a:pPr algn="ctr" indent="0" marL="0">
+            <a:pPr algn="l" indent="0" marL="0">
+              <a:lnSpc>
+                <a:spcPct val="110000"/>
+              </a:lnSpc>
               <a:buNone/>
             </a:pPr>
             <a:r>
               <a:rPr lang="en-US" sz="2000" b="1" dirty="0">
                 <a:solidFill>
-                  <a:srgbClr val="FFFFFF"/>
-                </a:solidFill>
-                <a:latin typeface="Microsoft YaHei" pitchFamily="34" charset="0"/>
-                <a:ea typeface="Microsoft YaHei" pitchFamily="34" charset="-122"/>
-                <a:cs typeface="Microsoft YaHei" pitchFamily="34" charset="-120"/>
-              </a:rPr>
-              <a:t>3</a:t>
+                  <a:srgbClr val="1F2A37"/>
+                </a:solidFill>
+                <a:latin typeface="Microsoft YaHei" pitchFamily="34" charset="0"/>
+                <a:ea typeface="Microsoft YaHei" pitchFamily="34" charset="-122"/>
+                <a:cs typeface="Microsoft YaHei" pitchFamily="34" charset="-120"/>
+              </a:rPr>
+              <a:t>SQL 照样能跑、不报错，用口径的智能体发现不了。</a:t>
             </a:r>
             <a:endParaRPr lang="en-US" sz="2000" dirty="0"/>
           </a:p>
-        </p:txBody>
-      </p:sp>
-      <p:sp>
-        <p:nvSpPr>
-          <p:cNvPr id="17" name="Text 15"/>
-          <p:cNvSpPr txBox="1"/>
-          <p:nvPr/>
-        </p:nvSpPr>
-        <p:spPr>
-          <a:xfrm>
-            <a:off x="8402117" y="3246120"/>
-            <a:ext cx="2966618" cy="411480"/>
-          </a:xfrm>
-          <a:prstGeom prst="rect">
-            <a:avLst/>
-          </a:prstGeom>
-          <a:noFill/>
-          <a:ln/>
-        </p:spPr>
-        <p:txBody>
-          <a:bodyPr wrap="square" lIns="0" tIns="0" rIns="0" bIns="0" rtlCol="0" anchor="ctr"/>
-          <a:lstStyle/>
-          <a:p>
-            <a:pPr indent="0" marL="0">
-              <a:buNone/>
-            </a:pPr>
-            <a:r>
-              <a:rPr lang="en-US" sz="2000" b="1" dirty="0">
-                <a:solidFill>
-                  <a:srgbClr val="B5671A"/>
-                </a:solidFill>
-                <a:latin typeface="Microsoft YaHei" pitchFamily="34" charset="0"/>
-                <a:ea typeface="Microsoft YaHei" pitchFamily="34" charset="-122"/>
-                <a:cs typeface="Microsoft YaHei" pitchFamily="34" charset="-120"/>
-              </a:rPr>
-              <a:t>使用时把关</a:t>
+          <a:p>
+            <a:pPr algn="l" indent="0" marL="0">
+              <a:lnSpc>
+                <a:spcPct val="110000"/>
+              </a:lnSpc>
+              <a:buNone/>
+            </a:pPr>
+            <a:r>
+              <a:rPr lang="en-US" sz="2000" dirty="0">
+                <a:solidFill>
+                  <a:srgbClr val="1F2A37"/>
+                </a:solidFill>
+                <a:latin typeface="Microsoft YaHei" pitchFamily="34" charset="0"/>
+                <a:ea typeface="Microsoft YaHei" pitchFamily="34" charset="-122"/>
+                <a:cs typeface="Microsoft YaHei" pitchFamily="34" charset="-120"/>
+              </a:rPr>
+              <a:t>MAVRA 要做的：记住每个口径依赖什么条件，数据变了就检查，用之前再核对。</a:t>
             </a:r>
             <a:endParaRPr lang="en-US" sz="2000" dirty="0"/>
-          </a:p>
-        </p:txBody>
-      </p:sp>
-      <p:sp>
-        <p:nvSpPr>
-          <p:cNvPr id="18" name="Text 16"/>
-          <p:cNvSpPr txBox="1"/>
-          <p:nvPr/>
-        </p:nvSpPr>
-        <p:spPr>
-          <a:xfrm>
-            <a:off x="8402117" y="3749040"/>
-            <a:ext cx="2966618" cy="1920240"/>
-          </a:xfrm>
-          <a:prstGeom prst="rect">
-            <a:avLst/>
-          </a:prstGeom>
-          <a:noFill/>
-          <a:ln/>
-        </p:spPr>
-        <p:txBody>
-          <a:bodyPr wrap="square" lIns="0" tIns="0" rIns="0" bIns="0" rtlCol="0" anchor="t"/>
-          <a:lstStyle/>
-          <a:p>
-            <a:pPr indent="0" marL="0">
-              <a:lnSpc>
-                <a:spcPct val="115000"/>
-              </a:lnSpc>
-              <a:buNone/>
-            </a:pPr>
-            <a:r>
-              <a:rPr lang="en-US" sz="1600" dirty="0">
-                <a:solidFill>
-                  <a:srgbClr val="1F2A37"/>
-                </a:solidFill>
-                <a:latin typeface="Microsoft YaHei" pitchFamily="34" charset="0"/>
-                <a:ea typeface="Microsoft YaHei" pitchFamily="34" charset="-122"/>
-                <a:cs typeface="Microsoft YaHei" pitchFamily="34" charset="-120"/>
-              </a:rPr>
-              <a:t>智能体的 SQL 要声明用了哪个定义的哪个修订。执行前在这条查询的同一快照上核对条件；过时或已失效的修订直接拒绝。</a:t>
-            </a:r>
-            <a:endParaRPr lang="en-US" sz="1600" dirty="0"/>
           </a:p>
         </p:txBody>
       </p:sp>
@@ -2583,46 +3351,159 @@
                 <a:ea typeface="Microsoft YaHei" pitchFamily="34" charset="-122"/>
                 <a:cs typeface="Microsoft YaHei" pitchFamily="34" charset="-120"/>
               </a:rPr>
-              <a:t>系统结构：一个请求怎样流经 MAVRA</a:t>
+              <a:t>系统结构：MAVRA 在智能体和数据库之间</a:t>
             </a:r>
             <a:endParaRPr lang="en-US" sz="3000" dirty="0"/>
           </a:p>
         </p:txBody>
       </p:sp>
-      <p:pic>
-        <p:nvPicPr>
-          <p:cNvPr id="3" name="overview" descr="/home/zhanhao/mingtai/ppt/agentdb-mid/tools/deck/figures/overview-zh.png">    </p:cNvPr>
-          <p:cNvPicPr>
-            <a:picLocks noChangeAspect="1"/>
-          </p:cNvPicPr>
+      <p:sp>
+        <p:nvSpPr>
+          <p:cNvPr id="3" name="Text 1"/>
+          <p:cNvSpPr/>
           <p:nvPr/>
-        </p:nvPicPr>
-        <p:blipFill>
-          <a:blip r:embed="rId1"/>
-          <a:stretch>
-            <a:fillRect/>
-          </a:stretch>
-        </p:blipFill>
-        <p:spPr>
-          <a:xfrm>
-            <a:off x="548640" y="1234440"/>
-            <a:ext cx="11094415" cy="4114904"/>
+        </p:nvSpPr>
+        <p:spPr>
+          <a:xfrm>
+            <a:off x="3108960" y="1234440"/>
+            <a:ext cx="5943600" cy="731520"/>
+          </a:xfrm>
+          <a:prstGeom prst="roundRect">
+            <a:avLst>
+              <a:gd name="adj" fmla="val 12500"/>
+            </a:avLst>
+          </a:prstGeom>
+          <a:solidFill>
+            <a:srgbClr val="F1F3F6"/>
+          </a:solidFill>
+          <a:ln w="12700">
+            <a:solidFill>
+              <a:srgbClr val="C9D1DB"/>
+            </a:solidFill>
+          </a:ln>
+        </p:spPr>
+        <p:txBody>
+          <a:bodyPr wrap="square" lIns="109728" tIns="109728" rIns="109728" bIns="109728" rtlCol="0" anchor="ctr"/>
+          <a:lstStyle/>
+          <a:p>
+            <a:pPr algn="ctr" indent="0" marL="0">
+              <a:lnSpc>
+                <a:spcPct val="110000"/>
+              </a:lnSpc>
+              <a:buNone/>
+            </a:pPr>
+            <a:r>
+              <a:rPr lang="en-US" sz="2000" b="1" dirty="0">
+                <a:solidFill>
+                  <a:srgbClr val="1F2A37"/>
+                </a:solidFill>
+                <a:latin typeface="Microsoft YaHei" pitchFamily="34" charset="0"/>
+                <a:ea typeface="Microsoft YaHei" pitchFamily="34" charset="-122"/>
+                <a:cs typeface="Microsoft YaHei" pitchFamily="34" charset="-120"/>
+              </a:rPr>
+              <a:t>用户端智能体（很多个）</a:t>
+            </a:r>
+            <a:endParaRPr lang="en-US" sz="2000" dirty="0"/>
+          </a:p>
+        </p:txBody>
+      </p:sp>
+      <p:sp>
+        <p:nvSpPr>
+          <p:cNvPr id="4" name="Shape 2"/>
+          <p:cNvSpPr/>
+          <p:nvPr/>
+        </p:nvSpPr>
+        <p:spPr>
+          <a:xfrm>
+            <a:off x="5120640" y="1965960"/>
+            <a:ext cx="0" cy="640080"/>
+          </a:xfrm>
+          <a:prstGeom prst="line">
+            <a:avLst/>
+          </a:prstGeom>
+          <a:noFill/>
+          <a:ln w="28575">
+            <a:solidFill>
+              <a:srgbClr val="1F2A37"/>
+            </a:solidFill>
+            <a:prstDash val="solid"/>
+            <a:tailEnd type="triangle"/>
+          </a:ln>
+        </p:spPr>
+      </p:sp>
+      <p:sp>
+        <p:nvSpPr>
+          <p:cNvPr id="5" name="Shape 3"/>
+          <p:cNvSpPr/>
+          <p:nvPr/>
+        </p:nvSpPr>
+        <p:spPr>
+          <a:xfrm flipV="1">
+            <a:off x="7040880" y="1965960"/>
+            <a:ext cx="0" cy="640080"/>
+          </a:xfrm>
+          <a:prstGeom prst="line">
+            <a:avLst/>
+          </a:prstGeom>
+          <a:noFill/>
+          <a:ln w="28575">
+            <a:solidFill>
+              <a:srgbClr val="1F2A37"/>
+            </a:solidFill>
+            <a:prstDash val="solid"/>
+            <a:tailEnd type="triangle"/>
+          </a:ln>
+        </p:spPr>
+      </p:sp>
+      <p:sp>
+        <p:nvSpPr>
+          <p:cNvPr id="6" name="Text 4"/>
+          <p:cNvSpPr txBox="1"/>
+          <p:nvPr/>
+        </p:nvSpPr>
+        <p:spPr>
+          <a:xfrm>
+            <a:off x="2926080" y="2103120"/>
+            <a:ext cx="2057400" cy="365760"/>
           </a:xfrm>
           <a:prstGeom prst="rect">
             <a:avLst/>
           </a:prstGeom>
-        </p:spPr>
-      </p:pic>
-      <p:sp>
-        <p:nvSpPr>
-          <p:cNvPr id="4" name="Text 1"/>
+          <a:noFill/>
+          <a:ln/>
+        </p:spPr>
+        <p:txBody>
+          <a:bodyPr wrap="square" lIns="0" tIns="0" rIns="0" bIns="0" rtlCol="0" anchor="t"/>
+          <a:lstStyle/>
+          <a:p>
+            <a:pPr algn="r" indent="0" marL="0">
+              <a:buNone/>
+            </a:pPr>
+            <a:r>
+              <a:rPr lang="en-US" sz="1600" dirty="0">
+                <a:solidFill>
+                  <a:srgbClr val="1F2A37"/>
+                </a:solidFill>
+                <a:latin typeface="Microsoft YaHei" pitchFamily="34" charset="0"/>
+                <a:ea typeface="Microsoft YaHei" pitchFamily="34" charset="-122"/>
+                <a:cs typeface="Microsoft YaHei" pitchFamily="34" charset="-120"/>
+              </a:rPr>
+              <a:t>问口径、发 SQL</a:t>
+            </a:r>
+            <a:endParaRPr lang="en-US" sz="1600" dirty="0"/>
+          </a:p>
+        </p:txBody>
+      </p:sp>
+      <p:sp>
+        <p:nvSpPr>
+          <p:cNvPr id="7" name="Text 5"/>
           <p:cNvSpPr txBox="1"/>
           <p:nvPr/>
         </p:nvSpPr>
         <p:spPr>
           <a:xfrm>
-            <a:off x="548640" y="5669384"/>
-            <a:ext cx="11094415" cy="411480"/>
+            <a:off x="7178040" y="2103120"/>
+            <a:ext cx="2377440" cy="365760"/>
           </a:xfrm>
           <a:prstGeom prst="rect">
             <a:avLst/>
@@ -2631,14 +3512,92 @@
           <a:ln/>
         </p:spPr>
         <p:txBody>
-          <a:bodyPr wrap="square" lIns="0" tIns="0" rIns="0" bIns="0" rtlCol="0" anchor="ctr"/>
+          <a:bodyPr wrap="square" lIns="0" tIns="0" rIns="0" bIns="0" rtlCol="0" anchor="t"/>
           <a:lstStyle/>
           <a:p>
             <a:pPr indent="0" marL="0">
               <a:buNone/>
             </a:pPr>
             <a:r>
-              <a:rPr lang="en-US" sz="1600" b="1" dirty="0">
+              <a:rPr lang="en-US" sz="1600" dirty="0">
+                <a:solidFill>
+                  <a:srgbClr val="1F2A37"/>
+                </a:solidFill>
+                <a:latin typeface="Microsoft YaHei" pitchFamily="34" charset="0"/>
+                <a:ea typeface="Microsoft YaHei" pitchFamily="34" charset="-122"/>
+                <a:cs typeface="Microsoft YaHei" pitchFamily="34" charset="-120"/>
+              </a:rPr>
+              <a:t>口径、查询结果</a:t>
+            </a:r>
+            <a:endParaRPr lang="en-US" sz="1600" dirty="0"/>
+          </a:p>
+        </p:txBody>
+      </p:sp>
+      <p:sp>
+        <p:nvSpPr>
+          <p:cNvPr id="8" name="Text 6"/>
+          <p:cNvSpPr/>
+          <p:nvPr/>
+        </p:nvSpPr>
+        <p:spPr>
+          <a:xfrm>
+            <a:off x="822960" y="2606040"/>
+            <a:ext cx="10515600" cy="2240280"/>
+          </a:xfrm>
+          <a:prstGeom prst="roundRect">
+            <a:avLst>
+              <a:gd name="adj" fmla="val 4082"/>
+            </a:avLst>
+          </a:prstGeom>
+          <a:solidFill>
+            <a:srgbClr val="EEF3FA"/>
+          </a:solidFill>
+          <a:ln w="12700">
+            <a:solidFill>
+              <a:srgbClr val="EEF3FA"/>
+            </a:solidFill>
+          </a:ln>
+        </p:spPr>
+        <p:txBody>
+          <a:bodyPr wrap="square" lIns="109728" tIns="109728" rIns="109728" bIns="109728" rtlCol="0" anchor="ctr"/>
+          <a:lstStyle/>
+          <a:p>
+            <a:pPr algn="ctr" indent="0" marL="0">
+              <a:lnSpc>
+                <a:spcPct val="110000"/>
+              </a:lnSpc>
+              <a:buNone/>
+            </a:pPr>
+            <a:endParaRPr lang="en-US" sz="1600" dirty="0"/>
+          </a:p>
+        </p:txBody>
+      </p:sp>
+      <p:sp>
+        <p:nvSpPr>
+          <p:cNvPr id="9" name="Text 7"/>
+          <p:cNvSpPr txBox="1"/>
+          <p:nvPr/>
+        </p:nvSpPr>
+        <p:spPr>
+          <a:xfrm>
+            <a:off x="1097280" y="2724912"/>
+            <a:ext cx="3657600" cy="365760"/>
+          </a:xfrm>
+          <a:prstGeom prst="rect">
+            <a:avLst/>
+          </a:prstGeom>
+          <a:noFill/>
+          <a:ln/>
+        </p:spPr>
+        <p:txBody>
+          <a:bodyPr wrap="square" lIns="0" tIns="0" rIns="0" bIns="0" rtlCol="0" anchor="t"/>
+          <a:lstStyle/>
+          <a:p>
+            <a:pPr indent="0" marL="0">
+              <a:buNone/>
+            </a:pPr>
+            <a:r>
+              <a:rPr lang="en-US" sz="1800" b="1" dirty="0">
                 <a:solidFill>
                   <a:srgbClr val="1D5BA6"/>
                 </a:solidFill>
@@ -2646,8 +3605,267 @@
                 <a:ea typeface="Microsoft YaHei" pitchFamily="34" charset="-122"/>
                 <a:cs typeface="Microsoft YaHei" pitchFamily="34" charset="-120"/>
               </a:rPr>
+              <a:t>MAVRA 中间件</a:t>
+            </a:r>
+            <a:endParaRPr lang="en-US" sz="1800" dirty="0"/>
+          </a:p>
+        </p:txBody>
+      </p:sp>
+      <p:sp>
+        <p:nvSpPr>
+          <p:cNvPr id="10" name="Text 8"/>
+          <p:cNvSpPr/>
+          <p:nvPr/>
+        </p:nvSpPr>
+        <p:spPr>
+          <a:xfrm>
+            <a:off x="1143000" y="3200400"/>
+            <a:ext cx="3108960" cy="1371600"/>
+          </a:xfrm>
+          <a:prstGeom prst="roundRect">
+            <a:avLst>
+              <a:gd name="adj" fmla="val 6667"/>
+            </a:avLst>
+          </a:prstGeom>
+          <a:solidFill>
+            <a:srgbClr val="FFFFFF"/>
+          </a:solidFill>
+          <a:ln w="25400">
+            <a:solidFill>
+              <a:srgbClr val="1D5BA6"/>
+            </a:solidFill>
+          </a:ln>
+        </p:spPr>
+        <p:txBody>
+          <a:bodyPr wrap="square" lIns="109728" tIns="109728" rIns="109728" bIns="109728" rtlCol="0" anchor="ctr"/>
+          <a:lstStyle/>
+          <a:p>
+            <a:pPr algn="ctr" indent="0" marL="0">
+              <a:lnSpc>
+                <a:spcPct val="110000"/>
+              </a:lnSpc>
+              <a:buNone/>
+            </a:pPr>
+            <a:r>
+              <a:rPr lang="en-US" sz="2200" b="1" dirty="0">
+                <a:solidFill>
+                  <a:srgbClr val="1D5BA6"/>
+                </a:solidFill>
+                <a:latin typeface="Microsoft YaHei" pitchFamily="34" charset="0"/>
+                <a:ea typeface="Microsoft YaHei" pitchFamily="34" charset="-122"/>
+                <a:cs typeface="Microsoft YaHei" pitchFamily="34" charset="-120"/>
+              </a:rPr>
               <a:t>请求处理</a:t>
             </a:r>
+            <a:endParaRPr lang="en-US" sz="1600" dirty="0"/>
+          </a:p>
+          <a:p>
+            <a:pPr algn="ctr" indent="0" marL="0">
+              <a:lnSpc>
+                <a:spcPct val="110000"/>
+              </a:lnSpc>
+              <a:buNone/>
+            </a:pPr>
+            <a:r>
+              <a:rPr lang="en-US" sz="1600" dirty="0">
+                <a:solidFill>
+                  <a:srgbClr val="1F2A37"/>
+                </a:solidFill>
+                <a:latin typeface="Microsoft YaHei" pitchFamily="34" charset="0"/>
+                <a:ea typeface="Microsoft YaHei" pitchFamily="34" charset="-122"/>
+                <a:cs typeface="Microsoft YaHei" pitchFamily="34" charset="-120"/>
+              </a:rPr>
+              <a:t>接待智能体的请求</a:t>
+            </a:r>
+            <a:endParaRPr lang="en-US" sz="1600" dirty="0"/>
+          </a:p>
+        </p:txBody>
+      </p:sp>
+      <p:sp>
+        <p:nvSpPr>
+          <p:cNvPr id="11" name="Text 9"/>
+          <p:cNvSpPr/>
+          <p:nvPr/>
+        </p:nvSpPr>
+        <p:spPr>
+          <a:xfrm>
+            <a:off x="4526280" y="3200400"/>
+            <a:ext cx="3108960" cy="1371600"/>
+          </a:xfrm>
+          <a:prstGeom prst="roundRect">
+            <a:avLst>
+              <a:gd name="adj" fmla="val 6667"/>
+            </a:avLst>
+          </a:prstGeom>
+          <a:solidFill>
+            <a:srgbClr val="FFFFFF"/>
+          </a:solidFill>
+          <a:ln w="25400">
+            <a:solidFill>
+              <a:srgbClr val="1F7A72"/>
+            </a:solidFill>
+          </a:ln>
+        </p:spPr>
+        <p:txBody>
+          <a:bodyPr wrap="square" lIns="109728" tIns="109728" rIns="109728" bIns="109728" rtlCol="0" anchor="ctr"/>
+          <a:lstStyle/>
+          <a:p>
+            <a:pPr algn="ctr" indent="0" marL="0">
+              <a:lnSpc>
+                <a:spcPct val="110000"/>
+              </a:lnSpc>
+              <a:buNone/>
+            </a:pPr>
+            <a:r>
+              <a:rPr lang="en-US" sz="2200" b="1" dirty="0">
+                <a:solidFill>
+                  <a:srgbClr val="1F7A72"/>
+                </a:solidFill>
+                <a:latin typeface="Microsoft YaHei" pitchFamily="34" charset="0"/>
+                <a:ea typeface="Microsoft YaHei" pitchFamily="34" charset="-122"/>
+                <a:cs typeface="Microsoft YaHei" pitchFamily="34" charset="-120"/>
+              </a:rPr>
+              <a:t>共享知识库</a:t>
+            </a:r>
+            <a:endParaRPr lang="en-US" sz="1600" dirty="0"/>
+          </a:p>
+          <a:p>
+            <a:pPr algn="ctr" indent="0" marL="0">
+              <a:lnSpc>
+                <a:spcPct val="110000"/>
+              </a:lnSpc>
+              <a:buNone/>
+            </a:pPr>
+            <a:r>
+              <a:rPr lang="en-US" sz="1600" dirty="0">
+                <a:solidFill>
+                  <a:srgbClr val="1F2A37"/>
+                </a:solidFill>
+                <a:latin typeface="Microsoft YaHei" pitchFamily="34" charset="0"/>
+                <a:ea typeface="Microsoft YaHei" pitchFamily="34" charset="-122"/>
+                <a:cs typeface="Microsoft YaHei" pitchFamily="34" charset="-120"/>
+              </a:rPr>
+              <a:t>存口径和检查结果</a:t>
+            </a:r>
+            <a:endParaRPr lang="en-US" sz="1600" dirty="0"/>
+          </a:p>
+        </p:txBody>
+      </p:sp>
+      <p:sp>
+        <p:nvSpPr>
+          <p:cNvPr id="12" name="Text 10"/>
+          <p:cNvSpPr/>
+          <p:nvPr/>
+        </p:nvSpPr>
+        <p:spPr>
+          <a:xfrm>
+            <a:off x="7909560" y="3200400"/>
+            <a:ext cx="3108960" cy="1371600"/>
+          </a:xfrm>
+          <a:prstGeom prst="roundRect">
+            <a:avLst>
+              <a:gd name="adj" fmla="val 6667"/>
+            </a:avLst>
+          </a:prstGeom>
+          <a:solidFill>
+            <a:srgbClr val="FFFFFF"/>
+          </a:solidFill>
+          <a:ln w="25400">
+            <a:solidFill>
+              <a:srgbClr val="6A58A3"/>
+            </a:solidFill>
+          </a:ln>
+        </p:spPr>
+        <p:txBody>
+          <a:bodyPr wrap="square" lIns="109728" tIns="109728" rIns="109728" bIns="109728" rtlCol="0" anchor="ctr"/>
+          <a:lstStyle/>
+          <a:p>
+            <a:pPr algn="ctr" indent="0" marL="0">
+              <a:lnSpc>
+                <a:spcPct val="110000"/>
+              </a:lnSpc>
+              <a:buNone/>
+            </a:pPr>
+            <a:r>
+              <a:rPr lang="en-US" sz="2200" b="1" dirty="0">
+                <a:solidFill>
+                  <a:srgbClr val="6A58A3"/>
+                </a:solidFill>
+                <a:latin typeface="Microsoft YaHei" pitchFamily="34" charset="0"/>
+                <a:ea typeface="Microsoft YaHei" pitchFamily="34" charset="-122"/>
+                <a:cs typeface="Microsoft YaHei" pitchFamily="34" charset="-120"/>
+              </a:rPr>
+              <a:t>学习与维护</a:t>
+            </a:r>
+            <a:endParaRPr lang="en-US" sz="1600" dirty="0"/>
+          </a:p>
+          <a:p>
+            <a:pPr algn="ctr" indent="0" marL="0">
+              <a:lnSpc>
+                <a:spcPct val="110000"/>
+              </a:lnSpc>
+              <a:buNone/>
+            </a:pPr>
+            <a:r>
+              <a:rPr lang="en-US" sz="1600" dirty="0">
+                <a:solidFill>
+                  <a:srgbClr val="1F2A37"/>
+                </a:solidFill>
+                <a:latin typeface="Microsoft YaHei" pitchFamily="34" charset="0"/>
+                <a:ea typeface="Microsoft YaHei" pitchFamily="34" charset="-122"/>
+                <a:cs typeface="Microsoft YaHei" pitchFamily="34" charset="-120"/>
+              </a:rPr>
+              <a:t>学口径、管口径</a:t>
+            </a:r>
+            <a:endParaRPr lang="en-US" sz="1600" dirty="0"/>
+          </a:p>
+        </p:txBody>
+      </p:sp>
+      <p:sp>
+        <p:nvSpPr>
+          <p:cNvPr id="13" name="Shape 11"/>
+          <p:cNvSpPr/>
+          <p:nvPr/>
+        </p:nvSpPr>
+        <p:spPr>
+          <a:xfrm>
+            <a:off x="6080760" y="4846320"/>
+            <a:ext cx="0" cy="502920"/>
+          </a:xfrm>
+          <a:prstGeom prst="line">
+            <a:avLst/>
+          </a:prstGeom>
+          <a:noFill/>
+          <a:ln w="28575">
+            <a:solidFill>
+              <a:srgbClr val="1F2A37"/>
+            </a:solidFill>
+            <a:prstDash val="solid"/>
+            <a:tailEnd type="triangle"/>
+          </a:ln>
+        </p:spPr>
+      </p:sp>
+      <p:sp>
+        <p:nvSpPr>
+          <p:cNvPr id="14" name="Text 12"/>
+          <p:cNvSpPr txBox="1"/>
+          <p:nvPr/>
+        </p:nvSpPr>
+        <p:spPr>
+          <a:xfrm>
+            <a:off x="6263640" y="4919472"/>
+            <a:ext cx="3108960" cy="365760"/>
+          </a:xfrm>
+          <a:prstGeom prst="rect">
+            <a:avLst/>
+          </a:prstGeom>
+          <a:noFill/>
+          <a:ln/>
+        </p:spPr>
+        <p:txBody>
+          <a:bodyPr wrap="square" lIns="0" tIns="0" rIns="0" bIns="0" rtlCol="0" anchor="t"/>
+          <a:lstStyle/>
+          <a:p>
             <a:pPr indent="0" marL="0">
               <a:buNone/>
             </a:pPr>
@@ -2660,65 +3878,172 @@
                 <a:ea typeface="Microsoft YaHei" pitchFamily="34" charset="-122"/>
                 <a:cs typeface="Microsoft YaHei" pitchFamily="34" charset="-120"/>
               </a:rPr>
-              <a:t>：查找、同快照验证      </a:t>
-            </a:r>
+              <a:t>读数据、跑检查、执行查询</a:t>
+            </a:r>
+            <a:endParaRPr lang="en-US" sz="1600" dirty="0"/>
+          </a:p>
+        </p:txBody>
+      </p:sp>
+      <p:sp>
+        <p:nvSpPr>
+          <p:cNvPr id="15" name="Text 13"/>
+          <p:cNvSpPr/>
+          <p:nvPr/>
+        </p:nvSpPr>
+        <p:spPr>
+          <a:xfrm>
+            <a:off x="4709160" y="5349240"/>
+            <a:ext cx="2743200" cy="960120"/>
+          </a:xfrm>
+          <a:prstGeom prst="can">
+            <a:avLst>
+              <a:gd name="adj" fmla="val 9524"/>
+            </a:avLst>
+          </a:prstGeom>
+          <a:solidFill>
+            <a:srgbClr val="FBF0E2"/>
+          </a:solidFill>
+          <a:ln w="19050">
+            <a:solidFill>
+              <a:srgbClr val="B5671A"/>
+            </a:solidFill>
+          </a:ln>
+        </p:spPr>
+        <p:txBody>
+          <a:bodyPr wrap="square" lIns="109728" tIns="109728" rIns="109728" bIns="109728" rtlCol="0" anchor="ctr"/>
+          <a:lstStyle/>
+          <a:p>
+            <a:pPr algn="ctr" indent="0" marL="0">
+              <a:lnSpc>
+                <a:spcPct val="110000"/>
+              </a:lnSpc>
+              <a:buNone/>
+            </a:pPr>
+            <a:r>
+              <a:rPr lang="en-US" sz="2000" b="1" dirty="0">
+                <a:solidFill>
+                  <a:srgbClr val="1F2A37"/>
+                </a:solidFill>
+                <a:latin typeface="Microsoft YaHei" pitchFamily="34" charset="0"/>
+                <a:ea typeface="Microsoft YaHei" pitchFamily="34" charset="-122"/>
+                <a:cs typeface="Microsoft YaHei" pitchFamily="34" charset="-120"/>
+              </a:rPr>
+              <a:t>SQL 数据库</a:t>
+            </a:r>
+            <a:endParaRPr lang="en-US" sz="2000" dirty="0"/>
+          </a:p>
+        </p:txBody>
+      </p:sp>
+      <p:sp>
+        <p:nvSpPr>
+          <p:cNvPr id="16" name="Text 14"/>
+          <p:cNvSpPr/>
+          <p:nvPr/>
+        </p:nvSpPr>
+        <p:spPr>
+          <a:xfrm>
+            <a:off x="9144000" y="5532120"/>
+            <a:ext cx="2194560" cy="640080"/>
+          </a:xfrm>
+          <a:prstGeom prst="roundRect">
+            <a:avLst>
+              <a:gd name="adj" fmla="val 14286"/>
+            </a:avLst>
+          </a:prstGeom>
+          <a:solidFill>
+            <a:srgbClr val="F1F3F6"/>
+          </a:solidFill>
+          <a:ln w="12700">
+            <a:solidFill>
+              <a:srgbClr val="C9D1DB"/>
+            </a:solidFill>
+          </a:ln>
+        </p:spPr>
+        <p:txBody>
+          <a:bodyPr wrap="square" lIns="109728" tIns="109728" rIns="109728" bIns="109728" rtlCol="0" anchor="ctr"/>
+          <a:lstStyle/>
+          <a:p>
+            <a:pPr algn="ctr" indent="0" marL="0">
+              <a:lnSpc>
+                <a:spcPct val="110000"/>
+              </a:lnSpc>
+              <a:buNone/>
+            </a:pPr>
+            <a:r>
+              <a:rPr lang="en-US" sz="1600" dirty="0">
+                <a:solidFill>
+                  <a:srgbClr val="1F2A37"/>
+                </a:solidFill>
+                <a:latin typeface="Microsoft YaHei" pitchFamily="34" charset="0"/>
+                <a:ea typeface="Microsoft YaHei" pitchFamily="34" charset="-122"/>
+                <a:cs typeface="Microsoft YaHei" pitchFamily="34" charset="-120"/>
+              </a:rPr>
+              <a:t>ETL / 写入方</a:t>
+            </a:r>
+            <a:endParaRPr lang="en-US" sz="1600" dirty="0"/>
+          </a:p>
+        </p:txBody>
+      </p:sp>
+      <p:sp>
+        <p:nvSpPr>
+          <p:cNvPr id="17" name="Shape 15"/>
+          <p:cNvSpPr/>
+          <p:nvPr/>
+        </p:nvSpPr>
+        <p:spPr>
+          <a:xfrm flipH="1">
+            <a:off x="7498080" y="5852160"/>
+            <a:ext cx="1645920" cy="0"/>
+          </a:xfrm>
+          <a:prstGeom prst="line">
+            <a:avLst/>
+          </a:prstGeom>
+          <a:noFill/>
+          <a:ln w="28575">
+            <a:solidFill>
+              <a:srgbClr val="B5671A"/>
+            </a:solidFill>
+            <a:prstDash val="solid"/>
+            <a:tailEnd type="triangle"/>
+          </a:ln>
+        </p:spPr>
+      </p:sp>
+      <p:sp>
+        <p:nvSpPr>
+          <p:cNvPr id="18" name="Text 16"/>
+          <p:cNvSpPr txBox="1"/>
+          <p:nvPr/>
+        </p:nvSpPr>
+        <p:spPr>
+          <a:xfrm>
+            <a:off x="7635240" y="5925312"/>
+            <a:ext cx="1554480" cy="320040"/>
+          </a:xfrm>
+          <a:prstGeom prst="rect">
+            <a:avLst/>
+          </a:prstGeom>
+          <a:noFill/>
+          <a:ln/>
+        </p:spPr>
+        <p:txBody>
+          <a:bodyPr wrap="square" lIns="0" tIns="0" rIns="0" bIns="0" rtlCol="0" anchor="t"/>
+          <a:lstStyle/>
+          <a:p>
             <a:pPr indent="0" marL="0">
               <a:buNone/>
             </a:pPr>
             <a:r>
-              <a:rPr lang="en-US" sz="1600" b="1" dirty="0">
-                <a:solidFill>
-                  <a:srgbClr val="1D5BA6"/>
-                </a:solidFill>
-                <a:latin typeface="Microsoft YaHei" pitchFamily="34" charset="0"/>
-                <a:ea typeface="Microsoft YaHei" pitchFamily="34" charset="-122"/>
-                <a:cs typeface="Microsoft YaHei" pitchFamily="34" charset="-120"/>
-              </a:rPr>
-              <a:t>共享知识库</a:t>
-            </a:r>
-            <a:pPr indent="0" marL="0">
-              <a:buNone/>
-            </a:pPr>
-            <a:r>
-              <a:rPr lang="en-US" sz="1600" dirty="0">
-                <a:solidFill>
-                  <a:srgbClr val="1F2A37"/>
-                </a:solidFill>
-                <a:latin typeface="Microsoft YaHei" pitchFamily="34" charset="0"/>
-                <a:ea typeface="Microsoft YaHei" pitchFamily="34" charset="-122"/>
-                <a:cs typeface="Microsoft YaHei" pitchFamily="34" charset="-120"/>
-              </a:rPr>
-              <a:t>：定义、检查结果      </a:t>
-            </a:r>
-            <a:pPr indent="0" marL="0">
-              <a:buNone/>
-            </a:pPr>
-            <a:r>
-              <a:rPr lang="en-US" sz="1600" b="1" dirty="0">
-                <a:solidFill>
-                  <a:srgbClr val="6A58A3"/>
-                </a:solidFill>
-                <a:latin typeface="Microsoft YaHei" pitchFamily="34" charset="0"/>
-                <a:ea typeface="Microsoft YaHei" pitchFamily="34" charset="-122"/>
-                <a:cs typeface="Microsoft YaHei" pitchFamily="34" charset="-120"/>
-              </a:rPr>
-              <a:t>学习与维护</a:t>
-            </a:r>
-            <a:pPr indent="0" marL="0">
-              <a:buNone/>
-            </a:pPr>
-            <a:r>
-              <a:rPr lang="en-US" sz="1600" dirty="0">
-                <a:solidFill>
-                  <a:srgbClr val="1F2A37"/>
-                </a:solidFill>
-                <a:latin typeface="Microsoft YaHei" pitchFamily="34" charset="0"/>
-                <a:ea typeface="Microsoft YaHei" pitchFamily="34" charset="-122"/>
-                <a:cs typeface="Microsoft YaHei" pitchFamily="34" charset="-120"/>
-              </a:rPr>
-              <a:t>：分析优化器、维护</a:t>
-            </a:r>
-            <a:endParaRPr lang="en-US" sz="1600" dirty="0"/>
+              <a:rPr lang="en-US" sz="1400" dirty="0">
+                <a:solidFill>
+                  <a:srgbClr val="B5671A"/>
+                </a:solidFill>
+                <a:latin typeface="Microsoft YaHei" pitchFamily="34" charset="0"/>
+                <a:ea typeface="Microsoft YaHei" pitchFamily="34" charset="-122"/>
+                <a:cs typeface="Microsoft YaHei" pitchFamily="34" charset="-120"/>
+              </a:rPr>
+              <a:t>不断写入新数据</a:t>
+            </a:r>
+            <a:endParaRPr lang="en-US" sz="1400" dirty="0"/>
           </a:p>
         </p:txBody>
       </p:sp>
@@ -2830,46 +4155,145 @@
                 <a:ea typeface="Microsoft YaHei" pitchFamily="34" charset="-122"/>
                 <a:cs typeface="Microsoft YaHei" pitchFamily="34" charset="-120"/>
               </a:rPr>
-              <a:t>工作流①：查找有效定义，在快照上执行</a:t>
+              <a:t>三个模块各管什么</a:t>
             </a:r>
             <a:endParaRPr lang="en-US" sz="3000" dirty="0"/>
           </a:p>
         </p:txBody>
       </p:sp>
-      <p:pic>
-        <p:nvPicPr>
-          <p:cNvPr id="3" name="lookup" descr="/home/zhanhao/mingtai/ppt/agentdb-mid/tools/deck/figures/lookup-zh.png">    </p:cNvPr>
-          <p:cNvPicPr>
-            <a:picLocks noChangeAspect="1"/>
-          </p:cNvPicPr>
+      <p:sp>
+        <p:nvSpPr>
+          <p:cNvPr id="3" name="Text 1"/>
+          <p:cNvSpPr/>
           <p:nvPr/>
-        </p:nvPicPr>
-        <p:blipFill>
-          <a:blip r:embed="rId1"/>
-          <a:stretch>
-            <a:fillRect/>
-          </a:stretch>
-        </p:blipFill>
-        <p:spPr>
-          <a:xfrm>
-            <a:off x="775959" y="1188720"/>
-            <a:ext cx="10639777" cy="4663440"/>
+        </p:nvSpPr>
+        <p:spPr>
+          <a:xfrm>
+            <a:off x="548640" y="1325880"/>
+            <a:ext cx="3484778" cy="4892040"/>
+          </a:xfrm>
+          <a:prstGeom prst="roundRect">
+            <a:avLst>
+              <a:gd name="adj" fmla="val 2624"/>
+            </a:avLst>
+          </a:prstGeom>
+          <a:solidFill>
+            <a:srgbClr val="E8F0FA"/>
+          </a:solidFill>
+          <a:ln w="12700">
+            <a:solidFill>
+              <a:srgbClr val="E8F0FA"/>
+            </a:solidFill>
+          </a:ln>
+        </p:spPr>
+        <p:txBody>
+          <a:bodyPr wrap="square" lIns="109728" tIns="109728" rIns="109728" bIns="109728" rtlCol="0" anchor="ctr"/>
+          <a:lstStyle/>
+          <a:p>
+            <a:pPr algn="ctr" indent="0" marL="0">
+              <a:lnSpc>
+                <a:spcPct val="110000"/>
+              </a:lnSpc>
+              <a:buNone/>
+            </a:pPr>
+            <a:endParaRPr lang="en-US" sz="1600" dirty="0"/>
+          </a:p>
+        </p:txBody>
+      </p:sp>
+      <p:sp>
+        <p:nvSpPr>
+          <p:cNvPr id="4" name="Text 2"/>
+          <p:cNvSpPr/>
+          <p:nvPr/>
+        </p:nvSpPr>
+        <p:spPr>
+          <a:xfrm>
+            <a:off x="868680" y="1600200"/>
+            <a:ext cx="685800" cy="685800"/>
+          </a:xfrm>
+          <a:prstGeom prst="ellipse">
+            <a:avLst/>
+          </a:prstGeom>
+          <a:solidFill>
+            <a:srgbClr val="1D5BA6"/>
+          </a:solidFill>
+          <a:ln>
+            <a:solidFill>
+              <a:srgbClr val="1D5BA6"/>
+            </a:solidFill>
+          </a:ln>
+        </p:spPr>
+        <p:txBody>
+          <a:bodyPr wrap="square" lIns="0" tIns="0" rIns="0" bIns="0" rtlCol="0" anchor="ctr"/>
+          <a:lstStyle/>
+          <a:p>
+            <a:pPr algn="ctr" indent="0" marL="0">
+              <a:buNone/>
+            </a:pPr>
+            <a:r>
+              <a:rPr lang="en-US" sz="2400" b="1" dirty="0">
+                <a:solidFill>
+                  <a:srgbClr val="FFFFFF"/>
+                </a:solidFill>
+                <a:latin typeface="Microsoft YaHei" pitchFamily="34" charset="0"/>
+                <a:ea typeface="Microsoft YaHei" pitchFamily="34" charset="-122"/>
+                <a:cs typeface="Microsoft YaHei" pitchFamily="34" charset="-120"/>
+              </a:rPr>
+              <a:t>接</a:t>
+            </a:r>
+            <a:endParaRPr lang="en-US" sz="2400" dirty="0"/>
+          </a:p>
+        </p:txBody>
+      </p:sp>
+      <p:sp>
+        <p:nvSpPr>
+          <p:cNvPr id="5" name="Text 3"/>
+          <p:cNvSpPr txBox="1"/>
+          <p:nvPr/>
+        </p:nvSpPr>
+        <p:spPr>
+          <a:xfrm>
+            <a:off x="1737360" y="1691640"/>
+            <a:ext cx="2113178" cy="502920"/>
           </a:xfrm>
           <a:prstGeom prst="rect">
             <a:avLst/>
           </a:prstGeom>
-        </p:spPr>
-      </p:pic>
-      <p:sp>
-        <p:nvSpPr>
-          <p:cNvPr id="4" name="Text 1"/>
+          <a:noFill/>
+          <a:ln/>
+        </p:spPr>
+        <p:txBody>
+          <a:bodyPr wrap="square" lIns="0" tIns="0" rIns="0" bIns="0" rtlCol="0" anchor="t"/>
+          <a:lstStyle/>
+          <a:p>
+            <a:pPr indent="0" marL="0">
+              <a:buNone/>
+            </a:pPr>
+            <a:r>
+              <a:rPr lang="en-US" sz="2400" b="1" dirty="0">
+                <a:solidFill>
+                  <a:srgbClr val="1D5BA6"/>
+                </a:solidFill>
+                <a:latin typeface="Microsoft YaHei" pitchFamily="34" charset="0"/>
+                <a:ea typeface="Microsoft YaHei" pitchFamily="34" charset="-122"/>
+                <a:cs typeface="Microsoft YaHei" pitchFamily="34" charset="-120"/>
+              </a:rPr>
+              <a:t>请求处理</a:t>
+            </a:r>
+            <a:endParaRPr lang="en-US" sz="2400" dirty="0"/>
+          </a:p>
+        </p:txBody>
+      </p:sp>
+      <p:sp>
+        <p:nvSpPr>
+          <p:cNvPr id="6" name="Text 4"/>
           <p:cNvSpPr txBox="1"/>
           <p:nvPr/>
         </p:nvSpPr>
         <p:spPr>
           <a:xfrm>
-            <a:off x="548640" y="6035040"/>
-            <a:ext cx="9997135" cy="411480"/>
+            <a:off x="868680" y="2560320"/>
+            <a:ext cx="2844698" cy="3474720"/>
           </a:xfrm>
           <a:prstGeom prst="rect">
             <a:avLst/>
@@ -2878,28 +4302,434 @@
           <a:ln/>
         </p:spPr>
         <p:txBody>
+          <a:bodyPr wrap="square" lIns="0" tIns="0" rIns="0" bIns="0" rtlCol="0" anchor="t"/>
+          <a:lstStyle/>
+          <a:p>
+            <a:pPr marL="342900" indent="-342900">
+              <a:spcAft>
+                <a:spcPts val="1200"/>
+              </a:spcAft>
+              <a:buSzPct val="100000"/>
+              <a:buChar char="•"/>
+            </a:pPr>
+            <a:r>
+              <a:rPr lang="en-US" sz="1800" dirty="0">
+                <a:solidFill>
+                  <a:srgbClr val="1F2A37"/>
+                </a:solidFill>
+                <a:latin typeface="Microsoft YaHei" pitchFamily="34" charset="0"/>
+                <a:ea typeface="Microsoft YaHei" pitchFamily="34" charset="-122"/>
+                <a:cs typeface="Microsoft YaHei" pitchFamily="34" charset="-120"/>
+              </a:rPr>
+              <a:t>智能体问“某指标怎么算”：返回现在能用的口径</a:t>
+            </a:r>
+            <a:endParaRPr lang="en-US" sz="1800" dirty="0"/>
+          </a:p>
+          <a:p>
+            <a:pPr marL="342900" indent="-342900">
+              <a:spcAft>
+                <a:spcPts val="1200"/>
+              </a:spcAft>
+              <a:buSzPct val="100000"/>
+              <a:buChar char="•"/>
+            </a:pPr>
+            <a:r>
+              <a:rPr lang="en-US" sz="1800" dirty="0">
+                <a:solidFill>
+                  <a:srgbClr val="1F2A37"/>
+                </a:solidFill>
+                <a:latin typeface="Microsoft YaHei" pitchFamily="34" charset="0"/>
+                <a:ea typeface="Microsoft YaHei" pitchFamily="34" charset="-122"/>
+                <a:cs typeface="Microsoft YaHei" pitchFamily="34" charset="-120"/>
+              </a:rPr>
+              <a:t>智能体发 SQL：先核对它用的口径还成立，再执行</a:t>
+            </a:r>
+            <a:endParaRPr lang="en-US" sz="1800" dirty="0"/>
+          </a:p>
+          <a:p>
+            <a:pPr marL="342900" indent="-342900">
+              <a:spcAft>
+                <a:spcPts val="1200"/>
+              </a:spcAft>
+              <a:buSzPct val="100000"/>
+              <a:buChar char="•"/>
+            </a:pPr>
+            <a:r>
+              <a:rPr lang="en-US" sz="1800" dirty="0">
+                <a:solidFill>
+                  <a:srgbClr val="1F2A37"/>
+                </a:solidFill>
+                <a:latin typeface="Microsoft YaHei" pitchFamily="34" charset="0"/>
+                <a:ea typeface="Microsoft YaHei" pitchFamily="34" charset="-122"/>
+                <a:cs typeface="Microsoft YaHei" pitchFamily="34" charset="-120"/>
+              </a:rPr>
+              <a:t>口径过时或停用：拒绝，并告诉智能体</a:t>
+            </a:r>
+            <a:endParaRPr lang="en-US" sz="1800" dirty="0"/>
+          </a:p>
+        </p:txBody>
+      </p:sp>
+      <p:sp>
+        <p:nvSpPr>
+          <p:cNvPr id="7" name="Text 5"/>
+          <p:cNvSpPr/>
+          <p:nvPr/>
+        </p:nvSpPr>
+        <p:spPr>
+          <a:xfrm>
+            <a:off x="4353458" y="1325880"/>
+            <a:ext cx="3484778" cy="4892040"/>
+          </a:xfrm>
+          <a:prstGeom prst="roundRect">
+            <a:avLst>
+              <a:gd name="adj" fmla="val 2624"/>
+            </a:avLst>
+          </a:prstGeom>
+          <a:solidFill>
+            <a:srgbClr val="E3F2F0"/>
+          </a:solidFill>
+          <a:ln w="12700">
+            <a:solidFill>
+              <a:srgbClr val="E3F2F0"/>
+            </a:solidFill>
+          </a:ln>
+        </p:spPr>
+        <p:txBody>
+          <a:bodyPr wrap="square" lIns="109728" tIns="109728" rIns="109728" bIns="109728" rtlCol="0" anchor="ctr"/>
+          <a:lstStyle/>
+          <a:p>
+            <a:pPr algn="ctr" indent="0" marL="0">
+              <a:lnSpc>
+                <a:spcPct val="110000"/>
+              </a:lnSpc>
+              <a:buNone/>
+            </a:pPr>
+            <a:endParaRPr lang="en-US" sz="1600" dirty="0"/>
+          </a:p>
+        </p:txBody>
+      </p:sp>
+      <p:sp>
+        <p:nvSpPr>
+          <p:cNvPr id="8" name="Text 6"/>
+          <p:cNvSpPr/>
+          <p:nvPr/>
+        </p:nvSpPr>
+        <p:spPr>
+          <a:xfrm>
+            <a:off x="4673498" y="1600200"/>
+            <a:ext cx="685800" cy="685800"/>
+          </a:xfrm>
+          <a:prstGeom prst="ellipse">
+            <a:avLst/>
+          </a:prstGeom>
+          <a:solidFill>
+            <a:srgbClr val="1F7A72"/>
+          </a:solidFill>
+          <a:ln>
+            <a:solidFill>
+              <a:srgbClr val="1F7A72"/>
+            </a:solidFill>
+          </a:ln>
+        </p:spPr>
+        <p:txBody>
           <a:bodyPr wrap="square" lIns="0" tIns="0" rIns="0" bIns="0" rtlCol="0" anchor="ctr"/>
           <a:lstStyle/>
           <a:p>
+            <a:pPr algn="ctr" indent="0" marL="0">
+              <a:buNone/>
+            </a:pPr>
+            <a:r>
+              <a:rPr lang="en-US" sz="2400" b="1" dirty="0">
+                <a:solidFill>
+                  <a:srgbClr val="FFFFFF"/>
+                </a:solidFill>
+                <a:latin typeface="Microsoft YaHei" pitchFamily="34" charset="0"/>
+                <a:ea typeface="Microsoft YaHei" pitchFamily="34" charset="-122"/>
+                <a:cs typeface="Microsoft YaHei" pitchFamily="34" charset="-120"/>
+              </a:rPr>
+              <a:t>存</a:t>
+            </a:r>
+            <a:endParaRPr lang="en-US" sz="2400" dirty="0"/>
+          </a:p>
+        </p:txBody>
+      </p:sp>
+      <p:sp>
+        <p:nvSpPr>
+          <p:cNvPr id="9" name="Text 7"/>
+          <p:cNvSpPr txBox="1"/>
+          <p:nvPr/>
+        </p:nvSpPr>
+        <p:spPr>
+          <a:xfrm>
+            <a:off x="5542178" y="1691640"/>
+            <a:ext cx="2113178" cy="502920"/>
+          </a:xfrm>
+          <a:prstGeom prst="rect">
+            <a:avLst/>
+          </a:prstGeom>
+          <a:noFill/>
+          <a:ln/>
+        </p:spPr>
+        <p:txBody>
+          <a:bodyPr wrap="square" lIns="0" tIns="0" rIns="0" bIns="0" rtlCol="0" anchor="t"/>
+          <a:lstStyle/>
+          <a:p>
             <a:pPr indent="0" marL="0">
               <a:buNone/>
             </a:pPr>
             <a:r>
-              <a:rPr lang="en-US" sz="1600" b="1" dirty="0">
-                <a:solidFill>
-                  <a:srgbClr val="1D5BA6"/>
-                </a:solidFill>
-                <a:latin typeface="Microsoft YaHei" pitchFamily="34" charset="0"/>
-                <a:ea typeface="Microsoft YaHei" pitchFamily="34" charset="-122"/>
-                <a:cs typeface="Microsoft YaHei" pitchFamily="34" charset="-120"/>
-              </a:rPr>
-              <a:t>检查结果的复用：</a:t>
-            </a:r>
+              <a:rPr lang="en-US" sz="2400" b="1" dirty="0">
+                <a:solidFill>
+                  <a:srgbClr val="1F7A72"/>
+                </a:solidFill>
+                <a:latin typeface="Microsoft YaHei" pitchFamily="34" charset="0"/>
+                <a:ea typeface="Microsoft YaHei" pitchFamily="34" charset="-122"/>
+                <a:cs typeface="Microsoft YaHei" pitchFamily="34" charset="-120"/>
+              </a:rPr>
+              <a:t>共享知识库</a:t>
+            </a:r>
+            <a:endParaRPr lang="en-US" sz="2400" dirty="0"/>
+          </a:p>
+        </p:txBody>
+      </p:sp>
+      <p:sp>
+        <p:nvSpPr>
+          <p:cNvPr id="10" name="Text 8"/>
+          <p:cNvSpPr txBox="1"/>
+          <p:nvPr/>
+        </p:nvSpPr>
+        <p:spPr>
+          <a:xfrm>
+            <a:off x="4673498" y="2560320"/>
+            <a:ext cx="2844698" cy="3474720"/>
+          </a:xfrm>
+          <a:prstGeom prst="rect">
+            <a:avLst/>
+          </a:prstGeom>
+          <a:noFill/>
+          <a:ln/>
+        </p:spPr>
+        <p:txBody>
+          <a:bodyPr wrap="square" lIns="0" tIns="0" rIns="0" bIns="0" rtlCol="0" anchor="t"/>
+          <a:lstStyle/>
+          <a:p>
+            <a:pPr marL="342900" indent="-342900">
+              <a:spcAft>
+                <a:spcPts val="1200"/>
+              </a:spcAft>
+              <a:buSzPct val="100000"/>
+              <a:buChar char="•"/>
+            </a:pPr>
+            <a:r>
+              <a:rPr lang="en-US" sz="1800" dirty="0">
+                <a:solidFill>
+                  <a:srgbClr val="1F2A37"/>
+                </a:solidFill>
+                <a:latin typeface="Microsoft YaHei" pitchFamily="34" charset="0"/>
+                <a:ea typeface="Microsoft YaHei" pitchFamily="34" charset="-122"/>
+                <a:cs typeface="Microsoft YaHei" pitchFamily="34" charset="-120"/>
+              </a:rPr>
+              <a:t>口径：怎么算，依赖哪些条件（如“每笔退货只有一行”）</a:t>
+            </a:r>
+            <a:endParaRPr lang="en-US" sz="1800" dirty="0"/>
+          </a:p>
+          <a:p>
+            <a:pPr marL="342900" indent="-342900">
+              <a:spcAft>
+                <a:spcPts val="1200"/>
+              </a:spcAft>
+              <a:buSzPct val="100000"/>
+              <a:buChar char="•"/>
+            </a:pPr>
+            <a:r>
+              <a:rPr lang="en-US" sz="1800" dirty="0">
+                <a:solidFill>
+                  <a:srgbClr val="1F2A37"/>
+                </a:solidFill>
+                <a:latin typeface="Microsoft YaHei" pitchFamily="34" charset="0"/>
+                <a:ea typeface="Microsoft YaHei" pitchFamily="34" charset="-122"/>
+                <a:cs typeface="Microsoft YaHei" pitchFamily="34" charset="-120"/>
+              </a:rPr>
+              <a:t>检查结果：哪个条件、在哪份数据上、成不成立</a:t>
+            </a:r>
+            <a:endParaRPr lang="en-US" sz="1800" dirty="0"/>
+          </a:p>
+          <a:p>
+            <a:pPr marL="342900" indent="-342900">
+              <a:spcAft>
+                <a:spcPts val="1200"/>
+              </a:spcAft>
+              <a:buSzPct val="100000"/>
+              <a:buChar char="•"/>
+            </a:pPr>
+            <a:r>
+              <a:rPr lang="en-US" sz="1800" dirty="0">
+                <a:solidFill>
+                  <a:srgbClr val="1F2A37"/>
+                </a:solidFill>
+                <a:latin typeface="Microsoft YaHei" pitchFamily="34" charset="0"/>
+                <a:ea typeface="Microsoft YaHei" pitchFamily="34" charset="-122"/>
+                <a:cs typeface="Microsoft YaHei" pitchFamily="34" charset="-120"/>
+              </a:rPr>
+              <a:t>所有智能体共用同一份</a:t>
+            </a:r>
+            <a:endParaRPr lang="en-US" sz="1800" dirty="0"/>
+          </a:p>
+        </p:txBody>
+      </p:sp>
+      <p:sp>
+        <p:nvSpPr>
+          <p:cNvPr id="11" name="Text 9"/>
+          <p:cNvSpPr/>
+          <p:nvPr/>
+        </p:nvSpPr>
+        <p:spPr>
+          <a:xfrm>
+            <a:off x="8158277" y="1325880"/>
+            <a:ext cx="3484778" cy="4892040"/>
+          </a:xfrm>
+          <a:prstGeom prst="roundRect">
+            <a:avLst>
+              <a:gd name="adj" fmla="val 2624"/>
+            </a:avLst>
+          </a:prstGeom>
+          <a:solidFill>
+            <a:srgbClr val="EFECF7"/>
+          </a:solidFill>
+          <a:ln w="12700">
+            <a:solidFill>
+              <a:srgbClr val="EFECF7"/>
+            </a:solidFill>
+          </a:ln>
+        </p:spPr>
+        <p:txBody>
+          <a:bodyPr wrap="square" lIns="109728" tIns="109728" rIns="109728" bIns="109728" rtlCol="0" anchor="ctr"/>
+          <a:lstStyle/>
+          <a:p>
+            <a:pPr algn="ctr" indent="0" marL="0">
+              <a:lnSpc>
+                <a:spcPct val="110000"/>
+              </a:lnSpc>
+              <a:buNone/>
+            </a:pPr>
+            <a:endParaRPr lang="en-US" sz="1600" dirty="0"/>
+          </a:p>
+        </p:txBody>
+      </p:sp>
+      <p:sp>
+        <p:nvSpPr>
+          <p:cNvPr id="12" name="Text 10"/>
+          <p:cNvSpPr/>
+          <p:nvPr/>
+        </p:nvSpPr>
+        <p:spPr>
+          <a:xfrm>
+            <a:off x="8478317" y="1600200"/>
+            <a:ext cx="685800" cy="685800"/>
+          </a:xfrm>
+          <a:prstGeom prst="ellipse">
+            <a:avLst/>
+          </a:prstGeom>
+          <a:solidFill>
+            <a:srgbClr val="6A58A3"/>
+          </a:solidFill>
+          <a:ln>
+            <a:solidFill>
+              <a:srgbClr val="6A58A3"/>
+            </a:solidFill>
+          </a:ln>
+        </p:spPr>
+        <p:txBody>
+          <a:bodyPr wrap="square" lIns="0" tIns="0" rIns="0" bIns="0" rtlCol="0" anchor="ctr"/>
+          <a:lstStyle/>
+          <a:p>
+            <a:pPr algn="ctr" indent="0" marL="0">
+              <a:buNone/>
+            </a:pPr>
+            <a:r>
+              <a:rPr lang="en-US" sz="2400" b="1" dirty="0">
+                <a:solidFill>
+                  <a:srgbClr val="FFFFFF"/>
+                </a:solidFill>
+                <a:latin typeface="Microsoft YaHei" pitchFamily="34" charset="0"/>
+                <a:ea typeface="Microsoft YaHei" pitchFamily="34" charset="-122"/>
+                <a:cs typeface="Microsoft YaHei" pitchFamily="34" charset="-120"/>
+              </a:rPr>
+              <a:t>学</a:t>
+            </a:r>
+            <a:endParaRPr lang="en-US" sz="2400" dirty="0"/>
+          </a:p>
+        </p:txBody>
+      </p:sp>
+      <p:sp>
+        <p:nvSpPr>
+          <p:cNvPr id="13" name="Text 11"/>
+          <p:cNvSpPr txBox="1"/>
+          <p:nvPr/>
+        </p:nvSpPr>
+        <p:spPr>
+          <a:xfrm>
+            <a:off x="9346997" y="1691640"/>
+            <a:ext cx="2113178" cy="502920"/>
+          </a:xfrm>
+          <a:prstGeom prst="rect">
+            <a:avLst/>
+          </a:prstGeom>
+          <a:noFill/>
+          <a:ln/>
+        </p:spPr>
+        <p:txBody>
+          <a:bodyPr wrap="square" lIns="0" tIns="0" rIns="0" bIns="0" rtlCol="0" anchor="t"/>
+          <a:lstStyle/>
+          <a:p>
             <a:pPr indent="0" marL="0">
               <a:buNone/>
             </a:pPr>
             <a:r>
-              <a:rPr lang="en-US" sz="1600" dirty="0">
+              <a:rPr lang="en-US" sz="2400" b="1" dirty="0">
+                <a:solidFill>
+                  <a:srgbClr val="6A58A3"/>
+                </a:solidFill>
+                <a:latin typeface="Microsoft YaHei" pitchFamily="34" charset="0"/>
+                <a:ea typeface="Microsoft YaHei" pitchFamily="34" charset="-122"/>
+                <a:cs typeface="Microsoft YaHei" pitchFamily="34" charset="-120"/>
+              </a:rPr>
+              <a:t>学习与维护</a:t>
+            </a:r>
+            <a:endParaRPr lang="en-US" sz="2400" dirty="0"/>
+          </a:p>
+        </p:txBody>
+      </p:sp>
+      <p:sp>
+        <p:nvSpPr>
+          <p:cNvPr id="14" name="Text 12"/>
+          <p:cNvSpPr txBox="1"/>
+          <p:nvPr/>
+        </p:nvSpPr>
+        <p:spPr>
+          <a:xfrm>
+            <a:off x="8478317" y="2560320"/>
+            <a:ext cx="2844698" cy="3474720"/>
+          </a:xfrm>
+          <a:prstGeom prst="rect">
+            <a:avLst/>
+          </a:prstGeom>
+          <a:noFill/>
+          <a:ln/>
+        </p:spPr>
+        <p:txBody>
+          <a:bodyPr wrap="square" lIns="0" tIns="0" rIns="0" bIns="0" rtlCol="0" anchor="t"/>
+          <a:lstStyle/>
+          <a:p>
+            <a:pPr marL="342900" indent="-342900">
+              <a:spcAft>
+                <a:spcPts val="1200"/>
+              </a:spcAft>
+              <a:buSzPct val="100000"/>
+              <a:buChar char="•"/>
+            </a:pPr>
+            <a:r>
+              <a:rPr lang="en-US" sz="1800" dirty="0">
                 <a:solidFill>
                   <a:srgbClr val="1F2A37"/>
                 </a:solidFill>
@@ -2907,9 +4737,51 @@
                 <a:ea typeface="Microsoft YaHei" pitchFamily="34" charset="-122"/>
                 <a:cs typeface="Microsoft YaHei" pitchFamily="34" charset="-120"/>
               </a:rPr>
-              <a:t>按“条件 + 表版本”保存，能复用就复用，只有表版本变了才重新检查。</a:t>
-            </a:r>
-            <a:endParaRPr lang="en-US" sz="1600" dirty="0"/>
+              <a:t>学：内置的大模型智能体答题，答对且通过检查才发布口径</a:t>
+            </a:r>
+            <a:endParaRPr lang="en-US" sz="1800" dirty="0"/>
+          </a:p>
+          <a:p>
+            <a:pPr marL="342900" indent="-342900">
+              <a:spcAft>
+                <a:spcPts val="1200"/>
+              </a:spcAft>
+              <a:buSzPct val="100000"/>
+              <a:buChar char="•"/>
+            </a:pPr>
+            <a:r>
+              <a:rPr lang="en-US" sz="1800" dirty="0">
+                <a:solidFill>
+                  <a:srgbClr val="1F2A37"/>
+                </a:solidFill>
+                <a:latin typeface="Microsoft YaHei" pitchFamily="34" charset="0"/>
+                <a:ea typeface="Microsoft YaHei" pitchFamily="34" charset="-122"/>
+                <a:cs typeface="Microsoft YaHei" pitchFamily="34" charset="-120"/>
+              </a:rPr>
+              <a:t>管：数据变了就重新检查条件</a:t>
+            </a:r>
+            <a:endParaRPr lang="en-US" sz="1800" dirty="0"/>
+          </a:p>
+          <a:p>
+            <a:pPr marL="342900" indent="-342900">
+              <a:spcAft>
+                <a:spcPts val="1200"/>
+              </a:spcAft>
+              <a:buSzPct val="100000"/>
+              <a:buChar char="•"/>
+            </a:pPr>
+            <a:r>
+              <a:rPr lang="en-US" sz="1800" dirty="0">
+                <a:solidFill>
+                  <a:srgbClr val="1F2A37"/>
+                </a:solidFill>
+                <a:latin typeface="Microsoft YaHei" pitchFamily="34" charset="0"/>
+                <a:ea typeface="Microsoft YaHei" pitchFamily="34" charset="-122"/>
+                <a:cs typeface="Microsoft YaHei" pitchFamily="34" charset="-120"/>
+              </a:rPr>
+              <a:t>坏了：能唯一修好就发新版，修不好就停用</a:t>
+            </a:r>
+            <a:endParaRPr lang="en-US" sz="1800" dirty="0"/>
           </a:p>
         </p:txBody>
       </p:sp>
@@ -3021,50 +4893,76 @@
                 <a:ea typeface="Microsoft YaHei" pitchFamily="34" charset="-122"/>
                 <a:cs typeface="Microsoft YaHei" pitchFamily="34" charset="-120"/>
               </a:rPr>
-              <a:t>工作流②：口径的学习、失效与修复</a:t>
+              <a:t>工作流①：智能体来问“退货金额怎么算”</a:t>
             </a:r>
             <a:endParaRPr lang="en-US" sz="3000" dirty="0"/>
           </a:p>
         </p:txBody>
       </p:sp>
-      <p:pic>
-        <p:nvPicPr>
-          <p:cNvPr id="3" name="lifecycle" descr="/home/zhanhao/mingtai/ppt/agentdb-mid/tools/deck/figures/lifecycle-zh.png">    </p:cNvPr>
-          <p:cNvPicPr>
-            <a:picLocks noChangeAspect="1"/>
-          </p:cNvPicPr>
-          <p:nvPr/>
-        </p:nvPicPr>
-        <p:blipFill>
-          <a:blip r:embed="rId1"/>
-          <a:stretch>
-            <a:fillRect/>
-          </a:stretch>
-        </p:blipFill>
-        <p:spPr>
-          <a:xfrm>
-            <a:off x="548640" y="1234440"/>
-            <a:ext cx="11094415" cy="3553062"/>
-          </a:xfrm>
-          <a:prstGeom prst="rect">
-            <a:avLst/>
-          </a:prstGeom>
-        </p:spPr>
-      </p:pic>
-      <p:sp>
-        <p:nvSpPr>
-          <p:cNvPr id="4" name="card 正常写入"/>
+      <p:sp>
+        <p:nvSpPr>
+          <p:cNvPr id="3" name="Text 1"/>
           <p:cNvSpPr/>
           <p:nvPr/>
         </p:nvSpPr>
         <p:spPr>
           <a:xfrm>
-            <a:off x="548640" y="5061822"/>
-            <a:ext cx="3515258" cy="1338978"/>
+            <a:off x="548640" y="1234440"/>
+            <a:ext cx="11094415" cy="548640"/>
           </a:xfrm>
           <a:prstGeom prst="roundRect">
             <a:avLst>
-              <a:gd name="adj" fmla="val 8195"/>
+              <a:gd name="adj" fmla="val 16667"/>
+            </a:avLst>
+          </a:prstGeom>
+          <a:solidFill>
+            <a:srgbClr val="F1F3F6"/>
+          </a:solidFill>
+          <a:ln w="12700">
+            <a:solidFill>
+              <a:srgbClr val="F1F3F6"/>
+            </a:solidFill>
+          </a:ln>
+        </p:spPr>
+        <p:txBody>
+          <a:bodyPr wrap="square" lIns="228600" tIns="228600" rIns="228600" bIns="228600" rtlCol="0" anchor="ctr"/>
+          <a:lstStyle/>
+          <a:p>
+            <a:pPr algn="l" indent="0" marL="0">
+              <a:lnSpc>
+                <a:spcPct val="110000"/>
+              </a:lnSpc>
+              <a:buNone/>
+            </a:pPr>
+            <a:r>
+              <a:rPr lang="en-US" sz="1700" dirty="0">
+                <a:solidFill>
+                  <a:srgbClr val="1F2A37"/>
+                </a:solidFill>
+                <a:latin typeface="Microsoft YaHei" pitchFamily="34" charset="0"/>
+                <a:ea typeface="Microsoft YaHei" pitchFamily="34" charset="-122"/>
+                <a:cs typeface="Microsoft YaHei" pitchFamily="34" charset="-120"/>
+              </a:rPr>
+              <a:t>智能体：“5 月门店退货金额是多少？”——它只知道指标名</a:t>
+            </a:r>
+            <a:endParaRPr lang="en-US" sz="1700" dirty="0"/>
+          </a:p>
+        </p:txBody>
+      </p:sp>
+      <p:sp>
+        <p:nvSpPr>
+          <p:cNvPr id="4" name="Text 2"/>
+          <p:cNvSpPr/>
+          <p:nvPr/>
+        </p:nvSpPr>
+        <p:spPr>
+          <a:xfrm>
+            <a:off x="548640" y="2331720"/>
+            <a:ext cx="2485568" cy="2103120"/>
+          </a:xfrm>
+          <a:prstGeom prst="roundRect">
+            <a:avLst>
+              <a:gd name="adj" fmla="val 4348"/>
             </a:avLst>
           </a:prstGeom>
           <a:solidFill>
@@ -3074,44 +4972,133 @@
             <a:solidFill>
               <a:srgbClr val="E8F0FA"/>
             </a:solidFill>
-            <a:prstDash val="solid"/>
           </a:ln>
         </p:spPr>
-      </p:sp>
-      <p:sp>
-        <p:nvSpPr>
-          <p:cNvPr id="5" name="Text 2"/>
-          <p:cNvSpPr txBox="1"/>
+        <p:txBody>
+          <a:bodyPr wrap="square" lIns="137160" tIns="685800" rIns="137160" bIns="91440" rtlCol="0" anchor="t"/>
+          <a:lstStyle/>
+          <a:p>
+            <a:pPr algn="ctr" indent="0" marL="0">
+              <a:lnSpc>
+                <a:spcPct val="110000"/>
+              </a:lnSpc>
+              <a:buNone/>
+            </a:pPr>
+            <a:r>
+              <a:rPr lang="en-US" sz="2000" b="1" dirty="0">
+                <a:solidFill>
+                  <a:srgbClr val="1D5BA6"/>
+                </a:solidFill>
+                <a:latin typeface="Microsoft YaHei" pitchFamily="34" charset="0"/>
+                <a:ea typeface="Microsoft YaHei" pitchFamily="34" charset="-122"/>
+                <a:cs typeface="Microsoft YaHei" pitchFamily="34" charset="-120"/>
+              </a:rPr>
+              <a:t>按名字找</a:t>
+            </a:r>
+            <a:endParaRPr lang="en-US" sz="1600" dirty="0"/>
+          </a:p>
+          <a:p>
+            <a:pPr algn="ctr" indent="0" marL="0">
+              <a:lnSpc>
+                <a:spcPct val="110000"/>
+              </a:lnSpc>
+              <a:buNone/>
+            </a:pPr>
+            <a:r>
+              <a:rPr lang="en-US" sz="1700" dirty="0">
+                <a:solidFill>
+                  <a:srgbClr val="1F2A37"/>
+                </a:solidFill>
+                <a:latin typeface="Microsoft YaHei" pitchFamily="34" charset="0"/>
+                <a:ea typeface="Microsoft YaHei" pitchFamily="34" charset="-122"/>
+                <a:cs typeface="Microsoft YaHei" pitchFamily="34" charset="-120"/>
+              </a:rPr>
+              <a:t>“退货金额”</a:t>
+            </a:r>
+            <a:endParaRPr lang="en-US" sz="1600" dirty="0"/>
+          </a:p>
+          <a:p>
+            <a:pPr algn="ctr" indent="0" marL="0">
+              <a:lnSpc>
+                <a:spcPct val="110000"/>
+              </a:lnSpc>
+              <a:buNone/>
+            </a:pPr>
+            <a:r>
+              <a:rPr lang="en-US" sz="1700" dirty="0">
+                <a:solidFill>
+                  <a:srgbClr val="1F2A37"/>
+                </a:solidFill>
+                <a:latin typeface="Microsoft YaHei" pitchFamily="34" charset="0"/>
+                <a:ea typeface="Microsoft YaHei" pitchFamily="34" charset="-122"/>
+                <a:cs typeface="Microsoft YaHei" pitchFamily="34" charset="-120"/>
+              </a:rPr>
+              <a:t>→ 找到口径</a:t>
+            </a:r>
+            <a:endParaRPr lang="en-US" sz="1600" dirty="0"/>
+          </a:p>
+          <a:p>
+            <a:pPr algn="ctr" indent="0" marL="0">
+              <a:lnSpc>
+                <a:spcPct val="110000"/>
+              </a:lnSpc>
+              <a:buNone/>
+            </a:pPr>
+            <a:r>
+              <a:rPr lang="en-US" sz="1700" dirty="0">
+                <a:solidFill>
+                  <a:srgbClr val="1F2A37"/>
+                </a:solidFill>
+                <a:latin typeface="Microsoft YaHei" pitchFamily="34" charset="0"/>
+                <a:ea typeface="Microsoft YaHei" pitchFamily="34" charset="-122"/>
+                <a:cs typeface="Microsoft YaHei" pitchFamily="34" charset="-120"/>
+              </a:rPr>
+              <a:t>“门店退货金额”</a:t>
+            </a:r>
+            <a:endParaRPr lang="en-US" sz="1600" dirty="0"/>
+          </a:p>
+        </p:txBody>
+      </p:sp>
+      <p:sp>
+        <p:nvSpPr>
+          <p:cNvPr id="5" name="Text 3"/>
+          <p:cNvSpPr/>
           <p:nvPr/>
         </p:nvSpPr>
         <p:spPr>
           <a:xfrm>
-            <a:off x="822960" y="5244702"/>
-            <a:ext cx="2966618" cy="411480"/>
-          </a:xfrm>
-          <a:prstGeom prst="rect">
+            <a:off x="1544536" y="2011680"/>
+            <a:ext cx="502920" cy="502920"/>
+          </a:xfrm>
+          <a:prstGeom prst="ellipse">
             <a:avLst/>
           </a:prstGeom>
-          <a:noFill/>
-          <a:ln/>
+          <a:solidFill>
+            <a:srgbClr val="1D5BA6"/>
+          </a:solidFill>
+          <a:ln>
+            <a:solidFill>
+              <a:srgbClr val="1D5BA6"/>
+            </a:solidFill>
+          </a:ln>
         </p:spPr>
         <p:txBody>
           <a:bodyPr wrap="square" lIns="0" tIns="0" rIns="0" bIns="0" rtlCol="0" anchor="ctr"/>
           <a:lstStyle/>
           <a:p>
-            <a:pPr indent="0" marL="0">
+            <a:pPr algn="ctr" indent="0" marL="0">
               <a:buNone/>
             </a:pPr>
             <a:r>
               <a:rPr lang="en-US" sz="2000" b="1" dirty="0">
                 <a:solidFill>
-                  <a:srgbClr val="1D5BA6"/>
-                </a:solidFill>
-                <a:latin typeface="Microsoft YaHei" pitchFamily="34" charset="0"/>
-                <a:ea typeface="Microsoft YaHei" pitchFamily="34" charset="-122"/>
-                <a:cs typeface="Microsoft YaHei" pitchFamily="34" charset="-120"/>
-              </a:rPr>
-              <a:t>正常写入</a:t>
+                  <a:srgbClr val="FFFFFF"/>
+                </a:solidFill>
+                <a:latin typeface="Microsoft YaHei" pitchFamily="34" charset="0"/>
+                <a:ea typeface="Microsoft YaHei" pitchFamily="34" charset="-122"/>
+                <a:cs typeface="Microsoft YaHei" pitchFamily="34" charset="-120"/>
+              </a:rPr>
+              <a:t>1</a:t>
             </a:r>
             <a:endParaRPr lang="en-US" sz="2000" dirty="0"/>
           </a:p>
@@ -3119,107 +5106,337 @@
       </p:sp>
       <p:sp>
         <p:nvSpPr>
-          <p:cNvPr id="6" name="Text 3"/>
-          <p:cNvSpPr txBox="1"/>
-          <p:nvPr/>
-        </p:nvSpPr>
-        <p:spPr>
-          <a:xfrm>
-            <a:off x="822960" y="5747622"/>
-            <a:ext cx="2966618" cy="470298"/>
-          </a:xfrm>
-          <a:prstGeom prst="rect">
-            <a:avLst/>
-          </a:prstGeom>
-          <a:noFill/>
-          <a:ln/>
-        </p:spPr>
-        <p:txBody>
-          <a:bodyPr wrap="square" lIns="0" tIns="0" rIns="0" bIns="0" rtlCol="0" anchor="t"/>
-          <a:lstStyle/>
-          <a:p>
-            <a:pPr indent="0" marL="0">
-              <a:lnSpc>
-                <a:spcPct val="115000"/>
-              </a:lnSpc>
-              <a:buNone/>
-            </a:pPr>
-            <a:r>
-              <a:rPr lang="en-US" sz="1400" dirty="0">
-                <a:solidFill>
-                  <a:srgbClr val="1F2A37"/>
-                </a:solidFill>
-                <a:latin typeface="Microsoft YaHei" pitchFamily="34" charset="0"/>
-                <a:ea typeface="Microsoft YaHei" pitchFamily="34" charset="-122"/>
-                <a:cs typeface="Microsoft YaHei" pitchFamily="34" charset="-120"/>
-              </a:rPr>
-              <a:t>只重查受影响的条件，其余结果复用；修订不变</a:t>
-            </a:r>
-            <a:endParaRPr lang="en-US" sz="1400" dirty="0"/>
-          </a:p>
-        </p:txBody>
-      </p:sp>
-      <p:sp>
-        <p:nvSpPr>
-          <p:cNvPr id="7" name="card 破坏性写入"/>
+          <p:cNvPr id="6" name="Shape 4"/>
           <p:cNvSpPr/>
           <p:nvPr/>
         </p:nvSpPr>
         <p:spPr>
           <a:xfrm>
-            <a:off x="4338218" y="5061822"/>
-            <a:ext cx="3515258" cy="1338978"/>
+            <a:off x="3089072" y="3383280"/>
+            <a:ext cx="274320" cy="0"/>
+          </a:xfrm>
+          <a:prstGeom prst="line">
+            <a:avLst/>
+          </a:prstGeom>
+          <a:noFill/>
+          <a:ln w="31750">
+            <a:solidFill>
+              <a:srgbClr val="1D5BA6"/>
+            </a:solidFill>
+            <a:prstDash val="solid"/>
+            <a:tailEnd type="triangle"/>
+          </a:ln>
+        </p:spPr>
+      </p:sp>
+      <p:sp>
+        <p:nvSpPr>
+          <p:cNvPr id="7" name="Text 5"/>
+          <p:cNvSpPr/>
+          <p:nvPr/>
+        </p:nvSpPr>
+        <p:spPr>
+          <a:xfrm>
+            <a:off x="3418256" y="2331720"/>
+            <a:ext cx="2485568" cy="2103120"/>
           </a:xfrm>
           <a:prstGeom prst="roundRect">
             <a:avLst>
-              <a:gd name="adj" fmla="val 8195"/>
+              <a:gd name="adj" fmla="val 4348"/>
             </a:avLst>
           </a:prstGeom>
           <a:solidFill>
-            <a:srgbClr val="FBF0E2"/>
+            <a:srgbClr val="E8F0FA"/>
           </a:solidFill>
           <a:ln w="12700">
             <a:solidFill>
-              <a:srgbClr val="FBF0E2"/>
+              <a:srgbClr val="E8F0FA"/>
+            </a:solidFill>
+          </a:ln>
+        </p:spPr>
+        <p:txBody>
+          <a:bodyPr wrap="square" lIns="137160" tIns="685800" rIns="137160" bIns="91440" rtlCol="0" anchor="t"/>
+          <a:lstStyle/>
+          <a:p>
+            <a:pPr algn="ctr" indent="0" marL="0">
+              <a:lnSpc>
+                <a:spcPct val="110000"/>
+              </a:lnSpc>
+              <a:buNone/>
+            </a:pPr>
+            <a:r>
+              <a:rPr lang="en-US" sz="2000" b="1" dirty="0">
+                <a:solidFill>
+                  <a:srgbClr val="1D5BA6"/>
+                </a:solidFill>
+                <a:latin typeface="Microsoft YaHei" pitchFamily="34" charset="0"/>
+                <a:ea typeface="Microsoft YaHei" pitchFamily="34" charset="-122"/>
+                <a:cs typeface="Microsoft YaHei" pitchFamily="34" charset="-120"/>
+              </a:rPr>
+              <a:t>看数据变没变</a:t>
+            </a:r>
+            <a:endParaRPr lang="en-US" sz="1600" dirty="0"/>
+          </a:p>
+          <a:p>
+            <a:pPr algn="ctr" indent="0" marL="0">
+              <a:lnSpc>
+                <a:spcPct val="110000"/>
+              </a:lnSpc>
+              <a:buNone/>
+            </a:pPr>
+            <a:r>
+              <a:rPr lang="en-US" sz="1700" dirty="0">
+                <a:solidFill>
+                  <a:srgbClr val="1F2A37"/>
+                </a:solidFill>
+                <a:latin typeface="Microsoft YaHei" pitchFamily="34" charset="0"/>
+                <a:ea typeface="Microsoft YaHei" pitchFamily="34" charset="-122"/>
+                <a:cs typeface="Microsoft YaHei" pitchFamily="34" charset="-120"/>
+              </a:rPr>
+              <a:t>它用的表</a:t>
+            </a:r>
+            <a:endParaRPr lang="en-US" sz="1600" dirty="0"/>
+          </a:p>
+          <a:p>
+            <a:pPr algn="ctr" indent="0" marL="0">
+              <a:lnSpc>
+                <a:spcPct val="110000"/>
+              </a:lnSpc>
+              <a:buNone/>
+            </a:pPr>
+            <a:r>
+              <a:rPr lang="en-US" sz="1700" dirty="0">
+                <a:solidFill>
+                  <a:srgbClr val="1F2A37"/>
+                </a:solidFill>
+                <a:latin typeface="Microsoft YaHei" pitchFamily="34" charset="0"/>
+                <a:ea typeface="Microsoft YaHei" pitchFamily="34" charset="-122"/>
+                <a:cs typeface="Microsoft YaHei" pitchFamily="34" charset="-120"/>
+              </a:rPr>
+              <a:t>store_returns</a:t>
+            </a:r>
+            <a:endParaRPr lang="en-US" sz="1600" dirty="0"/>
+          </a:p>
+          <a:p>
+            <a:pPr algn="ctr" indent="0" marL="0">
+              <a:lnSpc>
+                <a:spcPct val="110000"/>
+              </a:lnSpc>
+              <a:buNone/>
+            </a:pPr>
+            <a:r>
+              <a:rPr lang="en-US" sz="1700" dirty="0">
+                <a:solidFill>
+                  <a:srgbClr val="1F2A37"/>
+                </a:solidFill>
+                <a:latin typeface="Microsoft YaHei" pitchFamily="34" charset="0"/>
+                <a:ea typeface="Microsoft YaHei" pitchFamily="34" charset="-122"/>
+                <a:cs typeface="Microsoft YaHei" pitchFamily="34" charset="-120"/>
+              </a:rPr>
+              <a:t>刚有新写入</a:t>
+            </a:r>
+            <a:endParaRPr lang="en-US" sz="1600" dirty="0"/>
+          </a:p>
+        </p:txBody>
+      </p:sp>
+      <p:sp>
+        <p:nvSpPr>
+          <p:cNvPr id="8" name="Text 6"/>
+          <p:cNvSpPr/>
+          <p:nvPr/>
+        </p:nvSpPr>
+        <p:spPr>
+          <a:xfrm>
+            <a:off x="4414152" y="2011680"/>
+            <a:ext cx="502920" cy="502920"/>
+          </a:xfrm>
+          <a:prstGeom prst="ellipse">
+            <a:avLst/>
+          </a:prstGeom>
+          <a:solidFill>
+            <a:srgbClr val="1D5BA6"/>
+          </a:solidFill>
+          <a:ln>
+            <a:solidFill>
+              <a:srgbClr val="1D5BA6"/>
+            </a:solidFill>
+          </a:ln>
+        </p:spPr>
+        <p:txBody>
+          <a:bodyPr wrap="square" lIns="0" tIns="0" rIns="0" bIns="0" rtlCol="0" anchor="ctr"/>
+          <a:lstStyle/>
+          <a:p>
+            <a:pPr algn="ctr" indent="0" marL="0">
+              <a:buNone/>
+            </a:pPr>
+            <a:r>
+              <a:rPr lang="en-US" sz="2000" b="1" dirty="0">
+                <a:solidFill>
+                  <a:srgbClr val="FFFFFF"/>
+                </a:solidFill>
+                <a:latin typeface="Microsoft YaHei" pitchFamily="34" charset="0"/>
+                <a:ea typeface="Microsoft YaHei" pitchFamily="34" charset="-122"/>
+                <a:cs typeface="Microsoft YaHei" pitchFamily="34" charset="-120"/>
+              </a:rPr>
+              <a:t>2</a:t>
+            </a:r>
+            <a:endParaRPr lang="en-US" sz="2000" dirty="0"/>
+          </a:p>
+        </p:txBody>
+      </p:sp>
+      <p:sp>
+        <p:nvSpPr>
+          <p:cNvPr id="9" name="Shape 7"/>
+          <p:cNvSpPr/>
+          <p:nvPr/>
+        </p:nvSpPr>
+        <p:spPr>
+          <a:xfrm>
+            <a:off x="5958688" y="3383280"/>
+            <a:ext cx="274320" cy="0"/>
+          </a:xfrm>
+          <a:prstGeom prst="line">
+            <a:avLst/>
+          </a:prstGeom>
+          <a:noFill/>
+          <a:ln w="31750">
+            <a:solidFill>
+              <a:srgbClr val="1D5BA6"/>
             </a:solidFill>
             <a:prstDash val="solid"/>
+            <a:tailEnd type="triangle"/>
           </a:ln>
         </p:spPr>
       </p:sp>
       <p:sp>
         <p:nvSpPr>
-          <p:cNvPr id="8" name="Text 5"/>
-          <p:cNvSpPr txBox="1"/>
+          <p:cNvPr id="10" name="Text 8"/>
+          <p:cNvSpPr/>
           <p:nvPr/>
         </p:nvSpPr>
         <p:spPr>
           <a:xfrm>
-            <a:off x="4612538" y="5244702"/>
-            <a:ext cx="2966618" cy="411480"/>
-          </a:xfrm>
-          <a:prstGeom prst="rect">
+            <a:off x="6287872" y="2331720"/>
+            <a:ext cx="2485568" cy="2103120"/>
+          </a:xfrm>
+          <a:prstGeom prst="roundRect">
+            <a:avLst>
+              <a:gd name="adj" fmla="val 4348"/>
+            </a:avLst>
+          </a:prstGeom>
+          <a:solidFill>
+            <a:srgbClr val="E8F0FA"/>
+          </a:solidFill>
+          <a:ln w="12700">
+            <a:solidFill>
+              <a:srgbClr val="E8F0FA"/>
+            </a:solidFill>
+          </a:ln>
+        </p:spPr>
+        <p:txBody>
+          <a:bodyPr wrap="square" lIns="137160" tIns="685800" rIns="137160" bIns="91440" rtlCol="0" anchor="t"/>
+          <a:lstStyle/>
+          <a:p>
+            <a:pPr algn="ctr" indent="0" marL="0">
+              <a:lnSpc>
+                <a:spcPct val="110000"/>
+              </a:lnSpc>
+              <a:buNone/>
+            </a:pPr>
+            <a:r>
+              <a:rPr lang="en-US" sz="2000" b="1" dirty="0">
+                <a:solidFill>
+                  <a:srgbClr val="1D5BA6"/>
+                </a:solidFill>
+                <a:latin typeface="Microsoft YaHei" pitchFamily="34" charset="0"/>
+                <a:ea typeface="Microsoft YaHei" pitchFamily="34" charset="-122"/>
+                <a:cs typeface="Microsoft YaHei" pitchFamily="34" charset="-120"/>
+              </a:rPr>
+              <a:t>需要就重新检查</a:t>
+            </a:r>
+            <a:endParaRPr lang="en-US" sz="1600" dirty="0"/>
+          </a:p>
+          <a:p>
+            <a:pPr algn="ctr" indent="0" marL="0">
+              <a:lnSpc>
+                <a:spcPct val="110000"/>
+              </a:lnSpc>
+              <a:buNone/>
+            </a:pPr>
+            <a:r>
+              <a:rPr lang="en-US" sz="1700" dirty="0">
+                <a:solidFill>
+                  <a:srgbClr val="1F2A37"/>
+                </a:solidFill>
+                <a:latin typeface="Microsoft YaHei" pitchFamily="34" charset="0"/>
+                <a:ea typeface="Microsoft YaHei" pitchFamily="34" charset="-122"/>
+                <a:cs typeface="Microsoft YaHei" pitchFamily="34" charset="-120"/>
+              </a:rPr>
+              <a:t>查过的：直接用</a:t>
+            </a:r>
+            <a:endParaRPr lang="en-US" sz="1600" dirty="0"/>
+          </a:p>
+          <a:p>
+            <a:pPr algn="ctr" indent="0" marL="0">
+              <a:lnSpc>
+                <a:spcPct val="110000"/>
+              </a:lnSpc>
+              <a:buNone/>
+            </a:pPr>
+            <a:r>
+              <a:rPr lang="en-US" sz="1700" dirty="0">
+                <a:solidFill>
+                  <a:srgbClr val="1F2A37"/>
+                </a:solidFill>
+                <a:latin typeface="Microsoft YaHei" pitchFamily="34" charset="0"/>
+                <a:ea typeface="Microsoft YaHei" pitchFamily="34" charset="-122"/>
+                <a:cs typeface="Microsoft YaHei" pitchFamily="34" charset="-120"/>
+              </a:rPr>
+              <a:t>没查过的：现在查</a:t>
+            </a:r>
+            <a:endParaRPr lang="en-US" sz="1600" dirty="0"/>
+          </a:p>
+        </p:txBody>
+      </p:sp>
+      <p:sp>
+        <p:nvSpPr>
+          <p:cNvPr id="11" name="Text 9"/>
+          <p:cNvSpPr/>
+          <p:nvPr/>
+        </p:nvSpPr>
+        <p:spPr>
+          <a:xfrm>
+            <a:off x="7283768" y="2011680"/>
+            <a:ext cx="502920" cy="502920"/>
+          </a:xfrm>
+          <a:prstGeom prst="ellipse">
             <a:avLst/>
           </a:prstGeom>
-          <a:noFill/>
-          <a:ln/>
+          <a:solidFill>
+            <a:srgbClr val="1D5BA6"/>
+          </a:solidFill>
+          <a:ln>
+            <a:solidFill>
+              <a:srgbClr val="1D5BA6"/>
+            </a:solidFill>
+          </a:ln>
         </p:spPr>
         <p:txBody>
           <a:bodyPr wrap="square" lIns="0" tIns="0" rIns="0" bIns="0" rtlCol="0" anchor="ctr"/>
           <a:lstStyle/>
           <a:p>
-            <a:pPr indent="0" marL="0">
+            <a:pPr algn="ctr" indent="0" marL="0">
               <a:buNone/>
             </a:pPr>
             <a:r>
               <a:rPr lang="en-US" sz="2000" b="1" dirty="0">
                 <a:solidFill>
-                  <a:srgbClr val="B5671A"/>
-                </a:solidFill>
-                <a:latin typeface="Microsoft YaHei" pitchFamily="34" charset="0"/>
-                <a:ea typeface="Microsoft YaHei" pitchFamily="34" charset="-122"/>
-                <a:cs typeface="Microsoft YaHei" pitchFamily="34" charset="-120"/>
-              </a:rPr>
-              <a:t>破坏性写入</a:t>
+                  <a:srgbClr val="FFFFFF"/>
+                </a:solidFill>
+                <a:latin typeface="Microsoft YaHei" pitchFamily="34" charset="0"/>
+                <a:ea typeface="Microsoft YaHei" pitchFamily="34" charset="-122"/>
+                <a:cs typeface="Microsoft YaHei" pitchFamily="34" charset="-120"/>
+              </a:rPr>
+              <a:t>3</a:t>
             </a:r>
             <a:endParaRPr lang="en-US" sz="2000" dirty="0"/>
           </a:p>
@@ -3227,60 +5444,244 @@
       </p:sp>
       <p:sp>
         <p:nvSpPr>
-          <p:cNvPr id="9" name="Text 6"/>
-          <p:cNvSpPr txBox="1"/>
-          <p:nvPr/>
-        </p:nvSpPr>
-        <p:spPr>
-          <a:xfrm>
-            <a:off x="4612538" y="5747622"/>
-            <a:ext cx="2966618" cy="470298"/>
-          </a:xfrm>
-          <a:prstGeom prst="rect">
-            <a:avLst/>
-          </a:prstGeom>
-          <a:noFill/>
-          <a:ln/>
-        </p:spPr>
-        <p:txBody>
-          <a:bodyPr wrap="square" lIns="0" tIns="0" rIns="0" bIns="0" rtlCol="0" anchor="t"/>
-          <a:lstStyle/>
-          <a:p>
-            <a:pPr indent="0" marL="0">
-              <a:lnSpc>
-                <a:spcPct val="115000"/>
-              </a:lnSpc>
-              <a:buNone/>
-            </a:pPr>
-            <a:r>
-              <a:rPr lang="en-US" sz="1400" dirty="0">
-                <a:solidFill>
-                  <a:srgbClr val="1F2A37"/>
-                </a:solidFill>
-                <a:latin typeface="Microsoft YaHei" pitchFamily="34" charset="0"/>
-                <a:ea typeface="Microsoft YaHei" pitchFamily="34" charset="-122"/>
-                <a:cs typeface="Microsoft YaHei" pitchFamily="34" charset="-120"/>
-              </a:rPr>
-              <a:t>先失效；只有唯一的修复且回归测试通过，才发布新修订</a:t>
-            </a:r>
-            <a:endParaRPr lang="en-US" sz="1400" dirty="0"/>
-          </a:p>
-        </p:txBody>
-      </p:sp>
-      <p:sp>
-        <p:nvSpPr>
-          <p:cNvPr id="10" name="card 没有唯一修复"/>
+          <p:cNvPr id="12" name="Shape 10"/>
           <p:cNvSpPr/>
           <p:nvPr/>
         </p:nvSpPr>
         <p:spPr>
           <a:xfrm>
-            <a:off x="8127797" y="5061822"/>
-            <a:ext cx="3515258" cy="1338978"/>
+            <a:off x="8828303" y="3383280"/>
+            <a:ext cx="274320" cy="0"/>
+          </a:xfrm>
+          <a:prstGeom prst="line">
+            <a:avLst/>
+          </a:prstGeom>
+          <a:noFill/>
+          <a:ln w="31750">
+            <a:solidFill>
+              <a:srgbClr val="1D5BA6"/>
+            </a:solidFill>
+            <a:prstDash val="solid"/>
+            <a:tailEnd type="triangle"/>
+          </a:ln>
+        </p:spPr>
+      </p:sp>
+      <p:sp>
+        <p:nvSpPr>
+          <p:cNvPr id="13" name="Text 11"/>
+          <p:cNvSpPr/>
+          <p:nvPr/>
+        </p:nvSpPr>
+        <p:spPr>
+          <a:xfrm>
+            <a:off x="9157487" y="2331720"/>
+            <a:ext cx="2485568" cy="2103120"/>
           </a:xfrm>
           <a:prstGeom prst="roundRect">
             <a:avLst>
-              <a:gd name="adj" fmla="val 8195"/>
+              <a:gd name="adj" fmla="val 4348"/>
+            </a:avLst>
+          </a:prstGeom>
+          <a:solidFill>
+            <a:srgbClr val="E8F0FA"/>
+          </a:solidFill>
+          <a:ln w="12700">
+            <a:solidFill>
+              <a:srgbClr val="E8F0FA"/>
+            </a:solidFill>
+          </a:ln>
+        </p:spPr>
+        <p:txBody>
+          <a:bodyPr wrap="square" lIns="137160" tIns="685800" rIns="137160" bIns="91440" rtlCol="0" anchor="t"/>
+          <a:lstStyle/>
+          <a:p>
+            <a:pPr algn="ctr" indent="0" marL="0">
+              <a:lnSpc>
+                <a:spcPct val="110000"/>
+              </a:lnSpc>
+              <a:buNone/>
+            </a:pPr>
+            <a:r>
+              <a:rPr lang="en-US" sz="2000" b="1" dirty="0">
+                <a:solidFill>
+                  <a:srgbClr val="1D5BA6"/>
+                </a:solidFill>
+                <a:latin typeface="Microsoft YaHei" pitchFamily="34" charset="0"/>
+                <a:ea typeface="Microsoft YaHei" pitchFamily="34" charset="-122"/>
+                <a:cs typeface="Microsoft YaHei" pitchFamily="34" charset="-120"/>
+              </a:rPr>
+              <a:t>返回口径</a:t>
+            </a:r>
+            <a:endParaRPr lang="en-US" sz="1600" dirty="0"/>
+          </a:p>
+          <a:p>
+            <a:pPr algn="ctr" indent="0" marL="0">
+              <a:lnSpc>
+                <a:spcPct val="110000"/>
+              </a:lnSpc>
+              <a:buNone/>
+            </a:pPr>
+            <a:r>
+              <a:rPr lang="en-US" sz="1700" dirty="0">
+                <a:solidFill>
+                  <a:srgbClr val="1F2A37"/>
+                </a:solidFill>
+                <a:latin typeface="Microsoft YaHei" pitchFamily="34" charset="0"/>
+                <a:ea typeface="Microsoft YaHei" pitchFamily="34" charset="-122"/>
+                <a:cs typeface="Microsoft YaHei" pitchFamily="34" charset="-120"/>
+              </a:rPr>
+              <a:t>怎么算 + 参考 SQL</a:t>
+            </a:r>
+            <a:endParaRPr lang="en-US" sz="1600" dirty="0"/>
+          </a:p>
+          <a:p>
+            <a:pPr algn="ctr" indent="0" marL="0">
+              <a:lnSpc>
+                <a:spcPct val="110000"/>
+              </a:lnSpc>
+              <a:buNone/>
+            </a:pPr>
+            <a:r>
+              <a:rPr lang="en-US" sz="1700" dirty="0">
+                <a:solidFill>
+                  <a:srgbClr val="1F2A37"/>
+                </a:solidFill>
+                <a:latin typeface="Microsoft YaHei" pitchFamily="34" charset="0"/>
+                <a:ea typeface="Microsoft YaHei" pitchFamily="34" charset="-122"/>
+                <a:cs typeface="Microsoft YaHei" pitchFamily="34" charset="-120"/>
+              </a:rPr>
+              <a:t>智能体照着写</a:t>
+            </a:r>
+            <a:endParaRPr lang="en-US" sz="1600" dirty="0"/>
+          </a:p>
+        </p:txBody>
+      </p:sp>
+      <p:sp>
+        <p:nvSpPr>
+          <p:cNvPr id="14" name="Text 12"/>
+          <p:cNvSpPr/>
+          <p:nvPr/>
+        </p:nvSpPr>
+        <p:spPr>
+          <a:xfrm>
+            <a:off x="10153383" y="2011680"/>
+            <a:ext cx="502920" cy="502920"/>
+          </a:xfrm>
+          <a:prstGeom prst="ellipse">
+            <a:avLst/>
+          </a:prstGeom>
+          <a:solidFill>
+            <a:srgbClr val="1D5BA6"/>
+          </a:solidFill>
+          <a:ln>
+            <a:solidFill>
+              <a:srgbClr val="1D5BA6"/>
+            </a:solidFill>
+          </a:ln>
+        </p:spPr>
+        <p:txBody>
+          <a:bodyPr wrap="square" lIns="0" tIns="0" rIns="0" bIns="0" rtlCol="0" anchor="ctr"/>
+          <a:lstStyle/>
+          <a:p>
+            <a:pPr algn="ctr" indent="0" marL="0">
+              <a:buNone/>
+            </a:pPr>
+            <a:r>
+              <a:rPr lang="en-US" sz="2000" b="1" dirty="0">
+                <a:solidFill>
+                  <a:srgbClr val="FFFFFF"/>
+                </a:solidFill>
+                <a:latin typeface="Microsoft YaHei" pitchFamily="34" charset="0"/>
+                <a:ea typeface="Microsoft YaHei" pitchFamily="34" charset="-122"/>
+                <a:cs typeface="Microsoft YaHei" pitchFamily="34" charset="-120"/>
+              </a:rPr>
+              <a:t>4</a:t>
+            </a:r>
+            <a:endParaRPr lang="en-US" sz="2000" dirty="0"/>
+          </a:p>
+        </p:txBody>
+      </p:sp>
+      <p:sp>
+        <p:nvSpPr>
+          <p:cNvPr id="15" name="Text 13"/>
+          <p:cNvSpPr/>
+          <p:nvPr/>
+        </p:nvSpPr>
+        <p:spPr>
+          <a:xfrm>
+            <a:off x="548640" y="4846320"/>
+            <a:ext cx="5303520" cy="685800"/>
+          </a:xfrm>
+          <a:prstGeom prst="roundRect">
+            <a:avLst>
+              <a:gd name="adj" fmla="val 13333"/>
+            </a:avLst>
+          </a:prstGeom>
+          <a:solidFill>
+            <a:srgbClr val="E6F3EA"/>
+          </a:solidFill>
+          <a:ln w="12700">
+            <a:solidFill>
+              <a:srgbClr val="E6F3EA"/>
+            </a:solidFill>
+          </a:ln>
+        </p:spPr>
+        <p:txBody>
+          <a:bodyPr wrap="square" lIns="228600" tIns="228600" rIns="228600" bIns="228600" rtlCol="0" anchor="ctr"/>
+          <a:lstStyle/>
+          <a:p>
+            <a:pPr algn="l" indent="0" marL="0">
+              <a:lnSpc>
+                <a:spcPct val="110000"/>
+              </a:lnSpc>
+              <a:buNone/>
+            </a:pPr>
+            <a:r>
+              <a:rPr lang="en-US" sz="1700" b="1" dirty="0">
+                <a:solidFill>
+                  <a:srgbClr val="2E7D4F"/>
+                </a:solidFill>
+                <a:latin typeface="Microsoft YaHei" pitchFamily="34" charset="0"/>
+                <a:ea typeface="Microsoft YaHei" pitchFamily="34" charset="-122"/>
+                <a:cs typeface="Microsoft YaHei" pitchFamily="34" charset="-120"/>
+              </a:rPr>
+              <a:t>数据没变：</a:t>
+            </a:r>
+            <a:pPr algn="l" indent="0" marL="0">
+              <a:lnSpc>
+                <a:spcPct val="110000"/>
+              </a:lnSpc>
+              <a:buNone/>
+            </a:pPr>
+            <a:r>
+              <a:rPr lang="en-US" sz="1700" dirty="0">
+                <a:solidFill>
+                  <a:srgbClr val="1F2A37"/>
+                </a:solidFill>
+                <a:latin typeface="Microsoft YaHei" pitchFamily="34" charset="0"/>
+                <a:ea typeface="Microsoft YaHei" pitchFamily="34" charset="-122"/>
+                <a:cs typeface="Microsoft YaHei" pitchFamily="34" charset="-120"/>
+              </a:rPr>
+              <a:t>跳过第 3 步，直接返回</a:t>
+            </a:r>
+            <a:endParaRPr lang="en-US" sz="1700" dirty="0"/>
+          </a:p>
+        </p:txBody>
+      </p:sp>
+      <p:sp>
+        <p:nvSpPr>
+          <p:cNvPr id="16" name="Text 14"/>
+          <p:cNvSpPr/>
+          <p:nvPr/>
+        </p:nvSpPr>
+        <p:spPr>
+          <a:xfrm>
+            <a:off x="6217920" y="4846320"/>
+            <a:ext cx="5425135" cy="685800"/>
+          </a:xfrm>
+          <a:prstGeom prst="roundRect">
+            <a:avLst>
+              <a:gd name="adj" fmla="val 13333"/>
             </a:avLst>
           </a:prstGeom>
           <a:solidFill>
@@ -3290,36 +5691,20 @@
             <a:solidFill>
               <a:srgbClr val="FBEAE7"/>
             </a:solidFill>
-            <a:prstDash val="solid"/>
           </a:ln>
         </p:spPr>
-      </p:sp>
-      <p:sp>
-        <p:nvSpPr>
-          <p:cNvPr id="11" name="Text 8"/>
-          <p:cNvSpPr txBox="1"/>
-          <p:nvPr/>
-        </p:nvSpPr>
-        <p:spPr>
-          <a:xfrm>
-            <a:off x="8402117" y="5244702"/>
-            <a:ext cx="2966618" cy="411480"/>
-          </a:xfrm>
-          <a:prstGeom prst="rect">
-            <a:avLst/>
-          </a:prstGeom>
-          <a:noFill/>
-          <a:ln/>
-        </p:spPr>
-        <p:txBody>
-          <a:bodyPr wrap="square" lIns="0" tIns="0" rIns="0" bIns="0" rtlCol="0" anchor="ctr"/>
+        <p:txBody>
+          <a:bodyPr wrap="square" lIns="228600" tIns="228600" rIns="228600" bIns="228600" rtlCol="0" anchor="ctr"/>
           <a:lstStyle/>
           <a:p>
-            <a:pPr indent="0" marL="0">
-              <a:buNone/>
-            </a:pPr>
-            <a:r>
-              <a:rPr lang="en-US" sz="2000" b="1" dirty="0">
+            <a:pPr algn="l" indent="0" marL="0">
+              <a:lnSpc>
+                <a:spcPct val="110000"/>
+              </a:lnSpc>
+              <a:buNone/>
+            </a:pPr>
+            <a:r>
+              <a:rPr lang="en-US" sz="1700" b="1" dirty="0">
                 <a:solidFill>
                   <a:srgbClr val="B5392A"/>
                 </a:solidFill>
@@ -3327,41 +5712,16 @@
                 <a:ea typeface="Microsoft YaHei" pitchFamily="34" charset="-122"/>
                 <a:cs typeface="Microsoft YaHei" pitchFamily="34" charset="-120"/>
               </a:rPr>
-              <a:t>没有唯一修复</a:t>
-            </a:r>
-            <a:endParaRPr lang="en-US" sz="2000" dirty="0"/>
-          </a:p>
-        </p:txBody>
-      </p:sp>
-      <p:sp>
-        <p:nvSpPr>
-          <p:cNvPr id="12" name="Text 9"/>
-          <p:cNvSpPr txBox="1"/>
-          <p:nvPr/>
-        </p:nvSpPr>
-        <p:spPr>
-          <a:xfrm>
-            <a:off x="8402117" y="5747622"/>
-            <a:ext cx="2966618" cy="470298"/>
-          </a:xfrm>
-          <a:prstGeom prst="rect">
-            <a:avLst/>
-          </a:prstGeom>
-          <a:noFill/>
-          <a:ln/>
-        </p:spPr>
-        <p:txBody>
-          <a:bodyPr wrap="square" lIns="0" tIns="0" rIns="0" bIns="0" rtlCol="0" anchor="t"/>
-          <a:lstStyle/>
-          <a:p>
-            <a:pPr indent="0" marL="0">
+              <a:t>口径已停用：</a:t>
+            </a:r>
+            <a:pPr algn="l" indent="0" marL="0">
               <a:lnSpc>
-                <a:spcPct val="115000"/>
+                <a:spcPct val="110000"/>
               </a:lnSpc>
               <a:buNone/>
             </a:pPr>
             <a:r>
-              <a:rPr lang="en-US" sz="1400" dirty="0">
+              <a:rPr lang="en-US" sz="1700" dirty="0">
                 <a:solidFill>
                   <a:srgbClr val="1F2A37"/>
                 </a:solidFill>
@@ -3369,9 +5729,9 @@
                 <a:ea typeface="Microsoft YaHei" pitchFamily="34" charset="-122"/>
                 <a:cs typeface="Microsoft YaHei" pitchFamily="34" charset="-120"/>
               </a:rPr>
-              <a:t>宁可失效，等新的判题任务重新学习</a:t>
-            </a:r>
-            <a:endParaRPr lang="en-US" sz="1400" dirty="0"/>
+              <a:t>告诉智能体“这个口径现在不能用”</a:t>
+            </a:r>
+            <a:endParaRPr lang="en-US" sz="1700" dirty="0"/>
           </a:p>
         </p:txBody>
       </p:sp>
@@ -3458,8 +5818,8 @@
         </p:nvSpPr>
         <p:spPr>
           <a:xfrm>
-            <a:off x="731520" y="548640"/>
-            <a:ext cx="10698480" cy="822960"/>
+            <a:off x="548640" y="320040"/>
+            <a:ext cx="11094415" cy="731520"/>
           </a:xfrm>
           <a:prstGeom prst="rect">
             <a:avLst/>
@@ -3475,40 +5835,286 @@
               <a:buNone/>
             </a:pPr>
             <a:r>
-              <a:rPr lang="en-US" sz="3200" b="1" dirty="0">
-                <a:solidFill>
-                  <a:srgbClr val="FFFFFF"/>
-                </a:solidFill>
-                <a:latin typeface="Microsoft YaHei" pitchFamily="34" charset="0"/>
-                <a:ea typeface="Microsoft YaHei" pitchFamily="34" charset="-122"/>
-                <a:cs typeface="Microsoft YaHei" pitchFamily="34" charset="-120"/>
-              </a:rPr>
-              <a:t>小结</a:t>
-            </a:r>
-            <a:endParaRPr lang="en-US" sz="3200" dirty="0"/>
-          </a:p>
-        </p:txBody>
-      </p:sp>
-      <p:sp>
-        <p:nvSpPr>
-          <p:cNvPr id="3" name="label 结构"/>
+              <a:rPr lang="en-US" sz="3000" b="1" dirty="0">
+                <a:solidFill>
+                  <a:srgbClr val="1F2A37"/>
+                </a:solidFill>
+                <a:latin typeface="Microsoft YaHei" pitchFamily="34" charset="0"/>
+                <a:ea typeface="Microsoft YaHei" pitchFamily="34" charset="-122"/>
+                <a:cs typeface="Microsoft YaHei" pitchFamily="34" charset="-120"/>
+              </a:rPr>
+              <a:t>检查结果：查一次，大家都能用</a:t>
+            </a:r>
+            <a:endParaRPr lang="en-US" sz="3000" dirty="0"/>
+          </a:p>
+        </p:txBody>
+      </p:sp>
+      <p:sp>
+        <p:nvSpPr>
+          <p:cNvPr id="3" name="Text 1"/>
           <p:cNvSpPr/>
           <p:nvPr/>
         </p:nvSpPr>
         <p:spPr>
           <a:xfrm>
-            <a:off x="548640" y="1737360"/>
-            <a:ext cx="1463040" cy="640080"/>
+            <a:off x="548640" y="1463040"/>
+            <a:ext cx="3108960" cy="1188720"/>
           </a:xfrm>
           <a:prstGeom prst="roundRect">
             <a:avLst>
-              <a:gd name="adj" fmla="val 50000"/>
+              <a:gd name="adj" fmla="val 7692"/>
             </a:avLst>
           </a:prstGeom>
           <a:solidFill>
-            <a:srgbClr val="1D5BA6"/>
+            <a:srgbClr val="E8F0FA"/>
           </a:solidFill>
           <a:ln w="12700">
+            <a:solidFill>
+              <a:srgbClr val="E8F0FA"/>
+            </a:solidFill>
+          </a:ln>
+        </p:spPr>
+        <p:txBody>
+          <a:bodyPr wrap="square" lIns="109728" tIns="109728" rIns="109728" bIns="109728" rtlCol="0" anchor="ctr"/>
+          <a:lstStyle/>
+          <a:p>
+            <a:pPr algn="ctr" indent="0" marL="0">
+              <a:lnSpc>
+                <a:spcPct val="110000"/>
+              </a:lnSpc>
+              <a:buNone/>
+            </a:pPr>
+            <a:r>
+              <a:rPr lang="en-US" sz="2000" b="1" dirty="0">
+                <a:solidFill>
+                  <a:srgbClr val="1D5BA6"/>
+                </a:solidFill>
+                <a:latin typeface="Microsoft YaHei" pitchFamily="34" charset="0"/>
+                <a:ea typeface="Microsoft YaHei" pitchFamily="34" charset="-122"/>
+                <a:cs typeface="Microsoft YaHei" pitchFamily="34" charset="-120"/>
+              </a:rPr>
+              <a:t>门店退货金额</a:t>
+            </a:r>
+            <a:endParaRPr lang="en-US" sz="1600" dirty="0"/>
+          </a:p>
+          <a:p>
+            <a:pPr algn="ctr" indent="0" marL="0">
+              <a:lnSpc>
+                <a:spcPct val="110000"/>
+              </a:lnSpc>
+              <a:buNone/>
+            </a:pPr>
+            <a:r>
+              <a:rPr lang="en-US" sz="1600" dirty="0">
+                <a:solidFill>
+                  <a:srgbClr val="1F2A37"/>
+                </a:solidFill>
+                <a:latin typeface="Microsoft YaHei" pitchFamily="34" charset="0"/>
+                <a:ea typeface="Microsoft YaHei" pitchFamily="34" charset="-122"/>
+                <a:cs typeface="Microsoft YaHei" pitchFamily="34" charset="-120"/>
+              </a:rPr>
+              <a:t>需要：每笔退货只有一行</a:t>
+            </a:r>
+            <a:endParaRPr lang="en-US" sz="1600" dirty="0"/>
+          </a:p>
+        </p:txBody>
+      </p:sp>
+      <p:sp>
+        <p:nvSpPr>
+          <p:cNvPr id="4" name="Text 2"/>
+          <p:cNvSpPr/>
+          <p:nvPr/>
+        </p:nvSpPr>
+        <p:spPr>
+          <a:xfrm>
+            <a:off x="548640" y="3383280"/>
+            <a:ext cx="3108960" cy="1188720"/>
+          </a:xfrm>
+          <a:prstGeom prst="roundRect">
+            <a:avLst>
+              <a:gd name="adj" fmla="val 7692"/>
+            </a:avLst>
+          </a:prstGeom>
+          <a:solidFill>
+            <a:srgbClr val="E8F0FA"/>
+          </a:solidFill>
+          <a:ln w="12700">
+            <a:solidFill>
+              <a:srgbClr val="E8F0FA"/>
+            </a:solidFill>
+          </a:ln>
+        </p:spPr>
+        <p:txBody>
+          <a:bodyPr wrap="square" lIns="109728" tIns="109728" rIns="109728" bIns="109728" rtlCol="0" anchor="ctr"/>
+          <a:lstStyle/>
+          <a:p>
+            <a:pPr algn="ctr" indent="0" marL="0">
+              <a:lnSpc>
+                <a:spcPct val="110000"/>
+              </a:lnSpc>
+              <a:buNone/>
+            </a:pPr>
+            <a:r>
+              <a:rPr lang="en-US" sz="2000" b="1" dirty="0">
+                <a:solidFill>
+                  <a:srgbClr val="1D5BA6"/>
+                </a:solidFill>
+                <a:latin typeface="Microsoft YaHei" pitchFamily="34" charset="0"/>
+                <a:ea typeface="Microsoft YaHei" pitchFamily="34" charset="-122"/>
+                <a:cs typeface="Microsoft YaHei" pitchFamily="34" charset="-120"/>
+              </a:rPr>
+              <a:t>门店退货率</a:t>
+            </a:r>
+            <a:endParaRPr lang="en-US" sz="1600" dirty="0"/>
+          </a:p>
+          <a:p>
+            <a:pPr algn="ctr" indent="0" marL="0">
+              <a:lnSpc>
+                <a:spcPct val="110000"/>
+              </a:lnSpc>
+              <a:buNone/>
+            </a:pPr>
+            <a:r>
+              <a:rPr lang="en-US" sz="1600" dirty="0">
+                <a:solidFill>
+                  <a:srgbClr val="1F2A37"/>
+                </a:solidFill>
+                <a:latin typeface="Microsoft YaHei" pitchFamily="34" charset="0"/>
+                <a:ea typeface="Microsoft YaHei" pitchFamily="34" charset="-122"/>
+                <a:cs typeface="Microsoft YaHei" pitchFamily="34" charset="-120"/>
+              </a:rPr>
+              <a:t>需要：每笔退货只有一行</a:t>
+            </a:r>
+            <a:endParaRPr lang="en-US" sz="1600" dirty="0"/>
+          </a:p>
+        </p:txBody>
+      </p:sp>
+      <p:sp>
+        <p:nvSpPr>
+          <p:cNvPr id="5" name="Text 3"/>
+          <p:cNvSpPr/>
+          <p:nvPr/>
+        </p:nvSpPr>
+        <p:spPr>
+          <a:xfrm>
+            <a:off x="4754880" y="1920240"/>
+            <a:ext cx="3291840" cy="2194560"/>
+          </a:xfrm>
+          <a:prstGeom prst="roundRect">
+            <a:avLst>
+              <a:gd name="adj" fmla="val 4167"/>
+            </a:avLst>
+          </a:prstGeom>
+          <a:solidFill>
+            <a:srgbClr val="FFFFFF"/>
+          </a:solidFill>
+          <a:ln w="25400">
+            <a:solidFill>
+              <a:srgbClr val="1F7A72"/>
+            </a:solidFill>
+          </a:ln>
+        </p:spPr>
+        <p:txBody>
+          <a:bodyPr wrap="square" lIns="228600" tIns="228600" rIns="228600" bIns="228600" rtlCol="0" anchor="ctr"/>
+          <a:lstStyle/>
+          <a:p>
+            <a:pPr algn="l" indent="0" marL="0">
+              <a:lnSpc>
+                <a:spcPct val="110000"/>
+              </a:lnSpc>
+              <a:buNone/>
+            </a:pPr>
+            <a:r>
+              <a:rPr lang="en-US" sz="2000" b="1" dirty="0">
+                <a:solidFill>
+                  <a:srgbClr val="1F7A72"/>
+                </a:solidFill>
+                <a:latin typeface="Microsoft YaHei" pitchFamily="34" charset="0"/>
+                <a:ea typeface="Microsoft YaHei" pitchFamily="34" charset="-122"/>
+                <a:cs typeface="Microsoft YaHei" pitchFamily="34" charset="-120"/>
+              </a:rPr>
+              <a:t>检查结果</a:t>
+            </a:r>
+            <a:endParaRPr lang="en-US" sz="1700" dirty="0"/>
+          </a:p>
+          <a:p>
+            <a:pPr algn="l" indent="0" marL="0">
+              <a:lnSpc>
+                <a:spcPct val="110000"/>
+              </a:lnSpc>
+              <a:buNone/>
+            </a:pPr>
+            <a:r>
+              <a:rPr lang="en-US" sz="1700" dirty="0">
+                <a:solidFill>
+                  <a:srgbClr val="1F2A37"/>
+                </a:solidFill>
+                <a:latin typeface="Microsoft YaHei" pitchFamily="34" charset="0"/>
+                <a:ea typeface="Microsoft YaHei" pitchFamily="34" charset="-122"/>
+                <a:cs typeface="Microsoft YaHei" pitchFamily="34" charset="-120"/>
+              </a:rPr>
+              <a:t>条件：每笔退货只有一行</a:t>
+            </a:r>
+            <a:endParaRPr lang="en-US" sz="1700" dirty="0"/>
+          </a:p>
+          <a:p>
+            <a:pPr algn="l" indent="0" marL="0">
+              <a:lnSpc>
+                <a:spcPct val="110000"/>
+              </a:lnSpc>
+              <a:buNone/>
+            </a:pPr>
+            <a:r>
+              <a:rPr lang="en-US" sz="1700" dirty="0">
+                <a:solidFill>
+                  <a:srgbClr val="1F2A37"/>
+                </a:solidFill>
+                <a:latin typeface="Microsoft YaHei" pitchFamily="34" charset="0"/>
+                <a:ea typeface="Microsoft YaHei" pitchFamily="34" charset="-122"/>
+                <a:cs typeface="Microsoft YaHei" pitchFamily="34" charset="-120"/>
+              </a:rPr>
+              <a:t>数据版本：第 15 版</a:t>
+            </a:r>
+            <a:endParaRPr lang="en-US" sz="1700" dirty="0"/>
+          </a:p>
+          <a:p>
+            <a:pPr algn="l" indent="0" marL="0">
+              <a:lnSpc>
+                <a:spcPct val="110000"/>
+              </a:lnSpc>
+              <a:buNone/>
+            </a:pPr>
+            <a:r>
+              <a:rPr lang="en-US" sz="1700" b="1" dirty="0">
+                <a:solidFill>
+                  <a:srgbClr val="2E7D4F"/>
+                </a:solidFill>
+                <a:latin typeface="Microsoft YaHei" pitchFamily="34" charset="0"/>
+                <a:ea typeface="Microsoft YaHei" pitchFamily="34" charset="-122"/>
+                <a:cs typeface="Microsoft YaHei" pitchFamily="34" charset="-120"/>
+              </a:rPr>
+              <a:t>结论：成立 ✓</a:t>
+            </a:r>
+            <a:endParaRPr lang="en-US" sz="1700" dirty="0"/>
+          </a:p>
+        </p:txBody>
+      </p:sp>
+      <p:sp>
+        <p:nvSpPr>
+          <p:cNvPr id="6" name="Shape 4"/>
+          <p:cNvSpPr/>
+          <p:nvPr/>
+        </p:nvSpPr>
+        <p:spPr>
+          <a:xfrm>
+            <a:off x="3657600" y="2057400"/>
+            <a:ext cx="548640" cy="0"/>
+          </a:xfrm>
+          <a:prstGeom prst="line">
+            <a:avLst/>
+          </a:prstGeom>
+          <a:noFill/>
+          <a:ln w="25400">
             <a:solidFill>
               <a:srgbClr val="1D5BA6"/>
             </a:solidFill>
@@ -3518,102 +6124,20 @@
       </p:sp>
       <p:sp>
         <p:nvSpPr>
-          <p:cNvPr id="4" name="Text 2"/>
-          <p:cNvSpPr txBox="1"/>
-          <p:nvPr/>
-        </p:nvSpPr>
-        <p:spPr>
-          <a:xfrm>
-            <a:off x="548640" y="1737360"/>
-            <a:ext cx="1463040" cy="640080"/>
-          </a:xfrm>
-          <a:prstGeom prst="rect">
-            <a:avLst/>
-          </a:prstGeom>
-          <a:noFill/>
-          <a:ln/>
-        </p:spPr>
-        <p:txBody>
-          <a:bodyPr wrap="square" lIns="0" tIns="0" rIns="0" bIns="0" rtlCol="0" anchor="ctr"/>
-          <a:lstStyle/>
-          <a:p>
-            <a:pPr algn="ctr" indent="0" marL="0">
-              <a:buNone/>
-            </a:pPr>
-            <a:r>
-              <a:rPr lang="en-US" sz="2000" b="1" dirty="0">
-                <a:solidFill>
-                  <a:srgbClr val="FFFFFF"/>
-                </a:solidFill>
-                <a:latin typeface="Microsoft YaHei" pitchFamily="34" charset="0"/>
-                <a:ea typeface="Microsoft YaHei" pitchFamily="34" charset="-122"/>
-                <a:cs typeface="Microsoft YaHei" pitchFamily="34" charset="-120"/>
-              </a:rPr>
-              <a:t>结构</a:t>
-            </a:r>
-            <a:endParaRPr lang="en-US" sz="2000" dirty="0"/>
-          </a:p>
-        </p:txBody>
-      </p:sp>
-      <p:sp>
-        <p:nvSpPr>
-          <p:cNvPr id="5" name="Text 3"/>
-          <p:cNvSpPr txBox="1"/>
-          <p:nvPr/>
-        </p:nvSpPr>
-        <p:spPr>
-          <a:xfrm>
-            <a:off x="2377440" y="1645920"/>
-            <a:ext cx="9265615" cy="822960"/>
-          </a:xfrm>
-          <a:prstGeom prst="rect">
-            <a:avLst/>
-          </a:prstGeom>
-          <a:noFill/>
-          <a:ln/>
-        </p:spPr>
-        <p:txBody>
-          <a:bodyPr wrap="square" lIns="0" tIns="0" rIns="0" bIns="0" rtlCol="0" anchor="ctr"/>
-          <a:lstStyle/>
-          <a:p>
-            <a:pPr indent="0" marL="0">
-              <a:buNone/>
-            </a:pPr>
-            <a:r>
-              <a:rPr lang="en-US" sz="2000" dirty="0">
-                <a:solidFill>
-                  <a:srgbClr val="FFFFFF"/>
-                </a:solidFill>
-                <a:latin typeface="Microsoft YaHei" pitchFamily="34" charset="0"/>
-                <a:ea typeface="Microsoft YaHei" pitchFamily="34" charset="-122"/>
-                <a:cs typeface="Microsoft YaHei" pitchFamily="34" charset="-120"/>
-              </a:rPr>
-              <a:t>请求处理、共享知识库、学习与维护三个模块，位于用户端智能体和 SQL 数据库之间</a:t>
-            </a:r>
-            <a:endParaRPr lang="en-US" sz="2000" dirty="0"/>
-          </a:p>
-        </p:txBody>
-      </p:sp>
-      <p:sp>
-        <p:nvSpPr>
-          <p:cNvPr id="6" name="label 功能"/>
+          <p:cNvPr id="7" name="Shape 5"/>
           <p:cNvSpPr/>
           <p:nvPr/>
         </p:nvSpPr>
         <p:spPr>
           <a:xfrm>
-            <a:off x="548640" y="3108960"/>
-            <a:ext cx="1463040" cy="640080"/>
-          </a:xfrm>
-          <a:prstGeom prst="roundRect">
-            <a:avLst>
-              <a:gd name="adj" fmla="val 50000"/>
-            </a:avLst>
-          </a:prstGeom>
-          <a:solidFill>
-            <a:srgbClr val="1D5BA6"/>
-          </a:solidFill>
-          <a:ln w="12700">
+            <a:off x="4206240" y="2057400"/>
+            <a:ext cx="0" cy="594360"/>
+          </a:xfrm>
+          <a:prstGeom prst="line">
+            <a:avLst/>
+          </a:prstGeom>
+          <a:noFill/>
+          <a:ln w="25400">
             <a:solidFill>
               <a:srgbClr val="1D5BA6"/>
             </a:solidFill>
@@ -3623,102 +6147,44 @@
       </p:sp>
       <p:sp>
         <p:nvSpPr>
-          <p:cNvPr id="7" name="Text 5"/>
-          <p:cNvSpPr txBox="1"/>
-          <p:nvPr/>
-        </p:nvSpPr>
-        <p:spPr>
-          <a:xfrm>
-            <a:off x="548640" y="3108960"/>
-            <a:ext cx="1463040" cy="640080"/>
-          </a:xfrm>
-          <a:prstGeom prst="rect">
-            <a:avLst/>
-          </a:prstGeom>
-          <a:noFill/>
-          <a:ln/>
-        </p:spPr>
-        <p:txBody>
-          <a:bodyPr wrap="square" lIns="0" tIns="0" rIns="0" bIns="0" rtlCol="0" anchor="ctr"/>
-          <a:lstStyle/>
-          <a:p>
-            <a:pPr algn="ctr" indent="0" marL="0">
-              <a:buNone/>
-            </a:pPr>
-            <a:r>
-              <a:rPr lang="en-US" sz="2000" b="1" dirty="0">
-                <a:solidFill>
-                  <a:srgbClr val="FFFFFF"/>
-                </a:solidFill>
-                <a:latin typeface="Microsoft YaHei" pitchFamily="34" charset="0"/>
-                <a:ea typeface="Microsoft YaHei" pitchFamily="34" charset="-122"/>
-                <a:cs typeface="Microsoft YaHei" pitchFamily="34" charset="-120"/>
-              </a:rPr>
-              <a:t>功能</a:t>
-            </a:r>
-            <a:endParaRPr lang="en-US" sz="2000" dirty="0"/>
-          </a:p>
-        </p:txBody>
-      </p:sp>
-      <p:sp>
-        <p:nvSpPr>
-          <p:cNvPr id="8" name="Text 6"/>
-          <p:cNvSpPr txBox="1"/>
-          <p:nvPr/>
-        </p:nvSpPr>
-        <p:spPr>
-          <a:xfrm>
-            <a:off x="2377440" y="3017520"/>
-            <a:ext cx="9265615" cy="822960"/>
-          </a:xfrm>
-          <a:prstGeom prst="rect">
-            <a:avLst/>
-          </a:prstGeom>
-          <a:noFill/>
-          <a:ln/>
-        </p:spPr>
-        <p:txBody>
-          <a:bodyPr wrap="square" lIns="0" tIns="0" rIns="0" bIns="0" rtlCol="0" anchor="ctr"/>
-          <a:lstStyle/>
-          <a:p>
-            <a:pPr indent="0" marL="0">
-              <a:buNone/>
-            </a:pPr>
-            <a:r>
-              <a:rPr lang="en-US" sz="2000" dirty="0">
-                <a:solidFill>
-                  <a:srgbClr val="FFFFFF"/>
-                </a:solidFill>
-                <a:latin typeface="Microsoft YaHei" pitchFamily="34" charset="0"/>
-                <a:ea typeface="Microsoft YaHei" pitchFamily="34" charset="-122"/>
-                <a:cs typeface="Microsoft YaHei" pitchFamily="34" charset="-120"/>
-              </a:rPr>
-              <a:t>学习并共享口径；数据变化后维护；使用时在同一快照上把关</a:t>
-            </a:r>
-            <a:endParaRPr lang="en-US" sz="2000" dirty="0"/>
-          </a:p>
-        </p:txBody>
-      </p:sp>
-      <p:sp>
-        <p:nvSpPr>
-          <p:cNvPr id="9" name="label 工作流"/>
+          <p:cNvPr id="8" name="Shape 6"/>
           <p:cNvSpPr/>
           <p:nvPr/>
         </p:nvSpPr>
         <p:spPr>
           <a:xfrm>
-            <a:off x="548640" y="4480560"/>
-            <a:ext cx="1463040" cy="640080"/>
-          </a:xfrm>
-          <a:prstGeom prst="roundRect">
-            <a:avLst>
-              <a:gd name="adj" fmla="val 50000"/>
-            </a:avLst>
-          </a:prstGeom>
-          <a:solidFill>
-            <a:srgbClr val="1D5BA6"/>
-          </a:solidFill>
-          <a:ln w="12700">
+            <a:off x="4206240" y="2651760"/>
+            <a:ext cx="548640" cy="0"/>
+          </a:xfrm>
+          <a:prstGeom prst="line">
+            <a:avLst/>
+          </a:prstGeom>
+          <a:noFill/>
+          <a:ln w="25400">
+            <a:solidFill>
+              <a:srgbClr val="1D5BA6"/>
+            </a:solidFill>
+            <a:prstDash val="solid"/>
+            <a:tailEnd type="triangle"/>
+          </a:ln>
+        </p:spPr>
+      </p:sp>
+      <p:sp>
+        <p:nvSpPr>
+          <p:cNvPr id="9" name="Shape 7"/>
+          <p:cNvSpPr/>
+          <p:nvPr/>
+        </p:nvSpPr>
+        <p:spPr>
+          <a:xfrm>
+            <a:off x="3657600" y="3977640"/>
+            <a:ext cx="548640" cy="0"/>
+          </a:xfrm>
+          <a:prstGeom prst="line">
+            <a:avLst/>
+          </a:prstGeom>
+          <a:noFill/>
+          <a:ln w="25400">
             <a:solidFill>
               <a:srgbClr val="1D5BA6"/>
             </a:solidFill>
@@ -3728,14 +6194,61 @@
       </p:sp>
       <p:sp>
         <p:nvSpPr>
-          <p:cNvPr id="10" name="Text 8"/>
+          <p:cNvPr id="10" name="Shape 8"/>
+          <p:cNvSpPr/>
+          <p:nvPr/>
+        </p:nvSpPr>
+        <p:spPr>
+          <a:xfrm flipV="1">
+            <a:off x="4206240" y="3383280"/>
+            <a:ext cx="0" cy="594360"/>
+          </a:xfrm>
+          <a:prstGeom prst="line">
+            <a:avLst/>
+          </a:prstGeom>
+          <a:noFill/>
+          <a:ln w="25400">
+            <a:solidFill>
+              <a:srgbClr val="1D5BA6"/>
+            </a:solidFill>
+            <a:prstDash val="solid"/>
+          </a:ln>
+        </p:spPr>
+      </p:sp>
+      <p:sp>
+        <p:nvSpPr>
+          <p:cNvPr id="11" name="Shape 9"/>
+          <p:cNvSpPr/>
+          <p:nvPr/>
+        </p:nvSpPr>
+        <p:spPr>
+          <a:xfrm>
+            <a:off x="4206240" y="3383280"/>
+            <a:ext cx="548640" cy="0"/>
+          </a:xfrm>
+          <a:prstGeom prst="line">
+            <a:avLst/>
+          </a:prstGeom>
+          <a:noFill/>
+          <a:ln w="25400">
+            <a:solidFill>
+              <a:srgbClr val="1D5BA6"/>
+            </a:solidFill>
+            <a:prstDash val="solid"/>
+            <a:tailEnd type="triangle"/>
+          </a:ln>
+        </p:spPr>
+      </p:sp>
+      <p:sp>
+        <p:nvSpPr>
+          <p:cNvPr id="12" name="Text 10"/>
           <p:cNvSpPr txBox="1"/>
           <p:nvPr/>
         </p:nvSpPr>
         <p:spPr>
           <a:xfrm>
-            <a:off x="548640" y="4480560"/>
-            <a:ext cx="1463040" cy="640080"/>
+            <a:off x="548640" y="2743200"/>
+            <a:ext cx="3291840" cy="320040"/>
           </a:xfrm>
           <a:prstGeom prst="rect">
             <a:avLst/>
@@ -3744,37 +6257,37 @@
           <a:ln/>
         </p:spPr>
         <p:txBody>
-          <a:bodyPr wrap="square" lIns="0" tIns="0" rIns="0" bIns="0" rtlCol="0" anchor="ctr"/>
+          <a:bodyPr wrap="square" lIns="0" tIns="0" rIns="0" bIns="0" rtlCol="0" anchor="t"/>
           <a:lstStyle/>
           <a:p>
-            <a:pPr algn="ctr" indent="0" marL="0">
-              <a:buNone/>
-            </a:pPr>
-            <a:r>
-              <a:rPr lang="en-US" sz="2000" b="1" dirty="0">
-                <a:solidFill>
-                  <a:srgbClr val="FFFFFF"/>
-                </a:solidFill>
-                <a:latin typeface="Microsoft YaHei" pitchFamily="34" charset="0"/>
-                <a:ea typeface="Microsoft YaHei" pitchFamily="34" charset="-122"/>
-                <a:cs typeface="Microsoft YaHei" pitchFamily="34" charset="-120"/>
-              </a:rPr>
-              <a:t>工作流</a:t>
-            </a:r>
-            <a:endParaRPr lang="en-US" sz="2000" dirty="0"/>
-          </a:p>
-        </p:txBody>
-      </p:sp>
-      <p:sp>
-        <p:nvSpPr>
-          <p:cNvPr id="11" name="Text 9"/>
+            <a:pPr indent="0" marL="0">
+              <a:buNone/>
+            </a:pPr>
+            <a:r>
+              <a:rPr lang="en-US" sz="1500" dirty="0">
+                <a:solidFill>
+                  <a:srgbClr val="5B6573"/>
+                </a:solidFill>
+                <a:latin typeface="Microsoft YaHei" pitchFamily="34" charset="0"/>
+                <a:ea typeface="Microsoft YaHei" pitchFamily="34" charset="-122"/>
+                <a:cs typeface="Microsoft YaHei" pitchFamily="34" charset="-120"/>
+              </a:rPr>
+              <a:t>先到的：现在查，存起来</a:t>
+            </a:r>
+            <a:endParaRPr lang="en-US" sz="1500" dirty="0"/>
+          </a:p>
+        </p:txBody>
+      </p:sp>
+      <p:sp>
+        <p:nvSpPr>
+          <p:cNvPr id="13" name="Text 11"/>
           <p:cNvSpPr txBox="1"/>
           <p:nvPr/>
         </p:nvSpPr>
         <p:spPr>
           <a:xfrm>
-            <a:off x="2377440" y="4389120"/>
-            <a:ext cx="9265615" cy="822960"/>
+            <a:off x="548640" y="4663440"/>
+            <a:ext cx="3291840" cy="320040"/>
           </a:xfrm>
           <a:prstGeom prst="rect">
             <a:avLst/>
@@ -3783,24 +6296,245 @@
           <a:ln/>
         </p:spPr>
         <p:txBody>
-          <a:bodyPr wrap="square" lIns="0" tIns="0" rIns="0" bIns="0" rtlCol="0" anchor="ctr"/>
+          <a:bodyPr wrap="square" lIns="0" tIns="0" rIns="0" bIns="0" rtlCol="0" anchor="t"/>
           <a:lstStyle/>
           <a:p>
             <a:pPr indent="0" marL="0">
               <a:buNone/>
             </a:pPr>
             <a:r>
-              <a:rPr lang="en-US" sz="2000" dirty="0">
-                <a:solidFill>
-                  <a:srgbClr val="FFFFFF"/>
-                </a:solidFill>
-                <a:latin typeface="Microsoft YaHei" pitchFamily="34" charset="0"/>
-                <a:ea typeface="Microsoft YaHei" pitchFamily="34" charset="-122"/>
-                <a:cs typeface="Microsoft YaHei" pitchFamily="34" charset="-120"/>
-              </a:rPr>
-              <a:t>文本请求查到有效定义，SQL 请求在快照上验证并执行；检查结果跨定义、跨智能体复用</a:t>
-            </a:r>
-            <a:endParaRPr lang="en-US" sz="2000" dirty="0"/>
+              <a:rPr lang="en-US" sz="1500" dirty="0">
+                <a:solidFill>
+                  <a:srgbClr val="5B6573"/>
+                </a:solidFill>
+                <a:latin typeface="Microsoft YaHei" pitchFamily="34" charset="0"/>
+                <a:ea typeface="Microsoft YaHei" pitchFamily="34" charset="-122"/>
+                <a:cs typeface="Microsoft YaHei" pitchFamily="34" charset="-120"/>
+              </a:rPr>
+              <a:t>后到的：直接拿结果</a:t>
+            </a:r>
+            <a:endParaRPr lang="en-US" sz="1500" dirty="0"/>
+          </a:p>
+        </p:txBody>
+      </p:sp>
+      <p:sp>
+        <p:nvSpPr>
+          <p:cNvPr id="14" name="Shape 12"/>
+          <p:cNvSpPr/>
+          <p:nvPr/>
+        </p:nvSpPr>
+        <p:spPr>
+          <a:xfrm>
+            <a:off x="8046720" y="3017520"/>
+            <a:ext cx="640080" cy="0"/>
+          </a:xfrm>
+          <a:prstGeom prst="line">
+            <a:avLst/>
+          </a:prstGeom>
+          <a:noFill/>
+          <a:ln w="28575">
+            <a:solidFill>
+              <a:srgbClr val="B5671A"/>
+            </a:solidFill>
+            <a:prstDash val="solid"/>
+            <a:tailEnd type="triangle"/>
+          </a:ln>
+        </p:spPr>
+      </p:sp>
+      <p:sp>
+        <p:nvSpPr>
+          <p:cNvPr id="15" name="Text 13"/>
+          <p:cNvSpPr/>
+          <p:nvPr/>
+        </p:nvSpPr>
+        <p:spPr>
+          <a:xfrm>
+            <a:off x="8686800" y="1920240"/>
+            <a:ext cx="2953512" cy="2194560"/>
+          </a:xfrm>
+          <a:prstGeom prst="roundRect">
+            <a:avLst>
+              <a:gd name="adj" fmla="val 4167"/>
+            </a:avLst>
+          </a:prstGeom>
+          <a:solidFill>
+            <a:srgbClr val="FBF0E2"/>
+          </a:solidFill>
+          <a:ln w="12700">
+            <a:solidFill>
+              <a:srgbClr val="FBF0E2"/>
+            </a:solidFill>
+          </a:ln>
+        </p:spPr>
+        <p:txBody>
+          <a:bodyPr wrap="square" lIns="109728" tIns="109728" rIns="109728" bIns="109728" rtlCol="0" anchor="ctr"/>
+          <a:lstStyle/>
+          <a:p>
+            <a:pPr algn="ctr" indent="0" marL="0">
+              <a:lnSpc>
+                <a:spcPct val="110000"/>
+              </a:lnSpc>
+              <a:buNone/>
+            </a:pPr>
+            <a:r>
+              <a:rPr lang="en-US" sz="2000" b="1" dirty="0">
+                <a:solidFill>
+                  <a:srgbClr val="B5671A"/>
+                </a:solidFill>
+                <a:latin typeface="Microsoft YaHei" pitchFamily="34" charset="0"/>
+                <a:ea typeface="Microsoft YaHei" pitchFamily="34" charset="-122"/>
+                <a:cs typeface="Microsoft YaHei" pitchFamily="34" charset="-120"/>
+              </a:rPr>
+              <a:t>又有新数据写入</a:t>
+            </a:r>
+            <a:endParaRPr lang="en-US" sz="1600" dirty="0"/>
+          </a:p>
+          <a:p>
+            <a:pPr algn="ctr" indent="0" marL="0">
+              <a:lnSpc>
+                <a:spcPct val="110000"/>
+              </a:lnSpc>
+              <a:buNone/>
+            </a:pPr>
+            <a:r>
+              <a:rPr lang="en-US" sz="1600" dirty="0">
+                <a:solidFill>
+                  <a:srgbClr val="1F2A37"/>
+                </a:solidFill>
+                <a:latin typeface="Microsoft YaHei" pitchFamily="34" charset="0"/>
+                <a:ea typeface="Microsoft YaHei" pitchFamily="34" charset="-122"/>
+                <a:cs typeface="Microsoft YaHei" pitchFamily="34" charset="-120"/>
+              </a:rPr>
+              <a:t>版本变成第 16 版：</a:t>
+            </a:r>
+            <a:endParaRPr lang="en-US" sz="1600" dirty="0"/>
+          </a:p>
+          <a:p>
+            <a:pPr algn="ctr" indent="0" marL="0">
+              <a:lnSpc>
+                <a:spcPct val="110000"/>
+              </a:lnSpc>
+              <a:buNone/>
+            </a:pPr>
+            <a:r>
+              <a:rPr lang="en-US" sz="1600" dirty="0">
+                <a:solidFill>
+                  <a:srgbClr val="1F2A37"/>
+                </a:solidFill>
+                <a:latin typeface="Microsoft YaHei" pitchFamily="34" charset="0"/>
+                <a:ea typeface="Microsoft YaHei" pitchFamily="34" charset="-122"/>
+                <a:cs typeface="Microsoft YaHei" pitchFamily="34" charset="-120"/>
+              </a:rPr>
+              <a:t>这条结果对新数据不算数，</a:t>
+            </a:r>
+            <a:endParaRPr lang="en-US" sz="1600" dirty="0"/>
+          </a:p>
+          <a:p>
+            <a:pPr algn="ctr" indent="0" marL="0">
+              <a:lnSpc>
+                <a:spcPct val="110000"/>
+              </a:lnSpc>
+              <a:buNone/>
+            </a:pPr>
+            <a:r>
+              <a:rPr lang="en-US" sz="1600" dirty="0">
+                <a:solidFill>
+                  <a:srgbClr val="1F2A37"/>
+                </a:solidFill>
+                <a:latin typeface="Microsoft YaHei" pitchFamily="34" charset="0"/>
+                <a:ea typeface="Microsoft YaHei" pitchFamily="34" charset="-122"/>
+                <a:cs typeface="Microsoft YaHei" pitchFamily="34" charset="-120"/>
+              </a:rPr>
+              <a:t>下次用到时重查</a:t>
+            </a:r>
+            <a:endParaRPr lang="en-US" sz="1600" dirty="0"/>
+          </a:p>
+        </p:txBody>
+      </p:sp>
+      <p:sp>
+        <p:nvSpPr>
+          <p:cNvPr id="16" name="Text 14"/>
+          <p:cNvSpPr/>
+          <p:nvPr/>
+        </p:nvSpPr>
+        <p:spPr>
+          <a:xfrm>
+            <a:off x="548640" y="5120640"/>
+            <a:ext cx="11094415" cy="1097280"/>
+          </a:xfrm>
+          <a:prstGeom prst="roundRect">
+            <a:avLst>
+              <a:gd name="adj" fmla="val 8333"/>
+            </a:avLst>
+          </a:prstGeom>
+          <a:solidFill>
+            <a:srgbClr val="F1F3F6"/>
+          </a:solidFill>
+          <a:ln w="12700">
+            <a:solidFill>
+              <a:srgbClr val="F1F3F6"/>
+            </a:solidFill>
+          </a:ln>
+        </p:spPr>
+        <p:txBody>
+          <a:bodyPr wrap="square" lIns="228600" tIns="228600" rIns="228600" bIns="228600" rtlCol="0" anchor="ctr"/>
+          <a:lstStyle/>
+          <a:p>
+            <a:pPr algn="l" indent="0" marL="0">
+              <a:lnSpc>
+                <a:spcPct val="110000"/>
+              </a:lnSpc>
+              <a:buNone/>
+            </a:pPr>
+            <a:r>
+              <a:rPr lang="en-US" sz="1700" b="1" dirty="0">
+                <a:solidFill>
+                  <a:srgbClr val="1F7A72"/>
+                </a:solidFill>
+                <a:latin typeface="Microsoft YaHei" pitchFamily="34" charset="0"/>
+                <a:ea typeface="Microsoft YaHei" pitchFamily="34" charset="-122"/>
+                <a:cs typeface="Microsoft YaHei" pitchFamily="34" charset="-120"/>
+              </a:rPr>
+              <a:t>规则：</a:t>
+            </a:r>
+            <a:pPr algn="l" indent="0" marL="0">
+              <a:lnSpc>
+                <a:spcPct val="110000"/>
+              </a:lnSpc>
+              <a:buNone/>
+            </a:pPr>
+            <a:r>
+              <a:rPr lang="en-US" sz="1700" dirty="0">
+                <a:solidFill>
+                  <a:srgbClr val="1F2A37"/>
+                </a:solidFill>
+                <a:latin typeface="Microsoft YaHei" pitchFamily="34" charset="0"/>
+                <a:ea typeface="Microsoft YaHei" pitchFamily="34" charset="-122"/>
+                <a:cs typeface="Microsoft YaHei" pitchFamily="34" charset="-120"/>
+              </a:rPr>
+              <a:t>检查结果按“条件 + 数据版本”存。同一个条件、同一份数据，不管哪个口径、哪个智能体用到，只查一次。</a:t>
+            </a:r>
+            <a:endParaRPr lang="en-US" sz="1700" dirty="0"/>
+          </a:p>
+          <a:p>
+            <a:pPr algn="l" indent="0" marL="0">
+              <a:lnSpc>
+                <a:spcPct val="110000"/>
+              </a:lnSpc>
+              <a:buNone/>
+            </a:pPr>
+            <a:r>
+              <a:rPr lang="en-US" sz="1500" dirty="0">
+                <a:solidFill>
+                  <a:srgbClr val="5B6573"/>
+                </a:solidFill>
+                <a:latin typeface="Microsoft YaHei" pitchFamily="34" charset="0"/>
+                <a:ea typeface="Microsoft YaHei" pitchFamily="34" charset="-122"/>
+                <a:cs typeface="Microsoft YaHei" pitchFamily="34" charset="-120"/>
+              </a:rPr>
+              <a:t>数据版本：一张表每被写入一次，版本号加 1。</a:t>
+            </a:r>
+            <a:endParaRPr lang="en-US" sz="1700" dirty="0"/>
           </a:p>
         </p:txBody>
       </p:sp>
@@ -3834,7 +6568,7 @@
             <a:lvl1pPr>
               <a:defRPr sz="1000">
                 <a:solidFill>
-                  <a:srgbClr val="CADCFC"/>
+                  <a:srgbClr val="5B6573"/>
                 </a:solidFill>
                 <a:latin typeface="Microsoft YaHei"/>
                 <a:ea typeface="Microsoft YaHei"/>
@@ -3847,6 +6581,4112 @@
             <a:fld id="{F7021451-1387-4CA6-816F-3879F97B5CBC}" type="slidenum">
               <a:rPr b="0" lang="en-US"/>
               <a:t>6</a:t>
+            </a:fld>
+            <a:endParaRPr lang="en-US"/>
+          </a:p>
+        </p:txBody>
+      </p:sp>
+    </p:spTree>
+  </p:cSld>
+  <p:clrMapOvr>
+    <a:masterClrMapping/>
+  </p:clrMapOvr>
+</p:sld>
+</file>
+
+<file path=ppt/slides/slide7.xml><?xml version="1.0" encoding="utf-8"?>
+<p:sld xmlns:a="http://schemas.openxmlformats.org/drawingml/2006/main" xmlns:r="http://schemas.openxmlformats.org/officeDocument/2006/relationships" xmlns:p="http://schemas.openxmlformats.org/presentationml/2006/main">
+  <p:cSld name="Slide 7">
+    <p:spTree>
+      <p:nvGrpSpPr>
+        <p:cNvPr id="1" name=""/>
+        <p:cNvGrpSpPr/>
+        <p:nvPr/>
+      </p:nvGrpSpPr>
+      <p:grpSpPr>
+        <a:xfrm>
+          <a:off x="0" y="0"/>
+          <a:ext cx="0" cy="0"/>
+          <a:chOff x="0" y="0"/>
+          <a:chExt cx="0" cy="0"/>
+        </a:xfrm>
+      </p:grpSpPr>
+      <p:sp>
+        <p:nvSpPr>
+          <p:cNvPr id="2" name="Text 0"/>
+          <p:cNvSpPr/>
+          <p:nvPr>
+            <p:ph idx="100" type="title" hasCustomPrompt="1"/>
+          </p:nvPr>
+        </p:nvSpPr>
+        <p:spPr>
+          <a:xfrm>
+            <a:off x="548640" y="320040"/>
+            <a:ext cx="11094415" cy="731520"/>
+          </a:xfrm>
+          <a:prstGeom prst="rect">
+            <a:avLst/>
+          </a:prstGeom>
+          <a:noFill/>
+          <a:ln/>
+        </p:spPr>
+        <p:txBody>
+          <a:bodyPr wrap="square" lIns="0" tIns="0" rIns="0" bIns="0" rtlCol="0" anchor="ctr"/>
+          <a:lstStyle/>
+          <a:p>
+            <a:pPr algn="l" indent="0" marL="0">
+              <a:buNone/>
+            </a:pPr>
+            <a:r>
+              <a:rPr lang="en-US" sz="3000" b="1" dirty="0">
+                <a:solidFill>
+                  <a:srgbClr val="1F2A37"/>
+                </a:solidFill>
+                <a:latin typeface="Microsoft YaHei" pitchFamily="34" charset="0"/>
+                <a:ea typeface="Microsoft YaHei" pitchFamily="34" charset="-122"/>
+                <a:cs typeface="Microsoft YaHei" pitchFamily="34" charset="-120"/>
+              </a:rPr>
+              <a:t>工作流②：智能体执行 SQL</a:t>
+            </a:r>
+            <a:endParaRPr lang="en-US" sz="3000" dirty="0"/>
+          </a:p>
+        </p:txBody>
+      </p:sp>
+      <p:sp>
+        <p:nvSpPr>
+          <p:cNvPr id="3" name="Text 1"/>
+          <p:cNvSpPr/>
+          <p:nvPr/>
+        </p:nvSpPr>
+        <p:spPr>
+          <a:xfrm>
+            <a:off x="548640" y="1234440"/>
+            <a:ext cx="11094415" cy="548640"/>
+          </a:xfrm>
+          <a:prstGeom prst="roundRect">
+            <a:avLst>
+              <a:gd name="adj" fmla="val 16667"/>
+            </a:avLst>
+          </a:prstGeom>
+          <a:solidFill>
+            <a:srgbClr val="F1F3F6"/>
+          </a:solidFill>
+          <a:ln w="12700">
+            <a:solidFill>
+              <a:srgbClr val="F1F3F6"/>
+            </a:solidFill>
+          </a:ln>
+        </p:spPr>
+        <p:txBody>
+          <a:bodyPr wrap="square" lIns="228600" tIns="228600" rIns="228600" bIns="228600" rtlCol="0" anchor="ctr"/>
+          <a:lstStyle/>
+          <a:p>
+            <a:pPr algn="l" indent="0" marL="0">
+              <a:lnSpc>
+                <a:spcPct val="110000"/>
+              </a:lnSpc>
+              <a:buNone/>
+            </a:pPr>
+            <a:r>
+              <a:rPr lang="en-US" sz="1700" dirty="0">
+                <a:solidFill>
+                  <a:srgbClr val="1F2A37"/>
+                </a:solidFill>
+                <a:latin typeface="Microsoft YaHei" pitchFamily="34" charset="0"/>
+                <a:ea typeface="Microsoft YaHei" pitchFamily="34" charset="-122"/>
+                <a:cs typeface="Microsoft YaHei" pitchFamily="34" charset="-120"/>
+              </a:rPr>
+              <a:t>智能体按拿到的口径写好 SQL，发给 MAVRA</a:t>
+            </a:r>
+            <a:endParaRPr lang="en-US" sz="1700" dirty="0"/>
+          </a:p>
+        </p:txBody>
+      </p:sp>
+      <p:sp>
+        <p:nvSpPr>
+          <p:cNvPr id="4" name="Text 2"/>
+          <p:cNvSpPr/>
+          <p:nvPr/>
+        </p:nvSpPr>
+        <p:spPr>
+          <a:xfrm>
+            <a:off x="548640" y="2331720"/>
+            <a:ext cx="3393338" cy="1920240"/>
+          </a:xfrm>
+          <a:prstGeom prst="roundRect">
+            <a:avLst>
+              <a:gd name="adj" fmla="val 4762"/>
+            </a:avLst>
+          </a:prstGeom>
+          <a:solidFill>
+            <a:srgbClr val="FBF0E2"/>
+          </a:solidFill>
+          <a:ln w="12700">
+            <a:solidFill>
+              <a:srgbClr val="FBF0E2"/>
+            </a:solidFill>
+          </a:ln>
+        </p:spPr>
+        <p:txBody>
+          <a:bodyPr wrap="square" lIns="137160" tIns="685800" rIns="137160" bIns="91440" rtlCol="0" anchor="t"/>
+          <a:lstStyle/>
+          <a:p>
+            <a:pPr algn="ctr" indent="0" marL="0">
+              <a:lnSpc>
+                <a:spcPct val="110000"/>
+              </a:lnSpc>
+              <a:buNone/>
+            </a:pPr>
+            <a:r>
+              <a:rPr lang="en-US" sz="2000" b="1" dirty="0">
+                <a:solidFill>
+                  <a:srgbClr val="B5671A"/>
+                </a:solidFill>
+                <a:latin typeface="Microsoft YaHei" pitchFamily="34" charset="0"/>
+                <a:ea typeface="Microsoft YaHei" pitchFamily="34" charset="-122"/>
+                <a:cs typeface="Microsoft YaHei" pitchFamily="34" charset="-120"/>
+              </a:rPr>
+              <a:t>声明</a:t>
+            </a:r>
+            <a:endParaRPr lang="en-US" sz="1600" dirty="0"/>
+          </a:p>
+          <a:p>
+            <a:pPr algn="ctr" indent="0" marL="0">
+              <a:lnSpc>
+                <a:spcPct val="110000"/>
+              </a:lnSpc>
+              <a:buNone/>
+            </a:pPr>
+            <a:r>
+              <a:rPr lang="en-US" sz="1700" dirty="0">
+                <a:solidFill>
+                  <a:srgbClr val="1F2A37"/>
+                </a:solidFill>
+                <a:latin typeface="Microsoft YaHei" pitchFamily="34" charset="0"/>
+                <a:ea typeface="Microsoft YaHei" pitchFamily="34" charset="-122"/>
+                <a:cs typeface="Microsoft YaHei" pitchFamily="34" charset="-120"/>
+              </a:rPr>
+              <a:t>SQL 里写明：</a:t>
+            </a:r>
+            <a:endParaRPr lang="en-US" sz="1600" dirty="0"/>
+          </a:p>
+          <a:p>
+            <a:pPr algn="ctr" indent="0" marL="0">
+              <a:lnSpc>
+                <a:spcPct val="110000"/>
+              </a:lnSpc>
+              <a:buNone/>
+            </a:pPr>
+            <a:r>
+              <a:rPr lang="en-US" sz="1700" dirty="0">
+                <a:solidFill>
+                  <a:srgbClr val="1F2A37"/>
+                </a:solidFill>
+                <a:latin typeface="Microsoft YaHei" pitchFamily="34" charset="0"/>
+                <a:ea typeface="Microsoft YaHei" pitchFamily="34" charset="-122"/>
+                <a:cs typeface="Microsoft YaHei" pitchFamily="34" charset="-120"/>
+              </a:rPr>
+              <a:t>用“退货金额”第 2 版</a:t>
+            </a:r>
+            <a:endParaRPr lang="en-US" sz="1600" dirty="0"/>
+          </a:p>
+        </p:txBody>
+      </p:sp>
+      <p:sp>
+        <p:nvSpPr>
+          <p:cNvPr id="5" name="Text 3"/>
+          <p:cNvSpPr/>
+          <p:nvPr/>
+        </p:nvSpPr>
+        <p:spPr>
+          <a:xfrm>
+            <a:off x="1998421" y="2011680"/>
+            <a:ext cx="502920" cy="502920"/>
+          </a:xfrm>
+          <a:prstGeom prst="ellipse">
+            <a:avLst/>
+          </a:prstGeom>
+          <a:solidFill>
+            <a:srgbClr val="B5671A"/>
+          </a:solidFill>
+          <a:ln>
+            <a:solidFill>
+              <a:srgbClr val="B5671A"/>
+            </a:solidFill>
+          </a:ln>
+        </p:spPr>
+        <p:txBody>
+          <a:bodyPr wrap="square" lIns="0" tIns="0" rIns="0" bIns="0" rtlCol="0" anchor="ctr"/>
+          <a:lstStyle/>
+          <a:p>
+            <a:pPr algn="ctr" indent="0" marL="0">
+              <a:buNone/>
+            </a:pPr>
+            <a:r>
+              <a:rPr lang="en-US" sz="2000" b="1" dirty="0">
+                <a:solidFill>
+                  <a:srgbClr val="FFFFFF"/>
+                </a:solidFill>
+                <a:latin typeface="Microsoft YaHei" pitchFamily="34" charset="0"/>
+                <a:ea typeface="Microsoft YaHei" pitchFamily="34" charset="-122"/>
+                <a:cs typeface="Microsoft YaHei" pitchFamily="34" charset="-120"/>
+              </a:rPr>
+              <a:t>1</a:t>
+            </a:r>
+            <a:endParaRPr lang="en-US" sz="2000" dirty="0"/>
+          </a:p>
+        </p:txBody>
+      </p:sp>
+      <p:sp>
+        <p:nvSpPr>
+          <p:cNvPr id="6" name="Shape 4"/>
+          <p:cNvSpPr/>
+          <p:nvPr/>
+        </p:nvSpPr>
+        <p:spPr>
+          <a:xfrm>
+            <a:off x="4015130" y="3291840"/>
+            <a:ext cx="310896" cy="0"/>
+          </a:xfrm>
+          <a:prstGeom prst="line">
+            <a:avLst/>
+          </a:prstGeom>
+          <a:noFill/>
+          <a:ln w="31750">
+            <a:solidFill>
+              <a:srgbClr val="B5671A"/>
+            </a:solidFill>
+            <a:prstDash val="solid"/>
+            <a:tailEnd type="triangle"/>
+          </a:ln>
+        </p:spPr>
+      </p:sp>
+      <p:sp>
+        <p:nvSpPr>
+          <p:cNvPr id="7" name="Text 5"/>
+          <p:cNvSpPr/>
+          <p:nvPr/>
+        </p:nvSpPr>
+        <p:spPr>
+          <a:xfrm>
+            <a:off x="4399178" y="2331720"/>
+            <a:ext cx="3393338" cy="1920240"/>
+          </a:xfrm>
+          <a:prstGeom prst="roundRect">
+            <a:avLst>
+              <a:gd name="adj" fmla="val 4762"/>
+            </a:avLst>
+          </a:prstGeom>
+          <a:solidFill>
+            <a:srgbClr val="FBF0E2"/>
+          </a:solidFill>
+          <a:ln w="12700">
+            <a:solidFill>
+              <a:srgbClr val="FBF0E2"/>
+            </a:solidFill>
+          </a:ln>
+        </p:spPr>
+        <p:txBody>
+          <a:bodyPr wrap="square" lIns="137160" tIns="685800" rIns="137160" bIns="91440" rtlCol="0" anchor="t"/>
+          <a:lstStyle/>
+          <a:p>
+            <a:pPr algn="ctr" indent="0" marL="0">
+              <a:lnSpc>
+                <a:spcPct val="110000"/>
+              </a:lnSpc>
+              <a:buNone/>
+            </a:pPr>
+            <a:r>
+              <a:rPr lang="en-US" sz="2000" b="1" dirty="0">
+                <a:solidFill>
+                  <a:srgbClr val="B5671A"/>
+                </a:solidFill>
+                <a:latin typeface="Microsoft YaHei" pitchFamily="34" charset="0"/>
+                <a:ea typeface="Microsoft YaHei" pitchFamily="34" charset="-122"/>
+                <a:cs typeface="Microsoft YaHei" pitchFamily="34" charset="-120"/>
+              </a:rPr>
+              <a:t>核对</a:t>
+            </a:r>
+            <a:endParaRPr lang="en-US" sz="1600" dirty="0"/>
+          </a:p>
+          <a:p>
+            <a:pPr algn="ctr" indent="0" marL="0">
+              <a:lnSpc>
+                <a:spcPct val="110000"/>
+              </a:lnSpc>
+              <a:buNone/>
+            </a:pPr>
+            <a:r>
+              <a:rPr lang="en-US" sz="1700" dirty="0">
+                <a:solidFill>
+                  <a:srgbClr val="1F2A37"/>
+                </a:solidFill>
+                <a:latin typeface="Microsoft YaHei" pitchFamily="34" charset="0"/>
+                <a:ea typeface="Microsoft YaHei" pitchFamily="34" charset="-122"/>
+                <a:cs typeface="Microsoft YaHei" pitchFamily="34" charset="-120"/>
+              </a:rPr>
+              <a:t>这一版还有效吗？</a:t>
+            </a:r>
+            <a:endParaRPr lang="en-US" sz="1600" dirty="0"/>
+          </a:p>
+          <a:p>
+            <a:pPr algn="ctr" indent="0" marL="0">
+              <a:lnSpc>
+                <a:spcPct val="110000"/>
+              </a:lnSpc>
+              <a:buNone/>
+            </a:pPr>
+            <a:r>
+              <a:rPr lang="en-US" sz="1700" dirty="0">
+                <a:solidFill>
+                  <a:srgbClr val="1F2A37"/>
+                </a:solidFill>
+                <a:latin typeface="Microsoft YaHei" pitchFamily="34" charset="0"/>
+                <a:ea typeface="Microsoft YaHei" pitchFamily="34" charset="-122"/>
+                <a:cs typeface="Microsoft YaHei" pitchFamily="34" charset="-120"/>
+              </a:rPr>
+              <a:t>它的条件在“这一刻的数据”上</a:t>
+            </a:r>
+            <a:endParaRPr lang="en-US" sz="1600" dirty="0"/>
+          </a:p>
+          <a:p>
+            <a:pPr algn="ctr" indent="0" marL="0">
+              <a:lnSpc>
+                <a:spcPct val="110000"/>
+              </a:lnSpc>
+              <a:buNone/>
+            </a:pPr>
+            <a:r>
+              <a:rPr lang="en-US" sz="1700" dirty="0">
+                <a:solidFill>
+                  <a:srgbClr val="1F2A37"/>
+                </a:solidFill>
+                <a:latin typeface="Microsoft YaHei" pitchFamily="34" charset="0"/>
+                <a:ea typeface="Microsoft YaHei" pitchFamily="34" charset="-122"/>
+                <a:cs typeface="Microsoft YaHei" pitchFamily="34" charset="-120"/>
+              </a:rPr>
+              <a:t>还成立吗？（能复用就复用）</a:t>
+            </a:r>
+            <a:endParaRPr lang="en-US" sz="1600" dirty="0"/>
+          </a:p>
+        </p:txBody>
+      </p:sp>
+      <p:sp>
+        <p:nvSpPr>
+          <p:cNvPr id="8" name="Text 6"/>
+          <p:cNvSpPr/>
+          <p:nvPr/>
+        </p:nvSpPr>
+        <p:spPr>
+          <a:xfrm>
+            <a:off x="5848960" y="2011680"/>
+            <a:ext cx="502920" cy="502920"/>
+          </a:xfrm>
+          <a:prstGeom prst="ellipse">
+            <a:avLst/>
+          </a:prstGeom>
+          <a:solidFill>
+            <a:srgbClr val="B5671A"/>
+          </a:solidFill>
+          <a:ln>
+            <a:solidFill>
+              <a:srgbClr val="B5671A"/>
+            </a:solidFill>
+          </a:ln>
+        </p:spPr>
+        <p:txBody>
+          <a:bodyPr wrap="square" lIns="0" tIns="0" rIns="0" bIns="0" rtlCol="0" anchor="ctr"/>
+          <a:lstStyle/>
+          <a:p>
+            <a:pPr algn="ctr" indent="0" marL="0">
+              <a:buNone/>
+            </a:pPr>
+            <a:r>
+              <a:rPr lang="en-US" sz="2000" b="1" dirty="0">
+                <a:solidFill>
+                  <a:srgbClr val="FFFFFF"/>
+                </a:solidFill>
+                <a:latin typeface="Microsoft YaHei" pitchFamily="34" charset="0"/>
+                <a:ea typeface="Microsoft YaHei" pitchFamily="34" charset="-122"/>
+                <a:cs typeface="Microsoft YaHei" pitchFamily="34" charset="-120"/>
+              </a:rPr>
+              <a:t>2</a:t>
+            </a:r>
+            <a:endParaRPr lang="en-US" sz="2000" dirty="0"/>
+          </a:p>
+        </p:txBody>
+      </p:sp>
+      <p:sp>
+        <p:nvSpPr>
+          <p:cNvPr id="9" name="Shape 7"/>
+          <p:cNvSpPr/>
+          <p:nvPr/>
+        </p:nvSpPr>
+        <p:spPr>
+          <a:xfrm>
+            <a:off x="7865669" y="3291840"/>
+            <a:ext cx="310896" cy="0"/>
+          </a:xfrm>
+          <a:prstGeom prst="line">
+            <a:avLst/>
+          </a:prstGeom>
+          <a:noFill/>
+          <a:ln w="31750">
+            <a:solidFill>
+              <a:srgbClr val="B5671A"/>
+            </a:solidFill>
+            <a:prstDash val="solid"/>
+            <a:tailEnd type="triangle"/>
+          </a:ln>
+        </p:spPr>
+      </p:sp>
+      <p:sp>
+        <p:nvSpPr>
+          <p:cNvPr id="10" name="Text 8"/>
+          <p:cNvSpPr/>
+          <p:nvPr/>
+        </p:nvSpPr>
+        <p:spPr>
+          <a:xfrm>
+            <a:off x="8249717" y="2331720"/>
+            <a:ext cx="3393338" cy="1920240"/>
+          </a:xfrm>
+          <a:prstGeom prst="roundRect">
+            <a:avLst>
+              <a:gd name="adj" fmla="val 4762"/>
+            </a:avLst>
+          </a:prstGeom>
+          <a:solidFill>
+            <a:srgbClr val="FBF0E2"/>
+          </a:solidFill>
+          <a:ln w="12700">
+            <a:solidFill>
+              <a:srgbClr val="FBF0E2"/>
+            </a:solidFill>
+          </a:ln>
+        </p:spPr>
+        <p:txBody>
+          <a:bodyPr wrap="square" lIns="137160" tIns="685800" rIns="137160" bIns="91440" rtlCol="0" anchor="t"/>
+          <a:lstStyle/>
+          <a:p>
+            <a:pPr algn="ctr" indent="0" marL="0">
+              <a:lnSpc>
+                <a:spcPct val="110000"/>
+              </a:lnSpc>
+              <a:buNone/>
+            </a:pPr>
+            <a:r>
+              <a:rPr lang="en-US" sz="2000" b="1" dirty="0">
+                <a:solidFill>
+                  <a:srgbClr val="B5671A"/>
+                </a:solidFill>
+                <a:latin typeface="Microsoft YaHei" pitchFamily="34" charset="0"/>
+                <a:ea typeface="Microsoft YaHei" pitchFamily="34" charset="-122"/>
+                <a:cs typeface="Microsoft YaHei" pitchFamily="34" charset="-120"/>
+              </a:rPr>
+              <a:t>执行</a:t>
+            </a:r>
+            <a:endParaRPr lang="en-US" sz="1600" dirty="0"/>
+          </a:p>
+          <a:p>
+            <a:pPr algn="ctr" indent="0" marL="0">
+              <a:lnSpc>
+                <a:spcPct val="110000"/>
+              </a:lnSpc>
+              <a:buNone/>
+            </a:pPr>
+            <a:r>
+              <a:rPr lang="en-US" sz="1700" dirty="0">
+                <a:solidFill>
+                  <a:srgbClr val="1F2A37"/>
+                </a:solidFill>
+                <a:latin typeface="Microsoft YaHei" pitchFamily="34" charset="0"/>
+                <a:ea typeface="Microsoft YaHei" pitchFamily="34" charset="-122"/>
+                <a:cs typeface="Microsoft YaHei" pitchFamily="34" charset="-120"/>
+              </a:rPr>
+              <a:t>在同一份数据上跑 SQL</a:t>
+            </a:r>
+            <a:endParaRPr lang="en-US" sz="1600" dirty="0"/>
+          </a:p>
+          <a:p>
+            <a:pPr algn="ctr" indent="0" marL="0">
+              <a:lnSpc>
+                <a:spcPct val="110000"/>
+              </a:lnSpc>
+              <a:buNone/>
+            </a:pPr>
+            <a:r>
+              <a:rPr lang="en-US" sz="1700" dirty="0">
+                <a:solidFill>
+                  <a:srgbClr val="1F2A37"/>
+                </a:solidFill>
+                <a:latin typeface="Microsoft YaHei" pitchFamily="34" charset="0"/>
+                <a:ea typeface="Microsoft YaHei" pitchFamily="34" charset="-122"/>
+                <a:cs typeface="Microsoft YaHei" pitchFamily="34" charset="-120"/>
+              </a:rPr>
+              <a:t>5 月退货金额：329.4 万</a:t>
+            </a:r>
+            <a:endParaRPr lang="en-US" sz="1600" dirty="0"/>
+          </a:p>
+        </p:txBody>
+      </p:sp>
+      <p:sp>
+        <p:nvSpPr>
+          <p:cNvPr id="11" name="Text 9"/>
+          <p:cNvSpPr/>
+          <p:nvPr/>
+        </p:nvSpPr>
+        <p:spPr>
+          <a:xfrm>
+            <a:off x="9699498" y="2011680"/>
+            <a:ext cx="502920" cy="502920"/>
+          </a:xfrm>
+          <a:prstGeom prst="ellipse">
+            <a:avLst/>
+          </a:prstGeom>
+          <a:solidFill>
+            <a:srgbClr val="B5671A"/>
+          </a:solidFill>
+          <a:ln>
+            <a:solidFill>
+              <a:srgbClr val="B5671A"/>
+            </a:solidFill>
+          </a:ln>
+        </p:spPr>
+        <p:txBody>
+          <a:bodyPr wrap="square" lIns="0" tIns="0" rIns="0" bIns="0" rtlCol="0" anchor="ctr"/>
+          <a:lstStyle/>
+          <a:p>
+            <a:pPr algn="ctr" indent="0" marL="0">
+              <a:buNone/>
+            </a:pPr>
+            <a:r>
+              <a:rPr lang="en-US" sz="2000" b="1" dirty="0">
+                <a:solidFill>
+                  <a:srgbClr val="FFFFFF"/>
+                </a:solidFill>
+                <a:latin typeface="Microsoft YaHei" pitchFamily="34" charset="0"/>
+                <a:ea typeface="Microsoft YaHei" pitchFamily="34" charset="-122"/>
+                <a:cs typeface="Microsoft YaHei" pitchFamily="34" charset="-120"/>
+              </a:rPr>
+              <a:t>3</a:t>
+            </a:r>
+            <a:endParaRPr lang="en-US" sz="2000" dirty="0"/>
+          </a:p>
+        </p:txBody>
+      </p:sp>
+      <p:sp>
+        <p:nvSpPr>
+          <p:cNvPr id="12" name="Shape 10"/>
+          <p:cNvSpPr/>
+          <p:nvPr/>
+        </p:nvSpPr>
+        <p:spPr>
+          <a:xfrm>
+            <a:off x="6095848" y="4251960"/>
+            <a:ext cx="0" cy="457200"/>
+          </a:xfrm>
+          <a:prstGeom prst="line">
+            <a:avLst/>
+          </a:prstGeom>
+          <a:noFill/>
+          <a:ln w="25400">
+            <a:solidFill>
+              <a:srgbClr val="B5392A"/>
+            </a:solidFill>
+            <a:prstDash val="solid"/>
+            <a:tailEnd type="triangle"/>
+          </a:ln>
+        </p:spPr>
+      </p:sp>
+      <p:sp>
+        <p:nvSpPr>
+          <p:cNvPr id="13" name="Text 11"/>
+          <p:cNvSpPr/>
+          <p:nvPr/>
+        </p:nvSpPr>
+        <p:spPr>
+          <a:xfrm>
+            <a:off x="2804008" y="4709160"/>
+            <a:ext cx="6583680" cy="594360"/>
+          </a:xfrm>
+          <a:prstGeom prst="roundRect">
+            <a:avLst>
+              <a:gd name="adj" fmla="val 15385"/>
+            </a:avLst>
+          </a:prstGeom>
+          <a:solidFill>
+            <a:srgbClr val="FBEAE7"/>
+          </a:solidFill>
+          <a:ln w="12700">
+            <a:solidFill>
+              <a:srgbClr val="FBEAE7"/>
+            </a:solidFill>
+          </a:ln>
+        </p:spPr>
+        <p:txBody>
+          <a:bodyPr wrap="square" lIns="182880" tIns="182880" rIns="182880" bIns="182880" rtlCol="0" anchor="ctr"/>
+          <a:lstStyle/>
+          <a:p>
+            <a:pPr algn="ctr" indent="0" marL="0">
+              <a:lnSpc>
+                <a:spcPct val="110000"/>
+              </a:lnSpc>
+              <a:buNone/>
+            </a:pPr>
+            <a:r>
+              <a:rPr lang="en-US" sz="1700" b="1" dirty="0">
+                <a:solidFill>
+                  <a:srgbClr val="B5392A"/>
+                </a:solidFill>
+                <a:latin typeface="Microsoft YaHei" pitchFamily="34" charset="0"/>
+                <a:ea typeface="Microsoft YaHei" pitchFamily="34" charset="-122"/>
+                <a:cs typeface="Microsoft YaHei" pitchFamily="34" charset="-120"/>
+              </a:rPr>
+              <a:t>不成立或版本过时：</a:t>
+            </a:r>
+            <a:pPr algn="ctr" indent="0" marL="0">
+              <a:lnSpc>
+                <a:spcPct val="110000"/>
+              </a:lnSpc>
+              <a:buNone/>
+            </a:pPr>
+            <a:r>
+              <a:rPr lang="en-US" sz="1700" dirty="0">
+                <a:solidFill>
+                  <a:srgbClr val="1F2A37"/>
+                </a:solidFill>
+                <a:latin typeface="Microsoft YaHei" pitchFamily="34" charset="0"/>
+                <a:ea typeface="Microsoft YaHei" pitchFamily="34" charset="-122"/>
+                <a:cs typeface="Microsoft YaHei" pitchFamily="34" charset="-120"/>
+              </a:rPr>
+              <a:t>拒绝执行，提示智能体重新查口径</a:t>
+            </a:r>
+            <a:endParaRPr lang="en-US" sz="1700" dirty="0"/>
+          </a:p>
+        </p:txBody>
+      </p:sp>
+      <p:sp>
+        <p:nvSpPr>
+          <p:cNvPr id="14" name="Text 12"/>
+          <p:cNvSpPr txBox="1"/>
+          <p:nvPr/>
+        </p:nvSpPr>
+        <p:spPr>
+          <a:xfrm>
+            <a:off x="548640" y="5623560"/>
+            <a:ext cx="10362895" cy="548640"/>
+          </a:xfrm>
+          <a:prstGeom prst="rect">
+            <a:avLst/>
+          </a:prstGeom>
+          <a:noFill/>
+          <a:ln/>
+        </p:spPr>
+        <p:txBody>
+          <a:bodyPr wrap="square" lIns="0" tIns="0" rIns="0" bIns="0" rtlCol="0" anchor="t"/>
+          <a:lstStyle/>
+          <a:p>
+            <a:pPr indent="0" marL="0">
+              <a:buNone/>
+            </a:pPr>
+            <a:r>
+              <a:rPr lang="en-US" sz="1500" b="1" dirty="0">
+                <a:solidFill>
+                  <a:srgbClr val="5B6573"/>
+                </a:solidFill>
+                <a:latin typeface="Microsoft YaHei" pitchFamily="34" charset="0"/>
+                <a:ea typeface="Microsoft YaHei" pitchFamily="34" charset="-122"/>
+                <a:cs typeface="Microsoft YaHei" pitchFamily="34" charset="-120"/>
+              </a:rPr>
+              <a:t>“这一刻的数据”：</a:t>
+            </a:r>
+            <a:pPr indent="0" marL="0">
+              <a:buNone/>
+            </a:pPr>
+            <a:r>
+              <a:rPr lang="en-US" sz="1500" dirty="0">
+                <a:solidFill>
+                  <a:srgbClr val="5B6573"/>
+                </a:solidFill>
+                <a:latin typeface="Microsoft YaHei" pitchFamily="34" charset="0"/>
+                <a:ea typeface="Microsoft YaHei" pitchFamily="34" charset="-122"/>
+                <a:cs typeface="Microsoft YaHei" pitchFamily="34" charset="-120"/>
+              </a:rPr>
+              <a:t>核对和执行看同一个数据库快照。核对完、执行前有人写入，也不会让核对白做。</a:t>
+            </a:r>
+            <a:endParaRPr lang="en-US" sz="1500" dirty="0"/>
+          </a:p>
+        </p:txBody>
+      </p:sp>
+      <p:sp>
+        <p:nvSpPr>
+          <p:cNvPr id="25" name="Slide Number Placeholder 0"/>
+          <p:cNvSpPr>
+            <a:spLocks noGrp="1"/>
+          </p:cNvSpPr>
+          <p:nvPr>
+            <p:ph type="sldNum" sz="quarter" idx="4294967295"/>
+          </p:nvPr>
+        </p:nvSpPr>
+        <p:spPr>
+          <a:xfrm>
+            <a:off x="11185855" y="6400800"/>
+            <a:ext cx="457200" cy="274320"/>
+          </a:xfrm>
+          <a:prstGeom prst="rect">
+            <a:avLst/>
+          </a:prstGeom>
+          <a:extLst>
+            <a:ext uri="{C572A759-6A51-4108-AA02-DFA0A04FC94B}">
+              <ma14:wrappingTextBoxFlag xmlns:ma14="http://schemas.microsoft.com/office/mac/drawingml/2011/main" val="0"/>
+            </a:ext>
+          </a:extLst>
+        </p:spPr>
+        <p:txBody>
+          <a:bodyPr/>
+          <a:lstStyle>
+            <a:lvl1pPr>
+              <a:defRPr sz="1000">
+                <a:solidFill>
+                  <a:srgbClr val="5B6573"/>
+                </a:solidFill>
+                <a:latin typeface="Microsoft YaHei"/>
+                <a:ea typeface="Microsoft YaHei"/>
+                <a:cs typeface="Microsoft YaHei"/>
+              </a:defRPr>
+            </a:lvl1pPr>
+          </a:lstStyle>
+          <a:p>
+            <a:pPr algn="r"/>
+            <a:fld id="{F7021451-1387-4CA6-816F-3879F97B5CBC}" type="slidenum">
+              <a:rPr b="0" lang="en-US"/>
+              <a:t>7</a:t>
+            </a:fld>
+            <a:endParaRPr lang="en-US"/>
+          </a:p>
+        </p:txBody>
+      </p:sp>
+    </p:spTree>
+  </p:cSld>
+  <p:clrMapOvr>
+    <a:masterClrMapping/>
+  </p:clrMapOvr>
+</p:sld>
+</file>
+
+<file path=ppt/slides/slide8.xml><?xml version="1.0" encoding="utf-8"?>
+<p:sld xmlns:a="http://schemas.openxmlformats.org/drawingml/2006/main" xmlns:r="http://schemas.openxmlformats.org/officeDocument/2006/relationships" xmlns:p="http://schemas.openxmlformats.org/presentationml/2006/main">
+  <p:cSld name="Slide 8">
+    <p:spTree>
+      <p:nvGrpSpPr>
+        <p:cNvPr id="1" name=""/>
+        <p:cNvGrpSpPr/>
+        <p:nvPr/>
+      </p:nvGrpSpPr>
+      <p:grpSpPr>
+        <a:xfrm>
+          <a:off x="0" y="0"/>
+          <a:ext cx="0" cy="0"/>
+          <a:chOff x="0" y="0"/>
+          <a:chExt cx="0" cy="0"/>
+        </a:xfrm>
+      </p:grpSpPr>
+      <p:sp>
+        <p:nvSpPr>
+          <p:cNvPr id="2" name="Text 0"/>
+          <p:cNvSpPr/>
+          <p:nvPr>
+            <p:ph idx="100" type="title" hasCustomPrompt="1"/>
+          </p:nvPr>
+        </p:nvSpPr>
+        <p:spPr>
+          <a:xfrm>
+            <a:off x="548640" y="320040"/>
+            <a:ext cx="11094415" cy="731520"/>
+          </a:xfrm>
+          <a:prstGeom prst="rect">
+            <a:avLst/>
+          </a:prstGeom>
+          <a:noFill/>
+          <a:ln/>
+        </p:spPr>
+        <p:txBody>
+          <a:bodyPr wrap="square" lIns="0" tIns="0" rIns="0" bIns="0" rtlCol="0" anchor="ctr"/>
+          <a:lstStyle/>
+          <a:p>
+            <a:pPr algn="l" indent="0" marL="0">
+              <a:buNone/>
+            </a:pPr>
+            <a:r>
+              <a:rPr lang="en-US" sz="3000" b="1" dirty="0">
+                <a:solidFill>
+                  <a:srgbClr val="1F2A37"/>
+                </a:solidFill>
+                <a:latin typeface="Microsoft YaHei" pitchFamily="34" charset="0"/>
+                <a:ea typeface="Microsoft YaHei" pitchFamily="34" charset="-122"/>
+                <a:cs typeface="Microsoft YaHei" pitchFamily="34" charset="-120"/>
+              </a:rPr>
+              <a:t>工作流③：一个口径的一生</a:t>
+            </a:r>
+            <a:endParaRPr lang="en-US" sz="3000" dirty="0"/>
+          </a:p>
+        </p:txBody>
+      </p:sp>
+      <p:sp>
+        <p:nvSpPr>
+          <p:cNvPr id="3" name="Text 1"/>
+          <p:cNvSpPr/>
+          <p:nvPr/>
+        </p:nvSpPr>
+        <p:spPr>
+          <a:xfrm>
+            <a:off x="640080" y="1371600"/>
+            <a:ext cx="2514600" cy="1051560"/>
+          </a:xfrm>
+          <a:prstGeom prst="roundRect">
+            <a:avLst>
+              <a:gd name="adj" fmla="val 8696"/>
+            </a:avLst>
+          </a:prstGeom>
+          <a:solidFill>
+            <a:srgbClr val="EFECF7"/>
+          </a:solidFill>
+          <a:ln w="12700">
+            <a:solidFill>
+              <a:srgbClr val="EFECF7"/>
+            </a:solidFill>
+          </a:ln>
+        </p:spPr>
+        <p:txBody>
+          <a:bodyPr wrap="square" lIns="109728" tIns="109728" rIns="109728" bIns="109728" rtlCol="0" anchor="ctr"/>
+          <a:lstStyle/>
+          <a:p>
+            <a:pPr algn="ctr" indent="0" marL="0">
+              <a:lnSpc>
+                <a:spcPct val="110000"/>
+              </a:lnSpc>
+              <a:buNone/>
+            </a:pPr>
+            <a:r>
+              <a:rPr lang="en-US" sz="1800" b="1" dirty="0">
+                <a:solidFill>
+                  <a:srgbClr val="6A58A3"/>
+                </a:solidFill>
+                <a:latin typeface="Microsoft YaHei" pitchFamily="34" charset="0"/>
+                <a:ea typeface="Microsoft YaHei" pitchFamily="34" charset="-122"/>
+                <a:cs typeface="Microsoft YaHei" pitchFamily="34" charset="-120"/>
+              </a:rPr>
+              <a:t>学习</a:t>
+            </a:r>
+            <a:endParaRPr lang="en-US" sz="1600" dirty="0"/>
+          </a:p>
+          <a:p>
+            <a:pPr algn="ctr" indent="0" marL="0">
+              <a:lnSpc>
+                <a:spcPct val="110000"/>
+              </a:lnSpc>
+              <a:buNone/>
+            </a:pPr>
+            <a:r>
+              <a:rPr lang="en-US" sz="1400" dirty="0">
+                <a:solidFill>
+                  <a:srgbClr val="1F2A37"/>
+                </a:solidFill>
+                <a:latin typeface="Microsoft YaHei" pitchFamily="34" charset="0"/>
+                <a:ea typeface="Microsoft YaHei" pitchFamily="34" charset="-122"/>
+                <a:cs typeface="Microsoft YaHei" pitchFamily="34" charset="-120"/>
+              </a:rPr>
+              <a:t>大模型答题，判对才收</a:t>
+            </a:r>
+            <a:endParaRPr lang="en-US" sz="1600" dirty="0"/>
+          </a:p>
+        </p:txBody>
+      </p:sp>
+      <p:sp>
+        <p:nvSpPr>
+          <p:cNvPr id="4" name="Shape 2"/>
+          <p:cNvSpPr/>
+          <p:nvPr/>
+        </p:nvSpPr>
+        <p:spPr>
+          <a:xfrm>
+            <a:off x="3200400" y="1897380"/>
+            <a:ext cx="228600" cy="0"/>
+          </a:xfrm>
+          <a:prstGeom prst="line">
+            <a:avLst/>
+          </a:prstGeom>
+          <a:noFill/>
+          <a:ln w="25400">
+            <a:solidFill>
+              <a:srgbClr val="5B6573"/>
+            </a:solidFill>
+            <a:prstDash val="solid"/>
+            <a:tailEnd type="triangle"/>
+          </a:ln>
+        </p:spPr>
+      </p:sp>
+      <p:sp>
+        <p:nvSpPr>
+          <p:cNvPr id="5" name="Text 3"/>
+          <p:cNvSpPr/>
+          <p:nvPr/>
+        </p:nvSpPr>
+        <p:spPr>
+          <a:xfrm>
+            <a:off x="3474720" y="1371600"/>
+            <a:ext cx="2514600" cy="1051560"/>
+          </a:xfrm>
+          <a:prstGeom prst="roundRect">
+            <a:avLst>
+              <a:gd name="adj" fmla="val 8696"/>
+            </a:avLst>
+          </a:prstGeom>
+          <a:solidFill>
+            <a:srgbClr val="EFECF7"/>
+          </a:solidFill>
+          <a:ln w="12700">
+            <a:solidFill>
+              <a:srgbClr val="EFECF7"/>
+            </a:solidFill>
+          </a:ln>
+        </p:spPr>
+        <p:txBody>
+          <a:bodyPr wrap="square" lIns="109728" tIns="109728" rIns="109728" bIns="109728" rtlCol="0" anchor="ctr"/>
+          <a:lstStyle/>
+          <a:p>
+            <a:pPr algn="ctr" indent="0" marL="0">
+              <a:lnSpc>
+                <a:spcPct val="110000"/>
+              </a:lnSpc>
+              <a:buNone/>
+            </a:pPr>
+            <a:r>
+              <a:rPr lang="en-US" sz="1800" b="1" dirty="0">
+                <a:solidFill>
+                  <a:srgbClr val="6A58A3"/>
+                </a:solidFill>
+                <a:latin typeface="Microsoft YaHei" pitchFamily="34" charset="0"/>
+                <a:ea typeface="Microsoft YaHei" pitchFamily="34" charset="-122"/>
+                <a:cs typeface="Microsoft YaHei" pitchFamily="34" charset="-120"/>
+              </a:rPr>
+              <a:t>发布口径</a:t>
+            </a:r>
+            <a:endParaRPr lang="en-US" sz="1600" dirty="0"/>
+          </a:p>
+          <a:p>
+            <a:pPr algn="ctr" indent="0" marL="0">
+              <a:lnSpc>
+                <a:spcPct val="110000"/>
+              </a:lnSpc>
+              <a:buNone/>
+            </a:pPr>
+            <a:r>
+              <a:rPr lang="en-US" sz="1400" dirty="0">
+                <a:solidFill>
+                  <a:srgbClr val="1F2A37"/>
+                </a:solidFill>
+                <a:latin typeface="Microsoft YaHei" pitchFamily="34" charset="0"/>
+                <a:ea typeface="Microsoft YaHei" pitchFamily="34" charset="-122"/>
+                <a:cs typeface="Microsoft YaHei" pitchFamily="34" charset="-120"/>
+              </a:rPr>
+              <a:t>第 1 版（修好后第 2 版）</a:t>
+            </a:r>
+            <a:endParaRPr lang="en-US" sz="1600" dirty="0"/>
+          </a:p>
+        </p:txBody>
+      </p:sp>
+      <p:sp>
+        <p:nvSpPr>
+          <p:cNvPr id="6" name="Shape 4"/>
+          <p:cNvSpPr/>
+          <p:nvPr/>
+        </p:nvSpPr>
+        <p:spPr>
+          <a:xfrm>
+            <a:off x="6035040" y="1897380"/>
+            <a:ext cx="228600" cy="0"/>
+          </a:xfrm>
+          <a:prstGeom prst="line">
+            <a:avLst/>
+          </a:prstGeom>
+          <a:noFill/>
+          <a:ln w="25400">
+            <a:solidFill>
+              <a:srgbClr val="5B6573"/>
+            </a:solidFill>
+            <a:prstDash val="solid"/>
+            <a:tailEnd type="triangle"/>
+          </a:ln>
+        </p:spPr>
+      </p:sp>
+      <p:sp>
+        <p:nvSpPr>
+          <p:cNvPr id="7" name="Text 5"/>
+          <p:cNvSpPr/>
+          <p:nvPr/>
+        </p:nvSpPr>
+        <p:spPr>
+          <a:xfrm>
+            <a:off x="6309360" y="1371600"/>
+            <a:ext cx="2514600" cy="1051560"/>
+          </a:xfrm>
+          <a:prstGeom prst="roundRect">
+            <a:avLst>
+              <a:gd name="adj" fmla="val 8696"/>
+            </a:avLst>
+          </a:prstGeom>
+          <a:solidFill>
+            <a:srgbClr val="E8F0FA"/>
+          </a:solidFill>
+          <a:ln w="12700">
+            <a:solidFill>
+              <a:srgbClr val="E8F0FA"/>
+            </a:solidFill>
+          </a:ln>
+        </p:spPr>
+        <p:txBody>
+          <a:bodyPr wrap="square" lIns="109728" tIns="109728" rIns="109728" bIns="109728" rtlCol="0" anchor="ctr"/>
+          <a:lstStyle/>
+          <a:p>
+            <a:pPr algn="ctr" indent="0" marL="0">
+              <a:lnSpc>
+                <a:spcPct val="110000"/>
+              </a:lnSpc>
+              <a:buNone/>
+            </a:pPr>
+            <a:r>
+              <a:rPr lang="en-US" sz="1800" b="1" dirty="0">
+                <a:solidFill>
+                  <a:srgbClr val="1D5BA6"/>
+                </a:solidFill>
+                <a:latin typeface="Microsoft YaHei" pitchFamily="34" charset="0"/>
+                <a:ea typeface="Microsoft YaHei" pitchFamily="34" charset="-122"/>
+                <a:cs typeface="Microsoft YaHei" pitchFamily="34" charset="-120"/>
+              </a:rPr>
+              <a:t>智能体使用</a:t>
+            </a:r>
+            <a:endParaRPr lang="en-US" sz="1600" dirty="0"/>
+          </a:p>
+          <a:p>
+            <a:pPr algn="ctr" indent="0" marL="0">
+              <a:lnSpc>
+                <a:spcPct val="110000"/>
+              </a:lnSpc>
+              <a:buNone/>
+            </a:pPr>
+            <a:r>
+              <a:rPr lang="en-US" sz="1400" dirty="0">
+                <a:solidFill>
+                  <a:srgbClr val="1F2A37"/>
+                </a:solidFill>
+                <a:latin typeface="Microsoft YaHei" pitchFamily="34" charset="0"/>
+                <a:ea typeface="Microsoft YaHei" pitchFamily="34" charset="-122"/>
+                <a:cs typeface="Microsoft YaHei" pitchFamily="34" charset="-120"/>
+              </a:rPr>
+              <a:t>查口径、执行 SQL</a:t>
+            </a:r>
+            <a:endParaRPr lang="en-US" sz="1600" dirty="0"/>
+          </a:p>
+        </p:txBody>
+      </p:sp>
+      <p:sp>
+        <p:nvSpPr>
+          <p:cNvPr id="8" name="Shape 6"/>
+          <p:cNvSpPr/>
+          <p:nvPr/>
+        </p:nvSpPr>
+        <p:spPr>
+          <a:xfrm>
+            <a:off x="8869680" y="1897380"/>
+            <a:ext cx="228600" cy="0"/>
+          </a:xfrm>
+          <a:prstGeom prst="line">
+            <a:avLst/>
+          </a:prstGeom>
+          <a:noFill/>
+          <a:ln w="25400">
+            <a:solidFill>
+              <a:srgbClr val="5B6573"/>
+            </a:solidFill>
+            <a:prstDash val="solid"/>
+            <a:tailEnd type="triangle"/>
+          </a:ln>
+        </p:spPr>
+      </p:sp>
+      <p:sp>
+        <p:nvSpPr>
+          <p:cNvPr id="9" name="Text 7"/>
+          <p:cNvSpPr/>
+          <p:nvPr/>
+        </p:nvSpPr>
+        <p:spPr>
+          <a:xfrm>
+            <a:off x="9144000" y="1371600"/>
+            <a:ext cx="2514600" cy="1051560"/>
+          </a:xfrm>
+          <a:prstGeom prst="roundRect">
+            <a:avLst>
+              <a:gd name="adj" fmla="val 8696"/>
+            </a:avLst>
+          </a:prstGeom>
+          <a:solidFill>
+            <a:srgbClr val="FBF0E2"/>
+          </a:solidFill>
+          <a:ln w="12700">
+            <a:solidFill>
+              <a:srgbClr val="FBF0E2"/>
+            </a:solidFill>
+          </a:ln>
+        </p:spPr>
+        <p:txBody>
+          <a:bodyPr wrap="square" lIns="109728" tIns="109728" rIns="109728" bIns="109728" rtlCol="0" anchor="ctr"/>
+          <a:lstStyle/>
+          <a:p>
+            <a:pPr algn="ctr" indent="0" marL="0">
+              <a:lnSpc>
+                <a:spcPct val="110000"/>
+              </a:lnSpc>
+              <a:buNone/>
+            </a:pPr>
+            <a:r>
+              <a:rPr lang="en-US" sz="1800" b="1" dirty="0">
+                <a:solidFill>
+                  <a:srgbClr val="B5671A"/>
+                </a:solidFill>
+                <a:latin typeface="Microsoft YaHei" pitchFamily="34" charset="0"/>
+                <a:ea typeface="Microsoft YaHei" pitchFamily="34" charset="-122"/>
+                <a:cs typeface="Microsoft YaHei" pitchFamily="34" charset="-120"/>
+              </a:rPr>
+              <a:t>数据被写入</a:t>
+            </a:r>
+            <a:endParaRPr lang="en-US" sz="1600" dirty="0"/>
+          </a:p>
+          <a:p>
+            <a:pPr algn="ctr" indent="0" marL="0">
+              <a:lnSpc>
+                <a:spcPct val="110000"/>
+              </a:lnSpc>
+              <a:buNone/>
+            </a:pPr>
+            <a:r>
+              <a:rPr lang="en-US" sz="1400" dirty="0">
+                <a:solidFill>
+                  <a:srgbClr val="1F2A37"/>
+                </a:solidFill>
+                <a:latin typeface="Microsoft YaHei" pitchFamily="34" charset="0"/>
+                <a:ea typeface="Microsoft YaHei" pitchFamily="34" charset="-122"/>
+                <a:cs typeface="Microsoft YaHei" pitchFamily="34" charset="-120"/>
+              </a:rPr>
+              <a:t>例：多了“申请”行</a:t>
+            </a:r>
+            <a:endParaRPr lang="en-US" sz="1600" dirty="0"/>
+          </a:p>
+        </p:txBody>
+      </p:sp>
+      <p:sp>
+        <p:nvSpPr>
+          <p:cNvPr id="10" name="Shape 8"/>
+          <p:cNvSpPr/>
+          <p:nvPr/>
+        </p:nvSpPr>
+        <p:spPr>
+          <a:xfrm>
+            <a:off x="10401300" y="2423160"/>
+            <a:ext cx="0" cy="411480"/>
+          </a:xfrm>
+          <a:prstGeom prst="line">
+            <a:avLst/>
+          </a:prstGeom>
+          <a:noFill/>
+          <a:ln w="25400">
+            <a:solidFill>
+              <a:srgbClr val="5B6573"/>
+            </a:solidFill>
+            <a:prstDash val="solid"/>
+            <a:tailEnd type="triangle"/>
+          </a:ln>
+        </p:spPr>
+      </p:sp>
+      <p:sp>
+        <p:nvSpPr>
+          <p:cNvPr id="11" name="Text 9"/>
+          <p:cNvSpPr/>
+          <p:nvPr/>
+        </p:nvSpPr>
+        <p:spPr>
+          <a:xfrm>
+            <a:off x="9029700" y="2834640"/>
+            <a:ext cx="2743200" cy="1097280"/>
+          </a:xfrm>
+          <a:prstGeom prst="diamond">
+            <a:avLst>
+              <a:gd name="adj" fmla="val 8333"/>
+            </a:avLst>
+          </a:prstGeom>
+          <a:solidFill>
+            <a:srgbClr val="FFFFFF"/>
+          </a:solidFill>
+          <a:ln w="19050">
+            <a:solidFill>
+              <a:srgbClr val="1F2A37"/>
+            </a:solidFill>
+          </a:ln>
+        </p:spPr>
+        <p:txBody>
+          <a:bodyPr wrap="square" lIns="0" tIns="0" rIns="0" bIns="0" rtlCol="0" anchor="ctr"/>
+          <a:lstStyle/>
+          <a:p>
+            <a:pPr algn="ctr" indent="0" marL="0">
+              <a:lnSpc>
+                <a:spcPct val="110000"/>
+              </a:lnSpc>
+              <a:buNone/>
+            </a:pPr>
+            <a:r>
+              <a:rPr lang="en-US" sz="1600" b="1" dirty="0">
+                <a:solidFill>
+                  <a:srgbClr val="1F2A37"/>
+                </a:solidFill>
+                <a:latin typeface="Microsoft YaHei" pitchFamily="34" charset="0"/>
+                <a:ea typeface="Microsoft YaHei" pitchFamily="34" charset="-122"/>
+                <a:cs typeface="Microsoft YaHei" pitchFamily="34" charset="-120"/>
+              </a:rPr>
+              <a:t>条件还成立？</a:t>
+            </a:r>
+            <a:endParaRPr lang="en-US" sz="1600" dirty="0"/>
+          </a:p>
+        </p:txBody>
+      </p:sp>
+      <p:sp>
+        <p:nvSpPr>
+          <p:cNvPr id="12" name="Shape 10"/>
+          <p:cNvSpPr/>
+          <p:nvPr/>
+        </p:nvSpPr>
+        <p:spPr>
+          <a:xfrm flipH="1">
+            <a:off x="7566660" y="3383280"/>
+            <a:ext cx="1463040" cy="0"/>
+          </a:xfrm>
+          <a:prstGeom prst="line">
+            <a:avLst/>
+          </a:prstGeom>
+          <a:noFill/>
+          <a:ln w="25400">
+            <a:solidFill>
+              <a:srgbClr val="2E7D4F"/>
+            </a:solidFill>
+            <a:prstDash val="solid"/>
+          </a:ln>
+        </p:spPr>
+      </p:sp>
+      <p:sp>
+        <p:nvSpPr>
+          <p:cNvPr id="13" name="Shape 11"/>
+          <p:cNvSpPr/>
+          <p:nvPr/>
+        </p:nvSpPr>
+        <p:spPr>
+          <a:xfrm flipV="1">
+            <a:off x="7566660" y="2423160"/>
+            <a:ext cx="0" cy="960120"/>
+          </a:xfrm>
+          <a:prstGeom prst="line">
+            <a:avLst/>
+          </a:prstGeom>
+          <a:noFill/>
+          <a:ln w="25400">
+            <a:solidFill>
+              <a:srgbClr val="2E7D4F"/>
+            </a:solidFill>
+            <a:prstDash val="solid"/>
+            <a:tailEnd type="triangle"/>
+          </a:ln>
+        </p:spPr>
+      </p:sp>
+      <p:sp>
+        <p:nvSpPr>
+          <p:cNvPr id="14" name="Text 12"/>
+          <p:cNvSpPr txBox="1"/>
+          <p:nvPr/>
+        </p:nvSpPr>
+        <p:spPr>
+          <a:xfrm>
+            <a:off x="7703820" y="2999232"/>
+            <a:ext cx="2011680" cy="320040"/>
+          </a:xfrm>
+          <a:prstGeom prst="rect">
+            <a:avLst/>
+          </a:prstGeom>
+          <a:noFill/>
+          <a:ln/>
+        </p:spPr>
+        <p:txBody>
+          <a:bodyPr wrap="square" lIns="0" tIns="0" rIns="0" bIns="0" rtlCol="0" anchor="t"/>
+          <a:lstStyle/>
+          <a:p>
+            <a:pPr indent="0" marL="0">
+              <a:buNone/>
+            </a:pPr>
+            <a:r>
+              <a:rPr lang="en-US" sz="1500" b="1" dirty="0">
+                <a:solidFill>
+                  <a:srgbClr val="2E7D4F"/>
+                </a:solidFill>
+                <a:latin typeface="Microsoft YaHei" pitchFamily="34" charset="0"/>
+                <a:ea typeface="Microsoft YaHei" pitchFamily="34" charset="-122"/>
+                <a:cs typeface="Microsoft YaHei" pitchFamily="34" charset="-120"/>
+              </a:rPr>
+              <a:t>成立：继续用</a:t>
+            </a:r>
+            <a:endParaRPr lang="en-US" sz="1500" dirty="0"/>
+          </a:p>
+        </p:txBody>
+      </p:sp>
+      <p:sp>
+        <p:nvSpPr>
+          <p:cNvPr id="15" name="Shape 13"/>
+          <p:cNvSpPr/>
+          <p:nvPr/>
+        </p:nvSpPr>
+        <p:spPr>
+          <a:xfrm>
+            <a:off x="10401300" y="3931920"/>
+            <a:ext cx="0" cy="457200"/>
+          </a:xfrm>
+          <a:prstGeom prst="line">
+            <a:avLst/>
+          </a:prstGeom>
+          <a:noFill/>
+          <a:ln w="25400">
+            <a:solidFill>
+              <a:srgbClr val="B5392A"/>
+            </a:solidFill>
+            <a:prstDash val="solid"/>
+            <a:tailEnd type="triangle"/>
+          </a:ln>
+        </p:spPr>
+      </p:sp>
+      <p:sp>
+        <p:nvSpPr>
+          <p:cNvPr id="16" name="Text 14"/>
+          <p:cNvSpPr txBox="1"/>
+          <p:nvPr/>
+        </p:nvSpPr>
+        <p:spPr>
+          <a:xfrm>
+            <a:off x="8462772" y="3950208"/>
+            <a:ext cx="1828800" cy="320040"/>
+          </a:xfrm>
+          <a:prstGeom prst="rect">
+            <a:avLst/>
+          </a:prstGeom>
+          <a:noFill/>
+          <a:ln/>
+        </p:spPr>
+        <p:txBody>
+          <a:bodyPr wrap="square" lIns="0" tIns="0" rIns="0" bIns="0" rtlCol="0" anchor="t"/>
+          <a:lstStyle/>
+          <a:p>
+            <a:pPr algn="r" indent="0" marL="0">
+              <a:buNone/>
+            </a:pPr>
+            <a:r>
+              <a:rPr lang="en-US" sz="1500" b="1" dirty="0">
+                <a:solidFill>
+                  <a:srgbClr val="B5392A"/>
+                </a:solidFill>
+                <a:latin typeface="Microsoft YaHei" pitchFamily="34" charset="0"/>
+                <a:ea typeface="Microsoft YaHei" pitchFamily="34" charset="-122"/>
+                <a:cs typeface="Microsoft YaHei" pitchFamily="34" charset="-120"/>
+              </a:rPr>
+              <a:t>不成立：先停用</a:t>
+            </a:r>
+            <a:endParaRPr lang="en-US" sz="1500" dirty="0"/>
+          </a:p>
+        </p:txBody>
+      </p:sp>
+      <p:sp>
+        <p:nvSpPr>
+          <p:cNvPr id="17" name="Text 15"/>
+          <p:cNvSpPr/>
+          <p:nvPr/>
+        </p:nvSpPr>
+        <p:spPr>
+          <a:xfrm>
+            <a:off x="9029700" y="4389120"/>
+            <a:ext cx="2743200" cy="1097280"/>
+          </a:xfrm>
+          <a:prstGeom prst="diamond">
+            <a:avLst>
+              <a:gd name="adj" fmla="val 8333"/>
+            </a:avLst>
+          </a:prstGeom>
+          <a:solidFill>
+            <a:srgbClr val="FFFFFF"/>
+          </a:solidFill>
+          <a:ln w="19050">
+            <a:solidFill>
+              <a:srgbClr val="1F2A37"/>
+            </a:solidFill>
+          </a:ln>
+        </p:spPr>
+        <p:txBody>
+          <a:bodyPr wrap="square" lIns="0" tIns="0" rIns="0" bIns="0" rtlCol="0" anchor="ctr"/>
+          <a:lstStyle/>
+          <a:p>
+            <a:pPr algn="ctr" indent="0" marL="0">
+              <a:lnSpc>
+                <a:spcPct val="110000"/>
+              </a:lnSpc>
+              <a:buNone/>
+            </a:pPr>
+            <a:r>
+              <a:rPr lang="en-US" sz="1600" b="1" dirty="0">
+                <a:solidFill>
+                  <a:srgbClr val="1F2A37"/>
+                </a:solidFill>
+                <a:latin typeface="Microsoft YaHei" pitchFamily="34" charset="0"/>
+                <a:ea typeface="Microsoft YaHei" pitchFamily="34" charset="-122"/>
+                <a:cs typeface="Microsoft YaHei" pitchFamily="34" charset="-120"/>
+              </a:rPr>
+              <a:t>有唯一修复？</a:t>
+            </a:r>
+            <a:endParaRPr lang="en-US" sz="1600" dirty="0"/>
+          </a:p>
+        </p:txBody>
+      </p:sp>
+      <p:sp>
+        <p:nvSpPr>
+          <p:cNvPr id="18" name="Shape 16"/>
+          <p:cNvSpPr/>
+          <p:nvPr/>
+        </p:nvSpPr>
+        <p:spPr>
+          <a:xfrm flipH="1">
+            <a:off x="4732020" y="4937760"/>
+            <a:ext cx="4297680" cy="0"/>
+          </a:xfrm>
+          <a:prstGeom prst="line">
+            <a:avLst/>
+          </a:prstGeom>
+          <a:noFill/>
+          <a:ln w="25400">
+            <a:solidFill>
+              <a:srgbClr val="6A58A3"/>
+            </a:solidFill>
+            <a:prstDash val="solid"/>
+          </a:ln>
+        </p:spPr>
+      </p:sp>
+      <p:sp>
+        <p:nvSpPr>
+          <p:cNvPr id="19" name="Shape 17"/>
+          <p:cNvSpPr/>
+          <p:nvPr/>
+        </p:nvSpPr>
+        <p:spPr>
+          <a:xfrm flipV="1">
+            <a:off x="4732020" y="2423160"/>
+            <a:ext cx="0" cy="2514600"/>
+          </a:xfrm>
+          <a:prstGeom prst="line">
+            <a:avLst/>
+          </a:prstGeom>
+          <a:noFill/>
+          <a:ln w="25400">
+            <a:solidFill>
+              <a:srgbClr val="6A58A3"/>
+            </a:solidFill>
+            <a:prstDash val="solid"/>
+            <a:tailEnd type="triangle"/>
+          </a:ln>
+        </p:spPr>
+      </p:sp>
+      <p:sp>
+        <p:nvSpPr>
+          <p:cNvPr id="20" name="Text 18"/>
+          <p:cNvSpPr txBox="1"/>
+          <p:nvPr/>
+        </p:nvSpPr>
+        <p:spPr>
+          <a:xfrm>
+            <a:off x="4869180" y="4553712"/>
+            <a:ext cx="2194560" cy="320040"/>
+          </a:xfrm>
+          <a:prstGeom prst="rect">
+            <a:avLst/>
+          </a:prstGeom>
+          <a:noFill/>
+          <a:ln/>
+        </p:spPr>
+        <p:txBody>
+          <a:bodyPr wrap="square" lIns="0" tIns="0" rIns="0" bIns="0" rtlCol="0" anchor="t"/>
+          <a:lstStyle/>
+          <a:p>
+            <a:pPr indent="0" marL="0">
+              <a:buNone/>
+            </a:pPr>
+            <a:r>
+              <a:rPr lang="en-US" sz="1500" b="1" dirty="0">
+                <a:solidFill>
+                  <a:srgbClr val="6A58A3"/>
+                </a:solidFill>
+                <a:latin typeface="Microsoft YaHei" pitchFamily="34" charset="0"/>
+                <a:ea typeface="Microsoft YaHei" pitchFamily="34" charset="-122"/>
+                <a:cs typeface="Microsoft YaHei" pitchFamily="34" charset="-120"/>
+              </a:rPr>
+              <a:t>有：发布新版本</a:t>
+            </a:r>
+            <a:endParaRPr lang="en-US" sz="1500" dirty="0"/>
+          </a:p>
+        </p:txBody>
+      </p:sp>
+      <p:sp>
+        <p:nvSpPr>
+          <p:cNvPr id="21" name="Shape 19"/>
+          <p:cNvSpPr/>
+          <p:nvPr/>
+        </p:nvSpPr>
+        <p:spPr>
+          <a:xfrm>
+            <a:off x="10401300" y="5486400"/>
+            <a:ext cx="0" cy="502920"/>
+          </a:xfrm>
+          <a:prstGeom prst="line">
+            <a:avLst/>
+          </a:prstGeom>
+          <a:noFill/>
+          <a:ln w="25400">
+            <a:solidFill>
+              <a:srgbClr val="B5392A"/>
+            </a:solidFill>
+            <a:prstDash val="solid"/>
+          </a:ln>
+        </p:spPr>
+      </p:sp>
+      <p:sp>
+        <p:nvSpPr>
+          <p:cNvPr id="22" name="Shape 20"/>
+          <p:cNvSpPr/>
+          <p:nvPr/>
+        </p:nvSpPr>
+        <p:spPr>
+          <a:xfrm flipH="1">
+            <a:off x="1897380" y="5989320"/>
+            <a:ext cx="8503920" cy="0"/>
+          </a:xfrm>
+          <a:prstGeom prst="line">
+            <a:avLst/>
+          </a:prstGeom>
+          <a:noFill/>
+          <a:ln w="25400">
+            <a:solidFill>
+              <a:srgbClr val="B5392A"/>
+            </a:solidFill>
+            <a:prstDash val="solid"/>
+          </a:ln>
+        </p:spPr>
+      </p:sp>
+      <p:sp>
+        <p:nvSpPr>
+          <p:cNvPr id="23" name="Shape 21"/>
+          <p:cNvSpPr/>
+          <p:nvPr/>
+        </p:nvSpPr>
+        <p:spPr>
+          <a:xfrm flipV="1">
+            <a:off x="1897380" y="2423160"/>
+            <a:ext cx="0" cy="3566160"/>
+          </a:xfrm>
+          <a:prstGeom prst="line">
+            <a:avLst/>
+          </a:prstGeom>
+          <a:noFill/>
+          <a:ln w="25400">
+            <a:solidFill>
+              <a:srgbClr val="B5392A"/>
+            </a:solidFill>
+            <a:prstDash val="solid"/>
+            <a:tailEnd type="triangle"/>
+          </a:ln>
+        </p:spPr>
+      </p:sp>
+      <p:sp>
+        <p:nvSpPr>
+          <p:cNvPr id="24" name="Text 22"/>
+          <p:cNvSpPr txBox="1"/>
+          <p:nvPr/>
+        </p:nvSpPr>
+        <p:spPr>
+          <a:xfrm>
+            <a:off x="2034540" y="5577840"/>
+            <a:ext cx="3657600" cy="320040"/>
+          </a:xfrm>
+          <a:prstGeom prst="rect">
+            <a:avLst/>
+          </a:prstGeom>
+          <a:noFill/>
+          <a:ln/>
+        </p:spPr>
+        <p:txBody>
+          <a:bodyPr wrap="square" lIns="0" tIns="0" rIns="0" bIns="0" rtlCol="0" anchor="t"/>
+          <a:lstStyle/>
+          <a:p>
+            <a:pPr indent="0" marL="0">
+              <a:buNone/>
+            </a:pPr>
+            <a:r>
+              <a:rPr lang="en-US" sz="1500" b="1" dirty="0">
+                <a:solidFill>
+                  <a:srgbClr val="B5392A"/>
+                </a:solidFill>
+                <a:latin typeface="Microsoft YaHei" pitchFamily="34" charset="0"/>
+                <a:ea typeface="Microsoft YaHei" pitchFamily="34" charset="-122"/>
+                <a:cs typeface="Microsoft YaHei" pitchFamily="34" charset="-120"/>
+              </a:rPr>
+              <a:t>没有：保持停用，等重新学习</a:t>
+            </a:r>
+            <a:endParaRPr lang="en-US" sz="1500" dirty="0"/>
+          </a:p>
+        </p:txBody>
+      </p:sp>
+      <p:sp>
+        <p:nvSpPr>
+          <p:cNvPr id="25" name="Slide Number Placeholder 0"/>
+          <p:cNvSpPr>
+            <a:spLocks noGrp="1"/>
+          </p:cNvSpPr>
+          <p:nvPr>
+            <p:ph type="sldNum" sz="quarter" idx="4294967295"/>
+          </p:nvPr>
+        </p:nvSpPr>
+        <p:spPr>
+          <a:xfrm>
+            <a:off x="11185855" y="6400800"/>
+            <a:ext cx="457200" cy="274320"/>
+          </a:xfrm>
+          <a:prstGeom prst="rect">
+            <a:avLst/>
+          </a:prstGeom>
+          <a:extLst>
+            <a:ext uri="{C572A759-6A51-4108-AA02-DFA0A04FC94B}">
+              <ma14:wrappingTextBoxFlag xmlns:ma14="http://schemas.microsoft.com/office/mac/drawingml/2011/main" val="0"/>
+            </a:ext>
+          </a:extLst>
+        </p:spPr>
+        <p:txBody>
+          <a:bodyPr/>
+          <a:lstStyle>
+            <a:lvl1pPr>
+              <a:defRPr sz="1000">
+                <a:solidFill>
+                  <a:srgbClr val="5B6573"/>
+                </a:solidFill>
+                <a:latin typeface="Microsoft YaHei"/>
+                <a:ea typeface="Microsoft YaHei"/>
+                <a:cs typeface="Microsoft YaHei"/>
+              </a:defRPr>
+            </a:lvl1pPr>
+          </a:lstStyle>
+          <a:p>
+            <a:pPr algn="r"/>
+            <a:fld id="{F7021451-1387-4CA6-816F-3879F97B5CBC}" type="slidenum">
+              <a:rPr b="0" lang="en-US"/>
+              <a:t>8</a:t>
+            </a:fld>
+            <a:endParaRPr lang="en-US"/>
+          </a:p>
+        </p:txBody>
+      </p:sp>
+    </p:spTree>
+  </p:cSld>
+  <p:clrMapOvr>
+    <a:masterClrMapping/>
+  </p:clrMapOvr>
+</p:sld>
+</file>
+
+<file path=ppt/slides/slide9.xml><?xml version="1.0" encoding="utf-8"?>
+<p:sld xmlns:a="http://schemas.openxmlformats.org/drawingml/2006/main" xmlns:r="http://schemas.openxmlformats.org/officeDocument/2006/relationships" xmlns:p="http://schemas.openxmlformats.org/presentationml/2006/main">
+  <p:cSld name="Slide 9">
+    <p:spTree>
+      <p:nvGrpSpPr>
+        <p:cNvPr id="1" name=""/>
+        <p:cNvGrpSpPr/>
+        <p:nvPr/>
+      </p:nvGrpSpPr>
+      <p:grpSpPr>
+        <a:xfrm>
+          <a:off x="0" y="0"/>
+          <a:ext cx="0" cy="0"/>
+          <a:chOff x="0" y="0"/>
+          <a:chExt cx="0" cy="0"/>
+        </a:xfrm>
+      </p:grpSpPr>
+      <p:sp>
+        <p:nvSpPr>
+          <p:cNvPr id="2" name="Text 0"/>
+          <p:cNvSpPr/>
+          <p:nvPr>
+            <p:ph idx="100" type="title" hasCustomPrompt="1"/>
+          </p:nvPr>
+        </p:nvSpPr>
+        <p:spPr>
+          <a:xfrm>
+            <a:off x="548640" y="320040"/>
+            <a:ext cx="11094415" cy="731520"/>
+          </a:xfrm>
+          <a:prstGeom prst="rect">
+            <a:avLst/>
+          </a:prstGeom>
+          <a:noFill/>
+          <a:ln/>
+        </p:spPr>
+        <p:txBody>
+          <a:bodyPr wrap="square" lIns="0" tIns="0" rIns="0" bIns="0" rtlCol="0" anchor="ctr"/>
+          <a:lstStyle/>
+          <a:p>
+            <a:pPr algn="l" indent="0" marL="0">
+              <a:buNone/>
+            </a:pPr>
+            <a:r>
+              <a:rPr lang="en-US" sz="3000" b="1" dirty="0">
+                <a:solidFill>
+                  <a:srgbClr val="1F2A37"/>
+                </a:solidFill>
+                <a:latin typeface="Microsoft YaHei" pitchFamily="34" charset="0"/>
+                <a:ea typeface="Microsoft YaHei" pitchFamily="34" charset="-122"/>
+                <a:cs typeface="Microsoft YaHei" pitchFamily="34" charset="-120"/>
+              </a:rPr>
+              <a:t>修复的例子：退货表多了“申请”行</a:t>
+            </a:r>
+            <a:endParaRPr lang="en-US" sz="3000" dirty="0"/>
+          </a:p>
+        </p:txBody>
+      </p:sp>
+      <p:sp>
+        <p:nvSpPr>
+          <p:cNvPr id="3" name="Text 1"/>
+          <p:cNvSpPr txBox="1"/>
+          <p:nvPr/>
+        </p:nvSpPr>
+        <p:spPr>
+          <a:xfrm>
+            <a:off x="548640" y="1280160"/>
+            <a:ext cx="4572000" cy="365760"/>
+          </a:xfrm>
+          <a:prstGeom prst="rect">
+            <a:avLst/>
+          </a:prstGeom>
+          <a:noFill/>
+          <a:ln/>
+        </p:spPr>
+        <p:txBody>
+          <a:bodyPr wrap="square" lIns="0" tIns="0" rIns="0" bIns="0" rtlCol="0" anchor="t"/>
+          <a:lstStyle/>
+          <a:p>
+            <a:pPr indent="0" marL="0">
+              <a:buNone/>
+            </a:pPr>
+            <a:r>
+              <a:rPr lang="en-US" sz="1600" b="1" dirty="0">
+                <a:solidFill>
+                  <a:srgbClr val="1F2A37"/>
+                </a:solidFill>
+                <a:latin typeface="Microsoft YaHei" pitchFamily="34" charset="0"/>
+                <a:ea typeface="Microsoft YaHei" pitchFamily="34" charset="-122"/>
+                <a:cs typeface="Microsoft YaHei" pitchFamily="34" charset="-120"/>
+              </a:rPr>
+              <a:t>store_returns（示意）</a:t>
+            </a:r>
+            <a:endParaRPr lang="en-US" sz="1600" dirty="0"/>
+          </a:p>
+        </p:txBody>
+      </p:sp>
+      <p:graphicFrame>
+        <p:nvGraphicFramePr>
+          <p:cNvPr id="10" name="Table 0"/>
+          <p:cNvGraphicFramePr>
+            <a:graphicFrameLocks noGrp="1"/>
+          </p:cNvGraphicFramePr>
+          <p:nvPr>
+            <p:extLst>
+              <p:ext uri="{D42A27DB-BD31-4B8C-83A1-F6EECF244321}">
+                <p14:modId xmlns:p14="http://schemas.microsoft.com/office/powerpoint/2010/main" val="1579011935"/>
+              </p:ext>
+            </p:extLst>
+          </p:nvPr>
+        </p:nvGraphicFramePr>
+        <p:xfrm>
+          <a:off x="548640" y="1691640"/>
+          <a:ext cx="4206240" cy="914400"/>
+        </p:xfrm>
+        <a:graphic>
+          <a:graphicData uri="http://schemas.openxmlformats.org/drawingml/2006/table">
+            <a:tbl>
+              <a:tblPr/>
+              <a:tblGrid>
+                <a:gridCol w="914400"/>
+                <a:gridCol w="822960"/>
+                <a:gridCol w="914400"/>
+                <a:gridCol w="1554480"/>
+              </a:tblGrid>
+              <a:tr h="438912">
+                <a:tc>
+                  <a:txBody>
+                    <a:bodyPr/>
+                    <a:lstStyle/>
+                    <a:p>
+                      <a:pPr algn="ctr" indent="0" marL="0">
+                        <a:buNone/>
+                      </a:pPr>
+                      <a:r>
+                        <a:rPr lang="en-US" sz="1600" b="1" dirty="0">
+                          <a:solidFill>
+                            <a:srgbClr val="1F2A37"/>
+                          </a:solidFill>
+                          <a:latin typeface="Microsoft YaHei" pitchFamily="34" charset="0"/>
+                          <a:ea typeface="Microsoft YaHei" pitchFamily="34" charset="-122"/>
+                          <a:cs typeface="Microsoft YaHei" pitchFamily="34" charset="-120"/>
+                        </a:rPr>
+                        <a:t>小票</a:t>
+                      </a:r>
+                      <a:endParaRPr lang="en-US" sz="1600" dirty="0">
+                        <a:latin typeface="Microsoft YaHei" charset="0"/>
+                        <a:ea typeface="Microsoft YaHei" charset="0"/>
+                        <a:cs typeface="Microsoft YaHei" charset="0"/>
+                      </a:endParaRPr>
+                    </a:p>
+                  </a:txBody>
+                  <a:tcPr marL="91440" marR="91440" marT="45720" marB="45720" anchor="ctr">
+                    <a:lnL w="12700" cap="flat" cmpd="sng" algn="ctr">
+                      <a:solidFill>
+                        <a:srgbClr val="C9D1DB"/>
+                      </a:solidFill>
+                      <a:prstDash val="solid"/>
+                      <a:round/>
+                      <a:headEnd type="none" w="med" len="med"/>
+                      <a:tailEnd type="none" w="med" len="med"/>
+                    </a:lnL>
+                    <a:lnR w="12700" cap="flat" cmpd="sng" algn="ctr">
+                      <a:solidFill>
+                        <a:srgbClr val="C9D1DB"/>
+                      </a:solidFill>
+                      <a:prstDash val="solid"/>
+                      <a:round/>
+                      <a:headEnd type="none" w="med" len="med"/>
+                      <a:tailEnd type="none" w="med" len="med"/>
+                    </a:lnR>
+                    <a:lnT w="12700" cap="flat" cmpd="sng" algn="ctr">
+                      <a:solidFill>
+                        <a:srgbClr val="C9D1DB"/>
+                      </a:solidFill>
+                      <a:prstDash val="solid"/>
+                      <a:round/>
+                      <a:headEnd type="none" w="med" len="med"/>
+                      <a:tailEnd type="none" w="med" len="med"/>
+                    </a:lnT>
+                    <a:lnB w="12700" cap="flat" cmpd="sng" algn="ctr">
+                      <a:solidFill>
+                        <a:srgbClr val="C9D1DB"/>
+                      </a:solidFill>
+                      <a:prstDash val="solid"/>
+                      <a:round/>
+                      <a:headEnd type="none" w="med" len="med"/>
+                      <a:tailEnd type="none" w="med" len="med"/>
+                    </a:lnB>
+                    <a:solidFill>
+                      <a:srgbClr val="F1F3F6"/>
+                    </a:solidFill>
+                  </a:tcPr>
+                </a:tc>
+                <a:tc>
+                  <a:txBody>
+                    <a:bodyPr/>
+                    <a:lstStyle/>
+                    <a:p>
+                      <a:pPr algn="ctr" indent="0" marL="0">
+                        <a:buNone/>
+                      </a:pPr>
+                      <a:r>
+                        <a:rPr lang="en-US" sz="1600" b="1" dirty="0">
+                          <a:solidFill>
+                            <a:srgbClr val="1F2A37"/>
+                          </a:solidFill>
+                          <a:latin typeface="Microsoft YaHei" pitchFamily="34" charset="0"/>
+                          <a:ea typeface="Microsoft YaHei" pitchFamily="34" charset="-122"/>
+                          <a:cs typeface="Microsoft YaHei" pitchFamily="34" charset="-120"/>
+                        </a:rPr>
+                        <a:t>商品</a:t>
+                      </a:r>
+                      <a:endParaRPr lang="en-US" sz="1600" dirty="0">
+                        <a:latin typeface="Microsoft YaHei" charset="0"/>
+                        <a:ea typeface="Microsoft YaHei" charset="0"/>
+                        <a:cs typeface="Microsoft YaHei" charset="0"/>
+                      </a:endParaRPr>
+                    </a:p>
+                  </a:txBody>
+                  <a:tcPr marL="91440" marR="91440" marT="45720" marB="45720" anchor="ctr">
+                    <a:lnL w="12700" cap="flat" cmpd="sng" algn="ctr">
+                      <a:solidFill>
+                        <a:srgbClr val="C9D1DB"/>
+                      </a:solidFill>
+                      <a:prstDash val="solid"/>
+                      <a:round/>
+                      <a:headEnd type="none" w="med" len="med"/>
+                      <a:tailEnd type="none" w="med" len="med"/>
+                    </a:lnL>
+                    <a:lnR w="12700" cap="flat" cmpd="sng" algn="ctr">
+                      <a:solidFill>
+                        <a:srgbClr val="C9D1DB"/>
+                      </a:solidFill>
+                      <a:prstDash val="solid"/>
+                      <a:round/>
+                      <a:headEnd type="none" w="med" len="med"/>
+                      <a:tailEnd type="none" w="med" len="med"/>
+                    </a:lnR>
+                    <a:lnT w="12700" cap="flat" cmpd="sng" algn="ctr">
+                      <a:solidFill>
+                        <a:srgbClr val="C9D1DB"/>
+                      </a:solidFill>
+                      <a:prstDash val="solid"/>
+                      <a:round/>
+                      <a:headEnd type="none" w="med" len="med"/>
+                      <a:tailEnd type="none" w="med" len="med"/>
+                    </a:lnT>
+                    <a:lnB w="12700" cap="flat" cmpd="sng" algn="ctr">
+                      <a:solidFill>
+                        <a:srgbClr val="C9D1DB"/>
+                      </a:solidFill>
+                      <a:prstDash val="solid"/>
+                      <a:round/>
+                      <a:headEnd type="none" w="med" len="med"/>
+                      <a:tailEnd type="none" w="med" len="med"/>
+                    </a:lnB>
+                    <a:solidFill>
+                      <a:srgbClr val="F1F3F6"/>
+                    </a:solidFill>
+                  </a:tcPr>
+                </a:tc>
+                <a:tc>
+                  <a:txBody>
+                    <a:bodyPr/>
+                    <a:lstStyle/>
+                    <a:p>
+                      <a:pPr algn="ctr" indent="0" marL="0">
+                        <a:buNone/>
+                      </a:pPr>
+                      <a:r>
+                        <a:rPr lang="en-US" sz="1600" b="1" dirty="0">
+                          <a:solidFill>
+                            <a:srgbClr val="1F2A37"/>
+                          </a:solidFill>
+                          <a:latin typeface="Microsoft YaHei" pitchFamily="34" charset="0"/>
+                          <a:ea typeface="Microsoft YaHei" pitchFamily="34" charset="-122"/>
+                          <a:cs typeface="Microsoft YaHei" pitchFamily="34" charset="-120"/>
+                        </a:rPr>
+                        <a:t>金额</a:t>
+                      </a:r>
+                      <a:endParaRPr lang="en-US" sz="1600" dirty="0">
+                        <a:latin typeface="Microsoft YaHei" charset="0"/>
+                        <a:ea typeface="Microsoft YaHei" charset="0"/>
+                        <a:cs typeface="Microsoft YaHei" charset="0"/>
+                      </a:endParaRPr>
+                    </a:p>
+                  </a:txBody>
+                  <a:tcPr marL="91440" marR="91440" marT="45720" marB="45720" anchor="ctr">
+                    <a:lnL w="12700" cap="flat" cmpd="sng" algn="ctr">
+                      <a:solidFill>
+                        <a:srgbClr val="C9D1DB"/>
+                      </a:solidFill>
+                      <a:prstDash val="solid"/>
+                      <a:round/>
+                      <a:headEnd type="none" w="med" len="med"/>
+                      <a:tailEnd type="none" w="med" len="med"/>
+                    </a:lnL>
+                    <a:lnR w="12700" cap="flat" cmpd="sng" algn="ctr">
+                      <a:solidFill>
+                        <a:srgbClr val="C9D1DB"/>
+                      </a:solidFill>
+                      <a:prstDash val="solid"/>
+                      <a:round/>
+                      <a:headEnd type="none" w="med" len="med"/>
+                      <a:tailEnd type="none" w="med" len="med"/>
+                    </a:lnR>
+                    <a:lnT w="12700" cap="flat" cmpd="sng" algn="ctr">
+                      <a:solidFill>
+                        <a:srgbClr val="C9D1DB"/>
+                      </a:solidFill>
+                      <a:prstDash val="solid"/>
+                      <a:round/>
+                      <a:headEnd type="none" w="med" len="med"/>
+                      <a:tailEnd type="none" w="med" len="med"/>
+                    </a:lnT>
+                    <a:lnB w="12700" cap="flat" cmpd="sng" algn="ctr">
+                      <a:solidFill>
+                        <a:srgbClr val="C9D1DB"/>
+                      </a:solidFill>
+                      <a:prstDash val="solid"/>
+                      <a:round/>
+                      <a:headEnd type="none" w="med" len="med"/>
+                      <a:tailEnd type="none" w="med" len="med"/>
+                    </a:lnB>
+                    <a:solidFill>
+                      <a:srgbClr val="F1F3F6"/>
+                    </a:solidFill>
+                  </a:tcPr>
+                </a:tc>
+                <a:tc>
+                  <a:txBody>
+                    <a:bodyPr/>
+                    <a:lstStyle/>
+                    <a:p>
+                      <a:pPr algn="ctr" indent="0" marL="0">
+                        <a:buNone/>
+                      </a:pPr>
+                      <a:r>
+                        <a:rPr lang="en-US" sz="1600" b="1" dirty="0">
+                          <a:solidFill>
+                            <a:srgbClr val="1F2A37"/>
+                          </a:solidFill>
+                          <a:latin typeface="Microsoft YaHei" pitchFamily="34" charset="0"/>
+                          <a:ea typeface="Microsoft YaHei" pitchFamily="34" charset="-122"/>
+                          <a:cs typeface="Microsoft YaHei" pitchFamily="34" charset="-120"/>
+                        </a:rPr>
+                        <a:t>状态</a:t>
+                      </a:r>
+                      <a:endParaRPr lang="en-US" sz="1600" dirty="0">
+                        <a:latin typeface="Microsoft YaHei" charset="0"/>
+                        <a:ea typeface="Microsoft YaHei" charset="0"/>
+                        <a:cs typeface="Microsoft YaHei" charset="0"/>
+                      </a:endParaRPr>
+                    </a:p>
+                  </a:txBody>
+                  <a:tcPr marL="91440" marR="91440" marT="45720" marB="45720" anchor="ctr">
+                    <a:lnL w="12700" cap="flat" cmpd="sng" algn="ctr">
+                      <a:solidFill>
+                        <a:srgbClr val="C9D1DB"/>
+                      </a:solidFill>
+                      <a:prstDash val="solid"/>
+                      <a:round/>
+                      <a:headEnd type="none" w="med" len="med"/>
+                      <a:tailEnd type="none" w="med" len="med"/>
+                    </a:lnL>
+                    <a:lnR w="12700" cap="flat" cmpd="sng" algn="ctr">
+                      <a:solidFill>
+                        <a:srgbClr val="C9D1DB"/>
+                      </a:solidFill>
+                      <a:prstDash val="solid"/>
+                      <a:round/>
+                      <a:headEnd type="none" w="med" len="med"/>
+                      <a:tailEnd type="none" w="med" len="med"/>
+                    </a:lnR>
+                    <a:lnT w="12700" cap="flat" cmpd="sng" algn="ctr">
+                      <a:solidFill>
+                        <a:srgbClr val="C9D1DB"/>
+                      </a:solidFill>
+                      <a:prstDash val="solid"/>
+                      <a:round/>
+                      <a:headEnd type="none" w="med" len="med"/>
+                      <a:tailEnd type="none" w="med" len="med"/>
+                    </a:lnT>
+                    <a:lnB w="12700" cap="flat" cmpd="sng" algn="ctr">
+                      <a:solidFill>
+                        <a:srgbClr val="C9D1DB"/>
+                      </a:solidFill>
+                      <a:prstDash val="solid"/>
+                      <a:round/>
+                      <a:headEnd type="none" w="med" len="med"/>
+                      <a:tailEnd type="none" w="med" len="med"/>
+                    </a:lnB>
+                    <a:solidFill>
+                      <a:srgbClr val="F1F3F6"/>
+                    </a:solidFill>
+                  </a:tcPr>
+                </a:tc>
+              </a:tr>
+              <a:tr h="438912">
+                <a:tc>
+                  <a:txBody>
+                    <a:bodyPr/>
+                    <a:lstStyle/>
+                    <a:p>
+                      <a:pPr algn="ctr" indent="0" marL="0">
+                        <a:buNone/>
+                      </a:pPr>
+                      <a:r>
+                        <a:rPr lang="en-US" sz="1600" dirty="0">
+                          <a:solidFill>
+                            <a:srgbClr val="1F2A37"/>
+                          </a:solidFill>
+                          <a:latin typeface="Microsoft YaHei" pitchFamily="34" charset="0"/>
+                          <a:ea typeface="Microsoft YaHei" pitchFamily="34" charset="-122"/>
+                          <a:cs typeface="Microsoft YaHei" pitchFamily="34" charset="-120"/>
+                        </a:rPr>
+                        <a:t>1001</a:t>
+                      </a:r>
+                      <a:endParaRPr lang="en-US" sz="1600" dirty="0">
+                        <a:latin typeface="Microsoft YaHei" charset="0"/>
+                        <a:ea typeface="Microsoft YaHei" charset="0"/>
+                        <a:cs typeface="Microsoft YaHei" charset="0"/>
+                      </a:endParaRPr>
+                    </a:p>
+                  </a:txBody>
+                  <a:tcPr marL="91440" marR="91440" marT="45720" marB="45720" anchor="ctr">
+                    <a:lnL w="12700" cap="flat" cmpd="sng" algn="ctr">
+                      <a:solidFill>
+                        <a:srgbClr val="C9D1DB"/>
+                      </a:solidFill>
+                      <a:prstDash val="solid"/>
+                      <a:round/>
+                      <a:headEnd type="none" w="med" len="med"/>
+                      <a:tailEnd type="none" w="med" len="med"/>
+                    </a:lnL>
+                    <a:lnR w="12700" cap="flat" cmpd="sng" algn="ctr">
+                      <a:solidFill>
+                        <a:srgbClr val="C9D1DB"/>
+                      </a:solidFill>
+                      <a:prstDash val="solid"/>
+                      <a:round/>
+                      <a:headEnd type="none" w="med" len="med"/>
+                      <a:tailEnd type="none" w="med" len="med"/>
+                    </a:lnR>
+                    <a:lnT w="12700" cap="flat" cmpd="sng" algn="ctr">
+                      <a:solidFill>
+                        <a:srgbClr val="C9D1DB"/>
+                      </a:solidFill>
+                      <a:prstDash val="solid"/>
+                      <a:round/>
+                      <a:headEnd type="none" w="med" len="med"/>
+                      <a:tailEnd type="none" w="med" len="med"/>
+                    </a:lnT>
+                    <a:lnB w="12700" cap="flat" cmpd="sng" algn="ctr">
+                      <a:solidFill>
+                        <a:srgbClr val="C9D1DB"/>
+                      </a:solidFill>
+                      <a:prstDash val="solid"/>
+                      <a:round/>
+                      <a:headEnd type="none" w="med" len="med"/>
+                      <a:tailEnd type="none" w="med" len="med"/>
+                    </a:lnB>
+                  </a:tcPr>
+                </a:tc>
+                <a:tc>
+                  <a:txBody>
+                    <a:bodyPr/>
+                    <a:lstStyle/>
+                    <a:p>
+                      <a:pPr algn="ctr" indent="0" marL="0">
+                        <a:buNone/>
+                      </a:pPr>
+                      <a:r>
+                        <a:rPr lang="en-US" sz="1600" dirty="0">
+                          <a:solidFill>
+                            <a:srgbClr val="1F2A37"/>
+                          </a:solidFill>
+                          <a:latin typeface="Microsoft YaHei" pitchFamily="34" charset="0"/>
+                          <a:ea typeface="Microsoft YaHei" pitchFamily="34" charset="-122"/>
+                          <a:cs typeface="Microsoft YaHei" pitchFamily="34" charset="-120"/>
+                        </a:rPr>
+                        <a:t>7</a:t>
+                      </a:r>
+                      <a:endParaRPr lang="en-US" sz="1600" dirty="0">
+                        <a:latin typeface="Microsoft YaHei" charset="0"/>
+                        <a:ea typeface="Microsoft YaHei" charset="0"/>
+                        <a:cs typeface="Microsoft YaHei" charset="0"/>
+                      </a:endParaRPr>
+                    </a:p>
+                  </a:txBody>
+                  <a:tcPr marL="91440" marR="91440" marT="45720" marB="45720" anchor="ctr">
+                    <a:lnL w="12700" cap="flat" cmpd="sng" algn="ctr">
+                      <a:solidFill>
+                        <a:srgbClr val="C9D1DB"/>
+                      </a:solidFill>
+                      <a:prstDash val="solid"/>
+                      <a:round/>
+                      <a:headEnd type="none" w="med" len="med"/>
+                      <a:tailEnd type="none" w="med" len="med"/>
+                    </a:lnL>
+                    <a:lnR w="12700" cap="flat" cmpd="sng" algn="ctr">
+                      <a:solidFill>
+                        <a:srgbClr val="C9D1DB"/>
+                      </a:solidFill>
+                      <a:prstDash val="solid"/>
+                      <a:round/>
+                      <a:headEnd type="none" w="med" len="med"/>
+                      <a:tailEnd type="none" w="med" len="med"/>
+                    </a:lnR>
+                    <a:lnT w="12700" cap="flat" cmpd="sng" algn="ctr">
+                      <a:solidFill>
+                        <a:srgbClr val="C9D1DB"/>
+                      </a:solidFill>
+                      <a:prstDash val="solid"/>
+                      <a:round/>
+                      <a:headEnd type="none" w="med" len="med"/>
+                      <a:tailEnd type="none" w="med" len="med"/>
+                    </a:lnT>
+                    <a:lnB w="12700" cap="flat" cmpd="sng" algn="ctr">
+                      <a:solidFill>
+                        <a:srgbClr val="C9D1DB"/>
+                      </a:solidFill>
+                      <a:prstDash val="solid"/>
+                      <a:round/>
+                      <a:headEnd type="none" w="med" len="med"/>
+                      <a:tailEnd type="none" w="med" len="med"/>
+                    </a:lnB>
+                  </a:tcPr>
+                </a:tc>
+                <a:tc>
+                  <a:txBody>
+                    <a:bodyPr/>
+                    <a:lstStyle/>
+                    <a:p>
+                      <a:pPr algn="ctr" indent="0" marL="0">
+                        <a:buNone/>
+                      </a:pPr>
+                      <a:r>
+                        <a:rPr lang="en-US" sz="1600" dirty="0">
+                          <a:solidFill>
+                            <a:srgbClr val="1F2A37"/>
+                          </a:solidFill>
+                          <a:latin typeface="Microsoft YaHei" pitchFamily="34" charset="0"/>
+                          <a:ea typeface="Microsoft YaHei" pitchFamily="34" charset="-122"/>
+                          <a:cs typeface="Microsoft YaHei" pitchFamily="34" charset="-120"/>
+                        </a:rPr>
+                        <a:t>120</a:t>
+                      </a:r>
+                      <a:endParaRPr lang="en-US" sz="1600" dirty="0">
+                        <a:latin typeface="Microsoft YaHei" charset="0"/>
+                        <a:ea typeface="Microsoft YaHei" charset="0"/>
+                        <a:cs typeface="Microsoft YaHei" charset="0"/>
+                      </a:endParaRPr>
+                    </a:p>
+                  </a:txBody>
+                  <a:tcPr marL="91440" marR="91440" marT="45720" marB="45720" anchor="ctr">
+                    <a:lnL w="12700" cap="flat" cmpd="sng" algn="ctr">
+                      <a:solidFill>
+                        <a:srgbClr val="C9D1DB"/>
+                      </a:solidFill>
+                      <a:prstDash val="solid"/>
+                      <a:round/>
+                      <a:headEnd type="none" w="med" len="med"/>
+                      <a:tailEnd type="none" w="med" len="med"/>
+                    </a:lnL>
+                    <a:lnR w="12700" cap="flat" cmpd="sng" algn="ctr">
+                      <a:solidFill>
+                        <a:srgbClr val="C9D1DB"/>
+                      </a:solidFill>
+                      <a:prstDash val="solid"/>
+                      <a:round/>
+                      <a:headEnd type="none" w="med" len="med"/>
+                      <a:tailEnd type="none" w="med" len="med"/>
+                    </a:lnR>
+                    <a:lnT w="12700" cap="flat" cmpd="sng" algn="ctr">
+                      <a:solidFill>
+                        <a:srgbClr val="C9D1DB"/>
+                      </a:solidFill>
+                      <a:prstDash val="solid"/>
+                      <a:round/>
+                      <a:headEnd type="none" w="med" len="med"/>
+                      <a:tailEnd type="none" w="med" len="med"/>
+                    </a:lnT>
+                    <a:lnB w="12700" cap="flat" cmpd="sng" algn="ctr">
+                      <a:solidFill>
+                        <a:srgbClr val="C9D1DB"/>
+                      </a:solidFill>
+                      <a:prstDash val="solid"/>
+                      <a:round/>
+                      <a:headEnd type="none" w="med" len="med"/>
+                      <a:tailEnd type="none" w="med" len="med"/>
+                    </a:lnB>
+                  </a:tcPr>
+                </a:tc>
+                <a:tc>
+                  <a:txBody>
+                    <a:bodyPr/>
+                    <a:lstStyle/>
+                    <a:p>
+                      <a:pPr algn="ctr" indent="0" marL="0">
+                        <a:buNone/>
+                      </a:pPr>
+                      <a:r>
+                        <a:rPr lang="en-US" sz="1600" dirty="0">
+                          <a:solidFill>
+                            <a:srgbClr val="1F2A37"/>
+                          </a:solidFill>
+                          <a:latin typeface="Microsoft YaHei" pitchFamily="34" charset="0"/>
+                          <a:ea typeface="Microsoft YaHei" pitchFamily="34" charset="-122"/>
+                          <a:cs typeface="Microsoft YaHei" pitchFamily="34" charset="-120"/>
+                        </a:rPr>
+                        <a:t>完成</a:t>
+                      </a:r>
+                      <a:endParaRPr lang="en-US" sz="1600" dirty="0">
+                        <a:latin typeface="Microsoft YaHei" charset="0"/>
+                        <a:ea typeface="Microsoft YaHei" charset="0"/>
+                        <a:cs typeface="Microsoft YaHei" charset="0"/>
+                      </a:endParaRPr>
+                    </a:p>
+                  </a:txBody>
+                  <a:tcPr marL="91440" marR="91440" marT="45720" marB="45720" anchor="ctr">
+                    <a:lnL w="12700" cap="flat" cmpd="sng" algn="ctr">
+                      <a:solidFill>
+                        <a:srgbClr val="C9D1DB"/>
+                      </a:solidFill>
+                      <a:prstDash val="solid"/>
+                      <a:round/>
+                      <a:headEnd type="none" w="med" len="med"/>
+                      <a:tailEnd type="none" w="med" len="med"/>
+                    </a:lnL>
+                    <a:lnR w="12700" cap="flat" cmpd="sng" algn="ctr">
+                      <a:solidFill>
+                        <a:srgbClr val="C9D1DB"/>
+                      </a:solidFill>
+                      <a:prstDash val="solid"/>
+                      <a:round/>
+                      <a:headEnd type="none" w="med" len="med"/>
+                      <a:tailEnd type="none" w="med" len="med"/>
+                    </a:lnR>
+                    <a:lnT w="12700" cap="flat" cmpd="sng" algn="ctr">
+                      <a:solidFill>
+                        <a:srgbClr val="C9D1DB"/>
+                      </a:solidFill>
+                      <a:prstDash val="solid"/>
+                      <a:round/>
+                      <a:headEnd type="none" w="med" len="med"/>
+                      <a:tailEnd type="none" w="med" len="med"/>
+                    </a:lnT>
+                    <a:lnB w="12700" cap="flat" cmpd="sng" algn="ctr">
+                      <a:solidFill>
+                        <a:srgbClr val="C9D1DB"/>
+                      </a:solidFill>
+                      <a:prstDash val="solid"/>
+                      <a:round/>
+                      <a:headEnd type="none" w="med" len="med"/>
+                      <a:tailEnd type="none" w="med" len="med"/>
+                    </a:lnB>
+                  </a:tcPr>
+                </a:tc>
+              </a:tr>
+              <a:tr h="438912">
+                <a:tc>
+                  <a:txBody>
+                    <a:bodyPr/>
+                    <a:lstStyle/>
+                    <a:p>
+                      <a:pPr algn="ctr" indent="0" marL="0">
+                        <a:buNone/>
+                      </a:pPr>
+                      <a:r>
+                        <a:rPr lang="en-US" sz="1600" b="1" dirty="0">
+                          <a:solidFill>
+                            <a:srgbClr val="B5671A"/>
+                          </a:solidFill>
+                          <a:latin typeface="Microsoft YaHei" pitchFamily="34" charset="0"/>
+                          <a:ea typeface="Microsoft YaHei" pitchFamily="34" charset="-122"/>
+                          <a:cs typeface="Microsoft YaHei" pitchFamily="34" charset="-120"/>
+                        </a:rPr>
+                        <a:t>1001</a:t>
+                      </a:r>
+                      <a:endParaRPr lang="en-US" sz="1600" dirty="0">
+                        <a:latin typeface="Microsoft YaHei" charset="0"/>
+                        <a:ea typeface="Microsoft YaHei" charset="0"/>
+                        <a:cs typeface="Microsoft YaHei" charset="0"/>
+                      </a:endParaRPr>
+                    </a:p>
+                  </a:txBody>
+                  <a:tcPr marL="91440" marR="91440" marT="45720" marB="45720" anchor="ctr">
+                    <a:lnL w="12700" cap="flat" cmpd="sng" algn="ctr">
+                      <a:solidFill>
+                        <a:srgbClr val="C9D1DB"/>
+                      </a:solidFill>
+                      <a:prstDash val="solid"/>
+                      <a:round/>
+                      <a:headEnd type="none" w="med" len="med"/>
+                      <a:tailEnd type="none" w="med" len="med"/>
+                    </a:lnL>
+                    <a:lnR w="12700" cap="flat" cmpd="sng" algn="ctr">
+                      <a:solidFill>
+                        <a:srgbClr val="C9D1DB"/>
+                      </a:solidFill>
+                      <a:prstDash val="solid"/>
+                      <a:round/>
+                      <a:headEnd type="none" w="med" len="med"/>
+                      <a:tailEnd type="none" w="med" len="med"/>
+                    </a:lnR>
+                    <a:lnT w="12700" cap="flat" cmpd="sng" algn="ctr">
+                      <a:solidFill>
+                        <a:srgbClr val="C9D1DB"/>
+                      </a:solidFill>
+                      <a:prstDash val="solid"/>
+                      <a:round/>
+                      <a:headEnd type="none" w="med" len="med"/>
+                      <a:tailEnd type="none" w="med" len="med"/>
+                    </a:lnT>
+                    <a:lnB w="12700" cap="flat" cmpd="sng" algn="ctr">
+                      <a:solidFill>
+                        <a:srgbClr val="C9D1DB"/>
+                      </a:solidFill>
+                      <a:prstDash val="solid"/>
+                      <a:round/>
+                      <a:headEnd type="none" w="med" len="med"/>
+                      <a:tailEnd type="none" w="med" len="med"/>
+                    </a:lnB>
+                    <a:solidFill>
+                      <a:srgbClr val="FBF0E2"/>
+                    </a:solidFill>
+                  </a:tcPr>
+                </a:tc>
+                <a:tc>
+                  <a:txBody>
+                    <a:bodyPr/>
+                    <a:lstStyle/>
+                    <a:p>
+                      <a:pPr algn="ctr" indent="0" marL="0">
+                        <a:buNone/>
+                      </a:pPr>
+                      <a:r>
+                        <a:rPr lang="en-US" sz="1600" b="1" dirty="0">
+                          <a:solidFill>
+                            <a:srgbClr val="B5671A"/>
+                          </a:solidFill>
+                          <a:latin typeface="Microsoft YaHei" pitchFamily="34" charset="0"/>
+                          <a:ea typeface="Microsoft YaHei" pitchFamily="34" charset="-122"/>
+                          <a:cs typeface="Microsoft YaHei" pitchFamily="34" charset="-120"/>
+                        </a:rPr>
+                        <a:t>7</a:t>
+                      </a:r>
+                      <a:endParaRPr lang="en-US" sz="1600" dirty="0">
+                        <a:latin typeface="Microsoft YaHei" charset="0"/>
+                        <a:ea typeface="Microsoft YaHei" charset="0"/>
+                        <a:cs typeface="Microsoft YaHei" charset="0"/>
+                      </a:endParaRPr>
+                    </a:p>
+                  </a:txBody>
+                  <a:tcPr marL="91440" marR="91440" marT="45720" marB="45720" anchor="ctr">
+                    <a:lnL w="12700" cap="flat" cmpd="sng" algn="ctr">
+                      <a:solidFill>
+                        <a:srgbClr val="C9D1DB"/>
+                      </a:solidFill>
+                      <a:prstDash val="solid"/>
+                      <a:round/>
+                      <a:headEnd type="none" w="med" len="med"/>
+                      <a:tailEnd type="none" w="med" len="med"/>
+                    </a:lnL>
+                    <a:lnR w="12700" cap="flat" cmpd="sng" algn="ctr">
+                      <a:solidFill>
+                        <a:srgbClr val="C9D1DB"/>
+                      </a:solidFill>
+                      <a:prstDash val="solid"/>
+                      <a:round/>
+                      <a:headEnd type="none" w="med" len="med"/>
+                      <a:tailEnd type="none" w="med" len="med"/>
+                    </a:lnR>
+                    <a:lnT w="12700" cap="flat" cmpd="sng" algn="ctr">
+                      <a:solidFill>
+                        <a:srgbClr val="C9D1DB"/>
+                      </a:solidFill>
+                      <a:prstDash val="solid"/>
+                      <a:round/>
+                      <a:headEnd type="none" w="med" len="med"/>
+                      <a:tailEnd type="none" w="med" len="med"/>
+                    </a:lnT>
+                    <a:lnB w="12700" cap="flat" cmpd="sng" algn="ctr">
+                      <a:solidFill>
+                        <a:srgbClr val="C9D1DB"/>
+                      </a:solidFill>
+                      <a:prstDash val="solid"/>
+                      <a:round/>
+                      <a:headEnd type="none" w="med" len="med"/>
+                      <a:tailEnd type="none" w="med" len="med"/>
+                    </a:lnB>
+                    <a:solidFill>
+                      <a:srgbClr val="FBF0E2"/>
+                    </a:solidFill>
+                  </a:tcPr>
+                </a:tc>
+                <a:tc>
+                  <a:txBody>
+                    <a:bodyPr/>
+                    <a:lstStyle/>
+                    <a:p>
+                      <a:pPr algn="ctr" indent="0" marL="0">
+                        <a:buNone/>
+                      </a:pPr>
+                      <a:r>
+                        <a:rPr lang="en-US" sz="1600" b="1" dirty="0">
+                          <a:solidFill>
+                            <a:srgbClr val="B5671A"/>
+                          </a:solidFill>
+                          <a:latin typeface="Microsoft YaHei" pitchFamily="34" charset="0"/>
+                          <a:ea typeface="Microsoft YaHei" pitchFamily="34" charset="-122"/>
+                          <a:cs typeface="Microsoft YaHei" pitchFamily="34" charset="-120"/>
+                        </a:rPr>
+                        <a:t>120</a:t>
+                      </a:r>
+                      <a:endParaRPr lang="en-US" sz="1600" dirty="0">
+                        <a:latin typeface="Microsoft YaHei" charset="0"/>
+                        <a:ea typeface="Microsoft YaHei" charset="0"/>
+                        <a:cs typeface="Microsoft YaHei" charset="0"/>
+                      </a:endParaRPr>
+                    </a:p>
+                  </a:txBody>
+                  <a:tcPr marL="91440" marR="91440" marT="45720" marB="45720" anchor="ctr">
+                    <a:lnL w="12700" cap="flat" cmpd="sng" algn="ctr">
+                      <a:solidFill>
+                        <a:srgbClr val="C9D1DB"/>
+                      </a:solidFill>
+                      <a:prstDash val="solid"/>
+                      <a:round/>
+                      <a:headEnd type="none" w="med" len="med"/>
+                      <a:tailEnd type="none" w="med" len="med"/>
+                    </a:lnL>
+                    <a:lnR w="12700" cap="flat" cmpd="sng" algn="ctr">
+                      <a:solidFill>
+                        <a:srgbClr val="C9D1DB"/>
+                      </a:solidFill>
+                      <a:prstDash val="solid"/>
+                      <a:round/>
+                      <a:headEnd type="none" w="med" len="med"/>
+                      <a:tailEnd type="none" w="med" len="med"/>
+                    </a:lnR>
+                    <a:lnT w="12700" cap="flat" cmpd="sng" algn="ctr">
+                      <a:solidFill>
+                        <a:srgbClr val="C9D1DB"/>
+                      </a:solidFill>
+                      <a:prstDash val="solid"/>
+                      <a:round/>
+                      <a:headEnd type="none" w="med" len="med"/>
+                      <a:tailEnd type="none" w="med" len="med"/>
+                    </a:lnT>
+                    <a:lnB w="12700" cap="flat" cmpd="sng" algn="ctr">
+                      <a:solidFill>
+                        <a:srgbClr val="C9D1DB"/>
+                      </a:solidFill>
+                      <a:prstDash val="solid"/>
+                      <a:round/>
+                      <a:headEnd type="none" w="med" len="med"/>
+                      <a:tailEnd type="none" w="med" len="med"/>
+                    </a:lnB>
+                    <a:solidFill>
+                      <a:srgbClr val="FBF0E2"/>
+                    </a:solidFill>
+                  </a:tcPr>
+                </a:tc>
+                <a:tc>
+                  <a:txBody>
+                    <a:bodyPr/>
+                    <a:lstStyle/>
+                    <a:p>
+                      <a:pPr algn="ctr" indent="0" marL="0">
+                        <a:buNone/>
+                      </a:pPr>
+                      <a:r>
+                        <a:rPr lang="en-US" sz="1600" b="1" dirty="0">
+                          <a:solidFill>
+                            <a:srgbClr val="B5671A"/>
+                          </a:solidFill>
+                          <a:latin typeface="Microsoft YaHei" pitchFamily="34" charset="0"/>
+                          <a:ea typeface="Microsoft YaHei" pitchFamily="34" charset="-122"/>
+                          <a:cs typeface="Microsoft YaHei" pitchFamily="34" charset="-120"/>
+                        </a:rPr>
+                        <a:t>申请（新）</a:t>
+                      </a:r>
+                      <a:endParaRPr lang="en-US" sz="1600" dirty="0">
+                        <a:latin typeface="Microsoft YaHei" charset="0"/>
+                        <a:ea typeface="Microsoft YaHei" charset="0"/>
+                        <a:cs typeface="Microsoft YaHei" charset="0"/>
+                      </a:endParaRPr>
+                    </a:p>
+                  </a:txBody>
+                  <a:tcPr marL="91440" marR="91440" marT="45720" marB="45720" anchor="ctr">
+                    <a:lnL w="12700" cap="flat" cmpd="sng" algn="ctr">
+                      <a:solidFill>
+                        <a:srgbClr val="C9D1DB"/>
+                      </a:solidFill>
+                      <a:prstDash val="solid"/>
+                      <a:round/>
+                      <a:headEnd type="none" w="med" len="med"/>
+                      <a:tailEnd type="none" w="med" len="med"/>
+                    </a:lnL>
+                    <a:lnR w="12700" cap="flat" cmpd="sng" algn="ctr">
+                      <a:solidFill>
+                        <a:srgbClr val="C9D1DB"/>
+                      </a:solidFill>
+                      <a:prstDash val="solid"/>
+                      <a:round/>
+                      <a:headEnd type="none" w="med" len="med"/>
+                      <a:tailEnd type="none" w="med" len="med"/>
+                    </a:lnR>
+                    <a:lnT w="12700" cap="flat" cmpd="sng" algn="ctr">
+                      <a:solidFill>
+                        <a:srgbClr val="C9D1DB"/>
+                      </a:solidFill>
+                      <a:prstDash val="solid"/>
+                      <a:round/>
+                      <a:headEnd type="none" w="med" len="med"/>
+                      <a:tailEnd type="none" w="med" len="med"/>
+                    </a:lnT>
+                    <a:lnB w="12700" cap="flat" cmpd="sng" algn="ctr">
+                      <a:solidFill>
+                        <a:srgbClr val="C9D1DB"/>
+                      </a:solidFill>
+                      <a:prstDash val="solid"/>
+                      <a:round/>
+                      <a:headEnd type="none" w="med" len="med"/>
+                      <a:tailEnd type="none" w="med" len="med"/>
+                    </a:lnB>
+                    <a:solidFill>
+                      <a:srgbClr val="FBF0E2"/>
+                    </a:solidFill>
+                  </a:tcPr>
+                </a:tc>
+              </a:tr>
+              <a:tr h="438912">
+                <a:tc>
+                  <a:txBody>
+                    <a:bodyPr/>
+                    <a:lstStyle/>
+                    <a:p>
+                      <a:pPr algn="ctr" indent="0" marL="0">
+                        <a:buNone/>
+                      </a:pPr>
+                      <a:r>
+                        <a:rPr lang="en-US" sz="1600" dirty="0">
+                          <a:solidFill>
+                            <a:srgbClr val="1F2A37"/>
+                          </a:solidFill>
+                          <a:latin typeface="Microsoft YaHei" pitchFamily="34" charset="0"/>
+                          <a:ea typeface="Microsoft YaHei" pitchFamily="34" charset="-122"/>
+                          <a:cs typeface="Microsoft YaHei" pitchFamily="34" charset="-120"/>
+                        </a:rPr>
+                        <a:t>1002</a:t>
+                      </a:r>
+                      <a:endParaRPr lang="en-US" sz="1600" dirty="0">
+                        <a:latin typeface="Microsoft YaHei" charset="0"/>
+                        <a:ea typeface="Microsoft YaHei" charset="0"/>
+                        <a:cs typeface="Microsoft YaHei" charset="0"/>
+                      </a:endParaRPr>
+                    </a:p>
+                  </a:txBody>
+                  <a:tcPr marL="91440" marR="91440" marT="45720" marB="45720" anchor="ctr">
+                    <a:lnL w="12700" cap="flat" cmpd="sng" algn="ctr">
+                      <a:solidFill>
+                        <a:srgbClr val="C9D1DB"/>
+                      </a:solidFill>
+                      <a:prstDash val="solid"/>
+                      <a:round/>
+                      <a:headEnd type="none" w="med" len="med"/>
+                      <a:tailEnd type="none" w="med" len="med"/>
+                    </a:lnL>
+                    <a:lnR w="12700" cap="flat" cmpd="sng" algn="ctr">
+                      <a:solidFill>
+                        <a:srgbClr val="C9D1DB"/>
+                      </a:solidFill>
+                      <a:prstDash val="solid"/>
+                      <a:round/>
+                      <a:headEnd type="none" w="med" len="med"/>
+                      <a:tailEnd type="none" w="med" len="med"/>
+                    </a:lnR>
+                    <a:lnT w="12700" cap="flat" cmpd="sng" algn="ctr">
+                      <a:solidFill>
+                        <a:srgbClr val="C9D1DB"/>
+                      </a:solidFill>
+                      <a:prstDash val="solid"/>
+                      <a:round/>
+                      <a:headEnd type="none" w="med" len="med"/>
+                      <a:tailEnd type="none" w="med" len="med"/>
+                    </a:lnT>
+                    <a:lnB w="12700" cap="flat" cmpd="sng" algn="ctr">
+                      <a:solidFill>
+                        <a:srgbClr val="C9D1DB"/>
+                      </a:solidFill>
+                      <a:prstDash val="solid"/>
+                      <a:round/>
+                      <a:headEnd type="none" w="med" len="med"/>
+                      <a:tailEnd type="none" w="med" len="med"/>
+                    </a:lnB>
+                  </a:tcPr>
+                </a:tc>
+                <a:tc>
+                  <a:txBody>
+                    <a:bodyPr/>
+                    <a:lstStyle/>
+                    <a:p>
+                      <a:pPr algn="ctr" indent="0" marL="0">
+                        <a:buNone/>
+                      </a:pPr>
+                      <a:r>
+                        <a:rPr lang="en-US" sz="1600" dirty="0">
+                          <a:solidFill>
+                            <a:srgbClr val="1F2A37"/>
+                          </a:solidFill>
+                          <a:latin typeface="Microsoft YaHei" pitchFamily="34" charset="0"/>
+                          <a:ea typeface="Microsoft YaHei" pitchFamily="34" charset="-122"/>
+                          <a:cs typeface="Microsoft YaHei" pitchFamily="34" charset="-120"/>
+                        </a:rPr>
+                        <a:t>3</a:t>
+                      </a:r>
+                      <a:endParaRPr lang="en-US" sz="1600" dirty="0">
+                        <a:latin typeface="Microsoft YaHei" charset="0"/>
+                        <a:ea typeface="Microsoft YaHei" charset="0"/>
+                        <a:cs typeface="Microsoft YaHei" charset="0"/>
+                      </a:endParaRPr>
+                    </a:p>
+                  </a:txBody>
+                  <a:tcPr marL="91440" marR="91440" marT="45720" marB="45720" anchor="ctr">
+                    <a:lnL w="12700" cap="flat" cmpd="sng" algn="ctr">
+                      <a:solidFill>
+                        <a:srgbClr val="C9D1DB"/>
+                      </a:solidFill>
+                      <a:prstDash val="solid"/>
+                      <a:round/>
+                      <a:headEnd type="none" w="med" len="med"/>
+                      <a:tailEnd type="none" w="med" len="med"/>
+                    </a:lnL>
+                    <a:lnR w="12700" cap="flat" cmpd="sng" algn="ctr">
+                      <a:solidFill>
+                        <a:srgbClr val="C9D1DB"/>
+                      </a:solidFill>
+                      <a:prstDash val="solid"/>
+                      <a:round/>
+                      <a:headEnd type="none" w="med" len="med"/>
+                      <a:tailEnd type="none" w="med" len="med"/>
+                    </a:lnR>
+                    <a:lnT w="12700" cap="flat" cmpd="sng" algn="ctr">
+                      <a:solidFill>
+                        <a:srgbClr val="C9D1DB"/>
+                      </a:solidFill>
+                      <a:prstDash val="solid"/>
+                      <a:round/>
+                      <a:headEnd type="none" w="med" len="med"/>
+                      <a:tailEnd type="none" w="med" len="med"/>
+                    </a:lnT>
+                    <a:lnB w="12700" cap="flat" cmpd="sng" algn="ctr">
+                      <a:solidFill>
+                        <a:srgbClr val="C9D1DB"/>
+                      </a:solidFill>
+                      <a:prstDash val="solid"/>
+                      <a:round/>
+                      <a:headEnd type="none" w="med" len="med"/>
+                      <a:tailEnd type="none" w="med" len="med"/>
+                    </a:lnB>
+                  </a:tcPr>
+                </a:tc>
+                <a:tc>
+                  <a:txBody>
+                    <a:bodyPr/>
+                    <a:lstStyle/>
+                    <a:p>
+                      <a:pPr algn="ctr" indent="0" marL="0">
+                        <a:buNone/>
+                      </a:pPr>
+                      <a:r>
+                        <a:rPr lang="en-US" sz="1600" dirty="0">
+                          <a:solidFill>
+                            <a:srgbClr val="1F2A37"/>
+                          </a:solidFill>
+                          <a:latin typeface="Microsoft YaHei" pitchFamily="34" charset="0"/>
+                          <a:ea typeface="Microsoft YaHei" pitchFamily="34" charset="-122"/>
+                          <a:cs typeface="Microsoft YaHei" pitchFamily="34" charset="-120"/>
+                        </a:rPr>
+                        <a:t>80</a:t>
+                      </a:r>
+                      <a:endParaRPr lang="en-US" sz="1600" dirty="0">
+                        <a:latin typeface="Microsoft YaHei" charset="0"/>
+                        <a:ea typeface="Microsoft YaHei" charset="0"/>
+                        <a:cs typeface="Microsoft YaHei" charset="0"/>
+                      </a:endParaRPr>
+                    </a:p>
+                  </a:txBody>
+                  <a:tcPr marL="91440" marR="91440" marT="45720" marB="45720" anchor="ctr">
+                    <a:lnL w="12700" cap="flat" cmpd="sng" algn="ctr">
+                      <a:solidFill>
+                        <a:srgbClr val="C9D1DB"/>
+                      </a:solidFill>
+                      <a:prstDash val="solid"/>
+                      <a:round/>
+                      <a:headEnd type="none" w="med" len="med"/>
+                      <a:tailEnd type="none" w="med" len="med"/>
+                    </a:lnL>
+                    <a:lnR w="12700" cap="flat" cmpd="sng" algn="ctr">
+                      <a:solidFill>
+                        <a:srgbClr val="C9D1DB"/>
+                      </a:solidFill>
+                      <a:prstDash val="solid"/>
+                      <a:round/>
+                      <a:headEnd type="none" w="med" len="med"/>
+                      <a:tailEnd type="none" w="med" len="med"/>
+                    </a:lnR>
+                    <a:lnT w="12700" cap="flat" cmpd="sng" algn="ctr">
+                      <a:solidFill>
+                        <a:srgbClr val="C9D1DB"/>
+                      </a:solidFill>
+                      <a:prstDash val="solid"/>
+                      <a:round/>
+                      <a:headEnd type="none" w="med" len="med"/>
+                      <a:tailEnd type="none" w="med" len="med"/>
+                    </a:lnT>
+                    <a:lnB w="12700" cap="flat" cmpd="sng" algn="ctr">
+                      <a:solidFill>
+                        <a:srgbClr val="C9D1DB"/>
+                      </a:solidFill>
+                      <a:prstDash val="solid"/>
+                      <a:round/>
+                      <a:headEnd type="none" w="med" len="med"/>
+                      <a:tailEnd type="none" w="med" len="med"/>
+                    </a:lnB>
+                  </a:tcPr>
+                </a:tc>
+                <a:tc>
+                  <a:txBody>
+                    <a:bodyPr/>
+                    <a:lstStyle/>
+                    <a:p>
+                      <a:pPr algn="ctr" indent="0" marL="0">
+                        <a:buNone/>
+                      </a:pPr>
+                      <a:r>
+                        <a:rPr lang="en-US" sz="1600" dirty="0">
+                          <a:solidFill>
+                            <a:srgbClr val="1F2A37"/>
+                          </a:solidFill>
+                          <a:latin typeface="Microsoft YaHei" pitchFamily="34" charset="0"/>
+                          <a:ea typeface="Microsoft YaHei" pitchFamily="34" charset="-122"/>
+                          <a:cs typeface="Microsoft YaHei" pitchFamily="34" charset="-120"/>
+                        </a:rPr>
+                        <a:t>完成</a:t>
+                      </a:r>
+                      <a:endParaRPr lang="en-US" sz="1600" dirty="0">
+                        <a:latin typeface="Microsoft YaHei" charset="0"/>
+                        <a:ea typeface="Microsoft YaHei" charset="0"/>
+                        <a:cs typeface="Microsoft YaHei" charset="0"/>
+                      </a:endParaRPr>
+                    </a:p>
+                  </a:txBody>
+                  <a:tcPr marL="91440" marR="91440" marT="45720" marB="45720" anchor="ctr">
+                    <a:lnL w="12700" cap="flat" cmpd="sng" algn="ctr">
+                      <a:solidFill>
+                        <a:srgbClr val="C9D1DB"/>
+                      </a:solidFill>
+                      <a:prstDash val="solid"/>
+                      <a:round/>
+                      <a:headEnd type="none" w="med" len="med"/>
+                      <a:tailEnd type="none" w="med" len="med"/>
+                    </a:lnL>
+                    <a:lnR w="12700" cap="flat" cmpd="sng" algn="ctr">
+                      <a:solidFill>
+                        <a:srgbClr val="C9D1DB"/>
+                      </a:solidFill>
+                      <a:prstDash val="solid"/>
+                      <a:round/>
+                      <a:headEnd type="none" w="med" len="med"/>
+                      <a:tailEnd type="none" w="med" len="med"/>
+                    </a:lnR>
+                    <a:lnT w="12700" cap="flat" cmpd="sng" algn="ctr">
+                      <a:solidFill>
+                        <a:srgbClr val="C9D1DB"/>
+                      </a:solidFill>
+                      <a:prstDash val="solid"/>
+                      <a:round/>
+                      <a:headEnd type="none" w="med" len="med"/>
+                      <a:tailEnd type="none" w="med" len="med"/>
+                    </a:lnT>
+                    <a:lnB w="12700" cap="flat" cmpd="sng" algn="ctr">
+                      <a:solidFill>
+                        <a:srgbClr val="C9D1DB"/>
+                      </a:solidFill>
+                      <a:prstDash val="solid"/>
+                      <a:round/>
+                      <a:headEnd type="none" w="med" len="med"/>
+                      <a:tailEnd type="none" w="med" len="med"/>
+                    </a:lnB>
+                  </a:tcPr>
+                </a:tc>
+              </a:tr>
+            </a:tbl>
+          </a:graphicData>
+        </a:graphic>
+      </p:graphicFrame>
+      <p:sp>
+        <p:nvSpPr>
+          <p:cNvPr id="5" name="Text 2"/>
+          <p:cNvSpPr/>
+          <p:nvPr/>
+        </p:nvSpPr>
+        <p:spPr>
+          <a:xfrm>
+            <a:off x="548640" y="3703320"/>
+            <a:ext cx="4206240" cy="960120"/>
+          </a:xfrm>
+          <a:prstGeom prst="roundRect">
+            <a:avLst>
+              <a:gd name="adj" fmla="val 9524"/>
+            </a:avLst>
+          </a:prstGeom>
+          <a:solidFill>
+            <a:srgbClr val="FBEAE7"/>
+          </a:solidFill>
+          <a:ln w="12700">
+            <a:solidFill>
+              <a:srgbClr val="FBEAE7"/>
+            </a:solidFill>
+          </a:ln>
+        </p:spPr>
+        <p:txBody>
+          <a:bodyPr wrap="square" lIns="182880" tIns="182880" rIns="182880" bIns="182880" rtlCol="0" anchor="ctr"/>
+          <a:lstStyle/>
+          <a:p>
+            <a:pPr algn="l" indent="0" marL="0">
+              <a:lnSpc>
+                <a:spcPct val="110000"/>
+              </a:lnSpc>
+              <a:buNone/>
+            </a:pPr>
+            <a:r>
+              <a:rPr lang="en-US" sz="1700" dirty="0">
+                <a:solidFill>
+                  <a:srgbClr val="1F2A37"/>
+                </a:solidFill>
+                <a:latin typeface="Microsoft YaHei" pitchFamily="34" charset="0"/>
+                <a:ea typeface="Microsoft YaHei" pitchFamily="34" charset="-122"/>
+                <a:cs typeface="Microsoft YaHei" pitchFamily="34" charset="-120"/>
+              </a:rPr>
+              <a:t>检查：每笔退货只有一行？ </a:t>
+            </a:r>
+            <a:pPr algn="l" indent="0" marL="0">
+              <a:lnSpc>
+                <a:spcPct val="110000"/>
+              </a:lnSpc>
+              <a:buNone/>
+            </a:pPr>
+            <a:r>
+              <a:rPr lang="en-US" sz="1700" b="1" dirty="0">
+                <a:solidFill>
+                  <a:srgbClr val="B5392A"/>
+                </a:solidFill>
+                <a:latin typeface="Microsoft YaHei" pitchFamily="34" charset="0"/>
+                <a:ea typeface="Microsoft YaHei" pitchFamily="34" charset="-122"/>
+                <a:cs typeface="Microsoft YaHei" pitchFamily="34" charset="-120"/>
+              </a:rPr>
+              <a:t>✗ 不成立</a:t>
+            </a:r>
+            <a:endParaRPr lang="en-US" sz="1700" dirty="0"/>
+          </a:p>
+          <a:p>
+            <a:pPr algn="l" indent="0" marL="0">
+              <a:lnSpc>
+                <a:spcPct val="110000"/>
+              </a:lnSpc>
+              <a:buNone/>
+            </a:pPr>
+            <a:r>
+              <a:rPr lang="en-US" sz="1700" b="1" dirty="0">
+                <a:solidFill>
+                  <a:srgbClr val="B5392A"/>
+                </a:solidFill>
+                <a:latin typeface="Microsoft YaHei" pitchFamily="34" charset="0"/>
+                <a:ea typeface="Microsoft YaHei" pitchFamily="34" charset="-122"/>
+                <a:cs typeface="Microsoft YaHei" pitchFamily="34" charset="-120"/>
+              </a:rPr>
+              <a:t>→ 第 1 版先停用</a:t>
+            </a:r>
+            <a:endParaRPr lang="en-US" sz="1700" dirty="0"/>
+          </a:p>
+        </p:txBody>
+      </p:sp>
+      <p:sp>
+        <p:nvSpPr>
+          <p:cNvPr id="6" name="Shape 3"/>
+          <p:cNvSpPr/>
+          <p:nvPr/>
+        </p:nvSpPr>
+        <p:spPr>
+          <a:xfrm>
+            <a:off x="4892040" y="2743200"/>
+            <a:ext cx="594360" cy="0"/>
+          </a:xfrm>
+          <a:prstGeom prst="line">
+            <a:avLst/>
+          </a:prstGeom>
+          <a:noFill/>
+          <a:ln w="31750">
+            <a:solidFill>
+              <a:srgbClr val="5B6573"/>
+            </a:solidFill>
+            <a:prstDash val="solid"/>
+            <a:tailEnd type="triangle"/>
+          </a:ln>
+        </p:spPr>
+      </p:sp>
+      <p:sp>
+        <p:nvSpPr>
+          <p:cNvPr id="7" name="Text 4"/>
+          <p:cNvSpPr txBox="1"/>
+          <p:nvPr/>
+        </p:nvSpPr>
+        <p:spPr>
+          <a:xfrm>
+            <a:off x="5577840" y="1280160"/>
+            <a:ext cx="6035040" cy="365760"/>
+          </a:xfrm>
+          <a:prstGeom prst="rect">
+            <a:avLst/>
+          </a:prstGeom>
+          <a:noFill/>
+          <a:ln/>
+        </p:spPr>
+        <p:txBody>
+          <a:bodyPr wrap="square" lIns="0" tIns="0" rIns="0" bIns="0" rtlCol="0" anchor="t"/>
+          <a:lstStyle/>
+          <a:p>
+            <a:pPr indent="0" marL="0">
+              <a:buNone/>
+            </a:pPr>
+            <a:r>
+              <a:rPr lang="en-US" sz="1600" b="1" dirty="0">
+                <a:solidFill>
+                  <a:srgbClr val="1F2A37"/>
+                </a:solidFill>
+                <a:latin typeface="Microsoft YaHei" pitchFamily="34" charset="0"/>
+                <a:ea typeface="Microsoft YaHei" pitchFamily="34" charset="-122"/>
+                <a:cs typeface="Microsoft YaHei" pitchFamily="34" charset="-120"/>
+              </a:rPr>
+              <a:t>修复：在取值很少的列上试过滤</a:t>
+            </a:r>
+            <a:endParaRPr lang="en-US" sz="1600" dirty="0"/>
+          </a:p>
+        </p:txBody>
+      </p:sp>
+      <p:graphicFrame>
+        <p:nvGraphicFramePr>
+          <p:cNvPr id="19" name="Table 1"/>
+          <p:cNvGraphicFramePr>
+            <a:graphicFrameLocks noGrp="1"/>
+          </p:cNvGraphicFramePr>
+          <p:nvPr>
+            <p:extLst>
+              <p:ext uri="{D42A27DB-BD31-4B8C-83A1-F6EECF244321}">
+                <p14:modId xmlns:p14="http://schemas.microsoft.com/office/powerpoint/2010/main" val="1579011935"/>
+              </p:ext>
+            </p:extLst>
+          </p:nvPr>
+        </p:nvGraphicFramePr>
+        <p:xfrm>
+          <a:off x="5577840" y="1691640"/>
+          <a:ext cx="6062472" cy="914400"/>
+        </p:xfrm>
+        <a:graphic>
+          <a:graphicData uri="http://schemas.openxmlformats.org/drawingml/2006/table">
+            <a:tbl>
+              <a:tblPr/>
+              <a:tblGrid>
+                <a:gridCol w="1463040"/>
+                <a:gridCol w="1143000"/>
+                <a:gridCol w="2450592"/>
+                <a:gridCol w="1005840"/>
+              </a:tblGrid>
+              <a:tr h="457200">
+                <a:tc>
+                  <a:txBody>
+                    <a:bodyPr/>
+                    <a:lstStyle/>
+                    <a:p>
+                      <a:pPr algn="ctr" indent="0" marL="0">
+                        <a:buNone/>
+                      </a:pPr>
+                      <a:r>
+                        <a:rPr lang="en-US" sz="1600" b="1" dirty="0">
+                          <a:solidFill>
+                            <a:srgbClr val="1F2A37"/>
+                          </a:solidFill>
+                          <a:latin typeface="Microsoft YaHei" pitchFamily="34" charset="0"/>
+                          <a:ea typeface="Microsoft YaHei" pitchFamily="34" charset="-122"/>
+                          <a:cs typeface="Microsoft YaHei" pitchFamily="34" charset="-120"/>
+                        </a:rPr>
+                        <a:t>试的过滤</a:t>
+                      </a:r>
+                      <a:endParaRPr lang="en-US" sz="1600" dirty="0">
+                        <a:latin typeface="Microsoft YaHei" charset="0"/>
+                        <a:ea typeface="Microsoft YaHei" charset="0"/>
+                        <a:cs typeface="Microsoft YaHei" charset="0"/>
+                      </a:endParaRPr>
+                    </a:p>
+                  </a:txBody>
+                  <a:tcPr marL="91440" marR="91440" marT="45720" marB="45720" anchor="ctr">
+                    <a:lnL w="12700" cap="flat" cmpd="sng" algn="ctr">
+                      <a:solidFill>
+                        <a:srgbClr val="C9D1DB"/>
+                      </a:solidFill>
+                      <a:prstDash val="solid"/>
+                      <a:round/>
+                      <a:headEnd type="none" w="med" len="med"/>
+                      <a:tailEnd type="none" w="med" len="med"/>
+                    </a:lnL>
+                    <a:lnR w="12700" cap="flat" cmpd="sng" algn="ctr">
+                      <a:solidFill>
+                        <a:srgbClr val="C9D1DB"/>
+                      </a:solidFill>
+                      <a:prstDash val="solid"/>
+                      <a:round/>
+                      <a:headEnd type="none" w="med" len="med"/>
+                      <a:tailEnd type="none" w="med" len="med"/>
+                    </a:lnR>
+                    <a:lnT w="12700" cap="flat" cmpd="sng" algn="ctr">
+                      <a:solidFill>
+                        <a:srgbClr val="C9D1DB"/>
+                      </a:solidFill>
+                      <a:prstDash val="solid"/>
+                      <a:round/>
+                      <a:headEnd type="none" w="med" len="med"/>
+                      <a:tailEnd type="none" w="med" len="med"/>
+                    </a:lnT>
+                    <a:lnB w="12700" cap="flat" cmpd="sng" algn="ctr">
+                      <a:solidFill>
+                        <a:srgbClr val="C9D1DB"/>
+                      </a:solidFill>
+                      <a:prstDash val="solid"/>
+                      <a:round/>
+                      <a:headEnd type="none" w="med" len="med"/>
+                      <a:tailEnd type="none" w="med" len="med"/>
+                    </a:lnB>
+                    <a:solidFill>
+                      <a:srgbClr val="F1F3F6"/>
+                    </a:solidFill>
+                  </a:tcPr>
+                </a:tc>
+                <a:tc>
+                  <a:txBody>
+                    <a:bodyPr/>
+                    <a:lstStyle/>
+                    <a:p>
+                      <a:pPr algn="ctr" indent="0" marL="0">
+                        <a:buNone/>
+                      </a:pPr>
+                      <a:r>
+                        <a:rPr lang="en-US" sz="1600" b="1" dirty="0">
+                          <a:solidFill>
+                            <a:srgbClr val="1F2A37"/>
+                          </a:solidFill>
+                          <a:latin typeface="Microsoft YaHei" pitchFamily="34" charset="0"/>
+                          <a:ea typeface="Microsoft YaHei" pitchFamily="34" charset="-122"/>
+                          <a:cs typeface="Microsoft YaHei" pitchFamily="34" charset="-120"/>
+                        </a:rPr>
+                        <a:t>每笔一行</a:t>
+                      </a:r>
+                      <a:endParaRPr lang="en-US" sz="1600" dirty="0">
+                        <a:latin typeface="Microsoft YaHei" charset="0"/>
+                        <a:ea typeface="Microsoft YaHei" charset="0"/>
+                        <a:cs typeface="Microsoft YaHei" charset="0"/>
+                      </a:endParaRPr>
+                    </a:p>
+                  </a:txBody>
+                  <a:tcPr marL="91440" marR="91440" marT="45720" marB="45720" anchor="ctr">
+                    <a:lnL w="12700" cap="flat" cmpd="sng" algn="ctr">
+                      <a:solidFill>
+                        <a:srgbClr val="C9D1DB"/>
+                      </a:solidFill>
+                      <a:prstDash val="solid"/>
+                      <a:round/>
+                      <a:headEnd type="none" w="med" len="med"/>
+                      <a:tailEnd type="none" w="med" len="med"/>
+                    </a:lnL>
+                    <a:lnR w="12700" cap="flat" cmpd="sng" algn="ctr">
+                      <a:solidFill>
+                        <a:srgbClr val="C9D1DB"/>
+                      </a:solidFill>
+                      <a:prstDash val="solid"/>
+                      <a:round/>
+                      <a:headEnd type="none" w="med" len="med"/>
+                      <a:tailEnd type="none" w="med" len="med"/>
+                    </a:lnR>
+                    <a:lnT w="12700" cap="flat" cmpd="sng" algn="ctr">
+                      <a:solidFill>
+                        <a:srgbClr val="C9D1DB"/>
+                      </a:solidFill>
+                      <a:prstDash val="solid"/>
+                      <a:round/>
+                      <a:headEnd type="none" w="med" len="med"/>
+                      <a:tailEnd type="none" w="med" len="med"/>
+                    </a:lnT>
+                    <a:lnB w="12700" cap="flat" cmpd="sng" algn="ctr">
+                      <a:solidFill>
+                        <a:srgbClr val="C9D1DB"/>
+                      </a:solidFill>
+                      <a:prstDash val="solid"/>
+                      <a:round/>
+                      <a:headEnd type="none" w="med" len="med"/>
+                      <a:tailEnd type="none" w="med" len="med"/>
+                    </a:lnB>
+                    <a:solidFill>
+                      <a:srgbClr val="F1F3F6"/>
+                    </a:solidFill>
+                  </a:tcPr>
+                </a:tc>
+                <a:tc>
+                  <a:txBody>
+                    <a:bodyPr/>
+                    <a:lstStyle/>
+                    <a:p>
+                      <a:pPr algn="ctr" indent="0" marL="0">
+                        <a:buNone/>
+                      </a:pPr>
+                      <a:r>
+                        <a:rPr lang="en-US" sz="1600" b="1" dirty="0">
+                          <a:solidFill>
+                            <a:srgbClr val="1F2A37"/>
+                          </a:solidFill>
+                          <a:latin typeface="Microsoft YaHei" pitchFamily="34" charset="0"/>
+                          <a:ea typeface="Microsoft YaHei" pitchFamily="34" charset="-122"/>
+                          <a:cs typeface="Microsoft YaHei" pitchFamily="34" charset="-120"/>
+                        </a:rPr>
+                        <a:t>一笔不少</a:t>
+                      </a:r>
+                      <a:endParaRPr lang="en-US" sz="1600" dirty="0">
+                        <a:latin typeface="Microsoft YaHei" charset="0"/>
+                        <a:ea typeface="Microsoft YaHei" charset="0"/>
+                        <a:cs typeface="Microsoft YaHei" charset="0"/>
+                      </a:endParaRPr>
+                    </a:p>
+                  </a:txBody>
+                  <a:tcPr marL="91440" marR="91440" marT="45720" marB="45720" anchor="ctr">
+                    <a:lnL w="12700" cap="flat" cmpd="sng" algn="ctr">
+                      <a:solidFill>
+                        <a:srgbClr val="C9D1DB"/>
+                      </a:solidFill>
+                      <a:prstDash val="solid"/>
+                      <a:round/>
+                      <a:headEnd type="none" w="med" len="med"/>
+                      <a:tailEnd type="none" w="med" len="med"/>
+                    </a:lnL>
+                    <a:lnR w="12700" cap="flat" cmpd="sng" algn="ctr">
+                      <a:solidFill>
+                        <a:srgbClr val="C9D1DB"/>
+                      </a:solidFill>
+                      <a:prstDash val="solid"/>
+                      <a:round/>
+                      <a:headEnd type="none" w="med" len="med"/>
+                      <a:tailEnd type="none" w="med" len="med"/>
+                    </a:lnR>
+                    <a:lnT w="12700" cap="flat" cmpd="sng" algn="ctr">
+                      <a:solidFill>
+                        <a:srgbClr val="C9D1DB"/>
+                      </a:solidFill>
+                      <a:prstDash val="solid"/>
+                      <a:round/>
+                      <a:headEnd type="none" w="med" len="med"/>
+                      <a:tailEnd type="none" w="med" len="med"/>
+                    </a:lnT>
+                    <a:lnB w="12700" cap="flat" cmpd="sng" algn="ctr">
+                      <a:solidFill>
+                        <a:srgbClr val="C9D1DB"/>
+                      </a:solidFill>
+                      <a:prstDash val="solid"/>
+                      <a:round/>
+                      <a:headEnd type="none" w="med" len="med"/>
+                      <a:tailEnd type="none" w="med" len="med"/>
+                    </a:lnB>
+                    <a:solidFill>
+                      <a:srgbClr val="F1F3F6"/>
+                    </a:solidFill>
+                  </a:tcPr>
+                </a:tc>
+                <a:tc>
+                  <a:txBody>
+                    <a:bodyPr/>
+                    <a:lstStyle/>
+                    <a:p>
+                      <a:pPr algn="ctr" indent="0" marL="0">
+                        <a:buNone/>
+                      </a:pPr>
+                      <a:r>
+                        <a:rPr lang="en-US" sz="1600" b="1" dirty="0">
+                          <a:solidFill>
+                            <a:srgbClr val="1F2A37"/>
+                          </a:solidFill>
+                          <a:latin typeface="Microsoft YaHei" pitchFamily="34" charset="0"/>
+                          <a:ea typeface="Microsoft YaHei" pitchFamily="34" charset="-122"/>
+                          <a:cs typeface="Microsoft YaHei" pitchFamily="34" charset="-120"/>
+                        </a:rPr>
+                        <a:t>结论</a:t>
+                      </a:r>
+                      <a:endParaRPr lang="en-US" sz="1600" dirty="0">
+                        <a:latin typeface="Microsoft YaHei" charset="0"/>
+                        <a:ea typeface="Microsoft YaHei" charset="0"/>
+                        <a:cs typeface="Microsoft YaHei" charset="0"/>
+                      </a:endParaRPr>
+                    </a:p>
+                  </a:txBody>
+                  <a:tcPr marL="91440" marR="91440" marT="45720" marB="45720" anchor="ctr">
+                    <a:lnL w="12700" cap="flat" cmpd="sng" algn="ctr">
+                      <a:solidFill>
+                        <a:srgbClr val="C9D1DB"/>
+                      </a:solidFill>
+                      <a:prstDash val="solid"/>
+                      <a:round/>
+                      <a:headEnd type="none" w="med" len="med"/>
+                      <a:tailEnd type="none" w="med" len="med"/>
+                    </a:lnL>
+                    <a:lnR w="12700" cap="flat" cmpd="sng" algn="ctr">
+                      <a:solidFill>
+                        <a:srgbClr val="C9D1DB"/>
+                      </a:solidFill>
+                      <a:prstDash val="solid"/>
+                      <a:round/>
+                      <a:headEnd type="none" w="med" len="med"/>
+                      <a:tailEnd type="none" w="med" len="med"/>
+                    </a:lnR>
+                    <a:lnT w="12700" cap="flat" cmpd="sng" algn="ctr">
+                      <a:solidFill>
+                        <a:srgbClr val="C9D1DB"/>
+                      </a:solidFill>
+                      <a:prstDash val="solid"/>
+                      <a:round/>
+                      <a:headEnd type="none" w="med" len="med"/>
+                      <a:tailEnd type="none" w="med" len="med"/>
+                    </a:lnT>
+                    <a:lnB w="12700" cap="flat" cmpd="sng" algn="ctr">
+                      <a:solidFill>
+                        <a:srgbClr val="C9D1DB"/>
+                      </a:solidFill>
+                      <a:prstDash val="solid"/>
+                      <a:round/>
+                      <a:headEnd type="none" w="med" len="med"/>
+                      <a:tailEnd type="none" w="med" len="med"/>
+                    </a:lnB>
+                    <a:solidFill>
+                      <a:srgbClr val="F1F3F6"/>
+                    </a:solidFill>
+                  </a:tcPr>
+                </a:tc>
+              </a:tr>
+              <a:tr h="457200">
+                <a:tc>
+                  <a:txBody>
+                    <a:bodyPr/>
+                    <a:lstStyle/>
+                    <a:p>
+                      <a:pPr algn="ctr" indent="0" marL="0">
+                        <a:buNone/>
+                      </a:pPr>
+                      <a:r>
+                        <a:rPr lang="en-US" sz="1600" dirty="0">
+                          <a:solidFill>
+                            <a:srgbClr val="1F2A37"/>
+                          </a:solidFill>
+                          <a:latin typeface="Microsoft YaHei" pitchFamily="34" charset="0"/>
+                          <a:ea typeface="Microsoft YaHei" pitchFamily="34" charset="-122"/>
+                          <a:cs typeface="Microsoft YaHei" pitchFamily="34" charset="-120"/>
+                        </a:rPr>
+                        <a:t>只算“完成”</a:t>
+                      </a:r>
+                      <a:endParaRPr lang="en-US" sz="1600" dirty="0">
+                        <a:latin typeface="Microsoft YaHei" charset="0"/>
+                        <a:ea typeface="Microsoft YaHei" charset="0"/>
+                        <a:cs typeface="Microsoft YaHei" charset="0"/>
+                      </a:endParaRPr>
+                    </a:p>
+                  </a:txBody>
+                  <a:tcPr marL="91440" marR="91440" marT="45720" marB="45720" anchor="ctr">
+                    <a:lnL w="12700" cap="flat" cmpd="sng" algn="ctr">
+                      <a:solidFill>
+                        <a:srgbClr val="C9D1DB"/>
+                      </a:solidFill>
+                      <a:prstDash val="solid"/>
+                      <a:round/>
+                      <a:headEnd type="none" w="med" len="med"/>
+                      <a:tailEnd type="none" w="med" len="med"/>
+                    </a:lnL>
+                    <a:lnR w="12700" cap="flat" cmpd="sng" algn="ctr">
+                      <a:solidFill>
+                        <a:srgbClr val="C9D1DB"/>
+                      </a:solidFill>
+                      <a:prstDash val="solid"/>
+                      <a:round/>
+                      <a:headEnd type="none" w="med" len="med"/>
+                      <a:tailEnd type="none" w="med" len="med"/>
+                    </a:lnR>
+                    <a:lnT w="12700" cap="flat" cmpd="sng" algn="ctr">
+                      <a:solidFill>
+                        <a:srgbClr val="C9D1DB"/>
+                      </a:solidFill>
+                      <a:prstDash val="solid"/>
+                      <a:round/>
+                      <a:headEnd type="none" w="med" len="med"/>
+                      <a:tailEnd type="none" w="med" len="med"/>
+                    </a:lnT>
+                    <a:lnB w="12700" cap="flat" cmpd="sng" algn="ctr">
+                      <a:solidFill>
+                        <a:srgbClr val="C9D1DB"/>
+                      </a:solidFill>
+                      <a:prstDash val="solid"/>
+                      <a:round/>
+                      <a:headEnd type="none" w="med" len="med"/>
+                      <a:tailEnd type="none" w="med" len="med"/>
+                    </a:lnB>
+                  </a:tcPr>
+                </a:tc>
+                <a:tc>
+                  <a:txBody>
+                    <a:bodyPr/>
+                    <a:lstStyle/>
+                    <a:p>
+                      <a:pPr algn="ctr" indent="0" marL="0">
+                        <a:buNone/>
+                      </a:pPr>
+                      <a:r>
+                        <a:rPr lang="en-US" sz="1600" b="1" dirty="0">
+                          <a:solidFill>
+                            <a:srgbClr val="2E7D4F"/>
+                          </a:solidFill>
+                          <a:latin typeface="Microsoft YaHei" pitchFamily="34" charset="0"/>
+                          <a:ea typeface="Microsoft YaHei" pitchFamily="34" charset="-122"/>
+                          <a:cs typeface="Microsoft YaHei" pitchFamily="34" charset="-120"/>
+                        </a:rPr>
+                        <a:t>✓</a:t>
+                      </a:r>
+                      <a:endParaRPr lang="en-US" sz="1600" dirty="0">
+                        <a:latin typeface="Microsoft YaHei" charset="0"/>
+                        <a:ea typeface="Microsoft YaHei" charset="0"/>
+                        <a:cs typeface="Microsoft YaHei" charset="0"/>
+                      </a:endParaRPr>
+                    </a:p>
+                  </a:txBody>
+                  <a:tcPr marL="91440" marR="91440" marT="45720" marB="45720" anchor="ctr">
+                    <a:lnL w="12700" cap="flat" cmpd="sng" algn="ctr">
+                      <a:solidFill>
+                        <a:srgbClr val="C9D1DB"/>
+                      </a:solidFill>
+                      <a:prstDash val="solid"/>
+                      <a:round/>
+                      <a:headEnd type="none" w="med" len="med"/>
+                      <a:tailEnd type="none" w="med" len="med"/>
+                    </a:lnL>
+                    <a:lnR w="12700" cap="flat" cmpd="sng" algn="ctr">
+                      <a:solidFill>
+                        <a:srgbClr val="C9D1DB"/>
+                      </a:solidFill>
+                      <a:prstDash val="solid"/>
+                      <a:round/>
+                      <a:headEnd type="none" w="med" len="med"/>
+                      <a:tailEnd type="none" w="med" len="med"/>
+                    </a:lnR>
+                    <a:lnT w="12700" cap="flat" cmpd="sng" algn="ctr">
+                      <a:solidFill>
+                        <a:srgbClr val="C9D1DB"/>
+                      </a:solidFill>
+                      <a:prstDash val="solid"/>
+                      <a:round/>
+                      <a:headEnd type="none" w="med" len="med"/>
+                      <a:tailEnd type="none" w="med" len="med"/>
+                    </a:lnT>
+                    <a:lnB w="12700" cap="flat" cmpd="sng" algn="ctr">
+                      <a:solidFill>
+                        <a:srgbClr val="C9D1DB"/>
+                      </a:solidFill>
+                      <a:prstDash val="solid"/>
+                      <a:round/>
+                      <a:headEnd type="none" w="med" len="med"/>
+                      <a:tailEnd type="none" w="med" len="med"/>
+                    </a:lnB>
+                  </a:tcPr>
+                </a:tc>
+                <a:tc>
+                  <a:txBody>
+                    <a:bodyPr/>
+                    <a:lstStyle/>
+                    <a:p>
+                      <a:pPr algn="ctr" indent="0" marL="0">
+                        <a:buNone/>
+                      </a:pPr>
+                      <a:r>
+                        <a:rPr lang="en-US" sz="1600" b="1" dirty="0">
+                          <a:solidFill>
+                            <a:srgbClr val="2E7D4F"/>
+                          </a:solidFill>
+                          <a:latin typeface="Microsoft YaHei" pitchFamily="34" charset="0"/>
+                          <a:ea typeface="Microsoft YaHei" pitchFamily="34" charset="-122"/>
+                          <a:cs typeface="Microsoft YaHei" pitchFamily="34" charset="-120"/>
+                        </a:rPr>
+                        <a:t>✓</a:t>
+                      </a:r>
+                      <a:endParaRPr lang="en-US" sz="1600" dirty="0">
+                        <a:latin typeface="Microsoft YaHei" charset="0"/>
+                        <a:ea typeface="Microsoft YaHei" charset="0"/>
+                        <a:cs typeface="Microsoft YaHei" charset="0"/>
+                      </a:endParaRPr>
+                    </a:p>
+                  </a:txBody>
+                  <a:tcPr marL="91440" marR="91440" marT="45720" marB="45720" anchor="ctr">
+                    <a:lnL w="12700" cap="flat" cmpd="sng" algn="ctr">
+                      <a:solidFill>
+                        <a:srgbClr val="C9D1DB"/>
+                      </a:solidFill>
+                      <a:prstDash val="solid"/>
+                      <a:round/>
+                      <a:headEnd type="none" w="med" len="med"/>
+                      <a:tailEnd type="none" w="med" len="med"/>
+                    </a:lnL>
+                    <a:lnR w="12700" cap="flat" cmpd="sng" algn="ctr">
+                      <a:solidFill>
+                        <a:srgbClr val="C9D1DB"/>
+                      </a:solidFill>
+                      <a:prstDash val="solid"/>
+                      <a:round/>
+                      <a:headEnd type="none" w="med" len="med"/>
+                      <a:tailEnd type="none" w="med" len="med"/>
+                    </a:lnR>
+                    <a:lnT w="12700" cap="flat" cmpd="sng" algn="ctr">
+                      <a:solidFill>
+                        <a:srgbClr val="C9D1DB"/>
+                      </a:solidFill>
+                      <a:prstDash val="solid"/>
+                      <a:round/>
+                      <a:headEnd type="none" w="med" len="med"/>
+                      <a:tailEnd type="none" w="med" len="med"/>
+                    </a:lnT>
+                    <a:lnB w="12700" cap="flat" cmpd="sng" algn="ctr">
+                      <a:solidFill>
+                        <a:srgbClr val="C9D1DB"/>
+                      </a:solidFill>
+                      <a:prstDash val="solid"/>
+                      <a:round/>
+                      <a:headEnd type="none" w="med" len="med"/>
+                      <a:tailEnd type="none" w="med" len="med"/>
+                    </a:lnB>
+                  </a:tcPr>
+                </a:tc>
+                <a:tc>
+                  <a:txBody>
+                    <a:bodyPr/>
+                    <a:lstStyle/>
+                    <a:p>
+                      <a:pPr algn="ctr" indent="0" marL="0">
+                        <a:buNone/>
+                      </a:pPr>
+                      <a:r>
+                        <a:rPr lang="en-US" sz="1600" b="1" dirty="0">
+                          <a:solidFill>
+                            <a:srgbClr val="2E7D4F"/>
+                          </a:solidFill>
+                          <a:latin typeface="Microsoft YaHei" pitchFamily="34" charset="0"/>
+                          <a:ea typeface="Microsoft YaHei" pitchFamily="34" charset="-122"/>
+                          <a:cs typeface="Microsoft YaHei" pitchFamily="34" charset="-120"/>
+                        </a:rPr>
+                        <a:t>可用</a:t>
+                      </a:r>
+                      <a:endParaRPr lang="en-US" sz="1600" dirty="0">
+                        <a:latin typeface="Microsoft YaHei" charset="0"/>
+                        <a:ea typeface="Microsoft YaHei" charset="0"/>
+                        <a:cs typeface="Microsoft YaHei" charset="0"/>
+                      </a:endParaRPr>
+                    </a:p>
+                  </a:txBody>
+                  <a:tcPr marL="91440" marR="91440" marT="45720" marB="45720" anchor="ctr">
+                    <a:lnL w="12700" cap="flat" cmpd="sng" algn="ctr">
+                      <a:solidFill>
+                        <a:srgbClr val="C9D1DB"/>
+                      </a:solidFill>
+                      <a:prstDash val="solid"/>
+                      <a:round/>
+                      <a:headEnd type="none" w="med" len="med"/>
+                      <a:tailEnd type="none" w="med" len="med"/>
+                    </a:lnL>
+                    <a:lnR w="12700" cap="flat" cmpd="sng" algn="ctr">
+                      <a:solidFill>
+                        <a:srgbClr val="C9D1DB"/>
+                      </a:solidFill>
+                      <a:prstDash val="solid"/>
+                      <a:round/>
+                      <a:headEnd type="none" w="med" len="med"/>
+                      <a:tailEnd type="none" w="med" len="med"/>
+                    </a:lnR>
+                    <a:lnT w="12700" cap="flat" cmpd="sng" algn="ctr">
+                      <a:solidFill>
+                        <a:srgbClr val="C9D1DB"/>
+                      </a:solidFill>
+                      <a:prstDash val="solid"/>
+                      <a:round/>
+                      <a:headEnd type="none" w="med" len="med"/>
+                      <a:tailEnd type="none" w="med" len="med"/>
+                    </a:lnT>
+                    <a:lnB w="12700" cap="flat" cmpd="sng" algn="ctr">
+                      <a:solidFill>
+                        <a:srgbClr val="C9D1DB"/>
+                      </a:solidFill>
+                      <a:prstDash val="solid"/>
+                      <a:round/>
+                      <a:headEnd type="none" w="med" len="med"/>
+                      <a:tailEnd type="none" w="med" len="med"/>
+                    </a:lnB>
+                  </a:tcPr>
+                </a:tc>
+              </a:tr>
+              <a:tr h="457200">
+                <a:tc>
+                  <a:txBody>
+                    <a:bodyPr/>
+                    <a:lstStyle/>
+                    <a:p>
+                      <a:pPr algn="ctr" indent="0" marL="0">
+                        <a:buNone/>
+                      </a:pPr>
+                      <a:r>
+                        <a:rPr lang="en-US" sz="1600" dirty="0">
+                          <a:solidFill>
+                            <a:srgbClr val="1F2A37"/>
+                          </a:solidFill>
+                          <a:latin typeface="Microsoft YaHei" pitchFamily="34" charset="0"/>
+                          <a:ea typeface="Microsoft YaHei" pitchFamily="34" charset="-122"/>
+                          <a:cs typeface="Microsoft YaHei" pitchFamily="34" charset="-120"/>
+                        </a:rPr>
+                        <a:t>只算“申请”</a:t>
+                      </a:r>
+                      <a:endParaRPr lang="en-US" sz="1600" dirty="0">
+                        <a:latin typeface="Microsoft YaHei" charset="0"/>
+                        <a:ea typeface="Microsoft YaHei" charset="0"/>
+                        <a:cs typeface="Microsoft YaHei" charset="0"/>
+                      </a:endParaRPr>
+                    </a:p>
+                  </a:txBody>
+                  <a:tcPr marL="91440" marR="91440" marT="45720" marB="45720" anchor="ctr">
+                    <a:lnL w="12700" cap="flat" cmpd="sng" algn="ctr">
+                      <a:solidFill>
+                        <a:srgbClr val="C9D1DB"/>
+                      </a:solidFill>
+                      <a:prstDash val="solid"/>
+                      <a:round/>
+                      <a:headEnd type="none" w="med" len="med"/>
+                      <a:tailEnd type="none" w="med" len="med"/>
+                    </a:lnL>
+                    <a:lnR w="12700" cap="flat" cmpd="sng" algn="ctr">
+                      <a:solidFill>
+                        <a:srgbClr val="C9D1DB"/>
+                      </a:solidFill>
+                      <a:prstDash val="solid"/>
+                      <a:round/>
+                      <a:headEnd type="none" w="med" len="med"/>
+                      <a:tailEnd type="none" w="med" len="med"/>
+                    </a:lnR>
+                    <a:lnT w="12700" cap="flat" cmpd="sng" algn="ctr">
+                      <a:solidFill>
+                        <a:srgbClr val="C9D1DB"/>
+                      </a:solidFill>
+                      <a:prstDash val="solid"/>
+                      <a:round/>
+                      <a:headEnd type="none" w="med" len="med"/>
+                      <a:tailEnd type="none" w="med" len="med"/>
+                    </a:lnT>
+                    <a:lnB w="12700" cap="flat" cmpd="sng" algn="ctr">
+                      <a:solidFill>
+                        <a:srgbClr val="C9D1DB"/>
+                      </a:solidFill>
+                      <a:prstDash val="solid"/>
+                      <a:round/>
+                      <a:headEnd type="none" w="med" len="med"/>
+                      <a:tailEnd type="none" w="med" len="med"/>
+                    </a:lnB>
+                  </a:tcPr>
+                </a:tc>
+                <a:tc>
+                  <a:txBody>
+                    <a:bodyPr/>
+                    <a:lstStyle/>
+                    <a:p>
+                      <a:pPr algn="ctr" indent="0" marL="0">
+                        <a:buNone/>
+                      </a:pPr>
+                      <a:r>
+                        <a:rPr lang="en-US" sz="1600" b="1" dirty="0">
+                          <a:solidFill>
+                            <a:srgbClr val="2E7D4F"/>
+                          </a:solidFill>
+                          <a:latin typeface="Microsoft YaHei" pitchFamily="34" charset="0"/>
+                          <a:ea typeface="Microsoft YaHei" pitchFamily="34" charset="-122"/>
+                          <a:cs typeface="Microsoft YaHei" pitchFamily="34" charset="-120"/>
+                        </a:rPr>
+                        <a:t>✓</a:t>
+                      </a:r>
+                      <a:endParaRPr lang="en-US" sz="1600" dirty="0">
+                        <a:latin typeface="Microsoft YaHei" charset="0"/>
+                        <a:ea typeface="Microsoft YaHei" charset="0"/>
+                        <a:cs typeface="Microsoft YaHei" charset="0"/>
+                      </a:endParaRPr>
+                    </a:p>
+                  </a:txBody>
+                  <a:tcPr marL="91440" marR="91440" marT="45720" marB="45720" anchor="ctr">
+                    <a:lnL w="12700" cap="flat" cmpd="sng" algn="ctr">
+                      <a:solidFill>
+                        <a:srgbClr val="C9D1DB"/>
+                      </a:solidFill>
+                      <a:prstDash val="solid"/>
+                      <a:round/>
+                      <a:headEnd type="none" w="med" len="med"/>
+                      <a:tailEnd type="none" w="med" len="med"/>
+                    </a:lnL>
+                    <a:lnR w="12700" cap="flat" cmpd="sng" algn="ctr">
+                      <a:solidFill>
+                        <a:srgbClr val="C9D1DB"/>
+                      </a:solidFill>
+                      <a:prstDash val="solid"/>
+                      <a:round/>
+                      <a:headEnd type="none" w="med" len="med"/>
+                      <a:tailEnd type="none" w="med" len="med"/>
+                    </a:lnR>
+                    <a:lnT w="12700" cap="flat" cmpd="sng" algn="ctr">
+                      <a:solidFill>
+                        <a:srgbClr val="C9D1DB"/>
+                      </a:solidFill>
+                      <a:prstDash val="solid"/>
+                      <a:round/>
+                      <a:headEnd type="none" w="med" len="med"/>
+                      <a:tailEnd type="none" w="med" len="med"/>
+                    </a:lnT>
+                    <a:lnB w="12700" cap="flat" cmpd="sng" algn="ctr">
+                      <a:solidFill>
+                        <a:srgbClr val="C9D1DB"/>
+                      </a:solidFill>
+                      <a:prstDash val="solid"/>
+                      <a:round/>
+                      <a:headEnd type="none" w="med" len="med"/>
+                      <a:tailEnd type="none" w="med" len="med"/>
+                    </a:lnB>
+                  </a:tcPr>
+                </a:tc>
+                <a:tc>
+                  <a:txBody>
+                    <a:bodyPr/>
+                    <a:lstStyle/>
+                    <a:p>
+                      <a:pPr algn="ctr" indent="0" marL="0">
+                        <a:buNone/>
+                      </a:pPr>
+                      <a:r>
+                        <a:rPr lang="en-US" sz="1600" dirty="0">
+                          <a:solidFill>
+                            <a:srgbClr val="B5392A"/>
+                          </a:solidFill>
+                          <a:latin typeface="Microsoft YaHei" pitchFamily="34" charset="0"/>
+                          <a:ea typeface="Microsoft YaHei" pitchFamily="34" charset="-122"/>
+                          <a:cs typeface="Microsoft YaHei" pitchFamily="34" charset="-120"/>
+                        </a:rPr>
+                        <a:t>✗ 早期退货没有申请行</a:t>
+                      </a:r>
+                      <a:endParaRPr lang="en-US" sz="1600" dirty="0">
+                        <a:latin typeface="Microsoft YaHei" charset="0"/>
+                        <a:ea typeface="Microsoft YaHei" charset="0"/>
+                        <a:cs typeface="Microsoft YaHei" charset="0"/>
+                      </a:endParaRPr>
+                    </a:p>
+                  </a:txBody>
+                  <a:tcPr marL="91440" marR="91440" marT="45720" marB="45720" anchor="ctr">
+                    <a:lnL w="12700" cap="flat" cmpd="sng" algn="ctr">
+                      <a:solidFill>
+                        <a:srgbClr val="C9D1DB"/>
+                      </a:solidFill>
+                      <a:prstDash val="solid"/>
+                      <a:round/>
+                      <a:headEnd type="none" w="med" len="med"/>
+                      <a:tailEnd type="none" w="med" len="med"/>
+                    </a:lnL>
+                    <a:lnR w="12700" cap="flat" cmpd="sng" algn="ctr">
+                      <a:solidFill>
+                        <a:srgbClr val="C9D1DB"/>
+                      </a:solidFill>
+                      <a:prstDash val="solid"/>
+                      <a:round/>
+                      <a:headEnd type="none" w="med" len="med"/>
+                      <a:tailEnd type="none" w="med" len="med"/>
+                    </a:lnR>
+                    <a:lnT w="12700" cap="flat" cmpd="sng" algn="ctr">
+                      <a:solidFill>
+                        <a:srgbClr val="C9D1DB"/>
+                      </a:solidFill>
+                      <a:prstDash val="solid"/>
+                      <a:round/>
+                      <a:headEnd type="none" w="med" len="med"/>
+                      <a:tailEnd type="none" w="med" len="med"/>
+                    </a:lnT>
+                    <a:lnB w="12700" cap="flat" cmpd="sng" algn="ctr">
+                      <a:solidFill>
+                        <a:srgbClr val="C9D1DB"/>
+                      </a:solidFill>
+                      <a:prstDash val="solid"/>
+                      <a:round/>
+                      <a:headEnd type="none" w="med" len="med"/>
+                      <a:tailEnd type="none" w="med" len="med"/>
+                    </a:lnB>
+                  </a:tcPr>
+                </a:tc>
+                <a:tc>
+                  <a:txBody>
+                    <a:bodyPr/>
+                    <a:lstStyle/>
+                    <a:p>
+                      <a:pPr algn="ctr" indent="0" marL="0">
+                        <a:buNone/>
+                      </a:pPr>
+                      <a:r>
+                        <a:rPr lang="en-US" sz="1600" b="1" dirty="0">
+                          <a:solidFill>
+                            <a:srgbClr val="B5392A"/>
+                          </a:solidFill>
+                          <a:latin typeface="Microsoft YaHei" pitchFamily="34" charset="0"/>
+                          <a:ea typeface="Microsoft YaHei" pitchFamily="34" charset="-122"/>
+                          <a:cs typeface="Microsoft YaHei" pitchFamily="34" charset="-120"/>
+                        </a:rPr>
+                        <a:t>不行</a:t>
+                      </a:r>
+                      <a:endParaRPr lang="en-US" sz="1600" dirty="0">
+                        <a:latin typeface="Microsoft YaHei" charset="0"/>
+                        <a:ea typeface="Microsoft YaHei" charset="0"/>
+                        <a:cs typeface="Microsoft YaHei" charset="0"/>
+                      </a:endParaRPr>
+                    </a:p>
+                  </a:txBody>
+                  <a:tcPr marL="91440" marR="91440" marT="45720" marB="45720" anchor="ctr">
+                    <a:lnL w="12700" cap="flat" cmpd="sng" algn="ctr">
+                      <a:solidFill>
+                        <a:srgbClr val="C9D1DB"/>
+                      </a:solidFill>
+                      <a:prstDash val="solid"/>
+                      <a:round/>
+                      <a:headEnd type="none" w="med" len="med"/>
+                      <a:tailEnd type="none" w="med" len="med"/>
+                    </a:lnL>
+                    <a:lnR w="12700" cap="flat" cmpd="sng" algn="ctr">
+                      <a:solidFill>
+                        <a:srgbClr val="C9D1DB"/>
+                      </a:solidFill>
+                      <a:prstDash val="solid"/>
+                      <a:round/>
+                      <a:headEnd type="none" w="med" len="med"/>
+                      <a:tailEnd type="none" w="med" len="med"/>
+                    </a:lnR>
+                    <a:lnT w="12700" cap="flat" cmpd="sng" algn="ctr">
+                      <a:solidFill>
+                        <a:srgbClr val="C9D1DB"/>
+                      </a:solidFill>
+                      <a:prstDash val="solid"/>
+                      <a:round/>
+                      <a:headEnd type="none" w="med" len="med"/>
+                      <a:tailEnd type="none" w="med" len="med"/>
+                    </a:lnT>
+                    <a:lnB w="12700" cap="flat" cmpd="sng" algn="ctr">
+                      <a:solidFill>
+                        <a:srgbClr val="C9D1DB"/>
+                      </a:solidFill>
+                      <a:prstDash val="solid"/>
+                      <a:round/>
+                      <a:headEnd type="none" w="med" len="med"/>
+                      <a:tailEnd type="none" w="med" len="med"/>
+                    </a:lnB>
+                  </a:tcPr>
+                </a:tc>
+              </a:tr>
+            </a:tbl>
+          </a:graphicData>
+        </a:graphic>
+      </p:graphicFrame>
+      <p:sp>
+        <p:nvSpPr>
+          <p:cNvPr id="9" name="Text 5"/>
+          <p:cNvSpPr/>
+          <p:nvPr/>
+        </p:nvSpPr>
+        <p:spPr>
+          <a:xfrm>
+            <a:off x="5577840" y="3246120"/>
+            <a:ext cx="6062472" cy="1188720"/>
+          </a:xfrm>
+          <a:prstGeom prst="roundRect">
+            <a:avLst>
+              <a:gd name="adj" fmla="val 7692"/>
+            </a:avLst>
+          </a:prstGeom>
+          <a:solidFill>
+            <a:srgbClr val="EFECF7"/>
+          </a:solidFill>
+          <a:ln w="12700">
+            <a:solidFill>
+              <a:srgbClr val="EFECF7"/>
+            </a:solidFill>
+          </a:ln>
+        </p:spPr>
+        <p:txBody>
+          <a:bodyPr wrap="square" lIns="182880" tIns="182880" rIns="182880" bIns="182880" rtlCol="0" anchor="ctr"/>
+          <a:lstStyle/>
+          <a:p>
+            <a:pPr algn="l" indent="0" marL="0">
+              <a:lnSpc>
+                <a:spcPct val="110000"/>
+              </a:lnSpc>
+              <a:buNone/>
+            </a:pPr>
+            <a:r>
+              <a:rPr lang="en-US" sz="1700" b="1" dirty="0">
+                <a:solidFill>
+                  <a:srgbClr val="6A58A3"/>
+                </a:solidFill>
+                <a:latin typeface="Microsoft YaHei" pitchFamily="34" charset="0"/>
+                <a:ea typeface="Microsoft YaHei" pitchFamily="34" charset="-122"/>
+                <a:cs typeface="Microsoft YaHei" pitchFamily="34" charset="-120"/>
+              </a:rPr>
+              <a:t>只有一个能用 → 再核对：</a:t>
+            </a:r>
+            <a:pPr algn="l" indent="0" marL="0">
+              <a:lnSpc>
+                <a:spcPct val="110000"/>
+              </a:lnSpc>
+              <a:buNone/>
+            </a:pPr>
+            <a:r>
+              <a:rPr lang="en-US" sz="1700" dirty="0">
+                <a:solidFill>
+                  <a:srgbClr val="1F2A37"/>
+                </a:solidFill>
+                <a:latin typeface="Microsoft YaHei" pitchFamily="34" charset="0"/>
+                <a:ea typeface="Microsoft YaHei" pitchFamily="34" charset="-122"/>
+                <a:cs typeface="Microsoft YaHei" pitchFamily="34" charset="-120"/>
+              </a:rPr>
+              <a:t>用学习时的数据（4 月）重算，新旧口径都是 313.3 万 ✓</a:t>
+            </a:r>
+            <a:endParaRPr lang="en-US" sz="1700" dirty="0"/>
+          </a:p>
+          <a:p>
+            <a:pPr algn="l" indent="0" marL="0">
+              <a:lnSpc>
+                <a:spcPct val="110000"/>
+              </a:lnSpc>
+              <a:buNone/>
+            </a:pPr>
+            <a:r>
+              <a:rPr lang="en-US" sz="1700" b="1" dirty="0">
+                <a:solidFill>
+                  <a:srgbClr val="6A58A3"/>
+                </a:solidFill>
+                <a:latin typeface="Microsoft YaHei" pitchFamily="34" charset="0"/>
+                <a:ea typeface="Microsoft YaHei" pitchFamily="34" charset="-122"/>
+                <a:cs typeface="Microsoft YaHei" pitchFamily="34" charset="-120"/>
+              </a:rPr>
+              <a:t>→ 发布第 2 版：只算“完成”的行</a:t>
+            </a:r>
+            <a:endParaRPr lang="en-US" sz="1700" dirty="0"/>
+          </a:p>
+        </p:txBody>
+      </p:sp>
+      <p:sp>
+        <p:nvSpPr>
+          <p:cNvPr id="10" name="Text 6"/>
+          <p:cNvSpPr/>
+          <p:nvPr/>
+        </p:nvSpPr>
+        <p:spPr>
+          <a:xfrm>
+            <a:off x="548640" y="5029200"/>
+            <a:ext cx="11094415" cy="914400"/>
+          </a:xfrm>
+          <a:prstGeom prst="roundRect">
+            <a:avLst>
+              <a:gd name="adj" fmla="val 10000"/>
+            </a:avLst>
+          </a:prstGeom>
+          <a:solidFill>
+            <a:srgbClr val="F1F3F6"/>
+          </a:solidFill>
+          <a:ln w="12700">
+            <a:solidFill>
+              <a:srgbClr val="F1F3F6"/>
+            </a:solidFill>
+          </a:ln>
+        </p:spPr>
+        <p:txBody>
+          <a:bodyPr wrap="square" lIns="228600" tIns="228600" rIns="228600" bIns="228600" rtlCol="0" anchor="ctr"/>
+          <a:lstStyle/>
+          <a:p>
+            <a:pPr algn="l" indent="0" marL="0">
+              <a:lnSpc>
+                <a:spcPct val="110000"/>
+              </a:lnSpc>
+              <a:buNone/>
+            </a:pPr>
+            <a:r>
+              <a:rPr lang="en-US" sz="1700" b="1" dirty="0">
+                <a:solidFill>
+                  <a:srgbClr val="B5392A"/>
+                </a:solidFill>
+                <a:latin typeface="Microsoft YaHei" pitchFamily="34" charset="0"/>
+                <a:ea typeface="Microsoft YaHei" pitchFamily="34" charset="-122"/>
+                <a:cs typeface="Microsoft YaHei" pitchFamily="34" charset="-120"/>
+              </a:rPr>
+              <a:t>修不了就不修：</a:t>
+            </a:r>
+            <a:pPr algn="l" indent="0" marL="0">
+              <a:lnSpc>
+                <a:spcPct val="110000"/>
+              </a:lnSpc>
+              <a:buNone/>
+            </a:pPr>
+            <a:r>
+              <a:rPr lang="en-US" sz="1700" dirty="0">
+                <a:solidFill>
+                  <a:srgbClr val="1F2A37"/>
+                </a:solidFill>
+                <a:latin typeface="Microsoft YaHei" pitchFamily="34" charset="0"/>
+                <a:ea typeface="Microsoft YaHei" pitchFamily="34" charset="-122"/>
+                <a:cs typeface="Microsoft YaHei" pitchFamily="34" charset="-120"/>
+              </a:rPr>
+              <a:t>如果追加了整份备份，“只算主表”和“只算备份”都能做到每笔一行，没法判断哪个对——宁可停用，不乱猜。</a:t>
+            </a:r>
+            <a:endParaRPr lang="en-US" sz="1700" dirty="0"/>
+          </a:p>
+        </p:txBody>
+      </p:sp>
+      <p:sp>
+        <p:nvSpPr>
+          <p:cNvPr id="25" name="Slide Number Placeholder 0"/>
+          <p:cNvSpPr>
+            <a:spLocks noGrp="1"/>
+          </p:cNvSpPr>
+          <p:nvPr>
+            <p:ph type="sldNum" sz="quarter" idx="4294967295"/>
+          </p:nvPr>
+        </p:nvSpPr>
+        <p:spPr>
+          <a:xfrm>
+            <a:off x="11185855" y="6400800"/>
+            <a:ext cx="457200" cy="274320"/>
+          </a:xfrm>
+          <a:prstGeom prst="rect">
+            <a:avLst/>
+          </a:prstGeom>
+          <a:extLst>
+            <a:ext uri="{C572A759-6A51-4108-AA02-DFA0A04FC94B}">
+              <ma14:wrappingTextBoxFlag xmlns:ma14="http://schemas.microsoft.com/office/mac/drawingml/2011/main" val="0"/>
+            </a:ext>
+          </a:extLst>
+        </p:spPr>
+        <p:txBody>
+          <a:bodyPr/>
+          <a:lstStyle>
+            <a:lvl1pPr>
+              <a:defRPr sz="1000">
+                <a:solidFill>
+                  <a:srgbClr val="5B6573"/>
+                </a:solidFill>
+                <a:latin typeface="Microsoft YaHei"/>
+                <a:ea typeface="Microsoft YaHei"/>
+                <a:cs typeface="Microsoft YaHei"/>
+              </a:defRPr>
+            </a:lvl1pPr>
+          </a:lstStyle>
+          <a:p>
+            <a:pPr algn="r"/>
+            <a:fld id="{F7021451-1387-4CA6-816F-3879F97B5CBC}" type="slidenum">
+              <a:rPr b="0" lang="en-US"/>
+              <a:t>9</a:t>
             </a:fld>
             <a:endParaRPr lang="en-US"/>
           </a:p>

--- a/docs/mavra-system.pptx
+++ b/docs/mavra-system.pptx
@@ -11,9 +11,13 @@
     <p:sldId id="259" r:id="rId5"/>
     <p:sldId id="260" r:id="rId6"/>
     <p:sldId id="261" r:id="rId7"/>
+    <p:sldId id="262" r:id="rId8"/>
+    <p:sldId id="263" r:id="rId9"/>
+    <p:sldId id="264" r:id="rId10"/>
+    <p:sldId id="265" r:id="rId11"/>
   </p:sldIdLst>
   <p:notesMasterIdLst>
-    <p:notesMasterId r:id="rId8"/>
+    <p:notesMasterId r:id="rId12"/>
   </p:notesMasterIdLst>
   <p:sldSz cx="12192000" cy="6858000"/>
   <p:notesSz cx="6858000" cy="12192000"/>
@@ -112,26 +116,34 @@
   <p:extLst>
     <p:ext uri="{521415D9-36F7-43E2-AB2F-B90AF26B5E84}">
       <p14:sectionLst xmlns:p14="http://schemas.microsoft.com/office/powerpoint/2010/main">
-        <p14:section name="开场" id="{4159721e-d77e-4a39-d723-f3c2e8c1da4b}">
+        <p14:section name="开场" id="{35fc2a33-fb5f-7429-19d2-43043f71bcfe}">
           <p14:sldIdLst>
             <p14:sldId id="256"/>
           </p14:sldIdLst>
         </p14:section>
-        <p14:section name="功能与结构" id="{d2b7d64f-9aa6-123a-e94f-8662c3719b69}">
+        <p14:section name="功能与结构" id="{178ded1e-0a72-7035-db64-6169b6d439b8}">
           <p14:sldIdLst>
             <p14:sldId id="257"/>
             <p14:sldId id="258"/>
           </p14:sldIdLst>
         </p14:section>
-        <p14:section name="工作流" id="{c901a1c4-eee7-ca4a-1cd1-4945841604fb}">
+        <p14:section name="工作流" id="{6ad964c6-b151-b073-dd78-3be5d502b736}">
           <p14:sldIdLst>
             <p14:sldId id="259"/>
             <p14:sldId id="260"/>
           </p14:sldIdLst>
         </p14:section>
-        <p14:section name="小结" id="{a1b0262d-b9ab-53a1-7377-603efcf142b6}">
+        <p14:section name="真实例子" id="{659b2b30-4e42-7ee3-5bac-8cd5276ac3fc}">
           <p14:sldIdLst>
             <p14:sldId id="261"/>
+            <p14:sldId id="262"/>
+            <p14:sldId id="263"/>
+            <p14:sldId id="264"/>
+          </p14:sldIdLst>
+        </p14:section>
+        <p14:section name="小结" id="{59ee6e9d-e3e2-817c-7b72-306d51afab1f}">
+          <p14:sldIdLst>
+            <p14:sldId id="265"/>
           </p14:sldIdLst>
         </p14:section>
       </p14:sectionLst>
@@ -538,7 +550,7 @@
           <a:p>
             <a:r>
               <a:rPr lang="en-US" dirty="0"/>
-              <a:t>这次只讲系统：它由哪几部分组成、各做什么、一次请求怎么走、指标定义坏了怎么办。三张图讲的是同一个例子：门店退货金额。</a:t>
+              <a:t>先讲系统：由哪几部分组成、各做什么、一次请求怎么走、指标定义坏了怎么办；再用实验里的真实记录走一遍“门店营业额”这个例子。</a:t>
             </a:r>
             <a:endParaRPr lang="en-US" dirty="0"/>
           </a:p>
@@ -562,6 +574,94 @@
             <a:fld id="{F7021451-1387-4CA6-816F-3879F97B5CBC}" type="slidenum">
               <a:rPr lang="en-US"/>
               <a:t>1</a:t>
+            </a:fld>
+            <a:endParaRPr lang="en-US"/>
+          </a:p>
+        </p:txBody>
+      </p:sp>
+    </p:spTree>
+    <p:extLst>
+      <p:ext uri="{BB962C8B-B14F-4D97-AF65-F5344CB8AC3E}">
+        <p14:creationId xmlns:p14="http://schemas.microsoft.com/office/powerpoint/2010/main" val="1024086991"/>
+      </p:ext>
+    </p:extLst>
+  </p:cSld>
+  <p:clrMapOvr>
+    <a:masterClrMapping/>
+  </p:clrMapOvr>
+</p:notes>
+</file>
+
+<file path=ppt/notesSlides/notesSlide10.xml><?xml version="1.0" encoding="utf-8"?>
+<p:notes xmlns:a="http://schemas.openxmlformats.org/drawingml/2006/main" xmlns:r="http://schemas.openxmlformats.org/officeDocument/2006/relationships" xmlns:p="http://schemas.openxmlformats.org/presentationml/2006/main">
+  <p:cSld>
+    <p:spTree>
+      <p:nvGrpSpPr>
+        <p:cNvPr id="1" name=""/>
+        <p:cNvGrpSpPr/>
+        <p:nvPr/>
+      </p:nvGrpSpPr>
+      <p:grpSpPr>
+        <a:xfrm>
+          <a:off x="0" y="0"/>
+          <a:ext cx="0" cy="0"/>
+          <a:chOff x="0" y="0"/>
+          <a:chExt cx="0" cy="0"/>
+        </a:xfrm>
+      </p:grpSpPr>
+      <p:sp>
+        <p:nvSpPr>
+          <p:cNvPr id="2" name="Slide Image Placeholder 1"/>
+          <p:cNvSpPr>
+            <a:spLocks noGrp="1" noRot="1" noChangeAspect="1"/>
+          </p:cNvSpPr>
+          <p:nvPr>
+            <p:ph type="sldImg"/>
+          </p:nvPr>
+        </p:nvSpPr>
+        <p:spPr/>
+      </p:sp>
+      <p:sp>
+        <p:nvSpPr>
+          <p:cNvPr id="3" name="Notes Placeholder 2"/>
+          <p:cNvSpPr>
+            <a:spLocks noGrp="1"/>
+          </p:cNvSpPr>
+          <p:nvPr>
+            <p:ph type="body" idx="1"/>
+          </p:nvPr>
+        </p:nvSpPr>
+        <p:spPr/>
+        <p:txBody>
+          <a:bodyPr/>
+          <a:lstStyle/>
+          <a:p>
+            <a:r>
+              <a:rPr lang="en-US" dirty="0"/>
+              <a:t>四句话收尾：结构、功能、工作流，以及例子说明的事——日常写入就会让共享的定义悄悄出错，MAVRA 能发现，能唯一修好就修，修不了就停用，不让错误答案出去。</a:t>
+            </a:r>
+            <a:endParaRPr lang="en-US" dirty="0"/>
+          </a:p>
+        </p:txBody>
+      </p:sp>
+      <p:sp>
+        <p:nvSpPr>
+          <p:cNvPr id="4" name="Slide Number Placeholder 3"/>
+          <p:cNvSpPr>
+            <a:spLocks noGrp="1"/>
+          </p:cNvSpPr>
+          <p:nvPr>
+            <p:ph type="sldNum" sz="quarter" idx="10"/>
+          </p:nvPr>
+        </p:nvSpPr>
+        <p:spPr/>
+        <p:txBody>
+          <a:bodyPr/>
+          <a:lstStyle/>
+          <a:p>
+            <a:fld id="{F7021451-1387-4CA6-816F-3879F97B5CBC}" type="slidenum">
+              <a:rPr lang="en-US"/>
+              <a:t>10</a:t>
             </a:fld>
             <a:endParaRPr lang="en-US"/>
           </a:p>
@@ -626,7 +726,7 @@
           <a:p>
             <a:r>
               <a:rPr lang="en-US" dirty="0"/>
-              <a:t>先用一句话说清问题：指标定义被共享，数据会变，定义可能悄悄算错。MAVRA 做三件事：学习指标定义（紫色）、数据变了就重新校验（蓝色）、执行前把关（橙色）。后面三张图用的是同一套颜色。</a:t>
+              <a:t>先用一句话说清问题：指标定义被共享，数据会变，定义可能悄悄算错。MAVRA 做三件事：学习指标定义（紫色）、数据变了就重新校验（蓝色）、执行前把关（橙色）。后面三张图用的是同一套颜色，讲的都是“门店营业额”这个例子。</a:t>
             </a:r>
             <a:endParaRPr lang="en-US" dirty="0"/>
           </a:p>
@@ -714,7 +814,7 @@
           <a:p>
             <a:r>
               <a:rPr lang="en-US" dirty="0"/>
-              <a:t>左边是用户智能体，它发两种请求。蓝色 1–5 是查询指标定义：智能体只说“退货金额”，查询服务从指标库读出定义；它依赖的数据变了，而某条规则在新数据版本上还没有校验结果，就交给维护去校验，结果写入缓存，再返回有效的 v2。橙色 6–8 是执行 SQL：智能体写好 SQL 并注明用的是 v2，执行前校验直接复用缓存里的校验结果，在同一快照上执行。紫色是学习：内置智能体学到的定义，发布前校验通过才进入指标库。</a:t>
+              <a:t>左边是用户智能体，它发两种请求。蓝色 1–5 是查询指标定义：智能体只说“营业额”，查询服务从指标库读出定义；销售表的数据变了，某条规则在新数据版本上还没有校验结果，就交给维护去校验，结果写入缓存，再返回有效的 v2。橙色 6–8 是执行 SQL：智能体写好 SQL 并注明用的是 v2，执行前校验复用缓存里的结果，在同一快照上执行。紫色是学习：内置智能体学到的定义，发布前校验通过才进入指标库。</a:t>
             </a:r>
             <a:endParaRPr lang="en-US" dirty="0"/>
           </a:p>
@@ -802,7 +902,7 @@
           <a:p>
             <a:r>
               <a:rPr lang="en-US" dirty="0"/>
-              <a:t>上面一行是查询指标定义：先按名称匹配；再看它用到的表的数据版本有没有变（store_returns 从 14 变成 15）；然后逐条规则查缓存：“每笔退货一行”退货率已经校验过，直接复用；date_dim 没变，复用；“退货都有日期”在 15 上没有结果，现在校验并写入缓存；最后返回有效的 v2。中间是校验结果缓存：按（规则，数据版本）存，表里写明谁写入、哪一步复用。下面一行是执行 SQL：先检查注明的 v2 能不能用；再在这条查询的快照上校验——这期间又有写入，数据版本变成 16，所以两条规则在快照里重新校验并写入缓存；最后在同一快照上执行，结果 329.4 万。</a:t>
+              <a:t>上面一行是查询指标定义：按名称匹配到“门店营业额”（“电子品类门店营业额”也包含这几个字，一并返回，由智能体按口径说明挑选）；再看销售表的数据版本有没有变（14 变成 15）；然后逐条规则查缓存：“每笔销售一行”电子品类那个指标刚校验过，直接复用；日期表没变，复用；“丢行率不超标”在 15 上没有结果，现在校验并写入缓存；最后返回有效的 v2。中间是校验结果缓存：按（规则，数据版本）存，表里写明谁写入、哪一步复用。下面一行是执行 SQL：先检查注明的 v2 能不能用；再在这条查询的快照上校验——这期间又有写入，数据版本变成 16，所以两条规则在快照里重新校验并写入缓存；最后在同一快照上执行。</a:t>
             </a:r>
             <a:endParaRPr lang="en-US" dirty="0"/>
           </a:p>
@@ -890,7 +990,7 @@
           <a:p>
             <a:r>
               <a:rPr lang="en-US" dirty="0"/>
-              <a:t>跟着退货金额这个指标走一遍。内置智能体回答“4 月门店退货金额”，答案核验正确、发布前校验通过，发布 v1。之后追加迟到的退货，这是普通写入：规则仍成立，没变的表直接用缓存，还是 v1。再之后每笔退货多了一行“申请”状态，这是破坏性写入：“每笔退货一行”不成立，v1 停用，不处理的话 5 月的答案会翻倍。修复时在取值少的列上逐个试过滤，只有 sr_status = 完成 能恢复每笔退货一行；再用学习时的数据重算，结果和当初一致，于是发布 v2。红框是另一种情况：追加了整份备份数据，两个过滤都可行，无法判断哪个对，就停用，等待重新学习。</a:t>
+              <a:t>跟着门店营业额走一遍，后面四页是这个过程的真实记录。内置智能体回答“3 月门店营业额”，答案核验正确、发布前校验通过，发布 v1。之后追加一批新销售：规则仍成立，其他指标直接复用结果，还是 v1。再之后有一批销售被更正：旧行保留但标成非当前，新增当前行——“每笔销售一行”不成立，v1 停用，不处理会把新旧两版都算进去。修复时在取值少的列上试过滤，只有“只算当前行”可行；用学习时的数据重算 3 月，结果一致，发布 v2。红框是另一种情况：一批销售被重复装载，没有任何过滤能修好，就停用并提醒，等待重新学习。</a:t>
             </a:r>
             <a:endParaRPr lang="en-US" dirty="0"/>
           </a:p>
@@ -978,7 +1078,7 @@
           <a:p>
             <a:r>
               <a:rPr lang="en-US" dirty="0"/>
-              <a:t>三句话收尾：结构是查询服务、指标库、内置智能体与维护；功能是学习、校验、执行前把关；工作流是先查有效的指标定义、再在快照上校验并执行，校验结果能复用就复用。</a:t>
+              <a:t>这一页开始是实验里的真实记录。内置智能体拿到一道给出口径的题，几步就写出 SQL，答案和标准答案一致。然后大模型把它整理成右边这条定义，MAVRA 从定义里推出三条校验规则：每笔销售一行、日期键唯一、丢行率不超标。学习时有 1.03% 的销售关联不到日期表，这个比例被记下来，以后超过才算异常。</a:t>
             </a:r>
             <a:endParaRPr lang="en-US" dirty="0"/>
           </a:p>
@@ -1002,6 +1102,270 @@
             <a:fld id="{F7021451-1387-4CA6-816F-3879F97B5CBC}" type="slidenum">
               <a:rPr lang="en-US"/>
               <a:t>6</a:t>
+            </a:fld>
+            <a:endParaRPr lang="en-US"/>
+          </a:p>
+        </p:txBody>
+      </p:sp>
+    </p:spTree>
+    <p:extLst>
+      <p:ext uri="{BB962C8B-B14F-4D97-AF65-F5344CB8AC3E}">
+        <p14:creationId xmlns:p14="http://schemas.microsoft.com/office/powerpoint/2010/main" val="1024086991"/>
+      </p:ext>
+    </p:extLst>
+  </p:cSld>
+  <p:clrMapOvr>
+    <a:masterClrMapping/>
+  </p:clrMapOvr>
+</p:notes>
+</file>
+
+<file path=ppt/notesSlides/notesSlide7.xml><?xml version="1.0" encoding="utf-8"?>
+<p:notes xmlns:a="http://schemas.openxmlformats.org/drawingml/2006/main" xmlns:r="http://schemas.openxmlformats.org/officeDocument/2006/relationships" xmlns:p="http://schemas.openxmlformats.org/presentationml/2006/main">
+  <p:cSld>
+    <p:spTree>
+      <p:nvGrpSpPr>
+        <p:cNvPr id="1" name=""/>
+        <p:cNvGrpSpPr/>
+        <p:nvPr/>
+      </p:nvGrpSpPr>
+      <p:grpSpPr>
+        <a:xfrm>
+          <a:off x="0" y="0"/>
+          <a:ext cx="0" cy="0"/>
+          <a:chOff x="0" y="0"/>
+          <a:chExt cx="0" cy="0"/>
+        </a:xfrm>
+      </p:grpSpPr>
+      <p:sp>
+        <p:nvSpPr>
+          <p:cNvPr id="2" name="Slide Image Placeholder 1"/>
+          <p:cNvSpPr>
+            <a:spLocks noGrp="1" noRot="1" noChangeAspect="1"/>
+          </p:cNvSpPr>
+          <p:nvPr>
+            <p:ph type="sldImg"/>
+          </p:nvPr>
+        </p:nvSpPr>
+        <p:spPr/>
+      </p:sp>
+      <p:sp>
+        <p:nvSpPr>
+          <p:cNvPr id="3" name="Notes Placeholder 2"/>
+          <p:cNvSpPr>
+            <a:spLocks noGrp="1"/>
+          </p:cNvSpPr>
+          <p:nvPr>
+            <p:ph type="body" idx="1"/>
+          </p:nvPr>
+        </p:nvSpPr>
+        <p:spPr/>
+        <p:txBody>
+          <a:bodyPr/>
+          <a:lstStyle/>
+          <a:p>
+            <a:r>
+              <a:rPr lang="en-US" dirty="0"/>
+              <a:t>同一个问题“9 月门店营业额”，在三种日常写入下分别问一次。追加新数据：定义仍然对，MAVRA 重新校验后继续用；而且电子品类、退货率等 6 个依赖销售表的指标，一共只跑了 2 次校验，其余直接复用。数据更正：数据仓库里很常见的做法是旧行不删、标成非当前，再插一行新的。不维护的话会把新旧两版都加进去，多出 137 万；MAVRA 停用旧定义、修好后答对。重复装载：一批数据被导了两次，没法用过滤修好，MAVRA 停用并提醒智能体，智能体自己去重，3 次里 2 次答对。重点：这三种都是普通的数据写入，表结构没变，只看表结构的做法完全发现不了。</a:t>
+            </a:r>
+            <a:endParaRPr lang="en-US" dirty="0"/>
+          </a:p>
+        </p:txBody>
+      </p:sp>
+      <p:sp>
+        <p:nvSpPr>
+          <p:cNvPr id="4" name="Slide Number Placeholder 3"/>
+          <p:cNvSpPr>
+            <a:spLocks noGrp="1"/>
+          </p:cNvSpPr>
+          <p:nvPr>
+            <p:ph type="sldNum" sz="quarter" idx="10"/>
+          </p:nvPr>
+        </p:nvSpPr>
+        <p:spPr/>
+        <p:txBody>
+          <a:bodyPr/>
+          <a:lstStyle/>
+          <a:p>
+            <a:fld id="{F7021451-1387-4CA6-816F-3879F97B5CBC}" type="slidenum">
+              <a:rPr lang="en-US"/>
+              <a:t>7</a:t>
+            </a:fld>
+            <a:endParaRPr lang="en-US"/>
+          </a:p>
+        </p:txBody>
+      </p:sp>
+    </p:spTree>
+    <p:extLst>
+      <p:ext uri="{BB962C8B-B14F-4D97-AF65-F5344CB8AC3E}">
+        <p14:creationId xmlns:p14="http://schemas.microsoft.com/office/powerpoint/2010/main" val="1024086991"/>
+      </p:ext>
+    </p:extLst>
+  </p:cSld>
+  <p:clrMapOvr>
+    <a:masterClrMapping/>
+  </p:clrMapOvr>
+</p:notes>
+</file>
+
+<file path=ppt/notesSlides/notesSlide8.xml><?xml version="1.0" encoding="utf-8"?>
+<p:notes xmlns:a="http://schemas.openxmlformats.org/drawingml/2006/main" xmlns:r="http://schemas.openxmlformats.org/officeDocument/2006/relationships" xmlns:p="http://schemas.openxmlformats.org/presentationml/2006/main">
+  <p:cSld>
+    <p:spTree>
+      <p:nvGrpSpPr>
+        <p:cNvPr id="1" name=""/>
+        <p:cNvGrpSpPr/>
+        <p:nvPr/>
+      </p:nvGrpSpPr>
+      <p:grpSpPr>
+        <a:xfrm>
+          <a:off x="0" y="0"/>
+          <a:ext cx="0" cy="0"/>
+          <a:chOff x="0" y="0"/>
+          <a:chExt cx="0" cy="0"/>
+        </a:xfrm>
+      </p:grpSpPr>
+      <p:sp>
+        <p:nvSpPr>
+          <p:cNvPr id="2" name="Slide Image Placeholder 1"/>
+          <p:cNvSpPr>
+            <a:spLocks noGrp="1" noRot="1" noChangeAspect="1"/>
+          </p:cNvSpPr>
+          <p:nvPr>
+            <p:ph type="sldImg"/>
+          </p:nvPr>
+        </p:nvSpPr>
+        <p:spPr/>
+      </p:sp>
+      <p:sp>
+        <p:nvSpPr>
+          <p:cNvPr id="3" name="Notes Placeholder 2"/>
+          <p:cNvSpPr>
+            <a:spLocks noGrp="1"/>
+          </p:cNvSpPr>
+          <p:nvPr>
+            <p:ph type="body" idx="1"/>
+          </p:nvPr>
+        </p:nvSpPr>
+        <p:spPr/>
+        <p:txBody>
+          <a:bodyPr/>
+          <a:lstStyle/>
+          <a:p>
+            <a:r>
+              <a:rPr lang="en-US" dirty="0"/>
+              <a:t>数据更正之后，第一个用到销售表的查询到来，先检查名称匹配到的电子品类营业额。MAVRA 一校验就发现每个销售键平均有 1.07 行，停用旧定义；然后自动找修复，只有“只算当前行”这一个过滤可行，四项检查都过了，发布 v2，一共 28.7 秒。接着检查门店营业额：它依赖的是同一条规则、同一个数据版本，结果和修复都直接复用，45.8 毫秒就好了。退货率因为要关联销售表，也跟着修好。最后用户智能体收到提醒，按新定义写 SQL，答对。</a:t>
+            </a:r>
+            <a:endParaRPr lang="en-US" dirty="0"/>
+          </a:p>
+        </p:txBody>
+      </p:sp>
+      <p:sp>
+        <p:nvSpPr>
+          <p:cNvPr id="4" name="Slide Number Placeholder 3"/>
+          <p:cNvSpPr>
+            <a:spLocks noGrp="1"/>
+          </p:cNvSpPr>
+          <p:nvPr>
+            <p:ph type="sldNum" sz="quarter" idx="10"/>
+          </p:nvPr>
+        </p:nvSpPr>
+        <p:spPr/>
+        <p:txBody>
+          <a:bodyPr/>
+          <a:lstStyle/>
+          <a:p>
+            <a:fld id="{F7021451-1387-4CA6-816F-3879F97B5CBC}" type="slidenum">
+              <a:rPr lang="en-US"/>
+              <a:t>8</a:t>
+            </a:fld>
+            <a:endParaRPr lang="en-US"/>
+          </a:p>
+        </p:txBody>
+      </p:sp>
+    </p:spTree>
+    <p:extLst>
+      <p:ext uri="{BB962C8B-B14F-4D97-AF65-F5344CB8AC3E}">
+        <p14:creationId xmlns:p14="http://schemas.microsoft.com/office/powerpoint/2010/main" val="1024086991"/>
+      </p:ext>
+    </p:extLst>
+  </p:cSld>
+  <p:clrMapOvr>
+    <a:masterClrMapping/>
+  </p:clrMapOvr>
+</p:notes>
+</file>
+
+<file path=ppt/notesSlides/notesSlide9.xml><?xml version="1.0" encoding="utf-8"?>
+<p:notes xmlns:a="http://schemas.openxmlformats.org/drawingml/2006/main" xmlns:r="http://schemas.openxmlformats.org/officeDocument/2006/relationships" xmlns:p="http://schemas.openxmlformats.org/presentationml/2006/main">
+  <p:cSld>
+    <p:spTree>
+      <p:nvGrpSpPr>
+        <p:cNvPr id="1" name=""/>
+        <p:cNvGrpSpPr/>
+        <p:nvPr/>
+      </p:nvGrpSpPr>
+      <p:grpSpPr>
+        <a:xfrm>
+          <a:off x="0" y="0"/>
+          <a:ext cx="0" cy="0"/>
+          <a:chOff x="0" y="0"/>
+          <a:chExt cx="0" cy="0"/>
+        </a:xfrm>
+      </p:grpSpPr>
+      <p:sp>
+        <p:nvSpPr>
+          <p:cNvPr id="2" name="Slide Image Placeholder 1"/>
+          <p:cNvSpPr>
+            <a:spLocks noGrp="1" noRot="1" noChangeAspect="1"/>
+          </p:cNvSpPr>
+          <p:nvPr>
+            <p:ph type="sldImg"/>
+          </p:nvPr>
+        </p:nvSpPr>
+        <p:spPr/>
+      </p:sp>
+      <p:sp>
+        <p:nvSpPr>
+          <p:cNvPr id="3" name="Notes Placeholder 2"/>
+          <p:cNvSpPr>
+            <a:spLocks noGrp="1"/>
+          </p:cNvSpPr>
+          <p:nvPr>
+            <p:ph type="body" idx="1"/>
+          </p:nvPr>
+        </p:nvSpPr>
+        <p:spPr/>
+        <p:txBody>
+          <a:bodyPr/>
+          <a:lstStyle/>
+          <a:p>
+            <a:r>
+              <a:rPr lang="en-US" dirty="0"/>
+              <a:t>为什么回归测试不能直接用现在的数据？学习题问的是 3 月，而这次更正正好覆盖 3 月。在现在的数据上，智能体当初写的 SQL 本身就会把旧版本也算进去，得到 1489 万；正确的新定义得到 1342 万，两者对不上，正确的修复就被拒了。我们实际跑过这个对照：用现在的数据比，这个修复确实被拒绝。用学习时的数据比，两者都是 1357 万，修复被接受。</a:t>
+            </a:r>
+            <a:endParaRPr lang="en-US" dirty="0"/>
+          </a:p>
+        </p:txBody>
+      </p:sp>
+      <p:sp>
+        <p:nvSpPr>
+          <p:cNvPr id="4" name="Slide Number Placeholder 3"/>
+          <p:cNvSpPr>
+            <a:spLocks noGrp="1"/>
+          </p:cNvSpPr>
+          <p:nvPr>
+            <p:ph type="sldNum" sz="quarter" idx="10"/>
+          </p:nvPr>
+        </p:nvSpPr>
+        <p:spPr/>
+        <p:txBody>
+          <a:bodyPr/>
+          <a:lstStyle/>
+          <a:p>
+            <a:fld id="{F7021451-1387-4CA6-816F-3879F97B5CBC}" type="slidenum">
+              <a:rPr lang="en-US"/>
+              <a:t>9</a:t>
             </a:fld>
             <a:endParaRPr lang="en-US"/>
           </a:p>
@@ -1848,9 +2212,543 @@
                 <a:ea typeface="Microsoft YaHei" pitchFamily="34" charset="-122"/>
                 <a:cs typeface="Microsoft YaHei" pitchFamily="34" charset="-120"/>
               </a:rPr>
-              <a:t>系统结构 · 功能 · 工作流</a:t>
+              <a:t>系统结构 · 功能 · 工作流 · 一个真实例子</a:t>
             </a:r>
             <a:endParaRPr lang="en-US" sz="2200" dirty="0"/>
+          </a:p>
+        </p:txBody>
+      </p:sp>
+    </p:spTree>
+  </p:cSld>
+  <p:clrMapOvr>
+    <a:masterClrMapping/>
+  </p:clrMapOvr>
+</p:sld>
+</file>
+
+<file path=ppt/slides/slide10.xml><?xml version="1.0" encoding="utf-8"?>
+<p:sld xmlns:a="http://schemas.openxmlformats.org/drawingml/2006/main" xmlns:r="http://schemas.openxmlformats.org/officeDocument/2006/relationships" xmlns:p="http://schemas.openxmlformats.org/presentationml/2006/main">
+  <p:cSld name="Slide 10">
+    <p:spTree>
+      <p:nvGrpSpPr>
+        <p:cNvPr id="1" name=""/>
+        <p:cNvGrpSpPr/>
+        <p:nvPr/>
+      </p:nvGrpSpPr>
+      <p:grpSpPr>
+        <a:xfrm>
+          <a:off x="0" y="0"/>
+          <a:ext cx="0" cy="0"/>
+          <a:chOff x="0" y="0"/>
+          <a:chExt cx="0" cy="0"/>
+        </a:xfrm>
+      </p:grpSpPr>
+      <p:sp>
+        <p:nvSpPr>
+          <p:cNvPr id="2" name="Text 0"/>
+          <p:cNvSpPr/>
+          <p:nvPr>
+            <p:ph idx="100" type="title" hasCustomPrompt="1"/>
+          </p:nvPr>
+        </p:nvSpPr>
+        <p:spPr>
+          <a:xfrm>
+            <a:off x="548640" y="548640"/>
+            <a:ext cx="11094415" cy="822960"/>
+          </a:xfrm>
+          <a:prstGeom prst="rect">
+            <a:avLst/>
+          </a:prstGeom>
+          <a:noFill/>
+          <a:ln/>
+        </p:spPr>
+        <p:txBody>
+          <a:bodyPr wrap="square" lIns="0" tIns="0" rIns="0" bIns="0" rtlCol="0" anchor="ctr"/>
+          <a:lstStyle/>
+          <a:p>
+            <a:pPr algn="l" indent="0" marL="0">
+              <a:buNone/>
+            </a:pPr>
+            <a:r>
+              <a:rPr lang="en-US" sz="3200" b="1" dirty="0">
+                <a:solidFill>
+                  <a:srgbClr val="FFFFFF"/>
+                </a:solidFill>
+                <a:latin typeface="Microsoft YaHei" pitchFamily="34" charset="0"/>
+                <a:ea typeface="Microsoft YaHei" pitchFamily="34" charset="-122"/>
+                <a:cs typeface="Microsoft YaHei" pitchFamily="34" charset="-120"/>
+              </a:rPr>
+              <a:t>小结</a:t>
+            </a:r>
+            <a:endParaRPr lang="en-US" sz="3200" dirty="0"/>
+          </a:p>
+        </p:txBody>
+      </p:sp>
+      <p:sp>
+        <p:nvSpPr>
+          <p:cNvPr id="3" name="label 结构"/>
+          <p:cNvSpPr/>
+          <p:nvPr/>
+        </p:nvSpPr>
+        <p:spPr>
+          <a:xfrm>
+            <a:off x="548640" y="1600200"/>
+            <a:ext cx="1463040" cy="640080"/>
+          </a:xfrm>
+          <a:prstGeom prst="roundRect">
+            <a:avLst>
+              <a:gd name="adj" fmla="val 50000"/>
+            </a:avLst>
+          </a:prstGeom>
+          <a:solidFill>
+            <a:srgbClr val="1D5BA6"/>
+          </a:solidFill>
+          <a:ln w="12700">
+            <a:solidFill>
+              <a:srgbClr val="1D5BA6"/>
+            </a:solidFill>
+            <a:prstDash val="solid"/>
+          </a:ln>
+        </p:spPr>
+      </p:sp>
+      <p:sp>
+        <p:nvSpPr>
+          <p:cNvPr id="4" name="Text 2"/>
+          <p:cNvSpPr txBox="1"/>
+          <p:nvPr/>
+        </p:nvSpPr>
+        <p:spPr>
+          <a:xfrm>
+            <a:off x="548640" y="1600200"/>
+            <a:ext cx="1463040" cy="640080"/>
+          </a:xfrm>
+          <a:prstGeom prst="rect">
+            <a:avLst/>
+          </a:prstGeom>
+          <a:noFill/>
+          <a:ln/>
+        </p:spPr>
+        <p:txBody>
+          <a:bodyPr wrap="square" lIns="0" tIns="0" rIns="0" bIns="0" rtlCol="0" anchor="ctr"/>
+          <a:lstStyle/>
+          <a:p>
+            <a:pPr algn="ctr" indent="0" marL="0">
+              <a:buNone/>
+            </a:pPr>
+            <a:r>
+              <a:rPr lang="en-US" sz="2000" b="1" dirty="0">
+                <a:solidFill>
+                  <a:srgbClr val="FFFFFF"/>
+                </a:solidFill>
+                <a:latin typeface="Microsoft YaHei" pitchFamily="34" charset="0"/>
+                <a:ea typeface="Microsoft YaHei" pitchFamily="34" charset="-122"/>
+                <a:cs typeface="Microsoft YaHei" pitchFamily="34" charset="-120"/>
+              </a:rPr>
+              <a:t>结构</a:t>
+            </a:r>
+            <a:endParaRPr lang="en-US" sz="2000" dirty="0"/>
+          </a:p>
+        </p:txBody>
+      </p:sp>
+      <p:sp>
+        <p:nvSpPr>
+          <p:cNvPr id="5" name="Text 3"/>
+          <p:cNvSpPr txBox="1"/>
+          <p:nvPr/>
+        </p:nvSpPr>
+        <p:spPr>
+          <a:xfrm>
+            <a:off x="2377440" y="1508760"/>
+            <a:ext cx="9265615" cy="822960"/>
+          </a:xfrm>
+          <a:prstGeom prst="rect">
+            <a:avLst/>
+          </a:prstGeom>
+          <a:noFill/>
+          <a:ln/>
+        </p:spPr>
+        <p:txBody>
+          <a:bodyPr wrap="square" lIns="0" tIns="0" rIns="0" bIns="0" rtlCol="0" anchor="ctr"/>
+          <a:lstStyle/>
+          <a:p>
+            <a:pPr indent="0" marL="0">
+              <a:buNone/>
+            </a:pPr>
+            <a:r>
+              <a:rPr lang="en-US" sz="1900" dirty="0">
+                <a:solidFill>
+                  <a:srgbClr val="FFFFFF"/>
+                </a:solidFill>
+                <a:latin typeface="Microsoft YaHei" pitchFamily="34" charset="0"/>
+                <a:ea typeface="Microsoft YaHei" pitchFamily="34" charset="-122"/>
+                <a:cs typeface="Microsoft YaHei" pitchFamily="34" charset="-120"/>
+              </a:rPr>
+              <a:t>用户智能体 → MAVRA（查询服务、指标库、内置智能体与维护）→ 数据库</a:t>
+            </a:r>
+            <a:endParaRPr lang="en-US" sz="1900" dirty="0"/>
+          </a:p>
+        </p:txBody>
+      </p:sp>
+      <p:sp>
+        <p:nvSpPr>
+          <p:cNvPr id="6" name="label 功能"/>
+          <p:cNvSpPr/>
+          <p:nvPr/>
+        </p:nvSpPr>
+        <p:spPr>
+          <a:xfrm>
+            <a:off x="548640" y="2743200"/>
+            <a:ext cx="1463040" cy="640080"/>
+          </a:xfrm>
+          <a:prstGeom prst="roundRect">
+            <a:avLst>
+              <a:gd name="adj" fmla="val 50000"/>
+            </a:avLst>
+          </a:prstGeom>
+          <a:solidFill>
+            <a:srgbClr val="1D5BA6"/>
+          </a:solidFill>
+          <a:ln w="12700">
+            <a:solidFill>
+              <a:srgbClr val="1D5BA6"/>
+            </a:solidFill>
+            <a:prstDash val="solid"/>
+          </a:ln>
+        </p:spPr>
+      </p:sp>
+      <p:sp>
+        <p:nvSpPr>
+          <p:cNvPr id="7" name="Text 5"/>
+          <p:cNvSpPr txBox="1"/>
+          <p:nvPr/>
+        </p:nvSpPr>
+        <p:spPr>
+          <a:xfrm>
+            <a:off x="548640" y="2743200"/>
+            <a:ext cx="1463040" cy="640080"/>
+          </a:xfrm>
+          <a:prstGeom prst="rect">
+            <a:avLst/>
+          </a:prstGeom>
+          <a:noFill/>
+          <a:ln/>
+        </p:spPr>
+        <p:txBody>
+          <a:bodyPr wrap="square" lIns="0" tIns="0" rIns="0" bIns="0" rtlCol="0" anchor="ctr"/>
+          <a:lstStyle/>
+          <a:p>
+            <a:pPr algn="ctr" indent="0" marL="0">
+              <a:buNone/>
+            </a:pPr>
+            <a:r>
+              <a:rPr lang="en-US" sz="2000" b="1" dirty="0">
+                <a:solidFill>
+                  <a:srgbClr val="FFFFFF"/>
+                </a:solidFill>
+                <a:latin typeface="Microsoft YaHei" pitchFamily="34" charset="0"/>
+                <a:ea typeface="Microsoft YaHei" pitchFamily="34" charset="-122"/>
+                <a:cs typeface="Microsoft YaHei" pitchFamily="34" charset="-120"/>
+              </a:rPr>
+              <a:t>功能</a:t>
+            </a:r>
+            <a:endParaRPr lang="en-US" sz="2000" dirty="0"/>
+          </a:p>
+        </p:txBody>
+      </p:sp>
+      <p:sp>
+        <p:nvSpPr>
+          <p:cNvPr id="8" name="Text 6"/>
+          <p:cNvSpPr txBox="1"/>
+          <p:nvPr/>
+        </p:nvSpPr>
+        <p:spPr>
+          <a:xfrm>
+            <a:off x="2377440" y="2651760"/>
+            <a:ext cx="9265615" cy="822960"/>
+          </a:xfrm>
+          <a:prstGeom prst="rect">
+            <a:avLst/>
+          </a:prstGeom>
+          <a:noFill/>
+          <a:ln/>
+        </p:spPr>
+        <p:txBody>
+          <a:bodyPr wrap="square" lIns="0" tIns="0" rIns="0" bIns="0" rtlCol="0" anchor="ctr"/>
+          <a:lstStyle/>
+          <a:p>
+            <a:pPr indent="0" marL="0">
+              <a:buNone/>
+            </a:pPr>
+            <a:r>
+              <a:rPr lang="en-US" sz="1900" dirty="0">
+                <a:solidFill>
+                  <a:srgbClr val="FFFFFF"/>
+                </a:solidFill>
+                <a:latin typeface="Microsoft YaHei" pitchFamily="34" charset="0"/>
+                <a:ea typeface="Microsoft YaHei" pitchFamily="34" charset="-122"/>
+                <a:cs typeface="Microsoft YaHei" pitchFamily="34" charset="-120"/>
+              </a:rPr>
+              <a:t>学习指标定义；数据变了重新校验，校验结果缓存共用；执行前在同一快照上校验</a:t>
+            </a:r>
+            <a:endParaRPr lang="en-US" sz="1900" dirty="0"/>
+          </a:p>
+        </p:txBody>
+      </p:sp>
+      <p:sp>
+        <p:nvSpPr>
+          <p:cNvPr id="9" name="label 工作流"/>
+          <p:cNvSpPr/>
+          <p:nvPr/>
+        </p:nvSpPr>
+        <p:spPr>
+          <a:xfrm>
+            <a:off x="548640" y="3886200"/>
+            <a:ext cx="1463040" cy="640080"/>
+          </a:xfrm>
+          <a:prstGeom prst="roundRect">
+            <a:avLst>
+              <a:gd name="adj" fmla="val 50000"/>
+            </a:avLst>
+          </a:prstGeom>
+          <a:solidFill>
+            <a:srgbClr val="1D5BA6"/>
+          </a:solidFill>
+          <a:ln w="12700">
+            <a:solidFill>
+              <a:srgbClr val="1D5BA6"/>
+            </a:solidFill>
+            <a:prstDash val="solid"/>
+          </a:ln>
+        </p:spPr>
+      </p:sp>
+      <p:sp>
+        <p:nvSpPr>
+          <p:cNvPr id="10" name="Text 8"/>
+          <p:cNvSpPr txBox="1"/>
+          <p:nvPr/>
+        </p:nvSpPr>
+        <p:spPr>
+          <a:xfrm>
+            <a:off x="548640" y="3886200"/>
+            <a:ext cx="1463040" cy="640080"/>
+          </a:xfrm>
+          <a:prstGeom prst="rect">
+            <a:avLst/>
+          </a:prstGeom>
+          <a:noFill/>
+          <a:ln/>
+        </p:spPr>
+        <p:txBody>
+          <a:bodyPr wrap="square" lIns="0" tIns="0" rIns="0" bIns="0" rtlCol="0" anchor="ctr"/>
+          <a:lstStyle/>
+          <a:p>
+            <a:pPr algn="ctr" indent="0" marL="0">
+              <a:buNone/>
+            </a:pPr>
+            <a:r>
+              <a:rPr lang="en-US" sz="2000" b="1" dirty="0">
+                <a:solidFill>
+                  <a:srgbClr val="FFFFFF"/>
+                </a:solidFill>
+                <a:latin typeface="Microsoft YaHei" pitchFamily="34" charset="0"/>
+                <a:ea typeface="Microsoft YaHei" pitchFamily="34" charset="-122"/>
+                <a:cs typeface="Microsoft YaHei" pitchFamily="34" charset="-120"/>
+              </a:rPr>
+              <a:t>工作流</a:t>
+            </a:r>
+            <a:endParaRPr lang="en-US" sz="2000" dirty="0"/>
+          </a:p>
+        </p:txBody>
+      </p:sp>
+      <p:sp>
+        <p:nvSpPr>
+          <p:cNvPr id="11" name="Text 9"/>
+          <p:cNvSpPr txBox="1"/>
+          <p:nvPr/>
+        </p:nvSpPr>
+        <p:spPr>
+          <a:xfrm>
+            <a:off x="2377440" y="3794760"/>
+            <a:ext cx="9265615" cy="822960"/>
+          </a:xfrm>
+          <a:prstGeom prst="rect">
+            <a:avLst/>
+          </a:prstGeom>
+          <a:noFill/>
+          <a:ln/>
+        </p:spPr>
+        <p:txBody>
+          <a:bodyPr wrap="square" lIns="0" tIns="0" rIns="0" bIns="0" rtlCol="0" anchor="ctr"/>
+          <a:lstStyle/>
+          <a:p>
+            <a:pPr indent="0" marL="0">
+              <a:buNone/>
+            </a:pPr>
+            <a:r>
+              <a:rPr lang="en-US" sz="1900" dirty="0">
+                <a:solidFill>
+                  <a:srgbClr val="FFFFFF"/>
+                </a:solidFill>
+                <a:latin typeface="Microsoft YaHei" pitchFamily="34" charset="0"/>
+                <a:ea typeface="Microsoft YaHei" pitchFamily="34" charset="-122"/>
+                <a:cs typeface="Microsoft YaHei" pitchFamily="34" charset="-120"/>
+              </a:rPr>
+              <a:t>查指标定义 → 执行 SQL；数据变化 → 校验 → 修复或停用 → 重新学习</a:t>
+            </a:r>
+            <a:endParaRPr lang="en-US" sz="1900" dirty="0"/>
+          </a:p>
+        </p:txBody>
+      </p:sp>
+      <p:sp>
+        <p:nvSpPr>
+          <p:cNvPr id="12" name="label 例子"/>
+          <p:cNvSpPr/>
+          <p:nvPr/>
+        </p:nvSpPr>
+        <p:spPr>
+          <a:xfrm>
+            <a:off x="548640" y="5029200"/>
+            <a:ext cx="1463040" cy="640080"/>
+          </a:xfrm>
+          <a:prstGeom prst="roundRect">
+            <a:avLst>
+              <a:gd name="adj" fmla="val 50000"/>
+            </a:avLst>
+          </a:prstGeom>
+          <a:solidFill>
+            <a:srgbClr val="1D5BA6"/>
+          </a:solidFill>
+          <a:ln w="12700">
+            <a:solidFill>
+              <a:srgbClr val="1D5BA6"/>
+            </a:solidFill>
+            <a:prstDash val="solid"/>
+          </a:ln>
+        </p:spPr>
+      </p:sp>
+      <p:sp>
+        <p:nvSpPr>
+          <p:cNvPr id="13" name="Text 11"/>
+          <p:cNvSpPr txBox="1"/>
+          <p:nvPr/>
+        </p:nvSpPr>
+        <p:spPr>
+          <a:xfrm>
+            <a:off x="548640" y="5029200"/>
+            <a:ext cx="1463040" cy="640080"/>
+          </a:xfrm>
+          <a:prstGeom prst="rect">
+            <a:avLst/>
+          </a:prstGeom>
+          <a:noFill/>
+          <a:ln/>
+        </p:spPr>
+        <p:txBody>
+          <a:bodyPr wrap="square" lIns="0" tIns="0" rIns="0" bIns="0" rtlCol="0" anchor="ctr"/>
+          <a:lstStyle/>
+          <a:p>
+            <a:pPr algn="ctr" indent="0" marL="0">
+              <a:buNone/>
+            </a:pPr>
+            <a:r>
+              <a:rPr lang="en-US" sz="2000" b="1" dirty="0">
+                <a:solidFill>
+                  <a:srgbClr val="FFFFFF"/>
+                </a:solidFill>
+                <a:latin typeface="Microsoft YaHei" pitchFamily="34" charset="0"/>
+                <a:ea typeface="Microsoft YaHei" pitchFamily="34" charset="-122"/>
+                <a:cs typeface="Microsoft YaHei" pitchFamily="34" charset="-120"/>
+              </a:rPr>
+              <a:t>例子</a:t>
+            </a:r>
+            <a:endParaRPr lang="en-US" sz="2000" dirty="0"/>
+          </a:p>
+        </p:txBody>
+      </p:sp>
+      <p:sp>
+        <p:nvSpPr>
+          <p:cNvPr id="14" name="Text 12"/>
+          <p:cNvSpPr txBox="1"/>
+          <p:nvPr/>
+        </p:nvSpPr>
+        <p:spPr>
+          <a:xfrm>
+            <a:off x="2377440" y="4937760"/>
+            <a:ext cx="9265615" cy="822960"/>
+          </a:xfrm>
+          <a:prstGeom prst="rect">
+            <a:avLst/>
+          </a:prstGeom>
+          <a:noFill/>
+          <a:ln/>
+        </p:spPr>
+        <p:txBody>
+          <a:bodyPr wrap="square" lIns="0" tIns="0" rIns="0" bIns="0" rtlCol="0" anchor="ctr"/>
+          <a:lstStyle/>
+          <a:p>
+            <a:pPr indent="0" marL="0">
+              <a:buNone/>
+            </a:pPr>
+            <a:r>
+              <a:rPr lang="en-US" sz="1900" dirty="0">
+                <a:solidFill>
+                  <a:srgbClr val="FFFFFF"/>
+                </a:solidFill>
+                <a:latin typeface="Microsoft YaHei" pitchFamily="34" charset="0"/>
+                <a:ea typeface="Microsoft YaHei" pitchFamily="34" charset="-122"/>
+                <a:cs typeface="Microsoft YaHei" pitchFamily="34" charset="-120"/>
+              </a:rPr>
+              <a:t>追加、更正、重复装载都是日常写入，表结构不变；MAVRA 都能发现，能修就修，修不了就停用</a:t>
+            </a:r>
+            <a:endParaRPr lang="en-US" sz="1900" dirty="0"/>
+          </a:p>
+        </p:txBody>
+      </p:sp>
+      <p:sp>
+        <p:nvSpPr>
+          <p:cNvPr id="25" name="Slide Number Placeholder 0"/>
+          <p:cNvSpPr>
+            <a:spLocks noGrp="1"/>
+          </p:cNvSpPr>
+          <p:nvPr>
+            <p:ph type="sldNum" sz="quarter" idx="4294967295"/>
+          </p:nvPr>
+        </p:nvSpPr>
+        <p:spPr>
+          <a:xfrm>
+            <a:off x="11185855" y="6446520"/>
+            <a:ext cx="457200" cy="274320"/>
+          </a:xfrm>
+          <a:prstGeom prst="rect">
+            <a:avLst/>
+          </a:prstGeom>
+          <a:extLst>
+            <a:ext uri="{C572A759-6A51-4108-AA02-DFA0A04FC94B}">
+              <ma14:wrappingTextBoxFlag xmlns:ma14="http://schemas.microsoft.com/office/mac/drawingml/2011/main" val="0"/>
+            </a:ext>
+          </a:extLst>
+        </p:spPr>
+        <p:txBody>
+          <a:bodyPr/>
+          <a:lstStyle>
+            <a:lvl1pPr>
+              <a:defRPr sz="1000">
+                <a:solidFill>
+                  <a:srgbClr val="CADCFC"/>
+                </a:solidFill>
+                <a:latin typeface="Microsoft YaHei"/>
+                <a:ea typeface="Microsoft YaHei"/>
+                <a:cs typeface="Microsoft YaHei"/>
+              </a:defRPr>
+            </a:lvl1pPr>
+          </a:lstStyle>
+          <a:p>
+            <a:pPr algn="r"/>
+            <a:fld id="{F7021451-1387-4CA6-816F-3879F97B5CBC}" type="slidenum">
+              <a:rPr b="0" lang="en-US"/>
+              <a:t>10</a:t>
+            </a:fld>
+            <a:endParaRPr lang="en-US"/>
           </a:p>
         </p:txBody>
       </p:sp>
@@ -1953,7 +2851,7 @@
                 <a:ea typeface="Microsoft YaHei" pitchFamily="34" charset="-122"/>
                 <a:cs typeface="Microsoft YaHei" pitchFamily="34" charset="-120"/>
               </a:rPr>
-              <a:t>数据智能体学到的指标定义（例如“门店退货金额怎么算”）会被很多智能体共享；数据一变，定义可能悄悄算错。MAVRA 是位于智能体和数据库之间的中间件，负责：</a:t>
+              <a:t>数据智能体学到的指标定义（例如“门店营业额怎么算”）会被很多智能体共享；数据一变，定义可能悄悄算错。MAVRA 是位于智能体和数据库之间的中间件，负责：</a:t>
             </a:r>
             <a:endParaRPr lang="en-US" sz="1600" dirty="0"/>
           </a:p>
@@ -2297,7 +3195,7 @@
                 <a:ea typeface="Microsoft YaHei" pitchFamily="34" charset="-122"/>
                 <a:cs typeface="Microsoft YaHei" pitchFamily="34" charset="-120"/>
               </a:rPr>
-              <a:t>记录每个指标定义依赖的校验规则（如“每笔退货一行”）。数据一变，只重新校验受影响的规则；校验结果按（规则，数据版本）缓存，大家共用。规则不成立就修复，修不了就停用。</a:t>
+              <a:t>记录每个指标定义依赖的校验规则（如“每笔销售一行”）。数据一变，只重新校验受影响的规则；校验结果按（规则，数据版本）缓存，大家共用。规则不成立就修复，修不了就停用。</a:t>
             </a:r>
             <a:endParaRPr lang="en-US" sz="1600" dirty="0"/>
           </a:p>
@@ -2972,8 +3870,8 @@
         </p:nvSpPr>
         <p:spPr>
           <a:xfrm>
-            <a:off x="548640" y="548640"/>
-            <a:ext cx="11094415" cy="822960"/>
+            <a:off x="548640" y="274320"/>
+            <a:ext cx="11094415" cy="685800"/>
           </a:xfrm>
           <a:prstGeom prst="rect">
             <a:avLst/>
@@ -2989,96 +3887,30 @@
               <a:buNone/>
             </a:pPr>
             <a:r>
-              <a:rPr lang="en-US" sz="3200" b="1" dirty="0">
+              <a:rPr lang="en-US" sz="3000" b="1" dirty="0">
                 <a:solidFill>
-                  <a:srgbClr val="FFFFFF"/>
+                  <a:srgbClr val="1F2A37"/>
                 </a:solidFill>
                 <a:latin typeface="Microsoft YaHei" pitchFamily="34" charset="0"/>
                 <a:ea typeface="Microsoft YaHei" pitchFamily="34" charset="-122"/>
                 <a:cs typeface="Microsoft YaHei" pitchFamily="34" charset="-120"/>
               </a:rPr>
-              <a:t>小结</a:t>
+              <a:t>真实例子①：内置智能体学到“门店营业额”</a:t>
             </a:r>
-            <a:endParaRPr lang="en-US" sz="3200" dirty="0"/>
+            <a:endParaRPr lang="en-US" sz="3000" dirty="0"/>
           </a:p>
         </p:txBody>
       </p:sp>
       <p:sp>
         <p:nvSpPr>
-          <p:cNvPr id="3" name="label 结构"/>
-          <p:cNvSpPr/>
+          <p:cNvPr id="3" name="Text 1"/>
+          <p:cNvSpPr txBox="1"/>
           <p:nvPr/>
         </p:nvSpPr>
         <p:spPr>
           <a:xfrm>
-            <a:off x="548640" y="1737360"/>
-            <a:ext cx="1463040" cy="640080"/>
-          </a:xfrm>
-          <a:prstGeom prst="roundRect">
-            <a:avLst>
-              <a:gd name="adj" fmla="val 50000"/>
-            </a:avLst>
-          </a:prstGeom>
-          <a:solidFill>
-            <a:srgbClr val="1D5BA6"/>
-          </a:solidFill>
-          <a:ln w="12700">
-            <a:solidFill>
-              <a:srgbClr val="1D5BA6"/>
-            </a:solidFill>
-            <a:prstDash val="solid"/>
-          </a:ln>
-        </p:spPr>
-      </p:sp>
-      <p:sp>
-        <p:nvSpPr>
-          <p:cNvPr id="4" name="Text 2"/>
-          <p:cNvSpPr txBox="1"/>
-          <p:nvPr/>
-        </p:nvSpPr>
-        <p:spPr>
-          <a:xfrm>
-            <a:off x="548640" y="1737360"/>
-            <a:ext cx="1463040" cy="640080"/>
-          </a:xfrm>
-          <a:prstGeom prst="rect">
-            <a:avLst/>
-          </a:prstGeom>
-          <a:noFill/>
-          <a:ln/>
-        </p:spPr>
-        <p:txBody>
-          <a:bodyPr wrap="square" lIns="0" tIns="0" rIns="0" bIns="0" rtlCol="0" anchor="ctr"/>
-          <a:lstStyle/>
-          <a:p>
-            <a:pPr algn="ctr" indent="0" marL="0">
-              <a:buNone/>
-            </a:pPr>
-            <a:r>
-              <a:rPr lang="en-US" sz="2000" b="1" dirty="0">
-                <a:solidFill>
-                  <a:srgbClr val="FFFFFF"/>
-                </a:solidFill>
-                <a:latin typeface="Microsoft YaHei" pitchFamily="34" charset="0"/>
-                <a:ea typeface="Microsoft YaHei" pitchFamily="34" charset="-122"/>
-                <a:cs typeface="Microsoft YaHei" pitchFamily="34" charset="-120"/>
-              </a:rPr>
-              <a:t>结构</a:t>
-            </a:r>
-            <a:endParaRPr lang="en-US" sz="2000" dirty="0"/>
-          </a:p>
-        </p:txBody>
-      </p:sp>
-      <p:sp>
-        <p:nvSpPr>
-          <p:cNvPr id="5" name="Text 3"/>
-          <p:cNvSpPr txBox="1"/>
-          <p:nvPr/>
-        </p:nvSpPr>
-        <p:spPr>
-          <a:xfrm>
-            <a:off x="2377440" y="1645920"/>
-            <a:ext cx="9265615" cy="822960"/>
+            <a:off x="548640" y="1143000"/>
+            <a:ext cx="5303520" cy="365760"/>
           </a:xfrm>
           <a:prstGeom prst="rect">
             <a:avLst/>
@@ -3094,42 +3926,42 @@
               <a:buNone/>
             </a:pPr>
             <a:r>
-              <a:rPr lang="en-US" sz="2000" dirty="0">
+              <a:rPr lang="en-US" sz="1600" b="1" dirty="0">
                 <a:solidFill>
-                  <a:srgbClr val="FFFFFF"/>
+                  <a:srgbClr val="6A58A3"/>
                 </a:solidFill>
                 <a:latin typeface="Microsoft YaHei" pitchFamily="34" charset="0"/>
                 <a:ea typeface="Microsoft YaHei" pitchFamily="34" charset="-122"/>
                 <a:cs typeface="Microsoft YaHei" pitchFamily="34" charset="-120"/>
               </a:rPr>
-              <a:t>用户智能体 → MAVRA（查询服务、指标库、内置智能体与维护）→ 数据库</a:t>
+              <a:t>学习题</a:t>
             </a:r>
-            <a:endParaRPr lang="en-US" sz="2000" dirty="0"/>
+            <a:endParaRPr lang="en-US" sz="1600" dirty="0"/>
           </a:p>
         </p:txBody>
       </p:sp>
       <p:sp>
         <p:nvSpPr>
-          <p:cNvPr id="6" name="label 功能"/>
+          <p:cNvPr id="4" name="Shape 2"/>
           <p:cNvSpPr/>
           <p:nvPr/>
         </p:nvSpPr>
         <p:spPr>
           <a:xfrm>
-            <a:off x="548640" y="3108960"/>
-            <a:ext cx="1463040" cy="640080"/>
+            <a:off x="548640" y="1554480"/>
+            <a:ext cx="5303520" cy="1143000"/>
           </a:xfrm>
           <a:prstGeom prst="roundRect">
             <a:avLst>
-              <a:gd name="adj" fmla="val 50000"/>
+              <a:gd name="adj" fmla="val 6400"/>
             </a:avLst>
           </a:prstGeom>
           <a:solidFill>
-            <a:srgbClr val="1D5BA6"/>
+            <a:srgbClr val="EFECF7"/>
           </a:solidFill>
           <a:ln w="12700">
             <a:solidFill>
-              <a:srgbClr val="1D5BA6"/>
+              <a:srgbClr val="EFECF7"/>
             </a:solidFill>
             <a:prstDash val="solid"/>
           </a:ln>
@@ -3137,53 +3969,14 @@
       </p:sp>
       <p:sp>
         <p:nvSpPr>
-          <p:cNvPr id="7" name="Text 5"/>
+          <p:cNvPr id="5" name="Text 3"/>
           <p:cNvSpPr txBox="1"/>
           <p:nvPr/>
         </p:nvSpPr>
         <p:spPr>
           <a:xfrm>
-            <a:off x="548640" y="3108960"/>
-            <a:ext cx="1463040" cy="640080"/>
-          </a:xfrm>
-          <a:prstGeom prst="rect">
-            <a:avLst/>
-          </a:prstGeom>
-          <a:noFill/>
-          <a:ln/>
-        </p:spPr>
-        <p:txBody>
-          <a:bodyPr wrap="square" lIns="0" tIns="0" rIns="0" bIns="0" rtlCol="0" anchor="ctr"/>
-          <a:lstStyle/>
-          <a:p>
-            <a:pPr algn="ctr" indent="0" marL="0">
-              <a:buNone/>
-            </a:pPr>
-            <a:r>
-              <a:rPr lang="en-US" sz="2000" b="1" dirty="0">
-                <a:solidFill>
-                  <a:srgbClr val="FFFFFF"/>
-                </a:solidFill>
-                <a:latin typeface="Microsoft YaHei" pitchFamily="34" charset="0"/>
-                <a:ea typeface="Microsoft YaHei" pitchFamily="34" charset="-122"/>
-                <a:cs typeface="Microsoft YaHei" pitchFamily="34" charset="-120"/>
-              </a:rPr>
-              <a:t>功能</a:t>
-            </a:r>
-            <a:endParaRPr lang="en-US" sz="2000" dirty="0"/>
-          </a:p>
-        </p:txBody>
-      </p:sp>
-      <p:sp>
-        <p:nvSpPr>
-          <p:cNvPr id="8" name="Text 6"/>
-          <p:cNvSpPr txBox="1"/>
-          <p:nvPr/>
-        </p:nvSpPr>
-        <p:spPr>
-          <a:xfrm>
-            <a:off x="2377440" y="3017520"/>
-            <a:ext cx="9265615" cy="822960"/>
+            <a:off x="731520" y="1645920"/>
+            <a:ext cx="4937760" cy="960120"/>
           </a:xfrm>
           <a:prstGeom prst="rect">
             <a:avLst/>
@@ -3199,96 +3992,30 @@
               <a:buNone/>
             </a:pPr>
             <a:r>
-              <a:rPr lang="en-US" sz="2000" dirty="0">
+              <a:rPr lang="en-US" sz="1500" dirty="0">
                 <a:solidFill>
-                  <a:srgbClr val="FFFFFF"/>
+                  <a:srgbClr val="1F2A37"/>
                 </a:solidFill>
                 <a:latin typeface="Microsoft YaHei" pitchFamily="34" charset="0"/>
                 <a:ea typeface="Microsoft YaHei" pitchFamily="34" charset="-122"/>
                 <a:cs typeface="Microsoft YaHei" pitchFamily="34" charset="-120"/>
               </a:rPr>
-              <a:t>学习指标定义；数据变了重新校验，校验结果缓存共用；执行前在同一快照上校验</a:t>
+              <a:t>3 月的门店营业额是多少？口径：门店营业额 = 门店销售行的净支付额（store_sales.ss_net_paid）之和，按销售日期归属期间。保留两位小数。</a:t>
             </a:r>
-            <a:endParaRPr lang="en-US" sz="2000" dirty="0"/>
+            <a:endParaRPr lang="en-US" sz="1500" dirty="0"/>
           </a:p>
         </p:txBody>
       </p:sp>
       <p:sp>
         <p:nvSpPr>
-          <p:cNvPr id="9" name="label 工作流"/>
-          <p:cNvSpPr/>
+          <p:cNvPr id="6" name="Text 4"/>
+          <p:cNvSpPr txBox="1"/>
           <p:nvPr/>
         </p:nvSpPr>
         <p:spPr>
           <a:xfrm>
-            <a:off x="548640" y="4480560"/>
-            <a:ext cx="1463040" cy="640080"/>
-          </a:xfrm>
-          <a:prstGeom prst="roundRect">
-            <a:avLst>
-              <a:gd name="adj" fmla="val 50000"/>
-            </a:avLst>
-          </a:prstGeom>
-          <a:solidFill>
-            <a:srgbClr val="1D5BA6"/>
-          </a:solidFill>
-          <a:ln w="12700">
-            <a:solidFill>
-              <a:srgbClr val="1D5BA6"/>
-            </a:solidFill>
-            <a:prstDash val="solid"/>
-          </a:ln>
-        </p:spPr>
-      </p:sp>
-      <p:sp>
-        <p:nvSpPr>
-          <p:cNvPr id="10" name="Text 8"/>
-          <p:cNvSpPr txBox="1"/>
-          <p:nvPr/>
-        </p:nvSpPr>
-        <p:spPr>
-          <a:xfrm>
-            <a:off x="548640" y="4480560"/>
-            <a:ext cx="1463040" cy="640080"/>
-          </a:xfrm>
-          <a:prstGeom prst="rect">
-            <a:avLst/>
-          </a:prstGeom>
-          <a:noFill/>
-          <a:ln/>
-        </p:spPr>
-        <p:txBody>
-          <a:bodyPr wrap="square" lIns="0" tIns="0" rIns="0" bIns="0" rtlCol="0" anchor="ctr"/>
-          <a:lstStyle/>
-          <a:p>
-            <a:pPr algn="ctr" indent="0" marL="0">
-              <a:buNone/>
-            </a:pPr>
-            <a:r>
-              <a:rPr lang="en-US" sz="2000" b="1" dirty="0">
-                <a:solidFill>
-                  <a:srgbClr val="FFFFFF"/>
-                </a:solidFill>
-                <a:latin typeface="Microsoft YaHei" pitchFamily="34" charset="0"/>
-                <a:ea typeface="Microsoft YaHei" pitchFamily="34" charset="-122"/>
-                <a:cs typeface="Microsoft YaHei" pitchFamily="34" charset="-120"/>
-              </a:rPr>
-              <a:t>工作流</a:t>
-            </a:r>
-            <a:endParaRPr lang="en-US" sz="2000" dirty="0"/>
-          </a:p>
-        </p:txBody>
-      </p:sp>
-      <p:sp>
-        <p:nvSpPr>
-          <p:cNvPr id="11" name="Text 9"/>
-          <p:cNvSpPr txBox="1"/>
-          <p:nvPr/>
-        </p:nvSpPr>
-        <p:spPr>
-          <a:xfrm>
-            <a:off x="2377440" y="4389120"/>
-            <a:ext cx="9265615" cy="822960"/>
+            <a:off x="548640" y="2880360"/>
+            <a:ext cx="5303520" cy="320040"/>
           </a:xfrm>
           <a:prstGeom prst="rect">
             <a:avLst/>
@@ -3304,17 +4031,1377 @@
               <a:buNone/>
             </a:pPr>
             <a:r>
-              <a:rPr lang="en-US" sz="2000" dirty="0">
+              <a:rPr lang="en-US" sz="1400" dirty="0">
                 <a:solidFill>
-                  <a:srgbClr val="FFFFFF"/>
+                  <a:srgbClr val="5B6573"/>
                 </a:solidFill>
                 <a:latin typeface="Microsoft YaHei" pitchFamily="34" charset="0"/>
                 <a:ea typeface="Microsoft YaHei" pitchFamily="34" charset="-122"/>
                 <a:cs typeface="Microsoft YaHei" pitchFamily="34" charset="-120"/>
               </a:rPr>
-              <a:t>查指标定义 → 执行 SQL；数据变化 → 校验 → 修复或停用 → 重新学习</a:t>
+              <a:t>内置智能体：5 轮、7 次工具调用、9.5 秒，最后的 SQL</a:t>
             </a:r>
-            <a:endParaRPr lang="en-US" sz="2000" dirty="0"/>
+            <a:endParaRPr lang="en-US" sz="1400" dirty="0"/>
+          </a:p>
+        </p:txBody>
+      </p:sp>
+      <p:sp>
+        <p:nvSpPr>
+          <p:cNvPr id="7" name="Shape 5"/>
+          <p:cNvSpPr/>
+          <p:nvPr/>
+        </p:nvSpPr>
+        <p:spPr>
+          <a:xfrm>
+            <a:off x="548640" y="3246120"/>
+            <a:ext cx="5303520" cy="1417320"/>
+          </a:xfrm>
+          <a:prstGeom prst="roundRect">
+            <a:avLst>
+              <a:gd name="adj" fmla="val 5161"/>
+            </a:avLst>
+          </a:prstGeom>
+          <a:solidFill>
+            <a:srgbClr val="F1F3F6"/>
+          </a:solidFill>
+          <a:ln w="12700">
+            <a:solidFill>
+              <a:srgbClr val="F1F3F6"/>
+            </a:solidFill>
+            <a:prstDash val="solid"/>
+          </a:ln>
+        </p:spPr>
+      </p:sp>
+      <p:sp>
+        <p:nvSpPr>
+          <p:cNvPr id="8" name="Text 6"/>
+          <p:cNvSpPr txBox="1"/>
+          <p:nvPr/>
+        </p:nvSpPr>
+        <p:spPr>
+          <a:xfrm>
+            <a:off x="731520" y="3310128"/>
+            <a:ext cx="4937760" cy="1280160"/>
+          </a:xfrm>
+          <a:prstGeom prst="rect">
+            <a:avLst/>
+          </a:prstGeom>
+          <a:noFill/>
+          <a:ln/>
+        </p:spPr>
+        <p:txBody>
+          <a:bodyPr wrap="square" lIns="0" tIns="0" rIns="0" bIns="0" rtlCol="0" anchor="ctr"/>
+          <a:lstStyle/>
+          <a:p>
+            <a:pPr indent="0" marL="0">
+              <a:buNone/>
+            </a:pPr>
+            <a:r>
+              <a:rPr lang="en-US" sz="1300" dirty="0">
+                <a:solidFill>
+                  <a:srgbClr val="1F2A37"/>
+                </a:solidFill>
+                <a:latin typeface="Courier New" pitchFamily="34" charset="0"/>
+                <a:ea typeface="Courier New" pitchFamily="34" charset="-122"/>
+                <a:cs typeface="Courier New" pitchFamily="34" charset="-120"/>
+              </a:rPr>
+              <a:t>SELECT ROUND(SUM(ss.ss_net_paid), 2)</a:t>
+            </a:r>
+            <a:endParaRPr lang="en-US" sz="1300" dirty="0"/>
+          </a:p>
+          <a:p>
+            <a:pPr indent="0" marL="0">
+              <a:buNone/>
+            </a:pPr>
+            <a:r>
+              <a:rPr lang="en-US" sz="1300" dirty="0">
+                <a:solidFill>
+                  <a:srgbClr val="1F2A37"/>
+                </a:solidFill>
+                <a:latin typeface="Courier New" pitchFamily="34" charset="0"/>
+                <a:ea typeface="Courier New" pitchFamily="34" charset="-122"/>
+                <a:cs typeface="Courier New" pitchFamily="34" charset="-120"/>
+              </a:rPr>
+              <a:t>FROM store_sales ss</a:t>
+            </a:r>
+            <a:endParaRPr lang="en-US" sz="1300" dirty="0"/>
+          </a:p>
+          <a:p>
+            <a:pPr indent="0" marL="0">
+              <a:buNone/>
+            </a:pPr>
+            <a:r>
+              <a:rPr lang="en-US" sz="1300" dirty="0">
+                <a:solidFill>
+                  <a:srgbClr val="1F2A37"/>
+                </a:solidFill>
+                <a:latin typeface="Courier New" pitchFamily="34" charset="0"/>
+                <a:ea typeface="Courier New" pitchFamily="34" charset="-122"/>
+                <a:cs typeface="Courier New" pitchFamily="34" charset="-120"/>
+              </a:rPr>
+              <a:t>JOIN date_dim d</a:t>
+            </a:r>
+            <a:endParaRPr lang="en-US" sz="1300" dirty="0"/>
+          </a:p>
+          <a:p>
+            <a:pPr indent="0" marL="0">
+              <a:buNone/>
+            </a:pPr>
+            <a:r>
+              <a:rPr lang="en-US" sz="1300" dirty="0">
+                <a:solidFill>
+                  <a:srgbClr val="1F2A37"/>
+                </a:solidFill>
+                <a:latin typeface="Courier New" pitchFamily="34" charset="0"/>
+                <a:ea typeface="Courier New" pitchFamily="34" charset="-122"/>
+                <a:cs typeface="Courier New" pitchFamily="34" charset="-120"/>
+              </a:rPr>
+              <a:t>  ON ss.ss_sold_date_sk = d.d_date_sk</a:t>
+            </a:r>
+            <a:endParaRPr lang="en-US" sz="1300" dirty="0"/>
+          </a:p>
+          <a:p>
+            <a:pPr indent="0" marL="0">
+              <a:buNone/>
+            </a:pPr>
+            <a:r>
+              <a:rPr lang="en-US" sz="1300" dirty="0">
+                <a:solidFill>
+                  <a:srgbClr val="1F2A37"/>
+                </a:solidFill>
+                <a:latin typeface="Courier New" pitchFamily="34" charset="0"/>
+                <a:ea typeface="Courier New" pitchFamily="34" charset="-122"/>
+                <a:cs typeface="Courier New" pitchFamily="34" charset="-120"/>
+              </a:rPr>
+              <a:t>WHERE d.d_year = … AND d.d_moy = 3</a:t>
+            </a:r>
+            <a:endParaRPr lang="en-US" sz="1300" dirty="0"/>
+          </a:p>
+        </p:txBody>
+      </p:sp>
+      <p:sp>
+        <p:nvSpPr>
+          <p:cNvPr id="9" name="Text 7"/>
+          <p:cNvSpPr txBox="1"/>
+          <p:nvPr/>
+        </p:nvSpPr>
+        <p:spPr>
+          <a:xfrm>
+            <a:off x="548640" y="4800600"/>
+            <a:ext cx="5303520" cy="1097280"/>
+          </a:xfrm>
+          <a:prstGeom prst="rect">
+            <a:avLst/>
+          </a:prstGeom>
+          <a:noFill/>
+          <a:ln/>
+        </p:spPr>
+        <p:txBody>
+          <a:bodyPr wrap="square" lIns="0" tIns="0" rIns="0" bIns="0" rtlCol="0" anchor="t"/>
+          <a:lstStyle/>
+          <a:p>
+            <a:pPr indent="0" marL="0">
+              <a:buNone/>
+            </a:pPr>
+            <a:r>
+              <a:rPr lang="en-US" sz="1500" b="1" dirty="0">
+                <a:solidFill>
+                  <a:srgbClr val="2E7D4F"/>
+                </a:solidFill>
+                <a:latin typeface="Microsoft YaHei" pitchFamily="34" charset="0"/>
+                <a:ea typeface="Microsoft YaHei" pitchFamily="34" charset="-122"/>
+                <a:cs typeface="Microsoft YaHei" pitchFamily="34" charset="-120"/>
+              </a:rPr>
+              <a:t>答案 13,570,368.70，与标准答案一致 ✓</a:t>
+            </a:r>
+            <a:endParaRPr lang="en-US" sz="1500" dirty="0"/>
+          </a:p>
+          <a:p>
+            <a:pPr indent="0" marL="0">
+              <a:buNone/>
+            </a:pPr>
+            <a:r>
+              <a:rPr lang="en-US" sz="1500" dirty="0">
+                <a:solidFill>
+                  <a:srgbClr val="1F2A37"/>
+                </a:solidFill>
+                <a:latin typeface="Microsoft YaHei" pitchFamily="34" charset="0"/>
+                <a:ea typeface="Microsoft YaHei" pitchFamily="34" charset="-122"/>
+                <a:cs typeface="Microsoft YaHei" pitchFamily="34" charset="-120"/>
+              </a:rPr>
+              <a:t>大模型把解题过程抽取成定义（10 秒）；7 项发布前校验全部通过（2.0 秒），发布为 v1。</a:t>
+            </a:r>
+            <a:endParaRPr lang="en-US" sz="1500" dirty="0"/>
+          </a:p>
+        </p:txBody>
+      </p:sp>
+      <p:sp>
+        <p:nvSpPr>
+          <p:cNvPr id="10" name="Text 8"/>
+          <p:cNvSpPr txBox="1"/>
+          <p:nvPr/>
+        </p:nvSpPr>
+        <p:spPr>
+          <a:xfrm>
+            <a:off x="6172200" y="1143000"/>
+            <a:ext cx="5468112" cy="365760"/>
+          </a:xfrm>
+          <a:prstGeom prst="rect">
+            <a:avLst/>
+          </a:prstGeom>
+          <a:noFill/>
+          <a:ln/>
+        </p:spPr>
+        <p:txBody>
+          <a:bodyPr wrap="square" lIns="0" tIns="0" rIns="0" bIns="0" rtlCol="0" anchor="ctr"/>
+          <a:lstStyle/>
+          <a:p>
+            <a:pPr indent="0" marL="0">
+              <a:buNone/>
+            </a:pPr>
+            <a:r>
+              <a:rPr lang="en-US" sz="1600" b="1" dirty="0">
+                <a:solidFill>
+                  <a:srgbClr val="1D5BA6"/>
+                </a:solidFill>
+                <a:latin typeface="Microsoft YaHei" pitchFamily="34" charset="0"/>
+                <a:ea typeface="Microsoft YaHei" pitchFamily="34" charset="-122"/>
+                <a:cs typeface="Microsoft YaHei" pitchFamily="34" charset="-120"/>
+              </a:rPr>
+              <a:t>存进指标库的定义（v1）</a:t>
+            </a:r>
+            <a:endParaRPr lang="en-US" sz="1600" dirty="0"/>
+          </a:p>
+        </p:txBody>
+      </p:sp>
+      <p:graphicFrame>
+        <p:nvGraphicFramePr>
+          <p:cNvPr id="7" name="Table 0"/>
+          <p:cNvGraphicFramePr>
+            <a:graphicFrameLocks noGrp="1"/>
+          </p:cNvGraphicFramePr>
+          <p:nvPr>
+            <p:extLst>
+              <p:ext uri="{D42A27DB-BD31-4B8C-83A1-F6EECF244321}">
+                <p14:modId xmlns:p14="http://schemas.microsoft.com/office/powerpoint/2010/main" val="1579011935"/>
+              </p:ext>
+            </p:extLst>
+          </p:nvPr>
+        </p:nvGraphicFramePr>
+        <p:xfrm>
+          <a:off x="6172200" y="1554480"/>
+          <a:ext cx="5468112" cy="914400"/>
+        </p:xfrm>
+        <a:graphic>
+          <a:graphicData uri="http://schemas.openxmlformats.org/drawingml/2006/table">
+            <a:tbl>
+              <a:tblPr/>
+              <a:tblGrid>
+                <a:gridCol w="1097280"/>
+                <a:gridCol w="4370832"/>
+              </a:tblGrid>
+              <a:tr h="0">
+                <a:tc>
+                  <a:txBody>
+                    <a:bodyPr/>
+                    <a:lstStyle/>
+                    <a:p>
+                      <a:pPr indent="0" marL="0">
+                        <a:buNone/>
+                      </a:pPr>
+                      <a:r>
+                        <a:rPr lang="en-US" sz="1400" b="1" dirty="0">
+                          <a:solidFill>
+                            <a:srgbClr val="1F2A37"/>
+                          </a:solidFill>
+                          <a:latin typeface="Microsoft YaHei" pitchFamily="34" charset="0"/>
+                          <a:ea typeface="Microsoft YaHei" pitchFamily="34" charset="-122"/>
+                          <a:cs typeface="Microsoft YaHei" pitchFamily="34" charset="-120"/>
+                        </a:rPr>
+                        <a:t>字段</a:t>
+                      </a:r>
+                      <a:endParaRPr lang="en-US" sz="1400" dirty="0">
+                        <a:latin typeface="Microsoft YaHei" charset="0"/>
+                        <a:ea typeface="Microsoft YaHei" charset="0"/>
+                        <a:cs typeface="Microsoft YaHei" charset="0"/>
+                      </a:endParaRPr>
+                    </a:p>
+                  </a:txBody>
+                  <a:tcPr marL="91440" marR="91440" marT="54864" marB="54864" anchor="ctr">
+                    <a:lnL w="12700" cap="flat" cmpd="sng" algn="ctr">
+                      <a:solidFill>
+                        <a:srgbClr val="D5DBE3"/>
+                      </a:solidFill>
+                      <a:prstDash val="solid"/>
+                      <a:round/>
+                      <a:headEnd type="none" w="med" len="med"/>
+                      <a:tailEnd type="none" w="med" len="med"/>
+                    </a:lnL>
+                    <a:lnR w="12700" cap="flat" cmpd="sng" algn="ctr">
+                      <a:solidFill>
+                        <a:srgbClr val="D5DBE3"/>
+                      </a:solidFill>
+                      <a:prstDash val="solid"/>
+                      <a:round/>
+                      <a:headEnd type="none" w="med" len="med"/>
+                      <a:tailEnd type="none" w="med" len="med"/>
+                    </a:lnR>
+                    <a:lnT w="12700" cap="flat" cmpd="sng" algn="ctr">
+                      <a:solidFill>
+                        <a:srgbClr val="D5DBE3"/>
+                      </a:solidFill>
+                      <a:prstDash val="solid"/>
+                      <a:round/>
+                      <a:headEnd type="none" w="med" len="med"/>
+                      <a:tailEnd type="none" w="med" len="med"/>
+                    </a:lnT>
+                    <a:lnB w="12700" cap="flat" cmpd="sng" algn="ctr">
+                      <a:solidFill>
+                        <a:srgbClr val="D5DBE3"/>
+                      </a:solidFill>
+                      <a:prstDash val="solid"/>
+                      <a:round/>
+                      <a:headEnd type="none" w="med" len="med"/>
+                      <a:tailEnd type="none" w="med" len="med"/>
+                    </a:lnB>
+                    <a:solidFill>
+                      <a:srgbClr val="F1F3F6"/>
+                    </a:solidFill>
+                  </a:tcPr>
+                </a:tc>
+                <a:tc>
+                  <a:txBody>
+                    <a:bodyPr/>
+                    <a:lstStyle/>
+                    <a:p>
+                      <a:pPr indent="0" marL="0">
+                        <a:buNone/>
+                      </a:pPr>
+                      <a:r>
+                        <a:rPr lang="en-US" sz="1400" b="1" dirty="0">
+                          <a:solidFill>
+                            <a:srgbClr val="1F2A37"/>
+                          </a:solidFill>
+                          <a:latin typeface="Microsoft YaHei" pitchFamily="34" charset="0"/>
+                          <a:ea typeface="Microsoft YaHei" pitchFamily="34" charset="-122"/>
+                          <a:cs typeface="Microsoft YaHei" pitchFamily="34" charset="-120"/>
+                        </a:rPr>
+                        <a:t>内容</a:t>
+                      </a:r>
+                      <a:endParaRPr lang="en-US" sz="1400" dirty="0">
+                        <a:latin typeface="Microsoft YaHei" charset="0"/>
+                        <a:ea typeface="Microsoft YaHei" charset="0"/>
+                        <a:cs typeface="Microsoft YaHei" charset="0"/>
+                      </a:endParaRPr>
+                    </a:p>
+                  </a:txBody>
+                  <a:tcPr marL="91440" marR="91440" marT="54864" marB="54864" anchor="ctr">
+                    <a:lnL w="12700" cap="flat" cmpd="sng" algn="ctr">
+                      <a:solidFill>
+                        <a:srgbClr val="D5DBE3"/>
+                      </a:solidFill>
+                      <a:prstDash val="solid"/>
+                      <a:round/>
+                      <a:headEnd type="none" w="med" len="med"/>
+                      <a:tailEnd type="none" w="med" len="med"/>
+                    </a:lnL>
+                    <a:lnR w="12700" cap="flat" cmpd="sng" algn="ctr">
+                      <a:solidFill>
+                        <a:srgbClr val="D5DBE3"/>
+                      </a:solidFill>
+                      <a:prstDash val="solid"/>
+                      <a:round/>
+                      <a:headEnd type="none" w="med" len="med"/>
+                      <a:tailEnd type="none" w="med" len="med"/>
+                    </a:lnR>
+                    <a:lnT w="12700" cap="flat" cmpd="sng" algn="ctr">
+                      <a:solidFill>
+                        <a:srgbClr val="D5DBE3"/>
+                      </a:solidFill>
+                      <a:prstDash val="solid"/>
+                      <a:round/>
+                      <a:headEnd type="none" w="med" len="med"/>
+                      <a:tailEnd type="none" w="med" len="med"/>
+                    </a:lnT>
+                    <a:lnB w="12700" cap="flat" cmpd="sng" algn="ctr">
+                      <a:solidFill>
+                        <a:srgbClr val="D5DBE3"/>
+                      </a:solidFill>
+                      <a:prstDash val="solid"/>
+                      <a:round/>
+                      <a:headEnd type="none" w="med" len="med"/>
+                      <a:tailEnd type="none" w="med" len="med"/>
+                    </a:lnB>
+                    <a:solidFill>
+                      <a:srgbClr val="F1F3F6"/>
+                    </a:solidFill>
+                  </a:tcPr>
+                </a:tc>
+              </a:tr>
+              <a:tr h="0">
+                <a:tc>
+                  <a:txBody>
+                    <a:bodyPr/>
+                    <a:lstStyle/>
+                    <a:p>
+                      <a:pPr indent="0" marL="0">
+                        <a:buNone/>
+                      </a:pPr>
+                      <a:r>
+                        <a:rPr lang="en-US" sz="1400" dirty="0">
+                          <a:solidFill>
+                            <a:srgbClr val="1F2A37"/>
+                          </a:solidFill>
+                          <a:latin typeface="Microsoft YaHei" pitchFamily="34" charset="0"/>
+                          <a:ea typeface="Microsoft YaHei" pitchFamily="34" charset="-122"/>
+                          <a:cs typeface="Microsoft YaHei" pitchFamily="34" charset="-120"/>
+                        </a:rPr>
+                        <a:t>名称</a:t>
+                      </a:r>
+                      <a:endParaRPr lang="en-US" sz="1400" dirty="0">
+                        <a:latin typeface="Microsoft YaHei" charset="0"/>
+                        <a:ea typeface="Microsoft YaHei" charset="0"/>
+                        <a:cs typeface="Microsoft YaHei" charset="0"/>
+                      </a:endParaRPr>
+                    </a:p>
+                  </a:txBody>
+                  <a:tcPr marL="91440" marR="91440" marT="54864" marB="54864" anchor="ctr">
+                    <a:lnL w="12700" cap="flat" cmpd="sng" algn="ctr">
+                      <a:solidFill>
+                        <a:srgbClr val="D5DBE3"/>
+                      </a:solidFill>
+                      <a:prstDash val="solid"/>
+                      <a:round/>
+                      <a:headEnd type="none" w="med" len="med"/>
+                      <a:tailEnd type="none" w="med" len="med"/>
+                    </a:lnL>
+                    <a:lnR w="12700" cap="flat" cmpd="sng" algn="ctr">
+                      <a:solidFill>
+                        <a:srgbClr val="D5DBE3"/>
+                      </a:solidFill>
+                      <a:prstDash val="solid"/>
+                      <a:round/>
+                      <a:headEnd type="none" w="med" len="med"/>
+                      <a:tailEnd type="none" w="med" len="med"/>
+                    </a:lnR>
+                    <a:lnT w="12700" cap="flat" cmpd="sng" algn="ctr">
+                      <a:solidFill>
+                        <a:srgbClr val="D5DBE3"/>
+                      </a:solidFill>
+                      <a:prstDash val="solid"/>
+                      <a:round/>
+                      <a:headEnd type="none" w="med" len="med"/>
+                      <a:tailEnd type="none" w="med" len="med"/>
+                    </a:lnT>
+                    <a:lnB w="12700" cap="flat" cmpd="sng" algn="ctr">
+                      <a:solidFill>
+                        <a:srgbClr val="D5DBE3"/>
+                      </a:solidFill>
+                      <a:prstDash val="solid"/>
+                      <a:round/>
+                      <a:headEnd type="none" w="med" len="med"/>
+                      <a:tailEnd type="none" w="med" len="med"/>
+                    </a:lnB>
+                  </a:tcPr>
+                </a:tc>
+                <a:tc>
+                  <a:txBody>
+                    <a:bodyPr/>
+                    <a:lstStyle/>
+                    <a:p>
+                      <a:pPr indent="0" marL="0">
+                        <a:buNone/>
+                      </a:pPr>
+                      <a:r>
+                        <a:rPr lang="en-US" sz="1400" dirty="0">
+                          <a:solidFill>
+                            <a:srgbClr val="1F2A37"/>
+                          </a:solidFill>
+                          <a:latin typeface="Microsoft YaHei" pitchFamily="34" charset="0"/>
+                          <a:ea typeface="Microsoft YaHei" pitchFamily="34" charset="-122"/>
+                          <a:cs typeface="Microsoft YaHei" pitchFamily="34" charset="-120"/>
+                        </a:rPr>
+                        <a:t>门店营业额（别名：门店销售净额）</a:t>
+                      </a:r>
+                      <a:endParaRPr lang="en-US" sz="1400" dirty="0">
+                        <a:latin typeface="Microsoft YaHei" charset="0"/>
+                        <a:ea typeface="Microsoft YaHei" charset="0"/>
+                        <a:cs typeface="Microsoft YaHei" charset="0"/>
+                      </a:endParaRPr>
+                    </a:p>
+                  </a:txBody>
+                  <a:tcPr marL="91440" marR="91440" marT="54864" marB="54864" anchor="ctr">
+                    <a:lnL w="12700" cap="flat" cmpd="sng" algn="ctr">
+                      <a:solidFill>
+                        <a:srgbClr val="D5DBE3"/>
+                      </a:solidFill>
+                      <a:prstDash val="solid"/>
+                      <a:round/>
+                      <a:headEnd type="none" w="med" len="med"/>
+                      <a:tailEnd type="none" w="med" len="med"/>
+                    </a:lnL>
+                    <a:lnR w="12700" cap="flat" cmpd="sng" algn="ctr">
+                      <a:solidFill>
+                        <a:srgbClr val="D5DBE3"/>
+                      </a:solidFill>
+                      <a:prstDash val="solid"/>
+                      <a:round/>
+                      <a:headEnd type="none" w="med" len="med"/>
+                      <a:tailEnd type="none" w="med" len="med"/>
+                    </a:lnR>
+                    <a:lnT w="12700" cap="flat" cmpd="sng" algn="ctr">
+                      <a:solidFill>
+                        <a:srgbClr val="D5DBE3"/>
+                      </a:solidFill>
+                      <a:prstDash val="solid"/>
+                      <a:round/>
+                      <a:headEnd type="none" w="med" len="med"/>
+                      <a:tailEnd type="none" w="med" len="med"/>
+                    </a:lnT>
+                    <a:lnB w="12700" cap="flat" cmpd="sng" algn="ctr">
+                      <a:solidFill>
+                        <a:srgbClr val="D5DBE3"/>
+                      </a:solidFill>
+                      <a:prstDash val="solid"/>
+                      <a:round/>
+                      <a:headEnd type="none" w="med" len="med"/>
+                      <a:tailEnd type="none" w="med" len="med"/>
+                    </a:lnB>
+                  </a:tcPr>
+                </a:tc>
+              </a:tr>
+              <a:tr h="0">
+                <a:tc>
+                  <a:txBody>
+                    <a:bodyPr/>
+                    <a:lstStyle/>
+                    <a:p>
+                      <a:pPr indent="0" marL="0">
+                        <a:buNone/>
+                      </a:pPr>
+                      <a:r>
+                        <a:rPr lang="en-US" sz="1400" dirty="0">
+                          <a:solidFill>
+                            <a:srgbClr val="1F2A37"/>
+                          </a:solidFill>
+                          <a:latin typeface="Microsoft YaHei" pitchFamily="34" charset="0"/>
+                          <a:ea typeface="Microsoft YaHei" pitchFamily="34" charset="-122"/>
+                          <a:cs typeface="Microsoft YaHei" pitchFamily="34" charset="-120"/>
+                        </a:rPr>
+                        <a:t>口径</a:t>
+                      </a:r>
+                      <a:endParaRPr lang="en-US" sz="1400" dirty="0">
+                        <a:latin typeface="Microsoft YaHei" charset="0"/>
+                        <a:ea typeface="Microsoft YaHei" charset="0"/>
+                        <a:cs typeface="Microsoft YaHei" charset="0"/>
+                      </a:endParaRPr>
+                    </a:p>
+                  </a:txBody>
+                  <a:tcPr marL="91440" marR="91440" marT="54864" marB="54864" anchor="ctr">
+                    <a:lnL w="12700" cap="flat" cmpd="sng" algn="ctr">
+                      <a:solidFill>
+                        <a:srgbClr val="D5DBE3"/>
+                      </a:solidFill>
+                      <a:prstDash val="solid"/>
+                      <a:round/>
+                      <a:headEnd type="none" w="med" len="med"/>
+                      <a:tailEnd type="none" w="med" len="med"/>
+                    </a:lnL>
+                    <a:lnR w="12700" cap="flat" cmpd="sng" algn="ctr">
+                      <a:solidFill>
+                        <a:srgbClr val="D5DBE3"/>
+                      </a:solidFill>
+                      <a:prstDash val="solid"/>
+                      <a:round/>
+                      <a:headEnd type="none" w="med" len="med"/>
+                      <a:tailEnd type="none" w="med" len="med"/>
+                    </a:lnR>
+                    <a:lnT w="12700" cap="flat" cmpd="sng" algn="ctr">
+                      <a:solidFill>
+                        <a:srgbClr val="D5DBE3"/>
+                      </a:solidFill>
+                      <a:prstDash val="solid"/>
+                      <a:round/>
+                      <a:headEnd type="none" w="med" len="med"/>
+                      <a:tailEnd type="none" w="med" len="med"/>
+                    </a:lnT>
+                    <a:lnB w="12700" cap="flat" cmpd="sng" algn="ctr">
+                      <a:solidFill>
+                        <a:srgbClr val="D5DBE3"/>
+                      </a:solidFill>
+                      <a:prstDash val="solid"/>
+                      <a:round/>
+                      <a:headEnd type="none" w="med" len="med"/>
+                      <a:tailEnd type="none" w="med" len="med"/>
+                    </a:lnB>
+                  </a:tcPr>
+                </a:tc>
+                <a:tc>
+                  <a:txBody>
+                    <a:bodyPr/>
+                    <a:lstStyle/>
+                    <a:p>
+                      <a:pPr indent="0" marL="0">
+                        <a:buNone/>
+                      </a:pPr>
+                      <a:r>
+                        <a:rPr lang="en-US" sz="1400" dirty="0">
+                          <a:solidFill>
+                            <a:srgbClr val="1F2A37"/>
+                          </a:solidFill>
+                          <a:latin typeface="Microsoft YaHei" pitchFamily="34" charset="0"/>
+                          <a:ea typeface="Microsoft YaHei" pitchFamily="34" charset="-122"/>
+                          <a:cs typeface="Microsoft YaHei" pitchFamily="34" charset="-120"/>
+                        </a:rPr>
+                        <a:t>门店销售明细行净支付额之和，按销售日期归属期间</a:t>
+                      </a:r>
+                      <a:endParaRPr lang="en-US" sz="1400" dirty="0">
+                        <a:latin typeface="Microsoft YaHei" charset="0"/>
+                        <a:ea typeface="Microsoft YaHei" charset="0"/>
+                        <a:cs typeface="Microsoft YaHei" charset="0"/>
+                      </a:endParaRPr>
+                    </a:p>
+                  </a:txBody>
+                  <a:tcPr marL="91440" marR="91440" marT="54864" marB="54864" anchor="ctr">
+                    <a:lnL w="12700" cap="flat" cmpd="sng" algn="ctr">
+                      <a:solidFill>
+                        <a:srgbClr val="D5DBE3"/>
+                      </a:solidFill>
+                      <a:prstDash val="solid"/>
+                      <a:round/>
+                      <a:headEnd type="none" w="med" len="med"/>
+                      <a:tailEnd type="none" w="med" len="med"/>
+                    </a:lnL>
+                    <a:lnR w="12700" cap="flat" cmpd="sng" algn="ctr">
+                      <a:solidFill>
+                        <a:srgbClr val="D5DBE3"/>
+                      </a:solidFill>
+                      <a:prstDash val="solid"/>
+                      <a:round/>
+                      <a:headEnd type="none" w="med" len="med"/>
+                      <a:tailEnd type="none" w="med" len="med"/>
+                    </a:lnR>
+                    <a:lnT w="12700" cap="flat" cmpd="sng" algn="ctr">
+                      <a:solidFill>
+                        <a:srgbClr val="D5DBE3"/>
+                      </a:solidFill>
+                      <a:prstDash val="solid"/>
+                      <a:round/>
+                      <a:headEnd type="none" w="med" len="med"/>
+                      <a:tailEnd type="none" w="med" len="med"/>
+                    </a:lnT>
+                    <a:lnB w="12700" cap="flat" cmpd="sng" algn="ctr">
+                      <a:solidFill>
+                        <a:srgbClr val="D5DBE3"/>
+                      </a:solidFill>
+                      <a:prstDash val="solid"/>
+                      <a:round/>
+                      <a:headEnd type="none" w="med" len="med"/>
+                      <a:tailEnd type="none" w="med" len="med"/>
+                    </a:lnB>
+                  </a:tcPr>
+                </a:tc>
+              </a:tr>
+              <a:tr h="0">
+                <a:tc>
+                  <a:txBody>
+                    <a:bodyPr/>
+                    <a:lstStyle/>
+                    <a:p>
+                      <a:pPr indent="0" marL="0">
+                        <a:buNone/>
+                      </a:pPr>
+                      <a:r>
+                        <a:rPr lang="en-US" sz="1400" dirty="0">
+                          <a:solidFill>
+                            <a:srgbClr val="1F2A37"/>
+                          </a:solidFill>
+                          <a:latin typeface="Microsoft YaHei" pitchFamily="34" charset="0"/>
+                          <a:ea typeface="Microsoft YaHei" pitchFamily="34" charset="-122"/>
+                          <a:cs typeface="Microsoft YaHei" pitchFamily="34" charset="-120"/>
+                        </a:rPr>
+                        <a:t>计算</a:t>
+                      </a:r>
+                      <a:endParaRPr lang="en-US" sz="1400" dirty="0">
+                        <a:latin typeface="Microsoft YaHei" charset="0"/>
+                        <a:ea typeface="Microsoft YaHei" charset="0"/>
+                        <a:cs typeface="Microsoft YaHei" charset="0"/>
+                      </a:endParaRPr>
+                    </a:p>
+                  </a:txBody>
+                  <a:tcPr marL="91440" marR="91440" marT="54864" marB="54864" anchor="ctr">
+                    <a:lnL w="12700" cap="flat" cmpd="sng" algn="ctr">
+                      <a:solidFill>
+                        <a:srgbClr val="D5DBE3"/>
+                      </a:solidFill>
+                      <a:prstDash val="solid"/>
+                      <a:round/>
+                      <a:headEnd type="none" w="med" len="med"/>
+                      <a:tailEnd type="none" w="med" len="med"/>
+                    </a:lnL>
+                    <a:lnR w="12700" cap="flat" cmpd="sng" algn="ctr">
+                      <a:solidFill>
+                        <a:srgbClr val="D5DBE3"/>
+                      </a:solidFill>
+                      <a:prstDash val="solid"/>
+                      <a:round/>
+                      <a:headEnd type="none" w="med" len="med"/>
+                      <a:tailEnd type="none" w="med" len="med"/>
+                    </a:lnR>
+                    <a:lnT w="12700" cap="flat" cmpd="sng" algn="ctr">
+                      <a:solidFill>
+                        <a:srgbClr val="D5DBE3"/>
+                      </a:solidFill>
+                      <a:prstDash val="solid"/>
+                      <a:round/>
+                      <a:headEnd type="none" w="med" len="med"/>
+                      <a:tailEnd type="none" w="med" len="med"/>
+                    </a:lnT>
+                    <a:lnB w="12700" cap="flat" cmpd="sng" algn="ctr">
+                      <a:solidFill>
+                        <a:srgbClr val="D5DBE3"/>
+                      </a:solidFill>
+                      <a:prstDash val="solid"/>
+                      <a:round/>
+                      <a:headEnd type="none" w="med" len="med"/>
+                      <a:tailEnd type="none" w="med" len="med"/>
+                    </a:lnB>
+                  </a:tcPr>
+                </a:tc>
+                <a:tc>
+                  <a:txBody>
+                    <a:bodyPr/>
+                    <a:lstStyle/>
+                    <a:p>
+                      <a:pPr indent="0" marL="0">
+                        <a:buNone/>
+                      </a:pPr>
+                      <a:r>
+                        <a:rPr lang="en-US" sz="1400" dirty="0">
+                          <a:solidFill>
+                            <a:srgbClr val="1F2A37"/>
+                          </a:solidFill>
+                          <a:latin typeface="Microsoft YaHei" pitchFamily="34" charset="0"/>
+                          <a:ea typeface="Microsoft YaHei" pitchFamily="34" charset="-122"/>
+                          <a:cs typeface="Microsoft YaHei" pitchFamily="34" charset="-120"/>
+                        </a:rPr>
+                        <a:t>store_sales 上 SUM(ss_net_paid)，无过滤条件</a:t>
+                      </a:r>
+                      <a:endParaRPr lang="en-US" sz="1400" dirty="0">
+                        <a:latin typeface="Microsoft YaHei" charset="0"/>
+                        <a:ea typeface="Microsoft YaHei" charset="0"/>
+                        <a:cs typeface="Microsoft YaHei" charset="0"/>
+                      </a:endParaRPr>
+                    </a:p>
+                  </a:txBody>
+                  <a:tcPr marL="91440" marR="91440" marT="54864" marB="54864" anchor="ctr">
+                    <a:lnL w="12700" cap="flat" cmpd="sng" algn="ctr">
+                      <a:solidFill>
+                        <a:srgbClr val="D5DBE3"/>
+                      </a:solidFill>
+                      <a:prstDash val="solid"/>
+                      <a:round/>
+                      <a:headEnd type="none" w="med" len="med"/>
+                      <a:tailEnd type="none" w="med" len="med"/>
+                    </a:lnL>
+                    <a:lnR w="12700" cap="flat" cmpd="sng" algn="ctr">
+                      <a:solidFill>
+                        <a:srgbClr val="D5DBE3"/>
+                      </a:solidFill>
+                      <a:prstDash val="solid"/>
+                      <a:round/>
+                      <a:headEnd type="none" w="med" len="med"/>
+                      <a:tailEnd type="none" w="med" len="med"/>
+                    </a:lnR>
+                    <a:lnT w="12700" cap="flat" cmpd="sng" algn="ctr">
+                      <a:solidFill>
+                        <a:srgbClr val="D5DBE3"/>
+                      </a:solidFill>
+                      <a:prstDash val="solid"/>
+                      <a:round/>
+                      <a:headEnd type="none" w="med" len="med"/>
+                      <a:tailEnd type="none" w="med" len="med"/>
+                    </a:lnT>
+                    <a:lnB w="12700" cap="flat" cmpd="sng" algn="ctr">
+                      <a:solidFill>
+                        <a:srgbClr val="D5DBE3"/>
+                      </a:solidFill>
+                      <a:prstDash val="solid"/>
+                      <a:round/>
+                      <a:headEnd type="none" w="med" len="med"/>
+                      <a:tailEnd type="none" w="med" len="med"/>
+                    </a:lnB>
+                  </a:tcPr>
+                </a:tc>
+              </a:tr>
+              <a:tr h="0">
+                <a:tc>
+                  <a:txBody>
+                    <a:bodyPr/>
+                    <a:lstStyle/>
+                    <a:p>
+                      <a:pPr indent="0" marL="0">
+                        <a:buNone/>
+                      </a:pPr>
+                      <a:r>
+                        <a:rPr lang="en-US" sz="1400" dirty="0">
+                          <a:solidFill>
+                            <a:srgbClr val="1F2A37"/>
+                          </a:solidFill>
+                          <a:latin typeface="Microsoft YaHei" pitchFamily="34" charset="0"/>
+                          <a:ea typeface="Microsoft YaHei" pitchFamily="34" charset="-122"/>
+                          <a:cs typeface="Microsoft YaHei" pitchFamily="34" charset="-120"/>
+                        </a:rPr>
+                        <a:t>粒度</a:t>
+                      </a:r>
+                      <a:endParaRPr lang="en-US" sz="1400" dirty="0">
+                        <a:latin typeface="Microsoft YaHei" charset="0"/>
+                        <a:ea typeface="Microsoft YaHei" charset="0"/>
+                        <a:cs typeface="Microsoft YaHei" charset="0"/>
+                      </a:endParaRPr>
+                    </a:p>
+                  </a:txBody>
+                  <a:tcPr marL="91440" marR="91440" marT="54864" marB="54864" anchor="ctr">
+                    <a:lnL w="12700" cap="flat" cmpd="sng" algn="ctr">
+                      <a:solidFill>
+                        <a:srgbClr val="D5DBE3"/>
+                      </a:solidFill>
+                      <a:prstDash val="solid"/>
+                      <a:round/>
+                      <a:headEnd type="none" w="med" len="med"/>
+                      <a:tailEnd type="none" w="med" len="med"/>
+                    </a:lnL>
+                    <a:lnR w="12700" cap="flat" cmpd="sng" algn="ctr">
+                      <a:solidFill>
+                        <a:srgbClr val="D5DBE3"/>
+                      </a:solidFill>
+                      <a:prstDash val="solid"/>
+                      <a:round/>
+                      <a:headEnd type="none" w="med" len="med"/>
+                      <a:tailEnd type="none" w="med" len="med"/>
+                    </a:lnR>
+                    <a:lnT w="12700" cap="flat" cmpd="sng" algn="ctr">
+                      <a:solidFill>
+                        <a:srgbClr val="D5DBE3"/>
+                      </a:solidFill>
+                      <a:prstDash val="solid"/>
+                      <a:round/>
+                      <a:headEnd type="none" w="med" len="med"/>
+                      <a:tailEnd type="none" w="med" len="med"/>
+                    </a:lnT>
+                    <a:lnB w="12700" cap="flat" cmpd="sng" algn="ctr">
+                      <a:solidFill>
+                        <a:srgbClr val="D5DBE3"/>
+                      </a:solidFill>
+                      <a:prstDash val="solid"/>
+                      <a:round/>
+                      <a:headEnd type="none" w="med" len="med"/>
+                      <a:tailEnd type="none" w="med" len="med"/>
+                    </a:lnB>
+                  </a:tcPr>
+                </a:tc>
+                <a:tc>
+                  <a:txBody>
+                    <a:bodyPr/>
+                    <a:lstStyle/>
+                    <a:p>
+                      <a:pPr indent="0" marL="0">
+                        <a:buNone/>
+                      </a:pPr>
+                      <a:r>
+                        <a:rPr lang="en-US" sz="1400" dirty="0">
+                          <a:solidFill>
+                            <a:srgbClr val="1F2A37"/>
+                          </a:solidFill>
+                          <a:latin typeface="Microsoft YaHei" pitchFamily="34" charset="0"/>
+                          <a:ea typeface="Microsoft YaHei" pitchFamily="34" charset="-122"/>
+                          <a:cs typeface="Microsoft YaHei" pitchFamily="34" charset="-120"/>
+                        </a:rPr>
+                        <a:t>销售日 + 小票号 + 商品，即每笔销售一行</a:t>
+                      </a:r>
+                      <a:endParaRPr lang="en-US" sz="1400" dirty="0">
+                        <a:latin typeface="Microsoft YaHei" charset="0"/>
+                        <a:ea typeface="Microsoft YaHei" charset="0"/>
+                        <a:cs typeface="Microsoft YaHei" charset="0"/>
+                      </a:endParaRPr>
+                    </a:p>
+                  </a:txBody>
+                  <a:tcPr marL="91440" marR="91440" marT="54864" marB="54864" anchor="ctr">
+                    <a:lnL w="12700" cap="flat" cmpd="sng" algn="ctr">
+                      <a:solidFill>
+                        <a:srgbClr val="D5DBE3"/>
+                      </a:solidFill>
+                      <a:prstDash val="solid"/>
+                      <a:round/>
+                      <a:headEnd type="none" w="med" len="med"/>
+                      <a:tailEnd type="none" w="med" len="med"/>
+                    </a:lnL>
+                    <a:lnR w="12700" cap="flat" cmpd="sng" algn="ctr">
+                      <a:solidFill>
+                        <a:srgbClr val="D5DBE3"/>
+                      </a:solidFill>
+                      <a:prstDash val="solid"/>
+                      <a:round/>
+                      <a:headEnd type="none" w="med" len="med"/>
+                      <a:tailEnd type="none" w="med" len="med"/>
+                    </a:lnR>
+                    <a:lnT w="12700" cap="flat" cmpd="sng" algn="ctr">
+                      <a:solidFill>
+                        <a:srgbClr val="D5DBE3"/>
+                      </a:solidFill>
+                      <a:prstDash val="solid"/>
+                      <a:round/>
+                      <a:headEnd type="none" w="med" len="med"/>
+                      <a:tailEnd type="none" w="med" len="med"/>
+                    </a:lnT>
+                    <a:lnB w="12700" cap="flat" cmpd="sng" algn="ctr">
+                      <a:solidFill>
+                        <a:srgbClr val="D5DBE3"/>
+                      </a:solidFill>
+                      <a:prstDash val="solid"/>
+                      <a:round/>
+                      <a:headEnd type="none" w="med" len="med"/>
+                      <a:tailEnd type="none" w="med" len="med"/>
+                    </a:lnB>
+                  </a:tcPr>
+                </a:tc>
+              </a:tr>
+              <a:tr h="0">
+                <a:tc>
+                  <a:txBody>
+                    <a:bodyPr/>
+                    <a:lstStyle/>
+                    <a:p>
+                      <a:pPr indent="0" marL="0">
+                        <a:buNone/>
+                      </a:pPr>
+                      <a:r>
+                        <a:rPr lang="en-US" sz="1400" dirty="0">
+                          <a:solidFill>
+                            <a:srgbClr val="1F2A37"/>
+                          </a:solidFill>
+                          <a:latin typeface="Microsoft YaHei" pitchFamily="34" charset="0"/>
+                          <a:ea typeface="Microsoft YaHei" pitchFamily="34" charset="-122"/>
+                          <a:cs typeface="Microsoft YaHei" pitchFamily="34" charset="-120"/>
+                        </a:rPr>
+                        <a:t>日期</a:t>
+                      </a:r>
+                      <a:endParaRPr lang="en-US" sz="1400" dirty="0">
+                        <a:latin typeface="Microsoft YaHei" charset="0"/>
+                        <a:ea typeface="Microsoft YaHei" charset="0"/>
+                        <a:cs typeface="Microsoft YaHei" charset="0"/>
+                      </a:endParaRPr>
+                    </a:p>
+                  </a:txBody>
+                  <a:tcPr marL="91440" marR="91440" marT="54864" marB="54864" anchor="ctr">
+                    <a:lnL w="12700" cap="flat" cmpd="sng" algn="ctr">
+                      <a:solidFill>
+                        <a:srgbClr val="D5DBE3"/>
+                      </a:solidFill>
+                      <a:prstDash val="solid"/>
+                      <a:round/>
+                      <a:headEnd type="none" w="med" len="med"/>
+                      <a:tailEnd type="none" w="med" len="med"/>
+                    </a:lnL>
+                    <a:lnR w="12700" cap="flat" cmpd="sng" algn="ctr">
+                      <a:solidFill>
+                        <a:srgbClr val="D5DBE3"/>
+                      </a:solidFill>
+                      <a:prstDash val="solid"/>
+                      <a:round/>
+                      <a:headEnd type="none" w="med" len="med"/>
+                      <a:tailEnd type="none" w="med" len="med"/>
+                    </a:lnR>
+                    <a:lnT w="12700" cap="flat" cmpd="sng" algn="ctr">
+                      <a:solidFill>
+                        <a:srgbClr val="D5DBE3"/>
+                      </a:solidFill>
+                      <a:prstDash val="solid"/>
+                      <a:round/>
+                      <a:headEnd type="none" w="med" len="med"/>
+                      <a:tailEnd type="none" w="med" len="med"/>
+                    </a:lnT>
+                    <a:lnB w="12700" cap="flat" cmpd="sng" algn="ctr">
+                      <a:solidFill>
+                        <a:srgbClr val="D5DBE3"/>
+                      </a:solidFill>
+                      <a:prstDash val="solid"/>
+                      <a:round/>
+                      <a:headEnd type="none" w="med" len="med"/>
+                      <a:tailEnd type="none" w="med" len="med"/>
+                    </a:lnB>
+                  </a:tcPr>
+                </a:tc>
+                <a:tc>
+                  <a:txBody>
+                    <a:bodyPr/>
+                    <a:lstStyle/>
+                    <a:p>
+                      <a:pPr indent="0" marL="0">
+                        <a:buNone/>
+                      </a:pPr>
+                      <a:r>
+                        <a:rPr lang="en-US" sz="1400" dirty="0">
+                          <a:solidFill>
+                            <a:srgbClr val="1F2A37"/>
+                          </a:solidFill>
+                          <a:latin typeface="Microsoft YaHei" pitchFamily="34" charset="0"/>
+                          <a:ea typeface="Microsoft YaHei" pitchFamily="34" charset="-122"/>
+                          <a:cs typeface="Microsoft YaHei" pitchFamily="34" charset="-120"/>
+                        </a:rPr>
+                        <a:t>ss_sold_date_sk 关联 date_dim（销售日）</a:t>
+                      </a:r>
+                      <a:endParaRPr lang="en-US" sz="1400" dirty="0">
+                        <a:latin typeface="Microsoft YaHei" charset="0"/>
+                        <a:ea typeface="Microsoft YaHei" charset="0"/>
+                        <a:cs typeface="Microsoft YaHei" charset="0"/>
+                      </a:endParaRPr>
+                    </a:p>
+                  </a:txBody>
+                  <a:tcPr marL="91440" marR="91440" marT="54864" marB="54864" anchor="ctr">
+                    <a:lnL w="12700" cap="flat" cmpd="sng" algn="ctr">
+                      <a:solidFill>
+                        <a:srgbClr val="D5DBE3"/>
+                      </a:solidFill>
+                      <a:prstDash val="solid"/>
+                      <a:round/>
+                      <a:headEnd type="none" w="med" len="med"/>
+                      <a:tailEnd type="none" w="med" len="med"/>
+                    </a:lnL>
+                    <a:lnR w="12700" cap="flat" cmpd="sng" algn="ctr">
+                      <a:solidFill>
+                        <a:srgbClr val="D5DBE3"/>
+                      </a:solidFill>
+                      <a:prstDash val="solid"/>
+                      <a:round/>
+                      <a:headEnd type="none" w="med" len="med"/>
+                      <a:tailEnd type="none" w="med" len="med"/>
+                    </a:lnR>
+                    <a:lnT w="12700" cap="flat" cmpd="sng" algn="ctr">
+                      <a:solidFill>
+                        <a:srgbClr val="D5DBE3"/>
+                      </a:solidFill>
+                      <a:prstDash val="solid"/>
+                      <a:round/>
+                      <a:headEnd type="none" w="med" len="med"/>
+                      <a:tailEnd type="none" w="med" len="med"/>
+                    </a:lnT>
+                    <a:lnB w="12700" cap="flat" cmpd="sng" algn="ctr">
+                      <a:solidFill>
+                        <a:srgbClr val="D5DBE3"/>
+                      </a:solidFill>
+                      <a:prstDash val="solid"/>
+                      <a:round/>
+                      <a:headEnd type="none" w="med" len="med"/>
+                      <a:tailEnd type="none" w="med" len="med"/>
+                    </a:lnB>
+                  </a:tcPr>
+                </a:tc>
+              </a:tr>
+              <a:tr h="0">
+                <a:tc>
+                  <a:txBody>
+                    <a:bodyPr/>
+                    <a:lstStyle/>
+                    <a:p>
+                      <a:pPr indent="0" marL="0">
+                        <a:buNone/>
+                      </a:pPr>
+                      <a:r>
+                        <a:rPr lang="en-US" sz="1400" dirty="0">
+                          <a:solidFill>
+                            <a:srgbClr val="1F2A37"/>
+                          </a:solidFill>
+                          <a:latin typeface="Microsoft YaHei" pitchFamily="34" charset="0"/>
+                          <a:ea typeface="Microsoft YaHei" pitchFamily="34" charset="-122"/>
+                          <a:cs typeface="Microsoft YaHei" pitchFamily="34" charset="-120"/>
+                        </a:rPr>
+                        <a:t>校验规则</a:t>
+                      </a:r>
+                      <a:endParaRPr lang="en-US" sz="1400" dirty="0">
+                        <a:latin typeface="Microsoft YaHei" charset="0"/>
+                        <a:ea typeface="Microsoft YaHei" charset="0"/>
+                        <a:cs typeface="Microsoft YaHei" charset="0"/>
+                      </a:endParaRPr>
+                    </a:p>
+                  </a:txBody>
+                  <a:tcPr marL="91440" marR="91440" marT="54864" marB="54864" anchor="ctr">
+                    <a:lnL w="12700" cap="flat" cmpd="sng" algn="ctr">
+                      <a:solidFill>
+                        <a:srgbClr val="D5DBE3"/>
+                      </a:solidFill>
+                      <a:prstDash val="solid"/>
+                      <a:round/>
+                      <a:headEnd type="none" w="med" len="med"/>
+                      <a:tailEnd type="none" w="med" len="med"/>
+                    </a:lnL>
+                    <a:lnR w="12700" cap="flat" cmpd="sng" algn="ctr">
+                      <a:solidFill>
+                        <a:srgbClr val="D5DBE3"/>
+                      </a:solidFill>
+                      <a:prstDash val="solid"/>
+                      <a:round/>
+                      <a:headEnd type="none" w="med" len="med"/>
+                      <a:tailEnd type="none" w="med" len="med"/>
+                    </a:lnR>
+                    <a:lnT w="12700" cap="flat" cmpd="sng" algn="ctr">
+                      <a:solidFill>
+                        <a:srgbClr val="D5DBE3"/>
+                      </a:solidFill>
+                      <a:prstDash val="solid"/>
+                      <a:round/>
+                      <a:headEnd type="none" w="med" len="med"/>
+                      <a:tailEnd type="none" w="med" len="med"/>
+                    </a:lnT>
+                    <a:lnB w="12700" cap="flat" cmpd="sng" algn="ctr">
+                      <a:solidFill>
+                        <a:srgbClr val="D5DBE3"/>
+                      </a:solidFill>
+                      <a:prstDash val="solid"/>
+                      <a:round/>
+                      <a:headEnd type="none" w="med" len="med"/>
+                      <a:tailEnd type="none" w="med" len="med"/>
+                    </a:lnB>
+                  </a:tcPr>
+                </a:tc>
+                <a:tc>
+                  <a:txBody>
+                    <a:bodyPr/>
+                    <a:lstStyle/>
+                    <a:p>
+                      <a:pPr indent="0" marL="0">
+                        <a:buNone/>
+                      </a:pPr>
+                      <a:r>
+                        <a:rPr lang="en-US" sz="1400" dirty="0">
+                          <a:solidFill>
+                            <a:srgbClr val="1F2A37"/>
+                          </a:solidFill>
+                          <a:latin typeface="Microsoft YaHei" pitchFamily="34" charset="0"/>
+                          <a:ea typeface="Microsoft YaHei" pitchFamily="34" charset="-122"/>
+                          <a:cs typeface="Microsoft YaHei" pitchFamily="34" charset="-120"/>
+                        </a:rPr>
+                        <a:t>每笔销售一行；日期键唯一；丢行率不超标（学习时 1.03%）</a:t>
+                      </a:r>
+                      <a:endParaRPr lang="en-US" sz="1400" dirty="0">
+                        <a:latin typeface="Microsoft YaHei" charset="0"/>
+                        <a:ea typeface="Microsoft YaHei" charset="0"/>
+                        <a:cs typeface="Microsoft YaHei" charset="0"/>
+                      </a:endParaRPr>
+                    </a:p>
+                  </a:txBody>
+                  <a:tcPr marL="91440" marR="91440" marT="54864" marB="54864" anchor="ctr">
+                    <a:lnL w="12700" cap="flat" cmpd="sng" algn="ctr">
+                      <a:solidFill>
+                        <a:srgbClr val="D5DBE3"/>
+                      </a:solidFill>
+                      <a:prstDash val="solid"/>
+                      <a:round/>
+                      <a:headEnd type="none" w="med" len="med"/>
+                      <a:tailEnd type="none" w="med" len="med"/>
+                    </a:lnL>
+                    <a:lnR w="12700" cap="flat" cmpd="sng" algn="ctr">
+                      <a:solidFill>
+                        <a:srgbClr val="D5DBE3"/>
+                      </a:solidFill>
+                      <a:prstDash val="solid"/>
+                      <a:round/>
+                      <a:headEnd type="none" w="med" len="med"/>
+                      <a:tailEnd type="none" w="med" len="med"/>
+                    </a:lnR>
+                    <a:lnT w="12700" cap="flat" cmpd="sng" algn="ctr">
+                      <a:solidFill>
+                        <a:srgbClr val="D5DBE3"/>
+                      </a:solidFill>
+                      <a:prstDash val="solid"/>
+                      <a:round/>
+                      <a:headEnd type="none" w="med" len="med"/>
+                      <a:tailEnd type="none" w="med" len="med"/>
+                    </a:lnT>
+                    <a:lnB w="12700" cap="flat" cmpd="sng" algn="ctr">
+                      <a:solidFill>
+                        <a:srgbClr val="D5DBE3"/>
+                      </a:solidFill>
+                      <a:prstDash val="solid"/>
+                      <a:round/>
+                      <a:headEnd type="none" w="med" len="med"/>
+                      <a:tailEnd type="none" w="med" len="med"/>
+                    </a:lnB>
+                  </a:tcPr>
+                </a:tc>
+              </a:tr>
+              <a:tr h="0">
+                <a:tc>
+                  <a:txBody>
+                    <a:bodyPr/>
+                    <a:lstStyle/>
+                    <a:p>
+                      <a:pPr indent="0" marL="0">
+                        <a:buNone/>
+                      </a:pPr>
+                      <a:r>
+                        <a:rPr lang="en-US" sz="1400" dirty="0">
+                          <a:solidFill>
+                            <a:srgbClr val="1F2A37"/>
+                          </a:solidFill>
+                          <a:latin typeface="Microsoft YaHei" pitchFamily="34" charset="0"/>
+                          <a:ea typeface="Microsoft YaHei" pitchFamily="34" charset="-122"/>
+                          <a:cs typeface="Microsoft YaHei" pitchFamily="34" charset="-120"/>
+                        </a:rPr>
+                        <a:t>证据</a:t>
+                      </a:r>
+                      <a:endParaRPr lang="en-US" sz="1400" dirty="0">
+                        <a:latin typeface="Microsoft YaHei" charset="0"/>
+                        <a:ea typeface="Microsoft YaHei" charset="0"/>
+                        <a:cs typeface="Microsoft YaHei" charset="0"/>
+                      </a:endParaRPr>
+                    </a:p>
+                  </a:txBody>
+                  <a:tcPr marL="91440" marR="91440" marT="54864" marB="54864" anchor="ctr">
+                    <a:lnL w="12700" cap="flat" cmpd="sng" algn="ctr">
+                      <a:solidFill>
+                        <a:srgbClr val="D5DBE3"/>
+                      </a:solidFill>
+                      <a:prstDash val="solid"/>
+                      <a:round/>
+                      <a:headEnd type="none" w="med" len="med"/>
+                      <a:tailEnd type="none" w="med" len="med"/>
+                    </a:lnL>
+                    <a:lnR w="12700" cap="flat" cmpd="sng" algn="ctr">
+                      <a:solidFill>
+                        <a:srgbClr val="D5DBE3"/>
+                      </a:solidFill>
+                      <a:prstDash val="solid"/>
+                      <a:round/>
+                      <a:headEnd type="none" w="med" len="med"/>
+                      <a:tailEnd type="none" w="med" len="med"/>
+                    </a:lnR>
+                    <a:lnT w="12700" cap="flat" cmpd="sng" algn="ctr">
+                      <a:solidFill>
+                        <a:srgbClr val="D5DBE3"/>
+                      </a:solidFill>
+                      <a:prstDash val="solid"/>
+                      <a:round/>
+                      <a:headEnd type="none" w="med" len="med"/>
+                      <a:tailEnd type="none" w="med" len="med"/>
+                    </a:lnT>
+                    <a:lnB w="12700" cap="flat" cmpd="sng" algn="ctr">
+                      <a:solidFill>
+                        <a:srgbClr val="D5DBE3"/>
+                      </a:solidFill>
+                      <a:prstDash val="solid"/>
+                      <a:round/>
+                      <a:headEnd type="none" w="med" len="med"/>
+                      <a:tailEnd type="none" w="med" len="med"/>
+                    </a:lnB>
+                  </a:tcPr>
+                </a:tc>
+                <a:tc>
+                  <a:txBody>
+                    <a:bodyPr/>
+                    <a:lstStyle/>
+                    <a:p>
+                      <a:pPr indent="0" marL="0">
+                        <a:buNone/>
+                      </a:pPr>
+                      <a:r>
+                        <a:rPr lang="en-US" sz="1400" dirty="0">
+                          <a:solidFill>
+                            <a:srgbClr val="1F2A37"/>
+                          </a:solidFill>
+                          <a:latin typeface="Microsoft YaHei" pitchFamily="34" charset="0"/>
+                          <a:ea typeface="Microsoft YaHei" pitchFamily="34" charset="-122"/>
+                          <a:cs typeface="Microsoft YaHei" pitchFamily="34" charset="-120"/>
+                        </a:rPr>
+                        <a:t>学习题、学习时的 SQL 和答案、当时的数据版本</a:t>
+                      </a:r>
+                      <a:endParaRPr lang="en-US" sz="1400" dirty="0">
+                        <a:latin typeface="Microsoft YaHei" charset="0"/>
+                        <a:ea typeface="Microsoft YaHei" charset="0"/>
+                        <a:cs typeface="Microsoft YaHei" charset="0"/>
+                      </a:endParaRPr>
+                    </a:p>
+                  </a:txBody>
+                  <a:tcPr marL="91440" marR="91440" marT="54864" marB="54864" anchor="ctr">
+                    <a:lnL w="12700" cap="flat" cmpd="sng" algn="ctr">
+                      <a:solidFill>
+                        <a:srgbClr val="D5DBE3"/>
+                      </a:solidFill>
+                      <a:prstDash val="solid"/>
+                      <a:round/>
+                      <a:headEnd type="none" w="med" len="med"/>
+                      <a:tailEnd type="none" w="med" len="med"/>
+                    </a:lnL>
+                    <a:lnR w="12700" cap="flat" cmpd="sng" algn="ctr">
+                      <a:solidFill>
+                        <a:srgbClr val="D5DBE3"/>
+                      </a:solidFill>
+                      <a:prstDash val="solid"/>
+                      <a:round/>
+                      <a:headEnd type="none" w="med" len="med"/>
+                      <a:tailEnd type="none" w="med" len="med"/>
+                    </a:lnR>
+                    <a:lnT w="12700" cap="flat" cmpd="sng" algn="ctr">
+                      <a:solidFill>
+                        <a:srgbClr val="D5DBE3"/>
+                      </a:solidFill>
+                      <a:prstDash val="solid"/>
+                      <a:round/>
+                      <a:headEnd type="none" w="med" len="med"/>
+                      <a:tailEnd type="none" w="med" len="med"/>
+                    </a:lnT>
+                    <a:lnB w="12700" cap="flat" cmpd="sng" algn="ctr">
+                      <a:solidFill>
+                        <a:srgbClr val="D5DBE3"/>
+                      </a:solidFill>
+                      <a:prstDash val="solid"/>
+                      <a:round/>
+                      <a:headEnd type="none" w="med" len="med"/>
+                      <a:tailEnd type="none" w="med" len="med"/>
+                    </a:lnB>
+                  </a:tcPr>
+                </a:tc>
+              </a:tr>
+            </a:tbl>
+          </a:graphicData>
+        </a:graphic>
+      </p:graphicFrame>
+      <p:sp>
+        <p:nvSpPr>
+          <p:cNvPr id="12" name="Text 9"/>
+          <p:cNvSpPr txBox="1"/>
+          <p:nvPr/>
+        </p:nvSpPr>
+        <p:spPr>
+          <a:xfrm>
+            <a:off x="548640" y="6263640"/>
+            <a:ext cx="10362895" cy="365760"/>
+          </a:xfrm>
+          <a:prstGeom prst="rect">
+            <a:avLst/>
+          </a:prstGeom>
+          <a:noFill/>
+          <a:ln/>
+        </p:spPr>
+        <p:txBody>
+          <a:bodyPr wrap="square" lIns="0" tIns="0" rIns="0" bIns="0" rtlCol="0" anchor="b"/>
+          <a:lstStyle/>
+          <a:p>
+            <a:pPr indent="0" marL="0">
+              <a:buNone/>
+            </a:pPr>
+            <a:r>
+              <a:rPr lang="en-US" sz="1100" dirty="0">
+                <a:solidFill>
+                  <a:srgbClr val="5B6573"/>
+                </a:solidFill>
+                <a:latin typeface="Microsoft YaHei" pitchFamily="34" charset="0"/>
+                <a:ea typeface="Microsoft YaHei" pitchFamily="34" charset="-122"/>
+                <a:cs typeface="Microsoft YaHei" pitchFamily="34" charset="-120"/>
+              </a:rPr>
+              <a:t>记录：noctis results/scen-20261002/dsv41flash-r1-g3fix--snap（端到端实验第 1 次 MAVRA 运行）。数据为仿 TPC-DS 的合成零售数据（100 万行门店销售），题目中的年份略去。</a:t>
+            </a:r>
+            <a:endParaRPr lang="en-US" sz="1100" dirty="0"/>
           </a:p>
         </p:txBody>
       </p:sp>
@@ -3348,7 +5435,7 @@
             <a:lvl1pPr>
               <a:defRPr sz="1000">
                 <a:solidFill>
-                  <a:srgbClr val="CADCFC"/>
+                  <a:srgbClr val="5B6573"/>
                 </a:solidFill>
                 <a:latin typeface="Microsoft YaHei"/>
                 <a:ea typeface="Microsoft YaHei"/>
@@ -3361,6 +5448,4486 @@
             <a:fld id="{F7021451-1387-4CA6-816F-3879F97B5CBC}" type="slidenum">
               <a:rPr b="0" lang="en-US"/>
               <a:t>6</a:t>
+            </a:fld>
+            <a:endParaRPr lang="en-US"/>
+          </a:p>
+        </p:txBody>
+      </p:sp>
+    </p:spTree>
+  </p:cSld>
+  <p:clrMapOvr>
+    <a:masterClrMapping/>
+  </p:clrMapOvr>
+</p:sld>
+</file>
+
+<file path=ppt/slides/slide7.xml><?xml version="1.0" encoding="utf-8"?>
+<p:sld xmlns:a="http://schemas.openxmlformats.org/drawingml/2006/main" xmlns:r="http://schemas.openxmlformats.org/officeDocument/2006/relationships" xmlns:p="http://schemas.openxmlformats.org/presentationml/2006/main">
+  <p:cSld name="Slide 7">
+    <p:spTree>
+      <p:nvGrpSpPr>
+        <p:cNvPr id="1" name=""/>
+        <p:cNvGrpSpPr/>
+        <p:nvPr/>
+      </p:nvGrpSpPr>
+      <p:grpSpPr>
+        <a:xfrm>
+          <a:off x="0" y="0"/>
+          <a:ext cx="0" cy="0"/>
+          <a:chOff x="0" y="0"/>
+          <a:chExt cx="0" cy="0"/>
+        </a:xfrm>
+      </p:grpSpPr>
+      <p:sp>
+        <p:nvSpPr>
+          <p:cNvPr id="2" name="Text 0"/>
+          <p:cNvSpPr/>
+          <p:nvPr>
+            <p:ph idx="100" type="title" hasCustomPrompt="1"/>
+          </p:nvPr>
+        </p:nvSpPr>
+        <p:spPr>
+          <a:xfrm>
+            <a:off x="548640" y="274320"/>
+            <a:ext cx="11094415" cy="685800"/>
+          </a:xfrm>
+          <a:prstGeom prst="rect">
+            <a:avLst/>
+          </a:prstGeom>
+          <a:noFill/>
+          <a:ln/>
+        </p:spPr>
+        <p:txBody>
+          <a:bodyPr wrap="square" lIns="0" tIns="0" rIns="0" bIns="0" rtlCol="0" anchor="ctr"/>
+          <a:lstStyle/>
+          <a:p>
+            <a:pPr algn="l" indent="0" marL="0">
+              <a:buNone/>
+            </a:pPr>
+            <a:r>
+              <a:rPr lang="en-US" sz="3000" b="1" dirty="0">
+                <a:solidFill>
+                  <a:srgbClr val="1F2A37"/>
+                </a:solidFill>
+                <a:latin typeface="Microsoft YaHei" pitchFamily="34" charset="0"/>
+                <a:ea typeface="Microsoft YaHei" pitchFamily="34" charset="-122"/>
+                <a:cs typeface="Microsoft YaHei" pitchFamily="34" charset="-120"/>
+              </a:rPr>
+              <a:t>真实例子②：三种日常写入，同一个问题“9 月门店营业额”</a:t>
+            </a:r>
+            <a:endParaRPr lang="en-US" sz="3000" dirty="0"/>
+          </a:p>
+        </p:txBody>
+      </p:sp>
+      <p:graphicFrame>
+        <p:nvGraphicFramePr>
+          <p:cNvPr id="8" name="Table 0"/>
+          <p:cNvGraphicFramePr>
+            <a:graphicFrameLocks noGrp="1"/>
+          </p:cNvGraphicFramePr>
+          <p:nvPr>
+            <p:extLst>
+              <p:ext uri="{D42A27DB-BD31-4B8C-83A1-F6EECF244321}">
+                <p14:modId xmlns:p14="http://schemas.microsoft.com/office/powerpoint/2010/main" val="1579011935"/>
+              </p:ext>
+            </p:extLst>
+          </p:nvPr>
+        </p:nvGraphicFramePr>
+        <p:xfrm>
+          <a:off x="548640" y="1188720"/>
+          <a:ext cx="11094415" cy="914400"/>
+        </p:xfrm>
+        <a:graphic>
+          <a:graphicData uri="http://schemas.openxmlformats.org/drawingml/2006/table">
+            <a:tbl>
+              <a:tblPr/>
+              <a:tblGrid>
+                <a:gridCol w="1325880"/>
+                <a:gridCol w="3429000"/>
+                <a:gridCol w="1234440"/>
+                <a:gridCol w="1828800"/>
+                <a:gridCol w="3273552"/>
+              </a:tblGrid>
+              <a:tr h="0">
+                <a:tc>
+                  <a:txBody>
+                    <a:bodyPr/>
+                    <a:lstStyle/>
+                    <a:p>
+                      <a:pPr indent="0" marL="0">
+                        <a:buNone/>
+                      </a:pPr>
+                      <a:r>
+                        <a:rPr lang="en-US" sz="1400" b="1" dirty="0">
+                          <a:solidFill>
+                            <a:srgbClr val="1F2A37"/>
+                          </a:solidFill>
+                          <a:latin typeface="Microsoft YaHei" pitchFamily="34" charset="0"/>
+                          <a:ea typeface="Microsoft YaHei" pitchFamily="34" charset="-122"/>
+                          <a:cs typeface="Microsoft YaHei" pitchFamily="34" charset="-120"/>
+                        </a:rPr>
+                        <a:t>写入</a:t>
+                      </a:r>
+                      <a:endParaRPr lang="en-US" sz="1400" dirty="0">
+                        <a:latin typeface="Microsoft YaHei" charset="0"/>
+                        <a:ea typeface="Microsoft YaHei" charset="0"/>
+                        <a:cs typeface="Microsoft YaHei" charset="0"/>
+                      </a:endParaRPr>
+                    </a:p>
+                  </a:txBody>
+                  <a:tcPr marL="91440" marR="91440" marT="54864" marB="54864" anchor="ctr">
+                    <a:lnL w="12700" cap="flat" cmpd="sng" algn="ctr">
+                      <a:solidFill>
+                        <a:srgbClr val="D5DBE3"/>
+                      </a:solidFill>
+                      <a:prstDash val="solid"/>
+                      <a:round/>
+                      <a:headEnd type="none" w="med" len="med"/>
+                      <a:tailEnd type="none" w="med" len="med"/>
+                    </a:lnL>
+                    <a:lnR w="12700" cap="flat" cmpd="sng" algn="ctr">
+                      <a:solidFill>
+                        <a:srgbClr val="D5DBE3"/>
+                      </a:solidFill>
+                      <a:prstDash val="solid"/>
+                      <a:round/>
+                      <a:headEnd type="none" w="med" len="med"/>
+                      <a:tailEnd type="none" w="med" len="med"/>
+                    </a:lnR>
+                    <a:lnT w="12700" cap="flat" cmpd="sng" algn="ctr">
+                      <a:solidFill>
+                        <a:srgbClr val="D5DBE3"/>
+                      </a:solidFill>
+                      <a:prstDash val="solid"/>
+                      <a:round/>
+                      <a:headEnd type="none" w="med" len="med"/>
+                      <a:tailEnd type="none" w="med" len="med"/>
+                    </a:lnT>
+                    <a:lnB w="12700" cap="flat" cmpd="sng" algn="ctr">
+                      <a:solidFill>
+                        <a:srgbClr val="D5DBE3"/>
+                      </a:solidFill>
+                      <a:prstDash val="solid"/>
+                      <a:round/>
+                      <a:headEnd type="none" w="med" len="med"/>
+                      <a:tailEnd type="none" w="med" len="med"/>
+                    </a:lnB>
+                    <a:solidFill>
+                      <a:srgbClr val="F1F3F6"/>
+                    </a:solidFill>
+                  </a:tcPr>
+                </a:tc>
+                <a:tc>
+                  <a:txBody>
+                    <a:bodyPr/>
+                    <a:lstStyle/>
+                    <a:p>
+                      <a:pPr indent="0" marL="0">
+                        <a:buNone/>
+                      </a:pPr>
+                      <a:r>
+                        <a:rPr lang="en-US" sz="1400" b="1" dirty="0">
+                          <a:solidFill>
+                            <a:srgbClr val="1F2A37"/>
+                          </a:solidFill>
+                          <a:latin typeface="Microsoft YaHei" pitchFamily="34" charset="0"/>
+                          <a:ea typeface="Microsoft YaHei" pitchFamily="34" charset="-122"/>
+                          <a:cs typeface="Microsoft YaHei" pitchFamily="34" charset="-120"/>
+                        </a:rPr>
+                        <a:t>数据库里发生了什么</a:t>
+                      </a:r>
+                      <a:endParaRPr lang="en-US" sz="1400" dirty="0">
+                        <a:latin typeface="Microsoft YaHei" charset="0"/>
+                        <a:ea typeface="Microsoft YaHei" charset="0"/>
+                        <a:cs typeface="Microsoft YaHei" charset="0"/>
+                      </a:endParaRPr>
+                    </a:p>
+                  </a:txBody>
+                  <a:tcPr marL="91440" marR="91440" marT="54864" marB="54864" anchor="ctr">
+                    <a:lnL w="12700" cap="flat" cmpd="sng" algn="ctr">
+                      <a:solidFill>
+                        <a:srgbClr val="D5DBE3"/>
+                      </a:solidFill>
+                      <a:prstDash val="solid"/>
+                      <a:round/>
+                      <a:headEnd type="none" w="med" len="med"/>
+                      <a:tailEnd type="none" w="med" len="med"/>
+                    </a:lnL>
+                    <a:lnR w="12700" cap="flat" cmpd="sng" algn="ctr">
+                      <a:solidFill>
+                        <a:srgbClr val="D5DBE3"/>
+                      </a:solidFill>
+                      <a:prstDash val="solid"/>
+                      <a:round/>
+                      <a:headEnd type="none" w="med" len="med"/>
+                      <a:tailEnd type="none" w="med" len="med"/>
+                    </a:lnR>
+                    <a:lnT w="12700" cap="flat" cmpd="sng" algn="ctr">
+                      <a:solidFill>
+                        <a:srgbClr val="D5DBE3"/>
+                      </a:solidFill>
+                      <a:prstDash val="solid"/>
+                      <a:round/>
+                      <a:headEnd type="none" w="med" len="med"/>
+                      <a:tailEnd type="none" w="med" len="med"/>
+                    </a:lnT>
+                    <a:lnB w="12700" cap="flat" cmpd="sng" algn="ctr">
+                      <a:solidFill>
+                        <a:srgbClr val="D5DBE3"/>
+                      </a:solidFill>
+                      <a:prstDash val="solid"/>
+                      <a:round/>
+                      <a:headEnd type="none" w="med" len="med"/>
+                      <a:tailEnd type="none" w="med" len="med"/>
+                    </a:lnB>
+                    <a:solidFill>
+                      <a:srgbClr val="F1F3F6"/>
+                    </a:solidFill>
+                  </a:tcPr>
+                </a:tc>
+                <a:tc>
+                  <a:txBody>
+                    <a:bodyPr/>
+                    <a:lstStyle/>
+                    <a:p>
+                      <a:pPr indent="0" marL="0">
+                        <a:buNone/>
+                      </a:pPr>
+                      <a:r>
+                        <a:rPr lang="en-US" sz="1400" b="1" dirty="0">
+                          <a:solidFill>
+                            <a:srgbClr val="1F2A37"/>
+                          </a:solidFill>
+                          <a:latin typeface="Microsoft YaHei" pitchFamily="34" charset="0"/>
+                          <a:ea typeface="Microsoft YaHei" pitchFamily="34" charset="-122"/>
+                          <a:cs typeface="Microsoft YaHei" pitchFamily="34" charset="-120"/>
+                        </a:rPr>
+                        <a:t>正确答案</a:t>
+                      </a:r>
+                      <a:endParaRPr lang="en-US" sz="1400" dirty="0">
+                        <a:latin typeface="Microsoft YaHei" charset="0"/>
+                        <a:ea typeface="Microsoft YaHei" charset="0"/>
+                        <a:cs typeface="Microsoft YaHei" charset="0"/>
+                      </a:endParaRPr>
+                    </a:p>
+                  </a:txBody>
+                  <a:tcPr marL="91440" marR="91440" marT="54864" marB="54864" anchor="ctr">
+                    <a:lnL w="12700" cap="flat" cmpd="sng" algn="ctr">
+                      <a:solidFill>
+                        <a:srgbClr val="D5DBE3"/>
+                      </a:solidFill>
+                      <a:prstDash val="solid"/>
+                      <a:round/>
+                      <a:headEnd type="none" w="med" len="med"/>
+                      <a:tailEnd type="none" w="med" len="med"/>
+                    </a:lnL>
+                    <a:lnR w="12700" cap="flat" cmpd="sng" algn="ctr">
+                      <a:solidFill>
+                        <a:srgbClr val="D5DBE3"/>
+                      </a:solidFill>
+                      <a:prstDash val="solid"/>
+                      <a:round/>
+                      <a:headEnd type="none" w="med" len="med"/>
+                      <a:tailEnd type="none" w="med" len="med"/>
+                    </a:lnR>
+                    <a:lnT w="12700" cap="flat" cmpd="sng" algn="ctr">
+                      <a:solidFill>
+                        <a:srgbClr val="D5DBE3"/>
+                      </a:solidFill>
+                      <a:prstDash val="solid"/>
+                      <a:round/>
+                      <a:headEnd type="none" w="med" len="med"/>
+                      <a:tailEnd type="none" w="med" len="med"/>
+                    </a:lnT>
+                    <a:lnB w="12700" cap="flat" cmpd="sng" algn="ctr">
+                      <a:solidFill>
+                        <a:srgbClr val="D5DBE3"/>
+                      </a:solidFill>
+                      <a:prstDash val="solid"/>
+                      <a:round/>
+                      <a:headEnd type="none" w="med" len="med"/>
+                      <a:tailEnd type="none" w="med" len="med"/>
+                    </a:lnB>
+                    <a:solidFill>
+                      <a:srgbClr val="F1F3F6"/>
+                    </a:solidFill>
+                  </a:tcPr>
+                </a:tc>
+                <a:tc>
+                  <a:txBody>
+                    <a:bodyPr/>
+                    <a:lstStyle/>
+                    <a:p>
+                      <a:pPr indent="0" marL="0">
+                        <a:buNone/>
+                      </a:pPr>
+                      <a:r>
+                        <a:rPr lang="en-US" sz="1400" b="1" dirty="0">
+                          <a:solidFill>
+                            <a:srgbClr val="1F2A37"/>
+                          </a:solidFill>
+                          <a:latin typeface="Microsoft YaHei" pitchFamily="34" charset="0"/>
+                          <a:ea typeface="Microsoft YaHei" pitchFamily="34" charset="-122"/>
+                          <a:cs typeface="Microsoft YaHei" pitchFamily="34" charset="-120"/>
+                        </a:rPr>
+                        <a:t>不维护（对照组）</a:t>
+                      </a:r>
+                      <a:endParaRPr lang="en-US" sz="1400" dirty="0">
+                        <a:latin typeface="Microsoft YaHei" charset="0"/>
+                        <a:ea typeface="Microsoft YaHei" charset="0"/>
+                        <a:cs typeface="Microsoft YaHei" charset="0"/>
+                      </a:endParaRPr>
+                    </a:p>
+                  </a:txBody>
+                  <a:tcPr marL="91440" marR="91440" marT="54864" marB="54864" anchor="ctr">
+                    <a:lnL w="12700" cap="flat" cmpd="sng" algn="ctr">
+                      <a:solidFill>
+                        <a:srgbClr val="D5DBE3"/>
+                      </a:solidFill>
+                      <a:prstDash val="solid"/>
+                      <a:round/>
+                      <a:headEnd type="none" w="med" len="med"/>
+                      <a:tailEnd type="none" w="med" len="med"/>
+                    </a:lnL>
+                    <a:lnR w="12700" cap="flat" cmpd="sng" algn="ctr">
+                      <a:solidFill>
+                        <a:srgbClr val="D5DBE3"/>
+                      </a:solidFill>
+                      <a:prstDash val="solid"/>
+                      <a:round/>
+                      <a:headEnd type="none" w="med" len="med"/>
+                      <a:tailEnd type="none" w="med" len="med"/>
+                    </a:lnR>
+                    <a:lnT w="12700" cap="flat" cmpd="sng" algn="ctr">
+                      <a:solidFill>
+                        <a:srgbClr val="D5DBE3"/>
+                      </a:solidFill>
+                      <a:prstDash val="solid"/>
+                      <a:round/>
+                      <a:headEnd type="none" w="med" len="med"/>
+                      <a:tailEnd type="none" w="med" len="med"/>
+                    </a:lnT>
+                    <a:lnB w="12700" cap="flat" cmpd="sng" algn="ctr">
+                      <a:solidFill>
+                        <a:srgbClr val="D5DBE3"/>
+                      </a:solidFill>
+                      <a:prstDash val="solid"/>
+                      <a:round/>
+                      <a:headEnd type="none" w="med" len="med"/>
+                      <a:tailEnd type="none" w="med" len="med"/>
+                    </a:lnB>
+                    <a:solidFill>
+                      <a:srgbClr val="F1F3F6"/>
+                    </a:solidFill>
+                  </a:tcPr>
+                </a:tc>
+                <a:tc>
+                  <a:txBody>
+                    <a:bodyPr/>
+                    <a:lstStyle/>
+                    <a:p>
+                      <a:pPr indent="0" marL="0">
+                        <a:buNone/>
+                      </a:pPr>
+                      <a:r>
+                        <a:rPr lang="en-US" sz="1400" b="1" dirty="0">
+                          <a:solidFill>
+                            <a:srgbClr val="1F2A37"/>
+                          </a:solidFill>
+                          <a:latin typeface="Microsoft YaHei" pitchFamily="34" charset="0"/>
+                          <a:ea typeface="Microsoft YaHei" pitchFamily="34" charset="-122"/>
+                          <a:cs typeface="Microsoft YaHei" pitchFamily="34" charset="-120"/>
+                        </a:rPr>
+                        <a:t>MAVRA</a:t>
+                      </a:r>
+                      <a:endParaRPr lang="en-US" sz="1400" dirty="0">
+                        <a:latin typeface="Microsoft YaHei" charset="0"/>
+                        <a:ea typeface="Microsoft YaHei" charset="0"/>
+                        <a:cs typeface="Microsoft YaHei" charset="0"/>
+                      </a:endParaRPr>
+                    </a:p>
+                  </a:txBody>
+                  <a:tcPr marL="91440" marR="91440" marT="54864" marB="54864" anchor="ctr">
+                    <a:lnL w="12700" cap="flat" cmpd="sng" algn="ctr">
+                      <a:solidFill>
+                        <a:srgbClr val="D5DBE3"/>
+                      </a:solidFill>
+                      <a:prstDash val="solid"/>
+                      <a:round/>
+                      <a:headEnd type="none" w="med" len="med"/>
+                      <a:tailEnd type="none" w="med" len="med"/>
+                    </a:lnL>
+                    <a:lnR w="12700" cap="flat" cmpd="sng" algn="ctr">
+                      <a:solidFill>
+                        <a:srgbClr val="D5DBE3"/>
+                      </a:solidFill>
+                      <a:prstDash val="solid"/>
+                      <a:round/>
+                      <a:headEnd type="none" w="med" len="med"/>
+                      <a:tailEnd type="none" w="med" len="med"/>
+                    </a:lnR>
+                    <a:lnT w="12700" cap="flat" cmpd="sng" algn="ctr">
+                      <a:solidFill>
+                        <a:srgbClr val="D5DBE3"/>
+                      </a:solidFill>
+                      <a:prstDash val="solid"/>
+                      <a:round/>
+                      <a:headEnd type="none" w="med" len="med"/>
+                      <a:tailEnd type="none" w="med" len="med"/>
+                    </a:lnT>
+                    <a:lnB w="12700" cap="flat" cmpd="sng" algn="ctr">
+                      <a:solidFill>
+                        <a:srgbClr val="D5DBE3"/>
+                      </a:solidFill>
+                      <a:prstDash val="solid"/>
+                      <a:round/>
+                      <a:headEnd type="none" w="med" len="med"/>
+                      <a:tailEnd type="none" w="med" len="med"/>
+                    </a:lnB>
+                    <a:solidFill>
+                      <a:srgbClr val="F1F3F6"/>
+                    </a:solidFill>
+                  </a:tcPr>
+                </a:tc>
+              </a:tr>
+              <a:tr h="0">
+                <a:tc>
+                  <a:txBody>
+                    <a:bodyPr/>
+                    <a:lstStyle/>
+                    <a:p>
+                      <a:pPr indent="0" marL="0">
+                        <a:buNone/>
+                      </a:pPr>
+                      <a:r>
+                        <a:rPr lang="en-US" sz="1400" dirty="0">
+                          <a:solidFill>
+                            <a:srgbClr val="1F2A37"/>
+                          </a:solidFill>
+                          <a:latin typeface="Microsoft YaHei" pitchFamily="34" charset="0"/>
+                          <a:ea typeface="Microsoft YaHei" pitchFamily="34" charset="-122"/>
+                          <a:cs typeface="Microsoft YaHei" pitchFamily="34" charset="-120"/>
+                        </a:rPr>
+                        <a:t>追加新数据</a:t>
+                      </a:r>
+                      <a:endParaRPr lang="en-US" sz="1400" dirty="0">
+                        <a:latin typeface="Microsoft YaHei" charset="0"/>
+                        <a:ea typeface="Microsoft YaHei" charset="0"/>
+                        <a:cs typeface="Microsoft YaHei" charset="0"/>
+                      </a:endParaRPr>
+                    </a:p>
+                  </a:txBody>
+                  <a:tcPr marL="91440" marR="91440" marT="54864" marB="54864" anchor="ctr">
+                    <a:lnL w="12700" cap="flat" cmpd="sng" algn="ctr">
+                      <a:solidFill>
+                        <a:srgbClr val="D5DBE3"/>
+                      </a:solidFill>
+                      <a:prstDash val="solid"/>
+                      <a:round/>
+                      <a:headEnd type="none" w="med" len="med"/>
+                      <a:tailEnd type="none" w="med" len="med"/>
+                    </a:lnL>
+                    <a:lnR w="12700" cap="flat" cmpd="sng" algn="ctr">
+                      <a:solidFill>
+                        <a:srgbClr val="D5DBE3"/>
+                      </a:solidFill>
+                      <a:prstDash val="solid"/>
+                      <a:round/>
+                      <a:headEnd type="none" w="med" len="med"/>
+                      <a:tailEnd type="none" w="med" len="med"/>
+                    </a:lnR>
+                    <a:lnT w="12700" cap="flat" cmpd="sng" algn="ctr">
+                      <a:solidFill>
+                        <a:srgbClr val="D5DBE3"/>
+                      </a:solidFill>
+                      <a:prstDash val="solid"/>
+                      <a:round/>
+                      <a:headEnd type="none" w="med" len="med"/>
+                      <a:tailEnd type="none" w="med" len="med"/>
+                    </a:lnT>
+                    <a:lnB w="12700" cap="flat" cmpd="sng" algn="ctr">
+                      <a:solidFill>
+                        <a:srgbClr val="D5DBE3"/>
+                      </a:solidFill>
+                      <a:prstDash val="solid"/>
+                      <a:round/>
+                      <a:headEnd type="none" w="med" len="med"/>
+                      <a:tailEnd type="none" w="med" len="med"/>
+                    </a:lnB>
+                  </a:tcPr>
+                </a:tc>
+                <a:tc>
+                  <a:txBody>
+                    <a:bodyPr/>
+                    <a:lstStyle/>
+                    <a:p>
+                      <a:pPr indent="0" marL="0">
+                        <a:buNone/>
+                      </a:pPr>
+                      <a:r>
+                        <a:rPr lang="en-US" sz="1400" dirty="0">
+                          <a:solidFill>
+                            <a:srgbClr val="1F2A37"/>
+                          </a:solidFill>
+                          <a:latin typeface="Microsoft YaHei" pitchFamily="34" charset="0"/>
+                          <a:ea typeface="Microsoft YaHei" pitchFamily="34" charset="-122"/>
+                          <a:cs typeface="Microsoft YaHei" pitchFamily="34" charset="-120"/>
+                        </a:rPr>
+                        <a:t>把 9 月的销售复制一份、换新小票号，+27,095 行</a:t>
+                      </a:r>
+                      <a:endParaRPr lang="en-US" sz="1400" dirty="0">
+                        <a:latin typeface="Microsoft YaHei" charset="0"/>
+                        <a:ea typeface="Microsoft YaHei" charset="0"/>
+                        <a:cs typeface="Microsoft YaHei" charset="0"/>
+                      </a:endParaRPr>
+                    </a:p>
+                  </a:txBody>
+                  <a:tcPr marL="91440" marR="91440" marT="54864" marB="54864" anchor="ctr">
+                    <a:lnL w="12700" cap="flat" cmpd="sng" algn="ctr">
+                      <a:solidFill>
+                        <a:srgbClr val="D5DBE3"/>
+                      </a:solidFill>
+                      <a:prstDash val="solid"/>
+                      <a:round/>
+                      <a:headEnd type="none" w="med" len="med"/>
+                      <a:tailEnd type="none" w="med" len="med"/>
+                    </a:lnL>
+                    <a:lnR w="12700" cap="flat" cmpd="sng" algn="ctr">
+                      <a:solidFill>
+                        <a:srgbClr val="D5DBE3"/>
+                      </a:solidFill>
+                      <a:prstDash val="solid"/>
+                      <a:round/>
+                      <a:headEnd type="none" w="med" len="med"/>
+                      <a:tailEnd type="none" w="med" len="med"/>
+                    </a:lnR>
+                    <a:lnT w="12700" cap="flat" cmpd="sng" algn="ctr">
+                      <a:solidFill>
+                        <a:srgbClr val="D5DBE3"/>
+                      </a:solidFill>
+                      <a:prstDash val="solid"/>
+                      <a:round/>
+                      <a:headEnd type="none" w="med" len="med"/>
+                      <a:tailEnd type="none" w="med" len="med"/>
+                    </a:lnT>
+                    <a:lnB w="12700" cap="flat" cmpd="sng" algn="ctr">
+                      <a:solidFill>
+                        <a:srgbClr val="D5DBE3"/>
+                      </a:solidFill>
+                      <a:prstDash val="solid"/>
+                      <a:round/>
+                      <a:headEnd type="none" w="med" len="med"/>
+                      <a:tailEnd type="none" w="med" len="med"/>
+                    </a:lnB>
+                  </a:tcPr>
+                </a:tc>
+                <a:tc>
+                  <a:txBody>
+                    <a:bodyPr/>
+                    <a:lstStyle/>
+                    <a:p>
+                      <a:pPr indent="0" marL="0">
+                        <a:buNone/>
+                      </a:pPr>
+                      <a:r>
+                        <a:rPr lang="en-US" sz="1400" dirty="0">
+                          <a:solidFill>
+                            <a:srgbClr val="1F2A37"/>
+                          </a:solidFill>
+                          <a:latin typeface="Microsoft YaHei" pitchFamily="34" charset="0"/>
+                          <a:ea typeface="Microsoft YaHei" pitchFamily="34" charset="-122"/>
+                          <a:cs typeface="Microsoft YaHei" pitchFamily="34" charset="-120"/>
+                        </a:rPr>
+                        <a:t>2613.9 万</a:t>
+                      </a:r>
+                      <a:endParaRPr lang="en-US" sz="1400" dirty="0">
+                        <a:latin typeface="Microsoft YaHei" charset="0"/>
+                        <a:ea typeface="Microsoft YaHei" charset="0"/>
+                        <a:cs typeface="Microsoft YaHei" charset="0"/>
+                      </a:endParaRPr>
+                    </a:p>
+                  </a:txBody>
+                  <a:tcPr marL="91440" marR="91440" marT="54864" marB="54864" anchor="ctr">
+                    <a:lnL w="12700" cap="flat" cmpd="sng" algn="ctr">
+                      <a:solidFill>
+                        <a:srgbClr val="D5DBE3"/>
+                      </a:solidFill>
+                      <a:prstDash val="solid"/>
+                      <a:round/>
+                      <a:headEnd type="none" w="med" len="med"/>
+                      <a:tailEnd type="none" w="med" len="med"/>
+                    </a:lnL>
+                    <a:lnR w="12700" cap="flat" cmpd="sng" algn="ctr">
+                      <a:solidFill>
+                        <a:srgbClr val="D5DBE3"/>
+                      </a:solidFill>
+                      <a:prstDash val="solid"/>
+                      <a:round/>
+                      <a:headEnd type="none" w="med" len="med"/>
+                      <a:tailEnd type="none" w="med" len="med"/>
+                    </a:lnR>
+                    <a:lnT w="12700" cap="flat" cmpd="sng" algn="ctr">
+                      <a:solidFill>
+                        <a:srgbClr val="D5DBE3"/>
+                      </a:solidFill>
+                      <a:prstDash val="solid"/>
+                      <a:round/>
+                      <a:headEnd type="none" w="med" len="med"/>
+                      <a:tailEnd type="none" w="med" len="med"/>
+                    </a:lnT>
+                    <a:lnB w="12700" cap="flat" cmpd="sng" algn="ctr">
+                      <a:solidFill>
+                        <a:srgbClr val="D5DBE3"/>
+                      </a:solidFill>
+                      <a:prstDash val="solid"/>
+                      <a:round/>
+                      <a:headEnd type="none" w="med" len="med"/>
+                      <a:tailEnd type="none" w="med" len="med"/>
+                    </a:lnB>
+                  </a:tcPr>
+                </a:tc>
+                <a:tc>
+                  <a:txBody>
+                    <a:bodyPr/>
+                    <a:lstStyle/>
+                    <a:p>
+                      <a:pPr indent="0" marL="0">
+                        <a:buNone/>
+                      </a:pPr>
+                      <a:r>
+                        <a:rPr lang="en-US" sz="1400" b="1" dirty="0">
+                          <a:solidFill>
+                            <a:srgbClr val="2E7D4F"/>
+                          </a:solidFill>
+                          <a:latin typeface="Microsoft YaHei" pitchFamily="34" charset="0"/>
+                          <a:ea typeface="Microsoft YaHei" pitchFamily="34" charset="-122"/>
+                          <a:cs typeface="Microsoft YaHei" pitchFamily="34" charset="-120"/>
+                        </a:rPr>
+                        <a:t>2613.9 万 ✓</a:t>
+                      </a:r>
+                      <a:endParaRPr lang="en-US" sz="1400" dirty="0">
+                        <a:latin typeface="Microsoft YaHei" charset="0"/>
+                        <a:ea typeface="Microsoft YaHei" charset="0"/>
+                        <a:cs typeface="Microsoft YaHei" charset="0"/>
+                      </a:endParaRPr>
+                    </a:p>
+                  </a:txBody>
+                  <a:tcPr marL="91440" marR="91440" marT="54864" marB="54864" anchor="ctr">
+                    <a:lnL w="12700" cap="flat" cmpd="sng" algn="ctr">
+                      <a:solidFill>
+                        <a:srgbClr val="D5DBE3"/>
+                      </a:solidFill>
+                      <a:prstDash val="solid"/>
+                      <a:round/>
+                      <a:headEnd type="none" w="med" len="med"/>
+                      <a:tailEnd type="none" w="med" len="med"/>
+                    </a:lnL>
+                    <a:lnR w="12700" cap="flat" cmpd="sng" algn="ctr">
+                      <a:solidFill>
+                        <a:srgbClr val="D5DBE3"/>
+                      </a:solidFill>
+                      <a:prstDash val="solid"/>
+                      <a:round/>
+                      <a:headEnd type="none" w="med" len="med"/>
+                      <a:tailEnd type="none" w="med" len="med"/>
+                    </a:lnR>
+                    <a:lnT w="12700" cap="flat" cmpd="sng" algn="ctr">
+                      <a:solidFill>
+                        <a:srgbClr val="D5DBE3"/>
+                      </a:solidFill>
+                      <a:prstDash val="solid"/>
+                      <a:round/>
+                      <a:headEnd type="none" w="med" len="med"/>
+                      <a:tailEnd type="none" w="med" len="med"/>
+                    </a:lnT>
+                    <a:lnB w="12700" cap="flat" cmpd="sng" algn="ctr">
+                      <a:solidFill>
+                        <a:srgbClr val="D5DBE3"/>
+                      </a:solidFill>
+                      <a:prstDash val="solid"/>
+                      <a:round/>
+                      <a:headEnd type="none" w="med" len="med"/>
+                      <a:tailEnd type="none" w="med" len="med"/>
+                    </a:lnB>
+                  </a:tcPr>
+                </a:tc>
+                <a:tc>
+                  <a:txBody>
+                    <a:bodyPr/>
+                    <a:lstStyle/>
+                    <a:p>
+                      <a:pPr indent="0" marL="0">
+                        <a:buNone/>
+                      </a:pPr>
+                      <a:r>
+                        <a:rPr lang="en-US" sz="1400" dirty="0">
+                          <a:solidFill>
+                            <a:srgbClr val="1F2A37"/>
+                          </a:solidFill>
+                          <a:latin typeface="Microsoft YaHei" pitchFamily="34" charset="0"/>
+                          <a:ea typeface="Microsoft YaHei" pitchFamily="34" charset="-122"/>
+                          <a:cs typeface="Microsoft YaHei" pitchFamily="34" charset="-120"/>
+                        </a:rPr>
+                        <a:t>规则仍成立，保持 v1</a:t>
+                      </a:r>
+                      <a:endParaRPr lang="en-US" sz="1400" dirty="0">
+                        <a:latin typeface="Microsoft YaHei" charset="0"/>
+                        <a:ea typeface="Microsoft YaHei" charset="0"/>
+                        <a:cs typeface="Microsoft YaHei" charset="0"/>
+                      </a:endParaRPr>
+                    </a:p>
+                    <a:p>
+                      <a:pPr indent="0" marL="0">
+                        <a:buNone/>
+                      </a:pPr>
+                      <a:r>
+                        <a:rPr lang="en-US" sz="1400" dirty="0">
+                          <a:solidFill>
+                            <a:srgbClr val="1F2A37"/>
+                          </a:solidFill>
+                          <a:latin typeface="Microsoft YaHei" pitchFamily="34" charset="0"/>
+                          <a:ea typeface="Microsoft YaHei" pitchFamily="34" charset="-122"/>
+                          <a:cs typeface="Microsoft YaHei" pitchFamily="34" charset="-120"/>
+                        </a:rPr>
+                        <a:t>6 个指标只跑了 2 次校验</a:t>
+                      </a:r>
+                      <a:endParaRPr lang="en-US" sz="1400" dirty="0">
+                        <a:latin typeface="Microsoft YaHei" charset="0"/>
+                        <a:ea typeface="Microsoft YaHei" charset="0"/>
+                        <a:cs typeface="Microsoft YaHei" charset="0"/>
+                      </a:endParaRPr>
+                    </a:p>
+                    <a:p>
+                      <a:pPr indent="0" marL="0">
+                        <a:buNone/>
+                      </a:pPr>
+                      <a:r>
+                        <a:rPr lang="en-US" sz="1400" b="1" dirty="0">
+                          <a:solidFill>
+                            <a:srgbClr val="2E7D4F"/>
+                          </a:solidFill>
+                          <a:latin typeface="Microsoft YaHei" pitchFamily="34" charset="0"/>
+                          <a:ea typeface="Microsoft YaHei" pitchFamily="34" charset="-122"/>
+                          <a:cs typeface="Microsoft YaHei" pitchFamily="34" charset="-120"/>
+                        </a:rPr>
+                        <a:t>2613.9 万 ✓</a:t>
+                      </a:r>
+                      <a:endParaRPr lang="en-US" sz="1400" dirty="0">
+                        <a:latin typeface="Microsoft YaHei" charset="0"/>
+                        <a:ea typeface="Microsoft YaHei" charset="0"/>
+                        <a:cs typeface="Microsoft YaHei" charset="0"/>
+                      </a:endParaRPr>
+                    </a:p>
+                  </a:txBody>
+                  <a:tcPr marL="91440" marR="91440" marT="54864" marB="54864" anchor="ctr">
+                    <a:lnL w="12700" cap="flat" cmpd="sng" algn="ctr">
+                      <a:solidFill>
+                        <a:srgbClr val="D5DBE3"/>
+                      </a:solidFill>
+                      <a:prstDash val="solid"/>
+                      <a:round/>
+                      <a:headEnd type="none" w="med" len="med"/>
+                      <a:tailEnd type="none" w="med" len="med"/>
+                    </a:lnL>
+                    <a:lnR w="12700" cap="flat" cmpd="sng" algn="ctr">
+                      <a:solidFill>
+                        <a:srgbClr val="D5DBE3"/>
+                      </a:solidFill>
+                      <a:prstDash val="solid"/>
+                      <a:round/>
+                      <a:headEnd type="none" w="med" len="med"/>
+                      <a:tailEnd type="none" w="med" len="med"/>
+                    </a:lnR>
+                    <a:lnT w="12700" cap="flat" cmpd="sng" algn="ctr">
+                      <a:solidFill>
+                        <a:srgbClr val="D5DBE3"/>
+                      </a:solidFill>
+                      <a:prstDash val="solid"/>
+                      <a:round/>
+                      <a:headEnd type="none" w="med" len="med"/>
+                      <a:tailEnd type="none" w="med" len="med"/>
+                    </a:lnT>
+                    <a:lnB w="12700" cap="flat" cmpd="sng" algn="ctr">
+                      <a:solidFill>
+                        <a:srgbClr val="D5DBE3"/>
+                      </a:solidFill>
+                      <a:prstDash val="solid"/>
+                      <a:round/>
+                      <a:headEnd type="none" w="med" len="med"/>
+                      <a:tailEnd type="none" w="med" len="med"/>
+                    </a:lnB>
+                  </a:tcPr>
+                </a:tc>
+              </a:tr>
+              <a:tr h="0">
+                <a:tc>
+                  <a:txBody>
+                    <a:bodyPr/>
+                    <a:lstStyle/>
+                    <a:p>
+                      <a:pPr indent="0" marL="0">
+                        <a:buNone/>
+                      </a:pPr>
+                      <a:r>
+                        <a:rPr lang="en-US" sz="1400" dirty="0">
+                          <a:solidFill>
+                            <a:srgbClr val="1F2A37"/>
+                          </a:solidFill>
+                          <a:latin typeface="Microsoft YaHei" pitchFamily="34" charset="0"/>
+                          <a:ea typeface="Microsoft YaHei" pitchFamily="34" charset="-122"/>
+                          <a:cs typeface="Microsoft YaHei" pitchFamily="34" charset="-120"/>
+                        </a:rPr>
+                        <a:t>数据更正</a:t>
+                      </a:r>
+                      <a:endParaRPr lang="en-US" sz="1400" dirty="0">
+                        <a:latin typeface="Microsoft YaHei" charset="0"/>
+                        <a:ea typeface="Microsoft YaHei" charset="0"/>
+                        <a:cs typeface="Microsoft YaHei" charset="0"/>
+                      </a:endParaRPr>
+                    </a:p>
+                  </a:txBody>
+                  <a:tcPr marL="91440" marR="91440" marT="54864" marB="54864" anchor="ctr">
+                    <a:lnL w="12700" cap="flat" cmpd="sng" algn="ctr">
+                      <a:solidFill>
+                        <a:srgbClr val="D5DBE3"/>
+                      </a:solidFill>
+                      <a:prstDash val="solid"/>
+                      <a:round/>
+                      <a:headEnd type="none" w="med" len="med"/>
+                      <a:tailEnd type="none" w="med" len="med"/>
+                    </a:lnL>
+                    <a:lnR w="12700" cap="flat" cmpd="sng" algn="ctr">
+                      <a:solidFill>
+                        <a:srgbClr val="D5DBE3"/>
+                      </a:solidFill>
+                      <a:prstDash val="solid"/>
+                      <a:round/>
+                      <a:headEnd type="none" w="med" len="med"/>
+                      <a:tailEnd type="none" w="med" len="med"/>
+                    </a:lnR>
+                    <a:lnT w="12700" cap="flat" cmpd="sng" algn="ctr">
+                      <a:solidFill>
+                        <a:srgbClr val="D5DBE3"/>
+                      </a:solidFill>
+                      <a:prstDash val="solid"/>
+                      <a:round/>
+                      <a:headEnd type="none" w="med" len="med"/>
+                      <a:tailEnd type="none" w="med" len="med"/>
+                    </a:lnT>
+                    <a:lnB w="12700" cap="flat" cmpd="sng" algn="ctr">
+                      <a:solidFill>
+                        <a:srgbClr val="D5DBE3"/>
+                      </a:solidFill>
+                      <a:prstDash val="solid"/>
+                      <a:round/>
+                      <a:headEnd type="none" w="med" len="med"/>
+                      <a:tailEnd type="none" w="med" len="med"/>
+                    </a:lnB>
+                  </a:tcPr>
+                </a:tc>
+                <a:tc>
+                  <a:txBody>
+                    <a:bodyPr/>
+                    <a:lstStyle/>
+                    <a:p>
+                      <a:pPr indent="0" marL="0">
+                        <a:buNone/>
+                      </a:pPr>
+                      <a:r>
+                        <a:rPr lang="en-US" sz="1400" dirty="0">
+                          <a:solidFill>
+                            <a:srgbClr val="1F2A37"/>
+                          </a:solidFill>
+                          <a:latin typeface="Microsoft YaHei" pitchFamily="34" charset="0"/>
+                          <a:ea typeface="Microsoft YaHei" pitchFamily="34" charset="-122"/>
+                          <a:cs typeface="Microsoft YaHei" pitchFamily="34" charset="-120"/>
+                        </a:rPr>
+                        <a:t>部分销售被更正：旧行保留并标为非当前（ss_is_current = 0），新增九折的当前行，共 65,915 行</a:t>
+                      </a:r>
+                      <a:endParaRPr lang="en-US" sz="1400" dirty="0">
+                        <a:latin typeface="Microsoft YaHei" charset="0"/>
+                        <a:ea typeface="Microsoft YaHei" charset="0"/>
+                        <a:cs typeface="Microsoft YaHei" charset="0"/>
+                      </a:endParaRPr>
+                    </a:p>
+                  </a:txBody>
+                  <a:tcPr marL="91440" marR="91440" marT="54864" marB="54864" anchor="ctr">
+                    <a:lnL w="12700" cap="flat" cmpd="sng" algn="ctr">
+                      <a:solidFill>
+                        <a:srgbClr val="D5DBE3"/>
+                      </a:solidFill>
+                      <a:prstDash val="solid"/>
+                      <a:round/>
+                      <a:headEnd type="none" w="med" len="med"/>
+                      <a:tailEnd type="none" w="med" len="med"/>
+                    </a:lnL>
+                    <a:lnR w="12700" cap="flat" cmpd="sng" algn="ctr">
+                      <a:solidFill>
+                        <a:srgbClr val="D5DBE3"/>
+                      </a:solidFill>
+                      <a:prstDash val="solid"/>
+                      <a:round/>
+                      <a:headEnd type="none" w="med" len="med"/>
+                      <a:tailEnd type="none" w="med" len="med"/>
+                    </a:lnR>
+                    <a:lnT w="12700" cap="flat" cmpd="sng" algn="ctr">
+                      <a:solidFill>
+                        <a:srgbClr val="D5DBE3"/>
+                      </a:solidFill>
+                      <a:prstDash val="solid"/>
+                      <a:round/>
+                      <a:headEnd type="none" w="med" len="med"/>
+                      <a:tailEnd type="none" w="med" len="med"/>
+                    </a:lnT>
+                    <a:lnB w="12700" cap="flat" cmpd="sng" algn="ctr">
+                      <a:solidFill>
+                        <a:srgbClr val="D5DBE3"/>
+                      </a:solidFill>
+                      <a:prstDash val="solid"/>
+                      <a:round/>
+                      <a:headEnd type="none" w="med" len="med"/>
+                      <a:tailEnd type="none" w="med" len="med"/>
+                    </a:lnB>
+                  </a:tcPr>
+                </a:tc>
+                <a:tc>
+                  <a:txBody>
+                    <a:bodyPr/>
+                    <a:lstStyle/>
+                    <a:p>
+                      <a:pPr indent="0" marL="0">
+                        <a:buNone/>
+                      </a:pPr>
+                      <a:r>
+                        <a:rPr lang="en-US" sz="1400" dirty="0">
+                          <a:solidFill>
+                            <a:srgbClr val="1F2A37"/>
+                          </a:solidFill>
+                          <a:latin typeface="Microsoft YaHei" pitchFamily="34" charset="0"/>
+                          <a:ea typeface="Microsoft YaHei" pitchFamily="34" charset="-122"/>
+                          <a:cs typeface="Microsoft YaHei" pitchFamily="34" charset="-120"/>
+                        </a:rPr>
+                        <a:t>1293.3 万</a:t>
+                      </a:r>
+                      <a:endParaRPr lang="en-US" sz="1400" dirty="0">
+                        <a:latin typeface="Microsoft YaHei" charset="0"/>
+                        <a:ea typeface="Microsoft YaHei" charset="0"/>
+                        <a:cs typeface="Microsoft YaHei" charset="0"/>
+                      </a:endParaRPr>
+                    </a:p>
+                  </a:txBody>
+                  <a:tcPr marL="91440" marR="91440" marT="54864" marB="54864" anchor="ctr">
+                    <a:lnL w="12700" cap="flat" cmpd="sng" algn="ctr">
+                      <a:solidFill>
+                        <a:srgbClr val="D5DBE3"/>
+                      </a:solidFill>
+                      <a:prstDash val="solid"/>
+                      <a:round/>
+                      <a:headEnd type="none" w="med" len="med"/>
+                      <a:tailEnd type="none" w="med" len="med"/>
+                    </a:lnL>
+                    <a:lnR w="12700" cap="flat" cmpd="sng" algn="ctr">
+                      <a:solidFill>
+                        <a:srgbClr val="D5DBE3"/>
+                      </a:solidFill>
+                      <a:prstDash val="solid"/>
+                      <a:round/>
+                      <a:headEnd type="none" w="med" len="med"/>
+                      <a:tailEnd type="none" w="med" len="med"/>
+                    </a:lnR>
+                    <a:lnT w="12700" cap="flat" cmpd="sng" algn="ctr">
+                      <a:solidFill>
+                        <a:srgbClr val="D5DBE3"/>
+                      </a:solidFill>
+                      <a:prstDash val="solid"/>
+                      <a:round/>
+                      <a:headEnd type="none" w="med" len="med"/>
+                      <a:tailEnd type="none" w="med" len="med"/>
+                    </a:lnT>
+                    <a:lnB w="12700" cap="flat" cmpd="sng" algn="ctr">
+                      <a:solidFill>
+                        <a:srgbClr val="D5DBE3"/>
+                      </a:solidFill>
+                      <a:prstDash val="solid"/>
+                      <a:round/>
+                      <a:headEnd type="none" w="med" len="med"/>
+                      <a:tailEnd type="none" w="med" len="med"/>
+                    </a:lnB>
+                  </a:tcPr>
+                </a:tc>
+                <a:tc>
+                  <a:txBody>
+                    <a:bodyPr/>
+                    <a:lstStyle/>
+                    <a:p>
+                      <a:pPr indent="0" marL="0">
+                        <a:buNone/>
+                      </a:pPr>
+                      <a:r>
+                        <a:rPr lang="en-US" sz="1400" b="1" dirty="0">
+                          <a:solidFill>
+                            <a:srgbClr val="B5392A"/>
+                          </a:solidFill>
+                          <a:latin typeface="Microsoft YaHei" pitchFamily="34" charset="0"/>
+                          <a:ea typeface="Microsoft YaHei" pitchFamily="34" charset="-122"/>
+                          <a:cs typeface="Microsoft YaHei" pitchFamily="34" charset="-120"/>
+                        </a:rPr>
+                        <a:t>1430.1 万 ✗</a:t>
+                      </a:r>
+                      <a:endParaRPr lang="en-US" sz="1400" dirty="0">
+                        <a:latin typeface="Microsoft YaHei" charset="0"/>
+                        <a:ea typeface="Microsoft YaHei" charset="0"/>
+                        <a:cs typeface="Microsoft YaHei" charset="0"/>
+                      </a:endParaRPr>
+                    </a:p>
+                    <a:p>
+                      <a:pPr indent="0" marL="0">
+                        <a:buNone/>
+                      </a:pPr>
+                      <a:r>
+                        <a:rPr lang="en-US" sz="1400" dirty="0">
+                          <a:solidFill>
+                            <a:srgbClr val="1F2A37"/>
+                          </a:solidFill>
+                          <a:latin typeface="Microsoft YaHei" pitchFamily="34" charset="0"/>
+                          <a:ea typeface="Microsoft YaHei" pitchFamily="34" charset="-122"/>
+                          <a:cs typeface="Microsoft YaHei" pitchFamily="34" charset="-120"/>
+                        </a:rPr>
+                        <a:t>新旧两版都算了</a:t>
+                      </a:r>
+                      <a:endParaRPr lang="en-US" sz="1400" dirty="0">
+                        <a:latin typeface="Microsoft YaHei" charset="0"/>
+                        <a:ea typeface="Microsoft YaHei" charset="0"/>
+                        <a:cs typeface="Microsoft YaHei" charset="0"/>
+                      </a:endParaRPr>
+                    </a:p>
+                  </a:txBody>
+                  <a:tcPr marL="91440" marR="91440" marT="54864" marB="54864" anchor="ctr">
+                    <a:lnL w="12700" cap="flat" cmpd="sng" algn="ctr">
+                      <a:solidFill>
+                        <a:srgbClr val="D5DBE3"/>
+                      </a:solidFill>
+                      <a:prstDash val="solid"/>
+                      <a:round/>
+                      <a:headEnd type="none" w="med" len="med"/>
+                      <a:tailEnd type="none" w="med" len="med"/>
+                    </a:lnL>
+                    <a:lnR w="12700" cap="flat" cmpd="sng" algn="ctr">
+                      <a:solidFill>
+                        <a:srgbClr val="D5DBE3"/>
+                      </a:solidFill>
+                      <a:prstDash val="solid"/>
+                      <a:round/>
+                      <a:headEnd type="none" w="med" len="med"/>
+                      <a:tailEnd type="none" w="med" len="med"/>
+                    </a:lnR>
+                    <a:lnT w="12700" cap="flat" cmpd="sng" algn="ctr">
+                      <a:solidFill>
+                        <a:srgbClr val="D5DBE3"/>
+                      </a:solidFill>
+                      <a:prstDash val="solid"/>
+                      <a:round/>
+                      <a:headEnd type="none" w="med" len="med"/>
+                      <a:tailEnd type="none" w="med" len="med"/>
+                    </a:lnT>
+                    <a:lnB w="12700" cap="flat" cmpd="sng" algn="ctr">
+                      <a:solidFill>
+                        <a:srgbClr val="D5DBE3"/>
+                      </a:solidFill>
+                      <a:prstDash val="solid"/>
+                      <a:round/>
+                      <a:headEnd type="none" w="med" len="med"/>
+                      <a:tailEnd type="none" w="med" len="med"/>
+                    </a:lnB>
+                  </a:tcPr>
+                </a:tc>
+                <a:tc>
+                  <a:txBody>
+                    <a:bodyPr/>
+                    <a:lstStyle/>
+                    <a:p>
+                      <a:pPr indent="0" marL="0">
+                        <a:buNone/>
+                      </a:pPr>
+                      <a:r>
+                        <a:rPr lang="en-US" sz="1400" dirty="0">
+                          <a:solidFill>
+                            <a:srgbClr val="1F2A37"/>
+                          </a:solidFill>
+                          <a:latin typeface="Microsoft YaHei" pitchFamily="34" charset="0"/>
+                          <a:ea typeface="Microsoft YaHei" pitchFamily="34" charset="-122"/>
+                          <a:cs typeface="Microsoft YaHei" pitchFamily="34" charset="-120"/>
+                        </a:rPr>
+                        <a:t>停用 v1 → 修复为 v2</a:t>
+                      </a:r>
+                      <a:endParaRPr lang="en-US" sz="1400" dirty="0">
+                        <a:latin typeface="Microsoft YaHei" charset="0"/>
+                        <a:ea typeface="Microsoft YaHei" charset="0"/>
+                        <a:cs typeface="Microsoft YaHei" charset="0"/>
+                      </a:endParaRPr>
+                    </a:p>
+                    <a:p>
+                      <a:pPr indent="0" marL="0">
+                        <a:buNone/>
+                      </a:pPr>
+                      <a:r>
+                        <a:rPr lang="en-US" sz="1400" dirty="0">
+                          <a:solidFill>
+                            <a:srgbClr val="1F2A37"/>
+                          </a:solidFill>
+                          <a:latin typeface="Microsoft YaHei" pitchFamily="34" charset="0"/>
+                          <a:ea typeface="Microsoft YaHei" pitchFamily="34" charset="-122"/>
+                          <a:cs typeface="Microsoft YaHei" pitchFamily="34" charset="-120"/>
+                        </a:rPr>
+                        <a:t>（只算 ss_is_current = '1'）</a:t>
+                      </a:r>
+                      <a:endParaRPr lang="en-US" sz="1400" dirty="0">
+                        <a:latin typeface="Microsoft YaHei" charset="0"/>
+                        <a:ea typeface="Microsoft YaHei" charset="0"/>
+                        <a:cs typeface="Microsoft YaHei" charset="0"/>
+                      </a:endParaRPr>
+                    </a:p>
+                    <a:p>
+                      <a:pPr indent="0" marL="0">
+                        <a:buNone/>
+                      </a:pPr>
+                      <a:r>
+                        <a:rPr lang="en-US" sz="1400" b="1" dirty="0">
+                          <a:solidFill>
+                            <a:srgbClr val="2E7D4F"/>
+                          </a:solidFill>
+                          <a:latin typeface="Microsoft YaHei" pitchFamily="34" charset="0"/>
+                          <a:ea typeface="Microsoft YaHei" pitchFamily="34" charset="-122"/>
+                          <a:cs typeface="Microsoft YaHei" pitchFamily="34" charset="-120"/>
+                        </a:rPr>
+                        <a:t>1293.3 万 ✓</a:t>
+                      </a:r>
+                      <a:endParaRPr lang="en-US" sz="1400" dirty="0">
+                        <a:latin typeface="Microsoft YaHei" charset="0"/>
+                        <a:ea typeface="Microsoft YaHei" charset="0"/>
+                        <a:cs typeface="Microsoft YaHei" charset="0"/>
+                      </a:endParaRPr>
+                    </a:p>
+                  </a:txBody>
+                  <a:tcPr marL="91440" marR="91440" marT="54864" marB="54864" anchor="ctr">
+                    <a:lnL w="12700" cap="flat" cmpd="sng" algn="ctr">
+                      <a:solidFill>
+                        <a:srgbClr val="D5DBE3"/>
+                      </a:solidFill>
+                      <a:prstDash val="solid"/>
+                      <a:round/>
+                      <a:headEnd type="none" w="med" len="med"/>
+                      <a:tailEnd type="none" w="med" len="med"/>
+                    </a:lnL>
+                    <a:lnR w="12700" cap="flat" cmpd="sng" algn="ctr">
+                      <a:solidFill>
+                        <a:srgbClr val="D5DBE3"/>
+                      </a:solidFill>
+                      <a:prstDash val="solid"/>
+                      <a:round/>
+                      <a:headEnd type="none" w="med" len="med"/>
+                      <a:tailEnd type="none" w="med" len="med"/>
+                    </a:lnR>
+                    <a:lnT w="12700" cap="flat" cmpd="sng" algn="ctr">
+                      <a:solidFill>
+                        <a:srgbClr val="D5DBE3"/>
+                      </a:solidFill>
+                      <a:prstDash val="solid"/>
+                      <a:round/>
+                      <a:headEnd type="none" w="med" len="med"/>
+                      <a:tailEnd type="none" w="med" len="med"/>
+                    </a:lnT>
+                    <a:lnB w="12700" cap="flat" cmpd="sng" algn="ctr">
+                      <a:solidFill>
+                        <a:srgbClr val="D5DBE3"/>
+                      </a:solidFill>
+                      <a:prstDash val="solid"/>
+                      <a:round/>
+                      <a:headEnd type="none" w="med" len="med"/>
+                      <a:tailEnd type="none" w="med" len="med"/>
+                    </a:lnB>
+                  </a:tcPr>
+                </a:tc>
+              </a:tr>
+              <a:tr h="0">
+                <a:tc>
+                  <a:txBody>
+                    <a:bodyPr/>
+                    <a:lstStyle/>
+                    <a:p>
+                      <a:pPr indent="0" marL="0">
+                        <a:buNone/>
+                      </a:pPr>
+                      <a:r>
+                        <a:rPr lang="en-US" sz="1400" dirty="0">
+                          <a:solidFill>
+                            <a:srgbClr val="1F2A37"/>
+                          </a:solidFill>
+                          <a:latin typeface="Microsoft YaHei" pitchFamily="34" charset="0"/>
+                          <a:ea typeface="Microsoft YaHei" pitchFamily="34" charset="-122"/>
+                          <a:cs typeface="Microsoft YaHei" pitchFamily="34" charset="-120"/>
+                        </a:rPr>
+                        <a:t>重复装载</a:t>
+                      </a:r>
+                      <a:endParaRPr lang="en-US" sz="1400" dirty="0">
+                        <a:latin typeface="Microsoft YaHei" charset="0"/>
+                        <a:ea typeface="Microsoft YaHei" charset="0"/>
+                        <a:cs typeface="Microsoft YaHei" charset="0"/>
+                      </a:endParaRPr>
+                    </a:p>
+                  </a:txBody>
+                  <a:tcPr marL="91440" marR="91440" marT="54864" marB="54864" anchor="ctr">
+                    <a:lnL w="12700" cap="flat" cmpd="sng" algn="ctr">
+                      <a:solidFill>
+                        <a:srgbClr val="D5DBE3"/>
+                      </a:solidFill>
+                      <a:prstDash val="solid"/>
+                      <a:round/>
+                      <a:headEnd type="none" w="med" len="med"/>
+                      <a:tailEnd type="none" w="med" len="med"/>
+                    </a:lnL>
+                    <a:lnR w="12700" cap="flat" cmpd="sng" algn="ctr">
+                      <a:solidFill>
+                        <a:srgbClr val="D5DBE3"/>
+                      </a:solidFill>
+                      <a:prstDash val="solid"/>
+                      <a:round/>
+                      <a:headEnd type="none" w="med" len="med"/>
+                      <a:tailEnd type="none" w="med" len="med"/>
+                    </a:lnR>
+                    <a:lnT w="12700" cap="flat" cmpd="sng" algn="ctr">
+                      <a:solidFill>
+                        <a:srgbClr val="D5DBE3"/>
+                      </a:solidFill>
+                      <a:prstDash val="solid"/>
+                      <a:round/>
+                      <a:headEnd type="none" w="med" len="med"/>
+                      <a:tailEnd type="none" w="med" len="med"/>
+                    </a:lnT>
+                    <a:lnB w="12700" cap="flat" cmpd="sng" algn="ctr">
+                      <a:solidFill>
+                        <a:srgbClr val="D5DBE3"/>
+                      </a:solidFill>
+                      <a:prstDash val="solid"/>
+                      <a:round/>
+                      <a:headEnd type="none" w="med" len="med"/>
+                      <a:tailEnd type="none" w="med" len="med"/>
+                    </a:lnB>
+                  </a:tcPr>
+                </a:tc>
+                <a:tc>
+                  <a:txBody>
+                    <a:bodyPr/>
+                    <a:lstStyle/>
+                    <a:p>
+                      <a:pPr indent="0" marL="0">
+                        <a:buNone/>
+                      </a:pPr>
+                      <a:r>
+                        <a:rPr lang="en-US" sz="1400" dirty="0">
+                          <a:solidFill>
+                            <a:srgbClr val="1F2A37"/>
+                          </a:solidFill>
+                          <a:latin typeface="Microsoft YaHei" pitchFamily="34" charset="0"/>
+                          <a:ea typeface="Microsoft YaHei" pitchFamily="34" charset="-122"/>
+                          <a:cs typeface="Microsoft YaHei" pitchFamily="34" charset="-120"/>
+                        </a:rPr>
+                        <a:t>4 个月的销售整批又装载了一次，+110,165 行</a:t>
+                      </a:r>
+                      <a:endParaRPr lang="en-US" sz="1400" dirty="0">
+                        <a:latin typeface="Microsoft YaHei" charset="0"/>
+                        <a:ea typeface="Microsoft YaHei" charset="0"/>
+                        <a:cs typeface="Microsoft YaHei" charset="0"/>
+                      </a:endParaRPr>
+                    </a:p>
+                  </a:txBody>
+                  <a:tcPr marL="91440" marR="91440" marT="54864" marB="54864" anchor="ctr">
+                    <a:lnL w="12700" cap="flat" cmpd="sng" algn="ctr">
+                      <a:solidFill>
+                        <a:srgbClr val="D5DBE3"/>
+                      </a:solidFill>
+                      <a:prstDash val="solid"/>
+                      <a:round/>
+                      <a:headEnd type="none" w="med" len="med"/>
+                      <a:tailEnd type="none" w="med" len="med"/>
+                    </a:lnL>
+                    <a:lnR w="12700" cap="flat" cmpd="sng" algn="ctr">
+                      <a:solidFill>
+                        <a:srgbClr val="D5DBE3"/>
+                      </a:solidFill>
+                      <a:prstDash val="solid"/>
+                      <a:round/>
+                      <a:headEnd type="none" w="med" len="med"/>
+                      <a:tailEnd type="none" w="med" len="med"/>
+                    </a:lnR>
+                    <a:lnT w="12700" cap="flat" cmpd="sng" algn="ctr">
+                      <a:solidFill>
+                        <a:srgbClr val="D5DBE3"/>
+                      </a:solidFill>
+                      <a:prstDash val="solid"/>
+                      <a:round/>
+                      <a:headEnd type="none" w="med" len="med"/>
+                      <a:tailEnd type="none" w="med" len="med"/>
+                    </a:lnT>
+                    <a:lnB w="12700" cap="flat" cmpd="sng" algn="ctr">
+                      <a:solidFill>
+                        <a:srgbClr val="D5DBE3"/>
+                      </a:solidFill>
+                      <a:prstDash val="solid"/>
+                      <a:round/>
+                      <a:headEnd type="none" w="med" len="med"/>
+                      <a:tailEnd type="none" w="med" len="med"/>
+                    </a:lnB>
+                  </a:tcPr>
+                </a:tc>
+                <a:tc>
+                  <a:txBody>
+                    <a:bodyPr/>
+                    <a:lstStyle/>
+                    <a:p>
+                      <a:pPr indent="0" marL="0">
+                        <a:buNone/>
+                      </a:pPr>
+                      <a:r>
+                        <a:rPr lang="en-US" sz="1400" dirty="0">
+                          <a:solidFill>
+                            <a:srgbClr val="1F2A37"/>
+                          </a:solidFill>
+                          <a:latin typeface="Microsoft YaHei" pitchFamily="34" charset="0"/>
+                          <a:ea typeface="Microsoft YaHei" pitchFamily="34" charset="-122"/>
+                          <a:cs typeface="Microsoft YaHei" pitchFamily="34" charset="-120"/>
+                        </a:rPr>
+                        <a:t>1307.0 万</a:t>
+                      </a:r>
+                      <a:endParaRPr lang="en-US" sz="1400" dirty="0">
+                        <a:latin typeface="Microsoft YaHei" charset="0"/>
+                        <a:ea typeface="Microsoft YaHei" charset="0"/>
+                        <a:cs typeface="Microsoft YaHei" charset="0"/>
+                      </a:endParaRPr>
+                    </a:p>
+                  </a:txBody>
+                  <a:tcPr marL="91440" marR="91440" marT="54864" marB="54864" anchor="ctr">
+                    <a:lnL w="12700" cap="flat" cmpd="sng" algn="ctr">
+                      <a:solidFill>
+                        <a:srgbClr val="D5DBE3"/>
+                      </a:solidFill>
+                      <a:prstDash val="solid"/>
+                      <a:round/>
+                      <a:headEnd type="none" w="med" len="med"/>
+                      <a:tailEnd type="none" w="med" len="med"/>
+                    </a:lnL>
+                    <a:lnR w="12700" cap="flat" cmpd="sng" algn="ctr">
+                      <a:solidFill>
+                        <a:srgbClr val="D5DBE3"/>
+                      </a:solidFill>
+                      <a:prstDash val="solid"/>
+                      <a:round/>
+                      <a:headEnd type="none" w="med" len="med"/>
+                      <a:tailEnd type="none" w="med" len="med"/>
+                    </a:lnR>
+                    <a:lnT w="12700" cap="flat" cmpd="sng" algn="ctr">
+                      <a:solidFill>
+                        <a:srgbClr val="D5DBE3"/>
+                      </a:solidFill>
+                      <a:prstDash val="solid"/>
+                      <a:round/>
+                      <a:headEnd type="none" w="med" len="med"/>
+                      <a:tailEnd type="none" w="med" len="med"/>
+                    </a:lnT>
+                    <a:lnB w="12700" cap="flat" cmpd="sng" algn="ctr">
+                      <a:solidFill>
+                        <a:srgbClr val="D5DBE3"/>
+                      </a:solidFill>
+                      <a:prstDash val="solid"/>
+                      <a:round/>
+                      <a:headEnd type="none" w="med" len="med"/>
+                      <a:tailEnd type="none" w="med" len="med"/>
+                    </a:lnB>
+                  </a:tcPr>
+                </a:tc>
+                <a:tc>
+                  <a:txBody>
+                    <a:bodyPr/>
+                    <a:lstStyle/>
+                    <a:p>
+                      <a:pPr indent="0" marL="0">
+                        <a:buNone/>
+                      </a:pPr>
+                      <a:r>
+                        <a:rPr lang="en-US" sz="1400" b="1" dirty="0">
+                          <a:solidFill>
+                            <a:srgbClr val="B5392A"/>
+                          </a:solidFill>
+                          <a:latin typeface="Microsoft YaHei" pitchFamily="34" charset="0"/>
+                          <a:ea typeface="Microsoft YaHei" pitchFamily="34" charset="-122"/>
+                          <a:cs typeface="Microsoft YaHei" pitchFamily="34" charset="-120"/>
+                        </a:rPr>
+                        <a:t>2613.9 万 ✗</a:t>
+                      </a:r>
+                      <a:endParaRPr lang="en-US" sz="1400" dirty="0">
+                        <a:latin typeface="Microsoft YaHei" charset="0"/>
+                        <a:ea typeface="Microsoft YaHei" charset="0"/>
+                        <a:cs typeface="Microsoft YaHei" charset="0"/>
+                      </a:endParaRPr>
+                    </a:p>
+                    <a:p>
+                      <a:pPr indent="0" marL="0">
+                        <a:buNone/>
+                      </a:pPr>
+                      <a:r>
+                        <a:rPr lang="en-US" sz="1400" dirty="0">
+                          <a:solidFill>
+                            <a:srgbClr val="1F2A37"/>
+                          </a:solidFill>
+                          <a:latin typeface="Microsoft YaHei" pitchFamily="34" charset="0"/>
+                          <a:ea typeface="Microsoft YaHei" pitchFamily="34" charset="-122"/>
+                          <a:cs typeface="Microsoft YaHei" pitchFamily="34" charset="-120"/>
+                        </a:rPr>
+                        <a:t>9 月翻倍</a:t>
+                      </a:r>
+                      <a:endParaRPr lang="en-US" sz="1400" dirty="0">
+                        <a:latin typeface="Microsoft YaHei" charset="0"/>
+                        <a:ea typeface="Microsoft YaHei" charset="0"/>
+                        <a:cs typeface="Microsoft YaHei" charset="0"/>
+                      </a:endParaRPr>
+                    </a:p>
+                  </a:txBody>
+                  <a:tcPr marL="91440" marR="91440" marT="54864" marB="54864" anchor="ctr">
+                    <a:lnL w="12700" cap="flat" cmpd="sng" algn="ctr">
+                      <a:solidFill>
+                        <a:srgbClr val="D5DBE3"/>
+                      </a:solidFill>
+                      <a:prstDash val="solid"/>
+                      <a:round/>
+                      <a:headEnd type="none" w="med" len="med"/>
+                      <a:tailEnd type="none" w="med" len="med"/>
+                    </a:lnL>
+                    <a:lnR w="12700" cap="flat" cmpd="sng" algn="ctr">
+                      <a:solidFill>
+                        <a:srgbClr val="D5DBE3"/>
+                      </a:solidFill>
+                      <a:prstDash val="solid"/>
+                      <a:round/>
+                      <a:headEnd type="none" w="med" len="med"/>
+                      <a:tailEnd type="none" w="med" len="med"/>
+                    </a:lnR>
+                    <a:lnT w="12700" cap="flat" cmpd="sng" algn="ctr">
+                      <a:solidFill>
+                        <a:srgbClr val="D5DBE3"/>
+                      </a:solidFill>
+                      <a:prstDash val="solid"/>
+                      <a:round/>
+                      <a:headEnd type="none" w="med" len="med"/>
+                      <a:tailEnd type="none" w="med" len="med"/>
+                    </a:lnT>
+                    <a:lnB w="12700" cap="flat" cmpd="sng" algn="ctr">
+                      <a:solidFill>
+                        <a:srgbClr val="D5DBE3"/>
+                      </a:solidFill>
+                      <a:prstDash val="solid"/>
+                      <a:round/>
+                      <a:headEnd type="none" w="med" len="med"/>
+                      <a:tailEnd type="none" w="med" len="med"/>
+                    </a:lnB>
+                  </a:tcPr>
+                </a:tc>
+                <a:tc>
+                  <a:txBody>
+                    <a:bodyPr/>
+                    <a:lstStyle/>
+                    <a:p>
+                      <a:pPr indent="0" marL="0">
+                        <a:buNone/>
+                      </a:pPr>
+                      <a:r>
+                        <a:rPr lang="en-US" sz="1400" dirty="0">
+                          <a:solidFill>
+                            <a:srgbClr val="1F2A37"/>
+                          </a:solidFill>
+                          <a:latin typeface="Microsoft YaHei" pitchFamily="34" charset="0"/>
+                          <a:ea typeface="Microsoft YaHei" pitchFamily="34" charset="-122"/>
+                          <a:cs typeface="Microsoft YaHei" pitchFamily="34" charset="-120"/>
+                        </a:rPr>
+                        <a:t>找不到修复 → 停用并提醒</a:t>
+                      </a:r>
+                      <a:endParaRPr lang="en-US" sz="1400" dirty="0">
+                        <a:latin typeface="Microsoft YaHei" charset="0"/>
+                        <a:ea typeface="Microsoft YaHei" charset="0"/>
+                        <a:cs typeface="Microsoft YaHei" charset="0"/>
+                      </a:endParaRPr>
+                    </a:p>
+                    <a:p>
+                      <a:pPr indent="0" marL="0">
+                        <a:buNone/>
+                      </a:pPr>
+                      <a:r>
+                        <a:rPr lang="en-US" sz="1400" dirty="0">
+                          <a:solidFill>
+                            <a:srgbClr val="1F2A37"/>
+                          </a:solidFill>
+                          <a:latin typeface="Microsoft YaHei" pitchFamily="34" charset="0"/>
+                          <a:ea typeface="Microsoft YaHei" pitchFamily="34" charset="-122"/>
+                          <a:cs typeface="Microsoft YaHei" pitchFamily="34" charset="-120"/>
+                        </a:rPr>
+                        <a:t>智能体自己去重</a:t>
+                      </a:r>
+                      <a:endParaRPr lang="en-US" sz="1400" dirty="0">
+                        <a:latin typeface="Microsoft YaHei" charset="0"/>
+                        <a:ea typeface="Microsoft YaHei" charset="0"/>
+                        <a:cs typeface="Microsoft YaHei" charset="0"/>
+                      </a:endParaRPr>
+                    </a:p>
+                    <a:p>
+                      <a:pPr indent="0" marL="0">
+                        <a:buNone/>
+                      </a:pPr>
+                      <a:r>
+                        <a:rPr lang="en-US" sz="1400" b="1" dirty="0">
+                          <a:solidFill>
+                            <a:srgbClr val="1F2A37"/>
+                          </a:solidFill>
+                          <a:latin typeface="Microsoft YaHei" pitchFamily="34" charset="0"/>
+                          <a:ea typeface="Microsoft YaHei" pitchFamily="34" charset="-122"/>
+                          <a:cs typeface="Microsoft YaHei" pitchFamily="34" charset="-120"/>
+                        </a:rPr>
+                        <a:t>3 次运行中 2 次答对</a:t>
+                      </a:r>
+                      <a:endParaRPr lang="en-US" sz="1400" dirty="0">
+                        <a:latin typeface="Microsoft YaHei" charset="0"/>
+                        <a:ea typeface="Microsoft YaHei" charset="0"/>
+                        <a:cs typeface="Microsoft YaHei" charset="0"/>
+                      </a:endParaRPr>
+                    </a:p>
+                  </a:txBody>
+                  <a:tcPr marL="91440" marR="91440" marT="54864" marB="54864" anchor="ctr">
+                    <a:lnL w="12700" cap="flat" cmpd="sng" algn="ctr">
+                      <a:solidFill>
+                        <a:srgbClr val="D5DBE3"/>
+                      </a:solidFill>
+                      <a:prstDash val="solid"/>
+                      <a:round/>
+                      <a:headEnd type="none" w="med" len="med"/>
+                      <a:tailEnd type="none" w="med" len="med"/>
+                    </a:lnL>
+                    <a:lnR w="12700" cap="flat" cmpd="sng" algn="ctr">
+                      <a:solidFill>
+                        <a:srgbClr val="D5DBE3"/>
+                      </a:solidFill>
+                      <a:prstDash val="solid"/>
+                      <a:round/>
+                      <a:headEnd type="none" w="med" len="med"/>
+                      <a:tailEnd type="none" w="med" len="med"/>
+                    </a:lnR>
+                    <a:lnT w="12700" cap="flat" cmpd="sng" algn="ctr">
+                      <a:solidFill>
+                        <a:srgbClr val="D5DBE3"/>
+                      </a:solidFill>
+                      <a:prstDash val="solid"/>
+                      <a:round/>
+                      <a:headEnd type="none" w="med" len="med"/>
+                      <a:tailEnd type="none" w="med" len="med"/>
+                    </a:lnT>
+                    <a:lnB w="12700" cap="flat" cmpd="sng" algn="ctr">
+                      <a:solidFill>
+                        <a:srgbClr val="D5DBE3"/>
+                      </a:solidFill>
+                      <a:prstDash val="solid"/>
+                      <a:round/>
+                      <a:headEnd type="none" w="med" len="med"/>
+                      <a:tailEnd type="none" w="med" len="med"/>
+                    </a:lnB>
+                  </a:tcPr>
+                </a:tc>
+              </a:tr>
+            </a:tbl>
+          </a:graphicData>
+        </a:graphic>
+      </p:graphicFrame>
+      <p:sp>
+        <p:nvSpPr>
+          <p:cNvPr id="4" name="Text 1"/>
+          <p:cNvSpPr txBox="1"/>
+          <p:nvPr/>
+        </p:nvSpPr>
+        <p:spPr>
+          <a:xfrm>
+            <a:off x="548640" y="4892040"/>
+            <a:ext cx="11094415" cy="914400"/>
+          </a:xfrm>
+          <a:prstGeom prst="rect">
+            <a:avLst/>
+          </a:prstGeom>
+          <a:noFill/>
+          <a:ln/>
+        </p:spPr>
+        <p:txBody>
+          <a:bodyPr wrap="square" lIns="0" tIns="0" rIns="0" bIns="0" rtlCol="0" anchor="t"/>
+          <a:lstStyle/>
+          <a:p>
+            <a:pPr indent="0" marL="0">
+              <a:buNone/>
+            </a:pPr>
+            <a:r>
+              <a:rPr lang="en-US" sz="1600" b="1" dirty="0">
+                <a:solidFill>
+                  <a:srgbClr val="1F2A37"/>
+                </a:solidFill>
+                <a:latin typeface="Microsoft YaHei" pitchFamily="34" charset="0"/>
+                <a:ea typeface="Microsoft YaHei" pitchFamily="34" charset="-122"/>
+                <a:cs typeface="Microsoft YaHei" pitchFamily="34" charset="-120"/>
+              </a:rPr>
+              <a:t>三种写入都是普通的 INSERT / UPDATE，表结构都没变。</a:t>
+            </a:r>
+            <a:endParaRPr lang="en-US" sz="1600" dirty="0"/>
+          </a:p>
+          <a:p>
+            <a:pPr indent="0" marL="0">
+              <a:buNone/>
+            </a:pPr>
+            <a:r>
+              <a:rPr lang="en-US" sz="1600" dirty="0">
+                <a:solidFill>
+                  <a:srgbClr val="1F2A37"/>
+                </a:solidFill>
+                <a:latin typeface="Microsoft YaHei" pitchFamily="34" charset="0"/>
+                <a:ea typeface="Microsoft YaHei" pitchFamily="34" charset="-122"/>
+                <a:cs typeface="Microsoft YaHei" pitchFamily="34" charset="-120"/>
+              </a:rPr>
+              <a:t>所以“只在表结构变化时让定义失效”的做法一次也发现不了，数据更正和重复装载时 3 次运行全部答错。</a:t>
+            </a:r>
+            <a:endParaRPr lang="en-US" sz="1600" dirty="0"/>
+          </a:p>
+        </p:txBody>
+      </p:sp>
+      <p:sp>
+        <p:nvSpPr>
+          <p:cNvPr id="5" name="Text 2"/>
+          <p:cNvSpPr txBox="1"/>
+          <p:nvPr/>
+        </p:nvSpPr>
+        <p:spPr>
+          <a:xfrm>
+            <a:off x="548640" y="6263640"/>
+            <a:ext cx="10362895" cy="365760"/>
+          </a:xfrm>
+          <a:prstGeom prst="rect">
+            <a:avLst/>
+          </a:prstGeom>
+          <a:noFill/>
+          <a:ln/>
+        </p:spPr>
+        <p:txBody>
+          <a:bodyPr wrap="square" lIns="0" tIns="0" rIns="0" bIns="0" rtlCol="0" anchor="b"/>
+          <a:lstStyle/>
+          <a:p>
+            <a:pPr indent="0" marL="0">
+              <a:buNone/>
+            </a:pPr>
+            <a:r>
+              <a:rPr lang="en-US" sz="1100" dirty="0">
+                <a:solidFill>
+                  <a:srgbClr val="5B6573"/>
+                </a:solidFill>
+                <a:latin typeface="Microsoft YaHei" pitchFamily="34" charset="0"/>
+                <a:ea typeface="Microsoft YaHei" pitchFamily="34" charset="-122"/>
+                <a:cs typeface="Microsoft YaHei" pitchFamily="34" charset="-120"/>
+              </a:rPr>
+              <a:t>对照组：只在表结构变化时才让定义失效，3 次独立运行答案相同。MAVRA 栏为第 1 次运行；追加和更正 3 次运行结果相同，重复装载见表。数据为仿 TPC-DS 的合成零售数据（100 万行门店销售），题目中的年份略去。</a:t>
+            </a:r>
+            <a:endParaRPr lang="en-US" sz="1100" dirty="0"/>
+          </a:p>
+        </p:txBody>
+      </p:sp>
+      <p:sp>
+        <p:nvSpPr>
+          <p:cNvPr id="25" name="Slide Number Placeholder 0"/>
+          <p:cNvSpPr>
+            <a:spLocks noGrp="1"/>
+          </p:cNvSpPr>
+          <p:nvPr>
+            <p:ph type="sldNum" sz="quarter" idx="4294967295"/>
+          </p:nvPr>
+        </p:nvSpPr>
+        <p:spPr>
+          <a:xfrm>
+            <a:off x="11185855" y="6446520"/>
+            <a:ext cx="457200" cy="274320"/>
+          </a:xfrm>
+          <a:prstGeom prst="rect">
+            <a:avLst/>
+          </a:prstGeom>
+          <a:extLst>
+            <a:ext uri="{C572A759-6A51-4108-AA02-DFA0A04FC94B}">
+              <ma14:wrappingTextBoxFlag xmlns:ma14="http://schemas.microsoft.com/office/mac/drawingml/2011/main" val="0"/>
+            </a:ext>
+          </a:extLst>
+        </p:spPr>
+        <p:txBody>
+          <a:bodyPr/>
+          <a:lstStyle>
+            <a:lvl1pPr>
+              <a:defRPr sz="1000">
+                <a:solidFill>
+                  <a:srgbClr val="5B6573"/>
+                </a:solidFill>
+                <a:latin typeface="Microsoft YaHei"/>
+                <a:ea typeface="Microsoft YaHei"/>
+                <a:cs typeface="Microsoft YaHei"/>
+              </a:defRPr>
+            </a:lvl1pPr>
+          </a:lstStyle>
+          <a:p>
+            <a:pPr algn="r"/>
+            <a:fld id="{F7021451-1387-4CA6-816F-3879F97B5CBC}" type="slidenum">
+              <a:rPr b="0" lang="en-US"/>
+              <a:t>7</a:t>
+            </a:fld>
+            <a:endParaRPr lang="en-US"/>
+          </a:p>
+        </p:txBody>
+      </p:sp>
+    </p:spTree>
+  </p:cSld>
+  <p:clrMapOvr>
+    <a:masterClrMapping/>
+  </p:clrMapOvr>
+</p:sld>
+</file>
+
+<file path=ppt/slides/slide8.xml><?xml version="1.0" encoding="utf-8"?>
+<p:sld xmlns:a="http://schemas.openxmlformats.org/drawingml/2006/main" xmlns:r="http://schemas.openxmlformats.org/officeDocument/2006/relationships" xmlns:p="http://schemas.openxmlformats.org/presentationml/2006/main">
+  <p:cSld name="Slide 8">
+    <p:spTree>
+      <p:nvGrpSpPr>
+        <p:cNvPr id="1" name=""/>
+        <p:cNvGrpSpPr/>
+        <p:nvPr/>
+      </p:nvGrpSpPr>
+      <p:grpSpPr>
+        <a:xfrm>
+          <a:off x="0" y="0"/>
+          <a:ext cx="0" cy="0"/>
+          <a:chOff x="0" y="0"/>
+          <a:chExt cx="0" cy="0"/>
+        </a:xfrm>
+      </p:grpSpPr>
+      <p:sp>
+        <p:nvSpPr>
+          <p:cNvPr id="2" name="Text 0"/>
+          <p:cNvSpPr/>
+          <p:nvPr>
+            <p:ph idx="100" type="title" hasCustomPrompt="1"/>
+          </p:nvPr>
+        </p:nvSpPr>
+        <p:spPr>
+          <a:xfrm>
+            <a:off x="548640" y="274320"/>
+            <a:ext cx="11094415" cy="685800"/>
+          </a:xfrm>
+          <a:prstGeom prst="rect">
+            <a:avLst/>
+          </a:prstGeom>
+          <a:noFill/>
+          <a:ln/>
+        </p:spPr>
+        <p:txBody>
+          <a:bodyPr wrap="square" lIns="0" tIns="0" rIns="0" bIns="0" rtlCol="0" anchor="ctr"/>
+          <a:lstStyle/>
+          <a:p>
+            <a:pPr algn="l" indent="0" marL="0">
+              <a:buNone/>
+            </a:pPr>
+            <a:r>
+              <a:rPr lang="en-US" sz="3000" b="1" dirty="0">
+                <a:solidFill>
+                  <a:srgbClr val="1F2A37"/>
+                </a:solidFill>
+                <a:latin typeface="Microsoft YaHei" pitchFamily="34" charset="0"/>
+                <a:ea typeface="Microsoft YaHei" pitchFamily="34" charset="-122"/>
+                <a:cs typeface="Microsoft YaHei" pitchFamily="34" charset="-120"/>
+              </a:rPr>
+              <a:t>真实例子③：数据更正之后，MAVRA 依次做了什么</a:t>
+            </a:r>
+            <a:endParaRPr lang="en-US" sz="3000" dirty="0"/>
+          </a:p>
+        </p:txBody>
+      </p:sp>
+      <p:graphicFrame>
+        <p:nvGraphicFramePr>
+          <p:cNvPr id="9" name="Table 0"/>
+          <p:cNvGraphicFramePr>
+            <a:graphicFrameLocks noGrp="1"/>
+          </p:cNvGraphicFramePr>
+          <p:nvPr>
+            <p:extLst>
+              <p:ext uri="{D42A27DB-BD31-4B8C-83A1-F6EECF244321}">
+                <p14:modId xmlns:p14="http://schemas.microsoft.com/office/powerpoint/2010/main" val="1579011935"/>
+              </p:ext>
+            </p:extLst>
+          </p:nvPr>
+        </p:nvGraphicFramePr>
+        <p:xfrm>
+          <a:off x="548640" y="1188720"/>
+          <a:ext cx="11094415" cy="914400"/>
+        </p:xfrm>
+        <a:graphic>
+          <a:graphicData uri="http://schemas.openxmlformats.org/drawingml/2006/table">
+            <a:tbl>
+              <a:tblPr/>
+              <a:tblGrid>
+                <a:gridCol w="411480"/>
+                <a:gridCol w="4937760"/>
+                <a:gridCol w="5742432"/>
+              </a:tblGrid>
+              <a:tr h="0">
+                <a:tc>
+                  <a:txBody>
+                    <a:bodyPr/>
+                    <a:lstStyle/>
+                    <a:p>
+                      <a:pPr indent="0" marL="0">
+                        <a:buNone/>
+                      </a:pPr>
+                      <a:endParaRPr lang="en-US" sz="1400" dirty="0">
+                        <a:latin typeface="Microsoft YaHei" charset="0"/>
+                        <a:ea typeface="Microsoft YaHei" charset="0"/>
+                        <a:cs typeface="Microsoft YaHei" charset="0"/>
+                      </a:endParaRPr>
+                    </a:p>
+                  </a:txBody>
+                  <a:tcPr marL="91440" marR="91440" marT="54864" marB="54864" anchor="ctr">
+                    <a:lnL w="12700" cap="flat" cmpd="sng" algn="ctr">
+                      <a:solidFill>
+                        <a:srgbClr val="D5DBE3"/>
+                      </a:solidFill>
+                      <a:prstDash val="solid"/>
+                      <a:round/>
+                      <a:headEnd type="none" w="med" len="med"/>
+                      <a:tailEnd type="none" w="med" len="med"/>
+                    </a:lnL>
+                    <a:lnR w="12700" cap="flat" cmpd="sng" algn="ctr">
+                      <a:solidFill>
+                        <a:srgbClr val="D5DBE3"/>
+                      </a:solidFill>
+                      <a:prstDash val="solid"/>
+                      <a:round/>
+                      <a:headEnd type="none" w="med" len="med"/>
+                      <a:tailEnd type="none" w="med" len="med"/>
+                    </a:lnR>
+                    <a:lnT w="12700" cap="flat" cmpd="sng" algn="ctr">
+                      <a:solidFill>
+                        <a:srgbClr val="D5DBE3"/>
+                      </a:solidFill>
+                      <a:prstDash val="solid"/>
+                      <a:round/>
+                      <a:headEnd type="none" w="med" len="med"/>
+                      <a:tailEnd type="none" w="med" len="med"/>
+                    </a:lnT>
+                    <a:lnB w="12700" cap="flat" cmpd="sng" algn="ctr">
+                      <a:solidFill>
+                        <a:srgbClr val="D5DBE3"/>
+                      </a:solidFill>
+                      <a:prstDash val="solid"/>
+                      <a:round/>
+                      <a:headEnd type="none" w="med" len="med"/>
+                      <a:tailEnd type="none" w="med" len="med"/>
+                    </a:lnB>
+                    <a:solidFill>
+                      <a:srgbClr val="F1F3F6"/>
+                    </a:solidFill>
+                  </a:tcPr>
+                </a:tc>
+                <a:tc>
+                  <a:txBody>
+                    <a:bodyPr/>
+                    <a:lstStyle/>
+                    <a:p>
+                      <a:pPr indent="0" marL="0">
+                        <a:buNone/>
+                      </a:pPr>
+                      <a:r>
+                        <a:rPr lang="en-US" sz="1400" b="1" dirty="0">
+                          <a:solidFill>
+                            <a:srgbClr val="1F2A37"/>
+                          </a:solidFill>
+                          <a:latin typeface="Microsoft YaHei" pitchFamily="34" charset="0"/>
+                          <a:ea typeface="Microsoft YaHei" pitchFamily="34" charset="-122"/>
+                          <a:cs typeface="Microsoft YaHei" pitchFamily="34" charset="-120"/>
+                        </a:rPr>
+                        <a:t>发生了什么</a:t>
+                      </a:r>
+                      <a:endParaRPr lang="en-US" sz="1400" dirty="0">
+                        <a:latin typeface="Microsoft YaHei" charset="0"/>
+                        <a:ea typeface="Microsoft YaHei" charset="0"/>
+                        <a:cs typeface="Microsoft YaHei" charset="0"/>
+                      </a:endParaRPr>
+                    </a:p>
+                  </a:txBody>
+                  <a:tcPr marL="91440" marR="91440" marT="54864" marB="54864" anchor="ctr">
+                    <a:lnL w="12700" cap="flat" cmpd="sng" algn="ctr">
+                      <a:solidFill>
+                        <a:srgbClr val="D5DBE3"/>
+                      </a:solidFill>
+                      <a:prstDash val="solid"/>
+                      <a:round/>
+                      <a:headEnd type="none" w="med" len="med"/>
+                      <a:tailEnd type="none" w="med" len="med"/>
+                    </a:lnL>
+                    <a:lnR w="12700" cap="flat" cmpd="sng" algn="ctr">
+                      <a:solidFill>
+                        <a:srgbClr val="D5DBE3"/>
+                      </a:solidFill>
+                      <a:prstDash val="solid"/>
+                      <a:round/>
+                      <a:headEnd type="none" w="med" len="med"/>
+                      <a:tailEnd type="none" w="med" len="med"/>
+                    </a:lnR>
+                    <a:lnT w="12700" cap="flat" cmpd="sng" algn="ctr">
+                      <a:solidFill>
+                        <a:srgbClr val="D5DBE3"/>
+                      </a:solidFill>
+                      <a:prstDash val="solid"/>
+                      <a:round/>
+                      <a:headEnd type="none" w="med" len="med"/>
+                      <a:tailEnd type="none" w="med" len="med"/>
+                    </a:lnT>
+                    <a:lnB w="12700" cap="flat" cmpd="sng" algn="ctr">
+                      <a:solidFill>
+                        <a:srgbClr val="D5DBE3"/>
+                      </a:solidFill>
+                      <a:prstDash val="solid"/>
+                      <a:round/>
+                      <a:headEnd type="none" w="med" len="med"/>
+                      <a:tailEnd type="none" w="med" len="med"/>
+                    </a:lnB>
+                    <a:solidFill>
+                      <a:srgbClr val="F1F3F6"/>
+                    </a:solidFill>
+                  </a:tcPr>
+                </a:tc>
+                <a:tc>
+                  <a:txBody>
+                    <a:bodyPr/>
+                    <a:lstStyle/>
+                    <a:p>
+                      <a:pPr indent="0" marL="0">
+                        <a:buNone/>
+                      </a:pPr>
+                      <a:r>
+                        <a:rPr lang="en-US" sz="1400" b="1" dirty="0">
+                          <a:solidFill>
+                            <a:srgbClr val="1F2A37"/>
+                          </a:solidFill>
+                          <a:latin typeface="Microsoft YaHei" pitchFamily="34" charset="0"/>
+                          <a:ea typeface="Microsoft YaHei" pitchFamily="34" charset="-122"/>
+                          <a:cs typeface="Microsoft YaHei" pitchFamily="34" charset="-120"/>
+                        </a:rPr>
+                        <a:t>系统记录</a:t>
+                      </a:r>
+                      <a:endParaRPr lang="en-US" sz="1400" dirty="0">
+                        <a:latin typeface="Microsoft YaHei" charset="0"/>
+                        <a:ea typeface="Microsoft YaHei" charset="0"/>
+                        <a:cs typeface="Microsoft YaHei" charset="0"/>
+                      </a:endParaRPr>
+                    </a:p>
+                  </a:txBody>
+                  <a:tcPr marL="91440" marR="91440" marT="54864" marB="54864" anchor="ctr">
+                    <a:lnL w="12700" cap="flat" cmpd="sng" algn="ctr">
+                      <a:solidFill>
+                        <a:srgbClr val="D5DBE3"/>
+                      </a:solidFill>
+                      <a:prstDash val="solid"/>
+                      <a:round/>
+                      <a:headEnd type="none" w="med" len="med"/>
+                      <a:tailEnd type="none" w="med" len="med"/>
+                    </a:lnL>
+                    <a:lnR w="12700" cap="flat" cmpd="sng" algn="ctr">
+                      <a:solidFill>
+                        <a:srgbClr val="D5DBE3"/>
+                      </a:solidFill>
+                      <a:prstDash val="solid"/>
+                      <a:round/>
+                      <a:headEnd type="none" w="med" len="med"/>
+                      <a:tailEnd type="none" w="med" len="med"/>
+                    </a:lnR>
+                    <a:lnT w="12700" cap="flat" cmpd="sng" algn="ctr">
+                      <a:solidFill>
+                        <a:srgbClr val="D5DBE3"/>
+                      </a:solidFill>
+                      <a:prstDash val="solid"/>
+                      <a:round/>
+                      <a:headEnd type="none" w="med" len="med"/>
+                      <a:tailEnd type="none" w="med" len="med"/>
+                    </a:lnT>
+                    <a:lnB w="12700" cap="flat" cmpd="sng" algn="ctr">
+                      <a:solidFill>
+                        <a:srgbClr val="D5DBE3"/>
+                      </a:solidFill>
+                      <a:prstDash val="solid"/>
+                      <a:round/>
+                      <a:headEnd type="none" w="med" len="med"/>
+                      <a:tailEnd type="none" w="med" len="med"/>
+                    </a:lnB>
+                    <a:solidFill>
+                      <a:srgbClr val="F1F3F6"/>
+                    </a:solidFill>
+                  </a:tcPr>
+                </a:tc>
+              </a:tr>
+              <a:tr h="0">
+                <a:tc>
+                  <a:txBody>
+                    <a:bodyPr/>
+                    <a:lstStyle/>
+                    <a:p>
+                      <a:pPr indent="0" marL="0">
+                        <a:buNone/>
+                      </a:pPr>
+                      <a:r>
+                        <a:rPr lang="en-US" sz="1400" dirty="0">
+                          <a:solidFill>
+                            <a:srgbClr val="1F2A37"/>
+                          </a:solidFill>
+                          <a:latin typeface="Microsoft YaHei" pitchFamily="34" charset="0"/>
+                          <a:ea typeface="Microsoft YaHei" pitchFamily="34" charset="-122"/>
+                          <a:cs typeface="Microsoft YaHei" pitchFamily="34" charset="-120"/>
+                        </a:rPr>
+                        <a:t>1</a:t>
+                      </a:r>
+                      <a:endParaRPr lang="en-US" sz="1400" dirty="0">
+                        <a:latin typeface="Microsoft YaHei" charset="0"/>
+                        <a:ea typeface="Microsoft YaHei" charset="0"/>
+                        <a:cs typeface="Microsoft YaHei" charset="0"/>
+                      </a:endParaRPr>
+                    </a:p>
+                  </a:txBody>
+                  <a:tcPr marL="91440" marR="91440" marT="54864" marB="54864" anchor="ctr">
+                    <a:lnL w="12700" cap="flat" cmpd="sng" algn="ctr">
+                      <a:solidFill>
+                        <a:srgbClr val="D5DBE3"/>
+                      </a:solidFill>
+                      <a:prstDash val="solid"/>
+                      <a:round/>
+                      <a:headEnd type="none" w="med" len="med"/>
+                      <a:tailEnd type="none" w="med" len="med"/>
+                    </a:lnL>
+                    <a:lnR w="12700" cap="flat" cmpd="sng" algn="ctr">
+                      <a:solidFill>
+                        <a:srgbClr val="D5DBE3"/>
+                      </a:solidFill>
+                      <a:prstDash val="solid"/>
+                      <a:round/>
+                      <a:headEnd type="none" w="med" len="med"/>
+                      <a:tailEnd type="none" w="med" len="med"/>
+                    </a:lnR>
+                    <a:lnT w="12700" cap="flat" cmpd="sng" algn="ctr">
+                      <a:solidFill>
+                        <a:srgbClr val="D5DBE3"/>
+                      </a:solidFill>
+                      <a:prstDash val="solid"/>
+                      <a:round/>
+                      <a:headEnd type="none" w="med" len="med"/>
+                      <a:tailEnd type="none" w="med" len="med"/>
+                    </a:lnT>
+                    <a:lnB w="12700" cap="flat" cmpd="sng" algn="ctr">
+                      <a:solidFill>
+                        <a:srgbClr val="D5DBE3"/>
+                      </a:solidFill>
+                      <a:prstDash val="solid"/>
+                      <a:round/>
+                      <a:headEnd type="none" w="med" len="med"/>
+                      <a:tailEnd type="none" w="med" len="med"/>
+                    </a:lnB>
+                  </a:tcPr>
+                </a:tc>
+                <a:tc>
+                  <a:txBody>
+                    <a:bodyPr/>
+                    <a:lstStyle/>
+                    <a:p>
+                      <a:pPr indent="0" marL="0">
+                        <a:buNone/>
+                      </a:pPr>
+                      <a:r>
+                        <a:rPr lang="en-US" sz="1400" dirty="0">
+                          <a:solidFill>
+                            <a:srgbClr val="1F2A37"/>
+                          </a:solidFill>
+                          <a:latin typeface="Microsoft YaHei" pitchFamily="34" charset="0"/>
+                          <a:ea typeface="Microsoft YaHei" pitchFamily="34" charset="-122"/>
+                          <a:cs typeface="Microsoft YaHei" pitchFamily="34" charset="-120"/>
+                        </a:rPr>
+                        <a:t>第一个用到销售表的查询到来。先检查名称匹配到的“电子品类门店营业额”：销售表变了，重新校验“每笔销售一行”</a:t>
+                      </a:r>
+                      <a:endParaRPr lang="en-US" sz="1400" dirty="0">
+                        <a:latin typeface="Microsoft YaHei" charset="0"/>
+                        <a:ea typeface="Microsoft YaHei" charset="0"/>
+                        <a:cs typeface="Microsoft YaHei" charset="0"/>
+                      </a:endParaRPr>
+                    </a:p>
+                  </a:txBody>
+                  <a:tcPr marL="91440" marR="91440" marT="54864" marB="54864" anchor="ctr">
+                    <a:lnL w="12700" cap="flat" cmpd="sng" algn="ctr">
+                      <a:solidFill>
+                        <a:srgbClr val="D5DBE3"/>
+                      </a:solidFill>
+                      <a:prstDash val="solid"/>
+                      <a:round/>
+                      <a:headEnd type="none" w="med" len="med"/>
+                      <a:tailEnd type="none" w="med" len="med"/>
+                    </a:lnL>
+                    <a:lnR w="12700" cap="flat" cmpd="sng" algn="ctr">
+                      <a:solidFill>
+                        <a:srgbClr val="D5DBE3"/>
+                      </a:solidFill>
+                      <a:prstDash val="solid"/>
+                      <a:round/>
+                      <a:headEnd type="none" w="med" len="med"/>
+                      <a:tailEnd type="none" w="med" len="med"/>
+                    </a:lnR>
+                    <a:lnT w="12700" cap="flat" cmpd="sng" algn="ctr">
+                      <a:solidFill>
+                        <a:srgbClr val="D5DBE3"/>
+                      </a:solidFill>
+                      <a:prstDash val="solid"/>
+                      <a:round/>
+                      <a:headEnd type="none" w="med" len="med"/>
+                      <a:tailEnd type="none" w="med" len="med"/>
+                    </a:lnT>
+                    <a:lnB w="12700" cap="flat" cmpd="sng" algn="ctr">
+                      <a:solidFill>
+                        <a:srgbClr val="D5DBE3"/>
+                      </a:solidFill>
+                      <a:prstDash val="solid"/>
+                      <a:round/>
+                      <a:headEnd type="none" w="med" len="med"/>
+                      <a:tailEnd type="none" w="med" len="med"/>
+                    </a:lnB>
+                  </a:tcPr>
+                </a:tc>
+                <a:tc>
+                  <a:txBody>
+                    <a:bodyPr/>
+                    <a:lstStyle/>
+                    <a:p>
+                      <a:pPr indent="0" marL="0">
+                        <a:buNone/>
+                      </a:pPr>
+                      <a:r>
+                        <a:rPr lang="en-US" sz="1400" b="1" dirty="0">
+                          <a:solidFill>
+                            <a:srgbClr val="B5392A"/>
+                          </a:solidFill>
+                          <a:latin typeface="Microsoft YaHei" pitchFamily="34" charset="0"/>
+                          <a:ea typeface="Microsoft YaHei" pitchFamily="34" charset="-122"/>
+                          <a:cs typeface="Microsoft YaHei" pitchFamily="34" charset="-120"/>
+                        </a:rPr>
+                        <a:t>不成立：</a:t>
+                      </a:r>
+                      <a:pPr indent="0" marL="0">
+                        <a:buNone/>
+                      </a:pPr>
+                      <a:r>
+                        <a:rPr lang="en-US" sz="1400" dirty="0">
+                          <a:solidFill>
+                            <a:srgbClr val="1F2A37"/>
+                          </a:solidFill>
+                          <a:latin typeface="Microsoft YaHei" pitchFamily="34" charset="0"/>
+                          <a:ea typeface="Microsoft YaHei" pitchFamily="34" charset="-122"/>
+                          <a:cs typeface="Microsoft YaHei" pitchFamily="34" charset="-120"/>
+                        </a:rPr>
+                        <a:t>“1065915 行只有 1000000 个不同键（平均每键 1.07 行）”，用时 5.5 秒 → 停用 v1</a:t>
+                      </a:r>
+                      <a:endParaRPr lang="en-US" sz="1400" dirty="0">
+                        <a:latin typeface="Microsoft YaHei" charset="0"/>
+                        <a:ea typeface="Microsoft YaHei" charset="0"/>
+                        <a:cs typeface="Microsoft YaHei" charset="0"/>
+                      </a:endParaRPr>
+                    </a:p>
+                  </a:txBody>
+                  <a:tcPr marL="91440" marR="91440" marT="54864" marB="54864" anchor="ctr">
+                    <a:lnL w="12700" cap="flat" cmpd="sng" algn="ctr">
+                      <a:solidFill>
+                        <a:srgbClr val="D5DBE3"/>
+                      </a:solidFill>
+                      <a:prstDash val="solid"/>
+                      <a:round/>
+                      <a:headEnd type="none" w="med" len="med"/>
+                      <a:tailEnd type="none" w="med" len="med"/>
+                    </a:lnL>
+                    <a:lnR w="12700" cap="flat" cmpd="sng" algn="ctr">
+                      <a:solidFill>
+                        <a:srgbClr val="D5DBE3"/>
+                      </a:solidFill>
+                      <a:prstDash val="solid"/>
+                      <a:round/>
+                      <a:headEnd type="none" w="med" len="med"/>
+                      <a:tailEnd type="none" w="med" len="med"/>
+                    </a:lnR>
+                    <a:lnT w="12700" cap="flat" cmpd="sng" algn="ctr">
+                      <a:solidFill>
+                        <a:srgbClr val="D5DBE3"/>
+                      </a:solidFill>
+                      <a:prstDash val="solid"/>
+                      <a:round/>
+                      <a:headEnd type="none" w="med" len="med"/>
+                      <a:tailEnd type="none" w="med" len="med"/>
+                    </a:lnT>
+                    <a:lnB w="12700" cap="flat" cmpd="sng" algn="ctr">
+                      <a:solidFill>
+                        <a:srgbClr val="D5DBE3"/>
+                      </a:solidFill>
+                      <a:prstDash val="solid"/>
+                      <a:round/>
+                      <a:headEnd type="none" w="med" len="med"/>
+                      <a:tailEnd type="none" w="med" len="med"/>
+                    </a:lnB>
+                  </a:tcPr>
+                </a:tc>
+              </a:tr>
+              <a:tr h="0">
+                <a:tc>
+                  <a:txBody>
+                    <a:bodyPr/>
+                    <a:lstStyle/>
+                    <a:p>
+                      <a:pPr indent="0" marL="0">
+                        <a:buNone/>
+                      </a:pPr>
+                      <a:r>
+                        <a:rPr lang="en-US" sz="1400" dirty="0">
+                          <a:solidFill>
+                            <a:srgbClr val="1F2A37"/>
+                          </a:solidFill>
+                          <a:latin typeface="Microsoft YaHei" pitchFamily="34" charset="0"/>
+                          <a:ea typeface="Microsoft YaHei" pitchFamily="34" charset="-122"/>
+                          <a:cs typeface="Microsoft YaHei" pitchFamily="34" charset="-120"/>
+                        </a:rPr>
+                        <a:t>2</a:t>
+                      </a:r>
+                      <a:endParaRPr lang="en-US" sz="1400" dirty="0">
+                        <a:latin typeface="Microsoft YaHei" charset="0"/>
+                        <a:ea typeface="Microsoft YaHei" charset="0"/>
+                        <a:cs typeface="Microsoft YaHei" charset="0"/>
+                      </a:endParaRPr>
+                    </a:p>
+                  </a:txBody>
+                  <a:tcPr marL="91440" marR="91440" marT="54864" marB="54864" anchor="ctr">
+                    <a:lnL w="12700" cap="flat" cmpd="sng" algn="ctr">
+                      <a:solidFill>
+                        <a:srgbClr val="D5DBE3"/>
+                      </a:solidFill>
+                      <a:prstDash val="solid"/>
+                      <a:round/>
+                      <a:headEnd type="none" w="med" len="med"/>
+                      <a:tailEnd type="none" w="med" len="med"/>
+                    </a:lnL>
+                    <a:lnR w="12700" cap="flat" cmpd="sng" algn="ctr">
+                      <a:solidFill>
+                        <a:srgbClr val="D5DBE3"/>
+                      </a:solidFill>
+                      <a:prstDash val="solid"/>
+                      <a:round/>
+                      <a:headEnd type="none" w="med" len="med"/>
+                      <a:tailEnd type="none" w="med" len="med"/>
+                    </a:lnR>
+                    <a:lnT w="12700" cap="flat" cmpd="sng" algn="ctr">
+                      <a:solidFill>
+                        <a:srgbClr val="D5DBE3"/>
+                      </a:solidFill>
+                      <a:prstDash val="solid"/>
+                      <a:round/>
+                      <a:headEnd type="none" w="med" len="med"/>
+                      <a:tailEnd type="none" w="med" len="med"/>
+                    </a:lnT>
+                    <a:lnB w="12700" cap="flat" cmpd="sng" algn="ctr">
+                      <a:solidFill>
+                        <a:srgbClr val="D5DBE3"/>
+                      </a:solidFill>
+                      <a:prstDash val="solid"/>
+                      <a:round/>
+                      <a:headEnd type="none" w="med" len="med"/>
+                      <a:tailEnd type="none" w="med" len="med"/>
+                    </a:lnB>
+                  </a:tcPr>
+                </a:tc>
+                <a:tc>
+                  <a:txBody>
+                    <a:bodyPr/>
+                    <a:lstStyle/>
+                    <a:p>
+                      <a:pPr indent="0" marL="0">
+                        <a:buNone/>
+                      </a:pPr>
+                      <a:r>
+                        <a:rPr lang="en-US" sz="1400" dirty="0">
+                          <a:solidFill>
+                            <a:srgbClr val="1F2A37"/>
+                          </a:solidFill>
+                          <a:latin typeface="Microsoft YaHei" pitchFamily="34" charset="0"/>
+                          <a:ea typeface="Microsoft YaHei" pitchFamily="34" charset="-122"/>
+                          <a:cs typeface="Microsoft YaHei" pitchFamily="34" charset="-120"/>
+                        </a:rPr>
+                        <a:t>在取值少的列上逐个试过滤</a:t>
+                      </a:r>
+                      <a:endParaRPr lang="en-US" sz="1400" dirty="0">
+                        <a:latin typeface="Microsoft YaHei" charset="0"/>
+                        <a:ea typeface="Microsoft YaHei" charset="0"/>
+                        <a:cs typeface="Microsoft YaHei" charset="0"/>
+                      </a:endParaRPr>
+                    </a:p>
+                  </a:txBody>
+                  <a:tcPr marL="91440" marR="91440" marT="54864" marB="54864" anchor="ctr">
+                    <a:lnL w="12700" cap="flat" cmpd="sng" algn="ctr">
+                      <a:solidFill>
+                        <a:srgbClr val="D5DBE3"/>
+                      </a:solidFill>
+                      <a:prstDash val="solid"/>
+                      <a:round/>
+                      <a:headEnd type="none" w="med" len="med"/>
+                      <a:tailEnd type="none" w="med" len="med"/>
+                    </a:lnL>
+                    <a:lnR w="12700" cap="flat" cmpd="sng" algn="ctr">
+                      <a:solidFill>
+                        <a:srgbClr val="D5DBE3"/>
+                      </a:solidFill>
+                      <a:prstDash val="solid"/>
+                      <a:round/>
+                      <a:headEnd type="none" w="med" len="med"/>
+                      <a:tailEnd type="none" w="med" len="med"/>
+                    </a:lnR>
+                    <a:lnT w="12700" cap="flat" cmpd="sng" algn="ctr">
+                      <a:solidFill>
+                        <a:srgbClr val="D5DBE3"/>
+                      </a:solidFill>
+                      <a:prstDash val="solid"/>
+                      <a:round/>
+                      <a:headEnd type="none" w="med" len="med"/>
+                      <a:tailEnd type="none" w="med" len="med"/>
+                    </a:lnT>
+                    <a:lnB w="12700" cap="flat" cmpd="sng" algn="ctr">
+                      <a:solidFill>
+                        <a:srgbClr val="D5DBE3"/>
+                      </a:solidFill>
+                      <a:prstDash val="solid"/>
+                      <a:round/>
+                      <a:headEnd type="none" w="med" len="med"/>
+                      <a:tailEnd type="none" w="med" len="med"/>
+                    </a:lnB>
+                  </a:tcPr>
+                </a:tc>
+                <a:tc>
+                  <a:txBody>
+                    <a:bodyPr/>
+                    <a:lstStyle/>
+                    <a:p>
+                      <a:pPr indent="0" marL="0">
+                        <a:buNone/>
+                      </a:pPr>
+                      <a:r>
+                        <a:rPr lang="en-US" sz="1400" dirty="0">
+                          <a:solidFill>
+                            <a:srgbClr val="1F2A37"/>
+                          </a:solidFill>
+                          <a:latin typeface="Microsoft YaHei" pitchFamily="34" charset="0"/>
+                          <a:ea typeface="Microsoft YaHei" pitchFamily="34" charset="-122"/>
+                          <a:cs typeface="Microsoft YaHei" pitchFamily="34" charset="-120"/>
+                        </a:rPr>
+                        <a:t>只有 ss_is_current = '1' 能做到每笔一行、一笔不少</a:t>
+                      </a:r>
+                      <a:endParaRPr lang="en-US" sz="1400" dirty="0">
+                        <a:latin typeface="Microsoft YaHei" charset="0"/>
+                        <a:ea typeface="Microsoft YaHei" charset="0"/>
+                        <a:cs typeface="Microsoft YaHei" charset="0"/>
+                      </a:endParaRPr>
+                    </a:p>
+                  </a:txBody>
+                  <a:tcPr marL="91440" marR="91440" marT="54864" marB="54864" anchor="ctr">
+                    <a:lnL w="12700" cap="flat" cmpd="sng" algn="ctr">
+                      <a:solidFill>
+                        <a:srgbClr val="D5DBE3"/>
+                      </a:solidFill>
+                      <a:prstDash val="solid"/>
+                      <a:round/>
+                      <a:headEnd type="none" w="med" len="med"/>
+                      <a:tailEnd type="none" w="med" len="med"/>
+                    </a:lnL>
+                    <a:lnR w="12700" cap="flat" cmpd="sng" algn="ctr">
+                      <a:solidFill>
+                        <a:srgbClr val="D5DBE3"/>
+                      </a:solidFill>
+                      <a:prstDash val="solid"/>
+                      <a:round/>
+                      <a:headEnd type="none" w="med" len="med"/>
+                      <a:tailEnd type="none" w="med" len="med"/>
+                    </a:lnR>
+                    <a:lnT w="12700" cap="flat" cmpd="sng" algn="ctr">
+                      <a:solidFill>
+                        <a:srgbClr val="D5DBE3"/>
+                      </a:solidFill>
+                      <a:prstDash val="solid"/>
+                      <a:round/>
+                      <a:headEnd type="none" w="med" len="med"/>
+                      <a:tailEnd type="none" w="med" len="med"/>
+                    </a:lnT>
+                    <a:lnB w="12700" cap="flat" cmpd="sng" algn="ctr">
+                      <a:solidFill>
+                        <a:srgbClr val="D5DBE3"/>
+                      </a:solidFill>
+                      <a:prstDash val="solid"/>
+                      <a:round/>
+                      <a:headEnd type="none" w="med" len="med"/>
+                      <a:tailEnd type="none" w="med" len="med"/>
+                    </a:lnB>
+                  </a:tcPr>
+                </a:tc>
+              </a:tr>
+              <a:tr h="0">
+                <a:tc>
+                  <a:txBody>
+                    <a:bodyPr/>
+                    <a:lstStyle/>
+                    <a:p>
+                      <a:pPr indent="0" marL="0">
+                        <a:buNone/>
+                      </a:pPr>
+                      <a:r>
+                        <a:rPr lang="en-US" sz="1400" dirty="0">
+                          <a:solidFill>
+                            <a:srgbClr val="1F2A37"/>
+                          </a:solidFill>
+                          <a:latin typeface="Microsoft YaHei" pitchFamily="34" charset="0"/>
+                          <a:ea typeface="Microsoft YaHei" pitchFamily="34" charset="-122"/>
+                          <a:cs typeface="Microsoft YaHei" pitchFamily="34" charset="-120"/>
+                        </a:rPr>
+                        <a:t>3</a:t>
+                      </a:r>
+                      <a:endParaRPr lang="en-US" sz="1400" dirty="0">
+                        <a:latin typeface="Microsoft YaHei" charset="0"/>
+                        <a:ea typeface="Microsoft YaHei" charset="0"/>
+                        <a:cs typeface="Microsoft YaHei" charset="0"/>
+                      </a:endParaRPr>
+                    </a:p>
+                  </a:txBody>
+                  <a:tcPr marL="91440" marR="91440" marT="54864" marB="54864" anchor="ctr">
+                    <a:lnL w="12700" cap="flat" cmpd="sng" algn="ctr">
+                      <a:solidFill>
+                        <a:srgbClr val="D5DBE3"/>
+                      </a:solidFill>
+                      <a:prstDash val="solid"/>
+                      <a:round/>
+                      <a:headEnd type="none" w="med" len="med"/>
+                      <a:tailEnd type="none" w="med" len="med"/>
+                    </a:lnL>
+                    <a:lnR w="12700" cap="flat" cmpd="sng" algn="ctr">
+                      <a:solidFill>
+                        <a:srgbClr val="D5DBE3"/>
+                      </a:solidFill>
+                      <a:prstDash val="solid"/>
+                      <a:round/>
+                      <a:headEnd type="none" w="med" len="med"/>
+                      <a:tailEnd type="none" w="med" len="med"/>
+                    </a:lnR>
+                    <a:lnT w="12700" cap="flat" cmpd="sng" algn="ctr">
+                      <a:solidFill>
+                        <a:srgbClr val="D5DBE3"/>
+                      </a:solidFill>
+                      <a:prstDash val="solid"/>
+                      <a:round/>
+                      <a:headEnd type="none" w="med" len="med"/>
+                      <a:tailEnd type="none" w="med" len="med"/>
+                    </a:lnT>
+                    <a:lnB w="12700" cap="flat" cmpd="sng" algn="ctr">
+                      <a:solidFill>
+                        <a:srgbClr val="D5DBE3"/>
+                      </a:solidFill>
+                      <a:prstDash val="solid"/>
+                      <a:round/>
+                      <a:headEnd type="none" w="med" len="med"/>
+                      <a:tailEnd type="none" w="med" len="med"/>
+                    </a:lnB>
+                  </a:tcPr>
+                </a:tc>
+                <a:tc>
+                  <a:txBody>
+                    <a:bodyPr/>
+                    <a:lstStyle/>
+                    <a:p>
+                      <a:pPr indent="0" marL="0">
+                        <a:buNone/>
+                      </a:pPr>
+                      <a:r>
+                        <a:rPr lang="en-US" sz="1400" dirty="0">
+                          <a:solidFill>
+                            <a:srgbClr val="1F2A37"/>
+                          </a:solidFill>
+                          <a:latin typeface="Microsoft YaHei" pitchFamily="34" charset="0"/>
+                          <a:ea typeface="Microsoft YaHei" pitchFamily="34" charset="-122"/>
+                          <a:cs typeface="Microsoft YaHei" pitchFamily="34" charset="-120"/>
+                        </a:rPr>
+                        <a:t>对这个修复做 4 项检查：合法性、当前数据上的粒度、SQL 审查、回归测试</a:t>
+                      </a:r>
+                      <a:endParaRPr lang="en-US" sz="1400" dirty="0">
+                        <a:latin typeface="Microsoft YaHei" charset="0"/>
+                        <a:ea typeface="Microsoft YaHei" charset="0"/>
+                        <a:cs typeface="Microsoft YaHei" charset="0"/>
+                      </a:endParaRPr>
+                    </a:p>
+                  </a:txBody>
+                  <a:tcPr marL="91440" marR="91440" marT="54864" marB="54864" anchor="ctr">
+                    <a:lnL w="12700" cap="flat" cmpd="sng" algn="ctr">
+                      <a:solidFill>
+                        <a:srgbClr val="D5DBE3"/>
+                      </a:solidFill>
+                      <a:prstDash val="solid"/>
+                      <a:round/>
+                      <a:headEnd type="none" w="med" len="med"/>
+                      <a:tailEnd type="none" w="med" len="med"/>
+                    </a:lnL>
+                    <a:lnR w="12700" cap="flat" cmpd="sng" algn="ctr">
+                      <a:solidFill>
+                        <a:srgbClr val="D5DBE3"/>
+                      </a:solidFill>
+                      <a:prstDash val="solid"/>
+                      <a:round/>
+                      <a:headEnd type="none" w="med" len="med"/>
+                      <a:tailEnd type="none" w="med" len="med"/>
+                    </a:lnR>
+                    <a:lnT w="12700" cap="flat" cmpd="sng" algn="ctr">
+                      <a:solidFill>
+                        <a:srgbClr val="D5DBE3"/>
+                      </a:solidFill>
+                      <a:prstDash val="solid"/>
+                      <a:round/>
+                      <a:headEnd type="none" w="med" len="med"/>
+                      <a:tailEnd type="none" w="med" len="med"/>
+                    </a:lnT>
+                    <a:lnB w="12700" cap="flat" cmpd="sng" algn="ctr">
+                      <a:solidFill>
+                        <a:srgbClr val="D5DBE3"/>
+                      </a:solidFill>
+                      <a:prstDash val="solid"/>
+                      <a:round/>
+                      <a:headEnd type="none" w="med" len="med"/>
+                      <a:tailEnd type="none" w="med" len="med"/>
+                    </a:lnB>
+                  </a:tcPr>
+                </a:tc>
+                <a:tc>
+                  <a:txBody>
+                    <a:bodyPr/>
+                    <a:lstStyle/>
+                    <a:p>
+                      <a:pPr indent="0" marL="0">
+                        <a:buNone/>
+                      </a:pPr>
+                      <a:r>
+                        <a:rPr lang="en-US" sz="1400" b="1" dirty="0">
+                          <a:solidFill>
+                            <a:srgbClr val="2E7D4F"/>
+                          </a:solidFill>
+                          <a:latin typeface="Microsoft YaHei" pitchFamily="34" charset="0"/>
+                          <a:ea typeface="Microsoft YaHei" pitchFamily="34" charset="-122"/>
+                          <a:cs typeface="Microsoft YaHei" pitchFamily="34" charset="-120"/>
+                        </a:rPr>
+                        <a:t>全部通过 → 发布 v2</a:t>
+                      </a:r>
+                      <a:pPr indent="0" marL="0">
+                        <a:buNone/>
+                      </a:pPr>
+                      <a:r>
+                        <a:rPr lang="en-US" sz="1400" dirty="0">
+                          <a:solidFill>
+                            <a:srgbClr val="1F2A37"/>
+                          </a:solidFill>
+                          <a:latin typeface="Microsoft YaHei" pitchFamily="34" charset="0"/>
+                          <a:ea typeface="Microsoft YaHei" pitchFamily="34" charset="-122"/>
+                          <a:cs typeface="Microsoft YaHei" pitchFamily="34" charset="-120"/>
+                        </a:rPr>
+                        <a:t>（1–3 步共 28.7 秒）</a:t>
+                      </a:r>
+                      <a:endParaRPr lang="en-US" sz="1400" dirty="0">
+                        <a:latin typeface="Microsoft YaHei" charset="0"/>
+                        <a:ea typeface="Microsoft YaHei" charset="0"/>
+                        <a:cs typeface="Microsoft YaHei" charset="0"/>
+                      </a:endParaRPr>
+                    </a:p>
+                  </a:txBody>
+                  <a:tcPr marL="91440" marR="91440" marT="54864" marB="54864" anchor="ctr">
+                    <a:lnL w="12700" cap="flat" cmpd="sng" algn="ctr">
+                      <a:solidFill>
+                        <a:srgbClr val="D5DBE3"/>
+                      </a:solidFill>
+                      <a:prstDash val="solid"/>
+                      <a:round/>
+                      <a:headEnd type="none" w="med" len="med"/>
+                      <a:tailEnd type="none" w="med" len="med"/>
+                    </a:lnL>
+                    <a:lnR w="12700" cap="flat" cmpd="sng" algn="ctr">
+                      <a:solidFill>
+                        <a:srgbClr val="D5DBE3"/>
+                      </a:solidFill>
+                      <a:prstDash val="solid"/>
+                      <a:round/>
+                      <a:headEnd type="none" w="med" len="med"/>
+                      <a:tailEnd type="none" w="med" len="med"/>
+                    </a:lnR>
+                    <a:lnT w="12700" cap="flat" cmpd="sng" algn="ctr">
+                      <a:solidFill>
+                        <a:srgbClr val="D5DBE3"/>
+                      </a:solidFill>
+                      <a:prstDash val="solid"/>
+                      <a:round/>
+                      <a:headEnd type="none" w="med" len="med"/>
+                      <a:tailEnd type="none" w="med" len="med"/>
+                    </a:lnT>
+                    <a:lnB w="12700" cap="flat" cmpd="sng" algn="ctr">
+                      <a:solidFill>
+                        <a:srgbClr val="D5DBE3"/>
+                      </a:solidFill>
+                      <a:prstDash val="solid"/>
+                      <a:round/>
+                      <a:headEnd type="none" w="med" len="med"/>
+                      <a:tailEnd type="none" w="med" len="med"/>
+                    </a:lnB>
+                  </a:tcPr>
+                </a:tc>
+              </a:tr>
+              <a:tr h="0">
+                <a:tc>
+                  <a:txBody>
+                    <a:bodyPr/>
+                    <a:lstStyle/>
+                    <a:p>
+                      <a:pPr indent="0" marL="0">
+                        <a:buNone/>
+                      </a:pPr>
+                      <a:r>
+                        <a:rPr lang="en-US" sz="1400" dirty="0">
+                          <a:solidFill>
+                            <a:srgbClr val="1F2A37"/>
+                          </a:solidFill>
+                          <a:latin typeface="Microsoft YaHei" pitchFamily="34" charset="0"/>
+                          <a:ea typeface="Microsoft YaHei" pitchFamily="34" charset="-122"/>
+                          <a:cs typeface="Microsoft YaHei" pitchFamily="34" charset="-120"/>
+                        </a:rPr>
+                        <a:t>4</a:t>
+                      </a:r>
+                      <a:endParaRPr lang="en-US" sz="1400" dirty="0">
+                        <a:latin typeface="Microsoft YaHei" charset="0"/>
+                        <a:ea typeface="Microsoft YaHei" charset="0"/>
+                        <a:cs typeface="Microsoft YaHei" charset="0"/>
+                      </a:endParaRPr>
+                    </a:p>
+                  </a:txBody>
+                  <a:tcPr marL="91440" marR="91440" marT="54864" marB="54864" anchor="ctr">
+                    <a:lnL w="12700" cap="flat" cmpd="sng" algn="ctr">
+                      <a:solidFill>
+                        <a:srgbClr val="D5DBE3"/>
+                      </a:solidFill>
+                      <a:prstDash val="solid"/>
+                      <a:round/>
+                      <a:headEnd type="none" w="med" len="med"/>
+                      <a:tailEnd type="none" w="med" len="med"/>
+                    </a:lnL>
+                    <a:lnR w="12700" cap="flat" cmpd="sng" algn="ctr">
+                      <a:solidFill>
+                        <a:srgbClr val="D5DBE3"/>
+                      </a:solidFill>
+                      <a:prstDash val="solid"/>
+                      <a:round/>
+                      <a:headEnd type="none" w="med" len="med"/>
+                      <a:tailEnd type="none" w="med" len="med"/>
+                    </a:lnR>
+                    <a:lnT w="12700" cap="flat" cmpd="sng" algn="ctr">
+                      <a:solidFill>
+                        <a:srgbClr val="D5DBE3"/>
+                      </a:solidFill>
+                      <a:prstDash val="solid"/>
+                      <a:round/>
+                      <a:headEnd type="none" w="med" len="med"/>
+                      <a:tailEnd type="none" w="med" len="med"/>
+                    </a:lnT>
+                    <a:lnB w="12700" cap="flat" cmpd="sng" algn="ctr">
+                      <a:solidFill>
+                        <a:srgbClr val="D5DBE3"/>
+                      </a:solidFill>
+                      <a:prstDash val="solid"/>
+                      <a:round/>
+                      <a:headEnd type="none" w="med" len="med"/>
+                      <a:tailEnd type="none" w="med" len="med"/>
+                    </a:lnB>
+                  </a:tcPr>
+                </a:tc>
+                <a:tc>
+                  <a:txBody>
+                    <a:bodyPr/>
+                    <a:lstStyle/>
+                    <a:p>
+                      <a:pPr indent="0" marL="0">
+                        <a:buNone/>
+                      </a:pPr>
+                      <a:r>
+                        <a:rPr lang="en-US" sz="1400" dirty="0">
+                          <a:solidFill>
+                            <a:srgbClr val="1F2A37"/>
+                          </a:solidFill>
+                          <a:latin typeface="Microsoft YaHei" pitchFamily="34" charset="0"/>
+                          <a:ea typeface="Microsoft YaHei" pitchFamily="34" charset="-122"/>
+                          <a:cs typeface="Microsoft YaHei" pitchFamily="34" charset="-120"/>
+                        </a:rPr>
+                        <a:t>接着检查“门店营业额”：同一条规则、同一个数据版本已经有结果</a:t>
+                      </a:r>
+                      <a:endParaRPr lang="en-US" sz="1400" dirty="0">
+                        <a:latin typeface="Microsoft YaHei" charset="0"/>
+                        <a:ea typeface="Microsoft YaHei" charset="0"/>
+                        <a:cs typeface="Microsoft YaHei" charset="0"/>
+                      </a:endParaRPr>
+                    </a:p>
+                  </a:txBody>
+                  <a:tcPr marL="91440" marR="91440" marT="54864" marB="54864" anchor="ctr">
+                    <a:lnL w="12700" cap="flat" cmpd="sng" algn="ctr">
+                      <a:solidFill>
+                        <a:srgbClr val="D5DBE3"/>
+                      </a:solidFill>
+                      <a:prstDash val="solid"/>
+                      <a:round/>
+                      <a:headEnd type="none" w="med" len="med"/>
+                      <a:tailEnd type="none" w="med" len="med"/>
+                    </a:lnL>
+                    <a:lnR w="12700" cap="flat" cmpd="sng" algn="ctr">
+                      <a:solidFill>
+                        <a:srgbClr val="D5DBE3"/>
+                      </a:solidFill>
+                      <a:prstDash val="solid"/>
+                      <a:round/>
+                      <a:headEnd type="none" w="med" len="med"/>
+                      <a:tailEnd type="none" w="med" len="med"/>
+                    </a:lnR>
+                    <a:lnT w="12700" cap="flat" cmpd="sng" algn="ctr">
+                      <a:solidFill>
+                        <a:srgbClr val="D5DBE3"/>
+                      </a:solidFill>
+                      <a:prstDash val="solid"/>
+                      <a:round/>
+                      <a:headEnd type="none" w="med" len="med"/>
+                      <a:tailEnd type="none" w="med" len="med"/>
+                    </a:lnT>
+                    <a:lnB w="12700" cap="flat" cmpd="sng" algn="ctr">
+                      <a:solidFill>
+                        <a:srgbClr val="D5DBE3"/>
+                      </a:solidFill>
+                      <a:prstDash val="solid"/>
+                      <a:round/>
+                      <a:headEnd type="none" w="med" len="med"/>
+                      <a:tailEnd type="none" w="med" len="med"/>
+                    </a:lnB>
+                  </a:tcPr>
+                </a:tc>
+                <a:tc>
+                  <a:txBody>
+                    <a:bodyPr/>
+                    <a:lstStyle/>
+                    <a:p>
+                      <a:pPr indent="0" marL="0">
+                        <a:buNone/>
+                      </a:pPr>
+                      <a:r>
+                        <a:rPr lang="en-US" sz="1400" dirty="0">
+                          <a:solidFill>
+                            <a:srgbClr val="1F2A37"/>
+                          </a:solidFill>
+                          <a:latin typeface="Microsoft YaHei" pitchFamily="34" charset="0"/>
+                          <a:ea typeface="Microsoft YaHei" pitchFamily="34" charset="-122"/>
+                          <a:cs typeface="Microsoft YaHei" pitchFamily="34" charset="-120"/>
+                        </a:rPr>
+                        <a:t>复用校验结果和修复，</a:t>
+                      </a:r>
+                      <a:pPr indent="0" marL="0">
+                        <a:buNone/>
+                      </a:pPr>
+                      <a:r>
+                        <a:rPr lang="en-US" sz="1400" b="1" dirty="0">
+                          <a:solidFill>
+                            <a:srgbClr val="1D5BA6"/>
+                          </a:solidFill>
+                          <a:latin typeface="Microsoft YaHei" pitchFamily="34" charset="0"/>
+                          <a:ea typeface="Microsoft YaHei" pitchFamily="34" charset="-122"/>
+                          <a:cs typeface="Microsoft YaHei" pitchFamily="34" charset="-120"/>
+                        </a:rPr>
+                        <a:t>45.8 毫秒</a:t>
+                      </a:r>
+                      <a:pPr indent="0" marL="0">
+                        <a:buNone/>
+                      </a:pPr>
+                      <a:r>
+                        <a:rPr lang="en-US" sz="1400" dirty="0">
+                          <a:solidFill>
+                            <a:srgbClr val="1F2A37"/>
+                          </a:solidFill>
+                          <a:latin typeface="Microsoft YaHei" pitchFamily="34" charset="0"/>
+                          <a:ea typeface="Microsoft YaHei" pitchFamily="34" charset="-122"/>
+                          <a:cs typeface="Microsoft YaHei" pitchFamily="34" charset="-120"/>
+                        </a:rPr>
+                        <a:t>就发布了 v2</a:t>
+                      </a:r>
+                      <a:endParaRPr lang="en-US" sz="1400" dirty="0">
+                        <a:latin typeface="Microsoft YaHei" charset="0"/>
+                        <a:ea typeface="Microsoft YaHei" charset="0"/>
+                        <a:cs typeface="Microsoft YaHei" charset="0"/>
+                      </a:endParaRPr>
+                    </a:p>
+                  </a:txBody>
+                  <a:tcPr marL="91440" marR="91440" marT="54864" marB="54864" anchor="ctr">
+                    <a:lnL w="12700" cap="flat" cmpd="sng" algn="ctr">
+                      <a:solidFill>
+                        <a:srgbClr val="D5DBE3"/>
+                      </a:solidFill>
+                      <a:prstDash val="solid"/>
+                      <a:round/>
+                      <a:headEnd type="none" w="med" len="med"/>
+                      <a:tailEnd type="none" w="med" len="med"/>
+                    </a:lnL>
+                    <a:lnR w="12700" cap="flat" cmpd="sng" algn="ctr">
+                      <a:solidFill>
+                        <a:srgbClr val="D5DBE3"/>
+                      </a:solidFill>
+                      <a:prstDash val="solid"/>
+                      <a:round/>
+                      <a:headEnd type="none" w="med" len="med"/>
+                      <a:tailEnd type="none" w="med" len="med"/>
+                    </a:lnR>
+                    <a:lnT w="12700" cap="flat" cmpd="sng" algn="ctr">
+                      <a:solidFill>
+                        <a:srgbClr val="D5DBE3"/>
+                      </a:solidFill>
+                      <a:prstDash val="solid"/>
+                      <a:round/>
+                      <a:headEnd type="none" w="med" len="med"/>
+                      <a:tailEnd type="none" w="med" len="med"/>
+                    </a:lnT>
+                    <a:lnB w="12700" cap="flat" cmpd="sng" algn="ctr">
+                      <a:solidFill>
+                        <a:srgbClr val="D5DBE3"/>
+                      </a:solidFill>
+                      <a:prstDash val="solid"/>
+                      <a:round/>
+                      <a:headEnd type="none" w="med" len="med"/>
+                      <a:tailEnd type="none" w="med" len="med"/>
+                    </a:lnB>
+                  </a:tcPr>
+                </a:tc>
+              </a:tr>
+              <a:tr h="0">
+                <a:tc>
+                  <a:txBody>
+                    <a:bodyPr/>
+                    <a:lstStyle/>
+                    <a:p>
+                      <a:pPr indent="0" marL="0">
+                        <a:buNone/>
+                      </a:pPr>
+                      <a:r>
+                        <a:rPr lang="en-US" sz="1400" dirty="0">
+                          <a:solidFill>
+                            <a:srgbClr val="1F2A37"/>
+                          </a:solidFill>
+                          <a:latin typeface="Microsoft YaHei" pitchFamily="34" charset="0"/>
+                          <a:ea typeface="Microsoft YaHei" pitchFamily="34" charset="-122"/>
+                          <a:cs typeface="Microsoft YaHei" pitchFamily="34" charset="-120"/>
+                        </a:rPr>
+                        <a:t>5</a:t>
+                      </a:r>
+                      <a:endParaRPr lang="en-US" sz="1400" dirty="0">
+                        <a:latin typeface="Microsoft YaHei" charset="0"/>
+                        <a:ea typeface="Microsoft YaHei" charset="0"/>
+                        <a:cs typeface="Microsoft YaHei" charset="0"/>
+                      </a:endParaRPr>
+                    </a:p>
+                  </a:txBody>
+                  <a:tcPr marL="91440" marR="91440" marT="54864" marB="54864" anchor="ctr">
+                    <a:lnL w="12700" cap="flat" cmpd="sng" algn="ctr">
+                      <a:solidFill>
+                        <a:srgbClr val="D5DBE3"/>
+                      </a:solidFill>
+                      <a:prstDash val="solid"/>
+                      <a:round/>
+                      <a:headEnd type="none" w="med" len="med"/>
+                      <a:tailEnd type="none" w="med" len="med"/>
+                    </a:lnL>
+                    <a:lnR w="12700" cap="flat" cmpd="sng" algn="ctr">
+                      <a:solidFill>
+                        <a:srgbClr val="D5DBE3"/>
+                      </a:solidFill>
+                      <a:prstDash val="solid"/>
+                      <a:round/>
+                      <a:headEnd type="none" w="med" len="med"/>
+                      <a:tailEnd type="none" w="med" len="med"/>
+                    </a:lnR>
+                    <a:lnT w="12700" cap="flat" cmpd="sng" algn="ctr">
+                      <a:solidFill>
+                        <a:srgbClr val="D5DBE3"/>
+                      </a:solidFill>
+                      <a:prstDash val="solid"/>
+                      <a:round/>
+                      <a:headEnd type="none" w="med" len="med"/>
+                      <a:tailEnd type="none" w="med" len="med"/>
+                    </a:lnT>
+                    <a:lnB w="12700" cap="flat" cmpd="sng" algn="ctr">
+                      <a:solidFill>
+                        <a:srgbClr val="D5DBE3"/>
+                      </a:solidFill>
+                      <a:prstDash val="solid"/>
+                      <a:round/>
+                      <a:headEnd type="none" w="med" len="med"/>
+                      <a:tailEnd type="none" w="med" len="med"/>
+                    </a:lnB>
+                  </a:tcPr>
+                </a:tc>
+                <a:tc>
+                  <a:txBody>
+                    <a:bodyPr/>
+                    <a:lstStyle/>
+                    <a:p>
+                      <a:pPr indent="0" marL="0">
+                        <a:buNone/>
+                      </a:pPr>
+                      <a:r>
+                        <a:rPr lang="en-US" sz="1400" dirty="0">
+                          <a:solidFill>
+                            <a:srgbClr val="1F2A37"/>
+                          </a:solidFill>
+                          <a:latin typeface="Microsoft YaHei" pitchFamily="34" charset="0"/>
+                          <a:ea typeface="Microsoft YaHei" pitchFamily="34" charset="-122"/>
+                          <a:cs typeface="Microsoft YaHei" pitchFamily="34" charset="-120"/>
+                        </a:rPr>
+                        <a:t>“门店退货率”要把销售和退货关联起来</a:t>
+                      </a:r>
+                      <a:endParaRPr lang="en-US" sz="1400" dirty="0">
+                        <a:latin typeface="Microsoft YaHei" charset="0"/>
+                        <a:ea typeface="Microsoft YaHei" charset="0"/>
+                        <a:cs typeface="Microsoft YaHei" charset="0"/>
+                      </a:endParaRPr>
+                    </a:p>
+                  </a:txBody>
+                  <a:tcPr marL="91440" marR="91440" marT="54864" marB="54864" anchor="ctr">
+                    <a:lnL w="12700" cap="flat" cmpd="sng" algn="ctr">
+                      <a:solidFill>
+                        <a:srgbClr val="D5DBE3"/>
+                      </a:solidFill>
+                      <a:prstDash val="solid"/>
+                      <a:round/>
+                      <a:headEnd type="none" w="med" len="med"/>
+                      <a:tailEnd type="none" w="med" len="med"/>
+                    </a:lnL>
+                    <a:lnR w="12700" cap="flat" cmpd="sng" algn="ctr">
+                      <a:solidFill>
+                        <a:srgbClr val="D5DBE3"/>
+                      </a:solidFill>
+                      <a:prstDash val="solid"/>
+                      <a:round/>
+                      <a:headEnd type="none" w="med" len="med"/>
+                      <a:tailEnd type="none" w="med" len="med"/>
+                    </a:lnR>
+                    <a:lnT w="12700" cap="flat" cmpd="sng" algn="ctr">
+                      <a:solidFill>
+                        <a:srgbClr val="D5DBE3"/>
+                      </a:solidFill>
+                      <a:prstDash val="solid"/>
+                      <a:round/>
+                      <a:headEnd type="none" w="med" len="med"/>
+                      <a:tailEnd type="none" w="med" len="med"/>
+                    </a:lnT>
+                    <a:lnB w="12700" cap="flat" cmpd="sng" algn="ctr">
+                      <a:solidFill>
+                        <a:srgbClr val="D5DBE3"/>
+                      </a:solidFill>
+                      <a:prstDash val="solid"/>
+                      <a:round/>
+                      <a:headEnd type="none" w="med" len="med"/>
+                      <a:tailEnd type="none" w="med" len="med"/>
+                    </a:lnB>
+                  </a:tcPr>
+                </a:tc>
+                <a:tc>
+                  <a:txBody>
+                    <a:bodyPr/>
+                    <a:lstStyle/>
+                    <a:p>
+                      <a:pPr indent="0" marL="0">
+                        <a:buNone/>
+                      </a:pPr>
+                      <a:r>
+                        <a:rPr lang="en-US" sz="1400" dirty="0">
+                          <a:solidFill>
+                            <a:srgbClr val="1F2A37"/>
+                          </a:solidFill>
+                          <a:latin typeface="Microsoft YaHei" pitchFamily="34" charset="0"/>
+                          <a:ea typeface="Microsoft YaHei" pitchFamily="34" charset="-122"/>
+                          <a:cs typeface="Microsoft YaHei" pitchFamily="34" charset="-120"/>
+                        </a:rPr>
+                        <a:t>关联路径现在要求只用当前行 → 也修复为 v2</a:t>
+                      </a:r>
+                      <a:endParaRPr lang="en-US" sz="1400" dirty="0">
+                        <a:latin typeface="Microsoft YaHei" charset="0"/>
+                        <a:ea typeface="Microsoft YaHei" charset="0"/>
+                        <a:cs typeface="Microsoft YaHei" charset="0"/>
+                      </a:endParaRPr>
+                    </a:p>
+                  </a:txBody>
+                  <a:tcPr marL="91440" marR="91440" marT="54864" marB="54864" anchor="ctr">
+                    <a:lnL w="12700" cap="flat" cmpd="sng" algn="ctr">
+                      <a:solidFill>
+                        <a:srgbClr val="D5DBE3"/>
+                      </a:solidFill>
+                      <a:prstDash val="solid"/>
+                      <a:round/>
+                      <a:headEnd type="none" w="med" len="med"/>
+                      <a:tailEnd type="none" w="med" len="med"/>
+                    </a:lnL>
+                    <a:lnR w="12700" cap="flat" cmpd="sng" algn="ctr">
+                      <a:solidFill>
+                        <a:srgbClr val="D5DBE3"/>
+                      </a:solidFill>
+                      <a:prstDash val="solid"/>
+                      <a:round/>
+                      <a:headEnd type="none" w="med" len="med"/>
+                      <a:tailEnd type="none" w="med" len="med"/>
+                    </a:lnR>
+                    <a:lnT w="12700" cap="flat" cmpd="sng" algn="ctr">
+                      <a:solidFill>
+                        <a:srgbClr val="D5DBE3"/>
+                      </a:solidFill>
+                      <a:prstDash val="solid"/>
+                      <a:round/>
+                      <a:headEnd type="none" w="med" len="med"/>
+                      <a:tailEnd type="none" w="med" len="med"/>
+                    </a:lnT>
+                    <a:lnB w="12700" cap="flat" cmpd="sng" algn="ctr">
+                      <a:solidFill>
+                        <a:srgbClr val="D5DBE3"/>
+                      </a:solidFill>
+                      <a:prstDash val="solid"/>
+                      <a:round/>
+                      <a:headEnd type="none" w="med" len="med"/>
+                      <a:tailEnd type="none" w="med" len="med"/>
+                    </a:lnB>
+                  </a:tcPr>
+                </a:tc>
+              </a:tr>
+              <a:tr h="0">
+                <a:tc>
+                  <a:txBody>
+                    <a:bodyPr/>
+                    <a:lstStyle/>
+                    <a:p>
+                      <a:pPr indent="0" marL="0">
+                        <a:buNone/>
+                      </a:pPr>
+                      <a:r>
+                        <a:rPr lang="en-US" sz="1400" dirty="0">
+                          <a:solidFill>
+                            <a:srgbClr val="1F2A37"/>
+                          </a:solidFill>
+                          <a:latin typeface="Microsoft YaHei" pitchFamily="34" charset="0"/>
+                          <a:ea typeface="Microsoft YaHei" pitchFamily="34" charset="-122"/>
+                          <a:cs typeface="Microsoft YaHei" pitchFamily="34" charset="-120"/>
+                        </a:rPr>
+                        <a:t>6</a:t>
+                      </a:r>
+                      <a:endParaRPr lang="en-US" sz="1400" dirty="0">
+                        <a:latin typeface="Microsoft YaHei" charset="0"/>
+                        <a:ea typeface="Microsoft YaHei" charset="0"/>
+                        <a:cs typeface="Microsoft YaHei" charset="0"/>
+                      </a:endParaRPr>
+                    </a:p>
+                  </a:txBody>
+                  <a:tcPr marL="91440" marR="91440" marT="54864" marB="54864" anchor="ctr">
+                    <a:lnL w="12700" cap="flat" cmpd="sng" algn="ctr">
+                      <a:solidFill>
+                        <a:srgbClr val="D5DBE3"/>
+                      </a:solidFill>
+                      <a:prstDash val="solid"/>
+                      <a:round/>
+                      <a:headEnd type="none" w="med" len="med"/>
+                      <a:tailEnd type="none" w="med" len="med"/>
+                    </a:lnL>
+                    <a:lnR w="12700" cap="flat" cmpd="sng" algn="ctr">
+                      <a:solidFill>
+                        <a:srgbClr val="D5DBE3"/>
+                      </a:solidFill>
+                      <a:prstDash val="solid"/>
+                      <a:round/>
+                      <a:headEnd type="none" w="med" len="med"/>
+                      <a:tailEnd type="none" w="med" len="med"/>
+                    </a:lnR>
+                    <a:lnT w="12700" cap="flat" cmpd="sng" algn="ctr">
+                      <a:solidFill>
+                        <a:srgbClr val="D5DBE3"/>
+                      </a:solidFill>
+                      <a:prstDash val="solid"/>
+                      <a:round/>
+                      <a:headEnd type="none" w="med" len="med"/>
+                      <a:tailEnd type="none" w="med" len="med"/>
+                    </a:lnT>
+                    <a:lnB w="12700" cap="flat" cmpd="sng" algn="ctr">
+                      <a:solidFill>
+                        <a:srgbClr val="D5DBE3"/>
+                      </a:solidFill>
+                      <a:prstDash val="solid"/>
+                      <a:round/>
+                      <a:headEnd type="none" w="med" len="med"/>
+                      <a:tailEnd type="none" w="med" len="med"/>
+                    </a:lnB>
+                  </a:tcPr>
+                </a:tc>
+                <a:tc>
+                  <a:txBody>
+                    <a:bodyPr/>
+                    <a:lstStyle/>
+                    <a:p>
+                      <a:pPr indent="0" marL="0">
+                        <a:buNone/>
+                      </a:pPr>
+                      <a:r>
+                        <a:rPr lang="en-US" sz="1400" dirty="0">
+                          <a:solidFill>
+                            <a:srgbClr val="1F2A37"/>
+                          </a:solidFill>
+                          <a:latin typeface="Microsoft YaHei" pitchFamily="34" charset="0"/>
+                          <a:ea typeface="Microsoft YaHei" pitchFamily="34" charset="-122"/>
+                          <a:cs typeface="Microsoft YaHei" pitchFamily="34" charset="-120"/>
+                        </a:rPr>
+                        <a:t>用户智能体 B 问“9 月门店营业额”</a:t>
+                      </a:r>
+                      <a:endParaRPr lang="en-US" sz="1400" dirty="0">
+                        <a:latin typeface="Microsoft YaHei" charset="0"/>
+                        <a:ea typeface="Microsoft YaHei" charset="0"/>
+                        <a:cs typeface="Microsoft YaHei" charset="0"/>
+                      </a:endParaRPr>
+                    </a:p>
+                  </a:txBody>
+                  <a:tcPr marL="91440" marR="91440" marT="54864" marB="54864" anchor="ctr">
+                    <a:lnL w="12700" cap="flat" cmpd="sng" algn="ctr">
+                      <a:solidFill>
+                        <a:srgbClr val="D5DBE3"/>
+                      </a:solidFill>
+                      <a:prstDash val="solid"/>
+                      <a:round/>
+                      <a:headEnd type="none" w="med" len="med"/>
+                      <a:tailEnd type="none" w="med" len="med"/>
+                    </a:lnL>
+                    <a:lnR w="12700" cap="flat" cmpd="sng" algn="ctr">
+                      <a:solidFill>
+                        <a:srgbClr val="D5DBE3"/>
+                      </a:solidFill>
+                      <a:prstDash val="solid"/>
+                      <a:round/>
+                      <a:headEnd type="none" w="med" len="med"/>
+                      <a:tailEnd type="none" w="med" len="med"/>
+                    </a:lnR>
+                    <a:lnT w="12700" cap="flat" cmpd="sng" algn="ctr">
+                      <a:solidFill>
+                        <a:srgbClr val="D5DBE3"/>
+                      </a:solidFill>
+                      <a:prstDash val="solid"/>
+                      <a:round/>
+                      <a:headEnd type="none" w="med" len="med"/>
+                      <a:tailEnd type="none" w="med" len="med"/>
+                    </a:lnT>
+                    <a:lnB w="12700" cap="flat" cmpd="sng" algn="ctr">
+                      <a:solidFill>
+                        <a:srgbClr val="D5DBE3"/>
+                      </a:solidFill>
+                      <a:prstDash val="solid"/>
+                      <a:round/>
+                      <a:headEnd type="none" w="med" len="med"/>
+                      <a:tailEnd type="none" w="med" len="med"/>
+                    </a:lnB>
+                  </a:tcPr>
+                </a:tc>
+                <a:tc>
+                  <a:txBody>
+                    <a:bodyPr/>
+                    <a:lstStyle/>
+                    <a:p>
+                      <a:pPr indent="0" marL="0">
+                        <a:buNone/>
+                      </a:pPr>
+                      <a:r>
+                        <a:rPr lang="en-US" sz="1400" dirty="0">
+                          <a:solidFill>
+                            <a:srgbClr val="1F2A37"/>
+                          </a:solidFill>
+                          <a:latin typeface="Microsoft YaHei" pitchFamily="34" charset="0"/>
+                          <a:ea typeface="Microsoft YaHei" pitchFamily="34" charset="-122"/>
+                          <a:cs typeface="Microsoft YaHei" pitchFamily="34" charset="-120"/>
+                        </a:rPr>
+                        <a:t>收到 3 条提醒；SQL 带上 ss_is_current = '1'；答 </a:t>
+                      </a:r>
+                      <a:pPr indent="0" marL="0">
+                        <a:buNone/>
+                      </a:pPr>
+                      <a:r>
+                        <a:rPr lang="en-US" sz="1400" b="1" dirty="0">
+                          <a:solidFill>
+                            <a:srgbClr val="2E7D4F"/>
+                          </a:solidFill>
+                          <a:latin typeface="Microsoft YaHei" pitchFamily="34" charset="0"/>
+                          <a:ea typeface="Microsoft YaHei" pitchFamily="34" charset="-122"/>
+                          <a:cs typeface="Microsoft YaHei" pitchFamily="34" charset="-120"/>
+                        </a:rPr>
+                        <a:t>1293.3 万 ✓</a:t>
+                      </a:r>
+                      <a:pPr indent="0" marL="0">
+                        <a:buNone/>
+                      </a:pPr>
+                      <a:r>
+                        <a:rPr lang="en-US" sz="1400" dirty="0">
+                          <a:solidFill>
+                            <a:srgbClr val="1F2A37"/>
+                          </a:solidFill>
+                          <a:latin typeface="Microsoft YaHei" pitchFamily="34" charset="0"/>
+                          <a:ea typeface="Microsoft YaHei" pitchFamily="34" charset="-122"/>
+                          <a:cs typeface="Microsoft YaHei" pitchFamily="34" charset="-120"/>
+                        </a:rPr>
+                        <a:t>（4 轮，61.7 秒）</a:t>
+                      </a:r>
+                      <a:endParaRPr lang="en-US" sz="1400" dirty="0">
+                        <a:latin typeface="Microsoft YaHei" charset="0"/>
+                        <a:ea typeface="Microsoft YaHei" charset="0"/>
+                        <a:cs typeface="Microsoft YaHei" charset="0"/>
+                      </a:endParaRPr>
+                    </a:p>
+                  </a:txBody>
+                  <a:tcPr marL="91440" marR="91440" marT="54864" marB="54864" anchor="ctr">
+                    <a:lnL w="12700" cap="flat" cmpd="sng" algn="ctr">
+                      <a:solidFill>
+                        <a:srgbClr val="D5DBE3"/>
+                      </a:solidFill>
+                      <a:prstDash val="solid"/>
+                      <a:round/>
+                      <a:headEnd type="none" w="med" len="med"/>
+                      <a:tailEnd type="none" w="med" len="med"/>
+                    </a:lnL>
+                    <a:lnR w="12700" cap="flat" cmpd="sng" algn="ctr">
+                      <a:solidFill>
+                        <a:srgbClr val="D5DBE3"/>
+                      </a:solidFill>
+                      <a:prstDash val="solid"/>
+                      <a:round/>
+                      <a:headEnd type="none" w="med" len="med"/>
+                      <a:tailEnd type="none" w="med" len="med"/>
+                    </a:lnR>
+                    <a:lnT w="12700" cap="flat" cmpd="sng" algn="ctr">
+                      <a:solidFill>
+                        <a:srgbClr val="D5DBE3"/>
+                      </a:solidFill>
+                      <a:prstDash val="solid"/>
+                      <a:round/>
+                      <a:headEnd type="none" w="med" len="med"/>
+                      <a:tailEnd type="none" w="med" len="med"/>
+                    </a:lnT>
+                    <a:lnB w="12700" cap="flat" cmpd="sng" algn="ctr">
+                      <a:solidFill>
+                        <a:srgbClr val="D5DBE3"/>
+                      </a:solidFill>
+                      <a:prstDash val="solid"/>
+                      <a:round/>
+                      <a:headEnd type="none" w="med" len="med"/>
+                      <a:tailEnd type="none" w="med" len="med"/>
+                    </a:lnB>
+                  </a:tcPr>
+                </a:tc>
+              </a:tr>
+            </a:tbl>
+          </a:graphicData>
+        </a:graphic>
+      </p:graphicFrame>
+      <p:sp>
+        <p:nvSpPr>
+          <p:cNvPr id="4" name="Text 1"/>
+          <p:cNvSpPr txBox="1"/>
+          <p:nvPr/>
+        </p:nvSpPr>
+        <p:spPr>
+          <a:xfrm>
+            <a:off x="548640" y="6263640"/>
+            <a:ext cx="10362895" cy="365760"/>
+          </a:xfrm>
+          <a:prstGeom prst="rect">
+            <a:avLst/>
+          </a:prstGeom>
+          <a:noFill/>
+          <a:ln/>
+        </p:spPr>
+        <p:txBody>
+          <a:bodyPr wrap="square" lIns="0" tIns="0" rIns="0" bIns="0" rtlCol="0" anchor="b"/>
+          <a:lstStyle/>
+          <a:p>
+            <a:pPr indent="0" marL="0">
+              <a:buNone/>
+            </a:pPr>
+            <a:r>
+              <a:rPr lang="en-US" sz="1100" dirty="0">
+                <a:solidFill>
+                  <a:srgbClr val="5B6573"/>
+                </a:solidFill>
+                <a:latin typeface="Microsoft YaHei" pitchFamily="34" charset="0"/>
+                <a:ea typeface="Microsoft YaHei" pitchFamily="34" charset="-122"/>
+                <a:cs typeface="Microsoft YaHei" pitchFamily="34" charset="-120"/>
+              </a:rPr>
+              <a:t>记录：noctis results/scen-20261002/dsv41flash-r1-g3fix--snap（端到端实验第 1 次 MAVRA 运行）。数据为仿 TPC-DS 的合成零售数据（100 万行门店销售），题目中的年份略去。</a:t>
+            </a:r>
+            <a:endParaRPr lang="en-US" sz="1100" dirty="0"/>
+          </a:p>
+        </p:txBody>
+      </p:sp>
+      <p:sp>
+        <p:nvSpPr>
+          <p:cNvPr id="25" name="Slide Number Placeholder 0"/>
+          <p:cNvSpPr>
+            <a:spLocks noGrp="1"/>
+          </p:cNvSpPr>
+          <p:nvPr>
+            <p:ph type="sldNum" sz="quarter" idx="4294967295"/>
+          </p:nvPr>
+        </p:nvSpPr>
+        <p:spPr>
+          <a:xfrm>
+            <a:off x="11185855" y="6446520"/>
+            <a:ext cx="457200" cy="274320"/>
+          </a:xfrm>
+          <a:prstGeom prst="rect">
+            <a:avLst/>
+          </a:prstGeom>
+          <a:extLst>
+            <a:ext uri="{C572A759-6A51-4108-AA02-DFA0A04FC94B}">
+              <ma14:wrappingTextBoxFlag xmlns:ma14="http://schemas.microsoft.com/office/mac/drawingml/2011/main" val="0"/>
+            </a:ext>
+          </a:extLst>
+        </p:spPr>
+        <p:txBody>
+          <a:bodyPr/>
+          <a:lstStyle>
+            <a:lvl1pPr>
+              <a:defRPr sz="1000">
+                <a:solidFill>
+                  <a:srgbClr val="5B6573"/>
+                </a:solidFill>
+                <a:latin typeface="Microsoft YaHei"/>
+                <a:ea typeface="Microsoft YaHei"/>
+                <a:cs typeface="Microsoft YaHei"/>
+              </a:defRPr>
+            </a:lvl1pPr>
+          </a:lstStyle>
+          <a:p>
+            <a:pPr algn="r"/>
+            <a:fld id="{F7021451-1387-4CA6-816F-3879F97B5CBC}" type="slidenum">
+              <a:rPr b="0" lang="en-US"/>
+              <a:t>8</a:t>
+            </a:fld>
+            <a:endParaRPr lang="en-US"/>
+          </a:p>
+        </p:txBody>
+      </p:sp>
+    </p:spTree>
+  </p:cSld>
+  <p:clrMapOvr>
+    <a:masterClrMapping/>
+  </p:clrMapOvr>
+</p:sld>
+</file>
+
+<file path=ppt/slides/slide9.xml><?xml version="1.0" encoding="utf-8"?>
+<p:sld xmlns:a="http://schemas.openxmlformats.org/drawingml/2006/main" xmlns:r="http://schemas.openxmlformats.org/officeDocument/2006/relationships" xmlns:p="http://schemas.openxmlformats.org/presentationml/2006/main">
+  <p:cSld name="Slide 9">
+    <p:spTree>
+      <p:nvGrpSpPr>
+        <p:cNvPr id="1" name=""/>
+        <p:cNvGrpSpPr/>
+        <p:nvPr/>
+      </p:nvGrpSpPr>
+      <p:grpSpPr>
+        <a:xfrm>
+          <a:off x="0" y="0"/>
+          <a:ext cx="0" cy="0"/>
+          <a:chOff x="0" y="0"/>
+          <a:chExt cx="0" cy="0"/>
+        </a:xfrm>
+      </p:grpSpPr>
+      <p:sp>
+        <p:nvSpPr>
+          <p:cNvPr id="2" name="Text 0"/>
+          <p:cNvSpPr/>
+          <p:nvPr>
+            <p:ph idx="100" type="title" hasCustomPrompt="1"/>
+          </p:nvPr>
+        </p:nvSpPr>
+        <p:spPr>
+          <a:xfrm>
+            <a:off x="548640" y="274320"/>
+            <a:ext cx="11094415" cy="685800"/>
+          </a:xfrm>
+          <a:prstGeom prst="rect">
+            <a:avLst/>
+          </a:prstGeom>
+          <a:noFill/>
+          <a:ln/>
+        </p:spPr>
+        <p:txBody>
+          <a:bodyPr wrap="square" lIns="0" tIns="0" rIns="0" bIns="0" rtlCol="0" anchor="ctr"/>
+          <a:lstStyle/>
+          <a:p>
+            <a:pPr algn="l" indent="0" marL="0">
+              <a:buNone/>
+            </a:pPr>
+            <a:r>
+              <a:rPr lang="en-US" sz="3000" b="1" dirty="0">
+                <a:solidFill>
+                  <a:srgbClr val="1F2A37"/>
+                </a:solidFill>
+                <a:latin typeface="Microsoft YaHei" pitchFamily="34" charset="0"/>
+                <a:ea typeface="Microsoft YaHei" pitchFamily="34" charset="-122"/>
+                <a:cs typeface="Microsoft YaHei" pitchFamily="34" charset="-120"/>
+              </a:rPr>
+              <a:t>真实例子④：回归测试为什么要用学习时的数据</a:t>
+            </a:r>
+            <a:endParaRPr lang="en-US" sz="3000" dirty="0"/>
+          </a:p>
+        </p:txBody>
+      </p:sp>
+      <p:sp>
+        <p:nvSpPr>
+          <p:cNvPr id="3" name="Text 1"/>
+          <p:cNvSpPr txBox="1"/>
+          <p:nvPr/>
+        </p:nvSpPr>
+        <p:spPr>
+          <a:xfrm>
+            <a:off x="548640" y="1188720"/>
+            <a:ext cx="11094415" cy="731520"/>
+          </a:xfrm>
+          <a:prstGeom prst="rect">
+            <a:avLst/>
+          </a:prstGeom>
+          <a:noFill/>
+          <a:ln/>
+        </p:spPr>
+        <p:txBody>
+          <a:bodyPr wrap="square" lIns="0" tIns="0" rIns="0" bIns="0" rtlCol="0" anchor="t"/>
+          <a:lstStyle/>
+          <a:p>
+            <a:pPr indent="0" marL="0">
+              <a:buNone/>
+            </a:pPr>
+            <a:r>
+              <a:rPr lang="en-US" sz="1700" dirty="0">
+                <a:solidFill>
+                  <a:srgbClr val="1F2A37"/>
+                </a:solidFill>
+                <a:latin typeface="Microsoft YaHei" pitchFamily="34" charset="0"/>
+                <a:ea typeface="Microsoft YaHei" pitchFamily="34" charset="-122"/>
+                <a:cs typeface="Microsoft YaHei" pitchFamily="34" charset="-120"/>
+              </a:rPr>
+              <a:t>学习题问的是 3 月，正好在被更正的范围里。回归测试拿内置智能体当初的 SQL 当标准，和加了过滤的新定义各算一次 3 月：</a:t>
+            </a:r>
+            <a:endParaRPr lang="en-US" sz="1700" dirty="0"/>
+          </a:p>
+        </p:txBody>
+      </p:sp>
+      <p:graphicFrame>
+        <p:nvGraphicFramePr>
+          <p:cNvPr id="10" name="Table 0"/>
+          <p:cNvGraphicFramePr>
+            <a:graphicFrameLocks noGrp="1"/>
+          </p:cNvGraphicFramePr>
+          <p:nvPr>
+            <p:extLst>
+              <p:ext uri="{D42A27DB-BD31-4B8C-83A1-F6EECF244321}">
+                <p14:modId xmlns:p14="http://schemas.microsoft.com/office/powerpoint/2010/main" val="1579011935"/>
+              </p:ext>
+            </p:extLst>
+          </p:nvPr>
+        </p:nvGraphicFramePr>
+        <p:xfrm>
+          <a:off x="548640" y="2148840"/>
+          <a:ext cx="11094415" cy="914400"/>
+        </p:xfrm>
+        <a:graphic>
+          <a:graphicData uri="http://schemas.openxmlformats.org/drawingml/2006/table">
+            <a:tbl>
+              <a:tblPr/>
+              <a:tblGrid>
+                <a:gridCol w="2377440"/>
+                <a:gridCol w="2377440"/>
+                <a:gridCol w="2377440"/>
+                <a:gridCol w="3959352"/>
+              </a:tblGrid>
+              <a:tr h="594360">
+                <a:tc>
+                  <a:txBody>
+                    <a:bodyPr/>
+                    <a:lstStyle/>
+                    <a:p>
+                      <a:pPr indent="0" marL="0">
+                        <a:buNone/>
+                      </a:pPr>
+                      <a:r>
+                        <a:rPr lang="en-US" sz="1800" b="1" dirty="0">
+                          <a:solidFill>
+                            <a:srgbClr val="1F2A37"/>
+                          </a:solidFill>
+                          <a:latin typeface="Microsoft YaHei" pitchFamily="34" charset="0"/>
+                          <a:ea typeface="Microsoft YaHei" pitchFamily="34" charset="-122"/>
+                          <a:cs typeface="Microsoft YaHei" pitchFamily="34" charset="-120"/>
+                        </a:rPr>
+                        <a:t>用哪份数据比</a:t>
+                      </a:r>
+                      <a:endParaRPr lang="en-US" sz="1800" dirty="0">
+                        <a:latin typeface="Microsoft YaHei" charset="0"/>
+                        <a:ea typeface="Microsoft YaHei" charset="0"/>
+                        <a:cs typeface="Microsoft YaHei" charset="0"/>
+                      </a:endParaRPr>
+                    </a:p>
+                  </a:txBody>
+                  <a:tcPr marL="91440" marR="91440" marT="54864" marB="54864" anchor="ctr">
+                    <a:lnL w="12700" cap="flat" cmpd="sng" algn="ctr">
+                      <a:solidFill>
+                        <a:srgbClr val="D5DBE3"/>
+                      </a:solidFill>
+                      <a:prstDash val="solid"/>
+                      <a:round/>
+                      <a:headEnd type="none" w="med" len="med"/>
+                      <a:tailEnd type="none" w="med" len="med"/>
+                    </a:lnL>
+                    <a:lnR w="12700" cap="flat" cmpd="sng" algn="ctr">
+                      <a:solidFill>
+                        <a:srgbClr val="D5DBE3"/>
+                      </a:solidFill>
+                      <a:prstDash val="solid"/>
+                      <a:round/>
+                      <a:headEnd type="none" w="med" len="med"/>
+                      <a:tailEnd type="none" w="med" len="med"/>
+                    </a:lnR>
+                    <a:lnT w="12700" cap="flat" cmpd="sng" algn="ctr">
+                      <a:solidFill>
+                        <a:srgbClr val="D5DBE3"/>
+                      </a:solidFill>
+                      <a:prstDash val="solid"/>
+                      <a:round/>
+                      <a:headEnd type="none" w="med" len="med"/>
+                      <a:tailEnd type="none" w="med" len="med"/>
+                    </a:lnT>
+                    <a:lnB w="12700" cap="flat" cmpd="sng" algn="ctr">
+                      <a:solidFill>
+                        <a:srgbClr val="D5DBE3"/>
+                      </a:solidFill>
+                      <a:prstDash val="solid"/>
+                      <a:round/>
+                      <a:headEnd type="none" w="med" len="med"/>
+                      <a:tailEnd type="none" w="med" len="med"/>
+                    </a:lnB>
+                    <a:solidFill>
+                      <a:srgbClr val="F1F3F6"/>
+                    </a:solidFill>
+                  </a:tcPr>
+                </a:tc>
+                <a:tc>
+                  <a:txBody>
+                    <a:bodyPr/>
+                    <a:lstStyle/>
+                    <a:p>
+                      <a:pPr indent="0" marL="0">
+                        <a:buNone/>
+                      </a:pPr>
+                      <a:r>
+                        <a:rPr lang="en-US" sz="1800" b="1" dirty="0">
+                          <a:solidFill>
+                            <a:srgbClr val="1F2A37"/>
+                          </a:solidFill>
+                          <a:latin typeface="Microsoft YaHei" pitchFamily="34" charset="0"/>
+                          <a:ea typeface="Microsoft YaHei" pitchFamily="34" charset="-122"/>
+                          <a:cs typeface="Microsoft YaHei" pitchFamily="34" charset="-120"/>
+                        </a:rPr>
+                        <a:t>当初的 SQL</a:t>
+                      </a:r>
+                      <a:endParaRPr lang="en-US" sz="1800" dirty="0">
+                        <a:latin typeface="Microsoft YaHei" charset="0"/>
+                        <a:ea typeface="Microsoft YaHei" charset="0"/>
+                        <a:cs typeface="Microsoft YaHei" charset="0"/>
+                      </a:endParaRPr>
+                    </a:p>
+                  </a:txBody>
+                  <a:tcPr marL="91440" marR="91440" marT="54864" marB="54864" anchor="ctr">
+                    <a:lnL w="12700" cap="flat" cmpd="sng" algn="ctr">
+                      <a:solidFill>
+                        <a:srgbClr val="D5DBE3"/>
+                      </a:solidFill>
+                      <a:prstDash val="solid"/>
+                      <a:round/>
+                      <a:headEnd type="none" w="med" len="med"/>
+                      <a:tailEnd type="none" w="med" len="med"/>
+                    </a:lnL>
+                    <a:lnR w="12700" cap="flat" cmpd="sng" algn="ctr">
+                      <a:solidFill>
+                        <a:srgbClr val="D5DBE3"/>
+                      </a:solidFill>
+                      <a:prstDash val="solid"/>
+                      <a:round/>
+                      <a:headEnd type="none" w="med" len="med"/>
+                      <a:tailEnd type="none" w="med" len="med"/>
+                    </a:lnR>
+                    <a:lnT w="12700" cap="flat" cmpd="sng" algn="ctr">
+                      <a:solidFill>
+                        <a:srgbClr val="D5DBE3"/>
+                      </a:solidFill>
+                      <a:prstDash val="solid"/>
+                      <a:round/>
+                      <a:headEnd type="none" w="med" len="med"/>
+                      <a:tailEnd type="none" w="med" len="med"/>
+                    </a:lnT>
+                    <a:lnB w="12700" cap="flat" cmpd="sng" algn="ctr">
+                      <a:solidFill>
+                        <a:srgbClr val="D5DBE3"/>
+                      </a:solidFill>
+                      <a:prstDash val="solid"/>
+                      <a:round/>
+                      <a:headEnd type="none" w="med" len="med"/>
+                      <a:tailEnd type="none" w="med" len="med"/>
+                    </a:lnB>
+                    <a:solidFill>
+                      <a:srgbClr val="F1F3F6"/>
+                    </a:solidFill>
+                  </a:tcPr>
+                </a:tc>
+                <a:tc>
+                  <a:txBody>
+                    <a:bodyPr/>
+                    <a:lstStyle/>
+                    <a:p>
+                      <a:pPr indent="0" marL="0">
+                        <a:buNone/>
+                      </a:pPr>
+                      <a:r>
+                        <a:rPr lang="en-US" sz="1800" b="1" dirty="0">
+                          <a:solidFill>
+                            <a:srgbClr val="1F2A37"/>
+                          </a:solidFill>
+                          <a:latin typeface="Microsoft YaHei" pitchFamily="34" charset="0"/>
+                          <a:ea typeface="Microsoft YaHei" pitchFamily="34" charset="-122"/>
+                          <a:cs typeface="Microsoft YaHei" pitchFamily="34" charset="-120"/>
+                        </a:rPr>
+                        <a:t>新定义（v2）</a:t>
+                      </a:r>
+                      <a:endParaRPr lang="en-US" sz="1800" dirty="0">
+                        <a:latin typeface="Microsoft YaHei" charset="0"/>
+                        <a:ea typeface="Microsoft YaHei" charset="0"/>
+                        <a:cs typeface="Microsoft YaHei" charset="0"/>
+                      </a:endParaRPr>
+                    </a:p>
+                  </a:txBody>
+                  <a:tcPr marL="91440" marR="91440" marT="54864" marB="54864" anchor="ctr">
+                    <a:lnL w="12700" cap="flat" cmpd="sng" algn="ctr">
+                      <a:solidFill>
+                        <a:srgbClr val="D5DBE3"/>
+                      </a:solidFill>
+                      <a:prstDash val="solid"/>
+                      <a:round/>
+                      <a:headEnd type="none" w="med" len="med"/>
+                      <a:tailEnd type="none" w="med" len="med"/>
+                    </a:lnL>
+                    <a:lnR w="12700" cap="flat" cmpd="sng" algn="ctr">
+                      <a:solidFill>
+                        <a:srgbClr val="D5DBE3"/>
+                      </a:solidFill>
+                      <a:prstDash val="solid"/>
+                      <a:round/>
+                      <a:headEnd type="none" w="med" len="med"/>
+                      <a:tailEnd type="none" w="med" len="med"/>
+                    </a:lnR>
+                    <a:lnT w="12700" cap="flat" cmpd="sng" algn="ctr">
+                      <a:solidFill>
+                        <a:srgbClr val="D5DBE3"/>
+                      </a:solidFill>
+                      <a:prstDash val="solid"/>
+                      <a:round/>
+                      <a:headEnd type="none" w="med" len="med"/>
+                      <a:tailEnd type="none" w="med" len="med"/>
+                    </a:lnT>
+                    <a:lnB w="12700" cap="flat" cmpd="sng" algn="ctr">
+                      <a:solidFill>
+                        <a:srgbClr val="D5DBE3"/>
+                      </a:solidFill>
+                      <a:prstDash val="solid"/>
+                      <a:round/>
+                      <a:headEnd type="none" w="med" len="med"/>
+                      <a:tailEnd type="none" w="med" len="med"/>
+                    </a:lnB>
+                    <a:solidFill>
+                      <a:srgbClr val="F1F3F6"/>
+                    </a:solidFill>
+                  </a:tcPr>
+                </a:tc>
+                <a:tc>
+                  <a:txBody>
+                    <a:bodyPr/>
+                    <a:lstStyle/>
+                    <a:p>
+                      <a:pPr indent="0" marL="0">
+                        <a:buNone/>
+                      </a:pPr>
+                      <a:r>
+                        <a:rPr lang="en-US" sz="1800" b="1" dirty="0">
+                          <a:solidFill>
+                            <a:srgbClr val="1F2A37"/>
+                          </a:solidFill>
+                          <a:latin typeface="Microsoft YaHei" pitchFamily="34" charset="0"/>
+                          <a:ea typeface="Microsoft YaHei" pitchFamily="34" charset="-122"/>
+                          <a:cs typeface="Microsoft YaHei" pitchFamily="34" charset="-120"/>
+                        </a:rPr>
+                        <a:t>结果</a:t>
+                      </a:r>
+                      <a:endParaRPr lang="en-US" sz="1800" dirty="0">
+                        <a:latin typeface="Microsoft YaHei" charset="0"/>
+                        <a:ea typeface="Microsoft YaHei" charset="0"/>
+                        <a:cs typeface="Microsoft YaHei" charset="0"/>
+                      </a:endParaRPr>
+                    </a:p>
+                  </a:txBody>
+                  <a:tcPr marL="91440" marR="91440" marT="54864" marB="54864" anchor="ctr">
+                    <a:lnL w="12700" cap="flat" cmpd="sng" algn="ctr">
+                      <a:solidFill>
+                        <a:srgbClr val="D5DBE3"/>
+                      </a:solidFill>
+                      <a:prstDash val="solid"/>
+                      <a:round/>
+                      <a:headEnd type="none" w="med" len="med"/>
+                      <a:tailEnd type="none" w="med" len="med"/>
+                    </a:lnL>
+                    <a:lnR w="12700" cap="flat" cmpd="sng" algn="ctr">
+                      <a:solidFill>
+                        <a:srgbClr val="D5DBE3"/>
+                      </a:solidFill>
+                      <a:prstDash val="solid"/>
+                      <a:round/>
+                      <a:headEnd type="none" w="med" len="med"/>
+                      <a:tailEnd type="none" w="med" len="med"/>
+                    </a:lnR>
+                    <a:lnT w="12700" cap="flat" cmpd="sng" algn="ctr">
+                      <a:solidFill>
+                        <a:srgbClr val="D5DBE3"/>
+                      </a:solidFill>
+                      <a:prstDash val="solid"/>
+                      <a:round/>
+                      <a:headEnd type="none" w="med" len="med"/>
+                      <a:tailEnd type="none" w="med" len="med"/>
+                    </a:lnT>
+                    <a:lnB w="12700" cap="flat" cmpd="sng" algn="ctr">
+                      <a:solidFill>
+                        <a:srgbClr val="D5DBE3"/>
+                      </a:solidFill>
+                      <a:prstDash val="solid"/>
+                      <a:round/>
+                      <a:headEnd type="none" w="med" len="med"/>
+                      <a:tailEnd type="none" w="med" len="med"/>
+                    </a:lnB>
+                    <a:solidFill>
+                      <a:srgbClr val="F1F3F6"/>
+                    </a:solidFill>
+                  </a:tcPr>
+                </a:tc>
+              </a:tr>
+              <a:tr h="594360">
+                <a:tc>
+                  <a:txBody>
+                    <a:bodyPr/>
+                    <a:lstStyle/>
+                    <a:p>
+                      <a:pPr indent="0" marL="0">
+                        <a:buNone/>
+                      </a:pPr>
+                      <a:r>
+                        <a:rPr lang="en-US" sz="1800" dirty="0">
+                          <a:solidFill>
+                            <a:srgbClr val="1F2A37"/>
+                          </a:solidFill>
+                          <a:latin typeface="Microsoft YaHei" pitchFamily="34" charset="0"/>
+                          <a:ea typeface="Microsoft YaHei" pitchFamily="34" charset="-122"/>
+                          <a:cs typeface="Microsoft YaHei" pitchFamily="34" charset="-120"/>
+                        </a:rPr>
+                        <a:t>学习时的数据</a:t>
+                      </a:r>
+                      <a:endParaRPr lang="en-US" sz="1800" dirty="0">
+                        <a:latin typeface="Microsoft YaHei" charset="0"/>
+                        <a:ea typeface="Microsoft YaHei" charset="0"/>
+                        <a:cs typeface="Microsoft YaHei" charset="0"/>
+                      </a:endParaRPr>
+                    </a:p>
+                  </a:txBody>
+                  <a:tcPr marL="91440" marR="91440" marT="54864" marB="54864" anchor="ctr">
+                    <a:lnL w="12700" cap="flat" cmpd="sng" algn="ctr">
+                      <a:solidFill>
+                        <a:srgbClr val="D5DBE3"/>
+                      </a:solidFill>
+                      <a:prstDash val="solid"/>
+                      <a:round/>
+                      <a:headEnd type="none" w="med" len="med"/>
+                      <a:tailEnd type="none" w="med" len="med"/>
+                    </a:lnL>
+                    <a:lnR w="12700" cap="flat" cmpd="sng" algn="ctr">
+                      <a:solidFill>
+                        <a:srgbClr val="D5DBE3"/>
+                      </a:solidFill>
+                      <a:prstDash val="solid"/>
+                      <a:round/>
+                      <a:headEnd type="none" w="med" len="med"/>
+                      <a:tailEnd type="none" w="med" len="med"/>
+                    </a:lnR>
+                    <a:lnT w="12700" cap="flat" cmpd="sng" algn="ctr">
+                      <a:solidFill>
+                        <a:srgbClr val="D5DBE3"/>
+                      </a:solidFill>
+                      <a:prstDash val="solid"/>
+                      <a:round/>
+                      <a:headEnd type="none" w="med" len="med"/>
+                      <a:tailEnd type="none" w="med" len="med"/>
+                    </a:lnT>
+                    <a:lnB w="12700" cap="flat" cmpd="sng" algn="ctr">
+                      <a:solidFill>
+                        <a:srgbClr val="D5DBE3"/>
+                      </a:solidFill>
+                      <a:prstDash val="solid"/>
+                      <a:round/>
+                      <a:headEnd type="none" w="med" len="med"/>
+                      <a:tailEnd type="none" w="med" len="med"/>
+                    </a:lnB>
+                  </a:tcPr>
+                </a:tc>
+                <a:tc>
+                  <a:txBody>
+                    <a:bodyPr/>
+                    <a:lstStyle/>
+                    <a:p>
+                      <a:pPr indent="0" marL="0">
+                        <a:buNone/>
+                      </a:pPr>
+                      <a:r>
+                        <a:rPr lang="en-US" sz="1800" dirty="0">
+                          <a:solidFill>
+                            <a:srgbClr val="1F2A37"/>
+                          </a:solidFill>
+                          <a:latin typeface="Microsoft YaHei" pitchFamily="34" charset="0"/>
+                          <a:ea typeface="Microsoft YaHei" pitchFamily="34" charset="-122"/>
+                          <a:cs typeface="Microsoft YaHei" pitchFamily="34" charset="-120"/>
+                        </a:rPr>
+                        <a:t>1357.0 万</a:t>
+                      </a:r>
+                      <a:endParaRPr lang="en-US" sz="1800" dirty="0">
+                        <a:latin typeface="Microsoft YaHei" charset="0"/>
+                        <a:ea typeface="Microsoft YaHei" charset="0"/>
+                        <a:cs typeface="Microsoft YaHei" charset="0"/>
+                      </a:endParaRPr>
+                    </a:p>
+                  </a:txBody>
+                  <a:tcPr marL="91440" marR="91440" marT="54864" marB="54864" anchor="ctr">
+                    <a:lnL w="12700" cap="flat" cmpd="sng" algn="ctr">
+                      <a:solidFill>
+                        <a:srgbClr val="D5DBE3"/>
+                      </a:solidFill>
+                      <a:prstDash val="solid"/>
+                      <a:round/>
+                      <a:headEnd type="none" w="med" len="med"/>
+                      <a:tailEnd type="none" w="med" len="med"/>
+                    </a:lnL>
+                    <a:lnR w="12700" cap="flat" cmpd="sng" algn="ctr">
+                      <a:solidFill>
+                        <a:srgbClr val="D5DBE3"/>
+                      </a:solidFill>
+                      <a:prstDash val="solid"/>
+                      <a:round/>
+                      <a:headEnd type="none" w="med" len="med"/>
+                      <a:tailEnd type="none" w="med" len="med"/>
+                    </a:lnR>
+                    <a:lnT w="12700" cap="flat" cmpd="sng" algn="ctr">
+                      <a:solidFill>
+                        <a:srgbClr val="D5DBE3"/>
+                      </a:solidFill>
+                      <a:prstDash val="solid"/>
+                      <a:round/>
+                      <a:headEnd type="none" w="med" len="med"/>
+                      <a:tailEnd type="none" w="med" len="med"/>
+                    </a:lnT>
+                    <a:lnB w="12700" cap="flat" cmpd="sng" algn="ctr">
+                      <a:solidFill>
+                        <a:srgbClr val="D5DBE3"/>
+                      </a:solidFill>
+                      <a:prstDash val="solid"/>
+                      <a:round/>
+                      <a:headEnd type="none" w="med" len="med"/>
+                      <a:tailEnd type="none" w="med" len="med"/>
+                    </a:lnB>
+                  </a:tcPr>
+                </a:tc>
+                <a:tc>
+                  <a:txBody>
+                    <a:bodyPr/>
+                    <a:lstStyle/>
+                    <a:p>
+                      <a:pPr indent="0" marL="0">
+                        <a:buNone/>
+                      </a:pPr>
+                      <a:r>
+                        <a:rPr lang="en-US" sz="1800" dirty="0">
+                          <a:solidFill>
+                            <a:srgbClr val="1F2A37"/>
+                          </a:solidFill>
+                          <a:latin typeface="Microsoft YaHei" pitchFamily="34" charset="0"/>
+                          <a:ea typeface="Microsoft YaHei" pitchFamily="34" charset="-122"/>
+                          <a:cs typeface="Microsoft YaHei" pitchFamily="34" charset="-120"/>
+                        </a:rPr>
+                        <a:t>1357.0 万</a:t>
+                      </a:r>
+                      <a:endParaRPr lang="en-US" sz="1800" dirty="0">
+                        <a:latin typeface="Microsoft YaHei" charset="0"/>
+                        <a:ea typeface="Microsoft YaHei" charset="0"/>
+                        <a:cs typeface="Microsoft YaHei" charset="0"/>
+                      </a:endParaRPr>
+                    </a:p>
+                  </a:txBody>
+                  <a:tcPr marL="91440" marR="91440" marT="54864" marB="54864" anchor="ctr">
+                    <a:lnL w="12700" cap="flat" cmpd="sng" algn="ctr">
+                      <a:solidFill>
+                        <a:srgbClr val="D5DBE3"/>
+                      </a:solidFill>
+                      <a:prstDash val="solid"/>
+                      <a:round/>
+                      <a:headEnd type="none" w="med" len="med"/>
+                      <a:tailEnd type="none" w="med" len="med"/>
+                    </a:lnL>
+                    <a:lnR w="12700" cap="flat" cmpd="sng" algn="ctr">
+                      <a:solidFill>
+                        <a:srgbClr val="D5DBE3"/>
+                      </a:solidFill>
+                      <a:prstDash val="solid"/>
+                      <a:round/>
+                      <a:headEnd type="none" w="med" len="med"/>
+                      <a:tailEnd type="none" w="med" len="med"/>
+                    </a:lnR>
+                    <a:lnT w="12700" cap="flat" cmpd="sng" algn="ctr">
+                      <a:solidFill>
+                        <a:srgbClr val="D5DBE3"/>
+                      </a:solidFill>
+                      <a:prstDash val="solid"/>
+                      <a:round/>
+                      <a:headEnd type="none" w="med" len="med"/>
+                      <a:tailEnd type="none" w="med" len="med"/>
+                    </a:lnT>
+                    <a:lnB w="12700" cap="flat" cmpd="sng" algn="ctr">
+                      <a:solidFill>
+                        <a:srgbClr val="D5DBE3"/>
+                      </a:solidFill>
+                      <a:prstDash val="solid"/>
+                      <a:round/>
+                      <a:headEnd type="none" w="med" len="med"/>
+                      <a:tailEnd type="none" w="med" len="med"/>
+                    </a:lnB>
+                  </a:tcPr>
+                </a:tc>
+                <a:tc>
+                  <a:txBody>
+                    <a:bodyPr/>
+                    <a:lstStyle/>
+                    <a:p>
+                      <a:pPr indent="0" marL="0">
+                        <a:buNone/>
+                      </a:pPr>
+                      <a:r>
+                        <a:rPr lang="en-US" sz="1800" b="1" dirty="0">
+                          <a:solidFill>
+                            <a:srgbClr val="2E7D4F"/>
+                          </a:solidFill>
+                          <a:latin typeface="Microsoft YaHei" pitchFamily="34" charset="0"/>
+                          <a:ea typeface="Microsoft YaHei" pitchFamily="34" charset="-122"/>
+                          <a:cs typeface="Microsoft YaHei" pitchFamily="34" charset="-120"/>
+                        </a:rPr>
+                        <a:t>一致 → 接受修复 ✓</a:t>
+                      </a:r>
+                      <a:endParaRPr lang="en-US" sz="1800" dirty="0">
+                        <a:latin typeface="Microsoft YaHei" charset="0"/>
+                        <a:ea typeface="Microsoft YaHei" charset="0"/>
+                        <a:cs typeface="Microsoft YaHei" charset="0"/>
+                      </a:endParaRPr>
+                    </a:p>
+                  </a:txBody>
+                  <a:tcPr marL="91440" marR="91440" marT="54864" marB="54864" anchor="ctr">
+                    <a:lnL w="12700" cap="flat" cmpd="sng" algn="ctr">
+                      <a:solidFill>
+                        <a:srgbClr val="D5DBE3"/>
+                      </a:solidFill>
+                      <a:prstDash val="solid"/>
+                      <a:round/>
+                      <a:headEnd type="none" w="med" len="med"/>
+                      <a:tailEnd type="none" w="med" len="med"/>
+                    </a:lnL>
+                    <a:lnR w="12700" cap="flat" cmpd="sng" algn="ctr">
+                      <a:solidFill>
+                        <a:srgbClr val="D5DBE3"/>
+                      </a:solidFill>
+                      <a:prstDash val="solid"/>
+                      <a:round/>
+                      <a:headEnd type="none" w="med" len="med"/>
+                      <a:tailEnd type="none" w="med" len="med"/>
+                    </a:lnR>
+                    <a:lnT w="12700" cap="flat" cmpd="sng" algn="ctr">
+                      <a:solidFill>
+                        <a:srgbClr val="D5DBE3"/>
+                      </a:solidFill>
+                      <a:prstDash val="solid"/>
+                      <a:round/>
+                      <a:headEnd type="none" w="med" len="med"/>
+                      <a:tailEnd type="none" w="med" len="med"/>
+                    </a:lnT>
+                    <a:lnB w="12700" cap="flat" cmpd="sng" algn="ctr">
+                      <a:solidFill>
+                        <a:srgbClr val="D5DBE3"/>
+                      </a:solidFill>
+                      <a:prstDash val="solid"/>
+                      <a:round/>
+                      <a:headEnd type="none" w="med" len="med"/>
+                      <a:tailEnd type="none" w="med" len="med"/>
+                    </a:lnB>
+                  </a:tcPr>
+                </a:tc>
+              </a:tr>
+              <a:tr h="594360">
+                <a:tc>
+                  <a:txBody>
+                    <a:bodyPr/>
+                    <a:lstStyle/>
+                    <a:p>
+                      <a:pPr indent="0" marL="0">
+                        <a:buNone/>
+                      </a:pPr>
+                      <a:r>
+                        <a:rPr lang="en-US" sz="1800" dirty="0">
+                          <a:solidFill>
+                            <a:srgbClr val="1F2A37"/>
+                          </a:solidFill>
+                          <a:latin typeface="Microsoft YaHei" pitchFamily="34" charset="0"/>
+                          <a:ea typeface="Microsoft YaHei" pitchFamily="34" charset="-122"/>
+                          <a:cs typeface="Microsoft YaHei" pitchFamily="34" charset="-120"/>
+                        </a:rPr>
+                        <a:t>现在的数据</a:t>
+                      </a:r>
+                      <a:endParaRPr lang="en-US" sz="1800" dirty="0">
+                        <a:latin typeface="Microsoft YaHei" charset="0"/>
+                        <a:ea typeface="Microsoft YaHei" charset="0"/>
+                        <a:cs typeface="Microsoft YaHei" charset="0"/>
+                      </a:endParaRPr>
+                    </a:p>
+                  </a:txBody>
+                  <a:tcPr marL="91440" marR="91440" marT="54864" marB="54864" anchor="ctr">
+                    <a:lnL w="12700" cap="flat" cmpd="sng" algn="ctr">
+                      <a:solidFill>
+                        <a:srgbClr val="D5DBE3"/>
+                      </a:solidFill>
+                      <a:prstDash val="solid"/>
+                      <a:round/>
+                      <a:headEnd type="none" w="med" len="med"/>
+                      <a:tailEnd type="none" w="med" len="med"/>
+                    </a:lnL>
+                    <a:lnR w="12700" cap="flat" cmpd="sng" algn="ctr">
+                      <a:solidFill>
+                        <a:srgbClr val="D5DBE3"/>
+                      </a:solidFill>
+                      <a:prstDash val="solid"/>
+                      <a:round/>
+                      <a:headEnd type="none" w="med" len="med"/>
+                      <a:tailEnd type="none" w="med" len="med"/>
+                    </a:lnR>
+                    <a:lnT w="12700" cap="flat" cmpd="sng" algn="ctr">
+                      <a:solidFill>
+                        <a:srgbClr val="D5DBE3"/>
+                      </a:solidFill>
+                      <a:prstDash val="solid"/>
+                      <a:round/>
+                      <a:headEnd type="none" w="med" len="med"/>
+                      <a:tailEnd type="none" w="med" len="med"/>
+                    </a:lnT>
+                    <a:lnB w="12700" cap="flat" cmpd="sng" algn="ctr">
+                      <a:solidFill>
+                        <a:srgbClr val="D5DBE3"/>
+                      </a:solidFill>
+                      <a:prstDash val="solid"/>
+                      <a:round/>
+                      <a:headEnd type="none" w="med" len="med"/>
+                      <a:tailEnd type="none" w="med" len="med"/>
+                    </a:lnB>
+                  </a:tcPr>
+                </a:tc>
+                <a:tc>
+                  <a:txBody>
+                    <a:bodyPr/>
+                    <a:lstStyle/>
+                    <a:p>
+                      <a:pPr indent="0" marL="0">
+                        <a:buNone/>
+                      </a:pPr>
+                      <a:r>
+                        <a:rPr lang="en-US" sz="1800" dirty="0">
+                          <a:solidFill>
+                            <a:srgbClr val="1F2A37"/>
+                          </a:solidFill>
+                          <a:latin typeface="Microsoft YaHei" pitchFamily="34" charset="0"/>
+                          <a:ea typeface="Microsoft YaHei" pitchFamily="34" charset="-122"/>
+                          <a:cs typeface="Microsoft YaHei" pitchFamily="34" charset="-120"/>
+                        </a:rPr>
+                        <a:t>1489.1 万</a:t>
+                      </a:r>
+                      <a:endParaRPr lang="en-US" sz="1800" dirty="0">
+                        <a:latin typeface="Microsoft YaHei" charset="0"/>
+                        <a:ea typeface="Microsoft YaHei" charset="0"/>
+                        <a:cs typeface="Microsoft YaHei" charset="0"/>
+                      </a:endParaRPr>
+                    </a:p>
+                  </a:txBody>
+                  <a:tcPr marL="91440" marR="91440" marT="54864" marB="54864" anchor="ctr">
+                    <a:lnL w="12700" cap="flat" cmpd="sng" algn="ctr">
+                      <a:solidFill>
+                        <a:srgbClr val="D5DBE3"/>
+                      </a:solidFill>
+                      <a:prstDash val="solid"/>
+                      <a:round/>
+                      <a:headEnd type="none" w="med" len="med"/>
+                      <a:tailEnd type="none" w="med" len="med"/>
+                    </a:lnL>
+                    <a:lnR w="12700" cap="flat" cmpd="sng" algn="ctr">
+                      <a:solidFill>
+                        <a:srgbClr val="D5DBE3"/>
+                      </a:solidFill>
+                      <a:prstDash val="solid"/>
+                      <a:round/>
+                      <a:headEnd type="none" w="med" len="med"/>
+                      <a:tailEnd type="none" w="med" len="med"/>
+                    </a:lnR>
+                    <a:lnT w="12700" cap="flat" cmpd="sng" algn="ctr">
+                      <a:solidFill>
+                        <a:srgbClr val="D5DBE3"/>
+                      </a:solidFill>
+                      <a:prstDash val="solid"/>
+                      <a:round/>
+                      <a:headEnd type="none" w="med" len="med"/>
+                      <a:tailEnd type="none" w="med" len="med"/>
+                    </a:lnT>
+                    <a:lnB w="12700" cap="flat" cmpd="sng" algn="ctr">
+                      <a:solidFill>
+                        <a:srgbClr val="D5DBE3"/>
+                      </a:solidFill>
+                      <a:prstDash val="solid"/>
+                      <a:round/>
+                      <a:headEnd type="none" w="med" len="med"/>
+                      <a:tailEnd type="none" w="med" len="med"/>
+                    </a:lnB>
+                  </a:tcPr>
+                </a:tc>
+                <a:tc>
+                  <a:txBody>
+                    <a:bodyPr/>
+                    <a:lstStyle/>
+                    <a:p>
+                      <a:pPr indent="0" marL="0">
+                        <a:buNone/>
+                      </a:pPr>
+                      <a:r>
+                        <a:rPr lang="en-US" sz="1800" dirty="0">
+                          <a:solidFill>
+                            <a:srgbClr val="1F2A37"/>
+                          </a:solidFill>
+                          <a:latin typeface="Microsoft YaHei" pitchFamily="34" charset="0"/>
+                          <a:ea typeface="Microsoft YaHei" pitchFamily="34" charset="-122"/>
+                          <a:cs typeface="Microsoft YaHei" pitchFamily="34" charset="-120"/>
+                        </a:rPr>
+                        <a:t>1342.4 万</a:t>
+                      </a:r>
+                      <a:endParaRPr lang="en-US" sz="1800" dirty="0">
+                        <a:latin typeface="Microsoft YaHei" charset="0"/>
+                        <a:ea typeface="Microsoft YaHei" charset="0"/>
+                        <a:cs typeface="Microsoft YaHei" charset="0"/>
+                      </a:endParaRPr>
+                    </a:p>
+                  </a:txBody>
+                  <a:tcPr marL="91440" marR="91440" marT="54864" marB="54864" anchor="ctr">
+                    <a:lnL w="12700" cap="flat" cmpd="sng" algn="ctr">
+                      <a:solidFill>
+                        <a:srgbClr val="D5DBE3"/>
+                      </a:solidFill>
+                      <a:prstDash val="solid"/>
+                      <a:round/>
+                      <a:headEnd type="none" w="med" len="med"/>
+                      <a:tailEnd type="none" w="med" len="med"/>
+                    </a:lnL>
+                    <a:lnR w="12700" cap="flat" cmpd="sng" algn="ctr">
+                      <a:solidFill>
+                        <a:srgbClr val="D5DBE3"/>
+                      </a:solidFill>
+                      <a:prstDash val="solid"/>
+                      <a:round/>
+                      <a:headEnd type="none" w="med" len="med"/>
+                      <a:tailEnd type="none" w="med" len="med"/>
+                    </a:lnR>
+                    <a:lnT w="12700" cap="flat" cmpd="sng" algn="ctr">
+                      <a:solidFill>
+                        <a:srgbClr val="D5DBE3"/>
+                      </a:solidFill>
+                      <a:prstDash val="solid"/>
+                      <a:round/>
+                      <a:headEnd type="none" w="med" len="med"/>
+                      <a:tailEnd type="none" w="med" len="med"/>
+                    </a:lnT>
+                    <a:lnB w="12700" cap="flat" cmpd="sng" algn="ctr">
+                      <a:solidFill>
+                        <a:srgbClr val="D5DBE3"/>
+                      </a:solidFill>
+                      <a:prstDash val="solid"/>
+                      <a:round/>
+                      <a:headEnd type="none" w="med" len="med"/>
+                      <a:tailEnd type="none" w="med" len="med"/>
+                    </a:lnB>
+                  </a:tcPr>
+                </a:tc>
+                <a:tc>
+                  <a:txBody>
+                    <a:bodyPr/>
+                    <a:lstStyle/>
+                    <a:p>
+                      <a:pPr indent="0" marL="0">
+                        <a:buNone/>
+                      </a:pPr>
+                      <a:r>
+                        <a:rPr lang="en-US" sz="1800" b="1" dirty="0">
+                          <a:solidFill>
+                            <a:srgbClr val="B5392A"/>
+                          </a:solidFill>
+                          <a:latin typeface="Microsoft YaHei" pitchFamily="34" charset="0"/>
+                          <a:ea typeface="Microsoft YaHei" pitchFamily="34" charset="-122"/>
+                          <a:cs typeface="Microsoft YaHei" pitchFamily="34" charset="-120"/>
+                        </a:rPr>
+                        <a:t>不一致 → 拒绝了正确的修复 ✗</a:t>
+                      </a:r>
+                      <a:endParaRPr lang="en-US" sz="1800" dirty="0">
+                        <a:latin typeface="Microsoft YaHei" charset="0"/>
+                        <a:ea typeface="Microsoft YaHei" charset="0"/>
+                        <a:cs typeface="Microsoft YaHei" charset="0"/>
+                      </a:endParaRPr>
+                    </a:p>
+                  </a:txBody>
+                  <a:tcPr marL="91440" marR="91440" marT="54864" marB="54864" anchor="ctr">
+                    <a:lnL w="12700" cap="flat" cmpd="sng" algn="ctr">
+                      <a:solidFill>
+                        <a:srgbClr val="D5DBE3"/>
+                      </a:solidFill>
+                      <a:prstDash val="solid"/>
+                      <a:round/>
+                      <a:headEnd type="none" w="med" len="med"/>
+                      <a:tailEnd type="none" w="med" len="med"/>
+                    </a:lnL>
+                    <a:lnR w="12700" cap="flat" cmpd="sng" algn="ctr">
+                      <a:solidFill>
+                        <a:srgbClr val="D5DBE3"/>
+                      </a:solidFill>
+                      <a:prstDash val="solid"/>
+                      <a:round/>
+                      <a:headEnd type="none" w="med" len="med"/>
+                      <a:tailEnd type="none" w="med" len="med"/>
+                    </a:lnR>
+                    <a:lnT w="12700" cap="flat" cmpd="sng" algn="ctr">
+                      <a:solidFill>
+                        <a:srgbClr val="D5DBE3"/>
+                      </a:solidFill>
+                      <a:prstDash val="solid"/>
+                      <a:round/>
+                      <a:headEnd type="none" w="med" len="med"/>
+                      <a:tailEnd type="none" w="med" len="med"/>
+                    </a:lnT>
+                    <a:lnB w="12700" cap="flat" cmpd="sng" algn="ctr">
+                      <a:solidFill>
+                        <a:srgbClr val="D5DBE3"/>
+                      </a:solidFill>
+                      <a:prstDash val="solid"/>
+                      <a:round/>
+                      <a:headEnd type="none" w="med" len="med"/>
+                      <a:tailEnd type="none" w="med" len="med"/>
+                    </a:lnB>
+                  </a:tcPr>
+                </a:tc>
+              </a:tr>
+            </a:tbl>
+          </a:graphicData>
+        </a:graphic>
+      </p:graphicFrame>
+      <p:sp>
+        <p:nvSpPr>
+          <p:cNvPr id="5" name="Shape 2"/>
+          <p:cNvSpPr/>
+          <p:nvPr/>
+        </p:nvSpPr>
+        <p:spPr>
+          <a:xfrm>
+            <a:off x="548640" y="4206240"/>
+            <a:ext cx="11094415" cy="1371600"/>
+          </a:xfrm>
+          <a:prstGeom prst="roundRect">
+            <a:avLst>
+              <a:gd name="adj" fmla="val 5333"/>
+            </a:avLst>
+          </a:prstGeom>
+          <a:solidFill>
+            <a:srgbClr val="E8F0FA"/>
+          </a:solidFill>
+          <a:ln w="12700">
+            <a:solidFill>
+              <a:srgbClr val="E8F0FA"/>
+            </a:solidFill>
+            <a:prstDash val="solid"/>
+          </a:ln>
+        </p:spPr>
+      </p:sp>
+      <p:sp>
+        <p:nvSpPr>
+          <p:cNvPr id="6" name="Text 3"/>
+          <p:cNvSpPr txBox="1"/>
+          <p:nvPr/>
+        </p:nvSpPr>
+        <p:spPr>
+          <a:xfrm>
+            <a:off x="822960" y="4297680"/>
+            <a:ext cx="10545775" cy="1188720"/>
+          </a:xfrm>
+          <a:prstGeom prst="rect">
+            <a:avLst/>
+          </a:prstGeom>
+          <a:noFill/>
+          <a:ln/>
+        </p:spPr>
+        <p:txBody>
+          <a:bodyPr wrap="square" lIns="0" tIns="0" rIns="0" bIns="0" rtlCol="0" anchor="ctr"/>
+          <a:lstStyle/>
+          <a:p>
+            <a:pPr indent="0" marL="0">
+              <a:buNone/>
+            </a:pPr>
+            <a:r>
+              <a:rPr lang="en-US" sz="1700" b="1" dirty="0">
+                <a:solidFill>
+                  <a:srgbClr val="1D5BA6"/>
+                </a:solidFill>
+                <a:latin typeface="Microsoft YaHei" pitchFamily="34" charset="0"/>
+                <a:ea typeface="Microsoft YaHei" pitchFamily="34" charset="-122"/>
+                <a:cs typeface="Microsoft YaHei" pitchFamily="34" charset="-120"/>
+              </a:rPr>
+              <a:t>原因：</a:t>
+            </a:r>
+            <a:pPr indent="0" marL="0">
+              <a:buNone/>
+            </a:pPr>
+            <a:r>
+              <a:rPr lang="en-US" sz="1700" dirty="0">
+                <a:solidFill>
+                  <a:srgbClr val="1F2A37"/>
+                </a:solidFill>
+                <a:latin typeface="Microsoft YaHei" pitchFamily="34" charset="0"/>
+                <a:ea typeface="Microsoft YaHei" pitchFamily="34" charset="-122"/>
+                <a:cs typeface="Microsoft YaHei" pitchFamily="34" charset="-120"/>
+              </a:rPr>
+              <a:t>在现在的数据里，当初的 SQL 自己也过时了——它把更正前的旧行也算了进去（1489.1 万）。它只在学习时的数据上被核验过是对的，所以只能在那份数据上当标准。</a:t>
+            </a:r>
+            <a:endParaRPr lang="en-US" sz="1700" dirty="0"/>
+          </a:p>
+        </p:txBody>
+      </p:sp>
+      <p:sp>
+        <p:nvSpPr>
+          <p:cNvPr id="7" name="Text 4"/>
+          <p:cNvSpPr txBox="1"/>
+          <p:nvPr/>
+        </p:nvSpPr>
+        <p:spPr>
+          <a:xfrm>
+            <a:off x="548640" y="6263640"/>
+            <a:ext cx="10362895" cy="365760"/>
+          </a:xfrm>
+          <a:prstGeom prst="rect">
+            <a:avLst/>
+          </a:prstGeom>
+          <a:noFill/>
+          <a:ln/>
+        </p:spPr>
+        <p:txBody>
+          <a:bodyPr wrap="square" lIns="0" tIns="0" rIns="0" bIns="0" rtlCol="0" anchor="b"/>
+          <a:lstStyle/>
+          <a:p>
+            <a:pPr indent="0" marL="0">
+              <a:buNone/>
+            </a:pPr>
+            <a:r>
+              <a:rPr lang="en-US" sz="1100" dirty="0">
+                <a:solidFill>
+                  <a:srgbClr val="5B6573"/>
+                </a:solidFill>
+                <a:latin typeface="Microsoft YaHei" pitchFamily="34" charset="0"/>
+                <a:ea typeface="Microsoft YaHei" pitchFamily="34" charset="-122"/>
+                <a:cs typeface="Microsoft YaHei" pitchFamily="34" charset="-120"/>
+              </a:rPr>
+              <a:t>“现在的数据”一行来自对照实验（回归测试改用当前数据，dsv41flash-r1-g3fix--exref），系统记录原文：“结果 13423672.28 与期望 14890636.48 不一致”。</a:t>
+            </a:r>
+            <a:endParaRPr lang="en-US" sz="1100" dirty="0"/>
+          </a:p>
+        </p:txBody>
+      </p:sp>
+      <p:sp>
+        <p:nvSpPr>
+          <p:cNvPr id="25" name="Slide Number Placeholder 0"/>
+          <p:cNvSpPr>
+            <a:spLocks noGrp="1"/>
+          </p:cNvSpPr>
+          <p:nvPr>
+            <p:ph type="sldNum" sz="quarter" idx="4294967295"/>
+          </p:nvPr>
+        </p:nvSpPr>
+        <p:spPr>
+          <a:xfrm>
+            <a:off x="11185855" y="6446520"/>
+            <a:ext cx="457200" cy="274320"/>
+          </a:xfrm>
+          <a:prstGeom prst="rect">
+            <a:avLst/>
+          </a:prstGeom>
+          <a:extLst>
+            <a:ext uri="{C572A759-6A51-4108-AA02-DFA0A04FC94B}">
+              <ma14:wrappingTextBoxFlag xmlns:ma14="http://schemas.microsoft.com/office/mac/drawingml/2011/main" val="0"/>
+            </a:ext>
+          </a:extLst>
+        </p:spPr>
+        <p:txBody>
+          <a:bodyPr/>
+          <a:lstStyle>
+            <a:lvl1pPr>
+              <a:defRPr sz="1000">
+                <a:solidFill>
+                  <a:srgbClr val="5B6573"/>
+                </a:solidFill>
+                <a:latin typeface="Microsoft YaHei"/>
+                <a:ea typeface="Microsoft YaHei"/>
+                <a:cs typeface="Microsoft YaHei"/>
+              </a:defRPr>
+            </a:lvl1pPr>
+          </a:lstStyle>
+          <a:p>
+            <a:pPr algn="r"/>
+            <a:fld id="{F7021451-1387-4CA6-816F-3879F97B5CBC}" type="slidenum">
+              <a:rPr b="0" lang="en-US"/>
+              <a:t>9</a:t>
             </a:fld>
             <a:endParaRPr lang="en-US"/>
           </a:p>

--- a/docs/mavra-system.pptx
+++ b/docs/mavra-system.pptx
@@ -15,9 +15,10 @@
     <p:sldId id="263" r:id="rId9"/>
     <p:sldId id="264" r:id="rId10"/>
     <p:sldId id="265" r:id="rId11"/>
+    <p:sldId id="266" r:id="rId12"/>
   </p:sldIdLst>
   <p:notesMasterIdLst>
-    <p:notesMasterId r:id="rId12"/>
+    <p:notesMasterId r:id="rId13"/>
   </p:notesMasterIdLst>
   <p:sldSz cx="12192000" cy="6858000"/>
   <p:notesSz cx="6858000" cy="12192000"/>
@@ -116,34 +117,39 @@
   <p:extLst>
     <p:ext uri="{521415D9-36F7-43E2-AB2F-B90AF26B5E84}">
       <p14:sectionLst xmlns:p14="http://schemas.microsoft.com/office/powerpoint/2010/main">
-        <p14:section name="开场" id="{35fc2a33-fb5f-7429-19d2-43043f71bcfe}">
+        <p14:section name="开场" id="{f6c0766f-c400-9122-7890-8178b8c136a2}">
           <p14:sldIdLst>
             <p14:sldId id="256"/>
           </p14:sldIdLst>
         </p14:section>
-        <p14:section name="功能与结构" id="{178ded1e-0a72-7035-db64-6169b6d439b8}">
+        <p14:section name="例子" id="{0113fa6a-a158-9529-405a-dff18cedb59e}">
           <p14:sldIdLst>
             <p14:sldId id="257"/>
             <p14:sldId id="258"/>
           </p14:sldIdLst>
         </p14:section>
-        <p14:section name="工作流" id="{6ad964c6-b151-b073-dd78-3be5d502b736}">
+        <p14:section name="功能与结构" id="{bfe71694-5fc6-88ab-88cc-410026ae219e}">
           <p14:sldIdLst>
             <p14:sldId id="259"/>
             <p14:sldId id="260"/>
           </p14:sldIdLst>
         </p14:section>
-        <p14:section name="真实例子" id="{659b2b30-4e42-7ee3-5bac-8cd5276ac3fc}">
+        <p14:section name="工作流" id="{c715230f-78af-df93-eca1-9699929657d6}">
           <p14:sldIdLst>
             <p14:sldId id="261"/>
             <p14:sldId id="262"/>
+          </p14:sldIdLst>
+        </p14:section>
+        <p14:section name="回到例子" id="{93c0233f-621e-15f8-38b0-3cc4db60cb21}">
+          <p14:sldIdLst>
             <p14:sldId id="263"/>
             <p14:sldId id="264"/>
+            <p14:sldId id="265"/>
           </p14:sldIdLst>
         </p14:section>
-        <p14:section name="小结" id="{59ee6e9d-e3e2-817c-7b72-306d51afab1f}">
+        <p14:section name="小结" id="{50f29400-0088-70da-663c-4809c2a1ac67}">
           <p14:sldIdLst>
-            <p14:sldId id="265"/>
+            <p14:sldId id="266"/>
           </p14:sldIdLst>
         </p14:section>
       </p14:sectionLst>
@@ -550,7 +556,7 @@
           <a:p>
             <a:r>
               <a:rPr lang="en-US" dirty="0"/>
-              <a:t>先讲系统：由哪几部分组成、各做什么、一次请求怎么走、指标定义坏了怎么办；再用实验里的真实记录走一遍“门店营业额”这个例子。</a:t>
+              <a:t>先看实验里的一个真实例子：智能体学会的指标定义，遇到日常的数据写入会悄悄算错。然后讲 MAVRA 怎么解决：由哪几部分组成、各做什么、一次请求怎么走；最后回到这个例子，看 MAVRA 实际是怎么处理的。</a:t>
             </a:r>
             <a:endParaRPr lang="en-US" dirty="0"/>
           </a:p>
@@ -638,6 +644,94 @@
           <a:p>
             <a:r>
               <a:rPr lang="en-US" dirty="0"/>
+              <a:t>为什么回归测试不能直接用现在的数据？学习题问的是 3 月，而这次更正正好覆盖 3 月。在现在的数据上，智能体当初写的 SQL 本身就会把旧版本也算进去，得到 1489 万；正确的新定义得到 1342 万，两者对不上，正确的修复就被拒了。我们实际跑过这个对照：用现在的数据比，这个修复确实被拒绝。用学习时的数据比，两者都是 1357 万，修复被接受。</a:t>
+            </a:r>
+            <a:endParaRPr lang="en-US" dirty="0"/>
+          </a:p>
+        </p:txBody>
+      </p:sp>
+      <p:sp>
+        <p:nvSpPr>
+          <p:cNvPr id="4" name="Slide Number Placeholder 3"/>
+          <p:cNvSpPr>
+            <a:spLocks noGrp="1"/>
+          </p:cNvSpPr>
+          <p:nvPr>
+            <p:ph type="sldNum" sz="quarter" idx="10"/>
+          </p:nvPr>
+        </p:nvSpPr>
+        <p:spPr/>
+        <p:txBody>
+          <a:bodyPr/>
+          <a:lstStyle/>
+          <a:p>
+            <a:fld id="{F7021451-1387-4CA6-816F-3879F97B5CBC}" type="slidenum">
+              <a:rPr lang="en-US"/>
+              <a:t>10</a:t>
+            </a:fld>
+            <a:endParaRPr lang="en-US"/>
+          </a:p>
+        </p:txBody>
+      </p:sp>
+    </p:spTree>
+    <p:extLst>
+      <p:ext uri="{BB962C8B-B14F-4D97-AF65-F5344CB8AC3E}">
+        <p14:creationId xmlns:p14="http://schemas.microsoft.com/office/powerpoint/2010/main" val="1024086991"/>
+      </p:ext>
+    </p:extLst>
+  </p:cSld>
+  <p:clrMapOvr>
+    <a:masterClrMapping/>
+  </p:clrMapOvr>
+</p:notes>
+</file>
+
+<file path=ppt/notesSlides/notesSlide11.xml><?xml version="1.0" encoding="utf-8"?>
+<p:notes xmlns:a="http://schemas.openxmlformats.org/drawingml/2006/main" xmlns:r="http://schemas.openxmlformats.org/officeDocument/2006/relationships" xmlns:p="http://schemas.openxmlformats.org/presentationml/2006/main">
+  <p:cSld>
+    <p:spTree>
+      <p:nvGrpSpPr>
+        <p:cNvPr id="1" name=""/>
+        <p:cNvGrpSpPr/>
+        <p:nvPr/>
+      </p:nvGrpSpPr>
+      <p:grpSpPr>
+        <a:xfrm>
+          <a:off x="0" y="0"/>
+          <a:ext cx="0" cy="0"/>
+          <a:chOff x="0" y="0"/>
+          <a:chExt cx="0" cy="0"/>
+        </a:xfrm>
+      </p:grpSpPr>
+      <p:sp>
+        <p:nvSpPr>
+          <p:cNvPr id="2" name="Slide Image Placeholder 1"/>
+          <p:cNvSpPr>
+            <a:spLocks noGrp="1" noRot="1" noChangeAspect="1"/>
+          </p:cNvSpPr>
+          <p:nvPr>
+            <p:ph type="sldImg"/>
+          </p:nvPr>
+        </p:nvSpPr>
+        <p:spPr/>
+      </p:sp>
+      <p:sp>
+        <p:nvSpPr>
+          <p:cNvPr id="3" name="Notes Placeholder 2"/>
+          <p:cNvSpPr>
+            <a:spLocks noGrp="1"/>
+          </p:cNvSpPr>
+          <p:nvPr>
+            <p:ph type="body" idx="1"/>
+          </p:nvPr>
+        </p:nvSpPr>
+        <p:spPr/>
+        <p:txBody>
+          <a:bodyPr/>
+          <a:lstStyle/>
+          <a:p>
+            <a:r>
+              <a:rPr lang="en-US" dirty="0"/>
               <a:t>四句话收尾：结构、功能、工作流，以及例子说明的事——日常写入就会让共享的定义悄悄出错，MAVRA 能发现，能唯一修好就修，修不了就停用，不让错误答案出去。</a:t>
             </a:r>
             <a:endParaRPr lang="en-US" dirty="0"/>
@@ -661,7 +755,7 @@
           <a:p>
             <a:fld id="{F7021451-1387-4CA6-816F-3879F97B5CBC}" type="slidenum">
               <a:rPr lang="en-US"/>
-              <a:t>10</a:t>
+              <a:t>11</a:t>
             </a:fld>
             <a:endParaRPr lang="en-US"/>
           </a:p>
@@ -726,7 +820,7 @@
           <a:p>
             <a:r>
               <a:rPr lang="en-US" dirty="0"/>
-              <a:t>先用一句话说清问题：指标定义被共享，数据会变，定义可能悄悄算错。MAVRA 做三件事：学习指标定义（紫色）、数据变了就重新校验（蓝色）、执行前把关（橙色）。后面三张图用的是同一套颜色，讲的都是“门店营业额”这个例子。</a:t>
+              <a:t>先看实验里的真实记录。内置智能体拿到一道给出口径的题，几步就写出 SQL，答案和标准答案一致。然后大模型把它整理成右边这条定义，MAVRA 从定义里推出三条校验规则：每笔销售一行、日期键唯一、丢行率不超标。学习时有 1.03% 的销售关联不到日期表，这个比例被记下来，以后超过才算异常。</a:t>
             </a:r>
             <a:endParaRPr lang="en-US" dirty="0"/>
           </a:p>
@@ -814,7 +908,7 @@
           <a:p>
             <a:r>
               <a:rPr lang="en-US" dirty="0"/>
-              <a:t>左边是用户智能体，它发两种请求。蓝色 1–5 是查询指标定义：智能体只说“营业额”，查询服务从指标库读出定义；销售表的数据变了，某条规则在新数据版本上还没有校验结果，就交给维护去校验，结果写入缓存，再返回有效的 v2。橙色 6–8 是执行 SQL：智能体写好 SQL 并注明用的是 v2，执行前校验复用缓存里的结果，在同一快照上执行。紫色是学习：内置智能体学到的定义，发布前校验通过才进入指标库。</a:t>
+              <a:t>同一个问题“9 月门店营业额”，在三种日常写入之后分别再问一次，智能体照旧用学到的定义。追加新数据没问题。数据更正——数据仓库里很常见的做法是旧行不删、标成非当前，再插一行新的——照旧用就会把新旧两版都加进去，多出 137 万。重复装载，一批数据被导了两次，9 月直接翻倍。这三种都是普通的数据写入，表结构没变，只看表结构的做法完全发现不了；SQL 也不报错，用的人看不出来。这就是 MAVRA 要解决的问题。</a:t>
             </a:r>
             <a:endParaRPr lang="en-US" dirty="0"/>
           </a:p>
@@ -902,7 +996,7 @@
           <a:p>
             <a:r>
               <a:rPr lang="en-US" dirty="0"/>
-              <a:t>上面一行是查询指标定义：按名称匹配到“门店营业额”（“电子品类门店营业额”也包含这几个字，一并返回，由智能体按口径说明挑选）；再看销售表的数据版本有没有变（14 变成 15）；然后逐条规则查缓存：“每笔销售一行”电子品类那个指标刚校验过，直接复用；日期表没变，复用；“丢行率不超标”在 15 上没有结果，现在校验并写入缓存；最后返回有效的 v2。中间是校验结果缓存：按（规则，数据版本）存，表里写明谁写入、哪一步复用。下面一行是执行 SQL：先检查注明的 v2 能不能用；再在这条查询的快照上校验——这期间又有写入，数据版本变成 16，所以两条规则在快照里重新校验并写入缓存；最后在同一快照上执行。</a:t>
+              <a:t>回到刚才的问题：指标定义被共享，数据会变，定义可能悄悄算错，而且没人发现。MAVRA 做三件事：学习指标定义（紫色）、数据变了就重新校验（蓝色）、执行前把关（橙色）。后面三张图用的是同一套颜色，讲的都是“门店营业额”这个例子。</a:t>
             </a:r>
             <a:endParaRPr lang="en-US" dirty="0"/>
           </a:p>
@@ -990,7 +1084,7 @@
           <a:p>
             <a:r>
               <a:rPr lang="en-US" dirty="0"/>
-              <a:t>跟着门店营业额走一遍，后面四页是这个过程的真实记录。内置智能体回答“3 月门店营业额”，答案核验正确、发布前校验通过，发布 v1。之后追加一批新销售：规则仍成立，其他指标直接复用结果，还是 v1。再之后有一批销售被更正：旧行保留但标成非当前，新增当前行——“每笔销售一行”不成立，v1 停用，不处理会把新旧两版都算进去。修复时在取值少的列上试过滤，只有“只算当前行”可行；用学习时的数据重算 3 月，结果一致，发布 v2。红框是另一种情况：一批销售被重复装载，没有任何过滤能修好，就停用并提醒，等待重新学习。</a:t>
+              <a:t>左边是用户智能体，它发两种请求。蓝色 1–5 是查询指标定义：智能体只说“营业额”，查询服务从指标库读出定义；销售表的数据变了，某条规则在新数据版本上还没有校验结果，就交给维护去校验，结果写入缓存，再返回有效的 v2。橙色 6–8 是执行 SQL：智能体写好 SQL 并注明用的是 v2，执行前校验复用缓存里的结果，在同一快照上执行。紫色是学习：内置智能体学到的定义，发布前校验通过才进入指标库。</a:t>
             </a:r>
             <a:endParaRPr lang="en-US" dirty="0"/>
           </a:p>
@@ -1078,7 +1172,7 @@
           <a:p>
             <a:r>
               <a:rPr lang="en-US" dirty="0"/>
-              <a:t>这一页开始是实验里的真实记录。内置智能体拿到一道给出口径的题，几步就写出 SQL，答案和标准答案一致。然后大模型把它整理成右边这条定义，MAVRA 从定义里推出三条校验规则：每笔销售一行、日期键唯一、丢行率不超标。学习时有 1.03% 的销售关联不到日期表，这个比例被记下来，以后超过才算异常。</a:t>
+              <a:t>上面一行是查询指标定义：按名称匹配到“门店营业额”（“电子品类门店营业额”也包含这几个字，一并返回，由智能体按口径说明挑选）；再看销售表的数据版本有没有变（14 变成 15）；然后逐条规则查缓存：“每笔销售一行”电子品类那个指标刚校验过，直接复用；日期表没变，复用；“丢行率不超标”在 15 上没有结果，现在校验并写入缓存；最后返回有效的 v2。中间是校验结果缓存：按（规则，数据版本）存，表里写明谁写入、哪一步复用。下面一行是执行 SQL：先检查注明的 v2 能不能用；再在这条查询的快照上校验——这期间又有写入，数据版本变成 16，所以两条规则在快照里重新校验并写入缓存；最后在同一快照上执行。</a:t>
             </a:r>
             <a:endParaRPr lang="en-US" dirty="0"/>
           </a:p>
@@ -1166,7 +1260,7 @@
           <a:p>
             <a:r>
               <a:rPr lang="en-US" dirty="0"/>
-              <a:t>同一个问题“9 月门店营业额”，在三种日常写入下分别问一次。追加新数据：定义仍然对，MAVRA 重新校验后继续用；而且电子品类、退货率等 6 个依赖销售表的指标，一共只跑了 2 次校验，其余直接复用。数据更正：数据仓库里很常见的做法是旧行不删、标成非当前，再插一行新的。不维护的话会把新旧两版都加进去，多出 137 万；MAVRA 停用旧定义、修好后答对。重复装载：一批数据被导了两次，没法用过滤修好，MAVRA 停用并提醒智能体，智能体自己去重，3 次里 2 次答对。重点：这三种都是普通的数据写入，表结构没变，只看表结构的做法完全发现不了。</a:t>
+              <a:t>跟着门店营业额走一遍，接下来三页回到开头的例子，看真实记录。内置智能体回答“3 月门店营业额”，答案核验正确、发布前校验通过，发布 v1。之后追加一批新销售：规则仍成立，其他指标直接复用结果，还是 v1。再之后有一批销售被更正：旧行保留但标成非当前，新增当前行——“每笔销售一行”不成立，v1 停用，不处理会把新旧两版都算进去。修复时在取值少的列上试过滤，只有“只算当前行”可行；用学习时的数据重算 3 月，结果一致，发布 v2。红框是另一种情况：一批销售被重复装载，没有任何过滤能修好，就停用并提醒，等待重新学习。</a:t>
             </a:r>
             <a:endParaRPr lang="en-US" dirty="0"/>
           </a:p>
@@ -1254,7 +1348,7 @@
           <a:p>
             <a:r>
               <a:rPr lang="en-US" dirty="0"/>
-              <a:t>数据更正之后，第一个用到销售表的查询到来，先检查名称匹配到的电子品类营业额。MAVRA 一校验就发现每个销售键平均有 1.07 行，停用旧定义；然后自动找修复，只有“只算当前行”这一个过滤可行，四项检查都过了，发布 v2，一共 28.7 秒。接着检查门店营业额：它依赖的是同一条规则、同一个数据版本，结果和修复都直接复用，45.8 毫秒就好了。退货率因为要关联销售表，也跟着修好。最后用户智能体收到提醒，按新定义写 SQL，答对。</a:t>
+              <a:t>回到开头那张表，加上 MAVRA 这一栏。追加新数据：定义仍然对，MAVRA 重新校验后继续用；而且电子品类、退货率等 6 个依赖销售表的指标，一共只跑了 2 次校验，其余直接复用。数据更正：MAVRA 发现“每笔销售一行”不成立，停用旧定义，找到唯一的修复“只算当前行”，发布 v2，答对。重复装载：一批数据被导了两次，没法用过滤修好，MAVRA 停用并提醒智能体，智能体自己去重，3 次里 2 次答对。下一页看数据更正之后，MAVRA 具体一步步做了什么。</a:t>
             </a:r>
             <a:endParaRPr lang="en-US" dirty="0"/>
           </a:p>
@@ -1342,7 +1436,7 @@
           <a:p>
             <a:r>
               <a:rPr lang="en-US" dirty="0"/>
-              <a:t>为什么回归测试不能直接用现在的数据？学习题问的是 3 月，而这次更正正好覆盖 3 月。在现在的数据上，智能体当初写的 SQL 本身就会把旧版本也算进去，得到 1489 万；正确的新定义得到 1342 万，两者对不上，正确的修复就被拒了。我们实际跑过这个对照：用现在的数据比，这个修复确实被拒绝。用学习时的数据比，两者都是 1357 万，修复被接受。</a:t>
+              <a:t>数据更正之后，第一个用到销售表的查询到来，先检查名称匹配到的电子品类营业额。MAVRA 一校验就发现每个销售键平均有 1.07 行，停用旧定义；然后自动找修复，只有“只算当前行”这一个过滤可行，四项检查都过了，发布 v2，一共 28.7 秒。接着检查门店营业额：它依赖的是同一条规则、同一个数据版本，结果和修复都直接复用，45.8 毫秒就好了。退货率因为要关联销售表，也跟着修好。最后用户智能体收到提醒，按新定义写 SQL，答对。</a:t>
             </a:r>
             <a:endParaRPr lang="en-US" dirty="0"/>
           </a:p>
@@ -2212,7 +2306,7 @@
                 <a:ea typeface="Microsoft YaHei" pitchFamily="34" charset="-122"/>
                 <a:cs typeface="Microsoft YaHei" pitchFamily="34" charset="-120"/>
               </a:rPr>
-              <a:t>系统结构 · 功能 · 工作流 · 一个真实例子</a:t>
+              <a:t>一个真实例子 · 系统结构 · 功能 · 工作流</a:t>
             </a:r>
             <a:endParaRPr lang="en-US" sz="2200" dirty="0"/>
           </a:p>
@@ -2229,6 +2323,1108 @@
 <file path=ppt/slides/slide10.xml><?xml version="1.0" encoding="utf-8"?>
 <p:sld xmlns:a="http://schemas.openxmlformats.org/drawingml/2006/main" xmlns:r="http://schemas.openxmlformats.org/officeDocument/2006/relationships" xmlns:p="http://schemas.openxmlformats.org/presentationml/2006/main">
   <p:cSld name="Slide 10">
+    <p:spTree>
+      <p:nvGrpSpPr>
+        <p:cNvPr id="1" name=""/>
+        <p:cNvGrpSpPr/>
+        <p:nvPr/>
+      </p:nvGrpSpPr>
+      <p:grpSpPr>
+        <a:xfrm>
+          <a:off x="0" y="0"/>
+          <a:ext cx="0" cy="0"/>
+          <a:chOff x="0" y="0"/>
+          <a:chExt cx="0" cy="0"/>
+        </a:xfrm>
+      </p:grpSpPr>
+      <p:sp>
+        <p:nvSpPr>
+          <p:cNvPr id="2" name="Text 0"/>
+          <p:cNvSpPr/>
+          <p:nvPr>
+            <p:ph idx="100" type="title" hasCustomPrompt="1"/>
+          </p:nvPr>
+        </p:nvSpPr>
+        <p:spPr>
+          <a:xfrm>
+            <a:off x="548640" y="274320"/>
+            <a:ext cx="11094415" cy="685800"/>
+          </a:xfrm>
+          <a:prstGeom prst="rect">
+            <a:avLst/>
+          </a:prstGeom>
+          <a:noFill/>
+          <a:ln/>
+        </p:spPr>
+        <p:txBody>
+          <a:bodyPr wrap="square" lIns="0" tIns="0" rIns="0" bIns="0" rtlCol="0" anchor="ctr"/>
+          <a:lstStyle/>
+          <a:p>
+            <a:pPr algn="l" indent="0" marL="0">
+              <a:buNone/>
+            </a:pPr>
+            <a:r>
+              <a:rPr lang="en-US" sz="3000" b="1" dirty="0">
+                <a:solidFill>
+                  <a:srgbClr val="1F2A37"/>
+                </a:solidFill>
+                <a:latin typeface="Microsoft YaHei" pitchFamily="34" charset="0"/>
+                <a:ea typeface="Microsoft YaHei" pitchFamily="34" charset="-122"/>
+                <a:cs typeface="Microsoft YaHei" pitchFamily="34" charset="-120"/>
+              </a:rPr>
+              <a:t>回归测试为什么要用学习时的数据</a:t>
+            </a:r>
+            <a:endParaRPr lang="en-US" sz="3000" dirty="0"/>
+          </a:p>
+        </p:txBody>
+      </p:sp>
+      <p:sp>
+        <p:nvSpPr>
+          <p:cNvPr id="3" name="Text 1"/>
+          <p:cNvSpPr txBox="1"/>
+          <p:nvPr/>
+        </p:nvSpPr>
+        <p:spPr>
+          <a:xfrm>
+            <a:off x="548640" y="1188720"/>
+            <a:ext cx="11094415" cy="731520"/>
+          </a:xfrm>
+          <a:prstGeom prst="rect">
+            <a:avLst/>
+          </a:prstGeom>
+          <a:noFill/>
+          <a:ln/>
+        </p:spPr>
+        <p:txBody>
+          <a:bodyPr wrap="square" lIns="0" tIns="0" rIns="0" bIns="0" rtlCol="0" anchor="t"/>
+          <a:lstStyle/>
+          <a:p>
+            <a:pPr indent="0" marL="0">
+              <a:buNone/>
+            </a:pPr>
+            <a:r>
+              <a:rPr lang="en-US" sz="1700" dirty="0">
+                <a:solidFill>
+                  <a:srgbClr val="1F2A37"/>
+                </a:solidFill>
+                <a:latin typeface="Microsoft YaHei" pitchFamily="34" charset="0"/>
+                <a:ea typeface="Microsoft YaHei" pitchFamily="34" charset="-122"/>
+                <a:cs typeface="Microsoft YaHei" pitchFamily="34" charset="-120"/>
+              </a:rPr>
+              <a:t>学习题问的是 3 月，正好在被更正的范围里。回归测试拿内置智能体当初的 SQL 当标准，和加了过滤的新定义各算一次 3 月：</a:t>
+            </a:r>
+            <a:endParaRPr lang="en-US" sz="1700" dirty="0"/>
+          </a:p>
+        </p:txBody>
+      </p:sp>
+      <p:graphicFrame>
+        <p:nvGraphicFramePr>
+          <p:cNvPr id="11" name="Table 0"/>
+          <p:cNvGraphicFramePr>
+            <a:graphicFrameLocks noGrp="1"/>
+          </p:cNvGraphicFramePr>
+          <p:nvPr>
+            <p:extLst>
+              <p:ext uri="{D42A27DB-BD31-4B8C-83A1-F6EECF244321}">
+                <p14:modId xmlns:p14="http://schemas.microsoft.com/office/powerpoint/2010/main" val="1579011935"/>
+              </p:ext>
+            </p:extLst>
+          </p:nvPr>
+        </p:nvGraphicFramePr>
+        <p:xfrm>
+          <a:off x="548640" y="2148840"/>
+          <a:ext cx="11094415" cy="914400"/>
+        </p:xfrm>
+        <a:graphic>
+          <a:graphicData uri="http://schemas.openxmlformats.org/drawingml/2006/table">
+            <a:tbl>
+              <a:tblPr/>
+              <a:tblGrid>
+                <a:gridCol w="2377440"/>
+                <a:gridCol w="2377440"/>
+                <a:gridCol w="2377440"/>
+                <a:gridCol w="3959352"/>
+              </a:tblGrid>
+              <a:tr h="594360">
+                <a:tc>
+                  <a:txBody>
+                    <a:bodyPr/>
+                    <a:lstStyle/>
+                    <a:p>
+                      <a:pPr indent="0" marL="0">
+                        <a:buNone/>
+                      </a:pPr>
+                      <a:r>
+                        <a:rPr lang="en-US" sz="1800" b="1" dirty="0">
+                          <a:solidFill>
+                            <a:srgbClr val="1F2A37"/>
+                          </a:solidFill>
+                          <a:latin typeface="Microsoft YaHei" pitchFamily="34" charset="0"/>
+                          <a:ea typeface="Microsoft YaHei" pitchFamily="34" charset="-122"/>
+                          <a:cs typeface="Microsoft YaHei" pitchFamily="34" charset="-120"/>
+                        </a:rPr>
+                        <a:t>用哪份数据比</a:t>
+                      </a:r>
+                      <a:endParaRPr lang="en-US" sz="1800" dirty="0">
+                        <a:latin typeface="Microsoft YaHei" charset="0"/>
+                        <a:ea typeface="Microsoft YaHei" charset="0"/>
+                        <a:cs typeface="Microsoft YaHei" charset="0"/>
+                      </a:endParaRPr>
+                    </a:p>
+                  </a:txBody>
+                  <a:tcPr marL="91440" marR="91440" marT="54864" marB="54864" anchor="ctr">
+                    <a:lnL w="12700" cap="flat" cmpd="sng" algn="ctr">
+                      <a:solidFill>
+                        <a:srgbClr val="D5DBE3"/>
+                      </a:solidFill>
+                      <a:prstDash val="solid"/>
+                      <a:round/>
+                      <a:headEnd type="none" w="med" len="med"/>
+                      <a:tailEnd type="none" w="med" len="med"/>
+                    </a:lnL>
+                    <a:lnR w="12700" cap="flat" cmpd="sng" algn="ctr">
+                      <a:solidFill>
+                        <a:srgbClr val="D5DBE3"/>
+                      </a:solidFill>
+                      <a:prstDash val="solid"/>
+                      <a:round/>
+                      <a:headEnd type="none" w="med" len="med"/>
+                      <a:tailEnd type="none" w="med" len="med"/>
+                    </a:lnR>
+                    <a:lnT w="12700" cap="flat" cmpd="sng" algn="ctr">
+                      <a:solidFill>
+                        <a:srgbClr val="D5DBE3"/>
+                      </a:solidFill>
+                      <a:prstDash val="solid"/>
+                      <a:round/>
+                      <a:headEnd type="none" w="med" len="med"/>
+                      <a:tailEnd type="none" w="med" len="med"/>
+                    </a:lnT>
+                    <a:lnB w="12700" cap="flat" cmpd="sng" algn="ctr">
+                      <a:solidFill>
+                        <a:srgbClr val="D5DBE3"/>
+                      </a:solidFill>
+                      <a:prstDash val="solid"/>
+                      <a:round/>
+                      <a:headEnd type="none" w="med" len="med"/>
+                      <a:tailEnd type="none" w="med" len="med"/>
+                    </a:lnB>
+                    <a:solidFill>
+                      <a:srgbClr val="F1F3F6"/>
+                    </a:solidFill>
+                  </a:tcPr>
+                </a:tc>
+                <a:tc>
+                  <a:txBody>
+                    <a:bodyPr/>
+                    <a:lstStyle/>
+                    <a:p>
+                      <a:pPr indent="0" marL="0">
+                        <a:buNone/>
+                      </a:pPr>
+                      <a:r>
+                        <a:rPr lang="en-US" sz="1800" b="1" dirty="0">
+                          <a:solidFill>
+                            <a:srgbClr val="1F2A37"/>
+                          </a:solidFill>
+                          <a:latin typeface="Microsoft YaHei" pitchFamily="34" charset="0"/>
+                          <a:ea typeface="Microsoft YaHei" pitchFamily="34" charset="-122"/>
+                          <a:cs typeface="Microsoft YaHei" pitchFamily="34" charset="-120"/>
+                        </a:rPr>
+                        <a:t>当初的 SQL</a:t>
+                      </a:r>
+                      <a:endParaRPr lang="en-US" sz="1800" dirty="0">
+                        <a:latin typeface="Microsoft YaHei" charset="0"/>
+                        <a:ea typeface="Microsoft YaHei" charset="0"/>
+                        <a:cs typeface="Microsoft YaHei" charset="0"/>
+                      </a:endParaRPr>
+                    </a:p>
+                  </a:txBody>
+                  <a:tcPr marL="91440" marR="91440" marT="54864" marB="54864" anchor="ctr">
+                    <a:lnL w="12700" cap="flat" cmpd="sng" algn="ctr">
+                      <a:solidFill>
+                        <a:srgbClr val="D5DBE3"/>
+                      </a:solidFill>
+                      <a:prstDash val="solid"/>
+                      <a:round/>
+                      <a:headEnd type="none" w="med" len="med"/>
+                      <a:tailEnd type="none" w="med" len="med"/>
+                    </a:lnL>
+                    <a:lnR w="12700" cap="flat" cmpd="sng" algn="ctr">
+                      <a:solidFill>
+                        <a:srgbClr val="D5DBE3"/>
+                      </a:solidFill>
+                      <a:prstDash val="solid"/>
+                      <a:round/>
+                      <a:headEnd type="none" w="med" len="med"/>
+                      <a:tailEnd type="none" w="med" len="med"/>
+                    </a:lnR>
+                    <a:lnT w="12700" cap="flat" cmpd="sng" algn="ctr">
+                      <a:solidFill>
+                        <a:srgbClr val="D5DBE3"/>
+                      </a:solidFill>
+                      <a:prstDash val="solid"/>
+                      <a:round/>
+                      <a:headEnd type="none" w="med" len="med"/>
+                      <a:tailEnd type="none" w="med" len="med"/>
+                    </a:lnT>
+                    <a:lnB w="12700" cap="flat" cmpd="sng" algn="ctr">
+                      <a:solidFill>
+                        <a:srgbClr val="D5DBE3"/>
+                      </a:solidFill>
+                      <a:prstDash val="solid"/>
+                      <a:round/>
+                      <a:headEnd type="none" w="med" len="med"/>
+                      <a:tailEnd type="none" w="med" len="med"/>
+                    </a:lnB>
+                    <a:solidFill>
+                      <a:srgbClr val="F1F3F6"/>
+                    </a:solidFill>
+                  </a:tcPr>
+                </a:tc>
+                <a:tc>
+                  <a:txBody>
+                    <a:bodyPr/>
+                    <a:lstStyle/>
+                    <a:p>
+                      <a:pPr indent="0" marL="0">
+                        <a:buNone/>
+                      </a:pPr>
+                      <a:r>
+                        <a:rPr lang="en-US" sz="1800" b="1" dirty="0">
+                          <a:solidFill>
+                            <a:srgbClr val="1F2A37"/>
+                          </a:solidFill>
+                          <a:latin typeface="Microsoft YaHei" pitchFamily="34" charset="0"/>
+                          <a:ea typeface="Microsoft YaHei" pitchFamily="34" charset="-122"/>
+                          <a:cs typeface="Microsoft YaHei" pitchFamily="34" charset="-120"/>
+                        </a:rPr>
+                        <a:t>新定义（v2）</a:t>
+                      </a:r>
+                      <a:endParaRPr lang="en-US" sz="1800" dirty="0">
+                        <a:latin typeface="Microsoft YaHei" charset="0"/>
+                        <a:ea typeface="Microsoft YaHei" charset="0"/>
+                        <a:cs typeface="Microsoft YaHei" charset="0"/>
+                      </a:endParaRPr>
+                    </a:p>
+                  </a:txBody>
+                  <a:tcPr marL="91440" marR="91440" marT="54864" marB="54864" anchor="ctr">
+                    <a:lnL w="12700" cap="flat" cmpd="sng" algn="ctr">
+                      <a:solidFill>
+                        <a:srgbClr val="D5DBE3"/>
+                      </a:solidFill>
+                      <a:prstDash val="solid"/>
+                      <a:round/>
+                      <a:headEnd type="none" w="med" len="med"/>
+                      <a:tailEnd type="none" w="med" len="med"/>
+                    </a:lnL>
+                    <a:lnR w="12700" cap="flat" cmpd="sng" algn="ctr">
+                      <a:solidFill>
+                        <a:srgbClr val="D5DBE3"/>
+                      </a:solidFill>
+                      <a:prstDash val="solid"/>
+                      <a:round/>
+                      <a:headEnd type="none" w="med" len="med"/>
+                      <a:tailEnd type="none" w="med" len="med"/>
+                    </a:lnR>
+                    <a:lnT w="12700" cap="flat" cmpd="sng" algn="ctr">
+                      <a:solidFill>
+                        <a:srgbClr val="D5DBE3"/>
+                      </a:solidFill>
+                      <a:prstDash val="solid"/>
+                      <a:round/>
+                      <a:headEnd type="none" w="med" len="med"/>
+                      <a:tailEnd type="none" w="med" len="med"/>
+                    </a:lnT>
+                    <a:lnB w="12700" cap="flat" cmpd="sng" algn="ctr">
+                      <a:solidFill>
+                        <a:srgbClr val="D5DBE3"/>
+                      </a:solidFill>
+                      <a:prstDash val="solid"/>
+                      <a:round/>
+                      <a:headEnd type="none" w="med" len="med"/>
+                      <a:tailEnd type="none" w="med" len="med"/>
+                    </a:lnB>
+                    <a:solidFill>
+                      <a:srgbClr val="F1F3F6"/>
+                    </a:solidFill>
+                  </a:tcPr>
+                </a:tc>
+                <a:tc>
+                  <a:txBody>
+                    <a:bodyPr/>
+                    <a:lstStyle/>
+                    <a:p>
+                      <a:pPr indent="0" marL="0">
+                        <a:buNone/>
+                      </a:pPr>
+                      <a:r>
+                        <a:rPr lang="en-US" sz="1800" b="1" dirty="0">
+                          <a:solidFill>
+                            <a:srgbClr val="1F2A37"/>
+                          </a:solidFill>
+                          <a:latin typeface="Microsoft YaHei" pitchFamily="34" charset="0"/>
+                          <a:ea typeface="Microsoft YaHei" pitchFamily="34" charset="-122"/>
+                          <a:cs typeface="Microsoft YaHei" pitchFamily="34" charset="-120"/>
+                        </a:rPr>
+                        <a:t>结果</a:t>
+                      </a:r>
+                      <a:endParaRPr lang="en-US" sz="1800" dirty="0">
+                        <a:latin typeface="Microsoft YaHei" charset="0"/>
+                        <a:ea typeface="Microsoft YaHei" charset="0"/>
+                        <a:cs typeface="Microsoft YaHei" charset="0"/>
+                      </a:endParaRPr>
+                    </a:p>
+                  </a:txBody>
+                  <a:tcPr marL="91440" marR="91440" marT="54864" marB="54864" anchor="ctr">
+                    <a:lnL w="12700" cap="flat" cmpd="sng" algn="ctr">
+                      <a:solidFill>
+                        <a:srgbClr val="D5DBE3"/>
+                      </a:solidFill>
+                      <a:prstDash val="solid"/>
+                      <a:round/>
+                      <a:headEnd type="none" w="med" len="med"/>
+                      <a:tailEnd type="none" w="med" len="med"/>
+                    </a:lnL>
+                    <a:lnR w="12700" cap="flat" cmpd="sng" algn="ctr">
+                      <a:solidFill>
+                        <a:srgbClr val="D5DBE3"/>
+                      </a:solidFill>
+                      <a:prstDash val="solid"/>
+                      <a:round/>
+                      <a:headEnd type="none" w="med" len="med"/>
+                      <a:tailEnd type="none" w="med" len="med"/>
+                    </a:lnR>
+                    <a:lnT w="12700" cap="flat" cmpd="sng" algn="ctr">
+                      <a:solidFill>
+                        <a:srgbClr val="D5DBE3"/>
+                      </a:solidFill>
+                      <a:prstDash val="solid"/>
+                      <a:round/>
+                      <a:headEnd type="none" w="med" len="med"/>
+                      <a:tailEnd type="none" w="med" len="med"/>
+                    </a:lnT>
+                    <a:lnB w="12700" cap="flat" cmpd="sng" algn="ctr">
+                      <a:solidFill>
+                        <a:srgbClr val="D5DBE3"/>
+                      </a:solidFill>
+                      <a:prstDash val="solid"/>
+                      <a:round/>
+                      <a:headEnd type="none" w="med" len="med"/>
+                      <a:tailEnd type="none" w="med" len="med"/>
+                    </a:lnB>
+                    <a:solidFill>
+                      <a:srgbClr val="F1F3F6"/>
+                    </a:solidFill>
+                  </a:tcPr>
+                </a:tc>
+              </a:tr>
+              <a:tr h="594360">
+                <a:tc>
+                  <a:txBody>
+                    <a:bodyPr/>
+                    <a:lstStyle/>
+                    <a:p>
+                      <a:pPr indent="0" marL="0">
+                        <a:buNone/>
+                      </a:pPr>
+                      <a:r>
+                        <a:rPr lang="en-US" sz="1800" dirty="0">
+                          <a:solidFill>
+                            <a:srgbClr val="1F2A37"/>
+                          </a:solidFill>
+                          <a:latin typeface="Microsoft YaHei" pitchFamily="34" charset="0"/>
+                          <a:ea typeface="Microsoft YaHei" pitchFamily="34" charset="-122"/>
+                          <a:cs typeface="Microsoft YaHei" pitchFamily="34" charset="-120"/>
+                        </a:rPr>
+                        <a:t>学习时的数据</a:t>
+                      </a:r>
+                      <a:endParaRPr lang="en-US" sz="1800" dirty="0">
+                        <a:latin typeface="Microsoft YaHei" charset="0"/>
+                        <a:ea typeface="Microsoft YaHei" charset="0"/>
+                        <a:cs typeface="Microsoft YaHei" charset="0"/>
+                      </a:endParaRPr>
+                    </a:p>
+                  </a:txBody>
+                  <a:tcPr marL="91440" marR="91440" marT="54864" marB="54864" anchor="ctr">
+                    <a:lnL w="12700" cap="flat" cmpd="sng" algn="ctr">
+                      <a:solidFill>
+                        <a:srgbClr val="D5DBE3"/>
+                      </a:solidFill>
+                      <a:prstDash val="solid"/>
+                      <a:round/>
+                      <a:headEnd type="none" w="med" len="med"/>
+                      <a:tailEnd type="none" w="med" len="med"/>
+                    </a:lnL>
+                    <a:lnR w="12700" cap="flat" cmpd="sng" algn="ctr">
+                      <a:solidFill>
+                        <a:srgbClr val="D5DBE3"/>
+                      </a:solidFill>
+                      <a:prstDash val="solid"/>
+                      <a:round/>
+                      <a:headEnd type="none" w="med" len="med"/>
+                      <a:tailEnd type="none" w="med" len="med"/>
+                    </a:lnR>
+                    <a:lnT w="12700" cap="flat" cmpd="sng" algn="ctr">
+                      <a:solidFill>
+                        <a:srgbClr val="D5DBE3"/>
+                      </a:solidFill>
+                      <a:prstDash val="solid"/>
+                      <a:round/>
+                      <a:headEnd type="none" w="med" len="med"/>
+                      <a:tailEnd type="none" w="med" len="med"/>
+                    </a:lnT>
+                    <a:lnB w="12700" cap="flat" cmpd="sng" algn="ctr">
+                      <a:solidFill>
+                        <a:srgbClr val="D5DBE3"/>
+                      </a:solidFill>
+                      <a:prstDash val="solid"/>
+                      <a:round/>
+                      <a:headEnd type="none" w="med" len="med"/>
+                      <a:tailEnd type="none" w="med" len="med"/>
+                    </a:lnB>
+                  </a:tcPr>
+                </a:tc>
+                <a:tc>
+                  <a:txBody>
+                    <a:bodyPr/>
+                    <a:lstStyle/>
+                    <a:p>
+                      <a:pPr indent="0" marL="0">
+                        <a:buNone/>
+                      </a:pPr>
+                      <a:r>
+                        <a:rPr lang="en-US" sz="1800" dirty="0">
+                          <a:solidFill>
+                            <a:srgbClr val="1F2A37"/>
+                          </a:solidFill>
+                          <a:latin typeface="Microsoft YaHei" pitchFamily="34" charset="0"/>
+                          <a:ea typeface="Microsoft YaHei" pitchFamily="34" charset="-122"/>
+                          <a:cs typeface="Microsoft YaHei" pitchFamily="34" charset="-120"/>
+                        </a:rPr>
+                        <a:t>1357.0 万</a:t>
+                      </a:r>
+                      <a:endParaRPr lang="en-US" sz="1800" dirty="0">
+                        <a:latin typeface="Microsoft YaHei" charset="0"/>
+                        <a:ea typeface="Microsoft YaHei" charset="0"/>
+                        <a:cs typeface="Microsoft YaHei" charset="0"/>
+                      </a:endParaRPr>
+                    </a:p>
+                  </a:txBody>
+                  <a:tcPr marL="91440" marR="91440" marT="54864" marB="54864" anchor="ctr">
+                    <a:lnL w="12700" cap="flat" cmpd="sng" algn="ctr">
+                      <a:solidFill>
+                        <a:srgbClr val="D5DBE3"/>
+                      </a:solidFill>
+                      <a:prstDash val="solid"/>
+                      <a:round/>
+                      <a:headEnd type="none" w="med" len="med"/>
+                      <a:tailEnd type="none" w="med" len="med"/>
+                    </a:lnL>
+                    <a:lnR w="12700" cap="flat" cmpd="sng" algn="ctr">
+                      <a:solidFill>
+                        <a:srgbClr val="D5DBE3"/>
+                      </a:solidFill>
+                      <a:prstDash val="solid"/>
+                      <a:round/>
+                      <a:headEnd type="none" w="med" len="med"/>
+                      <a:tailEnd type="none" w="med" len="med"/>
+                    </a:lnR>
+                    <a:lnT w="12700" cap="flat" cmpd="sng" algn="ctr">
+                      <a:solidFill>
+                        <a:srgbClr val="D5DBE3"/>
+                      </a:solidFill>
+                      <a:prstDash val="solid"/>
+                      <a:round/>
+                      <a:headEnd type="none" w="med" len="med"/>
+                      <a:tailEnd type="none" w="med" len="med"/>
+                    </a:lnT>
+                    <a:lnB w="12700" cap="flat" cmpd="sng" algn="ctr">
+                      <a:solidFill>
+                        <a:srgbClr val="D5DBE3"/>
+                      </a:solidFill>
+                      <a:prstDash val="solid"/>
+                      <a:round/>
+                      <a:headEnd type="none" w="med" len="med"/>
+                      <a:tailEnd type="none" w="med" len="med"/>
+                    </a:lnB>
+                  </a:tcPr>
+                </a:tc>
+                <a:tc>
+                  <a:txBody>
+                    <a:bodyPr/>
+                    <a:lstStyle/>
+                    <a:p>
+                      <a:pPr indent="0" marL="0">
+                        <a:buNone/>
+                      </a:pPr>
+                      <a:r>
+                        <a:rPr lang="en-US" sz="1800" dirty="0">
+                          <a:solidFill>
+                            <a:srgbClr val="1F2A37"/>
+                          </a:solidFill>
+                          <a:latin typeface="Microsoft YaHei" pitchFamily="34" charset="0"/>
+                          <a:ea typeface="Microsoft YaHei" pitchFamily="34" charset="-122"/>
+                          <a:cs typeface="Microsoft YaHei" pitchFamily="34" charset="-120"/>
+                        </a:rPr>
+                        <a:t>1357.0 万</a:t>
+                      </a:r>
+                      <a:endParaRPr lang="en-US" sz="1800" dirty="0">
+                        <a:latin typeface="Microsoft YaHei" charset="0"/>
+                        <a:ea typeface="Microsoft YaHei" charset="0"/>
+                        <a:cs typeface="Microsoft YaHei" charset="0"/>
+                      </a:endParaRPr>
+                    </a:p>
+                  </a:txBody>
+                  <a:tcPr marL="91440" marR="91440" marT="54864" marB="54864" anchor="ctr">
+                    <a:lnL w="12700" cap="flat" cmpd="sng" algn="ctr">
+                      <a:solidFill>
+                        <a:srgbClr val="D5DBE3"/>
+                      </a:solidFill>
+                      <a:prstDash val="solid"/>
+                      <a:round/>
+                      <a:headEnd type="none" w="med" len="med"/>
+                      <a:tailEnd type="none" w="med" len="med"/>
+                    </a:lnL>
+                    <a:lnR w="12700" cap="flat" cmpd="sng" algn="ctr">
+                      <a:solidFill>
+                        <a:srgbClr val="D5DBE3"/>
+                      </a:solidFill>
+                      <a:prstDash val="solid"/>
+                      <a:round/>
+                      <a:headEnd type="none" w="med" len="med"/>
+                      <a:tailEnd type="none" w="med" len="med"/>
+                    </a:lnR>
+                    <a:lnT w="12700" cap="flat" cmpd="sng" algn="ctr">
+                      <a:solidFill>
+                        <a:srgbClr val="D5DBE3"/>
+                      </a:solidFill>
+                      <a:prstDash val="solid"/>
+                      <a:round/>
+                      <a:headEnd type="none" w="med" len="med"/>
+                      <a:tailEnd type="none" w="med" len="med"/>
+                    </a:lnT>
+                    <a:lnB w="12700" cap="flat" cmpd="sng" algn="ctr">
+                      <a:solidFill>
+                        <a:srgbClr val="D5DBE3"/>
+                      </a:solidFill>
+                      <a:prstDash val="solid"/>
+                      <a:round/>
+                      <a:headEnd type="none" w="med" len="med"/>
+                      <a:tailEnd type="none" w="med" len="med"/>
+                    </a:lnB>
+                  </a:tcPr>
+                </a:tc>
+                <a:tc>
+                  <a:txBody>
+                    <a:bodyPr/>
+                    <a:lstStyle/>
+                    <a:p>
+                      <a:pPr indent="0" marL="0">
+                        <a:buNone/>
+                      </a:pPr>
+                      <a:r>
+                        <a:rPr lang="en-US" sz="1800" b="1" dirty="0">
+                          <a:solidFill>
+                            <a:srgbClr val="2E7D4F"/>
+                          </a:solidFill>
+                          <a:latin typeface="Microsoft YaHei" pitchFamily="34" charset="0"/>
+                          <a:ea typeface="Microsoft YaHei" pitchFamily="34" charset="-122"/>
+                          <a:cs typeface="Microsoft YaHei" pitchFamily="34" charset="-120"/>
+                        </a:rPr>
+                        <a:t>一致 → 接受修复 ✓</a:t>
+                      </a:r>
+                      <a:endParaRPr lang="en-US" sz="1800" dirty="0">
+                        <a:latin typeface="Microsoft YaHei" charset="0"/>
+                        <a:ea typeface="Microsoft YaHei" charset="0"/>
+                        <a:cs typeface="Microsoft YaHei" charset="0"/>
+                      </a:endParaRPr>
+                    </a:p>
+                  </a:txBody>
+                  <a:tcPr marL="91440" marR="91440" marT="54864" marB="54864" anchor="ctr">
+                    <a:lnL w="12700" cap="flat" cmpd="sng" algn="ctr">
+                      <a:solidFill>
+                        <a:srgbClr val="D5DBE3"/>
+                      </a:solidFill>
+                      <a:prstDash val="solid"/>
+                      <a:round/>
+                      <a:headEnd type="none" w="med" len="med"/>
+                      <a:tailEnd type="none" w="med" len="med"/>
+                    </a:lnL>
+                    <a:lnR w="12700" cap="flat" cmpd="sng" algn="ctr">
+                      <a:solidFill>
+                        <a:srgbClr val="D5DBE3"/>
+                      </a:solidFill>
+                      <a:prstDash val="solid"/>
+                      <a:round/>
+                      <a:headEnd type="none" w="med" len="med"/>
+                      <a:tailEnd type="none" w="med" len="med"/>
+                    </a:lnR>
+                    <a:lnT w="12700" cap="flat" cmpd="sng" algn="ctr">
+                      <a:solidFill>
+                        <a:srgbClr val="D5DBE3"/>
+                      </a:solidFill>
+                      <a:prstDash val="solid"/>
+                      <a:round/>
+                      <a:headEnd type="none" w="med" len="med"/>
+                      <a:tailEnd type="none" w="med" len="med"/>
+                    </a:lnT>
+                    <a:lnB w="12700" cap="flat" cmpd="sng" algn="ctr">
+                      <a:solidFill>
+                        <a:srgbClr val="D5DBE3"/>
+                      </a:solidFill>
+                      <a:prstDash val="solid"/>
+                      <a:round/>
+                      <a:headEnd type="none" w="med" len="med"/>
+                      <a:tailEnd type="none" w="med" len="med"/>
+                    </a:lnB>
+                  </a:tcPr>
+                </a:tc>
+              </a:tr>
+              <a:tr h="594360">
+                <a:tc>
+                  <a:txBody>
+                    <a:bodyPr/>
+                    <a:lstStyle/>
+                    <a:p>
+                      <a:pPr indent="0" marL="0">
+                        <a:buNone/>
+                      </a:pPr>
+                      <a:r>
+                        <a:rPr lang="en-US" sz="1800" dirty="0">
+                          <a:solidFill>
+                            <a:srgbClr val="1F2A37"/>
+                          </a:solidFill>
+                          <a:latin typeface="Microsoft YaHei" pitchFamily="34" charset="0"/>
+                          <a:ea typeface="Microsoft YaHei" pitchFamily="34" charset="-122"/>
+                          <a:cs typeface="Microsoft YaHei" pitchFamily="34" charset="-120"/>
+                        </a:rPr>
+                        <a:t>现在的数据</a:t>
+                      </a:r>
+                      <a:endParaRPr lang="en-US" sz="1800" dirty="0">
+                        <a:latin typeface="Microsoft YaHei" charset="0"/>
+                        <a:ea typeface="Microsoft YaHei" charset="0"/>
+                        <a:cs typeface="Microsoft YaHei" charset="0"/>
+                      </a:endParaRPr>
+                    </a:p>
+                  </a:txBody>
+                  <a:tcPr marL="91440" marR="91440" marT="54864" marB="54864" anchor="ctr">
+                    <a:lnL w="12700" cap="flat" cmpd="sng" algn="ctr">
+                      <a:solidFill>
+                        <a:srgbClr val="D5DBE3"/>
+                      </a:solidFill>
+                      <a:prstDash val="solid"/>
+                      <a:round/>
+                      <a:headEnd type="none" w="med" len="med"/>
+                      <a:tailEnd type="none" w="med" len="med"/>
+                    </a:lnL>
+                    <a:lnR w="12700" cap="flat" cmpd="sng" algn="ctr">
+                      <a:solidFill>
+                        <a:srgbClr val="D5DBE3"/>
+                      </a:solidFill>
+                      <a:prstDash val="solid"/>
+                      <a:round/>
+                      <a:headEnd type="none" w="med" len="med"/>
+                      <a:tailEnd type="none" w="med" len="med"/>
+                    </a:lnR>
+                    <a:lnT w="12700" cap="flat" cmpd="sng" algn="ctr">
+                      <a:solidFill>
+                        <a:srgbClr val="D5DBE3"/>
+                      </a:solidFill>
+                      <a:prstDash val="solid"/>
+                      <a:round/>
+                      <a:headEnd type="none" w="med" len="med"/>
+                      <a:tailEnd type="none" w="med" len="med"/>
+                    </a:lnT>
+                    <a:lnB w="12700" cap="flat" cmpd="sng" algn="ctr">
+                      <a:solidFill>
+                        <a:srgbClr val="D5DBE3"/>
+                      </a:solidFill>
+                      <a:prstDash val="solid"/>
+                      <a:round/>
+                      <a:headEnd type="none" w="med" len="med"/>
+                      <a:tailEnd type="none" w="med" len="med"/>
+                    </a:lnB>
+                  </a:tcPr>
+                </a:tc>
+                <a:tc>
+                  <a:txBody>
+                    <a:bodyPr/>
+                    <a:lstStyle/>
+                    <a:p>
+                      <a:pPr indent="0" marL="0">
+                        <a:buNone/>
+                      </a:pPr>
+                      <a:r>
+                        <a:rPr lang="en-US" sz="1800" dirty="0">
+                          <a:solidFill>
+                            <a:srgbClr val="1F2A37"/>
+                          </a:solidFill>
+                          <a:latin typeface="Microsoft YaHei" pitchFamily="34" charset="0"/>
+                          <a:ea typeface="Microsoft YaHei" pitchFamily="34" charset="-122"/>
+                          <a:cs typeface="Microsoft YaHei" pitchFamily="34" charset="-120"/>
+                        </a:rPr>
+                        <a:t>1489.1 万</a:t>
+                      </a:r>
+                      <a:endParaRPr lang="en-US" sz="1800" dirty="0">
+                        <a:latin typeface="Microsoft YaHei" charset="0"/>
+                        <a:ea typeface="Microsoft YaHei" charset="0"/>
+                        <a:cs typeface="Microsoft YaHei" charset="0"/>
+                      </a:endParaRPr>
+                    </a:p>
+                  </a:txBody>
+                  <a:tcPr marL="91440" marR="91440" marT="54864" marB="54864" anchor="ctr">
+                    <a:lnL w="12700" cap="flat" cmpd="sng" algn="ctr">
+                      <a:solidFill>
+                        <a:srgbClr val="D5DBE3"/>
+                      </a:solidFill>
+                      <a:prstDash val="solid"/>
+                      <a:round/>
+                      <a:headEnd type="none" w="med" len="med"/>
+                      <a:tailEnd type="none" w="med" len="med"/>
+                    </a:lnL>
+                    <a:lnR w="12700" cap="flat" cmpd="sng" algn="ctr">
+                      <a:solidFill>
+                        <a:srgbClr val="D5DBE3"/>
+                      </a:solidFill>
+                      <a:prstDash val="solid"/>
+                      <a:round/>
+                      <a:headEnd type="none" w="med" len="med"/>
+                      <a:tailEnd type="none" w="med" len="med"/>
+                    </a:lnR>
+                    <a:lnT w="12700" cap="flat" cmpd="sng" algn="ctr">
+                      <a:solidFill>
+                        <a:srgbClr val="D5DBE3"/>
+                      </a:solidFill>
+                      <a:prstDash val="solid"/>
+                      <a:round/>
+                      <a:headEnd type="none" w="med" len="med"/>
+                      <a:tailEnd type="none" w="med" len="med"/>
+                    </a:lnT>
+                    <a:lnB w="12700" cap="flat" cmpd="sng" algn="ctr">
+                      <a:solidFill>
+                        <a:srgbClr val="D5DBE3"/>
+                      </a:solidFill>
+                      <a:prstDash val="solid"/>
+                      <a:round/>
+                      <a:headEnd type="none" w="med" len="med"/>
+                      <a:tailEnd type="none" w="med" len="med"/>
+                    </a:lnB>
+                  </a:tcPr>
+                </a:tc>
+                <a:tc>
+                  <a:txBody>
+                    <a:bodyPr/>
+                    <a:lstStyle/>
+                    <a:p>
+                      <a:pPr indent="0" marL="0">
+                        <a:buNone/>
+                      </a:pPr>
+                      <a:r>
+                        <a:rPr lang="en-US" sz="1800" dirty="0">
+                          <a:solidFill>
+                            <a:srgbClr val="1F2A37"/>
+                          </a:solidFill>
+                          <a:latin typeface="Microsoft YaHei" pitchFamily="34" charset="0"/>
+                          <a:ea typeface="Microsoft YaHei" pitchFamily="34" charset="-122"/>
+                          <a:cs typeface="Microsoft YaHei" pitchFamily="34" charset="-120"/>
+                        </a:rPr>
+                        <a:t>1342.4 万</a:t>
+                      </a:r>
+                      <a:endParaRPr lang="en-US" sz="1800" dirty="0">
+                        <a:latin typeface="Microsoft YaHei" charset="0"/>
+                        <a:ea typeface="Microsoft YaHei" charset="0"/>
+                        <a:cs typeface="Microsoft YaHei" charset="0"/>
+                      </a:endParaRPr>
+                    </a:p>
+                  </a:txBody>
+                  <a:tcPr marL="91440" marR="91440" marT="54864" marB="54864" anchor="ctr">
+                    <a:lnL w="12700" cap="flat" cmpd="sng" algn="ctr">
+                      <a:solidFill>
+                        <a:srgbClr val="D5DBE3"/>
+                      </a:solidFill>
+                      <a:prstDash val="solid"/>
+                      <a:round/>
+                      <a:headEnd type="none" w="med" len="med"/>
+                      <a:tailEnd type="none" w="med" len="med"/>
+                    </a:lnL>
+                    <a:lnR w="12700" cap="flat" cmpd="sng" algn="ctr">
+                      <a:solidFill>
+                        <a:srgbClr val="D5DBE3"/>
+                      </a:solidFill>
+                      <a:prstDash val="solid"/>
+                      <a:round/>
+                      <a:headEnd type="none" w="med" len="med"/>
+                      <a:tailEnd type="none" w="med" len="med"/>
+                    </a:lnR>
+                    <a:lnT w="12700" cap="flat" cmpd="sng" algn="ctr">
+                      <a:solidFill>
+                        <a:srgbClr val="D5DBE3"/>
+                      </a:solidFill>
+                      <a:prstDash val="solid"/>
+                      <a:round/>
+                      <a:headEnd type="none" w="med" len="med"/>
+                      <a:tailEnd type="none" w="med" len="med"/>
+                    </a:lnT>
+                    <a:lnB w="12700" cap="flat" cmpd="sng" algn="ctr">
+                      <a:solidFill>
+                        <a:srgbClr val="D5DBE3"/>
+                      </a:solidFill>
+                      <a:prstDash val="solid"/>
+                      <a:round/>
+                      <a:headEnd type="none" w="med" len="med"/>
+                      <a:tailEnd type="none" w="med" len="med"/>
+                    </a:lnB>
+                  </a:tcPr>
+                </a:tc>
+                <a:tc>
+                  <a:txBody>
+                    <a:bodyPr/>
+                    <a:lstStyle/>
+                    <a:p>
+                      <a:pPr indent="0" marL="0">
+                        <a:buNone/>
+                      </a:pPr>
+                      <a:r>
+                        <a:rPr lang="en-US" sz="1800" b="1" dirty="0">
+                          <a:solidFill>
+                            <a:srgbClr val="B5392A"/>
+                          </a:solidFill>
+                          <a:latin typeface="Microsoft YaHei" pitchFamily="34" charset="0"/>
+                          <a:ea typeface="Microsoft YaHei" pitchFamily="34" charset="-122"/>
+                          <a:cs typeface="Microsoft YaHei" pitchFamily="34" charset="-120"/>
+                        </a:rPr>
+                        <a:t>不一致 → 拒绝了正确的修复 ✗</a:t>
+                      </a:r>
+                      <a:endParaRPr lang="en-US" sz="1800" dirty="0">
+                        <a:latin typeface="Microsoft YaHei" charset="0"/>
+                        <a:ea typeface="Microsoft YaHei" charset="0"/>
+                        <a:cs typeface="Microsoft YaHei" charset="0"/>
+                      </a:endParaRPr>
+                    </a:p>
+                  </a:txBody>
+                  <a:tcPr marL="91440" marR="91440" marT="54864" marB="54864" anchor="ctr">
+                    <a:lnL w="12700" cap="flat" cmpd="sng" algn="ctr">
+                      <a:solidFill>
+                        <a:srgbClr val="D5DBE3"/>
+                      </a:solidFill>
+                      <a:prstDash val="solid"/>
+                      <a:round/>
+                      <a:headEnd type="none" w="med" len="med"/>
+                      <a:tailEnd type="none" w="med" len="med"/>
+                    </a:lnL>
+                    <a:lnR w="12700" cap="flat" cmpd="sng" algn="ctr">
+                      <a:solidFill>
+                        <a:srgbClr val="D5DBE3"/>
+                      </a:solidFill>
+                      <a:prstDash val="solid"/>
+                      <a:round/>
+                      <a:headEnd type="none" w="med" len="med"/>
+                      <a:tailEnd type="none" w="med" len="med"/>
+                    </a:lnR>
+                    <a:lnT w="12700" cap="flat" cmpd="sng" algn="ctr">
+                      <a:solidFill>
+                        <a:srgbClr val="D5DBE3"/>
+                      </a:solidFill>
+                      <a:prstDash val="solid"/>
+                      <a:round/>
+                      <a:headEnd type="none" w="med" len="med"/>
+                      <a:tailEnd type="none" w="med" len="med"/>
+                    </a:lnT>
+                    <a:lnB w="12700" cap="flat" cmpd="sng" algn="ctr">
+                      <a:solidFill>
+                        <a:srgbClr val="D5DBE3"/>
+                      </a:solidFill>
+                      <a:prstDash val="solid"/>
+                      <a:round/>
+                      <a:headEnd type="none" w="med" len="med"/>
+                      <a:tailEnd type="none" w="med" len="med"/>
+                    </a:lnB>
+                  </a:tcPr>
+                </a:tc>
+              </a:tr>
+            </a:tbl>
+          </a:graphicData>
+        </a:graphic>
+      </p:graphicFrame>
+      <p:sp>
+        <p:nvSpPr>
+          <p:cNvPr id="5" name="Shape 2"/>
+          <p:cNvSpPr/>
+          <p:nvPr/>
+        </p:nvSpPr>
+        <p:spPr>
+          <a:xfrm>
+            <a:off x="548640" y="4206240"/>
+            <a:ext cx="11094415" cy="1371600"/>
+          </a:xfrm>
+          <a:prstGeom prst="roundRect">
+            <a:avLst>
+              <a:gd name="adj" fmla="val 5333"/>
+            </a:avLst>
+          </a:prstGeom>
+          <a:solidFill>
+            <a:srgbClr val="E8F0FA"/>
+          </a:solidFill>
+          <a:ln w="12700">
+            <a:solidFill>
+              <a:srgbClr val="E8F0FA"/>
+            </a:solidFill>
+            <a:prstDash val="solid"/>
+          </a:ln>
+        </p:spPr>
+      </p:sp>
+      <p:sp>
+        <p:nvSpPr>
+          <p:cNvPr id="6" name="Text 3"/>
+          <p:cNvSpPr txBox="1"/>
+          <p:nvPr/>
+        </p:nvSpPr>
+        <p:spPr>
+          <a:xfrm>
+            <a:off x="822960" y="4297680"/>
+            <a:ext cx="10545775" cy="1188720"/>
+          </a:xfrm>
+          <a:prstGeom prst="rect">
+            <a:avLst/>
+          </a:prstGeom>
+          <a:noFill/>
+          <a:ln/>
+        </p:spPr>
+        <p:txBody>
+          <a:bodyPr wrap="square" lIns="0" tIns="0" rIns="0" bIns="0" rtlCol="0" anchor="ctr"/>
+          <a:lstStyle/>
+          <a:p>
+            <a:pPr indent="0" marL="0">
+              <a:buNone/>
+            </a:pPr>
+            <a:r>
+              <a:rPr lang="en-US" sz="1700" b="1" dirty="0">
+                <a:solidFill>
+                  <a:srgbClr val="1D5BA6"/>
+                </a:solidFill>
+                <a:latin typeface="Microsoft YaHei" pitchFamily="34" charset="0"/>
+                <a:ea typeface="Microsoft YaHei" pitchFamily="34" charset="-122"/>
+                <a:cs typeface="Microsoft YaHei" pitchFamily="34" charset="-120"/>
+              </a:rPr>
+              <a:t>原因：</a:t>
+            </a:r>
+            <a:pPr indent="0" marL="0">
+              <a:buNone/>
+            </a:pPr>
+            <a:r>
+              <a:rPr lang="en-US" sz="1700" dirty="0">
+                <a:solidFill>
+                  <a:srgbClr val="1F2A37"/>
+                </a:solidFill>
+                <a:latin typeface="Microsoft YaHei" pitchFamily="34" charset="0"/>
+                <a:ea typeface="Microsoft YaHei" pitchFamily="34" charset="-122"/>
+                <a:cs typeface="Microsoft YaHei" pitchFamily="34" charset="-120"/>
+              </a:rPr>
+              <a:t>在现在的数据里，当初的 SQL 自己也过时了——它把更正前的旧行也算了进去（1489.1 万）。它只在学习时的数据上被核验过是对的，所以只能在那份数据上当标准。</a:t>
+            </a:r>
+            <a:endParaRPr lang="en-US" sz="1700" dirty="0"/>
+          </a:p>
+        </p:txBody>
+      </p:sp>
+      <p:sp>
+        <p:nvSpPr>
+          <p:cNvPr id="7" name="Text 4"/>
+          <p:cNvSpPr txBox="1"/>
+          <p:nvPr/>
+        </p:nvSpPr>
+        <p:spPr>
+          <a:xfrm>
+            <a:off x="548640" y="6263640"/>
+            <a:ext cx="10362895" cy="365760"/>
+          </a:xfrm>
+          <a:prstGeom prst="rect">
+            <a:avLst/>
+          </a:prstGeom>
+          <a:noFill/>
+          <a:ln/>
+        </p:spPr>
+        <p:txBody>
+          <a:bodyPr wrap="square" lIns="0" tIns="0" rIns="0" bIns="0" rtlCol="0" anchor="b"/>
+          <a:lstStyle/>
+          <a:p>
+            <a:pPr indent="0" marL="0">
+              <a:buNone/>
+            </a:pPr>
+            <a:r>
+              <a:rPr lang="en-US" sz="1100" dirty="0">
+                <a:solidFill>
+                  <a:srgbClr val="5B6573"/>
+                </a:solidFill>
+                <a:latin typeface="Microsoft YaHei" pitchFamily="34" charset="0"/>
+                <a:ea typeface="Microsoft YaHei" pitchFamily="34" charset="-122"/>
+                <a:cs typeface="Microsoft YaHei" pitchFamily="34" charset="-120"/>
+              </a:rPr>
+              <a:t>“现在的数据”一行来自对照实验（回归测试改用当前数据，dsv41flash-r1-g3fix--exref），系统记录原文：“结果 13423672.28 与期望 14890636.48 不一致”。</a:t>
+            </a:r>
+            <a:endParaRPr lang="en-US" sz="1100" dirty="0"/>
+          </a:p>
+        </p:txBody>
+      </p:sp>
+      <p:sp>
+        <p:nvSpPr>
+          <p:cNvPr id="25" name="Slide Number Placeholder 0"/>
+          <p:cNvSpPr>
+            <a:spLocks noGrp="1"/>
+          </p:cNvSpPr>
+          <p:nvPr>
+            <p:ph type="sldNum" sz="quarter" idx="4294967295"/>
+          </p:nvPr>
+        </p:nvSpPr>
+        <p:spPr>
+          <a:xfrm>
+            <a:off x="11185855" y="6446520"/>
+            <a:ext cx="457200" cy="274320"/>
+          </a:xfrm>
+          <a:prstGeom prst="rect">
+            <a:avLst/>
+          </a:prstGeom>
+          <a:extLst>
+            <a:ext uri="{C572A759-6A51-4108-AA02-DFA0A04FC94B}">
+              <ma14:wrappingTextBoxFlag xmlns:ma14="http://schemas.microsoft.com/office/mac/drawingml/2011/main" val="0"/>
+            </a:ext>
+          </a:extLst>
+        </p:spPr>
+        <p:txBody>
+          <a:bodyPr/>
+          <a:lstStyle>
+            <a:lvl1pPr>
+              <a:defRPr sz="1000">
+                <a:solidFill>
+                  <a:srgbClr val="5B6573"/>
+                </a:solidFill>
+                <a:latin typeface="Microsoft YaHei"/>
+                <a:ea typeface="Microsoft YaHei"/>
+                <a:cs typeface="Microsoft YaHei"/>
+              </a:defRPr>
+            </a:lvl1pPr>
+          </a:lstStyle>
+          <a:p>
+            <a:pPr algn="r"/>
+            <a:fld id="{F7021451-1387-4CA6-816F-3879F97B5CBC}" type="slidenum">
+              <a:rPr b="0" lang="en-US"/>
+              <a:t>10</a:t>
+            </a:fld>
+            <a:endParaRPr lang="en-US"/>
+          </a:p>
+        </p:txBody>
+      </p:sp>
+    </p:spTree>
+  </p:cSld>
+  <p:clrMapOvr>
+    <a:masterClrMapping/>
+  </p:clrMapOvr>
+</p:sld>
+</file>
+
+<file path=ppt/slides/slide11.xml><?xml version="1.0" encoding="utf-8"?>
+<p:sld xmlns:a="http://schemas.openxmlformats.org/drawingml/2006/main" xmlns:r="http://schemas.openxmlformats.org/officeDocument/2006/relationships" xmlns:p="http://schemas.openxmlformats.org/presentationml/2006/main">
+  <p:cSld name="Slide 11">
     <p:spTree>
       <p:nvGrpSpPr>
         <p:cNvPr id="1" name=""/>
@@ -2746,7 +3942,7 @@
             <a:pPr algn="r"/>
             <a:fld id="{F7021451-1387-4CA6-816F-3879F97B5CBC}" type="slidenum">
               <a:rPr b="0" lang="en-US"/>
-              <a:t>10</a:t>
+              <a:t>11</a:t>
             </a:fld>
             <a:endParaRPr lang="en-US"/>
           </a:p>
@@ -2763,6 +3959,3043 @@
 <file path=ppt/slides/slide2.xml><?xml version="1.0" encoding="utf-8"?>
 <p:sld xmlns:a="http://schemas.openxmlformats.org/drawingml/2006/main" xmlns:r="http://schemas.openxmlformats.org/officeDocument/2006/relationships" xmlns:p="http://schemas.openxmlformats.org/presentationml/2006/main">
   <p:cSld name="Slide 2">
+    <p:spTree>
+      <p:nvGrpSpPr>
+        <p:cNvPr id="1" name=""/>
+        <p:cNvGrpSpPr/>
+        <p:nvPr/>
+      </p:nvGrpSpPr>
+      <p:grpSpPr>
+        <a:xfrm>
+          <a:off x="0" y="0"/>
+          <a:ext cx="0" cy="0"/>
+          <a:chOff x="0" y="0"/>
+          <a:chExt cx="0" cy="0"/>
+        </a:xfrm>
+      </p:grpSpPr>
+      <p:sp>
+        <p:nvSpPr>
+          <p:cNvPr id="2" name="Text 0"/>
+          <p:cNvSpPr/>
+          <p:nvPr>
+            <p:ph idx="100" type="title" hasCustomPrompt="1"/>
+          </p:nvPr>
+        </p:nvSpPr>
+        <p:spPr>
+          <a:xfrm>
+            <a:off x="548640" y="274320"/>
+            <a:ext cx="11094415" cy="685800"/>
+          </a:xfrm>
+          <a:prstGeom prst="rect">
+            <a:avLst/>
+          </a:prstGeom>
+          <a:noFill/>
+          <a:ln/>
+        </p:spPr>
+        <p:txBody>
+          <a:bodyPr wrap="square" lIns="0" tIns="0" rIns="0" bIns="0" rtlCol="0" anchor="ctr"/>
+          <a:lstStyle/>
+          <a:p>
+            <a:pPr algn="l" indent="0" marL="0">
+              <a:buNone/>
+            </a:pPr>
+            <a:r>
+              <a:rPr lang="en-US" sz="3000" b="1" dirty="0">
+                <a:solidFill>
+                  <a:srgbClr val="1F2A37"/>
+                </a:solidFill>
+                <a:latin typeface="Microsoft YaHei" pitchFamily="34" charset="0"/>
+                <a:ea typeface="Microsoft YaHei" pitchFamily="34" charset="-122"/>
+                <a:cs typeface="Microsoft YaHei" pitchFamily="34" charset="-120"/>
+              </a:rPr>
+              <a:t>一个真实例子：智能体学会了“门店营业额”</a:t>
+            </a:r>
+            <a:endParaRPr lang="en-US" sz="3000" dirty="0"/>
+          </a:p>
+        </p:txBody>
+      </p:sp>
+      <p:sp>
+        <p:nvSpPr>
+          <p:cNvPr id="3" name="Text 1"/>
+          <p:cNvSpPr txBox="1"/>
+          <p:nvPr/>
+        </p:nvSpPr>
+        <p:spPr>
+          <a:xfrm>
+            <a:off x="548640" y="1143000"/>
+            <a:ext cx="5303520" cy="365760"/>
+          </a:xfrm>
+          <a:prstGeom prst="rect">
+            <a:avLst/>
+          </a:prstGeom>
+          <a:noFill/>
+          <a:ln/>
+        </p:spPr>
+        <p:txBody>
+          <a:bodyPr wrap="square" lIns="0" tIns="0" rIns="0" bIns="0" rtlCol="0" anchor="ctr"/>
+          <a:lstStyle/>
+          <a:p>
+            <a:pPr indent="0" marL="0">
+              <a:buNone/>
+            </a:pPr>
+            <a:r>
+              <a:rPr lang="en-US" sz="1600" b="1" dirty="0">
+                <a:solidFill>
+                  <a:srgbClr val="6A58A3"/>
+                </a:solidFill>
+                <a:latin typeface="Microsoft YaHei" pitchFamily="34" charset="0"/>
+                <a:ea typeface="Microsoft YaHei" pitchFamily="34" charset="-122"/>
+                <a:cs typeface="Microsoft YaHei" pitchFamily="34" charset="-120"/>
+              </a:rPr>
+              <a:t>学习题</a:t>
+            </a:r>
+            <a:endParaRPr lang="en-US" sz="1600" dirty="0"/>
+          </a:p>
+        </p:txBody>
+      </p:sp>
+      <p:sp>
+        <p:nvSpPr>
+          <p:cNvPr id="4" name="Shape 2"/>
+          <p:cNvSpPr/>
+          <p:nvPr/>
+        </p:nvSpPr>
+        <p:spPr>
+          <a:xfrm>
+            <a:off x="548640" y="1554480"/>
+            <a:ext cx="5303520" cy="1143000"/>
+          </a:xfrm>
+          <a:prstGeom prst="roundRect">
+            <a:avLst>
+              <a:gd name="adj" fmla="val 6400"/>
+            </a:avLst>
+          </a:prstGeom>
+          <a:solidFill>
+            <a:srgbClr val="EFECF7"/>
+          </a:solidFill>
+          <a:ln w="12700">
+            <a:solidFill>
+              <a:srgbClr val="EFECF7"/>
+            </a:solidFill>
+            <a:prstDash val="solid"/>
+          </a:ln>
+        </p:spPr>
+      </p:sp>
+      <p:sp>
+        <p:nvSpPr>
+          <p:cNvPr id="5" name="Text 3"/>
+          <p:cNvSpPr txBox="1"/>
+          <p:nvPr/>
+        </p:nvSpPr>
+        <p:spPr>
+          <a:xfrm>
+            <a:off x="731520" y="1645920"/>
+            <a:ext cx="4937760" cy="960120"/>
+          </a:xfrm>
+          <a:prstGeom prst="rect">
+            <a:avLst/>
+          </a:prstGeom>
+          <a:noFill/>
+          <a:ln/>
+        </p:spPr>
+        <p:txBody>
+          <a:bodyPr wrap="square" lIns="0" tIns="0" rIns="0" bIns="0" rtlCol="0" anchor="ctr"/>
+          <a:lstStyle/>
+          <a:p>
+            <a:pPr indent="0" marL="0">
+              <a:buNone/>
+            </a:pPr>
+            <a:r>
+              <a:rPr lang="en-US" sz="1500" dirty="0">
+                <a:solidFill>
+                  <a:srgbClr val="1F2A37"/>
+                </a:solidFill>
+                <a:latin typeface="Microsoft YaHei" pitchFamily="34" charset="0"/>
+                <a:ea typeface="Microsoft YaHei" pitchFamily="34" charset="-122"/>
+                <a:cs typeface="Microsoft YaHei" pitchFamily="34" charset="-120"/>
+              </a:rPr>
+              <a:t>3 月的门店营业额是多少？口径：门店营业额 = 门店销售行的净支付额（store_sales.ss_net_paid）之和，按销售日期归属期间。保留两位小数。</a:t>
+            </a:r>
+            <a:endParaRPr lang="en-US" sz="1500" dirty="0"/>
+          </a:p>
+        </p:txBody>
+      </p:sp>
+      <p:sp>
+        <p:nvSpPr>
+          <p:cNvPr id="6" name="Text 4"/>
+          <p:cNvSpPr txBox="1"/>
+          <p:nvPr/>
+        </p:nvSpPr>
+        <p:spPr>
+          <a:xfrm>
+            <a:off x="548640" y="2880360"/>
+            <a:ext cx="5303520" cy="320040"/>
+          </a:xfrm>
+          <a:prstGeom prst="rect">
+            <a:avLst/>
+          </a:prstGeom>
+          <a:noFill/>
+          <a:ln/>
+        </p:spPr>
+        <p:txBody>
+          <a:bodyPr wrap="square" lIns="0" tIns="0" rIns="0" bIns="0" rtlCol="0" anchor="ctr"/>
+          <a:lstStyle/>
+          <a:p>
+            <a:pPr indent="0" marL="0">
+              <a:buNone/>
+            </a:pPr>
+            <a:r>
+              <a:rPr lang="en-US" sz="1400" dirty="0">
+                <a:solidFill>
+                  <a:srgbClr val="5B6573"/>
+                </a:solidFill>
+                <a:latin typeface="Microsoft YaHei" pitchFamily="34" charset="0"/>
+                <a:ea typeface="Microsoft YaHei" pitchFamily="34" charset="-122"/>
+                <a:cs typeface="Microsoft YaHei" pitchFamily="34" charset="-120"/>
+              </a:rPr>
+              <a:t>内置智能体：5 轮、7 次工具调用、9.5 秒，最后的 SQL</a:t>
+            </a:r>
+            <a:endParaRPr lang="en-US" sz="1400" dirty="0"/>
+          </a:p>
+        </p:txBody>
+      </p:sp>
+      <p:sp>
+        <p:nvSpPr>
+          <p:cNvPr id="7" name="Shape 5"/>
+          <p:cNvSpPr/>
+          <p:nvPr/>
+        </p:nvSpPr>
+        <p:spPr>
+          <a:xfrm>
+            <a:off x="548640" y="3246120"/>
+            <a:ext cx="5303520" cy="1417320"/>
+          </a:xfrm>
+          <a:prstGeom prst="roundRect">
+            <a:avLst>
+              <a:gd name="adj" fmla="val 5161"/>
+            </a:avLst>
+          </a:prstGeom>
+          <a:solidFill>
+            <a:srgbClr val="F1F3F6"/>
+          </a:solidFill>
+          <a:ln w="12700">
+            <a:solidFill>
+              <a:srgbClr val="F1F3F6"/>
+            </a:solidFill>
+            <a:prstDash val="solid"/>
+          </a:ln>
+        </p:spPr>
+      </p:sp>
+      <p:sp>
+        <p:nvSpPr>
+          <p:cNvPr id="8" name="Text 6"/>
+          <p:cNvSpPr txBox="1"/>
+          <p:nvPr/>
+        </p:nvSpPr>
+        <p:spPr>
+          <a:xfrm>
+            <a:off x="731520" y="3310128"/>
+            <a:ext cx="4937760" cy="1280160"/>
+          </a:xfrm>
+          <a:prstGeom prst="rect">
+            <a:avLst/>
+          </a:prstGeom>
+          <a:noFill/>
+          <a:ln/>
+        </p:spPr>
+        <p:txBody>
+          <a:bodyPr wrap="square" lIns="0" tIns="0" rIns="0" bIns="0" rtlCol="0" anchor="ctr"/>
+          <a:lstStyle/>
+          <a:p>
+            <a:pPr indent="0" marL="0">
+              <a:buNone/>
+            </a:pPr>
+            <a:r>
+              <a:rPr lang="en-US" sz="1300" dirty="0">
+                <a:solidFill>
+                  <a:srgbClr val="1F2A37"/>
+                </a:solidFill>
+                <a:latin typeface="Courier New" pitchFamily="34" charset="0"/>
+                <a:ea typeface="Courier New" pitchFamily="34" charset="-122"/>
+                <a:cs typeface="Courier New" pitchFamily="34" charset="-120"/>
+              </a:rPr>
+              <a:t>SELECT ROUND(SUM(ss.ss_net_paid), 2)</a:t>
+            </a:r>
+            <a:endParaRPr lang="en-US" sz="1300" dirty="0"/>
+          </a:p>
+          <a:p>
+            <a:pPr indent="0" marL="0">
+              <a:buNone/>
+            </a:pPr>
+            <a:r>
+              <a:rPr lang="en-US" sz="1300" dirty="0">
+                <a:solidFill>
+                  <a:srgbClr val="1F2A37"/>
+                </a:solidFill>
+                <a:latin typeface="Courier New" pitchFamily="34" charset="0"/>
+                <a:ea typeface="Courier New" pitchFamily="34" charset="-122"/>
+                <a:cs typeface="Courier New" pitchFamily="34" charset="-120"/>
+              </a:rPr>
+              <a:t>FROM store_sales ss</a:t>
+            </a:r>
+            <a:endParaRPr lang="en-US" sz="1300" dirty="0"/>
+          </a:p>
+          <a:p>
+            <a:pPr indent="0" marL="0">
+              <a:buNone/>
+            </a:pPr>
+            <a:r>
+              <a:rPr lang="en-US" sz="1300" dirty="0">
+                <a:solidFill>
+                  <a:srgbClr val="1F2A37"/>
+                </a:solidFill>
+                <a:latin typeface="Courier New" pitchFamily="34" charset="0"/>
+                <a:ea typeface="Courier New" pitchFamily="34" charset="-122"/>
+                <a:cs typeface="Courier New" pitchFamily="34" charset="-120"/>
+              </a:rPr>
+              <a:t>JOIN date_dim d</a:t>
+            </a:r>
+            <a:endParaRPr lang="en-US" sz="1300" dirty="0"/>
+          </a:p>
+          <a:p>
+            <a:pPr indent="0" marL="0">
+              <a:buNone/>
+            </a:pPr>
+            <a:r>
+              <a:rPr lang="en-US" sz="1300" dirty="0">
+                <a:solidFill>
+                  <a:srgbClr val="1F2A37"/>
+                </a:solidFill>
+                <a:latin typeface="Courier New" pitchFamily="34" charset="0"/>
+                <a:ea typeface="Courier New" pitchFamily="34" charset="-122"/>
+                <a:cs typeface="Courier New" pitchFamily="34" charset="-120"/>
+              </a:rPr>
+              <a:t>  ON ss.ss_sold_date_sk = d.d_date_sk</a:t>
+            </a:r>
+            <a:endParaRPr lang="en-US" sz="1300" dirty="0"/>
+          </a:p>
+          <a:p>
+            <a:pPr indent="0" marL="0">
+              <a:buNone/>
+            </a:pPr>
+            <a:r>
+              <a:rPr lang="en-US" sz="1300" dirty="0">
+                <a:solidFill>
+                  <a:srgbClr val="1F2A37"/>
+                </a:solidFill>
+                <a:latin typeface="Courier New" pitchFamily="34" charset="0"/>
+                <a:ea typeface="Courier New" pitchFamily="34" charset="-122"/>
+                <a:cs typeface="Courier New" pitchFamily="34" charset="-120"/>
+              </a:rPr>
+              <a:t>WHERE d.d_year = … AND d.d_moy = 3</a:t>
+            </a:r>
+            <a:endParaRPr lang="en-US" sz="1300" dirty="0"/>
+          </a:p>
+        </p:txBody>
+      </p:sp>
+      <p:sp>
+        <p:nvSpPr>
+          <p:cNvPr id="9" name="Text 7"/>
+          <p:cNvSpPr txBox="1"/>
+          <p:nvPr/>
+        </p:nvSpPr>
+        <p:spPr>
+          <a:xfrm>
+            <a:off x="548640" y="4800600"/>
+            <a:ext cx="5303520" cy="1097280"/>
+          </a:xfrm>
+          <a:prstGeom prst="rect">
+            <a:avLst/>
+          </a:prstGeom>
+          <a:noFill/>
+          <a:ln/>
+        </p:spPr>
+        <p:txBody>
+          <a:bodyPr wrap="square" lIns="0" tIns="0" rIns="0" bIns="0" rtlCol="0" anchor="t"/>
+          <a:lstStyle/>
+          <a:p>
+            <a:pPr indent="0" marL="0">
+              <a:buNone/>
+            </a:pPr>
+            <a:r>
+              <a:rPr lang="en-US" sz="1500" b="1" dirty="0">
+                <a:solidFill>
+                  <a:srgbClr val="2E7D4F"/>
+                </a:solidFill>
+                <a:latin typeface="Microsoft YaHei" pitchFamily="34" charset="0"/>
+                <a:ea typeface="Microsoft YaHei" pitchFamily="34" charset="-122"/>
+                <a:cs typeface="Microsoft YaHei" pitchFamily="34" charset="-120"/>
+              </a:rPr>
+              <a:t>答案 13,570,368.70，与标准答案一致 ✓</a:t>
+            </a:r>
+            <a:endParaRPr lang="en-US" sz="1500" dirty="0"/>
+          </a:p>
+          <a:p>
+            <a:pPr indent="0" marL="0">
+              <a:buNone/>
+            </a:pPr>
+            <a:r>
+              <a:rPr lang="en-US" sz="1500" dirty="0">
+                <a:solidFill>
+                  <a:srgbClr val="1F2A37"/>
+                </a:solidFill>
+                <a:latin typeface="Microsoft YaHei" pitchFamily="34" charset="0"/>
+                <a:ea typeface="Microsoft YaHei" pitchFamily="34" charset="-122"/>
+                <a:cs typeface="Microsoft YaHei" pitchFamily="34" charset="-120"/>
+              </a:rPr>
+              <a:t>大模型把解题过程抽取成定义（10 秒）；7 项发布前校验全部通过（2.0 秒），发布为 v1。</a:t>
+            </a:r>
+            <a:endParaRPr lang="en-US" sz="1500" dirty="0"/>
+          </a:p>
+        </p:txBody>
+      </p:sp>
+      <p:sp>
+        <p:nvSpPr>
+          <p:cNvPr id="10" name="Text 8"/>
+          <p:cNvSpPr txBox="1"/>
+          <p:nvPr/>
+        </p:nvSpPr>
+        <p:spPr>
+          <a:xfrm>
+            <a:off x="6172200" y="1143000"/>
+            <a:ext cx="5468112" cy="365760"/>
+          </a:xfrm>
+          <a:prstGeom prst="rect">
+            <a:avLst/>
+          </a:prstGeom>
+          <a:noFill/>
+          <a:ln/>
+        </p:spPr>
+        <p:txBody>
+          <a:bodyPr wrap="square" lIns="0" tIns="0" rIns="0" bIns="0" rtlCol="0" anchor="ctr"/>
+          <a:lstStyle/>
+          <a:p>
+            <a:pPr indent="0" marL="0">
+              <a:buNone/>
+            </a:pPr>
+            <a:r>
+              <a:rPr lang="en-US" sz="1600" b="1" dirty="0">
+                <a:solidFill>
+                  <a:srgbClr val="1D5BA6"/>
+                </a:solidFill>
+                <a:latin typeface="Microsoft YaHei" pitchFamily="34" charset="0"/>
+                <a:ea typeface="Microsoft YaHei" pitchFamily="34" charset="-122"/>
+                <a:cs typeface="Microsoft YaHei" pitchFamily="34" charset="-120"/>
+              </a:rPr>
+              <a:t>存进指标库的定义（v1）</a:t>
+            </a:r>
+            <a:endParaRPr lang="en-US" sz="1600" dirty="0"/>
+          </a:p>
+        </p:txBody>
+      </p:sp>
+      <p:graphicFrame>
+        <p:nvGraphicFramePr>
+          <p:cNvPr id="3" name="Table 0"/>
+          <p:cNvGraphicFramePr>
+            <a:graphicFrameLocks noGrp="1"/>
+          </p:cNvGraphicFramePr>
+          <p:nvPr>
+            <p:extLst>
+              <p:ext uri="{D42A27DB-BD31-4B8C-83A1-F6EECF244321}">
+                <p14:modId xmlns:p14="http://schemas.microsoft.com/office/powerpoint/2010/main" val="1579011935"/>
+              </p:ext>
+            </p:extLst>
+          </p:nvPr>
+        </p:nvGraphicFramePr>
+        <p:xfrm>
+          <a:off x="6172200" y="1554480"/>
+          <a:ext cx="5468112" cy="914400"/>
+        </p:xfrm>
+        <a:graphic>
+          <a:graphicData uri="http://schemas.openxmlformats.org/drawingml/2006/table">
+            <a:tbl>
+              <a:tblPr/>
+              <a:tblGrid>
+                <a:gridCol w="1097280"/>
+                <a:gridCol w="4370832"/>
+              </a:tblGrid>
+              <a:tr h="0">
+                <a:tc>
+                  <a:txBody>
+                    <a:bodyPr/>
+                    <a:lstStyle/>
+                    <a:p>
+                      <a:pPr indent="0" marL="0">
+                        <a:buNone/>
+                      </a:pPr>
+                      <a:r>
+                        <a:rPr lang="en-US" sz="1400" b="1" dirty="0">
+                          <a:solidFill>
+                            <a:srgbClr val="1F2A37"/>
+                          </a:solidFill>
+                          <a:latin typeface="Microsoft YaHei" pitchFamily="34" charset="0"/>
+                          <a:ea typeface="Microsoft YaHei" pitchFamily="34" charset="-122"/>
+                          <a:cs typeface="Microsoft YaHei" pitchFamily="34" charset="-120"/>
+                        </a:rPr>
+                        <a:t>字段</a:t>
+                      </a:r>
+                      <a:endParaRPr lang="en-US" sz="1400" dirty="0">
+                        <a:latin typeface="Microsoft YaHei" charset="0"/>
+                        <a:ea typeface="Microsoft YaHei" charset="0"/>
+                        <a:cs typeface="Microsoft YaHei" charset="0"/>
+                      </a:endParaRPr>
+                    </a:p>
+                  </a:txBody>
+                  <a:tcPr marL="91440" marR="91440" marT="54864" marB="54864" anchor="ctr">
+                    <a:lnL w="12700" cap="flat" cmpd="sng" algn="ctr">
+                      <a:solidFill>
+                        <a:srgbClr val="D5DBE3"/>
+                      </a:solidFill>
+                      <a:prstDash val="solid"/>
+                      <a:round/>
+                      <a:headEnd type="none" w="med" len="med"/>
+                      <a:tailEnd type="none" w="med" len="med"/>
+                    </a:lnL>
+                    <a:lnR w="12700" cap="flat" cmpd="sng" algn="ctr">
+                      <a:solidFill>
+                        <a:srgbClr val="D5DBE3"/>
+                      </a:solidFill>
+                      <a:prstDash val="solid"/>
+                      <a:round/>
+                      <a:headEnd type="none" w="med" len="med"/>
+                      <a:tailEnd type="none" w="med" len="med"/>
+                    </a:lnR>
+                    <a:lnT w="12700" cap="flat" cmpd="sng" algn="ctr">
+                      <a:solidFill>
+                        <a:srgbClr val="D5DBE3"/>
+                      </a:solidFill>
+                      <a:prstDash val="solid"/>
+                      <a:round/>
+                      <a:headEnd type="none" w="med" len="med"/>
+                      <a:tailEnd type="none" w="med" len="med"/>
+                    </a:lnT>
+                    <a:lnB w="12700" cap="flat" cmpd="sng" algn="ctr">
+                      <a:solidFill>
+                        <a:srgbClr val="D5DBE3"/>
+                      </a:solidFill>
+                      <a:prstDash val="solid"/>
+                      <a:round/>
+                      <a:headEnd type="none" w="med" len="med"/>
+                      <a:tailEnd type="none" w="med" len="med"/>
+                    </a:lnB>
+                    <a:solidFill>
+                      <a:srgbClr val="F1F3F6"/>
+                    </a:solidFill>
+                  </a:tcPr>
+                </a:tc>
+                <a:tc>
+                  <a:txBody>
+                    <a:bodyPr/>
+                    <a:lstStyle/>
+                    <a:p>
+                      <a:pPr indent="0" marL="0">
+                        <a:buNone/>
+                      </a:pPr>
+                      <a:r>
+                        <a:rPr lang="en-US" sz="1400" b="1" dirty="0">
+                          <a:solidFill>
+                            <a:srgbClr val="1F2A37"/>
+                          </a:solidFill>
+                          <a:latin typeface="Microsoft YaHei" pitchFamily="34" charset="0"/>
+                          <a:ea typeface="Microsoft YaHei" pitchFamily="34" charset="-122"/>
+                          <a:cs typeface="Microsoft YaHei" pitchFamily="34" charset="-120"/>
+                        </a:rPr>
+                        <a:t>内容</a:t>
+                      </a:r>
+                      <a:endParaRPr lang="en-US" sz="1400" dirty="0">
+                        <a:latin typeface="Microsoft YaHei" charset="0"/>
+                        <a:ea typeface="Microsoft YaHei" charset="0"/>
+                        <a:cs typeface="Microsoft YaHei" charset="0"/>
+                      </a:endParaRPr>
+                    </a:p>
+                  </a:txBody>
+                  <a:tcPr marL="91440" marR="91440" marT="54864" marB="54864" anchor="ctr">
+                    <a:lnL w="12700" cap="flat" cmpd="sng" algn="ctr">
+                      <a:solidFill>
+                        <a:srgbClr val="D5DBE3"/>
+                      </a:solidFill>
+                      <a:prstDash val="solid"/>
+                      <a:round/>
+                      <a:headEnd type="none" w="med" len="med"/>
+                      <a:tailEnd type="none" w="med" len="med"/>
+                    </a:lnL>
+                    <a:lnR w="12700" cap="flat" cmpd="sng" algn="ctr">
+                      <a:solidFill>
+                        <a:srgbClr val="D5DBE3"/>
+                      </a:solidFill>
+                      <a:prstDash val="solid"/>
+                      <a:round/>
+                      <a:headEnd type="none" w="med" len="med"/>
+                      <a:tailEnd type="none" w="med" len="med"/>
+                    </a:lnR>
+                    <a:lnT w="12700" cap="flat" cmpd="sng" algn="ctr">
+                      <a:solidFill>
+                        <a:srgbClr val="D5DBE3"/>
+                      </a:solidFill>
+                      <a:prstDash val="solid"/>
+                      <a:round/>
+                      <a:headEnd type="none" w="med" len="med"/>
+                      <a:tailEnd type="none" w="med" len="med"/>
+                    </a:lnT>
+                    <a:lnB w="12700" cap="flat" cmpd="sng" algn="ctr">
+                      <a:solidFill>
+                        <a:srgbClr val="D5DBE3"/>
+                      </a:solidFill>
+                      <a:prstDash val="solid"/>
+                      <a:round/>
+                      <a:headEnd type="none" w="med" len="med"/>
+                      <a:tailEnd type="none" w="med" len="med"/>
+                    </a:lnB>
+                    <a:solidFill>
+                      <a:srgbClr val="F1F3F6"/>
+                    </a:solidFill>
+                  </a:tcPr>
+                </a:tc>
+              </a:tr>
+              <a:tr h="0">
+                <a:tc>
+                  <a:txBody>
+                    <a:bodyPr/>
+                    <a:lstStyle/>
+                    <a:p>
+                      <a:pPr indent="0" marL="0">
+                        <a:buNone/>
+                      </a:pPr>
+                      <a:r>
+                        <a:rPr lang="en-US" sz="1400" dirty="0">
+                          <a:solidFill>
+                            <a:srgbClr val="1F2A37"/>
+                          </a:solidFill>
+                          <a:latin typeface="Microsoft YaHei" pitchFamily="34" charset="0"/>
+                          <a:ea typeface="Microsoft YaHei" pitchFamily="34" charset="-122"/>
+                          <a:cs typeface="Microsoft YaHei" pitchFamily="34" charset="-120"/>
+                        </a:rPr>
+                        <a:t>名称</a:t>
+                      </a:r>
+                      <a:endParaRPr lang="en-US" sz="1400" dirty="0">
+                        <a:latin typeface="Microsoft YaHei" charset="0"/>
+                        <a:ea typeface="Microsoft YaHei" charset="0"/>
+                        <a:cs typeface="Microsoft YaHei" charset="0"/>
+                      </a:endParaRPr>
+                    </a:p>
+                  </a:txBody>
+                  <a:tcPr marL="91440" marR="91440" marT="54864" marB="54864" anchor="ctr">
+                    <a:lnL w="12700" cap="flat" cmpd="sng" algn="ctr">
+                      <a:solidFill>
+                        <a:srgbClr val="D5DBE3"/>
+                      </a:solidFill>
+                      <a:prstDash val="solid"/>
+                      <a:round/>
+                      <a:headEnd type="none" w="med" len="med"/>
+                      <a:tailEnd type="none" w="med" len="med"/>
+                    </a:lnL>
+                    <a:lnR w="12700" cap="flat" cmpd="sng" algn="ctr">
+                      <a:solidFill>
+                        <a:srgbClr val="D5DBE3"/>
+                      </a:solidFill>
+                      <a:prstDash val="solid"/>
+                      <a:round/>
+                      <a:headEnd type="none" w="med" len="med"/>
+                      <a:tailEnd type="none" w="med" len="med"/>
+                    </a:lnR>
+                    <a:lnT w="12700" cap="flat" cmpd="sng" algn="ctr">
+                      <a:solidFill>
+                        <a:srgbClr val="D5DBE3"/>
+                      </a:solidFill>
+                      <a:prstDash val="solid"/>
+                      <a:round/>
+                      <a:headEnd type="none" w="med" len="med"/>
+                      <a:tailEnd type="none" w="med" len="med"/>
+                    </a:lnT>
+                    <a:lnB w="12700" cap="flat" cmpd="sng" algn="ctr">
+                      <a:solidFill>
+                        <a:srgbClr val="D5DBE3"/>
+                      </a:solidFill>
+                      <a:prstDash val="solid"/>
+                      <a:round/>
+                      <a:headEnd type="none" w="med" len="med"/>
+                      <a:tailEnd type="none" w="med" len="med"/>
+                    </a:lnB>
+                  </a:tcPr>
+                </a:tc>
+                <a:tc>
+                  <a:txBody>
+                    <a:bodyPr/>
+                    <a:lstStyle/>
+                    <a:p>
+                      <a:pPr indent="0" marL="0">
+                        <a:buNone/>
+                      </a:pPr>
+                      <a:r>
+                        <a:rPr lang="en-US" sz="1400" dirty="0">
+                          <a:solidFill>
+                            <a:srgbClr val="1F2A37"/>
+                          </a:solidFill>
+                          <a:latin typeface="Microsoft YaHei" pitchFamily="34" charset="0"/>
+                          <a:ea typeface="Microsoft YaHei" pitchFamily="34" charset="-122"/>
+                          <a:cs typeface="Microsoft YaHei" pitchFamily="34" charset="-120"/>
+                        </a:rPr>
+                        <a:t>门店营业额（别名：门店销售净额）</a:t>
+                      </a:r>
+                      <a:endParaRPr lang="en-US" sz="1400" dirty="0">
+                        <a:latin typeface="Microsoft YaHei" charset="0"/>
+                        <a:ea typeface="Microsoft YaHei" charset="0"/>
+                        <a:cs typeface="Microsoft YaHei" charset="0"/>
+                      </a:endParaRPr>
+                    </a:p>
+                  </a:txBody>
+                  <a:tcPr marL="91440" marR="91440" marT="54864" marB="54864" anchor="ctr">
+                    <a:lnL w="12700" cap="flat" cmpd="sng" algn="ctr">
+                      <a:solidFill>
+                        <a:srgbClr val="D5DBE3"/>
+                      </a:solidFill>
+                      <a:prstDash val="solid"/>
+                      <a:round/>
+                      <a:headEnd type="none" w="med" len="med"/>
+                      <a:tailEnd type="none" w="med" len="med"/>
+                    </a:lnL>
+                    <a:lnR w="12700" cap="flat" cmpd="sng" algn="ctr">
+                      <a:solidFill>
+                        <a:srgbClr val="D5DBE3"/>
+                      </a:solidFill>
+                      <a:prstDash val="solid"/>
+                      <a:round/>
+                      <a:headEnd type="none" w="med" len="med"/>
+                      <a:tailEnd type="none" w="med" len="med"/>
+                    </a:lnR>
+                    <a:lnT w="12700" cap="flat" cmpd="sng" algn="ctr">
+                      <a:solidFill>
+                        <a:srgbClr val="D5DBE3"/>
+                      </a:solidFill>
+                      <a:prstDash val="solid"/>
+                      <a:round/>
+                      <a:headEnd type="none" w="med" len="med"/>
+                      <a:tailEnd type="none" w="med" len="med"/>
+                    </a:lnT>
+                    <a:lnB w="12700" cap="flat" cmpd="sng" algn="ctr">
+                      <a:solidFill>
+                        <a:srgbClr val="D5DBE3"/>
+                      </a:solidFill>
+                      <a:prstDash val="solid"/>
+                      <a:round/>
+                      <a:headEnd type="none" w="med" len="med"/>
+                      <a:tailEnd type="none" w="med" len="med"/>
+                    </a:lnB>
+                  </a:tcPr>
+                </a:tc>
+              </a:tr>
+              <a:tr h="0">
+                <a:tc>
+                  <a:txBody>
+                    <a:bodyPr/>
+                    <a:lstStyle/>
+                    <a:p>
+                      <a:pPr indent="0" marL="0">
+                        <a:buNone/>
+                      </a:pPr>
+                      <a:r>
+                        <a:rPr lang="en-US" sz="1400" dirty="0">
+                          <a:solidFill>
+                            <a:srgbClr val="1F2A37"/>
+                          </a:solidFill>
+                          <a:latin typeface="Microsoft YaHei" pitchFamily="34" charset="0"/>
+                          <a:ea typeface="Microsoft YaHei" pitchFamily="34" charset="-122"/>
+                          <a:cs typeface="Microsoft YaHei" pitchFamily="34" charset="-120"/>
+                        </a:rPr>
+                        <a:t>口径</a:t>
+                      </a:r>
+                      <a:endParaRPr lang="en-US" sz="1400" dirty="0">
+                        <a:latin typeface="Microsoft YaHei" charset="0"/>
+                        <a:ea typeface="Microsoft YaHei" charset="0"/>
+                        <a:cs typeface="Microsoft YaHei" charset="0"/>
+                      </a:endParaRPr>
+                    </a:p>
+                  </a:txBody>
+                  <a:tcPr marL="91440" marR="91440" marT="54864" marB="54864" anchor="ctr">
+                    <a:lnL w="12700" cap="flat" cmpd="sng" algn="ctr">
+                      <a:solidFill>
+                        <a:srgbClr val="D5DBE3"/>
+                      </a:solidFill>
+                      <a:prstDash val="solid"/>
+                      <a:round/>
+                      <a:headEnd type="none" w="med" len="med"/>
+                      <a:tailEnd type="none" w="med" len="med"/>
+                    </a:lnL>
+                    <a:lnR w="12700" cap="flat" cmpd="sng" algn="ctr">
+                      <a:solidFill>
+                        <a:srgbClr val="D5DBE3"/>
+                      </a:solidFill>
+                      <a:prstDash val="solid"/>
+                      <a:round/>
+                      <a:headEnd type="none" w="med" len="med"/>
+                      <a:tailEnd type="none" w="med" len="med"/>
+                    </a:lnR>
+                    <a:lnT w="12700" cap="flat" cmpd="sng" algn="ctr">
+                      <a:solidFill>
+                        <a:srgbClr val="D5DBE3"/>
+                      </a:solidFill>
+                      <a:prstDash val="solid"/>
+                      <a:round/>
+                      <a:headEnd type="none" w="med" len="med"/>
+                      <a:tailEnd type="none" w="med" len="med"/>
+                    </a:lnT>
+                    <a:lnB w="12700" cap="flat" cmpd="sng" algn="ctr">
+                      <a:solidFill>
+                        <a:srgbClr val="D5DBE3"/>
+                      </a:solidFill>
+                      <a:prstDash val="solid"/>
+                      <a:round/>
+                      <a:headEnd type="none" w="med" len="med"/>
+                      <a:tailEnd type="none" w="med" len="med"/>
+                    </a:lnB>
+                  </a:tcPr>
+                </a:tc>
+                <a:tc>
+                  <a:txBody>
+                    <a:bodyPr/>
+                    <a:lstStyle/>
+                    <a:p>
+                      <a:pPr indent="0" marL="0">
+                        <a:buNone/>
+                      </a:pPr>
+                      <a:r>
+                        <a:rPr lang="en-US" sz="1400" dirty="0">
+                          <a:solidFill>
+                            <a:srgbClr val="1F2A37"/>
+                          </a:solidFill>
+                          <a:latin typeface="Microsoft YaHei" pitchFamily="34" charset="0"/>
+                          <a:ea typeface="Microsoft YaHei" pitchFamily="34" charset="-122"/>
+                          <a:cs typeface="Microsoft YaHei" pitchFamily="34" charset="-120"/>
+                        </a:rPr>
+                        <a:t>门店销售明细行净支付额之和，按销售日期归属期间</a:t>
+                      </a:r>
+                      <a:endParaRPr lang="en-US" sz="1400" dirty="0">
+                        <a:latin typeface="Microsoft YaHei" charset="0"/>
+                        <a:ea typeface="Microsoft YaHei" charset="0"/>
+                        <a:cs typeface="Microsoft YaHei" charset="0"/>
+                      </a:endParaRPr>
+                    </a:p>
+                  </a:txBody>
+                  <a:tcPr marL="91440" marR="91440" marT="54864" marB="54864" anchor="ctr">
+                    <a:lnL w="12700" cap="flat" cmpd="sng" algn="ctr">
+                      <a:solidFill>
+                        <a:srgbClr val="D5DBE3"/>
+                      </a:solidFill>
+                      <a:prstDash val="solid"/>
+                      <a:round/>
+                      <a:headEnd type="none" w="med" len="med"/>
+                      <a:tailEnd type="none" w="med" len="med"/>
+                    </a:lnL>
+                    <a:lnR w="12700" cap="flat" cmpd="sng" algn="ctr">
+                      <a:solidFill>
+                        <a:srgbClr val="D5DBE3"/>
+                      </a:solidFill>
+                      <a:prstDash val="solid"/>
+                      <a:round/>
+                      <a:headEnd type="none" w="med" len="med"/>
+                      <a:tailEnd type="none" w="med" len="med"/>
+                    </a:lnR>
+                    <a:lnT w="12700" cap="flat" cmpd="sng" algn="ctr">
+                      <a:solidFill>
+                        <a:srgbClr val="D5DBE3"/>
+                      </a:solidFill>
+                      <a:prstDash val="solid"/>
+                      <a:round/>
+                      <a:headEnd type="none" w="med" len="med"/>
+                      <a:tailEnd type="none" w="med" len="med"/>
+                    </a:lnT>
+                    <a:lnB w="12700" cap="flat" cmpd="sng" algn="ctr">
+                      <a:solidFill>
+                        <a:srgbClr val="D5DBE3"/>
+                      </a:solidFill>
+                      <a:prstDash val="solid"/>
+                      <a:round/>
+                      <a:headEnd type="none" w="med" len="med"/>
+                      <a:tailEnd type="none" w="med" len="med"/>
+                    </a:lnB>
+                  </a:tcPr>
+                </a:tc>
+              </a:tr>
+              <a:tr h="0">
+                <a:tc>
+                  <a:txBody>
+                    <a:bodyPr/>
+                    <a:lstStyle/>
+                    <a:p>
+                      <a:pPr indent="0" marL="0">
+                        <a:buNone/>
+                      </a:pPr>
+                      <a:r>
+                        <a:rPr lang="en-US" sz="1400" dirty="0">
+                          <a:solidFill>
+                            <a:srgbClr val="1F2A37"/>
+                          </a:solidFill>
+                          <a:latin typeface="Microsoft YaHei" pitchFamily="34" charset="0"/>
+                          <a:ea typeface="Microsoft YaHei" pitchFamily="34" charset="-122"/>
+                          <a:cs typeface="Microsoft YaHei" pitchFamily="34" charset="-120"/>
+                        </a:rPr>
+                        <a:t>计算</a:t>
+                      </a:r>
+                      <a:endParaRPr lang="en-US" sz="1400" dirty="0">
+                        <a:latin typeface="Microsoft YaHei" charset="0"/>
+                        <a:ea typeface="Microsoft YaHei" charset="0"/>
+                        <a:cs typeface="Microsoft YaHei" charset="0"/>
+                      </a:endParaRPr>
+                    </a:p>
+                  </a:txBody>
+                  <a:tcPr marL="91440" marR="91440" marT="54864" marB="54864" anchor="ctr">
+                    <a:lnL w="12700" cap="flat" cmpd="sng" algn="ctr">
+                      <a:solidFill>
+                        <a:srgbClr val="D5DBE3"/>
+                      </a:solidFill>
+                      <a:prstDash val="solid"/>
+                      <a:round/>
+                      <a:headEnd type="none" w="med" len="med"/>
+                      <a:tailEnd type="none" w="med" len="med"/>
+                    </a:lnL>
+                    <a:lnR w="12700" cap="flat" cmpd="sng" algn="ctr">
+                      <a:solidFill>
+                        <a:srgbClr val="D5DBE3"/>
+                      </a:solidFill>
+                      <a:prstDash val="solid"/>
+                      <a:round/>
+                      <a:headEnd type="none" w="med" len="med"/>
+                      <a:tailEnd type="none" w="med" len="med"/>
+                    </a:lnR>
+                    <a:lnT w="12700" cap="flat" cmpd="sng" algn="ctr">
+                      <a:solidFill>
+                        <a:srgbClr val="D5DBE3"/>
+                      </a:solidFill>
+                      <a:prstDash val="solid"/>
+                      <a:round/>
+                      <a:headEnd type="none" w="med" len="med"/>
+                      <a:tailEnd type="none" w="med" len="med"/>
+                    </a:lnT>
+                    <a:lnB w="12700" cap="flat" cmpd="sng" algn="ctr">
+                      <a:solidFill>
+                        <a:srgbClr val="D5DBE3"/>
+                      </a:solidFill>
+                      <a:prstDash val="solid"/>
+                      <a:round/>
+                      <a:headEnd type="none" w="med" len="med"/>
+                      <a:tailEnd type="none" w="med" len="med"/>
+                    </a:lnB>
+                  </a:tcPr>
+                </a:tc>
+                <a:tc>
+                  <a:txBody>
+                    <a:bodyPr/>
+                    <a:lstStyle/>
+                    <a:p>
+                      <a:pPr indent="0" marL="0">
+                        <a:buNone/>
+                      </a:pPr>
+                      <a:r>
+                        <a:rPr lang="en-US" sz="1400" dirty="0">
+                          <a:solidFill>
+                            <a:srgbClr val="1F2A37"/>
+                          </a:solidFill>
+                          <a:latin typeface="Microsoft YaHei" pitchFamily="34" charset="0"/>
+                          <a:ea typeface="Microsoft YaHei" pitchFamily="34" charset="-122"/>
+                          <a:cs typeface="Microsoft YaHei" pitchFamily="34" charset="-120"/>
+                        </a:rPr>
+                        <a:t>store_sales 上 SUM(ss_net_paid)，无过滤条件</a:t>
+                      </a:r>
+                      <a:endParaRPr lang="en-US" sz="1400" dirty="0">
+                        <a:latin typeface="Microsoft YaHei" charset="0"/>
+                        <a:ea typeface="Microsoft YaHei" charset="0"/>
+                        <a:cs typeface="Microsoft YaHei" charset="0"/>
+                      </a:endParaRPr>
+                    </a:p>
+                  </a:txBody>
+                  <a:tcPr marL="91440" marR="91440" marT="54864" marB="54864" anchor="ctr">
+                    <a:lnL w="12700" cap="flat" cmpd="sng" algn="ctr">
+                      <a:solidFill>
+                        <a:srgbClr val="D5DBE3"/>
+                      </a:solidFill>
+                      <a:prstDash val="solid"/>
+                      <a:round/>
+                      <a:headEnd type="none" w="med" len="med"/>
+                      <a:tailEnd type="none" w="med" len="med"/>
+                    </a:lnL>
+                    <a:lnR w="12700" cap="flat" cmpd="sng" algn="ctr">
+                      <a:solidFill>
+                        <a:srgbClr val="D5DBE3"/>
+                      </a:solidFill>
+                      <a:prstDash val="solid"/>
+                      <a:round/>
+                      <a:headEnd type="none" w="med" len="med"/>
+                      <a:tailEnd type="none" w="med" len="med"/>
+                    </a:lnR>
+                    <a:lnT w="12700" cap="flat" cmpd="sng" algn="ctr">
+                      <a:solidFill>
+                        <a:srgbClr val="D5DBE3"/>
+                      </a:solidFill>
+                      <a:prstDash val="solid"/>
+                      <a:round/>
+                      <a:headEnd type="none" w="med" len="med"/>
+                      <a:tailEnd type="none" w="med" len="med"/>
+                    </a:lnT>
+                    <a:lnB w="12700" cap="flat" cmpd="sng" algn="ctr">
+                      <a:solidFill>
+                        <a:srgbClr val="D5DBE3"/>
+                      </a:solidFill>
+                      <a:prstDash val="solid"/>
+                      <a:round/>
+                      <a:headEnd type="none" w="med" len="med"/>
+                      <a:tailEnd type="none" w="med" len="med"/>
+                    </a:lnB>
+                  </a:tcPr>
+                </a:tc>
+              </a:tr>
+              <a:tr h="0">
+                <a:tc>
+                  <a:txBody>
+                    <a:bodyPr/>
+                    <a:lstStyle/>
+                    <a:p>
+                      <a:pPr indent="0" marL="0">
+                        <a:buNone/>
+                      </a:pPr>
+                      <a:r>
+                        <a:rPr lang="en-US" sz="1400" dirty="0">
+                          <a:solidFill>
+                            <a:srgbClr val="1F2A37"/>
+                          </a:solidFill>
+                          <a:latin typeface="Microsoft YaHei" pitchFamily="34" charset="0"/>
+                          <a:ea typeface="Microsoft YaHei" pitchFamily="34" charset="-122"/>
+                          <a:cs typeface="Microsoft YaHei" pitchFamily="34" charset="-120"/>
+                        </a:rPr>
+                        <a:t>粒度</a:t>
+                      </a:r>
+                      <a:endParaRPr lang="en-US" sz="1400" dirty="0">
+                        <a:latin typeface="Microsoft YaHei" charset="0"/>
+                        <a:ea typeface="Microsoft YaHei" charset="0"/>
+                        <a:cs typeface="Microsoft YaHei" charset="0"/>
+                      </a:endParaRPr>
+                    </a:p>
+                  </a:txBody>
+                  <a:tcPr marL="91440" marR="91440" marT="54864" marB="54864" anchor="ctr">
+                    <a:lnL w="12700" cap="flat" cmpd="sng" algn="ctr">
+                      <a:solidFill>
+                        <a:srgbClr val="D5DBE3"/>
+                      </a:solidFill>
+                      <a:prstDash val="solid"/>
+                      <a:round/>
+                      <a:headEnd type="none" w="med" len="med"/>
+                      <a:tailEnd type="none" w="med" len="med"/>
+                    </a:lnL>
+                    <a:lnR w="12700" cap="flat" cmpd="sng" algn="ctr">
+                      <a:solidFill>
+                        <a:srgbClr val="D5DBE3"/>
+                      </a:solidFill>
+                      <a:prstDash val="solid"/>
+                      <a:round/>
+                      <a:headEnd type="none" w="med" len="med"/>
+                      <a:tailEnd type="none" w="med" len="med"/>
+                    </a:lnR>
+                    <a:lnT w="12700" cap="flat" cmpd="sng" algn="ctr">
+                      <a:solidFill>
+                        <a:srgbClr val="D5DBE3"/>
+                      </a:solidFill>
+                      <a:prstDash val="solid"/>
+                      <a:round/>
+                      <a:headEnd type="none" w="med" len="med"/>
+                      <a:tailEnd type="none" w="med" len="med"/>
+                    </a:lnT>
+                    <a:lnB w="12700" cap="flat" cmpd="sng" algn="ctr">
+                      <a:solidFill>
+                        <a:srgbClr val="D5DBE3"/>
+                      </a:solidFill>
+                      <a:prstDash val="solid"/>
+                      <a:round/>
+                      <a:headEnd type="none" w="med" len="med"/>
+                      <a:tailEnd type="none" w="med" len="med"/>
+                    </a:lnB>
+                  </a:tcPr>
+                </a:tc>
+                <a:tc>
+                  <a:txBody>
+                    <a:bodyPr/>
+                    <a:lstStyle/>
+                    <a:p>
+                      <a:pPr indent="0" marL="0">
+                        <a:buNone/>
+                      </a:pPr>
+                      <a:r>
+                        <a:rPr lang="en-US" sz="1400" dirty="0">
+                          <a:solidFill>
+                            <a:srgbClr val="1F2A37"/>
+                          </a:solidFill>
+                          <a:latin typeface="Microsoft YaHei" pitchFamily="34" charset="0"/>
+                          <a:ea typeface="Microsoft YaHei" pitchFamily="34" charset="-122"/>
+                          <a:cs typeface="Microsoft YaHei" pitchFamily="34" charset="-120"/>
+                        </a:rPr>
+                        <a:t>销售日 + 小票号 + 商品，即每笔销售一行</a:t>
+                      </a:r>
+                      <a:endParaRPr lang="en-US" sz="1400" dirty="0">
+                        <a:latin typeface="Microsoft YaHei" charset="0"/>
+                        <a:ea typeface="Microsoft YaHei" charset="0"/>
+                        <a:cs typeface="Microsoft YaHei" charset="0"/>
+                      </a:endParaRPr>
+                    </a:p>
+                  </a:txBody>
+                  <a:tcPr marL="91440" marR="91440" marT="54864" marB="54864" anchor="ctr">
+                    <a:lnL w="12700" cap="flat" cmpd="sng" algn="ctr">
+                      <a:solidFill>
+                        <a:srgbClr val="D5DBE3"/>
+                      </a:solidFill>
+                      <a:prstDash val="solid"/>
+                      <a:round/>
+                      <a:headEnd type="none" w="med" len="med"/>
+                      <a:tailEnd type="none" w="med" len="med"/>
+                    </a:lnL>
+                    <a:lnR w="12700" cap="flat" cmpd="sng" algn="ctr">
+                      <a:solidFill>
+                        <a:srgbClr val="D5DBE3"/>
+                      </a:solidFill>
+                      <a:prstDash val="solid"/>
+                      <a:round/>
+                      <a:headEnd type="none" w="med" len="med"/>
+                      <a:tailEnd type="none" w="med" len="med"/>
+                    </a:lnR>
+                    <a:lnT w="12700" cap="flat" cmpd="sng" algn="ctr">
+                      <a:solidFill>
+                        <a:srgbClr val="D5DBE3"/>
+                      </a:solidFill>
+                      <a:prstDash val="solid"/>
+                      <a:round/>
+                      <a:headEnd type="none" w="med" len="med"/>
+                      <a:tailEnd type="none" w="med" len="med"/>
+                    </a:lnT>
+                    <a:lnB w="12700" cap="flat" cmpd="sng" algn="ctr">
+                      <a:solidFill>
+                        <a:srgbClr val="D5DBE3"/>
+                      </a:solidFill>
+                      <a:prstDash val="solid"/>
+                      <a:round/>
+                      <a:headEnd type="none" w="med" len="med"/>
+                      <a:tailEnd type="none" w="med" len="med"/>
+                    </a:lnB>
+                  </a:tcPr>
+                </a:tc>
+              </a:tr>
+              <a:tr h="0">
+                <a:tc>
+                  <a:txBody>
+                    <a:bodyPr/>
+                    <a:lstStyle/>
+                    <a:p>
+                      <a:pPr indent="0" marL="0">
+                        <a:buNone/>
+                      </a:pPr>
+                      <a:r>
+                        <a:rPr lang="en-US" sz="1400" dirty="0">
+                          <a:solidFill>
+                            <a:srgbClr val="1F2A37"/>
+                          </a:solidFill>
+                          <a:latin typeface="Microsoft YaHei" pitchFamily="34" charset="0"/>
+                          <a:ea typeface="Microsoft YaHei" pitchFamily="34" charset="-122"/>
+                          <a:cs typeface="Microsoft YaHei" pitchFamily="34" charset="-120"/>
+                        </a:rPr>
+                        <a:t>日期</a:t>
+                      </a:r>
+                      <a:endParaRPr lang="en-US" sz="1400" dirty="0">
+                        <a:latin typeface="Microsoft YaHei" charset="0"/>
+                        <a:ea typeface="Microsoft YaHei" charset="0"/>
+                        <a:cs typeface="Microsoft YaHei" charset="0"/>
+                      </a:endParaRPr>
+                    </a:p>
+                  </a:txBody>
+                  <a:tcPr marL="91440" marR="91440" marT="54864" marB="54864" anchor="ctr">
+                    <a:lnL w="12700" cap="flat" cmpd="sng" algn="ctr">
+                      <a:solidFill>
+                        <a:srgbClr val="D5DBE3"/>
+                      </a:solidFill>
+                      <a:prstDash val="solid"/>
+                      <a:round/>
+                      <a:headEnd type="none" w="med" len="med"/>
+                      <a:tailEnd type="none" w="med" len="med"/>
+                    </a:lnL>
+                    <a:lnR w="12700" cap="flat" cmpd="sng" algn="ctr">
+                      <a:solidFill>
+                        <a:srgbClr val="D5DBE3"/>
+                      </a:solidFill>
+                      <a:prstDash val="solid"/>
+                      <a:round/>
+                      <a:headEnd type="none" w="med" len="med"/>
+                      <a:tailEnd type="none" w="med" len="med"/>
+                    </a:lnR>
+                    <a:lnT w="12700" cap="flat" cmpd="sng" algn="ctr">
+                      <a:solidFill>
+                        <a:srgbClr val="D5DBE3"/>
+                      </a:solidFill>
+                      <a:prstDash val="solid"/>
+                      <a:round/>
+                      <a:headEnd type="none" w="med" len="med"/>
+                      <a:tailEnd type="none" w="med" len="med"/>
+                    </a:lnT>
+                    <a:lnB w="12700" cap="flat" cmpd="sng" algn="ctr">
+                      <a:solidFill>
+                        <a:srgbClr val="D5DBE3"/>
+                      </a:solidFill>
+                      <a:prstDash val="solid"/>
+                      <a:round/>
+                      <a:headEnd type="none" w="med" len="med"/>
+                      <a:tailEnd type="none" w="med" len="med"/>
+                    </a:lnB>
+                  </a:tcPr>
+                </a:tc>
+                <a:tc>
+                  <a:txBody>
+                    <a:bodyPr/>
+                    <a:lstStyle/>
+                    <a:p>
+                      <a:pPr indent="0" marL="0">
+                        <a:buNone/>
+                      </a:pPr>
+                      <a:r>
+                        <a:rPr lang="en-US" sz="1400" dirty="0">
+                          <a:solidFill>
+                            <a:srgbClr val="1F2A37"/>
+                          </a:solidFill>
+                          <a:latin typeface="Microsoft YaHei" pitchFamily="34" charset="0"/>
+                          <a:ea typeface="Microsoft YaHei" pitchFamily="34" charset="-122"/>
+                          <a:cs typeface="Microsoft YaHei" pitchFamily="34" charset="-120"/>
+                        </a:rPr>
+                        <a:t>ss_sold_date_sk 关联 date_dim（销售日）</a:t>
+                      </a:r>
+                      <a:endParaRPr lang="en-US" sz="1400" dirty="0">
+                        <a:latin typeface="Microsoft YaHei" charset="0"/>
+                        <a:ea typeface="Microsoft YaHei" charset="0"/>
+                        <a:cs typeface="Microsoft YaHei" charset="0"/>
+                      </a:endParaRPr>
+                    </a:p>
+                  </a:txBody>
+                  <a:tcPr marL="91440" marR="91440" marT="54864" marB="54864" anchor="ctr">
+                    <a:lnL w="12700" cap="flat" cmpd="sng" algn="ctr">
+                      <a:solidFill>
+                        <a:srgbClr val="D5DBE3"/>
+                      </a:solidFill>
+                      <a:prstDash val="solid"/>
+                      <a:round/>
+                      <a:headEnd type="none" w="med" len="med"/>
+                      <a:tailEnd type="none" w="med" len="med"/>
+                    </a:lnL>
+                    <a:lnR w="12700" cap="flat" cmpd="sng" algn="ctr">
+                      <a:solidFill>
+                        <a:srgbClr val="D5DBE3"/>
+                      </a:solidFill>
+                      <a:prstDash val="solid"/>
+                      <a:round/>
+                      <a:headEnd type="none" w="med" len="med"/>
+                      <a:tailEnd type="none" w="med" len="med"/>
+                    </a:lnR>
+                    <a:lnT w="12700" cap="flat" cmpd="sng" algn="ctr">
+                      <a:solidFill>
+                        <a:srgbClr val="D5DBE3"/>
+                      </a:solidFill>
+                      <a:prstDash val="solid"/>
+                      <a:round/>
+                      <a:headEnd type="none" w="med" len="med"/>
+                      <a:tailEnd type="none" w="med" len="med"/>
+                    </a:lnT>
+                    <a:lnB w="12700" cap="flat" cmpd="sng" algn="ctr">
+                      <a:solidFill>
+                        <a:srgbClr val="D5DBE3"/>
+                      </a:solidFill>
+                      <a:prstDash val="solid"/>
+                      <a:round/>
+                      <a:headEnd type="none" w="med" len="med"/>
+                      <a:tailEnd type="none" w="med" len="med"/>
+                    </a:lnB>
+                  </a:tcPr>
+                </a:tc>
+              </a:tr>
+              <a:tr h="0">
+                <a:tc>
+                  <a:txBody>
+                    <a:bodyPr/>
+                    <a:lstStyle/>
+                    <a:p>
+                      <a:pPr indent="0" marL="0">
+                        <a:buNone/>
+                      </a:pPr>
+                      <a:r>
+                        <a:rPr lang="en-US" sz="1400" dirty="0">
+                          <a:solidFill>
+                            <a:srgbClr val="1F2A37"/>
+                          </a:solidFill>
+                          <a:latin typeface="Microsoft YaHei" pitchFamily="34" charset="0"/>
+                          <a:ea typeface="Microsoft YaHei" pitchFamily="34" charset="-122"/>
+                          <a:cs typeface="Microsoft YaHei" pitchFamily="34" charset="-120"/>
+                        </a:rPr>
+                        <a:t>校验规则</a:t>
+                      </a:r>
+                      <a:endParaRPr lang="en-US" sz="1400" dirty="0">
+                        <a:latin typeface="Microsoft YaHei" charset="0"/>
+                        <a:ea typeface="Microsoft YaHei" charset="0"/>
+                        <a:cs typeface="Microsoft YaHei" charset="0"/>
+                      </a:endParaRPr>
+                    </a:p>
+                  </a:txBody>
+                  <a:tcPr marL="91440" marR="91440" marT="54864" marB="54864" anchor="ctr">
+                    <a:lnL w="12700" cap="flat" cmpd="sng" algn="ctr">
+                      <a:solidFill>
+                        <a:srgbClr val="D5DBE3"/>
+                      </a:solidFill>
+                      <a:prstDash val="solid"/>
+                      <a:round/>
+                      <a:headEnd type="none" w="med" len="med"/>
+                      <a:tailEnd type="none" w="med" len="med"/>
+                    </a:lnL>
+                    <a:lnR w="12700" cap="flat" cmpd="sng" algn="ctr">
+                      <a:solidFill>
+                        <a:srgbClr val="D5DBE3"/>
+                      </a:solidFill>
+                      <a:prstDash val="solid"/>
+                      <a:round/>
+                      <a:headEnd type="none" w="med" len="med"/>
+                      <a:tailEnd type="none" w="med" len="med"/>
+                    </a:lnR>
+                    <a:lnT w="12700" cap="flat" cmpd="sng" algn="ctr">
+                      <a:solidFill>
+                        <a:srgbClr val="D5DBE3"/>
+                      </a:solidFill>
+                      <a:prstDash val="solid"/>
+                      <a:round/>
+                      <a:headEnd type="none" w="med" len="med"/>
+                      <a:tailEnd type="none" w="med" len="med"/>
+                    </a:lnT>
+                    <a:lnB w="12700" cap="flat" cmpd="sng" algn="ctr">
+                      <a:solidFill>
+                        <a:srgbClr val="D5DBE3"/>
+                      </a:solidFill>
+                      <a:prstDash val="solid"/>
+                      <a:round/>
+                      <a:headEnd type="none" w="med" len="med"/>
+                      <a:tailEnd type="none" w="med" len="med"/>
+                    </a:lnB>
+                  </a:tcPr>
+                </a:tc>
+                <a:tc>
+                  <a:txBody>
+                    <a:bodyPr/>
+                    <a:lstStyle/>
+                    <a:p>
+                      <a:pPr indent="0" marL="0">
+                        <a:buNone/>
+                      </a:pPr>
+                      <a:r>
+                        <a:rPr lang="en-US" sz="1400" dirty="0">
+                          <a:solidFill>
+                            <a:srgbClr val="1F2A37"/>
+                          </a:solidFill>
+                          <a:latin typeface="Microsoft YaHei" pitchFamily="34" charset="0"/>
+                          <a:ea typeface="Microsoft YaHei" pitchFamily="34" charset="-122"/>
+                          <a:cs typeface="Microsoft YaHei" pitchFamily="34" charset="-120"/>
+                        </a:rPr>
+                        <a:t>每笔销售一行；日期键唯一；丢行率不超标（学习时 1.03%）</a:t>
+                      </a:r>
+                      <a:endParaRPr lang="en-US" sz="1400" dirty="0">
+                        <a:latin typeface="Microsoft YaHei" charset="0"/>
+                        <a:ea typeface="Microsoft YaHei" charset="0"/>
+                        <a:cs typeface="Microsoft YaHei" charset="0"/>
+                      </a:endParaRPr>
+                    </a:p>
+                  </a:txBody>
+                  <a:tcPr marL="91440" marR="91440" marT="54864" marB="54864" anchor="ctr">
+                    <a:lnL w="12700" cap="flat" cmpd="sng" algn="ctr">
+                      <a:solidFill>
+                        <a:srgbClr val="D5DBE3"/>
+                      </a:solidFill>
+                      <a:prstDash val="solid"/>
+                      <a:round/>
+                      <a:headEnd type="none" w="med" len="med"/>
+                      <a:tailEnd type="none" w="med" len="med"/>
+                    </a:lnL>
+                    <a:lnR w="12700" cap="flat" cmpd="sng" algn="ctr">
+                      <a:solidFill>
+                        <a:srgbClr val="D5DBE3"/>
+                      </a:solidFill>
+                      <a:prstDash val="solid"/>
+                      <a:round/>
+                      <a:headEnd type="none" w="med" len="med"/>
+                      <a:tailEnd type="none" w="med" len="med"/>
+                    </a:lnR>
+                    <a:lnT w="12700" cap="flat" cmpd="sng" algn="ctr">
+                      <a:solidFill>
+                        <a:srgbClr val="D5DBE3"/>
+                      </a:solidFill>
+                      <a:prstDash val="solid"/>
+                      <a:round/>
+                      <a:headEnd type="none" w="med" len="med"/>
+                      <a:tailEnd type="none" w="med" len="med"/>
+                    </a:lnT>
+                    <a:lnB w="12700" cap="flat" cmpd="sng" algn="ctr">
+                      <a:solidFill>
+                        <a:srgbClr val="D5DBE3"/>
+                      </a:solidFill>
+                      <a:prstDash val="solid"/>
+                      <a:round/>
+                      <a:headEnd type="none" w="med" len="med"/>
+                      <a:tailEnd type="none" w="med" len="med"/>
+                    </a:lnB>
+                  </a:tcPr>
+                </a:tc>
+              </a:tr>
+              <a:tr h="0">
+                <a:tc>
+                  <a:txBody>
+                    <a:bodyPr/>
+                    <a:lstStyle/>
+                    <a:p>
+                      <a:pPr indent="0" marL="0">
+                        <a:buNone/>
+                      </a:pPr>
+                      <a:r>
+                        <a:rPr lang="en-US" sz="1400" dirty="0">
+                          <a:solidFill>
+                            <a:srgbClr val="1F2A37"/>
+                          </a:solidFill>
+                          <a:latin typeface="Microsoft YaHei" pitchFamily="34" charset="0"/>
+                          <a:ea typeface="Microsoft YaHei" pitchFamily="34" charset="-122"/>
+                          <a:cs typeface="Microsoft YaHei" pitchFamily="34" charset="-120"/>
+                        </a:rPr>
+                        <a:t>证据</a:t>
+                      </a:r>
+                      <a:endParaRPr lang="en-US" sz="1400" dirty="0">
+                        <a:latin typeface="Microsoft YaHei" charset="0"/>
+                        <a:ea typeface="Microsoft YaHei" charset="0"/>
+                        <a:cs typeface="Microsoft YaHei" charset="0"/>
+                      </a:endParaRPr>
+                    </a:p>
+                  </a:txBody>
+                  <a:tcPr marL="91440" marR="91440" marT="54864" marB="54864" anchor="ctr">
+                    <a:lnL w="12700" cap="flat" cmpd="sng" algn="ctr">
+                      <a:solidFill>
+                        <a:srgbClr val="D5DBE3"/>
+                      </a:solidFill>
+                      <a:prstDash val="solid"/>
+                      <a:round/>
+                      <a:headEnd type="none" w="med" len="med"/>
+                      <a:tailEnd type="none" w="med" len="med"/>
+                    </a:lnL>
+                    <a:lnR w="12700" cap="flat" cmpd="sng" algn="ctr">
+                      <a:solidFill>
+                        <a:srgbClr val="D5DBE3"/>
+                      </a:solidFill>
+                      <a:prstDash val="solid"/>
+                      <a:round/>
+                      <a:headEnd type="none" w="med" len="med"/>
+                      <a:tailEnd type="none" w="med" len="med"/>
+                    </a:lnR>
+                    <a:lnT w="12700" cap="flat" cmpd="sng" algn="ctr">
+                      <a:solidFill>
+                        <a:srgbClr val="D5DBE3"/>
+                      </a:solidFill>
+                      <a:prstDash val="solid"/>
+                      <a:round/>
+                      <a:headEnd type="none" w="med" len="med"/>
+                      <a:tailEnd type="none" w="med" len="med"/>
+                    </a:lnT>
+                    <a:lnB w="12700" cap="flat" cmpd="sng" algn="ctr">
+                      <a:solidFill>
+                        <a:srgbClr val="D5DBE3"/>
+                      </a:solidFill>
+                      <a:prstDash val="solid"/>
+                      <a:round/>
+                      <a:headEnd type="none" w="med" len="med"/>
+                      <a:tailEnd type="none" w="med" len="med"/>
+                    </a:lnB>
+                  </a:tcPr>
+                </a:tc>
+                <a:tc>
+                  <a:txBody>
+                    <a:bodyPr/>
+                    <a:lstStyle/>
+                    <a:p>
+                      <a:pPr indent="0" marL="0">
+                        <a:buNone/>
+                      </a:pPr>
+                      <a:r>
+                        <a:rPr lang="en-US" sz="1400" dirty="0">
+                          <a:solidFill>
+                            <a:srgbClr val="1F2A37"/>
+                          </a:solidFill>
+                          <a:latin typeface="Microsoft YaHei" pitchFamily="34" charset="0"/>
+                          <a:ea typeface="Microsoft YaHei" pitchFamily="34" charset="-122"/>
+                          <a:cs typeface="Microsoft YaHei" pitchFamily="34" charset="-120"/>
+                        </a:rPr>
+                        <a:t>学习题、学习时的 SQL 和答案、当时的数据版本</a:t>
+                      </a:r>
+                      <a:endParaRPr lang="en-US" sz="1400" dirty="0">
+                        <a:latin typeface="Microsoft YaHei" charset="0"/>
+                        <a:ea typeface="Microsoft YaHei" charset="0"/>
+                        <a:cs typeface="Microsoft YaHei" charset="0"/>
+                      </a:endParaRPr>
+                    </a:p>
+                  </a:txBody>
+                  <a:tcPr marL="91440" marR="91440" marT="54864" marB="54864" anchor="ctr">
+                    <a:lnL w="12700" cap="flat" cmpd="sng" algn="ctr">
+                      <a:solidFill>
+                        <a:srgbClr val="D5DBE3"/>
+                      </a:solidFill>
+                      <a:prstDash val="solid"/>
+                      <a:round/>
+                      <a:headEnd type="none" w="med" len="med"/>
+                      <a:tailEnd type="none" w="med" len="med"/>
+                    </a:lnL>
+                    <a:lnR w="12700" cap="flat" cmpd="sng" algn="ctr">
+                      <a:solidFill>
+                        <a:srgbClr val="D5DBE3"/>
+                      </a:solidFill>
+                      <a:prstDash val="solid"/>
+                      <a:round/>
+                      <a:headEnd type="none" w="med" len="med"/>
+                      <a:tailEnd type="none" w="med" len="med"/>
+                    </a:lnR>
+                    <a:lnT w="12700" cap="flat" cmpd="sng" algn="ctr">
+                      <a:solidFill>
+                        <a:srgbClr val="D5DBE3"/>
+                      </a:solidFill>
+                      <a:prstDash val="solid"/>
+                      <a:round/>
+                      <a:headEnd type="none" w="med" len="med"/>
+                      <a:tailEnd type="none" w="med" len="med"/>
+                    </a:lnT>
+                    <a:lnB w="12700" cap="flat" cmpd="sng" algn="ctr">
+                      <a:solidFill>
+                        <a:srgbClr val="D5DBE3"/>
+                      </a:solidFill>
+                      <a:prstDash val="solid"/>
+                      <a:round/>
+                      <a:headEnd type="none" w="med" len="med"/>
+                      <a:tailEnd type="none" w="med" len="med"/>
+                    </a:lnB>
+                  </a:tcPr>
+                </a:tc>
+              </a:tr>
+            </a:tbl>
+          </a:graphicData>
+        </a:graphic>
+      </p:graphicFrame>
+      <p:sp>
+        <p:nvSpPr>
+          <p:cNvPr id="12" name="Text 9"/>
+          <p:cNvSpPr txBox="1"/>
+          <p:nvPr/>
+        </p:nvSpPr>
+        <p:spPr>
+          <a:xfrm>
+            <a:off x="548640" y="6263640"/>
+            <a:ext cx="10362895" cy="365760"/>
+          </a:xfrm>
+          <a:prstGeom prst="rect">
+            <a:avLst/>
+          </a:prstGeom>
+          <a:noFill/>
+          <a:ln/>
+        </p:spPr>
+        <p:txBody>
+          <a:bodyPr wrap="square" lIns="0" tIns="0" rIns="0" bIns="0" rtlCol="0" anchor="b"/>
+          <a:lstStyle/>
+          <a:p>
+            <a:pPr indent="0" marL="0">
+              <a:buNone/>
+            </a:pPr>
+            <a:r>
+              <a:rPr lang="en-US" sz="1100" dirty="0">
+                <a:solidFill>
+                  <a:srgbClr val="5B6573"/>
+                </a:solidFill>
+                <a:latin typeface="Microsoft YaHei" pitchFamily="34" charset="0"/>
+                <a:ea typeface="Microsoft YaHei" pitchFamily="34" charset="-122"/>
+                <a:cs typeface="Microsoft YaHei" pitchFamily="34" charset="-120"/>
+              </a:rPr>
+              <a:t>记录：noctis results/scen-20261002/dsv41flash-r1-g3fix--snap（端到端实验第 1 次 MAVRA 运行）。数据为仿 TPC-DS 的合成零售数据（100 万行门店销售），题目中的年份略去。</a:t>
+            </a:r>
+            <a:endParaRPr lang="en-US" sz="1100" dirty="0"/>
+          </a:p>
+        </p:txBody>
+      </p:sp>
+      <p:sp>
+        <p:nvSpPr>
+          <p:cNvPr id="25" name="Slide Number Placeholder 0"/>
+          <p:cNvSpPr>
+            <a:spLocks noGrp="1"/>
+          </p:cNvSpPr>
+          <p:nvPr>
+            <p:ph type="sldNum" sz="quarter" idx="4294967295"/>
+          </p:nvPr>
+        </p:nvSpPr>
+        <p:spPr>
+          <a:xfrm>
+            <a:off x="11185855" y="6446520"/>
+            <a:ext cx="457200" cy="274320"/>
+          </a:xfrm>
+          <a:prstGeom prst="rect">
+            <a:avLst/>
+          </a:prstGeom>
+          <a:extLst>
+            <a:ext uri="{C572A759-6A51-4108-AA02-DFA0A04FC94B}">
+              <ma14:wrappingTextBoxFlag xmlns:ma14="http://schemas.microsoft.com/office/mac/drawingml/2011/main" val="0"/>
+            </a:ext>
+          </a:extLst>
+        </p:spPr>
+        <p:txBody>
+          <a:bodyPr/>
+          <a:lstStyle>
+            <a:lvl1pPr>
+              <a:defRPr sz="1000">
+                <a:solidFill>
+                  <a:srgbClr val="5B6573"/>
+                </a:solidFill>
+                <a:latin typeface="Microsoft YaHei"/>
+                <a:ea typeface="Microsoft YaHei"/>
+                <a:cs typeface="Microsoft YaHei"/>
+              </a:defRPr>
+            </a:lvl1pPr>
+          </a:lstStyle>
+          <a:p>
+            <a:pPr algn="r"/>
+            <a:fld id="{F7021451-1387-4CA6-816F-3879F97B5CBC}" type="slidenum">
+              <a:rPr b="0" lang="en-US"/>
+              <a:t>2</a:t>
+            </a:fld>
+            <a:endParaRPr lang="en-US"/>
+          </a:p>
+        </p:txBody>
+      </p:sp>
+    </p:spTree>
+  </p:cSld>
+  <p:clrMapOvr>
+    <a:masterClrMapping/>
+  </p:clrMapOvr>
+</p:sld>
+</file>
+
+<file path=ppt/slides/slide3.xml><?xml version="1.0" encoding="utf-8"?>
+<p:sld xmlns:a="http://schemas.openxmlformats.org/drawingml/2006/main" xmlns:r="http://schemas.openxmlformats.org/officeDocument/2006/relationships" xmlns:p="http://schemas.openxmlformats.org/presentationml/2006/main">
+  <p:cSld name="Slide 3">
+    <p:spTree>
+      <p:nvGrpSpPr>
+        <p:cNvPr id="1" name=""/>
+        <p:cNvGrpSpPr/>
+        <p:nvPr/>
+      </p:nvGrpSpPr>
+      <p:grpSpPr>
+        <a:xfrm>
+          <a:off x="0" y="0"/>
+          <a:ext cx="0" cy="0"/>
+          <a:chOff x="0" y="0"/>
+          <a:chExt cx="0" cy="0"/>
+        </a:xfrm>
+      </p:grpSpPr>
+      <p:sp>
+        <p:nvSpPr>
+          <p:cNvPr id="2" name="Text 0"/>
+          <p:cNvSpPr/>
+          <p:nvPr>
+            <p:ph idx="100" type="title" hasCustomPrompt="1"/>
+          </p:nvPr>
+        </p:nvSpPr>
+        <p:spPr>
+          <a:xfrm>
+            <a:off x="548640" y="274320"/>
+            <a:ext cx="11094415" cy="685800"/>
+          </a:xfrm>
+          <a:prstGeom prst="rect">
+            <a:avLst/>
+          </a:prstGeom>
+          <a:noFill/>
+          <a:ln/>
+        </p:spPr>
+        <p:txBody>
+          <a:bodyPr wrap="square" lIns="0" tIns="0" rIns="0" bIns="0" rtlCol="0" anchor="ctr"/>
+          <a:lstStyle/>
+          <a:p>
+            <a:pPr algn="l" indent="0" marL="0">
+              <a:buNone/>
+            </a:pPr>
+            <a:r>
+              <a:rPr lang="en-US" sz="3000" b="1" dirty="0">
+                <a:solidFill>
+                  <a:srgbClr val="1F2A37"/>
+                </a:solidFill>
+                <a:latin typeface="Microsoft YaHei" pitchFamily="34" charset="0"/>
+                <a:ea typeface="Microsoft YaHei" pitchFamily="34" charset="-122"/>
+                <a:cs typeface="Microsoft YaHei" pitchFamily="34" charset="-120"/>
+              </a:rPr>
+              <a:t>数据每天都在写入：照旧用这个定义会怎样</a:t>
+            </a:r>
+            <a:endParaRPr lang="en-US" sz="3000" dirty="0"/>
+          </a:p>
+        </p:txBody>
+      </p:sp>
+      <p:graphicFrame>
+        <p:nvGraphicFramePr>
+          <p:cNvPr id="4" name="Table 0"/>
+          <p:cNvGraphicFramePr>
+            <a:graphicFrameLocks noGrp="1"/>
+          </p:cNvGraphicFramePr>
+          <p:nvPr>
+            <p:extLst>
+              <p:ext uri="{D42A27DB-BD31-4B8C-83A1-F6EECF244321}">
+                <p14:modId xmlns:p14="http://schemas.microsoft.com/office/powerpoint/2010/main" val="1579011935"/>
+              </p:ext>
+            </p:extLst>
+          </p:nvPr>
+        </p:nvGraphicFramePr>
+        <p:xfrm>
+          <a:off x="548640" y="1188720"/>
+          <a:ext cx="11094415" cy="914400"/>
+        </p:xfrm>
+        <a:graphic>
+          <a:graphicData uri="http://schemas.openxmlformats.org/drawingml/2006/table">
+            <a:tbl>
+              <a:tblPr/>
+              <a:tblGrid>
+                <a:gridCol w="1463040"/>
+                <a:gridCol w="4937760"/>
+                <a:gridCol w="1463040"/>
+                <a:gridCol w="3227832"/>
+              </a:tblGrid>
+              <a:tr h="0">
+                <a:tc>
+                  <a:txBody>
+                    <a:bodyPr/>
+                    <a:lstStyle/>
+                    <a:p>
+                      <a:pPr indent="0" marL="0">
+                        <a:buNone/>
+                      </a:pPr>
+                      <a:r>
+                        <a:rPr lang="en-US" sz="1500" b="1" dirty="0">
+                          <a:solidFill>
+                            <a:srgbClr val="1F2A37"/>
+                          </a:solidFill>
+                          <a:latin typeface="Microsoft YaHei" pitchFamily="34" charset="0"/>
+                          <a:ea typeface="Microsoft YaHei" pitchFamily="34" charset="-122"/>
+                          <a:cs typeface="Microsoft YaHei" pitchFamily="34" charset="-120"/>
+                        </a:rPr>
+                        <a:t>写入</a:t>
+                      </a:r>
+                      <a:endParaRPr lang="en-US" sz="1500" dirty="0">
+                        <a:latin typeface="Microsoft YaHei" charset="0"/>
+                        <a:ea typeface="Microsoft YaHei" charset="0"/>
+                        <a:cs typeface="Microsoft YaHei" charset="0"/>
+                      </a:endParaRPr>
+                    </a:p>
+                  </a:txBody>
+                  <a:tcPr marL="91440" marR="91440" marT="54864" marB="54864" anchor="ctr">
+                    <a:lnL w="12700" cap="flat" cmpd="sng" algn="ctr">
+                      <a:solidFill>
+                        <a:srgbClr val="D5DBE3"/>
+                      </a:solidFill>
+                      <a:prstDash val="solid"/>
+                      <a:round/>
+                      <a:headEnd type="none" w="med" len="med"/>
+                      <a:tailEnd type="none" w="med" len="med"/>
+                    </a:lnL>
+                    <a:lnR w="12700" cap="flat" cmpd="sng" algn="ctr">
+                      <a:solidFill>
+                        <a:srgbClr val="D5DBE3"/>
+                      </a:solidFill>
+                      <a:prstDash val="solid"/>
+                      <a:round/>
+                      <a:headEnd type="none" w="med" len="med"/>
+                      <a:tailEnd type="none" w="med" len="med"/>
+                    </a:lnR>
+                    <a:lnT w="12700" cap="flat" cmpd="sng" algn="ctr">
+                      <a:solidFill>
+                        <a:srgbClr val="D5DBE3"/>
+                      </a:solidFill>
+                      <a:prstDash val="solid"/>
+                      <a:round/>
+                      <a:headEnd type="none" w="med" len="med"/>
+                      <a:tailEnd type="none" w="med" len="med"/>
+                    </a:lnT>
+                    <a:lnB w="12700" cap="flat" cmpd="sng" algn="ctr">
+                      <a:solidFill>
+                        <a:srgbClr val="D5DBE3"/>
+                      </a:solidFill>
+                      <a:prstDash val="solid"/>
+                      <a:round/>
+                      <a:headEnd type="none" w="med" len="med"/>
+                      <a:tailEnd type="none" w="med" len="med"/>
+                    </a:lnB>
+                    <a:solidFill>
+                      <a:srgbClr val="F1F3F6"/>
+                    </a:solidFill>
+                  </a:tcPr>
+                </a:tc>
+                <a:tc>
+                  <a:txBody>
+                    <a:bodyPr/>
+                    <a:lstStyle/>
+                    <a:p>
+                      <a:pPr indent="0" marL="0">
+                        <a:buNone/>
+                      </a:pPr>
+                      <a:r>
+                        <a:rPr lang="en-US" sz="1500" b="1" dirty="0">
+                          <a:solidFill>
+                            <a:srgbClr val="1F2A37"/>
+                          </a:solidFill>
+                          <a:latin typeface="Microsoft YaHei" pitchFamily="34" charset="0"/>
+                          <a:ea typeface="Microsoft YaHei" pitchFamily="34" charset="-122"/>
+                          <a:cs typeface="Microsoft YaHei" pitchFamily="34" charset="-120"/>
+                        </a:rPr>
+                        <a:t>数据库里发生了什么</a:t>
+                      </a:r>
+                      <a:endParaRPr lang="en-US" sz="1500" dirty="0">
+                        <a:latin typeface="Microsoft YaHei" charset="0"/>
+                        <a:ea typeface="Microsoft YaHei" charset="0"/>
+                        <a:cs typeface="Microsoft YaHei" charset="0"/>
+                      </a:endParaRPr>
+                    </a:p>
+                  </a:txBody>
+                  <a:tcPr marL="91440" marR="91440" marT="54864" marB="54864" anchor="ctr">
+                    <a:lnL w="12700" cap="flat" cmpd="sng" algn="ctr">
+                      <a:solidFill>
+                        <a:srgbClr val="D5DBE3"/>
+                      </a:solidFill>
+                      <a:prstDash val="solid"/>
+                      <a:round/>
+                      <a:headEnd type="none" w="med" len="med"/>
+                      <a:tailEnd type="none" w="med" len="med"/>
+                    </a:lnL>
+                    <a:lnR w="12700" cap="flat" cmpd="sng" algn="ctr">
+                      <a:solidFill>
+                        <a:srgbClr val="D5DBE3"/>
+                      </a:solidFill>
+                      <a:prstDash val="solid"/>
+                      <a:round/>
+                      <a:headEnd type="none" w="med" len="med"/>
+                      <a:tailEnd type="none" w="med" len="med"/>
+                    </a:lnR>
+                    <a:lnT w="12700" cap="flat" cmpd="sng" algn="ctr">
+                      <a:solidFill>
+                        <a:srgbClr val="D5DBE3"/>
+                      </a:solidFill>
+                      <a:prstDash val="solid"/>
+                      <a:round/>
+                      <a:headEnd type="none" w="med" len="med"/>
+                      <a:tailEnd type="none" w="med" len="med"/>
+                    </a:lnT>
+                    <a:lnB w="12700" cap="flat" cmpd="sng" algn="ctr">
+                      <a:solidFill>
+                        <a:srgbClr val="D5DBE3"/>
+                      </a:solidFill>
+                      <a:prstDash val="solid"/>
+                      <a:round/>
+                      <a:headEnd type="none" w="med" len="med"/>
+                      <a:tailEnd type="none" w="med" len="med"/>
+                    </a:lnB>
+                    <a:solidFill>
+                      <a:srgbClr val="F1F3F6"/>
+                    </a:solidFill>
+                  </a:tcPr>
+                </a:tc>
+                <a:tc>
+                  <a:txBody>
+                    <a:bodyPr/>
+                    <a:lstStyle/>
+                    <a:p>
+                      <a:pPr indent="0" marL="0">
+                        <a:buNone/>
+                      </a:pPr>
+                      <a:r>
+                        <a:rPr lang="en-US" sz="1500" b="1" dirty="0">
+                          <a:solidFill>
+                            <a:srgbClr val="1F2A37"/>
+                          </a:solidFill>
+                          <a:latin typeface="Microsoft YaHei" pitchFamily="34" charset="0"/>
+                          <a:ea typeface="Microsoft YaHei" pitchFamily="34" charset="-122"/>
+                          <a:cs typeface="Microsoft YaHei" pitchFamily="34" charset="-120"/>
+                        </a:rPr>
+                        <a:t>正确答案</a:t>
+                      </a:r>
+                      <a:endParaRPr lang="en-US" sz="1500" dirty="0">
+                        <a:latin typeface="Microsoft YaHei" charset="0"/>
+                        <a:ea typeface="Microsoft YaHei" charset="0"/>
+                        <a:cs typeface="Microsoft YaHei" charset="0"/>
+                      </a:endParaRPr>
+                    </a:p>
+                  </a:txBody>
+                  <a:tcPr marL="91440" marR="91440" marT="54864" marB="54864" anchor="ctr">
+                    <a:lnL w="12700" cap="flat" cmpd="sng" algn="ctr">
+                      <a:solidFill>
+                        <a:srgbClr val="D5DBE3"/>
+                      </a:solidFill>
+                      <a:prstDash val="solid"/>
+                      <a:round/>
+                      <a:headEnd type="none" w="med" len="med"/>
+                      <a:tailEnd type="none" w="med" len="med"/>
+                    </a:lnL>
+                    <a:lnR w="12700" cap="flat" cmpd="sng" algn="ctr">
+                      <a:solidFill>
+                        <a:srgbClr val="D5DBE3"/>
+                      </a:solidFill>
+                      <a:prstDash val="solid"/>
+                      <a:round/>
+                      <a:headEnd type="none" w="med" len="med"/>
+                      <a:tailEnd type="none" w="med" len="med"/>
+                    </a:lnR>
+                    <a:lnT w="12700" cap="flat" cmpd="sng" algn="ctr">
+                      <a:solidFill>
+                        <a:srgbClr val="D5DBE3"/>
+                      </a:solidFill>
+                      <a:prstDash val="solid"/>
+                      <a:round/>
+                      <a:headEnd type="none" w="med" len="med"/>
+                      <a:tailEnd type="none" w="med" len="med"/>
+                    </a:lnT>
+                    <a:lnB w="12700" cap="flat" cmpd="sng" algn="ctr">
+                      <a:solidFill>
+                        <a:srgbClr val="D5DBE3"/>
+                      </a:solidFill>
+                      <a:prstDash val="solid"/>
+                      <a:round/>
+                      <a:headEnd type="none" w="med" len="med"/>
+                      <a:tailEnd type="none" w="med" len="med"/>
+                    </a:lnB>
+                    <a:solidFill>
+                      <a:srgbClr val="F1F3F6"/>
+                    </a:solidFill>
+                  </a:tcPr>
+                </a:tc>
+                <a:tc>
+                  <a:txBody>
+                    <a:bodyPr/>
+                    <a:lstStyle/>
+                    <a:p>
+                      <a:pPr indent="0" marL="0">
+                        <a:buNone/>
+                      </a:pPr>
+                      <a:r>
+                        <a:rPr lang="en-US" sz="1500" b="1" dirty="0">
+                          <a:solidFill>
+                            <a:srgbClr val="1F2A37"/>
+                          </a:solidFill>
+                          <a:latin typeface="Microsoft YaHei" pitchFamily="34" charset="0"/>
+                          <a:ea typeface="Microsoft YaHei" pitchFamily="34" charset="-122"/>
+                          <a:cs typeface="Microsoft YaHei" pitchFamily="34" charset="-120"/>
+                        </a:rPr>
+                        <a:t>照旧用学到的定义</a:t>
+                      </a:r>
+                      <a:endParaRPr lang="en-US" sz="1500" dirty="0">
+                        <a:latin typeface="Microsoft YaHei" charset="0"/>
+                        <a:ea typeface="Microsoft YaHei" charset="0"/>
+                        <a:cs typeface="Microsoft YaHei" charset="0"/>
+                      </a:endParaRPr>
+                    </a:p>
+                  </a:txBody>
+                  <a:tcPr marL="91440" marR="91440" marT="54864" marB="54864" anchor="ctr">
+                    <a:lnL w="12700" cap="flat" cmpd="sng" algn="ctr">
+                      <a:solidFill>
+                        <a:srgbClr val="D5DBE3"/>
+                      </a:solidFill>
+                      <a:prstDash val="solid"/>
+                      <a:round/>
+                      <a:headEnd type="none" w="med" len="med"/>
+                      <a:tailEnd type="none" w="med" len="med"/>
+                    </a:lnL>
+                    <a:lnR w="12700" cap="flat" cmpd="sng" algn="ctr">
+                      <a:solidFill>
+                        <a:srgbClr val="D5DBE3"/>
+                      </a:solidFill>
+                      <a:prstDash val="solid"/>
+                      <a:round/>
+                      <a:headEnd type="none" w="med" len="med"/>
+                      <a:tailEnd type="none" w="med" len="med"/>
+                    </a:lnR>
+                    <a:lnT w="12700" cap="flat" cmpd="sng" algn="ctr">
+                      <a:solidFill>
+                        <a:srgbClr val="D5DBE3"/>
+                      </a:solidFill>
+                      <a:prstDash val="solid"/>
+                      <a:round/>
+                      <a:headEnd type="none" w="med" len="med"/>
+                      <a:tailEnd type="none" w="med" len="med"/>
+                    </a:lnT>
+                    <a:lnB w="12700" cap="flat" cmpd="sng" algn="ctr">
+                      <a:solidFill>
+                        <a:srgbClr val="D5DBE3"/>
+                      </a:solidFill>
+                      <a:prstDash val="solid"/>
+                      <a:round/>
+                      <a:headEnd type="none" w="med" len="med"/>
+                      <a:tailEnd type="none" w="med" len="med"/>
+                    </a:lnB>
+                    <a:solidFill>
+                      <a:srgbClr val="F1F3F6"/>
+                    </a:solidFill>
+                  </a:tcPr>
+                </a:tc>
+              </a:tr>
+              <a:tr h="0">
+                <a:tc>
+                  <a:txBody>
+                    <a:bodyPr/>
+                    <a:lstStyle/>
+                    <a:p>
+                      <a:pPr indent="0" marL="0">
+                        <a:buNone/>
+                      </a:pPr>
+                      <a:r>
+                        <a:rPr lang="en-US" sz="1500" dirty="0">
+                          <a:solidFill>
+                            <a:srgbClr val="1F2A37"/>
+                          </a:solidFill>
+                          <a:latin typeface="Microsoft YaHei" pitchFamily="34" charset="0"/>
+                          <a:ea typeface="Microsoft YaHei" pitchFamily="34" charset="-122"/>
+                          <a:cs typeface="Microsoft YaHei" pitchFamily="34" charset="-120"/>
+                        </a:rPr>
+                        <a:t>追加新数据</a:t>
+                      </a:r>
+                      <a:endParaRPr lang="en-US" sz="1500" dirty="0">
+                        <a:latin typeface="Microsoft YaHei" charset="0"/>
+                        <a:ea typeface="Microsoft YaHei" charset="0"/>
+                        <a:cs typeface="Microsoft YaHei" charset="0"/>
+                      </a:endParaRPr>
+                    </a:p>
+                  </a:txBody>
+                  <a:tcPr marL="91440" marR="91440" marT="54864" marB="54864" anchor="ctr">
+                    <a:lnL w="12700" cap="flat" cmpd="sng" algn="ctr">
+                      <a:solidFill>
+                        <a:srgbClr val="D5DBE3"/>
+                      </a:solidFill>
+                      <a:prstDash val="solid"/>
+                      <a:round/>
+                      <a:headEnd type="none" w="med" len="med"/>
+                      <a:tailEnd type="none" w="med" len="med"/>
+                    </a:lnL>
+                    <a:lnR w="12700" cap="flat" cmpd="sng" algn="ctr">
+                      <a:solidFill>
+                        <a:srgbClr val="D5DBE3"/>
+                      </a:solidFill>
+                      <a:prstDash val="solid"/>
+                      <a:round/>
+                      <a:headEnd type="none" w="med" len="med"/>
+                      <a:tailEnd type="none" w="med" len="med"/>
+                    </a:lnR>
+                    <a:lnT w="12700" cap="flat" cmpd="sng" algn="ctr">
+                      <a:solidFill>
+                        <a:srgbClr val="D5DBE3"/>
+                      </a:solidFill>
+                      <a:prstDash val="solid"/>
+                      <a:round/>
+                      <a:headEnd type="none" w="med" len="med"/>
+                      <a:tailEnd type="none" w="med" len="med"/>
+                    </a:lnT>
+                    <a:lnB w="12700" cap="flat" cmpd="sng" algn="ctr">
+                      <a:solidFill>
+                        <a:srgbClr val="D5DBE3"/>
+                      </a:solidFill>
+                      <a:prstDash val="solid"/>
+                      <a:round/>
+                      <a:headEnd type="none" w="med" len="med"/>
+                      <a:tailEnd type="none" w="med" len="med"/>
+                    </a:lnB>
+                  </a:tcPr>
+                </a:tc>
+                <a:tc>
+                  <a:txBody>
+                    <a:bodyPr/>
+                    <a:lstStyle/>
+                    <a:p>
+                      <a:pPr indent="0" marL="0">
+                        <a:buNone/>
+                      </a:pPr>
+                      <a:r>
+                        <a:rPr lang="en-US" sz="1500" dirty="0">
+                          <a:solidFill>
+                            <a:srgbClr val="1F2A37"/>
+                          </a:solidFill>
+                          <a:latin typeface="Microsoft YaHei" pitchFamily="34" charset="0"/>
+                          <a:ea typeface="Microsoft YaHei" pitchFamily="34" charset="-122"/>
+                          <a:cs typeface="Microsoft YaHei" pitchFamily="34" charset="-120"/>
+                        </a:rPr>
+                        <a:t>把 9 月的销售复制一份、换新小票号，+27,095 行</a:t>
+                      </a:r>
+                      <a:endParaRPr lang="en-US" sz="1500" dirty="0">
+                        <a:latin typeface="Microsoft YaHei" charset="0"/>
+                        <a:ea typeface="Microsoft YaHei" charset="0"/>
+                        <a:cs typeface="Microsoft YaHei" charset="0"/>
+                      </a:endParaRPr>
+                    </a:p>
+                  </a:txBody>
+                  <a:tcPr marL="91440" marR="91440" marT="54864" marB="54864" anchor="ctr">
+                    <a:lnL w="12700" cap="flat" cmpd="sng" algn="ctr">
+                      <a:solidFill>
+                        <a:srgbClr val="D5DBE3"/>
+                      </a:solidFill>
+                      <a:prstDash val="solid"/>
+                      <a:round/>
+                      <a:headEnd type="none" w="med" len="med"/>
+                      <a:tailEnd type="none" w="med" len="med"/>
+                    </a:lnL>
+                    <a:lnR w="12700" cap="flat" cmpd="sng" algn="ctr">
+                      <a:solidFill>
+                        <a:srgbClr val="D5DBE3"/>
+                      </a:solidFill>
+                      <a:prstDash val="solid"/>
+                      <a:round/>
+                      <a:headEnd type="none" w="med" len="med"/>
+                      <a:tailEnd type="none" w="med" len="med"/>
+                    </a:lnR>
+                    <a:lnT w="12700" cap="flat" cmpd="sng" algn="ctr">
+                      <a:solidFill>
+                        <a:srgbClr val="D5DBE3"/>
+                      </a:solidFill>
+                      <a:prstDash val="solid"/>
+                      <a:round/>
+                      <a:headEnd type="none" w="med" len="med"/>
+                      <a:tailEnd type="none" w="med" len="med"/>
+                    </a:lnT>
+                    <a:lnB w="12700" cap="flat" cmpd="sng" algn="ctr">
+                      <a:solidFill>
+                        <a:srgbClr val="D5DBE3"/>
+                      </a:solidFill>
+                      <a:prstDash val="solid"/>
+                      <a:round/>
+                      <a:headEnd type="none" w="med" len="med"/>
+                      <a:tailEnd type="none" w="med" len="med"/>
+                    </a:lnB>
+                  </a:tcPr>
+                </a:tc>
+                <a:tc>
+                  <a:txBody>
+                    <a:bodyPr/>
+                    <a:lstStyle/>
+                    <a:p>
+                      <a:pPr indent="0" marL="0">
+                        <a:buNone/>
+                      </a:pPr>
+                      <a:r>
+                        <a:rPr lang="en-US" sz="1500" dirty="0">
+                          <a:solidFill>
+                            <a:srgbClr val="1F2A37"/>
+                          </a:solidFill>
+                          <a:latin typeface="Microsoft YaHei" pitchFamily="34" charset="0"/>
+                          <a:ea typeface="Microsoft YaHei" pitchFamily="34" charset="-122"/>
+                          <a:cs typeface="Microsoft YaHei" pitchFamily="34" charset="-120"/>
+                        </a:rPr>
+                        <a:t>2613.9 万</a:t>
+                      </a:r>
+                      <a:endParaRPr lang="en-US" sz="1500" dirty="0">
+                        <a:latin typeface="Microsoft YaHei" charset="0"/>
+                        <a:ea typeface="Microsoft YaHei" charset="0"/>
+                        <a:cs typeface="Microsoft YaHei" charset="0"/>
+                      </a:endParaRPr>
+                    </a:p>
+                  </a:txBody>
+                  <a:tcPr marL="91440" marR="91440" marT="54864" marB="54864" anchor="ctr">
+                    <a:lnL w="12700" cap="flat" cmpd="sng" algn="ctr">
+                      <a:solidFill>
+                        <a:srgbClr val="D5DBE3"/>
+                      </a:solidFill>
+                      <a:prstDash val="solid"/>
+                      <a:round/>
+                      <a:headEnd type="none" w="med" len="med"/>
+                      <a:tailEnd type="none" w="med" len="med"/>
+                    </a:lnL>
+                    <a:lnR w="12700" cap="flat" cmpd="sng" algn="ctr">
+                      <a:solidFill>
+                        <a:srgbClr val="D5DBE3"/>
+                      </a:solidFill>
+                      <a:prstDash val="solid"/>
+                      <a:round/>
+                      <a:headEnd type="none" w="med" len="med"/>
+                      <a:tailEnd type="none" w="med" len="med"/>
+                    </a:lnR>
+                    <a:lnT w="12700" cap="flat" cmpd="sng" algn="ctr">
+                      <a:solidFill>
+                        <a:srgbClr val="D5DBE3"/>
+                      </a:solidFill>
+                      <a:prstDash val="solid"/>
+                      <a:round/>
+                      <a:headEnd type="none" w="med" len="med"/>
+                      <a:tailEnd type="none" w="med" len="med"/>
+                    </a:lnT>
+                    <a:lnB w="12700" cap="flat" cmpd="sng" algn="ctr">
+                      <a:solidFill>
+                        <a:srgbClr val="D5DBE3"/>
+                      </a:solidFill>
+                      <a:prstDash val="solid"/>
+                      <a:round/>
+                      <a:headEnd type="none" w="med" len="med"/>
+                      <a:tailEnd type="none" w="med" len="med"/>
+                    </a:lnB>
+                  </a:tcPr>
+                </a:tc>
+                <a:tc>
+                  <a:txBody>
+                    <a:bodyPr/>
+                    <a:lstStyle/>
+                    <a:p>
+                      <a:pPr indent="0" marL="0">
+                        <a:buNone/>
+                      </a:pPr>
+                      <a:r>
+                        <a:rPr lang="en-US" sz="1500" b="1" dirty="0">
+                          <a:solidFill>
+                            <a:srgbClr val="2E7D4F"/>
+                          </a:solidFill>
+                          <a:latin typeface="Microsoft YaHei" pitchFamily="34" charset="0"/>
+                          <a:ea typeface="Microsoft YaHei" pitchFamily="34" charset="-122"/>
+                          <a:cs typeface="Microsoft YaHei" pitchFamily="34" charset="-120"/>
+                        </a:rPr>
+                        <a:t>2613.9 万 ✓</a:t>
+                      </a:r>
+                      <a:endParaRPr lang="en-US" sz="1500" dirty="0">
+                        <a:latin typeface="Microsoft YaHei" charset="0"/>
+                        <a:ea typeface="Microsoft YaHei" charset="0"/>
+                        <a:cs typeface="Microsoft YaHei" charset="0"/>
+                      </a:endParaRPr>
+                    </a:p>
+                  </a:txBody>
+                  <a:tcPr marL="91440" marR="91440" marT="54864" marB="54864" anchor="ctr">
+                    <a:lnL w="12700" cap="flat" cmpd="sng" algn="ctr">
+                      <a:solidFill>
+                        <a:srgbClr val="D5DBE3"/>
+                      </a:solidFill>
+                      <a:prstDash val="solid"/>
+                      <a:round/>
+                      <a:headEnd type="none" w="med" len="med"/>
+                      <a:tailEnd type="none" w="med" len="med"/>
+                    </a:lnL>
+                    <a:lnR w="12700" cap="flat" cmpd="sng" algn="ctr">
+                      <a:solidFill>
+                        <a:srgbClr val="D5DBE3"/>
+                      </a:solidFill>
+                      <a:prstDash val="solid"/>
+                      <a:round/>
+                      <a:headEnd type="none" w="med" len="med"/>
+                      <a:tailEnd type="none" w="med" len="med"/>
+                    </a:lnR>
+                    <a:lnT w="12700" cap="flat" cmpd="sng" algn="ctr">
+                      <a:solidFill>
+                        <a:srgbClr val="D5DBE3"/>
+                      </a:solidFill>
+                      <a:prstDash val="solid"/>
+                      <a:round/>
+                      <a:headEnd type="none" w="med" len="med"/>
+                      <a:tailEnd type="none" w="med" len="med"/>
+                    </a:lnT>
+                    <a:lnB w="12700" cap="flat" cmpd="sng" algn="ctr">
+                      <a:solidFill>
+                        <a:srgbClr val="D5DBE3"/>
+                      </a:solidFill>
+                      <a:prstDash val="solid"/>
+                      <a:round/>
+                      <a:headEnd type="none" w="med" len="med"/>
+                      <a:tailEnd type="none" w="med" len="med"/>
+                    </a:lnB>
+                  </a:tcPr>
+                </a:tc>
+              </a:tr>
+              <a:tr h="0">
+                <a:tc>
+                  <a:txBody>
+                    <a:bodyPr/>
+                    <a:lstStyle/>
+                    <a:p>
+                      <a:pPr indent="0" marL="0">
+                        <a:buNone/>
+                      </a:pPr>
+                      <a:r>
+                        <a:rPr lang="en-US" sz="1500" dirty="0">
+                          <a:solidFill>
+                            <a:srgbClr val="1F2A37"/>
+                          </a:solidFill>
+                          <a:latin typeface="Microsoft YaHei" pitchFamily="34" charset="0"/>
+                          <a:ea typeface="Microsoft YaHei" pitchFamily="34" charset="-122"/>
+                          <a:cs typeface="Microsoft YaHei" pitchFamily="34" charset="-120"/>
+                        </a:rPr>
+                        <a:t>数据更正</a:t>
+                      </a:r>
+                      <a:endParaRPr lang="en-US" sz="1500" dirty="0">
+                        <a:latin typeface="Microsoft YaHei" charset="0"/>
+                        <a:ea typeface="Microsoft YaHei" charset="0"/>
+                        <a:cs typeface="Microsoft YaHei" charset="0"/>
+                      </a:endParaRPr>
+                    </a:p>
+                  </a:txBody>
+                  <a:tcPr marL="91440" marR="91440" marT="54864" marB="54864" anchor="ctr">
+                    <a:lnL w="12700" cap="flat" cmpd="sng" algn="ctr">
+                      <a:solidFill>
+                        <a:srgbClr val="D5DBE3"/>
+                      </a:solidFill>
+                      <a:prstDash val="solid"/>
+                      <a:round/>
+                      <a:headEnd type="none" w="med" len="med"/>
+                      <a:tailEnd type="none" w="med" len="med"/>
+                    </a:lnL>
+                    <a:lnR w="12700" cap="flat" cmpd="sng" algn="ctr">
+                      <a:solidFill>
+                        <a:srgbClr val="D5DBE3"/>
+                      </a:solidFill>
+                      <a:prstDash val="solid"/>
+                      <a:round/>
+                      <a:headEnd type="none" w="med" len="med"/>
+                      <a:tailEnd type="none" w="med" len="med"/>
+                    </a:lnR>
+                    <a:lnT w="12700" cap="flat" cmpd="sng" algn="ctr">
+                      <a:solidFill>
+                        <a:srgbClr val="D5DBE3"/>
+                      </a:solidFill>
+                      <a:prstDash val="solid"/>
+                      <a:round/>
+                      <a:headEnd type="none" w="med" len="med"/>
+                      <a:tailEnd type="none" w="med" len="med"/>
+                    </a:lnT>
+                    <a:lnB w="12700" cap="flat" cmpd="sng" algn="ctr">
+                      <a:solidFill>
+                        <a:srgbClr val="D5DBE3"/>
+                      </a:solidFill>
+                      <a:prstDash val="solid"/>
+                      <a:round/>
+                      <a:headEnd type="none" w="med" len="med"/>
+                      <a:tailEnd type="none" w="med" len="med"/>
+                    </a:lnB>
+                  </a:tcPr>
+                </a:tc>
+                <a:tc>
+                  <a:txBody>
+                    <a:bodyPr/>
+                    <a:lstStyle/>
+                    <a:p>
+                      <a:pPr indent="0" marL="0">
+                        <a:buNone/>
+                      </a:pPr>
+                      <a:r>
+                        <a:rPr lang="en-US" sz="1500" dirty="0">
+                          <a:solidFill>
+                            <a:srgbClr val="1F2A37"/>
+                          </a:solidFill>
+                          <a:latin typeface="Microsoft YaHei" pitchFamily="34" charset="0"/>
+                          <a:ea typeface="Microsoft YaHei" pitchFamily="34" charset="-122"/>
+                          <a:cs typeface="Microsoft YaHei" pitchFamily="34" charset="-120"/>
+                        </a:rPr>
+                        <a:t>部分销售被更正：旧行保留并标为非当前（ss_is_current = 0），新增九折的当前行，共 65,915 行</a:t>
+                      </a:r>
+                      <a:endParaRPr lang="en-US" sz="1500" dirty="0">
+                        <a:latin typeface="Microsoft YaHei" charset="0"/>
+                        <a:ea typeface="Microsoft YaHei" charset="0"/>
+                        <a:cs typeface="Microsoft YaHei" charset="0"/>
+                      </a:endParaRPr>
+                    </a:p>
+                  </a:txBody>
+                  <a:tcPr marL="91440" marR="91440" marT="54864" marB="54864" anchor="ctr">
+                    <a:lnL w="12700" cap="flat" cmpd="sng" algn="ctr">
+                      <a:solidFill>
+                        <a:srgbClr val="D5DBE3"/>
+                      </a:solidFill>
+                      <a:prstDash val="solid"/>
+                      <a:round/>
+                      <a:headEnd type="none" w="med" len="med"/>
+                      <a:tailEnd type="none" w="med" len="med"/>
+                    </a:lnL>
+                    <a:lnR w="12700" cap="flat" cmpd="sng" algn="ctr">
+                      <a:solidFill>
+                        <a:srgbClr val="D5DBE3"/>
+                      </a:solidFill>
+                      <a:prstDash val="solid"/>
+                      <a:round/>
+                      <a:headEnd type="none" w="med" len="med"/>
+                      <a:tailEnd type="none" w="med" len="med"/>
+                    </a:lnR>
+                    <a:lnT w="12700" cap="flat" cmpd="sng" algn="ctr">
+                      <a:solidFill>
+                        <a:srgbClr val="D5DBE3"/>
+                      </a:solidFill>
+                      <a:prstDash val="solid"/>
+                      <a:round/>
+                      <a:headEnd type="none" w="med" len="med"/>
+                      <a:tailEnd type="none" w="med" len="med"/>
+                    </a:lnT>
+                    <a:lnB w="12700" cap="flat" cmpd="sng" algn="ctr">
+                      <a:solidFill>
+                        <a:srgbClr val="D5DBE3"/>
+                      </a:solidFill>
+                      <a:prstDash val="solid"/>
+                      <a:round/>
+                      <a:headEnd type="none" w="med" len="med"/>
+                      <a:tailEnd type="none" w="med" len="med"/>
+                    </a:lnB>
+                  </a:tcPr>
+                </a:tc>
+                <a:tc>
+                  <a:txBody>
+                    <a:bodyPr/>
+                    <a:lstStyle/>
+                    <a:p>
+                      <a:pPr indent="0" marL="0">
+                        <a:buNone/>
+                      </a:pPr>
+                      <a:r>
+                        <a:rPr lang="en-US" sz="1500" dirty="0">
+                          <a:solidFill>
+                            <a:srgbClr val="1F2A37"/>
+                          </a:solidFill>
+                          <a:latin typeface="Microsoft YaHei" pitchFamily="34" charset="0"/>
+                          <a:ea typeface="Microsoft YaHei" pitchFamily="34" charset="-122"/>
+                          <a:cs typeface="Microsoft YaHei" pitchFamily="34" charset="-120"/>
+                        </a:rPr>
+                        <a:t>1293.3 万</a:t>
+                      </a:r>
+                      <a:endParaRPr lang="en-US" sz="1500" dirty="0">
+                        <a:latin typeface="Microsoft YaHei" charset="0"/>
+                        <a:ea typeface="Microsoft YaHei" charset="0"/>
+                        <a:cs typeface="Microsoft YaHei" charset="0"/>
+                      </a:endParaRPr>
+                    </a:p>
+                  </a:txBody>
+                  <a:tcPr marL="91440" marR="91440" marT="54864" marB="54864" anchor="ctr">
+                    <a:lnL w="12700" cap="flat" cmpd="sng" algn="ctr">
+                      <a:solidFill>
+                        <a:srgbClr val="D5DBE3"/>
+                      </a:solidFill>
+                      <a:prstDash val="solid"/>
+                      <a:round/>
+                      <a:headEnd type="none" w="med" len="med"/>
+                      <a:tailEnd type="none" w="med" len="med"/>
+                    </a:lnL>
+                    <a:lnR w="12700" cap="flat" cmpd="sng" algn="ctr">
+                      <a:solidFill>
+                        <a:srgbClr val="D5DBE3"/>
+                      </a:solidFill>
+                      <a:prstDash val="solid"/>
+                      <a:round/>
+                      <a:headEnd type="none" w="med" len="med"/>
+                      <a:tailEnd type="none" w="med" len="med"/>
+                    </a:lnR>
+                    <a:lnT w="12700" cap="flat" cmpd="sng" algn="ctr">
+                      <a:solidFill>
+                        <a:srgbClr val="D5DBE3"/>
+                      </a:solidFill>
+                      <a:prstDash val="solid"/>
+                      <a:round/>
+                      <a:headEnd type="none" w="med" len="med"/>
+                      <a:tailEnd type="none" w="med" len="med"/>
+                    </a:lnT>
+                    <a:lnB w="12700" cap="flat" cmpd="sng" algn="ctr">
+                      <a:solidFill>
+                        <a:srgbClr val="D5DBE3"/>
+                      </a:solidFill>
+                      <a:prstDash val="solid"/>
+                      <a:round/>
+                      <a:headEnd type="none" w="med" len="med"/>
+                      <a:tailEnd type="none" w="med" len="med"/>
+                    </a:lnB>
+                  </a:tcPr>
+                </a:tc>
+                <a:tc>
+                  <a:txBody>
+                    <a:bodyPr/>
+                    <a:lstStyle/>
+                    <a:p>
+                      <a:pPr indent="0" marL="0">
+                        <a:buNone/>
+                      </a:pPr>
+                      <a:r>
+                        <a:rPr lang="en-US" sz="1500" b="1" dirty="0">
+                          <a:solidFill>
+                            <a:srgbClr val="B5392A"/>
+                          </a:solidFill>
+                          <a:latin typeface="Microsoft YaHei" pitchFamily="34" charset="0"/>
+                          <a:ea typeface="Microsoft YaHei" pitchFamily="34" charset="-122"/>
+                          <a:cs typeface="Microsoft YaHei" pitchFamily="34" charset="-120"/>
+                        </a:rPr>
+                        <a:t>1430.1 万 ✗</a:t>
+                      </a:r>
+                      <a:endParaRPr lang="en-US" sz="1500" dirty="0">
+                        <a:latin typeface="Microsoft YaHei" charset="0"/>
+                        <a:ea typeface="Microsoft YaHei" charset="0"/>
+                        <a:cs typeface="Microsoft YaHei" charset="0"/>
+                      </a:endParaRPr>
+                    </a:p>
+                    <a:p>
+                      <a:pPr indent="0" marL="0">
+                        <a:buNone/>
+                      </a:pPr>
+                      <a:r>
+                        <a:rPr lang="en-US" sz="1500" dirty="0">
+                          <a:solidFill>
+                            <a:srgbClr val="1F2A37"/>
+                          </a:solidFill>
+                          <a:latin typeface="Microsoft YaHei" pitchFamily="34" charset="0"/>
+                          <a:ea typeface="Microsoft YaHei" pitchFamily="34" charset="-122"/>
+                          <a:cs typeface="Microsoft YaHei" pitchFamily="34" charset="-120"/>
+                        </a:rPr>
+                        <a:t>新旧两版都算了</a:t>
+                      </a:r>
+                      <a:endParaRPr lang="en-US" sz="1500" dirty="0">
+                        <a:latin typeface="Microsoft YaHei" charset="0"/>
+                        <a:ea typeface="Microsoft YaHei" charset="0"/>
+                        <a:cs typeface="Microsoft YaHei" charset="0"/>
+                      </a:endParaRPr>
+                    </a:p>
+                  </a:txBody>
+                  <a:tcPr marL="91440" marR="91440" marT="54864" marB="54864" anchor="ctr">
+                    <a:lnL w="12700" cap="flat" cmpd="sng" algn="ctr">
+                      <a:solidFill>
+                        <a:srgbClr val="D5DBE3"/>
+                      </a:solidFill>
+                      <a:prstDash val="solid"/>
+                      <a:round/>
+                      <a:headEnd type="none" w="med" len="med"/>
+                      <a:tailEnd type="none" w="med" len="med"/>
+                    </a:lnL>
+                    <a:lnR w="12700" cap="flat" cmpd="sng" algn="ctr">
+                      <a:solidFill>
+                        <a:srgbClr val="D5DBE3"/>
+                      </a:solidFill>
+                      <a:prstDash val="solid"/>
+                      <a:round/>
+                      <a:headEnd type="none" w="med" len="med"/>
+                      <a:tailEnd type="none" w="med" len="med"/>
+                    </a:lnR>
+                    <a:lnT w="12700" cap="flat" cmpd="sng" algn="ctr">
+                      <a:solidFill>
+                        <a:srgbClr val="D5DBE3"/>
+                      </a:solidFill>
+                      <a:prstDash val="solid"/>
+                      <a:round/>
+                      <a:headEnd type="none" w="med" len="med"/>
+                      <a:tailEnd type="none" w="med" len="med"/>
+                    </a:lnT>
+                    <a:lnB w="12700" cap="flat" cmpd="sng" algn="ctr">
+                      <a:solidFill>
+                        <a:srgbClr val="D5DBE3"/>
+                      </a:solidFill>
+                      <a:prstDash val="solid"/>
+                      <a:round/>
+                      <a:headEnd type="none" w="med" len="med"/>
+                      <a:tailEnd type="none" w="med" len="med"/>
+                    </a:lnB>
+                  </a:tcPr>
+                </a:tc>
+              </a:tr>
+              <a:tr h="0">
+                <a:tc>
+                  <a:txBody>
+                    <a:bodyPr/>
+                    <a:lstStyle/>
+                    <a:p>
+                      <a:pPr indent="0" marL="0">
+                        <a:buNone/>
+                      </a:pPr>
+                      <a:r>
+                        <a:rPr lang="en-US" sz="1500" dirty="0">
+                          <a:solidFill>
+                            <a:srgbClr val="1F2A37"/>
+                          </a:solidFill>
+                          <a:latin typeface="Microsoft YaHei" pitchFamily="34" charset="0"/>
+                          <a:ea typeface="Microsoft YaHei" pitchFamily="34" charset="-122"/>
+                          <a:cs typeface="Microsoft YaHei" pitchFamily="34" charset="-120"/>
+                        </a:rPr>
+                        <a:t>重复装载</a:t>
+                      </a:r>
+                      <a:endParaRPr lang="en-US" sz="1500" dirty="0">
+                        <a:latin typeface="Microsoft YaHei" charset="0"/>
+                        <a:ea typeface="Microsoft YaHei" charset="0"/>
+                        <a:cs typeface="Microsoft YaHei" charset="0"/>
+                      </a:endParaRPr>
+                    </a:p>
+                  </a:txBody>
+                  <a:tcPr marL="91440" marR="91440" marT="54864" marB="54864" anchor="ctr">
+                    <a:lnL w="12700" cap="flat" cmpd="sng" algn="ctr">
+                      <a:solidFill>
+                        <a:srgbClr val="D5DBE3"/>
+                      </a:solidFill>
+                      <a:prstDash val="solid"/>
+                      <a:round/>
+                      <a:headEnd type="none" w="med" len="med"/>
+                      <a:tailEnd type="none" w="med" len="med"/>
+                    </a:lnL>
+                    <a:lnR w="12700" cap="flat" cmpd="sng" algn="ctr">
+                      <a:solidFill>
+                        <a:srgbClr val="D5DBE3"/>
+                      </a:solidFill>
+                      <a:prstDash val="solid"/>
+                      <a:round/>
+                      <a:headEnd type="none" w="med" len="med"/>
+                      <a:tailEnd type="none" w="med" len="med"/>
+                    </a:lnR>
+                    <a:lnT w="12700" cap="flat" cmpd="sng" algn="ctr">
+                      <a:solidFill>
+                        <a:srgbClr val="D5DBE3"/>
+                      </a:solidFill>
+                      <a:prstDash val="solid"/>
+                      <a:round/>
+                      <a:headEnd type="none" w="med" len="med"/>
+                      <a:tailEnd type="none" w="med" len="med"/>
+                    </a:lnT>
+                    <a:lnB w="12700" cap="flat" cmpd="sng" algn="ctr">
+                      <a:solidFill>
+                        <a:srgbClr val="D5DBE3"/>
+                      </a:solidFill>
+                      <a:prstDash val="solid"/>
+                      <a:round/>
+                      <a:headEnd type="none" w="med" len="med"/>
+                      <a:tailEnd type="none" w="med" len="med"/>
+                    </a:lnB>
+                  </a:tcPr>
+                </a:tc>
+                <a:tc>
+                  <a:txBody>
+                    <a:bodyPr/>
+                    <a:lstStyle/>
+                    <a:p>
+                      <a:pPr indent="0" marL="0">
+                        <a:buNone/>
+                      </a:pPr>
+                      <a:r>
+                        <a:rPr lang="en-US" sz="1500" dirty="0">
+                          <a:solidFill>
+                            <a:srgbClr val="1F2A37"/>
+                          </a:solidFill>
+                          <a:latin typeface="Microsoft YaHei" pitchFamily="34" charset="0"/>
+                          <a:ea typeface="Microsoft YaHei" pitchFamily="34" charset="-122"/>
+                          <a:cs typeface="Microsoft YaHei" pitchFamily="34" charset="-120"/>
+                        </a:rPr>
+                        <a:t>4 个月的销售整批又装载了一次，+110,165 行</a:t>
+                      </a:r>
+                      <a:endParaRPr lang="en-US" sz="1500" dirty="0">
+                        <a:latin typeface="Microsoft YaHei" charset="0"/>
+                        <a:ea typeface="Microsoft YaHei" charset="0"/>
+                        <a:cs typeface="Microsoft YaHei" charset="0"/>
+                      </a:endParaRPr>
+                    </a:p>
+                  </a:txBody>
+                  <a:tcPr marL="91440" marR="91440" marT="54864" marB="54864" anchor="ctr">
+                    <a:lnL w="12700" cap="flat" cmpd="sng" algn="ctr">
+                      <a:solidFill>
+                        <a:srgbClr val="D5DBE3"/>
+                      </a:solidFill>
+                      <a:prstDash val="solid"/>
+                      <a:round/>
+                      <a:headEnd type="none" w="med" len="med"/>
+                      <a:tailEnd type="none" w="med" len="med"/>
+                    </a:lnL>
+                    <a:lnR w="12700" cap="flat" cmpd="sng" algn="ctr">
+                      <a:solidFill>
+                        <a:srgbClr val="D5DBE3"/>
+                      </a:solidFill>
+                      <a:prstDash val="solid"/>
+                      <a:round/>
+                      <a:headEnd type="none" w="med" len="med"/>
+                      <a:tailEnd type="none" w="med" len="med"/>
+                    </a:lnR>
+                    <a:lnT w="12700" cap="flat" cmpd="sng" algn="ctr">
+                      <a:solidFill>
+                        <a:srgbClr val="D5DBE3"/>
+                      </a:solidFill>
+                      <a:prstDash val="solid"/>
+                      <a:round/>
+                      <a:headEnd type="none" w="med" len="med"/>
+                      <a:tailEnd type="none" w="med" len="med"/>
+                    </a:lnT>
+                    <a:lnB w="12700" cap="flat" cmpd="sng" algn="ctr">
+                      <a:solidFill>
+                        <a:srgbClr val="D5DBE3"/>
+                      </a:solidFill>
+                      <a:prstDash val="solid"/>
+                      <a:round/>
+                      <a:headEnd type="none" w="med" len="med"/>
+                      <a:tailEnd type="none" w="med" len="med"/>
+                    </a:lnB>
+                  </a:tcPr>
+                </a:tc>
+                <a:tc>
+                  <a:txBody>
+                    <a:bodyPr/>
+                    <a:lstStyle/>
+                    <a:p>
+                      <a:pPr indent="0" marL="0">
+                        <a:buNone/>
+                      </a:pPr>
+                      <a:r>
+                        <a:rPr lang="en-US" sz="1500" dirty="0">
+                          <a:solidFill>
+                            <a:srgbClr val="1F2A37"/>
+                          </a:solidFill>
+                          <a:latin typeface="Microsoft YaHei" pitchFamily="34" charset="0"/>
+                          <a:ea typeface="Microsoft YaHei" pitchFamily="34" charset="-122"/>
+                          <a:cs typeface="Microsoft YaHei" pitchFamily="34" charset="-120"/>
+                        </a:rPr>
+                        <a:t>1307.0 万</a:t>
+                      </a:r>
+                      <a:endParaRPr lang="en-US" sz="1500" dirty="0">
+                        <a:latin typeface="Microsoft YaHei" charset="0"/>
+                        <a:ea typeface="Microsoft YaHei" charset="0"/>
+                        <a:cs typeface="Microsoft YaHei" charset="0"/>
+                      </a:endParaRPr>
+                    </a:p>
+                  </a:txBody>
+                  <a:tcPr marL="91440" marR="91440" marT="54864" marB="54864" anchor="ctr">
+                    <a:lnL w="12700" cap="flat" cmpd="sng" algn="ctr">
+                      <a:solidFill>
+                        <a:srgbClr val="D5DBE3"/>
+                      </a:solidFill>
+                      <a:prstDash val="solid"/>
+                      <a:round/>
+                      <a:headEnd type="none" w="med" len="med"/>
+                      <a:tailEnd type="none" w="med" len="med"/>
+                    </a:lnL>
+                    <a:lnR w="12700" cap="flat" cmpd="sng" algn="ctr">
+                      <a:solidFill>
+                        <a:srgbClr val="D5DBE3"/>
+                      </a:solidFill>
+                      <a:prstDash val="solid"/>
+                      <a:round/>
+                      <a:headEnd type="none" w="med" len="med"/>
+                      <a:tailEnd type="none" w="med" len="med"/>
+                    </a:lnR>
+                    <a:lnT w="12700" cap="flat" cmpd="sng" algn="ctr">
+                      <a:solidFill>
+                        <a:srgbClr val="D5DBE3"/>
+                      </a:solidFill>
+                      <a:prstDash val="solid"/>
+                      <a:round/>
+                      <a:headEnd type="none" w="med" len="med"/>
+                      <a:tailEnd type="none" w="med" len="med"/>
+                    </a:lnT>
+                    <a:lnB w="12700" cap="flat" cmpd="sng" algn="ctr">
+                      <a:solidFill>
+                        <a:srgbClr val="D5DBE3"/>
+                      </a:solidFill>
+                      <a:prstDash val="solid"/>
+                      <a:round/>
+                      <a:headEnd type="none" w="med" len="med"/>
+                      <a:tailEnd type="none" w="med" len="med"/>
+                    </a:lnB>
+                  </a:tcPr>
+                </a:tc>
+                <a:tc>
+                  <a:txBody>
+                    <a:bodyPr/>
+                    <a:lstStyle/>
+                    <a:p>
+                      <a:pPr indent="0" marL="0">
+                        <a:buNone/>
+                      </a:pPr>
+                      <a:r>
+                        <a:rPr lang="en-US" sz="1500" b="1" dirty="0">
+                          <a:solidFill>
+                            <a:srgbClr val="B5392A"/>
+                          </a:solidFill>
+                          <a:latin typeface="Microsoft YaHei" pitchFamily="34" charset="0"/>
+                          <a:ea typeface="Microsoft YaHei" pitchFamily="34" charset="-122"/>
+                          <a:cs typeface="Microsoft YaHei" pitchFamily="34" charset="-120"/>
+                        </a:rPr>
+                        <a:t>2613.9 万 ✗</a:t>
+                      </a:r>
+                      <a:endParaRPr lang="en-US" sz="1500" dirty="0">
+                        <a:latin typeface="Microsoft YaHei" charset="0"/>
+                        <a:ea typeface="Microsoft YaHei" charset="0"/>
+                        <a:cs typeface="Microsoft YaHei" charset="0"/>
+                      </a:endParaRPr>
+                    </a:p>
+                    <a:p>
+                      <a:pPr indent="0" marL="0">
+                        <a:buNone/>
+                      </a:pPr>
+                      <a:r>
+                        <a:rPr lang="en-US" sz="1500" dirty="0">
+                          <a:solidFill>
+                            <a:srgbClr val="1F2A37"/>
+                          </a:solidFill>
+                          <a:latin typeface="Microsoft YaHei" pitchFamily="34" charset="0"/>
+                          <a:ea typeface="Microsoft YaHei" pitchFamily="34" charset="-122"/>
+                          <a:cs typeface="Microsoft YaHei" pitchFamily="34" charset="-120"/>
+                        </a:rPr>
+                        <a:t>9 月翻倍</a:t>
+                      </a:r>
+                      <a:endParaRPr lang="en-US" sz="1500" dirty="0">
+                        <a:latin typeface="Microsoft YaHei" charset="0"/>
+                        <a:ea typeface="Microsoft YaHei" charset="0"/>
+                        <a:cs typeface="Microsoft YaHei" charset="0"/>
+                      </a:endParaRPr>
+                    </a:p>
+                  </a:txBody>
+                  <a:tcPr marL="91440" marR="91440" marT="54864" marB="54864" anchor="ctr">
+                    <a:lnL w="12700" cap="flat" cmpd="sng" algn="ctr">
+                      <a:solidFill>
+                        <a:srgbClr val="D5DBE3"/>
+                      </a:solidFill>
+                      <a:prstDash val="solid"/>
+                      <a:round/>
+                      <a:headEnd type="none" w="med" len="med"/>
+                      <a:tailEnd type="none" w="med" len="med"/>
+                    </a:lnL>
+                    <a:lnR w="12700" cap="flat" cmpd="sng" algn="ctr">
+                      <a:solidFill>
+                        <a:srgbClr val="D5DBE3"/>
+                      </a:solidFill>
+                      <a:prstDash val="solid"/>
+                      <a:round/>
+                      <a:headEnd type="none" w="med" len="med"/>
+                      <a:tailEnd type="none" w="med" len="med"/>
+                    </a:lnR>
+                    <a:lnT w="12700" cap="flat" cmpd="sng" algn="ctr">
+                      <a:solidFill>
+                        <a:srgbClr val="D5DBE3"/>
+                      </a:solidFill>
+                      <a:prstDash val="solid"/>
+                      <a:round/>
+                      <a:headEnd type="none" w="med" len="med"/>
+                      <a:tailEnd type="none" w="med" len="med"/>
+                    </a:lnT>
+                    <a:lnB w="12700" cap="flat" cmpd="sng" algn="ctr">
+                      <a:solidFill>
+                        <a:srgbClr val="D5DBE3"/>
+                      </a:solidFill>
+                      <a:prstDash val="solid"/>
+                      <a:round/>
+                      <a:headEnd type="none" w="med" len="med"/>
+                      <a:tailEnd type="none" w="med" len="med"/>
+                    </a:lnB>
+                  </a:tcPr>
+                </a:tc>
+              </a:tr>
+            </a:tbl>
+          </a:graphicData>
+        </a:graphic>
+      </p:graphicFrame>
+      <p:sp>
+        <p:nvSpPr>
+          <p:cNvPr id="4" name="Shape 1"/>
+          <p:cNvSpPr/>
+          <p:nvPr/>
+        </p:nvSpPr>
+        <p:spPr>
+          <a:xfrm>
+            <a:off x="548640" y="4160520"/>
+            <a:ext cx="11094415" cy="1737360"/>
+          </a:xfrm>
+          <a:prstGeom prst="roundRect">
+            <a:avLst>
+              <a:gd name="adj" fmla="val 4211"/>
+            </a:avLst>
+          </a:prstGeom>
+          <a:solidFill>
+            <a:srgbClr val="F1F3F6"/>
+          </a:solidFill>
+          <a:ln w="12700">
+            <a:solidFill>
+              <a:srgbClr val="F1F3F6"/>
+            </a:solidFill>
+            <a:prstDash val="solid"/>
+          </a:ln>
+        </p:spPr>
+      </p:sp>
+      <p:sp>
+        <p:nvSpPr>
+          <p:cNvPr id="5" name="Text 2"/>
+          <p:cNvSpPr txBox="1"/>
+          <p:nvPr/>
+        </p:nvSpPr>
+        <p:spPr>
+          <a:xfrm>
+            <a:off x="822960" y="4251960"/>
+            <a:ext cx="10545775" cy="1554480"/>
+          </a:xfrm>
+          <a:prstGeom prst="rect">
+            <a:avLst/>
+          </a:prstGeom>
+          <a:noFill/>
+          <a:ln/>
+        </p:spPr>
+        <p:txBody>
+          <a:bodyPr wrap="square" lIns="0" tIns="0" rIns="0" bIns="0" rtlCol="0" anchor="ctr"/>
+          <a:lstStyle/>
+          <a:p>
+            <a:pPr indent="0" marL="0">
+              <a:spcAft>
+                <a:spcPts val="400"/>
+              </a:spcAft>
+              <a:buNone/>
+            </a:pPr>
+            <a:r>
+              <a:rPr lang="en-US" sz="1700" b="1" dirty="0">
+                <a:solidFill>
+                  <a:srgbClr val="B5392A"/>
+                </a:solidFill>
+                <a:latin typeface="Microsoft YaHei" pitchFamily="34" charset="0"/>
+                <a:ea typeface="Microsoft YaHei" pitchFamily="34" charset="-122"/>
+                <a:cs typeface="Microsoft YaHei" pitchFamily="34" charset="-120"/>
+              </a:rPr>
+              <a:t>问题在哪</a:t>
+            </a:r>
+            <a:endParaRPr lang="en-US" sz="1700" dirty="0"/>
+          </a:p>
+          <a:p>
+            <a:pPr marL="342900" indent="-342900">
+              <a:spcAft>
+                <a:spcPts val="400"/>
+              </a:spcAft>
+              <a:buSzPct val="100000"/>
+              <a:buChar char="•"/>
+            </a:pPr>
+            <a:r>
+              <a:rPr lang="en-US" sz="1700" dirty="0">
+                <a:solidFill>
+                  <a:srgbClr val="1F2A37"/>
+                </a:solidFill>
+                <a:latin typeface="Microsoft YaHei" pitchFamily="34" charset="0"/>
+                <a:ea typeface="Microsoft YaHei" pitchFamily="34" charset="-122"/>
+                <a:cs typeface="Microsoft YaHei" pitchFamily="34" charset="-120"/>
+              </a:rPr>
+              <a:t>三种写入都是普通的 INSERT / UPDATE，表结构没变：只看表结构的做法发现不了</a:t>
+            </a:r>
+            <a:endParaRPr lang="en-US" sz="1700" dirty="0"/>
+          </a:p>
+          <a:p>
+            <a:pPr marL="342900" indent="-342900">
+              <a:spcAft>
+                <a:spcPts val="400"/>
+              </a:spcAft>
+              <a:buSzPct val="100000"/>
+              <a:buChar char="•"/>
+            </a:pPr>
+            <a:r>
+              <a:rPr lang="en-US" sz="1700" dirty="0">
+                <a:solidFill>
+                  <a:srgbClr val="1F2A37"/>
+                </a:solidFill>
+                <a:latin typeface="Microsoft YaHei" pitchFamily="34" charset="0"/>
+                <a:ea typeface="Microsoft YaHei" pitchFamily="34" charset="-122"/>
+                <a:cs typeface="Microsoft YaHei" pitchFamily="34" charset="-120"/>
+              </a:rPr>
+              <a:t>SQL 照样能跑、不报错：用这个定义的智能体自己看不出来</a:t>
+            </a:r>
+            <a:endParaRPr lang="en-US" sz="1700" dirty="0"/>
+          </a:p>
+          <a:p>
+            <a:pPr marL="342900" indent="-342900">
+              <a:spcAft>
+                <a:spcPts val="400"/>
+              </a:spcAft>
+              <a:buSzPct val="100000"/>
+              <a:buChar char="•"/>
+            </a:pPr>
+            <a:r>
+              <a:rPr lang="en-US" sz="1700" dirty="0">
+                <a:solidFill>
+                  <a:srgbClr val="1F2A37"/>
+                </a:solidFill>
+                <a:latin typeface="Microsoft YaHei" pitchFamily="34" charset="0"/>
+                <a:ea typeface="Microsoft YaHei" pitchFamily="34" charset="-122"/>
+                <a:cs typeface="Microsoft YaHei" pitchFamily="34" charset="-120"/>
+              </a:rPr>
+              <a:t>定义被很多智能体共享：一处过期，所有用它的智能体一起算错</a:t>
+            </a:r>
+            <a:endParaRPr lang="en-US" sz="1700" dirty="0"/>
+          </a:p>
+        </p:txBody>
+      </p:sp>
+      <p:sp>
+        <p:nvSpPr>
+          <p:cNvPr id="6" name="Text 3"/>
+          <p:cNvSpPr txBox="1"/>
+          <p:nvPr/>
+        </p:nvSpPr>
+        <p:spPr>
+          <a:xfrm>
+            <a:off x="548640" y="6263640"/>
+            <a:ext cx="10362895" cy="365760"/>
+          </a:xfrm>
+          <a:prstGeom prst="rect">
+            <a:avLst/>
+          </a:prstGeom>
+          <a:noFill/>
+          <a:ln/>
+        </p:spPr>
+        <p:txBody>
+          <a:bodyPr wrap="square" lIns="0" tIns="0" rIns="0" bIns="0" rtlCol="0" anchor="b"/>
+          <a:lstStyle/>
+          <a:p>
+            <a:pPr indent="0" marL="0">
+              <a:buNone/>
+            </a:pPr>
+            <a:r>
+              <a:rPr lang="en-US" sz="1100" dirty="0">
+                <a:solidFill>
+                  <a:srgbClr val="5B6573"/>
+                </a:solidFill>
+                <a:latin typeface="Microsoft YaHei" pitchFamily="34" charset="0"/>
+                <a:ea typeface="Microsoft YaHei" pitchFamily="34" charset="-122"/>
+                <a:cs typeface="Microsoft YaHei" pitchFamily="34" charset="-120"/>
+              </a:rPr>
+              <a:t>“照旧用学到的定义”即对照组：只在表结构变化时才让定义失效，3 次独立运行答案相同。数据为仿 TPC-DS 的合成零售数据（100 万行门店销售），题目中的年份略去。</a:t>
+            </a:r>
+            <a:endParaRPr lang="en-US" sz="1100" dirty="0"/>
+          </a:p>
+        </p:txBody>
+      </p:sp>
+      <p:sp>
+        <p:nvSpPr>
+          <p:cNvPr id="25" name="Slide Number Placeholder 0"/>
+          <p:cNvSpPr>
+            <a:spLocks noGrp="1"/>
+          </p:cNvSpPr>
+          <p:nvPr>
+            <p:ph type="sldNum" sz="quarter" idx="4294967295"/>
+          </p:nvPr>
+        </p:nvSpPr>
+        <p:spPr>
+          <a:xfrm>
+            <a:off x="11185855" y="6446520"/>
+            <a:ext cx="457200" cy="274320"/>
+          </a:xfrm>
+          <a:prstGeom prst="rect">
+            <a:avLst/>
+          </a:prstGeom>
+          <a:extLst>
+            <a:ext uri="{C572A759-6A51-4108-AA02-DFA0A04FC94B}">
+              <ma14:wrappingTextBoxFlag xmlns:ma14="http://schemas.microsoft.com/office/mac/drawingml/2011/main" val="0"/>
+            </a:ext>
+          </a:extLst>
+        </p:spPr>
+        <p:txBody>
+          <a:bodyPr/>
+          <a:lstStyle>
+            <a:lvl1pPr>
+              <a:defRPr sz="1000">
+                <a:solidFill>
+                  <a:srgbClr val="5B6573"/>
+                </a:solidFill>
+                <a:latin typeface="Microsoft YaHei"/>
+                <a:ea typeface="Microsoft YaHei"/>
+                <a:cs typeface="Microsoft YaHei"/>
+              </a:defRPr>
+            </a:lvl1pPr>
+          </a:lstStyle>
+          <a:p>
+            <a:pPr algn="r"/>
+            <a:fld id="{F7021451-1387-4CA6-816F-3879F97B5CBC}" type="slidenum">
+              <a:rPr b="0" lang="en-US"/>
+              <a:t>3</a:t>
+            </a:fld>
+            <a:endParaRPr lang="en-US"/>
+          </a:p>
+        </p:txBody>
+      </p:sp>
+    </p:spTree>
+  </p:cSld>
+  <p:clrMapOvr>
+    <a:masterClrMapping/>
+  </p:clrMapOvr>
+</p:sld>
+</file>
+
+<file path=ppt/slides/slide4.xml><?xml version="1.0" encoding="utf-8"?>
+<p:sld xmlns:a="http://schemas.openxmlformats.org/drawingml/2006/main" xmlns:r="http://schemas.openxmlformats.org/officeDocument/2006/relationships" xmlns:p="http://schemas.openxmlformats.org/presentationml/2006/main">
+  <p:cSld name="Slide 4">
     <p:spTree>
       <p:nvGrpSpPr>
         <p:cNvPr id="1" name=""/>
@@ -2851,7 +7084,7 @@
                 <a:ea typeface="Microsoft YaHei" pitchFamily="34" charset="-122"/>
                 <a:cs typeface="Microsoft YaHei" pitchFamily="34" charset="-120"/>
               </a:rPr>
-              <a:t>数据智能体学到的指标定义（例如“门店营业额怎么算”）会被很多智能体共享；数据一变，定义可能悄悄算错。MAVRA 是位于智能体和数据库之间的中间件，负责：</a:t>
+              <a:t>例子里的问题：学到的指标定义被很多智能体共享，数据一变就可能悄悄算错，而且没人发现。MAVRA 是位于智能体和数据库之间的中间件，负责：</a:t>
             </a:r>
             <a:endParaRPr lang="en-US" sz="1600" dirty="0"/>
           </a:p>
@@ -3415,7 +7648,7 @@
             <a:pPr algn="r"/>
             <a:fld id="{F7021451-1387-4CA6-816F-3879F97B5CBC}" type="slidenum">
               <a:rPr b="0" lang="en-US"/>
-              <a:t>2</a:t>
+              <a:t>4</a:t>
             </a:fld>
             <a:endParaRPr lang="en-US"/>
           </a:p>
@@ -3429,9 +7662,9 @@
 </p:sld>
 </file>
 
-<file path=ppt/slides/slide3.xml><?xml version="1.0" encoding="utf-8"?>
+<file path=ppt/slides/slide5.xml><?xml version="1.0" encoding="utf-8"?>
 <p:sld xmlns:a="http://schemas.openxmlformats.org/drawingml/2006/main" xmlns:r="http://schemas.openxmlformats.org/officeDocument/2006/relationships" xmlns:p="http://schemas.openxmlformats.org/presentationml/2006/main">
-  <p:cSld name="Slide 3">
+  <p:cSld name="Slide 5">
     <p:spTree>
       <p:nvGrpSpPr>
         <p:cNvPr id="1" name=""/>
@@ -3553,7 +7786,7 @@
             <a:pPr algn="r"/>
             <a:fld id="{F7021451-1387-4CA6-816F-3879F97B5CBC}" type="slidenum">
               <a:rPr b="0" lang="en-US"/>
-              <a:t>3</a:t>
+              <a:t>5</a:t>
             </a:fld>
             <a:endParaRPr lang="en-US"/>
           </a:p>
@@ -3567,9 +7800,9 @@
 </p:sld>
 </file>
 
-<file path=ppt/slides/slide4.xml><?xml version="1.0" encoding="utf-8"?>
+<file path=ppt/slides/slide6.xml><?xml version="1.0" encoding="utf-8"?>
 <p:sld xmlns:a="http://schemas.openxmlformats.org/drawingml/2006/main" xmlns:r="http://schemas.openxmlformats.org/officeDocument/2006/relationships" xmlns:p="http://schemas.openxmlformats.org/presentationml/2006/main">
-  <p:cSld name="Slide 4">
+  <p:cSld name="Slide 6">
     <p:spTree>
       <p:nvGrpSpPr>
         <p:cNvPr id="1" name=""/>
@@ -3691,7 +7924,7 @@
             <a:pPr algn="r"/>
             <a:fld id="{F7021451-1387-4CA6-816F-3879F97B5CBC}" type="slidenum">
               <a:rPr b="0" lang="en-US"/>
-              <a:t>4</a:t>
+              <a:t>6</a:t>
             </a:fld>
             <a:endParaRPr lang="en-US"/>
           </a:p>
@@ -3705,9 +7938,9 @@
 </p:sld>
 </file>
 
-<file path=ppt/slides/slide5.xml><?xml version="1.0" encoding="utf-8"?>
+<file path=ppt/slides/slide7.xml><?xml version="1.0" encoding="utf-8"?>
 <p:sld xmlns:a="http://schemas.openxmlformats.org/drawingml/2006/main" xmlns:r="http://schemas.openxmlformats.org/officeDocument/2006/relationships" xmlns:p="http://schemas.openxmlformats.org/presentationml/2006/main">
-  <p:cSld name="Slide 5">
+  <p:cSld name="Slide 7">
     <p:spTree>
       <p:nvGrpSpPr>
         <p:cNvPr id="1" name=""/>
@@ -3829,7 +8062,7 @@
             <a:pPr algn="r"/>
             <a:fld id="{F7021451-1387-4CA6-816F-3879F97B5CBC}" type="slidenum">
               <a:rPr b="0" lang="en-US"/>
-              <a:t>5</a:t>
+              <a:t>7</a:t>
             </a:fld>
             <a:endParaRPr lang="en-US"/>
           </a:p>
@@ -3843,9 +8076,9 @@
 </p:sld>
 </file>
 
-<file path=ppt/slides/slide6.xml><?xml version="1.0" encoding="utf-8"?>
+<file path=ppt/slides/slide8.xml><?xml version="1.0" encoding="utf-8"?>
 <p:sld xmlns:a="http://schemas.openxmlformats.org/drawingml/2006/main" xmlns:r="http://schemas.openxmlformats.org/officeDocument/2006/relationships" xmlns:p="http://schemas.openxmlformats.org/presentationml/2006/main">
-  <p:cSld name="Slide 6">
+  <p:cSld name="Slide 8">
     <p:spTree>
       <p:nvGrpSpPr>
         <p:cNvPr id="1" name=""/>
@@ -3895,1625 +8128,7 @@
                 <a:ea typeface="Microsoft YaHei" pitchFamily="34" charset="-122"/>
                 <a:cs typeface="Microsoft YaHei" pitchFamily="34" charset="-120"/>
               </a:rPr>
-              <a:t>真实例子①：内置智能体学到“门店营业额”</a:t>
-            </a:r>
-            <a:endParaRPr lang="en-US" sz="3000" dirty="0"/>
-          </a:p>
-        </p:txBody>
-      </p:sp>
-      <p:sp>
-        <p:nvSpPr>
-          <p:cNvPr id="3" name="Text 1"/>
-          <p:cNvSpPr txBox="1"/>
-          <p:nvPr/>
-        </p:nvSpPr>
-        <p:spPr>
-          <a:xfrm>
-            <a:off x="548640" y="1143000"/>
-            <a:ext cx="5303520" cy="365760"/>
-          </a:xfrm>
-          <a:prstGeom prst="rect">
-            <a:avLst/>
-          </a:prstGeom>
-          <a:noFill/>
-          <a:ln/>
-        </p:spPr>
-        <p:txBody>
-          <a:bodyPr wrap="square" lIns="0" tIns="0" rIns="0" bIns="0" rtlCol="0" anchor="ctr"/>
-          <a:lstStyle/>
-          <a:p>
-            <a:pPr indent="0" marL="0">
-              <a:buNone/>
-            </a:pPr>
-            <a:r>
-              <a:rPr lang="en-US" sz="1600" b="1" dirty="0">
-                <a:solidFill>
-                  <a:srgbClr val="6A58A3"/>
-                </a:solidFill>
-                <a:latin typeface="Microsoft YaHei" pitchFamily="34" charset="0"/>
-                <a:ea typeface="Microsoft YaHei" pitchFamily="34" charset="-122"/>
-                <a:cs typeface="Microsoft YaHei" pitchFamily="34" charset="-120"/>
-              </a:rPr>
-              <a:t>学习题</a:t>
-            </a:r>
-            <a:endParaRPr lang="en-US" sz="1600" dirty="0"/>
-          </a:p>
-        </p:txBody>
-      </p:sp>
-      <p:sp>
-        <p:nvSpPr>
-          <p:cNvPr id="4" name="Shape 2"/>
-          <p:cNvSpPr/>
-          <p:nvPr/>
-        </p:nvSpPr>
-        <p:spPr>
-          <a:xfrm>
-            <a:off x="548640" y="1554480"/>
-            <a:ext cx="5303520" cy="1143000"/>
-          </a:xfrm>
-          <a:prstGeom prst="roundRect">
-            <a:avLst>
-              <a:gd name="adj" fmla="val 6400"/>
-            </a:avLst>
-          </a:prstGeom>
-          <a:solidFill>
-            <a:srgbClr val="EFECF7"/>
-          </a:solidFill>
-          <a:ln w="12700">
-            <a:solidFill>
-              <a:srgbClr val="EFECF7"/>
-            </a:solidFill>
-            <a:prstDash val="solid"/>
-          </a:ln>
-        </p:spPr>
-      </p:sp>
-      <p:sp>
-        <p:nvSpPr>
-          <p:cNvPr id="5" name="Text 3"/>
-          <p:cNvSpPr txBox="1"/>
-          <p:nvPr/>
-        </p:nvSpPr>
-        <p:spPr>
-          <a:xfrm>
-            <a:off x="731520" y="1645920"/>
-            <a:ext cx="4937760" cy="960120"/>
-          </a:xfrm>
-          <a:prstGeom prst="rect">
-            <a:avLst/>
-          </a:prstGeom>
-          <a:noFill/>
-          <a:ln/>
-        </p:spPr>
-        <p:txBody>
-          <a:bodyPr wrap="square" lIns="0" tIns="0" rIns="0" bIns="0" rtlCol="0" anchor="ctr"/>
-          <a:lstStyle/>
-          <a:p>
-            <a:pPr indent="0" marL="0">
-              <a:buNone/>
-            </a:pPr>
-            <a:r>
-              <a:rPr lang="en-US" sz="1500" dirty="0">
-                <a:solidFill>
-                  <a:srgbClr val="1F2A37"/>
-                </a:solidFill>
-                <a:latin typeface="Microsoft YaHei" pitchFamily="34" charset="0"/>
-                <a:ea typeface="Microsoft YaHei" pitchFamily="34" charset="-122"/>
-                <a:cs typeface="Microsoft YaHei" pitchFamily="34" charset="-120"/>
-              </a:rPr>
-              <a:t>3 月的门店营业额是多少？口径：门店营业额 = 门店销售行的净支付额（store_sales.ss_net_paid）之和，按销售日期归属期间。保留两位小数。</a:t>
-            </a:r>
-            <a:endParaRPr lang="en-US" sz="1500" dirty="0"/>
-          </a:p>
-        </p:txBody>
-      </p:sp>
-      <p:sp>
-        <p:nvSpPr>
-          <p:cNvPr id="6" name="Text 4"/>
-          <p:cNvSpPr txBox="1"/>
-          <p:nvPr/>
-        </p:nvSpPr>
-        <p:spPr>
-          <a:xfrm>
-            <a:off x="548640" y="2880360"/>
-            <a:ext cx="5303520" cy="320040"/>
-          </a:xfrm>
-          <a:prstGeom prst="rect">
-            <a:avLst/>
-          </a:prstGeom>
-          <a:noFill/>
-          <a:ln/>
-        </p:spPr>
-        <p:txBody>
-          <a:bodyPr wrap="square" lIns="0" tIns="0" rIns="0" bIns="0" rtlCol="0" anchor="ctr"/>
-          <a:lstStyle/>
-          <a:p>
-            <a:pPr indent="0" marL="0">
-              <a:buNone/>
-            </a:pPr>
-            <a:r>
-              <a:rPr lang="en-US" sz="1400" dirty="0">
-                <a:solidFill>
-                  <a:srgbClr val="5B6573"/>
-                </a:solidFill>
-                <a:latin typeface="Microsoft YaHei" pitchFamily="34" charset="0"/>
-                <a:ea typeface="Microsoft YaHei" pitchFamily="34" charset="-122"/>
-                <a:cs typeface="Microsoft YaHei" pitchFamily="34" charset="-120"/>
-              </a:rPr>
-              <a:t>内置智能体：5 轮、7 次工具调用、9.5 秒，最后的 SQL</a:t>
-            </a:r>
-            <a:endParaRPr lang="en-US" sz="1400" dirty="0"/>
-          </a:p>
-        </p:txBody>
-      </p:sp>
-      <p:sp>
-        <p:nvSpPr>
-          <p:cNvPr id="7" name="Shape 5"/>
-          <p:cNvSpPr/>
-          <p:nvPr/>
-        </p:nvSpPr>
-        <p:spPr>
-          <a:xfrm>
-            <a:off x="548640" y="3246120"/>
-            <a:ext cx="5303520" cy="1417320"/>
-          </a:xfrm>
-          <a:prstGeom prst="roundRect">
-            <a:avLst>
-              <a:gd name="adj" fmla="val 5161"/>
-            </a:avLst>
-          </a:prstGeom>
-          <a:solidFill>
-            <a:srgbClr val="F1F3F6"/>
-          </a:solidFill>
-          <a:ln w="12700">
-            <a:solidFill>
-              <a:srgbClr val="F1F3F6"/>
-            </a:solidFill>
-            <a:prstDash val="solid"/>
-          </a:ln>
-        </p:spPr>
-      </p:sp>
-      <p:sp>
-        <p:nvSpPr>
-          <p:cNvPr id="8" name="Text 6"/>
-          <p:cNvSpPr txBox="1"/>
-          <p:nvPr/>
-        </p:nvSpPr>
-        <p:spPr>
-          <a:xfrm>
-            <a:off x="731520" y="3310128"/>
-            <a:ext cx="4937760" cy="1280160"/>
-          </a:xfrm>
-          <a:prstGeom prst="rect">
-            <a:avLst/>
-          </a:prstGeom>
-          <a:noFill/>
-          <a:ln/>
-        </p:spPr>
-        <p:txBody>
-          <a:bodyPr wrap="square" lIns="0" tIns="0" rIns="0" bIns="0" rtlCol="0" anchor="ctr"/>
-          <a:lstStyle/>
-          <a:p>
-            <a:pPr indent="0" marL="0">
-              <a:buNone/>
-            </a:pPr>
-            <a:r>
-              <a:rPr lang="en-US" sz="1300" dirty="0">
-                <a:solidFill>
-                  <a:srgbClr val="1F2A37"/>
-                </a:solidFill>
-                <a:latin typeface="Courier New" pitchFamily="34" charset="0"/>
-                <a:ea typeface="Courier New" pitchFamily="34" charset="-122"/>
-                <a:cs typeface="Courier New" pitchFamily="34" charset="-120"/>
-              </a:rPr>
-              <a:t>SELECT ROUND(SUM(ss.ss_net_paid), 2)</a:t>
-            </a:r>
-            <a:endParaRPr lang="en-US" sz="1300" dirty="0"/>
-          </a:p>
-          <a:p>
-            <a:pPr indent="0" marL="0">
-              <a:buNone/>
-            </a:pPr>
-            <a:r>
-              <a:rPr lang="en-US" sz="1300" dirty="0">
-                <a:solidFill>
-                  <a:srgbClr val="1F2A37"/>
-                </a:solidFill>
-                <a:latin typeface="Courier New" pitchFamily="34" charset="0"/>
-                <a:ea typeface="Courier New" pitchFamily="34" charset="-122"/>
-                <a:cs typeface="Courier New" pitchFamily="34" charset="-120"/>
-              </a:rPr>
-              <a:t>FROM store_sales ss</a:t>
-            </a:r>
-            <a:endParaRPr lang="en-US" sz="1300" dirty="0"/>
-          </a:p>
-          <a:p>
-            <a:pPr indent="0" marL="0">
-              <a:buNone/>
-            </a:pPr>
-            <a:r>
-              <a:rPr lang="en-US" sz="1300" dirty="0">
-                <a:solidFill>
-                  <a:srgbClr val="1F2A37"/>
-                </a:solidFill>
-                <a:latin typeface="Courier New" pitchFamily="34" charset="0"/>
-                <a:ea typeface="Courier New" pitchFamily="34" charset="-122"/>
-                <a:cs typeface="Courier New" pitchFamily="34" charset="-120"/>
-              </a:rPr>
-              <a:t>JOIN date_dim d</a:t>
-            </a:r>
-            <a:endParaRPr lang="en-US" sz="1300" dirty="0"/>
-          </a:p>
-          <a:p>
-            <a:pPr indent="0" marL="0">
-              <a:buNone/>
-            </a:pPr>
-            <a:r>
-              <a:rPr lang="en-US" sz="1300" dirty="0">
-                <a:solidFill>
-                  <a:srgbClr val="1F2A37"/>
-                </a:solidFill>
-                <a:latin typeface="Courier New" pitchFamily="34" charset="0"/>
-                <a:ea typeface="Courier New" pitchFamily="34" charset="-122"/>
-                <a:cs typeface="Courier New" pitchFamily="34" charset="-120"/>
-              </a:rPr>
-              <a:t>  ON ss.ss_sold_date_sk = d.d_date_sk</a:t>
-            </a:r>
-            <a:endParaRPr lang="en-US" sz="1300" dirty="0"/>
-          </a:p>
-          <a:p>
-            <a:pPr indent="0" marL="0">
-              <a:buNone/>
-            </a:pPr>
-            <a:r>
-              <a:rPr lang="en-US" sz="1300" dirty="0">
-                <a:solidFill>
-                  <a:srgbClr val="1F2A37"/>
-                </a:solidFill>
-                <a:latin typeface="Courier New" pitchFamily="34" charset="0"/>
-                <a:ea typeface="Courier New" pitchFamily="34" charset="-122"/>
-                <a:cs typeface="Courier New" pitchFamily="34" charset="-120"/>
-              </a:rPr>
-              <a:t>WHERE d.d_year = … AND d.d_moy = 3</a:t>
-            </a:r>
-            <a:endParaRPr lang="en-US" sz="1300" dirty="0"/>
-          </a:p>
-        </p:txBody>
-      </p:sp>
-      <p:sp>
-        <p:nvSpPr>
-          <p:cNvPr id="9" name="Text 7"/>
-          <p:cNvSpPr txBox="1"/>
-          <p:nvPr/>
-        </p:nvSpPr>
-        <p:spPr>
-          <a:xfrm>
-            <a:off x="548640" y="4800600"/>
-            <a:ext cx="5303520" cy="1097280"/>
-          </a:xfrm>
-          <a:prstGeom prst="rect">
-            <a:avLst/>
-          </a:prstGeom>
-          <a:noFill/>
-          <a:ln/>
-        </p:spPr>
-        <p:txBody>
-          <a:bodyPr wrap="square" lIns="0" tIns="0" rIns="0" bIns="0" rtlCol="0" anchor="t"/>
-          <a:lstStyle/>
-          <a:p>
-            <a:pPr indent="0" marL="0">
-              <a:buNone/>
-            </a:pPr>
-            <a:r>
-              <a:rPr lang="en-US" sz="1500" b="1" dirty="0">
-                <a:solidFill>
-                  <a:srgbClr val="2E7D4F"/>
-                </a:solidFill>
-                <a:latin typeface="Microsoft YaHei" pitchFamily="34" charset="0"/>
-                <a:ea typeface="Microsoft YaHei" pitchFamily="34" charset="-122"/>
-                <a:cs typeface="Microsoft YaHei" pitchFamily="34" charset="-120"/>
-              </a:rPr>
-              <a:t>答案 13,570,368.70，与标准答案一致 ✓</a:t>
-            </a:r>
-            <a:endParaRPr lang="en-US" sz="1500" dirty="0"/>
-          </a:p>
-          <a:p>
-            <a:pPr indent="0" marL="0">
-              <a:buNone/>
-            </a:pPr>
-            <a:r>
-              <a:rPr lang="en-US" sz="1500" dirty="0">
-                <a:solidFill>
-                  <a:srgbClr val="1F2A37"/>
-                </a:solidFill>
-                <a:latin typeface="Microsoft YaHei" pitchFamily="34" charset="0"/>
-                <a:ea typeface="Microsoft YaHei" pitchFamily="34" charset="-122"/>
-                <a:cs typeface="Microsoft YaHei" pitchFamily="34" charset="-120"/>
-              </a:rPr>
-              <a:t>大模型把解题过程抽取成定义（10 秒）；7 项发布前校验全部通过（2.0 秒），发布为 v1。</a:t>
-            </a:r>
-            <a:endParaRPr lang="en-US" sz="1500" dirty="0"/>
-          </a:p>
-        </p:txBody>
-      </p:sp>
-      <p:sp>
-        <p:nvSpPr>
-          <p:cNvPr id="10" name="Text 8"/>
-          <p:cNvSpPr txBox="1"/>
-          <p:nvPr/>
-        </p:nvSpPr>
-        <p:spPr>
-          <a:xfrm>
-            <a:off x="6172200" y="1143000"/>
-            <a:ext cx="5468112" cy="365760"/>
-          </a:xfrm>
-          <a:prstGeom prst="rect">
-            <a:avLst/>
-          </a:prstGeom>
-          <a:noFill/>
-          <a:ln/>
-        </p:spPr>
-        <p:txBody>
-          <a:bodyPr wrap="square" lIns="0" tIns="0" rIns="0" bIns="0" rtlCol="0" anchor="ctr"/>
-          <a:lstStyle/>
-          <a:p>
-            <a:pPr indent="0" marL="0">
-              <a:buNone/>
-            </a:pPr>
-            <a:r>
-              <a:rPr lang="en-US" sz="1600" b="1" dirty="0">
-                <a:solidFill>
-                  <a:srgbClr val="1D5BA6"/>
-                </a:solidFill>
-                <a:latin typeface="Microsoft YaHei" pitchFamily="34" charset="0"/>
-                <a:ea typeface="Microsoft YaHei" pitchFamily="34" charset="-122"/>
-                <a:cs typeface="Microsoft YaHei" pitchFamily="34" charset="-120"/>
-              </a:rPr>
-              <a:t>存进指标库的定义（v1）</a:t>
-            </a:r>
-            <a:endParaRPr lang="en-US" sz="1600" dirty="0"/>
-          </a:p>
-        </p:txBody>
-      </p:sp>
-      <p:graphicFrame>
-        <p:nvGraphicFramePr>
-          <p:cNvPr id="7" name="Table 0"/>
-          <p:cNvGraphicFramePr>
-            <a:graphicFrameLocks noGrp="1"/>
-          </p:cNvGraphicFramePr>
-          <p:nvPr>
-            <p:extLst>
-              <p:ext uri="{D42A27DB-BD31-4B8C-83A1-F6EECF244321}">
-                <p14:modId xmlns:p14="http://schemas.microsoft.com/office/powerpoint/2010/main" val="1579011935"/>
-              </p:ext>
-            </p:extLst>
-          </p:nvPr>
-        </p:nvGraphicFramePr>
-        <p:xfrm>
-          <a:off x="6172200" y="1554480"/>
-          <a:ext cx="5468112" cy="914400"/>
-        </p:xfrm>
-        <a:graphic>
-          <a:graphicData uri="http://schemas.openxmlformats.org/drawingml/2006/table">
-            <a:tbl>
-              <a:tblPr/>
-              <a:tblGrid>
-                <a:gridCol w="1097280"/>
-                <a:gridCol w="4370832"/>
-              </a:tblGrid>
-              <a:tr h="0">
-                <a:tc>
-                  <a:txBody>
-                    <a:bodyPr/>
-                    <a:lstStyle/>
-                    <a:p>
-                      <a:pPr indent="0" marL="0">
-                        <a:buNone/>
-                      </a:pPr>
-                      <a:r>
-                        <a:rPr lang="en-US" sz="1400" b="1" dirty="0">
-                          <a:solidFill>
-                            <a:srgbClr val="1F2A37"/>
-                          </a:solidFill>
-                          <a:latin typeface="Microsoft YaHei" pitchFamily="34" charset="0"/>
-                          <a:ea typeface="Microsoft YaHei" pitchFamily="34" charset="-122"/>
-                          <a:cs typeface="Microsoft YaHei" pitchFamily="34" charset="-120"/>
-                        </a:rPr>
-                        <a:t>字段</a:t>
-                      </a:r>
-                      <a:endParaRPr lang="en-US" sz="1400" dirty="0">
-                        <a:latin typeface="Microsoft YaHei" charset="0"/>
-                        <a:ea typeface="Microsoft YaHei" charset="0"/>
-                        <a:cs typeface="Microsoft YaHei" charset="0"/>
-                      </a:endParaRPr>
-                    </a:p>
-                  </a:txBody>
-                  <a:tcPr marL="91440" marR="91440" marT="54864" marB="54864" anchor="ctr">
-                    <a:lnL w="12700" cap="flat" cmpd="sng" algn="ctr">
-                      <a:solidFill>
-                        <a:srgbClr val="D5DBE3"/>
-                      </a:solidFill>
-                      <a:prstDash val="solid"/>
-                      <a:round/>
-                      <a:headEnd type="none" w="med" len="med"/>
-                      <a:tailEnd type="none" w="med" len="med"/>
-                    </a:lnL>
-                    <a:lnR w="12700" cap="flat" cmpd="sng" algn="ctr">
-                      <a:solidFill>
-                        <a:srgbClr val="D5DBE3"/>
-                      </a:solidFill>
-                      <a:prstDash val="solid"/>
-                      <a:round/>
-                      <a:headEnd type="none" w="med" len="med"/>
-                      <a:tailEnd type="none" w="med" len="med"/>
-                    </a:lnR>
-                    <a:lnT w="12700" cap="flat" cmpd="sng" algn="ctr">
-                      <a:solidFill>
-                        <a:srgbClr val="D5DBE3"/>
-                      </a:solidFill>
-                      <a:prstDash val="solid"/>
-                      <a:round/>
-                      <a:headEnd type="none" w="med" len="med"/>
-                      <a:tailEnd type="none" w="med" len="med"/>
-                    </a:lnT>
-                    <a:lnB w="12700" cap="flat" cmpd="sng" algn="ctr">
-                      <a:solidFill>
-                        <a:srgbClr val="D5DBE3"/>
-                      </a:solidFill>
-                      <a:prstDash val="solid"/>
-                      <a:round/>
-                      <a:headEnd type="none" w="med" len="med"/>
-                      <a:tailEnd type="none" w="med" len="med"/>
-                    </a:lnB>
-                    <a:solidFill>
-                      <a:srgbClr val="F1F3F6"/>
-                    </a:solidFill>
-                  </a:tcPr>
-                </a:tc>
-                <a:tc>
-                  <a:txBody>
-                    <a:bodyPr/>
-                    <a:lstStyle/>
-                    <a:p>
-                      <a:pPr indent="0" marL="0">
-                        <a:buNone/>
-                      </a:pPr>
-                      <a:r>
-                        <a:rPr lang="en-US" sz="1400" b="1" dirty="0">
-                          <a:solidFill>
-                            <a:srgbClr val="1F2A37"/>
-                          </a:solidFill>
-                          <a:latin typeface="Microsoft YaHei" pitchFamily="34" charset="0"/>
-                          <a:ea typeface="Microsoft YaHei" pitchFamily="34" charset="-122"/>
-                          <a:cs typeface="Microsoft YaHei" pitchFamily="34" charset="-120"/>
-                        </a:rPr>
-                        <a:t>内容</a:t>
-                      </a:r>
-                      <a:endParaRPr lang="en-US" sz="1400" dirty="0">
-                        <a:latin typeface="Microsoft YaHei" charset="0"/>
-                        <a:ea typeface="Microsoft YaHei" charset="0"/>
-                        <a:cs typeface="Microsoft YaHei" charset="0"/>
-                      </a:endParaRPr>
-                    </a:p>
-                  </a:txBody>
-                  <a:tcPr marL="91440" marR="91440" marT="54864" marB="54864" anchor="ctr">
-                    <a:lnL w="12700" cap="flat" cmpd="sng" algn="ctr">
-                      <a:solidFill>
-                        <a:srgbClr val="D5DBE3"/>
-                      </a:solidFill>
-                      <a:prstDash val="solid"/>
-                      <a:round/>
-                      <a:headEnd type="none" w="med" len="med"/>
-                      <a:tailEnd type="none" w="med" len="med"/>
-                    </a:lnL>
-                    <a:lnR w="12700" cap="flat" cmpd="sng" algn="ctr">
-                      <a:solidFill>
-                        <a:srgbClr val="D5DBE3"/>
-                      </a:solidFill>
-                      <a:prstDash val="solid"/>
-                      <a:round/>
-                      <a:headEnd type="none" w="med" len="med"/>
-                      <a:tailEnd type="none" w="med" len="med"/>
-                    </a:lnR>
-                    <a:lnT w="12700" cap="flat" cmpd="sng" algn="ctr">
-                      <a:solidFill>
-                        <a:srgbClr val="D5DBE3"/>
-                      </a:solidFill>
-                      <a:prstDash val="solid"/>
-                      <a:round/>
-                      <a:headEnd type="none" w="med" len="med"/>
-                      <a:tailEnd type="none" w="med" len="med"/>
-                    </a:lnT>
-                    <a:lnB w="12700" cap="flat" cmpd="sng" algn="ctr">
-                      <a:solidFill>
-                        <a:srgbClr val="D5DBE3"/>
-                      </a:solidFill>
-                      <a:prstDash val="solid"/>
-                      <a:round/>
-                      <a:headEnd type="none" w="med" len="med"/>
-                      <a:tailEnd type="none" w="med" len="med"/>
-                    </a:lnB>
-                    <a:solidFill>
-                      <a:srgbClr val="F1F3F6"/>
-                    </a:solidFill>
-                  </a:tcPr>
-                </a:tc>
-              </a:tr>
-              <a:tr h="0">
-                <a:tc>
-                  <a:txBody>
-                    <a:bodyPr/>
-                    <a:lstStyle/>
-                    <a:p>
-                      <a:pPr indent="0" marL="0">
-                        <a:buNone/>
-                      </a:pPr>
-                      <a:r>
-                        <a:rPr lang="en-US" sz="1400" dirty="0">
-                          <a:solidFill>
-                            <a:srgbClr val="1F2A37"/>
-                          </a:solidFill>
-                          <a:latin typeface="Microsoft YaHei" pitchFamily="34" charset="0"/>
-                          <a:ea typeface="Microsoft YaHei" pitchFamily="34" charset="-122"/>
-                          <a:cs typeface="Microsoft YaHei" pitchFamily="34" charset="-120"/>
-                        </a:rPr>
-                        <a:t>名称</a:t>
-                      </a:r>
-                      <a:endParaRPr lang="en-US" sz="1400" dirty="0">
-                        <a:latin typeface="Microsoft YaHei" charset="0"/>
-                        <a:ea typeface="Microsoft YaHei" charset="0"/>
-                        <a:cs typeface="Microsoft YaHei" charset="0"/>
-                      </a:endParaRPr>
-                    </a:p>
-                  </a:txBody>
-                  <a:tcPr marL="91440" marR="91440" marT="54864" marB="54864" anchor="ctr">
-                    <a:lnL w="12700" cap="flat" cmpd="sng" algn="ctr">
-                      <a:solidFill>
-                        <a:srgbClr val="D5DBE3"/>
-                      </a:solidFill>
-                      <a:prstDash val="solid"/>
-                      <a:round/>
-                      <a:headEnd type="none" w="med" len="med"/>
-                      <a:tailEnd type="none" w="med" len="med"/>
-                    </a:lnL>
-                    <a:lnR w="12700" cap="flat" cmpd="sng" algn="ctr">
-                      <a:solidFill>
-                        <a:srgbClr val="D5DBE3"/>
-                      </a:solidFill>
-                      <a:prstDash val="solid"/>
-                      <a:round/>
-                      <a:headEnd type="none" w="med" len="med"/>
-                      <a:tailEnd type="none" w="med" len="med"/>
-                    </a:lnR>
-                    <a:lnT w="12700" cap="flat" cmpd="sng" algn="ctr">
-                      <a:solidFill>
-                        <a:srgbClr val="D5DBE3"/>
-                      </a:solidFill>
-                      <a:prstDash val="solid"/>
-                      <a:round/>
-                      <a:headEnd type="none" w="med" len="med"/>
-                      <a:tailEnd type="none" w="med" len="med"/>
-                    </a:lnT>
-                    <a:lnB w="12700" cap="flat" cmpd="sng" algn="ctr">
-                      <a:solidFill>
-                        <a:srgbClr val="D5DBE3"/>
-                      </a:solidFill>
-                      <a:prstDash val="solid"/>
-                      <a:round/>
-                      <a:headEnd type="none" w="med" len="med"/>
-                      <a:tailEnd type="none" w="med" len="med"/>
-                    </a:lnB>
-                  </a:tcPr>
-                </a:tc>
-                <a:tc>
-                  <a:txBody>
-                    <a:bodyPr/>
-                    <a:lstStyle/>
-                    <a:p>
-                      <a:pPr indent="0" marL="0">
-                        <a:buNone/>
-                      </a:pPr>
-                      <a:r>
-                        <a:rPr lang="en-US" sz="1400" dirty="0">
-                          <a:solidFill>
-                            <a:srgbClr val="1F2A37"/>
-                          </a:solidFill>
-                          <a:latin typeface="Microsoft YaHei" pitchFamily="34" charset="0"/>
-                          <a:ea typeface="Microsoft YaHei" pitchFamily="34" charset="-122"/>
-                          <a:cs typeface="Microsoft YaHei" pitchFamily="34" charset="-120"/>
-                        </a:rPr>
-                        <a:t>门店营业额（别名：门店销售净额）</a:t>
-                      </a:r>
-                      <a:endParaRPr lang="en-US" sz="1400" dirty="0">
-                        <a:latin typeface="Microsoft YaHei" charset="0"/>
-                        <a:ea typeface="Microsoft YaHei" charset="0"/>
-                        <a:cs typeface="Microsoft YaHei" charset="0"/>
-                      </a:endParaRPr>
-                    </a:p>
-                  </a:txBody>
-                  <a:tcPr marL="91440" marR="91440" marT="54864" marB="54864" anchor="ctr">
-                    <a:lnL w="12700" cap="flat" cmpd="sng" algn="ctr">
-                      <a:solidFill>
-                        <a:srgbClr val="D5DBE3"/>
-                      </a:solidFill>
-                      <a:prstDash val="solid"/>
-                      <a:round/>
-                      <a:headEnd type="none" w="med" len="med"/>
-                      <a:tailEnd type="none" w="med" len="med"/>
-                    </a:lnL>
-                    <a:lnR w="12700" cap="flat" cmpd="sng" algn="ctr">
-                      <a:solidFill>
-                        <a:srgbClr val="D5DBE3"/>
-                      </a:solidFill>
-                      <a:prstDash val="solid"/>
-                      <a:round/>
-                      <a:headEnd type="none" w="med" len="med"/>
-                      <a:tailEnd type="none" w="med" len="med"/>
-                    </a:lnR>
-                    <a:lnT w="12700" cap="flat" cmpd="sng" algn="ctr">
-                      <a:solidFill>
-                        <a:srgbClr val="D5DBE3"/>
-                      </a:solidFill>
-                      <a:prstDash val="solid"/>
-                      <a:round/>
-                      <a:headEnd type="none" w="med" len="med"/>
-                      <a:tailEnd type="none" w="med" len="med"/>
-                    </a:lnT>
-                    <a:lnB w="12700" cap="flat" cmpd="sng" algn="ctr">
-                      <a:solidFill>
-                        <a:srgbClr val="D5DBE3"/>
-                      </a:solidFill>
-                      <a:prstDash val="solid"/>
-                      <a:round/>
-                      <a:headEnd type="none" w="med" len="med"/>
-                      <a:tailEnd type="none" w="med" len="med"/>
-                    </a:lnB>
-                  </a:tcPr>
-                </a:tc>
-              </a:tr>
-              <a:tr h="0">
-                <a:tc>
-                  <a:txBody>
-                    <a:bodyPr/>
-                    <a:lstStyle/>
-                    <a:p>
-                      <a:pPr indent="0" marL="0">
-                        <a:buNone/>
-                      </a:pPr>
-                      <a:r>
-                        <a:rPr lang="en-US" sz="1400" dirty="0">
-                          <a:solidFill>
-                            <a:srgbClr val="1F2A37"/>
-                          </a:solidFill>
-                          <a:latin typeface="Microsoft YaHei" pitchFamily="34" charset="0"/>
-                          <a:ea typeface="Microsoft YaHei" pitchFamily="34" charset="-122"/>
-                          <a:cs typeface="Microsoft YaHei" pitchFamily="34" charset="-120"/>
-                        </a:rPr>
-                        <a:t>口径</a:t>
-                      </a:r>
-                      <a:endParaRPr lang="en-US" sz="1400" dirty="0">
-                        <a:latin typeface="Microsoft YaHei" charset="0"/>
-                        <a:ea typeface="Microsoft YaHei" charset="0"/>
-                        <a:cs typeface="Microsoft YaHei" charset="0"/>
-                      </a:endParaRPr>
-                    </a:p>
-                  </a:txBody>
-                  <a:tcPr marL="91440" marR="91440" marT="54864" marB="54864" anchor="ctr">
-                    <a:lnL w="12700" cap="flat" cmpd="sng" algn="ctr">
-                      <a:solidFill>
-                        <a:srgbClr val="D5DBE3"/>
-                      </a:solidFill>
-                      <a:prstDash val="solid"/>
-                      <a:round/>
-                      <a:headEnd type="none" w="med" len="med"/>
-                      <a:tailEnd type="none" w="med" len="med"/>
-                    </a:lnL>
-                    <a:lnR w="12700" cap="flat" cmpd="sng" algn="ctr">
-                      <a:solidFill>
-                        <a:srgbClr val="D5DBE3"/>
-                      </a:solidFill>
-                      <a:prstDash val="solid"/>
-                      <a:round/>
-                      <a:headEnd type="none" w="med" len="med"/>
-                      <a:tailEnd type="none" w="med" len="med"/>
-                    </a:lnR>
-                    <a:lnT w="12700" cap="flat" cmpd="sng" algn="ctr">
-                      <a:solidFill>
-                        <a:srgbClr val="D5DBE3"/>
-                      </a:solidFill>
-                      <a:prstDash val="solid"/>
-                      <a:round/>
-                      <a:headEnd type="none" w="med" len="med"/>
-                      <a:tailEnd type="none" w="med" len="med"/>
-                    </a:lnT>
-                    <a:lnB w="12700" cap="flat" cmpd="sng" algn="ctr">
-                      <a:solidFill>
-                        <a:srgbClr val="D5DBE3"/>
-                      </a:solidFill>
-                      <a:prstDash val="solid"/>
-                      <a:round/>
-                      <a:headEnd type="none" w="med" len="med"/>
-                      <a:tailEnd type="none" w="med" len="med"/>
-                    </a:lnB>
-                  </a:tcPr>
-                </a:tc>
-                <a:tc>
-                  <a:txBody>
-                    <a:bodyPr/>
-                    <a:lstStyle/>
-                    <a:p>
-                      <a:pPr indent="0" marL="0">
-                        <a:buNone/>
-                      </a:pPr>
-                      <a:r>
-                        <a:rPr lang="en-US" sz="1400" dirty="0">
-                          <a:solidFill>
-                            <a:srgbClr val="1F2A37"/>
-                          </a:solidFill>
-                          <a:latin typeface="Microsoft YaHei" pitchFamily="34" charset="0"/>
-                          <a:ea typeface="Microsoft YaHei" pitchFamily="34" charset="-122"/>
-                          <a:cs typeface="Microsoft YaHei" pitchFamily="34" charset="-120"/>
-                        </a:rPr>
-                        <a:t>门店销售明细行净支付额之和，按销售日期归属期间</a:t>
-                      </a:r>
-                      <a:endParaRPr lang="en-US" sz="1400" dirty="0">
-                        <a:latin typeface="Microsoft YaHei" charset="0"/>
-                        <a:ea typeface="Microsoft YaHei" charset="0"/>
-                        <a:cs typeface="Microsoft YaHei" charset="0"/>
-                      </a:endParaRPr>
-                    </a:p>
-                  </a:txBody>
-                  <a:tcPr marL="91440" marR="91440" marT="54864" marB="54864" anchor="ctr">
-                    <a:lnL w="12700" cap="flat" cmpd="sng" algn="ctr">
-                      <a:solidFill>
-                        <a:srgbClr val="D5DBE3"/>
-                      </a:solidFill>
-                      <a:prstDash val="solid"/>
-                      <a:round/>
-                      <a:headEnd type="none" w="med" len="med"/>
-                      <a:tailEnd type="none" w="med" len="med"/>
-                    </a:lnL>
-                    <a:lnR w="12700" cap="flat" cmpd="sng" algn="ctr">
-                      <a:solidFill>
-                        <a:srgbClr val="D5DBE3"/>
-                      </a:solidFill>
-                      <a:prstDash val="solid"/>
-                      <a:round/>
-                      <a:headEnd type="none" w="med" len="med"/>
-                      <a:tailEnd type="none" w="med" len="med"/>
-                    </a:lnR>
-                    <a:lnT w="12700" cap="flat" cmpd="sng" algn="ctr">
-                      <a:solidFill>
-                        <a:srgbClr val="D5DBE3"/>
-                      </a:solidFill>
-                      <a:prstDash val="solid"/>
-                      <a:round/>
-                      <a:headEnd type="none" w="med" len="med"/>
-                      <a:tailEnd type="none" w="med" len="med"/>
-                    </a:lnT>
-                    <a:lnB w="12700" cap="flat" cmpd="sng" algn="ctr">
-                      <a:solidFill>
-                        <a:srgbClr val="D5DBE3"/>
-                      </a:solidFill>
-                      <a:prstDash val="solid"/>
-                      <a:round/>
-                      <a:headEnd type="none" w="med" len="med"/>
-                      <a:tailEnd type="none" w="med" len="med"/>
-                    </a:lnB>
-                  </a:tcPr>
-                </a:tc>
-              </a:tr>
-              <a:tr h="0">
-                <a:tc>
-                  <a:txBody>
-                    <a:bodyPr/>
-                    <a:lstStyle/>
-                    <a:p>
-                      <a:pPr indent="0" marL="0">
-                        <a:buNone/>
-                      </a:pPr>
-                      <a:r>
-                        <a:rPr lang="en-US" sz="1400" dirty="0">
-                          <a:solidFill>
-                            <a:srgbClr val="1F2A37"/>
-                          </a:solidFill>
-                          <a:latin typeface="Microsoft YaHei" pitchFamily="34" charset="0"/>
-                          <a:ea typeface="Microsoft YaHei" pitchFamily="34" charset="-122"/>
-                          <a:cs typeface="Microsoft YaHei" pitchFamily="34" charset="-120"/>
-                        </a:rPr>
-                        <a:t>计算</a:t>
-                      </a:r>
-                      <a:endParaRPr lang="en-US" sz="1400" dirty="0">
-                        <a:latin typeface="Microsoft YaHei" charset="0"/>
-                        <a:ea typeface="Microsoft YaHei" charset="0"/>
-                        <a:cs typeface="Microsoft YaHei" charset="0"/>
-                      </a:endParaRPr>
-                    </a:p>
-                  </a:txBody>
-                  <a:tcPr marL="91440" marR="91440" marT="54864" marB="54864" anchor="ctr">
-                    <a:lnL w="12700" cap="flat" cmpd="sng" algn="ctr">
-                      <a:solidFill>
-                        <a:srgbClr val="D5DBE3"/>
-                      </a:solidFill>
-                      <a:prstDash val="solid"/>
-                      <a:round/>
-                      <a:headEnd type="none" w="med" len="med"/>
-                      <a:tailEnd type="none" w="med" len="med"/>
-                    </a:lnL>
-                    <a:lnR w="12700" cap="flat" cmpd="sng" algn="ctr">
-                      <a:solidFill>
-                        <a:srgbClr val="D5DBE3"/>
-                      </a:solidFill>
-                      <a:prstDash val="solid"/>
-                      <a:round/>
-                      <a:headEnd type="none" w="med" len="med"/>
-                      <a:tailEnd type="none" w="med" len="med"/>
-                    </a:lnR>
-                    <a:lnT w="12700" cap="flat" cmpd="sng" algn="ctr">
-                      <a:solidFill>
-                        <a:srgbClr val="D5DBE3"/>
-                      </a:solidFill>
-                      <a:prstDash val="solid"/>
-                      <a:round/>
-                      <a:headEnd type="none" w="med" len="med"/>
-                      <a:tailEnd type="none" w="med" len="med"/>
-                    </a:lnT>
-                    <a:lnB w="12700" cap="flat" cmpd="sng" algn="ctr">
-                      <a:solidFill>
-                        <a:srgbClr val="D5DBE3"/>
-                      </a:solidFill>
-                      <a:prstDash val="solid"/>
-                      <a:round/>
-                      <a:headEnd type="none" w="med" len="med"/>
-                      <a:tailEnd type="none" w="med" len="med"/>
-                    </a:lnB>
-                  </a:tcPr>
-                </a:tc>
-                <a:tc>
-                  <a:txBody>
-                    <a:bodyPr/>
-                    <a:lstStyle/>
-                    <a:p>
-                      <a:pPr indent="0" marL="0">
-                        <a:buNone/>
-                      </a:pPr>
-                      <a:r>
-                        <a:rPr lang="en-US" sz="1400" dirty="0">
-                          <a:solidFill>
-                            <a:srgbClr val="1F2A37"/>
-                          </a:solidFill>
-                          <a:latin typeface="Microsoft YaHei" pitchFamily="34" charset="0"/>
-                          <a:ea typeface="Microsoft YaHei" pitchFamily="34" charset="-122"/>
-                          <a:cs typeface="Microsoft YaHei" pitchFamily="34" charset="-120"/>
-                        </a:rPr>
-                        <a:t>store_sales 上 SUM(ss_net_paid)，无过滤条件</a:t>
-                      </a:r>
-                      <a:endParaRPr lang="en-US" sz="1400" dirty="0">
-                        <a:latin typeface="Microsoft YaHei" charset="0"/>
-                        <a:ea typeface="Microsoft YaHei" charset="0"/>
-                        <a:cs typeface="Microsoft YaHei" charset="0"/>
-                      </a:endParaRPr>
-                    </a:p>
-                  </a:txBody>
-                  <a:tcPr marL="91440" marR="91440" marT="54864" marB="54864" anchor="ctr">
-                    <a:lnL w="12700" cap="flat" cmpd="sng" algn="ctr">
-                      <a:solidFill>
-                        <a:srgbClr val="D5DBE3"/>
-                      </a:solidFill>
-                      <a:prstDash val="solid"/>
-                      <a:round/>
-                      <a:headEnd type="none" w="med" len="med"/>
-                      <a:tailEnd type="none" w="med" len="med"/>
-                    </a:lnL>
-                    <a:lnR w="12700" cap="flat" cmpd="sng" algn="ctr">
-                      <a:solidFill>
-                        <a:srgbClr val="D5DBE3"/>
-                      </a:solidFill>
-                      <a:prstDash val="solid"/>
-                      <a:round/>
-                      <a:headEnd type="none" w="med" len="med"/>
-                      <a:tailEnd type="none" w="med" len="med"/>
-                    </a:lnR>
-                    <a:lnT w="12700" cap="flat" cmpd="sng" algn="ctr">
-                      <a:solidFill>
-                        <a:srgbClr val="D5DBE3"/>
-                      </a:solidFill>
-                      <a:prstDash val="solid"/>
-                      <a:round/>
-                      <a:headEnd type="none" w="med" len="med"/>
-                      <a:tailEnd type="none" w="med" len="med"/>
-                    </a:lnT>
-                    <a:lnB w="12700" cap="flat" cmpd="sng" algn="ctr">
-                      <a:solidFill>
-                        <a:srgbClr val="D5DBE3"/>
-                      </a:solidFill>
-                      <a:prstDash val="solid"/>
-                      <a:round/>
-                      <a:headEnd type="none" w="med" len="med"/>
-                      <a:tailEnd type="none" w="med" len="med"/>
-                    </a:lnB>
-                  </a:tcPr>
-                </a:tc>
-              </a:tr>
-              <a:tr h="0">
-                <a:tc>
-                  <a:txBody>
-                    <a:bodyPr/>
-                    <a:lstStyle/>
-                    <a:p>
-                      <a:pPr indent="0" marL="0">
-                        <a:buNone/>
-                      </a:pPr>
-                      <a:r>
-                        <a:rPr lang="en-US" sz="1400" dirty="0">
-                          <a:solidFill>
-                            <a:srgbClr val="1F2A37"/>
-                          </a:solidFill>
-                          <a:latin typeface="Microsoft YaHei" pitchFamily="34" charset="0"/>
-                          <a:ea typeface="Microsoft YaHei" pitchFamily="34" charset="-122"/>
-                          <a:cs typeface="Microsoft YaHei" pitchFamily="34" charset="-120"/>
-                        </a:rPr>
-                        <a:t>粒度</a:t>
-                      </a:r>
-                      <a:endParaRPr lang="en-US" sz="1400" dirty="0">
-                        <a:latin typeface="Microsoft YaHei" charset="0"/>
-                        <a:ea typeface="Microsoft YaHei" charset="0"/>
-                        <a:cs typeface="Microsoft YaHei" charset="0"/>
-                      </a:endParaRPr>
-                    </a:p>
-                  </a:txBody>
-                  <a:tcPr marL="91440" marR="91440" marT="54864" marB="54864" anchor="ctr">
-                    <a:lnL w="12700" cap="flat" cmpd="sng" algn="ctr">
-                      <a:solidFill>
-                        <a:srgbClr val="D5DBE3"/>
-                      </a:solidFill>
-                      <a:prstDash val="solid"/>
-                      <a:round/>
-                      <a:headEnd type="none" w="med" len="med"/>
-                      <a:tailEnd type="none" w="med" len="med"/>
-                    </a:lnL>
-                    <a:lnR w="12700" cap="flat" cmpd="sng" algn="ctr">
-                      <a:solidFill>
-                        <a:srgbClr val="D5DBE3"/>
-                      </a:solidFill>
-                      <a:prstDash val="solid"/>
-                      <a:round/>
-                      <a:headEnd type="none" w="med" len="med"/>
-                      <a:tailEnd type="none" w="med" len="med"/>
-                    </a:lnR>
-                    <a:lnT w="12700" cap="flat" cmpd="sng" algn="ctr">
-                      <a:solidFill>
-                        <a:srgbClr val="D5DBE3"/>
-                      </a:solidFill>
-                      <a:prstDash val="solid"/>
-                      <a:round/>
-                      <a:headEnd type="none" w="med" len="med"/>
-                      <a:tailEnd type="none" w="med" len="med"/>
-                    </a:lnT>
-                    <a:lnB w="12700" cap="flat" cmpd="sng" algn="ctr">
-                      <a:solidFill>
-                        <a:srgbClr val="D5DBE3"/>
-                      </a:solidFill>
-                      <a:prstDash val="solid"/>
-                      <a:round/>
-                      <a:headEnd type="none" w="med" len="med"/>
-                      <a:tailEnd type="none" w="med" len="med"/>
-                    </a:lnB>
-                  </a:tcPr>
-                </a:tc>
-                <a:tc>
-                  <a:txBody>
-                    <a:bodyPr/>
-                    <a:lstStyle/>
-                    <a:p>
-                      <a:pPr indent="0" marL="0">
-                        <a:buNone/>
-                      </a:pPr>
-                      <a:r>
-                        <a:rPr lang="en-US" sz="1400" dirty="0">
-                          <a:solidFill>
-                            <a:srgbClr val="1F2A37"/>
-                          </a:solidFill>
-                          <a:latin typeface="Microsoft YaHei" pitchFamily="34" charset="0"/>
-                          <a:ea typeface="Microsoft YaHei" pitchFamily="34" charset="-122"/>
-                          <a:cs typeface="Microsoft YaHei" pitchFamily="34" charset="-120"/>
-                        </a:rPr>
-                        <a:t>销售日 + 小票号 + 商品，即每笔销售一行</a:t>
-                      </a:r>
-                      <a:endParaRPr lang="en-US" sz="1400" dirty="0">
-                        <a:latin typeface="Microsoft YaHei" charset="0"/>
-                        <a:ea typeface="Microsoft YaHei" charset="0"/>
-                        <a:cs typeface="Microsoft YaHei" charset="0"/>
-                      </a:endParaRPr>
-                    </a:p>
-                  </a:txBody>
-                  <a:tcPr marL="91440" marR="91440" marT="54864" marB="54864" anchor="ctr">
-                    <a:lnL w="12700" cap="flat" cmpd="sng" algn="ctr">
-                      <a:solidFill>
-                        <a:srgbClr val="D5DBE3"/>
-                      </a:solidFill>
-                      <a:prstDash val="solid"/>
-                      <a:round/>
-                      <a:headEnd type="none" w="med" len="med"/>
-                      <a:tailEnd type="none" w="med" len="med"/>
-                    </a:lnL>
-                    <a:lnR w="12700" cap="flat" cmpd="sng" algn="ctr">
-                      <a:solidFill>
-                        <a:srgbClr val="D5DBE3"/>
-                      </a:solidFill>
-                      <a:prstDash val="solid"/>
-                      <a:round/>
-                      <a:headEnd type="none" w="med" len="med"/>
-                      <a:tailEnd type="none" w="med" len="med"/>
-                    </a:lnR>
-                    <a:lnT w="12700" cap="flat" cmpd="sng" algn="ctr">
-                      <a:solidFill>
-                        <a:srgbClr val="D5DBE3"/>
-                      </a:solidFill>
-                      <a:prstDash val="solid"/>
-                      <a:round/>
-                      <a:headEnd type="none" w="med" len="med"/>
-                      <a:tailEnd type="none" w="med" len="med"/>
-                    </a:lnT>
-                    <a:lnB w="12700" cap="flat" cmpd="sng" algn="ctr">
-                      <a:solidFill>
-                        <a:srgbClr val="D5DBE3"/>
-                      </a:solidFill>
-                      <a:prstDash val="solid"/>
-                      <a:round/>
-                      <a:headEnd type="none" w="med" len="med"/>
-                      <a:tailEnd type="none" w="med" len="med"/>
-                    </a:lnB>
-                  </a:tcPr>
-                </a:tc>
-              </a:tr>
-              <a:tr h="0">
-                <a:tc>
-                  <a:txBody>
-                    <a:bodyPr/>
-                    <a:lstStyle/>
-                    <a:p>
-                      <a:pPr indent="0" marL="0">
-                        <a:buNone/>
-                      </a:pPr>
-                      <a:r>
-                        <a:rPr lang="en-US" sz="1400" dirty="0">
-                          <a:solidFill>
-                            <a:srgbClr val="1F2A37"/>
-                          </a:solidFill>
-                          <a:latin typeface="Microsoft YaHei" pitchFamily="34" charset="0"/>
-                          <a:ea typeface="Microsoft YaHei" pitchFamily="34" charset="-122"/>
-                          <a:cs typeface="Microsoft YaHei" pitchFamily="34" charset="-120"/>
-                        </a:rPr>
-                        <a:t>日期</a:t>
-                      </a:r>
-                      <a:endParaRPr lang="en-US" sz="1400" dirty="0">
-                        <a:latin typeface="Microsoft YaHei" charset="0"/>
-                        <a:ea typeface="Microsoft YaHei" charset="0"/>
-                        <a:cs typeface="Microsoft YaHei" charset="0"/>
-                      </a:endParaRPr>
-                    </a:p>
-                  </a:txBody>
-                  <a:tcPr marL="91440" marR="91440" marT="54864" marB="54864" anchor="ctr">
-                    <a:lnL w="12700" cap="flat" cmpd="sng" algn="ctr">
-                      <a:solidFill>
-                        <a:srgbClr val="D5DBE3"/>
-                      </a:solidFill>
-                      <a:prstDash val="solid"/>
-                      <a:round/>
-                      <a:headEnd type="none" w="med" len="med"/>
-                      <a:tailEnd type="none" w="med" len="med"/>
-                    </a:lnL>
-                    <a:lnR w="12700" cap="flat" cmpd="sng" algn="ctr">
-                      <a:solidFill>
-                        <a:srgbClr val="D5DBE3"/>
-                      </a:solidFill>
-                      <a:prstDash val="solid"/>
-                      <a:round/>
-                      <a:headEnd type="none" w="med" len="med"/>
-                      <a:tailEnd type="none" w="med" len="med"/>
-                    </a:lnR>
-                    <a:lnT w="12700" cap="flat" cmpd="sng" algn="ctr">
-                      <a:solidFill>
-                        <a:srgbClr val="D5DBE3"/>
-                      </a:solidFill>
-                      <a:prstDash val="solid"/>
-                      <a:round/>
-                      <a:headEnd type="none" w="med" len="med"/>
-                      <a:tailEnd type="none" w="med" len="med"/>
-                    </a:lnT>
-                    <a:lnB w="12700" cap="flat" cmpd="sng" algn="ctr">
-                      <a:solidFill>
-                        <a:srgbClr val="D5DBE3"/>
-                      </a:solidFill>
-                      <a:prstDash val="solid"/>
-                      <a:round/>
-                      <a:headEnd type="none" w="med" len="med"/>
-                      <a:tailEnd type="none" w="med" len="med"/>
-                    </a:lnB>
-                  </a:tcPr>
-                </a:tc>
-                <a:tc>
-                  <a:txBody>
-                    <a:bodyPr/>
-                    <a:lstStyle/>
-                    <a:p>
-                      <a:pPr indent="0" marL="0">
-                        <a:buNone/>
-                      </a:pPr>
-                      <a:r>
-                        <a:rPr lang="en-US" sz="1400" dirty="0">
-                          <a:solidFill>
-                            <a:srgbClr val="1F2A37"/>
-                          </a:solidFill>
-                          <a:latin typeface="Microsoft YaHei" pitchFamily="34" charset="0"/>
-                          <a:ea typeface="Microsoft YaHei" pitchFamily="34" charset="-122"/>
-                          <a:cs typeface="Microsoft YaHei" pitchFamily="34" charset="-120"/>
-                        </a:rPr>
-                        <a:t>ss_sold_date_sk 关联 date_dim（销售日）</a:t>
-                      </a:r>
-                      <a:endParaRPr lang="en-US" sz="1400" dirty="0">
-                        <a:latin typeface="Microsoft YaHei" charset="0"/>
-                        <a:ea typeface="Microsoft YaHei" charset="0"/>
-                        <a:cs typeface="Microsoft YaHei" charset="0"/>
-                      </a:endParaRPr>
-                    </a:p>
-                  </a:txBody>
-                  <a:tcPr marL="91440" marR="91440" marT="54864" marB="54864" anchor="ctr">
-                    <a:lnL w="12700" cap="flat" cmpd="sng" algn="ctr">
-                      <a:solidFill>
-                        <a:srgbClr val="D5DBE3"/>
-                      </a:solidFill>
-                      <a:prstDash val="solid"/>
-                      <a:round/>
-                      <a:headEnd type="none" w="med" len="med"/>
-                      <a:tailEnd type="none" w="med" len="med"/>
-                    </a:lnL>
-                    <a:lnR w="12700" cap="flat" cmpd="sng" algn="ctr">
-                      <a:solidFill>
-                        <a:srgbClr val="D5DBE3"/>
-                      </a:solidFill>
-                      <a:prstDash val="solid"/>
-                      <a:round/>
-                      <a:headEnd type="none" w="med" len="med"/>
-                      <a:tailEnd type="none" w="med" len="med"/>
-                    </a:lnR>
-                    <a:lnT w="12700" cap="flat" cmpd="sng" algn="ctr">
-                      <a:solidFill>
-                        <a:srgbClr val="D5DBE3"/>
-                      </a:solidFill>
-                      <a:prstDash val="solid"/>
-                      <a:round/>
-                      <a:headEnd type="none" w="med" len="med"/>
-                      <a:tailEnd type="none" w="med" len="med"/>
-                    </a:lnT>
-                    <a:lnB w="12700" cap="flat" cmpd="sng" algn="ctr">
-                      <a:solidFill>
-                        <a:srgbClr val="D5DBE3"/>
-                      </a:solidFill>
-                      <a:prstDash val="solid"/>
-                      <a:round/>
-                      <a:headEnd type="none" w="med" len="med"/>
-                      <a:tailEnd type="none" w="med" len="med"/>
-                    </a:lnB>
-                  </a:tcPr>
-                </a:tc>
-              </a:tr>
-              <a:tr h="0">
-                <a:tc>
-                  <a:txBody>
-                    <a:bodyPr/>
-                    <a:lstStyle/>
-                    <a:p>
-                      <a:pPr indent="0" marL="0">
-                        <a:buNone/>
-                      </a:pPr>
-                      <a:r>
-                        <a:rPr lang="en-US" sz="1400" dirty="0">
-                          <a:solidFill>
-                            <a:srgbClr val="1F2A37"/>
-                          </a:solidFill>
-                          <a:latin typeface="Microsoft YaHei" pitchFamily="34" charset="0"/>
-                          <a:ea typeface="Microsoft YaHei" pitchFamily="34" charset="-122"/>
-                          <a:cs typeface="Microsoft YaHei" pitchFamily="34" charset="-120"/>
-                        </a:rPr>
-                        <a:t>校验规则</a:t>
-                      </a:r>
-                      <a:endParaRPr lang="en-US" sz="1400" dirty="0">
-                        <a:latin typeface="Microsoft YaHei" charset="0"/>
-                        <a:ea typeface="Microsoft YaHei" charset="0"/>
-                        <a:cs typeface="Microsoft YaHei" charset="0"/>
-                      </a:endParaRPr>
-                    </a:p>
-                  </a:txBody>
-                  <a:tcPr marL="91440" marR="91440" marT="54864" marB="54864" anchor="ctr">
-                    <a:lnL w="12700" cap="flat" cmpd="sng" algn="ctr">
-                      <a:solidFill>
-                        <a:srgbClr val="D5DBE3"/>
-                      </a:solidFill>
-                      <a:prstDash val="solid"/>
-                      <a:round/>
-                      <a:headEnd type="none" w="med" len="med"/>
-                      <a:tailEnd type="none" w="med" len="med"/>
-                    </a:lnL>
-                    <a:lnR w="12700" cap="flat" cmpd="sng" algn="ctr">
-                      <a:solidFill>
-                        <a:srgbClr val="D5DBE3"/>
-                      </a:solidFill>
-                      <a:prstDash val="solid"/>
-                      <a:round/>
-                      <a:headEnd type="none" w="med" len="med"/>
-                      <a:tailEnd type="none" w="med" len="med"/>
-                    </a:lnR>
-                    <a:lnT w="12700" cap="flat" cmpd="sng" algn="ctr">
-                      <a:solidFill>
-                        <a:srgbClr val="D5DBE3"/>
-                      </a:solidFill>
-                      <a:prstDash val="solid"/>
-                      <a:round/>
-                      <a:headEnd type="none" w="med" len="med"/>
-                      <a:tailEnd type="none" w="med" len="med"/>
-                    </a:lnT>
-                    <a:lnB w="12700" cap="flat" cmpd="sng" algn="ctr">
-                      <a:solidFill>
-                        <a:srgbClr val="D5DBE3"/>
-                      </a:solidFill>
-                      <a:prstDash val="solid"/>
-                      <a:round/>
-                      <a:headEnd type="none" w="med" len="med"/>
-                      <a:tailEnd type="none" w="med" len="med"/>
-                    </a:lnB>
-                  </a:tcPr>
-                </a:tc>
-                <a:tc>
-                  <a:txBody>
-                    <a:bodyPr/>
-                    <a:lstStyle/>
-                    <a:p>
-                      <a:pPr indent="0" marL="0">
-                        <a:buNone/>
-                      </a:pPr>
-                      <a:r>
-                        <a:rPr lang="en-US" sz="1400" dirty="0">
-                          <a:solidFill>
-                            <a:srgbClr val="1F2A37"/>
-                          </a:solidFill>
-                          <a:latin typeface="Microsoft YaHei" pitchFamily="34" charset="0"/>
-                          <a:ea typeface="Microsoft YaHei" pitchFamily="34" charset="-122"/>
-                          <a:cs typeface="Microsoft YaHei" pitchFamily="34" charset="-120"/>
-                        </a:rPr>
-                        <a:t>每笔销售一行；日期键唯一；丢行率不超标（学习时 1.03%）</a:t>
-                      </a:r>
-                      <a:endParaRPr lang="en-US" sz="1400" dirty="0">
-                        <a:latin typeface="Microsoft YaHei" charset="0"/>
-                        <a:ea typeface="Microsoft YaHei" charset="0"/>
-                        <a:cs typeface="Microsoft YaHei" charset="0"/>
-                      </a:endParaRPr>
-                    </a:p>
-                  </a:txBody>
-                  <a:tcPr marL="91440" marR="91440" marT="54864" marB="54864" anchor="ctr">
-                    <a:lnL w="12700" cap="flat" cmpd="sng" algn="ctr">
-                      <a:solidFill>
-                        <a:srgbClr val="D5DBE3"/>
-                      </a:solidFill>
-                      <a:prstDash val="solid"/>
-                      <a:round/>
-                      <a:headEnd type="none" w="med" len="med"/>
-                      <a:tailEnd type="none" w="med" len="med"/>
-                    </a:lnL>
-                    <a:lnR w="12700" cap="flat" cmpd="sng" algn="ctr">
-                      <a:solidFill>
-                        <a:srgbClr val="D5DBE3"/>
-                      </a:solidFill>
-                      <a:prstDash val="solid"/>
-                      <a:round/>
-                      <a:headEnd type="none" w="med" len="med"/>
-                      <a:tailEnd type="none" w="med" len="med"/>
-                    </a:lnR>
-                    <a:lnT w="12700" cap="flat" cmpd="sng" algn="ctr">
-                      <a:solidFill>
-                        <a:srgbClr val="D5DBE3"/>
-                      </a:solidFill>
-                      <a:prstDash val="solid"/>
-                      <a:round/>
-                      <a:headEnd type="none" w="med" len="med"/>
-                      <a:tailEnd type="none" w="med" len="med"/>
-                    </a:lnT>
-                    <a:lnB w="12700" cap="flat" cmpd="sng" algn="ctr">
-                      <a:solidFill>
-                        <a:srgbClr val="D5DBE3"/>
-                      </a:solidFill>
-                      <a:prstDash val="solid"/>
-                      <a:round/>
-                      <a:headEnd type="none" w="med" len="med"/>
-                      <a:tailEnd type="none" w="med" len="med"/>
-                    </a:lnB>
-                  </a:tcPr>
-                </a:tc>
-              </a:tr>
-              <a:tr h="0">
-                <a:tc>
-                  <a:txBody>
-                    <a:bodyPr/>
-                    <a:lstStyle/>
-                    <a:p>
-                      <a:pPr indent="0" marL="0">
-                        <a:buNone/>
-                      </a:pPr>
-                      <a:r>
-                        <a:rPr lang="en-US" sz="1400" dirty="0">
-                          <a:solidFill>
-                            <a:srgbClr val="1F2A37"/>
-                          </a:solidFill>
-                          <a:latin typeface="Microsoft YaHei" pitchFamily="34" charset="0"/>
-                          <a:ea typeface="Microsoft YaHei" pitchFamily="34" charset="-122"/>
-                          <a:cs typeface="Microsoft YaHei" pitchFamily="34" charset="-120"/>
-                        </a:rPr>
-                        <a:t>证据</a:t>
-                      </a:r>
-                      <a:endParaRPr lang="en-US" sz="1400" dirty="0">
-                        <a:latin typeface="Microsoft YaHei" charset="0"/>
-                        <a:ea typeface="Microsoft YaHei" charset="0"/>
-                        <a:cs typeface="Microsoft YaHei" charset="0"/>
-                      </a:endParaRPr>
-                    </a:p>
-                  </a:txBody>
-                  <a:tcPr marL="91440" marR="91440" marT="54864" marB="54864" anchor="ctr">
-                    <a:lnL w="12700" cap="flat" cmpd="sng" algn="ctr">
-                      <a:solidFill>
-                        <a:srgbClr val="D5DBE3"/>
-                      </a:solidFill>
-                      <a:prstDash val="solid"/>
-                      <a:round/>
-                      <a:headEnd type="none" w="med" len="med"/>
-                      <a:tailEnd type="none" w="med" len="med"/>
-                    </a:lnL>
-                    <a:lnR w="12700" cap="flat" cmpd="sng" algn="ctr">
-                      <a:solidFill>
-                        <a:srgbClr val="D5DBE3"/>
-                      </a:solidFill>
-                      <a:prstDash val="solid"/>
-                      <a:round/>
-                      <a:headEnd type="none" w="med" len="med"/>
-                      <a:tailEnd type="none" w="med" len="med"/>
-                    </a:lnR>
-                    <a:lnT w="12700" cap="flat" cmpd="sng" algn="ctr">
-                      <a:solidFill>
-                        <a:srgbClr val="D5DBE3"/>
-                      </a:solidFill>
-                      <a:prstDash val="solid"/>
-                      <a:round/>
-                      <a:headEnd type="none" w="med" len="med"/>
-                      <a:tailEnd type="none" w="med" len="med"/>
-                    </a:lnT>
-                    <a:lnB w="12700" cap="flat" cmpd="sng" algn="ctr">
-                      <a:solidFill>
-                        <a:srgbClr val="D5DBE3"/>
-                      </a:solidFill>
-                      <a:prstDash val="solid"/>
-                      <a:round/>
-                      <a:headEnd type="none" w="med" len="med"/>
-                      <a:tailEnd type="none" w="med" len="med"/>
-                    </a:lnB>
-                  </a:tcPr>
-                </a:tc>
-                <a:tc>
-                  <a:txBody>
-                    <a:bodyPr/>
-                    <a:lstStyle/>
-                    <a:p>
-                      <a:pPr indent="0" marL="0">
-                        <a:buNone/>
-                      </a:pPr>
-                      <a:r>
-                        <a:rPr lang="en-US" sz="1400" dirty="0">
-                          <a:solidFill>
-                            <a:srgbClr val="1F2A37"/>
-                          </a:solidFill>
-                          <a:latin typeface="Microsoft YaHei" pitchFamily="34" charset="0"/>
-                          <a:ea typeface="Microsoft YaHei" pitchFamily="34" charset="-122"/>
-                          <a:cs typeface="Microsoft YaHei" pitchFamily="34" charset="-120"/>
-                        </a:rPr>
-                        <a:t>学习题、学习时的 SQL 和答案、当时的数据版本</a:t>
-                      </a:r>
-                      <a:endParaRPr lang="en-US" sz="1400" dirty="0">
-                        <a:latin typeface="Microsoft YaHei" charset="0"/>
-                        <a:ea typeface="Microsoft YaHei" charset="0"/>
-                        <a:cs typeface="Microsoft YaHei" charset="0"/>
-                      </a:endParaRPr>
-                    </a:p>
-                  </a:txBody>
-                  <a:tcPr marL="91440" marR="91440" marT="54864" marB="54864" anchor="ctr">
-                    <a:lnL w="12700" cap="flat" cmpd="sng" algn="ctr">
-                      <a:solidFill>
-                        <a:srgbClr val="D5DBE3"/>
-                      </a:solidFill>
-                      <a:prstDash val="solid"/>
-                      <a:round/>
-                      <a:headEnd type="none" w="med" len="med"/>
-                      <a:tailEnd type="none" w="med" len="med"/>
-                    </a:lnL>
-                    <a:lnR w="12700" cap="flat" cmpd="sng" algn="ctr">
-                      <a:solidFill>
-                        <a:srgbClr val="D5DBE3"/>
-                      </a:solidFill>
-                      <a:prstDash val="solid"/>
-                      <a:round/>
-                      <a:headEnd type="none" w="med" len="med"/>
-                      <a:tailEnd type="none" w="med" len="med"/>
-                    </a:lnR>
-                    <a:lnT w="12700" cap="flat" cmpd="sng" algn="ctr">
-                      <a:solidFill>
-                        <a:srgbClr val="D5DBE3"/>
-                      </a:solidFill>
-                      <a:prstDash val="solid"/>
-                      <a:round/>
-                      <a:headEnd type="none" w="med" len="med"/>
-                      <a:tailEnd type="none" w="med" len="med"/>
-                    </a:lnT>
-                    <a:lnB w="12700" cap="flat" cmpd="sng" algn="ctr">
-                      <a:solidFill>
-                        <a:srgbClr val="D5DBE3"/>
-                      </a:solidFill>
-                      <a:prstDash val="solid"/>
-                      <a:round/>
-                      <a:headEnd type="none" w="med" len="med"/>
-                      <a:tailEnd type="none" w="med" len="med"/>
-                    </a:lnB>
-                  </a:tcPr>
-                </a:tc>
-              </a:tr>
-            </a:tbl>
-          </a:graphicData>
-        </a:graphic>
-      </p:graphicFrame>
-      <p:sp>
-        <p:nvSpPr>
-          <p:cNvPr id="12" name="Text 9"/>
-          <p:cNvSpPr txBox="1"/>
-          <p:nvPr/>
-        </p:nvSpPr>
-        <p:spPr>
-          <a:xfrm>
-            <a:off x="548640" y="6263640"/>
-            <a:ext cx="10362895" cy="365760"/>
-          </a:xfrm>
-          <a:prstGeom prst="rect">
-            <a:avLst/>
-          </a:prstGeom>
-          <a:noFill/>
-          <a:ln/>
-        </p:spPr>
-        <p:txBody>
-          <a:bodyPr wrap="square" lIns="0" tIns="0" rIns="0" bIns="0" rtlCol="0" anchor="b"/>
-          <a:lstStyle/>
-          <a:p>
-            <a:pPr indent="0" marL="0">
-              <a:buNone/>
-            </a:pPr>
-            <a:r>
-              <a:rPr lang="en-US" sz="1100" dirty="0">
-                <a:solidFill>
-                  <a:srgbClr val="5B6573"/>
-                </a:solidFill>
-                <a:latin typeface="Microsoft YaHei" pitchFamily="34" charset="0"/>
-                <a:ea typeface="Microsoft YaHei" pitchFamily="34" charset="-122"/>
-                <a:cs typeface="Microsoft YaHei" pitchFamily="34" charset="-120"/>
-              </a:rPr>
-              <a:t>记录：noctis results/scen-20261002/dsv41flash-r1-g3fix--snap（端到端实验第 1 次 MAVRA 运行）。数据为仿 TPC-DS 的合成零售数据（100 万行门店销售），题目中的年份略去。</a:t>
-            </a:r>
-            <a:endParaRPr lang="en-US" sz="1100" dirty="0"/>
-          </a:p>
-        </p:txBody>
-      </p:sp>
-      <p:sp>
-        <p:nvSpPr>
-          <p:cNvPr id="25" name="Slide Number Placeholder 0"/>
-          <p:cNvSpPr>
-            <a:spLocks noGrp="1"/>
-          </p:cNvSpPr>
-          <p:nvPr>
-            <p:ph type="sldNum" sz="quarter" idx="4294967295"/>
-          </p:nvPr>
-        </p:nvSpPr>
-        <p:spPr>
-          <a:xfrm>
-            <a:off x="11185855" y="6446520"/>
-            <a:ext cx="457200" cy="274320"/>
-          </a:xfrm>
-          <a:prstGeom prst="rect">
-            <a:avLst/>
-          </a:prstGeom>
-          <a:extLst>
-            <a:ext uri="{C572A759-6A51-4108-AA02-DFA0A04FC94B}">
-              <ma14:wrappingTextBoxFlag xmlns:ma14="http://schemas.microsoft.com/office/mac/drawingml/2011/main" val="0"/>
-            </a:ext>
-          </a:extLst>
-        </p:spPr>
-        <p:txBody>
-          <a:bodyPr/>
-          <a:lstStyle>
-            <a:lvl1pPr>
-              <a:defRPr sz="1000">
-                <a:solidFill>
-                  <a:srgbClr val="5B6573"/>
-                </a:solidFill>
-                <a:latin typeface="Microsoft YaHei"/>
-                <a:ea typeface="Microsoft YaHei"/>
-                <a:cs typeface="Microsoft YaHei"/>
-              </a:defRPr>
-            </a:lvl1pPr>
-          </a:lstStyle>
-          <a:p>
-            <a:pPr algn="r"/>
-            <a:fld id="{F7021451-1387-4CA6-816F-3879F97B5CBC}" type="slidenum">
-              <a:rPr b="0" lang="en-US"/>
-              <a:t>6</a:t>
-            </a:fld>
-            <a:endParaRPr lang="en-US"/>
-          </a:p>
-        </p:txBody>
-      </p:sp>
-    </p:spTree>
-  </p:cSld>
-  <p:clrMapOvr>
-    <a:masterClrMapping/>
-  </p:clrMapOvr>
-</p:sld>
-</file>
-
-<file path=ppt/slides/slide7.xml><?xml version="1.0" encoding="utf-8"?>
-<p:sld xmlns:a="http://schemas.openxmlformats.org/drawingml/2006/main" xmlns:r="http://schemas.openxmlformats.org/officeDocument/2006/relationships" xmlns:p="http://schemas.openxmlformats.org/presentationml/2006/main">
-  <p:cSld name="Slide 7">
-    <p:spTree>
-      <p:nvGrpSpPr>
-        <p:cNvPr id="1" name=""/>
-        <p:cNvGrpSpPr/>
-        <p:nvPr/>
-      </p:nvGrpSpPr>
-      <p:grpSpPr>
-        <a:xfrm>
-          <a:off x="0" y="0"/>
-          <a:ext cx="0" cy="0"/>
-          <a:chOff x="0" y="0"/>
-          <a:chExt cx="0" cy="0"/>
-        </a:xfrm>
-      </p:grpSpPr>
-      <p:sp>
-        <p:nvSpPr>
-          <p:cNvPr id="2" name="Text 0"/>
-          <p:cNvSpPr/>
-          <p:nvPr>
-            <p:ph idx="100" type="title" hasCustomPrompt="1"/>
-          </p:nvPr>
-        </p:nvSpPr>
-        <p:spPr>
-          <a:xfrm>
-            <a:off x="548640" y="274320"/>
-            <a:ext cx="11094415" cy="685800"/>
-          </a:xfrm>
-          <a:prstGeom prst="rect">
-            <a:avLst/>
-          </a:prstGeom>
-          <a:noFill/>
-          <a:ln/>
-        </p:spPr>
-        <p:txBody>
-          <a:bodyPr wrap="square" lIns="0" tIns="0" rIns="0" bIns="0" rtlCol="0" anchor="ctr"/>
-          <a:lstStyle/>
-          <a:p>
-            <a:pPr algn="l" indent="0" marL="0">
-              <a:buNone/>
-            </a:pPr>
-            <a:r>
-              <a:rPr lang="en-US" sz="3000" b="1" dirty="0">
-                <a:solidFill>
-                  <a:srgbClr val="1F2A37"/>
-                </a:solidFill>
-                <a:latin typeface="Microsoft YaHei" pitchFamily="34" charset="0"/>
-                <a:ea typeface="Microsoft YaHei" pitchFamily="34" charset="-122"/>
-                <a:cs typeface="Microsoft YaHei" pitchFamily="34" charset="-120"/>
-              </a:rPr>
-              <a:t>真实例子②：三种日常写入，同一个问题“9 月门店营业额”</a:t>
+              <a:t>回到例子：有了 MAVRA 之后</a:t>
             </a:r>
             <a:endParaRPr lang="en-US" sz="3000" dirty="0"/>
           </a:p>
@@ -5521,7 +8136,7 @@
       </p:sp>
       <p:graphicFrame>
         <p:nvGraphicFramePr>
-          <p:cNvPr id="8" name="Table 0"/>
+          <p:cNvPr id="9" name="Table 0"/>
           <p:cNvGraphicFramePr>
             <a:graphicFrameLocks noGrp="1"/>
           </p:cNvGraphicFramePr>
@@ -7076,7 +9691,7 @@
                 <a:ea typeface="Microsoft YaHei" pitchFamily="34" charset="-122"/>
                 <a:cs typeface="Microsoft YaHei" pitchFamily="34" charset="-120"/>
               </a:rPr>
-              <a:t>三种写入都是普通的 INSERT / UPDATE，表结构都没变。</a:t>
+              <a:t>同样三种写入，MAVRA 都发现了：</a:t>
             </a:r>
             <a:endParaRPr lang="en-US" sz="1600" dirty="0"/>
           </a:p>
@@ -7093,7 +9708,7 @@
                 <a:ea typeface="Microsoft YaHei" pitchFamily="34" charset="-122"/>
                 <a:cs typeface="Microsoft YaHei" pitchFamily="34" charset="-120"/>
               </a:rPr>
-              <a:t>所以“只在表结构变化时让定义失效”的做法一次也发现不了，数据更正和重复装载时 3 次运行全部答错。</a:t>
+              <a:t>规则仍成立就继续用；能唯一修好就发布新版本；修不了就停用并提醒，不让错误答案悄悄出去。</a:t>
             </a:r>
             <a:endParaRPr lang="en-US" sz="1600" dirty="0"/>
           </a:p>
@@ -7133,1651 +9748,6 @@
                 <a:cs typeface="Microsoft YaHei" pitchFamily="34" charset="-120"/>
               </a:rPr>
               <a:t>对照组：只在表结构变化时才让定义失效，3 次独立运行答案相同。MAVRA 栏为第 1 次运行；追加和更正 3 次运行结果相同，重复装载见表。数据为仿 TPC-DS 的合成零售数据（100 万行门店销售），题目中的年份略去。</a:t>
-            </a:r>
-            <a:endParaRPr lang="en-US" sz="1100" dirty="0"/>
-          </a:p>
-        </p:txBody>
-      </p:sp>
-      <p:sp>
-        <p:nvSpPr>
-          <p:cNvPr id="25" name="Slide Number Placeholder 0"/>
-          <p:cNvSpPr>
-            <a:spLocks noGrp="1"/>
-          </p:cNvSpPr>
-          <p:nvPr>
-            <p:ph type="sldNum" sz="quarter" idx="4294967295"/>
-          </p:nvPr>
-        </p:nvSpPr>
-        <p:spPr>
-          <a:xfrm>
-            <a:off x="11185855" y="6446520"/>
-            <a:ext cx="457200" cy="274320"/>
-          </a:xfrm>
-          <a:prstGeom prst="rect">
-            <a:avLst/>
-          </a:prstGeom>
-          <a:extLst>
-            <a:ext uri="{C572A759-6A51-4108-AA02-DFA0A04FC94B}">
-              <ma14:wrappingTextBoxFlag xmlns:ma14="http://schemas.microsoft.com/office/mac/drawingml/2011/main" val="0"/>
-            </a:ext>
-          </a:extLst>
-        </p:spPr>
-        <p:txBody>
-          <a:bodyPr/>
-          <a:lstStyle>
-            <a:lvl1pPr>
-              <a:defRPr sz="1000">
-                <a:solidFill>
-                  <a:srgbClr val="5B6573"/>
-                </a:solidFill>
-                <a:latin typeface="Microsoft YaHei"/>
-                <a:ea typeface="Microsoft YaHei"/>
-                <a:cs typeface="Microsoft YaHei"/>
-              </a:defRPr>
-            </a:lvl1pPr>
-          </a:lstStyle>
-          <a:p>
-            <a:pPr algn="r"/>
-            <a:fld id="{F7021451-1387-4CA6-816F-3879F97B5CBC}" type="slidenum">
-              <a:rPr b="0" lang="en-US"/>
-              <a:t>7</a:t>
-            </a:fld>
-            <a:endParaRPr lang="en-US"/>
-          </a:p>
-        </p:txBody>
-      </p:sp>
-    </p:spTree>
-  </p:cSld>
-  <p:clrMapOvr>
-    <a:masterClrMapping/>
-  </p:clrMapOvr>
-</p:sld>
-</file>
-
-<file path=ppt/slides/slide8.xml><?xml version="1.0" encoding="utf-8"?>
-<p:sld xmlns:a="http://schemas.openxmlformats.org/drawingml/2006/main" xmlns:r="http://schemas.openxmlformats.org/officeDocument/2006/relationships" xmlns:p="http://schemas.openxmlformats.org/presentationml/2006/main">
-  <p:cSld name="Slide 8">
-    <p:spTree>
-      <p:nvGrpSpPr>
-        <p:cNvPr id="1" name=""/>
-        <p:cNvGrpSpPr/>
-        <p:nvPr/>
-      </p:nvGrpSpPr>
-      <p:grpSpPr>
-        <a:xfrm>
-          <a:off x="0" y="0"/>
-          <a:ext cx="0" cy="0"/>
-          <a:chOff x="0" y="0"/>
-          <a:chExt cx="0" cy="0"/>
-        </a:xfrm>
-      </p:grpSpPr>
-      <p:sp>
-        <p:nvSpPr>
-          <p:cNvPr id="2" name="Text 0"/>
-          <p:cNvSpPr/>
-          <p:nvPr>
-            <p:ph idx="100" type="title" hasCustomPrompt="1"/>
-          </p:nvPr>
-        </p:nvSpPr>
-        <p:spPr>
-          <a:xfrm>
-            <a:off x="548640" y="274320"/>
-            <a:ext cx="11094415" cy="685800"/>
-          </a:xfrm>
-          <a:prstGeom prst="rect">
-            <a:avLst/>
-          </a:prstGeom>
-          <a:noFill/>
-          <a:ln/>
-        </p:spPr>
-        <p:txBody>
-          <a:bodyPr wrap="square" lIns="0" tIns="0" rIns="0" bIns="0" rtlCol="0" anchor="ctr"/>
-          <a:lstStyle/>
-          <a:p>
-            <a:pPr algn="l" indent="0" marL="0">
-              <a:buNone/>
-            </a:pPr>
-            <a:r>
-              <a:rPr lang="en-US" sz="3000" b="1" dirty="0">
-                <a:solidFill>
-                  <a:srgbClr val="1F2A37"/>
-                </a:solidFill>
-                <a:latin typeface="Microsoft YaHei" pitchFamily="34" charset="0"/>
-                <a:ea typeface="Microsoft YaHei" pitchFamily="34" charset="-122"/>
-                <a:cs typeface="Microsoft YaHei" pitchFamily="34" charset="-120"/>
-              </a:rPr>
-              <a:t>真实例子③：数据更正之后，MAVRA 依次做了什么</a:t>
-            </a:r>
-            <a:endParaRPr lang="en-US" sz="3000" dirty="0"/>
-          </a:p>
-        </p:txBody>
-      </p:sp>
-      <p:graphicFrame>
-        <p:nvGraphicFramePr>
-          <p:cNvPr id="9" name="Table 0"/>
-          <p:cNvGraphicFramePr>
-            <a:graphicFrameLocks noGrp="1"/>
-          </p:cNvGraphicFramePr>
-          <p:nvPr>
-            <p:extLst>
-              <p:ext uri="{D42A27DB-BD31-4B8C-83A1-F6EECF244321}">
-                <p14:modId xmlns:p14="http://schemas.microsoft.com/office/powerpoint/2010/main" val="1579011935"/>
-              </p:ext>
-            </p:extLst>
-          </p:nvPr>
-        </p:nvGraphicFramePr>
-        <p:xfrm>
-          <a:off x="548640" y="1188720"/>
-          <a:ext cx="11094415" cy="914400"/>
-        </p:xfrm>
-        <a:graphic>
-          <a:graphicData uri="http://schemas.openxmlformats.org/drawingml/2006/table">
-            <a:tbl>
-              <a:tblPr/>
-              <a:tblGrid>
-                <a:gridCol w="411480"/>
-                <a:gridCol w="4937760"/>
-                <a:gridCol w="5742432"/>
-              </a:tblGrid>
-              <a:tr h="0">
-                <a:tc>
-                  <a:txBody>
-                    <a:bodyPr/>
-                    <a:lstStyle/>
-                    <a:p>
-                      <a:pPr indent="0" marL="0">
-                        <a:buNone/>
-                      </a:pPr>
-                      <a:endParaRPr lang="en-US" sz="1400" dirty="0">
-                        <a:latin typeface="Microsoft YaHei" charset="0"/>
-                        <a:ea typeface="Microsoft YaHei" charset="0"/>
-                        <a:cs typeface="Microsoft YaHei" charset="0"/>
-                      </a:endParaRPr>
-                    </a:p>
-                  </a:txBody>
-                  <a:tcPr marL="91440" marR="91440" marT="54864" marB="54864" anchor="ctr">
-                    <a:lnL w="12700" cap="flat" cmpd="sng" algn="ctr">
-                      <a:solidFill>
-                        <a:srgbClr val="D5DBE3"/>
-                      </a:solidFill>
-                      <a:prstDash val="solid"/>
-                      <a:round/>
-                      <a:headEnd type="none" w="med" len="med"/>
-                      <a:tailEnd type="none" w="med" len="med"/>
-                    </a:lnL>
-                    <a:lnR w="12700" cap="flat" cmpd="sng" algn="ctr">
-                      <a:solidFill>
-                        <a:srgbClr val="D5DBE3"/>
-                      </a:solidFill>
-                      <a:prstDash val="solid"/>
-                      <a:round/>
-                      <a:headEnd type="none" w="med" len="med"/>
-                      <a:tailEnd type="none" w="med" len="med"/>
-                    </a:lnR>
-                    <a:lnT w="12700" cap="flat" cmpd="sng" algn="ctr">
-                      <a:solidFill>
-                        <a:srgbClr val="D5DBE3"/>
-                      </a:solidFill>
-                      <a:prstDash val="solid"/>
-                      <a:round/>
-                      <a:headEnd type="none" w="med" len="med"/>
-                      <a:tailEnd type="none" w="med" len="med"/>
-                    </a:lnT>
-                    <a:lnB w="12700" cap="flat" cmpd="sng" algn="ctr">
-                      <a:solidFill>
-                        <a:srgbClr val="D5DBE3"/>
-                      </a:solidFill>
-                      <a:prstDash val="solid"/>
-                      <a:round/>
-                      <a:headEnd type="none" w="med" len="med"/>
-                      <a:tailEnd type="none" w="med" len="med"/>
-                    </a:lnB>
-                    <a:solidFill>
-                      <a:srgbClr val="F1F3F6"/>
-                    </a:solidFill>
-                  </a:tcPr>
-                </a:tc>
-                <a:tc>
-                  <a:txBody>
-                    <a:bodyPr/>
-                    <a:lstStyle/>
-                    <a:p>
-                      <a:pPr indent="0" marL="0">
-                        <a:buNone/>
-                      </a:pPr>
-                      <a:r>
-                        <a:rPr lang="en-US" sz="1400" b="1" dirty="0">
-                          <a:solidFill>
-                            <a:srgbClr val="1F2A37"/>
-                          </a:solidFill>
-                          <a:latin typeface="Microsoft YaHei" pitchFamily="34" charset="0"/>
-                          <a:ea typeface="Microsoft YaHei" pitchFamily="34" charset="-122"/>
-                          <a:cs typeface="Microsoft YaHei" pitchFamily="34" charset="-120"/>
-                        </a:rPr>
-                        <a:t>发生了什么</a:t>
-                      </a:r>
-                      <a:endParaRPr lang="en-US" sz="1400" dirty="0">
-                        <a:latin typeface="Microsoft YaHei" charset="0"/>
-                        <a:ea typeface="Microsoft YaHei" charset="0"/>
-                        <a:cs typeface="Microsoft YaHei" charset="0"/>
-                      </a:endParaRPr>
-                    </a:p>
-                  </a:txBody>
-                  <a:tcPr marL="91440" marR="91440" marT="54864" marB="54864" anchor="ctr">
-                    <a:lnL w="12700" cap="flat" cmpd="sng" algn="ctr">
-                      <a:solidFill>
-                        <a:srgbClr val="D5DBE3"/>
-                      </a:solidFill>
-                      <a:prstDash val="solid"/>
-                      <a:round/>
-                      <a:headEnd type="none" w="med" len="med"/>
-                      <a:tailEnd type="none" w="med" len="med"/>
-                    </a:lnL>
-                    <a:lnR w="12700" cap="flat" cmpd="sng" algn="ctr">
-                      <a:solidFill>
-                        <a:srgbClr val="D5DBE3"/>
-                      </a:solidFill>
-                      <a:prstDash val="solid"/>
-                      <a:round/>
-                      <a:headEnd type="none" w="med" len="med"/>
-                      <a:tailEnd type="none" w="med" len="med"/>
-                    </a:lnR>
-                    <a:lnT w="12700" cap="flat" cmpd="sng" algn="ctr">
-                      <a:solidFill>
-                        <a:srgbClr val="D5DBE3"/>
-                      </a:solidFill>
-                      <a:prstDash val="solid"/>
-                      <a:round/>
-                      <a:headEnd type="none" w="med" len="med"/>
-                      <a:tailEnd type="none" w="med" len="med"/>
-                    </a:lnT>
-                    <a:lnB w="12700" cap="flat" cmpd="sng" algn="ctr">
-                      <a:solidFill>
-                        <a:srgbClr val="D5DBE3"/>
-                      </a:solidFill>
-                      <a:prstDash val="solid"/>
-                      <a:round/>
-                      <a:headEnd type="none" w="med" len="med"/>
-                      <a:tailEnd type="none" w="med" len="med"/>
-                    </a:lnB>
-                    <a:solidFill>
-                      <a:srgbClr val="F1F3F6"/>
-                    </a:solidFill>
-                  </a:tcPr>
-                </a:tc>
-                <a:tc>
-                  <a:txBody>
-                    <a:bodyPr/>
-                    <a:lstStyle/>
-                    <a:p>
-                      <a:pPr indent="0" marL="0">
-                        <a:buNone/>
-                      </a:pPr>
-                      <a:r>
-                        <a:rPr lang="en-US" sz="1400" b="1" dirty="0">
-                          <a:solidFill>
-                            <a:srgbClr val="1F2A37"/>
-                          </a:solidFill>
-                          <a:latin typeface="Microsoft YaHei" pitchFamily="34" charset="0"/>
-                          <a:ea typeface="Microsoft YaHei" pitchFamily="34" charset="-122"/>
-                          <a:cs typeface="Microsoft YaHei" pitchFamily="34" charset="-120"/>
-                        </a:rPr>
-                        <a:t>系统记录</a:t>
-                      </a:r>
-                      <a:endParaRPr lang="en-US" sz="1400" dirty="0">
-                        <a:latin typeface="Microsoft YaHei" charset="0"/>
-                        <a:ea typeface="Microsoft YaHei" charset="0"/>
-                        <a:cs typeface="Microsoft YaHei" charset="0"/>
-                      </a:endParaRPr>
-                    </a:p>
-                  </a:txBody>
-                  <a:tcPr marL="91440" marR="91440" marT="54864" marB="54864" anchor="ctr">
-                    <a:lnL w="12700" cap="flat" cmpd="sng" algn="ctr">
-                      <a:solidFill>
-                        <a:srgbClr val="D5DBE3"/>
-                      </a:solidFill>
-                      <a:prstDash val="solid"/>
-                      <a:round/>
-                      <a:headEnd type="none" w="med" len="med"/>
-                      <a:tailEnd type="none" w="med" len="med"/>
-                    </a:lnL>
-                    <a:lnR w="12700" cap="flat" cmpd="sng" algn="ctr">
-                      <a:solidFill>
-                        <a:srgbClr val="D5DBE3"/>
-                      </a:solidFill>
-                      <a:prstDash val="solid"/>
-                      <a:round/>
-                      <a:headEnd type="none" w="med" len="med"/>
-                      <a:tailEnd type="none" w="med" len="med"/>
-                    </a:lnR>
-                    <a:lnT w="12700" cap="flat" cmpd="sng" algn="ctr">
-                      <a:solidFill>
-                        <a:srgbClr val="D5DBE3"/>
-                      </a:solidFill>
-                      <a:prstDash val="solid"/>
-                      <a:round/>
-                      <a:headEnd type="none" w="med" len="med"/>
-                      <a:tailEnd type="none" w="med" len="med"/>
-                    </a:lnT>
-                    <a:lnB w="12700" cap="flat" cmpd="sng" algn="ctr">
-                      <a:solidFill>
-                        <a:srgbClr val="D5DBE3"/>
-                      </a:solidFill>
-                      <a:prstDash val="solid"/>
-                      <a:round/>
-                      <a:headEnd type="none" w="med" len="med"/>
-                      <a:tailEnd type="none" w="med" len="med"/>
-                    </a:lnB>
-                    <a:solidFill>
-                      <a:srgbClr val="F1F3F6"/>
-                    </a:solidFill>
-                  </a:tcPr>
-                </a:tc>
-              </a:tr>
-              <a:tr h="0">
-                <a:tc>
-                  <a:txBody>
-                    <a:bodyPr/>
-                    <a:lstStyle/>
-                    <a:p>
-                      <a:pPr indent="0" marL="0">
-                        <a:buNone/>
-                      </a:pPr>
-                      <a:r>
-                        <a:rPr lang="en-US" sz="1400" dirty="0">
-                          <a:solidFill>
-                            <a:srgbClr val="1F2A37"/>
-                          </a:solidFill>
-                          <a:latin typeface="Microsoft YaHei" pitchFamily="34" charset="0"/>
-                          <a:ea typeface="Microsoft YaHei" pitchFamily="34" charset="-122"/>
-                          <a:cs typeface="Microsoft YaHei" pitchFamily="34" charset="-120"/>
-                        </a:rPr>
-                        <a:t>1</a:t>
-                      </a:r>
-                      <a:endParaRPr lang="en-US" sz="1400" dirty="0">
-                        <a:latin typeface="Microsoft YaHei" charset="0"/>
-                        <a:ea typeface="Microsoft YaHei" charset="0"/>
-                        <a:cs typeface="Microsoft YaHei" charset="0"/>
-                      </a:endParaRPr>
-                    </a:p>
-                  </a:txBody>
-                  <a:tcPr marL="91440" marR="91440" marT="54864" marB="54864" anchor="ctr">
-                    <a:lnL w="12700" cap="flat" cmpd="sng" algn="ctr">
-                      <a:solidFill>
-                        <a:srgbClr val="D5DBE3"/>
-                      </a:solidFill>
-                      <a:prstDash val="solid"/>
-                      <a:round/>
-                      <a:headEnd type="none" w="med" len="med"/>
-                      <a:tailEnd type="none" w="med" len="med"/>
-                    </a:lnL>
-                    <a:lnR w="12700" cap="flat" cmpd="sng" algn="ctr">
-                      <a:solidFill>
-                        <a:srgbClr val="D5DBE3"/>
-                      </a:solidFill>
-                      <a:prstDash val="solid"/>
-                      <a:round/>
-                      <a:headEnd type="none" w="med" len="med"/>
-                      <a:tailEnd type="none" w="med" len="med"/>
-                    </a:lnR>
-                    <a:lnT w="12700" cap="flat" cmpd="sng" algn="ctr">
-                      <a:solidFill>
-                        <a:srgbClr val="D5DBE3"/>
-                      </a:solidFill>
-                      <a:prstDash val="solid"/>
-                      <a:round/>
-                      <a:headEnd type="none" w="med" len="med"/>
-                      <a:tailEnd type="none" w="med" len="med"/>
-                    </a:lnT>
-                    <a:lnB w="12700" cap="flat" cmpd="sng" algn="ctr">
-                      <a:solidFill>
-                        <a:srgbClr val="D5DBE3"/>
-                      </a:solidFill>
-                      <a:prstDash val="solid"/>
-                      <a:round/>
-                      <a:headEnd type="none" w="med" len="med"/>
-                      <a:tailEnd type="none" w="med" len="med"/>
-                    </a:lnB>
-                  </a:tcPr>
-                </a:tc>
-                <a:tc>
-                  <a:txBody>
-                    <a:bodyPr/>
-                    <a:lstStyle/>
-                    <a:p>
-                      <a:pPr indent="0" marL="0">
-                        <a:buNone/>
-                      </a:pPr>
-                      <a:r>
-                        <a:rPr lang="en-US" sz="1400" dirty="0">
-                          <a:solidFill>
-                            <a:srgbClr val="1F2A37"/>
-                          </a:solidFill>
-                          <a:latin typeface="Microsoft YaHei" pitchFamily="34" charset="0"/>
-                          <a:ea typeface="Microsoft YaHei" pitchFamily="34" charset="-122"/>
-                          <a:cs typeface="Microsoft YaHei" pitchFamily="34" charset="-120"/>
-                        </a:rPr>
-                        <a:t>第一个用到销售表的查询到来。先检查名称匹配到的“电子品类门店营业额”：销售表变了，重新校验“每笔销售一行”</a:t>
-                      </a:r>
-                      <a:endParaRPr lang="en-US" sz="1400" dirty="0">
-                        <a:latin typeface="Microsoft YaHei" charset="0"/>
-                        <a:ea typeface="Microsoft YaHei" charset="0"/>
-                        <a:cs typeface="Microsoft YaHei" charset="0"/>
-                      </a:endParaRPr>
-                    </a:p>
-                  </a:txBody>
-                  <a:tcPr marL="91440" marR="91440" marT="54864" marB="54864" anchor="ctr">
-                    <a:lnL w="12700" cap="flat" cmpd="sng" algn="ctr">
-                      <a:solidFill>
-                        <a:srgbClr val="D5DBE3"/>
-                      </a:solidFill>
-                      <a:prstDash val="solid"/>
-                      <a:round/>
-                      <a:headEnd type="none" w="med" len="med"/>
-                      <a:tailEnd type="none" w="med" len="med"/>
-                    </a:lnL>
-                    <a:lnR w="12700" cap="flat" cmpd="sng" algn="ctr">
-                      <a:solidFill>
-                        <a:srgbClr val="D5DBE3"/>
-                      </a:solidFill>
-                      <a:prstDash val="solid"/>
-                      <a:round/>
-                      <a:headEnd type="none" w="med" len="med"/>
-                      <a:tailEnd type="none" w="med" len="med"/>
-                    </a:lnR>
-                    <a:lnT w="12700" cap="flat" cmpd="sng" algn="ctr">
-                      <a:solidFill>
-                        <a:srgbClr val="D5DBE3"/>
-                      </a:solidFill>
-                      <a:prstDash val="solid"/>
-                      <a:round/>
-                      <a:headEnd type="none" w="med" len="med"/>
-                      <a:tailEnd type="none" w="med" len="med"/>
-                    </a:lnT>
-                    <a:lnB w="12700" cap="flat" cmpd="sng" algn="ctr">
-                      <a:solidFill>
-                        <a:srgbClr val="D5DBE3"/>
-                      </a:solidFill>
-                      <a:prstDash val="solid"/>
-                      <a:round/>
-                      <a:headEnd type="none" w="med" len="med"/>
-                      <a:tailEnd type="none" w="med" len="med"/>
-                    </a:lnB>
-                  </a:tcPr>
-                </a:tc>
-                <a:tc>
-                  <a:txBody>
-                    <a:bodyPr/>
-                    <a:lstStyle/>
-                    <a:p>
-                      <a:pPr indent="0" marL="0">
-                        <a:buNone/>
-                      </a:pPr>
-                      <a:r>
-                        <a:rPr lang="en-US" sz="1400" b="1" dirty="0">
-                          <a:solidFill>
-                            <a:srgbClr val="B5392A"/>
-                          </a:solidFill>
-                          <a:latin typeface="Microsoft YaHei" pitchFamily="34" charset="0"/>
-                          <a:ea typeface="Microsoft YaHei" pitchFamily="34" charset="-122"/>
-                          <a:cs typeface="Microsoft YaHei" pitchFamily="34" charset="-120"/>
-                        </a:rPr>
-                        <a:t>不成立：</a:t>
-                      </a:r>
-                      <a:pPr indent="0" marL="0">
-                        <a:buNone/>
-                      </a:pPr>
-                      <a:r>
-                        <a:rPr lang="en-US" sz="1400" dirty="0">
-                          <a:solidFill>
-                            <a:srgbClr val="1F2A37"/>
-                          </a:solidFill>
-                          <a:latin typeface="Microsoft YaHei" pitchFamily="34" charset="0"/>
-                          <a:ea typeface="Microsoft YaHei" pitchFamily="34" charset="-122"/>
-                          <a:cs typeface="Microsoft YaHei" pitchFamily="34" charset="-120"/>
-                        </a:rPr>
-                        <a:t>“1065915 行只有 1000000 个不同键（平均每键 1.07 行）”，用时 5.5 秒 → 停用 v1</a:t>
-                      </a:r>
-                      <a:endParaRPr lang="en-US" sz="1400" dirty="0">
-                        <a:latin typeface="Microsoft YaHei" charset="0"/>
-                        <a:ea typeface="Microsoft YaHei" charset="0"/>
-                        <a:cs typeface="Microsoft YaHei" charset="0"/>
-                      </a:endParaRPr>
-                    </a:p>
-                  </a:txBody>
-                  <a:tcPr marL="91440" marR="91440" marT="54864" marB="54864" anchor="ctr">
-                    <a:lnL w="12700" cap="flat" cmpd="sng" algn="ctr">
-                      <a:solidFill>
-                        <a:srgbClr val="D5DBE3"/>
-                      </a:solidFill>
-                      <a:prstDash val="solid"/>
-                      <a:round/>
-                      <a:headEnd type="none" w="med" len="med"/>
-                      <a:tailEnd type="none" w="med" len="med"/>
-                    </a:lnL>
-                    <a:lnR w="12700" cap="flat" cmpd="sng" algn="ctr">
-                      <a:solidFill>
-                        <a:srgbClr val="D5DBE3"/>
-                      </a:solidFill>
-                      <a:prstDash val="solid"/>
-                      <a:round/>
-                      <a:headEnd type="none" w="med" len="med"/>
-                      <a:tailEnd type="none" w="med" len="med"/>
-                    </a:lnR>
-                    <a:lnT w="12700" cap="flat" cmpd="sng" algn="ctr">
-                      <a:solidFill>
-                        <a:srgbClr val="D5DBE3"/>
-                      </a:solidFill>
-                      <a:prstDash val="solid"/>
-                      <a:round/>
-                      <a:headEnd type="none" w="med" len="med"/>
-                      <a:tailEnd type="none" w="med" len="med"/>
-                    </a:lnT>
-                    <a:lnB w="12700" cap="flat" cmpd="sng" algn="ctr">
-                      <a:solidFill>
-                        <a:srgbClr val="D5DBE3"/>
-                      </a:solidFill>
-                      <a:prstDash val="solid"/>
-                      <a:round/>
-                      <a:headEnd type="none" w="med" len="med"/>
-                      <a:tailEnd type="none" w="med" len="med"/>
-                    </a:lnB>
-                  </a:tcPr>
-                </a:tc>
-              </a:tr>
-              <a:tr h="0">
-                <a:tc>
-                  <a:txBody>
-                    <a:bodyPr/>
-                    <a:lstStyle/>
-                    <a:p>
-                      <a:pPr indent="0" marL="0">
-                        <a:buNone/>
-                      </a:pPr>
-                      <a:r>
-                        <a:rPr lang="en-US" sz="1400" dirty="0">
-                          <a:solidFill>
-                            <a:srgbClr val="1F2A37"/>
-                          </a:solidFill>
-                          <a:latin typeface="Microsoft YaHei" pitchFamily="34" charset="0"/>
-                          <a:ea typeface="Microsoft YaHei" pitchFamily="34" charset="-122"/>
-                          <a:cs typeface="Microsoft YaHei" pitchFamily="34" charset="-120"/>
-                        </a:rPr>
-                        <a:t>2</a:t>
-                      </a:r>
-                      <a:endParaRPr lang="en-US" sz="1400" dirty="0">
-                        <a:latin typeface="Microsoft YaHei" charset="0"/>
-                        <a:ea typeface="Microsoft YaHei" charset="0"/>
-                        <a:cs typeface="Microsoft YaHei" charset="0"/>
-                      </a:endParaRPr>
-                    </a:p>
-                  </a:txBody>
-                  <a:tcPr marL="91440" marR="91440" marT="54864" marB="54864" anchor="ctr">
-                    <a:lnL w="12700" cap="flat" cmpd="sng" algn="ctr">
-                      <a:solidFill>
-                        <a:srgbClr val="D5DBE3"/>
-                      </a:solidFill>
-                      <a:prstDash val="solid"/>
-                      <a:round/>
-                      <a:headEnd type="none" w="med" len="med"/>
-                      <a:tailEnd type="none" w="med" len="med"/>
-                    </a:lnL>
-                    <a:lnR w="12700" cap="flat" cmpd="sng" algn="ctr">
-                      <a:solidFill>
-                        <a:srgbClr val="D5DBE3"/>
-                      </a:solidFill>
-                      <a:prstDash val="solid"/>
-                      <a:round/>
-                      <a:headEnd type="none" w="med" len="med"/>
-                      <a:tailEnd type="none" w="med" len="med"/>
-                    </a:lnR>
-                    <a:lnT w="12700" cap="flat" cmpd="sng" algn="ctr">
-                      <a:solidFill>
-                        <a:srgbClr val="D5DBE3"/>
-                      </a:solidFill>
-                      <a:prstDash val="solid"/>
-                      <a:round/>
-                      <a:headEnd type="none" w="med" len="med"/>
-                      <a:tailEnd type="none" w="med" len="med"/>
-                    </a:lnT>
-                    <a:lnB w="12700" cap="flat" cmpd="sng" algn="ctr">
-                      <a:solidFill>
-                        <a:srgbClr val="D5DBE3"/>
-                      </a:solidFill>
-                      <a:prstDash val="solid"/>
-                      <a:round/>
-                      <a:headEnd type="none" w="med" len="med"/>
-                      <a:tailEnd type="none" w="med" len="med"/>
-                    </a:lnB>
-                  </a:tcPr>
-                </a:tc>
-                <a:tc>
-                  <a:txBody>
-                    <a:bodyPr/>
-                    <a:lstStyle/>
-                    <a:p>
-                      <a:pPr indent="0" marL="0">
-                        <a:buNone/>
-                      </a:pPr>
-                      <a:r>
-                        <a:rPr lang="en-US" sz="1400" dirty="0">
-                          <a:solidFill>
-                            <a:srgbClr val="1F2A37"/>
-                          </a:solidFill>
-                          <a:latin typeface="Microsoft YaHei" pitchFamily="34" charset="0"/>
-                          <a:ea typeface="Microsoft YaHei" pitchFamily="34" charset="-122"/>
-                          <a:cs typeface="Microsoft YaHei" pitchFamily="34" charset="-120"/>
-                        </a:rPr>
-                        <a:t>在取值少的列上逐个试过滤</a:t>
-                      </a:r>
-                      <a:endParaRPr lang="en-US" sz="1400" dirty="0">
-                        <a:latin typeface="Microsoft YaHei" charset="0"/>
-                        <a:ea typeface="Microsoft YaHei" charset="0"/>
-                        <a:cs typeface="Microsoft YaHei" charset="0"/>
-                      </a:endParaRPr>
-                    </a:p>
-                  </a:txBody>
-                  <a:tcPr marL="91440" marR="91440" marT="54864" marB="54864" anchor="ctr">
-                    <a:lnL w="12700" cap="flat" cmpd="sng" algn="ctr">
-                      <a:solidFill>
-                        <a:srgbClr val="D5DBE3"/>
-                      </a:solidFill>
-                      <a:prstDash val="solid"/>
-                      <a:round/>
-                      <a:headEnd type="none" w="med" len="med"/>
-                      <a:tailEnd type="none" w="med" len="med"/>
-                    </a:lnL>
-                    <a:lnR w="12700" cap="flat" cmpd="sng" algn="ctr">
-                      <a:solidFill>
-                        <a:srgbClr val="D5DBE3"/>
-                      </a:solidFill>
-                      <a:prstDash val="solid"/>
-                      <a:round/>
-                      <a:headEnd type="none" w="med" len="med"/>
-                      <a:tailEnd type="none" w="med" len="med"/>
-                    </a:lnR>
-                    <a:lnT w="12700" cap="flat" cmpd="sng" algn="ctr">
-                      <a:solidFill>
-                        <a:srgbClr val="D5DBE3"/>
-                      </a:solidFill>
-                      <a:prstDash val="solid"/>
-                      <a:round/>
-                      <a:headEnd type="none" w="med" len="med"/>
-                      <a:tailEnd type="none" w="med" len="med"/>
-                    </a:lnT>
-                    <a:lnB w="12700" cap="flat" cmpd="sng" algn="ctr">
-                      <a:solidFill>
-                        <a:srgbClr val="D5DBE3"/>
-                      </a:solidFill>
-                      <a:prstDash val="solid"/>
-                      <a:round/>
-                      <a:headEnd type="none" w="med" len="med"/>
-                      <a:tailEnd type="none" w="med" len="med"/>
-                    </a:lnB>
-                  </a:tcPr>
-                </a:tc>
-                <a:tc>
-                  <a:txBody>
-                    <a:bodyPr/>
-                    <a:lstStyle/>
-                    <a:p>
-                      <a:pPr indent="0" marL="0">
-                        <a:buNone/>
-                      </a:pPr>
-                      <a:r>
-                        <a:rPr lang="en-US" sz="1400" dirty="0">
-                          <a:solidFill>
-                            <a:srgbClr val="1F2A37"/>
-                          </a:solidFill>
-                          <a:latin typeface="Microsoft YaHei" pitchFamily="34" charset="0"/>
-                          <a:ea typeface="Microsoft YaHei" pitchFamily="34" charset="-122"/>
-                          <a:cs typeface="Microsoft YaHei" pitchFamily="34" charset="-120"/>
-                        </a:rPr>
-                        <a:t>只有 ss_is_current = '1' 能做到每笔一行、一笔不少</a:t>
-                      </a:r>
-                      <a:endParaRPr lang="en-US" sz="1400" dirty="0">
-                        <a:latin typeface="Microsoft YaHei" charset="0"/>
-                        <a:ea typeface="Microsoft YaHei" charset="0"/>
-                        <a:cs typeface="Microsoft YaHei" charset="0"/>
-                      </a:endParaRPr>
-                    </a:p>
-                  </a:txBody>
-                  <a:tcPr marL="91440" marR="91440" marT="54864" marB="54864" anchor="ctr">
-                    <a:lnL w="12700" cap="flat" cmpd="sng" algn="ctr">
-                      <a:solidFill>
-                        <a:srgbClr val="D5DBE3"/>
-                      </a:solidFill>
-                      <a:prstDash val="solid"/>
-                      <a:round/>
-                      <a:headEnd type="none" w="med" len="med"/>
-                      <a:tailEnd type="none" w="med" len="med"/>
-                    </a:lnL>
-                    <a:lnR w="12700" cap="flat" cmpd="sng" algn="ctr">
-                      <a:solidFill>
-                        <a:srgbClr val="D5DBE3"/>
-                      </a:solidFill>
-                      <a:prstDash val="solid"/>
-                      <a:round/>
-                      <a:headEnd type="none" w="med" len="med"/>
-                      <a:tailEnd type="none" w="med" len="med"/>
-                    </a:lnR>
-                    <a:lnT w="12700" cap="flat" cmpd="sng" algn="ctr">
-                      <a:solidFill>
-                        <a:srgbClr val="D5DBE3"/>
-                      </a:solidFill>
-                      <a:prstDash val="solid"/>
-                      <a:round/>
-                      <a:headEnd type="none" w="med" len="med"/>
-                      <a:tailEnd type="none" w="med" len="med"/>
-                    </a:lnT>
-                    <a:lnB w="12700" cap="flat" cmpd="sng" algn="ctr">
-                      <a:solidFill>
-                        <a:srgbClr val="D5DBE3"/>
-                      </a:solidFill>
-                      <a:prstDash val="solid"/>
-                      <a:round/>
-                      <a:headEnd type="none" w="med" len="med"/>
-                      <a:tailEnd type="none" w="med" len="med"/>
-                    </a:lnB>
-                  </a:tcPr>
-                </a:tc>
-              </a:tr>
-              <a:tr h="0">
-                <a:tc>
-                  <a:txBody>
-                    <a:bodyPr/>
-                    <a:lstStyle/>
-                    <a:p>
-                      <a:pPr indent="0" marL="0">
-                        <a:buNone/>
-                      </a:pPr>
-                      <a:r>
-                        <a:rPr lang="en-US" sz="1400" dirty="0">
-                          <a:solidFill>
-                            <a:srgbClr val="1F2A37"/>
-                          </a:solidFill>
-                          <a:latin typeface="Microsoft YaHei" pitchFamily="34" charset="0"/>
-                          <a:ea typeface="Microsoft YaHei" pitchFamily="34" charset="-122"/>
-                          <a:cs typeface="Microsoft YaHei" pitchFamily="34" charset="-120"/>
-                        </a:rPr>
-                        <a:t>3</a:t>
-                      </a:r>
-                      <a:endParaRPr lang="en-US" sz="1400" dirty="0">
-                        <a:latin typeface="Microsoft YaHei" charset="0"/>
-                        <a:ea typeface="Microsoft YaHei" charset="0"/>
-                        <a:cs typeface="Microsoft YaHei" charset="0"/>
-                      </a:endParaRPr>
-                    </a:p>
-                  </a:txBody>
-                  <a:tcPr marL="91440" marR="91440" marT="54864" marB="54864" anchor="ctr">
-                    <a:lnL w="12700" cap="flat" cmpd="sng" algn="ctr">
-                      <a:solidFill>
-                        <a:srgbClr val="D5DBE3"/>
-                      </a:solidFill>
-                      <a:prstDash val="solid"/>
-                      <a:round/>
-                      <a:headEnd type="none" w="med" len="med"/>
-                      <a:tailEnd type="none" w="med" len="med"/>
-                    </a:lnL>
-                    <a:lnR w="12700" cap="flat" cmpd="sng" algn="ctr">
-                      <a:solidFill>
-                        <a:srgbClr val="D5DBE3"/>
-                      </a:solidFill>
-                      <a:prstDash val="solid"/>
-                      <a:round/>
-                      <a:headEnd type="none" w="med" len="med"/>
-                      <a:tailEnd type="none" w="med" len="med"/>
-                    </a:lnR>
-                    <a:lnT w="12700" cap="flat" cmpd="sng" algn="ctr">
-                      <a:solidFill>
-                        <a:srgbClr val="D5DBE3"/>
-                      </a:solidFill>
-                      <a:prstDash val="solid"/>
-                      <a:round/>
-                      <a:headEnd type="none" w="med" len="med"/>
-                      <a:tailEnd type="none" w="med" len="med"/>
-                    </a:lnT>
-                    <a:lnB w="12700" cap="flat" cmpd="sng" algn="ctr">
-                      <a:solidFill>
-                        <a:srgbClr val="D5DBE3"/>
-                      </a:solidFill>
-                      <a:prstDash val="solid"/>
-                      <a:round/>
-                      <a:headEnd type="none" w="med" len="med"/>
-                      <a:tailEnd type="none" w="med" len="med"/>
-                    </a:lnB>
-                  </a:tcPr>
-                </a:tc>
-                <a:tc>
-                  <a:txBody>
-                    <a:bodyPr/>
-                    <a:lstStyle/>
-                    <a:p>
-                      <a:pPr indent="0" marL="0">
-                        <a:buNone/>
-                      </a:pPr>
-                      <a:r>
-                        <a:rPr lang="en-US" sz="1400" dirty="0">
-                          <a:solidFill>
-                            <a:srgbClr val="1F2A37"/>
-                          </a:solidFill>
-                          <a:latin typeface="Microsoft YaHei" pitchFamily="34" charset="0"/>
-                          <a:ea typeface="Microsoft YaHei" pitchFamily="34" charset="-122"/>
-                          <a:cs typeface="Microsoft YaHei" pitchFamily="34" charset="-120"/>
-                        </a:rPr>
-                        <a:t>对这个修复做 4 项检查：合法性、当前数据上的粒度、SQL 审查、回归测试</a:t>
-                      </a:r>
-                      <a:endParaRPr lang="en-US" sz="1400" dirty="0">
-                        <a:latin typeface="Microsoft YaHei" charset="0"/>
-                        <a:ea typeface="Microsoft YaHei" charset="0"/>
-                        <a:cs typeface="Microsoft YaHei" charset="0"/>
-                      </a:endParaRPr>
-                    </a:p>
-                  </a:txBody>
-                  <a:tcPr marL="91440" marR="91440" marT="54864" marB="54864" anchor="ctr">
-                    <a:lnL w="12700" cap="flat" cmpd="sng" algn="ctr">
-                      <a:solidFill>
-                        <a:srgbClr val="D5DBE3"/>
-                      </a:solidFill>
-                      <a:prstDash val="solid"/>
-                      <a:round/>
-                      <a:headEnd type="none" w="med" len="med"/>
-                      <a:tailEnd type="none" w="med" len="med"/>
-                    </a:lnL>
-                    <a:lnR w="12700" cap="flat" cmpd="sng" algn="ctr">
-                      <a:solidFill>
-                        <a:srgbClr val="D5DBE3"/>
-                      </a:solidFill>
-                      <a:prstDash val="solid"/>
-                      <a:round/>
-                      <a:headEnd type="none" w="med" len="med"/>
-                      <a:tailEnd type="none" w="med" len="med"/>
-                    </a:lnR>
-                    <a:lnT w="12700" cap="flat" cmpd="sng" algn="ctr">
-                      <a:solidFill>
-                        <a:srgbClr val="D5DBE3"/>
-                      </a:solidFill>
-                      <a:prstDash val="solid"/>
-                      <a:round/>
-                      <a:headEnd type="none" w="med" len="med"/>
-                      <a:tailEnd type="none" w="med" len="med"/>
-                    </a:lnT>
-                    <a:lnB w="12700" cap="flat" cmpd="sng" algn="ctr">
-                      <a:solidFill>
-                        <a:srgbClr val="D5DBE3"/>
-                      </a:solidFill>
-                      <a:prstDash val="solid"/>
-                      <a:round/>
-                      <a:headEnd type="none" w="med" len="med"/>
-                      <a:tailEnd type="none" w="med" len="med"/>
-                    </a:lnB>
-                  </a:tcPr>
-                </a:tc>
-                <a:tc>
-                  <a:txBody>
-                    <a:bodyPr/>
-                    <a:lstStyle/>
-                    <a:p>
-                      <a:pPr indent="0" marL="0">
-                        <a:buNone/>
-                      </a:pPr>
-                      <a:r>
-                        <a:rPr lang="en-US" sz="1400" b="1" dirty="0">
-                          <a:solidFill>
-                            <a:srgbClr val="2E7D4F"/>
-                          </a:solidFill>
-                          <a:latin typeface="Microsoft YaHei" pitchFamily="34" charset="0"/>
-                          <a:ea typeface="Microsoft YaHei" pitchFamily="34" charset="-122"/>
-                          <a:cs typeface="Microsoft YaHei" pitchFamily="34" charset="-120"/>
-                        </a:rPr>
-                        <a:t>全部通过 → 发布 v2</a:t>
-                      </a:r>
-                      <a:pPr indent="0" marL="0">
-                        <a:buNone/>
-                      </a:pPr>
-                      <a:r>
-                        <a:rPr lang="en-US" sz="1400" dirty="0">
-                          <a:solidFill>
-                            <a:srgbClr val="1F2A37"/>
-                          </a:solidFill>
-                          <a:latin typeface="Microsoft YaHei" pitchFamily="34" charset="0"/>
-                          <a:ea typeface="Microsoft YaHei" pitchFamily="34" charset="-122"/>
-                          <a:cs typeface="Microsoft YaHei" pitchFamily="34" charset="-120"/>
-                        </a:rPr>
-                        <a:t>（1–3 步共 28.7 秒）</a:t>
-                      </a:r>
-                      <a:endParaRPr lang="en-US" sz="1400" dirty="0">
-                        <a:latin typeface="Microsoft YaHei" charset="0"/>
-                        <a:ea typeface="Microsoft YaHei" charset="0"/>
-                        <a:cs typeface="Microsoft YaHei" charset="0"/>
-                      </a:endParaRPr>
-                    </a:p>
-                  </a:txBody>
-                  <a:tcPr marL="91440" marR="91440" marT="54864" marB="54864" anchor="ctr">
-                    <a:lnL w="12700" cap="flat" cmpd="sng" algn="ctr">
-                      <a:solidFill>
-                        <a:srgbClr val="D5DBE3"/>
-                      </a:solidFill>
-                      <a:prstDash val="solid"/>
-                      <a:round/>
-                      <a:headEnd type="none" w="med" len="med"/>
-                      <a:tailEnd type="none" w="med" len="med"/>
-                    </a:lnL>
-                    <a:lnR w="12700" cap="flat" cmpd="sng" algn="ctr">
-                      <a:solidFill>
-                        <a:srgbClr val="D5DBE3"/>
-                      </a:solidFill>
-                      <a:prstDash val="solid"/>
-                      <a:round/>
-                      <a:headEnd type="none" w="med" len="med"/>
-                      <a:tailEnd type="none" w="med" len="med"/>
-                    </a:lnR>
-                    <a:lnT w="12700" cap="flat" cmpd="sng" algn="ctr">
-                      <a:solidFill>
-                        <a:srgbClr val="D5DBE3"/>
-                      </a:solidFill>
-                      <a:prstDash val="solid"/>
-                      <a:round/>
-                      <a:headEnd type="none" w="med" len="med"/>
-                      <a:tailEnd type="none" w="med" len="med"/>
-                    </a:lnT>
-                    <a:lnB w="12700" cap="flat" cmpd="sng" algn="ctr">
-                      <a:solidFill>
-                        <a:srgbClr val="D5DBE3"/>
-                      </a:solidFill>
-                      <a:prstDash val="solid"/>
-                      <a:round/>
-                      <a:headEnd type="none" w="med" len="med"/>
-                      <a:tailEnd type="none" w="med" len="med"/>
-                    </a:lnB>
-                  </a:tcPr>
-                </a:tc>
-              </a:tr>
-              <a:tr h="0">
-                <a:tc>
-                  <a:txBody>
-                    <a:bodyPr/>
-                    <a:lstStyle/>
-                    <a:p>
-                      <a:pPr indent="0" marL="0">
-                        <a:buNone/>
-                      </a:pPr>
-                      <a:r>
-                        <a:rPr lang="en-US" sz="1400" dirty="0">
-                          <a:solidFill>
-                            <a:srgbClr val="1F2A37"/>
-                          </a:solidFill>
-                          <a:latin typeface="Microsoft YaHei" pitchFamily="34" charset="0"/>
-                          <a:ea typeface="Microsoft YaHei" pitchFamily="34" charset="-122"/>
-                          <a:cs typeface="Microsoft YaHei" pitchFamily="34" charset="-120"/>
-                        </a:rPr>
-                        <a:t>4</a:t>
-                      </a:r>
-                      <a:endParaRPr lang="en-US" sz="1400" dirty="0">
-                        <a:latin typeface="Microsoft YaHei" charset="0"/>
-                        <a:ea typeface="Microsoft YaHei" charset="0"/>
-                        <a:cs typeface="Microsoft YaHei" charset="0"/>
-                      </a:endParaRPr>
-                    </a:p>
-                  </a:txBody>
-                  <a:tcPr marL="91440" marR="91440" marT="54864" marB="54864" anchor="ctr">
-                    <a:lnL w="12700" cap="flat" cmpd="sng" algn="ctr">
-                      <a:solidFill>
-                        <a:srgbClr val="D5DBE3"/>
-                      </a:solidFill>
-                      <a:prstDash val="solid"/>
-                      <a:round/>
-                      <a:headEnd type="none" w="med" len="med"/>
-                      <a:tailEnd type="none" w="med" len="med"/>
-                    </a:lnL>
-                    <a:lnR w="12700" cap="flat" cmpd="sng" algn="ctr">
-                      <a:solidFill>
-                        <a:srgbClr val="D5DBE3"/>
-                      </a:solidFill>
-                      <a:prstDash val="solid"/>
-                      <a:round/>
-                      <a:headEnd type="none" w="med" len="med"/>
-                      <a:tailEnd type="none" w="med" len="med"/>
-                    </a:lnR>
-                    <a:lnT w="12700" cap="flat" cmpd="sng" algn="ctr">
-                      <a:solidFill>
-                        <a:srgbClr val="D5DBE3"/>
-                      </a:solidFill>
-                      <a:prstDash val="solid"/>
-                      <a:round/>
-                      <a:headEnd type="none" w="med" len="med"/>
-                      <a:tailEnd type="none" w="med" len="med"/>
-                    </a:lnT>
-                    <a:lnB w="12700" cap="flat" cmpd="sng" algn="ctr">
-                      <a:solidFill>
-                        <a:srgbClr val="D5DBE3"/>
-                      </a:solidFill>
-                      <a:prstDash val="solid"/>
-                      <a:round/>
-                      <a:headEnd type="none" w="med" len="med"/>
-                      <a:tailEnd type="none" w="med" len="med"/>
-                    </a:lnB>
-                  </a:tcPr>
-                </a:tc>
-                <a:tc>
-                  <a:txBody>
-                    <a:bodyPr/>
-                    <a:lstStyle/>
-                    <a:p>
-                      <a:pPr indent="0" marL="0">
-                        <a:buNone/>
-                      </a:pPr>
-                      <a:r>
-                        <a:rPr lang="en-US" sz="1400" dirty="0">
-                          <a:solidFill>
-                            <a:srgbClr val="1F2A37"/>
-                          </a:solidFill>
-                          <a:latin typeface="Microsoft YaHei" pitchFamily="34" charset="0"/>
-                          <a:ea typeface="Microsoft YaHei" pitchFamily="34" charset="-122"/>
-                          <a:cs typeface="Microsoft YaHei" pitchFamily="34" charset="-120"/>
-                        </a:rPr>
-                        <a:t>接着检查“门店营业额”：同一条规则、同一个数据版本已经有结果</a:t>
-                      </a:r>
-                      <a:endParaRPr lang="en-US" sz="1400" dirty="0">
-                        <a:latin typeface="Microsoft YaHei" charset="0"/>
-                        <a:ea typeface="Microsoft YaHei" charset="0"/>
-                        <a:cs typeface="Microsoft YaHei" charset="0"/>
-                      </a:endParaRPr>
-                    </a:p>
-                  </a:txBody>
-                  <a:tcPr marL="91440" marR="91440" marT="54864" marB="54864" anchor="ctr">
-                    <a:lnL w="12700" cap="flat" cmpd="sng" algn="ctr">
-                      <a:solidFill>
-                        <a:srgbClr val="D5DBE3"/>
-                      </a:solidFill>
-                      <a:prstDash val="solid"/>
-                      <a:round/>
-                      <a:headEnd type="none" w="med" len="med"/>
-                      <a:tailEnd type="none" w="med" len="med"/>
-                    </a:lnL>
-                    <a:lnR w="12700" cap="flat" cmpd="sng" algn="ctr">
-                      <a:solidFill>
-                        <a:srgbClr val="D5DBE3"/>
-                      </a:solidFill>
-                      <a:prstDash val="solid"/>
-                      <a:round/>
-                      <a:headEnd type="none" w="med" len="med"/>
-                      <a:tailEnd type="none" w="med" len="med"/>
-                    </a:lnR>
-                    <a:lnT w="12700" cap="flat" cmpd="sng" algn="ctr">
-                      <a:solidFill>
-                        <a:srgbClr val="D5DBE3"/>
-                      </a:solidFill>
-                      <a:prstDash val="solid"/>
-                      <a:round/>
-                      <a:headEnd type="none" w="med" len="med"/>
-                      <a:tailEnd type="none" w="med" len="med"/>
-                    </a:lnT>
-                    <a:lnB w="12700" cap="flat" cmpd="sng" algn="ctr">
-                      <a:solidFill>
-                        <a:srgbClr val="D5DBE3"/>
-                      </a:solidFill>
-                      <a:prstDash val="solid"/>
-                      <a:round/>
-                      <a:headEnd type="none" w="med" len="med"/>
-                      <a:tailEnd type="none" w="med" len="med"/>
-                    </a:lnB>
-                  </a:tcPr>
-                </a:tc>
-                <a:tc>
-                  <a:txBody>
-                    <a:bodyPr/>
-                    <a:lstStyle/>
-                    <a:p>
-                      <a:pPr indent="0" marL="0">
-                        <a:buNone/>
-                      </a:pPr>
-                      <a:r>
-                        <a:rPr lang="en-US" sz="1400" dirty="0">
-                          <a:solidFill>
-                            <a:srgbClr val="1F2A37"/>
-                          </a:solidFill>
-                          <a:latin typeface="Microsoft YaHei" pitchFamily="34" charset="0"/>
-                          <a:ea typeface="Microsoft YaHei" pitchFamily="34" charset="-122"/>
-                          <a:cs typeface="Microsoft YaHei" pitchFamily="34" charset="-120"/>
-                        </a:rPr>
-                        <a:t>复用校验结果和修复，</a:t>
-                      </a:r>
-                      <a:pPr indent="0" marL="0">
-                        <a:buNone/>
-                      </a:pPr>
-                      <a:r>
-                        <a:rPr lang="en-US" sz="1400" b="1" dirty="0">
-                          <a:solidFill>
-                            <a:srgbClr val="1D5BA6"/>
-                          </a:solidFill>
-                          <a:latin typeface="Microsoft YaHei" pitchFamily="34" charset="0"/>
-                          <a:ea typeface="Microsoft YaHei" pitchFamily="34" charset="-122"/>
-                          <a:cs typeface="Microsoft YaHei" pitchFamily="34" charset="-120"/>
-                        </a:rPr>
-                        <a:t>45.8 毫秒</a:t>
-                      </a:r>
-                      <a:pPr indent="0" marL="0">
-                        <a:buNone/>
-                      </a:pPr>
-                      <a:r>
-                        <a:rPr lang="en-US" sz="1400" dirty="0">
-                          <a:solidFill>
-                            <a:srgbClr val="1F2A37"/>
-                          </a:solidFill>
-                          <a:latin typeface="Microsoft YaHei" pitchFamily="34" charset="0"/>
-                          <a:ea typeface="Microsoft YaHei" pitchFamily="34" charset="-122"/>
-                          <a:cs typeface="Microsoft YaHei" pitchFamily="34" charset="-120"/>
-                        </a:rPr>
-                        <a:t>就发布了 v2</a:t>
-                      </a:r>
-                      <a:endParaRPr lang="en-US" sz="1400" dirty="0">
-                        <a:latin typeface="Microsoft YaHei" charset="0"/>
-                        <a:ea typeface="Microsoft YaHei" charset="0"/>
-                        <a:cs typeface="Microsoft YaHei" charset="0"/>
-                      </a:endParaRPr>
-                    </a:p>
-                  </a:txBody>
-                  <a:tcPr marL="91440" marR="91440" marT="54864" marB="54864" anchor="ctr">
-                    <a:lnL w="12700" cap="flat" cmpd="sng" algn="ctr">
-                      <a:solidFill>
-                        <a:srgbClr val="D5DBE3"/>
-                      </a:solidFill>
-                      <a:prstDash val="solid"/>
-                      <a:round/>
-                      <a:headEnd type="none" w="med" len="med"/>
-                      <a:tailEnd type="none" w="med" len="med"/>
-                    </a:lnL>
-                    <a:lnR w="12700" cap="flat" cmpd="sng" algn="ctr">
-                      <a:solidFill>
-                        <a:srgbClr val="D5DBE3"/>
-                      </a:solidFill>
-                      <a:prstDash val="solid"/>
-                      <a:round/>
-                      <a:headEnd type="none" w="med" len="med"/>
-                      <a:tailEnd type="none" w="med" len="med"/>
-                    </a:lnR>
-                    <a:lnT w="12700" cap="flat" cmpd="sng" algn="ctr">
-                      <a:solidFill>
-                        <a:srgbClr val="D5DBE3"/>
-                      </a:solidFill>
-                      <a:prstDash val="solid"/>
-                      <a:round/>
-                      <a:headEnd type="none" w="med" len="med"/>
-                      <a:tailEnd type="none" w="med" len="med"/>
-                    </a:lnT>
-                    <a:lnB w="12700" cap="flat" cmpd="sng" algn="ctr">
-                      <a:solidFill>
-                        <a:srgbClr val="D5DBE3"/>
-                      </a:solidFill>
-                      <a:prstDash val="solid"/>
-                      <a:round/>
-                      <a:headEnd type="none" w="med" len="med"/>
-                      <a:tailEnd type="none" w="med" len="med"/>
-                    </a:lnB>
-                  </a:tcPr>
-                </a:tc>
-              </a:tr>
-              <a:tr h="0">
-                <a:tc>
-                  <a:txBody>
-                    <a:bodyPr/>
-                    <a:lstStyle/>
-                    <a:p>
-                      <a:pPr indent="0" marL="0">
-                        <a:buNone/>
-                      </a:pPr>
-                      <a:r>
-                        <a:rPr lang="en-US" sz="1400" dirty="0">
-                          <a:solidFill>
-                            <a:srgbClr val="1F2A37"/>
-                          </a:solidFill>
-                          <a:latin typeface="Microsoft YaHei" pitchFamily="34" charset="0"/>
-                          <a:ea typeface="Microsoft YaHei" pitchFamily="34" charset="-122"/>
-                          <a:cs typeface="Microsoft YaHei" pitchFamily="34" charset="-120"/>
-                        </a:rPr>
-                        <a:t>5</a:t>
-                      </a:r>
-                      <a:endParaRPr lang="en-US" sz="1400" dirty="0">
-                        <a:latin typeface="Microsoft YaHei" charset="0"/>
-                        <a:ea typeface="Microsoft YaHei" charset="0"/>
-                        <a:cs typeface="Microsoft YaHei" charset="0"/>
-                      </a:endParaRPr>
-                    </a:p>
-                  </a:txBody>
-                  <a:tcPr marL="91440" marR="91440" marT="54864" marB="54864" anchor="ctr">
-                    <a:lnL w="12700" cap="flat" cmpd="sng" algn="ctr">
-                      <a:solidFill>
-                        <a:srgbClr val="D5DBE3"/>
-                      </a:solidFill>
-                      <a:prstDash val="solid"/>
-                      <a:round/>
-                      <a:headEnd type="none" w="med" len="med"/>
-                      <a:tailEnd type="none" w="med" len="med"/>
-                    </a:lnL>
-                    <a:lnR w="12700" cap="flat" cmpd="sng" algn="ctr">
-                      <a:solidFill>
-                        <a:srgbClr val="D5DBE3"/>
-                      </a:solidFill>
-                      <a:prstDash val="solid"/>
-                      <a:round/>
-                      <a:headEnd type="none" w="med" len="med"/>
-                      <a:tailEnd type="none" w="med" len="med"/>
-                    </a:lnR>
-                    <a:lnT w="12700" cap="flat" cmpd="sng" algn="ctr">
-                      <a:solidFill>
-                        <a:srgbClr val="D5DBE3"/>
-                      </a:solidFill>
-                      <a:prstDash val="solid"/>
-                      <a:round/>
-                      <a:headEnd type="none" w="med" len="med"/>
-                      <a:tailEnd type="none" w="med" len="med"/>
-                    </a:lnT>
-                    <a:lnB w="12700" cap="flat" cmpd="sng" algn="ctr">
-                      <a:solidFill>
-                        <a:srgbClr val="D5DBE3"/>
-                      </a:solidFill>
-                      <a:prstDash val="solid"/>
-                      <a:round/>
-                      <a:headEnd type="none" w="med" len="med"/>
-                      <a:tailEnd type="none" w="med" len="med"/>
-                    </a:lnB>
-                  </a:tcPr>
-                </a:tc>
-                <a:tc>
-                  <a:txBody>
-                    <a:bodyPr/>
-                    <a:lstStyle/>
-                    <a:p>
-                      <a:pPr indent="0" marL="0">
-                        <a:buNone/>
-                      </a:pPr>
-                      <a:r>
-                        <a:rPr lang="en-US" sz="1400" dirty="0">
-                          <a:solidFill>
-                            <a:srgbClr val="1F2A37"/>
-                          </a:solidFill>
-                          <a:latin typeface="Microsoft YaHei" pitchFamily="34" charset="0"/>
-                          <a:ea typeface="Microsoft YaHei" pitchFamily="34" charset="-122"/>
-                          <a:cs typeface="Microsoft YaHei" pitchFamily="34" charset="-120"/>
-                        </a:rPr>
-                        <a:t>“门店退货率”要把销售和退货关联起来</a:t>
-                      </a:r>
-                      <a:endParaRPr lang="en-US" sz="1400" dirty="0">
-                        <a:latin typeface="Microsoft YaHei" charset="0"/>
-                        <a:ea typeface="Microsoft YaHei" charset="0"/>
-                        <a:cs typeface="Microsoft YaHei" charset="0"/>
-                      </a:endParaRPr>
-                    </a:p>
-                  </a:txBody>
-                  <a:tcPr marL="91440" marR="91440" marT="54864" marB="54864" anchor="ctr">
-                    <a:lnL w="12700" cap="flat" cmpd="sng" algn="ctr">
-                      <a:solidFill>
-                        <a:srgbClr val="D5DBE3"/>
-                      </a:solidFill>
-                      <a:prstDash val="solid"/>
-                      <a:round/>
-                      <a:headEnd type="none" w="med" len="med"/>
-                      <a:tailEnd type="none" w="med" len="med"/>
-                    </a:lnL>
-                    <a:lnR w="12700" cap="flat" cmpd="sng" algn="ctr">
-                      <a:solidFill>
-                        <a:srgbClr val="D5DBE3"/>
-                      </a:solidFill>
-                      <a:prstDash val="solid"/>
-                      <a:round/>
-                      <a:headEnd type="none" w="med" len="med"/>
-                      <a:tailEnd type="none" w="med" len="med"/>
-                    </a:lnR>
-                    <a:lnT w="12700" cap="flat" cmpd="sng" algn="ctr">
-                      <a:solidFill>
-                        <a:srgbClr val="D5DBE3"/>
-                      </a:solidFill>
-                      <a:prstDash val="solid"/>
-                      <a:round/>
-                      <a:headEnd type="none" w="med" len="med"/>
-                      <a:tailEnd type="none" w="med" len="med"/>
-                    </a:lnT>
-                    <a:lnB w="12700" cap="flat" cmpd="sng" algn="ctr">
-                      <a:solidFill>
-                        <a:srgbClr val="D5DBE3"/>
-                      </a:solidFill>
-                      <a:prstDash val="solid"/>
-                      <a:round/>
-                      <a:headEnd type="none" w="med" len="med"/>
-                      <a:tailEnd type="none" w="med" len="med"/>
-                    </a:lnB>
-                  </a:tcPr>
-                </a:tc>
-                <a:tc>
-                  <a:txBody>
-                    <a:bodyPr/>
-                    <a:lstStyle/>
-                    <a:p>
-                      <a:pPr indent="0" marL="0">
-                        <a:buNone/>
-                      </a:pPr>
-                      <a:r>
-                        <a:rPr lang="en-US" sz="1400" dirty="0">
-                          <a:solidFill>
-                            <a:srgbClr val="1F2A37"/>
-                          </a:solidFill>
-                          <a:latin typeface="Microsoft YaHei" pitchFamily="34" charset="0"/>
-                          <a:ea typeface="Microsoft YaHei" pitchFamily="34" charset="-122"/>
-                          <a:cs typeface="Microsoft YaHei" pitchFamily="34" charset="-120"/>
-                        </a:rPr>
-                        <a:t>关联路径现在要求只用当前行 → 也修复为 v2</a:t>
-                      </a:r>
-                      <a:endParaRPr lang="en-US" sz="1400" dirty="0">
-                        <a:latin typeface="Microsoft YaHei" charset="0"/>
-                        <a:ea typeface="Microsoft YaHei" charset="0"/>
-                        <a:cs typeface="Microsoft YaHei" charset="0"/>
-                      </a:endParaRPr>
-                    </a:p>
-                  </a:txBody>
-                  <a:tcPr marL="91440" marR="91440" marT="54864" marB="54864" anchor="ctr">
-                    <a:lnL w="12700" cap="flat" cmpd="sng" algn="ctr">
-                      <a:solidFill>
-                        <a:srgbClr val="D5DBE3"/>
-                      </a:solidFill>
-                      <a:prstDash val="solid"/>
-                      <a:round/>
-                      <a:headEnd type="none" w="med" len="med"/>
-                      <a:tailEnd type="none" w="med" len="med"/>
-                    </a:lnL>
-                    <a:lnR w="12700" cap="flat" cmpd="sng" algn="ctr">
-                      <a:solidFill>
-                        <a:srgbClr val="D5DBE3"/>
-                      </a:solidFill>
-                      <a:prstDash val="solid"/>
-                      <a:round/>
-                      <a:headEnd type="none" w="med" len="med"/>
-                      <a:tailEnd type="none" w="med" len="med"/>
-                    </a:lnR>
-                    <a:lnT w="12700" cap="flat" cmpd="sng" algn="ctr">
-                      <a:solidFill>
-                        <a:srgbClr val="D5DBE3"/>
-                      </a:solidFill>
-                      <a:prstDash val="solid"/>
-                      <a:round/>
-                      <a:headEnd type="none" w="med" len="med"/>
-                      <a:tailEnd type="none" w="med" len="med"/>
-                    </a:lnT>
-                    <a:lnB w="12700" cap="flat" cmpd="sng" algn="ctr">
-                      <a:solidFill>
-                        <a:srgbClr val="D5DBE3"/>
-                      </a:solidFill>
-                      <a:prstDash val="solid"/>
-                      <a:round/>
-                      <a:headEnd type="none" w="med" len="med"/>
-                      <a:tailEnd type="none" w="med" len="med"/>
-                    </a:lnB>
-                  </a:tcPr>
-                </a:tc>
-              </a:tr>
-              <a:tr h="0">
-                <a:tc>
-                  <a:txBody>
-                    <a:bodyPr/>
-                    <a:lstStyle/>
-                    <a:p>
-                      <a:pPr indent="0" marL="0">
-                        <a:buNone/>
-                      </a:pPr>
-                      <a:r>
-                        <a:rPr lang="en-US" sz="1400" dirty="0">
-                          <a:solidFill>
-                            <a:srgbClr val="1F2A37"/>
-                          </a:solidFill>
-                          <a:latin typeface="Microsoft YaHei" pitchFamily="34" charset="0"/>
-                          <a:ea typeface="Microsoft YaHei" pitchFamily="34" charset="-122"/>
-                          <a:cs typeface="Microsoft YaHei" pitchFamily="34" charset="-120"/>
-                        </a:rPr>
-                        <a:t>6</a:t>
-                      </a:r>
-                      <a:endParaRPr lang="en-US" sz="1400" dirty="0">
-                        <a:latin typeface="Microsoft YaHei" charset="0"/>
-                        <a:ea typeface="Microsoft YaHei" charset="0"/>
-                        <a:cs typeface="Microsoft YaHei" charset="0"/>
-                      </a:endParaRPr>
-                    </a:p>
-                  </a:txBody>
-                  <a:tcPr marL="91440" marR="91440" marT="54864" marB="54864" anchor="ctr">
-                    <a:lnL w="12700" cap="flat" cmpd="sng" algn="ctr">
-                      <a:solidFill>
-                        <a:srgbClr val="D5DBE3"/>
-                      </a:solidFill>
-                      <a:prstDash val="solid"/>
-                      <a:round/>
-                      <a:headEnd type="none" w="med" len="med"/>
-                      <a:tailEnd type="none" w="med" len="med"/>
-                    </a:lnL>
-                    <a:lnR w="12700" cap="flat" cmpd="sng" algn="ctr">
-                      <a:solidFill>
-                        <a:srgbClr val="D5DBE3"/>
-                      </a:solidFill>
-                      <a:prstDash val="solid"/>
-                      <a:round/>
-                      <a:headEnd type="none" w="med" len="med"/>
-                      <a:tailEnd type="none" w="med" len="med"/>
-                    </a:lnR>
-                    <a:lnT w="12700" cap="flat" cmpd="sng" algn="ctr">
-                      <a:solidFill>
-                        <a:srgbClr val="D5DBE3"/>
-                      </a:solidFill>
-                      <a:prstDash val="solid"/>
-                      <a:round/>
-                      <a:headEnd type="none" w="med" len="med"/>
-                      <a:tailEnd type="none" w="med" len="med"/>
-                    </a:lnT>
-                    <a:lnB w="12700" cap="flat" cmpd="sng" algn="ctr">
-                      <a:solidFill>
-                        <a:srgbClr val="D5DBE3"/>
-                      </a:solidFill>
-                      <a:prstDash val="solid"/>
-                      <a:round/>
-                      <a:headEnd type="none" w="med" len="med"/>
-                      <a:tailEnd type="none" w="med" len="med"/>
-                    </a:lnB>
-                  </a:tcPr>
-                </a:tc>
-                <a:tc>
-                  <a:txBody>
-                    <a:bodyPr/>
-                    <a:lstStyle/>
-                    <a:p>
-                      <a:pPr indent="0" marL="0">
-                        <a:buNone/>
-                      </a:pPr>
-                      <a:r>
-                        <a:rPr lang="en-US" sz="1400" dirty="0">
-                          <a:solidFill>
-                            <a:srgbClr val="1F2A37"/>
-                          </a:solidFill>
-                          <a:latin typeface="Microsoft YaHei" pitchFamily="34" charset="0"/>
-                          <a:ea typeface="Microsoft YaHei" pitchFamily="34" charset="-122"/>
-                          <a:cs typeface="Microsoft YaHei" pitchFamily="34" charset="-120"/>
-                        </a:rPr>
-                        <a:t>用户智能体 B 问“9 月门店营业额”</a:t>
-                      </a:r>
-                      <a:endParaRPr lang="en-US" sz="1400" dirty="0">
-                        <a:latin typeface="Microsoft YaHei" charset="0"/>
-                        <a:ea typeface="Microsoft YaHei" charset="0"/>
-                        <a:cs typeface="Microsoft YaHei" charset="0"/>
-                      </a:endParaRPr>
-                    </a:p>
-                  </a:txBody>
-                  <a:tcPr marL="91440" marR="91440" marT="54864" marB="54864" anchor="ctr">
-                    <a:lnL w="12700" cap="flat" cmpd="sng" algn="ctr">
-                      <a:solidFill>
-                        <a:srgbClr val="D5DBE3"/>
-                      </a:solidFill>
-                      <a:prstDash val="solid"/>
-                      <a:round/>
-                      <a:headEnd type="none" w="med" len="med"/>
-                      <a:tailEnd type="none" w="med" len="med"/>
-                    </a:lnL>
-                    <a:lnR w="12700" cap="flat" cmpd="sng" algn="ctr">
-                      <a:solidFill>
-                        <a:srgbClr val="D5DBE3"/>
-                      </a:solidFill>
-                      <a:prstDash val="solid"/>
-                      <a:round/>
-                      <a:headEnd type="none" w="med" len="med"/>
-                      <a:tailEnd type="none" w="med" len="med"/>
-                    </a:lnR>
-                    <a:lnT w="12700" cap="flat" cmpd="sng" algn="ctr">
-                      <a:solidFill>
-                        <a:srgbClr val="D5DBE3"/>
-                      </a:solidFill>
-                      <a:prstDash val="solid"/>
-                      <a:round/>
-                      <a:headEnd type="none" w="med" len="med"/>
-                      <a:tailEnd type="none" w="med" len="med"/>
-                    </a:lnT>
-                    <a:lnB w="12700" cap="flat" cmpd="sng" algn="ctr">
-                      <a:solidFill>
-                        <a:srgbClr val="D5DBE3"/>
-                      </a:solidFill>
-                      <a:prstDash val="solid"/>
-                      <a:round/>
-                      <a:headEnd type="none" w="med" len="med"/>
-                      <a:tailEnd type="none" w="med" len="med"/>
-                    </a:lnB>
-                  </a:tcPr>
-                </a:tc>
-                <a:tc>
-                  <a:txBody>
-                    <a:bodyPr/>
-                    <a:lstStyle/>
-                    <a:p>
-                      <a:pPr indent="0" marL="0">
-                        <a:buNone/>
-                      </a:pPr>
-                      <a:r>
-                        <a:rPr lang="en-US" sz="1400" dirty="0">
-                          <a:solidFill>
-                            <a:srgbClr val="1F2A37"/>
-                          </a:solidFill>
-                          <a:latin typeface="Microsoft YaHei" pitchFamily="34" charset="0"/>
-                          <a:ea typeface="Microsoft YaHei" pitchFamily="34" charset="-122"/>
-                          <a:cs typeface="Microsoft YaHei" pitchFamily="34" charset="-120"/>
-                        </a:rPr>
-                        <a:t>收到 3 条提醒；SQL 带上 ss_is_current = '1'；答 </a:t>
-                      </a:r>
-                      <a:pPr indent="0" marL="0">
-                        <a:buNone/>
-                      </a:pPr>
-                      <a:r>
-                        <a:rPr lang="en-US" sz="1400" b="1" dirty="0">
-                          <a:solidFill>
-                            <a:srgbClr val="2E7D4F"/>
-                          </a:solidFill>
-                          <a:latin typeface="Microsoft YaHei" pitchFamily="34" charset="0"/>
-                          <a:ea typeface="Microsoft YaHei" pitchFamily="34" charset="-122"/>
-                          <a:cs typeface="Microsoft YaHei" pitchFamily="34" charset="-120"/>
-                        </a:rPr>
-                        <a:t>1293.3 万 ✓</a:t>
-                      </a:r>
-                      <a:pPr indent="0" marL="0">
-                        <a:buNone/>
-                      </a:pPr>
-                      <a:r>
-                        <a:rPr lang="en-US" sz="1400" dirty="0">
-                          <a:solidFill>
-                            <a:srgbClr val="1F2A37"/>
-                          </a:solidFill>
-                          <a:latin typeface="Microsoft YaHei" pitchFamily="34" charset="0"/>
-                          <a:ea typeface="Microsoft YaHei" pitchFamily="34" charset="-122"/>
-                          <a:cs typeface="Microsoft YaHei" pitchFamily="34" charset="-120"/>
-                        </a:rPr>
-                        <a:t>（4 轮，61.7 秒）</a:t>
-                      </a:r>
-                      <a:endParaRPr lang="en-US" sz="1400" dirty="0">
-                        <a:latin typeface="Microsoft YaHei" charset="0"/>
-                        <a:ea typeface="Microsoft YaHei" charset="0"/>
-                        <a:cs typeface="Microsoft YaHei" charset="0"/>
-                      </a:endParaRPr>
-                    </a:p>
-                  </a:txBody>
-                  <a:tcPr marL="91440" marR="91440" marT="54864" marB="54864" anchor="ctr">
-                    <a:lnL w="12700" cap="flat" cmpd="sng" algn="ctr">
-                      <a:solidFill>
-                        <a:srgbClr val="D5DBE3"/>
-                      </a:solidFill>
-                      <a:prstDash val="solid"/>
-                      <a:round/>
-                      <a:headEnd type="none" w="med" len="med"/>
-                      <a:tailEnd type="none" w="med" len="med"/>
-                    </a:lnL>
-                    <a:lnR w="12700" cap="flat" cmpd="sng" algn="ctr">
-                      <a:solidFill>
-                        <a:srgbClr val="D5DBE3"/>
-                      </a:solidFill>
-                      <a:prstDash val="solid"/>
-                      <a:round/>
-                      <a:headEnd type="none" w="med" len="med"/>
-                      <a:tailEnd type="none" w="med" len="med"/>
-                    </a:lnR>
-                    <a:lnT w="12700" cap="flat" cmpd="sng" algn="ctr">
-                      <a:solidFill>
-                        <a:srgbClr val="D5DBE3"/>
-                      </a:solidFill>
-                      <a:prstDash val="solid"/>
-                      <a:round/>
-                      <a:headEnd type="none" w="med" len="med"/>
-                      <a:tailEnd type="none" w="med" len="med"/>
-                    </a:lnT>
-                    <a:lnB w="12700" cap="flat" cmpd="sng" algn="ctr">
-                      <a:solidFill>
-                        <a:srgbClr val="D5DBE3"/>
-                      </a:solidFill>
-                      <a:prstDash val="solid"/>
-                      <a:round/>
-                      <a:headEnd type="none" w="med" len="med"/>
-                      <a:tailEnd type="none" w="med" len="med"/>
-                    </a:lnB>
-                  </a:tcPr>
-                </a:tc>
-              </a:tr>
-            </a:tbl>
-          </a:graphicData>
-        </a:graphic>
-      </p:graphicFrame>
-      <p:sp>
-        <p:nvSpPr>
-          <p:cNvPr id="4" name="Text 1"/>
-          <p:cNvSpPr txBox="1"/>
-          <p:nvPr/>
-        </p:nvSpPr>
-        <p:spPr>
-          <a:xfrm>
-            <a:off x="548640" y="6263640"/>
-            <a:ext cx="10362895" cy="365760"/>
-          </a:xfrm>
-          <a:prstGeom prst="rect">
-            <a:avLst/>
-          </a:prstGeom>
-          <a:noFill/>
-          <a:ln/>
-        </p:spPr>
-        <p:txBody>
-          <a:bodyPr wrap="square" lIns="0" tIns="0" rIns="0" bIns="0" rtlCol="0" anchor="b"/>
-          <a:lstStyle/>
-          <a:p>
-            <a:pPr indent="0" marL="0">
-              <a:buNone/>
-            </a:pPr>
-            <a:r>
-              <a:rPr lang="en-US" sz="1100" dirty="0">
-                <a:solidFill>
-                  <a:srgbClr val="5B6573"/>
-                </a:solidFill>
-                <a:latin typeface="Microsoft YaHei" pitchFamily="34" charset="0"/>
-                <a:ea typeface="Microsoft YaHei" pitchFamily="34" charset="-122"/>
-                <a:cs typeface="Microsoft YaHei" pitchFamily="34" charset="-120"/>
-              </a:rPr>
-              <a:t>记录：noctis results/scen-20261002/dsv41flash-r1-g3fix--snap（端到端实验第 1 次 MAVRA 运行）。数据为仿 TPC-DS 的合成零售数据（100 万行门店销售），题目中的年份略去。</a:t>
             </a:r>
             <a:endParaRPr lang="en-US" sz="1100" dirty="0"/>
           </a:p>
@@ -8891,48 +9861,9 @@
                 <a:ea typeface="Microsoft YaHei" pitchFamily="34" charset="-122"/>
                 <a:cs typeface="Microsoft YaHei" pitchFamily="34" charset="-120"/>
               </a:rPr>
-              <a:t>真实例子④：回归测试为什么要用学习时的数据</a:t>
+              <a:t>数据更正之后，MAVRA 依次做了什么</a:t>
             </a:r>
             <a:endParaRPr lang="en-US" sz="3000" dirty="0"/>
-          </a:p>
-        </p:txBody>
-      </p:sp>
-      <p:sp>
-        <p:nvSpPr>
-          <p:cNvPr id="3" name="Text 1"/>
-          <p:cNvSpPr txBox="1"/>
-          <p:nvPr/>
-        </p:nvSpPr>
-        <p:spPr>
-          <a:xfrm>
-            <a:off x="548640" y="1188720"/>
-            <a:ext cx="11094415" cy="731520"/>
-          </a:xfrm>
-          <a:prstGeom prst="rect">
-            <a:avLst/>
-          </a:prstGeom>
-          <a:noFill/>
-          <a:ln/>
-        </p:spPr>
-        <p:txBody>
-          <a:bodyPr wrap="square" lIns="0" tIns="0" rIns="0" bIns="0" rtlCol="0" anchor="t"/>
-          <a:lstStyle/>
-          <a:p>
-            <a:pPr indent="0" marL="0">
-              <a:buNone/>
-            </a:pPr>
-            <a:r>
-              <a:rPr lang="en-US" sz="1700" dirty="0">
-                <a:solidFill>
-                  <a:srgbClr val="1F2A37"/>
-                </a:solidFill>
-                <a:latin typeface="Microsoft YaHei" pitchFamily="34" charset="0"/>
-                <a:ea typeface="Microsoft YaHei" pitchFamily="34" charset="-122"/>
-                <a:cs typeface="Microsoft YaHei" pitchFamily="34" charset="-120"/>
-              </a:rPr>
-              <a:t>学习题问的是 3 月，正好在被更正的范围里。回归测试拿内置智能体当初的 SQL 当标准，和加了过滤的新定义各算一次 3 月：</a:t>
-            </a:r>
-            <a:endParaRPr lang="en-US" sz="1700" dirty="0"/>
           </a:p>
         </p:txBody>
       </p:sp>
@@ -8951,7 +9882,7 @@
           </p:nvPr>
         </p:nvGraphicFramePr>
         <p:xfrm>
-          <a:off x="548640" y="2148840"/>
+          <a:off x="548640" y="1188720"/>
           <a:ext cx="11094415" cy="914400"/>
         </p:xfrm>
         <a:graphic>
@@ -8959,12 +9890,11 @@
             <a:tbl>
               <a:tblPr/>
               <a:tblGrid>
-                <a:gridCol w="2377440"/>
-                <a:gridCol w="2377440"/>
-                <a:gridCol w="2377440"/>
-                <a:gridCol w="3959352"/>
+                <a:gridCol w="411480"/>
+                <a:gridCol w="4937760"/>
+                <a:gridCol w="5742432"/>
               </a:tblGrid>
-              <a:tr h="594360">
+              <a:tr h="0">
                 <a:tc>
                   <a:txBody>
                     <a:bodyPr/>
@@ -8973,18 +9903,7 @@
                       <a:pPr indent="0" marL="0">
                         <a:buNone/>
                       </a:pPr>
-                      <a:r>
-                        <a:rPr lang="en-US" sz="1800" b="1" dirty="0">
-                          <a:solidFill>
-                            <a:srgbClr val="1F2A37"/>
-                          </a:solidFill>
-                          <a:latin typeface="Microsoft YaHei" pitchFamily="34" charset="0"/>
-                          <a:ea typeface="Microsoft YaHei" pitchFamily="34" charset="-122"/>
-                          <a:cs typeface="Microsoft YaHei" pitchFamily="34" charset="-120"/>
-                        </a:rPr>
-                        <a:t>用哪份数据比</a:t>
-                      </a:r>
-                      <a:endParaRPr lang="en-US" sz="1800" dirty="0">
+                      <a:endParaRPr lang="en-US" sz="1400" dirty="0">
                         <a:latin typeface="Microsoft YaHei" charset="0"/>
                         <a:ea typeface="Microsoft YaHei" charset="0"/>
                         <a:cs typeface="Microsoft YaHei" charset="0"/>
@@ -9042,7 +9961,7 @@
                         <a:buNone/>
                       </a:pPr>
                       <a:r>
-                        <a:rPr lang="en-US" sz="1800" b="1" dirty="0">
+                        <a:rPr lang="en-US" sz="1400" b="1" dirty="0">
                           <a:solidFill>
                             <a:srgbClr val="1F2A37"/>
                           </a:solidFill>
@@ -9050,9 +9969,9 @@
                           <a:ea typeface="Microsoft YaHei" pitchFamily="34" charset="-122"/>
                           <a:cs typeface="Microsoft YaHei" pitchFamily="34" charset="-120"/>
                         </a:rPr>
-                        <a:t>当初的 SQL</a:t>
+                        <a:t>发生了什么</a:t>
                       </a:r>
-                      <a:endParaRPr lang="en-US" sz="1800" dirty="0">
+                      <a:endParaRPr lang="en-US" sz="1400" dirty="0">
                         <a:latin typeface="Microsoft YaHei" charset="0"/>
                         <a:ea typeface="Microsoft YaHei" charset="0"/>
                         <a:cs typeface="Microsoft YaHei" charset="0"/>
@@ -9110,7 +10029,7 @@
                         <a:buNone/>
                       </a:pPr>
                       <a:r>
-                        <a:rPr lang="en-US" sz="1800" b="1" dirty="0">
+                        <a:rPr lang="en-US" sz="1400" b="1" dirty="0">
                           <a:solidFill>
                             <a:srgbClr val="1F2A37"/>
                           </a:solidFill>
@@ -9118,9 +10037,9 @@
                           <a:ea typeface="Microsoft YaHei" pitchFamily="34" charset="-122"/>
                           <a:cs typeface="Microsoft YaHei" pitchFamily="34" charset="-120"/>
                         </a:rPr>
-                        <a:t>新定义（v2）</a:t>
+                        <a:t>系统记录</a:t>
                       </a:r>
-                      <a:endParaRPr lang="en-US" sz="1800" dirty="0">
+                      <a:endParaRPr lang="en-US" sz="1400" dirty="0">
                         <a:latin typeface="Microsoft YaHei" charset="0"/>
                         <a:ea typeface="Microsoft YaHei" charset="0"/>
                         <a:cs typeface="Microsoft YaHei" charset="0"/>
@@ -9169,6 +10088,8 @@
                     </a:solidFill>
                   </a:tcPr>
                 </a:tc>
+              </a:tr>
+              <a:tr h="0">
                 <a:tc>
                   <a:txBody>
                     <a:bodyPr/>
@@ -9178,7 +10099,7 @@
                         <a:buNone/>
                       </a:pPr>
                       <a:r>
-                        <a:rPr lang="en-US" sz="1800" b="1" dirty="0">
+                        <a:rPr lang="en-US" sz="1400" dirty="0">
                           <a:solidFill>
                             <a:srgbClr val="1F2A37"/>
                           </a:solidFill>
@@ -9186,79 +10107,9 @@
                           <a:ea typeface="Microsoft YaHei" pitchFamily="34" charset="-122"/>
                           <a:cs typeface="Microsoft YaHei" pitchFamily="34" charset="-120"/>
                         </a:rPr>
-                        <a:t>结果</a:t>
+                        <a:t>1</a:t>
                       </a:r>
-                      <a:endParaRPr lang="en-US" sz="1800" dirty="0">
-                        <a:latin typeface="Microsoft YaHei" charset="0"/>
-                        <a:ea typeface="Microsoft YaHei" charset="0"/>
-                        <a:cs typeface="Microsoft YaHei" charset="0"/>
-                      </a:endParaRPr>
-                    </a:p>
-                  </a:txBody>
-                  <a:tcPr marL="91440" marR="91440" marT="54864" marB="54864" anchor="ctr">
-                    <a:lnL w="12700" cap="flat" cmpd="sng" algn="ctr">
-                      <a:solidFill>
-                        <a:srgbClr val="D5DBE3"/>
-                      </a:solidFill>
-                      <a:prstDash val="solid"/>
-                      <a:round/>
-                      <a:headEnd type="none" w="med" len="med"/>
-                      <a:tailEnd type="none" w="med" len="med"/>
-                    </a:lnL>
-                    <a:lnR w="12700" cap="flat" cmpd="sng" algn="ctr">
-                      <a:solidFill>
-                        <a:srgbClr val="D5DBE3"/>
-                      </a:solidFill>
-                      <a:prstDash val="solid"/>
-                      <a:round/>
-                      <a:headEnd type="none" w="med" len="med"/>
-                      <a:tailEnd type="none" w="med" len="med"/>
-                    </a:lnR>
-                    <a:lnT w="12700" cap="flat" cmpd="sng" algn="ctr">
-                      <a:solidFill>
-                        <a:srgbClr val="D5DBE3"/>
-                      </a:solidFill>
-                      <a:prstDash val="solid"/>
-                      <a:round/>
-                      <a:headEnd type="none" w="med" len="med"/>
-                      <a:tailEnd type="none" w="med" len="med"/>
-                    </a:lnT>
-                    <a:lnB w="12700" cap="flat" cmpd="sng" algn="ctr">
-                      <a:solidFill>
-                        <a:srgbClr val="D5DBE3"/>
-                      </a:solidFill>
-                      <a:prstDash val="solid"/>
-                      <a:round/>
-                      <a:headEnd type="none" w="med" len="med"/>
-                      <a:tailEnd type="none" w="med" len="med"/>
-                    </a:lnB>
-                    <a:solidFill>
-                      <a:srgbClr val="F1F3F6"/>
-                    </a:solidFill>
-                  </a:tcPr>
-                </a:tc>
-              </a:tr>
-              <a:tr h="594360">
-                <a:tc>
-                  <a:txBody>
-                    <a:bodyPr/>
-                    <a:lstStyle/>
-                    <a:p>
-                      <a:pPr indent="0" marL="0">
-                        <a:buNone/>
-                      </a:pPr>
-                      <a:r>
-                        <a:rPr lang="en-US" sz="1800" dirty="0">
-                          <a:solidFill>
-                            <a:srgbClr val="1F2A37"/>
-                          </a:solidFill>
-                          <a:latin typeface="Microsoft YaHei" pitchFamily="34" charset="0"/>
-                          <a:ea typeface="Microsoft YaHei" pitchFamily="34" charset="-122"/>
-                          <a:cs typeface="Microsoft YaHei" pitchFamily="34" charset="-120"/>
-                        </a:rPr>
-                        <a:t>学习时的数据</a:t>
-                      </a:r>
-                      <a:endParaRPr lang="en-US" sz="1800" dirty="0">
+                      <a:endParaRPr lang="en-US" sz="1400" dirty="0">
                         <a:latin typeface="Microsoft YaHei" charset="0"/>
                         <a:ea typeface="Microsoft YaHei" charset="0"/>
                         <a:cs typeface="Microsoft YaHei" charset="0"/>
@@ -9313,7 +10164,7 @@
                         <a:buNone/>
                       </a:pPr>
                       <a:r>
-                        <a:rPr lang="en-US" sz="1800" dirty="0">
+                        <a:rPr lang="en-US" sz="1400" dirty="0">
                           <a:solidFill>
                             <a:srgbClr val="1F2A37"/>
                           </a:solidFill>
@@ -9321,9 +10172,9 @@
                           <a:ea typeface="Microsoft YaHei" pitchFamily="34" charset="-122"/>
                           <a:cs typeface="Microsoft YaHei" pitchFamily="34" charset="-120"/>
                         </a:rPr>
-                        <a:t>1357.0 万</a:t>
+                        <a:t>第一个用到销售表的查询到来。先检查名称匹配到的“电子品类门店营业额”：销售表变了，重新校验“每笔销售一行”</a:t>
                       </a:r>
-                      <a:endParaRPr lang="en-US" sz="1800" dirty="0">
+                      <a:endParaRPr lang="en-US" sz="1400" dirty="0">
                         <a:latin typeface="Microsoft YaHei" charset="0"/>
                         <a:ea typeface="Microsoft YaHei" charset="0"/>
                         <a:cs typeface="Microsoft YaHei" charset="0"/>
@@ -9378,7 +10229,21 @@
                         <a:buNone/>
                       </a:pPr>
                       <a:r>
-                        <a:rPr lang="en-US" sz="1800" dirty="0">
+                        <a:rPr lang="en-US" sz="1400" b="1" dirty="0">
+                          <a:solidFill>
+                            <a:srgbClr val="B5392A"/>
+                          </a:solidFill>
+                          <a:latin typeface="Microsoft YaHei" pitchFamily="34" charset="0"/>
+                          <a:ea typeface="Microsoft YaHei" pitchFamily="34" charset="-122"/>
+                          <a:cs typeface="Microsoft YaHei" pitchFamily="34" charset="-120"/>
+                        </a:rPr>
+                        <a:t>不成立：</a:t>
+                      </a:r>
+                      <a:pPr indent="0" marL="0">
+                        <a:buNone/>
+                      </a:pPr>
+                      <a:r>
+                        <a:rPr lang="en-US" sz="1400" dirty="0">
                           <a:solidFill>
                             <a:srgbClr val="1F2A37"/>
                           </a:solidFill>
@@ -9386,9 +10251,76 @@
                           <a:ea typeface="Microsoft YaHei" pitchFamily="34" charset="-122"/>
                           <a:cs typeface="Microsoft YaHei" pitchFamily="34" charset="-120"/>
                         </a:rPr>
-                        <a:t>1357.0 万</a:t>
+                        <a:t>“1065915 行只有 1000000 个不同键（平均每键 1.07 行）”，用时 5.5 秒 → 停用 v1</a:t>
                       </a:r>
-                      <a:endParaRPr lang="en-US" sz="1800" dirty="0">
+                      <a:endParaRPr lang="en-US" sz="1400" dirty="0">
+                        <a:latin typeface="Microsoft YaHei" charset="0"/>
+                        <a:ea typeface="Microsoft YaHei" charset="0"/>
+                        <a:cs typeface="Microsoft YaHei" charset="0"/>
+                      </a:endParaRPr>
+                    </a:p>
+                  </a:txBody>
+                  <a:tcPr marL="91440" marR="91440" marT="54864" marB="54864" anchor="ctr">
+                    <a:lnL w="12700" cap="flat" cmpd="sng" algn="ctr">
+                      <a:solidFill>
+                        <a:srgbClr val="D5DBE3"/>
+                      </a:solidFill>
+                      <a:prstDash val="solid"/>
+                      <a:round/>
+                      <a:headEnd type="none" w="med" len="med"/>
+                      <a:tailEnd type="none" w="med" len="med"/>
+                    </a:lnL>
+                    <a:lnR w="12700" cap="flat" cmpd="sng" algn="ctr">
+                      <a:solidFill>
+                        <a:srgbClr val="D5DBE3"/>
+                      </a:solidFill>
+                      <a:prstDash val="solid"/>
+                      <a:round/>
+                      <a:headEnd type="none" w="med" len="med"/>
+                      <a:tailEnd type="none" w="med" len="med"/>
+                    </a:lnR>
+                    <a:lnT w="12700" cap="flat" cmpd="sng" algn="ctr">
+                      <a:solidFill>
+                        <a:srgbClr val="D5DBE3"/>
+                      </a:solidFill>
+                      <a:prstDash val="solid"/>
+                      <a:round/>
+                      <a:headEnd type="none" w="med" len="med"/>
+                      <a:tailEnd type="none" w="med" len="med"/>
+                    </a:lnT>
+                    <a:lnB w="12700" cap="flat" cmpd="sng" algn="ctr">
+                      <a:solidFill>
+                        <a:srgbClr val="D5DBE3"/>
+                      </a:solidFill>
+                      <a:prstDash val="solid"/>
+                      <a:round/>
+                      <a:headEnd type="none" w="med" len="med"/>
+                      <a:tailEnd type="none" w="med" len="med"/>
+                    </a:lnB>
+                  </a:tcPr>
+                </a:tc>
+              </a:tr>
+              <a:tr h="0">
+                <a:tc>
+                  <a:txBody>
+                    <a:bodyPr/>
+                    <a:lstStyle/>
+                    <a:p>
+                      <a:pPr indent="0" marL="0">
+                        <a:buNone/>
+                      </a:pPr>
+                      <a:r>
+                        <a:rPr lang="en-US" sz="1400" dirty="0">
+                          <a:solidFill>
+                            <a:srgbClr val="1F2A37"/>
+                          </a:solidFill>
+                          <a:latin typeface="Microsoft YaHei" pitchFamily="34" charset="0"/>
+                          <a:ea typeface="Microsoft YaHei" pitchFamily="34" charset="-122"/>
+                          <a:cs typeface="Microsoft YaHei" pitchFamily="34" charset="-120"/>
+                        </a:rPr>
+                        <a:t>2</a:t>
+                      </a:r>
+                      <a:endParaRPr lang="en-US" sz="1400" dirty="0">
                         <a:latin typeface="Microsoft YaHei" charset="0"/>
                         <a:ea typeface="Microsoft YaHei" charset="0"/>
                         <a:cs typeface="Microsoft YaHei" charset="0"/>
@@ -9443,74 +10375,7 @@
                         <a:buNone/>
                       </a:pPr>
                       <a:r>
-                        <a:rPr lang="en-US" sz="1800" b="1" dirty="0">
-                          <a:solidFill>
-                            <a:srgbClr val="2E7D4F"/>
-                          </a:solidFill>
-                          <a:latin typeface="Microsoft YaHei" pitchFamily="34" charset="0"/>
-                          <a:ea typeface="Microsoft YaHei" pitchFamily="34" charset="-122"/>
-                          <a:cs typeface="Microsoft YaHei" pitchFamily="34" charset="-120"/>
-                        </a:rPr>
-                        <a:t>一致 → 接受修复 ✓</a:t>
-                      </a:r>
-                      <a:endParaRPr lang="en-US" sz="1800" dirty="0">
-                        <a:latin typeface="Microsoft YaHei" charset="0"/>
-                        <a:ea typeface="Microsoft YaHei" charset="0"/>
-                        <a:cs typeface="Microsoft YaHei" charset="0"/>
-                      </a:endParaRPr>
-                    </a:p>
-                  </a:txBody>
-                  <a:tcPr marL="91440" marR="91440" marT="54864" marB="54864" anchor="ctr">
-                    <a:lnL w="12700" cap="flat" cmpd="sng" algn="ctr">
-                      <a:solidFill>
-                        <a:srgbClr val="D5DBE3"/>
-                      </a:solidFill>
-                      <a:prstDash val="solid"/>
-                      <a:round/>
-                      <a:headEnd type="none" w="med" len="med"/>
-                      <a:tailEnd type="none" w="med" len="med"/>
-                    </a:lnL>
-                    <a:lnR w="12700" cap="flat" cmpd="sng" algn="ctr">
-                      <a:solidFill>
-                        <a:srgbClr val="D5DBE3"/>
-                      </a:solidFill>
-                      <a:prstDash val="solid"/>
-                      <a:round/>
-                      <a:headEnd type="none" w="med" len="med"/>
-                      <a:tailEnd type="none" w="med" len="med"/>
-                    </a:lnR>
-                    <a:lnT w="12700" cap="flat" cmpd="sng" algn="ctr">
-                      <a:solidFill>
-                        <a:srgbClr val="D5DBE3"/>
-                      </a:solidFill>
-                      <a:prstDash val="solid"/>
-                      <a:round/>
-                      <a:headEnd type="none" w="med" len="med"/>
-                      <a:tailEnd type="none" w="med" len="med"/>
-                    </a:lnT>
-                    <a:lnB w="12700" cap="flat" cmpd="sng" algn="ctr">
-                      <a:solidFill>
-                        <a:srgbClr val="D5DBE3"/>
-                      </a:solidFill>
-                      <a:prstDash val="solid"/>
-                      <a:round/>
-                      <a:headEnd type="none" w="med" len="med"/>
-                      <a:tailEnd type="none" w="med" len="med"/>
-                    </a:lnB>
-                  </a:tcPr>
-                </a:tc>
-              </a:tr>
-              <a:tr h="594360">
-                <a:tc>
-                  <a:txBody>
-                    <a:bodyPr/>
-                    <a:lstStyle/>
-                    <a:p>
-                      <a:pPr indent="0" marL="0">
-                        <a:buNone/>
-                      </a:pPr>
-                      <a:r>
-                        <a:rPr lang="en-US" sz="1800" dirty="0">
+                        <a:rPr lang="en-US" sz="1400" dirty="0">
                           <a:solidFill>
                             <a:srgbClr val="1F2A37"/>
                           </a:solidFill>
@@ -9518,9 +10383,9 @@
                           <a:ea typeface="Microsoft YaHei" pitchFamily="34" charset="-122"/>
                           <a:cs typeface="Microsoft YaHei" pitchFamily="34" charset="-120"/>
                         </a:rPr>
-                        <a:t>现在的数据</a:t>
+                        <a:t>在取值少的列上逐个试过滤</a:t>
                       </a:r>
-                      <a:endParaRPr lang="en-US" sz="1800" dirty="0">
+                      <a:endParaRPr lang="en-US" sz="1400" dirty="0">
                         <a:latin typeface="Microsoft YaHei" charset="0"/>
                         <a:ea typeface="Microsoft YaHei" charset="0"/>
                         <a:cs typeface="Microsoft YaHei" charset="0"/>
@@ -9575,7 +10440,7 @@
                         <a:buNone/>
                       </a:pPr>
                       <a:r>
-                        <a:rPr lang="en-US" sz="1800" dirty="0">
+                        <a:rPr lang="en-US" sz="1400" dirty="0">
                           <a:solidFill>
                             <a:srgbClr val="1F2A37"/>
                           </a:solidFill>
@@ -9583,9 +10448,76 @@
                           <a:ea typeface="Microsoft YaHei" pitchFamily="34" charset="-122"/>
                           <a:cs typeface="Microsoft YaHei" pitchFamily="34" charset="-120"/>
                         </a:rPr>
-                        <a:t>1489.1 万</a:t>
+                        <a:t>只有 ss_is_current = '1' 能做到每笔一行、一笔不少</a:t>
                       </a:r>
-                      <a:endParaRPr lang="en-US" sz="1800" dirty="0">
+                      <a:endParaRPr lang="en-US" sz="1400" dirty="0">
+                        <a:latin typeface="Microsoft YaHei" charset="0"/>
+                        <a:ea typeface="Microsoft YaHei" charset="0"/>
+                        <a:cs typeface="Microsoft YaHei" charset="0"/>
+                      </a:endParaRPr>
+                    </a:p>
+                  </a:txBody>
+                  <a:tcPr marL="91440" marR="91440" marT="54864" marB="54864" anchor="ctr">
+                    <a:lnL w="12700" cap="flat" cmpd="sng" algn="ctr">
+                      <a:solidFill>
+                        <a:srgbClr val="D5DBE3"/>
+                      </a:solidFill>
+                      <a:prstDash val="solid"/>
+                      <a:round/>
+                      <a:headEnd type="none" w="med" len="med"/>
+                      <a:tailEnd type="none" w="med" len="med"/>
+                    </a:lnL>
+                    <a:lnR w="12700" cap="flat" cmpd="sng" algn="ctr">
+                      <a:solidFill>
+                        <a:srgbClr val="D5DBE3"/>
+                      </a:solidFill>
+                      <a:prstDash val="solid"/>
+                      <a:round/>
+                      <a:headEnd type="none" w="med" len="med"/>
+                      <a:tailEnd type="none" w="med" len="med"/>
+                    </a:lnR>
+                    <a:lnT w="12700" cap="flat" cmpd="sng" algn="ctr">
+                      <a:solidFill>
+                        <a:srgbClr val="D5DBE3"/>
+                      </a:solidFill>
+                      <a:prstDash val="solid"/>
+                      <a:round/>
+                      <a:headEnd type="none" w="med" len="med"/>
+                      <a:tailEnd type="none" w="med" len="med"/>
+                    </a:lnT>
+                    <a:lnB w="12700" cap="flat" cmpd="sng" algn="ctr">
+                      <a:solidFill>
+                        <a:srgbClr val="D5DBE3"/>
+                      </a:solidFill>
+                      <a:prstDash val="solid"/>
+                      <a:round/>
+                      <a:headEnd type="none" w="med" len="med"/>
+                      <a:tailEnd type="none" w="med" len="med"/>
+                    </a:lnB>
+                  </a:tcPr>
+                </a:tc>
+              </a:tr>
+              <a:tr h="0">
+                <a:tc>
+                  <a:txBody>
+                    <a:bodyPr/>
+                    <a:lstStyle/>
+                    <a:p>
+                      <a:pPr indent="0" marL="0">
+                        <a:buNone/>
+                      </a:pPr>
+                      <a:r>
+                        <a:rPr lang="en-US" sz="1400" dirty="0">
+                          <a:solidFill>
+                            <a:srgbClr val="1F2A37"/>
+                          </a:solidFill>
+                          <a:latin typeface="Microsoft YaHei" pitchFamily="34" charset="0"/>
+                          <a:ea typeface="Microsoft YaHei" pitchFamily="34" charset="-122"/>
+                          <a:cs typeface="Microsoft YaHei" pitchFamily="34" charset="-120"/>
+                        </a:rPr>
+                        <a:t>3</a:t>
+                      </a:r>
+                      <a:endParaRPr lang="en-US" sz="1400" dirty="0">
                         <a:latin typeface="Microsoft YaHei" charset="0"/>
                         <a:ea typeface="Microsoft YaHei" charset="0"/>
                         <a:cs typeface="Microsoft YaHei" charset="0"/>
@@ -9640,7 +10572,7 @@
                         <a:buNone/>
                       </a:pPr>
                       <a:r>
-                        <a:rPr lang="en-US" sz="1800" dirty="0">
+                        <a:rPr lang="en-US" sz="1400" dirty="0">
                           <a:solidFill>
                             <a:srgbClr val="1F2A37"/>
                           </a:solidFill>
@@ -9648,9 +10580,9 @@
                           <a:ea typeface="Microsoft YaHei" pitchFamily="34" charset="-122"/>
                           <a:cs typeface="Microsoft YaHei" pitchFamily="34" charset="-120"/>
                         </a:rPr>
-                        <a:t>1342.4 万</a:t>
+                        <a:t>对这个修复做 4 项检查：合法性、当前数据上的粒度、SQL 审查、回归测试</a:t>
                       </a:r>
-                      <a:endParaRPr lang="en-US" sz="1800" dirty="0">
+                      <a:endParaRPr lang="en-US" sz="1400" dirty="0">
                         <a:latin typeface="Microsoft YaHei" charset="0"/>
                         <a:ea typeface="Microsoft YaHei" charset="0"/>
                         <a:cs typeface="Microsoft YaHei" charset="0"/>
@@ -9705,17 +10637,678 @@
                         <a:buNone/>
                       </a:pPr>
                       <a:r>
-                        <a:rPr lang="en-US" sz="1800" b="1" dirty="0">
+                        <a:rPr lang="en-US" sz="1400" b="1" dirty="0">
                           <a:solidFill>
-                            <a:srgbClr val="B5392A"/>
+                            <a:srgbClr val="2E7D4F"/>
                           </a:solidFill>
                           <a:latin typeface="Microsoft YaHei" pitchFamily="34" charset="0"/>
                           <a:ea typeface="Microsoft YaHei" pitchFamily="34" charset="-122"/>
                           <a:cs typeface="Microsoft YaHei" pitchFamily="34" charset="-120"/>
                         </a:rPr>
-                        <a:t>不一致 → 拒绝了正确的修复 ✗</a:t>
+                        <a:t>全部通过 → 发布 v2</a:t>
                       </a:r>
-                      <a:endParaRPr lang="en-US" sz="1800" dirty="0">
+                      <a:pPr indent="0" marL="0">
+                        <a:buNone/>
+                      </a:pPr>
+                      <a:r>
+                        <a:rPr lang="en-US" sz="1400" dirty="0">
+                          <a:solidFill>
+                            <a:srgbClr val="1F2A37"/>
+                          </a:solidFill>
+                          <a:latin typeface="Microsoft YaHei" pitchFamily="34" charset="0"/>
+                          <a:ea typeface="Microsoft YaHei" pitchFamily="34" charset="-122"/>
+                          <a:cs typeface="Microsoft YaHei" pitchFamily="34" charset="-120"/>
+                        </a:rPr>
+                        <a:t>（1–3 步共 28.7 秒）</a:t>
+                      </a:r>
+                      <a:endParaRPr lang="en-US" sz="1400" dirty="0">
+                        <a:latin typeface="Microsoft YaHei" charset="0"/>
+                        <a:ea typeface="Microsoft YaHei" charset="0"/>
+                        <a:cs typeface="Microsoft YaHei" charset="0"/>
+                      </a:endParaRPr>
+                    </a:p>
+                  </a:txBody>
+                  <a:tcPr marL="91440" marR="91440" marT="54864" marB="54864" anchor="ctr">
+                    <a:lnL w="12700" cap="flat" cmpd="sng" algn="ctr">
+                      <a:solidFill>
+                        <a:srgbClr val="D5DBE3"/>
+                      </a:solidFill>
+                      <a:prstDash val="solid"/>
+                      <a:round/>
+                      <a:headEnd type="none" w="med" len="med"/>
+                      <a:tailEnd type="none" w="med" len="med"/>
+                    </a:lnL>
+                    <a:lnR w="12700" cap="flat" cmpd="sng" algn="ctr">
+                      <a:solidFill>
+                        <a:srgbClr val="D5DBE3"/>
+                      </a:solidFill>
+                      <a:prstDash val="solid"/>
+                      <a:round/>
+                      <a:headEnd type="none" w="med" len="med"/>
+                      <a:tailEnd type="none" w="med" len="med"/>
+                    </a:lnR>
+                    <a:lnT w="12700" cap="flat" cmpd="sng" algn="ctr">
+                      <a:solidFill>
+                        <a:srgbClr val="D5DBE3"/>
+                      </a:solidFill>
+                      <a:prstDash val="solid"/>
+                      <a:round/>
+                      <a:headEnd type="none" w="med" len="med"/>
+                      <a:tailEnd type="none" w="med" len="med"/>
+                    </a:lnT>
+                    <a:lnB w="12700" cap="flat" cmpd="sng" algn="ctr">
+                      <a:solidFill>
+                        <a:srgbClr val="D5DBE3"/>
+                      </a:solidFill>
+                      <a:prstDash val="solid"/>
+                      <a:round/>
+                      <a:headEnd type="none" w="med" len="med"/>
+                      <a:tailEnd type="none" w="med" len="med"/>
+                    </a:lnB>
+                  </a:tcPr>
+                </a:tc>
+              </a:tr>
+              <a:tr h="0">
+                <a:tc>
+                  <a:txBody>
+                    <a:bodyPr/>
+                    <a:lstStyle/>
+                    <a:p>
+                      <a:pPr indent="0" marL="0">
+                        <a:buNone/>
+                      </a:pPr>
+                      <a:r>
+                        <a:rPr lang="en-US" sz="1400" dirty="0">
+                          <a:solidFill>
+                            <a:srgbClr val="1F2A37"/>
+                          </a:solidFill>
+                          <a:latin typeface="Microsoft YaHei" pitchFamily="34" charset="0"/>
+                          <a:ea typeface="Microsoft YaHei" pitchFamily="34" charset="-122"/>
+                          <a:cs typeface="Microsoft YaHei" pitchFamily="34" charset="-120"/>
+                        </a:rPr>
+                        <a:t>4</a:t>
+                      </a:r>
+                      <a:endParaRPr lang="en-US" sz="1400" dirty="0">
+                        <a:latin typeface="Microsoft YaHei" charset="0"/>
+                        <a:ea typeface="Microsoft YaHei" charset="0"/>
+                        <a:cs typeface="Microsoft YaHei" charset="0"/>
+                      </a:endParaRPr>
+                    </a:p>
+                  </a:txBody>
+                  <a:tcPr marL="91440" marR="91440" marT="54864" marB="54864" anchor="ctr">
+                    <a:lnL w="12700" cap="flat" cmpd="sng" algn="ctr">
+                      <a:solidFill>
+                        <a:srgbClr val="D5DBE3"/>
+                      </a:solidFill>
+                      <a:prstDash val="solid"/>
+                      <a:round/>
+                      <a:headEnd type="none" w="med" len="med"/>
+                      <a:tailEnd type="none" w="med" len="med"/>
+                    </a:lnL>
+                    <a:lnR w="12700" cap="flat" cmpd="sng" algn="ctr">
+                      <a:solidFill>
+                        <a:srgbClr val="D5DBE3"/>
+                      </a:solidFill>
+                      <a:prstDash val="solid"/>
+                      <a:round/>
+                      <a:headEnd type="none" w="med" len="med"/>
+                      <a:tailEnd type="none" w="med" len="med"/>
+                    </a:lnR>
+                    <a:lnT w="12700" cap="flat" cmpd="sng" algn="ctr">
+                      <a:solidFill>
+                        <a:srgbClr val="D5DBE3"/>
+                      </a:solidFill>
+                      <a:prstDash val="solid"/>
+                      <a:round/>
+                      <a:headEnd type="none" w="med" len="med"/>
+                      <a:tailEnd type="none" w="med" len="med"/>
+                    </a:lnT>
+                    <a:lnB w="12700" cap="flat" cmpd="sng" algn="ctr">
+                      <a:solidFill>
+                        <a:srgbClr val="D5DBE3"/>
+                      </a:solidFill>
+                      <a:prstDash val="solid"/>
+                      <a:round/>
+                      <a:headEnd type="none" w="med" len="med"/>
+                      <a:tailEnd type="none" w="med" len="med"/>
+                    </a:lnB>
+                  </a:tcPr>
+                </a:tc>
+                <a:tc>
+                  <a:txBody>
+                    <a:bodyPr/>
+                    <a:lstStyle/>
+                    <a:p>
+                      <a:pPr indent="0" marL="0">
+                        <a:buNone/>
+                      </a:pPr>
+                      <a:r>
+                        <a:rPr lang="en-US" sz="1400" dirty="0">
+                          <a:solidFill>
+                            <a:srgbClr val="1F2A37"/>
+                          </a:solidFill>
+                          <a:latin typeface="Microsoft YaHei" pitchFamily="34" charset="0"/>
+                          <a:ea typeface="Microsoft YaHei" pitchFamily="34" charset="-122"/>
+                          <a:cs typeface="Microsoft YaHei" pitchFamily="34" charset="-120"/>
+                        </a:rPr>
+                        <a:t>接着检查“门店营业额”：同一条规则、同一个数据版本已经有结果</a:t>
+                      </a:r>
+                      <a:endParaRPr lang="en-US" sz="1400" dirty="0">
+                        <a:latin typeface="Microsoft YaHei" charset="0"/>
+                        <a:ea typeface="Microsoft YaHei" charset="0"/>
+                        <a:cs typeface="Microsoft YaHei" charset="0"/>
+                      </a:endParaRPr>
+                    </a:p>
+                  </a:txBody>
+                  <a:tcPr marL="91440" marR="91440" marT="54864" marB="54864" anchor="ctr">
+                    <a:lnL w="12700" cap="flat" cmpd="sng" algn="ctr">
+                      <a:solidFill>
+                        <a:srgbClr val="D5DBE3"/>
+                      </a:solidFill>
+                      <a:prstDash val="solid"/>
+                      <a:round/>
+                      <a:headEnd type="none" w="med" len="med"/>
+                      <a:tailEnd type="none" w="med" len="med"/>
+                    </a:lnL>
+                    <a:lnR w="12700" cap="flat" cmpd="sng" algn="ctr">
+                      <a:solidFill>
+                        <a:srgbClr val="D5DBE3"/>
+                      </a:solidFill>
+                      <a:prstDash val="solid"/>
+                      <a:round/>
+                      <a:headEnd type="none" w="med" len="med"/>
+                      <a:tailEnd type="none" w="med" len="med"/>
+                    </a:lnR>
+                    <a:lnT w="12700" cap="flat" cmpd="sng" algn="ctr">
+                      <a:solidFill>
+                        <a:srgbClr val="D5DBE3"/>
+                      </a:solidFill>
+                      <a:prstDash val="solid"/>
+                      <a:round/>
+                      <a:headEnd type="none" w="med" len="med"/>
+                      <a:tailEnd type="none" w="med" len="med"/>
+                    </a:lnT>
+                    <a:lnB w="12700" cap="flat" cmpd="sng" algn="ctr">
+                      <a:solidFill>
+                        <a:srgbClr val="D5DBE3"/>
+                      </a:solidFill>
+                      <a:prstDash val="solid"/>
+                      <a:round/>
+                      <a:headEnd type="none" w="med" len="med"/>
+                      <a:tailEnd type="none" w="med" len="med"/>
+                    </a:lnB>
+                  </a:tcPr>
+                </a:tc>
+                <a:tc>
+                  <a:txBody>
+                    <a:bodyPr/>
+                    <a:lstStyle/>
+                    <a:p>
+                      <a:pPr indent="0" marL="0">
+                        <a:buNone/>
+                      </a:pPr>
+                      <a:r>
+                        <a:rPr lang="en-US" sz="1400" dirty="0">
+                          <a:solidFill>
+                            <a:srgbClr val="1F2A37"/>
+                          </a:solidFill>
+                          <a:latin typeface="Microsoft YaHei" pitchFamily="34" charset="0"/>
+                          <a:ea typeface="Microsoft YaHei" pitchFamily="34" charset="-122"/>
+                          <a:cs typeface="Microsoft YaHei" pitchFamily="34" charset="-120"/>
+                        </a:rPr>
+                        <a:t>复用校验结果和修复，</a:t>
+                      </a:r>
+                      <a:pPr indent="0" marL="0">
+                        <a:buNone/>
+                      </a:pPr>
+                      <a:r>
+                        <a:rPr lang="en-US" sz="1400" b="1" dirty="0">
+                          <a:solidFill>
+                            <a:srgbClr val="1D5BA6"/>
+                          </a:solidFill>
+                          <a:latin typeface="Microsoft YaHei" pitchFamily="34" charset="0"/>
+                          <a:ea typeface="Microsoft YaHei" pitchFamily="34" charset="-122"/>
+                          <a:cs typeface="Microsoft YaHei" pitchFamily="34" charset="-120"/>
+                        </a:rPr>
+                        <a:t>45.8 毫秒</a:t>
+                      </a:r>
+                      <a:pPr indent="0" marL="0">
+                        <a:buNone/>
+                      </a:pPr>
+                      <a:r>
+                        <a:rPr lang="en-US" sz="1400" dirty="0">
+                          <a:solidFill>
+                            <a:srgbClr val="1F2A37"/>
+                          </a:solidFill>
+                          <a:latin typeface="Microsoft YaHei" pitchFamily="34" charset="0"/>
+                          <a:ea typeface="Microsoft YaHei" pitchFamily="34" charset="-122"/>
+                          <a:cs typeface="Microsoft YaHei" pitchFamily="34" charset="-120"/>
+                        </a:rPr>
+                        <a:t>就发布了 v2</a:t>
+                      </a:r>
+                      <a:endParaRPr lang="en-US" sz="1400" dirty="0">
+                        <a:latin typeface="Microsoft YaHei" charset="0"/>
+                        <a:ea typeface="Microsoft YaHei" charset="0"/>
+                        <a:cs typeface="Microsoft YaHei" charset="0"/>
+                      </a:endParaRPr>
+                    </a:p>
+                  </a:txBody>
+                  <a:tcPr marL="91440" marR="91440" marT="54864" marB="54864" anchor="ctr">
+                    <a:lnL w="12700" cap="flat" cmpd="sng" algn="ctr">
+                      <a:solidFill>
+                        <a:srgbClr val="D5DBE3"/>
+                      </a:solidFill>
+                      <a:prstDash val="solid"/>
+                      <a:round/>
+                      <a:headEnd type="none" w="med" len="med"/>
+                      <a:tailEnd type="none" w="med" len="med"/>
+                    </a:lnL>
+                    <a:lnR w="12700" cap="flat" cmpd="sng" algn="ctr">
+                      <a:solidFill>
+                        <a:srgbClr val="D5DBE3"/>
+                      </a:solidFill>
+                      <a:prstDash val="solid"/>
+                      <a:round/>
+                      <a:headEnd type="none" w="med" len="med"/>
+                      <a:tailEnd type="none" w="med" len="med"/>
+                    </a:lnR>
+                    <a:lnT w="12700" cap="flat" cmpd="sng" algn="ctr">
+                      <a:solidFill>
+                        <a:srgbClr val="D5DBE3"/>
+                      </a:solidFill>
+                      <a:prstDash val="solid"/>
+                      <a:round/>
+                      <a:headEnd type="none" w="med" len="med"/>
+                      <a:tailEnd type="none" w="med" len="med"/>
+                    </a:lnT>
+                    <a:lnB w="12700" cap="flat" cmpd="sng" algn="ctr">
+                      <a:solidFill>
+                        <a:srgbClr val="D5DBE3"/>
+                      </a:solidFill>
+                      <a:prstDash val="solid"/>
+                      <a:round/>
+                      <a:headEnd type="none" w="med" len="med"/>
+                      <a:tailEnd type="none" w="med" len="med"/>
+                    </a:lnB>
+                  </a:tcPr>
+                </a:tc>
+              </a:tr>
+              <a:tr h="0">
+                <a:tc>
+                  <a:txBody>
+                    <a:bodyPr/>
+                    <a:lstStyle/>
+                    <a:p>
+                      <a:pPr indent="0" marL="0">
+                        <a:buNone/>
+                      </a:pPr>
+                      <a:r>
+                        <a:rPr lang="en-US" sz="1400" dirty="0">
+                          <a:solidFill>
+                            <a:srgbClr val="1F2A37"/>
+                          </a:solidFill>
+                          <a:latin typeface="Microsoft YaHei" pitchFamily="34" charset="0"/>
+                          <a:ea typeface="Microsoft YaHei" pitchFamily="34" charset="-122"/>
+                          <a:cs typeface="Microsoft YaHei" pitchFamily="34" charset="-120"/>
+                        </a:rPr>
+                        <a:t>5</a:t>
+                      </a:r>
+                      <a:endParaRPr lang="en-US" sz="1400" dirty="0">
+                        <a:latin typeface="Microsoft YaHei" charset="0"/>
+                        <a:ea typeface="Microsoft YaHei" charset="0"/>
+                        <a:cs typeface="Microsoft YaHei" charset="0"/>
+                      </a:endParaRPr>
+                    </a:p>
+                  </a:txBody>
+                  <a:tcPr marL="91440" marR="91440" marT="54864" marB="54864" anchor="ctr">
+                    <a:lnL w="12700" cap="flat" cmpd="sng" algn="ctr">
+                      <a:solidFill>
+                        <a:srgbClr val="D5DBE3"/>
+                      </a:solidFill>
+                      <a:prstDash val="solid"/>
+                      <a:round/>
+                      <a:headEnd type="none" w="med" len="med"/>
+                      <a:tailEnd type="none" w="med" len="med"/>
+                    </a:lnL>
+                    <a:lnR w="12700" cap="flat" cmpd="sng" algn="ctr">
+                      <a:solidFill>
+                        <a:srgbClr val="D5DBE3"/>
+                      </a:solidFill>
+                      <a:prstDash val="solid"/>
+                      <a:round/>
+                      <a:headEnd type="none" w="med" len="med"/>
+                      <a:tailEnd type="none" w="med" len="med"/>
+                    </a:lnR>
+                    <a:lnT w="12700" cap="flat" cmpd="sng" algn="ctr">
+                      <a:solidFill>
+                        <a:srgbClr val="D5DBE3"/>
+                      </a:solidFill>
+                      <a:prstDash val="solid"/>
+                      <a:round/>
+                      <a:headEnd type="none" w="med" len="med"/>
+                      <a:tailEnd type="none" w="med" len="med"/>
+                    </a:lnT>
+                    <a:lnB w="12700" cap="flat" cmpd="sng" algn="ctr">
+                      <a:solidFill>
+                        <a:srgbClr val="D5DBE3"/>
+                      </a:solidFill>
+                      <a:prstDash val="solid"/>
+                      <a:round/>
+                      <a:headEnd type="none" w="med" len="med"/>
+                      <a:tailEnd type="none" w="med" len="med"/>
+                    </a:lnB>
+                  </a:tcPr>
+                </a:tc>
+                <a:tc>
+                  <a:txBody>
+                    <a:bodyPr/>
+                    <a:lstStyle/>
+                    <a:p>
+                      <a:pPr indent="0" marL="0">
+                        <a:buNone/>
+                      </a:pPr>
+                      <a:r>
+                        <a:rPr lang="en-US" sz="1400" dirty="0">
+                          <a:solidFill>
+                            <a:srgbClr val="1F2A37"/>
+                          </a:solidFill>
+                          <a:latin typeface="Microsoft YaHei" pitchFamily="34" charset="0"/>
+                          <a:ea typeface="Microsoft YaHei" pitchFamily="34" charset="-122"/>
+                          <a:cs typeface="Microsoft YaHei" pitchFamily="34" charset="-120"/>
+                        </a:rPr>
+                        <a:t>“门店退货率”要把销售和退货关联起来</a:t>
+                      </a:r>
+                      <a:endParaRPr lang="en-US" sz="1400" dirty="0">
+                        <a:latin typeface="Microsoft YaHei" charset="0"/>
+                        <a:ea typeface="Microsoft YaHei" charset="0"/>
+                        <a:cs typeface="Microsoft YaHei" charset="0"/>
+                      </a:endParaRPr>
+                    </a:p>
+                  </a:txBody>
+                  <a:tcPr marL="91440" marR="91440" marT="54864" marB="54864" anchor="ctr">
+                    <a:lnL w="12700" cap="flat" cmpd="sng" algn="ctr">
+                      <a:solidFill>
+                        <a:srgbClr val="D5DBE3"/>
+                      </a:solidFill>
+                      <a:prstDash val="solid"/>
+                      <a:round/>
+                      <a:headEnd type="none" w="med" len="med"/>
+                      <a:tailEnd type="none" w="med" len="med"/>
+                    </a:lnL>
+                    <a:lnR w="12700" cap="flat" cmpd="sng" algn="ctr">
+                      <a:solidFill>
+                        <a:srgbClr val="D5DBE3"/>
+                      </a:solidFill>
+                      <a:prstDash val="solid"/>
+                      <a:round/>
+                      <a:headEnd type="none" w="med" len="med"/>
+                      <a:tailEnd type="none" w="med" len="med"/>
+                    </a:lnR>
+                    <a:lnT w="12700" cap="flat" cmpd="sng" algn="ctr">
+                      <a:solidFill>
+                        <a:srgbClr val="D5DBE3"/>
+                      </a:solidFill>
+                      <a:prstDash val="solid"/>
+                      <a:round/>
+                      <a:headEnd type="none" w="med" len="med"/>
+                      <a:tailEnd type="none" w="med" len="med"/>
+                    </a:lnT>
+                    <a:lnB w="12700" cap="flat" cmpd="sng" algn="ctr">
+                      <a:solidFill>
+                        <a:srgbClr val="D5DBE3"/>
+                      </a:solidFill>
+                      <a:prstDash val="solid"/>
+                      <a:round/>
+                      <a:headEnd type="none" w="med" len="med"/>
+                      <a:tailEnd type="none" w="med" len="med"/>
+                    </a:lnB>
+                  </a:tcPr>
+                </a:tc>
+                <a:tc>
+                  <a:txBody>
+                    <a:bodyPr/>
+                    <a:lstStyle/>
+                    <a:p>
+                      <a:pPr indent="0" marL="0">
+                        <a:buNone/>
+                      </a:pPr>
+                      <a:r>
+                        <a:rPr lang="en-US" sz="1400" dirty="0">
+                          <a:solidFill>
+                            <a:srgbClr val="1F2A37"/>
+                          </a:solidFill>
+                          <a:latin typeface="Microsoft YaHei" pitchFamily="34" charset="0"/>
+                          <a:ea typeface="Microsoft YaHei" pitchFamily="34" charset="-122"/>
+                          <a:cs typeface="Microsoft YaHei" pitchFamily="34" charset="-120"/>
+                        </a:rPr>
+                        <a:t>关联路径现在要求只用当前行 → 也修复为 v2</a:t>
+                      </a:r>
+                      <a:endParaRPr lang="en-US" sz="1400" dirty="0">
+                        <a:latin typeface="Microsoft YaHei" charset="0"/>
+                        <a:ea typeface="Microsoft YaHei" charset="0"/>
+                        <a:cs typeface="Microsoft YaHei" charset="0"/>
+                      </a:endParaRPr>
+                    </a:p>
+                  </a:txBody>
+                  <a:tcPr marL="91440" marR="91440" marT="54864" marB="54864" anchor="ctr">
+                    <a:lnL w="12700" cap="flat" cmpd="sng" algn="ctr">
+                      <a:solidFill>
+                        <a:srgbClr val="D5DBE3"/>
+                      </a:solidFill>
+                      <a:prstDash val="solid"/>
+                      <a:round/>
+                      <a:headEnd type="none" w="med" len="med"/>
+                      <a:tailEnd type="none" w="med" len="med"/>
+                    </a:lnL>
+                    <a:lnR w="12700" cap="flat" cmpd="sng" algn="ctr">
+                      <a:solidFill>
+                        <a:srgbClr val="D5DBE3"/>
+                      </a:solidFill>
+                      <a:prstDash val="solid"/>
+                      <a:round/>
+                      <a:headEnd type="none" w="med" len="med"/>
+                      <a:tailEnd type="none" w="med" len="med"/>
+                    </a:lnR>
+                    <a:lnT w="12700" cap="flat" cmpd="sng" algn="ctr">
+                      <a:solidFill>
+                        <a:srgbClr val="D5DBE3"/>
+                      </a:solidFill>
+                      <a:prstDash val="solid"/>
+                      <a:round/>
+                      <a:headEnd type="none" w="med" len="med"/>
+                      <a:tailEnd type="none" w="med" len="med"/>
+                    </a:lnT>
+                    <a:lnB w="12700" cap="flat" cmpd="sng" algn="ctr">
+                      <a:solidFill>
+                        <a:srgbClr val="D5DBE3"/>
+                      </a:solidFill>
+                      <a:prstDash val="solid"/>
+                      <a:round/>
+                      <a:headEnd type="none" w="med" len="med"/>
+                      <a:tailEnd type="none" w="med" len="med"/>
+                    </a:lnB>
+                  </a:tcPr>
+                </a:tc>
+              </a:tr>
+              <a:tr h="0">
+                <a:tc>
+                  <a:txBody>
+                    <a:bodyPr/>
+                    <a:lstStyle/>
+                    <a:p>
+                      <a:pPr indent="0" marL="0">
+                        <a:buNone/>
+                      </a:pPr>
+                      <a:r>
+                        <a:rPr lang="en-US" sz="1400" dirty="0">
+                          <a:solidFill>
+                            <a:srgbClr val="1F2A37"/>
+                          </a:solidFill>
+                          <a:latin typeface="Microsoft YaHei" pitchFamily="34" charset="0"/>
+                          <a:ea typeface="Microsoft YaHei" pitchFamily="34" charset="-122"/>
+                          <a:cs typeface="Microsoft YaHei" pitchFamily="34" charset="-120"/>
+                        </a:rPr>
+                        <a:t>6</a:t>
+                      </a:r>
+                      <a:endParaRPr lang="en-US" sz="1400" dirty="0">
+                        <a:latin typeface="Microsoft YaHei" charset="0"/>
+                        <a:ea typeface="Microsoft YaHei" charset="0"/>
+                        <a:cs typeface="Microsoft YaHei" charset="0"/>
+                      </a:endParaRPr>
+                    </a:p>
+                  </a:txBody>
+                  <a:tcPr marL="91440" marR="91440" marT="54864" marB="54864" anchor="ctr">
+                    <a:lnL w="12700" cap="flat" cmpd="sng" algn="ctr">
+                      <a:solidFill>
+                        <a:srgbClr val="D5DBE3"/>
+                      </a:solidFill>
+                      <a:prstDash val="solid"/>
+                      <a:round/>
+                      <a:headEnd type="none" w="med" len="med"/>
+                      <a:tailEnd type="none" w="med" len="med"/>
+                    </a:lnL>
+                    <a:lnR w="12700" cap="flat" cmpd="sng" algn="ctr">
+                      <a:solidFill>
+                        <a:srgbClr val="D5DBE3"/>
+                      </a:solidFill>
+                      <a:prstDash val="solid"/>
+                      <a:round/>
+                      <a:headEnd type="none" w="med" len="med"/>
+                      <a:tailEnd type="none" w="med" len="med"/>
+                    </a:lnR>
+                    <a:lnT w="12700" cap="flat" cmpd="sng" algn="ctr">
+                      <a:solidFill>
+                        <a:srgbClr val="D5DBE3"/>
+                      </a:solidFill>
+                      <a:prstDash val="solid"/>
+                      <a:round/>
+                      <a:headEnd type="none" w="med" len="med"/>
+                      <a:tailEnd type="none" w="med" len="med"/>
+                    </a:lnT>
+                    <a:lnB w="12700" cap="flat" cmpd="sng" algn="ctr">
+                      <a:solidFill>
+                        <a:srgbClr val="D5DBE3"/>
+                      </a:solidFill>
+                      <a:prstDash val="solid"/>
+                      <a:round/>
+                      <a:headEnd type="none" w="med" len="med"/>
+                      <a:tailEnd type="none" w="med" len="med"/>
+                    </a:lnB>
+                  </a:tcPr>
+                </a:tc>
+                <a:tc>
+                  <a:txBody>
+                    <a:bodyPr/>
+                    <a:lstStyle/>
+                    <a:p>
+                      <a:pPr indent="0" marL="0">
+                        <a:buNone/>
+                      </a:pPr>
+                      <a:r>
+                        <a:rPr lang="en-US" sz="1400" dirty="0">
+                          <a:solidFill>
+                            <a:srgbClr val="1F2A37"/>
+                          </a:solidFill>
+                          <a:latin typeface="Microsoft YaHei" pitchFamily="34" charset="0"/>
+                          <a:ea typeface="Microsoft YaHei" pitchFamily="34" charset="-122"/>
+                          <a:cs typeface="Microsoft YaHei" pitchFamily="34" charset="-120"/>
+                        </a:rPr>
+                        <a:t>用户智能体 B 问“9 月门店营业额”</a:t>
+                      </a:r>
+                      <a:endParaRPr lang="en-US" sz="1400" dirty="0">
+                        <a:latin typeface="Microsoft YaHei" charset="0"/>
+                        <a:ea typeface="Microsoft YaHei" charset="0"/>
+                        <a:cs typeface="Microsoft YaHei" charset="0"/>
+                      </a:endParaRPr>
+                    </a:p>
+                  </a:txBody>
+                  <a:tcPr marL="91440" marR="91440" marT="54864" marB="54864" anchor="ctr">
+                    <a:lnL w="12700" cap="flat" cmpd="sng" algn="ctr">
+                      <a:solidFill>
+                        <a:srgbClr val="D5DBE3"/>
+                      </a:solidFill>
+                      <a:prstDash val="solid"/>
+                      <a:round/>
+                      <a:headEnd type="none" w="med" len="med"/>
+                      <a:tailEnd type="none" w="med" len="med"/>
+                    </a:lnL>
+                    <a:lnR w="12700" cap="flat" cmpd="sng" algn="ctr">
+                      <a:solidFill>
+                        <a:srgbClr val="D5DBE3"/>
+                      </a:solidFill>
+                      <a:prstDash val="solid"/>
+                      <a:round/>
+                      <a:headEnd type="none" w="med" len="med"/>
+                      <a:tailEnd type="none" w="med" len="med"/>
+                    </a:lnR>
+                    <a:lnT w="12700" cap="flat" cmpd="sng" algn="ctr">
+                      <a:solidFill>
+                        <a:srgbClr val="D5DBE3"/>
+                      </a:solidFill>
+                      <a:prstDash val="solid"/>
+                      <a:round/>
+                      <a:headEnd type="none" w="med" len="med"/>
+                      <a:tailEnd type="none" w="med" len="med"/>
+                    </a:lnT>
+                    <a:lnB w="12700" cap="flat" cmpd="sng" algn="ctr">
+                      <a:solidFill>
+                        <a:srgbClr val="D5DBE3"/>
+                      </a:solidFill>
+                      <a:prstDash val="solid"/>
+                      <a:round/>
+                      <a:headEnd type="none" w="med" len="med"/>
+                      <a:tailEnd type="none" w="med" len="med"/>
+                    </a:lnB>
+                  </a:tcPr>
+                </a:tc>
+                <a:tc>
+                  <a:txBody>
+                    <a:bodyPr/>
+                    <a:lstStyle/>
+                    <a:p>
+                      <a:pPr indent="0" marL="0">
+                        <a:buNone/>
+                      </a:pPr>
+                      <a:r>
+                        <a:rPr lang="en-US" sz="1400" dirty="0">
+                          <a:solidFill>
+                            <a:srgbClr val="1F2A37"/>
+                          </a:solidFill>
+                          <a:latin typeface="Microsoft YaHei" pitchFamily="34" charset="0"/>
+                          <a:ea typeface="Microsoft YaHei" pitchFamily="34" charset="-122"/>
+                          <a:cs typeface="Microsoft YaHei" pitchFamily="34" charset="-120"/>
+                        </a:rPr>
+                        <a:t>收到 3 条提醒；SQL 带上 ss_is_current = '1'；答 </a:t>
+                      </a:r>
+                      <a:pPr indent="0" marL="0">
+                        <a:buNone/>
+                      </a:pPr>
+                      <a:r>
+                        <a:rPr lang="en-US" sz="1400" b="1" dirty="0">
+                          <a:solidFill>
+                            <a:srgbClr val="2E7D4F"/>
+                          </a:solidFill>
+                          <a:latin typeface="Microsoft YaHei" pitchFamily="34" charset="0"/>
+                          <a:ea typeface="Microsoft YaHei" pitchFamily="34" charset="-122"/>
+                          <a:cs typeface="Microsoft YaHei" pitchFamily="34" charset="-120"/>
+                        </a:rPr>
+                        <a:t>1293.3 万 ✓</a:t>
+                      </a:r>
+                      <a:pPr indent="0" marL="0">
+                        <a:buNone/>
+                      </a:pPr>
+                      <a:r>
+                        <a:rPr lang="en-US" sz="1400" dirty="0">
+                          <a:solidFill>
+                            <a:srgbClr val="1F2A37"/>
+                          </a:solidFill>
+                          <a:latin typeface="Microsoft YaHei" pitchFamily="34" charset="0"/>
+                          <a:ea typeface="Microsoft YaHei" pitchFamily="34" charset="-122"/>
+                          <a:cs typeface="Microsoft YaHei" pitchFamily="34" charset="-120"/>
+                        </a:rPr>
+                        <a:t>（4 轮，61.7 秒）</a:t>
+                      </a:r>
+                      <a:endParaRPr lang="en-US" sz="1400" dirty="0">
                         <a:latin typeface="Microsoft YaHei" charset="0"/>
                         <a:ea typeface="Microsoft YaHei" charset="0"/>
                         <a:cs typeface="Microsoft YaHei" charset="0"/>
@@ -9768,87 +11361,7 @@
       </p:graphicFrame>
       <p:sp>
         <p:nvSpPr>
-          <p:cNvPr id="5" name="Shape 2"/>
-          <p:cNvSpPr/>
-          <p:nvPr/>
-        </p:nvSpPr>
-        <p:spPr>
-          <a:xfrm>
-            <a:off x="548640" y="4206240"/>
-            <a:ext cx="11094415" cy="1371600"/>
-          </a:xfrm>
-          <a:prstGeom prst="roundRect">
-            <a:avLst>
-              <a:gd name="adj" fmla="val 5333"/>
-            </a:avLst>
-          </a:prstGeom>
-          <a:solidFill>
-            <a:srgbClr val="E8F0FA"/>
-          </a:solidFill>
-          <a:ln w="12700">
-            <a:solidFill>
-              <a:srgbClr val="E8F0FA"/>
-            </a:solidFill>
-            <a:prstDash val="solid"/>
-          </a:ln>
-        </p:spPr>
-      </p:sp>
-      <p:sp>
-        <p:nvSpPr>
-          <p:cNvPr id="6" name="Text 3"/>
-          <p:cNvSpPr txBox="1"/>
-          <p:nvPr/>
-        </p:nvSpPr>
-        <p:spPr>
-          <a:xfrm>
-            <a:off x="822960" y="4297680"/>
-            <a:ext cx="10545775" cy="1188720"/>
-          </a:xfrm>
-          <a:prstGeom prst="rect">
-            <a:avLst/>
-          </a:prstGeom>
-          <a:noFill/>
-          <a:ln/>
-        </p:spPr>
-        <p:txBody>
-          <a:bodyPr wrap="square" lIns="0" tIns="0" rIns="0" bIns="0" rtlCol="0" anchor="ctr"/>
-          <a:lstStyle/>
-          <a:p>
-            <a:pPr indent="0" marL="0">
-              <a:buNone/>
-            </a:pPr>
-            <a:r>
-              <a:rPr lang="en-US" sz="1700" b="1" dirty="0">
-                <a:solidFill>
-                  <a:srgbClr val="1D5BA6"/>
-                </a:solidFill>
-                <a:latin typeface="Microsoft YaHei" pitchFamily="34" charset="0"/>
-                <a:ea typeface="Microsoft YaHei" pitchFamily="34" charset="-122"/>
-                <a:cs typeface="Microsoft YaHei" pitchFamily="34" charset="-120"/>
-              </a:rPr>
-              <a:t>原因：</a:t>
-            </a:r>
-            <a:pPr indent="0" marL="0">
-              <a:buNone/>
-            </a:pPr>
-            <a:r>
-              <a:rPr lang="en-US" sz="1700" dirty="0">
-                <a:solidFill>
-                  <a:srgbClr val="1F2A37"/>
-                </a:solidFill>
-                <a:latin typeface="Microsoft YaHei" pitchFamily="34" charset="0"/>
-                <a:ea typeface="Microsoft YaHei" pitchFamily="34" charset="-122"/>
-                <a:cs typeface="Microsoft YaHei" pitchFamily="34" charset="-120"/>
-              </a:rPr>
-              <a:t>在现在的数据里，当初的 SQL 自己也过时了——它把更正前的旧行也算了进去（1489.1 万）。它只在学习时的数据上被核验过是对的，所以只能在那份数据上当标准。</a:t>
-            </a:r>
-            <a:endParaRPr lang="en-US" sz="1700" dirty="0"/>
-          </a:p>
-        </p:txBody>
-      </p:sp>
-      <p:sp>
-        <p:nvSpPr>
-          <p:cNvPr id="7" name="Text 4"/>
+          <p:cNvPr id="4" name="Text 1"/>
           <p:cNvSpPr txBox="1"/>
           <p:nvPr/>
         </p:nvSpPr>
@@ -9879,7 +11392,7 @@
                 <a:ea typeface="Microsoft YaHei" pitchFamily="34" charset="-122"/>
                 <a:cs typeface="Microsoft YaHei" pitchFamily="34" charset="-120"/>
               </a:rPr>
-              <a:t>“现在的数据”一行来自对照实验（回归测试改用当前数据，dsv41flash-r1-g3fix--exref），系统记录原文：“结果 13423672.28 与期望 14890636.48 不一致”。</a:t>
+              <a:t>记录：noctis results/scen-20261002/dsv41flash-r1-g3fix--snap（端到端实验第 1 次 MAVRA 运行）。数据为仿 TPC-DS 的合成零售数据（100 万行门店销售），题目中的年份略去。</a:t>
             </a:r>
             <a:endParaRPr lang="en-US" sz="1100" dirty="0"/>
           </a:p>

--- a/docs/mavra-system.pptx
+++ b/docs/mavra-system.pptx
@@ -124,19 +124,19 @@
   <p:extLst>
     <p:ext uri="{521415D9-36F7-43E2-AB2F-B90AF26B5E84}">
       <p14:sectionLst xmlns:p14="http://schemas.microsoft.com/office/powerpoint/2010/main">
-        <p14:section name="开场" id="{242c1b78-482f-9152-822d-3331214ff3b9}">
+        <p14:section name="开场" id="{ba7b0628-4ce5-6089-d8d1-f7ff8c18a0bd}">
           <p14:sldIdLst>
             <p14:sldId id="256"/>
           </p14:sldIdLst>
         </p14:section>
-        <p14:section name="问题" id="{208ef3e0-74fc-f331-4b22-542ec4977ed3}">
+        <p14:section name="问题" id="{e3231245-0b83-1005-da47-3e5c9519da76}">
           <p14:sldIdLst>
             <p14:sldId id="257"/>
             <p14:sldId id="258"/>
             <p14:sldId id="259"/>
           </p14:sldIdLst>
         </p14:section>
-        <p14:section name="MAVRA 是什么" id="{6e2ad356-5cbd-630b-c155-46c6cae04884}">
+        <p14:section name="MAVRA 是什么" id="{e99d414e-2c80-ca5a-33e0-f85406b28e53}">
           <p14:sldIdLst>
             <p14:sldId id="260"/>
             <p14:sldId id="261"/>
@@ -144,7 +144,7 @@
             <p14:sldId id="263"/>
           </p14:sldIdLst>
         </p14:section>
-        <p14:section name="记忆管理" id="{7ffb2abf-d723-7858-19c9-b600cb9c6e7e}">
+        <p14:section name="记忆管理" id="{a0052a68-3ec1-27f3-0b14-271ac5337d61}">
           <p14:sldIdLst>
             <p14:sldId id="264"/>
             <p14:sldId id="265"/>
@@ -153,14 +153,14 @@
             <p14:sldId id="268"/>
           </p14:sldIdLst>
         </p14:section>
-        <p14:section name="回到例子" id="{136ad5e3-bb40-69f4-fb5a-f4e566f435ff}">
+        <p14:section name="回到例子" id="{472b7091-a0ba-1f3e-05a2-22a2602dc038}">
           <p14:sldIdLst>
             <p14:sldId id="269"/>
             <p14:sldId id="270"/>
             <p14:sldId id="271"/>
           </p14:sldIdLst>
         </p14:section>
-        <p14:section name="比较与小结" id="{442c9a38-55b2-5de4-d56e-a34584f63031}">
+        <p14:section name="比较与小结" id="{887da6fe-d42c-4c81-8e35-2fb61313ccb3}">
           <p14:sldIdLst>
             <p14:sldId id="272"/>
             <p14:sldId id="273"/>
@@ -570,7 +570,7 @@
           <a:p>
             <a:r>
               <a:rPr lang="en-US" dirty="0"/>
-              <a:t>MAVRA 是放在数据智能体和数据库之间的一个中间件。一句话概括它做的事：把智能体探索数据库时学到的东西记下来，共享给其他智能体用，并在数据变化时保证这些记忆仍然正确——能修就修成新版本，修不了就停用。先讲它和 Text-to-SQL 的区别，再讲记忆里存什么、怎么管理，最后用实验里的一个真实例子走一遍。</a:t>
+              <a:t>MAVRA 是部署在数据智能体与数据库之间的中间件。它做三件事：把智能体在探索数据库时获得的知识持久化；跨智能体共享；在数据更新后维护这些知识的有效性——存在唯一修复时发布新修订，否则使其失效。先说明它与 Text-to-SQL 的区别，再说明记忆的内容与管理方式，最后用端到端实验中的一个例子走一遍。</a:t>
             </a:r>
             <a:endParaRPr lang="en-US" dirty="0"/>
           </a:p>
@@ -658,7 +658,7 @@
           <a:p>
             <a:r>
               <a:rPr lang="en-US" dirty="0"/>
-              <a:t>写入是记忆的入口。内置智能体拿到一道给出口径的学习题，5 轮写出 SQL，答案正确。然后大模型把解题过程抽取成一条结构化的定义，再过 7 项校验：有口径依据、答案正确、字段合法、粒度成立、SQL 审查，以及两次重放——当初的 SQL 再跑一次答案相同，按定义字段生成的标准 SQL 也得到相同答案。最后一项最关键，因为别的智能体读到的就是这些字段，漏一个过滤或者写死月份都会在这里被发现。第 2 项“答案正确”在实验里用题目的参考答案；实际部署中是指标负责人确认一次，或者与已发布的报表对账。这只在写入时需要一次，之后的维护和修复都不需要参考答案。</a:t>
+              <a:t>写入是记忆的入口。内置智能体得到一道给定业务口径的学习任务，5 轮写出 SQL，答案正确。然后大模型将求解轨迹抽取为结构化定义，再通过 7 项准入检查：业务依据、答案判定正确、静态合法性、粒度成立、SQL 审查，以及两次重放——示例 SQL 重新执行结果一致，由定义字段编译的规范 SQL 也得到相同结果。最后一项最关键：其他智能体读取的正是这些字段，遗漏过滤谓词或把月份写死都会在这里被发现。第 2 项“答案判定正确”在实验中使用任务的参考答案；部署中由指标负责人确认一次，或与已发布的报表对账。它只在写入时需要一次，此后的维护和修复都不依赖参考答案。</a:t>
             </a:r>
             <a:endParaRPr lang="en-US" dirty="0"/>
           </a:p>
@@ -746,7 +746,7 @@
           <a:p>
             <a:r>
               <a:rPr lang="en-US" dirty="0"/>
-              <a:t>上面一行是查询指标定义：按名称匹配到“门店营业额”（“电子品类门店营业额”也包含这几个字，一并返回，由智能体按口径说明挑选）；再看销售表的数据版本有没有变（14 变成 15）；然后逐条规则查缓存：“每笔销售一行”电子品类那个指标刚校验过，直接复用；日期表没变，复用；“丢行率不超标”在 15 上没有结果，现在校验并写入缓存；最后返回有效的 v2。中间是校验结果缓存：按（规则，数据版本）存，表里写明谁写入、哪一步复用。下面一行是执行 SQL：先检查注明的 v2 能不能用；再在这条查询的快照上校验——这期间又有写入，数据版本变成 16，所以两条规则在快照里重新校验并写入缓存；最后在同一快照上执行。</a:t>
+              <a:t>上方是检索指标定义：名称匹配到“门店营业额”（“电子品类门店营业额”同样包含查询词，一并返回，由智能体依据口径说明选择）；比较 store_sales 的表版本（14 → 15）；逐个条件查缓存：“粒度键唯一”电子品类的定义刚验证过，直接复用；date_dim 未变，复用；“日期键完整性”在版本 15 上没有结果，执行验证并写入缓存；最后返回有效修订 v2。中间是验证结果缓存：按（条件，表版本）存储，表中标明写入者和复用的步骤。下方是执行 SQL：先检查声明的 v2 是否有效；再在查询快照上验证——期间又有更新，表版本变为 16，因此两个条件在快照内重新验证并写入缓存；最后在同一快照上执行。</a:t>
             </a:r>
             <a:endParaRPr lang="en-US" dirty="0"/>
           </a:p>
@@ -834,7 +834,7 @@
           <a:p>
             <a:r>
               <a:rPr lang="en-US" dirty="0"/>
-              <a:t>跟着门店营业额走一遍。内置智能体回答“3 月门店营业额”，答案核验正确、发布前校验通过，发布 v1。之后追加一批新销售：规则仍成立，其他指标直接复用结果，还是 v1。再之后有一批销售被更正：旧行保留但标成非当前，新增当前行——“每笔销售一行”不成立，v1 停用，不处理会把新旧两版都算进去。修复时在取值少的列上试过滤，只有“只算当前行”可行；用学习时的数据重算 3 月，结果一致，发布 v2。红框是另一种情况：一批销售被重复装载，没有任何过滤能修好，就停用并提醒，等待重新学习。</a:t>
+              <a:t>沿着门店营业额走一遍。内置智能体求解“3 月门店营业额”，答案判定正确、准入检查通过，发布 v1。之后增量加载一批销售记录：条件仍成立，其他定义直接复用验证结果，仍为 v1。再之后一批销售被更正：旧行标记为非当前，插入当前行——“粒度键唯一”不成立，v1 失效，不处理会把新旧版本重复计入。修复搜索在低基数列上枚举等值谓词，只有“ss_is_current = 1”可行；按学习时刻重算 3 月，结果一致，发布 v2。红框是另一种结果：批次重复加载，没有谓词能恢复唯一性，定义失效并通知使用方，等待重新学习。</a:t>
             </a:r>
             <a:endParaRPr lang="en-US" dirty="0"/>
           </a:p>
@@ -922,7 +922,7 @@
           <a:p>
             <a:r>
               <a:rPr lang="en-US" dirty="0"/>
-              <a:t>迭代就是记忆的版本怎么变。同一个指标又学到一次、算法一样，就不新增，只给原来那条记一次佐证。名字一样但算法不同——实验里“门店营业额”学到了两种粒度——两条并存，查询时都返回，智能体按口径说明挑。规则不成立而且只有一种修法，就停用旧版本、发布新版本，注明旧版本的 SQL 会被拒绝，修复期间来的请求等修复结果。别的记忆碰到同样的问题，直接复用已有的结果和修复，门店营业额只用了 45.8 毫秒。修不好就停用，并提醒用过它的智能体；之后内置智能体学到新的解题过程，校验通过再作为新版本发布。</a:t>
+              <a:t>迭代即定义修订的演化。同一指标再次学到相同结构的定义，不新增，只为原定义记录一次佐证。同名但结构不同——实验中“门店营业额”学到了两种粒度——两条并存，检索时同时返回，由智能体依据口径说明选择。条件不成立且存在唯一修复，旧修订失效、发布新修订，声明旧修订的查询被拒绝，修复期间到达的请求等待修复结果。其他定义遇到相同的条件失败，直接复用已有的验证结果和修复，门店营业额只用了 45.8 毫秒。无唯一修复则失效，并通知使用方；之后内置智能体学到新的定义，通过准入检查再作为新修订发布。</a:t>
             </a:r>
             <a:endParaRPr lang="en-US" dirty="0"/>
           </a:p>
@@ -1010,7 +1010,7 @@
           <a:p>
             <a:r>
               <a:rPr lang="en-US" dirty="0"/>
-              <a:t>回到开头那张表，加上 MAVRA 这一栏。追加新数据：定义仍然对，MAVRA 重新校验后继续用；6 条依赖销售表的定义一共只跑了 2 次校验，其余直接复用。数据更正：MAVRA 发现“每笔销售一行”不成立，停用旧定义，找到唯一的修复“只算当前行”，发布 v2，答对。重复装载：没法用过滤修好，MAVRA 停用并提醒智能体，智能体自己去重，3 次里 2 次答对。下一页看数据更正之后，MAVRA 具体一步步做了什么。</a:t>
+              <a:t>回到前面那张表，加上 MAVRA 一栏。增量加载：定义仍然有效，MAVRA 重新验证后继续使用；6 条依赖 store_sales 的定义一共只执行了 2 次验证，其余复用。数据更正：MAVRA 检测到“粒度键唯一”不成立，旧修订失效，找到唯一修复“只取当前行”，发布 v2，答案正确。重复加载：没有谓词能修复，MAVRA 使定义失效并通知智能体，智能体自行去重，3 次中 2 次正确。下一页看数据更正之后 MAVRA 的具体处理过程。</a:t>
             </a:r>
             <a:endParaRPr lang="en-US" dirty="0"/>
           </a:p>
@@ -1098,7 +1098,7 @@
           <a:p>
             <a:r>
               <a:rPr lang="en-US" dirty="0"/>
-              <a:t>数据更正之后，第一个用到销售表的查询到来，先检查名称匹配到的电子品类营业额。MAVRA 一校验就发现每个销售键平均有 1.07 行，停用旧定义；然后自动找修复，只有“只算当前行”这一个过滤可行，四项检查都过了，发布 v2，一共 28.7 秒。接着检查门店营业额：它依赖的是同一条规则、同一个数据版本，结果和修复都直接复用，45.8 毫秒就好了。退货率因为要关联销售表，也跟着修好。最后用户智能体收到提醒，按新定义写 SQL，答对。</a:t>
+              <a:t>数据更正之后，首个访问 store_sales 的请求到达，先处理名称匹配到的电子品类营业额。MAVRA 一验证就发现每个粒度键平均 1.07 行，旧修订失效；随后修复搜索，只有“ss_is_current = 1”这一个谓词可行，四项检查全部通过，发布 v2，共 28.7 秒。接着处理门店营业额：它依赖相同的条件和相同的表版本，验证结果和修复直接复用，45.8 毫秒完成。退货率需要连接 store_sales，连接路径现在要求该谓词，也修复为 v2。最后用户智能体收到通知，按新修订写 SQL，答案正确。</a:t>
             </a:r>
             <a:endParaRPr lang="en-US" dirty="0"/>
           </a:p>
@@ -1186,7 +1186,7 @@
           <a:p>
             <a:r>
               <a:rPr lang="en-US" dirty="0"/>
-              <a:t>为什么回归测试不能直接用现在的数据？学习题问的是 3 月，而这次更正正好覆盖 3 月。在现在的数据上，智能体当初写的 SQL 本身就会把旧版本也算进去，得到 1489 万；正确的新定义得到 1342 万，两者对不上，正确的修复就被拒了。我们实际跑过这个对照：用现在的数据比，这个修复确实被拒绝。用学习时的数据比，两者都是 1357 万，修复被接受。学习时的答案是唯一被确认过的答案，所以修复只和它比，不需要另外的参考答案。</a:t>
+              <a:t>为什么回归测试不能直接用当前数据？学习任务询问的是 3 月，而这次更正恰好覆盖 3 月。在当前数据上，学习时的 SQL 本身就会把旧版本计入，得到 1489 万；正确的新修订得到 1342 万，两者不一致，正确的修复就被拒绝了。我们实际跑过这个对照：用当前数据比较，这个修复确实被拒绝。按学习时刻比较，两者都是 1357 万，修复被接受。学习时的答案是唯一被确认过的答案，所以修复只与它比较，不需要另外的参考答案。数据仓库用时间旅行查询提供学习时刻的数据。</a:t>
             </a:r>
             <a:endParaRPr lang="en-US" dirty="0"/>
           </a:p>
@@ -1274,7 +1274,7 @@
           <a:p>
             <a:r>
               <a:rPr lang="en-US" dirty="0"/>
-              <a:t>把几种做法放在一起比。Text-to-SQL 或不共享记忆的智能体什么都不记，每次重新猜口径，数据不变时也只答对 49%。检索历史 SQL 示例会记下答对过的 SQL，数据不变时和 MAVRA 一样好，但数据变了它不知道，照旧给出旧 SQL；在 5 种破坏性变化下只答对 57%，提示它自己去核对也只有 63%，MAVRA 是 73%。语义层是人写的指标定义，数据变了靠人发现、人改，执行时也不检查数据是否还满足前提；MAVRA 的维护同样可以用在语义层的定义上。</a:t>
+              <a:t>把几种方法放在一起比较。Text-to-SQL 或无共享定义的智能体不保留任何知识，每次重新推断口径，数据未变时准确率也只有 49%。检索历史查询示例保存答对过的 SQL，数据未变时与 MAVRA 一样好，但数据更新后它不感知，继续返回旧 SQL；在 5 种破坏性更新下只有 57%，提示它自行验证也只有 63%，MAVRA 是 73%。语义层是人工编写的指标定义，数据更新后依赖人工发现和修改，执行时也不验证数据是否仍满足前提；MAVRA 的维护同样适用于语义层中声明的定义。</a:t>
             </a:r>
             <a:endParaRPr lang="en-US" dirty="0"/>
           </a:p>
@@ -1362,7 +1362,7 @@
           <a:p>
             <a:r>
               <a:rPr lang="en-US" dirty="0"/>
-              <a:t>五句话收尾。定位：MAVRA 是智能体和数据库之间的记忆中间件，不生成 SQL，和 Text-to-SQL 是上下游。记什么：表画像、关联路径、指标定义，以及它们成立的前提。怎么管：写入前校验，执行前在同一快照上校验，数据变了只重验受影响的规则。怎么迭代：能唯一修好就发新版本，修不了就停用并提醒。效果：数据不变时准确率从 49% 到 100%、轮数更少；数据变化后从 32% 到 81%。</a:t>
+              <a:t>五句话收尾。定位：MAVRA 是智能体与数据库之间的记忆中间件，不生成 SQL，与 Text-to-SQL 处于不同层次。记忆内容：表统计信息、连接路径、指标定义，及其成立的条件。管理方式：写入前准入检查，执行前在同一快照上验证，数据更新后仅重新验证受影响的条件。迭代方式：存在唯一修复则发布新修订，否则失效并通知。效果：数据未变时准确率从 49% 到 100%、轮数更少；数据更新后从 32% 到 81%。</a:t>
             </a:r>
             <a:endParaRPr lang="en-US" dirty="0"/>
           </a:p>
@@ -1450,7 +1450,7 @@
           <a:p>
             <a:r>
               <a:rPr lang="en-US" dirty="0"/>
-              <a:t>Text-to-SQL 研究的是翻译：给一句自然语言问题和表结构，生成一条 SQL，评价这条 SQL 对不对。每个问题都是独立的，做完不留下任何东西。MAVRA 不是一个新的 Text-to-SQL 方法，它不生成 SQL。它在智能体下面、数据库上面，智能体对数据库的请求都经过它。它关心的是另一个问题：智能体探索数据库时学到的知识——“营业额是哪一列”“这两张表怎么关联”——怎么记下来、怎么共享、数据变了之后还对不对。所以两者是上下游关系，任何 Text-to-SQL 模型都可以作为用户智能体接在 MAVRA 上。</a:t>
+              <a:t>Text-to-SQL 研究的是翻译：给定自然语言问题和数据库模式，生成一条 SQL，评价这条 SQL 是否正确。它是无状态的：每个问题独立处理，不保留任何结果。MAVRA 不是新的 Text-to-SQL 方法，也不生成 SQL。它位于智能体与数据库之间，智能体对数据库的访问都经由它转发。它关注的是另一个问题：智能体在探索中获得的知识——“营业额对应哪一列”“两张表如何连接”——如何持久化、如何共享、数据更新后是否仍然有效。因此两者处于不同层次，任何 Text-to-SQL 模型都可以作为用户智能体接入 MAVRA。</a:t>
             </a:r>
             <a:endParaRPr lang="en-US" dirty="0"/>
           </a:p>
@@ -1538,7 +1538,7 @@
           <a:p>
             <a:r>
               <a:rPr lang="en-US" dirty="0"/>
-              <a:t>这是实验里的真实记录。题目只说“门店营业额”，不给口径。不共享记忆的智能体独立跑了三次：两次选了折扣前的销售额 ss_ext_sales_price，答 1413.8 万，错；一次选了净支付额 ss_net_paid，答对。每次都是 5 轮。有 MAVRA 的智能体先查记忆，拿到内置智能体学过的“门店营业额”定义，三次都选对，3 轮完成。难点不在 SQL 语法，而在业务知识：表里好几列都像营业额，选哪一列是口径问题，表结构里没写。Text-to-SQL 每次都要重新猜，结果会变；把学到的口径记下来共享，准确率和成本都改善。</a:t>
+              <a:t>这是实验中的原始记录。题目只给出指标名称“门店营业额”，不给业务口径。无共享定义的智能体独立求解三次：两次选择了折扣前的扩展销售额 ss_ext_sales_price，答 1413.8 万，错误；一次选择净支付额 ss_net_paid，答案正确。每次 5 轮。接入 MAVRA 的智能体先检索记忆，得到内置智能体学习到的“门店营业额”定义，三次均正确，3 轮完成。错误不在 SQL 语法，而在业务口径：事实表中有多个候选度量列，选择哪一列是业务规则，模式中并不记录。Text-to-SQL 每次重新推断，答案不稳定；共享已验证的定义后，准确率和成本同时改善。</a:t>
             </a:r>
             <a:endParaRPr lang="en-US" dirty="0"/>
           </a:p>
@@ -1626,7 +1626,7 @@
           <a:p>
             <a:r>
               <a:rPr lang="en-US" dirty="0"/>
-              <a:t>共享记忆带来新问题：记忆是在某一份数据上学到的，数据会变。同一个问题“9 月门店营业额”，在三种日常写入之后分别再问一次，照旧用记住的定义。追加新数据没问题。数据更正——数据仓库里常见的做法是旧行不删、标成非当前，再插一行新的——照旧用就会把新旧两版都加进去，多出 137 万。重复装载，一批数据被导了两次，9 月直接翻倍。这三种都是普通的写入，表结构没变，只看表结构的做法完全发现不了；SQL 也不报错。所以 MAVRA 不只是“记下来”，更要管理记忆：知道每条记忆在什么前提下成立，数据变了重新检查。</a:t>
+              <a:t>共享带来新的问题：定义是在某一快照上学习的，数据会继续更新。同一问题“9 月门店营业额”，在三种常见更新之后分别再问一次，沿用已发布的定义。增量加载没有问题。数据更正——数据仓库中常见的做法是旧行不删除、标记为非当前，再插入更正后的行——沿用定义会把新旧版本重复计入，多出 137 万。重复加载，同一批次被加载两次，9 月的值翻倍。三种更新都是普通 DML，模式未变，基于模式变更的失效策略完全检测不到；查询也不报错。因此 MAVRA 不只是持久化知识，还要管理知识：记录每条定义成立的条件，数据更新后重新验证。</a:t>
             </a:r>
             <a:endParaRPr lang="en-US" dirty="0"/>
           </a:p>
@@ -1714,7 +1714,7 @@
           <a:p>
             <a:r>
               <a:rPr lang="en-US" dirty="0"/>
-              <a:t>从用户智能体的角度看，MAVRA 就是一组数据库工具：列出表、查看表、问两张表怎么关联、查指标定义、执行 SQL。区别在背后：每个工具都先查记忆。查看表时，数据没变就直接返回记住的表画像；问关联时，返回以前验证过的关联方式和踩过的坑；查指标定义时，如果依赖的表有写入，先重新校验再返回。执行 SQL 时，智能体注明用了哪条定义的哪一版，过期的版本直接拒绝。每次返回还会附带提醒，告诉智能体它用过的记忆有变化。记忆来自两处：内置智能体专门学习指标定义，用户智能体在探索中查过、验证过的东西也会记下来。</a:t>
+              <a:t>从用户智能体的角度看，MAVRA 是一组数据库工具：列出表、描述表、查询连接路径、检索指标定义、执行 SQL。区别在于每个工具都先访问记忆：描述表时，表版本未变就返回缓存的统计信息；查询连接路径时，返回已验证的连接键、基数和已证伪的写法；检索指标定义时，依赖表的版本已变则先重新验证再返回。执行 SQL 时，智能体声明所依赖的指标修订，失效或被替代的修订直接拒绝。每次响应附带通知，告知智能体其使用过的定义有变化。记忆有两个来源：内置智能体学习指标定义；用户智能体在探索中获得的表统计信息和连接路径也写入记忆。</a:t>
             </a:r>
             <a:endParaRPr lang="en-US" dirty="0"/>
           </a:p>
@@ -1802,7 +1802,7 @@
           <a:p>
             <a:r>
               <a:rPr lang="en-US" dirty="0"/>
-              <a:t>左边是用户智能体，它发两种请求。蓝色 1–5 是查询指标定义：智能体只说“营业额”，查询服务从共享记忆里读出定义；销售表的数据变了，某条规则在新数据版本上还没有校验结果，就交给维护去校验，结果写入缓存，再返回有效的 v2。橙色 6–8 是执行 SQL：智能体写好 SQL 并注明用的是 v2，执行前校验复用缓存里的结果，在同一快照上执行。紫色是学习：内置智能体学到的定义，发布前校验通过才写进共享记忆。共享记忆里还有表画像和关联路径，图里没有展开。</a:t>
+              <a:t>左侧是用户智能体，发出两类请求。蓝色 1–5 是检索指标定义：智能体只给出“营业额”，查询服务从共享记忆中读取定义；store_sales 的表版本已变，某个条件在新版本上尚无验证结果，交给维护执行验证，结果写入缓存，再返回有效修订 v2。橙色 6–8 是执行 SQL：智能体的 SQL 声明依赖 v2，执行前验证复用缓存中的结果，在同一快照上执行。紫色是学习：内置智能体学习到的定义，通过准入检查后写入共享记忆。共享记忆中还有表统计信息和连接路径，图中未展开。</a:t>
             </a:r>
             <a:endParaRPr lang="en-US" dirty="0"/>
           </a:p>
@@ -1890,7 +1890,7 @@
           <a:p>
             <a:r>
               <a:rPr lang="en-US" dirty="0"/>
-              <a:t>记忆有四类。表画像是查看表时得到的列信息；关联路径是验证过的两表关联方式，包括一对多关系、需要加的过滤、有多少行关联不上，还有试过但证明不对的写法。指标定义是最重要的一类：口径、怎么算、一行代表什么、按哪个日期归期，再加上它成立所依赖的校验规则。校验结果按“规则 + 数据版本”存，同一条规则在同一个数据版本上只校验一次，所有记忆共用。每条记忆都记着依赖哪些表的哪个版本、当前状态、版本号、谁写的、谁用过。实验第一次运行结束时一共 70 条记忆，被查了 995 次，696 次直接复用。</a:t>
+              <a:t>记忆分四类。表统计信息是描述表时得到的列级信息；连接路径是已验证的两表连接方式，包括基数、所需的过滤谓词、未匹配行比例，以及已证伪的写法。指标定义是最重要的一类：业务口径、度量、粒度、时间维度，以及它成立所依赖的验证条件。验证结果按“条件 + 表版本”存储，同一条件在同一表版本上只验证一次，跨定义共享。每条记忆附带依赖的表及其版本、状态、修订号、写入者和使用者。第 1 次运行结束时共 70 条记忆，查询 995 次，696 次直接命中。</a:t>
             </a:r>
             <a:endParaRPr lang="en-US" dirty="0"/>
           </a:p>
@@ -1978,7 +1978,7 @@
           <a:p>
             <a:r>
               <a:rPr lang="en-US" dirty="0"/>
-              <a:t>这是实验里“门店营业额”这条记忆的原样内容。左边是用户智能体查询时拿到的：名称和别名、口径、怎么算、一行代表什么、按哪个日期归期、注意事项和示例。右边是 MAVRA 自己管理、用来保证它仍然正确的：依据是什么、学习时的证据、校验规则、依赖哪些表的哪个版本、当前状态和版本号、谁写的谁用过。Text-to-SQL 里没有这样的东西：每次生成的 SQL 用完就丢，也不知道它在什么前提下成立。</a:t>
+              <a:t>这是实验中“门店营业额”这条记忆的完整记录。左侧是用户智能体检索时得到的：名称和别名、业务口径、度量、粒度、时间维度、注意事项和示例。右侧是 MAVRA 自己维护、用于判断它是否仍然有效的：依据、学习时的证据、验证条件、依赖的表版本、状态和修订号、写入者和使用者。Text-to-SQL 没有这样的结构：生成的查询用后即弃，也不记录它在什么前提下成立。</a:t>
             </a:r>
             <a:endParaRPr lang="en-US" dirty="0"/>
           </a:p>
@@ -2066,7 +2066,7 @@
           <a:p>
             <a:r>
               <a:rPr lang="en-US" dirty="0"/>
-              <a:t>记忆管理分五个环节，颜色和后面两张图一致。写入：内置智能体答对学习题，抽取成定义，过 7 项校验才发布。读取：用户智能体按名称查，依赖的表没变就直接返回，有写入就先维护。使用：执行 SQL 时注明版本，过期的拒绝，在本次查询的快照上校验后再执行。维护：数据写入后，记忆第一次被用到时，只重新校验受影响的规则，结果缓存共用——追加新数据后，6 条依赖销售表的定义只真正跑了 2 次校验。迭代：规则不成立时，能唯一修好就发布新版本，修不了就停用并提醒。这些都发生在“生成一条 SQL”之外，这就是和 Text-to-SQL 的区别。</a:t>
+              <a:t>记忆管理分五个环节，颜色与后面两张图一致。写入：内置智能体正确求解学习任务，抽取为结构化定义，通过 7 项准入检查后发布。读取：用户智能体按名称检索，依赖表版本未变则直接返回，已变则先维护。使用：执行 SQL 时声明所依赖的修订，失效的拒绝，在查询快照上验证条件后执行。维护：数据更新后，定义首次被访问时，仅重新验证受影响的条件，结果缓存并共享——增量加载后，6 条依赖 store_sales 的定义只执行了 2 次验证。迭代：条件不成立时，存在唯一修复则发布新修订，否则失效并通知。这些都发生在单条查询的生成之外，这就是与 Text-to-SQL 的区别。</a:t>
             </a:r>
             <a:endParaRPr lang="en-US" dirty="0"/>
           </a:p>
@@ -2936,7 +2936,7 @@
                 <a:ea typeface="Microsoft YaHei" pitchFamily="34" charset="-122"/>
                 <a:cs typeface="Microsoft YaHei" pitchFamily="34" charset="-120"/>
               </a:rPr>
-              <a:t>记住智能体学到的东西 · 共享给所有智能体 · 数据变了也保持正确</a:t>
+              <a:t>持久化智能体获得的数据库知识 · 跨智能体共享 · 在数据更新下保持有效</a:t>
             </a:r>
             <a:endParaRPr lang="en-US" sz="2200" dirty="0"/>
           </a:p>
@@ -3002,7 +3002,7 @@
                 <a:ea typeface="Microsoft YaHei" pitchFamily="34" charset="-122"/>
                 <a:cs typeface="Microsoft YaHei" pitchFamily="34" charset="-120"/>
               </a:rPr>
-              <a:t>写入：从一次解题到一条记忆</a:t>
+              <a:t>写入：从一次成功求解到一条定义</a:t>
             </a:r>
             <a:endParaRPr lang="en-US" sz="3000" dirty="0"/>
           </a:p>
@@ -3041,7 +3041,7 @@
                 <a:ea typeface="Microsoft YaHei" pitchFamily="34" charset="-122"/>
                 <a:cs typeface="Microsoft YaHei" pitchFamily="34" charset="-120"/>
               </a:rPr>
-              <a:t>学习题</a:t>
+              <a:t>学习任务</a:t>
             </a:r>
             <a:endParaRPr lang="en-US" sz="1600" dirty="0"/>
           </a:p>
@@ -3146,7 +3146,7 @@
                 <a:ea typeface="Microsoft YaHei" pitchFamily="34" charset="-122"/>
                 <a:cs typeface="Microsoft YaHei" pitchFamily="34" charset="-120"/>
               </a:rPr>
-              <a:t>内置智能体：5 轮、7 次工具调用、9.5 秒，最后的 SQL</a:t>
+              <a:t>内置智能体：5 轮、7 次工具调用、9.5 秒，最终 SQL</a:t>
             </a:r>
             <a:endParaRPr lang="en-US" sz="1400" dirty="0"/>
           </a:p>
@@ -3336,7 +3336,7 @@
                 <a:ea typeface="Microsoft YaHei" pitchFamily="34" charset="-122"/>
                 <a:cs typeface="Microsoft YaHei" pitchFamily="34" charset="-120"/>
               </a:rPr>
-              <a:t>大模型把解题过程抽取成定义（16.3 秒）；7 项校验全部通过（5 条查询，5.7 秒），发布为 v1。</a:t>
+              <a:t>大模型将求解轨迹抽取为结构化定义（16.3 秒）；7 项准入检查全部通过（5 条查询，5.7 秒），发布为修订 v1。</a:t>
             </a:r>
             <a:endParaRPr lang="en-US" sz="1500" dirty="0"/>
           </a:p>
@@ -3375,7 +3375,7 @@
                 <a:ea typeface="Microsoft YaHei" pitchFamily="34" charset="-122"/>
                 <a:cs typeface="Microsoft YaHei" pitchFamily="34" charset="-120"/>
               </a:rPr>
-              <a:t>发布前的 7 项校验</a:t>
+              <a:t>7 项准入检查</a:t>
             </a:r>
             <a:endParaRPr lang="en-US" sz="1600" dirty="0"/>
           </a:p>
@@ -3425,7 +3425,7 @@
                           <a:ea typeface="Microsoft YaHei" pitchFamily="34" charset="-122"/>
                           <a:cs typeface="Microsoft YaHei" pitchFamily="34" charset="-120"/>
                         </a:rPr>
-                        <a:t>校验</a:t>
+                        <a:t>检查</a:t>
                       </a:r>
                       <a:endParaRPr lang="en-US" sz="1300" dirty="0">
                         <a:latin typeface="Microsoft YaHei" charset="0"/>
@@ -3493,7 +3493,7 @@
                           <a:ea typeface="Microsoft YaHei" pitchFamily="34" charset="-122"/>
                           <a:cs typeface="Microsoft YaHei" pitchFamily="34" charset="-120"/>
                         </a:rPr>
-                        <a:t>防的是什么</a:t>
+                        <a:t>目的</a:t>
                       </a:r>
                       <a:endParaRPr lang="en-US" sz="1300" dirty="0">
                         <a:latin typeface="Microsoft YaHei" charset="0"/>
@@ -3563,7 +3563,7 @@
                           <a:ea typeface="Microsoft YaHei" pitchFamily="34" charset="-122"/>
                           <a:cs typeface="Microsoft YaHei" pitchFamily="34" charset="-120"/>
                         </a:rPr>
-                        <a:t>1 有口径依据</a:t>
+                        <a:t>1 业务依据</a:t>
                       </a:r>
                       <a:endParaRPr lang="en-US" sz="1300" dirty="0">
                         <a:latin typeface="Microsoft YaHei" charset="0"/>
@@ -3628,7 +3628,7 @@
                           <a:ea typeface="Microsoft YaHei" pitchFamily="34" charset="-122"/>
                           <a:cs typeface="Microsoft YaHei" pitchFamily="34" charset="-120"/>
                         </a:rPr>
-                        <a:t>题目明确给出了业务口径，不是猜的</a:t>
+                        <a:t>学习任务明确给出业务口径，而非推测</a:t>
                       </a:r>
                       <a:endParaRPr lang="en-US" sz="1300" dirty="0">
                         <a:latin typeface="Microsoft YaHei" charset="0"/>
@@ -3695,7 +3695,7 @@
                           <a:ea typeface="Microsoft YaHei" pitchFamily="34" charset="-122"/>
                           <a:cs typeface="Microsoft YaHei" pitchFamily="34" charset="-120"/>
                         </a:rPr>
-                        <a:t>2 答案核验正确</a:t>
+                        <a:t>2 答案判定正确</a:t>
                       </a:r>
                       <a:endParaRPr lang="en-US" sz="1300" dirty="0">
                         <a:latin typeface="Microsoft YaHei" charset="0"/>
@@ -3760,7 +3760,7 @@
                           <a:ea typeface="Microsoft YaHei" pitchFamily="34" charset="-122"/>
                           <a:cs typeface="Microsoft YaHei" pitchFamily="34" charset="-120"/>
                         </a:rPr>
-                        <a:t>错误答案不进记忆</a:t>
+                        <a:t>错误答案不进入记忆</a:t>
                       </a:r>
                       <a:endParaRPr lang="en-US" sz="1300" dirty="0">
                         <a:latin typeface="Microsoft YaHei" charset="0"/>
@@ -3827,7 +3827,7 @@
                           <a:ea typeface="Microsoft YaHei" pitchFamily="34" charset="-122"/>
                           <a:cs typeface="Microsoft YaHei" pitchFamily="34" charset="-120"/>
                         </a:rPr>
-                        <a:t>3 字段合法</a:t>
+                        <a:t>3 静态合法性</a:t>
                       </a:r>
                       <a:endParaRPr lang="en-US" sz="1300" dirty="0">
                         <a:latin typeface="Microsoft YaHei" charset="0"/>
@@ -3892,7 +3892,7 @@
                           <a:ea typeface="Microsoft YaHei" pitchFamily="34" charset="-122"/>
                           <a:cs typeface="Microsoft YaHei" pitchFamily="34" charset="-120"/>
                         </a:rPr>
-                        <a:t>列存在；计算只用允许的列；关联走验证过的路径；没把题目里的月份写死</a:t>
+                        <a:t>列存在；度量仅使用允许的列；连接沿已验证路径；包含必需的粒度过滤且不含任务字面量</a:t>
                       </a:r>
                       <a:endParaRPr lang="en-US" sz="1300" dirty="0">
                         <a:latin typeface="Microsoft YaHei" charset="0"/>
@@ -4024,7 +4024,7 @@
                           <a:ea typeface="Microsoft YaHei" pitchFamily="34" charset="-122"/>
                           <a:cs typeface="Microsoft YaHei" pitchFamily="34" charset="-120"/>
                         </a:rPr>
-                        <a:t>在当前数据上“每笔销售一行”成立</a:t>
+                        <a:t>当前快照上粒度键唯一</a:t>
                       </a:r>
                       <a:endParaRPr lang="en-US" sz="1300" dirty="0">
                         <a:latin typeface="Microsoft YaHei" charset="0"/>
@@ -4156,7 +4156,7 @@
                           <a:ea typeface="Microsoft YaHei" pitchFamily="34" charset="-122"/>
                           <a:cs typeface="Microsoft YaHei" pitchFamily="34" charset="-120"/>
                         </a:rPr>
-                        <a:t>示例 SQL 符合记下的粒度和关联要求</a:t>
+                        <a:t>示例查询符合记录的粒度与连接要求</a:t>
                       </a:r>
                       <a:endParaRPr lang="en-US" sz="1300" dirty="0">
                         <a:latin typeface="Microsoft YaHei" charset="0"/>
@@ -4223,7 +4223,7 @@
                           <a:ea typeface="Microsoft YaHei" pitchFamily="34" charset="-122"/>
                           <a:cs typeface="Microsoft YaHei" pitchFamily="34" charset="-120"/>
                         </a:rPr>
-                        <a:t>6 重放当初的 SQL</a:t>
+                        <a:t>6 重放示例 SQL</a:t>
                       </a:r>
                       <a:endParaRPr lang="en-US" sz="1300" dirty="0">
                         <a:latin typeface="Microsoft YaHei" charset="0"/>
@@ -4288,7 +4288,7 @@
                           <a:ea typeface="Microsoft YaHei" pitchFamily="34" charset="-122"/>
                           <a:cs typeface="Microsoft YaHei" pitchFamily="34" charset="-120"/>
                         </a:rPr>
-                        <a:t>再跑一次，答案相同</a:t>
+                        <a:t>重新执行，结果与答案一致</a:t>
                       </a:r>
                       <a:endParaRPr lang="en-US" sz="1300" dirty="0">
                         <a:latin typeface="Microsoft YaHei" charset="0"/>
@@ -4355,7 +4355,7 @@
                           <a:ea typeface="Microsoft YaHei" pitchFamily="34" charset="-122"/>
                           <a:cs typeface="Microsoft YaHei" pitchFamily="34" charset="-120"/>
                         </a:rPr>
-                        <a:t>7 重放标准 SQL</a:t>
+                        <a:t>7 重放规范 SQL</a:t>
                       </a:r>
                       <a:endParaRPr lang="en-US" sz="1300" dirty="0">
                         <a:latin typeface="Microsoft YaHei" charset="0"/>
@@ -4420,7 +4420,7 @@
                           <a:ea typeface="Microsoft YaHei" pitchFamily="34" charset="-122"/>
                           <a:cs typeface="Microsoft YaHei" pitchFamily="34" charset="-120"/>
                         </a:rPr>
-                        <a:t>按定义字段生成的 SQL 也得到同样答案：别的智能体读到的就是这些字段</a:t>
+                        <a:t>由定义字段编译的查询得到相同结果：其他智能体读取的正是这些字段</a:t>
                       </a:r>
                       <a:endParaRPr lang="en-US" sz="1300" dirty="0">
                         <a:latin typeface="Microsoft YaHei" charset="0"/>
@@ -4536,7 +4536,7 @@
                 <a:ea typeface="Microsoft YaHei" pitchFamily="34" charset="-122"/>
                 <a:cs typeface="Microsoft YaHei" pitchFamily="34" charset="-120"/>
               </a:rPr>
-              <a:t>第 2 项在实际部署中：</a:t>
+              <a:t>第 2 项在部署中的来源：</a:t>
             </a:r>
             <a:pPr indent="0" marL="0">
               <a:spcAft>
@@ -4553,7 +4553,7 @@
                 <a:ea typeface="Microsoft YaHei" pitchFamily="34" charset="-122"/>
                 <a:cs typeface="Microsoft YaHei" pitchFamily="34" charset="-120"/>
               </a:rPr>
-              <a:t>实验用题目的参考答案；部署时由指标负责人确认一次，或与已发布的报表对账。之后的维护和修复都不再需要参考答案。</a:t>
+              <a:t>实验使用任务的参考答案；部署中由指标负责人确认一次，或与已发布的报表对账。此后的维护与修复不再依赖参考答案。</a:t>
             </a:r>
             <a:endParaRPr lang="en-US" sz="1300" dirty="0"/>
           </a:p>
@@ -4592,7 +4592,7 @@
                 <a:ea typeface="Microsoft YaHei" pitchFamily="34" charset="-122"/>
                 <a:cs typeface="Microsoft YaHei" pitchFamily="34" charset="-120"/>
               </a:rPr>
-              <a:t>记录：noctis results/scen-20261002/dsv41flash-r1-g3fix--snap（端到端实验第 1 次 MAVRA 运行）。数据为仿 TPC-DS 的合成零售数据（100 万行门店销售），题目中的年份略去。</a:t>
+              <a:t>记录：noctis results/scen-20261002/dsv41flash-r1-g3fix--snap（端到端实验第 1 次 MAVRA 运行）。数据为仿 TPC-DS 的合成零售数据（store_sales 100 万行），题目中的年份略去。</a:t>
             </a:r>
             <a:endParaRPr lang="en-US" sz="1100" dirty="0"/>
           </a:p>
@@ -4706,7 +4706,7 @@
                 <a:ea typeface="Microsoft YaHei" pitchFamily="34" charset="-122"/>
                 <a:cs typeface="Microsoft YaHei" pitchFamily="34" charset="-120"/>
               </a:rPr>
-              <a:t>读取与使用：一次请求怎么走</a:t>
+              <a:t>读取与使用：一次请求的处理路径</a:t>
             </a:r>
             <a:endParaRPr lang="en-US" sz="3000" dirty="0"/>
           </a:p>
@@ -4844,7 +4844,7 @@
                 <a:ea typeface="Microsoft YaHei" pitchFamily="34" charset="-122"/>
                 <a:cs typeface="Microsoft YaHei" pitchFamily="34" charset="-120"/>
               </a:rPr>
-              <a:t>维护与迭代：一条记忆的一生</a:t>
+              <a:t>维护与迭代：一条定义的生命周期</a:t>
             </a:r>
             <a:endParaRPr lang="en-US" sz="3000" dirty="0"/>
           </a:p>
@@ -4982,7 +4982,7 @@
                 <a:ea typeface="Microsoft YaHei" pitchFamily="34" charset="-122"/>
                 <a:cs typeface="Microsoft YaHei" pitchFamily="34" charset="-120"/>
               </a:rPr>
-              <a:t>迭代：记忆的版本怎么变</a:t>
+              <a:t>迭代：定义修订的演化规则</a:t>
             </a:r>
             <a:endParaRPr lang="en-US" sz="3000" dirty="0"/>
           </a:p>
@@ -5033,7 +5033,7 @@
                           <a:ea typeface="Microsoft YaHei" pitchFamily="34" charset="-122"/>
                           <a:cs typeface="Microsoft YaHei" pitchFamily="34" charset="-120"/>
                         </a:rPr>
-                        <a:t>情况</a:t>
+                        <a:t>情形</a:t>
                       </a:r>
                       <a:endParaRPr lang="en-US" sz="1300" dirty="0">
                         <a:latin typeface="Microsoft YaHei" charset="0"/>
@@ -5101,7 +5101,7 @@
                           <a:ea typeface="Microsoft YaHei" pitchFamily="34" charset="-122"/>
                           <a:cs typeface="Microsoft YaHei" pitchFamily="34" charset="-120"/>
                         </a:rPr>
-                        <a:t>MAVRA 怎么做</a:t>
+                        <a:t>MAVRA 的处理</a:t>
                       </a:r>
                       <a:endParaRPr lang="en-US" sz="1300" dirty="0">
                         <a:latin typeface="Microsoft YaHei" charset="0"/>
@@ -5239,7 +5239,7 @@
                           <a:ea typeface="Microsoft YaHei" pitchFamily="34" charset="-122"/>
                           <a:cs typeface="Microsoft YaHei" pitchFamily="34" charset="-120"/>
                         </a:rPr>
-                        <a:t>同一指标又学到一次，算法相同</a:t>
+                        <a:t>同一指标再次学到相同结构的定义</a:t>
                       </a:r>
                       <a:endParaRPr lang="en-US" sz="1300" dirty="0">
                         <a:latin typeface="Microsoft YaHei" charset="0"/>
@@ -5304,7 +5304,7 @@
                           <a:ea typeface="Microsoft YaHei" pitchFamily="34" charset="-122"/>
                           <a:cs typeface="Microsoft YaHei" pitchFamily="34" charset="-120"/>
                         </a:rPr>
-                        <a:t>不新增，给原记忆记一次佐证</a:t>
+                        <a:t>不新增，为原定义记录一次佐证</a:t>
                       </a:r>
                       <a:endParaRPr lang="en-US" sz="1300" dirty="0">
                         <a:latin typeface="Microsoft YaHei" charset="0"/>
@@ -5436,7 +5436,7 @@
                           <a:ea typeface="Microsoft YaHei" pitchFamily="34" charset="-122"/>
                           <a:cs typeface="Microsoft YaHei" pitchFamily="34" charset="-120"/>
                         </a:rPr>
-                        <a:t>同名，但算法不同</a:t>
+                        <a:t>同名但结构不同</a:t>
                       </a:r>
                       <a:endParaRPr lang="en-US" sz="1300" dirty="0">
                         <a:latin typeface="Microsoft YaHei" charset="0"/>
@@ -5501,7 +5501,7 @@
                           <a:ea typeface="Microsoft YaHei" pitchFamily="34" charset="-122"/>
                           <a:cs typeface="Microsoft YaHei" pitchFamily="34" charset="-120"/>
                         </a:rPr>
-                        <a:t>两条并存；查询时都返回，由智能体按口径说明挑选</a:t>
+                        <a:t>两条并存；检索时同时返回，由智能体依据口径说明选择</a:t>
                       </a:r>
                       <a:endParaRPr lang="en-US" sz="1300" dirty="0">
                         <a:latin typeface="Microsoft YaHei" charset="0"/>
@@ -5633,7 +5633,7 @@
                           <a:ea typeface="Microsoft YaHei" pitchFamily="34" charset="-122"/>
                           <a:cs typeface="Microsoft YaHei" pitchFamily="34" charset="-120"/>
                         </a:rPr>
-                        <a:t>规则不成立，只有一种修法</a:t>
+                        <a:t>条件不成立，存在唯一修复</a:t>
                       </a:r>
                       <a:endParaRPr lang="en-US" sz="1300" dirty="0">
                         <a:latin typeface="Microsoft YaHei" charset="0"/>
@@ -5698,7 +5698,7 @@
                           <a:ea typeface="Microsoft YaHei" pitchFamily="34" charset="-122"/>
                           <a:cs typeface="Microsoft YaHei" pitchFamily="34" charset="-120"/>
                         </a:rPr>
-                        <a:t>停用 v1，修复后发布 v2；注明 v1 的 SQL 被拒绝；修复期间来的请求等结果</a:t>
+                        <a:t>v1 失效，发布修复后的 v2；声明 v1 的查询被拒绝；修复期间到达的请求等待其结果</a:t>
                       </a:r>
                       <a:endParaRPr lang="en-US" sz="1300" dirty="0">
                         <a:latin typeface="Microsoft YaHei" charset="0"/>
@@ -5763,7 +5763,7 @@
                           <a:ea typeface="Microsoft YaHei" pitchFamily="34" charset="-122"/>
                           <a:cs typeface="Microsoft YaHei" pitchFamily="34" charset="-120"/>
                         </a:rPr>
-                        <a:t>数据更正后：v1 → v2（加 ss_is_current = '1'）</a:t>
+                        <a:t>数据更正后：v1 → v2（增加谓词 ss_is_current = '1'）</a:t>
                       </a:r>
                       <a:endParaRPr lang="en-US" sz="1300" dirty="0">
                         <a:latin typeface="Microsoft YaHei" charset="0"/>
@@ -5830,7 +5830,7 @@
                           <a:ea typeface="Microsoft YaHei" pitchFamily="34" charset="-122"/>
                           <a:cs typeface="Microsoft YaHei" pitchFamily="34" charset="-120"/>
                         </a:rPr>
-                        <a:t>别的记忆遇到同样的问题</a:t>
+                        <a:t>其他定义遇到相同的条件失败</a:t>
                       </a:r>
                       <a:endParaRPr lang="en-US" sz="1300" dirty="0">
                         <a:latin typeface="Microsoft YaHei" charset="0"/>
@@ -5895,7 +5895,7 @@
                           <a:ea typeface="Microsoft YaHei" pitchFamily="34" charset="-122"/>
                           <a:cs typeface="Microsoft YaHei" pitchFamily="34" charset="-120"/>
                         </a:rPr>
-                        <a:t>直接复用已有的校验结果和修复</a:t>
+                        <a:t>直接复用已有的验证结果与修复</a:t>
                       </a:r>
                       <a:endParaRPr lang="en-US" sz="1300" dirty="0">
                         <a:latin typeface="Microsoft YaHei" charset="0"/>
@@ -6027,7 +6027,7 @@
                           <a:ea typeface="Microsoft YaHei" pitchFamily="34" charset="-122"/>
                           <a:cs typeface="Microsoft YaHei" pitchFamily="34" charset="-120"/>
                         </a:rPr>
-                        <a:t>规则不成立，修不好（没有或不止一种修法）</a:t>
+                        <a:t>条件不成立，无唯一修复（无候选或多个候选）</a:t>
                       </a:r>
                       <a:endParaRPr lang="en-US" sz="1300" dirty="0">
                         <a:latin typeface="Microsoft YaHei" charset="0"/>
@@ -6092,7 +6092,7 @@
                           <a:ea typeface="Microsoft YaHei" pitchFamily="34" charset="-122"/>
                           <a:cs typeface="Microsoft YaHei" pitchFamily="34" charset="-120"/>
                         </a:rPr>
-                        <a:t>停用，提醒用过它的智能体</a:t>
+                        <a:t>失效，通知使用方</a:t>
                       </a:r>
                       <a:endParaRPr lang="en-US" sz="1300" dirty="0">
                         <a:latin typeface="Microsoft YaHei" charset="0"/>
@@ -6157,7 +6157,7 @@
                           <a:ea typeface="Microsoft YaHei" pitchFamily="34" charset="-122"/>
                           <a:cs typeface="Microsoft YaHei" pitchFamily="34" charset="-120"/>
                         </a:rPr>
-                        <a:t>重复装载后停用，智能体自己去重</a:t>
+                        <a:t>重复加载后失效；智能体自行去重</a:t>
                       </a:r>
                       <a:endParaRPr lang="en-US" sz="1300" dirty="0">
                         <a:latin typeface="Microsoft YaHei" charset="0"/>
@@ -6224,7 +6224,7 @@
                           <a:ea typeface="Microsoft YaHei" pitchFamily="34" charset="-122"/>
                           <a:cs typeface="Microsoft YaHei" pitchFamily="34" charset="-120"/>
                         </a:rPr>
-                        <a:t>停用之后</a:t>
+                        <a:t>失效之后</a:t>
                       </a:r>
                       <a:endParaRPr lang="en-US" sz="1300" dirty="0">
                         <a:latin typeface="Microsoft YaHei" charset="0"/>
@@ -6289,7 +6289,7 @@
                           <a:ea typeface="Microsoft YaHei" pitchFamily="34" charset="-122"/>
                           <a:cs typeface="Microsoft YaHei" pitchFamily="34" charset="-120"/>
                         </a:rPr>
-                        <a:t>内置智能体再学到同样算法的解题过程，校验通过后作为新版本发布</a:t>
+                        <a:t>内置智能体再次学到相同结构的定义，通过准入检查后作为新修订发布</a:t>
                       </a:r>
                       <a:endParaRPr lang="en-US" sz="1300" dirty="0">
                         <a:latin typeface="Microsoft YaHei" charset="0"/>
@@ -6470,7 +6470,7 @@
                 <a:ea typeface="Microsoft YaHei" pitchFamily="34" charset="-122"/>
                 <a:cs typeface="Microsoft YaHei" pitchFamily="34" charset="-120"/>
               </a:rPr>
-              <a:t>重复装载后的提醒（据系统记录）：</a:t>
+              <a:t>重复加载后发送给使用方的通知（据系统记录整理）：</a:t>
             </a:r>
             <a:endParaRPr lang="en-US" sz="1300" dirty="0"/>
           </a:p>
@@ -6490,7 +6490,7 @@
                 <a:ea typeface="Microsoft YaHei" pitchFamily="34" charset="-122"/>
                 <a:cs typeface="Microsoft YaHei" pitchFamily="34" charset="-120"/>
               </a:rPr>
-              <a:t>你用过的“门店营业额”已停用：“每笔销售一行”不成立，1,099,860 行只有 989,695 个不同键（平均每键 1.11 行），没有找到能恢复的过滤；之前基于它得到的结果建议复核。</a:t>
+              <a:t>你使用过的“门店营业额”已失效：“粒度键唯一”不成立，1,099,860 行只有 989,695 个不同键（平均每键 1.11 行），未找到能恢复唯一性的谓词；此前基于它得到的结果建议复核。</a:t>
             </a:r>
             <a:endParaRPr lang="en-US" sz="1300" dirty="0"/>
           </a:p>
@@ -6529,7 +6529,7 @@
                 <a:ea typeface="Microsoft YaHei" pitchFamily="34" charset="-122"/>
                 <a:cs typeface="Microsoft YaHei" pitchFamily="34" charset="-120"/>
               </a:rPr>
-              <a:t>记录：noctis results/scen-20261002/dsv41flash-r1-g3fix--snap（端到端实验第 1 次 MAVRA 运行）。数据为仿 TPC-DS 的合成零售数据（100 万行门店销售），题目中的年份略去。</a:t>
+              <a:t>记录：noctis results/scen-20261002/dsv41flash-r1-g3fix--snap（端到端实验第 1 次 MAVRA 运行）。数据为仿 TPC-DS 的合成零售数据（store_sales 100 万行），题目中的年份略去。</a:t>
             </a:r>
             <a:endParaRPr lang="en-US" sz="1100" dirty="0"/>
           </a:p>
@@ -6643,7 +6643,7 @@
                 <a:ea typeface="Microsoft YaHei" pitchFamily="34" charset="-122"/>
                 <a:cs typeface="Microsoft YaHei" pitchFamily="34" charset="-120"/>
               </a:rPr>
-              <a:t>回到例子：有了 MAVRA 之后</a:t>
+              <a:t>回到例子：引入 MAVRA 之后</a:t>
             </a:r>
             <a:endParaRPr lang="en-US" sz="3000" dirty="0"/>
           </a:p>
@@ -6696,7 +6696,7 @@
                           <a:ea typeface="Microsoft YaHei" pitchFamily="34" charset="-122"/>
                           <a:cs typeface="Microsoft YaHei" pitchFamily="34" charset="-120"/>
                         </a:rPr>
-                        <a:t>写入</a:t>
+                        <a:t>更新</a:t>
                       </a:r>
                       <a:endParaRPr lang="en-US" sz="1400" dirty="0">
                         <a:latin typeface="Microsoft YaHei" charset="0"/>
@@ -6764,7 +6764,7 @@
                           <a:ea typeface="Microsoft YaHei" pitchFamily="34" charset="-122"/>
                           <a:cs typeface="Microsoft YaHei" pitchFamily="34" charset="-120"/>
                         </a:rPr>
-                        <a:t>数据库里发生了什么</a:t>
+                        <a:t>数据库中的变化</a:t>
                       </a:r>
                       <a:endParaRPr lang="en-US" sz="1400" dirty="0">
                         <a:latin typeface="Microsoft YaHei" charset="0"/>
@@ -6832,7 +6832,7 @@
                           <a:ea typeface="Microsoft YaHei" pitchFamily="34" charset="-122"/>
                           <a:cs typeface="Microsoft YaHei" pitchFamily="34" charset="-120"/>
                         </a:rPr>
-                        <a:t>正确答案</a:t>
+                        <a:t>参考答案</a:t>
                       </a:r>
                       <a:endParaRPr lang="en-US" sz="1400" dirty="0">
                         <a:latin typeface="Microsoft YaHei" charset="0"/>
@@ -7038,7 +7038,7 @@
                           <a:ea typeface="Microsoft YaHei" pitchFamily="34" charset="-122"/>
                           <a:cs typeface="Microsoft YaHei" pitchFamily="34" charset="-120"/>
                         </a:rPr>
-                        <a:t>追加新数据</a:t>
+                        <a:t>增量加载</a:t>
                       </a:r>
                       <a:endParaRPr lang="en-US" sz="1400" dirty="0">
                         <a:latin typeface="Microsoft YaHei" charset="0"/>
@@ -7103,7 +7103,7 @@
                           <a:ea typeface="Microsoft YaHei" pitchFamily="34" charset="-122"/>
                           <a:cs typeface="Microsoft YaHei" pitchFamily="34" charset="-120"/>
                         </a:rPr>
-                        <a:t>把 9 月的销售复制一份、换新小票号，+27,095 行</a:t>
+                        <a:t>追加一批新的销售记录（新小票号），+27,095 行</a:t>
                       </a:r>
                       <a:endParaRPr lang="en-US" sz="1400" dirty="0">
                         <a:latin typeface="Microsoft YaHei" charset="0"/>
@@ -7298,7 +7298,7 @@
                           <a:ea typeface="Microsoft YaHei" pitchFamily="34" charset="-122"/>
                           <a:cs typeface="Microsoft YaHei" pitchFamily="34" charset="-120"/>
                         </a:rPr>
-                        <a:t>规则仍成立，保持 v1</a:t>
+                        <a:t>条件仍成立，保持 v1</a:t>
                       </a:r>
                       <a:endParaRPr lang="en-US" sz="1400" dirty="0">
                         <a:latin typeface="Microsoft YaHei" charset="0"/>
@@ -7319,7 +7319,7 @@
                           <a:ea typeface="Microsoft YaHei" pitchFamily="34" charset="-122"/>
                           <a:cs typeface="Microsoft YaHei" pitchFamily="34" charset="-120"/>
                         </a:rPr>
-                        <a:t>6 条定义只跑了 2 次校验</a:t>
+                        <a:t>6 条定义仅执行 2 次验证</a:t>
                       </a:r>
                       <a:endParaRPr lang="en-US" sz="1400" dirty="0">
                         <a:latin typeface="Microsoft YaHei" charset="0"/>
@@ -7472,7 +7472,7 @@
                           <a:ea typeface="Microsoft YaHei" pitchFamily="34" charset="-122"/>
                           <a:cs typeface="Microsoft YaHei" pitchFamily="34" charset="-120"/>
                         </a:rPr>
-                        <a:t>部分销售被更正：旧行保留并标为非当前（ss_is_current = 0），新增九折的当前行，共 65,915 行</a:t>
+                        <a:t>部分销售被更正：旧行保留并标记为非当前（ss_is_current = 0），插入九折后的当前行，共 65,915 行</a:t>
                       </a:r>
                       <a:endParaRPr lang="en-US" sz="1400" dirty="0">
                         <a:latin typeface="Microsoft YaHei" charset="0"/>
@@ -7623,7 +7623,7 @@
                           <a:ea typeface="Microsoft YaHei" pitchFamily="34" charset="-122"/>
                           <a:cs typeface="Microsoft YaHei" pitchFamily="34" charset="-120"/>
                         </a:rPr>
-                        <a:t>新旧两版都算了</a:t>
+                        <a:t>新旧版本重复计入</a:t>
                       </a:r>
                       <a:endParaRPr lang="en-US" sz="1400" dirty="0">
                         <a:latin typeface="Microsoft YaHei" charset="0"/>
@@ -7688,7 +7688,7 @@
                           <a:ea typeface="Microsoft YaHei" pitchFamily="34" charset="-122"/>
                           <a:cs typeface="Microsoft YaHei" pitchFamily="34" charset="-120"/>
                         </a:rPr>
-                        <a:t>停用 v1 → 修复为 v2</a:t>
+                        <a:t>v1 失效 → 修复为 v2</a:t>
                       </a:r>
                       <a:endParaRPr lang="en-US" sz="1400" dirty="0">
                         <a:latin typeface="Microsoft YaHei" charset="0"/>
@@ -7709,7 +7709,7 @@
                           <a:ea typeface="Microsoft YaHei" pitchFamily="34" charset="-122"/>
                           <a:cs typeface="Microsoft YaHei" pitchFamily="34" charset="-120"/>
                         </a:rPr>
-                        <a:t>（只算 ss_is_current = '1'）</a:t>
+                        <a:t>（谓词 ss_is_current = '1'）</a:t>
                       </a:r>
                       <a:endParaRPr lang="en-US" sz="1400" dirty="0">
                         <a:latin typeface="Microsoft YaHei" charset="0"/>
@@ -7797,7 +7797,7 @@
                           <a:ea typeface="Microsoft YaHei" pitchFamily="34" charset="-122"/>
                           <a:cs typeface="Microsoft YaHei" pitchFamily="34" charset="-120"/>
                         </a:rPr>
-                        <a:t>重复装载</a:t>
+                        <a:t>重复加载</a:t>
                       </a:r>
                       <a:endParaRPr lang="en-US" sz="1400" dirty="0">
                         <a:latin typeface="Microsoft YaHei" charset="0"/>
@@ -7862,7 +7862,7 @@
                           <a:ea typeface="Microsoft YaHei" pitchFamily="34" charset="-122"/>
                           <a:cs typeface="Microsoft YaHei" pitchFamily="34" charset="-120"/>
                         </a:rPr>
-                        <a:t>4 个月的销售整批又装载了一次，+110,165 行</a:t>
+                        <a:t>4 个月的销售批次被再次加载，+110,165 行</a:t>
                       </a:r>
                       <a:endParaRPr lang="en-US" sz="1400" dirty="0">
                         <a:latin typeface="Microsoft YaHei" charset="0"/>
@@ -8013,7 +8013,7 @@
                           <a:ea typeface="Microsoft YaHei" pitchFamily="34" charset="-122"/>
                           <a:cs typeface="Microsoft YaHei" pitchFamily="34" charset="-120"/>
                         </a:rPr>
-                        <a:t>9 月翻倍</a:t>
+                        <a:t>9 月重复计入</a:t>
                       </a:r>
                       <a:endParaRPr lang="en-US" sz="1400" dirty="0">
                         <a:latin typeface="Microsoft YaHei" charset="0"/>
@@ -8078,7 +8078,7 @@
                           <a:ea typeface="Microsoft YaHei" pitchFamily="34" charset="-122"/>
                           <a:cs typeface="Microsoft YaHei" pitchFamily="34" charset="-120"/>
                         </a:rPr>
-                        <a:t>找不到修复 → 停用并提醒</a:t>
+                        <a:t>无唯一修复 → 失效并通知</a:t>
                       </a:r>
                       <a:endParaRPr lang="en-US" sz="1400" dirty="0">
                         <a:latin typeface="Microsoft YaHei" charset="0"/>
@@ -8099,7 +8099,7 @@
                           <a:ea typeface="Microsoft YaHei" pitchFamily="34" charset="-122"/>
                           <a:cs typeface="Microsoft YaHei" pitchFamily="34" charset="-120"/>
                         </a:rPr>
-                        <a:t>智能体自己去重</a:t>
+                        <a:t>智能体自行去重</a:t>
                       </a:r>
                       <a:endParaRPr lang="en-US" sz="1400" dirty="0">
                         <a:latin typeface="Microsoft YaHei" charset="0"/>
@@ -8206,7 +8206,7 @@
                 <a:ea typeface="Microsoft YaHei" pitchFamily="34" charset="-122"/>
                 <a:cs typeface="Microsoft YaHei" pitchFamily="34" charset="-120"/>
               </a:rPr>
-              <a:t>同样三种写入，MAVRA 都发现了：</a:t>
+              <a:t>三种更新 MAVRA 均检测到：</a:t>
             </a:r>
             <a:endParaRPr lang="en-US" sz="1600" dirty="0"/>
           </a:p>
@@ -8223,7 +8223,7 @@
                 <a:ea typeface="Microsoft YaHei" pitchFamily="34" charset="-122"/>
                 <a:cs typeface="Microsoft YaHei" pitchFamily="34" charset="-120"/>
               </a:rPr>
-              <a:t>规则仍成立就继续用；能唯一修好就发布新版本；修不了就停用并提醒，不让错误答案悄悄出去。</a:t>
+              <a:t>条件成立则继续使用；存在唯一修复则发布新修订；否则失效并通知，不向使用方返回错误答案。</a:t>
             </a:r>
             <a:endParaRPr lang="en-US" sz="1600" dirty="0"/>
           </a:p>
@@ -8262,7 +8262,7 @@
                 <a:ea typeface="Microsoft YaHei" pitchFamily="34" charset="-122"/>
                 <a:cs typeface="Microsoft YaHei" pitchFamily="34" charset="-120"/>
               </a:rPr>
-              <a:t>对照组：只在表结构变化时才让定义失效，3 次独立运行答案相同。MAVRA 栏为第 1 次运行；追加和更正 3 次运行结果相同，重复装载见表。数据为仿 TPC-DS 的合成零售数据（100 万行门店销售），题目中的年份略去。</a:t>
+              <a:t>对照组：仅在模式变更时使定义失效，3 次独立运行答案相同。MAVRA 栏为第 1 次运行；增量加载与数据更正 3 次运行结果相同，重复加载见表。数据为仿 TPC-DS 的合成零售数据（store_sales 100 万行），题目中的年份略去。</a:t>
             </a:r>
             <a:endParaRPr lang="en-US" sz="1100" dirty="0"/>
           </a:p>
@@ -8376,7 +8376,7 @@
                 <a:ea typeface="Microsoft YaHei" pitchFamily="34" charset="-122"/>
                 <a:cs typeface="Microsoft YaHei" pitchFamily="34" charset="-120"/>
               </a:rPr>
-              <a:t>数据更正之后，MAVRA 依次做了什么</a:t>
+              <a:t>数据更正之后：MAVRA 的处理过程</a:t>
             </a:r>
             <a:endParaRPr lang="en-US" sz="3000" dirty="0"/>
           </a:p>
@@ -8484,7 +8484,7 @@
                           <a:ea typeface="Microsoft YaHei" pitchFamily="34" charset="-122"/>
                           <a:cs typeface="Microsoft YaHei" pitchFamily="34" charset="-120"/>
                         </a:rPr>
-                        <a:t>发生了什么</a:t>
+                        <a:t>事件</a:t>
                       </a:r>
                       <a:endParaRPr lang="en-US" sz="1400" dirty="0">
                         <a:latin typeface="Microsoft YaHei" charset="0"/>
@@ -8687,7 +8687,7 @@
                           <a:ea typeface="Microsoft YaHei" pitchFamily="34" charset="-122"/>
                           <a:cs typeface="Microsoft YaHei" pitchFamily="34" charset="-120"/>
                         </a:rPr>
-                        <a:t>第一个用到销售表的查询到来。先检查名称匹配到的“电子品类门店营业额”：销售表变了，重新校验“每笔销售一行”</a:t>
+                        <a:t>更新后首个访问 store_sales 的请求到达。先处理名称匹配到的“电子品类门店营业额”：表版本已变，重新验证“粒度键唯一”</a:t>
                       </a:r>
                       <a:endParaRPr lang="en-US" sz="1400" dirty="0">
                         <a:latin typeface="Microsoft YaHei" charset="0"/>
@@ -8766,7 +8766,7 @@
                           <a:ea typeface="Microsoft YaHei" pitchFamily="34" charset="-122"/>
                           <a:cs typeface="Microsoft YaHei" pitchFamily="34" charset="-120"/>
                         </a:rPr>
-                        <a:t>“1065915 行只有 1000000 个不同键（平均每键 1.07 行）”，用时 5.5 秒 → 停用 v1</a:t>
+                        <a:t>“1065915 行只有 1000000 个不同键（平均每键 1.07 行）”，耗时 5.5 秒 → v1 失效</a:t>
                       </a:r>
                       <a:endParaRPr lang="en-US" sz="1400" dirty="0">
                         <a:latin typeface="Microsoft YaHei" charset="0"/>
@@ -8898,7 +8898,7 @@
                           <a:ea typeface="Microsoft YaHei" pitchFamily="34" charset="-122"/>
                           <a:cs typeface="Microsoft YaHei" pitchFamily="34" charset="-120"/>
                         </a:rPr>
-                        <a:t>在取值少的列上逐个试过滤</a:t>
+                        <a:t>在低基数列上枚举等值谓词</a:t>
                       </a:r>
                       <a:endParaRPr lang="en-US" sz="1400" dirty="0">
                         <a:latin typeface="Microsoft YaHei" charset="0"/>
@@ -8963,7 +8963,7 @@
                           <a:ea typeface="Microsoft YaHei" pitchFamily="34" charset="-122"/>
                           <a:cs typeface="Microsoft YaHei" pitchFamily="34" charset="-120"/>
                         </a:rPr>
-                        <a:t>只有 ss_is_current = '1' 能做到每笔一行、一笔不少</a:t>
+                        <a:t>仅 ss_is_current = '1' 能恢复键唯一且不丢失键</a:t>
                       </a:r>
                       <a:endParaRPr lang="en-US" sz="1400" dirty="0">
                         <a:latin typeface="Microsoft YaHei" charset="0"/>
@@ -9095,7 +9095,7 @@
                           <a:ea typeface="Microsoft YaHei" pitchFamily="34" charset="-122"/>
                           <a:cs typeface="Microsoft YaHei" pitchFamily="34" charset="-120"/>
                         </a:rPr>
-                        <a:t>对这个修复做 4 项检查：合法性、当前数据上的粒度、SQL 审查、回归测试</a:t>
+                        <a:t>对该修复执行 4 项检查：静态合法性、当前快照上的粒度、SQL 审查、回归测试</a:t>
                       </a:r>
                       <a:endParaRPr lang="en-US" sz="1400" dirty="0">
                         <a:latin typeface="Microsoft YaHei" charset="0"/>
@@ -9306,7 +9306,7 @@
                           <a:ea typeface="Microsoft YaHei" pitchFamily="34" charset="-122"/>
                           <a:cs typeface="Microsoft YaHei" pitchFamily="34" charset="-120"/>
                         </a:rPr>
-                        <a:t>接着检查“门店营业额”：同一条规则、同一个数据版本已经有结果</a:t>
+                        <a:t>接着处理“门店营业额”：相同条件、相同表版本已有结果</a:t>
                       </a:r>
                       <a:endParaRPr lang="en-US" sz="1400" dirty="0">
                         <a:latin typeface="Microsoft YaHei" charset="0"/>
@@ -9371,7 +9371,7 @@
                           <a:ea typeface="Microsoft YaHei" pitchFamily="34" charset="-122"/>
                           <a:cs typeface="Microsoft YaHei" pitchFamily="34" charset="-120"/>
                         </a:rPr>
-                        <a:t>复用校验结果和修复，</a:t>
+                        <a:t>复用验证结果与修复，</a:t>
                       </a:r>
                       <a:pPr indent="0" marL="0">
                         <a:buNone/>
@@ -9399,7 +9399,7 @@
                           <a:ea typeface="Microsoft YaHei" pitchFamily="34" charset="-122"/>
                           <a:cs typeface="Microsoft YaHei" pitchFamily="34" charset="-120"/>
                         </a:rPr>
-                        <a:t>就发布了 v2</a:t>
+                        <a:t>发布 v2</a:t>
                       </a:r>
                       <a:endParaRPr lang="en-US" sz="1400" dirty="0">
                         <a:latin typeface="Microsoft YaHei" charset="0"/>
@@ -9531,7 +9531,7 @@
                           <a:ea typeface="Microsoft YaHei" pitchFamily="34" charset="-122"/>
                           <a:cs typeface="Microsoft YaHei" pitchFamily="34" charset="-120"/>
                         </a:rPr>
-                        <a:t>“门店退货率”要把销售和退货关联起来</a:t>
+                        <a:t>“门店退货率”需要连接 store_sales 与 store_returns</a:t>
                       </a:r>
                       <a:endParaRPr lang="en-US" sz="1400" dirty="0">
                         <a:latin typeface="Microsoft YaHei" charset="0"/>
@@ -9596,7 +9596,7 @@
                           <a:ea typeface="Microsoft YaHei" pitchFamily="34" charset="-122"/>
                           <a:cs typeface="Microsoft YaHei" pitchFamily="34" charset="-120"/>
                         </a:rPr>
-                        <a:t>关联路径现在要求只用当前行 → 也修复为 v2</a:t>
+                        <a:t>连接路径现在要求谓词 ss_is_current = '1' → 同样修复为 v2</a:t>
                       </a:r>
                       <a:endParaRPr lang="en-US" sz="1400" dirty="0">
                         <a:latin typeface="Microsoft YaHei" charset="0"/>
@@ -9728,7 +9728,7 @@
                           <a:ea typeface="Microsoft YaHei" pitchFamily="34" charset="-122"/>
                           <a:cs typeface="Microsoft YaHei" pitchFamily="34" charset="-120"/>
                         </a:rPr>
-                        <a:t>用户智能体 B 问“9 月门店营业额”</a:t>
+                        <a:t>用户智能体 B 询问“9 月门店营业额”</a:t>
                       </a:r>
                       <a:endParaRPr lang="en-US" sz="1400" dirty="0">
                         <a:latin typeface="Microsoft YaHei" charset="0"/>
@@ -9793,7 +9793,7 @@
                           <a:ea typeface="Microsoft YaHei" pitchFamily="34" charset="-122"/>
                           <a:cs typeface="Microsoft YaHei" pitchFamily="34" charset="-120"/>
                         </a:rPr>
-                        <a:t>收到 3 条提醒；SQL 带上 ss_is_current = '1'；答 </a:t>
+                        <a:t>收到 3 条通知；SQL 带上 ss_is_current = '1'；答 </a:t>
                       </a:r>
                       <a:pPr indent="0" marL="0">
                         <a:buNone/>
@@ -9907,7 +9907,7 @@
                 <a:ea typeface="Microsoft YaHei" pitchFamily="34" charset="-122"/>
                 <a:cs typeface="Microsoft YaHei" pitchFamily="34" charset="-120"/>
               </a:rPr>
-              <a:t>记录：noctis results/scen-20261002/dsv41flash-r1-g3fix--snap（端到端实验第 1 次 MAVRA 运行）。数据为仿 TPC-DS 的合成零售数据（100 万行门店销售），题目中的年份略去。</a:t>
+              <a:t>记录：noctis results/scen-20261002/dsv41flash-r1-g3fix--snap（端到端实验第 1 次 MAVRA 运行）。数据为仿 TPC-DS 的合成零售数据（store_sales 100 万行），题目中的年份略去。</a:t>
             </a:r>
             <a:endParaRPr lang="en-US" sz="1100" dirty="0"/>
           </a:p>
@@ -10021,7 +10021,7 @@
                 <a:ea typeface="Microsoft YaHei" pitchFamily="34" charset="-122"/>
                 <a:cs typeface="Microsoft YaHei" pitchFamily="34" charset="-120"/>
               </a:rPr>
-              <a:t>回归测试为什么要用学习时的数据</a:t>
+              <a:t>回归测试为何以学习时刻为基准</a:t>
             </a:r>
             <a:endParaRPr lang="en-US" sz="3000" dirty="0"/>
           </a:p>
@@ -10060,7 +10060,7 @@
                 <a:ea typeface="Microsoft YaHei" pitchFamily="34" charset="-122"/>
                 <a:cs typeface="Microsoft YaHei" pitchFamily="34" charset="-120"/>
               </a:rPr>
-              <a:t>学习题问的是 3 月，正好在被更正的范围里。回归测试拿内置智能体当初的 SQL 当标准，和加了过滤的新定义各算一次 3 月：</a:t>
+              <a:t>学习任务询问的是 3 月，恰在被更正的范围内。回归测试以内置智能体学习时的 SQL 为基准，与修复后的定义各计算一次 3 月：</a:t>
             </a:r>
             <a:endParaRPr lang="en-US" sz="1700" dirty="0"/>
           </a:p>
@@ -10112,7 +10112,7 @@
                           <a:ea typeface="Microsoft YaHei" pitchFamily="34" charset="-122"/>
                           <a:cs typeface="Microsoft YaHei" pitchFamily="34" charset="-120"/>
                         </a:rPr>
-                        <a:t>用哪份数据比</a:t>
+                        <a:t>比较所用的数据</a:t>
                       </a:r>
                       <a:endParaRPr lang="en-US" sz="1800" dirty="0">
                         <a:latin typeface="Microsoft YaHei" charset="0"/>
@@ -10180,7 +10180,7 @@
                           <a:ea typeface="Microsoft YaHei" pitchFamily="34" charset="-122"/>
                           <a:cs typeface="Microsoft YaHei" pitchFamily="34" charset="-120"/>
                         </a:rPr>
-                        <a:t>当初的 SQL</a:t>
+                        <a:t>学习时的 SQL</a:t>
                       </a:r>
                       <a:endParaRPr lang="en-US" sz="1800" dirty="0">
                         <a:latin typeface="Microsoft YaHei" charset="0"/>
@@ -10248,7 +10248,7 @@
                           <a:ea typeface="Microsoft YaHei" pitchFamily="34" charset="-122"/>
                           <a:cs typeface="Microsoft YaHei" pitchFamily="34" charset="-120"/>
                         </a:rPr>
-                        <a:t>新定义（v2）</a:t>
+                        <a:t>修复后的定义（v2）</a:t>
                       </a:r>
                       <a:endParaRPr lang="en-US" sz="1800" dirty="0">
                         <a:latin typeface="Microsoft YaHei" charset="0"/>
@@ -10386,7 +10386,7 @@
                           <a:ea typeface="Microsoft YaHei" pitchFamily="34" charset="-122"/>
                           <a:cs typeface="Microsoft YaHei" pitchFamily="34" charset="-120"/>
                         </a:rPr>
-                        <a:t>学习时的数据</a:t>
+                        <a:t>学习时刻（as-of 查询）</a:t>
                       </a:r>
                       <a:endParaRPr lang="en-US" sz="1800" dirty="0">
                         <a:latin typeface="Microsoft YaHei" charset="0"/>
@@ -10648,7 +10648,7 @@
                           <a:ea typeface="Microsoft YaHei" pitchFamily="34" charset="-122"/>
                           <a:cs typeface="Microsoft YaHei" pitchFamily="34" charset="-120"/>
                         </a:rPr>
-                        <a:t>现在的数据</a:t>
+                        <a:t>当前数据</a:t>
                       </a:r>
                       <a:endParaRPr lang="en-US" sz="1800" dirty="0">
                         <a:latin typeface="Microsoft YaHei" charset="0"/>
@@ -10843,7 +10843,7 @@
                           <a:ea typeface="Microsoft YaHei" pitchFamily="34" charset="-122"/>
                           <a:cs typeface="Microsoft YaHei" pitchFamily="34" charset="-120"/>
                         </a:rPr>
-                        <a:t>不一致 → 拒绝了正确的修复 ✗</a:t>
+                        <a:t>不一致 → 误拒正确的修复 ✗</a:t>
                       </a:r>
                       <a:endParaRPr lang="en-US" sz="1800" dirty="0">
                         <a:latin typeface="Microsoft YaHei" charset="0"/>
@@ -10951,7 +10951,7 @@
               <a:buNone/>
             </a:pPr>
             <a:r>
-              <a:rPr lang="en-US" sz="1700" b="1" dirty="0">
+              <a:rPr lang="en-US" sz="1600" b="1" dirty="0">
                 <a:solidFill>
                   <a:srgbClr val="1D5BA6"/>
                 </a:solidFill>
@@ -10968,7 +10968,7 @@
               <a:buNone/>
             </a:pPr>
             <a:r>
-              <a:rPr lang="en-US" sz="1700" dirty="0">
+              <a:rPr lang="en-US" sz="1600" dirty="0">
                 <a:solidFill>
                   <a:srgbClr val="1F2A37"/>
                 </a:solidFill>
@@ -10976,9 +10976,9 @@
                 <a:ea typeface="Microsoft YaHei" pitchFamily="34" charset="-122"/>
                 <a:cs typeface="Microsoft YaHei" pitchFamily="34" charset="-120"/>
               </a:rPr>
-              <a:t>在现在的数据里，当初的 SQL 自己也过时了——它把更正前的旧行也算了进去（1489.1 万）。它只在学习时的数据上被核验过是对的，所以只能在那份数据上当标准。这也是修复不需要参考答案的原因。</a:t>
+              <a:t>在当前数据上，学习时的 SQL 本身已经过期——它同样把更正前的旧行计入（1489.1 万）。它仅在学习时的快照上被判定正确，因此只能在该快照上作为基准；这也是修复不需要参考答案的原因。数据仓库通过时间旅行查询（FOR SYSTEM_TIME AS OF）提供学习时刻的数据。</a:t>
             </a:r>
-            <a:endParaRPr lang="en-US" sz="1700" dirty="0"/>
+            <a:endParaRPr lang="en-US" sz="1600" dirty="0"/>
           </a:p>
         </p:txBody>
       </p:sp>
@@ -11015,7 +11015,7 @@
                 <a:ea typeface="Microsoft YaHei" pitchFamily="34" charset="-122"/>
                 <a:cs typeface="Microsoft YaHei" pitchFamily="34" charset="-120"/>
               </a:rPr>
-              <a:t>“现在的数据”一行来自对照实验（回归测试改用当前数据，dsv41flash-r1-g3fix--exref），系统记录原文：“结果 13423672.28 与期望 14890636.48 不一致”。</a:t>
+              <a:t>“当前数据”一行来自对照实验（回归测试改用当前数据，dsv41flash-r1-g3fix--exref），系统记录原文：“结果 13423672.28 与期望 14890636.48 不一致”。</a:t>
             </a:r>
             <a:endParaRPr lang="en-US" sz="1100" dirty="0"/>
           </a:p>
@@ -11129,7 +11129,7 @@
                 <a:ea typeface="Microsoft YaHei" pitchFamily="34" charset="-122"/>
                 <a:cs typeface="Microsoft YaHei" pitchFamily="34" charset="-120"/>
               </a:rPr>
-              <a:t>和已有做法比</a:t>
+              <a:t>与现有方法的比较</a:t>
             </a:r>
             <a:endParaRPr lang="en-US" sz="3000" dirty="0"/>
           </a:p>
@@ -11239,7 +11239,7 @@
                           <a:ea typeface="Microsoft YaHei" pitchFamily="34" charset="-122"/>
                           <a:cs typeface="Microsoft YaHei" pitchFamily="34" charset="-120"/>
                         </a:rPr>
-                        <a:t>Text-to-SQL / 不共享记忆的智能体</a:t>
+                        <a:t>Text-to-SQL / 无共享定义的智能体</a:t>
                       </a:r>
                       <a:endParaRPr lang="en-US" sz="1400" dirty="0">
                         <a:latin typeface="Microsoft YaHei" charset="0"/>
@@ -11307,7 +11307,7 @@
                           <a:ea typeface="Microsoft YaHei" pitchFamily="34" charset="-122"/>
                           <a:cs typeface="Microsoft YaHei" pitchFamily="34" charset="-120"/>
                         </a:rPr>
-                        <a:t>检索历史 SQL 示例</a:t>
+                        <a:t>检索历史查询示例</a:t>
                       </a:r>
                       <a:endParaRPr lang="en-US" sz="1400" dirty="0">
                         <a:latin typeface="Microsoft YaHei" charset="0"/>
@@ -11375,7 +11375,7 @@
                           <a:ea typeface="Microsoft YaHei" pitchFamily="34" charset="-122"/>
                           <a:cs typeface="Microsoft YaHei" pitchFamily="34" charset="-120"/>
                         </a:rPr>
-                        <a:t>语义层（人工定义指标）</a:t>
+                        <a:t>语义层（人工维护的指标定义）</a:t>
                       </a:r>
                       <a:endParaRPr lang="en-US" sz="1400" dirty="0">
                         <a:latin typeface="Microsoft YaHei" charset="0"/>
@@ -11513,7 +11513,7 @@
                           <a:ea typeface="Microsoft YaHei" pitchFamily="34" charset="-122"/>
                           <a:cs typeface="Microsoft YaHei" pitchFamily="34" charset="-120"/>
                         </a:rPr>
-                        <a:t>记住什么</a:t>
+                        <a:t>记忆内容</a:t>
                       </a:r>
                       <a:endParaRPr lang="en-US" sz="1400" dirty="0">
                         <a:latin typeface="Microsoft YaHei" charset="0"/>
@@ -11578,7 +11578,7 @@
                           <a:ea typeface="Microsoft YaHei" pitchFamily="34" charset="-122"/>
                           <a:cs typeface="Microsoft YaHei" pitchFamily="34" charset="-120"/>
                         </a:rPr>
-                        <a:t>不记</a:t>
+                        <a:t>无</a:t>
                       </a:r>
                       <a:endParaRPr lang="en-US" sz="1400" dirty="0">
                         <a:latin typeface="Microsoft YaHei" charset="0"/>
@@ -11643,7 +11643,7 @@
                           <a:ea typeface="Microsoft YaHei" pitchFamily="34" charset="-122"/>
                           <a:cs typeface="Microsoft YaHei" pitchFamily="34" charset="-120"/>
                         </a:rPr>
-                        <a:t>答对过的问题和当时的 SQL</a:t>
+                        <a:t>已正确回答的问题及其 SQL</a:t>
                       </a:r>
                       <a:endParaRPr lang="en-US" sz="1400" dirty="0">
                         <a:latin typeface="Microsoft YaHei" charset="0"/>
@@ -11708,7 +11708,7 @@
                           <a:ea typeface="Microsoft YaHei" pitchFamily="34" charset="-122"/>
                           <a:cs typeface="Microsoft YaHei" pitchFamily="34" charset="-120"/>
                         </a:rPr>
-                        <a:t>人写好的指标定义</a:t>
+                        <a:t>人工编写的指标定义</a:t>
                       </a:r>
                       <a:endParaRPr lang="en-US" sz="1400" dirty="0">
                         <a:latin typeface="Microsoft YaHei" charset="0"/>
@@ -11773,7 +11773,7 @@
                           <a:ea typeface="Microsoft YaHei" pitchFamily="34" charset="-122"/>
                           <a:cs typeface="Microsoft YaHei" pitchFamily="34" charset="-120"/>
                         </a:rPr>
-                        <a:t>表画像、关联路径、指标定义，以及它们成立的前提</a:t>
+                        <a:t>表统计信息、连接路径、指标定义及其成立的条件</a:t>
                       </a:r>
                       <a:endParaRPr lang="en-US" sz="1400" dirty="0">
                         <a:latin typeface="Microsoft YaHei" charset="0"/>
@@ -11840,7 +11840,7 @@
                           <a:ea typeface="Microsoft YaHei" pitchFamily="34" charset="-122"/>
                           <a:cs typeface="Microsoft YaHei" pitchFamily="34" charset="-120"/>
                         </a:rPr>
-                        <a:t>谁来写</a:t>
+                        <a:t>写入方式</a:t>
                       </a:r>
                       <a:endParaRPr lang="en-US" sz="1400" dirty="0">
                         <a:latin typeface="Microsoft YaHei" charset="0"/>
@@ -12035,7 +12035,7 @@
                           <a:ea typeface="Microsoft YaHei" pitchFamily="34" charset="-122"/>
                           <a:cs typeface="Microsoft YaHei" pitchFamily="34" charset="-120"/>
                         </a:rPr>
-                        <a:t>数据团队手写</a:t>
+                        <a:t>数据团队手工编写</a:t>
                       </a:r>
                       <a:endParaRPr lang="en-US" sz="1400" dirty="0">
                         <a:latin typeface="Microsoft YaHei" charset="0"/>
@@ -12100,7 +12100,7 @@
                           <a:ea typeface="Microsoft YaHei" pitchFamily="34" charset="-122"/>
                           <a:cs typeface="Microsoft YaHei" pitchFamily="34" charset="-120"/>
                         </a:rPr>
-                        <a:t>内置智能体学习，校验通过后自动发布</a:t>
+                        <a:t>内置智能体学习，通过准入检查后自动发布</a:t>
                       </a:r>
                       <a:endParaRPr lang="en-US" sz="1400" dirty="0">
                         <a:latin typeface="Microsoft YaHei" charset="0"/>
@@ -12167,7 +12167,7 @@
                           <a:ea typeface="Microsoft YaHei" pitchFamily="34" charset="-122"/>
                           <a:cs typeface="Microsoft YaHei" pitchFamily="34" charset="-120"/>
                         </a:rPr>
-                        <a:t>数据变了</a:t>
+                        <a:t>数据更新后</a:t>
                       </a:r>
                       <a:endParaRPr lang="en-US" sz="1400" dirty="0">
                         <a:latin typeface="Microsoft YaHei" charset="0"/>
@@ -12297,7 +12297,7 @@
                           <a:ea typeface="Microsoft YaHei" pitchFamily="34" charset="-122"/>
                           <a:cs typeface="Microsoft YaHei" pitchFamily="34" charset="-120"/>
                         </a:rPr>
-                        <a:t>不知道，照旧给出旧 SQL</a:t>
+                        <a:t>不感知，继续返回旧 SQL</a:t>
                       </a:r>
                       <a:endParaRPr lang="en-US" sz="1400" dirty="0">
                         <a:latin typeface="Microsoft YaHei" charset="0"/>
@@ -12362,7 +12362,7 @@
                           <a:ea typeface="Microsoft YaHei" pitchFamily="34" charset="-122"/>
                           <a:cs typeface="Microsoft YaHei" pitchFamily="34" charset="-120"/>
                         </a:rPr>
-                        <a:t>靠人发现、人改</a:t>
+                        <a:t>依赖人工发现与修改</a:t>
                       </a:r>
                       <a:endParaRPr lang="en-US" sz="1400" dirty="0">
                         <a:latin typeface="Microsoft YaHei" charset="0"/>
@@ -12427,7 +12427,7 @@
                           <a:ea typeface="Microsoft YaHei" pitchFamily="34" charset="-122"/>
                           <a:cs typeface="Microsoft YaHei" pitchFamily="34" charset="-120"/>
                         </a:rPr>
-                        <a:t>只重验受影响的规则；修复为新版本或停用</a:t>
+                        <a:t>仅重新验证受影响的条件；修复为新修订或失效</a:t>
                       </a:r>
                       <a:endParaRPr lang="en-US" sz="1400" dirty="0">
                         <a:latin typeface="Microsoft YaHei" charset="0"/>
@@ -12494,7 +12494,7 @@
                           <a:ea typeface="Microsoft YaHei" pitchFamily="34" charset="-122"/>
                           <a:cs typeface="Microsoft YaHei" pitchFamily="34" charset="-120"/>
                         </a:rPr>
-                        <a:t>执行前检查</a:t>
+                        <a:t>执行前验证</a:t>
                       </a:r>
                       <a:endParaRPr lang="en-US" sz="1400" dirty="0">
                         <a:latin typeface="Microsoft YaHei" charset="0"/>
@@ -12624,7 +12624,7 @@
                           <a:ea typeface="Microsoft YaHei" pitchFamily="34" charset="-122"/>
                           <a:cs typeface="Microsoft YaHei" pitchFamily="34" charset="-120"/>
                         </a:rPr>
-                        <a:t>不检查</a:t>
+                        <a:t>无</a:t>
                       </a:r>
                       <a:endParaRPr lang="en-US" sz="1400" dirty="0">
                         <a:latin typeface="Microsoft YaHei" charset="0"/>
@@ -12689,7 +12689,7 @@
                           <a:ea typeface="Microsoft YaHei" pitchFamily="34" charset="-122"/>
                           <a:cs typeface="Microsoft YaHei" pitchFamily="34" charset="-120"/>
                         </a:rPr>
-                        <a:t>不检查数据是否仍满足前提</a:t>
+                        <a:t>不验证数据是否仍满足定义的前提</a:t>
                       </a:r>
                       <a:endParaRPr lang="en-US" sz="1400" dirty="0">
                         <a:latin typeface="Microsoft YaHei" charset="0"/>
@@ -12754,7 +12754,7 @@
                           <a:ea typeface="Microsoft YaHei" pitchFamily="34" charset="-122"/>
                           <a:cs typeface="Microsoft YaHei" pitchFamily="34" charset="-120"/>
                         </a:rPr>
-                        <a:t>在本次查询的快照上校验</a:t>
+                        <a:t>在查询快照上验证条件</a:t>
                       </a:r>
                       <a:endParaRPr lang="en-US" sz="1400" dirty="0">
                         <a:latin typeface="Microsoft YaHei" charset="0"/>
@@ -12821,7 +12821,7 @@
                           <a:ea typeface="Microsoft YaHei" pitchFamily="34" charset="-122"/>
                           <a:cs typeface="Microsoft YaHei" pitchFamily="34" charset="-120"/>
                         </a:rPr>
-                        <a:t>数据不变时答对</a:t>
+                        <a:t>数据未变时准确率</a:t>
                       </a:r>
                       <a:endParaRPr lang="en-US" sz="1400" dirty="0">
                         <a:latin typeface="Microsoft YaHei" charset="0"/>
@@ -13148,7 +13148,7 @@
                           <a:ea typeface="Microsoft YaHei" pitchFamily="34" charset="-122"/>
                           <a:cs typeface="Microsoft YaHei" pitchFamily="34" charset="-120"/>
                         </a:rPr>
-                        <a:t>11 种数据变化后答对</a:t>
+                        <a:t>11 种数据更新后</a:t>
                       </a:r>
                       <a:endParaRPr lang="en-US" sz="1400" dirty="0">
                         <a:latin typeface="Microsoft YaHei" charset="0"/>
@@ -13475,7 +13475,7 @@
                           <a:ea typeface="Microsoft YaHei" pitchFamily="34" charset="-122"/>
                           <a:cs typeface="Microsoft YaHei" pitchFamily="34" charset="-120"/>
                         </a:rPr>
-                        <a:t>其中 5 种破坏性变化</a:t>
+                        <a:t>其中 5 种破坏性更新</a:t>
                       </a:r>
                       <a:endParaRPr lang="en-US" sz="1400" dirty="0">
                         <a:latin typeface="Microsoft YaHei" charset="0"/>
@@ -13605,7 +13605,7 @@
                           <a:ea typeface="Microsoft YaHei" pitchFamily="34" charset="-122"/>
                           <a:cs typeface="Microsoft YaHei" pitchFamily="34" charset="-120"/>
                         </a:rPr>
-                        <a:t>57%（提示它自己核对：63%）</a:t>
+                        <a:t>57%（提示其自行验证：63%）</a:t>
                       </a:r>
                       <a:endParaRPr lang="en-US" sz="1400" dirty="0">
                         <a:latin typeface="Microsoft YaHei" charset="0"/>
@@ -13821,7 +13821,7 @@
                 <a:ea typeface="Microsoft YaHei" pitchFamily="34" charset="-122"/>
                 <a:cs typeface="Microsoft YaHei" pitchFamily="34" charset="-120"/>
               </a:rPr>
-              <a:t>实验：DeepSeek V4.1 Flash，每种做法独立运行 3 次；“不共享记忆”为不共享指标定义的智能体。5 种破坏性变化：退货状态行、销售更正（保留旧行）、重复装载、商品维表拉链、日期键换格式。语义层没有做实验。</a:t>
+              <a:t>实验：DeepSeek V4.1 Flash，每种方法独立运行 3 次；“无共享定义”的智能体仍共享表统计信息与连接路径。5 种破坏性更新：退货状态行、保留旧行的销售更正、重复加载、商品维度 SCD Type 2、日期键格式变更。语义层未做实验；MAVRA 的维护同样适用于语义层中声明的定义。</a:t>
             </a:r>
             <a:endParaRPr lang="en-US" sz="1100" dirty="0"/>
           </a:p>
@@ -14040,7 +14040,7 @@
                 <a:ea typeface="Microsoft YaHei" pitchFamily="34" charset="-122"/>
                 <a:cs typeface="Microsoft YaHei" pitchFamily="34" charset="-120"/>
               </a:rPr>
-              <a:t>数据智能体与数据库之间的记忆中间件；不生成 SQL，和 Text-to-SQL 是上下游</a:t>
+              <a:t>智能体与数据库之间的记忆中间件；不生成 SQL，与 Text-to-SQL 处于不同层次</a:t>
             </a:r>
             <a:endParaRPr lang="en-US" sz="1900" dirty="0"/>
           </a:p>
@@ -14048,7 +14048,7 @@
       </p:sp>
       <p:sp>
         <p:nvSpPr>
-          <p:cNvPr id="6" name="label 记什么"/>
+          <p:cNvPr id="6" name="label 记忆内容"/>
           <p:cNvSpPr/>
           <p:nvPr/>
         </p:nvSpPr>
@@ -14106,7 +14106,7 @@
                 <a:ea typeface="Microsoft YaHei" pitchFamily="34" charset="-122"/>
                 <a:cs typeface="Microsoft YaHei" pitchFamily="34" charset="-120"/>
               </a:rPr>
-              <a:t>记什么</a:t>
+              <a:t>记忆内容</a:t>
             </a:r>
             <a:endParaRPr lang="en-US" sz="2000" dirty="0"/>
           </a:p>
@@ -14145,7 +14145,7 @@
                 <a:ea typeface="Microsoft YaHei" pitchFamily="34" charset="-122"/>
                 <a:cs typeface="Microsoft YaHei" pitchFamily="34" charset="-120"/>
               </a:rPr>
-              <a:t>表画像、关联路径、指标定义，以及它们成立的前提（校验规则）和校验结果</a:t>
+              <a:t>表统计信息、连接路径、指标定义，及其成立的验证条件与验证结果</a:t>
             </a:r>
             <a:endParaRPr lang="en-US" sz="1900" dirty="0"/>
           </a:p>
@@ -14153,7 +14153,7 @@
       </p:sp>
       <p:sp>
         <p:nvSpPr>
-          <p:cNvPr id="9" name="label 怎么管"/>
+          <p:cNvPr id="9" name="label 管理方式"/>
           <p:cNvSpPr/>
           <p:nvPr/>
         </p:nvSpPr>
@@ -14211,7 +14211,7 @@
                 <a:ea typeface="Microsoft YaHei" pitchFamily="34" charset="-122"/>
                 <a:cs typeface="Microsoft YaHei" pitchFamily="34" charset="-120"/>
               </a:rPr>
-              <a:t>怎么管</a:t>
+              <a:t>管理方式</a:t>
             </a:r>
             <a:endParaRPr lang="en-US" sz="2000" dirty="0"/>
           </a:p>
@@ -14250,7 +14250,7 @@
                 <a:ea typeface="Microsoft YaHei" pitchFamily="34" charset="-122"/>
                 <a:cs typeface="Microsoft YaHei" pitchFamily="34" charset="-120"/>
               </a:rPr>
-              <a:t>写入前 7 项校验；执行前在同一快照上校验；数据变了只重验受影响的规则</a:t>
+              <a:t>写入前 7 项准入检查；执行前在同一快照上验证；更新后仅重新验证受影响的条件</a:t>
             </a:r>
             <a:endParaRPr lang="en-US" sz="1900" dirty="0"/>
           </a:p>
@@ -14258,7 +14258,7 @@
       </p:sp>
       <p:sp>
         <p:nvSpPr>
-          <p:cNvPr id="12" name="label 怎么迭代"/>
+          <p:cNvPr id="12" name="label 迭代方式"/>
           <p:cNvSpPr/>
           <p:nvPr/>
         </p:nvSpPr>
@@ -14316,7 +14316,7 @@
                 <a:ea typeface="Microsoft YaHei" pitchFamily="34" charset="-122"/>
                 <a:cs typeface="Microsoft YaHei" pitchFamily="34" charset="-120"/>
               </a:rPr>
-              <a:t>怎么迭代</a:t>
+              <a:t>迭代方式</a:t>
             </a:r>
             <a:endParaRPr lang="en-US" sz="2000" dirty="0"/>
           </a:p>
@@ -14355,7 +14355,7 @@
                 <a:ea typeface="Microsoft YaHei" pitchFamily="34" charset="-122"/>
                 <a:cs typeface="Microsoft YaHei" pitchFamily="34" charset="-120"/>
               </a:rPr>
-              <a:t>能唯一修好就发布新版本，修不了就停用并提醒，学到新证据再发布</a:t>
+              <a:t>存在唯一修复则发布新修订；否则失效并通知；学到新证据后重新发布</a:t>
             </a:r>
             <a:endParaRPr lang="en-US" sz="1900" dirty="0"/>
           </a:p>
@@ -14460,7 +14460,7 @@
                 <a:ea typeface="Microsoft YaHei" pitchFamily="34" charset="-122"/>
                 <a:cs typeface="Microsoft YaHei" pitchFamily="34" charset="-120"/>
               </a:rPr>
-              <a:t>数据不变：49% → 100%，每题 5.6 轮 → 3.6 轮；数据变化后：32% → 81%</a:t>
+              <a:t>数据未变：49% → 100%，每题 5.6 轮 → 3.6 轮；数据更新后：32% → 81%</a:t>
             </a:r>
             <a:endParaRPr lang="en-US" sz="1900" dirty="0"/>
           </a:p>
@@ -14574,7 +14574,7 @@
                 <a:ea typeface="Microsoft YaHei" pitchFamily="34" charset="-122"/>
                 <a:cs typeface="Microsoft YaHei" pitchFamily="34" charset="-120"/>
               </a:rPr>
-              <a:t>Text-to-SQL 和 MAVRA 解决的不是同一个问题</a:t>
+              <a:t>Text-to-SQL 与 MAVRA：不同层次的问题</a:t>
             </a:r>
             <a:endParaRPr lang="en-US" sz="3000" dirty="0"/>
           </a:p>
@@ -14679,7 +14679,7 @@
                 <a:ea typeface="Microsoft YaHei" pitchFamily="34" charset="-122"/>
                 <a:cs typeface="Microsoft YaHei" pitchFamily="34" charset="-120"/>
               </a:rPr>
-              <a:t>把一句话翻译成一条 SQL</a:t>
+              <a:t>将自然语言问题翻译为 SQL 查询</a:t>
             </a:r>
             <a:endParaRPr lang="en-US" sz="2200" dirty="0"/>
           </a:p>
@@ -14757,7 +14757,7 @@
                 <a:ea typeface="Microsoft YaHei" pitchFamily="34" charset="-122"/>
                 <a:cs typeface="Microsoft YaHei" pitchFamily="34" charset="-120"/>
               </a:rPr>
-              <a:t>问题 + 表结构（可附几条示例 SQL）</a:t>
+              <a:t>自然语言问题 + 数据库模式（可附示例查询）</a:t>
             </a:r>
             <a:endParaRPr lang="en-US" sz="1600" dirty="0"/>
           </a:p>
@@ -14835,7 +14835,7 @@
                 <a:ea typeface="Microsoft YaHei" pitchFamily="34" charset="-122"/>
                 <a:cs typeface="Microsoft YaHei" pitchFamily="34" charset="-120"/>
               </a:rPr>
-              <a:t>一条 SQL</a:t>
+              <a:t>一条 SQL 查询</a:t>
             </a:r>
             <a:endParaRPr lang="en-US" sz="1600" dirty="0"/>
           </a:p>
@@ -14913,7 +14913,7 @@
                 <a:ea typeface="Microsoft YaHei" pitchFamily="34" charset="-122"/>
                 <a:cs typeface="Microsoft YaHei" pitchFamily="34" charset="-120"/>
               </a:rPr>
-              <a:t>每个问题从头做，做完就忘</a:t>
+              <a:t>无状态：每个问题独立处理，不保留结果</a:t>
             </a:r>
             <a:endParaRPr lang="en-US" sz="1600" dirty="0"/>
           </a:p>
@@ -14952,7 +14952,7 @@
                 <a:ea typeface="Microsoft YaHei" pitchFamily="34" charset="-122"/>
                 <a:cs typeface="Microsoft YaHei" pitchFamily="34" charset="-120"/>
               </a:rPr>
-              <a:t>关心</a:t>
+              <a:t>关注</a:t>
             </a:r>
             <a:endParaRPr lang="en-US" sz="1600" dirty="0"/>
           </a:p>
@@ -14991,7 +14991,7 @@
                 <a:ea typeface="Microsoft YaHei" pitchFamily="34" charset="-122"/>
                 <a:cs typeface="Microsoft YaHei" pitchFamily="34" charset="-120"/>
               </a:rPr>
-              <a:t>这一条 SQL 写得对不对</a:t>
+              <a:t>单条查询的正确性</a:t>
             </a:r>
             <a:endParaRPr lang="en-US" sz="1600" dirty="0"/>
           </a:p>
@@ -15096,7 +15096,7 @@
                 <a:ea typeface="Microsoft YaHei" pitchFamily="34" charset="-122"/>
                 <a:cs typeface="Microsoft YaHei" pitchFamily="34" charset="-120"/>
               </a:rPr>
-              <a:t>智能体和数据库之间的记忆中间件</a:t>
+              <a:t>智能体与数据库之间的记忆中间件</a:t>
             </a:r>
             <a:endParaRPr lang="en-US" sz="2200" dirty="0"/>
           </a:p>
@@ -15174,7 +15174,7 @@
                 <a:ea typeface="Microsoft YaHei" pitchFamily="34" charset="-122"/>
                 <a:cs typeface="Microsoft YaHei" pitchFamily="34" charset="-120"/>
               </a:rPr>
-              <a:t>智能体对数据库的每个请求都经过它</a:t>
+              <a:t>智能体对数据库的全部访问经由它转发</a:t>
             </a:r>
             <a:endParaRPr lang="en-US" sz="1600" dirty="0"/>
           </a:p>
@@ -15213,7 +15213,7 @@
                 <a:ea typeface="Microsoft YaHei" pitchFamily="34" charset="-122"/>
                 <a:cs typeface="Microsoft YaHei" pitchFamily="34" charset="-120"/>
               </a:rPr>
-              <a:t>记住</a:t>
+              <a:t>记忆</a:t>
             </a:r>
             <a:endParaRPr lang="en-US" sz="1600" dirty="0"/>
           </a:p>
@@ -15252,7 +15252,7 @@
                 <a:ea typeface="Microsoft YaHei" pitchFamily="34" charset="-122"/>
                 <a:cs typeface="Microsoft YaHei" pitchFamily="34" charset="-120"/>
               </a:rPr>
-              <a:t>智能体学到的、关于这个库的知识</a:t>
+              <a:t>智能体获得的数据库知识：表统计信息、连接路径、指标定义</a:t>
             </a:r>
             <a:endParaRPr lang="en-US" sz="1600" dirty="0"/>
           </a:p>
@@ -15330,7 +15330,7 @@
                 <a:ea typeface="Microsoft YaHei" pitchFamily="34" charset="-122"/>
                 <a:cs typeface="Microsoft YaHei" pitchFamily="34" charset="-120"/>
               </a:rPr>
-              <a:t>一个智能体学会，所有智能体都能用</a:t>
+              <a:t>跨智能体、跨会话共享</a:t>
             </a:r>
             <a:endParaRPr lang="en-US" sz="1600" dirty="0"/>
           </a:p>
@@ -15369,7 +15369,7 @@
                 <a:ea typeface="Microsoft YaHei" pitchFamily="34" charset="-122"/>
                 <a:cs typeface="Microsoft YaHei" pitchFamily="34" charset="-120"/>
               </a:rPr>
-              <a:t>关心</a:t>
+              <a:t>关注</a:t>
             </a:r>
             <a:endParaRPr lang="en-US" sz="1600" dirty="0"/>
           </a:p>
@@ -15408,7 +15408,7 @@
                 <a:ea typeface="Microsoft YaHei" pitchFamily="34" charset="-122"/>
                 <a:cs typeface="Microsoft YaHei" pitchFamily="34" charset="-120"/>
               </a:rPr>
-              <a:t>记住的东西现在还对不对</a:t>
+              <a:t>已有知识在当前数据上的有效性</a:t>
             </a:r>
             <a:endParaRPr lang="en-US" sz="1600" dirty="0"/>
           </a:p>
@@ -15477,7 +15477,7 @@
                 <a:ea typeface="Microsoft YaHei" pitchFamily="34" charset="-122"/>
                 <a:cs typeface="Microsoft YaHei" pitchFamily="34" charset="-120"/>
               </a:rPr>
-              <a:t>两者是上下游关系：</a:t>
+              <a:t>两者处于不同层次：</a:t>
             </a:r>
             <a:pPr indent="0" marL="0">
               <a:spcAft>
@@ -15494,7 +15494,7 @@
                 <a:ea typeface="Microsoft YaHei" pitchFamily="34" charset="-122"/>
                 <a:cs typeface="Microsoft YaHei" pitchFamily="34" charset="-120"/>
               </a:rPr>
-              <a:t>Text-to-SQL 模型或任何数据智能体，都可以作为“用户智能体”接在 MAVRA 上面。MAVRA 不替它写 SQL，而是给它经过校验的记忆，并在 SQL 执行前把关。</a:t>
+              <a:t>任何 Text-to-SQL 模型或数据智能体都可以作为用户智能体接入 MAVRA。MAVRA 不生成 SQL；它向智能体提供经过验证的知识，并在查询执行前验证其有效性。</a:t>
             </a:r>
             <a:endParaRPr lang="en-US" sz="1700" dirty="0"/>
           </a:p>
@@ -15608,7 +15608,7 @@
                 <a:ea typeface="Microsoft YaHei" pitchFamily="34" charset="-122"/>
                 <a:cs typeface="Microsoft YaHei" pitchFamily="34" charset="-120"/>
               </a:rPr>
-              <a:t>真实记录：不共享记忆，同一个问题问三次</a:t>
+              <a:t>实验记录：无共享定义时，同一问题三次独立求解</a:t>
             </a:r>
             <a:endParaRPr lang="en-US" sz="3000" dirty="0"/>
           </a:p>
@@ -15661,7 +15661,7 @@
                 <a:ea typeface="Microsoft YaHei" pitchFamily="34" charset="-122"/>
                 <a:cs typeface="Microsoft YaHei" pitchFamily="34" charset="-120"/>
               </a:rPr>
-              <a:t>只说名称，不给口径。正确答案 1307.0 万。</a:t>
+              <a:t>仅给出指标名称，不给出业务口径。参考答案 1307.0 万。</a:t>
             </a:r>
             <a:endParaRPr lang="en-US" sz="1700" dirty="0"/>
           </a:p>
@@ -15771,7 +15771,7 @@
                           <a:ea typeface="Microsoft YaHei" pitchFamily="34" charset="-122"/>
                           <a:cs typeface="Microsoft YaHei" pitchFamily="34" charset="-120"/>
                         </a:rPr>
-                        <a:t>智能体选的列</a:t>
+                        <a:t>所选度量列</a:t>
                       </a:r>
                       <a:endParaRPr lang="en-US" sz="1400" dirty="0">
                         <a:latin typeface="Microsoft YaHei" charset="0"/>
@@ -16045,7 +16045,7 @@
                           <a:ea typeface="Microsoft YaHei" pitchFamily="34" charset="-122"/>
                           <a:cs typeface="Microsoft YaHei" pitchFamily="34" charset="-120"/>
                         </a:rPr>
-                        <a:t>不共享记忆 · 第 1 次</a:t>
+                        <a:t>无共享定义 · 第 1 次</a:t>
                       </a:r>
                       <a:endParaRPr lang="en-US" sz="1400" dirty="0">
                         <a:latin typeface="Microsoft YaHei" charset="0"/>
@@ -16131,7 +16131,7 @@
                           <a:ea typeface="Microsoft YaHei" pitchFamily="34" charset="-122"/>
                           <a:cs typeface="Microsoft YaHei" pitchFamily="34" charset="-120"/>
                         </a:rPr>
-                        <a:t>折扣前的销售额</a:t>
+                        <a:t>扩展销售额（折扣前）</a:t>
                       </a:r>
                       <a:endParaRPr lang="en-US" sz="1400" dirty="0">
                         <a:latin typeface="Microsoft YaHei" charset="0"/>
@@ -16393,7 +16393,7 @@
                           <a:ea typeface="Microsoft YaHei" pitchFamily="34" charset="-122"/>
                           <a:cs typeface="Microsoft YaHei" pitchFamily="34" charset="-120"/>
                         </a:rPr>
-                        <a:t>不共享记忆 · 第 2 次</a:t>
+                        <a:t>无共享定义 · 第 2 次</a:t>
                       </a:r>
                       <a:endParaRPr lang="en-US" sz="1400" dirty="0">
                         <a:latin typeface="Microsoft YaHei" charset="0"/>
@@ -16479,7 +16479,7 @@
                           <a:ea typeface="Microsoft YaHei" pitchFamily="34" charset="-122"/>
                           <a:cs typeface="Microsoft YaHei" pitchFamily="34" charset="-120"/>
                         </a:rPr>
-                        <a:t>折扣前的销售额</a:t>
+                        <a:t>扩展销售额（折扣前）</a:t>
                       </a:r>
                       <a:endParaRPr lang="en-US" sz="1400" dirty="0">
                         <a:latin typeface="Microsoft YaHei" charset="0"/>
@@ -16741,7 +16741,7 @@
                           <a:ea typeface="Microsoft YaHei" pitchFamily="34" charset="-122"/>
                           <a:cs typeface="Microsoft YaHei" pitchFamily="34" charset="-120"/>
                         </a:rPr>
-                        <a:t>不共享记忆 · 第 3 次</a:t>
+                        <a:t>无共享定义 · 第 3 次</a:t>
                       </a:r>
                       <a:endParaRPr lang="en-US" sz="1400" dirty="0">
                         <a:latin typeface="Microsoft YaHei" charset="0"/>
@@ -17089,7 +17089,7 @@
                           <a:ea typeface="Microsoft YaHei" pitchFamily="34" charset="-122"/>
                           <a:cs typeface="Microsoft YaHei" pitchFamily="34" charset="-120"/>
                         </a:rPr>
-                        <a:t>有 MAVRA · 3 次结果相同</a:t>
+                        <a:t>有 MAVRA · 3 次结果一致</a:t>
                       </a:r>
                       <a:endParaRPr lang="en-US" sz="1400" dirty="0">
                         <a:latin typeface="Microsoft YaHei" charset="0"/>
@@ -17175,7 +17175,7 @@
                           <a:ea typeface="Microsoft YaHei" pitchFamily="34" charset="-122"/>
                           <a:cs typeface="Microsoft YaHei" pitchFamily="34" charset="-120"/>
                         </a:rPr>
-                        <a:t>查记忆，拿到“门店营业额”的定义</a:t>
+                        <a:t>检索到共享的指标定义</a:t>
                       </a:r>
                       <a:endParaRPr lang="en-US" sz="1400" dirty="0">
                         <a:latin typeface="Microsoft YaHei" charset="0"/>
@@ -17486,7 +17486,7 @@
                 <a:ea typeface="Microsoft YaHei" pitchFamily="34" charset="-122"/>
                 <a:cs typeface="Microsoft YaHei" pitchFamily="34" charset="-120"/>
               </a:rPr>
-              <a:t>错的不是 SQL 语法，是业务知识</a:t>
+              <a:t>错误来自业务口径，而非 SQL 语法</a:t>
             </a:r>
             <a:endParaRPr lang="en-US" sz="1400" dirty="0"/>
           </a:p>
@@ -17507,7 +17507,7 @@
                 <a:ea typeface="Microsoft YaHei" pitchFamily="34" charset="-122"/>
                 <a:cs typeface="Microsoft YaHei" pitchFamily="34" charset="-120"/>
               </a:rPr>
-              <a:t>销售表里像“营业额”的列有好几个：ss_ext_sales_price、ss_net_paid、ss_net_paid_inc_tax……选哪一列是业务口径，表结构里没写</a:t>
+              <a:t>事实表中存在多个候选度量列（ss_ext_sales_price、ss_net_paid、ss_net_paid_inc_tax 等）；选择哪一列由业务口径决定，模式中并不记录</a:t>
             </a:r>
             <a:endParaRPr lang="en-US" sz="1400" dirty="0"/>
           </a:p>
@@ -17528,7 +17528,7 @@
                 <a:ea typeface="Microsoft YaHei" pitchFamily="34" charset="-122"/>
                 <a:cs typeface="Microsoft YaHei" pitchFamily="34" charset="-120"/>
               </a:rPr>
-              <a:t>Text-to-SQL 和不共享记忆的智能体每次重新猜，同一个问题答案会变</a:t>
+              <a:t>无共享知识时，每次独立推断口径，同一问题的答案不稳定</a:t>
             </a:r>
             <a:endParaRPr lang="en-US" sz="1400" dirty="0"/>
           </a:p>
@@ -17549,7 +17549,7 @@
                 <a:ea typeface="Microsoft YaHei" pitchFamily="34" charset="-122"/>
                 <a:cs typeface="Microsoft YaHei" pitchFamily="34" charset="-120"/>
               </a:rPr>
-              <a:t>把学到的口径记下来、大家照着用：15 道题 × 3 次运行，数据不变时不共享只答对 49%，共享后 100%；每题从 5.6 轮降到 3.6 轮，输入 token 少 34%</a:t>
+              <a:t>共享已验证的指标定义后：15 道题 × 3 次运行，数据未变时准确率从 49% 升至 100%，每题平均 5.6 轮降至 3.6 轮，输入 token 减少 34%</a:t>
             </a:r>
             <a:endParaRPr lang="en-US" sz="1400" dirty="0"/>
           </a:p>
@@ -17588,7 +17588,7 @@
                 <a:ea typeface="Microsoft YaHei" pitchFamily="34" charset="-122"/>
                 <a:cs typeface="Microsoft YaHei" pitchFamily="34" charset="-120"/>
               </a:rPr>
-              <a:t>记录：noctis results/scen-20261002，留出题 M1-P1；不共享（不共享指标定义）：dsv41flash-r1-a、r2-b、r3-a；MAVRA：r1–r3-g3fix--snap。合成零售数据，年份略去。</a:t>
+              <a:t>记录：noctis results/scen-20261002，留出任务 M1-P1；无共享定义（仍共享表统计信息与连接路径）：dsv41flash-r1-a、r2-b、r3-a；MAVRA：r1–r3-g3fix--snap。合成零售数据，年份略去。</a:t>
             </a:r>
             <a:endParaRPr lang="en-US" sz="1100" dirty="0"/>
           </a:p>
@@ -17702,7 +17702,7 @@
                 <a:ea typeface="Microsoft YaHei" pitchFamily="34" charset="-122"/>
                 <a:cs typeface="Microsoft YaHei" pitchFamily="34" charset="-120"/>
               </a:rPr>
-              <a:t>记住了还不够：数据一变，记忆可能悄悄过期</a:t>
+              <a:t>共享之后：数据更新可能使定义静默失效</a:t>
             </a:r>
             <a:endParaRPr lang="en-US" sz="3000" dirty="0"/>
           </a:p>
@@ -17741,7 +17741,7 @@
                 <a:ea typeface="Microsoft YaHei" pitchFamily="34" charset="-122"/>
                 <a:cs typeface="Microsoft YaHei" pitchFamily="34" charset="-120"/>
               </a:rPr>
-              <a:t>“门店营业额”记下来以后，数据库照常写入。之后再问“9 月门店营业额”，照旧用记住的定义：</a:t>
+              <a:t>“门店营业额”的定义发布后，数据库持续接受更新。之后再次询问“9 月门店营业额”，沿用已发布的定义：</a:t>
             </a:r>
             <a:endParaRPr lang="en-US" sz="1600" dirty="0"/>
           </a:p>
@@ -17793,7 +17793,7 @@
                           <a:ea typeface="Microsoft YaHei" pitchFamily="34" charset="-122"/>
                           <a:cs typeface="Microsoft YaHei" pitchFamily="34" charset="-120"/>
                         </a:rPr>
-                        <a:t>写入</a:t>
+                        <a:t>更新</a:t>
                       </a:r>
                       <a:endParaRPr lang="en-US" sz="1500" dirty="0">
                         <a:latin typeface="Microsoft YaHei" charset="0"/>
@@ -17861,7 +17861,7 @@
                           <a:ea typeface="Microsoft YaHei" pitchFamily="34" charset="-122"/>
                           <a:cs typeface="Microsoft YaHei" pitchFamily="34" charset="-120"/>
                         </a:rPr>
-                        <a:t>数据库里发生了什么</a:t>
+                        <a:t>数据库中的变化</a:t>
                       </a:r>
                       <a:endParaRPr lang="en-US" sz="1500" dirty="0">
                         <a:latin typeface="Microsoft YaHei" charset="0"/>
@@ -17929,7 +17929,7 @@
                           <a:ea typeface="Microsoft YaHei" pitchFamily="34" charset="-122"/>
                           <a:cs typeface="Microsoft YaHei" pitchFamily="34" charset="-120"/>
                         </a:rPr>
-                        <a:t>正确答案</a:t>
+                        <a:t>参考答案</a:t>
                       </a:r>
                       <a:endParaRPr lang="en-US" sz="1500" dirty="0">
                         <a:latin typeface="Microsoft YaHei" charset="0"/>
@@ -17997,7 +17997,7 @@
                           <a:ea typeface="Microsoft YaHei" pitchFamily="34" charset="-122"/>
                           <a:cs typeface="Microsoft YaHei" pitchFamily="34" charset="-120"/>
                         </a:rPr>
-                        <a:t>照旧用记住的定义</a:t>
+                        <a:t>沿用已发布的定义</a:t>
                       </a:r>
                       <a:endParaRPr lang="en-US" sz="1500" dirty="0">
                         <a:latin typeface="Microsoft YaHei" charset="0"/>
@@ -18067,7 +18067,7 @@
                           <a:ea typeface="Microsoft YaHei" pitchFamily="34" charset="-122"/>
                           <a:cs typeface="Microsoft YaHei" pitchFamily="34" charset="-120"/>
                         </a:rPr>
-                        <a:t>追加新数据</a:t>
+                        <a:t>增量加载</a:t>
                       </a:r>
                       <a:endParaRPr lang="en-US" sz="1500" dirty="0">
                         <a:latin typeface="Microsoft YaHei" charset="0"/>
@@ -18132,7 +18132,7 @@
                           <a:ea typeface="Microsoft YaHei" pitchFamily="34" charset="-122"/>
                           <a:cs typeface="Microsoft YaHei" pitchFamily="34" charset="-120"/>
                         </a:rPr>
-                        <a:t>把 9 月的销售复制一份、换新小票号，+27,095 行</a:t>
+                        <a:t>追加一批新的销售记录（新小票号），+27,095 行</a:t>
                       </a:r>
                       <a:endParaRPr lang="en-US" sz="1500" dirty="0">
                         <a:latin typeface="Microsoft YaHei" charset="0"/>
@@ -18394,7 +18394,7 @@
                           <a:ea typeface="Microsoft YaHei" pitchFamily="34" charset="-122"/>
                           <a:cs typeface="Microsoft YaHei" pitchFamily="34" charset="-120"/>
                         </a:rPr>
-                        <a:t>部分销售被更正：旧行保留并标为非当前（ss_is_current = 0），新增九折的当前行，共 65,915 行</a:t>
+                        <a:t>部分销售被更正：旧行保留并标记为非当前（ss_is_current = 0），插入九折后的当前行，共 65,915 行</a:t>
                       </a:r>
                       <a:endParaRPr lang="en-US" sz="1500" dirty="0">
                         <a:latin typeface="Microsoft YaHei" charset="0"/>
@@ -18545,7 +18545,7 @@
                           <a:ea typeface="Microsoft YaHei" pitchFamily="34" charset="-122"/>
                           <a:cs typeface="Microsoft YaHei" pitchFamily="34" charset="-120"/>
                         </a:rPr>
-                        <a:t>新旧两版都算了</a:t>
+                        <a:t>新旧版本重复计入</a:t>
                       </a:r>
                       <a:endParaRPr lang="en-US" sz="1500" dirty="0">
                         <a:latin typeface="Microsoft YaHei" charset="0"/>
@@ -18612,7 +18612,7 @@
                           <a:ea typeface="Microsoft YaHei" pitchFamily="34" charset="-122"/>
                           <a:cs typeface="Microsoft YaHei" pitchFamily="34" charset="-120"/>
                         </a:rPr>
-                        <a:t>重复装载</a:t>
+                        <a:t>重复加载</a:t>
                       </a:r>
                       <a:endParaRPr lang="en-US" sz="1500" dirty="0">
                         <a:latin typeface="Microsoft YaHei" charset="0"/>
@@ -18677,7 +18677,7 @@
                           <a:ea typeface="Microsoft YaHei" pitchFamily="34" charset="-122"/>
                           <a:cs typeface="Microsoft YaHei" pitchFamily="34" charset="-120"/>
                         </a:rPr>
-                        <a:t>4 个月的销售整批又装载了一次，+110,165 行</a:t>
+                        <a:t>4 个月的销售批次被再次加载，+110,165 行</a:t>
                       </a:r>
                       <a:endParaRPr lang="en-US" sz="1500" dirty="0">
                         <a:latin typeface="Microsoft YaHei" charset="0"/>
@@ -18828,7 +18828,7 @@
                           <a:ea typeface="Microsoft YaHei" pitchFamily="34" charset="-122"/>
                           <a:cs typeface="Microsoft YaHei" pitchFamily="34" charset="-120"/>
                         </a:rPr>
-                        <a:t>9 月翻倍</a:t>
+                        <a:t>9 月重复计入</a:t>
                       </a:r>
                       <a:endParaRPr lang="en-US" sz="1500" dirty="0">
                         <a:latin typeface="Microsoft YaHei" charset="0"/>
@@ -18944,7 +18944,7 @@
                 <a:ea typeface="Microsoft YaHei" pitchFamily="34" charset="-122"/>
                 <a:cs typeface="Microsoft YaHei" pitchFamily="34" charset="-120"/>
               </a:rPr>
-              <a:t>问题在哪</a:t>
+              <a:t>问题所在</a:t>
             </a:r>
             <a:endParaRPr lang="en-US" sz="1700" dirty="0"/>
           </a:p>
@@ -18965,7 +18965,7 @@
                 <a:ea typeface="Microsoft YaHei" pitchFamily="34" charset="-122"/>
                 <a:cs typeface="Microsoft YaHei" pitchFamily="34" charset="-120"/>
               </a:rPr>
-              <a:t>三种写入都是普通的 INSERT / UPDATE，表结构没变：只看表结构的做法发现不了</a:t>
+              <a:t>三种更新均为普通 DML（INSERT / UPDATE），模式未变：基于模式变更的失效策略无法检测</a:t>
             </a:r>
             <a:endParaRPr lang="en-US" sz="1700" dirty="0"/>
           </a:p>
@@ -18986,7 +18986,7 @@
                 <a:ea typeface="Microsoft YaHei" pitchFamily="34" charset="-122"/>
                 <a:cs typeface="Microsoft YaHei" pitchFamily="34" charset="-120"/>
               </a:rPr>
-              <a:t>SQL 照样能跑、不报错：用这条记忆的智能体自己看不出来</a:t>
+              <a:t>查询仍成功执行，不报错：使用方无法从执行结果察觉</a:t>
             </a:r>
             <a:endParaRPr lang="en-US" sz="1700" dirty="0"/>
           </a:p>
@@ -19007,7 +19007,7 @@
                 <a:ea typeface="Microsoft YaHei" pitchFamily="34" charset="-122"/>
                 <a:cs typeface="Microsoft YaHei" pitchFamily="34" charset="-120"/>
               </a:rPr>
-              <a:t>记忆被共享：一处过期，所有用它的智能体一起算错</a:t>
+              <a:t>定义被共享：一处失效，所有使用方同时出错</a:t>
             </a:r>
             <a:endParaRPr lang="en-US" sz="1700" dirty="0"/>
           </a:p>
@@ -19046,7 +19046,7 @@
                 <a:ea typeface="Microsoft YaHei" pitchFamily="34" charset="-122"/>
                 <a:cs typeface="Microsoft YaHei" pitchFamily="34" charset="-120"/>
               </a:rPr>
-              <a:t>“照旧用”即对照组：只在表结构变化时才让定义失效，3 次独立运行答案相同。数据为仿 TPC-DS 的合成零售数据（100 万行门店销售），题目中的年份略去。</a:t>
+              <a:t>“沿用已发布的定义”为对照组：仅在模式变更时使定义失效；3 次独立运行答案相同。数据为仿 TPC-DS 的合成零售数据（store_sales 100 万行），题目中的年份略去。</a:t>
             </a:r>
             <a:endParaRPr lang="en-US" sz="1100" dirty="0"/>
           </a:p>
@@ -19160,7 +19160,7 @@
                 <a:ea typeface="Microsoft YaHei" pitchFamily="34" charset="-122"/>
                 <a:cs typeface="Microsoft YaHei" pitchFamily="34" charset="-120"/>
               </a:rPr>
-              <a:t>MAVRA 是什么：智能体看到的是工具，背后是记忆管理</a:t>
+              <a:t>MAVRA 的接口：智能体调用工具，中间件管理记忆</a:t>
             </a:r>
             <a:endParaRPr lang="en-US" sz="3000" dirty="0"/>
           </a:p>
@@ -19211,7 +19211,7 @@
                           <a:ea typeface="Microsoft YaHei" pitchFamily="34" charset="-122"/>
                           <a:cs typeface="Microsoft YaHei" pitchFamily="34" charset="-120"/>
                         </a:rPr>
-                        <a:t>智能体调用</a:t>
+                        <a:t>智能体调用的工具</a:t>
                       </a:r>
                       <a:endParaRPr lang="en-US" sz="1400" dirty="0">
                         <a:latin typeface="Microsoft YaHei" charset="0"/>
@@ -19279,7 +19279,7 @@
                           <a:ea typeface="Microsoft YaHei" pitchFamily="34" charset="-122"/>
                           <a:cs typeface="Microsoft YaHei" pitchFamily="34" charset="-120"/>
                         </a:rPr>
-                        <a:t>MAVRA 在背后做什么</a:t>
+                        <a:t>MAVRA 的处理</a:t>
                       </a:r>
                       <a:endParaRPr lang="en-US" sz="1400" dirty="0">
                         <a:latin typeface="Microsoft YaHei" charset="0"/>
@@ -19347,7 +19347,7 @@
                           <a:ea typeface="Microsoft YaHei" pitchFamily="34" charset="-122"/>
                           <a:cs typeface="Microsoft YaHei" pitchFamily="34" charset="-120"/>
                         </a:rPr>
-                        <a:t>用到的记忆</a:t>
+                        <a:t>涉及的记忆</a:t>
                       </a:r>
                       <a:endParaRPr lang="en-US" sz="1400" dirty="0">
                         <a:latin typeface="Microsoft YaHei" charset="0"/>
@@ -19503,7 +19503,7 @@
                           <a:ea typeface="Microsoft YaHei" pitchFamily="34" charset="-122"/>
                           <a:cs typeface="Microsoft YaHei" pitchFamily="34" charset="-120"/>
                         </a:rPr>
-                        <a:t>返回表名、行数和注释</a:t>
+                        <a:t>返回表名、估计行数与注释</a:t>
                       </a:r>
                       <a:endParaRPr lang="en-US" sz="1400" dirty="0">
                         <a:latin typeface="Microsoft YaHei" charset="0"/>
@@ -19635,7 +19635,7 @@
                           <a:ea typeface="Microsoft YaHei" pitchFamily="34" charset="-122"/>
                           <a:cs typeface="Microsoft YaHei" pitchFamily="34" charset="-120"/>
                         </a:rPr>
-                        <a:t>查看一张表</a:t>
+                        <a:t>描述表</a:t>
                       </a:r>
                       <a:endParaRPr lang="en-US" sz="1400" dirty="0">
                         <a:latin typeface="Microsoft YaHei" charset="0"/>
@@ -19721,7 +19721,7 @@
                           <a:ea typeface="Microsoft YaHei" pitchFamily="34" charset="-122"/>
                           <a:cs typeface="Microsoft YaHei" pitchFamily="34" charset="-120"/>
                         </a:rPr>
-                        <a:t>数据没变：直接返回记住的表画像；变了：重新探查并记下</a:t>
+                        <a:t>表版本未变：返回缓存的表统计信息；已变：重新采样并更新</a:t>
                       </a:r>
                       <a:endParaRPr lang="en-US" sz="1400" dirty="0">
                         <a:latin typeface="Microsoft YaHei" charset="0"/>
@@ -19786,7 +19786,7 @@
                           <a:ea typeface="Microsoft YaHei" pitchFamily="34" charset="-122"/>
                           <a:cs typeface="Microsoft YaHei" pitchFamily="34" charset="-120"/>
                         </a:rPr>
-                        <a:t>表画像</a:t>
+                        <a:t>表统计信息</a:t>
                       </a:r>
                       <a:endParaRPr lang="en-US" sz="1400" dirty="0">
                         <a:latin typeface="Microsoft YaHei" charset="0"/>
@@ -19853,7 +19853,7 @@
                           <a:ea typeface="Microsoft YaHei" pitchFamily="34" charset="-122"/>
                           <a:cs typeface="Microsoft YaHei" pitchFamily="34" charset="-120"/>
                         </a:rPr>
-                        <a:t>问两张表怎么关联</a:t>
+                        <a:t>查询连接路径</a:t>
                       </a:r>
                       <a:endParaRPr lang="en-US" sz="1400" dirty="0">
                         <a:latin typeface="Microsoft YaHei" charset="0"/>
@@ -19939,7 +19939,7 @@
                           <a:ea typeface="Microsoft YaHei" pitchFamily="34" charset="-122"/>
                           <a:cs typeface="Microsoft YaHei" pitchFamily="34" charset="-120"/>
                         </a:rPr>
-                        <a:t>返回验证过的关联列、一对多关系、需要的过滤、关联不上的比例，以及试过但不对的写法</a:t>
+                        <a:t>返回已验证的连接键、基数（N:1 / 1:1）、所需过滤谓词、未匹配行比例，以及已证伪的连接写法</a:t>
                       </a:r>
                       <a:endParaRPr lang="en-US" sz="1400" dirty="0">
                         <a:latin typeface="Microsoft YaHei" charset="0"/>
@@ -20004,7 +20004,7 @@
                           <a:ea typeface="Microsoft YaHei" pitchFamily="34" charset="-122"/>
                           <a:cs typeface="Microsoft YaHei" pitchFamily="34" charset="-120"/>
                         </a:rPr>
-                        <a:t>关联路径</a:t>
+                        <a:t>连接路径</a:t>
                       </a:r>
                       <a:endParaRPr lang="en-US" sz="1400" dirty="0">
                         <a:latin typeface="Microsoft YaHei" charset="0"/>
@@ -20071,7 +20071,7 @@
                           <a:ea typeface="Microsoft YaHei" pitchFamily="34" charset="-122"/>
                           <a:cs typeface="Microsoft YaHei" pitchFamily="34" charset="-120"/>
                         </a:rPr>
-                        <a:t>按名称查指标定义</a:t>
+                        <a:t>检索指标定义</a:t>
                       </a:r>
                       <a:endParaRPr lang="en-US" sz="1400" dirty="0">
                         <a:latin typeface="Microsoft YaHei" charset="0"/>
@@ -20157,7 +20157,7 @@
                           <a:ea typeface="Microsoft YaHei" pitchFamily="34" charset="-122"/>
                           <a:cs typeface="Microsoft YaHei" pitchFamily="34" charset="-120"/>
                         </a:rPr>
-                        <a:t>依赖的表有写入：先重新校验；再返回有效版本、注意事项和示例 SQL</a:t>
+                        <a:t>依赖表的版本已变：先重新验证；返回有效修订、注意事项与示例查询</a:t>
                       </a:r>
                       <a:endParaRPr lang="en-US" sz="1400" dirty="0">
                         <a:latin typeface="Microsoft YaHei" charset="0"/>
@@ -20222,7 +20222,7 @@
                           <a:ea typeface="Microsoft YaHei" pitchFamily="34" charset="-122"/>
                           <a:cs typeface="Microsoft YaHei" pitchFamily="34" charset="-120"/>
                         </a:rPr>
-                        <a:t>指标定义、校验结果</a:t>
+                        <a:t>指标定义、验证结果</a:t>
                       </a:r>
                       <a:endParaRPr lang="en-US" sz="1400" dirty="0">
                         <a:latin typeface="Microsoft YaHei" charset="0"/>
@@ -20289,7 +20289,7 @@
                           <a:ea typeface="Microsoft YaHei" pitchFamily="34" charset="-122"/>
                           <a:cs typeface="Microsoft YaHei" pitchFamily="34" charset="-120"/>
                         </a:rPr>
-                        <a:t>执行 SQL，注明用了哪条定义的哪一版</a:t>
+                        <a:t>执行 SQL，声明所依赖的指标修订</a:t>
                       </a:r>
                       <a:endParaRPr lang="en-US" sz="1400" dirty="0">
                         <a:latin typeface="Microsoft YaHei" charset="0"/>
@@ -20375,7 +20375,7 @@
                           <a:ea typeface="Microsoft YaHei" pitchFamily="34" charset="-122"/>
                           <a:cs typeface="Microsoft YaHei" pitchFamily="34" charset="-120"/>
                         </a:rPr>
-                        <a:t>版本已停用或已有新版：拒绝；否则在本次查询的快照上校验，再执行</a:t>
+                        <a:t>修订已失效或已被替代：拒绝；否则在查询快照上验证条件后执行</a:t>
                       </a:r>
                       <a:endParaRPr lang="en-US" sz="1400" dirty="0">
                         <a:latin typeface="Microsoft YaHei" charset="0"/>
@@ -20440,7 +20440,7 @@
                           <a:ea typeface="Microsoft YaHei" pitchFamily="34" charset="-122"/>
                           <a:cs typeface="Microsoft YaHei" pitchFamily="34" charset="-120"/>
                         </a:rPr>
-                        <a:t>指标定义、校验结果</a:t>
+                        <a:t>指标定义、验证结果</a:t>
                       </a:r>
                       <a:endParaRPr lang="en-US" sz="1400" dirty="0">
                         <a:latin typeface="Microsoft YaHei" charset="0"/>
@@ -20507,7 +20507,7 @@
                           <a:ea typeface="Microsoft YaHei" pitchFamily="34" charset="-122"/>
                           <a:cs typeface="Microsoft YaHei" pitchFamily="34" charset="-120"/>
                         </a:rPr>
-                        <a:t>每次返回</a:t>
+                        <a:t>每次响应</a:t>
                       </a:r>
                       <a:endParaRPr lang="en-US" sz="1400" dirty="0">
                         <a:latin typeface="Microsoft YaHei" charset="0"/>
@@ -20572,7 +20572,7 @@
                           <a:ea typeface="Microsoft YaHei" pitchFamily="34" charset="-122"/>
                           <a:cs typeface="Microsoft YaHei" pitchFamily="34" charset="-120"/>
                         </a:rPr>
-                        <a:t>附上提醒：你用过的记忆被停用或修复了</a:t>
+                        <a:t>附带通知：所用定义已失效或已修复</a:t>
                       </a:r>
                       <a:endParaRPr lang="en-US" sz="1400" dirty="0">
                         <a:latin typeface="Microsoft YaHei" charset="0"/>
@@ -20637,7 +20637,7 @@
                           <a:ea typeface="Microsoft YaHei" pitchFamily="34" charset="-122"/>
                           <a:cs typeface="Microsoft YaHei" pitchFamily="34" charset="-120"/>
                         </a:rPr>
-                        <a:t>使用记录</a:t>
+                        <a:t>使用者记录</a:t>
                       </a:r>
                       <a:endParaRPr lang="en-US" sz="1400" dirty="0">
                         <a:latin typeface="Microsoft YaHei" charset="0"/>
@@ -20753,7 +20753,7 @@
                 <a:ea typeface="Microsoft YaHei" pitchFamily="34" charset="-122"/>
                 <a:cs typeface="Microsoft YaHei" pitchFamily="34" charset="-120"/>
               </a:rPr>
-              <a:t>记忆从哪来：</a:t>
+              <a:t>记忆的来源：</a:t>
             </a:r>
             <a:pPr indent="0" marL="0">
               <a:spcAft>
@@ -20770,7 +20770,7 @@
                 <a:ea typeface="Microsoft YaHei" pitchFamily="34" charset="-122"/>
                 <a:cs typeface="Microsoft YaHei" pitchFamily="34" charset="-120"/>
               </a:rPr>
-              <a:t>内置智能体（大模型）专门回答给出口径的学习题，答对的解题过程被抽取成指标定义，通过 7 项校验才写进记忆；用户智能体查过的表、验证过的关联也会记下来，所有智能体共用。</a:t>
+              <a:t>内置智能体（大模型）求解给定业务口径的学习任务；判定正确的求解轨迹被抽取为结构化指标定义，通过 7 项准入检查后发布。用户智能体获得的表统计信息与已验证的连接路径同样写入记忆，供所有智能体共享。</a:t>
             </a:r>
             <a:endParaRPr lang="en-US" sz="1500" dirty="0"/>
           </a:p>
@@ -20884,7 +20884,7 @@
                 <a:ea typeface="Microsoft YaHei" pitchFamily="34" charset="-122"/>
                 <a:cs typeface="Microsoft YaHei" pitchFamily="34" charset="-120"/>
               </a:rPr>
-              <a:t>系统结构：请求怎样经过 MAVRA</a:t>
+              <a:t>系统架构：请求路径</a:t>
             </a:r>
             <a:endParaRPr lang="en-US" sz="3000" dirty="0"/>
           </a:p>
@@ -21022,7 +21022,7 @@
                 <a:ea typeface="Microsoft YaHei" pitchFamily="34" charset="-122"/>
                 <a:cs typeface="Microsoft YaHei" pitchFamily="34" charset="-120"/>
               </a:rPr>
-              <a:t>记忆里存什么</a:t>
+              <a:t>记忆的内容</a:t>
             </a:r>
             <a:endParaRPr lang="en-US" sz="3000" dirty="0"/>
           </a:p>
@@ -21074,7 +21074,7 @@
                           <a:ea typeface="Microsoft YaHei" pitchFamily="34" charset="-122"/>
                           <a:cs typeface="Microsoft YaHei" pitchFamily="34" charset="-120"/>
                         </a:rPr>
-                        <a:t>记忆</a:t>
+                        <a:t>类型</a:t>
                       </a:r>
                       <a:endParaRPr lang="en-US" sz="1400" dirty="0">
                         <a:latin typeface="Microsoft YaHei" charset="0"/>
@@ -21142,7 +21142,7 @@
                           <a:ea typeface="Microsoft YaHei" pitchFamily="34" charset="-122"/>
                           <a:cs typeface="Microsoft YaHei" pitchFamily="34" charset="-120"/>
                         </a:rPr>
-                        <a:t>记了什么</a:t>
+                        <a:t>内容</a:t>
                       </a:r>
                       <a:endParaRPr lang="en-US" sz="1400" dirty="0">
                         <a:latin typeface="Microsoft YaHei" charset="0"/>
@@ -21210,7 +21210,7 @@
                           <a:ea typeface="Microsoft YaHei" pitchFamily="34" charset="-122"/>
                           <a:cs typeface="Microsoft YaHei" pitchFamily="34" charset="-120"/>
                         </a:rPr>
-                        <a:t>例子（门店营业额）</a:t>
+                        <a:t>示例（门店营业额）</a:t>
                       </a:r>
                       <a:endParaRPr lang="en-US" sz="1400" dirty="0">
                         <a:latin typeface="Microsoft YaHei" charset="0"/>
@@ -21278,7 +21278,7 @@
                           <a:ea typeface="Microsoft YaHei" pitchFamily="34" charset="-122"/>
                           <a:cs typeface="Microsoft YaHei" pitchFamily="34" charset="-120"/>
                         </a:rPr>
-                        <a:t>数据变了怎么办</a:t>
+                        <a:t>数据更新后的处理</a:t>
                       </a:r>
                       <a:endParaRPr lang="en-US" sz="1400" dirty="0">
                         <a:latin typeface="Microsoft YaHei" charset="0"/>
@@ -21348,7 +21348,7 @@
                           <a:ea typeface="Microsoft YaHei" pitchFamily="34" charset="-122"/>
                           <a:cs typeface="Microsoft YaHei" pitchFamily="34" charset="-120"/>
                         </a:rPr>
-                        <a:t>表画像</a:t>
+                        <a:t>表统计信息</a:t>
                       </a:r>
                       <a:endParaRPr lang="en-US" sz="1400" dirty="0">
                         <a:latin typeface="Microsoft YaHei" charset="0"/>
@@ -21413,7 +21413,7 @@
                           <a:ea typeface="Microsoft YaHei" pitchFamily="34" charset="-122"/>
                           <a:cs typeface="Microsoft YaHei" pitchFamily="34" charset="-120"/>
                         </a:rPr>
-                        <a:t>列、类型、空值比例、不同值个数、常见取值、3 行样例</a:t>
+                        <a:t>列、类型、空值比例、不同值数、高频取值、样例行</a:t>
                       </a:r>
                       <a:endParaRPr lang="en-US" sz="1400" dirty="0">
                         <a:latin typeface="Microsoft YaHei" charset="0"/>
@@ -21478,7 +21478,7 @@
                           <a:ea typeface="Microsoft YaHei" pitchFamily="34" charset="-122"/>
                           <a:cs typeface="Microsoft YaHei" pitchFamily="34" charset="-120"/>
                         </a:rPr>
-                        <a:t>store_sales 每一列的情况</a:t>
+                        <a:t>store_sales 各列的统计信息</a:t>
                       </a:r>
                       <a:endParaRPr lang="en-US" sz="1400" dirty="0">
                         <a:latin typeface="Microsoft YaHei" charset="0"/>
@@ -21543,7 +21543,7 @@
                           <a:ea typeface="Microsoft YaHei" pitchFamily="34" charset="-122"/>
                           <a:cs typeface="Microsoft YaHei" pitchFamily="34" charset="-120"/>
                         </a:rPr>
-                        <a:t>表有写入：下次查看时重新探查</a:t>
+                        <a:t>表版本变化：下次访问时重新采样</a:t>
                       </a:r>
                       <a:endParaRPr lang="en-US" sz="1400" dirty="0">
                         <a:latin typeface="Microsoft YaHei" charset="0"/>
@@ -21610,7 +21610,7 @@
                           <a:ea typeface="Microsoft YaHei" pitchFamily="34" charset="-122"/>
                           <a:cs typeface="Microsoft YaHei" pitchFamily="34" charset="-120"/>
                         </a:rPr>
-                        <a:t>关联路径</a:t>
+                        <a:t>连接路径</a:t>
                       </a:r>
                       <a:endParaRPr lang="en-US" sz="1400" dirty="0">
                         <a:latin typeface="Microsoft YaHei" charset="0"/>
@@ -21675,7 +21675,7 @@
                           <a:ea typeface="Microsoft YaHei" pitchFamily="34" charset="-122"/>
                           <a:cs typeface="Microsoft YaHei" pitchFamily="34" charset="-120"/>
                         </a:rPr>
-                        <a:t>关联列、一对多关系、需要的过滤、关联不上的比例、试过但不对的写法</a:t>
+                        <a:t>连接键、基数、所需过滤谓词、未匹配行比例、已证伪的写法</a:t>
                       </a:r>
                       <a:endParaRPr lang="en-US" sz="1400" dirty="0">
                         <a:latin typeface="Microsoft YaHei" charset="0"/>
@@ -21740,7 +21740,7 @@
                           <a:ea typeface="Microsoft YaHei" pitchFamily="34" charset="-122"/>
                           <a:cs typeface="Microsoft YaHei" pitchFamily="34" charset="-120"/>
                         </a:rPr>
-                        <a:t>store_sales → date_dim：ss_sold_date_sk = d_date_sk，多对一，1.03% 的销售关联不上</a:t>
+                        <a:t>store_sales → date_dim：ss_sold_date_sk = d_date_sk，N:1，1.03% 的销售行未匹配</a:t>
                       </a:r>
                       <a:endParaRPr lang="en-US" sz="1400" dirty="0">
                         <a:latin typeface="Microsoft YaHei" charset="0"/>
@@ -21805,7 +21805,7 @@
                           <a:ea typeface="Microsoft YaHei" pitchFamily="34" charset="-122"/>
                           <a:cs typeface="Microsoft YaHei" pitchFamily="34" charset="-120"/>
                         </a:rPr>
-                        <a:t>任一张表有写入：重新校验“一”那一侧的键仍唯一</a:t>
+                        <a:t>任一表版本变化：重新验证“1”侧键的唯一性</a:t>
                       </a:r>
                       <a:endParaRPr lang="en-US" sz="1400" dirty="0">
                         <a:latin typeface="Microsoft YaHei" charset="0"/>
@@ -21937,7 +21937,7 @@
                           <a:ea typeface="Microsoft YaHei" pitchFamily="34" charset="-122"/>
                           <a:cs typeface="Microsoft YaHei" pitchFamily="34" charset="-120"/>
                         </a:rPr>
-                        <a:t>口径、计算、粒度、日期、注意事项、示例 SQL，以及校验规则</a:t>
+                        <a:t>业务口径、度量、粒度、时间维度、注意事项、示例查询，以及验证条件</a:t>
                       </a:r>
                       <a:endParaRPr lang="en-US" sz="1400" dirty="0">
                         <a:latin typeface="Microsoft YaHei" charset="0"/>
@@ -22002,7 +22002,7 @@
                           <a:ea typeface="Microsoft YaHei" pitchFamily="34" charset="-122"/>
                           <a:cs typeface="Microsoft YaHei" pitchFamily="34" charset="-120"/>
                         </a:rPr>
-                        <a:t>门店营业额 v1：SUM(ss_net_paid)，每笔销售一行</a:t>
+                        <a:t>门店营业额 v1：SUM(ss_net_paid)，粒度为小票 × 商品</a:t>
                       </a:r>
                       <a:endParaRPr lang="en-US" sz="1400" dirty="0">
                         <a:latin typeface="Microsoft YaHei" charset="0"/>
@@ -22067,7 +22067,7 @@
                           <a:ea typeface="Microsoft YaHei" pitchFamily="34" charset="-122"/>
                           <a:cs typeface="Microsoft YaHei" pitchFamily="34" charset="-120"/>
                         </a:rPr>
-                        <a:t>依赖的表有写入：重新校验规则；不成立就修复或停用</a:t>
+                        <a:t>依赖表版本变化：重新验证条件；不成立则修复或失效</a:t>
                       </a:r>
                       <a:endParaRPr lang="en-US" sz="1400" dirty="0">
                         <a:latin typeface="Microsoft YaHei" charset="0"/>
@@ -22134,7 +22134,7 @@
                           <a:ea typeface="Microsoft YaHei" pitchFamily="34" charset="-122"/>
                           <a:cs typeface="Microsoft YaHei" pitchFamily="34" charset="-120"/>
                         </a:rPr>
-                        <a:t>校验结果</a:t>
+                        <a:t>验证结果</a:t>
                       </a:r>
                       <a:endParaRPr lang="en-US" sz="1400" dirty="0">
                         <a:latin typeface="Microsoft YaHei" charset="0"/>
@@ -22199,7 +22199,7 @@
                           <a:ea typeface="Microsoft YaHei" pitchFamily="34" charset="-122"/>
                           <a:cs typeface="Microsoft YaHei" pitchFamily="34" charset="-120"/>
                         </a:rPr>
-                        <a:t>哪条规则、在哪个数据版本上、成立与否</a:t>
+                        <a:t>条件、表版本、结果</a:t>
                       </a:r>
                       <a:endParaRPr lang="en-US" sz="1400" dirty="0">
                         <a:latin typeface="Microsoft YaHei" charset="0"/>
@@ -22264,7 +22264,7 @@
                           <a:ea typeface="Microsoft YaHei" pitchFamily="34" charset="-122"/>
                           <a:cs typeface="Microsoft YaHei" pitchFamily="34" charset="-120"/>
                         </a:rPr>
-                        <a:t>“每笔销售一行”在 store_sales 第 15 版上成立</a:t>
+                        <a:t>“粒度键唯一”在 store_sales 版本 15 上成立</a:t>
                       </a:r>
                       <a:endParaRPr lang="en-US" sz="1400" dirty="0">
                         <a:latin typeface="Microsoft YaHei" charset="0"/>
@@ -22329,7 +22329,7 @@
                           <a:ea typeface="Microsoft YaHei" pitchFamily="34" charset="-122"/>
                           <a:cs typeface="Microsoft YaHei" pitchFamily="34" charset="-120"/>
                         </a:rPr>
-                        <a:t>按（规则，数据版本）存：版本变了就算新的一条，所有记忆共用</a:t>
+                        <a:t>按（条件，表版本）键存储：版本变化即为新条目；跨定义共享</a:t>
                       </a:r>
                       <a:endParaRPr lang="en-US" sz="1400" dirty="0">
                         <a:latin typeface="Microsoft YaHei" charset="0"/>
@@ -22445,7 +22445,7 @@
                 <a:ea typeface="Microsoft YaHei" pitchFamily="34" charset="-122"/>
                 <a:cs typeface="Microsoft YaHei" pitchFamily="34" charset="-120"/>
               </a:rPr>
-              <a:t>每条记忆都带着：</a:t>
+              <a:t>每条记忆附带：</a:t>
             </a:r>
             <a:pPr indent="0" marL="0">
               <a:spcAft>
@@ -22462,7 +22462,7 @@
                 <a:ea typeface="Microsoft YaHei" pitchFamily="34" charset="-122"/>
                 <a:cs typeface="Microsoft YaHei" pitchFamily="34" charset="-120"/>
               </a:rPr>
-              <a:t>依赖哪些表的哪个数据版本、状态（有效 / 待校验 / 停用）、版本号、谁写的、谁用过。</a:t>
+              <a:t>依赖的表及其版本、状态（有效 / 待验证 / 失效）、修订号、写入者、使用者。</a:t>
             </a:r>
             <a:endParaRPr lang="en-US" sz="1500" dirty="0"/>
           </a:p>
@@ -22482,7 +22482,7 @@
                 <a:ea typeface="Microsoft YaHei" pitchFamily="34" charset="-122"/>
                 <a:cs typeface="Microsoft YaHei" pitchFamily="34" charset="-120"/>
               </a:rPr>
-              <a:t>第 1 次运行结束时共 70 条记忆，被查 995 次，其中 696 次直接复用。</a:t>
+              <a:t>第 1 次运行结束时共 70 条记忆，查询 995 次，其中 696 次直接命中。</a:t>
             </a:r>
             <a:endParaRPr lang="en-US" sz="1500" dirty="0"/>
           </a:p>
@@ -22521,7 +22521,7 @@
                 <a:ea typeface="Microsoft YaHei" pitchFamily="34" charset="-122"/>
                 <a:cs typeface="Microsoft YaHei" pitchFamily="34" charset="-120"/>
               </a:rPr>
-              <a:t>记录：noctis results/scen-20261002/dsv41flash-r1-g3fix--snap（端到端实验第 1 次 MAVRA 运行）。数据为仿 TPC-DS 的合成零售数据（100 万行门店销售），题目中的年份略去。</a:t>
+              <a:t>记录：noctis results/scen-20261002/dsv41flash-r1-g3fix--snap（端到端实验第 1 次 MAVRA 运行）。数据为仿 TPC-DS 的合成零售数据（store_sales 100 万行），题目中的年份略去。</a:t>
             </a:r>
             <a:endParaRPr lang="en-US" sz="1100" dirty="0"/>
           </a:p>
@@ -22635,7 +22635,7 @@
                 <a:ea typeface="Microsoft YaHei" pitchFamily="34" charset="-122"/>
                 <a:cs typeface="Microsoft YaHei" pitchFamily="34" charset="-120"/>
               </a:rPr>
-              <a:t>一条指标定义记忆的全部内容（实验记录）</a:t>
+              <a:t>一条指标定义的完整记录（实验数据）</a:t>
             </a:r>
             <a:endParaRPr lang="en-US" sz="3000" dirty="0"/>
           </a:p>
@@ -22674,7 +22674,7 @@
                 <a:ea typeface="Microsoft YaHei" pitchFamily="34" charset="-122"/>
                 <a:cs typeface="Microsoft YaHei" pitchFamily="34" charset="-120"/>
               </a:rPr>
-              <a:t>给智能体看的（查询时返回）</a:t>
+              <a:t>返回给智能体的部分</a:t>
             </a:r>
             <a:endParaRPr lang="en-US" sz="1600" dirty="0"/>
           </a:p>
@@ -22994,7 +22994,7 @@
                           <a:ea typeface="Microsoft YaHei" pitchFamily="34" charset="-122"/>
                           <a:cs typeface="Microsoft YaHei" pitchFamily="34" charset="-120"/>
                         </a:rPr>
-                        <a:t>口径</a:t>
+                        <a:t>业务口径</a:t>
                       </a:r>
                       <a:endParaRPr lang="en-US" sz="1300" dirty="0">
                         <a:latin typeface="Microsoft YaHei" charset="0"/>
@@ -23126,7 +23126,7 @@
                           <a:ea typeface="Microsoft YaHei" pitchFamily="34" charset="-122"/>
                           <a:cs typeface="Microsoft YaHei" pitchFamily="34" charset="-120"/>
                         </a:rPr>
-                        <a:t>计算</a:t>
+                        <a:t>度量</a:t>
                       </a:r>
                       <a:endParaRPr lang="en-US" sz="1300" dirty="0">
                         <a:latin typeface="Microsoft YaHei" charset="0"/>
@@ -23191,7 +23191,7 @@
                           <a:ea typeface="Microsoft YaHei" pitchFamily="34" charset="-122"/>
                           <a:cs typeface="Microsoft YaHei" pitchFamily="34" charset="-120"/>
                         </a:rPr>
-                        <a:t>store_sales 上 SUM(ss_net_paid)，无过滤</a:t>
+                        <a:t>store_sales 上 SUM(ss_net_paid)，无过滤谓词</a:t>
                       </a:r>
                       <a:endParaRPr lang="en-US" sz="1300" dirty="0">
                         <a:latin typeface="Microsoft YaHei" charset="0"/>
@@ -23323,7 +23323,7 @@
                           <a:ea typeface="Microsoft YaHei" pitchFamily="34" charset="-122"/>
                           <a:cs typeface="Microsoft YaHei" pitchFamily="34" charset="-120"/>
                         </a:rPr>
-                        <a:t>销售日 + 小票号 + 商品：每笔销售一行</a:t>
+                        <a:t>销售日 × 小票号 × 商品：每行一笔销售明细</a:t>
                       </a:r>
                       <a:endParaRPr lang="en-US" sz="1300" dirty="0">
                         <a:latin typeface="Microsoft YaHei" charset="0"/>
@@ -23390,7 +23390,7 @@
                           <a:ea typeface="Microsoft YaHei" pitchFamily="34" charset="-122"/>
                           <a:cs typeface="Microsoft YaHei" pitchFamily="34" charset="-120"/>
                         </a:rPr>
-                        <a:t>日期</a:t>
+                        <a:t>时间维度</a:t>
                       </a:r>
                       <a:endParaRPr lang="en-US" sz="1300" dirty="0">
                         <a:latin typeface="Microsoft YaHei" charset="0"/>
@@ -23455,7 +23455,7 @@
                           <a:ea typeface="Microsoft YaHei" pitchFamily="34" charset="-122"/>
                           <a:cs typeface="Microsoft YaHei" pitchFamily="34" charset="-120"/>
                         </a:rPr>
-                        <a:t>ss_sold_date_sk 关联 date_dim，按销售日</a:t>
+                        <a:t>ss_sold_date_sk → date_dim，按销售日</a:t>
                       </a:r>
                       <a:endParaRPr lang="en-US" sz="1300" dirty="0">
                         <a:latin typeface="Microsoft YaHei" charset="0"/>
@@ -23587,7 +23587,7 @@
                           <a:ea typeface="Microsoft YaHei" pitchFamily="34" charset="-122"/>
                           <a:cs typeface="Microsoft YaHei" pitchFamily="34" charset="-120"/>
                         </a:rPr>
-                        <a:t>① 内连接日期表会排除约 1.03% 关联不上的销售；② 用不含税的 ss_net_paid，不要和含税的 ss_net_paid_inc_tax 混用</a:t>
+                        <a:t>① 与日期维度内连接会排除约 1.03% 未匹配的销售行；② 使用不含税的 ss_net_paid，勿与含税的 ss_net_paid_inc_tax 混用</a:t>
                       </a:r>
                       <a:endParaRPr lang="en-US" sz="1300" dirty="0">
                         <a:latin typeface="Microsoft YaHei" charset="0"/>
@@ -23719,7 +23719,7 @@
                           <a:ea typeface="Microsoft YaHei" pitchFamily="34" charset="-122"/>
                           <a:cs typeface="Microsoft YaHei" pitchFamily="34" charset="-120"/>
                         </a:rPr>
-                        <a:t>学习题和当时的 SQL</a:t>
+                        <a:t>学习任务与当时的 SQL</a:t>
                       </a:r>
                       <a:endParaRPr lang="en-US" sz="1300" dirty="0">
                         <a:latin typeface="Microsoft YaHei" charset="0"/>
@@ -23805,7 +23805,7 @@
                 <a:ea typeface="Microsoft YaHei" pitchFamily="34" charset="-122"/>
                 <a:cs typeface="Microsoft YaHei" pitchFamily="34" charset="-120"/>
               </a:rPr>
-              <a:t>MAVRA 自己管理的</a:t>
+              <a:t>由 MAVRA 维护的部分</a:t>
             </a:r>
             <a:endParaRPr lang="en-US" sz="1600" dirty="0"/>
           </a:p>
@@ -24058,7 +24058,7 @@
                           <a:ea typeface="Microsoft YaHei" pitchFamily="34" charset="-122"/>
                           <a:cs typeface="Microsoft YaHei" pitchFamily="34" charset="-120"/>
                         </a:rPr>
-                        <a:t>学习题给出的口径（M1-L1）</a:t>
+                        <a:t>学习任务给定的业务口径（M1-L1）</a:t>
                       </a:r>
                       <a:endParaRPr lang="en-US" sz="1300" dirty="0">
                         <a:latin typeface="Microsoft YaHei" charset="0"/>
@@ -24190,7 +24190,7 @@
                           <a:ea typeface="Microsoft YaHei" pitchFamily="34" charset="-122"/>
                           <a:cs typeface="Microsoft YaHei" pitchFamily="34" charset="-120"/>
                         </a:rPr>
-                        <a:t>学习时的 SQL、答案 13,570,368.70、当时的数据版本；7 项发布前校验全部通过</a:t>
+                        <a:t>学习时的 SQL、答案 13,570,368.70、当时的表版本；7 项准入检查全部通过</a:t>
                       </a:r>
                       <a:endParaRPr lang="en-US" sz="1300" dirty="0">
                         <a:latin typeface="Microsoft YaHei" charset="0"/>
@@ -24257,7 +24257,7 @@
                           <a:ea typeface="Microsoft YaHei" pitchFamily="34" charset="-122"/>
                           <a:cs typeface="Microsoft YaHei" pitchFamily="34" charset="-120"/>
                         </a:rPr>
-                        <a:t>校验规则</a:t>
+                        <a:t>验证条件</a:t>
                       </a:r>
                       <a:endParaRPr lang="en-US" sz="1300" dirty="0">
                         <a:latin typeface="Microsoft YaHei" charset="0"/>
@@ -24322,7 +24322,7 @@
                           <a:ea typeface="Microsoft YaHei" pitchFamily="34" charset="-122"/>
                           <a:cs typeface="Microsoft YaHei" pitchFamily="34" charset="-120"/>
                         </a:rPr>
-                        <a:t>每笔销售一行；日期键唯一；丢行率不超标（学习时 1.03%）</a:t>
+                        <a:t>粒度键唯一；日期键唯一；日期键完整性（学习时未匹配率 1.03%）</a:t>
                       </a:r>
                       <a:endParaRPr lang="en-US" sz="1300" dirty="0">
                         <a:latin typeface="Microsoft YaHei" charset="0"/>
@@ -24454,7 +24454,7 @@
                           <a:ea typeface="Microsoft YaHei" pitchFamily="34" charset="-122"/>
                           <a:cs typeface="Microsoft YaHei" pitchFamily="34" charset="-120"/>
                         </a:rPr>
-                        <a:t>store_sales、date_dim 的数据版本</a:t>
+                        <a:t>store_sales、date_dim 的表版本</a:t>
                       </a:r>
                       <a:endParaRPr lang="en-US" sz="1300" dirty="0">
                         <a:latin typeface="Microsoft YaHei" charset="0"/>
@@ -24586,7 +24586,7 @@
                           <a:ea typeface="Microsoft YaHei" pitchFamily="34" charset="-122"/>
                           <a:cs typeface="Microsoft YaHei" pitchFamily="34" charset="-120"/>
                         </a:rPr>
-                        <a:t>有效，v1</a:t>
+                        <a:t>有效，修订 v1</a:t>
                       </a:r>
                       <a:endParaRPr lang="en-US" sz="1300" dirty="0">
                         <a:latin typeface="Microsoft YaHei" charset="0"/>
@@ -24718,7 +24718,7 @@
                           <a:ea typeface="Microsoft YaHei" pitchFamily="34" charset="-122"/>
                           <a:cs typeface="Microsoft YaHei" pitchFamily="34" charset="-120"/>
                         </a:rPr>
-                        <a:t>内置智能体 A 写入；A、B 用过，被查 9 次</a:t>
+                        <a:t>内置智能体 A 写入；A、B 使用，命中 9 次</a:t>
                       </a:r>
                       <a:endParaRPr lang="en-US" sz="1300" dirty="0">
                         <a:latin typeface="Microsoft YaHei" charset="0"/>
@@ -24834,7 +24834,7 @@
                 <a:ea typeface="Microsoft YaHei" pitchFamily="34" charset="-122"/>
                 <a:cs typeface="Microsoft YaHei" pitchFamily="34" charset="-120"/>
               </a:rPr>
-              <a:t>左边告诉智能体“怎么算”，右边让 MAVRA 判断“现在还能不能这么算”。</a:t>
+              <a:t>左侧告诉智能体如何计算，右侧让 MAVRA 判断该计算在当前数据上是否仍然有效。</a:t>
             </a:r>
             <a:pPr indent="0" marL="0">
               <a:spcAft>
@@ -24851,7 +24851,7 @@
                 <a:ea typeface="Microsoft YaHei" pitchFamily="34" charset="-122"/>
                 <a:cs typeface="Microsoft YaHei" pitchFamily="34" charset="-120"/>
               </a:rPr>
-              <a:t>Text-to-SQL 生成的 SQL 用完就丢，也不知道它在什么前提下成立。</a:t>
+              <a:t>Text-to-SQL 生成的查询用后即弃，也不记录其成立的前提。</a:t>
             </a:r>
             <a:endParaRPr lang="en-US" sz="1500" dirty="0"/>
           </a:p>
@@ -24890,7 +24890,7 @@
                 <a:ea typeface="Microsoft YaHei" pitchFamily="34" charset="-122"/>
                 <a:cs typeface="Microsoft YaHei" pitchFamily="34" charset="-120"/>
               </a:rPr>
-              <a:t>记录：noctis results/scen-20261002/dsv41flash-r1-g3fix--snap（端到端实验第 1 次 MAVRA 运行）。数据为仿 TPC-DS 的合成零售数据（100 万行门店销售），题目中的年份略去。</a:t>
+              <a:t>记录：noctis results/scen-20261002/dsv41flash-r1-g3fix--snap（端到端实验第 1 次 MAVRA 运行）。数据为仿 TPC-DS 的合成零售数据（store_sales 100 万行），题目中的年份略去。</a:t>
             </a:r>
             <a:endParaRPr lang="en-US" sz="1100" dirty="0"/>
           </a:p>
@@ -25124,7 +25124,7 @@
                           <a:ea typeface="Microsoft YaHei" pitchFamily="34" charset="-122"/>
                           <a:cs typeface="Microsoft YaHei" pitchFamily="34" charset="-120"/>
                         </a:rPr>
-                        <a:t>什么时候</a:t>
+                        <a:t>触发</a:t>
                       </a:r>
                       <a:endParaRPr lang="en-US" sz="1500" dirty="0">
                         <a:latin typeface="Microsoft YaHei" charset="0"/>
@@ -25192,7 +25192,7 @@
                           <a:ea typeface="Microsoft YaHei" pitchFamily="34" charset="-122"/>
                           <a:cs typeface="Microsoft YaHei" pitchFamily="34" charset="-120"/>
                         </a:rPr>
-                        <a:t>MAVRA 做什么</a:t>
+                        <a:t>MAVRA 的处理</a:t>
                       </a:r>
                       <a:endParaRPr lang="en-US" sz="1500" dirty="0">
                         <a:latin typeface="Microsoft YaHei" charset="0"/>
@@ -25395,7 +25395,7 @@
                           <a:ea typeface="Microsoft YaHei" pitchFamily="34" charset="-122"/>
                           <a:cs typeface="Microsoft YaHei" pitchFamily="34" charset="-120"/>
                         </a:rPr>
-                        <a:t>内置智能体答对一道学习题</a:t>
+                        <a:t>内置智能体正确求解一道学习任务</a:t>
                       </a:r>
                       <a:endParaRPr lang="en-US" sz="1500" dirty="0">
                         <a:latin typeface="Microsoft YaHei" charset="0"/>
@@ -25460,7 +25460,7 @@
                           <a:ea typeface="Microsoft YaHei" pitchFamily="34" charset="-122"/>
                           <a:cs typeface="Microsoft YaHei" pitchFamily="34" charset="-120"/>
                         </a:rPr>
-                        <a:t>抽取成定义，过 7 项发布前校验，通过才发布</a:t>
+                        <a:t>抽取为结构化定义，通过 7 项准入检查后发布</a:t>
                       </a:r>
                       <a:endParaRPr lang="en-US" sz="1500" dirty="0">
                         <a:latin typeface="Microsoft YaHei" charset="0"/>
@@ -25525,7 +25525,7 @@
                           <a:ea typeface="Microsoft YaHei" pitchFamily="34" charset="-122"/>
                           <a:cs typeface="Microsoft YaHei" pitchFamily="34" charset="-120"/>
                         </a:rPr>
-                        <a:t>发布 v1：抽取 16.3 秒，校验 5.7 秒</a:t>
+                        <a:t>发布 v1：抽取 16.3 秒，准入检查 5.7 秒</a:t>
                       </a:r>
                       <a:endParaRPr lang="en-US" sz="1500" dirty="0">
                         <a:latin typeface="Microsoft YaHei" charset="0"/>
@@ -25657,7 +25657,7 @@
                           <a:ea typeface="Microsoft YaHei" pitchFamily="34" charset="-122"/>
                           <a:cs typeface="Microsoft YaHei" pitchFamily="34" charset="-120"/>
                         </a:rPr>
-                        <a:t>用户智能体按名称查</a:t>
+                        <a:t>用户智能体按名称检索</a:t>
                       </a:r>
                       <a:endParaRPr lang="en-US" sz="1500" dirty="0">
                         <a:latin typeface="Microsoft YaHei" charset="0"/>
@@ -25722,7 +25722,7 @@
                           <a:ea typeface="Microsoft YaHei" pitchFamily="34" charset="-122"/>
                           <a:cs typeface="Microsoft YaHei" pitchFamily="34" charset="-120"/>
                         </a:rPr>
-                        <a:t>依赖的表没变：直接返回；有写入：先维护再返回</a:t>
+                        <a:t>依赖表版本未变：直接返回；已变：先维护再返回</a:t>
                       </a:r>
                       <a:endParaRPr lang="en-US" sz="1500" dirty="0">
                         <a:latin typeface="Microsoft YaHei" charset="0"/>
@@ -25787,7 +25787,7 @@
                           <a:ea typeface="Microsoft YaHei" pitchFamily="34" charset="-122"/>
                           <a:cs typeface="Microsoft YaHei" pitchFamily="34" charset="-120"/>
                         </a:rPr>
-                        <a:t>问 9 月营业额：查到 v1，3 轮答对</a:t>
+                        <a:t>询问 9 月营业额：检索到 v1，3 轮答对</a:t>
                       </a:r>
                       <a:endParaRPr lang="en-US" sz="1500" dirty="0">
                         <a:latin typeface="Microsoft YaHei" charset="0"/>
@@ -25919,7 +25919,7 @@
                           <a:ea typeface="Microsoft YaHei" pitchFamily="34" charset="-122"/>
                           <a:cs typeface="Microsoft YaHei" pitchFamily="34" charset="-120"/>
                         </a:rPr>
-                        <a:t>用户智能体执行 SQL，注明所用版本</a:t>
+                        <a:t>用户智能体执行 SQL 并声明所依赖的修订</a:t>
                       </a:r>
                       <a:endParaRPr lang="en-US" sz="1500" dirty="0">
                         <a:latin typeface="Microsoft YaHei" charset="0"/>
@@ -25984,7 +25984,7 @@
                           <a:ea typeface="Microsoft YaHei" pitchFamily="34" charset="-122"/>
                           <a:cs typeface="Microsoft YaHei" pitchFamily="34" charset="-120"/>
                         </a:rPr>
-                        <a:t>过期版本拒绝；在本次查询的快照上校验，再执行</a:t>
+                        <a:t>失效或被替代的修订拒绝；在查询快照上验证条件后执行</a:t>
                       </a:r>
                       <a:endParaRPr lang="en-US" sz="1500" dirty="0">
                         <a:latin typeface="Microsoft YaHei" charset="0"/>
@@ -26049,7 +26049,7 @@
                           <a:ea typeface="Microsoft YaHei" pitchFamily="34" charset="-122"/>
                           <a:cs typeface="Microsoft YaHei" pitchFamily="34" charset="-120"/>
                         </a:rPr>
-                        <a:t>SQL 注明“门店营业额 v1”</a:t>
+                        <a:t>SQL 声明“门店营业额 v1”</a:t>
                       </a:r>
                       <a:endParaRPr lang="en-US" sz="1500" dirty="0">
                         <a:latin typeface="Microsoft YaHei" charset="0"/>
@@ -26181,7 +26181,7 @@
                           <a:ea typeface="Microsoft YaHei" pitchFamily="34" charset="-122"/>
                           <a:cs typeface="Microsoft YaHei" pitchFamily="34" charset="-120"/>
                         </a:rPr>
-                        <a:t>数据写入后，记忆第一次被用到时</a:t>
+                        <a:t>数据更新后，定义首次被访问时</a:t>
                       </a:r>
                       <a:endParaRPr lang="en-US" sz="1500" dirty="0">
                         <a:latin typeface="Microsoft YaHei" charset="0"/>
@@ -26246,7 +26246,7 @@
                           <a:ea typeface="Microsoft YaHei" pitchFamily="34" charset="-122"/>
                           <a:cs typeface="Microsoft YaHei" pitchFamily="34" charset="-120"/>
                         </a:rPr>
-                        <a:t>只重新校验受影响的规则；结果按（规则，数据版本）缓存共用</a:t>
+                        <a:t>仅重新验证受影响的条件；结果按（条件，表版本）缓存并共享</a:t>
                       </a:r>
                       <a:endParaRPr lang="en-US" sz="1500" dirty="0">
                         <a:latin typeface="Microsoft YaHei" charset="0"/>
@@ -26311,7 +26311,7 @@
                           <a:ea typeface="Microsoft YaHei" pitchFamily="34" charset="-122"/>
                           <a:cs typeface="Microsoft YaHei" pitchFamily="34" charset="-120"/>
                         </a:rPr>
-                        <a:t>追加新数据后：6 条定义只真正跑了 2 次校验</a:t>
+                        <a:t>增量加载后：6 条定义仅执行 2 次验证</a:t>
                       </a:r>
                       <a:endParaRPr lang="en-US" sz="1500" dirty="0">
                         <a:latin typeface="Microsoft YaHei" charset="0"/>
@@ -26443,7 +26443,7 @@
                           <a:ea typeface="Microsoft YaHei" pitchFamily="34" charset="-122"/>
                           <a:cs typeface="Microsoft YaHei" pitchFamily="34" charset="-120"/>
                         </a:rPr>
-                        <a:t>某条规则不成立</a:t>
+                        <a:t>某条件不再成立</a:t>
                       </a:r>
                       <a:endParaRPr lang="en-US" sz="1500" dirty="0">
                         <a:latin typeface="Microsoft YaHei" charset="0"/>
@@ -26508,7 +26508,7 @@
                           <a:ea typeface="Microsoft YaHei" pitchFamily="34" charset="-122"/>
                           <a:cs typeface="Microsoft YaHei" pitchFamily="34" charset="-120"/>
                         </a:rPr>
-                        <a:t>能唯一修好：发布 v2；修不了：停用并提醒；以后学到新证据再发布</a:t>
+                        <a:t>存在唯一修复：发布新修订；否则失效并通知；学到新证据后重新发布</a:t>
                       </a:r>
                       <a:endParaRPr lang="en-US" sz="1500" dirty="0">
                         <a:latin typeface="Microsoft YaHei" charset="0"/>
@@ -26573,7 +26573,7 @@
                           <a:ea typeface="Microsoft YaHei" pitchFamily="34" charset="-122"/>
                           <a:cs typeface="Microsoft YaHei" pitchFamily="34" charset="-120"/>
                         </a:rPr>
-                        <a:t>数据更正：v1 → v2；重复装载：停用</a:t>
+                        <a:t>数据更正：v1 → v2；重复加载：失效</a:t>
                       </a:r>
                       <a:endParaRPr lang="en-US" sz="1500" dirty="0">
                         <a:latin typeface="Microsoft YaHei" charset="0"/>
@@ -26689,7 +26689,7 @@
                 <a:ea typeface="Microsoft YaHei" pitchFamily="34" charset="-122"/>
                 <a:cs typeface="Microsoft YaHei" pitchFamily="34" charset="-120"/>
               </a:rPr>
-              <a:t>和 Text-to-SQL 的区别就在这里：</a:t>
+              <a:t>与 Text-to-SQL 的区别在于：</a:t>
             </a:r>
             <a:pPr indent="0" marL="0">
               <a:spcAft>
@@ -26706,7 +26706,7 @@
                 <a:ea typeface="Microsoft YaHei" pitchFamily="34" charset="-122"/>
                 <a:cs typeface="Microsoft YaHei" pitchFamily="34" charset="-120"/>
               </a:rPr>
-              <a:t>这五个环节都发生在“生成一条 SQL”之外，跨问题、跨智能体、跨数据版本。</a:t>
+              <a:t>这五个环节均发生在单条查询的生成之外，跨问题、跨智能体、跨表版本。</a:t>
             </a:r>
             <a:endParaRPr lang="en-US" sz="1600" dirty="0"/>
           </a:p>
@@ -26745,7 +26745,7 @@
                 <a:ea typeface="Microsoft YaHei" pitchFamily="34" charset="-122"/>
                 <a:cs typeface="Microsoft YaHei" pitchFamily="34" charset="-120"/>
               </a:rPr>
-              <a:t>记录：noctis results/scen-20261002/dsv41flash-r1-g3fix--snap（端到端实验第 1 次 MAVRA 运行）。数据为仿 TPC-DS 的合成零售数据（100 万行门店销售），题目中的年份略去。</a:t>
+              <a:t>记录：noctis results/scen-20261002/dsv41flash-r1-g3fix--snap（端到端实验第 1 次 MAVRA 运行）。数据为仿 TPC-DS 的合成零售数据（store_sales 100 万行），题目中的年份略去。</a:t>
             </a:r>
             <a:endParaRPr lang="en-US" sz="1100" dirty="0"/>
           </a:p>

--- a/docs/mavra-system.pptx
+++ b/docs/mavra-system.pptx
@@ -19,9 +19,10 @@
     <p:sldId id="267" r:id="rId13"/>
     <p:sldId id="268" r:id="rId14"/>
     <p:sldId id="269" r:id="rId15"/>
+    <p:sldId id="270" r:id="rId16"/>
   </p:sldIdLst>
   <p:notesMasterIdLst>
-    <p:notesMasterId r:id="rId16"/>
+    <p:notesMasterId r:id="rId17"/>
   </p:notesMasterIdLst>
   <p:sldSz cx="12192000" cy="6858000"/>
   <p:notesSz cx="6858000" cy="12192000"/>
@@ -120,54 +121,55 @@
   <p:extLst>
     <p:ext uri="{521415D9-36F7-43E2-AB2F-B90AF26B5E84}">
       <p14:sectionLst xmlns:p14="http://schemas.microsoft.com/office/powerpoint/2010/main">
-        <p14:section name="开场" id="{2c54ecec-87a3-b6fa-9d63-7c595e664e5b}">
+        <p14:section name="开场" id="{814cf3d3-a6d0-9665-6660-497f229552ad}">
           <p14:sldIdLst>
             <p14:sldId id="256"/>
           </p14:sldIdLst>
         </p14:section>
-        <p14:section name="问题" id="{7ce276fb-5051-25b3-5031-a9dfa5146c32}">
+        <p14:section name="问题" id="{6f7b1fa6-9fae-c3f7-c0e4-02a32fd26103}">
           <p14:sldIdLst>
             <p14:sldId id="257"/>
+            <p14:sldId id="258"/>
           </p14:sldIdLst>
         </p14:section>
-        <p14:section name="MAVRA" id="{b84dc990-45fd-4374-7d11-6e19eae54425}">
+        <p14:section name="MAVRA" id="{f5270270-d4b8-9563-9a36-4c2744b955a9}">
           <p14:sldIdLst>
-            <p14:sldId id="258"/>
             <p14:sldId id="259"/>
+            <p14:sldId id="260"/>
           </p14:sldIdLst>
         </p14:section>
-        <p14:section name="检查什么" id="{3a7db9ee-be00-e579-7e47-f0fbc91190d8}">
+        <p14:section name="检查什么" id="{b732257b-2006-a140-d742-80def715a5dd}">
           <p14:sldIdLst>
-            <p14:sldId id="260"/>
             <p14:sldId id="261"/>
+            <p14:sldId id="262"/>
           </p14:sldIdLst>
         </p14:section>
-        <p14:section name="何时检查" id="{df25dc9a-ddf4-b1ba-740f-4fc701db55d7}">
+        <p14:section name="何时检查" id="{b6ffe290-acfd-76fc-f658-168899c0a979}">
           <p14:sldIdLst>
-            <p14:sldId id="262"/>
             <p14:sldId id="263"/>
+            <p14:sldId id="264"/>
           </p14:sldIdLst>
         </p14:section>
-        <p14:section name="失败后怎么办" id="{60c9359b-d880-6c37-6575-f018c1bdceef}">
+        <p14:section name="失败后怎么办" id="{3108f627-a670-1543-1a17-2809ed040ce8}">
           <p14:sldIdLst>
-            <p14:sldId id="264"/>
             <p14:sldId id="265"/>
-          </p14:sldIdLst>
-        </p14:section>
-        <p14:section name="真实记录" id="{163f310b-0ea4-0412-5b1a-0d4656b59e6a}">
-          <p14:sldIdLst>
             <p14:sldId id="266"/>
           </p14:sldIdLst>
         </p14:section>
-        <p14:section name="实验结果" id="{0069ac7e-aaec-84fc-0e30-34ba381e0e8a}">
+        <p14:section name="真实记录" id="{5e0178b8-4ebb-3932-6dc0-50fabf8e27c1}">
           <p14:sldIdLst>
             <p14:sldId id="267"/>
-            <p14:sldId id="268"/>
           </p14:sldIdLst>
         </p14:section>
-        <p14:section name="边界与总结" id="{49dc51c8-74b3-deae-8682-aa5127b0c27a}">
+        <p14:section name="实验结果" id="{bc6525e9-76e5-e9cb-255e-0adb266b8a04}">
           <p14:sldIdLst>
+            <p14:sldId id="268"/>
             <p14:sldId id="269"/>
+          </p14:sldIdLst>
+        </p14:section>
+        <p14:section name="边界与总结" id="{a455127e-09de-aaff-29a5-94740b219d3e}">
+          <p14:sldIdLst>
+            <p14:sldId id="270"/>
           </p14:sldIdLst>
         </p14:section>
       </p14:sectionLst>
@@ -662,7 +664,7 @@
           <a:p>
             <a:r>
               <a:rPr lang="en-US" dirty="0"/>
-              <a:t>把前面几页串在一张图上。内置智能体求解“3 月门店营业额”，判定正确、准入检查通过，发布 v1。增量加载：条件仍成立，其他定义复用验证结果，仍为 v1。数据更正：旧行标记为非当前，插入当前行——粒度键唯一不成立，v1 失效，不处理会把新旧版本都算进去。修复搜索只有 ss_is_current = 1 可行；按学习时刻重算 3 月，结果一致，发布 v2。红框是另一种结果：批次重复加载，没有谓词能恢复唯一性，定义失效并通知使用方，等待重新学习。</a:t>
+              <a:t>回到订单 002。MAVRA 发现订单号重复，一行是旧记录，一行是当前记录。它去找一个过滤谓词：只保留 ss_is_current = 1，过滤后订单不再重复，总额 650 元。但不能看到一个像样的条件就用。候选必须满足两件事：过滤后每个键恰好一行；原来的键一个不丢——“只保留金额大于 200”也能去重，但 100 元的订单没了，这不叫修复。还要唯一：如果 is_current 和 is_backup 两个过滤都通过，表结构说不出哪份是业务事实，MAVRA 不擅自选，定义失效，交给人确认。宁可说不知道怎么安全地修，也不猜。修复通过结构检查之后还要考一次试：像换一种解法重做老师判过的那道题，答案必须一样。必须用当初那份数据，因为今天的数据已经变了，当初的 SQL 在上面同样过期，我们实际跑过：按当前数据比，正确的修复会被拒绝。通过后发布 v2，v1 失效。</a:t>
             </a:r>
             <a:endParaRPr lang="en-US" dirty="0"/>
           </a:p>
@@ -750,7 +752,7 @@
           <a:p>
             <a:r>
               <a:rPr lang="en-US" dirty="0"/>
-              <a:t>把整套系统的合作串起来。三条共享定义——电子品类营业额、门店营业额、退货率——都依赖同一张销售表。数据更正之后：第一个智能体来检索电子品类营业额，MAVRA 发现表版本变了，一验证，106 万行只有 100 万个键，重复了，v1 失效；修复搜索找到唯一可行的谓词，四项检查通过，发布 v2，共 28.7 秒。第二个智能体来检索门店营业额，依赖同一张表、同一个条件、同一个版本，验证结果和修复直接复用，45.8 毫秒。退货率要连接销售表，连接路径现在也要求这个谓词，同样修复。最后相关智能体收到通知，按新修订写 SQL，答案正确。这页的重点不是快，而是一个智能体发现的问题修好后，所有相关智能体得到一致的新知识。</a:t>
+              <a:t>把前面几页串在一张图上。内置智能体求解“3 月门店营业额”，判定正确、准入检查通过，发布 v1。增量加载：条件仍成立，其他定义复用验证结果，仍为 v1。数据更正：旧行标记为非当前，插入当前行——粒度键唯一不成立，v1 失效，不处理会把新旧版本都算进去。修复搜索只有 ss_is_current = 1 可行；按学习时刻重算 3 月，结果一致，发布 v2。红框是另一种结果：批次重复加载，没有谓词能恢复唯一性，定义失效并通知使用方，等待重新学习。</a:t>
             </a:r>
             <a:endParaRPr lang="en-US" dirty="0"/>
           </a:p>
@@ -838,7 +840,7 @@
           <a:p>
             <a:r>
               <a:rPr lang="en-US" dirty="0"/>
-              <a:t>端到端实验：DeepSeek V4.1 Flash 智能体，每种方法独立运行 3 次，15 道留出题，再加 11 种数据更新。共享本身的收益：数据未变时准确率从 49% 到 100%，轮数和 token 都下降——任何共享方法都有这个收益，不是 MAVRA 独有。维护的收益：更新后从 75% 到 81%，5 种破坏性更新下从 59% 到 73%；检索历史示例即使提示它自行验证也只有 63%。MAVRA 与整定义重查答案相同，差异来自各次运行学到的定义不同。两个对照：单位变化不违反任何条件，所有方法同样过期，与命题的范围一致；备份副本下修复有歧义，MAVRA 按规则使定义失效，检索示例碰巧答对，这是如实保留的负结果。这些数字来自我们设定的实验，不是说在所有数据库和模型上都能达到。</a:t>
+              <a:t>把整套系统的合作串起来。三条共享定义——电子品类营业额、门店营业额、退货率——都依赖同一张销售表。数据更正之后：第一个智能体来检索电子品类营业额，MAVRA 发现表版本变了，一验证，106 万行只有 100 万个键，重复了，v1 失效；修复搜索找到唯一可行的谓词，四项检查通过，发布 v2，共 28.7 秒。第二个智能体来检索门店营业额，依赖同一张表、同一个条件、同一个版本，验证结果和修复直接复用，45.8 毫秒。退货率要连接销售表，连接路径现在也要求这个谓词，同样修复。最后相关智能体收到通知，按新修订写 SQL，答案正确。这页的重点不是快，而是一个智能体发现的问题修好后，所有相关智能体得到一致的新知识。</a:t>
             </a:r>
             <a:endParaRPr lang="en-US" dirty="0"/>
           </a:p>
@@ -926,7 +928,7 @@
           <a:p>
             <a:r>
               <a:rPr lang="en-US" dirty="0"/>
-              <a:t>系统层实验不用大模型：固定各次运行学到的定义库，只改变维护方式，比较的是机制本身。配对回放：合成数据 1,470 题次，MAVRA 在覆盖的更新下没有错答，99 个错答全部是单位变化这个对照；按模式变更失效有 629 个错答。TPC-DS 上用 99 个查询模板导出的定义，结论一致。同快照验证：并发写入下 11,297 次使用没有一次在违反条件的数据上作答，先检查后执行有 3.8% 到 4.6%。修复的回归基准：按学习时刻比较，修复成功的数量与使用标准答案参照完全相同；按当前数据比较会误拒正确的修复。维护成本：19 条定义时为整定义重查的 14%，因为很多定义依赖同一张表的同一个条件；但按表版本缓存验证查询也能得到同样的节省，所以效率不是本文的贡献，贡献在于检查什么、何时可以依赖检查结果、失败后怎么办。</a:t>
+              <a:t>端到端实验：DeepSeek V4.1 Flash 智能体，每种方法独立运行 3 次，15 道留出题，再加 11 种数据更新。共享本身的收益：数据未变时准确率从 49% 到 100%，轮数和 token 都下降——任何共享方法都有这个收益，不是 MAVRA 独有。维护的收益：更新后从 75% 到 81%，5 种破坏性更新下从 59% 到 73%；检索历史示例即使提示它自行验证也只有 63%。MAVRA 与整定义重查答案相同，差异来自各次运行学到的定义不同。两个对照：单位变化不违反任何条件，所有方法同样过期，与命题的范围一致；备份副本下修复有歧义，MAVRA 按规则使定义失效，检索示例碰巧答对，这是如实保留的负结果。这些数字来自我们设定的实验，不是说在所有数据库和模型上都能达到。</a:t>
             </a:r>
             <a:endParaRPr lang="en-US" dirty="0"/>
           </a:p>
@@ -1014,6 +1016,94 @@
           <a:p>
             <a:r>
               <a:rPr lang="en-US" dirty="0"/>
+              <a:t>系统层实验不用大模型：固定各次运行学到的定义库，只改变维护方式，比较的是机制本身。配对回放：合成数据 1,470 题次，MAVRA 在覆盖的更新下没有错答，99 个错答全部是单位变化这个对照；按模式变更失效有 629 个错答。TPC-DS 上用 99 个查询模板导出的定义，结论一致。同快照验证：并发写入下 11,297 次使用没有一次在违反条件的数据上作答，先检查后执行有 3.8% 到 4.6%。修复的回归基准：按学习时刻比较，修复成功的数量与使用标准答案参照完全相同；按当前数据比较会误拒正确的修复。维护成本：19 条定义时为整定义重查的 14%，因为很多定义依赖同一张表的同一个条件；但按表版本缓存验证查询也能得到同样的节省，所以效率不是本文的贡献，贡献在于检查什么、何时可以依赖检查结果、失败后怎么办。</a:t>
+            </a:r>
+            <a:endParaRPr lang="en-US" dirty="0"/>
+          </a:p>
+        </p:txBody>
+      </p:sp>
+      <p:sp>
+        <p:nvSpPr>
+          <p:cNvPr id="4" name="Slide Number Placeholder 3"/>
+          <p:cNvSpPr>
+            <a:spLocks noGrp="1"/>
+          </p:cNvSpPr>
+          <p:nvPr>
+            <p:ph type="sldNum" sz="quarter" idx="10"/>
+          </p:nvPr>
+        </p:nvSpPr>
+        <p:spPr/>
+        <p:txBody>
+          <a:bodyPr/>
+          <a:lstStyle/>
+          <a:p>
+            <a:fld id="{F7021451-1387-4CA6-816F-3879F97B5CBC}" type="slidenum">
+              <a:rPr lang="en-US"/>
+              <a:t>14</a:t>
+            </a:fld>
+            <a:endParaRPr lang="en-US"/>
+          </a:p>
+        </p:txBody>
+      </p:sp>
+    </p:spTree>
+    <p:extLst>
+      <p:ext uri="{BB962C8B-B14F-4D97-AF65-F5344CB8AC3E}">
+        <p14:creationId xmlns:p14="http://schemas.microsoft.com/office/powerpoint/2010/main" val="1024086991"/>
+      </p:ext>
+    </p:extLst>
+  </p:cSld>
+  <p:clrMapOvr>
+    <a:masterClrMapping/>
+  </p:clrMapOvr>
+</p:notes>
+</file>
+
+<file path=ppt/notesSlides/notesSlide15.xml><?xml version="1.0" encoding="utf-8"?>
+<p:notes xmlns:a="http://schemas.openxmlformats.org/drawingml/2006/main" xmlns:r="http://schemas.openxmlformats.org/officeDocument/2006/relationships" xmlns:p="http://schemas.openxmlformats.org/presentationml/2006/main">
+  <p:cSld>
+    <p:spTree>
+      <p:nvGrpSpPr>
+        <p:cNvPr id="1" name=""/>
+        <p:cNvGrpSpPr/>
+        <p:nvPr/>
+      </p:nvGrpSpPr>
+      <p:grpSpPr>
+        <a:xfrm>
+          <a:off x="0" y="0"/>
+          <a:ext cx="0" cy="0"/>
+          <a:chOff x="0" y="0"/>
+          <a:chExt cx="0" cy="0"/>
+        </a:xfrm>
+      </p:grpSpPr>
+      <p:sp>
+        <p:nvSpPr>
+          <p:cNvPr id="2" name="Slide Image Placeholder 1"/>
+          <p:cNvSpPr>
+            <a:spLocks noGrp="1" noRot="1" noChangeAspect="1"/>
+          </p:cNvSpPr>
+          <p:nvPr>
+            <p:ph type="sldImg"/>
+          </p:nvPr>
+        </p:nvSpPr>
+        <p:spPr/>
+      </p:sp>
+      <p:sp>
+        <p:nvSpPr>
+          <p:cNvPr id="3" name="Notes Placeholder 2"/>
+          <p:cNvSpPr>
+            <a:spLocks noGrp="1"/>
+          </p:cNvSpPr>
+          <p:nvPr>
+            <p:ph type="body" idx="1"/>
+          </p:nvPr>
+        </p:nvSpPr>
+        <p:spPr/>
+        <p:txBody>
+          <a:bodyPr/>
+          <a:lstStyle/>
+          <a:p>
+            <a:r>
+              <a:rPr lang="en-US" dirty="0"/>
               <a:t>MAVRA 是严谨的管理员，但不是无所不知。能做的：旧记录有唯一的当前标志，检测并修复；整批重复加载，检测但修不了，失效并通知；主表和备份都合理，不擅自选，交给人。做不到的：金额换了单位、日期键指向错误日期，行数和键都没变，四类条件发现不了；智能体没声明用了哪个修订，也不在保证范围内。两点要分清：MAVRA 不判断业务含义对不对，那需要有人给口径；它也不保证每条 SQL 都对，保护的是声明了受管修订的查询。最后三句话：问题——学会的规则会因数据变化而失效，SQL 却不报错；方法——保存规则成立的条件，使用时在实际执行的快照上保证成立；贡献——只有唯一且通过回归测试的修复才发布，否则失效，不让错误知识传播。</a:t>
             </a:r>
             <a:endParaRPr lang="en-US" dirty="0"/>
@@ -1037,7 +1127,7 @@
           <a:p>
             <a:fld id="{F7021451-1387-4CA6-816F-3879F97B5CBC}" type="slidenum">
               <a:rPr lang="en-US"/>
-              <a:t>14</a:t>
+              <a:t>15</a:t>
             </a:fld>
             <a:endParaRPr lang="en-US"/>
           </a:p>
@@ -1102,7 +1192,7 @@
           <a:p>
             <a:r>
               <a:rPr lang="en-US" dirty="0"/>
-              <a:t>先用一个示意的小账本。第一天三笔订单，规则“把每笔销售金额加起来”算出 600 元，正确。第二天订单 002 被更正为 250 元，数据仓库常见的做法是旧行不删、标记为非当前，再插入一行新的。沿用规则会把 200 和 250 都加进去，得到 850 元，正确答案是 650 元。注意：规则没有算错，是规则的前提“每个订单号只有一行”不再成立了。下半是实验里的真实记录：增量加载没问题；数据更正后沿用定义多算 137 万；重复加载让 9 月翻倍。三种更新都是普通 DML，表结构没变，查询不报错，智能体会非常自信地给出错误答案；而定义是共享的，一处失效所有智能体一起错。这就是 MAVRA 要解决的问题。</a:t>
+              <a:t>先说清楚这不是一个 Text-to-SQL 工作。Text-to-SQL 研究的是翻译：给定自然语言问题和数据库模式，生成一条 SQL，评价这条 SQL 对不对；它是无状态的，每个问题独立处理，不保留任何结果。MAVRA 不生成 SQL。它位于智能体与数据库之间，智能体对数据库的访问都经由它转发；它关注的是智能体在探索中获得的知识——营业额对应哪一列、两张表怎么连——如何持久化、如何共享、数据更新后是否仍然有效。下面是实验记录：题目只给“门店营业额”这个名称，无共享定义的智能体三次独立求解，两次选了折扣前的扩展销售额，错；一次选了净支付额，对。选哪一列是业务口径，模式里没有，Text-to-SQL 每次重新猜，答案不稳定。接入 MAVRA 后检索到共享的定义，三次都对，3 轮完成。所以两者处于不同层次：任何 Text-to-SQL 模型都可以作为用户智能体接在 MAVRA 上面。</a:t>
             </a:r>
             <a:endParaRPr lang="en-US" dirty="0"/>
           </a:p>
@@ -1190,7 +1280,7 @@
           <a:p>
             <a:r>
               <a:rPr lang="en-US" dirty="0"/>
-              <a:t>把 MAVRA 想成一个很认真的账本管理员，它做三件事。第一，记住规则成立的条件——比如每个订单号只能对应一笔有效销售。这对应论文的第一个问题：检查什么。第二，使用规则前检查条件，而且是在这条查询实际执行的那份数据快照上检查。对应第二个问题：何时检查。第三，条件不成立时，有唯一可靠的修法就修，否则禁止使用并通知。对应第三个问题：检查失败了怎么办。整篇论文可以理解为给这三个问题各设计了一个可靠的答案。下面这条逻辑链是整个汇报的主线。</a:t>
+              <a:t>先用一个示意的小账本。第一天三笔订单，规则“把每笔销售金额加起来”算出 600 元，正确。第二天订单 002 被更正为 250 元，数据仓库常见的做法是旧行不删、标记为非当前，再插入一行新的。沿用规则会把 200 和 250 都加进去，得到 850 元，正确答案是 650 元。注意：规则没有算错，是规则的前提“每个订单号只有一行”不再成立了。下半是实验里的真实记录：增量加载没问题；数据更正后沿用定义多算 137 万；重复加载让 9 月翻倍。三种更新都是普通 DML，表结构没变，查询不报错，智能体会非常自信地给出错误答案；而定义是共享的，一处失效所有智能体一起错。这就是 MAVRA 要解决的问题。</a:t>
             </a:r>
             <a:endParaRPr lang="en-US" dirty="0"/>
           </a:p>
@@ -1278,7 +1368,7 @@
           <a:p>
             <a:r>
               <a:rPr lang="en-US" dirty="0"/>
-              <a:t>原来智能体直接访问数据库，现在 MAVRA 放在中间，不替代智能体，也不替代数据库。智能体看到的是一组工具：列出表、描述表、查询连接路径、检索指标定义、执行 SQL。图中蓝色 1–5 是检索指标定义：智能体只说“营业额”，查询服务从共享记忆读出定义；表版本变了，缺少验证结果的条件交给维护执行，结果写入缓存，再返回有效修订 v2。橙色 6–8 是执行 SQL：智能体声明依赖 v2，执行前验证复用缓存，在同一快照上执行。紫色是学习：内置智能体学到的定义通过准入检查后写入。MAVRA 记四类记忆：有什么表什么列、表之间怎么连、学会过哪些计算规则、这些规则依赖的条件最近检查是否通过。</a:t>
+              <a:t>把 MAVRA 想成一个很认真的账本管理员，它做三件事。第一，记住规则成立的条件——比如每个订单号只能对应一笔有效销售。这对应论文的第一个问题：检查什么。第二，使用规则前检查条件，而且是在这条查询实际执行的那份数据快照上检查。对应第二个问题：何时检查。第三，条件不成立时，有唯一可靠的修法就修，否则禁止使用并通知。对应第三个问题：检查失败了怎么办。整篇论文可以理解为给这三个问题各设计了一个可靠的答案。下面这条逻辑链是整个汇报的主线。</a:t>
             </a:r>
             <a:endParaRPr lang="en-US" dirty="0"/>
           </a:p>
@@ -1366,7 +1456,7 @@
           <a:p>
             <a:r>
               <a:rPr lang="en-US" dirty="0"/>
-              <a:t>一条规则不是学到就直接相信，要走准入流程，像加入竞赛队要审核。内置智能体拿到一道给定业务口径的学习任务，写出 SQL，答案正确。这一步 MAVRA 自己不能凭空知道业务规则对不对：实验里用参考答案，实际公司里由负责这个指标的人确认一次。然后把零散的学习过程整理成一张知识卡，分两部分：给智能体看的“怎么算”，和 MAVRA 自己保管的“什么时候这样算是安全的”——验证条件、学习证据、表版本、使用者。再过七道检查。第七道尤其重要：只凭这张知识卡重新编译出的 SQL 必须得到同样答案，因为别的智能体读到的只有这张卡，原来的智能体心里知道要过滤而卡上没写，后来的智能体就会算错。七道都通过才发布 v1。</a:t>
+              <a:t>原来智能体直接访问数据库，现在 MAVRA 放在中间，不替代智能体，也不替代数据库。智能体看到的是一组工具：列出表、描述表、查询连接路径、检索指标定义、执行 SQL。图中蓝色 1–5 是检索指标定义：智能体只说“营业额”，查询服务从共享记忆读出定义；表版本变了，缺少验证结果的条件交给维护执行，结果写入缓存，再返回有效修订 v2。橙色 6–8 是执行 SQL：智能体声明依赖 v2，执行前验证复用缓存，在同一快照上执行。紫色是学习：内置智能体学到的定义通过准入检查后写入。MAVRA 记四类记忆：有什么表什么列、表之间怎么连、学会过哪些计算规则、这些规则依赖的条件最近检查是否通过。</a:t>
             </a:r>
             <a:endParaRPr lang="en-US" dirty="0"/>
           </a:p>
@@ -1454,7 +1544,7 @@
           <a:p>
             <a:r>
               <a:rPr lang="en-US" dirty="0"/>
-              <a:t>MAVRA 从定义里推出四类条件。粒度键唯一：每件事情只登记一次，检查行数是否等于不同键的数量，当然要在定义的过滤之下算。连接基数：连接其他表时不能把一行变两行，比如门店表里同一个门店出现两次，一笔 100 元就会被算成 200 元；所以连接“1”那一侧的键必须唯一。日期角色：一个日期键只能连出一个日期，而且要按定义指定的日期，销售日不能和退货日混。日期键完整性：关联不上日期的记录会从按月统计里消失，学习时有 1.03%，允许 0.1 个百分点的容差，突然变成 8% 就不正常。论文的充分性命题说：这四类条件都成立，规范 SQL 就把每笔业务事件恰好计一次。但它不保证一切，比如金额换了单位，行数和键都没变，发现不了——实验里的单位变化就是这个对照。</a:t>
+              <a:t>一条规则不是学到就直接相信，要走准入流程，像加入竞赛队要审核。内置智能体拿到一道给定业务口径的学习任务，写出 SQL，答案正确。这一步 MAVRA 自己不能凭空知道业务规则对不对：实验里用参考答案，实际公司里由负责这个指标的人确认一次。然后把零散的学习过程整理成一张知识卡，分两部分：给智能体看的“怎么算”，和 MAVRA 自己保管的“什么时候这样算是安全的”——验证条件、学习证据、表版本、使用者。再过七道检查。第七道尤其重要：只凭这张知识卡重新编译出的 SQL 必须得到同样答案，因为别的智能体读到的只有这张卡，原来的智能体心里知道要过滤而卡上没写，后来的智能体就会算错。七道都通过才发布 v1。</a:t>
             </a:r>
             <a:endParaRPr lang="en-US" dirty="0"/>
           </a:p>
@@ -1542,7 +1632,7 @@
           <a:p>
             <a:r>
               <a:rPr lang="en-US" dirty="0"/>
-              <a:t>100 个智能体每天都要查营业额，不能每问一次就把几百万行从头检查一遍。两个办法。一是给每张表盖版本章：9 点在版本 10 上验证通过并记下来；10 点另一个智能体来用，版本没变，直接复用；下午 2 点有写入，版本变成 11，旧结论不再适用，等有人用时再重新验证受影响的条件。版本必须可靠：由语句级触发器在写入事务内更新，看到写入就一定看到版本变化；PostgreSQL 自带的修改统计做不到这一点。二是惰性维护：更新后不立即重验所有规则，使用时只验相关的条件。但还有一个最容易被忽视的问题：10:00:00 检查通过，10:00:01 别人插入一条重复记录，10:00:02 执行查询就错了。检查正确不代表使用时还正确。MAVRA 用事务快照解决：在同一个可重复读的只读事务里读版本、验证条件、执行 SQL，相当于给账本拍一张照片，检查和计算都在这张照片上。引理 1 说明什么时候可以复用验证结论。实验里并发写入下 11,297 次使用没有一次在被破坏的数据上作答。</a:t>
+              <a:t>MAVRA 从定义里推出四类条件。粒度键唯一：每件事情只登记一次，检查行数是否等于不同键的数量，当然要在定义的过滤之下算。连接基数：连接其他表时不能把一行变两行，比如门店表里同一个门店出现两次，一笔 100 元就会被算成 200 元；所以连接“1”那一侧的键必须唯一。日期角色：一个日期键只能连出一个日期，而且要按定义指定的日期，销售日不能和退货日混。日期键完整性：关联不上日期的记录会从按月统计里消失，学习时有 1.03%，允许 0.1 个百分点的容差，突然变成 8% 就不正常。论文的充分性命题说：这四类条件都成立，规范 SQL 就把每笔业务事件恰好计一次。但它不保证一切，比如金额换了单位，行数和键都没变，发现不了——实验里的单位变化就是这个对照。</a:t>
             </a:r>
             <a:endParaRPr lang="en-US" dirty="0"/>
           </a:p>
@@ -1630,7 +1720,7 @@
           <a:p>
             <a:r>
               <a:rPr lang="en-US" dirty="0"/>
-              <a:t>上方是检索指标定义：名称匹配到“门店营业额”（电子品类的同名定义一并返回，由智能体按口径选择）；比较 store_sales 的表版本（14 → 15）；逐个条件查缓存：“粒度键唯一”电子品类刚验证过，复用；date_dim 未变，复用；“日期键完整性”在版本 15 上没有结果，执行验证并写入缓存；返回有效修订 v2。中间是验证结果缓存：按（条件，表版本）存储，写入者和复用步骤都标出来了。下方是执行 SQL：先检查声明的 v2 是否有效；再在查询快照上验证——期间又有更新，表版本已是 16，两个条件在快照内重新验证并写入缓存；最后在同一快照上执行，得到 1293.3 万。</a:t>
+              <a:t>100 个智能体每天都要查营业额，不能每问一次就把几百万行从头检查一遍。两个办法。一是给每张表盖版本章：9 点在版本 10 上验证通过并记下来；10 点另一个智能体来用，版本没变，直接复用；下午 2 点有写入，版本变成 11，旧结论不再适用，等有人用时再重新验证受影响的条件。版本必须可靠：由语句级触发器在写入事务内更新，看到写入就一定看到版本变化；PostgreSQL 自带的修改统计做不到这一点。二是惰性维护：更新后不立即重验所有规则，使用时只验相关的条件。但还有一个最容易被忽视的问题：10:00:00 检查通过，10:00:01 别人插入一条重复记录，10:00:02 执行查询就错了。检查正确不代表使用时还正确。MAVRA 用事务快照解决：在同一个可重复读的只读事务里读版本、验证条件、执行 SQL，相当于给账本拍一张照片，检查和计算都在这张照片上。引理 1 说明什么时候可以复用验证结论。实验里并发写入下 11,297 次使用没有一次在被破坏的数据上作答。</a:t>
             </a:r>
             <a:endParaRPr lang="en-US" dirty="0"/>
           </a:p>
@@ -1718,7 +1808,7 @@
           <a:p>
             <a:r>
               <a:rPr lang="en-US" dirty="0"/>
-              <a:t>回到订单 002。MAVRA 发现订单号重复，一行是旧记录，一行是当前记录。它去找一个过滤谓词：只保留 ss_is_current = 1，过滤后订单不再重复，总额 650 元。但不能看到一个像样的条件就用。候选必须满足两件事：过滤后每个键恰好一行；原来的键一个不丢——“只保留金额大于 200”也能去重，但 100 元的订单没了，这不叫修复。还要唯一：如果 is_current 和 is_backup 两个过滤都通过，表结构说不出哪份是业务事实，MAVRA 不擅自选，定义失效，交给人确认。宁可说不知道怎么安全地修，也不猜。修复通过结构检查之后还要考一次试：像换一种解法重做老师判过的那道题，答案必须一样。必须用当初那份数据，因为今天的数据已经变了，当初的 SQL 在上面同样过期，我们实际跑过：按当前数据比，正确的修复会被拒绝。通过后发布 v2，v1 失效。</a:t>
+              <a:t>上方是检索指标定义：名称匹配到“门店营业额”（电子品类的同名定义一并返回，由智能体按口径选择）；比较 store_sales 的表版本（14 → 15）；逐个条件查缓存：“粒度键唯一”电子品类刚验证过，复用；date_dim 未变，复用；“日期键完整性”在版本 15 上没有结果，执行验证并写入缓存；返回有效修订 v2。中间是验证结果缓存：按（条件，表版本）存储，写入者和复用步骤都标出来了。下方是执行 SQL：先检查声明的 v2 是否有效；再在查询快照上验证——期间又有更新，表版本已是 16，两个条件在快照内重新验证并写入缓存；最后在同一快照上执行，得到 1293.3 万。</a:t>
             </a:r>
             <a:endParaRPr lang="en-US" dirty="0"/>
           </a:p>
@@ -2531,6 +2621,2148 @@
                 <a:ea typeface="Microsoft YaHei" pitchFamily="34" charset="-122"/>
                 <a:cs typeface="Microsoft YaHei" pitchFamily="34" charset="-120"/>
               </a:rPr>
+              <a:t>检查失败了怎么办：唯一修复，按学习时刻回归，否则失效</a:t>
+            </a:r>
+            <a:endParaRPr lang="en-US" sz="2800" dirty="0"/>
+          </a:p>
+        </p:txBody>
+      </p:sp>
+      <p:sp>
+        <p:nvSpPr>
+          <p:cNvPr id="3" name="Text 1"/>
+          <p:cNvSpPr txBox="1"/>
+          <p:nvPr/>
+        </p:nvSpPr>
+        <p:spPr>
+          <a:xfrm>
+            <a:off x="548640" y="1005840"/>
+            <a:ext cx="5577840" cy="320040"/>
+          </a:xfrm>
+          <a:prstGeom prst="rect">
+            <a:avLst/>
+          </a:prstGeom>
+          <a:noFill/>
+          <a:ln/>
+        </p:spPr>
+        <p:txBody>
+          <a:bodyPr wrap="square" lIns="0" tIns="0" rIns="0" bIns="0" rtlCol="0" anchor="ctr"/>
+          <a:lstStyle/>
+          <a:p>
+            <a:pPr indent="0" marL="0">
+              <a:buNone/>
+            </a:pPr>
+            <a:r>
+              <a:rPr lang="en-US" sz="1500" b="1" dirty="0">
+                <a:solidFill>
+                  <a:srgbClr val="B5671A"/>
+                </a:solidFill>
+                <a:latin typeface="Microsoft YaHei" pitchFamily="34" charset="0"/>
+                <a:ea typeface="Microsoft YaHei" pitchFamily="34" charset="-122"/>
+                <a:cs typeface="Microsoft YaHei" pitchFamily="34" charset="-120"/>
+              </a:rPr>
+              <a:t>修复：找一个谓词，恢复“每个键一行”且不丢键</a:t>
+            </a:r>
+            <a:endParaRPr lang="en-US" sz="1500" dirty="0"/>
+          </a:p>
+        </p:txBody>
+      </p:sp>
+      <p:graphicFrame>
+        <p:nvGraphicFramePr>
+          <p:cNvPr id="11" name="Table 0"/>
+          <p:cNvGraphicFramePr>
+            <a:graphicFrameLocks noGrp="1"/>
+          </p:cNvGraphicFramePr>
+          <p:nvPr>
+            <p:extLst>
+              <p:ext uri="{D42A27DB-BD31-4B8C-83A1-F6EECF244321}">
+                <p14:modId xmlns:p14="http://schemas.microsoft.com/office/powerpoint/2010/main" val="1579011935"/>
+              </p:ext>
+            </p:extLst>
+          </p:nvPr>
+        </p:nvGraphicFramePr>
+        <p:xfrm>
+          <a:off x="548640" y="1325880"/>
+          <a:ext cx="5577840" cy="914400"/>
+        </p:xfrm>
+        <a:graphic>
+          <a:graphicData uri="http://schemas.openxmlformats.org/drawingml/2006/table">
+            <a:tbl>
+              <a:tblPr/>
+              <a:tblGrid>
+                <a:gridCol w="1371600"/>
+                <a:gridCol w="1463040"/>
+                <a:gridCol w="2743200"/>
+              </a:tblGrid>
+              <a:tr h="0">
+                <a:tc>
+                  <a:txBody>
+                    <a:bodyPr/>
+                    <a:lstStyle/>
+                    <a:p>
+                      <a:pPr indent="0" marL="0">
+                        <a:buNone/>
+                      </a:pPr>
+                      <a:r>
+                        <a:rPr lang="en-US" sz="1200" b="1" dirty="0">
+                          <a:solidFill>
+                            <a:srgbClr val="1F2A37"/>
+                          </a:solidFill>
+                          <a:latin typeface="Microsoft YaHei" pitchFamily="34" charset="0"/>
+                          <a:ea typeface="Microsoft YaHei" pitchFamily="34" charset="-122"/>
+                          <a:cs typeface="Microsoft YaHei" pitchFamily="34" charset="-120"/>
+                        </a:rPr>
+                        <a:t>订单号</a:t>
+                      </a:r>
+                      <a:endParaRPr lang="en-US" sz="1200" dirty="0">
+                        <a:latin typeface="Microsoft YaHei" charset="0"/>
+                        <a:ea typeface="Microsoft YaHei" charset="0"/>
+                        <a:cs typeface="Microsoft YaHei" charset="0"/>
+                      </a:endParaRPr>
+                    </a:p>
+                  </a:txBody>
+                  <a:tcPr marL="91440" marR="91440" marT="54864" marB="54864" anchor="ctr">
+                    <a:lnL w="12700" cap="flat" cmpd="sng" algn="ctr">
+                      <a:solidFill>
+                        <a:srgbClr val="D5DBE3"/>
+                      </a:solidFill>
+                      <a:prstDash val="solid"/>
+                      <a:round/>
+                      <a:headEnd type="none" w="med" len="med"/>
+                      <a:tailEnd type="none" w="med" len="med"/>
+                    </a:lnL>
+                    <a:lnR w="12700" cap="flat" cmpd="sng" algn="ctr">
+                      <a:solidFill>
+                        <a:srgbClr val="D5DBE3"/>
+                      </a:solidFill>
+                      <a:prstDash val="solid"/>
+                      <a:round/>
+                      <a:headEnd type="none" w="med" len="med"/>
+                      <a:tailEnd type="none" w="med" len="med"/>
+                    </a:lnR>
+                    <a:lnT w="12700" cap="flat" cmpd="sng" algn="ctr">
+                      <a:solidFill>
+                        <a:srgbClr val="D5DBE3"/>
+                      </a:solidFill>
+                      <a:prstDash val="solid"/>
+                      <a:round/>
+                      <a:headEnd type="none" w="med" len="med"/>
+                      <a:tailEnd type="none" w="med" len="med"/>
+                    </a:lnT>
+                    <a:lnB w="12700" cap="flat" cmpd="sng" algn="ctr">
+                      <a:solidFill>
+                        <a:srgbClr val="D5DBE3"/>
+                      </a:solidFill>
+                      <a:prstDash val="solid"/>
+                      <a:round/>
+                      <a:headEnd type="none" w="med" len="med"/>
+                      <a:tailEnd type="none" w="med" len="med"/>
+                    </a:lnB>
+                    <a:solidFill>
+                      <a:srgbClr val="F1F3F6"/>
+                    </a:solidFill>
+                  </a:tcPr>
+                </a:tc>
+                <a:tc>
+                  <a:txBody>
+                    <a:bodyPr/>
+                    <a:lstStyle/>
+                    <a:p>
+                      <a:pPr indent="0" marL="0">
+                        <a:buNone/>
+                      </a:pPr>
+                      <a:r>
+                        <a:rPr lang="en-US" sz="1200" b="1" dirty="0">
+                          <a:solidFill>
+                            <a:srgbClr val="1F2A37"/>
+                          </a:solidFill>
+                          <a:latin typeface="Microsoft YaHei" pitchFamily="34" charset="0"/>
+                          <a:ea typeface="Microsoft YaHei" pitchFamily="34" charset="-122"/>
+                          <a:cs typeface="Microsoft YaHei" pitchFamily="34" charset="-120"/>
+                        </a:rPr>
+                        <a:t>金额</a:t>
+                      </a:r>
+                      <a:endParaRPr lang="en-US" sz="1200" dirty="0">
+                        <a:latin typeface="Microsoft YaHei" charset="0"/>
+                        <a:ea typeface="Microsoft YaHei" charset="0"/>
+                        <a:cs typeface="Microsoft YaHei" charset="0"/>
+                      </a:endParaRPr>
+                    </a:p>
+                  </a:txBody>
+                  <a:tcPr marL="91440" marR="91440" marT="54864" marB="54864" anchor="ctr">
+                    <a:lnL w="12700" cap="flat" cmpd="sng" algn="ctr">
+                      <a:solidFill>
+                        <a:srgbClr val="D5DBE3"/>
+                      </a:solidFill>
+                      <a:prstDash val="solid"/>
+                      <a:round/>
+                      <a:headEnd type="none" w="med" len="med"/>
+                      <a:tailEnd type="none" w="med" len="med"/>
+                    </a:lnL>
+                    <a:lnR w="12700" cap="flat" cmpd="sng" algn="ctr">
+                      <a:solidFill>
+                        <a:srgbClr val="D5DBE3"/>
+                      </a:solidFill>
+                      <a:prstDash val="solid"/>
+                      <a:round/>
+                      <a:headEnd type="none" w="med" len="med"/>
+                      <a:tailEnd type="none" w="med" len="med"/>
+                    </a:lnR>
+                    <a:lnT w="12700" cap="flat" cmpd="sng" algn="ctr">
+                      <a:solidFill>
+                        <a:srgbClr val="D5DBE3"/>
+                      </a:solidFill>
+                      <a:prstDash val="solid"/>
+                      <a:round/>
+                      <a:headEnd type="none" w="med" len="med"/>
+                      <a:tailEnd type="none" w="med" len="med"/>
+                    </a:lnT>
+                    <a:lnB w="12700" cap="flat" cmpd="sng" algn="ctr">
+                      <a:solidFill>
+                        <a:srgbClr val="D5DBE3"/>
+                      </a:solidFill>
+                      <a:prstDash val="solid"/>
+                      <a:round/>
+                      <a:headEnd type="none" w="med" len="med"/>
+                      <a:tailEnd type="none" w="med" len="med"/>
+                    </a:lnB>
+                    <a:solidFill>
+                      <a:srgbClr val="F1F3F6"/>
+                    </a:solidFill>
+                  </a:tcPr>
+                </a:tc>
+                <a:tc>
+                  <a:txBody>
+                    <a:bodyPr/>
+                    <a:lstStyle/>
+                    <a:p>
+                      <a:pPr indent="0" marL="0">
+                        <a:buNone/>
+                      </a:pPr>
+                      <a:r>
+                        <a:rPr lang="en-US" sz="1200" b="1" dirty="0">
+                          <a:solidFill>
+                            <a:srgbClr val="1F2A37"/>
+                          </a:solidFill>
+                          <a:latin typeface="Microsoft YaHei" pitchFamily="34" charset="0"/>
+                          <a:ea typeface="Microsoft YaHei" pitchFamily="34" charset="-122"/>
+                          <a:cs typeface="Microsoft YaHei" pitchFamily="34" charset="-120"/>
+                        </a:rPr>
+                        <a:t>ss_is_current</a:t>
+                      </a:r>
+                      <a:endParaRPr lang="en-US" sz="1200" dirty="0">
+                        <a:latin typeface="Microsoft YaHei" charset="0"/>
+                        <a:ea typeface="Microsoft YaHei" charset="0"/>
+                        <a:cs typeface="Microsoft YaHei" charset="0"/>
+                      </a:endParaRPr>
+                    </a:p>
+                  </a:txBody>
+                  <a:tcPr marL="91440" marR="91440" marT="54864" marB="54864" anchor="ctr">
+                    <a:lnL w="12700" cap="flat" cmpd="sng" algn="ctr">
+                      <a:solidFill>
+                        <a:srgbClr val="D5DBE3"/>
+                      </a:solidFill>
+                      <a:prstDash val="solid"/>
+                      <a:round/>
+                      <a:headEnd type="none" w="med" len="med"/>
+                      <a:tailEnd type="none" w="med" len="med"/>
+                    </a:lnL>
+                    <a:lnR w="12700" cap="flat" cmpd="sng" algn="ctr">
+                      <a:solidFill>
+                        <a:srgbClr val="D5DBE3"/>
+                      </a:solidFill>
+                      <a:prstDash val="solid"/>
+                      <a:round/>
+                      <a:headEnd type="none" w="med" len="med"/>
+                      <a:tailEnd type="none" w="med" len="med"/>
+                    </a:lnR>
+                    <a:lnT w="12700" cap="flat" cmpd="sng" algn="ctr">
+                      <a:solidFill>
+                        <a:srgbClr val="D5DBE3"/>
+                      </a:solidFill>
+                      <a:prstDash val="solid"/>
+                      <a:round/>
+                      <a:headEnd type="none" w="med" len="med"/>
+                      <a:tailEnd type="none" w="med" len="med"/>
+                    </a:lnT>
+                    <a:lnB w="12700" cap="flat" cmpd="sng" algn="ctr">
+                      <a:solidFill>
+                        <a:srgbClr val="D5DBE3"/>
+                      </a:solidFill>
+                      <a:prstDash val="solid"/>
+                      <a:round/>
+                      <a:headEnd type="none" w="med" len="med"/>
+                      <a:tailEnd type="none" w="med" len="med"/>
+                    </a:lnB>
+                    <a:solidFill>
+                      <a:srgbClr val="F1F3F6"/>
+                    </a:solidFill>
+                  </a:tcPr>
+                </a:tc>
+              </a:tr>
+              <a:tr h="0">
+                <a:tc>
+                  <a:txBody>
+                    <a:bodyPr/>
+                    <a:lstStyle/>
+                    <a:p>
+                      <a:pPr indent="0" marL="0">
+                        <a:buNone/>
+                      </a:pPr>
+                      <a:r>
+                        <a:rPr lang="en-US" sz="1200" dirty="0">
+                          <a:solidFill>
+                            <a:srgbClr val="1F2A37"/>
+                          </a:solidFill>
+                          <a:latin typeface="Microsoft YaHei" pitchFamily="34" charset="0"/>
+                          <a:ea typeface="Microsoft YaHei" pitchFamily="34" charset="-122"/>
+                          <a:cs typeface="Microsoft YaHei" pitchFamily="34" charset="-120"/>
+                        </a:rPr>
+                        <a:t>001</a:t>
+                      </a:r>
+                      <a:endParaRPr lang="en-US" sz="1200" dirty="0">
+                        <a:latin typeface="Microsoft YaHei" charset="0"/>
+                        <a:ea typeface="Microsoft YaHei" charset="0"/>
+                        <a:cs typeface="Microsoft YaHei" charset="0"/>
+                      </a:endParaRPr>
+                    </a:p>
+                  </a:txBody>
+                  <a:tcPr marL="91440" marR="91440" marT="54864" marB="54864" anchor="ctr">
+                    <a:lnL w="12700" cap="flat" cmpd="sng" algn="ctr">
+                      <a:solidFill>
+                        <a:srgbClr val="D5DBE3"/>
+                      </a:solidFill>
+                      <a:prstDash val="solid"/>
+                      <a:round/>
+                      <a:headEnd type="none" w="med" len="med"/>
+                      <a:tailEnd type="none" w="med" len="med"/>
+                    </a:lnL>
+                    <a:lnR w="12700" cap="flat" cmpd="sng" algn="ctr">
+                      <a:solidFill>
+                        <a:srgbClr val="D5DBE3"/>
+                      </a:solidFill>
+                      <a:prstDash val="solid"/>
+                      <a:round/>
+                      <a:headEnd type="none" w="med" len="med"/>
+                      <a:tailEnd type="none" w="med" len="med"/>
+                    </a:lnR>
+                    <a:lnT w="12700" cap="flat" cmpd="sng" algn="ctr">
+                      <a:solidFill>
+                        <a:srgbClr val="D5DBE3"/>
+                      </a:solidFill>
+                      <a:prstDash val="solid"/>
+                      <a:round/>
+                      <a:headEnd type="none" w="med" len="med"/>
+                      <a:tailEnd type="none" w="med" len="med"/>
+                    </a:lnT>
+                    <a:lnB w="12700" cap="flat" cmpd="sng" algn="ctr">
+                      <a:solidFill>
+                        <a:srgbClr val="D5DBE3"/>
+                      </a:solidFill>
+                      <a:prstDash val="solid"/>
+                      <a:round/>
+                      <a:headEnd type="none" w="med" len="med"/>
+                      <a:tailEnd type="none" w="med" len="med"/>
+                    </a:lnB>
+                  </a:tcPr>
+                </a:tc>
+                <a:tc>
+                  <a:txBody>
+                    <a:bodyPr/>
+                    <a:lstStyle/>
+                    <a:p>
+                      <a:pPr indent="0" marL="0">
+                        <a:buNone/>
+                      </a:pPr>
+                      <a:r>
+                        <a:rPr lang="en-US" sz="1200" dirty="0">
+                          <a:solidFill>
+                            <a:srgbClr val="1F2A37"/>
+                          </a:solidFill>
+                          <a:latin typeface="Microsoft YaHei" pitchFamily="34" charset="0"/>
+                          <a:ea typeface="Microsoft YaHei" pitchFamily="34" charset="-122"/>
+                          <a:cs typeface="Microsoft YaHei" pitchFamily="34" charset="-120"/>
+                        </a:rPr>
+                        <a:t>100 元</a:t>
+                      </a:r>
+                      <a:endParaRPr lang="en-US" sz="1200" dirty="0">
+                        <a:latin typeface="Microsoft YaHei" charset="0"/>
+                        <a:ea typeface="Microsoft YaHei" charset="0"/>
+                        <a:cs typeface="Microsoft YaHei" charset="0"/>
+                      </a:endParaRPr>
+                    </a:p>
+                  </a:txBody>
+                  <a:tcPr marL="91440" marR="91440" marT="54864" marB="54864" anchor="ctr">
+                    <a:lnL w="12700" cap="flat" cmpd="sng" algn="ctr">
+                      <a:solidFill>
+                        <a:srgbClr val="D5DBE3"/>
+                      </a:solidFill>
+                      <a:prstDash val="solid"/>
+                      <a:round/>
+                      <a:headEnd type="none" w="med" len="med"/>
+                      <a:tailEnd type="none" w="med" len="med"/>
+                    </a:lnL>
+                    <a:lnR w="12700" cap="flat" cmpd="sng" algn="ctr">
+                      <a:solidFill>
+                        <a:srgbClr val="D5DBE3"/>
+                      </a:solidFill>
+                      <a:prstDash val="solid"/>
+                      <a:round/>
+                      <a:headEnd type="none" w="med" len="med"/>
+                      <a:tailEnd type="none" w="med" len="med"/>
+                    </a:lnR>
+                    <a:lnT w="12700" cap="flat" cmpd="sng" algn="ctr">
+                      <a:solidFill>
+                        <a:srgbClr val="D5DBE3"/>
+                      </a:solidFill>
+                      <a:prstDash val="solid"/>
+                      <a:round/>
+                      <a:headEnd type="none" w="med" len="med"/>
+                      <a:tailEnd type="none" w="med" len="med"/>
+                    </a:lnT>
+                    <a:lnB w="12700" cap="flat" cmpd="sng" algn="ctr">
+                      <a:solidFill>
+                        <a:srgbClr val="D5DBE3"/>
+                      </a:solidFill>
+                      <a:prstDash val="solid"/>
+                      <a:round/>
+                      <a:headEnd type="none" w="med" len="med"/>
+                      <a:tailEnd type="none" w="med" len="med"/>
+                    </a:lnB>
+                  </a:tcPr>
+                </a:tc>
+                <a:tc>
+                  <a:txBody>
+                    <a:bodyPr/>
+                    <a:lstStyle/>
+                    <a:p>
+                      <a:pPr indent="0" marL="0">
+                        <a:buNone/>
+                      </a:pPr>
+                      <a:r>
+                        <a:rPr lang="en-US" sz="1200" dirty="0">
+                          <a:solidFill>
+                            <a:srgbClr val="1F2A37"/>
+                          </a:solidFill>
+                          <a:latin typeface="Microsoft YaHei" pitchFamily="34" charset="0"/>
+                          <a:ea typeface="Microsoft YaHei" pitchFamily="34" charset="-122"/>
+                          <a:cs typeface="Microsoft YaHei" pitchFamily="34" charset="-120"/>
+                        </a:rPr>
+                        <a:t>1</a:t>
+                      </a:r>
+                      <a:endParaRPr lang="en-US" sz="1200" dirty="0">
+                        <a:latin typeface="Microsoft YaHei" charset="0"/>
+                        <a:ea typeface="Microsoft YaHei" charset="0"/>
+                        <a:cs typeface="Microsoft YaHei" charset="0"/>
+                      </a:endParaRPr>
+                    </a:p>
+                  </a:txBody>
+                  <a:tcPr marL="91440" marR="91440" marT="54864" marB="54864" anchor="ctr">
+                    <a:lnL w="12700" cap="flat" cmpd="sng" algn="ctr">
+                      <a:solidFill>
+                        <a:srgbClr val="D5DBE3"/>
+                      </a:solidFill>
+                      <a:prstDash val="solid"/>
+                      <a:round/>
+                      <a:headEnd type="none" w="med" len="med"/>
+                      <a:tailEnd type="none" w="med" len="med"/>
+                    </a:lnL>
+                    <a:lnR w="12700" cap="flat" cmpd="sng" algn="ctr">
+                      <a:solidFill>
+                        <a:srgbClr val="D5DBE3"/>
+                      </a:solidFill>
+                      <a:prstDash val="solid"/>
+                      <a:round/>
+                      <a:headEnd type="none" w="med" len="med"/>
+                      <a:tailEnd type="none" w="med" len="med"/>
+                    </a:lnR>
+                    <a:lnT w="12700" cap="flat" cmpd="sng" algn="ctr">
+                      <a:solidFill>
+                        <a:srgbClr val="D5DBE3"/>
+                      </a:solidFill>
+                      <a:prstDash val="solid"/>
+                      <a:round/>
+                      <a:headEnd type="none" w="med" len="med"/>
+                      <a:tailEnd type="none" w="med" len="med"/>
+                    </a:lnT>
+                    <a:lnB w="12700" cap="flat" cmpd="sng" algn="ctr">
+                      <a:solidFill>
+                        <a:srgbClr val="D5DBE3"/>
+                      </a:solidFill>
+                      <a:prstDash val="solid"/>
+                      <a:round/>
+                      <a:headEnd type="none" w="med" len="med"/>
+                      <a:tailEnd type="none" w="med" len="med"/>
+                    </a:lnB>
+                  </a:tcPr>
+                </a:tc>
+              </a:tr>
+              <a:tr h="0">
+                <a:tc>
+                  <a:txBody>
+                    <a:bodyPr/>
+                    <a:lstStyle/>
+                    <a:p>
+                      <a:pPr indent="0" marL="0">
+                        <a:buNone/>
+                      </a:pPr>
+                      <a:r>
+                        <a:rPr lang="en-US" sz="1200" dirty="0">
+                          <a:solidFill>
+                            <a:srgbClr val="1F2A37"/>
+                          </a:solidFill>
+                          <a:latin typeface="Microsoft YaHei" pitchFamily="34" charset="0"/>
+                          <a:ea typeface="Microsoft YaHei" pitchFamily="34" charset="-122"/>
+                          <a:cs typeface="Microsoft YaHei" pitchFamily="34" charset="-120"/>
+                        </a:rPr>
+                        <a:t>002</a:t>
+                      </a:r>
+                      <a:endParaRPr lang="en-US" sz="1200" dirty="0">
+                        <a:latin typeface="Microsoft YaHei" charset="0"/>
+                        <a:ea typeface="Microsoft YaHei" charset="0"/>
+                        <a:cs typeface="Microsoft YaHei" charset="0"/>
+                      </a:endParaRPr>
+                    </a:p>
+                  </a:txBody>
+                  <a:tcPr marL="91440" marR="91440" marT="54864" marB="54864" anchor="ctr">
+                    <a:lnL w="12700" cap="flat" cmpd="sng" algn="ctr">
+                      <a:solidFill>
+                        <a:srgbClr val="D5DBE3"/>
+                      </a:solidFill>
+                      <a:prstDash val="solid"/>
+                      <a:round/>
+                      <a:headEnd type="none" w="med" len="med"/>
+                      <a:tailEnd type="none" w="med" len="med"/>
+                    </a:lnL>
+                    <a:lnR w="12700" cap="flat" cmpd="sng" algn="ctr">
+                      <a:solidFill>
+                        <a:srgbClr val="D5DBE3"/>
+                      </a:solidFill>
+                      <a:prstDash val="solid"/>
+                      <a:round/>
+                      <a:headEnd type="none" w="med" len="med"/>
+                      <a:tailEnd type="none" w="med" len="med"/>
+                    </a:lnR>
+                    <a:lnT w="12700" cap="flat" cmpd="sng" algn="ctr">
+                      <a:solidFill>
+                        <a:srgbClr val="D5DBE3"/>
+                      </a:solidFill>
+                      <a:prstDash val="solid"/>
+                      <a:round/>
+                      <a:headEnd type="none" w="med" len="med"/>
+                      <a:tailEnd type="none" w="med" len="med"/>
+                    </a:lnT>
+                    <a:lnB w="12700" cap="flat" cmpd="sng" algn="ctr">
+                      <a:solidFill>
+                        <a:srgbClr val="D5DBE3"/>
+                      </a:solidFill>
+                      <a:prstDash val="solid"/>
+                      <a:round/>
+                      <a:headEnd type="none" w="med" len="med"/>
+                      <a:tailEnd type="none" w="med" len="med"/>
+                    </a:lnB>
+                  </a:tcPr>
+                </a:tc>
+                <a:tc>
+                  <a:txBody>
+                    <a:bodyPr/>
+                    <a:lstStyle/>
+                    <a:p>
+                      <a:pPr indent="0" marL="0">
+                        <a:buNone/>
+                      </a:pPr>
+                      <a:r>
+                        <a:rPr lang="en-US" sz="1200" dirty="0">
+                          <a:solidFill>
+                            <a:srgbClr val="1F2A37"/>
+                          </a:solidFill>
+                          <a:latin typeface="Microsoft YaHei" pitchFamily="34" charset="0"/>
+                          <a:ea typeface="Microsoft YaHei" pitchFamily="34" charset="-122"/>
+                          <a:cs typeface="Microsoft YaHei" pitchFamily="34" charset="-120"/>
+                        </a:rPr>
+                        <a:t>250 元</a:t>
+                      </a:r>
+                      <a:endParaRPr lang="en-US" sz="1200" dirty="0">
+                        <a:latin typeface="Microsoft YaHei" charset="0"/>
+                        <a:ea typeface="Microsoft YaHei" charset="0"/>
+                        <a:cs typeface="Microsoft YaHei" charset="0"/>
+                      </a:endParaRPr>
+                    </a:p>
+                  </a:txBody>
+                  <a:tcPr marL="91440" marR="91440" marT="54864" marB="54864" anchor="ctr">
+                    <a:lnL w="12700" cap="flat" cmpd="sng" algn="ctr">
+                      <a:solidFill>
+                        <a:srgbClr val="D5DBE3"/>
+                      </a:solidFill>
+                      <a:prstDash val="solid"/>
+                      <a:round/>
+                      <a:headEnd type="none" w="med" len="med"/>
+                      <a:tailEnd type="none" w="med" len="med"/>
+                    </a:lnL>
+                    <a:lnR w="12700" cap="flat" cmpd="sng" algn="ctr">
+                      <a:solidFill>
+                        <a:srgbClr val="D5DBE3"/>
+                      </a:solidFill>
+                      <a:prstDash val="solid"/>
+                      <a:round/>
+                      <a:headEnd type="none" w="med" len="med"/>
+                      <a:tailEnd type="none" w="med" len="med"/>
+                    </a:lnR>
+                    <a:lnT w="12700" cap="flat" cmpd="sng" algn="ctr">
+                      <a:solidFill>
+                        <a:srgbClr val="D5DBE3"/>
+                      </a:solidFill>
+                      <a:prstDash val="solid"/>
+                      <a:round/>
+                      <a:headEnd type="none" w="med" len="med"/>
+                      <a:tailEnd type="none" w="med" len="med"/>
+                    </a:lnT>
+                    <a:lnB w="12700" cap="flat" cmpd="sng" algn="ctr">
+                      <a:solidFill>
+                        <a:srgbClr val="D5DBE3"/>
+                      </a:solidFill>
+                      <a:prstDash val="solid"/>
+                      <a:round/>
+                      <a:headEnd type="none" w="med" len="med"/>
+                      <a:tailEnd type="none" w="med" len="med"/>
+                    </a:lnB>
+                  </a:tcPr>
+                </a:tc>
+                <a:tc>
+                  <a:txBody>
+                    <a:bodyPr/>
+                    <a:lstStyle/>
+                    <a:p>
+                      <a:pPr indent="0" marL="0">
+                        <a:buNone/>
+                      </a:pPr>
+                      <a:r>
+                        <a:rPr lang="en-US" sz="1200" dirty="0">
+                          <a:solidFill>
+                            <a:srgbClr val="1F2A37"/>
+                          </a:solidFill>
+                          <a:latin typeface="Microsoft YaHei" pitchFamily="34" charset="0"/>
+                          <a:ea typeface="Microsoft YaHei" pitchFamily="34" charset="-122"/>
+                          <a:cs typeface="Microsoft YaHei" pitchFamily="34" charset="-120"/>
+                        </a:rPr>
+                        <a:t>1</a:t>
+                      </a:r>
+                      <a:endParaRPr lang="en-US" sz="1200" dirty="0">
+                        <a:latin typeface="Microsoft YaHei" charset="0"/>
+                        <a:ea typeface="Microsoft YaHei" charset="0"/>
+                        <a:cs typeface="Microsoft YaHei" charset="0"/>
+                      </a:endParaRPr>
+                    </a:p>
+                  </a:txBody>
+                  <a:tcPr marL="91440" marR="91440" marT="54864" marB="54864" anchor="ctr">
+                    <a:lnL w="12700" cap="flat" cmpd="sng" algn="ctr">
+                      <a:solidFill>
+                        <a:srgbClr val="D5DBE3"/>
+                      </a:solidFill>
+                      <a:prstDash val="solid"/>
+                      <a:round/>
+                      <a:headEnd type="none" w="med" len="med"/>
+                      <a:tailEnd type="none" w="med" len="med"/>
+                    </a:lnL>
+                    <a:lnR w="12700" cap="flat" cmpd="sng" algn="ctr">
+                      <a:solidFill>
+                        <a:srgbClr val="D5DBE3"/>
+                      </a:solidFill>
+                      <a:prstDash val="solid"/>
+                      <a:round/>
+                      <a:headEnd type="none" w="med" len="med"/>
+                      <a:tailEnd type="none" w="med" len="med"/>
+                    </a:lnR>
+                    <a:lnT w="12700" cap="flat" cmpd="sng" algn="ctr">
+                      <a:solidFill>
+                        <a:srgbClr val="D5DBE3"/>
+                      </a:solidFill>
+                      <a:prstDash val="solid"/>
+                      <a:round/>
+                      <a:headEnd type="none" w="med" len="med"/>
+                      <a:tailEnd type="none" w="med" len="med"/>
+                    </a:lnT>
+                    <a:lnB w="12700" cap="flat" cmpd="sng" algn="ctr">
+                      <a:solidFill>
+                        <a:srgbClr val="D5DBE3"/>
+                      </a:solidFill>
+                      <a:prstDash val="solid"/>
+                      <a:round/>
+                      <a:headEnd type="none" w="med" len="med"/>
+                      <a:tailEnd type="none" w="med" len="med"/>
+                    </a:lnB>
+                  </a:tcPr>
+                </a:tc>
+              </a:tr>
+              <a:tr h="0">
+                <a:tc>
+                  <a:txBody>
+                    <a:bodyPr/>
+                    <a:lstStyle/>
+                    <a:p>
+                      <a:pPr indent="0" marL="0">
+                        <a:buNone/>
+                      </a:pPr>
+                      <a:r>
+                        <a:rPr lang="en-US" sz="1200" dirty="0">
+                          <a:solidFill>
+                            <a:srgbClr val="1F2A37"/>
+                          </a:solidFill>
+                          <a:latin typeface="Microsoft YaHei" pitchFamily="34" charset="0"/>
+                          <a:ea typeface="Microsoft YaHei" pitchFamily="34" charset="-122"/>
+                          <a:cs typeface="Microsoft YaHei" pitchFamily="34" charset="-120"/>
+                        </a:rPr>
+                        <a:t>003</a:t>
+                      </a:r>
+                      <a:endParaRPr lang="en-US" sz="1200" dirty="0">
+                        <a:latin typeface="Microsoft YaHei" charset="0"/>
+                        <a:ea typeface="Microsoft YaHei" charset="0"/>
+                        <a:cs typeface="Microsoft YaHei" charset="0"/>
+                      </a:endParaRPr>
+                    </a:p>
+                  </a:txBody>
+                  <a:tcPr marL="91440" marR="91440" marT="54864" marB="54864" anchor="ctr">
+                    <a:lnL w="12700" cap="flat" cmpd="sng" algn="ctr">
+                      <a:solidFill>
+                        <a:srgbClr val="D5DBE3"/>
+                      </a:solidFill>
+                      <a:prstDash val="solid"/>
+                      <a:round/>
+                      <a:headEnd type="none" w="med" len="med"/>
+                      <a:tailEnd type="none" w="med" len="med"/>
+                    </a:lnL>
+                    <a:lnR w="12700" cap="flat" cmpd="sng" algn="ctr">
+                      <a:solidFill>
+                        <a:srgbClr val="D5DBE3"/>
+                      </a:solidFill>
+                      <a:prstDash val="solid"/>
+                      <a:round/>
+                      <a:headEnd type="none" w="med" len="med"/>
+                      <a:tailEnd type="none" w="med" len="med"/>
+                    </a:lnR>
+                    <a:lnT w="12700" cap="flat" cmpd="sng" algn="ctr">
+                      <a:solidFill>
+                        <a:srgbClr val="D5DBE3"/>
+                      </a:solidFill>
+                      <a:prstDash val="solid"/>
+                      <a:round/>
+                      <a:headEnd type="none" w="med" len="med"/>
+                      <a:tailEnd type="none" w="med" len="med"/>
+                    </a:lnT>
+                    <a:lnB w="12700" cap="flat" cmpd="sng" algn="ctr">
+                      <a:solidFill>
+                        <a:srgbClr val="D5DBE3"/>
+                      </a:solidFill>
+                      <a:prstDash val="solid"/>
+                      <a:round/>
+                      <a:headEnd type="none" w="med" len="med"/>
+                      <a:tailEnd type="none" w="med" len="med"/>
+                    </a:lnB>
+                  </a:tcPr>
+                </a:tc>
+                <a:tc>
+                  <a:txBody>
+                    <a:bodyPr/>
+                    <a:lstStyle/>
+                    <a:p>
+                      <a:pPr indent="0" marL="0">
+                        <a:buNone/>
+                      </a:pPr>
+                      <a:r>
+                        <a:rPr lang="en-US" sz="1200" dirty="0">
+                          <a:solidFill>
+                            <a:srgbClr val="1F2A37"/>
+                          </a:solidFill>
+                          <a:latin typeface="Microsoft YaHei" pitchFamily="34" charset="0"/>
+                          <a:ea typeface="Microsoft YaHei" pitchFamily="34" charset="-122"/>
+                          <a:cs typeface="Microsoft YaHei" pitchFamily="34" charset="-120"/>
+                        </a:rPr>
+                        <a:t>300 元</a:t>
+                      </a:r>
+                      <a:endParaRPr lang="en-US" sz="1200" dirty="0">
+                        <a:latin typeface="Microsoft YaHei" charset="0"/>
+                        <a:ea typeface="Microsoft YaHei" charset="0"/>
+                        <a:cs typeface="Microsoft YaHei" charset="0"/>
+                      </a:endParaRPr>
+                    </a:p>
+                  </a:txBody>
+                  <a:tcPr marL="91440" marR="91440" marT="54864" marB="54864" anchor="ctr">
+                    <a:lnL w="12700" cap="flat" cmpd="sng" algn="ctr">
+                      <a:solidFill>
+                        <a:srgbClr val="D5DBE3"/>
+                      </a:solidFill>
+                      <a:prstDash val="solid"/>
+                      <a:round/>
+                      <a:headEnd type="none" w="med" len="med"/>
+                      <a:tailEnd type="none" w="med" len="med"/>
+                    </a:lnL>
+                    <a:lnR w="12700" cap="flat" cmpd="sng" algn="ctr">
+                      <a:solidFill>
+                        <a:srgbClr val="D5DBE3"/>
+                      </a:solidFill>
+                      <a:prstDash val="solid"/>
+                      <a:round/>
+                      <a:headEnd type="none" w="med" len="med"/>
+                      <a:tailEnd type="none" w="med" len="med"/>
+                    </a:lnR>
+                    <a:lnT w="12700" cap="flat" cmpd="sng" algn="ctr">
+                      <a:solidFill>
+                        <a:srgbClr val="D5DBE3"/>
+                      </a:solidFill>
+                      <a:prstDash val="solid"/>
+                      <a:round/>
+                      <a:headEnd type="none" w="med" len="med"/>
+                      <a:tailEnd type="none" w="med" len="med"/>
+                    </a:lnT>
+                    <a:lnB w="12700" cap="flat" cmpd="sng" algn="ctr">
+                      <a:solidFill>
+                        <a:srgbClr val="D5DBE3"/>
+                      </a:solidFill>
+                      <a:prstDash val="solid"/>
+                      <a:round/>
+                      <a:headEnd type="none" w="med" len="med"/>
+                      <a:tailEnd type="none" w="med" len="med"/>
+                    </a:lnB>
+                  </a:tcPr>
+                </a:tc>
+                <a:tc>
+                  <a:txBody>
+                    <a:bodyPr/>
+                    <a:lstStyle/>
+                    <a:p>
+                      <a:pPr indent="0" marL="0">
+                        <a:buNone/>
+                      </a:pPr>
+                      <a:r>
+                        <a:rPr lang="en-US" sz="1200" dirty="0">
+                          <a:solidFill>
+                            <a:srgbClr val="1F2A37"/>
+                          </a:solidFill>
+                          <a:latin typeface="Microsoft YaHei" pitchFamily="34" charset="0"/>
+                          <a:ea typeface="Microsoft YaHei" pitchFamily="34" charset="-122"/>
+                          <a:cs typeface="Microsoft YaHei" pitchFamily="34" charset="-120"/>
+                        </a:rPr>
+                        <a:t>1</a:t>
+                      </a:r>
+                      <a:endParaRPr lang="en-US" sz="1200" dirty="0">
+                        <a:latin typeface="Microsoft YaHei" charset="0"/>
+                        <a:ea typeface="Microsoft YaHei" charset="0"/>
+                        <a:cs typeface="Microsoft YaHei" charset="0"/>
+                      </a:endParaRPr>
+                    </a:p>
+                  </a:txBody>
+                  <a:tcPr marL="91440" marR="91440" marT="54864" marB="54864" anchor="ctr">
+                    <a:lnL w="12700" cap="flat" cmpd="sng" algn="ctr">
+                      <a:solidFill>
+                        <a:srgbClr val="D5DBE3"/>
+                      </a:solidFill>
+                      <a:prstDash val="solid"/>
+                      <a:round/>
+                      <a:headEnd type="none" w="med" len="med"/>
+                      <a:tailEnd type="none" w="med" len="med"/>
+                    </a:lnL>
+                    <a:lnR w="12700" cap="flat" cmpd="sng" algn="ctr">
+                      <a:solidFill>
+                        <a:srgbClr val="D5DBE3"/>
+                      </a:solidFill>
+                      <a:prstDash val="solid"/>
+                      <a:round/>
+                      <a:headEnd type="none" w="med" len="med"/>
+                      <a:tailEnd type="none" w="med" len="med"/>
+                    </a:lnR>
+                    <a:lnT w="12700" cap="flat" cmpd="sng" algn="ctr">
+                      <a:solidFill>
+                        <a:srgbClr val="D5DBE3"/>
+                      </a:solidFill>
+                      <a:prstDash val="solid"/>
+                      <a:round/>
+                      <a:headEnd type="none" w="med" len="med"/>
+                      <a:tailEnd type="none" w="med" len="med"/>
+                    </a:lnT>
+                    <a:lnB w="12700" cap="flat" cmpd="sng" algn="ctr">
+                      <a:solidFill>
+                        <a:srgbClr val="D5DBE3"/>
+                      </a:solidFill>
+                      <a:prstDash val="solid"/>
+                      <a:round/>
+                      <a:headEnd type="none" w="med" len="med"/>
+                      <a:tailEnd type="none" w="med" len="med"/>
+                    </a:lnB>
+                  </a:tcPr>
+                </a:tc>
+              </a:tr>
+            </a:tbl>
+          </a:graphicData>
+        </a:graphic>
+      </p:graphicFrame>
+      <p:sp>
+        <p:nvSpPr>
+          <p:cNvPr id="5" name="Text 2"/>
+          <p:cNvSpPr txBox="1"/>
+          <p:nvPr/>
+        </p:nvSpPr>
+        <p:spPr>
+          <a:xfrm>
+            <a:off x="548640" y="2743200"/>
+            <a:ext cx="5577840" cy="274320"/>
+          </a:xfrm>
+          <a:prstGeom prst="rect">
+            <a:avLst/>
+          </a:prstGeom>
+          <a:noFill/>
+          <a:ln/>
+        </p:spPr>
+        <p:txBody>
+          <a:bodyPr wrap="square" lIns="0" tIns="0" rIns="0" bIns="0" rtlCol="0" anchor="ctr"/>
+          <a:lstStyle/>
+          <a:p>
+            <a:pPr indent="0" marL="0">
+              <a:buNone/>
+            </a:pPr>
+            <a:r>
+              <a:rPr lang="en-US" sz="1300" b="1" dirty="0">
+                <a:solidFill>
+                  <a:srgbClr val="2E7D4F"/>
+                </a:solidFill>
+                <a:latin typeface="Microsoft YaHei" pitchFamily="34" charset="0"/>
+                <a:ea typeface="Microsoft YaHei" pitchFamily="34" charset="-122"/>
+                <a:cs typeface="Microsoft YaHei" pitchFamily="34" charset="-120"/>
+              </a:rPr>
+              <a:t>过滤 ss_is_current = '1' 之后：650 元 ✓</a:t>
+            </a:r>
+            <a:endParaRPr lang="en-US" sz="1300" dirty="0"/>
+          </a:p>
+        </p:txBody>
+      </p:sp>
+      <p:sp>
+        <p:nvSpPr>
+          <p:cNvPr id="6" name="Text 3"/>
+          <p:cNvSpPr txBox="1"/>
+          <p:nvPr/>
+        </p:nvSpPr>
+        <p:spPr>
+          <a:xfrm>
+            <a:off x="548640" y="3108960"/>
+            <a:ext cx="5577840" cy="1645920"/>
+          </a:xfrm>
+          <a:prstGeom prst="rect">
+            <a:avLst/>
+          </a:prstGeom>
+          <a:noFill/>
+          <a:ln/>
+        </p:spPr>
+        <p:txBody>
+          <a:bodyPr wrap="square" lIns="0" tIns="0" rIns="0" bIns="0" rtlCol="0" anchor="t"/>
+          <a:lstStyle/>
+          <a:p>
+            <a:pPr marL="342900" indent="-342900">
+              <a:spcAft>
+                <a:spcPts val="400"/>
+              </a:spcAft>
+              <a:buSzPct val="100000"/>
+              <a:buChar char="•"/>
+            </a:pPr>
+            <a:r>
+              <a:rPr lang="en-US" sz="1200" dirty="0">
+                <a:solidFill>
+                  <a:srgbClr val="1F2A37"/>
+                </a:solidFill>
+                <a:latin typeface="Microsoft YaHei" pitchFamily="34" charset="0"/>
+                <a:ea typeface="Microsoft YaHei" pitchFamily="34" charset="-122"/>
+                <a:cs typeface="Microsoft YaHei" pitchFamily="34" charset="-120"/>
+              </a:rPr>
+              <a:t>修复搜索在低基数列上枚举等值谓词，候选必须同时满足：过滤后每个键恰好一行；原有的键一个不丢（“只保留金额 &gt; 200”能去重，但丢了订单 001，不算修复）</a:t>
+            </a:r>
+            <a:endParaRPr lang="en-US" sz="1200" dirty="0"/>
+          </a:p>
+          <a:p>
+            <a:pPr marL="342900" indent="-342900">
+              <a:spcAft>
+                <a:spcPts val="400"/>
+              </a:spcAft>
+              <a:buSzPct val="100000"/>
+              <a:buChar char="•"/>
+            </a:pPr>
+            <a:r>
+              <a:rPr lang="en-US" sz="1200" dirty="0">
+                <a:solidFill>
+                  <a:srgbClr val="1F2A37"/>
+                </a:solidFill>
+                <a:latin typeface="Microsoft YaHei" pitchFamily="34" charset="0"/>
+                <a:ea typeface="Microsoft YaHei" pitchFamily="34" charset="-122"/>
+                <a:cs typeface="Microsoft YaHei" pitchFamily="34" charset="-120"/>
+              </a:rPr>
+              <a:t>唯一性：若 is_current = 1 与 is_backup = 1 都通过检查，表结构说不出哪一份是业务事实——不擅自选择，定义失效并交给人确认（实验中的“备份副本”）</a:t>
+            </a:r>
+            <a:endParaRPr lang="en-US" sz="1200" dirty="0"/>
+          </a:p>
+        </p:txBody>
+      </p:sp>
+      <p:sp>
+        <p:nvSpPr>
+          <p:cNvPr id="7" name="Text 4"/>
+          <p:cNvSpPr txBox="1"/>
+          <p:nvPr/>
+        </p:nvSpPr>
+        <p:spPr>
+          <a:xfrm>
+            <a:off x="6446520" y="1005840"/>
+            <a:ext cx="5196535" cy="320040"/>
+          </a:xfrm>
+          <a:prstGeom prst="rect">
+            <a:avLst/>
+          </a:prstGeom>
+          <a:noFill/>
+          <a:ln/>
+        </p:spPr>
+        <p:txBody>
+          <a:bodyPr wrap="square" lIns="0" tIns="0" rIns="0" bIns="0" rtlCol="0" anchor="ctr"/>
+          <a:lstStyle/>
+          <a:p>
+            <a:pPr indent="0" marL="0">
+              <a:buNone/>
+            </a:pPr>
+            <a:r>
+              <a:rPr lang="en-US" sz="1500" b="1" dirty="0">
+                <a:solidFill>
+                  <a:srgbClr val="1D5BA6"/>
+                </a:solidFill>
+                <a:latin typeface="Microsoft YaHei" pitchFamily="34" charset="0"/>
+                <a:ea typeface="Microsoft YaHei" pitchFamily="34" charset="-122"/>
+                <a:cs typeface="Microsoft YaHei" pitchFamily="34" charset="-120"/>
+              </a:rPr>
+              <a:t>回归测试：新定义要在学习时的数据上复现当初的答案</a:t>
+            </a:r>
+            <a:endParaRPr lang="en-US" sz="1500" dirty="0"/>
+          </a:p>
+        </p:txBody>
+      </p:sp>
+      <p:graphicFrame>
+        <p:nvGraphicFramePr>
+          <p:cNvPr id="21" name="Table 1"/>
+          <p:cNvGraphicFramePr>
+            <a:graphicFrameLocks noGrp="1"/>
+          </p:cNvGraphicFramePr>
+          <p:nvPr>
+            <p:extLst>
+              <p:ext uri="{D42A27DB-BD31-4B8C-83A1-F6EECF244321}">
+                <p14:modId xmlns:p14="http://schemas.microsoft.com/office/powerpoint/2010/main" val="1579011935"/>
+              </p:ext>
+            </p:extLst>
+          </p:nvPr>
+        </p:nvGraphicFramePr>
+        <p:xfrm>
+          <a:off x="6446520" y="1325880"/>
+          <a:ext cx="5196535" cy="914400"/>
+        </p:xfrm>
+        <a:graphic>
+          <a:graphicData uri="http://schemas.openxmlformats.org/drawingml/2006/table">
+            <a:tbl>
+              <a:tblPr/>
+              <a:tblGrid>
+                <a:gridCol w="1463040"/>
+                <a:gridCol w="1143000"/>
+                <a:gridCol w="1143000"/>
+                <a:gridCol w="1447495"/>
+              </a:tblGrid>
+              <a:tr h="0">
+                <a:tc>
+                  <a:txBody>
+                    <a:bodyPr/>
+                    <a:lstStyle/>
+                    <a:p>
+                      <a:pPr indent="0" marL="0">
+                        <a:buNone/>
+                      </a:pPr>
+                      <a:r>
+                        <a:rPr lang="en-US" sz="1200" b="1" dirty="0">
+                          <a:solidFill>
+                            <a:srgbClr val="1F2A37"/>
+                          </a:solidFill>
+                          <a:latin typeface="Microsoft YaHei" pitchFamily="34" charset="0"/>
+                          <a:ea typeface="Microsoft YaHei" pitchFamily="34" charset="-122"/>
+                          <a:cs typeface="Microsoft YaHei" pitchFamily="34" charset="-120"/>
+                        </a:rPr>
+                        <a:t>比较所用的数据</a:t>
+                      </a:r>
+                      <a:endParaRPr lang="en-US" sz="1200" dirty="0">
+                        <a:latin typeface="Microsoft YaHei" charset="0"/>
+                        <a:ea typeface="Microsoft YaHei" charset="0"/>
+                        <a:cs typeface="Microsoft YaHei" charset="0"/>
+                      </a:endParaRPr>
+                    </a:p>
+                  </a:txBody>
+                  <a:tcPr marL="91440" marR="91440" marT="54864" marB="54864" anchor="ctr">
+                    <a:lnL w="12700" cap="flat" cmpd="sng" algn="ctr">
+                      <a:solidFill>
+                        <a:srgbClr val="D5DBE3"/>
+                      </a:solidFill>
+                      <a:prstDash val="solid"/>
+                      <a:round/>
+                      <a:headEnd type="none" w="med" len="med"/>
+                      <a:tailEnd type="none" w="med" len="med"/>
+                    </a:lnL>
+                    <a:lnR w="12700" cap="flat" cmpd="sng" algn="ctr">
+                      <a:solidFill>
+                        <a:srgbClr val="D5DBE3"/>
+                      </a:solidFill>
+                      <a:prstDash val="solid"/>
+                      <a:round/>
+                      <a:headEnd type="none" w="med" len="med"/>
+                      <a:tailEnd type="none" w="med" len="med"/>
+                    </a:lnR>
+                    <a:lnT w="12700" cap="flat" cmpd="sng" algn="ctr">
+                      <a:solidFill>
+                        <a:srgbClr val="D5DBE3"/>
+                      </a:solidFill>
+                      <a:prstDash val="solid"/>
+                      <a:round/>
+                      <a:headEnd type="none" w="med" len="med"/>
+                      <a:tailEnd type="none" w="med" len="med"/>
+                    </a:lnT>
+                    <a:lnB w="12700" cap="flat" cmpd="sng" algn="ctr">
+                      <a:solidFill>
+                        <a:srgbClr val="D5DBE3"/>
+                      </a:solidFill>
+                      <a:prstDash val="solid"/>
+                      <a:round/>
+                      <a:headEnd type="none" w="med" len="med"/>
+                      <a:tailEnd type="none" w="med" len="med"/>
+                    </a:lnB>
+                    <a:solidFill>
+                      <a:srgbClr val="F1F3F6"/>
+                    </a:solidFill>
+                  </a:tcPr>
+                </a:tc>
+                <a:tc>
+                  <a:txBody>
+                    <a:bodyPr/>
+                    <a:lstStyle/>
+                    <a:p>
+                      <a:pPr indent="0" marL="0">
+                        <a:buNone/>
+                      </a:pPr>
+                      <a:r>
+                        <a:rPr lang="en-US" sz="1200" b="1" dirty="0">
+                          <a:solidFill>
+                            <a:srgbClr val="1F2A37"/>
+                          </a:solidFill>
+                          <a:latin typeface="Microsoft YaHei" pitchFamily="34" charset="0"/>
+                          <a:ea typeface="Microsoft YaHei" pitchFamily="34" charset="-122"/>
+                          <a:cs typeface="Microsoft YaHei" pitchFamily="34" charset="-120"/>
+                        </a:rPr>
+                        <a:t>学习时的 SQL</a:t>
+                      </a:r>
+                      <a:endParaRPr lang="en-US" sz="1200" dirty="0">
+                        <a:latin typeface="Microsoft YaHei" charset="0"/>
+                        <a:ea typeface="Microsoft YaHei" charset="0"/>
+                        <a:cs typeface="Microsoft YaHei" charset="0"/>
+                      </a:endParaRPr>
+                    </a:p>
+                  </a:txBody>
+                  <a:tcPr marL="91440" marR="91440" marT="54864" marB="54864" anchor="ctr">
+                    <a:lnL w="12700" cap="flat" cmpd="sng" algn="ctr">
+                      <a:solidFill>
+                        <a:srgbClr val="D5DBE3"/>
+                      </a:solidFill>
+                      <a:prstDash val="solid"/>
+                      <a:round/>
+                      <a:headEnd type="none" w="med" len="med"/>
+                      <a:tailEnd type="none" w="med" len="med"/>
+                    </a:lnL>
+                    <a:lnR w="12700" cap="flat" cmpd="sng" algn="ctr">
+                      <a:solidFill>
+                        <a:srgbClr val="D5DBE3"/>
+                      </a:solidFill>
+                      <a:prstDash val="solid"/>
+                      <a:round/>
+                      <a:headEnd type="none" w="med" len="med"/>
+                      <a:tailEnd type="none" w="med" len="med"/>
+                    </a:lnR>
+                    <a:lnT w="12700" cap="flat" cmpd="sng" algn="ctr">
+                      <a:solidFill>
+                        <a:srgbClr val="D5DBE3"/>
+                      </a:solidFill>
+                      <a:prstDash val="solid"/>
+                      <a:round/>
+                      <a:headEnd type="none" w="med" len="med"/>
+                      <a:tailEnd type="none" w="med" len="med"/>
+                    </a:lnT>
+                    <a:lnB w="12700" cap="flat" cmpd="sng" algn="ctr">
+                      <a:solidFill>
+                        <a:srgbClr val="D5DBE3"/>
+                      </a:solidFill>
+                      <a:prstDash val="solid"/>
+                      <a:round/>
+                      <a:headEnd type="none" w="med" len="med"/>
+                      <a:tailEnd type="none" w="med" len="med"/>
+                    </a:lnB>
+                    <a:solidFill>
+                      <a:srgbClr val="F1F3F6"/>
+                    </a:solidFill>
+                  </a:tcPr>
+                </a:tc>
+                <a:tc>
+                  <a:txBody>
+                    <a:bodyPr/>
+                    <a:lstStyle/>
+                    <a:p>
+                      <a:pPr indent="0" marL="0">
+                        <a:buNone/>
+                      </a:pPr>
+                      <a:r>
+                        <a:rPr lang="en-US" sz="1200" b="1" dirty="0">
+                          <a:solidFill>
+                            <a:srgbClr val="1F2A37"/>
+                          </a:solidFill>
+                          <a:latin typeface="Microsoft YaHei" pitchFamily="34" charset="0"/>
+                          <a:ea typeface="Microsoft YaHei" pitchFamily="34" charset="-122"/>
+                          <a:cs typeface="Microsoft YaHei" pitchFamily="34" charset="-120"/>
+                        </a:rPr>
+                        <a:t>修复后的 v2</a:t>
+                      </a:r>
+                      <a:endParaRPr lang="en-US" sz="1200" dirty="0">
+                        <a:latin typeface="Microsoft YaHei" charset="0"/>
+                        <a:ea typeface="Microsoft YaHei" charset="0"/>
+                        <a:cs typeface="Microsoft YaHei" charset="0"/>
+                      </a:endParaRPr>
+                    </a:p>
+                  </a:txBody>
+                  <a:tcPr marL="91440" marR="91440" marT="54864" marB="54864" anchor="ctr">
+                    <a:lnL w="12700" cap="flat" cmpd="sng" algn="ctr">
+                      <a:solidFill>
+                        <a:srgbClr val="D5DBE3"/>
+                      </a:solidFill>
+                      <a:prstDash val="solid"/>
+                      <a:round/>
+                      <a:headEnd type="none" w="med" len="med"/>
+                      <a:tailEnd type="none" w="med" len="med"/>
+                    </a:lnL>
+                    <a:lnR w="12700" cap="flat" cmpd="sng" algn="ctr">
+                      <a:solidFill>
+                        <a:srgbClr val="D5DBE3"/>
+                      </a:solidFill>
+                      <a:prstDash val="solid"/>
+                      <a:round/>
+                      <a:headEnd type="none" w="med" len="med"/>
+                      <a:tailEnd type="none" w="med" len="med"/>
+                    </a:lnR>
+                    <a:lnT w="12700" cap="flat" cmpd="sng" algn="ctr">
+                      <a:solidFill>
+                        <a:srgbClr val="D5DBE3"/>
+                      </a:solidFill>
+                      <a:prstDash val="solid"/>
+                      <a:round/>
+                      <a:headEnd type="none" w="med" len="med"/>
+                      <a:tailEnd type="none" w="med" len="med"/>
+                    </a:lnT>
+                    <a:lnB w="12700" cap="flat" cmpd="sng" algn="ctr">
+                      <a:solidFill>
+                        <a:srgbClr val="D5DBE3"/>
+                      </a:solidFill>
+                      <a:prstDash val="solid"/>
+                      <a:round/>
+                      <a:headEnd type="none" w="med" len="med"/>
+                      <a:tailEnd type="none" w="med" len="med"/>
+                    </a:lnB>
+                    <a:solidFill>
+                      <a:srgbClr val="F1F3F6"/>
+                    </a:solidFill>
+                  </a:tcPr>
+                </a:tc>
+                <a:tc>
+                  <a:txBody>
+                    <a:bodyPr/>
+                    <a:lstStyle/>
+                    <a:p>
+                      <a:pPr indent="0" marL="0">
+                        <a:buNone/>
+                      </a:pPr>
+                      <a:r>
+                        <a:rPr lang="en-US" sz="1200" b="1" dirty="0">
+                          <a:solidFill>
+                            <a:srgbClr val="1F2A37"/>
+                          </a:solidFill>
+                          <a:latin typeface="Microsoft YaHei" pitchFamily="34" charset="0"/>
+                          <a:ea typeface="Microsoft YaHei" pitchFamily="34" charset="-122"/>
+                          <a:cs typeface="Microsoft YaHei" pitchFamily="34" charset="-120"/>
+                        </a:rPr>
+                        <a:t>结果</a:t>
+                      </a:r>
+                      <a:endParaRPr lang="en-US" sz="1200" dirty="0">
+                        <a:latin typeface="Microsoft YaHei" charset="0"/>
+                        <a:ea typeface="Microsoft YaHei" charset="0"/>
+                        <a:cs typeface="Microsoft YaHei" charset="0"/>
+                      </a:endParaRPr>
+                    </a:p>
+                  </a:txBody>
+                  <a:tcPr marL="91440" marR="91440" marT="54864" marB="54864" anchor="ctr">
+                    <a:lnL w="12700" cap="flat" cmpd="sng" algn="ctr">
+                      <a:solidFill>
+                        <a:srgbClr val="D5DBE3"/>
+                      </a:solidFill>
+                      <a:prstDash val="solid"/>
+                      <a:round/>
+                      <a:headEnd type="none" w="med" len="med"/>
+                      <a:tailEnd type="none" w="med" len="med"/>
+                    </a:lnL>
+                    <a:lnR w="12700" cap="flat" cmpd="sng" algn="ctr">
+                      <a:solidFill>
+                        <a:srgbClr val="D5DBE3"/>
+                      </a:solidFill>
+                      <a:prstDash val="solid"/>
+                      <a:round/>
+                      <a:headEnd type="none" w="med" len="med"/>
+                      <a:tailEnd type="none" w="med" len="med"/>
+                    </a:lnR>
+                    <a:lnT w="12700" cap="flat" cmpd="sng" algn="ctr">
+                      <a:solidFill>
+                        <a:srgbClr val="D5DBE3"/>
+                      </a:solidFill>
+                      <a:prstDash val="solid"/>
+                      <a:round/>
+                      <a:headEnd type="none" w="med" len="med"/>
+                      <a:tailEnd type="none" w="med" len="med"/>
+                    </a:lnT>
+                    <a:lnB w="12700" cap="flat" cmpd="sng" algn="ctr">
+                      <a:solidFill>
+                        <a:srgbClr val="D5DBE3"/>
+                      </a:solidFill>
+                      <a:prstDash val="solid"/>
+                      <a:round/>
+                      <a:headEnd type="none" w="med" len="med"/>
+                      <a:tailEnd type="none" w="med" len="med"/>
+                    </a:lnB>
+                    <a:solidFill>
+                      <a:srgbClr val="F1F3F6"/>
+                    </a:solidFill>
+                  </a:tcPr>
+                </a:tc>
+              </a:tr>
+              <a:tr h="0">
+                <a:tc>
+                  <a:txBody>
+                    <a:bodyPr/>
+                    <a:lstStyle/>
+                    <a:p>
+                      <a:pPr indent="0" marL="0">
+                        <a:buNone/>
+                      </a:pPr>
+                      <a:r>
+                        <a:rPr lang="en-US" sz="1200" dirty="0">
+                          <a:solidFill>
+                            <a:srgbClr val="1F2A37"/>
+                          </a:solidFill>
+                          <a:latin typeface="Microsoft YaHei" pitchFamily="34" charset="0"/>
+                          <a:ea typeface="Microsoft YaHei" pitchFamily="34" charset="-122"/>
+                          <a:cs typeface="Microsoft YaHei" pitchFamily="34" charset="-120"/>
+                        </a:rPr>
+                        <a:t>学习时刻 as-of</a:t>
+                      </a:r>
+                      <a:endParaRPr lang="en-US" sz="1200" dirty="0">
+                        <a:latin typeface="Microsoft YaHei" charset="0"/>
+                        <a:ea typeface="Microsoft YaHei" charset="0"/>
+                        <a:cs typeface="Microsoft YaHei" charset="0"/>
+                      </a:endParaRPr>
+                    </a:p>
+                  </a:txBody>
+                  <a:tcPr marL="91440" marR="91440" marT="54864" marB="54864" anchor="ctr">
+                    <a:lnL w="12700" cap="flat" cmpd="sng" algn="ctr">
+                      <a:solidFill>
+                        <a:srgbClr val="D5DBE3"/>
+                      </a:solidFill>
+                      <a:prstDash val="solid"/>
+                      <a:round/>
+                      <a:headEnd type="none" w="med" len="med"/>
+                      <a:tailEnd type="none" w="med" len="med"/>
+                    </a:lnL>
+                    <a:lnR w="12700" cap="flat" cmpd="sng" algn="ctr">
+                      <a:solidFill>
+                        <a:srgbClr val="D5DBE3"/>
+                      </a:solidFill>
+                      <a:prstDash val="solid"/>
+                      <a:round/>
+                      <a:headEnd type="none" w="med" len="med"/>
+                      <a:tailEnd type="none" w="med" len="med"/>
+                    </a:lnR>
+                    <a:lnT w="12700" cap="flat" cmpd="sng" algn="ctr">
+                      <a:solidFill>
+                        <a:srgbClr val="D5DBE3"/>
+                      </a:solidFill>
+                      <a:prstDash val="solid"/>
+                      <a:round/>
+                      <a:headEnd type="none" w="med" len="med"/>
+                      <a:tailEnd type="none" w="med" len="med"/>
+                    </a:lnT>
+                    <a:lnB w="12700" cap="flat" cmpd="sng" algn="ctr">
+                      <a:solidFill>
+                        <a:srgbClr val="D5DBE3"/>
+                      </a:solidFill>
+                      <a:prstDash val="solid"/>
+                      <a:round/>
+                      <a:headEnd type="none" w="med" len="med"/>
+                      <a:tailEnd type="none" w="med" len="med"/>
+                    </a:lnB>
+                  </a:tcPr>
+                </a:tc>
+                <a:tc>
+                  <a:txBody>
+                    <a:bodyPr/>
+                    <a:lstStyle/>
+                    <a:p>
+                      <a:pPr indent="0" marL="0">
+                        <a:buNone/>
+                      </a:pPr>
+                      <a:r>
+                        <a:rPr lang="en-US" sz="1200" dirty="0">
+                          <a:solidFill>
+                            <a:srgbClr val="1F2A37"/>
+                          </a:solidFill>
+                          <a:latin typeface="Microsoft YaHei" pitchFamily="34" charset="0"/>
+                          <a:ea typeface="Microsoft YaHei" pitchFamily="34" charset="-122"/>
+                          <a:cs typeface="Microsoft YaHei" pitchFamily="34" charset="-120"/>
+                        </a:rPr>
+                        <a:t>1357.0 万</a:t>
+                      </a:r>
+                      <a:endParaRPr lang="en-US" sz="1200" dirty="0">
+                        <a:latin typeface="Microsoft YaHei" charset="0"/>
+                        <a:ea typeface="Microsoft YaHei" charset="0"/>
+                        <a:cs typeface="Microsoft YaHei" charset="0"/>
+                      </a:endParaRPr>
+                    </a:p>
+                  </a:txBody>
+                  <a:tcPr marL="91440" marR="91440" marT="54864" marB="54864" anchor="ctr">
+                    <a:lnL w="12700" cap="flat" cmpd="sng" algn="ctr">
+                      <a:solidFill>
+                        <a:srgbClr val="D5DBE3"/>
+                      </a:solidFill>
+                      <a:prstDash val="solid"/>
+                      <a:round/>
+                      <a:headEnd type="none" w="med" len="med"/>
+                      <a:tailEnd type="none" w="med" len="med"/>
+                    </a:lnL>
+                    <a:lnR w="12700" cap="flat" cmpd="sng" algn="ctr">
+                      <a:solidFill>
+                        <a:srgbClr val="D5DBE3"/>
+                      </a:solidFill>
+                      <a:prstDash val="solid"/>
+                      <a:round/>
+                      <a:headEnd type="none" w="med" len="med"/>
+                      <a:tailEnd type="none" w="med" len="med"/>
+                    </a:lnR>
+                    <a:lnT w="12700" cap="flat" cmpd="sng" algn="ctr">
+                      <a:solidFill>
+                        <a:srgbClr val="D5DBE3"/>
+                      </a:solidFill>
+                      <a:prstDash val="solid"/>
+                      <a:round/>
+                      <a:headEnd type="none" w="med" len="med"/>
+                      <a:tailEnd type="none" w="med" len="med"/>
+                    </a:lnT>
+                    <a:lnB w="12700" cap="flat" cmpd="sng" algn="ctr">
+                      <a:solidFill>
+                        <a:srgbClr val="D5DBE3"/>
+                      </a:solidFill>
+                      <a:prstDash val="solid"/>
+                      <a:round/>
+                      <a:headEnd type="none" w="med" len="med"/>
+                      <a:tailEnd type="none" w="med" len="med"/>
+                    </a:lnB>
+                  </a:tcPr>
+                </a:tc>
+                <a:tc>
+                  <a:txBody>
+                    <a:bodyPr/>
+                    <a:lstStyle/>
+                    <a:p>
+                      <a:pPr indent="0" marL="0">
+                        <a:buNone/>
+                      </a:pPr>
+                      <a:r>
+                        <a:rPr lang="en-US" sz="1200" dirty="0">
+                          <a:solidFill>
+                            <a:srgbClr val="1F2A37"/>
+                          </a:solidFill>
+                          <a:latin typeface="Microsoft YaHei" pitchFamily="34" charset="0"/>
+                          <a:ea typeface="Microsoft YaHei" pitchFamily="34" charset="-122"/>
+                          <a:cs typeface="Microsoft YaHei" pitchFamily="34" charset="-120"/>
+                        </a:rPr>
+                        <a:t>1357.0 万</a:t>
+                      </a:r>
+                      <a:endParaRPr lang="en-US" sz="1200" dirty="0">
+                        <a:latin typeface="Microsoft YaHei" charset="0"/>
+                        <a:ea typeface="Microsoft YaHei" charset="0"/>
+                        <a:cs typeface="Microsoft YaHei" charset="0"/>
+                      </a:endParaRPr>
+                    </a:p>
+                  </a:txBody>
+                  <a:tcPr marL="91440" marR="91440" marT="54864" marB="54864" anchor="ctr">
+                    <a:lnL w="12700" cap="flat" cmpd="sng" algn="ctr">
+                      <a:solidFill>
+                        <a:srgbClr val="D5DBE3"/>
+                      </a:solidFill>
+                      <a:prstDash val="solid"/>
+                      <a:round/>
+                      <a:headEnd type="none" w="med" len="med"/>
+                      <a:tailEnd type="none" w="med" len="med"/>
+                    </a:lnL>
+                    <a:lnR w="12700" cap="flat" cmpd="sng" algn="ctr">
+                      <a:solidFill>
+                        <a:srgbClr val="D5DBE3"/>
+                      </a:solidFill>
+                      <a:prstDash val="solid"/>
+                      <a:round/>
+                      <a:headEnd type="none" w="med" len="med"/>
+                      <a:tailEnd type="none" w="med" len="med"/>
+                    </a:lnR>
+                    <a:lnT w="12700" cap="flat" cmpd="sng" algn="ctr">
+                      <a:solidFill>
+                        <a:srgbClr val="D5DBE3"/>
+                      </a:solidFill>
+                      <a:prstDash val="solid"/>
+                      <a:round/>
+                      <a:headEnd type="none" w="med" len="med"/>
+                      <a:tailEnd type="none" w="med" len="med"/>
+                    </a:lnT>
+                    <a:lnB w="12700" cap="flat" cmpd="sng" algn="ctr">
+                      <a:solidFill>
+                        <a:srgbClr val="D5DBE3"/>
+                      </a:solidFill>
+                      <a:prstDash val="solid"/>
+                      <a:round/>
+                      <a:headEnd type="none" w="med" len="med"/>
+                      <a:tailEnd type="none" w="med" len="med"/>
+                    </a:lnB>
+                  </a:tcPr>
+                </a:tc>
+                <a:tc>
+                  <a:txBody>
+                    <a:bodyPr/>
+                    <a:lstStyle/>
+                    <a:p>
+                      <a:pPr indent="0" marL="0">
+                        <a:buNone/>
+                      </a:pPr>
+                      <a:r>
+                        <a:rPr lang="en-US" sz="1200" b="1" dirty="0">
+                          <a:solidFill>
+                            <a:srgbClr val="2E7D4F"/>
+                          </a:solidFill>
+                          <a:latin typeface="Microsoft YaHei" pitchFamily="34" charset="0"/>
+                          <a:ea typeface="Microsoft YaHei" pitchFamily="34" charset="-122"/>
+                          <a:cs typeface="Microsoft YaHei" pitchFamily="34" charset="-120"/>
+                        </a:rPr>
+                        <a:t>一致 → 发布 v2</a:t>
+                      </a:r>
+                      <a:endParaRPr lang="en-US" sz="1200" dirty="0">
+                        <a:latin typeface="Microsoft YaHei" charset="0"/>
+                        <a:ea typeface="Microsoft YaHei" charset="0"/>
+                        <a:cs typeface="Microsoft YaHei" charset="0"/>
+                      </a:endParaRPr>
+                    </a:p>
+                  </a:txBody>
+                  <a:tcPr marL="91440" marR="91440" marT="54864" marB="54864" anchor="ctr">
+                    <a:lnL w="12700" cap="flat" cmpd="sng" algn="ctr">
+                      <a:solidFill>
+                        <a:srgbClr val="D5DBE3"/>
+                      </a:solidFill>
+                      <a:prstDash val="solid"/>
+                      <a:round/>
+                      <a:headEnd type="none" w="med" len="med"/>
+                      <a:tailEnd type="none" w="med" len="med"/>
+                    </a:lnL>
+                    <a:lnR w="12700" cap="flat" cmpd="sng" algn="ctr">
+                      <a:solidFill>
+                        <a:srgbClr val="D5DBE3"/>
+                      </a:solidFill>
+                      <a:prstDash val="solid"/>
+                      <a:round/>
+                      <a:headEnd type="none" w="med" len="med"/>
+                      <a:tailEnd type="none" w="med" len="med"/>
+                    </a:lnR>
+                    <a:lnT w="12700" cap="flat" cmpd="sng" algn="ctr">
+                      <a:solidFill>
+                        <a:srgbClr val="D5DBE3"/>
+                      </a:solidFill>
+                      <a:prstDash val="solid"/>
+                      <a:round/>
+                      <a:headEnd type="none" w="med" len="med"/>
+                      <a:tailEnd type="none" w="med" len="med"/>
+                    </a:lnT>
+                    <a:lnB w="12700" cap="flat" cmpd="sng" algn="ctr">
+                      <a:solidFill>
+                        <a:srgbClr val="D5DBE3"/>
+                      </a:solidFill>
+                      <a:prstDash val="solid"/>
+                      <a:round/>
+                      <a:headEnd type="none" w="med" len="med"/>
+                      <a:tailEnd type="none" w="med" len="med"/>
+                    </a:lnB>
+                  </a:tcPr>
+                </a:tc>
+              </a:tr>
+              <a:tr h="0">
+                <a:tc>
+                  <a:txBody>
+                    <a:bodyPr/>
+                    <a:lstStyle/>
+                    <a:p>
+                      <a:pPr indent="0" marL="0">
+                        <a:buNone/>
+                      </a:pPr>
+                      <a:r>
+                        <a:rPr lang="en-US" sz="1200" dirty="0">
+                          <a:solidFill>
+                            <a:srgbClr val="1F2A37"/>
+                          </a:solidFill>
+                          <a:latin typeface="Microsoft YaHei" pitchFamily="34" charset="0"/>
+                          <a:ea typeface="Microsoft YaHei" pitchFamily="34" charset="-122"/>
+                          <a:cs typeface="Microsoft YaHei" pitchFamily="34" charset="-120"/>
+                        </a:rPr>
+                        <a:t>当前数据</a:t>
+                      </a:r>
+                      <a:endParaRPr lang="en-US" sz="1200" dirty="0">
+                        <a:latin typeface="Microsoft YaHei" charset="0"/>
+                        <a:ea typeface="Microsoft YaHei" charset="0"/>
+                        <a:cs typeface="Microsoft YaHei" charset="0"/>
+                      </a:endParaRPr>
+                    </a:p>
+                  </a:txBody>
+                  <a:tcPr marL="91440" marR="91440" marT="54864" marB="54864" anchor="ctr">
+                    <a:lnL w="12700" cap="flat" cmpd="sng" algn="ctr">
+                      <a:solidFill>
+                        <a:srgbClr val="D5DBE3"/>
+                      </a:solidFill>
+                      <a:prstDash val="solid"/>
+                      <a:round/>
+                      <a:headEnd type="none" w="med" len="med"/>
+                      <a:tailEnd type="none" w="med" len="med"/>
+                    </a:lnL>
+                    <a:lnR w="12700" cap="flat" cmpd="sng" algn="ctr">
+                      <a:solidFill>
+                        <a:srgbClr val="D5DBE3"/>
+                      </a:solidFill>
+                      <a:prstDash val="solid"/>
+                      <a:round/>
+                      <a:headEnd type="none" w="med" len="med"/>
+                      <a:tailEnd type="none" w="med" len="med"/>
+                    </a:lnR>
+                    <a:lnT w="12700" cap="flat" cmpd="sng" algn="ctr">
+                      <a:solidFill>
+                        <a:srgbClr val="D5DBE3"/>
+                      </a:solidFill>
+                      <a:prstDash val="solid"/>
+                      <a:round/>
+                      <a:headEnd type="none" w="med" len="med"/>
+                      <a:tailEnd type="none" w="med" len="med"/>
+                    </a:lnT>
+                    <a:lnB w="12700" cap="flat" cmpd="sng" algn="ctr">
+                      <a:solidFill>
+                        <a:srgbClr val="D5DBE3"/>
+                      </a:solidFill>
+                      <a:prstDash val="solid"/>
+                      <a:round/>
+                      <a:headEnd type="none" w="med" len="med"/>
+                      <a:tailEnd type="none" w="med" len="med"/>
+                    </a:lnB>
+                  </a:tcPr>
+                </a:tc>
+                <a:tc>
+                  <a:txBody>
+                    <a:bodyPr/>
+                    <a:lstStyle/>
+                    <a:p>
+                      <a:pPr indent="0" marL="0">
+                        <a:buNone/>
+                      </a:pPr>
+                      <a:r>
+                        <a:rPr lang="en-US" sz="1200" dirty="0">
+                          <a:solidFill>
+                            <a:srgbClr val="1F2A37"/>
+                          </a:solidFill>
+                          <a:latin typeface="Microsoft YaHei" pitchFamily="34" charset="0"/>
+                          <a:ea typeface="Microsoft YaHei" pitchFamily="34" charset="-122"/>
+                          <a:cs typeface="Microsoft YaHei" pitchFamily="34" charset="-120"/>
+                        </a:rPr>
+                        <a:t>1489.1 万</a:t>
+                      </a:r>
+                      <a:endParaRPr lang="en-US" sz="1200" dirty="0">
+                        <a:latin typeface="Microsoft YaHei" charset="0"/>
+                        <a:ea typeface="Microsoft YaHei" charset="0"/>
+                        <a:cs typeface="Microsoft YaHei" charset="0"/>
+                      </a:endParaRPr>
+                    </a:p>
+                  </a:txBody>
+                  <a:tcPr marL="91440" marR="91440" marT="54864" marB="54864" anchor="ctr">
+                    <a:lnL w="12700" cap="flat" cmpd="sng" algn="ctr">
+                      <a:solidFill>
+                        <a:srgbClr val="D5DBE3"/>
+                      </a:solidFill>
+                      <a:prstDash val="solid"/>
+                      <a:round/>
+                      <a:headEnd type="none" w="med" len="med"/>
+                      <a:tailEnd type="none" w="med" len="med"/>
+                    </a:lnL>
+                    <a:lnR w="12700" cap="flat" cmpd="sng" algn="ctr">
+                      <a:solidFill>
+                        <a:srgbClr val="D5DBE3"/>
+                      </a:solidFill>
+                      <a:prstDash val="solid"/>
+                      <a:round/>
+                      <a:headEnd type="none" w="med" len="med"/>
+                      <a:tailEnd type="none" w="med" len="med"/>
+                    </a:lnR>
+                    <a:lnT w="12700" cap="flat" cmpd="sng" algn="ctr">
+                      <a:solidFill>
+                        <a:srgbClr val="D5DBE3"/>
+                      </a:solidFill>
+                      <a:prstDash val="solid"/>
+                      <a:round/>
+                      <a:headEnd type="none" w="med" len="med"/>
+                      <a:tailEnd type="none" w="med" len="med"/>
+                    </a:lnT>
+                    <a:lnB w="12700" cap="flat" cmpd="sng" algn="ctr">
+                      <a:solidFill>
+                        <a:srgbClr val="D5DBE3"/>
+                      </a:solidFill>
+                      <a:prstDash val="solid"/>
+                      <a:round/>
+                      <a:headEnd type="none" w="med" len="med"/>
+                      <a:tailEnd type="none" w="med" len="med"/>
+                    </a:lnB>
+                  </a:tcPr>
+                </a:tc>
+                <a:tc>
+                  <a:txBody>
+                    <a:bodyPr/>
+                    <a:lstStyle/>
+                    <a:p>
+                      <a:pPr indent="0" marL="0">
+                        <a:buNone/>
+                      </a:pPr>
+                      <a:r>
+                        <a:rPr lang="en-US" sz="1200" dirty="0">
+                          <a:solidFill>
+                            <a:srgbClr val="1F2A37"/>
+                          </a:solidFill>
+                          <a:latin typeface="Microsoft YaHei" pitchFamily="34" charset="0"/>
+                          <a:ea typeface="Microsoft YaHei" pitchFamily="34" charset="-122"/>
+                          <a:cs typeface="Microsoft YaHei" pitchFamily="34" charset="-120"/>
+                        </a:rPr>
+                        <a:t>1342.4 万</a:t>
+                      </a:r>
+                      <a:endParaRPr lang="en-US" sz="1200" dirty="0">
+                        <a:latin typeface="Microsoft YaHei" charset="0"/>
+                        <a:ea typeface="Microsoft YaHei" charset="0"/>
+                        <a:cs typeface="Microsoft YaHei" charset="0"/>
+                      </a:endParaRPr>
+                    </a:p>
+                  </a:txBody>
+                  <a:tcPr marL="91440" marR="91440" marT="54864" marB="54864" anchor="ctr">
+                    <a:lnL w="12700" cap="flat" cmpd="sng" algn="ctr">
+                      <a:solidFill>
+                        <a:srgbClr val="D5DBE3"/>
+                      </a:solidFill>
+                      <a:prstDash val="solid"/>
+                      <a:round/>
+                      <a:headEnd type="none" w="med" len="med"/>
+                      <a:tailEnd type="none" w="med" len="med"/>
+                    </a:lnL>
+                    <a:lnR w="12700" cap="flat" cmpd="sng" algn="ctr">
+                      <a:solidFill>
+                        <a:srgbClr val="D5DBE3"/>
+                      </a:solidFill>
+                      <a:prstDash val="solid"/>
+                      <a:round/>
+                      <a:headEnd type="none" w="med" len="med"/>
+                      <a:tailEnd type="none" w="med" len="med"/>
+                    </a:lnR>
+                    <a:lnT w="12700" cap="flat" cmpd="sng" algn="ctr">
+                      <a:solidFill>
+                        <a:srgbClr val="D5DBE3"/>
+                      </a:solidFill>
+                      <a:prstDash val="solid"/>
+                      <a:round/>
+                      <a:headEnd type="none" w="med" len="med"/>
+                      <a:tailEnd type="none" w="med" len="med"/>
+                    </a:lnT>
+                    <a:lnB w="12700" cap="flat" cmpd="sng" algn="ctr">
+                      <a:solidFill>
+                        <a:srgbClr val="D5DBE3"/>
+                      </a:solidFill>
+                      <a:prstDash val="solid"/>
+                      <a:round/>
+                      <a:headEnd type="none" w="med" len="med"/>
+                      <a:tailEnd type="none" w="med" len="med"/>
+                    </a:lnB>
+                  </a:tcPr>
+                </a:tc>
+                <a:tc>
+                  <a:txBody>
+                    <a:bodyPr/>
+                    <a:lstStyle/>
+                    <a:p>
+                      <a:pPr indent="0" marL="0">
+                        <a:buNone/>
+                      </a:pPr>
+                      <a:r>
+                        <a:rPr lang="en-US" sz="1200" b="1" dirty="0">
+                          <a:solidFill>
+                            <a:srgbClr val="B5392A"/>
+                          </a:solidFill>
+                          <a:latin typeface="Microsoft YaHei" pitchFamily="34" charset="0"/>
+                          <a:ea typeface="Microsoft YaHei" pitchFamily="34" charset="-122"/>
+                          <a:cs typeface="Microsoft YaHei" pitchFamily="34" charset="-120"/>
+                        </a:rPr>
+                        <a:t>不一致 → 误拒</a:t>
+                      </a:r>
+                      <a:endParaRPr lang="en-US" sz="1200" dirty="0">
+                        <a:latin typeface="Microsoft YaHei" charset="0"/>
+                        <a:ea typeface="Microsoft YaHei" charset="0"/>
+                        <a:cs typeface="Microsoft YaHei" charset="0"/>
+                      </a:endParaRPr>
+                    </a:p>
+                  </a:txBody>
+                  <a:tcPr marL="91440" marR="91440" marT="54864" marB="54864" anchor="ctr">
+                    <a:lnL w="12700" cap="flat" cmpd="sng" algn="ctr">
+                      <a:solidFill>
+                        <a:srgbClr val="D5DBE3"/>
+                      </a:solidFill>
+                      <a:prstDash val="solid"/>
+                      <a:round/>
+                      <a:headEnd type="none" w="med" len="med"/>
+                      <a:tailEnd type="none" w="med" len="med"/>
+                    </a:lnL>
+                    <a:lnR w="12700" cap="flat" cmpd="sng" algn="ctr">
+                      <a:solidFill>
+                        <a:srgbClr val="D5DBE3"/>
+                      </a:solidFill>
+                      <a:prstDash val="solid"/>
+                      <a:round/>
+                      <a:headEnd type="none" w="med" len="med"/>
+                      <a:tailEnd type="none" w="med" len="med"/>
+                    </a:lnR>
+                    <a:lnT w="12700" cap="flat" cmpd="sng" algn="ctr">
+                      <a:solidFill>
+                        <a:srgbClr val="D5DBE3"/>
+                      </a:solidFill>
+                      <a:prstDash val="solid"/>
+                      <a:round/>
+                      <a:headEnd type="none" w="med" len="med"/>
+                      <a:tailEnd type="none" w="med" len="med"/>
+                    </a:lnT>
+                    <a:lnB w="12700" cap="flat" cmpd="sng" algn="ctr">
+                      <a:solidFill>
+                        <a:srgbClr val="D5DBE3"/>
+                      </a:solidFill>
+                      <a:prstDash val="solid"/>
+                      <a:round/>
+                      <a:headEnd type="none" w="med" len="med"/>
+                      <a:tailEnd type="none" w="med" len="med"/>
+                    </a:lnB>
+                  </a:tcPr>
+                </a:tc>
+              </a:tr>
+            </a:tbl>
+          </a:graphicData>
+        </a:graphic>
+      </p:graphicFrame>
+      <p:sp>
+        <p:nvSpPr>
+          <p:cNvPr id="9" name="Text 5"/>
+          <p:cNvSpPr txBox="1"/>
+          <p:nvPr/>
+        </p:nvSpPr>
+        <p:spPr>
+          <a:xfrm>
+            <a:off x="6446520" y="2743200"/>
+            <a:ext cx="5196535" cy="2011680"/>
+          </a:xfrm>
+          <a:prstGeom prst="rect">
+            <a:avLst/>
+          </a:prstGeom>
+          <a:noFill/>
+          <a:ln/>
+        </p:spPr>
+        <p:txBody>
+          <a:bodyPr wrap="square" lIns="0" tIns="0" rIns="0" bIns="0" rtlCol="0" anchor="t"/>
+          <a:lstStyle/>
+          <a:p>
+            <a:pPr marL="342900" indent="-342900">
+              <a:spcAft>
+                <a:spcPts val="400"/>
+              </a:spcAft>
+              <a:buSzPct val="100000"/>
+              <a:buChar char="•"/>
+            </a:pPr>
+            <a:r>
+              <a:rPr lang="en-US" sz="1200" dirty="0">
+                <a:solidFill>
+                  <a:srgbClr val="1F2A37"/>
+                </a:solidFill>
+                <a:latin typeface="Microsoft YaHei" pitchFamily="34" charset="0"/>
+                <a:ea typeface="Microsoft YaHei" pitchFamily="34" charset="-122"/>
+                <a:cs typeface="Microsoft YaHei" pitchFamily="34" charset="-120"/>
+              </a:rPr>
+              <a:t>像换一种解法重做老师已经判过的那道题：答案必须相同。但必须用当初那份数据——今天的数据已经变了，学习时的 SQL 在上面同样过期（把旧行也算进去得 1489.1 万），比不出新解法对不对</a:t>
+            </a:r>
+            <a:endParaRPr lang="en-US" sz="1200" dirty="0"/>
+          </a:p>
+          <a:p>
+            <a:pPr marL="342900" indent="-342900">
+              <a:spcAft>
+                <a:spcPts val="400"/>
+              </a:spcAft>
+              <a:buSzPct val="100000"/>
+              <a:buChar char="•"/>
+            </a:pPr>
+            <a:r>
+              <a:rPr lang="en-US" sz="1200" dirty="0">
+                <a:solidFill>
+                  <a:srgbClr val="1F2A37"/>
+                </a:solidFill>
+                <a:latin typeface="Microsoft YaHei" pitchFamily="34" charset="0"/>
+                <a:ea typeface="Microsoft YaHei" pitchFamily="34" charset="-122"/>
+                <a:cs typeface="Microsoft YaHei" pitchFamily="34" charset="-120"/>
+              </a:rPr>
+              <a:t>学习时的答案是唯一被确认过的答案，所以修复不需要参考答案。数据仓库用时间旅行查询（FOR SYSTEM_TIME AS OF）取学习时刻的数据，原型保留学习时的副本</a:t>
+            </a:r>
+            <a:endParaRPr lang="en-US" sz="1200" dirty="0"/>
+          </a:p>
+        </p:txBody>
+      </p:sp>
+      <p:sp>
+        <p:nvSpPr>
+          <p:cNvPr id="10" name="Shape 6"/>
+          <p:cNvSpPr/>
+          <p:nvPr/>
+        </p:nvSpPr>
+        <p:spPr>
+          <a:xfrm>
+            <a:off x="548640" y="4846320"/>
+            <a:ext cx="11094415" cy="868680"/>
+          </a:xfrm>
+          <a:prstGeom prst="roundRect">
+            <a:avLst>
+              <a:gd name="adj" fmla="val 8421"/>
+            </a:avLst>
+          </a:prstGeom>
+          <a:solidFill>
+            <a:srgbClr val="E8F0FA"/>
+          </a:solidFill>
+          <a:ln w="12700">
+            <a:solidFill>
+              <a:srgbClr val="E8F0FA"/>
+            </a:solidFill>
+            <a:prstDash val="solid"/>
+          </a:ln>
+        </p:spPr>
+      </p:sp>
+      <p:sp>
+        <p:nvSpPr>
+          <p:cNvPr id="11" name="Text 7"/>
+          <p:cNvSpPr txBox="1"/>
+          <p:nvPr/>
+        </p:nvSpPr>
+        <p:spPr>
+          <a:xfrm>
+            <a:off x="822960" y="4937760"/>
+            <a:ext cx="10545775" cy="685800"/>
+          </a:xfrm>
+          <a:prstGeom prst="rect">
+            <a:avLst/>
+          </a:prstGeom>
+          <a:noFill/>
+          <a:ln/>
+        </p:spPr>
+        <p:txBody>
+          <a:bodyPr wrap="square" lIns="0" tIns="0" rIns="0" bIns="0" rtlCol="0" anchor="ctr"/>
+          <a:lstStyle/>
+          <a:p>
+            <a:pPr indent="0" marL="0">
+              <a:spcAft>
+                <a:spcPts val="400"/>
+              </a:spcAft>
+              <a:buNone/>
+            </a:pPr>
+            <a:r>
+              <a:rPr lang="en-US" sz="1300" b="1" dirty="0">
+                <a:solidFill>
+                  <a:srgbClr val="1D5BA6"/>
+                </a:solidFill>
+                <a:latin typeface="Microsoft YaHei" pitchFamily="34" charset="0"/>
+                <a:ea typeface="Microsoft YaHei" pitchFamily="34" charset="-122"/>
+                <a:cs typeface="Microsoft YaHei" pitchFamily="34" charset="-120"/>
+              </a:rPr>
+              <a:t>发布 v2 之后：</a:t>
+            </a:r>
+            <a:pPr indent="0" marL="0">
+              <a:spcAft>
+                <a:spcPts val="400"/>
+              </a:spcAft>
+              <a:buNone/>
+            </a:pPr>
+            <a:r>
+              <a:rPr lang="en-US" sz="1300" dirty="0">
+                <a:solidFill>
+                  <a:srgbClr val="1F2A37"/>
+                </a:solidFill>
+                <a:latin typeface="Microsoft YaHei" pitchFamily="34" charset="0"/>
+                <a:ea typeface="Microsoft YaHei" pitchFamily="34" charset="-122"/>
+                <a:cs typeface="Microsoft YaHei" pitchFamily="34" charset="-120"/>
+              </a:rPr>
+              <a:t>v1 失效，声明 v1 的查询被拒绝；修复期间到达的请求等待结果；其他定义遇到相同的条件失败直接复用验证结果与修复；修不好的定义失效并通知使用方，等学到新证据再发布。</a:t>
+            </a:r>
+            <a:endParaRPr lang="en-US" sz="1300" dirty="0"/>
+          </a:p>
+        </p:txBody>
+      </p:sp>
+      <p:sp>
+        <p:nvSpPr>
+          <p:cNvPr id="12" name="Text 8"/>
+          <p:cNvSpPr txBox="1"/>
+          <p:nvPr/>
+        </p:nvSpPr>
+        <p:spPr>
+          <a:xfrm>
+            <a:off x="548640" y="6263640"/>
+            <a:ext cx="10362895" cy="365760"/>
+          </a:xfrm>
+          <a:prstGeom prst="rect">
+            <a:avLst/>
+          </a:prstGeom>
+          <a:noFill/>
+          <a:ln/>
+        </p:spPr>
+        <p:txBody>
+          <a:bodyPr wrap="square" lIns="0" tIns="0" rIns="0" bIns="0" rtlCol="0" anchor="b"/>
+          <a:lstStyle/>
+          <a:p>
+            <a:pPr indent="0" marL="0">
+              <a:buNone/>
+            </a:pPr>
+            <a:r>
+              <a:rPr lang="en-US" sz="1100" dirty="0">
+                <a:solidFill>
+                  <a:srgbClr val="5B6573"/>
+                </a:solidFill>
+                <a:latin typeface="Microsoft YaHei" pitchFamily="34" charset="0"/>
+                <a:ea typeface="Microsoft YaHei" pitchFamily="34" charset="-122"/>
+                <a:cs typeface="Microsoft YaHei" pitchFamily="34" charset="-120"/>
+              </a:rPr>
+              <a:t>上表为示意；回归测试数字来自 noctis results/scen-20261002/dsv41flash-r1-g3fix--snap（端到端实验第 1 次 MAVRA 运行）。“当前数据”一行来自对照实验 dsv41flash-r1-g3fix--exref（系统记录：“结果 13423672.28 与期望 14890636.48 不一致”）。</a:t>
+            </a:r>
+            <a:endParaRPr lang="en-US" sz="1100" dirty="0"/>
+          </a:p>
+        </p:txBody>
+      </p:sp>
+      <p:sp>
+        <p:nvSpPr>
+          <p:cNvPr id="25" name="Slide Number Placeholder 0"/>
+          <p:cNvSpPr>
+            <a:spLocks noGrp="1"/>
+          </p:cNvSpPr>
+          <p:nvPr>
+            <p:ph type="sldNum" sz="quarter" idx="4294967295"/>
+          </p:nvPr>
+        </p:nvSpPr>
+        <p:spPr>
+          <a:xfrm>
+            <a:off x="11185855" y="6446520"/>
+            <a:ext cx="457200" cy="274320"/>
+          </a:xfrm>
+          <a:prstGeom prst="rect">
+            <a:avLst/>
+          </a:prstGeom>
+          <a:extLst>
+            <a:ext uri="{C572A759-6A51-4108-AA02-DFA0A04FC94B}">
+              <ma14:wrappingTextBoxFlag xmlns:ma14="http://schemas.microsoft.com/office/mac/drawingml/2011/main" val="0"/>
+            </a:ext>
+          </a:extLst>
+        </p:spPr>
+        <p:txBody>
+          <a:bodyPr/>
+          <a:lstStyle>
+            <a:lvl1pPr>
+              <a:defRPr sz="1000">
+                <a:solidFill>
+                  <a:srgbClr val="5B6573"/>
+                </a:solidFill>
+                <a:latin typeface="Microsoft YaHei"/>
+                <a:ea typeface="Microsoft YaHei"/>
+                <a:cs typeface="Microsoft YaHei"/>
+              </a:defRPr>
+            </a:lvl1pPr>
+          </a:lstStyle>
+          <a:p>
+            <a:pPr algn="r"/>
+            <a:fld id="{F7021451-1387-4CA6-816F-3879F97B5CBC}" type="slidenum">
+              <a:rPr b="0" lang="en-US"/>
+              <a:t>10</a:t>
+            </a:fld>
+            <a:endParaRPr lang="en-US"/>
+          </a:p>
+        </p:txBody>
+      </p:sp>
+    </p:spTree>
+  </p:cSld>
+  <p:clrMapOvr>
+    <a:masterClrMapping/>
+  </p:clrMapOvr>
+</p:sld>
+</file>
+
+<file path=ppt/slides/slide11.xml><?xml version="1.0" encoding="utf-8"?>
+<p:sld xmlns:a="http://schemas.openxmlformats.org/drawingml/2006/main" xmlns:r="http://schemas.openxmlformats.org/officeDocument/2006/relationships" xmlns:p="http://schemas.openxmlformats.org/presentationml/2006/main">
+  <p:cSld name="Slide 11">
+    <p:spTree>
+      <p:nvGrpSpPr>
+        <p:cNvPr id="1" name=""/>
+        <p:cNvGrpSpPr/>
+        <p:nvPr/>
+      </p:nvGrpSpPr>
+      <p:grpSpPr>
+        <a:xfrm>
+          <a:off x="0" y="0"/>
+          <a:ext cx="0" cy="0"/>
+          <a:chOff x="0" y="0"/>
+          <a:chExt cx="0" cy="0"/>
+        </a:xfrm>
+      </p:grpSpPr>
+      <p:sp>
+        <p:nvSpPr>
+          <p:cNvPr id="2" name="Text 0"/>
+          <p:cNvSpPr/>
+          <p:nvPr>
+            <p:ph idx="100" type="title" hasCustomPrompt="1"/>
+          </p:nvPr>
+        </p:nvSpPr>
+        <p:spPr>
+          <a:xfrm>
+            <a:off x="548640" y="274320"/>
+            <a:ext cx="11094415" cy="685800"/>
+          </a:xfrm>
+          <a:prstGeom prst="rect">
+            <a:avLst/>
+          </a:prstGeom>
+          <a:noFill/>
+          <a:ln/>
+        </p:spPr>
+        <p:txBody>
+          <a:bodyPr wrap="square" lIns="0" tIns="0" rIns="0" bIns="0" rtlCol="0" anchor="ctr"/>
+          <a:lstStyle/>
+          <a:p>
+            <a:pPr algn="l" indent="0" marL="0">
+              <a:buNone/>
+            </a:pPr>
+            <a:r>
+              <a:rPr lang="en-US" sz="2800" b="1" dirty="0">
+                <a:solidFill>
+                  <a:srgbClr val="1F2A37"/>
+                </a:solidFill>
+                <a:latin typeface="Microsoft YaHei" pitchFamily="34" charset="0"/>
+                <a:ea typeface="Microsoft YaHei" pitchFamily="34" charset="-122"/>
+                <a:cs typeface="Microsoft YaHei" pitchFamily="34" charset="-120"/>
+              </a:rPr>
               <a:t>一条定义的生命周期：学习、维护、修复、失效</a:t>
             </a:r>
             <a:endParaRPr lang="en-US" sz="2800" dirty="0"/>
@@ -2689,7 +4921,7 @@
             <a:pPr algn="r"/>
             <a:fld id="{F7021451-1387-4CA6-816F-3879F97B5CBC}" type="slidenum">
               <a:rPr b="0" lang="en-US"/>
-              <a:t>10</a:t>
+              <a:t>11</a:t>
             </a:fld>
             <a:endParaRPr lang="en-US"/>
           </a:p>
@@ -2703,9 +4935,9 @@
 </p:sld>
 </file>
 
-<file path=ppt/slides/slide11.xml><?xml version="1.0" encoding="utf-8"?>
+<file path=ppt/slides/slide12.xml><?xml version="1.0" encoding="utf-8"?>
 <p:sld xmlns:a="http://schemas.openxmlformats.org/drawingml/2006/main" xmlns:r="http://schemas.openxmlformats.org/officeDocument/2006/relationships" xmlns:p="http://schemas.openxmlformats.org/presentationml/2006/main">
-  <p:cSld name="Slide 11">
+  <p:cSld name="Slide 12">
     <p:spTree>
       <p:nvGrpSpPr>
         <p:cNvPr id="1" name=""/>
@@ -2763,7 +4995,7 @@
       </p:sp>
       <p:graphicFrame>
         <p:nvGraphicFramePr>
-          <p:cNvPr id="12" name="Table 0"/>
+          <p:cNvPr id="13" name="Table 0"/>
           <p:cNvGraphicFramePr>
             <a:graphicFrameLocks noGrp="1"/>
           </p:cNvGraphicFramePr>
@@ -4260,7 +6492,7 @@
             <a:pPr algn="r"/>
             <a:fld id="{F7021451-1387-4CA6-816F-3879F97B5CBC}" type="slidenum">
               <a:rPr b="0" lang="en-US"/>
-              <a:t>11</a:t>
+              <a:t>12</a:t>
             </a:fld>
             <a:endParaRPr lang="en-US"/>
           </a:p>
@@ -4274,9 +6506,9 @@
 </p:sld>
 </file>
 
-<file path=ppt/slides/slide12.xml><?xml version="1.0" encoding="utf-8"?>
+<file path=ppt/slides/slide13.xml><?xml version="1.0" encoding="utf-8"?>
 <p:sld xmlns:a="http://schemas.openxmlformats.org/drawingml/2006/main" xmlns:r="http://schemas.openxmlformats.org/officeDocument/2006/relationships" xmlns:p="http://schemas.openxmlformats.org/presentationml/2006/main">
-  <p:cSld name="Slide 12">
+  <p:cSld name="Slide 13">
     <p:spTree>
       <p:nvGrpSpPr>
         <p:cNvPr id="1" name=""/>
@@ -4334,7 +6566,7 @@
       </p:sp>
       <p:graphicFrame>
         <p:nvGraphicFramePr>
-          <p:cNvPr id="13" name="Table 0"/>
+          <p:cNvPr id="14" name="Table 0"/>
           <p:cNvGraphicFramePr>
             <a:graphicFrameLocks noGrp="1"/>
           </p:cNvGraphicFramePr>
@@ -7713,7 +9945,7 @@
             <a:pPr algn="r"/>
             <a:fld id="{F7021451-1387-4CA6-816F-3879F97B5CBC}" type="slidenum">
               <a:rPr b="0" lang="en-US"/>
-              <a:t>12</a:t>
+              <a:t>13</a:t>
             </a:fld>
             <a:endParaRPr lang="en-US"/>
           </a:p>
@@ -7727,9 +9959,9 @@
 </p:sld>
 </file>
 
-<file path=ppt/slides/slide13.xml><?xml version="1.0" encoding="utf-8"?>
+<file path=ppt/slides/slide14.xml><?xml version="1.0" encoding="utf-8"?>
 <p:sld xmlns:a="http://schemas.openxmlformats.org/drawingml/2006/main" xmlns:r="http://schemas.openxmlformats.org/officeDocument/2006/relationships" xmlns:p="http://schemas.openxmlformats.org/presentationml/2006/main">
-  <p:cSld name="Slide 13">
+  <p:cSld name="Slide 14">
     <p:spTree>
       <p:nvGrpSpPr>
         <p:cNvPr id="1" name=""/>
@@ -7787,7 +10019,7 @@
       </p:sp>
       <p:graphicFrame>
         <p:nvGraphicFramePr>
-          <p:cNvPr id="14" name="Table 0"/>
+          <p:cNvPr id="15" name="Table 0"/>
           <p:cNvGraphicFramePr>
             <a:graphicFrameLocks noGrp="1"/>
           </p:cNvGraphicFramePr>
@@ -9279,7 +11511,7 @@
             <a:pPr algn="r"/>
             <a:fld id="{F7021451-1387-4CA6-816F-3879F97B5CBC}" type="slidenum">
               <a:rPr b="0" lang="en-US"/>
-              <a:t>13</a:t>
+              <a:t>14</a:t>
             </a:fld>
             <a:endParaRPr lang="en-US"/>
           </a:p>
@@ -9293,9 +11525,9 @@
 </p:sld>
 </file>
 
-<file path=ppt/slides/slide14.xml><?xml version="1.0" encoding="utf-8"?>
+<file path=ppt/slides/slide15.xml><?xml version="1.0" encoding="utf-8"?>
 <p:sld xmlns:a="http://schemas.openxmlformats.org/drawingml/2006/main" xmlns:r="http://schemas.openxmlformats.org/officeDocument/2006/relationships" xmlns:p="http://schemas.openxmlformats.org/presentationml/2006/main">
-  <p:cSld name="Slide 14">
+  <p:cSld name="Slide 15">
     <p:spTree>
       <p:nvGrpSpPr>
         <p:cNvPr id="1" name=""/>
@@ -9353,7 +11585,7 @@
       </p:sp>
       <p:graphicFrame>
         <p:nvGraphicFramePr>
-          <p:cNvPr id="15" name="Table 0"/>
+          <p:cNvPr id="16" name="Table 0"/>
           <p:cNvGraphicFramePr>
             <a:graphicFrameLocks noGrp="1"/>
           </p:cNvGraphicFramePr>
@@ -10796,7 +13028,7 @@
             <a:pPr algn="r"/>
             <a:fld id="{F7021451-1387-4CA6-816F-3879F97B5CBC}" type="slidenum">
               <a:rPr b="0" lang="en-US"/>
-              <a:t>14</a:t>
+              <a:t>15</a:t>
             </a:fld>
             <a:endParaRPr lang="en-US"/>
           </a:p>
@@ -10813,6 +13045,2236 @@
 <file path=ppt/slides/slide2.xml><?xml version="1.0" encoding="utf-8"?>
 <p:sld xmlns:a="http://schemas.openxmlformats.org/drawingml/2006/main" xmlns:r="http://schemas.openxmlformats.org/officeDocument/2006/relationships" xmlns:p="http://schemas.openxmlformats.org/presentationml/2006/main">
   <p:cSld name="Slide 2">
+    <p:spTree>
+      <p:nvGrpSpPr>
+        <p:cNvPr id="1" name=""/>
+        <p:cNvGrpSpPr/>
+        <p:nvPr/>
+      </p:nvGrpSpPr>
+      <p:grpSpPr>
+        <a:xfrm>
+          <a:off x="0" y="0"/>
+          <a:ext cx="0" cy="0"/>
+          <a:chOff x="0" y="0"/>
+          <a:chExt cx="0" cy="0"/>
+        </a:xfrm>
+      </p:grpSpPr>
+      <p:sp>
+        <p:nvSpPr>
+          <p:cNvPr id="2" name="Text 0"/>
+          <p:cNvSpPr/>
+          <p:nvPr>
+            <p:ph idx="100" type="title" hasCustomPrompt="1"/>
+          </p:nvPr>
+        </p:nvSpPr>
+        <p:spPr>
+          <a:xfrm>
+            <a:off x="548640" y="274320"/>
+            <a:ext cx="11094415" cy="685800"/>
+          </a:xfrm>
+          <a:prstGeom prst="rect">
+            <a:avLst/>
+          </a:prstGeom>
+          <a:noFill/>
+          <a:ln/>
+        </p:spPr>
+        <p:txBody>
+          <a:bodyPr wrap="square" lIns="0" tIns="0" rIns="0" bIns="0" rtlCol="0" anchor="ctr"/>
+          <a:lstStyle/>
+          <a:p>
+            <a:pPr algn="l" indent="0" marL="0">
+              <a:buNone/>
+            </a:pPr>
+            <a:r>
+              <a:rPr lang="en-US" sz="2800" b="1" dirty="0">
+                <a:solidFill>
+                  <a:srgbClr val="1F2A37"/>
+                </a:solidFill>
+                <a:latin typeface="Microsoft YaHei" pitchFamily="34" charset="0"/>
+                <a:ea typeface="Microsoft YaHei" pitchFamily="34" charset="-122"/>
+                <a:cs typeface="Microsoft YaHei" pitchFamily="34" charset="-120"/>
+              </a:rPr>
+              <a:t>Text-to-SQL 与 MAVRA：不同层次的问题</a:t>
+            </a:r>
+            <a:endParaRPr lang="en-US" sz="2800" dirty="0"/>
+          </a:p>
+        </p:txBody>
+      </p:sp>
+      <p:sp>
+        <p:nvSpPr>
+          <p:cNvPr id="3" name="card Text-to-SQL"/>
+          <p:cNvSpPr/>
+          <p:nvPr/>
+        </p:nvSpPr>
+        <p:spPr>
+          <a:xfrm>
+            <a:off x="548640" y="1051560"/>
+            <a:ext cx="5364328" cy="2331720"/>
+          </a:xfrm>
+          <a:prstGeom prst="roundRect">
+            <a:avLst>
+              <a:gd name="adj" fmla="val 4706"/>
+            </a:avLst>
+          </a:prstGeom>
+          <a:solidFill>
+            <a:srgbClr val="F1F3F6"/>
+          </a:solidFill>
+          <a:ln w="12700">
+            <a:solidFill>
+              <a:srgbClr val="F1F3F6"/>
+            </a:solidFill>
+            <a:prstDash val="solid"/>
+          </a:ln>
+        </p:spPr>
+      </p:sp>
+      <p:sp>
+        <p:nvSpPr>
+          <p:cNvPr id="4" name="Text 2"/>
+          <p:cNvSpPr txBox="1"/>
+          <p:nvPr/>
+        </p:nvSpPr>
+        <p:spPr>
+          <a:xfrm>
+            <a:off x="868680" y="1170432"/>
+            <a:ext cx="4724248" cy="320040"/>
+          </a:xfrm>
+          <a:prstGeom prst="rect">
+            <a:avLst/>
+          </a:prstGeom>
+          <a:noFill/>
+          <a:ln/>
+        </p:spPr>
+        <p:txBody>
+          <a:bodyPr wrap="square" lIns="0" tIns="0" rIns="0" bIns="0" rtlCol="0" anchor="ctr"/>
+          <a:lstStyle/>
+          <a:p>
+            <a:pPr indent="0" marL="0">
+              <a:buNone/>
+            </a:pPr>
+            <a:r>
+              <a:rPr lang="en-US" sz="1500" b="1" dirty="0">
+                <a:solidFill>
+                  <a:srgbClr val="5B6573"/>
+                </a:solidFill>
+                <a:latin typeface="Microsoft YaHei" pitchFamily="34" charset="0"/>
+                <a:ea typeface="Microsoft YaHei" pitchFamily="34" charset="-122"/>
+                <a:cs typeface="Microsoft YaHei" pitchFamily="34" charset="-120"/>
+              </a:rPr>
+              <a:t>Text-to-SQL</a:t>
+            </a:r>
+            <a:endParaRPr lang="en-US" sz="1500" dirty="0"/>
+          </a:p>
+        </p:txBody>
+      </p:sp>
+      <p:sp>
+        <p:nvSpPr>
+          <p:cNvPr id="5" name="Text 3"/>
+          <p:cNvSpPr txBox="1"/>
+          <p:nvPr/>
+        </p:nvSpPr>
+        <p:spPr>
+          <a:xfrm>
+            <a:off x="868680" y="1481328"/>
+            <a:ext cx="4724248" cy="457200"/>
+          </a:xfrm>
+          <a:prstGeom prst="rect">
+            <a:avLst/>
+          </a:prstGeom>
+          <a:noFill/>
+          <a:ln/>
+        </p:spPr>
+        <p:txBody>
+          <a:bodyPr wrap="square" lIns="0" tIns="0" rIns="0" bIns="0" rtlCol="0" anchor="ctr"/>
+          <a:lstStyle/>
+          <a:p>
+            <a:pPr indent="0" marL="0">
+              <a:buNone/>
+            </a:pPr>
+            <a:r>
+              <a:rPr lang="en-US" sz="2000" b="1" dirty="0">
+                <a:solidFill>
+                  <a:srgbClr val="1F2A37"/>
+                </a:solidFill>
+                <a:latin typeface="Microsoft YaHei" pitchFamily="34" charset="0"/>
+                <a:ea typeface="Microsoft YaHei" pitchFamily="34" charset="-122"/>
+                <a:cs typeface="Microsoft YaHei" pitchFamily="34" charset="-120"/>
+              </a:rPr>
+              <a:t>将自然语言问题翻译为 SQL 查询</a:t>
+            </a:r>
+            <a:endParaRPr lang="en-US" sz="2000" dirty="0"/>
+          </a:p>
+        </p:txBody>
+      </p:sp>
+      <p:sp>
+        <p:nvSpPr>
+          <p:cNvPr id="6" name="Text 4"/>
+          <p:cNvSpPr txBox="1"/>
+          <p:nvPr/>
+        </p:nvSpPr>
+        <p:spPr>
+          <a:xfrm>
+            <a:off x="868680" y="2011680"/>
+            <a:ext cx="685800" cy="329184"/>
+          </a:xfrm>
+          <a:prstGeom prst="rect">
+            <a:avLst/>
+          </a:prstGeom>
+          <a:noFill/>
+          <a:ln/>
+        </p:spPr>
+        <p:txBody>
+          <a:bodyPr wrap="square" lIns="0" tIns="0" rIns="0" bIns="0" rtlCol="0" anchor="ctr"/>
+          <a:lstStyle/>
+          <a:p>
+            <a:pPr indent="0" marL="0">
+              <a:buNone/>
+            </a:pPr>
+            <a:r>
+              <a:rPr lang="en-US" sz="1400" b="1" dirty="0">
+                <a:solidFill>
+                  <a:srgbClr val="5B6573"/>
+                </a:solidFill>
+                <a:latin typeface="Microsoft YaHei" pitchFamily="34" charset="0"/>
+                <a:ea typeface="Microsoft YaHei" pitchFamily="34" charset="-122"/>
+                <a:cs typeface="Microsoft YaHei" pitchFamily="34" charset="-120"/>
+              </a:rPr>
+              <a:t>输入</a:t>
+            </a:r>
+            <a:endParaRPr lang="en-US" sz="1400" dirty="0"/>
+          </a:p>
+        </p:txBody>
+      </p:sp>
+      <p:sp>
+        <p:nvSpPr>
+          <p:cNvPr id="7" name="Text 5"/>
+          <p:cNvSpPr txBox="1"/>
+          <p:nvPr/>
+        </p:nvSpPr>
+        <p:spPr>
+          <a:xfrm>
+            <a:off x="1554480" y="2011680"/>
+            <a:ext cx="4038448" cy="329184"/>
+          </a:xfrm>
+          <a:prstGeom prst="rect">
+            <a:avLst/>
+          </a:prstGeom>
+          <a:noFill/>
+          <a:ln/>
+        </p:spPr>
+        <p:txBody>
+          <a:bodyPr wrap="square" lIns="0" tIns="0" rIns="0" bIns="0" rtlCol="0" anchor="ctr"/>
+          <a:lstStyle/>
+          <a:p>
+            <a:pPr indent="0" marL="0">
+              <a:buNone/>
+            </a:pPr>
+            <a:r>
+              <a:rPr lang="en-US" sz="1400" dirty="0">
+                <a:solidFill>
+                  <a:srgbClr val="1F2A37"/>
+                </a:solidFill>
+                <a:latin typeface="Microsoft YaHei" pitchFamily="34" charset="0"/>
+                <a:ea typeface="Microsoft YaHei" pitchFamily="34" charset="-122"/>
+                <a:cs typeface="Microsoft YaHei" pitchFamily="34" charset="-120"/>
+              </a:rPr>
+              <a:t>自然语言问题 + 数据库模式（可附示例查询）</a:t>
+            </a:r>
+            <a:endParaRPr lang="en-US" sz="1400" dirty="0"/>
+          </a:p>
+        </p:txBody>
+      </p:sp>
+      <p:sp>
+        <p:nvSpPr>
+          <p:cNvPr id="8" name="Text 6"/>
+          <p:cNvSpPr txBox="1"/>
+          <p:nvPr/>
+        </p:nvSpPr>
+        <p:spPr>
+          <a:xfrm>
+            <a:off x="868680" y="2359152"/>
+            <a:ext cx="685800" cy="329184"/>
+          </a:xfrm>
+          <a:prstGeom prst="rect">
+            <a:avLst/>
+          </a:prstGeom>
+          <a:noFill/>
+          <a:ln/>
+        </p:spPr>
+        <p:txBody>
+          <a:bodyPr wrap="square" lIns="0" tIns="0" rIns="0" bIns="0" rtlCol="0" anchor="ctr"/>
+          <a:lstStyle/>
+          <a:p>
+            <a:pPr indent="0" marL="0">
+              <a:buNone/>
+            </a:pPr>
+            <a:r>
+              <a:rPr lang="en-US" sz="1400" b="1" dirty="0">
+                <a:solidFill>
+                  <a:srgbClr val="5B6573"/>
+                </a:solidFill>
+                <a:latin typeface="Microsoft YaHei" pitchFamily="34" charset="0"/>
+                <a:ea typeface="Microsoft YaHei" pitchFamily="34" charset="-122"/>
+                <a:cs typeface="Microsoft YaHei" pitchFamily="34" charset="-120"/>
+              </a:rPr>
+              <a:t>输出</a:t>
+            </a:r>
+            <a:endParaRPr lang="en-US" sz="1400" dirty="0"/>
+          </a:p>
+        </p:txBody>
+      </p:sp>
+      <p:sp>
+        <p:nvSpPr>
+          <p:cNvPr id="9" name="Text 7"/>
+          <p:cNvSpPr txBox="1"/>
+          <p:nvPr/>
+        </p:nvSpPr>
+        <p:spPr>
+          <a:xfrm>
+            <a:off x="1554480" y="2359152"/>
+            <a:ext cx="4038448" cy="329184"/>
+          </a:xfrm>
+          <a:prstGeom prst="rect">
+            <a:avLst/>
+          </a:prstGeom>
+          <a:noFill/>
+          <a:ln/>
+        </p:spPr>
+        <p:txBody>
+          <a:bodyPr wrap="square" lIns="0" tIns="0" rIns="0" bIns="0" rtlCol="0" anchor="ctr"/>
+          <a:lstStyle/>
+          <a:p>
+            <a:pPr indent="0" marL="0">
+              <a:buNone/>
+            </a:pPr>
+            <a:r>
+              <a:rPr lang="en-US" sz="1400" dirty="0">
+                <a:solidFill>
+                  <a:srgbClr val="1F2A37"/>
+                </a:solidFill>
+                <a:latin typeface="Microsoft YaHei" pitchFamily="34" charset="0"/>
+                <a:ea typeface="Microsoft YaHei" pitchFamily="34" charset="-122"/>
+                <a:cs typeface="Microsoft YaHei" pitchFamily="34" charset="-120"/>
+              </a:rPr>
+              <a:t>一条 SQL 查询</a:t>
+            </a:r>
+            <a:endParaRPr lang="en-US" sz="1400" dirty="0"/>
+          </a:p>
+        </p:txBody>
+      </p:sp>
+      <p:sp>
+        <p:nvSpPr>
+          <p:cNvPr id="10" name="Text 8"/>
+          <p:cNvSpPr txBox="1"/>
+          <p:nvPr/>
+        </p:nvSpPr>
+        <p:spPr>
+          <a:xfrm>
+            <a:off x="868680" y="2706624"/>
+            <a:ext cx="685800" cy="329184"/>
+          </a:xfrm>
+          <a:prstGeom prst="rect">
+            <a:avLst/>
+          </a:prstGeom>
+          <a:noFill/>
+          <a:ln/>
+        </p:spPr>
+        <p:txBody>
+          <a:bodyPr wrap="square" lIns="0" tIns="0" rIns="0" bIns="0" rtlCol="0" anchor="ctr"/>
+          <a:lstStyle/>
+          <a:p>
+            <a:pPr indent="0" marL="0">
+              <a:buNone/>
+            </a:pPr>
+            <a:r>
+              <a:rPr lang="en-US" sz="1400" b="1" dirty="0">
+                <a:solidFill>
+                  <a:srgbClr val="5B6573"/>
+                </a:solidFill>
+                <a:latin typeface="Microsoft YaHei" pitchFamily="34" charset="0"/>
+                <a:ea typeface="Microsoft YaHei" pitchFamily="34" charset="-122"/>
+                <a:cs typeface="Microsoft YaHei" pitchFamily="34" charset="-120"/>
+              </a:rPr>
+              <a:t>状态</a:t>
+            </a:r>
+            <a:endParaRPr lang="en-US" sz="1400" dirty="0"/>
+          </a:p>
+        </p:txBody>
+      </p:sp>
+      <p:sp>
+        <p:nvSpPr>
+          <p:cNvPr id="11" name="Text 9"/>
+          <p:cNvSpPr txBox="1"/>
+          <p:nvPr/>
+        </p:nvSpPr>
+        <p:spPr>
+          <a:xfrm>
+            <a:off x="1554480" y="2706624"/>
+            <a:ext cx="4038448" cy="329184"/>
+          </a:xfrm>
+          <a:prstGeom prst="rect">
+            <a:avLst/>
+          </a:prstGeom>
+          <a:noFill/>
+          <a:ln/>
+        </p:spPr>
+        <p:txBody>
+          <a:bodyPr wrap="square" lIns="0" tIns="0" rIns="0" bIns="0" rtlCol="0" anchor="ctr"/>
+          <a:lstStyle/>
+          <a:p>
+            <a:pPr indent="0" marL="0">
+              <a:buNone/>
+            </a:pPr>
+            <a:r>
+              <a:rPr lang="en-US" sz="1400" dirty="0">
+                <a:solidFill>
+                  <a:srgbClr val="1F2A37"/>
+                </a:solidFill>
+                <a:latin typeface="Microsoft YaHei" pitchFamily="34" charset="0"/>
+                <a:ea typeface="Microsoft YaHei" pitchFamily="34" charset="-122"/>
+                <a:cs typeface="Microsoft YaHei" pitchFamily="34" charset="-120"/>
+              </a:rPr>
+              <a:t>无状态：每个问题独立处理，不保留结果</a:t>
+            </a:r>
+            <a:endParaRPr lang="en-US" sz="1400" dirty="0"/>
+          </a:p>
+        </p:txBody>
+      </p:sp>
+      <p:sp>
+        <p:nvSpPr>
+          <p:cNvPr id="12" name="Text 10"/>
+          <p:cNvSpPr txBox="1"/>
+          <p:nvPr/>
+        </p:nvSpPr>
+        <p:spPr>
+          <a:xfrm>
+            <a:off x="868680" y="3054096"/>
+            <a:ext cx="685800" cy="329184"/>
+          </a:xfrm>
+          <a:prstGeom prst="rect">
+            <a:avLst/>
+          </a:prstGeom>
+          <a:noFill/>
+          <a:ln/>
+        </p:spPr>
+        <p:txBody>
+          <a:bodyPr wrap="square" lIns="0" tIns="0" rIns="0" bIns="0" rtlCol="0" anchor="ctr"/>
+          <a:lstStyle/>
+          <a:p>
+            <a:pPr indent="0" marL="0">
+              <a:buNone/>
+            </a:pPr>
+            <a:r>
+              <a:rPr lang="en-US" sz="1400" b="1" dirty="0">
+                <a:solidFill>
+                  <a:srgbClr val="5B6573"/>
+                </a:solidFill>
+                <a:latin typeface="Microsoft YaHei" pitchFamily="34" charset="0"/>
+                <a:ea typeface="Microsoft YaHei" pitchFamily="34" charset="-122"/>
+                <a:cs typeface="Microsoft YaHei" pitchFamily="34" charset="-120"/>
+              </a:rPr>
+              <a:t>关注</a:t>
+            </a:r>
+            <a:endParaRPr lang="en-US" sz="1400" dirty="0"/>
+          </a:p>
+        </p:txBody>
+      </p:sp>
+      <p:sp>
+        <p:nvSpPr>
+          <p:cNvPr id="13" name="Text 11"/>
+          <p:cNvSpPr txBox="1"/>
+          <p:nvPr/>
+        </p:nvSpPr>
+        <p:spPr>
+          <a:xfrm>
+            <a:off x="1554480" y="3054096"/>
+            <a:ext cx="4038448" cy="329184"/>
+          </a:xfrm>
+          <a:prstGeom prst="rect">
+            <a:avLst/>
+          </a:prstGeom>
+          <a:noFill/>
+          <a:ln/>
+        </p:spPr>
+        <p:txBody>
+          <a:bodyPr wrap="square" lIns="0" tIns="0" rIns="0" bIns="0" rtlCol="0" anchor="ctr"/>
+          <a:lstStyle/>
+          <a:p>
+            <a:pPr indent="0" marL="0">
+              <a:buNone/>
+            </a:pPr>
+            <a:r>
+              <a:rPr lang="en-US" sz="1400" dirty="0">
+                <a:solidFill>
+                  <a:srgbClr val="1F2A37"/>
+                </a:solidFill>
+                <a:latin typeface="Microsoft YaHei" pitchFamily="34" charset="0"/>
+                <a:ea typeface="Microsoft YaHei" pitchFamily="34" charset="-122"/>
+                <a:cs typeface="Microsoft YaHei" pitchFamily="34" charset="-120"/>
+              </a:rPr>
+              <a:t>单条查询的正确性</a:t>
+            </a:r>
+            <a:endParaRPr lang="en-US" sz="1400" dirty="0"/>
+          </a:p>
+        </p:txBody>
+      </p:sp>
+      <p:sp>
+        <p:nvSpPr>
+          <p:cNvPr id="14" name="card MAVRA"/>
+          <p:cNvSpPr/>
+          <p:nvPr/>
+        </p:nvSpPr>
+        <p:spPr>
+          <a:xfrm>
+            <a:off x="6278728" y="1051560"/>
+            <a:ext cx="5364328" cy="2331720"/>
+          </a:xfrm>
+          <a:prstGeom prst="roundRect">
+            <a:avLst>
+              <a:gd name="adj" fmla="val 4706"/>
+            </a:avLst>
+          </a:prstGeom>
+          <a:solidFill>
+            <a:srgbClr val="E8F0FA"/>
+          </a:solidFill>
+          <a:ln w="12700">
+            <a:solidFill>
+              <a:srgbClr val="E8F0FA"/>
+            </a:solidFill>
+            <a:prstDash val="solid"/>
+          </a:ln>
+        </p:spPr>
+      </p:sp>
+      <p:sp>
+        <p:nvSpPr>
+          <p:cNvPr id="15" name="Text 13"/>
+          <p:cNvSpPr txBox="1"/>
+          <p:nvPr/>
+        </p:nvSpPr>
+        <p:spPr>
+          <a:xfrm>
+            <a:off x="6598768" y="1170432"/>
+            <a:ext cx="4724248" cy="320040"/>
+          </a:xfrm>
+          <a:prstGeom prst="rect">
+            <a:avLst/>
+          </a:prstGeom>
+          <a:noFill/>
+          <a:ln/>
+        </p:spPr>
+        <p:txBody>
+          <a:bodyPr wrap="square" lIns="0" tIns="0" rIns="0" bIns="0" rtlCol="0" anchor="ctr"/>
+          <a:lstStyle/>
+          <a:p>
+            <a:pPr indent="0" marL="0">
+              <a:buNone/>
+            </a:pPr>
+            <a:r>
+              <a:rPr lang="en-US" sz="1500" b="1" dirty="0">
+                <a:solidFill>
+                  <a:srgbClr val="1D5BA6"/>
+                </a:solidFill>
+                <a:latin typeface="Microsoft YaHei" pitchFamily="34" charset="0"/>
+                <a:ea typeface="Microsoft YaHei" pitchFamily="34" charset="-122"/>
+                <a:cs typeface="Microsoft YaHei" pitchFamily="34" charset="-120"/>
+              </a:rPr>
+              <a:t>MAVRA</a:t>
+            </a:r>
+            <a:endParaRPr lang="en-US" sz="1500" dirty="0"/>
+          </a:p>
+        </p:txBody>
+      </p:sp>
+      <p:sp>
+        <p:nvSpPr>
+          <p:cNvPr id="16" name="Text 14"/>
+          <p:cNvSpPr txBox="1"/>
+          <p:nvPr/>
+        </p:nvSpPr>
+        <p:spPr>
+          <a:xfrm>
+            <a:off x="6598768" y="1481328"/>
+            <a:ext cx="4724248" cy="457200"/>
+          </a:xfrm>
+          <a:prstGeom prst="rect">
+            <a:avLst/>
+          </a:prstGeom>
+          <a:noFill/>
+          <a:ln/>
+        </p:spPr>
+        <p:txBody>
+          <a:bodyPr wrap="square" lIns="0" tIns="0" rIns="0" bIns="0" rtlCol="0" anchor="ctr"/>
+          <a:lstStyle/>
+          <a:p>
+            <a:pPr indent="0" marL="0">
+              <a:buNone/>
+            </a:pPr>
+            <a:r>
+              <a:rPr lang="en-US" sz="2000" b="1" dirty="0">
+                <a:solidFill>
+                  <a:srgbClr val="1F2A37"/>
+                </a:solidFill>
+                <a:latin typeface="Microsoft YaHei" pitchFamily="34" charset="0"/>
+                <a:ea typeface="Microsoft YaHei" pitchFamily="34" charset="-122"/>
+                <a:cs typeface="Microsoft YaHei" pitchFamily="34" charset="-120"/>
+              </a:rPr>
+              <a:t>智能体与数据库之间的记忆中间件</a:t>
+            </a:r>
+            <a:endParaRPr lang="en-US" sz="2000" dirty="0"/>
+          </a:p>
+        </p:txBody>
+      </p:sp>
+      <p:sp>
+        <p:nvSpPr>
+          <p:cNvPr id="17" name="Text 15"/>
+          <p:cNvSpPr txBox="1"/>
+          <p:nvPr/>
+        </p:nvSpPr>
+        <p:spPr>
+          <a:xfrm>
+            <a:off x="6598768" y="2011680"/>
+            <a:ext cx="685800" cy="329184"/>
+          </a:xfrm>
+          <a:prstGeom prst="rect">
+            <a:avLst/>
+          </a:prstGeom>
+          <a:noFill/>
+          <a:ln/>
+        </p:spPr>
+        <p:txBody>
+          <a:bodyPr wrap="square" lIns="0" tIns="0" rIns="0" bIns="0" rtlCol="0" anchor="ctr"/>
+          <a:lstStyle/>
+          <a:p>
+            <a:pPr indent="0" marL="0">
+              <a:buNone/>
+            </a:pPr>
+            <a:r>
+              <a:rPr lang="en-US" sz="1400" b="1" dirty="0">
+                <a:solidFill>
+                  <a:srgbClr val="1D5BA6"/>
+                </a:solidFill>
+                <a:latin typeface="Microsoft YaHei" pitchFamily="34" charset="0"/>
+                <a:ea typeface="Microsoft YaHei" pitchFamily="34" charset="-122"/>
+                <a:cs typeface="Microsoft YaHei" pitchFamily="34" charset="-120"/>
+              </a:rPr>
+              <a:t>位置</a:t>
+            </a:r>
+            <a:endParaRPr lang="en-US" sz="1400" dirty="0"/>
+          </a:p>
+        </p:txBody>
+      </p:sp>
+      <p:sp>
+        <p:nvSpPr>
+          <p:cNvPr id="18" name="Text 16"/>
+          <p:cNvSpPr txBox="1"/>
+          <p:nvPr/>
+        </p:nvSpPr>
+        <p:spPr>
+          <a:xfrm>
+            <a:off x="7284568" y="2011680"/>
+            <a:ext cx="4038448" cy="329184"/>
+          </a:xfrm>
+          <a:prstGeom prst="rect">
+            <a:avLst/>
+          </a:prstGeom>
+          <a:noFill/>
+          <a:ln/>
+        </p:spPr>
+        <p:txBody>
+          <a:bodyPr wrap="square" lIns="0" tIns="0" rIns="0" bIns="0" rtlCol="0" anchor="ctr"/>
+          <a:lstStyle/>
+          <a:p>
+            <a:pPr indent="0" marL="0">
+              <a:buNone/>
+            </a:pPr>
+            <a:r>
+              <a:rPr lang="en-US" sz="1400" dirty="0">
+                <a:solidFill>
+                  <a:srgbClr val="1F2A37"/>
+                </a:solidFill>
+                <a:latin typeface="Microsoft YaHei" pitchFamily="34" charset="0"/>
+                <a:ea typeface="Microsoft YaHei" pitchFamily="34" charset="-122"/>
+                <a:cs typeface="Microsoft YaHei" pitchFamily="34" charset="-120"/>
+              </a:rPr>
+              <a:t>智能体对数据库的全部访问经由它转发</a:t>
+            </a:r>
+            <a:endParaRPr lang="en-US" sz="1400" dirty="0"/>
+          </a:p>
+        </p:txBody>
+      </p:sp>
+      <p:sp>
+        <p:nvSpPr>
+          <p:cNvPr id="19" name="Text 17"/>
+          <p:cNvSpPr txBox="1"/>
+          <p:nvPr/>
+        </p:nvSpPr>
+        <p:spPr>
+          <a:xfrm>
+            <a:off x="6598768" y="2359152"/>
+            <a:ext cx="685800" cy="329184"/>
+          </a:xfrm>
+          <a:prstGeom prst="rect">
+            <a:avLst/>
+          </a:prstGeom>
+          <a:noFill/>
+          <a:ln/>
+        </p:spPr>
+        <p:txBody>
+          <a:bodyPr wrap="square" lIns="0" tIns="0" rIns="0" bIns="0" rtlCol="0" anchor="ctr"/>
+          <a:lstStyle/>
+          <a:p>
+            <a:pPr indent="0" marL="0">
+              <a:buNone/>
+            </a:pPr>
+            <a:r>
+              <a:rPr lang="en-US" sz="1400" b="1" dirty="0">
+                <a:solidFill>
+                  <a:srgbClr val="1D5BA6"/>
+                </a:solidFill>
+                <a:latin typeface="Microsoft YaHei" pitchFamily="34" charset="0"/>
+                <a:ea typeface="Microsoft YaHei" pitchFamily="34" charset="-122"/>
+                <a:cs typeface="Microsoft YaHei" pitchFamily="34" charset="-120"/>
+              </a:rPr>
+              <a:t>记忆</a:t>
+            </a:r>
+            <a:endParaRPr lang="en-US" sz="1400" dirty="0"/>
+          </a:p>
+        </p:txBody>
+      </p:sp>
+      <p:sp>
+        <p:nvSpPr>
+          <p:cNvPr id="20" name="Text 18"/>
+          <p:cNvSpPr txBox="1"/>
+          <p:nvPr/>
+        </p:nvSpPr>
+        <p:spPr>
+          <a:xfrm>
+            <a:off x="7284568" y="2359152"/>
+            <a:ext cx="4038448" cy="329184"/>
+          </a:xfrm>
+          <a:prstGeom prst="rect">
+            <a:avLst/>
+          </a:prstGeom>
+          <a:noFill/>
+          <a:ln/>
+        </p:spPr>
+        <p:txBody>
+          <a:bodyPr wrap="square" lIns="0" tIns="0" rIns="0" bIns="0" rtlCol="0" anchor="ctr"/>
+          <a:lstStyle/>
+          <a:p>
+            <a:pPr indent="0" marL="0">
+              <a:buNone/>
+            </a:pPr>
+            <a:r>
+              <a:rPr lang="en-US" sz="1400" dirty="0">
+                <a:solidFill>
+                  <a:srgbClr val="1F2A37"/>
+                </a:solidFill>
+                <a:latin typeface="Microsoft YaHei" pitchFamily="34" charset="0"/>
+                <a:ea typeface="Microsoft YaHei" pitchFamily="34" charset="-122"/>
+                <a:cs typeface="Microsoft YaHei" pitchFamily="34" charset="-120"/>
+              </a:rPr>
+              <a:t>智能体获得的数据库知识：表统计、连接路径、指标定义</a:t>
+            </a:r>
+            <a:endParaRPr lang="en-US" sz="1400" dirty="0"/>
+          </a:p>
+        </p:txBody>
+      </p:sp>
+      <p:sp>
+        <p:nvSpPr>
+          <p:cNvPr id="21" name="Text 19"/>
+          <p:cNvSpPr txBox="1"/>
+          <p:nvPr/>
+        </p:nvSpPr>
+        <p:spPr>
+          <a:xfrm>
+            <a:off x="6598768" y="2706624"/>
+            <a:ext cx="685800" cy="329184"/>
+          </a:xfrm>
+          <a:prstGeom prst="rect">
+            <a:avLst/>
+          </a:prstGeom>
+          <a:noFill/>
+          <a:ln/>
+        </p:spPr>
+        <p:txBody>
+          <a:bodyPr wrap="square" lIns="0" tIns="0" rIns="0" bIns="0" rtlCol="0" anchor="ctr"/>
+          <a:lstStyle/>
+          <a:p>
+            <a:pPr indent="0" marL="0">
+              <a:buNone/>
+            </a:pPr>
+            <a:r>
+              <a:rPr lang="en-US" sz="1400" b="1" dirty="0">
+                <a:solidFill>
+                  <a:srgbClr val="1D5BA6"/>
+                </a:solidFill>
+                <a:latin typeface="Microsoft YaHei" pitchFamily="34" charset="0"/>
+                <a:ea typeface="Microsoft YaHei" pitchFamily="34" charset="-122"/>
+                <a:cs typeface="Microsoft YaHei" pitchFamily="34" charset="-120"/>
+              </a:rPr>
+              <a:t>共享</a:t>
+            </a:r>
+            <a:endParaRPr lang="en-US" sz="1400" dirty="0"/>
+          </a:p>
+        </p:txBody>
+      </p:sp>
+      <p:sp>
+        <p:nvSpPr>
+          <p:cNvPr id="22" name="Text 20"/>
+          <p:cNvSpPr txBox="1"/>
+          <p:nvPr/>
+        </p:nvSpPr>
+        <p:spPr>
+          <a:xfrm>
+            <a:off x="7284568" y="2706624"/>
+            <a:ext cx="4038448" cy="329184"/>
+          </a:xfrm>
+          <a:prstGeom prst="rect">
+            <a:avLst/>
+          </a:prstGeom>
+          <a:noFill/>
+          <a:ln/>
+        </p:spPr>
+        <p:txBody>
+          <a:bodyPr wrap="square" lIns="0" tIns="0" rIns="0" bIns="0" rtlCol="0" anchor="ctr"/>
+          <a:lstStyle/>
+          <a:p>
+            <a:pPr indent="0" marL="0">
+              <a:buNone/>
+            </a:pPr>
+            <a:r>
+              <a:rPr lang="en-US" sz="1400" dirty="0">
+                <a:solidFill>
+                  <a:srgbClr val="1F2A37"/>
+                </a:solidFill>
+                <a:latin typeface="Microsoft YaHei" pitchFamily="34" charset="0"/>
+                <a:ea typeface="Microsoft YaHei" pitchFamily="34" charset="-122"/>
+                <a:cs typeface="Microsoft YaHei" pitchFamily="34" charset="-120"/>
+              </a:rPr>
+              <a:t>跨智能体、跨会话共享</a:t>
+            </a:r>
+            <a:endParaRPr lang="en-US" sz="1400" dirty="0"/>
+          </a:p>
+        </p:txBody>
+      </p:sp>
+      <p:sp>
+        <p:nvSpPr>
+          <p:cNvPr id="23" name="Text 21"/>
+          <p:cNvSpPr txBox="1"/>
+          <p:nvPr/>
+        </p:nvSpPr>
+        <p:spPr>
+          <a:xfrm>
+            <a:off x="6598768" y="3054096"/>
+            <a:ext cx="685800" cy="329184"/>
+          </a:xfrm>
+          <a:prstGeom prst="rect">
+            <a:avLst/>
+          </a:prstGeom>
+          <a:noFill/>
+          <a:ln/>
+        </p:spPr>
+        <p:txBody>
+          <a:bodyPr wrap="square" lIns="0" tIns="0" rIns="0" bIns="0" rtlCol="0" anchor="ctr"/>
+          <a:lstStyle/>
+          <a:p>
+            <a:pPr indent="0" marL="0">
+              <a:buNone/>
+            </a:pPr>
+            <a:r>
+              <a:rPr lang="en-US" sz="1400" b="1" dirty="0">
+                <a:solidFill>
+                  <a:srgbClr val="1D5BA6"/>
+                </a:solidFill>
+                <a:latin typeface="Microsoft YaHei" pitchFamily="34" charset="0"/>
+                <a:ea typeface="Microsoft YaHei" pitchFamily="34" charset="-122"/>
+                <a:cs typeface="Microsoft YaHei" pitchFamily="34" charset="-120"/>
+              </a:rPr>
+              <a:t>关注</a:t>
+            </a:r>
+            <a:endParaRPr lang="en-US" sz="1400" dirty="0"/>
+          </a:p>
+        </p:txBody>
+      </p:sp>
+      <p:sp>
+        <p:nvSpPr>
+          <p:cNvPr id="24" name="Text 22"/>
+          <p:cNvSpPr txBox="1"/>
+          <p:nvPr/>
+        </p:nvSpPr>
+        <p:spPr>
+          <a:xfrm>
+            <a:off x="7284568" y="3054096"/>
+            <a:ext cx="4038448" cy="329184"/>
+          </a:xfrm>
+          <a:prstGeom prst="rect">
+            <a:avLst/>
+          </a:prstGeom>
+          <a:noFill/>
+          <a:ln/>
+        </p:spPr>
+        <p:txBody>
+          <a:bodyPr wrap="square" lIns="0" tIns="0" rIns="0" bIns="0" rtlCol="0" anchor="ctr"/>
+          <a:lstStyle/>
+          <a:p>
+            <a:pPr indent="0" marL="0">
+              <a:buNone/>
+            </a:pPr>
+            <a:r>
+              <a:rPr lang="en-US" sz="1400" dirty="0">
+                <a:solidFill>
+                  <a:srgbClr val="1F2A37"/>
+                </a:solidFill>
+                <a:latin typeface="Microsoft YaHei" pitchFamily="34" charset="0"/>
+                <a:ea typeface="Microsoft YaHei" pitchFamily="34" charset="-122"/>
+                <a:cs typeface="Microsoft YaHei" pitchFamily="34" charset="-120"/>
+              </a:rPr>
+              <a:t>已有知识在当前数据上的有效性</a:t>
+            </a:r>
+            <a:endParaRPr lang="en-US" sz="1400" dirty="0"/>
+          </a:p>
+        </p:txBody>
+      </p:sp>
+      <p:sp>
+        <p:nvSpPr>
+          <p:cNvPr id="25" name="Text 23"/>
+          <p:cNvSpPr txBox="1"/>
+          <p:nvPr/>
+        </p:nvSpPr>
+        <p:spPr>
+          <a:xfrm>
+            <a:off x="548640" y="3474720"/>
+            <a:ext cx="11094415" cy="320040"/>
+          </a:xfrm>
+          <a:prstGeom prst="rect">
+            <a:avLst/>
+          </a:prstGeom>
+          <a:noFill/>
+          <a:ln/>
+        </p:spPr>
+        <p:txBody>
+          <a:bodyPr wrap="square" lIns="0" tIns="0" rIns="0" bIns="0" rtlCol="0" anchor="ctr"/>
+          <a:lstStyle/>
+          <a:p>
+            <a:pPr indent="0" marL="0">
+              <a:buNone/>
+            </a:pPr>
+            <a:r>
+              <a:rPr lang="en-US" sz="1500" b="1" dirty="0">
+                <a:solidFill>
+                  <a:srgbClr val="1D5BA6"/>
+                </a:solidFill>
+                <a:latin typeface="Microsoft YaHei" pitchFamily="34" charset="0"/>
+                <a:ea typeface="Microsoft YaHei" pitchFamily="34" charset="-122"/>
+                <a:cs typeface="Microsoft YaHei" pitchFamily="34" charset="-120"/>
+              </a:rPr>
+              <a:t>实验记录：同一问题“9 月的门店营业额是多少？”（只给名称）三次独立求解</a:t>
+            </a:r>
+            <a:endParaRPr lang="en-US" sz="1500" dirty="0"/>
+          </a:p>
+        </p:txBody>
+      </p:sp>
+      <p:graphicFrame>
+        <p:nvGraphicFramePr>
+          <p:cNvPr id="3" name="Table 0"/>
+          <p:cNvGraphicFramePr>
+            <a:graphicFrameLocks noGrp="1"/>
+          </p:cNvGraphicFramePr>
+          <p:nvPr>
+            <p:extLst>
+              <p:ext uri="{D42A27DB-BD31-4B8C-83A1-F6EECF244321}">
+                <p14:modId xmlns:p14="http://schemas.microsoft.com/office/powerpoint/2010/main" val="1579011935"/>
+              </p:ext>
+            </p:extLst>
+          </p:nvPr>
+        </p:nvGraphicFramePr>
+        <p:xfrm>
+          <a:off x="548640" y="3794760"/>
+          <a:ext cx="11094415" cy="914400"/>
+        </p:xfrm>
+        <a:graphic>
+          <a:graphicData uri="http://schemas.openxmlformats.org/drawingml/2006/table">
+            <a:tbl>
+              <a:tblPr/>
+              <a:tblGrid>
+                <a:gridCol w="2743200"/>
+                <a:gridCol w="5486400"/>
+                <a:gridCol w="1828800"/>
+                <a:gridCol w="1036015"/>
+              </a:tblGrid>
+              <a:tr h="0">
+                <a:tc>
+                  <a:txBody>
+                    <a:bodyPr/>
+                    <a:lstStyle/>
+                    <a:p>
+                      <a:pPr indent="0" marL="0">
+                        <a:buNone/>
+                      </a:pPr>
+                      <a:endParaRPr lang="en-US" sz="1200" dirty="0">
+                        <a:latin typeface="Microsoft YaHei" charset="0"/>
+                        <a:ea typeface="Microsoft YaHei" charset="0"/>
+                        <a:cs typeface="Microsoft YaHei" charset="0"/>
+                      </a:endParaRPr>
+                    </a:p>
+                  </a:txBody>
+                  <a:tcPr marL="91440" marR="91440" marT="54864" marB="54864" anchor="ctr">
+                    <a:lnL w="12700" cap="flat" cmpd="sng" algn="ctr">
+                      <a:solidFill>
+                        <a:srgbClr val="D5DBE3"/>
+                      </a:solidFill>
+                      <a:prstDash val="solid"/>
+                      <a:round/>
+                      <a:headEnd type="none" w="med" len="med"/>
+                      <a:tailEnd type="none" w="med" len="med"/>
+                    </a:lnL>
+                    <a:lnR w="12700" cap="flat" cmpd="sng" algn="ctr">
+                      <a:solidFill>
+                        <a:srgbClr val="D5DBE3"/>
+                      </a:solidFill>
+                      <a:prstDash val="solid"/>
+                      <a:round/>
+                      <a:headEnd type="none" w="med" len="med"/>
+                      <a:tailEnd type="none" w="med" len="med"/>
+                    </a:lnR>
+                    <a:lnT w="12700" cap="flat" cmpd="sng" algn="ctr">
+                      <a:solidFill>
+                        <a:srgbClr val="D5DBE3"/>
+                      </a:solidFill>
+                      <a:prstDash val="solid"/>
+                      <a:round/>
+                      <a:headEnd type="none" w="med" len="med"/>
+                      <a:tailEnd type="none" w="med" len="med"/>
+                    </a:lnT>
+                    <a:lnB w="12700" cap="flat" cmpd="sng" algn="ctr">
+                      <a:solidFill>
+                        <a:srgbClr val="D5DBE3"/>
+                      </a:solidFill>
+                      <a:prstDash val="solid"/>
+                      <a:round/>
+                      <a:headEnd type="none" w="med" len="med"/>
+                      <a:tailEnd type="none" w="med" len="med"/>
+                    </a:lnB>
+                    <a:solidFill>
+                      <a:srgbClr val="F1F3F6"/>
+                    </a:solidFill>
+                  </a:tcPr>
+                </a:tc>
+                <a:tc>
+                  <a:txBody>
+                    <a:bodyPr/>
+                    <a:lstStyle/>
+                    <a:p>
+                      <a:pPr indent="0" marL="0">
+                        <a:buNone/>
+                      </a:pPr>
+                      <a:r>
+                        <a:rPr lang="en-US" sz="1200" b="1" dirty="0">
+                          <a:solidFill>
+                            <a:srgbClr val="1F2A37"/>
+                          </a:solidFill>
+                          <a:latin typeface="Microsoft YaHei" pitchFamily="34" charset="0"/>
+                          <a:ea typeface="Microsoft YaHei" pitchFamily="34" charset="-122"/>
+                          <a:cs typeface="Microsoft YaHei" pitchFamily="34" charset="-120"/>
+                        </a:rPr>
+                        <a:t>所选度量列</a:t>
+                      </a:r>
+                      <a:endParaRPr lang="en-US" sz="1200" dirty="0">
+                        <a:latin typeface="Microsoft YaHei" charset="0"/>
+                        <a:ea typeface="Microsoft YaHei" charset="0"/>
+                        <a:cs typeface="Microsoft YaHei" charset="0"/>
+                      </a:endParaRPr>
+                    </a:p>
+                  </a:txBody>
+                  <a:tcPr marL="91440" marR="91440" marT="54864" marB="54864" anchor="ctr">
+                    <a:lnL w="12700" cap="flat" cmpd="sng" algn="ctr">
+                      <a:solidFill>
+                        <a:srgbClr val="D5DBE3"/>
+                      </a:solidFill>
+                      <a:prstDash val="solid"/>
+                      <a:round/>
+                      <a:headEnd type="none" w="med" len="med"/>
+                      <a:tailEnd type="none" w="med" len="med"/>
+                    </a:lnL>
+                    <a:lnR w="12700" cap="flat" cmpd="sng" algn="ctr">
+                      <a:solidFill>
+                        <a:srgbClr val="D5DBE3"/>
+                      </a:solidFill>
+                      <a:prstDash val="solid"/>
+                      <a:round/>
+                      <a:headEnd type="none" w="med" len="med"/>
+                      <a:tailEnd type="none" w="med" len="med"/>
+                    </a:lnR>
+                    <a:lnT w="12700" cap="flat" cmpd="sng" algn="ctr">
+                      <a:solidFill>
+                        <a:srgbClr val="D5DBE3"/>
+                      </a:solidFill>
+                      <a:prstDash val="solid"/>
+                      <a:round/>
+                      <a:headEnd type="none" w="med" len="med"/>
+                      <a:tailEnd type="none" w="med" len="med"/>
+                    </a:lnT>
+                    <a:lnB w="12700" cap="flat" cmpd="sng" algn="ctr">
+                      <a:solidFill>
+                        <a:srgbClr val="D5DBE3"/>
+                      </a:solidFill>
+                      <a:prstDash val="solid"/>
+                      <a:round/>
+                      <a:headEnd type="none" w="med" len="med"/>
+                      <a:tailEnd type="none" w="med" len="med"/>
+                    </a:lnB>
+                    <a:solidFill>
+                      <a:srgbClr val="F1F3F6"/>
+                    </a:solidFill>
+                  </a:tcPr>
+                </a:tc>
+                <a:tc>
+                  <a:txBody>
+                    <a:bodyPr/>
+                    <a:lstStyle/>
+                    <a:p>
+                      <a:pPr indent="0" marL="0">
+                        <a:buNone/>
+                      </a:pPr>
+                      <a:r>
+                        <a:rPr lang="en-US" sz="1200" b="1" dirty="0">
+                          <a:solidFill>
+                            <a:srgbClr val="1F2A37"/>
+                          </a:solidFill>
+                          <a:latin typeface="Microsoft YaHei" pitchFamily="34" charset="0"/>
+                          <a:ea typeface="Microsoft YaHei" pitchFamily="34" charset="-122"/>
+                          <a:cs typeface="Microsoft YaHei" pitchFamily="34" charset="-120"/>
+                        </a:rPr>
+                        <a:t>答案</a:t>
+                      </a:r>
+                      <a:endParaRPr lang="en-US" sz="1200" dirty="0">
+                        <a:latin typeface="Microsoft YaHei" charset="0"/>
+                        <a:ea typeface="Microsoft YaHei" charset="0"/>
+                        <a:cs typeface="Microsoft YaHei" charset="0"/>
+                      </a:endParaRPr>
+                    </a:p>
+                  </a:txBody>
+                  <a:tcPr marL="91440" marR="91440" marT="54864" marB="54864" anchor="ctr">
+                    <a:lnL w="12700" cap="flat" cmpd="sng" algn="ctr">
+                      <a:solidFill>
+                        <a:srgbClr val="D5DBE3"/>
+                      </a:solidFill>
+                      <a:prstDash val="solid"/>
+                      <a:round/>
+                      <a:headEnd type="none" w="med" len="med"/>
+                      <a:tailEnd type="none" w="med" len="med"/>
+                    </a:lnL>
+                    <a:lnR w="12700" cap="flat" cmpd="sng" algn="ctr">
+                      <a:solidFill>
+                        <a:srgbClr val="D5DBE3"/>
+                      </a:solidFill>
+                      <a:prstDash val="solid"/>
+                      <a:round/>
+                      <a:headEnd type="none" w="med" len="med"/>
+                      <a:tailEnd type="none" w="med" len="med"/>
+                    </a:lnR>
+                    <a:lnT w="12700" cap="flat" cmpd="sng" algn="ctr">
+                      <a:solidFill>
+                        <a:srgbClr val="D5DBE3"/>
+                      </a:solidFill>
+                      <a:prstDash val="solid"/>
+                      <a:round/>
+                      <a:headEnd type="none" w="med" len="med"/>
+                      <a:tailEnd type="none" w="med" len="med"/>
+                    </a:lnT>
+                    <a:lnB w="12700" cap="flat" cmpd="sng" algn="ctr">
+                      <a:solidFill>
+                        <a:srgbClr val="D5DBE3"/>
+                      </a:solidFill>
+                      <a:prstDash val="solid"/>
+                      <a:round/>
+                      <a:headEnd type="none" w="med" len="med"/>
+                      <a:tailEnd type="none" w="med" len="med"/>
+                    </a:lnB>
+                    <a:solidFill>
+                      <a:srgbClr val="F1F3F6"/>
+                    </a:solidFill>
+                  </a:tcPr>
+                </a:tc>
+                <a:tc>
+                  <a:txBody>
+                    <a:bodyPr/>
+                    <a:lstStyle/>
+                    <a:p>
+                      <a:pPr indent="0" marL="0">
+                        <a:buNone/>
+                      </a:pPr>
+                      <a:r>
+                        <a:rPr lang="en-US" sz="1200" b="1" dirty="0">
+                          <a:solidFill>
+                            <a:srgbClr val="1F2A37"/>
+                          </a:solidFill>
+                          <a:latin typeface="Microsoft YaHei" pitchFamily="34" charset="0"/>
+                          <a:ea typeface="Microsoft YaHei" pitchFamily="34" charset="-122"/>
+                          <a:cs typeface="Microsoft YaHei" pitchFamily="34" charset="-120"/>
+                        </a:rPr>
+                        <a:t>轮数</a:t>
+                      </a:r>
+                      <a:endParaRPr lang="en-US" sz="1200" dirty="0">
+                        <a:latin typeface="Microsoft YaHei" charset="0"/>
+                        <a:ea typeface="Microsoft YaHei" charset="0"/>
+                        <a:cs typeface="Microsoft YaHei" charset="0"/>
+                      </a:endParaRPr>
+                    </a:p>
+                  </a:txBody>
+                  <a:tcPr marL="91440" marR="91440" marT="54864" marB="54864" anchor="ctr">
+                    <a:lnL w="12700" cap="flat" cmpd="sng" algn="ctr">
+                      <a:solidFill>
+                        <a:srgbClr val="D5DBE3"/>
+                      </a:solidFill>
+                      <a:prstDash val="solid"/>
+                      <a:round/>
+                      <a:headEnd type="none" w="med" len="med"/>
+                      <a:tailEnd type="none" w="med" len="med"/>
+                    </a:lnL>
+                    <a:lnR w="12700" cap="flat" cmpd="sng" algn="ctr">
+                      <a:solidFill>
+                        <a:srgbClr val="D5DBE3"/>
+                      </a:solidFill>
+                      <a:prstDash val="solid"/>
+                      <a:round/>
+                      <a:headEnd type="none" w="med" len="med"/>
+                      <a:tailEnd type="none" w="med" len="med"/>
+                    </a:lnR>
+                    <a:lnT w="12700" cap="flat" cmpd="sng" algn="ctr">
+                      <a:solidFill>
+                        <a:srgbClr val="D5DBE3"/>
+                      </a:solidFill>
+                      <a:prstDash val="solid"/>
+                      <a:round/>
+                      <a:headEnd type="none" w="med" len="med"/>
+                      <a:tailEnd type="none" w="med" len="med"/>
+                    </a:lnT>
+                    <a:lnB w="12700" cap="flat" cmpd="sng" algn="ctr">
+                      <a:solidFill>
+                        <a:srgbClr val="D5DBE3"/>
+                      </a:solidFill>
+                      <a:prstDash val="solid"/>
+                      <a:round/>
+                      <a:headEnd type="none" w="med" len="med"/>
+                      <a:tailEnd type="none" w="med" len="med"/>
+                    </a:lnB>
+                    <a:solidFill>
+                      <a:srgbClr val="F1F3F6"/>
+                    </a:solidFill>
+                  </a:tcPr>
+                </a:tc>
+              </a:tr>
+              <a:tr h="0">
+                <a:tc>
+                  <a:txBody>
+                    <a:bodyPr/>
+                    <a:lstStyle/>
+                    <a:p>
+                      <a:pPr indent="0" marL="0">
+                        <a:buNone/>
+                      </a:pPr>
+                      <a:r>
+                        <a:rPr lang="en-US" sz="1200" dirty="0">
+                          <a:solidFill>
+                            <a:srgbClr val="1F2A37"/>
+                          </a:solidFill>
+                          <a:latin typeface="Microsoft YaHei" pitchFamily="34" charset="0"/>
+                          <a:ea typeface="Microsoft YaHei" pitchFamily="34" charset="-122"/>
+                          <a:cs typeface="Microsoft YaHei" pitchFamily="34" charset="-120"/>
+                        </a:rPr>
+                        <a:t>无共享定义 · 第 1、2 次</a:t>
+                      </a:r>
+                      <a:endParaRPr lang="en-US" sz="1200" dirty="0">
+                        <a:latin typeface="Microsoft YaHei" charset="0"/>
+                        <a:ea typeface="Microsoft YaHei" charset="0"/>
+                        <a:cs typeface="Microsoft YaHei" charset="0"/>
+                      </a:endParaRPr>
+                    </a:p>
+                  </a:txBody>
+                  <a:tcPr marL="91440" marR="91440" marT="54864" marB="54864" anchor="ctr">
+                    <a:lnL w="12700" cap="flat" cmpd="sng" algn="ctr">
+                      <a:solidFill>
+                        <a:srgbClr val="D5DBE3"/>
+                      </a:solidFill>
+                      <a:prstDash val="solid"/>
+                      <a:round/>
+                      <a:headEnd type="none" w="med" len="med"/>
+                      <a:tailEnd type="none" w="med" len="med"/>
+                    </a:lnL>
+                    <a:lnR w="12700" cap="flat" cmpd="sng" algn="ctr">
+                      <a:solidFill>
+                        <a:srgbClr val="D5DBE3"/>
+                      </a:solidFill>
+                      <a:prstDash val="solid"/>
+                      <a:round/>
+                      <a:headEnd type="none" w="med" len="med"/>
+                      <a:tailEnd type="none" w="med" len="med"/>
+                    </a:lnR>
+                    <a:lnT w="12700" cap="flat" cmpd="sng" algn="ctr">
+                      <a:solidFill>
+                        <a:srgbClr val="D5DBE3"/>
+                      </a:solidFill>
+                      <a:prstDash val="solid"/>
+                      <a:round/>
+                      <a:headEnd type="none" w="med" len="med"/>
+                      <a:tailEnd type="none" w="med" len="med"/>
+                    </a:lnT>
+                    <a:lnB w="12700" cap="flat" cmpd="sng" algn="ctr">
+                      <a:solidFill>
+                        <a:srgbClr val="D5DBE3"/>
+                      </a:solidFill>
+                      <a:prstDash val="solid"/>
+                      <a:round/>
+                      <a:headEnd type="none" w="med" len="med"/>
+                      <a:tailEnd type="none" w="med" len="med"/>
+                    </a:lnB>
+                  </a:tcPr>
+                </a:tc>
+                <a:tc>
+                  <a:txBody>
+                    <a:bodyPr/>
+                    <a:lstStyle/>
+                    <a:p>
+                      <a:pPr indent="0" marL="0">
+                        <a:buNone/>
+                      </a:pPr>
+                      <a:r>
+                        <a:rPr lang="en-US" sz="1200" dirty="0">
+                          <a:solidFill>
+                            <a:srgbClr val="1F2A37"/>
+                          </a:solidFill>
+                          <a:latin typeface="Microsoft YaHei" pitchFamily="34" charset="0"/>
+                          <a:ea typeface="Microsoft YaHei" pitchFamily="34" charset="-122"/>
+                          <a:cs typeface="Microsoft YaHei" pitchFamily="34" charset="-120"/>
+                        </a:rPr>
+                        <a:t>ss_ext_sales_price（扩展销售额，折扣前）</a:t>
+                      </a:r>
+                      <a:endParaRPr lang="en-US" sz="1200" dirty="0">
+                        <a:latin typeface="Microsoft YaHei" charset="0"/>
+                        <a:ea typeface="Microsoft YaHei" charset="0"/>
+                        <a:cs typeface="Microsoft YaHei" charset="0"/>
+                      </a:endParaRPr>
+                    </a:p>
+                  </a:txBody>
+                  <a:tcPr marL="91440" marR="91440" marT="54864" marB="54864" anchor="ctr">
+                    <a:lnL w="12700" cap="flat" cmpd="sng" algn="ctr">
+                      <a:solidFill>
+                        <a:srgbClr val="D5DBE3"/>
+                      </a:solidFill>
+                      <a:prstDash val="solid"/>
+                      <a:round/>
+                      <a:headEnd type="none" w="med" len="med"/>
+                      <a:tailEnd type="none" w="med" len="med"/>
+                    </a:lnL>
+                    <a:lnR w="12700" cap="flat" cmpd="sng" algn="ctr">
+                      <a:solidFill>
+                        <a:srgbClr val="D5DBE3"/>
+                      </a:solidFill>
+                      <a:prstDash val="solid"/>
+                      <a:round/>
+                      <a:headEnd type="none" w="med" len="med"/>
+                      <a:tailEnd type="none" w="med" len="med"/>
+                    </a:lnR>
+                    <a:lnT w="12700" cap="flat" cmpd="sng" algn="ctr">
+                      <a:solidFill>
+                        <a:srgbClr val="D5DBE3"/>
+                      </a:solidFill>
+                      <a:prstDash val="solid"/>
+                      <a:round/>
+                      <a:headEnd type="none" w="med" len="med"/>
+                      <a:tailEnd type="none" w="med" len="med"/>
+                    </a:lnT>
+                    <a:lnB w="12700" cap="flat" cmpd="sng" algn="ctr">
+                      <a:solidFill>
+                        <a:srgbClr val="D5DBE3"/>
+                      </a:solidFill>
+                      <a:prstDash val="solid"/>
+                      <a:round/>
+                      <a:headEnd type="none" w="med" len="med"/>
+                      <a:tailEnd type="none" w="med" len="med"/>
+                    </a:lnB>
+                  </a:tcPr>
+                </a:tc>
+                <a:tc>
+                  <a:txBody>
+                    <a:bodyPr/>
+                    <a:lstStyle/>
+                    <a:p>
+                      <a:pPr indent="0" marL="0">
+                        <a:buNone/>
+                      </a:pPr>
+                      <a:r>
+                        <a:rPr lang="en-US" sz="1200" b="1" dirty="0">
+                          <a:solidFill>
+                            <a:srgbClr val="B5392A"/>
+                          </a:solidFill>
+                          <a:latin typeface="Microsoft YaHei" pitchFamily="34" charset="0"/>
+                          <a:ea typeface="Microsoft YaHei" pitchFamily="34" charset="-122"/>
+                          <a:cs typeface="Microsoft YaHei" pitchFamily="34" charset="-120"/>
+                        </a:rPr>
+                        <a:t>1413.8 万 ✗</a:t>
+                      </a:r>
+                      <a:endParaRPr lang="en-US" sz="1200" dirty="0">
+                        <a:latin typeface="Microsoft YaHei" charset="0"/>
+                        <a:ea typeface="Microsoft YaHei" charset="0"/>
+                        <a:cs typeface="Microsoft YaHei" charset="0"/>
+                      </a:endParaRPr>
+                    </a:p>
+                  </a:txBody>
+                  <a:tcPr marL="91440" marR="91440" marT="54864" marB="54864" anchor="ctr">
+                    <a:lnL w="12700" cap="flat" cmpd="sng" algn="ctr">
+                      <a:solidFill>
+                        <a:srgbClr val="D5DBE3"/>
+                      </a:solidFill>
+                      <a:prstDash val="solid"/>
+                      <a:round/>
+                      <a:headEnd type="none" w="med" len="med"/>
+                      <a:tailEnd type="none" w="med" len="med"/>
+                    </a:lnL>
+                    <a:lnR w="12700" cap="flat" cmpd="sng" algn="ctr">
+                      <a:solidFill>
+                        <a:srgbClr val="D5DBE3"/>
+                      </a:solidFill>
+                      <a:prstDash val="solid"/>
+                      <a:round/>
+                      <a:headEnd type="none" w="med" len="med"/>
+                      <a:tailEnd type="none" w="med" len="med"/>
+                    </a:lnR>
+                    <a:lnT w="12700" cap="flat" cmpd="sng" algn="ctr">
+                      <a:solidFill>
+                        <a:srgbClr val="D5DBE3"/>
+                      </a:solidFill>
+                      <a:prstDash val="solid"/>
+                      <a:round/>
+                      <a:headEnd type="none" w="med" len="med"/>
+                      <a:tailEnd type="none" w="med" len="med"/>
+                    </a:lnT>
+                    <a:lnB w="12700" cap="flat" cmpd="sng" algn="ctr">
+                      <a:solidFill>
+                        <a:srgbClr val="D5DBE3"/>
+                      </a:solidFill>
+                      <a:prstDash val="solid"/>
+                      <a:round/>
+                      <a:headEnd type="none" w="med" len="med"/>
+                      <a:tailEnd type="none" w="med" len="med"/>
+                    </a:lnB>
+                  </a:tcPr>
+                </a:tc>
+                <a:tc>
+                  <a:txBody>
+                    <a:bodyPr/>
+                    <a:lstStyle/>
+                    <a:p>
+                      <a:pPr indent="0" marL="0">
+                        <a:buNone/>
+                      </a:pPr>
+                      <a:r>
+                        <a:rPr lang="en-US" sz="1200" dirty="0">
+                          <a:solidFill>
+                            <a:srgbClr val="1F2A37"/>
+                          </a:solidFill>
+                          <a:latin typeface="Microsoft YaHei" pitchFamily="34" charset="0"/>
+                          <a:ea typeface="Microsoft YaHei" pitchFamily="34" charset="-122"/>
+                          <a:cs typeface="Microsoft YaHei" pitchFamily="34" charset="-120"/>
+                        </a:rPr>
+                        <a:t>5</a:t>
+                      </a:r>
+                      <a:endParaRPr lang="en-US" sz="1200" dirty="0">
+                        <a:latin typeface="Microsoft YaHei" charset="0"/>
+                        <a:ea typeface="Microsoft YaHei" charset="0"/>
+                        <a:cs typeface="Microsoft YaHei" charset="0"/>
+                      </a:endParaRPr>
+                    </a:p>
+                  </a:txBody>
+                  <a:tcPr marL="91440" marR="91440" marT="54864" marB="54864" anchor="ctr">
+                    <a:lnL w="12700" cap="flat" cmpd="sng" algn="ctr">
+                      <a:solidFill>
+                        <a:srgbClr val="D5DBE3"/>
+                      </a:solidFill>
+                      <a:prstDash val="solid"/>
+                      <a:round/>
+                      <a:headEnd type="none" w="med" len="med"/>
+                      <a:tailEnd type="none" w="med" len="med"/>
+                    </a:lnL>
+                    <a:lnR w="12700" cap="flat" cmpd="sng" algn="ctr">
+                      <a:solidFill>
+                        <a:srgbClr val="D5DBE3"/>
+                      </a:solidFill>
+                      <a:prstDash val="solid"/>
+                      <a:round/>
+                      <a:headEnd type="none" w="med" len="med"/>
+                      <a:tailEnd type="none" w="med" len="med"/>
+                    </a:lnR>
+                    <a:lnT w="12700" cap="flat" cmpd="sng" algn="ctr">
+                      <a:solidFill>
+                        <a:srgbClr val="D5DBE3"/>
+                      </a:solidFill>
+                      <a:prstDash val="solid"/>
+                      <a:round/>
+                      <a:headEnd type="none" w="med" len="med"/>
+                      <a:tailEnd type="none" w="med" len="med"/>
+                    </a:lnT>
+                    <a:lnB w="12700" cap="flat" cmpd="sng" algn="ctr">
+                      <a:solidFill>
+                        <a:srgbClr val="D5DBE3"/>
+                      </a:solidFill>
+                      <a:prstDash val="solid"/>
+                      <a:round/>
+                      <a:headEnd type="none" w="med" len="med"/>
+                      <a:tailEnd type="none" w="med" len="med"/>
+                    </a:lnB>
+                  </a:tcPr>
+                </a:tc>
+              </a:tr>
+              <a:tr h="0">
+                <a:tc>
+                  <a:txBody>
+                    <a:bodyPr/>
+                    <a:lstStyle/>
+                    <a:p>
+                      <a:pPr indent="0" marL="0">
+                        <a:buNone/>
+                      </a:pPr>
+                      <a:r>
+                        <a:rPr lang="en-US" sz="1200" dirty="0">
+                          <a:solidFill>
+                            <a:srgbClr val="1F2A37"/>
+                          </a:solidFill>
+                          <a:latin typeface="Microsoft YaHei" pitchFamily="34" charset="0"/>
+                          <a:ea typeface="Microsoft YaHei" pitchFamily="34" charset="-122"/>
+                          <a:cs typeface="Microsoft YaHei" pitchFamily="34" charset="-120"/>
+                        </a:rPr>
+                        <a:t>无共享定义 · 第 3 次</a:t>
+                      </a:r>
+                      <a:endParaRPr lang="en-US" sz="1200" dirty="0">
+                        <a:latin typeface="Microsoft YaHei" charset="0"/>
+                        <a:ea typeface="Microsoft YaHei" charset="0"/>
+                        <a:cs typeface="Microsoft YaHei" charset="0"/>
+                      </a:endParaRPr>
+                    </a:p>
+                  </a:txBody>
+                  <a:tcPr marL="91440" marR="91440" marT="54864" marB="54864" anchor="ctr">
+                    <a:lnL w="12700" cap="flat" cmpd="sng" algn="ctr">
+                      <a:solidFill>
+                        <a:srgbClr val="D5DBE3"/>
+                      </a:solidFill>
+                      <a:prstDash val="solid"/>
+                      <a:round/>
+                      <a:headEnd type="none" w="med" len="med"/>
+                      <a:tailEnd type="none" w="med" len="med"/>
+                    </a:lnL>
+                    <a:lnR w="12700" cap="flat" cmpd="sng" algn="ctr">
+                      <a:solidFill>
+                        <a:srgbClr val="D5DBE3"/>
+                      </a:solidFill>
+                      <a:prstDash val="solid"/>
+                      <a:round/>
+                      <a:headEnd type="none" w="med" len="med"/>
+                      <a:tailEnd type="none" w="med" len="med"/>
+                    </a:lnR>
+                    <a:lnT w="12700" cap="flat" cmpd="sng" algn="ctr">
+                      <a:solidFill>
+                        <a:srgbClr val="D5DBE3"/>
+                      </a:solidFill>
+                      <a:prstDash val="solid"/>
+                      <a:round/>
+                      <a:headEnd type="none" w="med" len="med"/>
+                      <a:tailEnd type="none" w="med" len="med"/>
+                    </a:lnT>
+                    <a:lnB w="12700" cap="flat" cmpd="sng" algn="ctr">
+                      <a:solidFill>
+                        <a:srgbClr val="D5DBE3"/>
+                      </a:solidFill>
+                      <a:prstDash val="solid"/>
+                      <a:round/>
+                      <a:headEnd type="none" w="med" len="med"/>
+                      <a:tailEnd type="none" w="med" len="med"/>
+                    </a:lnB>
+                  </a:tcPr>
+                </a:tc>
+                <a:tc>
+                  <a:txBody>
+                    <a:bodyPr/>
+                    <a:lstStyle/>
+                    <a:p>
+                      <a:pPr indent="0" marL="0">
+                        <a:buNone/>
+                      </a:pPr>
+                      <a:r>
+                        <a:rPr lang="en-US" sz="1200" dirty="0">
+                          <a:solidFill>
+                            <a:srgbClr val="1F2A37"/>
+                          </a:solidFill>
+                          <a:latin typeface="Microsoft YaHei" pitchFamily="34" charset="0"/>
+                          <a:ea typeface="Microsoft YaHei" pitchFamily="34" charset="-122"/>
+                          <a:cs typeface="Microsoft YaHei" pitchFamily="34" charset="-120"/>
+                        </a:rPr>
+                        <a:t>ss_net_paid（净支付额）</a:t>
+                      </a:r>
+                      <a:endParaRPr lang="en-US" sz="1200" dirty="0">
+                        <a:latin typeface="Microsoft YaHei" charset="0"/>
+                        <a:ea typeface="Microsoft YaHei" charset="0"/>
+                        <a:cs typeface="Microsoft YaHei" charset="0"/>
+                      </a:endParaRPr>
+                    </a:p>
+                  </a:txBody>
+                  <a:tcPr marL="91440" marR="91440" marT="54864" marB="54864" anchor="ctr">
+                    <a:lnL w="12700" cap="flat" cmpd="sng" algn="ctr">
+                      <a:solidFill>
+                        <a:srgbClr val="D5DBE3"/>
+                      </a:solidFill>
+                      <a:prstDash val="solid"/>
+                      <a:round/>
+                      <a:headEnd type="none" w="med" len="med"/>
+                      <a:tailEnd type="none" w="med" len="med"/>
+                    </a:lnL>
+                    <a:lnR w="12700" cap="flat" cmpd="sng" algn="ctr">
+                      <a:solidFill>
+                        <a:srgbClr val="D5DBE3"/>
+                      </a:solidFill>
+                      <a:prstDash val="solid"/>
+                      <a:round/>
+                      <a:headEnd type="none" w="med" len="med"/>
+                      <a:tailEnd type="none" w="med" len="med"/>
+                    </a:lnR>
+                    <a:lnT w="12700" cap="flat" cmpd="sng" algn="ctr">
+                      <a:solidFill>
+                        <a:srgbClr val="D5DBE3"/>
+                      </a:solidFill>
+                      <a:prstDash val="solid"/>
+                      <a:round/>
+                      <a:headEnd type="none" w="med" len="med"/>
+                      <a:tailEnd type="none" w="med" len="med"/>
+                    </a:lnT>
+                    <a:lnB w="12700" cap="flat" cmpd="sng" algn="ctr">
+                      <a:solidFill>
+                        <a:srgbClr val="D5DBE3"/>
+                      </a:solidFill>
+                      <a:prstDash val="solid"/>
+                      <a:round/>
+                      <a:headEnd type="none" w="med" len="med"/>
+                      <a:tailEnd type="none" w="med" len="med"/>
+                    </a:lnB>
+                  </a:tcPr>
+                </a:tc>
+                <a:tc>
+                  <a:txBody>
+                    <a:bodyPr/>
+                    <a:lstStyle/>
+                    <a:p>
+                      <a:pPr indent="0" marL="0">
+                        <a:buNone/>
+                      </a:pPr>
+                      <a:r>
+                        <a:rPr lang="en-US" sz="1200" b="1" dirty="0">
+                          <a:solidFill>
+                            <a:srgbClr val="2E7D4F"/>
+                          </a:solidFill>
+                          <a:latin typeface="Microsoft YaHei" pitchFamily="34" charset="0"/>
+                          <a:ea typeface="Microsoft YaHei" pitchFamily="34" charset="-122"/>
+                          <a:cs typeface="Microsoft YaHei" pitchFamily="34" charset="-120"/>
+                        </a:rPr>
+                        <a:t>1307.0 万 ✓</a:t>
+                      </a:r>
+                      <a:endParaRPr lang="en-US" sz="1200" dirty="0">
+                        <a:latin typeface="Microsoft YaHei" charset="0"/>
+                        <a:ea typeface="Microsoft YaHei" charset="0"/>
+                        <a:cs typeface="Microsoft YaHei" charset="0"/>
+                      </a:endParaRPr>
+                    </a:p>
+                  </a:txBody>
+                  <a:tcPr marL="91440" marR="91440" marT="54864" marB="54864" anchor="ctr">
+                    <a:lnL w="12700" cap="flat" cmpd="sng" algn="ctr">
+                      <a:solidFill>
+                        <a:srgbClr val="D5DBE3"/>
+                      </a:solidFill>
+                      <a:prstDash val="solid"/>
+                      <a:round/>
+                      <a:headEnd type="none" w="med" len="med"/>
+                      <a:tailEnd type="none" w="med" len="med"/>
+                    </a:lnL>
+                    <a:lnR w="12700" cap="flat" cmpd="sng" algn="ctr">
+                      <a:solidFill>
+                        <a:srgbClr val="D5DBE3"/>
+                      </a:solidFill>
+                      <a:prstDash val="solid"/>
+                      <a:round/>
+                      <a:headEnd type="none" w="med" len="med"/>
+                      <a:tailEnd type="none" w="med" len="med"/>
+                    </a:lnR>
+                    <a:lnT w="12700" cap="flat" cmpd="sng" algn="ctr">
+                      <a:solidFill>
+                        <a:srgbClr val="D5DBE3"/>
+                      </a:solidFill>
+                      <a:prstDash val="solid"/>
+                      <a:round/>
+                      <a:headEnd type="none" w="med" len="med"/>
+                      <a:tailEnd type="none" w="med" len="med"/>
+                    </a:lnT>
+                    <a:lnB w="12700" cap="flat" cmpd="sng" algn="ctr">
+                      <a:solidFill>
+                        <a:srgbClr val="D5DBE3"/>
+                      </a:solidFill>
+                      <a:prstDash val="solid"/>
+                      <a:round/>
+                      <a:headEnd type="none" w="med" len="med"/>
+                      <a:tailEnd type="none" w="med" len="med"/>
+                    </a:lnB>
+                  </a:tcPr>
+                </a:tc>
+                <a:tc>
+                  <a:txBody>
+                    <a:bodyPr/>
+                    <a:lstStyle/>
+                    <a:p>
+                      <a:pPr indent="0" marL="0">
+                        <a:buNone/>
+                      </a:pPr>
+                      <a:r>
+                        <a:rPr lang="en-US" sz="1200" dirty="0">
+                          <a:solidFill>
+                            <a:srgbClr val="1F2A37"/>
+                          </a:solidFill>
+                          <a:latin typeface="Microsoft YaHei" pitchFamily="34" charset="0"/>
+                          <a:ea typeface="Microsoft YaHei" pitchFamily="34" charset="-122"/>
+                          <a:cs typeface="Microsoft YaHei" pitchFamily="34" charset="-120"/>
+                        </a:rPr>
+                        <a:t>5</a:t>
+                      </a:r>
+                      <a:endParaRPr lang="en-US" sz="1200" dirty="0">
+                        <a:latin typeface="Microsoft YaHei" charset="0"/>
+                        <a:ea typeface="Microsoft YaHei" charset="0"/>
+                        <a:cs typeface="Microsoft YaHei" charset="0"/>
+                      </a:endParaRPr>
+                    </a:p>
+                  </a:txBody>
+                  <a:tcPr marL="91440" marR="91440" marT="54864" marB="54864" anchor="ctr">
+                    <a:lnL w="12700" cap="flat" cmpd="sng" algn="ctr">
+                      <a:solidFill>
+                        <a:srgbClr val="D5DBE3"/>
+                      </a:solidFill>
+                      <a:prstDash val="solid"/>
+                      <a:round/>
+                      <a:headEnd type="none" w="med" len="med"/>
+                      <a:tailEnd type="none" w="med" len="med"/>
+                    </a:lnL>
+                    <a:lnR w="12700" cap="flat" cmpd="sng" algn="ctr">
+                      <a:solidFill>
+                        <a:srgbClr val="D5DBE3"/>
+                      </a:solidFill>
+                      <a:prstDash val="solid"/>
+                      <a:round/>
+                      <a:headEnd type="none" w="med" len="med"/>
+                      <a:tailEnd type="none" w="med" len="med"/>
+                    </a:lnR>
+                    <a:lnT w="12700" cap="flat" cmpd="sng" algn="ctr">
+                      <a:solidFill>
+                        <a:srgbClr val="D5DBE3"/>
+                      </a:solidFill>
+                      <a:prstDash val="solid"/>
+                      <a:round/>
+                      <a:headEnd type="none" w="med" len="med"/>
+                      <a:tailEnd type="none" w="med" len="med"/>
+                    </a:lnT>
+                    <a:lnB w="12700" cap="flat" cmpd="sng" algn="ctr">
+                      <a:solidFill>
+                        <a:srgbClr val="D5DBE3"/>
+                      </a:solidFill>
+                      <a:prstDash val="solid"/>
+                      <a:round/>
+                      <a:headEnd type="none" w="med" len="med"/>
+                      <a:tailEnd type="none" w="med" len="med"/>
+                    </a:lnB>
+                  </a:tcPr>
+                </a:tc>
+              </a:tr>
+              <a:tr h="0">
+                <a:tc>
+                  <a:txBody>
+                    <a:bodyPr/>
+                    <a:lstStyle/>
+                    <a:p>
+                      <a:pPr indent="0" marL="0">
+                        <a:buNone/>
+                      </a:pPr>
+                      <a:r>
+                        <a:rPr lang="en-US" sz="1200" b="1" dirty="0">
+                          <a:solidFill>
+                            <a:srgbClr val="1D5BA6"/>
+                          </a:solidFill>
+                          <a:latin typeface="Microsoft YaHei" pitchFamily="34" charset="0"/>
+                          <a:ea typeface="Microsoft YaHei" pitchFamily="34" charset="-122"/>
+                          <a:cs typeface="Microsoft YaHei" pitchFamily="34" charset="-120"/>
+                        </a:rPr>
+                        <a:t>有 MAVRA · 3 次结果一致</a:t>
+                      </a:r>
+                      <a:endParaRPr lang="en-US" sz="1200" dirty="0">
+                        <a:latin typeface="Microsoft YaHei" charset="0"/>
+                        <a:ea typeface="Microsoft YaHei" charset="0"/>
+                        <a:cs typeface="Microsoft YaHei" charset="0"/>
+                      </a:endParaRPr>
+                    </a:p>
+                  </a:txBody>
+                  <a:tcPr marL="91440" marR="91440" marT="54864" marB="54864" anchor="ctr">
+                    <a:lnL w="12700" cap="flat" cmpd="sng" algn="ctr">
+                      <a:solidFill>
+                        <a:srgbClr val="D5DBE3"/>
+                      </a:solidFill>
+                      <a:prstDash val="solid"/>
+                      <a:round/>
+                      <a:headEnd type="none" w="med" len="med"/>
+                      <a:tailEnd type="none" w="med" len="med"/>
+                    </a:lnL>
+                    <a:lnR w="12700" cap="flat" cmpd="sng" algn="ctr">
+                      <a:solidFill>
+                        <a:srgbClr val="D5DBE3"/>
+                      </a:solidFill>
+                      <a:prstDash val="solid"/>
+                      <a:round/>
+                      <a:headEnd type="none" w="med" len="med"/>
+                      <a:tailEnd type="none" w="med" len="med"/>
+                    </a:lnR>
+                    <a:lnT w="12700" cap="flat" cmpd="sng" algn="ctr">
+                      <a:solidFill>
+                        <a:srgbClr val="D5DBE3"/>
+                      </a:solidFill>
+                      <a:prstDash val="solid"/>
+                      <a:round/>
+                      <a:headEnd type="none" w="med" len="med"/>
+                      <a:tailEnd type="none" w="med" len="med"/>
+                    </a:lnT>
+                    <a:lnB w="12700" cap="flat" cmpd="sng" algn="ctr">
+                      <a:solidFill>
+                        <a:srgbClr val="D5DBE3"/>
+                      </a:solidFill>
+                      <a:prstDash val="solid"/>
+                      <a:round/>
+                      <a:headEnd type="none" w="med" len="med"/>
+                      <a:tailEnd type="none" w="med" len="med"/>
+                    </a:lnB>
+                  </a:tcPr>
+                </a:tc>
+                <a:tc>
+                  <a:txBody>
+                    <a:bodyPr/>
+                    <a:lstStyle/>
+                    <a:p>
+                      <a:pPr indent="0" marL="0">
+                        <a:buNone/>
+                      </a:pPr>
+                      <a:r>
+                        <a:rPr lang="en-US" sz="1200" dirty="0">
+                          <a:solidFill>
+                            <a:srgbClr val="1F2A37"/>
+                          </a:solidFill>
+                          <a:latin typeface="Microsoft YaHei" pitchFamily="34" charset="0"/>
+                          <a:ea typeface="Microsoft YaHei" pitchFamily="34" charset="-122"/>
+                          <a:cs typeface="Microsoft YaHei" pitchFamily="34" charset="-120"/>
+                        </a:rPr>
+                        <a:t>ss_net_paid（检索到共享的指标定义）</a:t>
+                      </a:r>
+                      <a:endParaRPr lang="en-US" sz="1200" dirty="0">
+                        <a:latin typeface="Microsoft YaHei" charset="0"/>
+                        <a:ea typeface="Microsoft YaHei" charset="0"/>
+                        <a:cs typeface="Microsoft YaHei" charset="0"/>
+                      </a:endParaRPr>
+                    </a:p>
+                  </a:txBody>
+                  <a:tcPr marL="91440" marR="91440" marT="54864" marB="54864" anchor="ctr">
+                    <a:lnL w="12700" cap="flat" cmpd="sng" algn="ctr">
+                      <a:solidFill>
+                        <a:srgbClr val="D5DBE3"/>
+                      </a:solidFill>
+                      <a:prstDash val="solid"/>
+                      <a:round/>
+                      <a:headEnd type="none" w="med" len="med"/>
+                      <a:tailEnd type="none" w="med" len="med"/>
+                    </a:lnL>
+                    <a:lnR w="12700" cap="flat" cmpd="sng" algn="ctr">
+                      <a:solidFill>
+                        <a:srgbClr val="D5DBE3"/>
+                      </a:solidFill>
+                      <a:prstDash val="solid"/>
+                      <a:round/>
+                      <a:headEnd type="none" w="med" len="med"/>
+                      <a:tailEnd type="none" w="med" len="med"/>
+                    </a:lnR>
+                    <a:lnT w="12700" cap="flat" cmpd="sng" algn="ctr">
+                      <a:solidFill>
+                        <a:srgbClr val="D5DBE3"/>
+                      </a:solidFill>
+                      <a:prstDash val="solid"/>
+                      <a:round/>
+                      <a:headEnd type="none" w="med" len="med"/>
+                      <a:tailEnd type="none" w="med" len="med"/>
+                    </a:lnT>
+                    <a:lnB w="12700" cap="flat" cmpd="sng" algn="ctr">
+                      <a:solidFill>
+                        <a:srgbClr val="D5DBE3"/>
+                      </a:solidFill>
+                      <a:prstDash val="solid"/>
+                      <a:round/>
+                      <a:headEnd type="none" w="med" len="med"/>
+                      <a:tailEnd type="none" w="med" len="med"/>
+                    </a:lnB>
+                  </a:tcPr>
+                </a:tc>
+                <a:tc>
+                  <a:txBody>
+                    <a:bodyPr/>
+                    <a:lstStyle/>
+                    <a:p>
+                      <a:pPr indent="0" marL="0">
+                        <a:buNone/>
+                      </a:pPr>
+                      <a:r>
+                        <a:rPr lang="en-US" sz="1200" b="1" dirty="0">
+                          <a:solidFill>
+                            <a:srgbClr val="2E7D4F"/>
+                          </a:solidFill>
+                          <a:latin typeface="Microsoft YaHei" pitchFamily="34" charset="0"/>
+                          <a:ea typeface="Microsoft YaHei" pitchFamily="34" charset="-122"/>
+                          <a:cs typeface="Microsoft YaHei" pitchFamily="34" charset="-120"/>
+                        </a:rPr>
+                        <a:t>1307.0 万 ✓</a:t>
+                      </a:r>
+                      <a:endParaRPr lang="en-US" sz="1200" dirty="0">
+                        <a:latin typeface="Microsoft YaHei" charset="0"/>
+                        <a:ea typeface="Microsoft YaHei" charset="0"/>
+                        <a:cs typeface="Microsoft YaHei" charset="0"/>
+                      </a:endParaRPr>
+                    </a:p>
+                  </a:txBody>
+                  <a:tcPr marL="91440" marR="91440" marT="54864" marB="54864" anchor="ctr">
+                    <a:lnL w="12700" cap="flat" cmpd="sng" algn="ctr">
+                      <a:solidFill>
+                        <a:srgbClr val="D5DBE3"/>
+                      </a:solidFill>
+                      <a:prstDash val="solid"/>
+                      <a:round/>
+                      <a:headEnd type="none" w="med" len="med"/>
+                      <a:tailEnd type="none" w="med" len="med"/>
+                    </a:lnL>
+                    <a:lnR w="12700" cap="flat" cmpd="sng" algn="ctr">
+                      <a:solidFill>
+                        <a:srgbClr val="D5DBE3"/>
+                      </a:solidFill>
+                      <a:prstDash val="solid"/>
+                      <a:round/>
+                      <a:headEnd type="none" w="med" len="med"/>
+                      <a:tailEnd type="none" w="med" len="med"/>
+                    </a:lnR>
+                    <a:lnT w="12700" cap="flat" cmpd="sng" algn="ctr">
+                      <a:solidFill>
+                        <a:srgbClr val="D5DBE3"/>
+                      </a:solidFill>
+                      <a:prstDash val="solid"/>
+                      <a:round/>
+                      <a:headEnd type="none" w="med" len="med"/>
+                      <a:tailEnd type="none" w="med" len="med"/>
+                    </a:lnT>
+                    <a:lnB w="12700" cap="flat" cmpd="sng" algn="ctr">
+                      <a:solidFill>
+                        <a:srgbClr val="D5DBE3"/>
+                      </a:solidFill>
+                      <a:prstDash val="solid"/>
+                      <a:round/>
+                      <a:headEnd type="none" w="med" len="med"/>
+                      <a:tailEnd type="none" w="med" len="med"/>
+                    </a:lnB>
+                  </a:tcPr>
+                </a:tc>
+                <a:tc>
+                  <a:txBody>
+                    <a:bodyPr/>
+                    <a:lstStyle/>
+                    <a:p>
+                      <a:pPr indent="0" marL="0">
+                        <a:buNone/>
+                      </a:pPr>
+                      <a:r>
+                        <a:rPr lang="en-US" sz="1200" dirty="0">
+                          <a:solidFill>
+                            <a:srgbClr val="1F2A37"/>
+                          </a:solidFill>
+                          <a:latin typeface="Microsoft YaHei" pitchFamily="34" charset="0"/>
+                          <a:ea typeface="Microsoft YaHei" pitchFamily="34" charset="-122"/>
+                          <a:cs typeface="Microsoft YaHei" pitchFamily="34" charset="-120"/>
+                        </a:rPr>
+                        <a:t>3</a:t>
+                      </a:r>
+                      <a:endParaRPr lang="en-US" sz="1200" dirty="0">
+                        <a:latin typeface="Microsoft YaHei" charset="0"/>
+                        <a:ea typeface="Microsoft YaHei" charset="0"/>
+                        <a:cs typeface="Microsoft YaHei" charset="0"/>
+                      </a:endParaRPr>
+                    </a:p>
+                  </a:txBody>
+                  <a:tcPr marL="91440" marR="91440" marT="54864" marB="54864" anchor="ctr">
+                    <a:lnL w="12700" cap="flat" cmpd="sng" algn="ctr">
+                      <a:solidFill>
+                        <a:srgbClr val="D5DBE3"/>
+                      </a:solidFill>
+                      <a:prstDash val="solid"/>
+                      <a:round/>
+                      <a:headEnd type="none" w="med" len="med"/>
+                      <a:tailEnd type="none" w="med" len="med"/>
+                    </a:lnL>
+                    <a:lnR w="12700" cap="flat" cmpd="sng" algn="ctr">
+                      <a:solidFill>
+                        <a:srgbClr val="D5DBE3"/>
+                      </a:solidFill>
+                      <a:prstDash val="solid"/>
+                      <a:round/>
+                      <a:headEnd type="none" w="med" len="med"/>
+                      <a:tailEnd type="none" w="med" len="med"/>
+                    </a:lnR>
+                    <a:lnT w="12700" cap="flat" cmpd="sng" algn="ctr">
+                      <a:solidFill>
+                        <a:srgbClr val="D5DBE3"/>
+                      </a:solidFill>
+                      <a:prstDash val="solid"/>
+                      <a:round/>
+                      <a:headEnd type="none" w="med" len="med"/>
+                      <a:tailEnd type="none" w="med" len="med"/>
+                    </a:lnT>
+                    <a:lnB w="12700" cap="flat" cmpd="sng" algn="ctr">
+                      <a:solidFill>
+                        <a:srgbClr val="D5DBE3"/>
+                      </a:solidFill>
+                      <a:prstDash val="solid"/>
+                      <a:round/>
+                      <a:headEnd type="none" w="med" len="med"/>
+                      <a:tailEnd type="none" w="med" len="med"/>
+                    </a:lnB>
+                  </a:tcPr>
+                </a:tc>
+              </a:tr>
+            </a:tbl>
+          </a:graphicData>
+        </a:graphic>
+      </p:graphicFrame>
+      <p:sp>
+        <p:nvSpPr>
+          <p:cNvPr id="27" name="Shape 24"/>
+          <p:cNvSpPr/>
+          <p:nvPr/>
+        </p:nvSpPr>
+        <p:spPr>
+          <a:xfrm>
+            <a:off x="548640" y="5303520"/>
+            <a:ext cx="11094415" cy="868680"/>
+          </a:xfrm>
+          <a:prstGeom prst="roundRect">
+            <a:avLst>
+              <a:gd name="adj" fmla="val 8421"/>
+            </a:avLst>
+          </a:prstGeom>
+          <a:solidFill>
+            <a:srgbClr val="FBF0E2"/>
+          </a:solidFill>
+          <a:ln w="12700">
+            <a:solidFill>
+              <a:srgbClr val="FBF0E2"/>
+            </a:solidFill>
+            <a:prstDash val="solid"/>
+          </a:ln>
+        </p:spPr>
+      </p:sp>
+      <p:sp>
+        <p:nvSpPr>
+          <p:cNvPr id="28" name="Text 25"/>
+          <p:cNvSpPr txBox="1"/>
+          <p:nvPr/>
+        </p:nvSpPr>
+        <p:spPr>
+          <a:xfrm>
+            <a:off x="822960" y="5394960"/>
+            <a:ext cx="10545775" cy="685800"/>
+          </a:xfrm>
+          <a:prstGeom prst="rect">
+            <a:avLst/>
+          </a:prstGeom>
+          <a:noFill/>
+          <a:ln/>
+        </p:spPr>
+        <p:txBody>
+          <a:bodyPr wrap="square" lIns="0" tIns="0" rIns="0" bIns="0" rtlCol="0" anchor="ctr"/>
+          <a:lstStyle/>
+          <a:p>
+            <a:pPr indent="0" marL="0">
+              <a:spcAft>
+                <a:spcPts val="400"/>
+              </a:spcAft>
+              <a:buNone/>
+            </a:pPr>
+            <a:r>
+              <a:rPr lang="en-US" sz="1200" b="1" dirty="0">
+                <a:solidFill>
+                  <a:srgbClr val="1D5BA6"/>
+                </a:solidFill>
+                <a:latin typeface="Microsoft YaHei" pitchFamily="34" charset="0"/>
+                <a:ea typeface="Microsoft YaHei" pitchFamily="34" charset="-122"/>
+                <a:cs typeface="Microsoft YaHei" pitchFamily="34" charset="-120"/>
+              </a:rPr>
+              <a:t>两者处于不同层次：</a:t>
+            </a:r>
+            <a:pPr indent="0" marL="0">
+              <a:spcAft>
+                <a:spcPts val="400"/>
+              </a:spcAft>
+              <a:buNone/>
+            </a:pPr>
+            <a:r>
+              <a:rPr lang="en-US" sz="1200" dirty="0">
+                <a:solidFill>
+                  <a:srgbClr val="1F2A37"/>
+                </a:solidFill>
+                <a:latin typeface="Microsoft YaHei" pitchFamily="34" charset="0"/>
+                <a:ea typeface="Microsoft YaHei" pitchFamily="34" charset="-122"/>
+                <a:cs typeface="Microsoft YaHei" pitchFamily="34" charset="-120"/>
+              </a:rPr>
+              <a:t>任何 Text-to-SQL 模型或数据智能体都可以作为用户智能体接入 MAVRA。MAVRA 不生成 SQL；它提供经过验证的知识，并在查询执行前验证其有效性。</a:t>
+            </a:r>
+            <a:endParaRPr lang="en-US" sz="1200" dirty="0"/>
+          </a:p>
+          <a:p>
+            <a:pPr indent="0" marL="0">
+              <a:spcAft>
+                <a:spcPts val="400"/>
+              </a:spcAft>
+              <a:buNone/>
+            </a:pPr>
+            <a:r>
+              <a:rPr lang="en-US" sz="1200" b="1" dirty="0">
+                <a:solidFill>
+                  <a:srgbClr val="1D5BA6"/>
+                </a:solidFill>
+                <a:latin typeface="Microsoft YaHei" pitchFamily="34" charset="0"/>
+                <a:ea typeface="Microsoft YaHei" pitchFamily="34" charset="-122"/>
+                <a:cs typeface="Microsoft YaHei" pitchFamily="34" charset="-120"/>
+              </a:rPr>
+              <a:t>业务口径不在模式中：</a:t>
+            </a:r>
+            <a:pPr indent="0" marL="0">
+              <a:spcAft>
+                <a:spcPts val="400"/>
+              </a:spcAft>
+              <a:buNone/>
+            </a:pPr>
+            <a:r>
+              <a:rPr lang="en-US" sz="1200" dirty="0">
+                <a:solidFill>
+                  <a:srgbClr val="1F2A37"/>
+                </a:solidFill>
+                <a:latin typeface="Microsoft YaHei" pitchFamily="34" charset="0"/>
+                <a:ea typeface="Microsoft YaHei" pitchFamily="34" charset="-122"/>
+                <a:cs typeface="Microsoft YaHei" pitchFamily="34" charset="-120"/>
+              </a:rPr>
+              <a:t>Text-to-SQL 每次重新推断选哪一列，同一问题的答案不稳定；共享已验证的定义后，答案一致且轮数更少。</a:t>
+            </a:r>
+            <a:endParaRPr lang="en-US" sz="1200" dirty="0"/>
+          </a:p>
+        </p:txBody>
+      </p:sp>
+      <p:sp>
+        <p:nvSpPr>
+          <p:cNvPr id="29" name="Text 26"/>
+          <p:cNvSpPr txBox="1"/>
+          <p:nvPr/>
+        </p:nvSpPr>
+        <p:spPr>
+          <a:xfrm>
+            <a:off x="548640" y="6263640"/>
+            <a:ext cx="10362895" cy="365760"/>
+          </a:xfrm>
+          <a:prstGeom prst="rect">
+            <a:avLst/>
+          </a:prstGeom>
+          <a:noFill/>
+          <a:ln/>
+        </p:spPr>
+        <p:txBody>
+          <a:bodyPr wrap="square" lIns="0" tIns="0" rIns="0" bIns="0" rtlCol="0" anchor="b"/>
+          <a:lstStyle/>
+          <a:p>
+            <a:pPr indent="0" marL="0">
+              <a:buNone/>
+            </a:pPr>
+            <a:r>
+              <a:rPr lang="en-US" sz="1100" dirty="0">
+                <a:solidFill>
+                  <a:srgbClr val="5B6573"/>
+                </a:solidFill>
+                <a:latin typeface="Microsoft YaHei" pitchFamily="34" charset="0"/>
+                <a:ea typeface="Microsoft YaHei" pitchFamily="34" charset="-122"/>
+                <a:cs typeface="Microsoft YaHei" pitchFamily="34" charset="-120"/>
+              </a:rPr>
+              <a:t>记录：noctis results/scen-20261002，留出任务 M1-P1；无共享定义：dsv41flash-r1-a、r2-b、r3-a；MAVRA：r1–r3-g3fix--snap。数据为仿 TPC-DS 的合成零售数据（store_sales 100 万行），题目中的年份略去。</a:t>
+            </a:r>
+            <a:endParaRPr lang="en-US" sz="1100" dirty="0"/>
+          </a:p>
+        </p:txBody>
+      </p:sp>
+      <p:sp>
+        <p:nvSpPr>
+          <p:cNvPr id="25" name="Slide Number Placeholder 0"/>
+          <p:cNvSpPr>
+            <a:spLocks noGrp="1"/>
+          </p:cNvSpPr>
+          <p:nvPr>
+            <p:ph type="sldNum" sz="quarter" idx="4294967295"/>
+          </p:nvPr>
+        </p:nvSpPr>
+        <p:spPr>
+          <a:xfrm>
+            <a:off x="11185855" y="6446520"/>
+            <a:ext cx="457200" cy="274320"/>
+          </a:xfrm>
+          <a:prstGeom prst="rect">
+            <a:avLst/>
+          </a:prstGeom>
+          <a:extLst>
+            <a:ext uri="{C572A759-6A51-4108-AA02-DFA0A04FC94B}">
+              <ma14:wrappingTextBoxFlag xmlns:ma14="http://schemas.microsoft.com/office/mac/drawingml/2011/main" val="0"/>
+            </a:ext>
+          </a:extLst>
+        </p:spPr>
+        <p:txBody>
+          <a:bodyPr/>
+          <a:lstStyle>
+            <a:lvl1pPr>
+              <a:defRPr sz="1000">
+                <a:solidFill>
+                  <a:srgbClr val="5B6573"/>
+                </a:solidFill>
+                <a:latin typeface="Microsoft YaHei"/>
+                <a:ea typeface="Microsoft YaHei"/>
+                <a:cs typeface="Microsoft YaHei"/>
+              </a:defRPr>
+            </a:lvl1pPr>
+          </a:lstStyle>
+          <a:p>
+            <a:pPr algn="r"/>
+            <a:fld id="{F7021451-1387-4CA6-816F-3879F97B5CBC}" type="slidenum">
+              <a:rPr b="0" lang="en-US"/>
+              <a:t>2</a:t>
+            </a:fld>
+            <a:endParaRPr lang="en-US"/>
+          </a:p>
+        </p:txBody>
+      </p:sp>
+    </p:spTree>
+  </p:cSld>
+  <p:clrMapOvr>
+    <a:masterClrMapping/>
+  </p:clrMapOvr>
+</p:sld>
+</file>
+
+<file path=ppt/slides/slide3.xml><?xml version="1.0" encoding="utf-8"?>
+<p:sld xmlns:a="http://schemas.openxmlformats.org/drawingml/2006/main" xmlns:r="http://schemas.openxmlformats.org/officeDocument/2006/relationships" xmlns:p="http://schemas.openxmlformats.org/presentationml/2006/main">
+  <p:cSld name="Slide 3">
     <p:spTree>
       <p:nvGrpSpPr>
         <p:cNvPr id="1" name=""/>
@@ -10909,7 +15371,7 @@
       </p:sp>
       <p:graphicFrame>
         <p:nvGraphicFramePr>
-          <p:cNvPr id="3" name="Table 0"/>
+          <p:cNvPr id="4" name="Table 0"/>
           <p:cNvGraphicFramePr>
             <a:graphicFrameLocks noGrp="1"/>
           </p:cNvGraphicFramePr>
@@ -11815,7 +16277,7 @@
       </p:sp>
       <p:graphicFrame>
         <p:nvGraphicFramePr>
-          <p:cNvPr id="5" name="Table 1"/>
+          <p:cNvPr id="7" name="Table 1"/>
           <p:cNvGraphicFramePr>
             <a:graphicFrameLocks noGrp="1"/>
           </p:cNvGraphicFramePr>
@@ -12935,7 +17397,7 @@
       </p:sp>
       <p:graphicFrame>
         <p:nvGraphicFramePr>
-          <p:cNvPr id="7" name="Table 2"/>
+          <p:cNvPr id="10" name="Table 2"/>
           <p:cNvGraphicFramePr>
             <a:graphicFrameLocks noGrp="1"/>
           </p:cNvGraphicFramePr>
@@ -14195,7 +18657,7 @@
             <a:pPr algn="r"/>
             <a:fld id="{F7021451-1387-4CA6-816F-3879F97B5CBC}" type="slidenum">
               <a:rPr b="0" lang="en-US"/>
-              <a:t>2</a:t>
+              <a:t>3</a:t>
             </a:fld>
             <a:endParaRPr lang="en-US"/>
           </a:p>
@@ -14209,9 +18671,9 @@
 </p:sld>
 </file>
 
-<file path=ppt/slides/slide3.xml><?xml version="1.0" encoding="utf-8"?>
+<file path=ppt/slides/slide4.xml><?xml version="1.0" encoding="utf-8"?>
 <p:sld xmlns:a="http://schemas.openxmlformats.org/drawingml/2006/main" xmlns:r="http://schemas.openxmlformats.org/officeDocument/2006/relationships" xmlns:p="http://schemas.openxmlformats.org/presentationml/2006/main">
-  <p:cSld name="Slide 3">
+  <p:cSld name="Slide 4">
     <p:spTree>
       <p:nvGrpSpPr>
         <p:cNvPr id="1" name=""/>
@@ -15048,7 +19510,7 @@
             <a:pPr algn="r"/>
             <a:fld id="{F7021451-1387-4CA6-816F-3879F97B5CBC}" type="slidenum">
               <a:rPr b="0" lang="en-US"/>
-              <a:t>3</a:t>
+              <a:t>4</a:t>
             </a:fld>
             <a:endParaRPr lang="en-US"/>
           </a:p>
@@ -15062,9 +19524,9 @@
 </p:sld>
 </file>
 
-<file path=ppt/slides/slide4.xml><?xml version="1.0" encoding="utf-8"?>
+<file path=ppt/slides/slide5.xml><?xml version="1.0" encoding="utf-8"?>
 <p:sld xmlns:a="http://schemas.openxmlformats.org/drawingml/2006/main" xmlns:r="http://schemas.openxmlformats.org/officeDocument/2006/relationships" xmlns:p="http://schemas.openxmlformats.org/presentationml/2006/main">
-  <p:cSld name="Slide 4">
+  <p:cSld name="Slide 5">
     <p:spTree>
       <p:nvGrpSpPr>
         <p:cNvPr id="1" name=""/>
@@ -15309,7 +19771,7 @@
             <a:pPr algn="r"/>
             <a:fld id="{F7021451-1387-4CA6-816F-3879F97B5CBC}" type="slidenum">
               <a:rPr b="0" lang="en-US"/>
-              <a:t>4</a:t>
+              <a:t>5</a:t>
             </a:fld>
             <a:endParaRPr lang="en-US"/>
           </a:p>
@@ -15323,9 +19785,9 @@
 </p:sld>
 </file>
 
-<file path=ppt/slides/slide5.xml><?xml version="1.0" encoding="utf-8"?>
+<file path=ppt/slides/slide6.xml><?xml version="1.0" encoding="utf-8"?>
 <p:sld xmlns:a="http://schemas.openxmlformats.org/drawingml/2006/main" xmlns:r="http://schemas.openxmlformats.org/officeDocument/2006/relationships" xmlns:p="http://schemas.openxmlformats.org/presentationml/2006/main">
-  <p:cSld name="Slide 5">
+  <p:cSld name="Slide 6">
     <p:spTree>
       <p:nvGrpSpPr>
         <p:cNvPr id="1" name=""/>
@@ -15583,7 +20045,7 @@
       </p:sp>
       <p:graphicFrame>
         <p:nvGraphicFramePr>
-          <p:cNvPr id="6" name="Table 0"/>
+          <p:cNvPr id="7" name="Table 0"/>
           <p:cNvGraphicFramePr>
             <a:graphicFrameLocks noGrp="1"/>
           </p:cNvGraphicFramePr>
@@ -15961,7 +20423,7 @@
       </p:sp>
       <p:graphicFrame>
         <p:nvGraphicFramePr>
-          <p:cNvPr id="11" name="Table 1"/>
+          <p:cNvPr id="13" name="Table 1"/>
           <p:cNvGraphicFramePr>
             <a:graphicFrameLocks noGrp="1"/>
           </p:cNvGraphicFramePr>
@@ -17255,7 +21717,7 @@
             <a:pPr algn="r"/>
             <a:fld id="{F7021451-1387-4CA6-816F-3879F97B5CBC}" type="slidenum">
               <a:rPr b="0" lang="en-US"/>
-              <a:t>5</a:t>
+              <a:t>6</a:t>
             </a:fld>
             <a:endParaRPr lang="en-US"/>
           </a:p>
@@ -17269,9 +21731,9 @@
 </p:sld>
 </file>
 
-<file path=ppt/slides/slide6.xml><?xml version="1.0" encoding="utf-8"?>
+<file path=ppt/slides/slide7.xml><?xml version="1.0" encoding="utf-8"?>
 <p:sld xmlns:a="http://schemas.openxmlformats.org/drawingml/2006/main" xmlns:r="http://schemas.openxmlformats.org/officeDocument/2006/relationships" xmlns:p="http://schemas.openxmlformats.org/presentationml/2006/main">
-  <p:cSld name="Slide 6">
+  <p:cSld name="Slide 7">
     <p:spTree>
       <p:nvGrpSpPr>
         <p:cNvPr id="1" name=""/>
@@ -17329,7 +21791,7 @@
       </p:sp>
       <p:graphicFrame>
         <p:nvGraphicFramePr>
-          <p:cNvPr id="7" name="Table 0"/>
+          <p:cNvPr id="8" name="Table 0"/>
           <p:cNvGraphicFramePr>
             <a:graphicFrameLocks noGrp="1"/>
           </p:cNvGraphicFramePr>
@@ -18846,7 +23308,7 @@
             <a:pPr algn="r"/>
             <a:fld id="{F7021451-1387-4CA6-816F-3879F97B5CBC}" type="slidenum">
               <a:rPr b="0" lang="en-US"/>
-              <a:t>6</a:t>
+              <a:t>7</a:t>
             </a:fld>
             <a:endParaRPr lang="en-US"/>
           </a:p>
@@ -18860,9 +23322,9 @@
 </p:sld>
 </file>
 
-<file path=ppt/slides/slide7.xml><?xml version="1.0" encoding="utf-8"?>
+<file path=ppt/slides/slide8.xml><?xml version="1.0" encoding="utf-8"?>
 <p:sld xmlns:a="http://schemas.openxmlformats.org/drawingml/2006/main" xmlns:r="http://schemas.openxmlformats.org/officeDocument/2006/relationships" xmlns:p="http://schemas.openxmlformats.org/presentationml/2006/main">
-  <p:cSld name="Slide 7">
+  <p:cSld name="Slide 8">
     <p:spTree>
       <p:nvGrpSpPr>
         <p:cNvPr id="1" name=""/>
@@ -18959,7 +23421,7 @@
       </p:sp>
       <p:graphicFrame>
         <p:nvGraphicFramePr>
-          <p:cNvPr id="8" name="Table 0"/>
+          <p:cNvPr id="9" name="Table 0"/>
           <p:cNvGraphicFramePr>
             <a:graphicFrameLocks noGrp="1"/>
           </p:cNvGraphicFramePr>
@@ -19890,7 +24352,7 @@
       </p:sp>
       <p:graphicFrame>
         <p:nvGraphicFramePr>
-          <p:cNvPr id="15" name="Table 1"/>
+          <p:cNvPr id="17" name="Table 1"/>
           <p:cNvGraphicFramePr>
             <a:graphicFrameLocks noGrp="1"/>
           </p:cNvGraphicFramePr>
@@ -20683,7 +25145,7 @@
             <a:pPr algn="r"/>
             <a:fld id="{F7021451-1387-4CA6-816F-3879F97B5CBC}" type="slidenum">
               <a:rPr b="0" lang="en-US"/>
-              <a:t>7</a:t>
+              <a:t>8</a:t>
             </a:fld>
             <a:endParaRPr lang="en-US"/>
           </a:p>
@@ -20697,9 +25159,9 @@
 </p:sld>
 </file>
 
-<file path=ppt/slides/slide8.xml><?xml version="1.0" encoding="utf-8"?>
+<file path=ppt/slides/slide9.xml><?xml version="1.0" encoding="utf-8"?>
 <p:sld xmlns:a="http://schemas.openxmlformats.org/drawingml/2006/main" xmlns:r="http://schemas.openxmlformats.org/officeDocument/2006/relationships" xmlns:p="http://schemas.openxmlformats.org/presentationml/2006/main">
-  <p:cSld name="Slide 8">
+  <p:cSld name="Slide 9">
     <p:spTree>
       <p:nvGrpSpPr>
         <p:cNvPr id="1" name=""/>
@@ -20779,2148 +25241,6 @@
           </a:prstGeom>
         </p:spPr>
       </p:pic>
-      <p:sp>
-        <p:nvSpPr>
-          <p:cNvPr id="25" name="Slide Number Placeholder 0"/>
-          <p:cNvSpPr>
-            <a:spLocks noGrp="1"/>
-          </p:cNvSpPr>
-          <p:nvPr>
-            <p:ph type="sldNum" sz="quarter" idx="4294967295"/>
-          </p:nvPr>
-        </p:nvSpPr>
-        <p:spPr>
-          <a:xfrm>
-            <a:off x="11185855" y="6446520"/>
-            <a:ext cx="457200" cy="274320"/>
-          </a:xfrm>
-          <a:prstGeom prst="rect">
-            <a:avLst/>
-          </a:prstGeom>
-          <a:extLst>
-            <a:ext uri="{C572A759-6A51-4108-AA02-DFA0A04FC94B}">
-              <ma14:wrappingTextBoxFlag xmlns:ma14="http://schemas.microsoft.com/office/mac/drawingml/2011/main" val="0"/>
-            </a:ext>
-          </a:extLst>
-        </p:spPr>
-        <p:txBody>
-          <a:bodyPr/>
-          <a:lstStyle>
-            <a:lvl1pPr>
-              <a:defRPr sz="1000">
-                <a:solidFill>
-                  <a:srgbClr val="5B6573"/>
-                </a:solidFill>
-                <a:latin typeface="Microsoft YaHei"/>
-                <a:ea typeface="Microsoft YaHei"/>
-                <a:cs typeface="Microsoft YaHei"/>
-              </a:defRPr>
-            </a:lvl1pPr>
-          </a:lstStyle>
-          <a:p>
-            <a:pPr algn="r"/>
-            <a:fld id="{F7021451-1387-4CA6-816F-3879F97B5CBC}" type="slidenum">
-              <a:rPr b="0" lang="en-US"/>
-              <a:t>8</a:t>
-            </a:fld>
-            <a:endParaRPr lang="en-US"/>
-          </a:p>
-        </p:txBody>
-      </p:sp>
-    </p:spTree>
-  </p:cSld>
-  <p:clrMapOvr>
-    <a:masterClrMapping/>
-  </p:clrMapOvr>
-</p:sld>
-</file>
-
-<file path=ppt/slides/slide9.xml><?xml version="1.0" encoding="utf-8"?>
-<p:sld xmlns:a="http://schemas.openxmlformats.org/drawingml/2006/main" xmlns:r="http://schemas.openxmlformats.org/officeDocument/2006/relationships" xmlns:p="http://schemas.openxmlformats.org/presentationml/2006/main">
-  <p:cSld name="Slide 9">
-    <p:spTree>
-      <p:nvGrpSpPr>
-        <p:cNvPr id="1" name=""/>
-        <p:cNvGrpSpPr/>
-        <p:nvPr/>
-      </p:nvGrpSpPr>
-      <p:grpSpPr>
-        <a:xfrm>
-          <a:off x="0" y="0"/>
-          <a:ext cx="0" cy="0"/>
-          <a:chOff x="0" y="0"/>
-          <a:chExt cx="0" cy="0"/>
-        </a:xfrm>
-      </p:grpSpPr>
-      <p:sp>
-        <p:nvSpPr>
-          <p:cNvPr id="2" name="Text 0"/>
-          <p:cNvSpPr/>
-          <p:nvPr>
-            <p:ph idx="100" type="title" hasCustomPrompt="1"/>
-          </p:nvPr>
-        </p:nvSpPr>
-        <p:spPr>
-          <a:xfrm>
-            <a:off x="548640" y="274320"/>
-            <a:ext cx="11094415" cy="685800"/>
-          </a:xfrm>
-          <a:prstGeom prst="rect">
-            <a:avLst/>
-          </a:prstGeom>
-          <a:noFill/>
-          <a:ln/>
-        </p:spPr>
-        <p:txBody>
-          <a:bodyPr wrap="square" lIns="0" tIns="0" rIns="0" bIns="0" rtlCol="0" anchor="ctr"/>
-          <a:lstStyle/>
-          <a:p>
-            <a:pPr algn="l" indent="0" marL="0">
-              <a:buNone/>
-            </a:pPr>
-            <a:r>
-              <a:rPr lang="en-US" sz="2800" b="1" dirty="0">
-                <a:solidFill>
-                  <a:srgbClr val="1F2A37"/>
-                </a:solidFill>
-                <a:latin typeface="Microsoft YaHei" pitchFamily="34" charset="0"/>
-                <a:ea typeface="Microsoft YaHei" pitchFamily="34" charset="-122"/>
-                <a:cs typeface="Microsoft YaHei" pitchFamily="34" charset="-120"/>
-              </a:rPr>
-              <a:t>检查失败了怎么办：唯一修复，按学习时刻回归，否则失效</a:t>
-            </a:r>
-            <a:endParaRPr lang="en-US" sz="2800" dirty="0"/>
-          </a:p>
-        </p:txBody>
-      </p:sp>
-      <p:sp>
-        <p:nvSpPr>
-          <p:cNvPr id="3" name="Text 1"/>
-          <p:cNvSpPr txBox="1"/>
-          <p:nvPr/>
-        </p:nvSpPr>
-        <p:spPr>
-          <a:xfrm>
-            <a:off x="548640" y="1005840"/>
-            <a:ext cx="5577840" cy="320040"/>
-          </a:xfrm>
-          <a:prstGeom prst="rect">
-            <a:avLst/>
-          </a:prstGeom>
-          <a:noFill/>
-          <a:ln/>
-        </p:spPr>
-        <p:txBody>
-          <a:bodyPr wrap="square" lIns="0" tIns="0" rIns="0" bIns="0" rtlCol="0" anchor="ctr"/>
-          <a:lstStyle/>
-          <a:p>
-            <a:pPr indent="0" marL="0">
-              <a:buNone/>
-            </a:pPr>
-            <a:r>
-              <a:rPr lang="en-US" sz="1500" b="1" dirty="0">
-                <a:solidFill>
-                  <a:srgbClr val="B5671A"/>
-                </a:solidFill>
-                <a:latin typeface="Microsoft YaHei" pitchFamily="34" charset="0"/>
-                <a:ea typeface="Microsoft YaHei" pitchFamily="34" charset="-122"/>
-                <a:cs typeface="Microsoft YaHei" pitchFamily="34" charset="-120"/>
-              </a:rPr>
-              <a:t>修复：找一个谓词，恢复“每个键一行”且不丢键</a:t>
-            </a:r>
-            <a:endParaRPr lang="en-US" sz="1500" dirty="0"/>
-          </a:p>
-        </p:txBody>
-      </p:sp>
-      <p:graphicFrame>
-        <p:nvGraphicFramePr>
-          <p:cNvPr id="10" name="Table 0"/>
-          <p:cNvGraphicFramePr>
-            <a:graphicFrameLocks noGrp="1"/>
-          </p:cNvGraphicFramePr>
-          <p:nvPr>
-            <p:extLst>
-              <p:ext uri="{D42A27DB-BD31-4B8C-83A1-F6EECF244321}">
-                <p14:modId xmlns:p14="http://schemas.microsoft.com/office/powerpoint/2010/main" val="1579011935"/>
-              </p:ext>
-            </p:extLst>
-          </p:nvPr>
-        </p:nvGraphicFramePr>
-        <p:xfrm>
-          <a:off x="548640" y="1325880"/>
-          <a:ext cx="5577840" cy="914400"/>
-        </p:xfrm>
-        <a:graphic>
-          <a:graphicData uri="http://schemas.openxmlformats.org/drawingml/2006/table">
-            <a:tbl>
-              <a:tblPr/>
-              <a:tblGrid>
-                <a:gridCol w="1371600"/>
-                <a:gridCol w="1463040"/>
-                <a:gridCol w="2743200"/>
-              </a:tblGrid>
-              <a:tr h="0">
-                <a:tc>
-                  <a:txBody>
-                    <a:bodyPr/>
-                    <a:lstStyle/>
-                    <a:p>
-                      <a:pPr indent="0" marL="0">
-                        <a:buNone/>
-                      </a:pPr>
-                      <a:r>
-                        <a:rPr lang="en-US" sz="1200" b="1" dirty="0">
-                          <a:solidFill>
-                            <a:srgbClr val="1F2A37"/>
-                          </a:solidFill>
-                          <a:latin typeface="Microsoft YaHei" pitchFamily="34" charset="0"/>
-                          <a:ea typeface="Microsoft YaHei" pitchFamily="34" charset="-122"/>
-                          <a:cs typeface="Microsoft YaHei" pitchFamily="34" charset="-120"/>
-                        </a:rPr>
-                        <a:t>订单号</a:t>
-                      </a:r>
-                      <a:endParaRPr lang="en-US" sz="1200" dirty="0">
-                        <a:latin typeface="Microsoft YaHei" charset="0"/>
-                        <a:ea typeface="Microsoft YaHei" charset="0"/>
-                        <a:cs typeface="Microsoft YaHei" charset="0"/>
-                      </a:endParaRPr>
-                    </a:p>
-                  </a:txBody>
-                  <a:tcPr marL="91440" marR="91440" marT="54864" marB="54864" anchor="ctr">
-                    <a:lnL w="12700" cap="flat" cmpd="sng" algn="ctr">
-                      <a:solidFill>
-                        <a:srgbClr val="D5DBE3"/>
-                      </a:solidFill>
-                      <a:prstDash val="solid"/>
-                      <a:round/>
-                      <a:headEnd type="none" w="med" len="med"/>
-                      <a:tailEnd type="none" w="med" len="med"/>
-                    </a:lnL>
-                    <a:lnR w="12700" cap="flat" cmpd="sng" algn="ctr">
-                      <a:solidFill>
-                        <a:srgbClr val="D5DBE3"/>
-                      </a:solidFill>
-                      <a:prstDash val="solid"/>
-                      <a:round/>
-                      <a:headEnd type="none" w="med" len="med"/>
-                      <a:tailEnd type="none" w="med" len="med"/>
-                    </a:lnR>
-                    <a:lnT w="12700" cap="flat" cmpd="sng" algn="ctr">
-                      <a:solidFill>
-                        <a:srgbClr val="D5DBE3"/>
-                      </a:solidFill>
-                      <a:prstDash val="solid"/>
-                      <a:round/>
-                      <a:headEnd type="none" w="med" len="med"/>
-                      <a:tailEnd type="none" w="med" len="med"/>
-                    </a:lnT>
-                    <a:lnB w="12700" cap="flat" cmpd="sng" algn="ctr">
-                      <a:solidFill>
-                        <a:srgbClr val="D5DBE3"/>
-                      </a:solidFill>
-                      <a:prstDash val="solid"/>
-                      <a:round/>
-                      <a:headEnd type="none" w="med" len="med"/>
-                      <a:tailEnd type="none" w="med" len="med"/>
-                    </a:lnB>
-                    <a:solidFill>
-                      <a:srgbClr val="F1F3F6"/>
-                    </a:solidFill>
-                  </a:tcPr>
-                </a:tc>
-                <a:tc>
-                  <a:txBody>
-                    <a:bodyPr/>
-                    <a:lstStyle/>
-                    <a:p>
-                      <a:pPr indent="0" marL="0">
-                        <a:buNone/>
-                      </a:pPr>
-                      <a:r>
-                        <a:rPr lang="en-US" sz="1200" b="1" dirty="0">
-                          <a:solidFill>
-                            <a:srgbClr val="1F2A37"/>
-                          </a:solidFill>
-                          <a:latin typeface="Microsoft YaHei" pitchFamily="34" charset="0"/>
-                          <a:ea typeface="Microsoft YaHei" pitchFamily="34" charset="-122"/>
-                          <a:cs typeface="Microsoft YaHei" pitchFamily="34" charset="-120"/>
-                        </a:rPr>
-                        <a:t>金额</a:t>
-                      </a:r>
-                      <a:endParaRPr lang="en-US" sz="1200" dirty="0">
-                        <a:latin typeface="Microsoft YaHei" charset="0"/>
-                        <a:ea typeface="Microsoft YaHei" charset="0"/>
-                        <a:cs typeface="Microsoft YaHei" charset="0"/>
-                      </a:endParaRPr>
-                    </a:p>
-                  </a:txBody>
-                  <a:tcPr marL="91440" marR="91440" marT="54864" marB="54864" anchor="ctr">
-                    <a:lnL w="12700" cap="flat" cmpd="sng" algn="ctr">
-                      <a:solidFill>
-                        <a:srgbClr val="D5DBE3"/>
-                      </a:solidFill>
-                      <a:prstDash val="solid"/>
-                      <a:round/>
-                      <a:headEnd type="none" w="med" len="med"/>
-                      <a:tailEnd type="none" w="med" len="med"/>
-                    </a:lnL>
-                    <a:lnR w="12700" cap="flat" cmpd="sng" algn="ctr">
-                      <a:solidFill>
-                        <a:srgbClr val="D5DBE3"/>
-                      </a:solidFill>
-                      <a:prstDash val="solid"/>
-                      <a:round/>
-                      <a:headEnd type="none" w="med" len="med"/>
-                      <a:tailEnd type="none" w="med" len="med"/>
-                    </a:lnR>
-                    <a:lnT w="12700" cap="flat" cmpd="sng" algn="ctr">
-                      <a:solidFill>
-                        <a:srgbClr val="D5DBE3"/>
-                      </a:solidFill>
-                      <a:prstDash val="solid"/>
-                      <a:round/>
-                      <a:headEnd type="none" w="med" len="med"/>
-                      <a:tailEnd type="none" w="med" len="med"/>
-                    </a:lnT>
-                    <a:lnB w="12700" cap="flat" cmpd="sng" algn="ctr">
-                      <a:solidFill>
-                        <a:srgbClr val="D5DBE3"/>
-                      </a:solidFill>
-                      <a:prstDash val="solid"/>
-                      <a:round/>
-                      <a:headEnd type="none" w="med" len="med"/>
-                      <a:tailEnd type="none" w="med" len="med"/>
-                    </a:lnB>
-                    <a:solidFill>
-                      <a:srgbClr val="F1F3F6"/>
-                    </a:solidFill>
-                  </a:tcPr>
-                </a:tc>
-                <a:tc>
-                  <a:txBody>
-                    <a:bodyPr/>
-                    <a:lstStyle/>
-                    <a:p>
-                      <a:pPr indent="0" marL="0">
-                        <a:buNone/>
-                      </a:pPr>
-                      <a:r>
-                        <a:rPr lang="en-US" sz="1200" b="1" dirty="0">
-                          <a:solidFill>
-                            <a:srgbClr val="1F2A37"/>
-                          </a:solidFill>
-                          <a:latin typeface="Microsoft YaHei" pitchFamily="34" charset="0"/>
-                          <a:ea typeface="Microsoft YaHei" pitchFamily="34" charset="-122"/>
-                          <a:cs typeface="Microsoft YaHei" pitchFamily="34" charset="-120"/>
-                        </a:rPr>
-                        <a:t>ss_is_current</a:t>
-                      </a:r>
-                      <a:endParaRPr lang="en-US" sz="1200" dirty="0">
-                        <a:latin typeface="Microsoft YaHei" charset="0"/>
-                        <a:ea typeface="Microsoft YaHei" charset="0"/>
-                        <a:cs typeface="Microsoft YaHei" charset="0"/>
-                      </a:endParaRPr>
-                    </a:p>
-                  </a:txBody>
-                  <a:tcPr marL="91440" marR="91440" marT="54864" marB="54864" anchor="ctr">
-                    <a:lnL w="12700" cap="flat" cmpd="sng" algn="ctr">
-                      <a:solidFill>
-                        <a:srgbClr val="D5DBE3"/>
-                      </a:solidFill>
-                      <a:prstDash val="solid"/>
-                      <a:round/>
-                      <a:headEnd type="none" w="med" len="med"/>
-                      <a:tailEnd type="none" w="med" len="med"/>
-                    </a:lnL>
-                    <a:lnR w="12700" cap="flat" cmpd="sng" algn="ctr">
-                      <a:solidFill>
-                        <a:srgbClr val="D5DBE3"/>
-                      </a:solidFill>
-                      <a:prstDash val="solid"/>
-                      <a:round/>
-                      <a:headEnd type="none" w="med" len="med"/>
-                      <a:tailEnd type="none" w="med" len="med"/>
-                    </a:lnR>
-                    <a:lnT w="12700" cap="flat" cmpd="sng" algn="ctr">
-                      <a:solidFill>
-                        <a:srgbClr val="D5DBE3"/>
-                      </a:solidFill>
-                      <a:prstDash val="solid"/>
-                      <a:round/>
-                      <a:headEnd type="none" w="med" len="med"/>
-                      <a:tailEnd type="none" w="med" len="med"/>
-                    </a:lnT>
-                    <a:lnB w="12700" cap="flat" cmpd="sng" algn="ctr">
-                      <a:solidFill>
-                        <a:srgbClr val="D5DBE3"/>
-                      </a:solidFill>
-                      <a:prstDash val="solid"/>
-                      <a:round/>
-                      <a:headEnd type="none" w="med" len="med"/>
-                      <a:tailEnd type="none" w="med" len="med"/>
-                    </a:lnB>
-                    <a:solidFill>
-                      <a:srgbClr val="F1F3F6"/>
-                    </a:solidFill>
-                  </a:tcPr>
-                </a:tc>
-              </a:tr>
-              <a:tr h="0">
-                <a:tc>
-                  <a:txBody>
-                    <a:bodyPr/>
-                    <a:lstStyle/>
-                    <a:p>
-                      <a:pPr indent="0" marL="0">
-                        <a:buNone/>
-                      </a:pPr>
-                      <a:r>
-                        <a:rPr lang="en-US" sz="1200" dirty="0">
-                          <a:solidFill>
-                            <a:srgbClr val="1F2A37"/>
-                          </a:solidFill>
-                          <a:latin typeface="Microsoft YaHei" pitchFamily="34" charset="0"/>
-                          <a:ea typeface="Microsoft YaHei" pitchFamily="34" charset="-122"/>
-                          <a:cs typeface="Microsoft YaHei" pitchFamily="34" charset="-120"/>
-                        </a:rPr>
-                        <a:t>001</a:t>
-                      </a:r>
-                      <a:endParaRPr lang="en-US" sz="1200" dirty="0">
-                        <a:latin typeface="Microsoft YaHei" charset="0"/>
-                        <a:ea typeface="Microsoft YaHei" charset="0"/>
-                        <a:cs typeface="Microsoft YaHei" charset="0"/>
-                      </a:endParaRPr>
-                    </a:p>
-                  </a:txBody>
-                  <a:tcPr marL="91440" marR="91440" marT="54864" marB="54864" anchor="ctr">
-                    <a:lnL w="12700" cap="flat" cmpd="sng" algn="ctr">
-                      <a:solidFill>
-                        <a:srgbClr val="D5DBE3"/>
-                      </a:solidFill>
-                      <a:prstDash val="solid"/>
-                      <a:round/>
-                      <a:headEnd type="none" w="med" len="med"/>
-                      <a:tailEnd type="none" w="med" len="med"/>
-                    </a:lnL>
-                    <a:lnR w="12700" cap="flat" cmpd="sng" algn="ctr">
-                      <a:solidFill>
-                        <a:srgbClr val="D5DBE3"/>
-                      </a:solidFill>
-                      <a:prstDash val="solid"/>
-                      <a:round/>
-                      <a:headEnd type="none" w="med" len="med"/>
-                      <a:tailEnd type="none" w="med" len="med"/>
-                    </a:lnR>
-                    <a:lnT w="12700" cap="flat" cmpd="sng" algn="ctr">
-                      <a:solidFill>
-                        <a:srgbClr val="D5DBE3"/>
-                      </a:solidFill>
-                      <a:prstDash val="solid"/>
-                      <a:round/>
-                      <a:headEnd type="none" w="med" len="med"/>
-                      <a:tailEnd type="none" w="med" len="med"/>
-                    </a:lnT>
-                    <a:lnB w="12700" cap="flat" cmpd="sng" algn="ctr">
-                      <a:solidFill>
-                        <a:srgbClr val="D5DBE3"/>
-                      </a:solidFill>
-                      <a:prstDash val="solid"/>
-                      <a:round/>
-                      <a:headEnd type="none" w="med" len="med"/>
-                      <a:tailEnd type="none" w="med" len="med"/>
-                    </a:lnB>
-                  </a:tcPr>
-                </a:tc>
-                <a:tc>
-                  <a:txBody>
-                    <a:bodyPr/>
-                    <a:lstStyle/>
-                    <a:p>
-                      <a:pPr indent="0" marL="0">
-                        <a:buNone/>
-                      </a:pPr>
-                      <a:r>
-                        <a:rPr lang="en-US" sz="1200" dirty="0">
-                          <a:solidFill>
-                            <a:srgbClr val="1F2A37"/>
-                          </a:solidFill>
-                          <a:latin typeface="Microsoft YaHei" pitchFamily="34" charset="0"/>
-                          <a:ea typeface="Microsoft YaHei" pitchFamily="34" charset="-122"/>
-                          <a:cs typeface="Microsoft YaHei" pitchFamily="34" charset="-120"/>
-                        </a:rPr>
-                        <a:t>100 元</a:t>
-                      </a:r>
-                      <a:endParaRPr lang="en-US" sz="1200" dirty="0">
-                        <a:latin typeface="Microsoft YaHei" charset="0"/>
-                        <a:ea typeface="Microsoft YaHei" charset="0"/>
-                        <a:cs typeface="Microsoft YaHei" charset="0"/>
-                      </a:endParaRPr>
-                    </a:p>
-                  </a:txBody>
-                  <a:tcPr marL="91440" marR="91440" marT="54864" marB="54864" anchor="ctr">
-                    <a:lnL w="12700" cap="flat" cmpd="sng" algn="ctr">
-                      <a:solidFill>
-                        <a:srgbClr val="D5DBE3"/>
-                      </a:solidFill>
-                      <a:prstDash val="solid"/>
-                      <a:round/>
-                      <a:headEnd type="none" w="med" len="med"/>
-                      <a:tailEnd type="none" w="med" len="med"/>
-                    </a:lnL>
-                    <a:lnR w="12700" cap="flat" cmpd="sng" algn="ctr">
-                      <a:solidFill>
-                        <a:srgbClr val="D5DBE3"/>
-                      </a:solidFill>
-                      <a:prstDash val="solid"/>
-                      <a:round/>
-                      <a:headEnd type="none" w="med" len="med"/>
-                      <a:tailEnd type="none" w="med" len="med"/>
-                    </a:lnR>
-                    <a:lnT w="12700" cap="flat" cmpd="sng" algn="ctr">
-                      <a:solidFill>
-                        <a:srgbClr val="D5DBE3"/>
-                      </a:solidFill>
-                      <a:prstDash val="solid"/>
-                      <a:round/>
-                      <a:headEnd type="none" w="med" len="med"/>
-                      <a:tailEnd type="none" w="med" len="med"/>
-                    </a:lnT>
-                    <a:lnB w="12700" cap="flat" cmpd="sng" algn="ctr">
-                      <a:solidFill>
-                        <a:srgbClr val="D5DBE3"/>
-                      </a:solidFill>
-                      <a:prstDash val="solid"/>
-                      <a:round/>
-                      <a:headEnd type="none" w="med" len="med"/>
-                      <a:tailEnd type="none" w="med" len="med"/>
-                    </a:lnB>
-                  </a:tcPr>
-                </a:tc>
-                <a:tc>
-                  <a:txBody>
-                    <a:bodyPr/>
-                    <a:lstStyle/>
-                    <a:p>
-                      <a:pPr indent="0" marL="0">
-                        <a:buNone/>
-                      </a:pPr>
-                      <a:r>
-                        <a:rPr lang="en-US" sz="1200" dirty="0">
-                          <a:solidFill>
-                            <a:srgbClr val="1F2A37"/>
-                          </a:solidFill>
-                          <a:latin typeface="Microsoft YaHei" pitchFamily="34" charset="0"/>
-                          <a:ea typeface="Microsoft YaHei" pitchFamily="34" charset="-122"/>
-                          <a:cs typeface="Microsoft YaHei" pitchFamily="34" charset="-120"/>
-                        </a:rPr>
-                        <a:t>1</a:t>
-                      </a:r>
-                      <a:endParaRPr lang="en-US" sz="1200" dirty="0">
-                        <a:latin typeface="Microsoft YaHei" charset="0"/>
-                        <a:ea typeface="Microsoft YaHei" charset="0"/>
-                        <a:cs typeface="Microsoft YaHei" charset="0"/>
-                      </a:endParaRPr>
-                    </a:p>
-                  </a:txBody>
-                  <a:tcPr marL="91440" marR="91440" marT="54864" marB="54864" anchor="ctr">
-                    <a:lnL w="12700" cap="flat" cmpd="sng" algn="ctr">
-                      <a:solidFill>
-                        <a:srgbClr val="D5DBE3"/>
-                      </a:solidFill>
-                      <a:prstDash val="solid"/>
-                      <a:round/>
-                      <a:headEnd type="none" w="med" len="med"/>
-                      <a:tailEnd type="none" w="med" len="med"/>
-                    </a:lnL>
-                    <a:lnR w="12700" cap="flat" cmpd="sng" algn="ctr">
-                      <a:solidFill>
-                        <a:srgbClr val="D5DBE3"/>
-                      </a:solidFill>
-                      <a:prstDash val="solid"/>
-                      <a:round/>
-                      <a:headEnd type="none" w="med" len="med"/>
-                      <a:tailEnd type="none" w="med" len="med"/>
-                    </a:lnR>
-                    <a:lnT w="12700" cap="flat" cmpd="sng" algn="ctr">
-                      <a:solidFill>
-                        <a:srgbClr val="D5DBE3"/>
-                      </a:solidFill>
-                      <a:prstDash val="solid"/>
-                      <a:round/>
-                      <a:headEnd type="none" w="med" len="med"/>
-                      <a:tailEnd type="none" w="med" len="med"/>
-                    </a:lnT>
-                    <a:lnB w="12700" cap="flat" cmpd="sng" algn="ctr">
-                      <a:solidFill>
-                        <a:srgbClr val="D5DBE3"/>
-                      </a:solidFill>
-                      <a:prstDash val="solid"/>
-                      <a:round/>
-                      <a:headEnd type="none" w="med" len="med"/>
-                      <a:tailEnd type="none" w="med" len="med"/>
-                    </a:lnB>
-                  </a:tcPr>
-                </a:tc>
-              </a:tr>
-              <a:tr h="0">
-                <a:tc>
-                  <a:txBody>
-                    <a:bodyPr/>
-                    <a:lstStyle/>
-                    <a:p>
-                      <a:pPr indent="0" marL="0">
-                        <a:buNone/>
-                      </a:pPr>
-                      <a:r>
-                        <a:rPr lang="en-US" sz="1200" dirty="0">
-                          <a:solidFill>
-                            <a:srgbClr val="1F2A37"/>
-                          </a:solidFill>
-                          <a:latin typeface="Microsoft YaHei" pitchFamily="34" charset="0"/>
-                          <a:ea typeface="Microsoft YaHei" pitchFamily="34" charset="-122"/>
-                          <a:cs typeface="Microsoft YaHei" pitchFamily="34" charset="-120"/>
-                        </a:rPr>
-                        <a:t>002</a:t>
-                      </a:r>
-                      <a:endParaRPr lang="en-US" sz="1200" dirty="0">
-                        <a:latin typeface="Microsoft YaHei" charset="0"/>
-                        <a:ea typeface="Microsoft YaHei" charset="0"/>
-                        <a:cs typeface="Microsoft YaHei" charset="0"/>
-                      </a:endParaRPr>
-                    </a:p>
-                  </a:txBody>
-                  <a:tcPr marL="91440" marR="91440" marT="54864" marB="54864" anchor="ctr">
-                    <a:lnL w="12700" cap="flat" cmpd="sng" algn="ctr">
-                      <a:solidFill>
-                        <a:srgbClr val="D5DBE3"/>
-                      </a:solidFill>
-                      <a:prstDash val="solid"/>
-                      <a:round/>
-                      <a:headEnd type="none" w="med" len="med"/>
-                      <a:tailEnd type="none" w="med" len="med"/>
-                    </a:lnL>
-                    <a:lnR w="12700" cap="flat" cmpd="sng" algn="ctr">
-                      <a:solidFill>
-                        <a:srgbClr val="D5DBE3"/>
-                      </a:solidFill>
-                      <a:prstDash val="solid"/>
-                      <a:round/>
-                      <a:headEnd type="none" w="med" len="med"/>
-                      <a:tailEnd type="none" w="med" len="med"/>
-                    </a:lnR>
-                    <a:lnT w="12700" cap="flat" cmpd="sng" algn="ctr">
-                      <a:solidFill>
-                        <a:srgbClr val="D5DBE3"/>
-                      </a:solidFill>
-                      <a:prstDash val="solid"/>
-                      <a:round/>
-                      <a:headEnd type="none" w="med" len="med"/>
-                      <a:tailEnd type="none" w="med" len="med"/>
-                    </a:lnT>
-                    <a:lnB w="12700" cap="flat" cmpd="sng" algn="ctr">
-                      <a:solidFill>
-                        <a:srgbClr val="D5DBE3"/>
-                      </a:solidFill>
-                      <a:prstDash val="solid"/>
-                      <a:round/>
-                      <a:headEnd type="none" w="med" len="med"/>
-                      <a:tailEnd type="none" w="med" len="med"/>
-                    </a:lnB>
-                  </a:tcPr>
-                </a:tc>
-                <a:tc>
-                  <a:txBody>
-                    <a:bodyPr/>
-                    <a:lstStyle/>
-                    <a:p>
-                      <a:pPr indent="0" marL="0">
-                        <a:buNone/>
-                      </a:pPr>
-                      <a:r>
-                        <a:rPr lang="en-US" sz="1200" dirty="0">
-                          <a:solidFill>
-                            <a:srgbClr val="1F2A37"/>
-                          </a:solidFill>
-                          <a:latin typeface="Microsoft YaHei" pitchFamily="34" charset="0"/>
-                          <a:ea typeface="Microsoft YaHei" pitchFamily="34" charset="-122"/>
-                          <a:cs typeface="Microsoft YaHei" pitchFamily="34" charset="-120"/>
-                        </a:rPr>
-                        <a:t>250 元</a:t>
-                      </a:r>
-                      <a:endParaRPr lang="en-US" sz="1200" dirty="0">
-                        <a:latin typeface="Microsoft YaHei" charset="0"/>
-                        <a:ea typeface="Microsoft YaHei" charset="0"/>
-                        <a:cs typeface="Microsoft YaHei" charset="0"/>
-                      </a:endParaRPr>
-                    </a:p>
-                  </a:txBody>
-                  <a:tcPr marL="91440" marR="91440" marT="54864" marB="54864" anchor="ctr">
-                    <a:lnL w="12700" cap="flat" cmpd="sng" algn="ctr">
-                      <a:solidFill>
-                        <a:srgbClr val="D5DBE3"/>
-                      </a:solidFill>
-                      <a:prstDash val="solid"/>
-                      <a:round/>
-                      <a:headEnd type="none" w="med" len="med"/>
-                      <a:tailEnd type="none" w="med" len="med"/>
-                    </a:lnL>
-                    <a:lnR w="12700" cap="flat" cmpd="sng" algn="ctr">
-                      <a:solidFill>
-                        <a:srgbClr val="D5DBE3"/>
-                      </a:solidFill>
-                      <a:prstDash val="solid"/>
-                      <a:round/>
-                      <a:headEnd type="none" w="med" len="med"/>
-                      <a:tailEnd type="none" w="med" len="med"/>
-                    </a:lnR>
-                    <a:lnT w="12700" cap="flat" cmpd="sng" algn="ctr">
-                      <a:solidFill>
-                        <a:srgbClr val="D5DBE3"/>
-                      </a:solidFill>
-                      <a:prstDash val="solid"/>
-                      <a:round/>
-                      <a:headEnd type="none" w="med" len="med"/>
-                      <a:tailEnd type="none" w="med" len="med"/>
-                    </a:lnT>
-                    <a:lnB w="12700" cap="flat" cmpd="sng" algn="ctr">
-                      <a:solidFill>
-                        <a:srgbClr val="D5DBE3"/>
-                      </a:solidFill>
-                      <a:prstDash val="solid"/>
-                      <a:round/>
-                      <a:headEnd type="none" w="med" len="med"/>
-                      <a:tailEnd type="none" w="med" len="med"/>
-                    </a:lnB>
-                  </a:tcPr>
-                </a:tc>
-                <a:tc>
-                  <a:txBody>
-                    <a:bodyPr/>
-                    <a:lstStyle/>
-                    <a:p>
-                      <a:pPr indent="0" marL="0">
-                        <a:buNone/>
-                      </a:pPr>
-                      <a:r>
-                        <a:rPr lang="en-US" sz="1200" dirty="0">
-                          <a:solidFill>
-                            <a:srgbClr val="1F2A37"/>
-                          </a:solidFill>
-                          <a:latin typeface="Microsoft YaHei" pitchFamily="34" charset="0"/>
-                          <a:ea typeface="Microsoft YaHei" pitchFamily="34" charset="-122"/>
-                          <a:cs typeface="Microsoft YaHei" pitchFamily="34" charset="-120"/>
-                        </a:rPr>
-                        <a:t>1</a:t>
-                      </a:r>
-                      <a:endParaRPr lang="en-US" sz="1200" dirty="0">
-                        <a:latin typeface="Microsoft YaHei" charset="0"/>
-                        <a:ea typeface="Microsoft YaHei" charset="0"/>
-                        <a:cs typeface="Microsoft YaHei" charset="0"/>
-                      </a:endParaRPr>
-                    </a:p>
-                  </a:txBody>
-                  <a:tcPr marL="91440" marR="91440" marT="54864" marB="54864" anchor="ctr">
-                    <a:lnL w="12700" cap="flat" cmpd="sng" algn="ctr">
-                      <a:solidFill>
-                        <a:srgbClr val="D5DBE3"/>
-                      </a:solidFill>
-                      <a:prstDash val="solid"/>
-                      <a:round/>
-                      <a:headEnd type="none" w="med" len="med"/>
-                      <a:tailEnd type="none" w="med" len="med"/>
-                    </a:lnL>
-                    <a:lnR w="12700" cap="flat" cmpd="sng" algn="ctr">
-                      <a:solidFill>
-                        <a:srgbClr val="D5DBE3"/>
-                      </a:solidFill>
-                      <a:prstDash val="solid"/>
-                      <a:round/>
-                      <a:headEnd type="none" w="med" len="med"/>
-                      <a:tailEnd type="none" w="med" len="med"/>
-                    </a:lnR>
-                    <a:lnT w="12700" cap="flat" cmpd="sng" algn="ctr">
-                      <a:solidFill>
-                        <a:srgbClr val="D5DBE3"/>
-                      </a:solidFill>
-                      <a:prstDash val="solid"/>
-                      <a:round/>
-                      <a:headEnd type="none" w="med" len="med"/>
-                      <a:tailEnd type="none" w="med" len="med"/>
-                    </a:lnT>
-                    <a:lnB w="12700" cap="flat" cmpd="sng" algn="ctr">
-                      <a:solidFill>
-                        <a:srgbClr val="D5DBE3"/>
-                      </a:solidFill>
-                      <a:prstDash val="solid"/>
-                      <a:round/>
-                      <a:headEnd type="none" w="med" len="med"/>
-                      <a:tailEnd type="none" w="med" len="med"/>
-                    </a:lnB>
-                  </a:tcPr>
-                </a:tc>
-              </a:tr>
-              <a:tr h="0">
-                <a:tc>
-                  <a:txBody>
-                    <a:bodyPr/>
-                    <a:lstStyle/>
-                    <a:p>
-                      <a:pPr indent="0" marL="0">
-                        <a:buNone/>
-                      </a:pPr>
-                      <a:r>
-                        <a:rPr lang="en-US" sz="1200" dirty="0">
-                          <a:solidFill>
-                            <a:srgbClr val="1F2A37"/>
-                          </a:solidFill>
-                          <a:latin typeface="Microsoft YaHei" pitchFamily="34" charset="0"/>
-                          <a:ea typeface="Microsoft YaHei" pitchFamily="34" charset="-122"/>
-                          <a:cs typeface="Microsoft YaHei" pitchFamily="34" charset="-120"/>
-                        </a:rPr>
-                        <a:t>003</a:t>
-                      </a:r>
-                      <a:endParaRPr lang="en-US" sz="1200" dirty="0">
-                        <a:latin typeface="Microsoft YaHei" charset="0"/>
-                        <a:ea typeface="Microsoft YaHei" charset="0"/>
-                        <a:cs typeface="Microsoft YaHei" charset="0"/>
-                      </a:endParaRPr>
-                    </a:p>
-                  </a:txBody>
-                  <a:tcPr marL="91440" marR="91440" marT="54864" marB="54864" anchor="ctr">
-                    <a:lnL w="12700" cap="flat" cmpd="sng" algn="ctr">
-                      <a:solidFill>
-                        <a:srgbClr val="D5DBE3"/>
-                      </a:solidFill>
-                      <a:prstDash val="solid"/>
-                      <a:round/>
-                      <a:headEnd type="none" w="med" len="med"/>
-                      <a:tailEnd type="none" w="med" len="med"/>
-                    </a:lnL>
-                    <a:lnR w="12700" cap="flat" cmpd="sng" algn="ctr">
-                      <a:solidFill>
-                        <a:srgbClr val="D5DBE3"/>
-                      </a:solidFill>
-                      <a:prstDash val="solid"/>
-                      <a:round/>
-                      <a:headEnd type="none" w="med" len="med"/>
-                      <a:tailEnd type="none" w="med" len="med"/>
-                    </a:lnR>
-                    <a:lnT w="12700" cap="flat" cmpd="sng" algn="ctr">
-                      <a:solidFill>
-                        <a:srgbClr val="D5DBE3"/>
-                      </a:solidFill>
-                      <a:prstDash val="solid"/>
-                      <a:round/>
-                      <a:headEnd type="none" w="med" len="med"/>
-                      <a:tailEnd type="none" w="med" len="med"/>
-                    </a:lnT>
-                    <a:lnB w="12700" cap="flat" cmpd="sng" algn="ctr">
-                      <a:solidFill>
-                        <a:srgbClr val="D5DBE3"/>
-                      </a:solidFill>
-                      <a:prstDash val="solid"/>
-                      <a:round/>
-                      <a:headEnd type="none" w="med" len="med"/>
-                      <a:tailEnd type="none" w="med" len="med"/>
-                    </a:lnB>
-                  </a:tcPr>
-                </a:tc>
-                <a:tc>
-                  <a:txBody>
-                    <a:bodyPr/>
-                    <a:lstStyle/>
-                    <a:p>
-                      <a:pPr indent="0" marL="0">
-                        <a:buNone/>
-                      </a:pPr>
-                      <a:r>
-                        <a:rPr lang="en-US" sz="1200" dirty="0">
-                          <a:solidFill>
-                            <a:srgbClr val="1F2A37"/>
-                          </a:solidFill>
-                          <a:latin typeface="Microsoft YaHei" pitchFamily="34" charset="0"/>
-                          <a:ea typeface="Microsoft YaHei" pitchFamily="34" charset="-122"/>
-                          <a:cs typeface="Microsoft YaHei" pitchFamily="34" charset="-120"/>
-                        </a:rPr>
-                        <a:t>300 元</a:t>
-                      </a:r>
-                      <a:endParaRPr lang="en-US" sz="1200" dirty="0">
-                        <a:latin typeface="Microsoft YaHei" charset="0"/>
-                        <a:ea typeface="Microsoft YaHei" charset="0"/>
-                        <a:cs typeface="Microsoft YaHei" charset="0"/>
-                      </a:endParaRPr>
-                    </a:p>
-                  </a:txBody>
-                  <a:tcPr marL="91440" marR="91440" marT="54864" marB="54864" anchor="ctr">
-                    <a:lnL w="12700" cap="flat" cmpd="sng" algn="ctr">
-                      <a:solidFill>
-                        <a:srgbClr val="D5DBE3"/>
-                      </a:solidFill>
-                      <a:prstDash val="solid"/>
-                      <a:round/>
-                      <a:headEnd type="none" w="med" len="med"/>
-                      <a:tailEnd type="none" w="med" len="med"/>
-                    </a:lnL>
-                    <a:lnR w="12700" cap="flat" cmpd="sng" algn="ctr">
-                      <a:solidFill>
-                        <a:srgbClr val="D5DBE3"/>
-                      </a:solidFill>
-                      <a:prstDash val="solid"/>
-                      <a:round/>
-                      <a:headEnd type="none" w="med" len="med"/>
-                      <a:tailEnd type="none" w="med" len="med"/>
-                    </a:lnR>
-                    <a:lnT w="12700" cap="flat" cmpd="sng" algn="ctr">
-                      <a:solidFill>
-                        <a:srgbClr val="D5DBE3"/>
-                      </a:solidFill>
-                      <a:prstDash val="solid"/>
-                      <a:round/>
-                      <a:headEnd type="none" w="med" len="med"/>
-                      <a:tailEnd type="none" w="med" len="med"/>
-                    </a:lnT>
-                    <a:lnB w="12700" cap="flat" cmpd="sng" algn="ctr">
-                      <a:solidFill>
-                        <a:srgbClr val="D5DBE3"/>
-                      </a:solidFill>
-                      <a:prstDash val="solid"/>
-                      <a:round/>
-                      <a:headEnd type="none" w="med" len="med"/>
-                      <a:tailEnd type="none" w="med" len="med"/>
-                    </a:lnB>
-                  </a:tcPr>
-                </a:tc>
-                <a:tc>
-                  <a:txBody>
-                    <a:bodyPr/>
-                    <a:lstStyle/>
-                    <a:p>
-                      <a:pPr indent="0" marL="0">
-                        <a:buNone/>
-                      </a:pPr>
-                      <a:r>
-                        <a:rPr lang="en-US" sz="1200" dirty="0">
-                          <a:solidFill>
-                            <a:srgbClr val="1F2A37"/>
-                          </a:solidFill>
-                          <a:latin typeface="Microsoft YaHei" pitchFamily="34" charset="0"/>
-                          <a:ea typeface="Microsoft YaHei" pitchFamily="34" charset="-122"/>
-                          <a:cs typeface="Microsoft YaHei" pitchFamily="34" charset="-120"/>
-                        </a:rPr>
-                        <a:t>1</a:t>
-                      </a:r>
-                      <a:endParaRPr lang="en-US" sz="1200" dirty="0">
-                        <a:latin typeface="Microsoft YaHei" charset="0"/>
-                        <a:ea typeface="Microsoft YaHei" charset="0"/>
-                        <a:cs typeface="Microsoft YaHei" charset="0"/>
-                      </a:endParaRPr>
-                    </a:p>
-                  </a:txBody>
-                  <a:tcPr marL="91440" marR="91440" marT="54864" marB="54864" anchor="ctr">
-                    <a:lnL w="12700" cap="flat" cmpd="sng" algn="ctr">
-                      <a:solidFill>
-                        <a:srgbClr val="D5DBE3"/>
-                      </a:solidFill>
-                      <a:prstDash val="solid"/>
-                      <a:round/>
-                      <a:headEnd type="none" w="med" len="med"/>
-                      <a:tailEnd type="none" w="med" len="med"/>
-                    </a:lnL>
-                    <a:lnR w="12700" cap="flat" cmpd="sng" algn="ctr">
-                      <a:solidFill>
-                        <a:srgbClr val="D5DBE3"/>
-                      </a:solidFill>
-                      <a:prstDash val="solid"/>
-                      <a:round/>
-                      <a:headEnd type="none" w="med" len="med"/>
-                      <a:tailEnd type="none" w="med" len="med"/>
-                    </a:lnR>
-                    <a:lnT w="12700" cap="flat" cmpd="sng" algn="ctr">
-                      <a:solidFill>
-                        <a:srgbClr val="D5DBE3"/>
-                      </a:solidFill>
-                      <a:prstDash val="solid"/>
-                      <a:round/>
-                      <a:headEnd type="none" w="med" len="med"/>
-                      <a:tailEnd type="none" w="med" len="med"/>
-                    </a:lnT>
-                    <a:lnB w="12700" cap="flat" cmpd="sng" algn="ctr">
-                      <a:solidFill>
-                        <a:srgbClr val="D5DBE3"/>
-                      </a:solidFill>
-                      <a:prstDash val="solid"/>
-                      <a:round/>
-                      <a:headEnd type="none" w="med" len="med"/>
-                      <a:tailEnd type="none" w="med" len="med"/>
-                    </a:lnB>
-                  </a:tcPr>
-                </a:tc>
-              </a:tr>
-            </a:tbl>
-          </a:graphicData>
-        </a:graphic>
-      </p:graphicFrame>
-      <p:sp>
-        <p:nvSpPr>
-          <p:cNvPr id="5" name="Text 2"/>
-          <p:cNvSpPr txBox="1"/>
-          <p:nvPr/>
-        </p:nvSpPr>
-        <p:spPr>
-          <a:xfrm>
-            <a:off x="548640" y="2743200"/>
-            <a:ext cx="5577840" cy="274320"/>
-          </a:xfrm>
-          <a:prstGeom prst="rect">
-            <a:avLst/>
-          </a:prstGeom>
-          <a:noFill/>
-          <a:ln/>
-        </p:spPr>
-        <p:txBody>
-          <a:bodyPr wrap="square" lIns="0" tIns="0" rIns="0" bIns="0" rtlCol="0" anchor="ctr"/>
-          <a:lstStyle/>
-          <a:p>
-            <a:pPr indent="0" marL="0">
-              <a:buNone/>
-            </a:pPr>
-            <a:r>
-              <a:rPr lang="en-US" sz="1300" b="1" dirty="0">
-                <a:solidFill>
-                  <a:srgbClr val="2E7D4F"/>
-                </a:solidFill>
-                <a:latin typeface="Microsoft YaHei" pitchFamily="34" charset="0"/>
-                <a:ea typeface="Microsoft YaHei" pitchFamily="34" charset="-122"/>
-                <a:cs typeface="Microsoft YaHei" pitchFamily="34" charset="-120"/>
-              </a:rPr>
-              <a:t>过滤 ss_is_current = '1' 之后：650 元 ✓</a:t>
-            </a:r>
-            <a:endParaRPr lang="en-US" sz="1300" dirty="0"/>
-          </a:p>
-        </p:txBody>
-      </p:sp>
-      <p:sp>
-        <p:nvSpPr>
-          <p:cNvPr id="6" name="Text 3"/>
-          <p:cNvSpPr txBox="1"/>
-          <p:nvPr/>
-        </p:nvSpPr>
-        <p:spPr>
-          <a:xfrm>
-            <a:off x="548640" y="3108960"/>
-            <a:ext cx="5577840" cy="1645920"/>
-          </a:xfrm>
-          <a:prstGeom prst="rect">
-            <a:avLst/>
-          </a:prstGeom>
-          <a:noFill/>
-          <a:ln/>
-        </p:spPr>
-        <p:txBody>
-          <a:bodyPr wrap="square" lIns="0" tIns="0" rIns="0" bIns="0" rtlCol="0" anchor="t"/>
-          <a:lstStyle/>
-          <a:p>
-            <a:pPr marL="342900" indent="-342900">
-              <a:spcAft>
-                <a:spcPts val="400"/>
-              </a:spcAft>
-              <a:buSzPct val="100000"/>
-              <a:buChar char="•"/>
-            </a:pPr>
-            <a:r>
-              <a:rPr lang="en-US" sz="1200" dirty="0">
-                <a:solidFill>
-                  <a:srgbClr val="1F2A37"/>
-                </a:solidFill>
-                <a:latin typeface="Microsoft YaHei" pitchFamily="34" charset="0"/>
-                <a:ea typeface="Microsoft YaHei" pitchFamily="34" charset="-122"/>
-                <a:cs typeface="Microsoft YaHei" pitchFamily="34" charset="-120"/>
-              </a:rPr>
-              <a:t>修复搜索在低基数列上枚举等值谓词，候选必须同时满足：过滤后每个键恰好一行；原有的键一个不丢（“只保留金额 &gt; 200”能去重，但丢了订单 001，不算修复）</a:t>
-            </a:r>
-            <a:endParaRPr lang="en-US" sz="1200" dirty="0"/>
-          </a:p>
-          <a:p>
-            <a:pPr marL="342900" indent="-342900">
-              <a:spcAft>
-                <a:spcPts val="400"/>
-              </a:spcAft>
-              <a:buSzPct val="100000"/>
-              <a:buChar char="•"/>
-            </a:pPr>
-            <a:r>
-              <a:rPr lang="en-US" sz="1200" dirty="0">
-                <a:solidFill>
-                  <a:srgbClr val="1F2A37"/>
-                </a:solidFill>
-                <a:latin typeface="Microsoft YaHei" pitchFamily="34" charset="0"/>
-                <a:ea typeface="Microsoft YaHei" pitchFamily="34" charset="-122"/>
-                <a:cs typeface="Microsoft YaHei" pitchFamily="34" charset="-120"/>
-              </a:rPr>
-              <a:t>唯一性：若 is_current = 1 与 is_backup = 1 都通过检查，表结构说不出哪一份是业务事实——不擅自选择，定义失效并交给人确认（实验中的“备份副本”）</a:t>
-            </a:r>
-            <a:endParaRPr lang="en-US" sz="1200" dirty="0"/>
-          </a:p>
-        </p:txBody>
-      </p:sp>
-      <p:sp>
-        <p:nvSpPr>
-          <p:cNvPr id="7" name="Text 4"/>
-          <p:cNvSpPr txBox="1"/>
-          <p:nvPr/>
-        </p:nvSpPr>
-        <p:spPr>
-          <a:xfrm>
-            <a:off x="6446520" y="1005840"/>
-            <a:ext cx="5196535" cy="320040"/>
-          </a:xfrm>
-          <a:prstGeom prst="rect">
-            <a:avLst/>
-          </a:prstGeom>
-          <a:noFill/>
-          <a:ln/>
-        </p:spPr>
-        <p:txBody>
-          <a:bodyPr wrap="square" lIns="0" tIns="0" rIns="0" bIns="0" rtlCol="0" anchor="ctr"/>
-          <a:lstStyle/>
-          <a:p>
-            <a:pPr indent="0" marL="0">
-              <a:buNone/>
-            </a:pPr>
-            <a:r>
-              <a:rPr lang="en-US" sz="1500" b="1" dirty="0">
-                <a:solidFill>
-                  <a:srgbClr val="1D5BA6"/>
-                </a:solidFill>
-                <a:latin typeface="Microsoft YaHei" pitchFamily="34" charset="0"/>
-                <a:ea typeface="Microsoft YaHei" pitchFamily="34" charset="-122"/>
-                <a:cs typeface="Microsoft YaHei" pitchFamily="34" charset="-120"/>
-              </a:rPr>
-              <a:t>回归测试：新定义要在学习时的数据上复现当初的答案</a:t>
-            </a:r>
-            <a:endParaRPr lang="en-US" sz="1500" dirty="0"/>
-          </a:p>
-        </p:txBody>
-      </p:sp>
-      <p:graphicFrame>
-        <p:nvGraphicFramePr>
-          <p:cNvPr id="19" name="Table 1"/>
-          <p:cNvGraphicFramePr>
-            <a:graphicFrameLocks noGrp="1"/>
-          </p:cNvGraphicFramePr>
-          <p:nvPr>
-            <p:extLst>
-              <p:ext uri="{D42A27DB-BD31-4B8C-83A1-F6EECF244321}">
-                <p14:modId xmlns:p14="http://schemas.microsoft.com/office/powerpoint/2010/main" val="1579011935"/>
-              </p:ext>
-            </p:extLst>
-          </p:nvPr>
-        </p:nvGraphicFramePr>
-        <p:xfrm>
-          <a:off x="6446520" y="1325880"/>
-          <a:ext cx="5196535" cy="914400"/>
-        </p:xfrm>
-        <a:graphic>
-          <a:graphicData uri="http://schemas.openxmlformats.org/drawingml/2006/table">
-            <a:tbl>
-              <a:tblPr/>
-              <a:tblGrid>
-                <a:gridCol w="1463040"/>
-                <a:gridCol w="1143000"/>
-                <a:gridCol w="1143000"/>
-                <a:gridCol w="1447495"/>
-              </a:tblGrid>
-              <a:tr h="0">
-                <a:tc>
-                  <a:txBody>
-                    <a:bodyPr/>
-                    <a:lstStyle/>
-                    <a:p>
-                      <a:pPr indent="0" marL="0">
-                        <a:buNone/>
-                      </a:pPr>
-                      <a:r>
-                        <a:rPr lang="en-US" sz="1200" b="1" dirty="0">
-                          <a:solidFill>
-                            <a:srgbClr val="1F2A37"/>
-                          </a:solidFill>
-                          <a:latin typeface="Microsoft YaHei" pitchFamily="34" charset="0"/>
-                          <a:ea typeface="Microsoft YaHei" pitchFamily="34" charset="-122"/>
-                          <a:cs typeface="Microsoft YaHei" pitchFamily="34" charset="-120"/>
-                        </a:rPr>
-                        <a:t>比较所用的数据</a:t>
-                      </a:r>
-                      <a:endParaRPr lang="en-US" sz="1200" dirty="0">
-                        <a:latin typeface="Microsoft YaHei" charset="0"/>
-                        <a:ea typeface="Microsoft YaHei" charset="0"/>
-                        <a:cs typeface="Microsoft YaHei" charset="0"/>
-                      </a:endParaRPr>
-                    </a:p>
-                  </a:txBody>
-                  <a:tcPr marL="91440" marR="91440" marT="54864" marB="54864" anchor="ctr">
-                    <a:lnL w="12700" cap="flat" cmpd="sng" algn="ctr">
-                      <a:solidFill>
-                        <a:srgbClr val="D5DBE3"/>
-                      </a:solidFill>
-                      <a:prstDash val="solid"/>
-                      <a:round/>
-                      <a:headEnd type="none" w="med" len="med"/>
-                      <a:tailEnd type="none" w="med" len="med"/>
-                    </a:lnL>
-                    <a:lnR w="12700" cap="flat" cmpd="sng" algn="ctr">
-                      <a:solidFill>
-                        <a:srgbClr val="D5DBE3"/>
-                      </a:solidFill>
-                      <a:prstDash val="solid"/>
-                      <a:round/>
-                      <a:headEnd type="none" w="med" len="med"/>
-                      <a:tailEnd type="none" w="med" len="med"/>
-                    </a:lnR>
-                    <a:lnT w="12700" cap="flat" cmpd="sng" algn="ctr">
-                      <a:solidFill>
-                        <a:srgbClr val="D5DBE3"/>
-                      </a:solidFill>
-                      <a:prstDash val="solid"/>
-                      <a:round/>
-                      <a:headEnd type="none" w="med" len="med"/>
-                      <a:tailEnd type="none" w="med" len="med"/>
-                    </a:lnT>
-                    <a:lnB w="12700" cap="flat" cmpd="sng" algn="ctr">
-                      <a:solidFill>
-                        <a:srgbClr val="D5DBE3"/>
-                      </a:solidFill>
-                      <a:prstDash val="solid"/>
-                      <a:round/>
-                      <a:headEnd type="none" w="med" len="med"/>
-                      <a:tailEnd type="none" w="med" len="med"/>
-                    </a:lnB>
-                    <a:solidFill>
-                      <a:srgbClr val="F1F3F6"/>
-                    </a:solidFill>
-                  </a:tcPr>
-                </a:tc>
-                <a:tc>
-                  <a:txBody>
-                    <a:bodyPr/>
-                    <a:lstStyle/>
-                    <a:p>
-                      <a:pPr indent="0" marL="0">
-                        <a:buNone/>
-                      </a:pPr>
-                      <a:r>
-                        <a:rPr lang="en-US" sz="1200" b="1" dirty="0">
-                          <a:solidFill>
-                            <a:srgbClr val="1F2A37"/>
-                          </a:solidFill>
-                          <a:latin typeface="Microsoft YaHei" pitchFamily="34" charset="0"/>
-                          <a:ea typeface="Microsoft YaHei" pitchFamily="34" charset="-122"/>
-                          <a:cs typeface="Microsoft YaHei" pitchFamily="34" charset="-120"/>
-                        </a:rPr>
-                        <a:t>学习时的 SQL</a:t>
-                      </a:r>
-                      <a:endParaRPr lang="en-US" sz="1200" dirty="0">
-                        <a:latin typeface="Microsoft YaHei" charset="0"/>
-                        <a:ea typeface="Microsoft YaHei" charset="0"/>
-                        <a:cs typeface="Microsoft YaHei" charset="0"/>
-                      </a:endParaRPr>
-                    </a:p>
-                  </a:txBody>
-                  <a:tcPr marL="91440" marR="91440" marT="54864" marB="54864" anchor="ctr">
-                    <a:lnL w="12700" cap="flat" cmpd="sng" algn="ctr">
-                      <a:solidFill>
-                        <a:srgbClr val="D5DBE3"/>
-                      </a:solidFill>
-                      <a:prstDash val="solid"/>
-                      <a:round/>
-                      <a:headEnd type="none" w="med" len="med"/>
-                      <a:tailEnd type="none" w="med" len="med"/>
-                    </a:lnL>
-                    <a:lnR w="12700" cap="flat" cmpd="sng" algn="ctr">
-                      <a:solidFill>
-                        <a:srgbClr val="D5DBE3"/>
-                      </a:solidFill>
-                      <a:prstDash val="solid"/>
-                      <a:round/>
-                      <a:headEnd type="none" w="med" len="med"/>
-                      <a:tailEnd type="none" w="med" len="med"/>
-                    </a:lnR>
-                    <a:lnT w="12700" cap="flat" cmpd="sng" algn="ctr">
-                      <a:solidFill>
-                        <a:srgbClr val="D5DBE3"/>
-                      </a:solidFill>
-                      <a:prstDash val="solid"/>
-                      <a:round/>
-                      <a:headEnd type="none" w="med" len="med"/>
-                      <a:tailEnd type="none" w="med" len="med"/>
-                    </a:lnT>
-                    <a:lnB w="12700" cap="flat" cmpd="sng" algn="ctr">
-                      <a:solidFill>
-                        <a:srgbClr val="D5DBE3"/>
-                      </a:solidFill>
-                      <a:prstDash val="solid"/>
-                      <a:round/>
-                      <a:headEnd type="none" w="med" len="med"/>
-                      <a:tailEnd type="none" w="med" len="med"/>
-                    </a:lnB>
-                    <a:solidFill>
-                      <a:srgbClr val="F1F3F6"/>
-                    </a:solidFill>
-                  </a:tcPr>
-                </a:tc>
-                <a:tc>
-                  <a:txBody>
-                    <a:bodyPr/>
-                    <a:lstStyle/>
-                    <a:p>
-                      <a:pPr indent="0" marL="0">
-                        <a:buNone/>
-                      </a:pPr>
-                      <a:r>
-                        <a:rPr lang="en-US" sz="1200" b="1" dirty="0">
-                          <a:solidFill>
-                            <a:srgbClr val="1F2A37"/>
-                          </a:solidFill>
-                          <a:latin typeface="Microsoft YaHei" pitchFamily="34" charset="0"/>
-                          <a:ea typeface="Microsoft YaHei" pitchFamily="34" charset="-122"/>
-                          <a:cs typeface="Microsoft YaHei" pitchFamily="34" charset="-120"/>
-                        </a:rPr>
-                        <a:t>修复后的 v2</a:t>
-                      </a:r>
-                      <a:endParaRPr lang="en-US" sz="1200" dirty="0">
-                        <a:latin typeface="Microsoft YaHei" charset="0"/>
-                        <a:ea typeface="Microsoft YaHei" charset="0"/>
-                        <a:cs typeface="Microsoft YaHei" charset="0"/>
-                      </a:endParaRPr>
-                    </a:p>
-                  </a:txBody>
-                  <a:tcPr marL="91440" marR="91440" marT="54864" marB="54864" anchor="ctr">
-                    <a:lnL w="12700" cap="flat" cmpd="sng" algn="ctr">
-                      <a:solidFill>
-                        <a:srgbClr val="D5DBE3"/>
-                      </a:solidFill>
-                      <a:prstDash val="solid"/>
-                      <a:round/>
-                      <a:headEnd type="none" w="med" len="med"/>
-                      <a:tailEnd type="none" w="med" len="med"/>
-                    </a:lnL>
-                    <a:lnR w="12700" cap="flat" cmpd="sng" algn="ctr">
-                      <a:solidFill>
-                        <a:srgbClr val="D5DBE3"/>
-                      </a:solidFill>
-                      <a:prstDash val="solid"/>
-                      <a:round/>
-                      <a:headEnd type="none" w="med" len="med"/>
-                      <a:tailEnd type="none" w="med" len="med"/>
-                    </a:lnR>
-                    <a:lnT w="12700" cap="flat" cmpd="sng" algn="ctr">
-                      <a:solidFill>
-                        <a:srgbClr val="D5DBE3"/>
-                      </a:solidFill>
-                      <a:prstDash val="solid"/>
-                      <a:round/>
-                      <a:headEnd type="none" w="med" len="med"/>
-                      <a:tailEnd type="none" w="med" len="med"/>
-                    </a:lnT>
-                    <a:lnB w="12700" cap="flat" cmpd="sng" algn="ctr">
-                      <a:solidFill>
-                        <a:srgbClr val="D5DBE3"/>
-                      </a:solidFill>
-                      <a:prstDash val="solid"/>
-                      <a:round/>
-                      <a:headEnd type="none" w="med" len="med"/>
-                      <a:tailEnd type="none" w="med" len="med"/>
-                    </a:lnB>
-                    <a:solidFill>
-                      <a:srgbClr val="F1F3F6"/>
-                    </a:solidFill>
-                  </a:tcPr>
-                </a:tc>
-                <a:tc>
-                  <a:txBody>
-                    <a:bodyPr/>
-                    <a:lstStyle/>
-                    <a:p>
-                      <a:pPr indent="0" marL="0">
-                        <a:buNone/>
-                      </a:pPr>
-                      <a:r>
-                        <a:rPr lang="en-US" sz="1200" b="1" dirty="0">
-                          <a:solidFill>
-                            <a:srgbClr val="1F2A37"/>
-                          </a:solidFill>
-                          <a:latin typeface="Microsoft YaHei" pitchFamily="34" charset="0"/>
-                          <a:ea typeface="Microsoft YaHei" pitchFamily="34" charset="-122"/>
-                          <a:cs typeface="Microsoft YaHei" pitchFamily="34" charset="-120"/>
-                        </a:rPr>
-                        <a:t>结果</a:t>
-                      </a:r>
-                      <a:endParaRPr lang="en-US" sz="1200" dirty="0">
-                        <a:latin typeface="Microsoft YaHei" charset="0"/>
-                        <a:ea typeface="Microsoft YaHei" charset="0"/>
-                        <a:cs typeface="Microsoft YaHei" charset="0"/>
-                      </a:endParaRPr>
-                    </a:p>
-                  </a:txBody>
-                  <a:tcPr marL="91440" marR="91440" marT="54864" marB="54864" anchor="ctr">
-                    <a:lnL w="12700" cap="flat" cmpd="sng" algn="ctr">
-                      <a:solidFill>
-                        <a:srgbClr val="D5DBE3"/>
-                      </a:solidFill>
-                      <a:prstDash val="solid"/>
-                      <a:round/>
-                      <a:headEnd type="none" w="med" len="med"/>
-                      <a:tailEnd type="none" w="med" len="med"/>
-                    </a:lnL>
-                    <a:lnR w="12700" cap="flat" cmpd="sng" algn="ctr">
-                      <a:solidFill>
-                        <a:srgbClr val="D5DBE3"/>
-                      </a:solidFill>
-                      <a:prstDash val="solid"/>
-                      <a:round/>
-                      <a:headEnd type="none" w="med" len="med"/>
-                      <a:tailEnd type="none" w="med" len="med"/>
-                    </a:lnR>
-                    <a:lnT w="12700" cap="flat" cmpd="sng" algn="ctr">
-                      <a:solidFill>
-                        <a:srgbClr val="D5DBE3"/>
-                      </a:solidFill>
-                      <a:prstDash val="solid"/>
-                      <a:round/>
-                      <a:headEnd type="none" w="med" len="med"/>
-                      <a:tailEnd type="none" w="med" len="med"/>
-                    </a:lnT>
-                    <a:lnB w="12700" cap="flat" cmpd="sng" algn="ctr">
-                      <a:solidFill>
-                        <a:srgbClr val="D5DBE3"/>
-                      </a:solidFill>
-                      <a:prstDash val="solid"/>
-                      <a:round/>
-                      <a:headEnd type="none" w="med" len="med"/>
-                      <a:tailEnd type="none" w="med" len="med"/>
-                    </a:lnB>
-                    <a:solidFill>
-                      <a:srgbClr val="F1F3F6"/>
-                    </a:solidFill>
-                  </a:tcPr>
-                </a:tc>
-              </a:tr>
-              <a:tr h="0">
-                <a:tc>
-                  <a:txBody>
-                    <a:bodyPr/>
-                    <a:lstStyle/>
-                    <a:p>
-                      <a:pPr indent="0" marL="0">
-                        <a:buNone/>
-                      </a:pPr>
-                      <a:r>
-                        <a:rPr lang="en-US" sz="1200" dirty="0">
-                          <a:solidFill>
-                            <a:srgbClr val="1F2A37"/>
-                          </a:solidFill>
-                          <a:latin typeface="Microsoft YaHei" pitchFamily="34" charset="0"/>
-                          <a:ea typeface="Microsoft YaHei" pitchFamily="34" charset="-122"/>
-                          <a:cs typeface="Microsoft YaHei" pitchFamily="34" charset="-120"/>
-                        </a:rPr>
-                        <a:t>学习时刻 as-of</a:t>
-                      </a:r>
-                      <a:endParaRPr lang="en-US" sz="1200" dirty="0">
-                        <a:latin typeface="Microsoft YaHei" charset="0"/>
-                        <a:ea typeface="Microsoft YaHei" charset="0"/>
-                        <a:cs typeface="Microsoft YaHei" charset="0"/>
-                      </a:endParaRPr>
-                    </a:p>
-                  </a:txBody>
-                  <a:tcPr marL="91440" marR="91440" marT="54864" marB="54864" anchor="ctr">
-                    <a:lnL w="12700" cap="flat" cmpd="sng" algn="ctr">
-                      <a:solidFill>
-                        <a:srgbClr val="D5DBE3"/>
-                      </a:solidFill>
-                      <a:prstDash val="solid"/>
-                      <a:round/>
-                      <a:headEnd type="none" w="med" len="med"/>
-                      <a:tailEnd type="none" w="med" len="med"/>
-                    </a:lnL>
-                    <a:lnR w="12700" cap="flat" cmpd="sng" algn="ctr">
-                      <a:solidFill>
-                        <a:srgbClr val="D5DBE3"/>
-                      </a:solidFill>
-                      <a:prstDash val="solid"/>
-                      <a:round/>
-                      <a:headEnd type="none" w="med" len="med"/>
-                      <a:tailEnd type="none" w="med" len="med"/>
-                    </a:lnR>
-                    <a:lnT w="12700" cap="flat" cmpd="sng" algn="ctr">
-                      <a:solidFill>
-                        <a:srgbClr val="D5DBE3"/>
-                      </a:solidFill>
-                      <a:prstDash val="solid"/>
-                      <a:round/>
-                      <a:headEnd type="none" w="med" len="med"/>
-                      <a:tailEnd type="none" w="med" len="med"/>
-                    </a:lnT>
-                    <a:lnB w="12700" cap="flat" cmpd="sng" algn="ctr">
-                      <a:solidFill>
-                        <a:srgbClr val="D5DBE3"/>
-                      </a:solidFill>
-                      <a:prstDash val="solid"/>
-                      <a:round/>
-                      <a:headEnd type="none" w="med" len="med"/>
-                      <a:tailEnd type="none" w="med" len="med"/>
-                    </a:lnB>
-                  </a:tcPr>
-                </a:tc>
-                <a:tc>
-                  <a:txBody>
-                    <a:bodyPr/>
-                    <a:lstStyle/>
-                    <a:p>
-                      <a:pPr indent="0" marL="0">
-                        <a:buNone/>
-                      </a:pPr>
-                      <a:r>
-                        <a:rPr lang="en-US" sz="1200" dirty="0">
-                          <a:solidFill>
-                            <a:srgbClr val="1F2A37"/>
-                          </a:solidFill>
-                          <a:latin typeface="Microsoft YaHei" pitchFamily="34" charset="0"/>
-                          <a:ea typeface="Microsoft YaHei" pitchFamily="34" charset="-122"/>
-                          <a:cs typeface="Microsoft YaHei" pitchFamily="34" charset="-120"/>
-                        </a:rPr>
-                        <a:t>1357.0 万</a:t>
-                      </a:r>
-                      <a:endParaRPr lang="en-US" sz="1200" dirty="0">
-                        <a:latin typeface="Microsoft YaHei" charset="0"/>
-                        <a:ea typeface="Microsoft YaHei" charset="0"/>
-                        <a:cs typeface="Microsoft YaHei" charset="0"/>
-                      </a:endParaRPr>
-                    </a:p>
-                  </a:txBody>
-                  <a:tcPr marL="91440" marR="91440" marT="54864" marB="54864" anchor="ctr">
-                    <a:lnL w="12700" cap="flat" cmpd="sng" algn="ctr">
-                      <a:solidFill>
-                        <a:srgbClr val="D5DBE3"/>
-                      </a:solidFill>
-                      <a:prstDash val="solid"/>
-                      <a:round/>
-                      <a:headEnd type="none" w="med" len="med"/>
-                      <a:tailEnd type="none" w="med" len="med"/>
-                    </a:lnL>
-                    <a:lnR w="12700" cap="flat" cmpd="sng" algn="ctr">
-                      <a:solidFill>
-                        <a:srgbClr val="D5DBE3"/>
-                      </a:solidFill>
-                      <a:prstDash val="solid"/>
-                      <a:round/>
-                      <a:headEnd type="none" w="med" len="med"/>
-                      <a:tailEnd type="none" w="med" len="med"/>
-                    </a:lnR>
-                    <a:lnT w="12700" cap="flat" cmpd="sng" algn="ctr">
-                      <a:solidFill>
-                        <a:srgbClr val="D5DBE3"/>
-                      </a:solidFill>
-                      <a:prstDash val="solid"/>
-                      <a:round/>
-                      <a:headEnd type="none" w="med" len="med"/>
-                      <a:tailEnd type="none" w="med" len="med"/>
-                    </a:lnT>
-                    <a:lnB w="12700" cap="flat" cmpd="sng" algn="ctr">
-                      <a:solidFill>
-                        <a:srgbClr val="D5DBE3"/>
-                      </a:solidFill>
-                      <a:prstDash val="solid"/>
-                      <a:round/>
-                      <a:headEnd type="none" w="med" len="med"/>
-                      <a:tailEnd type="none" w="med" len="med"/>
-                    </a:lnB>
-                  </a:tcPr>
-                </a:tc>
-                <a:tc>
-                  <a:txBody>
-                    <a:bodyPr/>
-                    <a:lstStyle/>
-                    <a:p>
-                      <a:pPr indent="0" marL="0">
-                        <a:buNone/>
-                      </a:pPr>
-                      <a:r>
-                        <a:rPr lang="en-US" sz="1200" dirty="0">
-                          <a:solidFill>
-                            <a:srgbClr val="1F2A37"/>
-                          </a:solidFill>
-                          <a:latin typeface="Microsoft YaHei" pitchFamily="34" charset="0"/>
-                          <a:ea typeface="Microsoft YaHei" pitchFamily="34" charset="-122"/>
-                          <a:cs typeface="Microsoft YaHei" pitchFamily="34" charset="-120"/>
-                        </a:rPr>
-                        <a:t>1357.0 万</a:t>
-                      </a:r>
-                      <a:endParaRPr lang="en-US" sz="1200" dirty="0">
-                        <a:latin typeface="Microsoft YaHei" charset="0"/>
-                        <a:ea typeface="Microsoft YaHei" charset="0"/>
-                        <a:cs typeface="Microsoft YaHei" charset="0"/>
-                      </a:endParaRPr>
-                    </a:p>
-                  </a:txBody>
-                  <a:tcPr marL="91440" marR="91440" marT="54864" marB="54864" anchor="ctr">
-                    <a:lnL w="12700" cap="flat" cmpd="sng" algn="ctr">
-                      <a:solidFill>
-                        <a:srgbClr val="D5DBE3"/>
-                      </a:solidFill>
-                      <a:prstDash val="solid"/>
-                      <a:round/>
-                      <a:headEnd type="none" w="med" len="med"/>
-                      <a:tailEnd type="none" w="med" len="med"/>
-                    </a:lnL>
-                    <a:lnR w="12700" cap="flat" cmpd="sng" algn="ctr">
-                      <a:solidFill>
-                        <a:srgbClr val="D5DBE3"/>
-                      </a:solidFill>
-                      <a:prstDash val="solid"/>
-                      <a:round/>
-                      <a:headEnd type="none" w="med" len="med"/>
-                      <a:tailEnd type="none" w="med" len="med"/>
-                    </a:lnR>
-                    <a:lnT w="12700" cap="flat" cmpd="sng" algn="ctr">
-                      <a:solidFill>
-                        <a:srgbClr val="D5DBE3"/>
-                      </a:solidFill>
-                      <a:prstDash val="solid"/>
-                      <a:round/>
-                      <a:headEnd type="none" w="med" len="med"/>
-                      <a:tailEnd type="none" w="med" len="med"/>
-                    </a:lnT>
-                    <a:lnB w="12700" cap="flat" cmpd="sng" algn="ctr">
-                      <a:solidFill>
-                        <a:srgbClr val="D5DBE3"/>
-                      </a:solidFill>
-                      <a:prstDash val="solid"/>
-                      <a:round/>
-                      <a:headEnd type="none" w="med" len="med"/>
-                      <a:tailEnd type="none" w="med" len="med"/>
-                    </a:lnB>
-                  </a:tcPr>
-                </a:tc>
-                <a:tc>
-                  <a:txBody>
-                    <a:bodyPr/>
-                    <a:lstStyle/>
-                    <a:p>
-                      <a:pPr indent="0" marL="0">
-                        <a:buNone/>
-                      </a:pPr>
-                      <a:r>
-                        <a:rPr lang="en-US" sz="1200" b="1" dirty="0">
-                          <a:solidFill>
-                            <a:srgbClr val="2E7D4F"/>
-                          </a:solidFill>
-                          <a:latin typeface="Microsoft YaHei" pitchFamily="34" charset="0"/>
-                          <a:ea typeface="Microsoft YaHei" pitchFamily="34" charset="-122"/>
-                          <a:cs typeface="Microsoft YaHei" pitchFamily="34" charset="-120"/>
-                        </a:rPr>
-                        <a:t>一致 → 发布 v2</a:t>
-                      </a:r>
-                      <a:endParaRPr lang="en-US" sz="1200" dirty="0">
-                        <a:latin typeface="Microsoft YaHei" charset="0"/>
-                        <a:ea typeface="Microsoft YaHei" charset="0"/>
-                        <a:cs typeface="Microsoft YaHei" charset="0"/>
-                      </a:endParaRPr>
-                    </a:p>
-                  </a:txBody>
-                  <a:tcPr marL="91440" marR="91440" marT="54864" marB="54864" anchor="ctr">
-                    <a:lnL w="12700" cap="flat" cmpd="sng" algn="ctr">
-                      <a:solidFill>
-                        <a:srgbClr val="D5DBE3"/>
-                      </a:solidFill>
-                      <a:prstDash val="solid"/>
-                      <a:round/>
-                      <a:headEnd type="none" w="med" len="med"/>
-                      <a:tailEnd type="none" w="med" len="med"/>
-                    </a:lnL>
-                    <a:lnR w="12700" cap="flat" cmpd="sng" algn="ctr">
-                      <a:solidFill>
-                        <a:srgbClr val="D5DBE3"/>
-                      </a:solidFill>
-                      <a:prstDash val="solid"/>
-                      <a:round/>
-                      <a:headEnd type="none" w="med" len="med"/>
-                      <a:tailEnd type="none" w="med" len="med"/>
-                    </a:lnR>
-                    <a:lnT w="12700" cap="flat" cmpd="sng" algn="ctr">
-                      <a:solidFill>
-                        <a:srgbClr val="D5DBE3"/>
-                      </a:solidFill>
-                      <a:prstDash val="solid"/>
-                      <a:round/>
-                      <a:headEnd type="none" w="med" len="med"/>
-                      <a:tailEnd type="none" w="med" len="med"/>
-                    </a:lnT>
-                    <a:lnB w="12700" cap="flat" cmpd="sng" algn="ctr">
-                      <a:solidFill>
-                        <a:srgbClr val="D5DBE3"/>
-                      </a:solidFill>
-                      <a:prstDash val="solid"/>
-                      <a:round/>
-                      <a:headEnd type="none" w="med" len="med"/>
-                      <a:tailEnd type="none" w="med" len="med"/>
-                    </a:lnB>
-                  </a:tcPr>
-                </a:tc>
-              </a:tr>
-              <a:tr h="0">
-                <a:tc>
-                  <a:txBody>
-                    <a:bodyPr/>
-                    <a:lstStyle/>
-                    <a:p>
-                      <a:pPr indent="0" marL="0">
-                        <a:buNone/>
-                      </a:pPr>
-                      <a:r>
-                        <a:rPr lang="en-US" sz="1200" dirty="0">
-                          <a:solidFill>
-                            <a:srgbClr val="1F2A37"/>
-                          </a:solidFill>
-                          <a:latin typeface="Microsoft YaHei" pitchFamily="34" charset="0"/>
-                          <a:ea typeface="Microsoft YaHei" pitchFamily="34" charset="-122"/>
-                          <a:cs typeface="Microsoft YaHei" pitchFamily="34" charset="-120"/>
-                        </a:rPr>
-                        <a:t>当前数据</a:t>
-                      </a:r>
-                      <a:endParaRPr lang="en-US" sz="1200" dirty="0">
-                        <a:latin typeface="Microsoft YaHei" charset="0"/>
-                        <a:ea typeface="Microsoft YaHei" charset="0"/>
-                        <a:cs typeface="Microsoft YaHei" charset="0"/>
-                      </a:endParaRPr>
-                    </a:p>
-                  </a:txBody>
-                  <a:tcPr marL="91440" marR="91440" marT="54864" marB="54864" anchor="ctr">
-                    <a:lnL w="12700" cap="flat" cmpd="sng" algn="ctr">
-                      <a:solidFill>
-                        <a:srgbClr val="D5DBE3"/>
-                      </a:solidFill>
-                      <a:prstDash val="solid"/>
-                      <a:round/>
-                      <a:headEnd type="none" w="med" len="med"/>
-                      <a:tailEnd type="none" w="med" len="med"/>
-                    </a:lnL>
-                    <a:lnR w="12700" cap="flat" cmpd="sng" algn="ctr">
-                      <a:solidFill>
-                        <a:srgbClr val="D5DBE3"/>
-                      </a:solidFill>
-                      <a:prstDash val="solid"/>
-                      <a:round/>
-                      <a:headEnd type="none" w="med" len="med"/>
-                      <a:tailEnd type="none" w="med" len="med"/>
-                    </a:lnR>
-                    <a:lnT w="12700" cap="flat" cmpd="sng" algn="ctr">
-                      <a:solidFill>
-                        <a:srgbClr val="D5DBE3"/>
-                      </a:solidFill>
-                      <a:prstDash val="solid"/>
-                      <a:round/>
-                      <a:headEnd type="none" w="med" len="med"/>
-                      <a:tailEnd type="none" w="med" len="med"/>
-                    </a:lnT>
-                    <a:lnB w="12700" cap="flat" cmpd="sng" algn="ctr">
-                      <a:solidFill>
-                        <a:srgbClr val="D5DBE3"/>
-                      </a:solidFill>
-                      <a:prstDash val="solid"/>
-                      <a:round/>
-                      <a:headEnd type="none" w="med" len="med"/>
-                      <a:tailEnd type="none" w="med" len="med"/>
-                    </a:lnB>
-                  </a:tcPr>
-                </a:tc>
-                <a:tc>
-                  <a:txBody>
-                    <a:bodyPr/>
-                    <a:lstStyle/>
-                    <a:p>
-                      <a:pPr indent="0" marL="0">
-                        <a:buNone/>
-                      </a:pPr>
-                      <a:r>
-                        <a:rPr lang="en-US" sz="1200" dirty="0">
-                          <a:solidFill>
-                            <a:srgbClr val="1F2A37"/>
-                          </a:solidFill>
-                          <a:latin typeface="Microsoft YaHei" pitchFamily="34" charset="0"/>
-                          <a:ea typeface="Microsoft YaHei" pitchFamily="34" charset="-122"/>
-                          <a:cs typeface="Microsoft YaHei" pitchFamily="34" charset="-120"/>
-                        </a:rPr>
-                        <a:t>1489.1 万</a:t>
-                      </a:r>
-                      <a:endParaRPr lang="en-US" sz="1200" dirty="0">
-                        <a:latin typeface="Microsoft YaHei" charset="0"/>
-                        <a:ea typeface="Microsoft YaHei" charset="0"/>
-                        <a:cs typeface="Microsoft YaHei" charset="0"/>
-                      </a:endParaRPr>
-                    </a:p>
-                  </a:txBody>
-                  <a:tcPr marL="91440" marR="91440" marT="54864" marB="54864" anchor="ctr">
-                    <a:lnL w="12700" cap="flat" cmpd="sng" algn="ctr">
-                      <a:solidFill>
-                        <a:srgbClr val="D5DBE3"/>
-                      </a:solidFill>
-                      <a:prstDash val="solid"/>
-                      <a:round/>
-                      <a:headEnd type="none" w="med" len="med"/>
-                      <a:tailEnd type="none" w="med" len="med"/>
-                    </a:lnL>
-                    <a:lnR w="12700" cap="flat" cmpd="sng" algn="ctr">
-                      <a:solidFill>
-                        <a:srgbClr val="D5DBE3"/>
-                      </a:solidFill>
-                      <a:prstDash val="solid"/>
-                      <a:round/>
-                      <a:headEnd type="none" w="med" len="med"/>
-                      <a:tailEnd type="none" w="med" len="med"/>
-                    </a:lnR>
-                    <a:lnT w="12700" cap="flat" cmpd="sng" algn="ctr">
-                      <a:solidFill>
-                        <a:srgbClr val="D5DBE3"/>
-                      </a:solidFill>
-                      <a:prstDash val="solid"/>
-                      <a:round/>
-                      <a:headEnd type="none" w="med" len="med"/>
-                      <a:tailEnd type="none" w="med" len="med"/>
-                    </a:lnT>
-                    <a:lnB w="12700" cap="flat" cmpd="sng" algn="ctr">
-                      <a:solidFill>
-                        <a:srgbClr val="D5DBE3"/>
-                      </a:solidFill>
-                      <a:prstDash val="solid"/>
-                      <a:round/>
-                      <a:headEnd type="none" w="med" len="med"/>
-                      <a:tailEnd type="none" w="med" len="med"/>
-                    </a:lnB>
-                  </a:tcPr>
-                </a:tc>
-                <a:tc>
-                  <a:txBody>
-                    <a:bodyPr/>
-                    <a:lstStyle/>
-                    <a:p>
-                      <a:pPr indent="0" marL="0">
-                        <a:buNone/>
-                      </a:pPr>
-                      <a:r>
-                        <a:rPr lang="en-US" sz="1200" dirty="0">
-                          <a:solidFill>
-                            <a:srgbClr val="1F2A37"/>
-                          </a:solidFill>
-                          <a:latin typeface="Microsoft YaHei" pitchFamily="34" charset="0"/>
-                          <a:ea typeface="Microsoft YaHei" pitchFamily="34" charset="-122"/>
-                          <a:cs typeface="Microsoft YaHei" pitchFamily="34" charset="-120"/>
-                        </a:rPr>
-                        <a:t>1342.4 万</a:t>
-                      </a:r>
-                      <a:endParaRPr lang="en-US" sz="1200" dirty="0">
-                        <a:latin typeface="Microsoft YaHei" charset="0"/>
-                        <a:ea typeface="Microsoft YaHei" charset="0"/>
-                        <a:cs typeface="Microsoft YaHei" charset="0"/>
-                      </a:endParaRPr>
-                    </a:p>
-                  </a:txBody>
-                  <a:tcPr marL="91440" marR="91440" marT="54864" marB="54864" anchor="ctr">
-                    <a:lnL w="12700" cap="flat" cmpd="sng" algn="ctr">
-                      <a:solidFill>
-                        <a:srgbClr val="D5DBE3"/>
-                      </a:solidFill>
-                      <a:prstDash val="solid"/>
-                      <a:round/>
-                      <a:headEnd type="none" w="med" len="med"/>
-                      <a:tailEnd type="none" w="med" len="med"/>
-                    </a:lnL>
-                    <a:lnR w="12700" cap="flat" cmpd="sng" algn="ctr">
-                      <a:solidFill>
-                        <a:srgbClr val="D5DBE3"/>
-                      </a:solidFill>
-                      <a:prstDash val="solid"/>
-                      <a:round/>
-                      <a:headEnd type="none" w="med" len="med"/>
-                      <a:tailEnd type="none" w="med" len="med"/>
-                    </a:lnR>
-                    <a:lnT w="12700" cap="flat" cmpd="sng" algn="ctr">
-                      <a:solidFill>
-                        <a:srgbClr val="D5DBE3"/>
-                      </a:solidFill>
-                      <a:prstDash val="solid"/>
-                      <a:round/>
-                      <a:headEnd type="none" w="med" len="med"/>
-                      <a:tailEnd type="none" w="med" len="med"/>
-                    </a:lnT>
-                    <a:lnB w="12700" cap="flat" cmpd="sng" algn="ctr">
-                      <a:solidFill>
-                        <a:srgbClr val="D5DBE3"/>
-                      </a:solidFill>
-                      <a:prstDash val="solid"/>
-                      <a:round/>
-                      <a:headEnd type="none" w="med" len="med"/>
-                      <a:tailEnd type="none" w="med" len="med"/>
-                    </a:lnB>
-                  </a:tcPr>
-                </a:tc>
-                <a:tc>
-                  <a:txBody>
-                    <a:bodyPr/>
-                    <a:lstStyle/>
-                    <a:p>
-                      <a:pPr indent="0" marL="0">
-                        <a:buNone/>
-                      </a:pPr>
-                      <a:r>
-                        <a:rPr lang="en-US" sz="1200" b="1" dirty="0">
-                          <a:solidFill>
-                            <a:srgbClr val="B5392A"/>
-                          </a:solidFill>
-                          <a:latin typeface="Microsoft YaHei" pitchFamily="34" charset="0"/>
-                          <a:ea typeface="Microsoft YaHei" pitchFamily="34" charset="-122"/>
-                          <a:cs typeface="Microsoft YaHei" pitchFamily="34" charset="-120"/>
-                        </a:rPr>
-                        <a:t>不一致 → 误拒</a:t>
-                      </a:r>
-                      <a:endParaRPr lang="en-US" sz="1200" dirty="0">
-                        <a:latin typeface="Microsoft YaHei" charset="0"/>
-                        <a:ea typeface="Microsoft YaHei" charset="0"/>
-                        <a:cs typeface="Microsoft YaHei" charset="0"/>
-                      </a:endParaRPr>
-                    </a:p>
-                  </a:txBody>
-                  <a:tcPr marL="91440" marR="91440" marT="54864" marB="54864" anchor="ctr">
-                    <a:lnL w="12700" cap="flat" cmpd="sng" algn="ctr">
-                      <a:solidFill>
-                        <a:srgbClr val="D5DBE3"/>
-                      </a:solidFill>
-                      <a:prstDash val="solid"/>
-                      <a:round/>
-                      <a:headEnd type="none" w="med" len="med"/>
-                      <a:tailEnd type="none" w="med" len="med"/>
-                    </a:lnL>
-                    <a:lnR w="12700" cap="flat" cmpd="sng" algn="ctr">
-                      <a:solidFill>
-                        <a:srgbClr val="D5DBE3"/>
-                      </a:solidFill>
-                      <a:prstDash val="solid"/>
-                      <a:round/>
-                      <a:headEnd type="none" w="med" len="med"/>
-                      <a:tailEnd type="none" w="med" len="med"/>
-                    </a:lnR>
-                    <a:lnT w="12700" cap="flat" cmpd="sng" algn="ctr">
-                      <a:solidFill>
-                        <a:srgbClr val="D5DBE3"/>
-                      </a:solidFill>
-                      <a:prstDash val="solid"/>
-                      <a:round/>
-                      <a:headEnd type="none" w="med" len="med"/>
-                      <a:tailEnd type="none" w="med" len="med"/>
-                    </a:lnT>
-                    <a:lnB w="12700" cap="flat" cmpd="sng" algn="ctr">
-                      <a:solidFill>
-                        <a:srgbClr val="D5DBE3"/>
-                      </a:solidFill>
-                      <a:prstDash val="solid"/>
-                      <a:round/>
-                      <a:headEnd type="none" w="med" len="med"/>
-                      <a:tailEnd type="none" w="med" len="med"/>
-                    </a:lnB>
-                  </a:tcPr>
-                </a:tc>
-              </a:tr>
-            </a:tbl>
-          </a:graphicData>
-        </a:graphic>
-      </p:graphicFrame>
-      <p:sp>
-        <p:nvSpPr>
-          <p:cNvPr id="9" name="Text 5"/>
-          <p:cNvSpPr txBox="1"/>
-          <p:nvPr/>
-        </p:nvSpPr>
-        <p:spPr>
-          <a:xfrm>
-            <a:off x="6446520" y="2743200"/>
-            <a:ext cx="5196535" cy="2011680"/>
-          </a:xfrm>
-          <a:prstGeom prst="rect">
-            <a:avLst/>
-          </a:prstGeom>
-          <a:noFill/>
-          <a:ln/>
-        </p:spPr>
-        <p:txBody>
-          <a:bodyPr wrap="square" lIns="0" tIns="0" rIns="0" bIns="0" rtlCol="0" anchor="t"/>
-          <a:lstStyle/>
-          <a:p>
-            <a:pPr marL="342900" indent="-342900">
-              <a:spcAft>
-                <a:spcPts val="400"/>
-              </a:spcAft>
-              <a:buSzPct val="100000"/>
-              <a:buChar char="•"/>
-            </a:pPr>
-            <a:r>
-              <a:rPr lang="en-US" sz="1200" dirty="0">
-                <a:solidFill>
-                  <a:srgbClr val="1F2A37"/>
-                </a:solidFill>
-                <a:latin typeface="Microsoft YaHei" pitchFamily="34" charset="0"/>
-                <a:ea typeface="Microsoft YaHei" pitchFamily="34" charset="-122"/>
-                <a:cs typeface="Microsoft YaHei" pitchFamily="34" charset="-120"/>
-              </a:rPr>
-              <a:t>像换一种解法重做老师已经判过的那道题：答案必须相同。但必须用当初那份数据——今天的数据已经变了，学习时的 SQL 在上面同样过期（把旧行也算进去得 1489.1 万），比不出新解法对不对</a:t>
-            </a:r>
-            <a:endParaRPr lang="en-US" sz="1200" dirty="0"/>
-          </a:p>
-          <a:p>
-            <a:pPr marL="342900" indent="-342900">
-              <a:spcAft>
-                <a:spcPts val="400"/>
-              </a:spcAft>
-              <a:buSzPct val="100000"/>
-              <a:buChar char="•"/>
-            </a:pPr>
-            <a:r>
-              <a:rPr lang="en-US" sz="1200" dirty="0">
-                <a:solidFill>
-                  <a:srgbClr val="1F2A37"/>
-                </a:solidFill>
-                <a:latin typeface="Microsoft YaHei" pitchFamily="34" charset="0"/>
-                <a:ea typeface="Microsoft YaHei" pitchFamily="34" charset="-122"/>
-                <a:cs typeface="Microsoft YaHei" pitchFamily="34" charset="-120"/>
-              </a:rPr>
-              <a:t>学习时的答案是唯一被确认过的答案，所以修复不需要参考答案。数据仓库用时间旅行查询（FOR SYSTEM_TIME AS OF）取学习时刻的数据，原型保留学习时的副本</a:t>
-            </a:r>
-            <a:endParaRPr lang="en-US" sz="1200" dirty="0"/>
-          </a:p>
-        </p:txBody>
-      </p:sp>
-      <p:sp>
-        <p:nvSpPr>
-          <p:cNvPr id="10" name="Shape 6"/>
-          <p:cNvSpPr/>
-          <p:nvPr/>
-        </p:nvSpPr>
-        <p:spPr>
-          <a:xfrm>
-            <a:off x="548640" y="4846320"/>
-            <a:ext cx="11094415" cy="868680"/>
-          </a:xfrm>
-          <a:prstGeom prst="roundRect">
-            <a:avLst>
-              <a:gd name="adj" fmla="val 8421"/>
-            </a:avLst>
-          </a:prstGeom>
-          <a:solidFill>
-            <a:srgbClr val="E8F0FA"/>
-          </a:solidFill>
-          <a:ln w="12700">
-            <a:solidFill>
-              <a:srgbClr val="E8F0FA"/>
-            </a:solidFill>
-            <a:prstDash val="solid"/>
-          </a:ln>
-        </p:spPr>
-      </p:sp>
-      <p:sp>
-        <p:nvSpPr>
-          <p:cNvPr id="11" name="Text 7"/>
-          <p:cNvSpPr txBox="1"/>
-          <p:nvPr/>
-        </p:nvSpPr>
-        <p:spPr>
-          <a:xfrm>
-            <a:off x="822960" y="4937760"/>
-            <a:ext cx="10545775" cy="685800"/>
-          </a:xfrm>
-          <a:prstGeom prst="rect">
-            <a:avLst/>
-          </a:prstGeom>
-          <a:noFill/>
-          <a:ln/>
-        </p:spPr>
-        <p:txBody>
-          <a:bodyPr wrap="square" lIns="0" tIns="0" rIns="0" bIns="0" rtlCol="0" anchor="ctr"/>
-          <a:lstStyle/>
-          <a:p>
-            <a:pPr indent="0" marL="0">
-              <a:spcAft>
-                <a:spcPts val="400"/>
-              </a:spcAft>
-              <a:buNone/>
-            </a:pPr>
-            <a:r>
-              <a:rPr lang="en-US" sz="1300" b="1" dirty="0">
-                <a:solidFill>
-                  <a:srgbClr val="1D5BA6"/>
-                </a:solidFill>
-                <a:latin typeface="Microsoft YaHei" pitchFamily="34" charset="0"/>
-                <a:ea typeface="Microsoft YaHei" pitchFamily="34" charset="-122"/>
-                <a:cs typeface="Microsoft YaHei" pitchFamily="34" charset="-120"/>
-              </a:rPr>
-              <a:t>发布 v2 之后：</a:t>
-            </a:r>
-            <a:pPr indent="0" marL="0">
-              <a:spcAft>
-                <a:spcPts val="400"/>
-              </a:spcAft>
-              <a:buNone/>
-            </a:pPr>
-            <a:r>
-              <a:rPr lang="en-US" sz="1300" dirty="0">
-                <a:solidFill>
-                  <a:srgbClr val="1F2A37"/>
-                </a:solidFill>
-                <a:latin typeface="Microsoft YaHei" pitchFamily="34" charset="0"/>
-                <a:ea typeface="Microsoft YaHei" pitchFamily="34" charset="-122"/>
-                <a:cs typeface="Microsoft YaHei" pitchFamily="34" charset="-120"/>
-              </a:rPr>
-              <a:t>v1 失效，声明 v1 的查询被拒绝；修复期间到达的请求等待结果；其他定义遇到相同的条件失败直接复用验证结果与修复；修不好的定义失效并通知使用方，等学到新证据再发布。</a:t>
-            </a:r>
-            <a:endParaRPr lang="en-US" sz="1300" dirty="0"/>
-          </a:p>
-        </p:txBody>
-      </p:sp>
-      <p:sp>
-        <p:nvSpPr>
-          <p:cNvPr id="12" name="Text 8"/>
-          <p:cNvSpPr txBox="1"/>
-          <p:nvPr/>
-        </p:nvSpPr>
-        <p:spPr>
-          <a:xfrm>
-            <a:off x="548640" y="6263640"/>
-            <a:ext cx="10362895" cy="365760"/>
-          </a:xfrm>
-          <a:prstGeom prst="rect">
-            <a:avLst/>
-          </a:prstGeom>
-          <a:noFill/>
-          <a:ln/>
-        </p:spPr>
-        <p:txBody>
-          <a:bodyPr wrap="square" lIns="0" tIns="0" rIns="0" bIns="0" rtlCol="0" anchor="b"/>
-          <a:lstStyle/>
-          <a:p>
-            <a:pPr indent="0" marL="0">
-              <a:buNone/>
-            </a:pPr>
-            <a:r>
-              <a:rPr lang="en-US" sz="1100" dirty="0">
-                <a:solidFill>
-                  <a:srgbClr val="5B6573"/>
-                </a:solidFill>
-                <a:latin typeface="Microsoft YaHei" pitchFamily="34" charset="0"/>
-                <a:ea typeface="Microsoft YaHei" pitchFamily="34" charset="-122"/>
-                <a:cs typeface="Microsoft YaHei" pitchFamily="34" charset="-120"/>
-              </a:rPr>
-              <a:t>上表为示意；回归测试数字来自 noctis results/scen-20261002/dsv41flash-r1-g3fix--snap（端到端实验第 1 次 MAVRA 运行）。“当前数据”一行来自对照实验 dsv41flash-r1-g3fix--exref（系统记录：“结果 13423672.28 与期望 14890636.48 不一致”）。</a:t>
-            </a:r>
-            <a:endParaRPr lang="en-US" sz="1100" dirty="0"/>
-          </a:p>
-        </p:txBody>
-      </p:sp>
       <p:sp>
         <p:nvSpPr>
           <p:cNvPr id="25" name="Slide Number Placeholder 0"/>

--- a/docs/mavra-system.pptx
+++ b/docs/mavra-system.pptx
@@ -20,9 +20,10 @@
     <p:sldId id="268" r:id="rId14"/>
     <p:sldId id="269" r:id="rId15"/>
     <p:sldId id="270" r:id="rId16"/>
+    <p:sldId id="271" r:id="rId17"/>
   </p:sldIdLst>
   <p:notesMasterIdLst>
-    <p:notesMasterId r:id="rId17"/>
+    <p:notesMasterId r:id="rId18"/>
   </p:notesMasterIdLst>
   <p:sldSz cx="12192000" cy="6858000"/>
   <p:notesSz cx="6858000" cy="12192000"/>
@@ -121,55 +122,56 @@
   <p:extLst>
     <p:ext uri="{521415D9-36F7-43E2-AB2F-B90AF26B5E84}">
       <p14:sectionLst xmlns:p14="http://schemas.microsoft.com/office/powerpoint/2010/main">
-        <p14:section name="开场" id="{814cf3d3-a6d0-9665-6660-497f229552ad}">
+        <p14:section name="开场" id="{1e5d74d7-b375-2995-2093-3bc7beb137ab}">
           <p14:sldIdLst>
             <p14:sldId id="256"/>
           </p14:sldIdLst>
         </p14:section>
-        <p14:section name="问题" id="{6f7b1fa6-9fae-c3f7-c0e4-02a32fd26103}">
+        <p14:section name="问题" id="{78411a1d-68bb-3e73-f465-53d8e43474dd}">
           <p14:sldIdLst>
             <p14:sldId id="257"/>
             <p14:sldId id="258"/>
           </p14:sldIdLst>
         </p14:section>
-        <p14:section name="MAVRA" id="{f5270270-d4b8-9563-9a36-4c2744b955a9}">
+        <p14:section name="MAVRA" id="{d3c81382-11f3-a12b-7cf6-9e43ef9717bd}">
           <p14:sldIdLst>
             <p14:sldId id="259"/>
             <p14:sldId id="260"/>
           </p14:sldIdLst>
         </p14:section>
-        <p14:section name="检查什么" id="{b732257b-2006-a140-d742-80def715a5dd}">
+        <p14:section name="检查什么" id="{4bca11af-35ce-633f-7be2-25d0d3e8bdd4}">
           <p14:sldIdLst>
             <p14:sldId id="261"/>
             <p14:sldId id="262"/>
           </p14:sldIdLst>
         </p14:section>
-        <p14:section name="何时检查" id="{b6ffe290-acfd-76fc-f658-168899c0a979}">
+        <p14:section name="何时检查" id="{7fdb5722-45d4-afd3-7cdd-34ba81208877}">
           <p14:sldIdLst>
             <p14:sldId id="263"/>
             <p14:sldId id="264"/>
           </p14:sldIdLst>
         </p14:section>
-        <p14:section name="失败后怎么办" id="{3108f627-a670-1543-1a17-2809ed040ce8}">
+        <p14:section name="失败后怎么办" id="{c336b912-ab54-6a67-3b82-e640710e0f03}">
           <p14:sldIdLst>
             <p14:sldId id="265"/>
             <p14:sldId id="266"/>
           </p14:sldIdLst>
         </p14:section>
-        <p14:section name="真实记录" id="{5e0178b8-4ebb-3932-6dc0-50fabf8e27c1}">
+        <p14:section name="真实记录" id="{79bcf0a2-d2c0-93a4-e79c-e05f71e8d402}">
           <p14:sldIdLst>
             <p14:sldId id="267"/>
+            <p14:sldId id="268"/>
           </p14:sldIdLst>
         </p14:section>
-        <p14:section name="实验结果" id="{bc6525e9-76e5-e9cb-255e-0adb266b8a04}">
+        <p14:section name="实验结果" id="{8cfa19e8-2dee-d752-e58e-9520d1f4f736}">
           <p14:sldIdLst>
-            <p14:sldId id="268"/>
             <p14:sldId id="269"/>
+            <p14:sldId id="270"/>
           </p14:sldIdLst>
         </p14:section>
-        <p14:section name="边界与总结" id="{a455127e-09de-aaff-29a5-94740b219d3e}">
+        <p14:section name="边界与总结" id="{865d3fd3-e479-6c9a-b8fe-f54468a8054c}">
           <p14:sldIdLst>
-            <p14:sldId id="270"/>
+            <p14:sldId id="271"/>
           </p14:sldIdLst>
         </p14:section>
       </p14:sectionLst>
@@ -928,7 +930,7 @@
           <a:p>
             <a:r>
               <a:rPr lang="en-US" dirty="0"/>
-              <a:t>端到端实验：DeepSeek V4.1 Flash 智能体，每种方法独立运行 3 次，15 道留出题，再加 11 种数据更新。共享本身的收益：数据未变时准确率从 49% 到 100%，轮数和 token 都下降——任何共享方法都有这个收益，不是 MAVRA 独有。维护的收益：更新后从 75% 到 81%，5 种破坏性更新下从 59% 到 73%；检索历史示例即使提示它自行验证也只有 63%。MAVRA 与整定义重查答案相同，差异来自各次运行学到的定义不同。两个对照：单位变化不违反任何条件，所有方法同样过期，与命题的范围一致；备份副本下修复有歧义，MAVRA 按规则使定义失效，检索示例碰巧答对，这是如实保留的负结果。这些数字来自我们设定的实验，不是说在所有数据库和模型上都能达到。</a:t>
+              <a:t>前面讲的都是“保持正确”。这页讲“变得更省”：常见指标的写法常常有更省的等价形式，比如按期间统计时不连接日期维度，直接按日期键范围过滤。MAVRA 的做法和修复一样严格：候选可以来自规则、模型提议或智能体的成功轨迹；先验证等价——结构合法、新前提成立、学习时快照和当前快照上 14 个样本期间结果全部相同；再验证更省——同一快照内配对做 EXPLAIN ANALYZE，配对差的 95% 区间整体低于 0 且平均省 10% 以上；都通过才作为新修订发布，旧修订宽限可用并通知使用方。右边是集成测试的真实记录：门店营业额改为日期键范围过滤，14 个期间全部一致，执行时间省 14.6%，发布为 r1。关键是最后一句：更省的写法同样有前提，日期键按月连续；它被当作条件维护，前提被破坏时该修订失效。</a:t>
             </a:r>
             <a:endParaRPr lang="en-US" dirty="0"/>
           </a:p>
@@ -1016,7 +1018,7 @@
           <a:p>
             <a:r>
               <a:rPr lang="en-US" dirty="0"/>
-              <a:t>系统层实验不用大模型：固定各次运行学到的定义库，只改变维护方式，比较的是机制本身。配对回放：合成数据 1,470 题次，MAVRA 在覆盖的更新下没有错答，99 个错答全部是单位变化这个对照；按模式变更失效有 629 个错答。TPC-DS 上用 99 个查询模板导出的定义，结论一致。同快照验证：并发写入下 11,297 次使用没有一次在违反条件的数据上作答，先检查后执行有 3.8% 到 4.6%。修复的回归基准：按学习时刻比较，修复成功的数量与使用标准答案参照完全相同；按当前数据比较会误拒正确的修复。维护成本：19 条定义时为整定义重查的 14%，因为很多定义依赖同一张表的同一个条件；但按表版本缓存验证查询也能得到同样的节省，所以效率不是本文的贡献，贡献在于检查什么、何时可以依赖检查结果、失败后怎么办。</a:t>
+              <a:t>端到端实验：DeepSeek V4.1 Flash 智能体，每种方法独立运行 3 次，15 道留出题，再加 11 种数据更新。共享本身的收益：数据未变时准确率从 49% 到 100%，轮数和 token 都下降——任何共享方法都有这个收益，不是 MAVRA 独有。维护的收益：更新后从 75% 到 81%，5 种破坏性更新下从 59% 到 73%；检索历史示例即使提示它自行验证也只有 63%。MAVRA 与整定义重查答案相同，差异来自各次运行学到的定义不同。两个对照：单位变化不违反任何条件，所有方法同样过期，与命题的范围一致；备份副本下修复有歧义，MAVRA 按规则使定义失效，检索示例碰巧答对，这是如实保留的负结果。这些数字来自我们设定的实验，不是说在所有数据库和模型上都能达到。</a:t>
             </a:r>
             <a:endParaRPr lang="en-US" dirty="0"/>
           </a:p>
@@ -1104,6 +1106,94 @@
           <a:p>
             <a:r>
               <a:rPr lang="en-US" dirty="0"/>
+              <a:t>系统层实验不用大模型：固定各次运行学到的定义库，只改变维护方式，比较的是机制本身。配对回放：合成数据 1,470 题次，MAVRA 在覆盖的更新下没有错答，99 个错答全部是单位变化这个对照；按模式变更失效有 629 个错答。TPC-DS 上用 99 个查询模板导出的定义，结论一致。同快照验证：并发写入下 11,297 次使用没有一次在违反条件的数据上作答，先检查后执行有 3.8% 到 4.6%。修复的回归基准：按学习时刻比较，修复成功的数量与使用标准答案参照完全相同；按当前数据比较会误拒正确的修复。维护成本：19 条定义时为整定义重查的 14%，因为很多定义依赖同一张表的同一个条件；但按表版本缓存验证查询也能得到同样的节省，所以效率不是本文的贡献，贡献在于检查什么、何时可以依赖检查结果、失败后怎么办。</a:t>
+            </a:r>
+            <a:endParaRPr lang="en-US" dirty="0"/>
+          </a:p>
+        </p:txBody>
+      </p:sp>
+      <p:sp>
+        <p:nvSpPr>
+          <p:cNvPr id="4" name="Slide Number Placeholder 3"/>
+          <p:cNvSpPr>
+            <a:spLocks noGrp="1"/>
+          </p:cNvSpPr>
+          <p:nvPr>
+            <p:ph type="sldNum" sz="quarter" idx="10"/>
+          </p:nvPr>
+        </p:nvSpPr>
+        <p:spPr/>
+        <p:txBody>
+          <a:bodyPr/>
+          <a:lstStyle/>
+          <a:p>
+            <a:fld id="{F7021451-1387-4CA6-816F-3879F97B5CBC}" type="slidenum">
+              <a:rPr lang="en-US"/>
+              <a:t>15</a:t>
+            </a:fld>
+            <a:endParaRPr lang="en-US"/>
+          </a:p>
+        </p:txBody>
+      </p:sp>
+    </p:spTree>
+    <p:extLst>
+      <p:ext uri="{BB962C8B-B14F-4D97-AF65-F5344CB8AC3E}">
+        <p14:creationId xmlns:p14="http://schemas.microsoft.com/office/powerpoint/2010/main" val="1024086991"/>
+      </p:ext>
+    </p:extLst>
+  </p:cSld>
+  <p:clrMapOvr>
+    <a:masterClrMapping/>
+  </p:clrMapOvr>
+</p:notes>
+</file>
+
+<file path=ppt/notesSlides/notesSlide16.xml><?xml version="1.0" encoding="utf-8"?>
+<p:notes xmlns:a="http://schemas.openxmlformats.org/drawingml/2006/main" xmlns:r="http://schemas.openxmlformats.org/officeDocument/2006/relationships" xmlns:p="http://schemas.openxmlformats.org/presentationml/2006/main">
+  <p:cSld>
+    <p:spTree>
+      <p:nvGrpSpPr>
+        <p:cNvPr id="1" name=""/>
+        <p:cNvGrpSpPr/>
+        <p:nvPr/>
+      </p:nvGrpSpPr>
+      <p:grpSpPr>
+        <a:xfrm>
+          <a:off x="0" y="0"/>
+          <a:ext cx="0" cy="0"/>
+          <a:chOff x="0" y="0"/>
+          <a:chExt cx="0" cy="0"/>
+        </a:xfrm>
+      </p:grpSpPr>
+      <p:sp>
+        <p:nvSpPr>
+          <p:cNvPr id="2" name="Slide Image Placeholder 1"/>
+          <p:cNvSpPr>
+            <a:spLocks noGrp="1" noRot="1" noChangeAspect="1"/>
+          </p:cNvSpPr>
+          <p:nvPr>
+            <p:ph type="sldImg"/>
+          </p:nvPr>
+        </p:nvSpPr>
+        <p:spPr/>
+      </p:sp>
+      <p:sp>
+        <p:nvSpPr>
+          <p:cNvPr id="3" name="Notes Placeholder 2"/>
+          <p:cNvSpPr>
+            <a:spLocks noGrp="1"/>
+          </p:cNvSpPr>
+          <p:nvPr>
+            <p:ph type="body" idx="1"/>
+          </p:nvPr>
+        </p:nvSpPr>
+        <p:spPr/>
+        <p:txBody>
+          <a:bodyPr/>
+          <a:lstStyle/>
+          <a:p>
+            <a:r>
+              <a:rPr lang="en-US" dirty="0"/>
               <a:t>MAVRA 是严谨的管理员，但不是无所不知。能做的：旧记录有唯一的当前标志，检测并修复；整批重复加载，检测但修不了，失效并通知；主表和备份都合理，不擅自选，交给人。做不到的：金额换了单位、日期键指向错误日期，行数和键都没变，四类条件发现不了；智能体没声明用了哪个修订，也不在保证范围内。两点要分清：MAVRA 不判断业务含义对不对，那需要有人给口径；它也不保证每条 SQL 都对，保护的是声明了受管修订的查询。最后三句话：问题——学会的规则会因数据变化而失效，SQL 却不报错；方法——保存规则成立的条件，使用时在实际执行的快照上保证成立；贡献——只有唯一且通过回归测试的修复才发布，否则失效，不让错误知识传播。</a:t>
             </a:r>
             <a:endParaRPr lang="en-US" dirty="0"/>
@@ -1127,7 +1217,7 @@
           <a:p>
             <a:fld id="{F7021451-1387-4CA6-816F-3879F97B5CBC}" type="slidenum">
               <a:rPr lang="en-US"/>
-              <a:t>15</a:t>
+              <a:t>16</a:t>
             </a:fld>
             <a:endParaRPr lang="en-US"/>
           </a:p>
@@ -6558,6 +6648,1926 @@
                 <a:ea typeface="Microsoft YaHei" pitchFamily="34" charset="-122"/>
                 <a:cs typeface="Microsoft YaHei" pitchFamily="34" charset="-120"/>
               </a:rPr>
+              <a:t>迭代：常见指标的写法可以更省——验证等价与代价后作为新修订共享</a:t>
+            </a:r>
+            <a:endParaRPr lang="en-US" sz="2800" dirty="0"/>
+          </a:p>
+        </p:txBody>
+      </p:sp>
+      <p:sp>
+        <p:nvSpPr>
+          <p:cNvPr id="3" name="Text 1"/>
+          <p:cNvSpPr txBox="1"/>
+          <p:nvPr/>
+        </p:nvSpPr>
+        <p:spPr>
+          <a:xfrm>
+            <a:off x="548640" y="1005840"/>
+            <a:ext cx="5669280" cy="320040"/>
+          </a:xfrm>
+          <a:prstGeom prst="rect">
+            <a:avLst/>
+          </a:prstGeom>
+          <a:noFill/>
+          <a:ln/>
+        </p:spPr>
+        <p:txBody>
+          <a:bodyPr wrap="square" lIns="0" tIns="0" rIns="0" bIns="0" rtlCol="0" anchor="ctr"/>
+          <a:lstStyle/>
+          <a:p>
+            <a:pPr indent="0" marL="0">
+              <a:buNone/>
+            </a:pPr>
+            <a:r>
+              <a:rPr lang="en-US" sz="1500" b="1" dirty="0">
+                <a:solidFill>
+                  <a:srgbClr val="1D5BA6"/>
+                </a:solidFill>
+                <a:latin typeface="Microsoft YaHei" pitchFamily="34" charset="0"/>
+                <a:ea typeface="Microsoft YaHei" pitchFamily="34" charset="-122"/>
+                <a:cs typeface="Microsoft YaHei" pitchFamily="34" charset="-120"/>
+              </a:rPr>
+              <a:t>怎么做：候选 → 等价 → 更省 → 发布</a:t>
+            </a:r>
+            <a:endParaRPr lang="en-US" sz="1500" dirty="0"/>
+          </a:p>
+        </p:txBody>
+      </p:sp>
+      <p:graphicFrame>
+        <p:nvGraphicFramePr>
+          <p:cNvPr id="14" name="Table 0"/>
+          <p:cNvGraphicFramePr>
+            <a:graphicFrameLocks noGrp="1"/>
+          </p:cNvGraphicFramePr>
+          <p:nvPr>
+            <p:extLst>
+              <p:ext uri="{D42A27DB-BD31-4B8C-83A1-F6EECF244321}">
+                <p14:modId xmlns:p14="http://schemas.microsoft.com/office/powerpoint/2010/main" val="1579011935"/>
+              </p:ext>
+            </p:extLst>
+          </p:nvPr>
+        </p:nvGraphicFramePr>
+        <p:xfrm>
+          <a:off x="548640" y="1325880"/>
+          <a:ext cx="5669280" cy="914400"/>
+        </p:xfrm>
+        <a:graphic>
+          <a:graphicData uri="http://schemas.openxmlformats.org/drawingml/2006/table">
+            <a:tbl>
+              <a:tblPr/>
+              <a:tblGrid>
+                <a:gridCol w="822960"/>
+                <a:gridCol w="4846320"/>
+              </a:tblGrid>
+              <a:tr h="0">
+                <a:tc>
+                  <a:txBody>
+                    <a:bodyPr/>
+                    <a:lstStyle/>
+                    <a:p>
+                      <a:pPr indent="0" marL="0">
+                        <a:buNone/>
+                      </a:pPr>
+                      <a:r>
+                        <a:rPr lang="en-US" sz="1200" b="1" dirty="0">
+                          <a:solidFill>
+                            <a:srgbClr val="1F2A37"/>
+                          </a:solidFill>
+                          <a:latin typeface="Microsoft YaHei" pitchFamily="34" charset="0"/>
+                          <a:ea typeface="Microsoft YaHei" pitchFamily="34" charset="-122"/>
+                          <a:cs typeface="Microsoft YaHei" pitchFamily="34" charset="-120"/>
+                        </a:rPr>
+                        <a:t>环节</a:t>
+                      </a:r>
+                      <a:endParaRPr lang="en-US" sz="1200" dirty="0">
+                        <a:latin typeface="Microsoft YaHei" charset="0"/>
+                        <a:ea typeface="Microsoft YaHei" charset="0"/>
+                        <a:cs typeface="Microsoft YaHei" charset="0"/>
+                      </a:endParaRPr>
+                    </a:p>
+                  </a:txBody>
+                  <a:tcPr marL="91440" marR="91440" marT="54864" marB="54864" anchor="ctr">
+                    <a:lnL w="12700" cap="flat" cmpd="sng" algn="ctr">
+                      <a:solidFill>
+                        <a:srgbClr val="D5DBE3"/>
+                      </a:solidFill>
+                      <a:prstDash val="solid"/>
+                      <a:round/>
+                      <a:headEnd type="none" w="med" len="med"/>
+                      <a:tailEnd type="none" w="med" len="med"/>
+                    </a:lnL>
+                    <a:lnR w="12700" cap="flat" cmpd="sng" algn="ctr">
+                      <a:solidFill>
+                        <a:srgbClr val="D5DBE3"/>
+                      </a:solidFill>
+                      <a:prstDash val="solid"/>
+                      <a:round/>
+                      <a:headEnd type="none" w="med" len="med"/>
+                      <a:tailEnd type="none" w="med" len="med"/>
+                    </a:lnR>
+                    <a:lnT w="12700" cap="flat" cmpd="sng" algn="ctr">
+                      <a:solidFill>
+                        <a:srgbClr val="D5DBE3"/>
+                      </a:solidFill>
+                      <a:prstDash val="solid"/>
+                      <a:round/>
+                      <a:headEnd type="none" w="med" len="med"/>
+                      <a:tailEnd type="none" w="med" len="med"/>
+                    </a:lnT>
+                    <a:lnB w="12700" cap="flat" cmpd="sng" algn="ctr">
+                      <a:solidFill>
+                        <a:srgbClr val="D5DBE3"/>
+                      </a:solidFill>
+                      <a:prstDash val="solid"/>
+                      <a:round/>
+                      <a:headEnd type="none" w="med" len="med"/>
+                      <a:tailEnd type="none" w="med" len="med"/>
+                    </a:lnB>
+                    <a:solidFill>
+                      <a:srgbClr val="F1F3F6"/>
+                    </a:solidFill>
+                  </a:tcPr>
+                </a:tc>
+                <a:tc>
+                  <a:txBody>
+                    <a:bodyPr/>
+                    <a:lstStyle/>
+                    <a:p>
+                      <a:pPr indent="0" marL="0">
+                        <a:buNone/>
+                      </a:pPr>
+                      <a:r>
+                        <a:rPr lang="en-US" sz="1200" b="1" dirty="0">
+                          <a:solidFill>
+                            <a:srgbClr val="1F2A37"/>
+                          </a:solidFill>
+                          <a:latin typeface="Microsoft YaHei" pitchFamily="34" charset="0"/>
+                          <a:ea typeface="Microsoft YaHei" pitchFamily="34" charset="-122"/>
+                          <a:cs typeface="Microsoft YaHei" pitchFamily="34" charset="-120"/>
+                        </a:rPr>
+                        <a:t>内容</a:t>
+                      </a:r>
+                      <a:endParaRPr lang="en-US" sz="1200" dirty="0">
+                        <a:latin typeface="Microsoft YaHei" charset="0"/>
+                        <a:ea typeface="Microsoft YaHei" charset="0"/>
+                        <a:cs typeface="Microsoft YaHei" charset="0"/>
+                      </a:endParaRPr>
+                    </a:p>
+                  </a:txBody>
+                  <a:tcPr marL="91440" marR="91440" marT="54864" marB="54864" anchor="ctr">
+                    <a:lnL w="12700" cap="flat" cmpd="sng" algn="ctr">
+                      <a:solidFill>
+                        <a:srgbClr val="D5DBE3"/>
+                      </a:solidFill>
+                      <a:prstDash val="solid"/>
+                      <a:round/>
+                      <a:headEnd type="none" w="med" len="med"/>
+                      <a:tailEnd type="none" w="med" len="med"/>
+                    </a:lnL>
+                    <a:lnR w="12700" cap="flat" cmpd="sng" algn="ctr">
+                      <a:solidFill>
+                        <a:srgbClr val="D5DBE3"/>
+                      </a:solidFill>
+                      <a:prstDash val="solid"/>
+                      <a:round/>
+                      <a:headEnd type="none" w="med" len="med"/>
+                      <a:tailEnd type="none" w="med" len="med"/>
+                    </a:lnR>
+                    <a:lnT w="12700" cap="flat" cmpd="sng" algn="ctr">
+                      <a:solidFill>
+                        <a:srgbClr val="D5DBE3"/>
+                      </a:solidFill>
+                      <a:prstDash val="solid"/>
+                      <a:round/>
+                      <a:headEnd type="none" w="med" len="med"/>
+                      <a:tailEnd type="none" w="med" len="med"/>
+                    </a:lnT>
+                    <a:lnB w="12700" cap="flat" cmpd="sng" algn="ctr">
+                      <a:solidFill>
+                        <a:srgbClr val="D5DBE3"/>
+                      </a:solidFill>
+                      <a:prstDash val="solid"/>
+                      <a:round/>
+                      <a:headEnd type="none" w="med" len="med"/>
+                      <a:tailEnd type="none" w="med" len="med"/>
+                    </a:lnB>
+                    <a:solidFill>
+                      <a:srgbClr val="F1F3F6"/>
+                    </a:solidFill>
+                  </a:tcPr>
+                </a:tc>
+              </a:tr>
+              <a:tr h="0">
+                <a:tc>
+                  <a:txBody>
+                    <a:bodyPr/>
+                    <a:lstStyle/>
+                    <a:p>
+                      <a:pPr indent="0" marL="0">
+                        <a:buNone/>
+                      </a:pPr>
+                      <a:r>
+                        <a:rPr lang="en-US" sz="1200" dirty="0">
+                          <a:solidFill>
+                            <a:srgbClr val="1F2A37"/>
+                          </a:solidFill>
+                          <a:latin typeface="Microsoft YaHei" pitchFamily="34" charset="0"/>
+                          <a:ea typeface="Microsoft YaHei" pitchFamily="34" charset="-122"/>
+                          <a:cs typeface="Microsoft YaHei" pitchFamily="34" charset="-120"/>
+                        </a:rPr>
+                        <a:t>候选</a:t>
+                      </a:r>
+                      <a:endParaRPr lang="en-US" sz="1200" dirty="0">
+                        <a:latin typeface="Microsoft YaHei" charset="0"/>
+                        <a:ea typeface="Microsoft YaHei" charset="0"/>
+                        <a:cs typeface="Microsoft YaHei" charset="0"/>
+                      </a:endParaRPr>
+                    </a:p>
+                  </a:txBody>
+                  <a:tcPr marL="91440" marR="91440" marT="54864" marB="54864" anchor="ctr">
+                    <a:lnL w="12700" cap="flat" cmpd="sng" algn="ctr">
+                      <a:solidFill>
+                        <a:srgbClr val="D5DBE3"/>
+                      </a:solidFill>
+                      <a:prstDash val="solid"/>
+                      <a:round/>
+                      <a:headEnd type="none" w="med" len="med"/>
+                      <a:tailEnd type="none" w="med" len="med"/>
+                    </a:lnL>
+                    <a:lnR w="12700" cap="flat" cmpd="sng" algn="ctr">
+                      <a:solidFill>
+                        <a:srgbClr val="D5DBE3"/>
+                      </a:solidFill>
+                      <a:prstDash val="solid"/>
+                      <a:round/>
+                      <a:headEnd type="none" w="med" len="med"/>
+                      <a:tailEnd type="none" w="med" len="med"/>
+                    </a:lnR>
+                    <a:lnT w="12700" cap="flat" cmpd="sng" algn="ctr">
+                      <a:solidFill>
+                        <a:srgbClr val="D5DBE3"/>
+                      </a:solidFill>
+                      <a:prstDash val="solid"/>
+                      <a:round/>
+                      <a:headEnd type="none" w="med" len="med"/>
+                      <a:tailEnd type="none" w="med" len="med"/>
+                    </a:lnT>
+                    <a:lnB w="12700" cap="flat" cmpd="sng" algn="ctr">
+                      <a:solidFill>
+                        <a:srgbClr val="D5DBE3"/>
+                      </a:solidFill>
+                      <a:prstDash val="solid"/>
+                      <a:round/>
+                      <a:headEnd type="none" w="med" len="med"/>
+                      <a:tailEnd type="none" w="med" len="med"/>
+                    </a:lnB>
+                  </a:tcPr>
+                </a:tc>
+                <a:tc>
+                  <a:txBody>
+                    <a:bodyPr/>
+                    <a:lstStyle/>
+                    <a:p>
+                      <a:pPr indent="0" marL="0">
+                        <a:buNone/>
+                      </a:pPr>
+                      <a:r>
+                        <a:rPr lang="en-US" sz="1200" dirty="0">
+                          <a:solidFill>
+                            <a:srgbClr val="1F2A37"/>
+                          </a:solidFill>
+                          <a:latin typeface="Microsoft YaHei" pitchFamily="34" charset="0"/>
+                          <a:ea typeface="Microsoft YaHei" pitchFamily="34" charset="-122"/>
+                          <a:cs typeface="Microsoft YaHei" pitchFamily="34" charset="-120"/>
+                        </a:rPr>
+                        <a:t>规则改写：期间谓词改为日期键范围过滤（不连接日期维度）、去掉未使用的关联；模型提议；智能体成功轨迹中的不同写法</a:t>
+                      </a:r>
+                      <a:endParaRPr lang="en-US" sz="1200" dirty="0">
+                        <a:latin typeface="Microsoft YaHei" charset="0"/>
+                        <a:ea typeface="Microsoft YaHei" charset="0"/>
+                        <a:cs typeface="Microsoft YaHei" charset="0"/>
+                      </a:endParaRPr>
+                    </a:p>
+                  </a:txBody>
+                  <a:tcPr marL="91440" marR="91440" marT="54864" marB="54864" anchor="ctr">
+                    <a:lnL w="12700" cap="flat" cmpd="sng" algn="ctr">
+                      <a:solidFill>
+                        <a:srgbClr val="D5DBE3"/>
+                      </a:solidFill>
+                      <a:prstDash val="solid"/>
+                      <a:round/>
+                      <a:headEnd type="none" w="med" len="med"/>
+                      <a:tailEnd type="none" w="med" len="med"/>
+                    </a:lnL>
+                    <a:lnR w="12700" cap="flat" cmpd="sng" algn="ctr">
+                      <a:solidFill>
+                        <a:srgbClr val="D5DBE3"/>
+                      </a:solidFill>
+                      <a:prstDash val="solid"/>
+                      <a:round/>
+                      <a:headEnd type="none" w="med" len="med"/>
+                      <a:tailEnd type="none" w="med" len="med"/>
+                    </a:lnR>
+                    <a:lnT w="12700" cap="flat" cmpd="sng" algn="ctr">
+                      <a:solidFill>
+                        <a:srgbClr val="D5DBE3"/>
+                      </a:solidFill>
+                      <a:prstDash val="solid"/>
+                      <a:round/>
+                      <a:headEnd type="none" w="med" len="med"/>
+                      <a:tailEnd type="none" w="med" len="med"/>
+                    </a:lnT>
+                    <a:lnB w="12700" cap="flat" cmpd="sng" algn="ctr">
+                      <a:solidFill>
+                        <a:srgbClr val="D5DBE3"/>
+                      </a:solidFill>
+                      <a:prstDash val="solid"/>
+                      <a:round/>
+                      <a:headEnd type="none" w="med" len="med"/>
+                      <a:tailEnd type="none" w="med" len="med"/>
+                    </a:lnB>
+                  </a:tcPr>
+                </a:tc>
+              </a:tr>
+              <a:tr h="0">
+                <a:tc>
+                  <a:txBody>
+                    <a:bodyPr/>
+                    <a:lstStyle/>
+                    <a:p>
+                      <a:pPr indent="0" marL="0">
+                        <a:buNone/>
+                      </a:pPr>
+                      <a:r>
+                        <a:rPr lang="en-US" sz="1200" dirty="0">
+                          <a:solidFill>
+                            <a:srgbClr val="1F2A37"/>
+                          </a:solidFill>
+                          <a:latin typeface="Microsoft YaHei" pitchFamily="34" charset="0"/>
+                          <a:ea typeface="Microsoft YaHei" pitchFamily="34" charset="-122"/>
+                          <a:cs typeface="Microsoft YaHei" pitchFamily="34" charset="-120"/>
+                        </a:rPr>
+                        <a:t>等价</a:t>
+                      </a:r>
+                      <a:endParaRPr lang="en-US" sz="1200" dirty="0">
+                        <a:latin typeface="Microsoft YaHei" charset="0"/>
+                        <a:ea typeface="Microsoft YaHei" charset="0"/>
+                        <a:cs typeface="Microsoft YaHei" charset="0"/>
+                      </a:endParaRPr>
+                    </a:p>
+                  </a:txBody>
+                  <a:tcPr marL="91440" marR="91440" marT="54864" marB="54864" anchor="ctr">
+                    <a:lnL w="12700" cap="flat" cmpd="sng" algn="ctr">
+                      <a:solidFill>
+                        <a:srgbClr val="D5DBE3"/>
+                      </a:solidFill>
+                      <a:prstDash val="solid"/>
+                      <a:round/>
+                      <a:headEnd type="none" w="med" len="med"/>
+                      <a:tailEnd type="none" w="med" len="med"/>
+                    </a:lnL>
+                    <a:lnR w="12700" cap="flat" cmpd="sng" algn="ctr">
+                      <a:solidFill>
+                        <a:srgbClr val="D5DBE3"/>
+                      </a:solidFill>
+                      <a:prstDash val="solid"/>
+                      <a:round/>
+                      <a:headEnd type="none" w="med" len="med"/>
+                      <a:tailEnd type="none" w="med" len="med"/>
+                    </a:lnR>
+                    <a:lnT w="12700" cap="flat" cmpd="sng" algn="ctr">
+                      <a:solidFill>
+                        <a:srgbClr val="D5DBE3"/>
+                      </a:solidFill>
+                      <a:prstDash val="solid"/>
+                      <a:round/>
+                      <a:headEnd type="none" w="med" len="med"/>
+                      <a:tailEnd type="none" w="med" len="med"/>
+                    </a:lnT>
+                    <a:lnB w="12700" cap="flat" cmpd="sng" algn="ctr">
+                      <a:solidFill>
+                        <a:srgbClr val="D5DBE3"/>
+                      </a:solidFill>
+                      <a:prstDash val="solid"/>
+                      <a:round/>
+                      <a:headEnd type="none" w="med" len="med"/>
+                      <a:tailEnd type="none" w="med" len="med"/>
+                    </a:lnB>
+                  </a:tcPr>
+                </a:tc>
+                <a:tc>
+                  <a:txBody>
+                    <a:bodyPr/>
+                    <a:lstStyle/>
+                    <a:p>
+                      <a:pPr indent="0" marL="0">
+                        <a:buNone/>
+                      </a:pPr>
+                      <a:r>
+                        <a:rPr lang="en-US" sz="1200" dirty="0">
+                          <a:solidFill>
+                            <a:srgbClr val="1F2A37"/>
+                          </a:solidFill>
+                          <a:latin typeface="Microsoft YaHei" pitchFamily="34" charset="0"/>
+                          <a:ea typeface="Microsoft YaHei" pitchFamily="34" charset="-122"/>
+                          <a:cs typeface="Microsoft YaHei" pitchFamily="34" charset="-120"/>
+                        </a:rPr>
+                        <a:t>结构合法、粒度成立；新前提成立（日期键按月连续）；学习时快照上与当前修订结果相同；当前快照上 14 个样本期间结果全部相同</a:t>
+                      </a:r>
+                      <a:endParaRPr lang="en-US" sz="1200" dirty="0">
+                        <a:latin typeface="Microsoft YaHei" charset="0"/>
+                        <a:ea typeface="Microsoft YaHei" charset="0"/>
+                        <a:cs typeface="Microsoft YaHei" charset="0"/>
+                      </a:endParaRPr>
+                    </a:p>
+                  </a:txBody>
+                  <a:tcPr marL="91440" marR="91440" marT="54864" marB="54864" anchor="ctr">
+                    <a:lnL w="12700" cap="flat" cmpd="sng" algn="ctr">
+                      <a:solidFill>
+                        <a:srgbClr val="D5DBE3"/>
+                      </a:solidFill>
+                      <a:prstDash val="solid"/>
+                      <a:round/>
+                      <a:headEnd type="none" w="med" len="med"/>
+                      <a:tailEnd type="none" w="med" len="med"/>
+                    </a:lnL>
+                    <a:lnR w="12700" cap="flat" cmpd="sng" algn="ctr">
+                      <a:solidFill>
+                        <a:srgbClr val="D5DBE3"/>
+                      </a:solidFill>
+                      <a:prstDash val="solid"/>
+                      <a:round/>
+                      <a:headEnd type="none" w="med" len="med"/>
+                      <a:tailEnd type="none" w="med" len="med"/>
+                    </a:lnR>
+                    <a:lnT w="12700" cap="flat" cmpd="sng" algn="ctr">
+                      <a:solidFill>
+                        <a:srgbClr val="D5DBE3"/>
+                      </a:solidFill>
+                      <a:prstDash val="solid"/>
+                      <a:round/>
+                      <a:headEnd type="none" w="med" len="med"/>
+                      <a:tailEnd type="none" w="med" len="med"/>
+                    </a:lnT>
+                    <a:lnB w="12700" cap="flat" cmpd="sng" algn="ctr">
+                      <a:solidFill>
+                        <a:srgbClr val="D5DBE3"/>
+                      </a:solidFill>
+                      <a:prstDash val="solid"/>
+                      <a:round/>
+                      <a:headEnd type="none" w="med" len="med"/>
+                      <a:tailEnd type="none" w="med" len="med"/>
+                    </a:lnB>
+                  </a:tcPr>
+                </a:tc>
+              </a:tr>
+              <a:tr h="0">
+                <a:tc>
+                  <a:txBody>
+                    <a:bodyPr/>
+                    <a:lstStyle/>
+                    <a:p>
+                      <a:pPr indent="0" marL="0">
+                        <a:buNone/>
+                      </a:pPr>
+                      <a:r>
+                        <a:rPr lang="en-US" sz="1200" dirty="0">
+                          <a:solidFill>
+                            <a:srgbClr val="1F2A37"/>
+                          </a:solidFill>
+                          <a:latin typeface="Microsoft YaHei" pitchFamily="34" charset="0"/>
+                          <a:ea typeface="Microsoft YaHei" pitchFamily="34" charset="-122"/>
+                          <a:cs typeface="Microsoft YaHei" pitchFamily="34" charset="-120"/>
+                        </a:rPr>
+                        <a:t>更省</a:t>
+                      </a:r>
+                      <a:endParaRPr lang="en-US" sz="1200" dirty="0">
+                        <a:latin typeface="Microsoft YaHei" charset="0"/>
+                        <a:ea typeface="Microsoft YaHei" charset="0"/>
+                        <a:cs typeface="Microsoft YaHei" charset="0"/>
+                      </a:endParaRPr>
+                    </a:p>
+                  </a:txBody>
+                  <a:tcPr marL="91440" marR="91440" marT="54864" marB="54864" anchor="ctr">
+                    <a:lnL w="12700" cap="flat" cmpd="sng" algn="ctr">
+                      <a:solidFill>
+                        <a:srgbClr val="D5DBE3"/>
+                      </a:solidFill>
+                      <a:prstDash val="solid"/>
+                      <a:round/>
+                      <a:headEnd type="none" w="med" len="med"/>
+                      <a:tailEnd type="none" w="med" len="med"/>
+                    </a:lnL>
+                    <a:lnR w="12700" cap="flat" cmpd="sng" algn="ctr">
+                      <a:solidFill>
+                        <a:srgbClr val="D5DBE3"/>
+                      </a:solidFill>
+                      <a:prstDash val="solid"/>
+                      <a:round/>
+                      <a:headEnd type="none" w="med" len="med"/>
+                      <a:tailEnd type="none" w="med" len="med"/>
+                    </a:lnR>
+                    <a:lnT w="12700" cap="flat" cmpd="sng" algn="ctr">
+                      <a:solidFill>
+                        <a:srgbClr val="D5DBE3"/>
+                      </a:solidFill>
+                      <a:prstDash val="solid"/>
+                      <a:round/>
+                      <a:headEnd type="none" w="med" len="med"/>
+                      <a:tailEnd type="none" w="med" len="med"/>
+                    </a:lnT>
+                    <a:lnB w="12700" cap="flat" cmpd="sng" algn="ctr">
+                      <a:solidFill>
+                        <a:srgbClr val="D5DBE3"/>
+                      </a:solidFill>
+                      <a:prstDash val="solid"/>
+                      <a:round/>
+                      <a:headEnd type="none" w="med" len="med"/>
+                      <a:tailEnd type="none" w="med" len="med"/>
+                    </a:lnB>
+                  </a:tcPr>
+                </a:tc>
+                <a:tc>
+                  <a:txBody>
+                    <a:bodyPr/>
+                    <a:lstStyle/>
+                    <a:p>
+                      <a:pPr indent="0" marL="0">
+                        <a:buNone/>
+                      </a:pPr>
+                      <a:r>
+                        <a:rPr lang="en-US" sz="1200" dirty="0">
+                          <a:solidFill>
+                            <a:srgbClr val="1F2A37"/>
+                          </a:solidFill>
+                          <a:latin typeface="Microsoft YaHei" pitchFamily="34" charset="0"/>
+                          <a:ea typeface="Microsoft YaHei" pitchFamily="34" charset="-122"/>
+                          <a:cs typeface="Microsoft YaHei" pitchFamily="34" charset="-120"/>
+                        </a:rPr>
+                        <a:t>同一快照内对每个期间配对做 EXPLAIN ANALYZE，先后交替；执行时间配对差的 95% 区间整体低于 0，且平均节省 ≥ 10%</a:t>
+                      </a:r>
+                      <a:endParaRPr lang="en-US" sz="1200" dirty="0">
+                        <a:latin typeface="Microsoft YaHei" charset="0"/>
+                        <a:ea typeface="Microsoft YaHei" charset="0"/>
+                        <a:cs typeface="Microsoft YaHei" charset="0"/>
+                      </a:endParaRPr>
+                    </a:p>
+                  </a:txBody>
+                  <a:tcPr marL="91440" marR="91440" marT="54864" marB="54864" anchor="ctr">
+                    <a:lnL w="12700" cap="flat" cmpd="sng" algn="ctr">
+                      <a:solidFill>
+                        <a:srgbClr val="D5DBE3"/>
+                      </a:solidFill>
+                      <a:prstDash val="solid"/>
+                      <a:round/>
+                      <a:headEnd type="none" w="med" len="med"/>
+                      <a:tailEnd type="none" w="med" len="med"/>
+                    </a:lnL>
+                    <a:lnR w="12700" cap="flat" cmpd="sng" algn="ctr">
+                      <a:solidFill>
+                        <a:srgbClr val="D5DBE3"/>
+                      </a:solidFill>
+                      <a:prstDash val="solid"/>
+                      <a:round/>
+                      <a:headEnd type="none" w="med" len="med"/>
+                      <a:tailEnd type="none" w="med" len="med"/>
+                    </a:lnR>
+                    <a:lnT w="12700" cap="flat" cmpd="sng" algn="ctr">
+                      <a:solidFill>
+                        <a:srgbClr val="D5DBE3"/>
+                      </a:solidFill>
+                      <a:prstDash val="solid"/>
+                      <a:round/>
+                      <a:headEnd type="none" w="med" len="med"/>
+                      <a:tailEnd type="none" w="med" len="med"/>
+                    </a:lnT>
+                    <a:lnB w="12700" cap="flat" cmpd="sng" algn="ctr">
+                      <a:solidFill>
+                        <a:srgbClr val="D5DBE3"/>
+                      </a:solidFill>
+                      <a:prstDash val="solid"/>
+                      <a:round/>
+                      <a:headEnd type="none" w="med" len="med"/>
+                      <a:tailEnd type="none" w="med" len="med"/>
+                    </a:lnB>
+                  </a:tcPr>
+                </a:tc>
+              </a:tr>
+              <a:tr h="0">
+                <a:tc>
+                  <a:txBody>
+                    <a:bodyPr/>
+                    <a:lstStyle/>
+                    <a:p>
+                      <a:pPr indent="0" marL="0">
+                        <a:buNone/>
+                      </a:pPr>
+                      <a:r>
+                        <a:rPr lang="en-US" sz="1200" dirty="0">
+                          <a:solidFill>
+                            <a:srgbClr val="1F2A37"/>
+                          </a:solidFill>
+                          <a:latin typeface="Microsoft YaHei" pitchFamily="34" charset="0"/>
+                          <a:ea typeface="Microsoft YaHei" pitchFamily="34" charset="-122"/>
+                          <a:cs typeface="Microsoft YaHei" pitchFamily="34" charset="-120"/>
+                        </a:rPr>
+                        <a:t>发布</a:t>
+                      </a:r>
+                      <a:endParaRPr lang="en-US" sz="1200" dirty="0">
+                        <a:latin typeface="Microsoft YaHei" charset="0"/>
+                        <a:ea typeface="Microsoft YaHei" charset="0"/>
+                        <a:cs typeface="Microsoft YaHei" charset="0"/>
+                      </a:endParaRPr>
+                    </a:p>
+                  </a:txBody>
+                  <a:tcPr marL="91440" marR="91440" marT="54864" marB="54864" anchor="ctr">
+                    <a:lnL w="12700" cap="flat" cmpd="sng" algn="ctr">
+                      <a:solidFill>
+                        <a:srgbClr val="D5DBE3"/>
+                      </a:solidFill>
+                      <a:prstDash val="solid"/>
+                      <a:round/>
+                      <a:headEnd type="none" w="med" len="med"/>
+                      <a:tailEnd type="none" w="med" len="med"/>
+                    </a:lnL>
+                    <a:lnR w="12700" cap="flat" cmpd="sng" algn="ctr">
+                      <a:solidFill>
+                        <a:srgbClr val="D5DBE3"/>
+                      </a:solidFill>
+                      <a:prstDash val="solid"/>
+                      <a:round/>
+                      <a:headEnd type="none" w="med" len="med"/>
+                      <a:tailEnd type="none" w="med" len="med"/>
+                    </a:lnR>
+                    <a:lnT w="12700" cap="flat" cmpd="sng" algn="ctr">
+                      <a:solidFill>
+                        <a:srgbClr val="D5DBE3"/>
+                      </a:solidFill>
+                      <a:prstDash val="solid"/>
+                      <a:round/>
+                      <a:headEnd type="none" w="med" len="med"/>
+                      <a:tailEnd type="none" w="med" len="med"/>
+                    </a:lnT>
+                    <a:lnB w="12700" cap="flat" cmpd="sng" algn="ctr">
+                      <a:solidFill>
+                        <a:srgbClr val="D5DBE3"/>
+                      </a:solidFill>
+                      <a:prstDash val="solid"/>
+                      <a:round/>
+                      <a:headEnd type="none" w="med" len="med"/>
+                      <a:tailEnd type="none" w="med" len="med"/>
+                    </a:lnB>
+                  </a:tcPr>
+                </a:tc>
+                <a:tc>
+                  <a:txBody>
+                    <a:bodyPr/>
+                    <a:lstStyle/>
+                    <a:p>
+                      <a:pPr indent="0" marL="0">
+                        <a:buNone/>
+                      </a:pPr>
+                      <a:r>
+                        <a:rPr lang="en-US" sz="1200" dirty="0">
+                          <a:solidFill>
+                            <a:srgbClr val="1F2A37"/>
+                          </a:solidFill>
+                          <a:latin typeface="Microsoft YaHei" pitchFamily="34" charset="0"/>
+                          <a:ea typeface="Microsoft YaHei" pitchFamily="34" charset="-122"/>
+                          <a:cs typeface="Microsoft YaHei" pitchFamily="34" charset="-120"/>
+                        </a:rPr>
+                        <a:t>作为同一定义的新修订；旧修订仍正确，宽限可用并通知使用方；新前提成为该修订的条件，随数据更新维护，不成立则失效</a:t>
+                      </a:r>
+                      <a:endParaRPr lang="en-US" sz="1200" dirty="0">
+                        <a:latin typeface="Microsoft YaHei" charset="0"/>
+                        <a:ea typeface="Microsoft YaHei" charset="0"/>
+                        <a:cs typeface="Microsoft YaHei" charset="0"/>
+                      </a:endParaRPr>
+                    </a:p>
+                  </a:txBody>
+                  <a:tcPr marL="91440" marR="91440" marT="54864" marB="54864" anchor="ctr">
+                    <a:lnL w="12700" cap="flat" cmpd="sng" algn="ctr">
+                      <a:solidFill>
+                        <a:srgbClr val="D5DBE3"/>
+                      </a:solidFill>
+                      <a:prstDash val="solid"/>
+                      <a:round/>
+                      <a:headEnd type="none" w="med" len="med"/>
+                      <a:tailEnd type="none" w="med" len="med"/>
+                    </a:lnL>
+                    <a:lnR w="12700" cap="flat" cmpd="sng" algn="ctr">
+                      <a:solidFill>
+                        <a:srgbClr val="D5DBE3"/>
+                      </a:solidFill>
+                      <a:prstDash val="solid"/>
+                      <a:round/>
+                      <a:headEnd type="none" w="med" len="med"/>
+                      <a:tailEnd type="none" w="med" len="med"/>
+                    </a:lnR>
+                    <a:lnT w="12700" cap="flat" cmpd="sng" algn="ctr">
+                      <a:solidFill>
+                        <a:srgbClr val="D5DBE3"/>
+                      </a:solidFill>
+                      <a:prstDash val="solid"/>
+                      <a:round/>
+                      <a:headEnd type="none" w="med" len="med"/>
+                      <a:tailEnd type="none" w="med" len="med"/>
+                    </a:lnT>
+                    <a:lnB w="12700" cap="flat" cmpd="sng" algn="ctr">
+                      <a:solidFill>
+                        <a:srgbClr val="D5DBE3"/>
+                      </a:solidFill>
+                      <a:prstDash val="solid"/>
+                      <a:round/>
+                      <a:headEnd type="none" w="med" len="med"/>
+                      <a:tailEnd type="none" w="med" len="med"/>
+                    </a:lnB>
+                  </a:tcPr>
+                </a:tc>
+              </a:tr>
+            </a:tbl>
+          </a:graphicData>
+        </a:graphic>
+      </p:graphicFrame>
+      <p:sp>
+        <p:nvSpPr>
+          <p:cNvPr id="5" name="Text 2"/>
+          <p:cNvSpPr txBox="1"/>
+          <p:nvPr/>
+        </p:nvSpPr>
+        <p:spPr>
+          <a:xfrm>
+            <a:off x="6492240" y="1005840"/>
+            <a:ext cx="5150815" cy="320040"/>
+          </a:xfrm>
+          <a:prstGeom prst="rect">
+            <a:avLst/>
+          </a:prstGeom>
+          <a:noFill/>
+          <a:ln/>
+        </p:spPr>
+        <p:txBody>
+          <a:bodyPr wrap="square" lIns="0" tIns="0" rIns="0" bIns="0" rtlCol="0" anchor="ctr"/>
+          <a:lstStyle/>
+          <a:p>
+            <a:pPr indent="0" marL="0">
+              <a:buNone/>
+            </a:pPr>
+            <a:r>
+              <a:rPr lang="en-US" sz="1500" b="1" dirty="0">
+                <a:solidFill>
+                  <a:srgbClr val="B5671A"/>
+                </a:solidFill>
+                <a:latin typeface="Microsoft YaHei" pitchFamily="34" charset="0"/>
+                <a:ea typeface="Microsoft YaHei" pitchFamily="34" charset="-122"/>
+                <a:cs typeface="Microsoft YaHei" pitchFamily="34" charset="-120"/>
+              </a:rPr>
+              <a:t>真实记录：门店营业额（集成测试，store_sales 20 万行）</a:t>
+            </a:r>
+            <a:endParaRPr lang="en-US" sz="1500" dirty="0"/>
+          </a:p>
+        </p:txBody>
+      </p:sp>
+      <p:graphicFrame>
+        <p:nvGraphicFramePr>
+          <p:cNvPr id="27" name="Table 1"/>
+          <p:cNvGraphicFramePr>
+            <a:graphicFrameLocks noGrp="1"/>
+          </p:cNvGraphicFramePr>
+          <p:nvPr>
+            <p:extLst>
+              <p:ext uri="{D42A27DB-BD31-4B8C-83A1-F6EECF244321}">
+                <p14:modId xmlns:p14="http://schemas.microsoft.com/office/powerpoint/2010/main" val="1579011935"/>
+              </p:ext>
+            </p:extLst>
+          </p:nvPr>
+        </p:nvGraphicFramePr>
+        <p:xfrm>
+          <a:off x="6492240" y="1325880"/>
+          <a:ext cx="5150815" cy="914400"/>
+        </p:xfrm>
+        <a:graphic>
+          <a:graphicData uri="http://schemas.openxmlformats.org/drawingml/2006/table">
+            <a:tbl>
+              <a:tblPr/>
+              <a:tblGrid>
+                <a:gridCol w="822960"/>
+                <a:gridCol w="4327855"/>
+              </a:tblGrid>
+              <a:tr h="0">
+                <a:tc>
+                  <a:txBody>
+                    <a:bodyPr/>
+                    <a:lstStyle/>
+                    <a:p>
+                      <a:pPr indent="0" marL="0">
+                        <a:buNone/>
+                      </a:pPr>
+                      <a:r>
+                        <a:rPr lang="en-US" sz="1200" b="1" dirty="0">
+                          <a:solidFill>
+                            <a:srgbClr val="1F2A37"/>
+                          </a:solidFill>
+                          <a:latin typeface="Microsoft YaHei" pitchFamily="34" charset="0"/>
+                          <a:ea typeface="Microsoft YaHei" pitchFamily="34" charset="-122"/>
+                          <a:cs typeface="Microsoft YaHei" pitchFamily="34" charset="-120"/>
+                        </a:rPr>
+                        <a:t>项目</a:t>
+                      </a:r>
+                      <a:endParaRPr lang="en-US" sz="1200" dirty="0">
+                        <a:latin typeface="Microsoft YaHei" charset="0"/>
+                        <a:ea typeface="Microsoft YaHei" charset="0"/>
+                        <a:cs typeface="Microsoft YaHei" charset="0"/>
+                      </a:endParaRPr>
+                    </a:p>
+                  </a:txBody>
+                  <a:tcPr marL="91440" marR="91440" marT="54864" marB="54864" anchor="ctr">
+                    <a:lnL w="12700" cap="flat" cmpd="sng" algn="ctr">
+                      <a:solidFill>
+                        <a:srgbClr val="D5DBE3"/>
+                      </a:solidFill>
+                      <a:prstDash val="solid"/>
+                      <a:round/>
+                      <a:headEnd type="none" w="med" len="med"/>
+                      <a:tailEnd type="none" w="med" len="med"/>
+                    </a:lnL>
+                    <a:lnR w="12700" cap="flat" cmpd="sng" algn="ctr">
+                      <a:solidFill>
+                        <a:srgbClr val="D5DBE3"/>
+                      </a:solidFill>
+                      <a:prstDash val="solid"/>
+                      <a:round/>
+                      <a:headEnd type="none" w="med" len="med"/>
+                      <a:tailEnd type="none" w="med" len="med"/>
+                    </a:lnR>
+                    <a:lnT w="12700" cap="flat" cmpd="sng" algn="ctr">
+                      <a:solidFill>
+                        <a:srgbClr val="D5DBE3"/>
+                      </a:solidFill>
+                      <a:prstDash val="solid"/>
+                      <a:round/>
+                      <a:headEnd type="none" w="med" len="med"/>
+                      <a:tailEnd type="none" w="med" len="med"/>
+                    </a:lnT>
+                    <a:lnB w="12700" cap="flat" cmpd="sng" algn="ctr">
+                      <a:solidFill>
+                        <a:srgbClr val="D5DBE3"/>
+                      </a:solidFill>
+                      <a:prstDash val="solid"/>
+                      <a:round/>
+                      <a:headEnd type="none" w="med" len="med"/>
+                      <a:tailEnd type="none" w="med" len="med"/>
+                    </a:lnB>
+                    <a:solidFill>
+                      <a:srgbClr val="F1F3F6"/>
+                    </a:solidFill>
+                  </a:tcPr>
+                </a:tc>
+                <a:tc>
+                  <a:txBody>
+                    <a:bodyPr/>
+                    <a:lstStyle/>
+                    <a:p>
+                      <a:pPr indent="0" marL="0">
+                        <a:buNone/>
+                      </a:pPr>
+                      <a:r>
+                        <a:rPr lang="en-US" sz="1200" b="1" dirty="0">
+                          <a:solidFill>
+                            <a:srgbClr val="1F2A37"/>
+                          </a:solidFill>
+                          <a:latin typeface="Microsoft YaHei" pitchFamily="34" charset="0"/>
+                          <a:ea typeface="Microsoft YaHei" pitchFamily="34" charset="-122"/>
+                          <a:cs typeface="Microsoft YaHei" pitchFamily="34" charset="-120"/>
+                        </a:rPr>
+                        <a:t>系统记录</a:t>
+                      </a:r>
+                      <a:endParaRPr lang="en-US" sz="1200" dirty="0">
+                        <a:latin typeface="Microsoft YaHei" charset="0"/>
+                        <a:ea typeface="Microsoft YaHei" charset="0"/>
+                        <a:cs typeface="Microsoft YaHei" charset="0"/>
+                      </a:endParaRPr>
+                    </a:p>
+                  </a:txBody>
+                  <a:tcPr marL="91440" marR="91440" marT="54864" marB="54864" anchor="ctr">
+                    <a:lnL w="12700" cap="flat" cmpd="sng" algn="ctr">
+                      <a:solidFill>
+                        <a:srgbClr val="D5DBE3"/>
+                      </a:solidFill>
+                      <a:prstDash val="solid"/>
+                      <a:round/>
+                      <a:headEnd type="none" w="med" len="med"/>
+                      <a:tailEnd type="none" w="med" len="med"/>
+                    </a:lnL>
+                    <a:lnR w="12700" cap="flat" cmpd="sng" algn="ctr">
+                      <a:solidFill>
+                        <a:srgbClr val="D5DBE3"/>
+                      </a:solidFill>
+                      <a:prstDash val="solid"/>
+                      <a:round/>
+                      <a:headEnd type="none" w="med" len="med"/>
+                      <a:tailEnd type="none" w="med" len="med"/>
+                    </a:lnR>
+                    <a:lnT w="12700" cap="flat" cmpd="sng" algn="ctr">
+                      <a:solidFill>
+                        <a:srgbClr val="D5DBE3"/>
+                      </a:solidFill>
+                      <a:prstDash val="solid"/>
+                      <a:round/>
+                      <a:headEnd type="none" w="med" len="med"/>
+                      <a:tailEnd type="none" w="med" len="med"/>
+                    </a:lnT>
+                    <a:lnB w="12700" cap="flat" cmpd="sng" algn="ctr">
+                      <a:solidFill>
+                        <a:srgbClr val="D5DBE3"/>
+                      </a:solidFill>
+                      <a:prstDash val="solid"/>
+                      <a:round/>
+                      <a:headEnd type="none" w="med" len="med"/>
+                      <a:tailEnd type="none" w="med" len="med"/>
+                    </a:lnB>
+                    <a:solidFill>
+                      <a:srgbClr val="F1F3F6"/>
+                    </a:solidFill>
+                  </a:tcPr>
+                </a:tc>
+              </a:tr>
+              <a:tr h="0">
+                <a:tc>
+                  <a:txBody>
+                    <a:bodyPr/>
+                    <a:lstStyle/>
+                    <a:p>
+                      <a:pPr indent="0" marL="0">
+                        <a:buNone/>
+                      </a:pPr>
+                      <a:r>
+                        <a:rPr lang="en-US" sz="1200" dirty="0">
+                          <a:solidFill>
+                            <a:srgbClr val="1F2A37"/>
+                          </a:solidFill>
+                          <a:latin typeface="Microsoft YaHei" pitchFamily="34" charset="0"/>
+                          <a:ea typeface="Microsoft YaHei" pitchFamily="34" charset="-122"/>
+                          <a:cs typeface="Microsoft YaHei" pitchFamily="34" charset="-120"/>
+                        </a:rPr>
+                        <a:t>候选</a:t>
+                      </a:r>
+                      <a:endParaRPr lang="en-US" sz="1200" dirty="0">
+                        <a:latin typeface="Microsoft YaHei" charset="0"/>
+                        <a:ea typeface="Microsoft YaHei" charset="0"/>
+                        <a:cs typeface="Microsoft YaHei" charset="0"/>
+                      </a:endParaRPr>
+                    </a:p>
+                  </a:txBody>
+                  <a:tcPr marL="91440" marR="91440" marT="54864" marB="54864" anchor="ctr">
+                    <a:lnL w="12700" cap="flat" cmpd="sng" algn="ctr">
+                      <a:solidFill>
+                        <a:srgbClr val="D5DBE3"/>
+                      </a:solidFill>
+                      <a:prstDash val="solid"/>
+                      <a:round/>
+                      <a:headEnd type="none" w="med" len="med"/>
+                      <a:tailEnd type="none" w="med" len="med"/>
+                    </a:lnL>
+                    <a:lnR w="12700" cap="flat" cmpd="sng" algn="ctr">
+                      <a:solidFill>
+                        <a:srgbClr val="D5DBE3"/>
+                      </a:solidFill>
+                      <a:prstDash val="solid"/>
+                      <a:round/>
+                      <a:headEnd type="none" w="med" len="med"/>
+                      <a:tailEnd type="none" w="med" len="med"/>
+                    </a:lnR>
+                    <a:lnT w="12700" cap="flat" cmpd="sng" algn="ctr">
+                      <a:solidFill>
+                        <a:srgbClr val="D5DBE3"/>
+                      </a:solidFill>
+                      <a:prstDash val="solid"/>
+                      <a:round/>
+                      <a:headEnd type="none" w="med" len="med"/>
+                      <a:tailEnd type="none" w="med" len="med"/>
+                    </a:lnT>
+                    <a:lnB w="12700" cap="flat" cmpd="sng" algn="ctr">
+                      <a:solidFill>
+                        <a:srgbClr val="D5DBE3"/>
+                      </a:solidFill>
+                      <a:prstDash val="solid"/>
+                      <a:round/>
+                      <a:headEnd type="none" w="med" len="med"/>
+                      <a:tailEnd type="none" w="med" len="med"/>
+                    </a:lnB>
+                  </a:tcPr>
+                </a:tc>
+                <a:tc>
+                  <a:txBody>
+                    <a:bodyPr/>
+                    <a:lstStyle/>
+                    <a:p>
+                      <a:pPr indent="0" marL="0">
+                        <a:buNone/>
+                      </a:pPr>
+                      <a:r>
+                        <a:rPr lang="en-US" sz="1200" dirty="0">
+                          <a:solidFill>
+                            <a:srgbClr val="1F2A37"/>
+                          </a:solidFill>
+                          <a:latin typeface="Microsoft YaHei" pitchFamily="34" charset="0"/>
+                          <a:ea typeface="Microsoft YaHei" pitchFamily="34" charset="-122"/>
+                          <a:cs typeface="Microsoft YaHei" pitchFamily="34" charset="-120"/>
+                        </a:rPr>
+                        <a:t>期间谓词改为日期键范围过滤，不连接 date_dim</a:t>
+                      </a:r>
+                      <a:endParaRPr lang="en-US" sz="1200" dirty="0">
+                        <a:latin typeface="Microsoft YaHei" charset="0"/>
+                        <a:ea typeface="Microsoft YaHei" charset="0"/>
+                        <a:cs typeface="Microsoft YaHei" charset="0"/>
+                      </a:endParaRPr>
+                    </a:p>
+                  </a:txBody>
+                  <a:tcPr marL="91440" marR="91440" marT="54864" marB="54864" anchor="ctr">
+                    <a:lnL w="12700" cap="flat" cmpd="sng" algn="ctr">
+                      <a:solidFill>
+                        <a:srgbClr val="D5DBE3"/>
+                      </a:solidFill>
+                      <a:prstDash val="solid"/>
+                      <a:round/>
+                      <a:headEnd type="none" w="med" len="med"/>
+                      <a:tailEnd type="none" w="med" len="med"/>
+                    </a:lnL>
+                    <a:lnR w="12700" cap="flat" cmpd="sng" algn="ctr">
+                      <a:solidFill>
+                        <a:srgbClr val="D5DBE3"/>
+                      </a:solidFill>
+                      <a:prstDash val="solid"/>
+                      <a:round/>
+                      <a:headEnd type="none" w="med" len="med"/>
+                      <a:tailEnd type="none" w="med" len="med"/>
+                    </a:lnR>
+                    <a:lnT w="12700" cap="flat" cmpd="sng" algn="ctr">
+                      <a:solidFill>
+                        <a:srgbClr val="D5DBE3"/>
+                      </a:solidFill>
+                      <a:prstDash val="solid"/>
+                      <a:round/>
+                      <a:headEnd type="none" w="med" len="med"/>
+                      <a:tailEnd type="none" w="med" len="med"/>
+                    </a:lnT>
+                    <a:lnB w="12700" cap="flat" cmpd="sng" algn="ctr">
+                      <a:solidFill>
+                        <a:srgbClr val="D5DBE3"/>
+                      </a:solidFill>
+                      <a:prstDash val="solid"/>
+                      <a:round/>
+                      <a:headEnd type="none" w="med" len="med"/>
+                      <a:tailEnd type="none" w="med" len="med"/>
+                    </a:lnB>
+                  </a:tcPr>
+                </a:tc>
+              </a:tr>
+              <a:tr h="0">
+                <a:tc>
+                  <a:txBody>
+                    <a:bodyPr/>
+                    <a:lstStyle/>
+                    <a:p>
+                      <a:pPr indent="0" marL="0">
+                        <a:buNone/>
+                      </a:pPr>
+                      <a:r>
+                        <a:rPr lang="en-US" sz="1200" dirty="0">
+                          <a:solidFill>
+                            <a:srgbClr val="1F2A37"/>
+                          </a:solidFill>
+                          <a:latin typeface="Microsoft YaHei" pitchFamily="34" charset="0"/>
+                          <a:ea typeface="Microsoft YaHei" pitchFamily="34" charset="-122"/>
+                          <a:cs typeface="Microsoft YaHei" pitchFamily="34" charset="-120"/>
+                        </a:rPr>
+                        <a:t>新写法</a:t>
+                      </a:r>
+                      <a:endParaRPr lang="en-US" sz="1200" dirty="0">
+                        <a:latin typeface="Microsoft YaHei" charset="0"/>
+                        <a:ea typeface="Microsoft YaHei" charset="0"/>
+                        <a:cs typeface="Microsoft YaHei" charset="0"/>
+                      </a:endParaRPr>
+                    </a:p>
+                  </a:txBody>
+                  <a:tcPr marL="91440" marR="91440" marT="54864" marB="54864" anchor="ctr">
+                    <a:lnL w="12700" cap="flat" cmpd="sng" algn="ctr">
+                      <a:solidFill>
+                        <a:srgbClr val="D5DBE3"/>
+                      </a:solidFill>
+                      <a:prstDash val="solid"/>
+                      <a:round/>
+                      <a:headEnd type="none" w="med" len="med"/>
+                      <a:tailEnd type="none" w="med" len="med"/>
+                    </a:lnL>
+                    <a:lnR w="12700" cap="flat" cmpd="sng" algn="ctr">
+                      <a:solidFill>
+                        <a:srgbClr val="D5DBE3"/>
+                      </a:solidFill>
+                      <a:prstDash val="solid"/>
+                      <a:round/>
+                      <a:headEnd type="none" w="med" len="med"/>
+                      <a:tailEnd type="none" w="med" len="med"/>
+                    </a:lnR>
+                    <a:lnT w="12700" cap="flat" cmpd="sng" algn="ctr">
+                      <a:solidFill>
+                        <a:srgbClr val="D5DBE3"/>
+                      </a:solidFill>
+                      <a:prstDash val="solid"/>
+                      <a:round/>
+                      <a:headEnd type="none" w="med" len="med"/>
+                      <a:tailEnd type="none" w="med" len="med"/>
+                    </a:lnT>
+                    <a:lnB w="12700" cap="flat" cmpd="sng" algn="ctr">
+                      <a:solidFill>
+                        <a:srgbClr val="D5DBE3"/>
+                      </a:solidFill>
+                      <a:prstDash val="solid"/>
+                      <a:round/>
+                      <a:headEnd type="none" w="med" len="med"/>
+                      <a:tailEnd type="none" w="med" len="med"/>
+                    </a:lnB>
+                  </a:tcPr>
+                </a:tc>
+                <a:tc>
+                  <a:txBody>
+                    <a:bodyPr/>
+                    <a:lstStyle/>
+                    <a:p>
+                      <a:pPr indent="0" marL="0">
+                        <a:buNone/>
+                      </a:pPr>
+                      <a:r>
+                        <a:rPr lang="en-US" sz="1200" dirty="0">
+                          <a:solidFill>
+                            <a:srgbClr val="1F2A37"/>
+                          </a:solidFill>
+                          <a:latin typeface="Microsoft YaHei" pitchFamily="34" charset="0"/>
+                          <a:ea typeface="Microsoft YaHei" pitchFamily="34" charset="-122"/>
+                          <a:cs typeface="Microsoft YaHei" pitchFamily="34" charset="-120"/>
+                        </a:rPr>
+                        <a:t>ss_sold_date_sk between (select min(d_date_sk) from date_dim where …) and (select max(d_date_sk) …)</a:t>
+                      </a:r>
+                      <a:endParaRPr lang="en-US" sz="1200" dirty="0">
+                        <a:latin typeface="Microsoft YaHei" charset="0"/>
+                        <a:ea typeface="Microsoft YaHei" charset="0"/>
+                        <a:cs typeface="Microsoft YaHei" charset="0"/>
+                      </a:endParaRPr>
+                    </a:p>
+                  </a:txBody>
+                  <a:tcPr marL="91440" marR="91440" marT="54864" marB="54864" anchor="ctr">
+                    <a:lnL w="12700" cap="flat" cmpd="sng" algn="ctr">
+                      <a:solidFill>
+                        <a:srgbClr val="D5DBE3"/>
+                      </a:solidFill>
+                      <a:prstDash val="solid"/>
+                      <a:round/>
+                      <a:headEnd type="none" w="med" len="med"/>
+                      <a:tailEnd type="none" w="med" len="med"/>
+                    </a:lnL>
+                    <a:lnR w="12700" cap="flat" cmpd="sng" algn="ctr">
+                      <a:solidFill>
+                        <a:srgbClr val="D5DBE3"/>
+                      </a:solidFill>
+                      <a:prstDash val="solid"/>
+                      <a:round/>
+                      <a:headEnd type="none" w="med" len="med"/>
+                      <a:tailEnd type="none" w="med" len="med"/>
+                    </a:lnR>
+                    <a:lnT w="12700" cap="flat" cmpd="sng" algn="ctr">
+                      <a:solidFill>
+                        <a:srgbClr val="D5DBE3"/>
+                      </a:solidFill>
+                      <a:prstDash val="solid"/>
+                      <a:round/>
+                      <a:headEnd type="none" w="med" len="med"/>
+                      <a:tailEnd type="none" w="med" len="med"/>
+                    </a:lnT>
+                    <a:lnB w="12700" cap="flat" cmpd="sng" algn="ctr">
+                      <a:solidFill>
+                        <a:srgbClr val="D5DBE3"/>
+                      </a:solidFill>
+                      <a:prstDash val="solid"/>
+                      <a:round/>
+                      <a:headEnd type="none" w="med" len="med"/>
+                      <a:tailEnd type="none" w="med" len="med"/>
+                    </a:lnB>
+                  </a:tcPr>
+                </a:tc>
+              </a:tr>
+              <a:tr h="0">
+                <a:tc>
+                  <a:txBody>
+                    <a:bodyPr/>
+                    <a:lstStyle/>
+                    <a:p>
+                      <a:pPr indent="0" marL="0">
+                        <a:buNone/>
+                      </a:pPr>
+                      <a:r>
+                        <a:rPr lang="en-US" sz="1200" dirty="0">
+                          <a:solidFill>
+                            <a:srgbClr val="1F2A37"/>
+                          </a:solidFill>
+                          <a:latin typeface="Microsoft YaHei" pitchFamily="34" charset="0"/>
+                          <a:ea typeface="Microsoft YaHei" pitchFamily="34" charset="-122"/>
+                          <a:cs typeface="Microsoft YaHei" pitchFamily="34" charset="-120"/>
+                        </a:rPr>
+                        <a:t>等价</a:t>
+                      </a:r>
+                      <a:endParaRPr lang="en-US" sz="1200" dirty="0">
+                        <a:latin typeface="Microsoft YaHei" charset="0"/>
+                        <a:ea typeface="Microsoft YaHei" charset="0"/>
+                        <a:cs typeface="Microsoft YaHei" charset="0"/>
+                      </a:endParaRPr>
+                    </a:p>
+                  </a:txBody>
+                  <a:tcPr marL="91440" marR="91440" marT="54864" marB="54864" anchor="ctr">
+                    <a:lnL w="12700" cap="flat" cmpd="sng" algn="ctr">
+                      <a:solidFill>
+                        <a:srgbClr val="D5DBE3"/>
+                      </a:solidFill>
+                      <a:prstDash val="solid"/>
+                      <a:round/>
+                      <a:headEnd type="none" w="med" len="med"/>
+                      <a:tailEnd type="none" w="med" len="med"/>
+                    </a:lnL>
+                    <a:lnR w="12700" cap="flat" cmpd="sng" algn="ctr">
+                      <a:solidFill>
+                        <a:srgbClr val="D5DBE3"/>
+                      </a:solidFill>
+                      <a:prstDash val="solid"/>
+                      <a:round/>
+                      <a:headEnd type="none" w="med" len="med"/>
+                      <a:tailEnd type="none" w="med" len="med"/>
+                    </a:lnR>
+                    <a:lnT w="12700" cap="flat" cmpd="sng" algn="ctr">
+                      <a:solidFill>
+                        <a:srgbClr val="D5DBE3"/>
+                      </a:solidFill>
+                      <a:prstDash val="solid"/>
+                      <a:round/>
+                      <a:headEnd type="none" w="med" len="med"/>
+                      <a:tailEnd type="none" w="med" len="med"/>
+                    </a:lnT>
+                    <a:lnB w="12700" cap="flat" cmpd="sng" algn="ctr">
+                      <a:solidFill>
+                        <a:srgbClr val="D5DBE3"/>
+                      </a:solidFill>
+                      <a:prstDash val="solid"/>
+                      <a:round/>
+                      <a:headEnd type="none" w="med" len="med"/>
+                      <a:tailEnd type="none" w="med" len="med"/>
+                    </a:lnB>
+                  </a:tcPr>
+                </a:tc>
+                <a:tc>
+                  <a:txBody>
+                    <a:bodyPr/>
+                    <a:lstStyle/>
+                    <a:p>
+                      <a:pPr indent="0" marL="0">
+                        <a:buNone/>
+                      </a:pPr>
+                      <a:r>
+                        <a:rPr lang="en-US" sz="1200" dirty="0">
+                          <a:solidFill>
+                            <a:srgbClr val="1F2A37"/>
+                          </a:solidFill>
+                          <a:latin typeface="Microsoft YaHei" pitchFamily="34" charset="0"/>
+                          <a:ea typeface="Microsoft YaHei" pitchFamily="34" charset="-122"/>
+                          <a:cs typeface="Microsoft YaHei" pitchFamily="34" charset="-120"/>
+                        </a:rPr>
+                        <a:t>学习时快照一致；当前快照 14 个期间全部一致</a:t>
+                      </a:r>
+                      <a:endParaRPr lang="en-US" sz="1200" dirty="0">
+                        <a:latin typeface="Microsoft YaHei" charset="0"/>
+                        <a:ea typeface="Microsoft YaHei" charset="0"/>
+                        <a:cs typeface="Microsoft YaHei" charset="0"/>
+                      </a:endParaRPr>
+                    </a:p>
+                  </a:txBody>
+                  <a:tcPr marL="91440" marR="91440" marT="54864" marB="54864" anchor="ctr">
+                    <a:lnL w="12700" cap="flat" cmpd="sng" algn="ctr">
+                      <a:solidFill>
+                        <a:srgbClr val="D5DBE3"/>
+                      </a:solidFill>
+                      <a:prstDash val="solid"/>
+                      <a:round/>
+                      <a:headEnd type="none" w="med" len="med"/>
+                      <a:tailEnd type="none" w="med" len="med"/>
+                    </a:lnL>
+                    <a:lnR w="12700" cap="flat" cmpd="sng" algn="ctr">
+                      <a:solidFill>
+                        <a:srgbClr val="D5DBE3"/>
+                      </a:solidFill>
+                      <a:prstDash val="solid"/>
+                      <a:round/>
+                      <a:headEnd type="none" w="med" len="med"/>
+                      <a:tailEnd type="none" w="med" len="med"/>
+                    </a:lnR>
+                    <a:lnT w="12700" cap="flat" cmpd="sng" algn="ctr">
+                      <a:solidFill>
+                        <a:srgbClr val="D5DBE3"/>
+                      </a:solidFill>
+                      <a:prstDash val="solid"/>
+                      <a:round/>
+                      <a:headEnd type="none" w="med" len="med"/>
+                      <a:tailEnd type="none" w="med" len="med"/>
+                    </a:lnT>
+                    <a:lnB w="12700" cap="flat" cmpd="sng" algn="ctr">
+                      <a:solidFill>
+                        <a:srgbClr val="D5DBE3"/>
+                      </a:solidFill>
+                      <a:prstDash val="solid"/>
+                      <a:round/>
+                      <a:headEnd type="none" w="med" len="med"/>
+                      <a:tailEnd type="none" w="med" len="med"/>
+                    </a:lnB>
+                  </a:tcPr>
+                </a:tc>
+              </a:tr>
+              <a:tr h="0">
+                <a:tc>
+                  <a:txBody>
+                    <a:bodyPr/>
+                    <a:lstStyle/>
+                    <a:p>
+                      <a:pPr indent="0" marL="0">
+                        <a:buNone/>
+                      </a:pPr>
+                      <a:r>
+                        <a:rPr lang="en-US" sz="1200" dirty="0">
+                          <a:solidFill>
+                            <a:srgbClr val="1F2A37"/>
+                          </a:solidFill>
+                          <a:latin typeface="Microsoft YaHei" pitchFamily="34" charset="0"/>
+                          <a:ea typeface="Microsoft YaHei" pitchFamily="34" charset="-122"/>
+                          <a:cs typeface="Microsoft YaHei" pitchFamily="34" charset="-120"/>
+                        </a:rPr>
+                        <a:t>代价</a:t>
+                      </a:r>
+                      <a:endParaRPr lang="en-US" sz="1200" dirty="0">
+                        <a:latin typeface="Microsoft YaHei" charset="0"/>
+                        <a:ea typeface="Microsoft YaHei" charset="0"/>
+                        <a:cs typeface="Microsoft YaHei" charset="0"/>
+                      </a:endParaRPr>
+                    </a:p>
+                  </a:txBody>
+                  <a:tcPr marL="91440" marR="91440" marT="54864" marB="54864" anchor="ctr">
+                    <a:lnL w="12700" cap="flat" cmpd="sng" algn="ctr">
+                      <a:solidFill>
+                        <a:srgbClr val="D5DBE3"/>
+                      </a:solidFill>
+                      <a:prstDash val="solid"/>
+                      <a:round/>
+                      <a:headEnd type="none" w="med" len="med"/>
+                      <a:tailEnd type="none" w="med" len="med"/>
+                    </a:lnL>
+                    <a:lnR w="12700" cap="flat" cmpd="sng" algn="ctr">
+                      <a:solidFill>
+                        <a:srgbClr val="D5DBE3"/>
+                      </a:solidFill>
+                      <a:prstDash val="solid"/>
+                      <a:round/>
+                      <a:headEnd type="none" w="med" len="med"/>
+                      <a:tailEnd type="none" w="med" len="med"/>
+                    </a:lnR>
+                    <a:lnT w="12700" cap="flat" cmpd="sng" algn="ctr">
+                      <a:solidFill>
+                        <a:srgbClr val="D5DBE3"/>
+                      </a:solidFill>
+                      <a:prstDash val="solid"/>
+                      <a:round/>
+                      <a:headEnd type="none" w="med" len="med"/>
+                      <a:tailEnd type="none" w="med" len="med"/>
+                    </a:lnT>
+                    <a:lnB w="12700" cap="flat" cmpd="sng" algn="ctr">
+                      <a:solidFill>
+                        <a:srgbClr val="D5DBE3"/>
+                      </a:solidFill>
+                      <a:prstDash val="solid"/>
+                      <a:round/>
+                      <a:headEnd type="none" w="med" len="med"/>
+                      <a:tailEnd type="none" w="med" len="med"/>
+                    </a:lnB>
+                  </a:tcPr>
+                </a:tc>
+                <a:tc>
+                  <a:txBody>
+                    <a:bodyPr/>
+                    <a:lstStyle/>
+                    <a:p>
+                      <a:pPr indent="0" marL="0">
+                        <a:buNone/>
+                      </a:pPr>
+                      <a:r>
+                        <a:rPr lang="en-US" sz="1200" dirty="0">
+                          <a:solidFill>
+                            <a:srgbClr val="1F2A37"/>
+                          </a:solidFill>
+                          <a:latin typeface="Microsoft YaHei" pitchFamily="34" charset="0"/>
+                          <a:ea typeface="Microsoft YaHei" pitchFamily="34" charset="-122"/>
+                          <a:cs typeface="Microsoft YaHei" pitchFamily="34" charset="-120"/>
+                        </a:rPr>
+                        <a:t>执行时间 4.69 → 4.01 ms（−14.6%），95% 区间 [−1.10, −0.28] ms</a:t>
+                      </a:r>
+                      <a:endParaRPr lang="en-US" sz="1200" dirty="0">
+                        <a:latin typeface="Microsoft YaHei" charset="0"/>
+                        <a:ea typeface="Microsoft YaHei" charset="0"/>
+                        <a:cs typeface="Microsoft YaHei" charset="0"/>
+                      </a:endParaRPr>
+                    </a:p>
+                    <a:p>
+                      <a:pPr indent="0" marL="0">
+                        <a:buNone/>
+                      </a:pPr>
+                      <a:r>
+                        <a:rPr lang="en-US" sz="1200" dirty="0">
+                          <a:solidFill>
+                            <a:srgbClr val="1F2A37"/>
+                          </a:solidFill>
+                          <a:latin typeface="Microsoft YaHei" pitchFamily="34" charset="0"/>
+                          <a:ea typeface="Microsoft YaHei" pitchFamily="34" charset="-122"/>
+                          <a:cs typeface="Microsoft YaHei" pitchFamily="34" charset="-120"/>
+                        </a:rPr>
+                        <a:t>读到的共享块 19,786 → 17,597</a:t>
+                      </a:r>
+                      <a:endParaRPr lang="en-US" sz="1200" dirty="0">
+                        <a:latin typeface="Microsoft YaHei" charset="0"/>
+                        <a:ea typeface="Microsoft YaHei" charset="0"/>
+                        <a:cs typeface="Microsoft YaHei" charset="0"/>
+                      </a:endParaRPr>
+                    </a:p>
+                  </a:txBody>
+                  <a:tcPr marL="91440" marR="91440" marT="54864" marB="54864" anchor="ctr">
+                    <a:lnL w="12700" cap="flat" cmpd="sng" algn="ctr">
+                      <a:solidFill>
+                        <a:srgbClr val="D5DBE3"/>
+                      </a:solidFill>
+                      <a:prstDash val="solid"/>
+                      <a:round/>
+                      <a:headEnd type="none" w="med" len="med"/>
+                      <a:tailEnd type="none" w="med" len="med"/>
+                    </a:lnL>
+                    <a:lnR w="12700" cap="flat" cmpd="sng" algn="ctr">
+                      <a:solidFill>
+                        <a:srgbClr val="D5DBE3"/>
+                      </a:solidFill>
+                      <a:prstDash val="solid"/>
+                      <a:round/>
+                      <a:headEnd type="none" w="med" len="med"/>
+                      <a:tailEnd type="none" w="med" len="med"/>
+                    </a:lnR>
+                    <a:lnT w="12700" cap="flat" cmpd="sng" algn="ctr">
+                      <a:solidFill>
+                        <a:srgbClr val="D5DBE3"/>
+                      </a:solidFill>
+                      <a:prstDash val="solid"/>
+                      <a:round/>
+                      <a:headEnd type="none" w="med" len="med"/>
+                      <a:tailEnd type="none" w="med" len="med"/>
+                    </a:lnT>
+                    <a:lnB w="12700" cap="flat" cmpd="sng" algn="ctr">
+                      <a:solidFill>
+                        <a:srgbClr val="D5DBE3"/>
+                      </a:solidFill>
+                      <a:prstDash val="solid"/>
+                      <a:round/>
+                      <a:headEnd type="none" w="med" len="med"/>
+                      <a:tailEnd type="none" w="med" len="med"/>
+                    </a:lnB>
+                  </a:tcPr>
+                </a:tc>
+              </a:tr>
+              <a:tr h="0">
+                <a:tc>
+                  <a:txBody>
+                    <a:bodyPr/>
+                    <a:lstStyle/>
+                    <a:p>
+                      <a:pPr indent="0" marL="0">
+                        <a:buNone/>
+                      </a:pPr>
+                      <a:r>
+                        <a:rPr lang="en-US" sz="1200" dirty="0">
+                          <a:solidFill>
+                            <a:srgbClr val="1F2A37"/>
+                          </a:solidFill>
+                          <a:latin typeface="Microsoft YaHei" pitchFamily="34" charset="0"/>
+                          <a:ea typeface="Microsoft YaHei" pitchFamily="34" charset="-122"/>
+                          <a:cs typeface="Microsoft YaHei" pitchFamily="34" charset="-120"/>
+                        </a:rPr>
+                        <a:t>发布</a:t>
+                      </a:r>
+                      <a:endParaRPr lang="en-US" sz="1200" dirty="0">
+                        <a:latin typeface="Microsoft YaHei" charset="0"/>
+                        <a:ea typeface="Microsoft YaHei" charset="0"/>
+                        <a:cs typeface="Microsoft YaHei" charset="0"/>
+                      </a:endParaRPr>
+                    </a:p>
+                  </a:txBody>
+                  <a:tcPr marL="91440" marR="91440" marT="54864" marB="54864" anchor="ctr">
+                    <a:lnL w="12700" cap="flat" cmpd="sng" algn="ctr">
+                      <a:solidFill>
+                        <a:srgbClr val="D5DBE3"/>
+                      </a:solidFill>
+                      <a:prstDash val="solid"/>
+                      <a:round/>
+                      <a:headEnd type="none" w="med" len="med"/>
+                      <a:tailEnd type="none" w="med" len="med"/>
+                    </a:lnL>
+                    <a:lnR w="12700" cap="flat" cmpd="sng" algn="ctr">
+                      <a:solidFill>
+                        <a:srgbClr val="D5DBE3"/>
+                      </a:solidFill>
+                      <a:prstDash val="solid"/>
+                      <a:round/>
+                      <a:headEnd type="none" w="med" len="med"/>
+                      <a:tailEnd type="none" w="med" len="med"/>
+                    </a:lnR>
+                    <a:lnT w="12700" cap="flat" cmpd="sng" algn="ctr">
+                      <a:solidFill>
+                        <a:srgbClr val="D5DBE3"/>
+                      </a:solidFill>
+                      <a:prstDash val="solid"/>
+                      <a:round/>
+                      <a:headEnd type="none" w="med" len="med"/>
+                      <a:tailEnd type="none" w="med" len="med"/>
+                    </a:lnT>
+                    <a:lnB w="12700" cap="flat" cmpd="sng" algn="ctr">
+                      <a:solidFill>
+                        <a:srgbClr val="D5DBE3"/>
+                      </a:solidFill>
+                      <a:prstDash val="solid"/>
+                      <a:round/>
+                      <a:headEnd type="none" w="med" len="med"/>
+                      <a:tailEnd type="none" w="med" len="med"/>
+                    </a:lnB>
+                  </a:tcPr>
+                </a:tc>
+                <a:tc>
+                  <a:txBody>
+                    <a:bodyPr/>
+                    <a:lstStyle/>
+                    <a:p>
+                      <a:pPr indent="0" marL="0">
+                        <a:buNone/>
+                      </a:pPr>
+                      <a:r>
+                        <a:rPr lang="en-US" sz="1200" b="1" dirty="0">
+                          <a:solidFill>
+                            <a:srgbClr val="2E7D4F"/>
+                          </a:solidFill>
+                          <a:latin typeface="Microsoft YaHei" pitchFamily="34" charset="0"/>
+                          <a:ea typeface="Microsoft YaHei" pitchFamily="34" charset="-122"/>
+                          <a:cs typeface="Microsoft YaHei" pitchFamily="34" charset="-120"/>
+                        </a:rPr>
+                        <a:t>r0 → r1</a:t>
+                      </a:r>
+                      <a:endParaRPr lang="en-US" sz="1200" dirty="0">
+                        <a:latin typeface="Microsoft YaHei" charset="0"/>
+                        <a:ea typeface="Microsoft YaHei" charset="0"/>
+                        <a:cs typeface="Microsoft YaHei" charset="0"/>
+                      </a:endParaRPr>
+                    </a:p>
+                    <a:p>
+                      <a:pPr indent="0" marL="0">
+                        <a:buNone/>
+                      </a:pPr>
+                      <a:r>
+                        <a:rPr lang="en-US" sz="1200" dirty="0">
+                          <a:solidFill>
+                            <a:srgbClr val="1F2A37"/>
+                          </a:solidFill>
+                          <a:latin typeface="Microsoft YaHei" pitchFamily="34" charset="0"/>
+                          <a:ea typeface="Microsoft YaHei" pitchFamily="34" charset="-122"/>
+                          <a:cs typeface="Microsoft YaHei" pitchFamily="34" charset="-120"/>
+                        </a:rPr>
+                        <a:t>声明 r0 的查询仍被接受并收到通知；整轮 61 条查询、0.27 秒</a:t>
+                      </a:r>
+                      <a:endParaRPr lang="en-US" sz="1200" dirty="0">
+                        <a:latin typeface="Microsoft YaHei" charset="0"/>
+                        <a:ea typeface="Microsoft YaHei" charset="0"/>
+                        <a:cs typeface="Microsoft YaHei" charset="0"/>
+                      </a:endParaRPr>
+                    </a:p>
+                  </a:txBody>
+                  <a:tcPr marL="91440" marR="91440" marT="54864" marB="54864" anchor="ctr">
+                    <a:lnL w="12700" cap="flat" cmpd="sng" algn="ctr">
+                      <a:solidFill>
+                        <a:srgbClr val="D5DBE3"/>
+                      </a:solidFill>
+                      <a:prstDash val="solid"/>
+                      <a:round/>
+                      <a:headEnd type="none" w="med" len="med"/>
+                      <a:tailEnd type="none" w="med" len="med"/>
+                    </a:lnL>
+                    <a:lnR w="12700" cap="flat" cmpd="sng" algn="ctr">
+                      <a:solidFill>
+                        <a:srgbClr val="D5DBE3"/>
+                      </a:solidFill>
+                      <a:prstDash val="solid"/>
+                      <a:round/>
+                      <a:headEnd type="none" w="med" len="med"/>
+                      <a:tailEnd type="none" w="med" len="med"/>
+                    </a:lnR>
+                    <a:lnT w="12700" cap="flat" cmpd="sng" algn="ctr">
+                      <a:solidFill>
+                        <a:srgbClr val="D5DBE3"/>
+                      </a:solidFill>
+                      <a:prstDash val="solid"/>
+                      <a:round/>
+                      <a:headEnd type="none" w="med" len="med"/>
+                      <a:tailEnd type="none" w="med" len="med"/>
+                    </a:lnT>
+                    <a:lnB w="12700" cap="flat" cmpd="sng" algn="ctr">
+                      <a:solidFill>
+                        <a:srgbClr val="D5DBE3"/>
+                      </a:solidFill>
+                      <a:prstDash val="solid"/>
+                      <a:round/>
+                      <a:headEnd type="none" w="med" len="med"/>
+                      <a:tailEnd type="none" w="med" len="med"/>
+                    </a:lnB>
+                  </a:tcPr>
+                </a:tc>
+              </a:tr>
+            </a:tbl>
+          </a:graphicData>
+        </a:graphic>
+      </p:graphicFrame>
+      <p:sp>
+        <p:nvSpPr>
+          <p:cNvPr id="7" name="Shape 3"/>
+          <p:cNvSpPr/>
+          <p:nvPr/>
+        </p:nvSpPr>
+        <p:spPr>
+          <a:xfrm>
+            <a:off x="548640" y="4572000"/>
+            <a:ext cx="11094415" cy="1554480"/>
+          </a:xfrm>
+          <a:prstGeom prst="roundRect">
+            <a:avLst>
+              <a:gd name="adj" fmla="val 4706"/>
+            </a:avLst>
+          </a:prstGeom>
+          <a:solidFill>
+            <a:srgbClr val="F1F3F6"/>
+          </a:solidFill>
+          <a:ln w="12700">
+            <a:solidFill>
+              <a:srgbClr val="F1F3F6"/>
+            </a:solidFill>
+            <a:prstDash val="solid"/>
+          </a:ln>
+        </p:spPr>
+      </p:sp>
+      <p:sp>
+        <p:nvSpPr>
+          <p:cNvPr id="8" name="Text 4"/>
+          <p:cNvSpPr txBox="1"/>
+          <p:nvPr/>
+        </p:nvSpPr>
+        <p:spPr>
+          <a:xfrm>
+            <a:off x="822960" y="4663440"/>
+            <a:ext cx="10545775" cy="1371600"/>
+          </a:xfrm>
+          <a:prstGeom prst="rect">
+            <a:avLst/>
+          </a:prstGeom>
+          <a:noFill/>
+          <a:ln/>
+        </p:spPr>
+        <p:txBody>
+          <a:bodyPr wrap="square" lIns="0" tIns="0" rIns="0" bIns="0" rtlCol="0" anchor="ctr"/>
+          <a:lstStyle/>
+          <a:p>
+            <a:pPr indent="0" marL="0">
+              <a:spcAft>
+                <a:spcPts val="400"/>
+              </a:spcAft>
+              <a:buNone/>
+            </a:pPr>
+            <a:r>
+              <a:rPr lang="en-US" sz="1300" b="1" dirty="0">
+                <a:solidFill>
+                  <a:srgbClr val="1D5BA6"/>
+                </a:solidFill>
+                <a:latin typeface="Microsoft YaHei" pitchFamily="34" charset="0"/>
+                <a:ea typeface="Microsoft YaHei" pitchFamily="34" charset="-122"/>
+                <a:cs typeface="Microsoft YaHei" pitchFamily="34" charset="-120"/>
+              </a:rPr>
+              <a:t>更省的写法同样有前提：</a:t>
+            </a:r>
+            <a:pPr indent="0" marL="0">
+              <a:spcAft>
+                <a:spcPts val="400"/>
+              </a:spcAft>
+              <a:buNone/>
+            </a:pPr>
+            <a:r>
+              <a:rPr lang="en-US" sz="1300" dirty="0">
+                <a:solidFill>
+                  <a:srgbClr val="1F2A37"/>
+                </a:solidFill>
+                <a:latin typeface="Microsoft YaHei" pitchFamily="34" charset="0"/>
+                <a:ea typeface="Microsoft YaHei" pitchFamily="34" charset="-122"/>
+                <a:cs typeface="Microsoft YaHei" pitchFamily="34" charset="-120"/>
+              </a:rPr>
+              <a:t>日期键范围等价于维度连接，只在日期键按月连续时成立。这个前提被记为新修订的条件，与粒度、连接、日期条件一样维护；前提被破坏时该修订失效，回到维度连接的写法。</a:t>
+            </a:r>
+            <a:endParaRPr lang="en-US" sz="1300" dirty="0"/>
+          </a:p>
+          <a:p>
+            <a:pPr indent="0" marL="0">
+              <a:spcAft>
+                <a:spcPts val="400"/>
+              </a:spcAft>
+              <a:buNone/>
+            </a:pPr>
+            <a:r>
+              <a:rPr lang="en-US" sz="1300" b="1" dirty="0">
+                <a:solidFill>
+                  <a:srgbClr val="1D5BA6"/>
+                </a:solidFill>
+                <a:latin typeface="Microsoft YaHei" pitchFamily="34" charset="0"/>
+                <a:ea typeface="Microsoft YaHei" pitchFamily="34" charset="-122"/>
+                <a:cs typeface="Microsoft YaHei" pitchFamily="34" charset="-120"/>
+              </a:rPr>
+              <a:t>效率不是靠猜：</a:t>
+            </a:r>
+            <a:pPr indent="0" marL="0">
+              <a:spcAft>
+                <a:spcPts val="400"/>
+              </a:spcAft>
+              <a:buNone/>
+            </a:pPr>
+            <a:r>
+              <a:rPr lang="en-US" sz="1300" dirty="0">
+                <a:solidFill>
+                  <a:srgbClr val="1F2A37"/>
+                </a:solidFill>
+                <a:latin typeface="Microsoft YaHei" pitchFamily="34" charset="0"/>
+                <a:ea typeface="Microsoft YaHei" pitchFamily="34" charset="-122"/>
+                <a:cs typeface="Microsoft YaHei" pitchFamily="34" charset="-120"/>
+              </a:rPr>
+              <a:t>等价与代价都在同一个快照上按期间配对验证，达不到证据门槛就不发布；发布后所有智能体共享新写法。</a:t>
+            </a:r>
+            <a:endParaRPr lang="en-US" sz="1300" dirty="0"/>
+          </a:p>
+        </p:txBody>
+      </p:sp>
+      <p:sp>
+        <p:nvSpPr>
+          <p:cNvPr id="9" name="Text 5"/>
+          <p:cNvSpPr txBox="1"/>
+          <p:nvPr/>
+        </p:nvSpPr>
+        <p:spPr>
+          <a:xfrm>
+            <a:off x="548640" y="6263640"/>
+            <a:ext cx="10362895" cy="365760"/>
+          </a:xfrm>
+          <a:prstGeom prst="rect">
+            <a:avLst/>
+          </a:prstGeom>
+          <a:noFill/>
+          <a:ln/>
+        </p:spPr>
+        <p:txBody>
+          <a:bodyPr wrap="square" lIns="0" tIns="0" rIns="0" bIns="0" rtlCol="0" anchor="b"/>
+          <a:lstStyle/>
+          <a:p>
+            <a:pPr indent="0" marL="0">
+              <a:buNone/>
+            </a:pPr>
+            <a:r>
+              <a:rPr lang="en-US" sz="1100" dirty="0">
+                <a:solidFill>
+                  <a:srgbClr val="5B6573"/>
+                </a:solidFill>
+                <a:latin typeface="Microsoft YaHei" pitchFamily="34" charset="0"/>
+                <a:ea typeface="Microsoft YaHei" pitchFamily="34" charset="-122"/>
+                <a:cs typeface="Microsoft YaHei" pitchFamily="34" charset="-120"/>
+              </a:rPr>
+              <a:t>记录：noctis results/optimize-test-1791439403141244/report.json（integration_tests::postgres_optimization_revision）。百万行端到端运行（metric-global-opt）进行中，完成后替换数字。</a:t>
+            </a:r>
+            <a:endParaRPr lang="en-US" sz="1100" dirty="0"/>
+          </a:p>
+        </p:txBody>
+      </p:sp>
+      <p:sp>
+        <p:nvSpPr>
+          <p:cNvPr id="25" name="Slide Number Placeholder 0"/>
+          <p:cNvSpPr>
+            <a:spLocks noGrp="1"/>
+          </p:cNvSpPr>
+          <p:nvPr>
+            <p:ph type="sldNum" sz="quarter" idx="4294967295"/>
+          </p:nvPr>
+        </p:nvSpPr>
+        <p:spPr>
+          <a:xfrm>
+            <a:off x="11185855" y="6446520"/>
+            <a:ext cx="457200" cy="274320"/>
+          </a:xfrm>
+          <a:prstGeom prst="rect">
+            <a:avLst/>
+          </a:prstGeom>
+          <a:extLst>
+            <a:ext uri="{C572A759-6A51-4108-AA02-DFA0A04FC94B}">
+              <ma14:wrappingTextBoxFlag xmlns:ma14="http://schemas.microsoft.com/office/mac/drawingml/2011/main" val="0"/>
+            </a:ext>
+          </a:extLst>
+        </p:spPr>
+        <p:txBody>
+          <a:bodyPr/>
+          <a:lstStyle>
+            <a:lvl1pPr>
+              <a:defRPr sz="1000">
+                <a:solidFill>
+                  <a:srgbClr val="5B6573"/>
+                </a:solidFill>
+                <a:latin typeface="Microsoft YaHei"/>
+                <a:ea typeface="Microsoft YaHei"/>
+                <a:cs typeface="Microsoft YaHei"/>
+              </a:defRPr>
+            </a:lvl1pPr>
+          </a:lstStyle>
+          <a:p>
+            <a:pPr algn="r"/>
+            <a:fld id="{F7021451-1387-4CA6-816F-3879F97B5CBC}" type="slidenum">
+              <a:rPr b="0" lang="en-US"/>
+              <a:t>13</a:t>
+            </a:fld>
+            <a:endParaRPr lang="en-US"/>
+          </a:p>
+        </p:txBody>
+      </p:sp>
+    </p:spTree>
+  </p:cSld>
+  <p:clrMapOvr>
+    <a:masterClrMapping/>
+  </p:clrMapOvr>
+</p:sld>
+</file>
+
+<file path=ppt/slides/slide14.xml><?xml version="1.0" encoding="utf-8"?>
+<p:sld xmlns:a="http://schemas.openxmlformats.org/drawingml/2006/main" xmlns:r="http://schemas.openxmlformats.org/officeDocument/2006/relationships" xmlns:p="http://schemas.openxmlformats.org/presentationml/2006/main">
+  <p:cSld name="Slide 14">
+    <p:spTree>
+      <p:nvGrpSpPr>
+        <p:cNvPr id="1" name=""/>
+        <p:cNvGrpSpPr/>
+        <p:nvPr/>
+      </p:nvGrpSpPr>
+      <p:grpSpPr>
+        <a:xfrm>
+          <a:off x="0" y="0"/>
+          <a:ext cx="0" cy="0"/>
+          <a:chOff x="0" y="0"/>
+          <a:chExt cx="0" cy="0"/>
+        </a:xfrm>
+      </p:grpSpPr>
+      <p:sp>
+        <p:nvSpPr>
+          <p:cNvPr id="2" name="Text 0"/>
+          <p:cNvSpPr/>
+          <p:nvPr>
+            <p:ph idx="100" type="title" hasCustomPrompt="1"/>
+          </p:nvPr>
+        </p:nvSpPr>
+        <p:spPr>
+          <a:xfrm>
+            <a:off x="548640" y="274320"/>
+            <a:ext cx="11094415" cy="685800"/>
+          </a:xfrm>
+          <a:prstGeom prst="rect">
+            <a:avLst/>
+          </a:prstGeom>
+          <a:noFill/>
+          <a:ln/>
+        </p:spPr>
+        <p:txBody>
+          <a:bodyPr wrap="square" lIns="0" tIns="0" rIns="0" bIns="0" rtlCol="0" anchor="ctr"/>
+          <a:lstStyle/>
+          <a:p>
+            <a:pPr algn="l" indent="0" marL="0">
+              <a:buNone/>
+            </a:pPr>
+            <a:r>
+              <a:rPr lang="en-US" sz="2800" b="1" dirty="0">
+                <a:solidFill>
+                  <a:srgbClr val="1F2A37"/>
+                </a:solidFill>
+                <a:latin typeface="Microsoft YaHei" pitchFamily="34" charset="0"/>
+                <a:ea typeface="Microsoft YaHei" pitchFamily="34" charset="-122"/>
+                <a:cs typeface="Microsoft YaHei" pitchFamily="34" charset="-120"/>
+              </a:rPr>
               <a:t>实验结果①：端到端（DeepSeek V4.1 Flash，3 次独立运行）</a:t>
             </a:r>
             <a:endParaRPr lang="en-US" sz="2800" dirty="0"/>
@@ -6566,7 +8576,7 @@
       </p:sp>
       <p:graphicFrame>
         <p:nvGraphicFramePr>
-          <p:cNvPr id="14" name="Table 0"/>
+          <p:cNvPr id="15" name="Table 0"/>
           <p:cNvGraphicFramePr>
             <a:graphicFrameLocks noGrp="1"/>
           </p:cNvGraphicFramePr>
@@ -9945,7 +11955,7 @@
             <a:pPr algn="r"/>
             <a:fld id="{F7021451-1387-4CA6-816F-3879F97B5CBC}" type="slidenum">
               <a:rPr b="0" lang="en-US"/>
-              <a:t>13</a:t>
+              <a:t>14</a:t>
             </a:fld>
             <a:endParaRPr lang="en-US"/>
           </a:p>
@@ -9959,9 +11969,9 @@
 </p:sld>
 </file>
 
-<file path=ppt/slides/slide14.xml><?xml version="1.0" encoding="utf-8"?>
+<file path=ppt/slides/slide15.xml><?xml version="1.0" encoding="utf-8"?>
 <p:sld xmlns:a="http://schemas.openxmlformats.org/drawingml/2006/main" xmlns:r="http://schemas.openxmlformats.org/officeDocument/2006/relationships" xmlns:p="http://schemas.openxmlformats.org/presentationml/2006/main">
-  <p:cSld name="Slide 14">
+  <p:cSld name="Slide 15">
     <p:spTree>
       <p:nvGrpSpPr>
         <p:cNvPr id="1" name=""/>
@@ -10019,7 +12029,7 @@
       </p:sp>
       <p:graphicFrame>
         <p:nvGraphicFramePr>
-          <p:cNvPr id="15" name="Table 0"/>
+          <p:cNvPr id="16" name="Table 0"/>
           <p:cNvGraphicFramePr>
             <a:graphicFrameLocks noGrp="1"/>
           </p:cNvGraphicFramePr>
@@ -11511,7 +13521,7 @@
             <a:pPr algn="r"/>
             <a:fld id="{F7021451-1387-4CA6-816F-3879F97B5CBC}" type="slidenum">
               <a:rPr b="0" lang="en-US"/>
-              <a:t>14</a:t>
+              <a:t>15</a:t>
             </a:fld>
             <a:endParaRPr lang="en-US"/>
           </a:p>
@@ -11525,9 +13535,9 @@
 </p:sld>
 </file>
 
-<file path=ppt/slides/slide15.xml><?xml version="1.0" encoding="utf-8"?>
+<file path=ppt/slides/slide16.xml><?xml version="1.0" encoding="utf-8"?>
 <p:sld xmlns:a="http://schemas.openxmlformats.org/drawingml/2006/main" xmlns:r="http://schemas.openxmlformats.org/officeDocument/2006/relationships" xmlns:p="http://schemas.openxmlformats.org/presentationml/2006/main">
-  <p:cSld name="Slide 15">
+  <p:cSld name="Slide 16">
     <p:spTree>
       <p:nvGrpSpPr>
         <p:cNvPr id="1" name=""/>
@@ -11585,7 +13595,7 @@
       </p:sp>
       <p:graphicFrame>
         <p:nvGraphicFramePr>
-          <p:cNvPr id="16" name="Table 0"/>
+          <p:cNvPr id="17" name="Table 0"/>
           <p:cNvGraphicFramePr>
             <a:graphicFrameLocks noGrp="1"/>
           </p:cNvGraphicFramePr>
@@ -13028,7 +15038,7 @@
             <a:pPr algn="r"/>
             <a:fld id="{F7021451-1387-4CA6-816F-3879F97B5CBC}" type="slidenum">
               <a:rPr b="0" lang="en-US"/>
-              <a:t>15</a:t>
+              <a:t>16</a:t>
             </a:fld>
             <a:endParaRPr lang="en-US"/>
           </a:p>

--- a/docs/mavra-system.pptx
+++ b/docs/mavra-system.pptx
@@ -122,54 +122,54 @@
   <p:extLst>
     <p:ext uri="{521415D9-36F7-43E2-AB2F-B90AF26B5E84}">
       <p14:sectionLst xmlns:p14="http://schemas.microsoft.com/office/powerpoint/2010/main">
-        <p14:section name="开场" id="{1e5d74d7-b375-2995-2093-3bc7beb137ab}">
+        <p14:section name="开场" id="{6086e708-c1a2-e223-c3af-61f369c3ae84}">
           <p14:sldIdLst>
             <p14:sldId id="256"/>
           </p14:sldIdLst>
         </p14:section>
-        <p14:section name="问题" id="{78411a1d-68bb-3e73-f465-53d8e43474dd}">
+        <p14:section name="问题" id="{b35f992b-36b4-c29c-e399-e508ed75db97}">
           <p14:sldIdLst>
             <p14:sldId id="257"/>
             <p14:sldId id="258"/>
           </p14:sldIdLst>
         </p14:section>
-        <p14:section name="MAVRA" id="{d3c81382-11f3-a12b-7cf6-9e43ef9717bd}">
+        <p14:section name="MAVRA" id="{010e05b6-7969-f068-9295-805edaad2642}">
           <p14:sldIdLst>
             <p14:sldId id="259"/>
             <p14:sldId id="260"/>
           </p14:sldIdLst>
         </p14:section>
-        <p14:section name="检查什么" id="{4bca11af-35ce-633f-7be2-25d0d3e8bdd4}">
+        <p14:section name="检查什么" id="{b3b05301-0052-804f-c495-a872ca5ee12a}">
           <p14:sldIdLst>
             <p14:sldId id="261"/>
             <p14:sldId id="262"/>
           </p14:sldIdLst>
         </p14:section>
-        <p14:section name="何时检查" id="{7fdb5722-45d4-afd3-7cdd-34ba81208877}">
+        <p14:section name="何时检查" id="{3472df67-0659-149d-7219-aa3210808da2}">
           <p14:sldIdLst>
             <p14:sldId id="263"/>
             <p14:sldId id="264"/>
           </p14:sldIdLst>
         </p14:section>
-        <p14:section name="失败后怎么办" id="{c336b912-ab54-6a67-3b82-e640710e0f03}">
+        <p14:section name="失败后怎么办" id="{7af2de26-2d37-03b9-2104-983d519bd494}">
           <p14:sldIdLst>
             <p14:sldId id="265"/>
             <p14:sldId id="266"/>
           </p14:sldIdLst>
         </p14:section>
-        <p14:section name="真实记录" id="{79bcf0a2-d2c0-93a4-e79c-e05f71e8d402}">
+        <p14:section name="真实记录" id="{3ada33a6-ecea-81f1-443f-8180a937cee1}">
           <p14:sldIdLst>
             <p14:sldId id="267"/>
             <p14:sldId id="268"/>
           </p14:sldIdLst>
         </p14:section>
-        <p14:section name="实验结果" id="{8cfa19e8-2dee-d752-e58e-9520d1f4f736}">
+        <p14:section name="实验结果" id="{40f6a428-c945-72e8-f209-25f659569182}">
           <p14:sldIdLst>
             <p14:sldId id="269"/>
             <p14:sldId id="270"/>
           </p14:sldIdLst>
         </p14:section>
-        <p14:section name="边界与总结" id="{865d3fd3-e479-6c9a-b8fe-f54468a8054c}">
+        <p14:section name="边界与总结" id="{8fc57773-50dd-c368-fb2c-2af94da0ea16}">
           <p14:sldIdLst>
             <p14:sldId id="271"/>
           </p14:sldIdLst>
@@ -930,7 +930,7 @@
           <a:p>
             <a:r>
               <a:rPr lang="en-US" dirty="0"/>
-              <a:t>前面讲的都是“保持正确”。这页讲“变得更省”：常见指标的写法常常有更省的等价形式，比如按期间统计时不连接日期维度，直接按日期键范围过滤。MAVRA 的做法和修复一样严格：候选可以来自规则、模型提议或智能体的成功轨迹；先验证等价——结构合法、新前提成立、学习时快照和当前快照上 14 个样本期间结果全部相同；再验证更省——同一快照内配对做 EXPLAIN ANALYZE，配对差的 95% 区间整体低于 0 且平均省 10% 以上；都通过才作为新修订发布，旧修订宽限可用并通知使用方。右边是集成测试的真实记录：门店营业额改为日期键范围过滤，14 个期间全部一致，执行时间省 14.6%，发布为 r1。关键是最后一句：更省的写法同样有前提，日期键按月连续；它被当作条件维护，前提被破坏时该修订失效。</a:t>
+              <a:t>前面讲的都是“保持正确”。这页讲“变得更省”：常见指标的写法常常有更省的等价形式，比如按期间统计时不连接日期维度，直接按日期键范围过滤。MAVRA 的做法和修复一样严格：候选可以来自规则、模型提议或智能体的成功轨迹；先验证等价——结构合法、新前提成立、学习时快照和当前快照上 14 个样本期间结果全部相同；再验证更省——同一快照内配对做 EXPLAIN ANALYZE，配对差的 95% 区间整体低于 0 且平均省 10% 以上；都通过才作为新修订发布，旧修订宽限可用并通知使用方。右边是百万行端到端实验的真实记录：9 条定义都改为日期键范围过滤，14 个期间全部一致，执行时间省 15.6% 到 36.1%，全部发布为 r1；之后的留出题和 11 种数据变化答对 78/96，和未优化时相同。关键是最后一句：更省的写法同样有前提，日期键按月连续；它被当作条件维护，前提被破坏时该修订失效。</a:t>
             </a:r>
             <a:endParaRPr lang="en-US" dirty="0"/>
           </a:p>
@@ -7422,7 +7422,7 @@
                 <a:ea typeface="Microsoft YaHei" pitchFamily="34" charset="-122"/>
                 <a:cs typeface="Microsoft YaHei" pitchFamily="34" charset="-120"/>
               </a:rPr>
-              <a:t>真实记录：门店营业额（集成测试，store_sales 20 万行）</a:t>
+              <a:t>真实记录：端到端实验的优化轮（store_sales 100 万行）</a:t>
             </a:r>
             <a:endParaRPr lang="en-US" sz="1500" dirty="0"/>
           </a:p>
@@ -7939,7 +7939,7 @@
                           <a:ea typeface="Microsoft YaHei" pitchFamily="34" charset="-122"/>
                           <a:cs typeface="Microsoft YaHei" pitchFamily="34" charset="-120"/>
                         </a:rPr>
-                        <a:t>学习时快照一致；当前快照 14 个期间全部一致</a:t>
+                        <a:t>9 条定义都通过：学习时快照一致；当前快照 14 个期间全部一致</a:t>
                       </a:r>
                       <a:endParaRPr lang="en-US" sz="1200" dirty="0">
                         <a:latin typeface="Microsoft YaHei" charset="0"/>
@@ -8071,7 +8071,7 @@
                           <a:ea typeface="Microsoft YaHei" pitchFamily="34" charset="-122"/>
                           <a:cs typeface="Microsoft YaHei" pitchFamily="34" charset="-120"/>
                         </a:rPr>
-                        <a:t>执行时间 4.69 → 4.01 ms（−14.6%），95% 区间 [−1.10, −0.28] ms</a:t>
+                        <a:t>门店营业额 29.1 → 23.3 ms（−19.8%），95% 区间 [−9.1, −2.5]</a:t>
                       </a:r>
                       <a:endParaRPr lang="en-US" sz="1200" dirty="0">
                         <a:latin typeface="Microsoft YaHei" charset="0"/>
@@ -8092,7 +8092,7 @@
                           <a:ea typeface="Microsoft YaHei" pitchFamily="34" charset="-122"/>
                           <a:cs typeface="Microsoft YaHei" pitchFamily="34" charset="-120"/>
                         </a:rPr>
-                        <a:t>读到的共享块 19,786 → 17,597</a:t>
+                        <a:t>9 条定义省 15.6%–36.1%（退货率 173 → 111 ms）</a:t>
                       </a:r>
                       <a:endParaRPr lang="en-US" sz="1200" dirty="0">
                         <a:latin typeface="Microsoft YaHei" charset="0"/>
@@ -8224,7 +8224,7 @@
                           <a:ea typeface="Microsoft YaHei" pitchFamily="34" charset="-122"/>
                           <a:cs typeface="Microsoft YaHei" pitchFamily="34" charset="-120"/>
                         </a:rPr>
-                        <a:t>r0 → r1</a:t>
+                        <a:t>9 条定义全部 r0 → r1，474 秒</a:t>
                       </a:r>
                       <a:endParaRPr lang="en-US" sz="1200" dirty="0">
                         <a:latin typeface="Microsoft YaHei" charset="0"/>
@@ -8245,7 +8245,7 @@
                           <a:ea typeface="Microsoft YaHei" pitchFamily="34" charset="-122"/>
                           <a:cs typeface="Microsoft YaHei" pitchFamily="34" charset="-120"/>
                         </a:rPr>
-                        <a:t>声明 r0 的查询仍被接受并收到通知；整轮 61 条查询、0.27 秒</a:t>
+                        <a:t>之后留出与 11 种更新 78/96 答对（未优化 77/96）</a:t>
                       </a:r>
                       <a:endParaRPr lang="en-US" sz="1200" dirty="0">
                         <a:latin typeface="Microsoft YaHei" charset="0"/>
@@ -8306,12 +8306,12 @@
         </p:nvSpPr>
         <p:spPr>
           <a:xfrm>
-            <a:off x="548640" y="4572000"/>
-            <a:ext cx="11094415" cy="1554480"/>
+            <a:off x="548640" y="4800600"/>
+            <a:ext cx="11094415" cy="1325880"/>
           </a:xfrm>
           <a:prstGeom prst="roundRect">
             <a:avLst>
-              <a:gd name="adj" fmla="val 4706"/>
+              <a:gd name="adj" fmla="val 5517"/>
             </a:avLst>
           </a:prstGeom>
           <a:solidFill>
@@ -8333,8 +8333,8 @@
         </p:nvSpPr>
         <p:spPr>
           <a:xfrm>
-            <a:off x="822960" y="4663440"/>
-            <a:ext cx="10545775" cy="1371600"/>
+            <a:off x="822960" y="4892040"/>
+            <a:ext cx="10545775" cy="1143000"/>
           </a:xfrm>
           <a:prstGeom prst="rect">
             <a:avLst/>
@@ -8353,7 +8353,7 @@
               <a:buNone/>
             </a:pPr>
             <a:r>
-              <a:rPr lang="en-US" sz="1300" b="1" dirty="0">
+              <a:rPr lang="en-US" sz="1200" b="1" dirty="0">
                 <a:solidFill>
                   <a:srgbClr val="1D5BA6"/>
                 </a:solidFill>
@@ -8370,7 +8370,7 @@
               <a:buNone/>
             </a:pPr>
             <a:r>
-              <a:rPr lang="en-US" sz="1300" dirty="0">
+              <a:rPr lang="en-US" sz="1200" dirty="0">
                 <a:solidFill>
                   <a:srgbClr val="1F2A37"/>
                 </a:solidFill>
@@ -8380,7 +8380,7 @@
               </a:rPr>
               <a:t>日期键范围等价于维度连接，只在日期键按月连续时成立。这个前提被记为新修订的条件，与粒度、连接、日期条件一样维护；前提被破坏时该修订失效，回到维度连接的写法。</a:t>
             </a:r>
-            <a:endParaRPr lang="en-US" sz="1300" dirty="0"/>
+            <a:endParaRPr lang="en-US" sz="1200" dirty="0"/>
           </a:p>
           <a:p>
             <a:pPr indent="0" marL="0">
@@ -8390,7 +8390,7 @@
               <a:buNone/>
             </a:pPr>
             <a:r>
-              <a:rPr lang="en-US" sz="1300" b="1" dirty="0">
+              <a:rPr lang="en-US" sz="1200" b="1" dirty="0">
                 <a:solidFill>
                   <a:srgbClr val="1D5BA6"/>
                 </a:solidFill>
@@ -8407,7 +8407,7 @@
               <a:buNone/>
             </a:pPr>
             <a:r>
-              <a:rPr lang="en-US" sz="1300" dirty="0">
+              <a:rPr lang="en-US" sz="1200" dirty="0">
                 <a:solidFill>
                   <a:srgbClr val="1F2A37"/>
                 </a:solidFill>
@@ -8417,7 +8417,7 @@
               </a:rPr>
               <a:t>等价与代价都在同一个快照上按期间配对验证，达不到证据门槛就不发布；发布后所有智能体共享新写法。</a:t>
             </a:r>
-            <a:endParaRPr lang="en-US" sz="1300" dirty="0"/>
+            <a:endParaRPr lang="en-US" sz="1200" dirty="0"/>
           </a:p>
         </p:txBody>
       </p:sp>
@@ -8454,7 +8454,7 @@
                 <a:ea typeface="Microsoft YaHei" pitchFamily="34" charset="-122"/>
                 <a:cs typeface="Microsoft YaHei" pitchFamily="34" charset="-120"/>
               </a:rPr>
-              <a:t>记录：noctis results/optimize-test-1791439403141244/report.json（integration_tests::postgres_optimization_revision）。百万行端到端运行（metric-global-opt）进行中，完成后替换数字。</a:t>
+              <a:t>记录：noctis results/scen-20261008-opt/metric-1791439498065570（metric-global-opt，DeepSeek V4.1 Flash，第 1 次运行）；对照为 dsv41flash-r1-g3fix--snap。留出题中 15 条用户智能体查询有 9 条采用了新写法。数据为仿 TPC-DS 的合成零售数据（store_sales 100 万行），题目中的年份略去。</a:t>
             </a:r>
             <a:endParaRPr lang="en-US" sz="1100" dirty="0"/>
           </a:p>

--- a/docs/mavra-system.pptx
+++ b/docs/mavra-system.pptx
@@ -122,54 +122,54 @@
   <p:extLst>
     <p:ext uri="{521415D9-36F7-43E2-AB2F-B90AF26B5E84}">
       <p14:sectionLst xmlns:p14="http://schemas.microsoft.com/office/powerpoint/2010/main">
-        <p14:section name="开场" id="{6086e708-c1a2-e223-c3af-61f369c3ae84}">
+        <p14:section name="开场" id="{5d87e9e6-fcbd-42f2-1a09-d1a7b2204704}">
           <p14:sldIdLst>
             <p14:sldId id="256"/>
           </p14:sldIdLst>
         </p14:section>
-        <p14:section name="问题" id="{b35f992b-36b4-c29c-e399-e508ed75db97}">
+        <p14:section name="问题" id="{7ed5be5c-c26f-51ff-82e5-6d992f0d5f6b}">
           <p14:sldIdLst>
             <p14:sldId id="257"/>
             <p14:sldId id="258"/>
           </p14:sldIdLst>
         </p14:section>
-        <p14:section name="MAVRA" id="{010e05b6-7969-f068-9295-805edaad2642}">
+        <p14:section name="MAVRA" id="{3a8a8ac0-265c-6a1d-ad61-2cc7364155cc}">
           <p14:sldIdLst>
             <p14:sldId id="259"/>
             <p14:sldId id="260"/>
           </p14:sldIdLst>
         </p14:section>
-        <p14:section name="检查什么" id="{b3b05301-0052-804f-c495-a872ca5ee12a}">
+        <p14:section name="检查什么" id="{7b1108be-9d37-6a7d-7aaf-50d1af6906de}">
           <p14:sldIdLst>
             <p14:sldId id="261"/>
             <p14:sldId id="262"/>
           </p14:sldIdLst>
         </p14:section>
-        <p14:section name="何时检查" id="{3472df67-0659-149d-7219-aa3210808da2}">
+        <p14:section name="何时检查" id="{e28e9783-00fc-9a76-f106-301f8557d080}">
           <p14:sldIdLst>
             <p14:sldId id="263"/>
             <p14:sldId id="264"/>
           </p14:sldIdLst>
         </p14:section>
-        <p14:section name="失败后怎么办" id="{7af2de26-2d37-03b9-2104-983d519bd494}">
+        <p14:section name="失败后怎么办" id="{70bc1b8d-bdb1-d22e-cad4-d65864ba31ea}">
           <p14:sldIdLst>
             <p14:sldId id="265"/>
             <p14:sldId id="266"/>
           </p14:sldIdLst>
         </p14:section>
-        <p14:section name="真实记录" id="{3ada33a6-ecea-81f1-443f-8180a937cee1}">
+        <p14:section name="真实记录" id="{e89da99d-bc96-28a4-8f86-6bed00d2546b}">
           <p14:sldIdLst>
             <p14:sldId id="267"/>
             <p14:sldId id="268"/>
           </p14:sldIdLst>
         </p14:section>
-        <p14:section name="实验结果" id="{40f6a428-c945-72e8-f209-25f659569182}">
+        <p14:section name="实验结果" id="{0977422d-54ff-ea5b-fa51-05a5a72062a1}">
           <p14:sldIdLst>
             <p14:sldId id="269"/>
             <p14:sldId id="270"/>
           </p14:sldIdLst>
         </p14:section>
-        <p14:section name="边界与总结" id="{8fc57773-50dd-c368-fb2c-2af94da0ea16}">
+        <p14:section name="边界与总结" id="{7aa8c8a6-f413-36f2-ab4e-5fe2e4a884c6}">
           <p14:sldIdLst>
             <p14:sldId id="271"/>
           </p14:sldIdLst>
@@ -754,7 +754,7 @@
           <a:p>
             <a:r>
               <a:rPr lang="en-US" dirty="0"/>
-              <a:t>把前面几页串在一张图上。内置智能体求解“3 月门店营业额”，判定正确、准入检查通过，发布 v1。增量加载：条件仍成立，其他定义复用验证结果，仍为 v1。数据更正：旧行标记为非当前，插入当前行——粒度键唯一不成立，v1 失效，不处理会把新旧版本都算进去。修复搜索只有 ss_is_current = 1 可行；按学习时刻重算 3 月，结果一致，发布 v2。红框是另一种结果：批次重复加载，没有谓词能恢复唯一性，定义失效并通知使用方，等待重新学习。</a:t>
+              <a:t>把前面几页串在一张图上。内置智能体求解“3 月门店营业额”，判定正确、准入检查通过，发布 v1。第 3 步是优化：规则改写把期间谓词改为日期键范围，14 个样本期间结果一致、执行时间省 19.8%，发布 v2；新前提“日期键按月连续”成为 v2 的条件，v1 宽限可用。之后一批销售被更正：旧行标记为非当前，插入当前行——“粒度键唯一”不成立，v2 失效，不处理会把新旧版本都算进去。修复搜索在低基数列上枚举等值谓词，只有“ss_is_current = 1”可行；按学习时刻重算 3 月，结果一致，发布 v3。红框是另一种结果：批次重复加载，没有谓词能恢复唯一性，定义失效并通知使用方，等待重新学习。</a:t>
             </a:r>
             <a:endParaRPr lang="en-US" dirty="0"/>
           </a:p>
@@ -4853,7 +4853,7 @@
                 <a:ea typeface="Microsoft YaHei" pitchFamily="34" charset="-122"/>
                 <a:cs typeface="Microsoft YaHei" pitchFamily="34" charset="-120"/>
               </a:rPr>
-              <a:t>一条定义的生命周期：学习、维护、修复、失效</a:t>
+              <a:t>一条定义的生命周期：学习、优化、维护、修复、失效</a:t>
             </a:r>
             <a:endParaRPr lang="en-US" sz="2800" dirty="0"/>
           </a:p>

--- a/docs/mavra-system.pptx
+++ b/docs/mavra-system.pptx
@@ -21,9 +21,11 @@
     <p:sldId id="269" r:id="rId15"/>
     <p:sldId id="270" r:id="rId16"/>
     <p:sldId id="271" r:id="rId17"/>
+    <p:sldId id="272" r:id="rId18"/>
+    <p:sldId id="273" r:id="rId19"/>
   </p:sldIdLst>
   <p:notesMasterIdLst>
-    <p:notesMasterId r:id="rId18"/>
+    <p:notesMasterId r:id="rId20"/>
   </p:notesMasterIdLst>
   <p:sldSz cx="12192000" cy="6858000"/>
   <p:notesSz cx="6858000" cy="12192000"/>
@@ -122,56 +124,58 @@
   <p:extLst>
     <p:ext uri="{521415D9-36F7-43E2-AB2F-B90AF26B5E84}">
       <p14:sectionLst xmlns:p14="http://schemas.microsoft.com/office/powerpoint/2010/main">
-        <p14:section name="开场" id="{5d87e9e6-fcbd-42f2-1a09-d1a7b2204704}">
+        <p14:section name="开场" id="{76fc17ec-a445-c907-366f-ee2ffe0850af}">
           <p14:sldIdLst>
             <p14:sldId id="256"/>
           </p14:sldIdLst>
         </p14:section>
-        <p14:section name="问题" id="{7ed5be5c-c26f-51ff-82e5-6d992f0d5f6b}">
+        <p14:section name="问题" id="{01dc11cf-cb9e-ee48-51f5-dc6176eed108}">
           <p14:sldIdLst>
             <p14:sldId id="257"/>
             <p14:sldId id="258"/>
           </p14:sldIdLst>
         </p14:section>
-        <p14:section name="MAVRA" id="{3a8a8ac0-265c-6a1d-ad61-2cc7364155cc}">
+        <p14:section name="MAVRA" id="{cd27a8f3-cc7f-af3b-9908-ec796a7dc7c4}">
           <p14:sldIdLst>
             <p14:sldId id="259"/>
             <p14:sldId id="260"/>
+            <p14:sldId id="261"/>
           </p14:sldIdLst>
         </p14:section>
-        <p14:section name="检查什么" id="{7b1108be-9d37-6a7d-7aaf-50d1af6906de}">
+        <p14:section name="检查什么" id="{1fa5b20f-a0a1-d73c-bcd8-5c9968b31794}">
           <p14:sldIdLst>
-            <p14:sldId id="261"/>
             <p14:sldId id="262"/>
+            <p14:sldId id="263"/>
           </p14:sldIdLst>
         </p14:section>
-        <p14:section name="何时检查" id="{e28e9783-00fc-9a76-f106-301f8557d080}">
+        <p14:section name="何时检查" id="{f0160688-0828-956f-324d-c6759759303e}">
           <p14:sldIdLst>
-            <p14:sldId id="263"/>
             <p14:sldId id="264"/>
+            <p14:sldId id="265"/>
           </p14:sldIdLst>
         </p14:section>
-        <p14:section name="失败后怎么办" id="{70bc1b8d-bdb1-d22e-cad4-d65864ba31ea}">
+        <p14:section name="失败后怎么办" id="{274c737f-4a00-1cc6-0036-46b16ebf91ef}">
           <p14:sldIdLst>
-            <p14:sldId id="265"/>
             <p14:sldId id="266"/>
+            <p14:sldId id="267"/>
           </p14:sldIdLst>
         </p14:section>
-        <p14:section name="真实记录" id="{e89da99d-bc96-28a4-8f86-6bed00d2546b}">
+        <p14:section name="真实记录" id="{1d56b105-740c-7577-c65e-8677f93fd818}">
           <p14:sldIdLst>
-            <p14:sldId id="267"/>
             <p14:sldId id="268"/>
-          </p14:sldIdLst>
-        </p14:section>
-        <p14:section name="实验结果" id="{0977422d-54ff-ea5b-fa51-05a5a72062a1}">
-          <p14:sldIdLst>
             <p14:sldId id="269"/>
             <p14:sldId id="270"/>
           </p14:sldIdLst>
         </p14:section>
-        <p14:section name="边界与总结" id="{7aa8c8a6-f413-36f2-ab4e-5fe2e4a884c6}">
+        <p14:section name="实验结果" id="{ae48a27a-11f2-0084-9c66-92abc681d7ef}">
           <p14:sldIdLst>
             <p14:sldId id="271"/>
+            <p14:sldId id="272"/>
+          </p14:sldIdLst>
+        </p14:section>
+        <p14:section name="边界与总结" id="{577771b7-e97c-dfe8-a643-341d4ea71524}">
+          <p14:sldIdLst>
+            <p14:sldId id="273"/>
           </p14:sldIdLst>
         </p14:section>
       </p14:sectionLst>
@@ -666,7 +670,7 @@
           <a:p>
             <a:r>
               <a:rPr lang="en-US" dirty="0"/>
-              <a:t>回到订单 002。MAVRA 发现订单号重复，一行是旧记录，一行是当前记录。它去找一个过滤谓词：只保留 ss_is_current = 1，过滤后订单不再重复，总额 650 元。但不能看到一个像样的条件就用。候选必须满足两件事：过滤后每个键恰好一行；原来的键一个不丢——“只保留金额大于 200”也能去重，但 100 元的订单没了，这不叫修复。还要唯一：如果 is_current 和 is_backup 两个过滤都通过，表结构说不出哪份是业务事实，MAVRA 不擅自选，定义失效，交给人确认。宁可说不知道怎么安全地修，也不猜。修复通过结构检查之后还要考一次试：像换一种解法重做老师判过的那道题，答案必须一样。必须用当初那份数据，因为今天的数据已经变了，当初的 SQL 在上面同样过期，我们实际跑过：按当前数据比，正确的修复会被拒绝。通过后发布 v2，v1 失效。</a:t>
+              <a:t>上方是检索指标定义：名称匹配到“门店营业额”（电子品类的同名定义一并返回，由智能体按口径选择）；比较 store_sales 的表版本（14 → 15）；逐个条件查缓存：“粒度键唯一”电子品类刚验证过，复用；date_dim 未变，复用；“日期键完整性”在版本 15 上没有结果，执行验证并写入缓存；返回有效修订 v2。中间是验证结果缓存：按（条件，表版本）存储，写入者和复用步骤都标出来了。下方是执行 SQL：先检查声明的 v2 是否有效；再在查询快照上验证——期间又有更新，表版本已是 16，两个条件在快照内重新验证并写入缓存；最后在同一快照上执行，得到 1293.3 万。</a:t>
             </a:r>
             <a:endParaRPr lang="en-US" dirty="0"/>
           </a:p>
@@ -754,7 +758,7 @@
           <a:p>
             <a:r>
               <a:rPr lang="en-US" dirty="0"/>
-              <a:t>把前面几页串在一张图上。内置智能体求解“3 月门店营业额”，判定正确、准入检查通过，发布 v1。第 3 步是优化：规则改写把期间谓词改为日期键范围，14 个样本期间结果一致、执行时间省 19.8%，发布 v2；新前提“日期键按月连续”成为 v2 的条件，v1 宽限可用。之后一批销售被更正：旧行标记为非当前，插入当前行——“粒度键唯一”不成立，v2 失效，不处理会把新旧版本都算进去。修复搜索在低基数列上枚举等值谓词，只有“ss_is_current = 1”可行；按学习时刻重算 3 月，结果一致，发布 v3。红框是另一种结果：批次重复加载，没有谓词能恢复唯一性，定义失效并通知使用方，等待重新学习。</a:t>
+              <a:t>回到订单 002。MAVRA 发现订单号重复，一行是旧记录，一行是当前记录。它去找一个过滤谓词：只保留 ss_is_current = 1，过滤后订单不再重复，总额 650 元。但不能看到一个像样的条件就用。候选必须满足两件事：过滤后每个键恰好一行；原来的键一个不丢——“只保留金额大于 200”也能去重，但 100 元的订单没了，这不叫修复。还要唯一：如果 is_current 和 is_backup 两个过滤都通过，表结构说不出哪份是业务事实，MAVRA 不擅自选，定义失效，交给人确认。宁可说不知道怎么安全地修，也不猜。修复通过结构检查之后还要考一次试：像换一种解法重做老师判过的那道题，答案必须一样。必须用当初那份数据，因为今天的数据已经变了，当初的 SQL 在上面同样过期，我们实际跑过：按当前数据比，正确的修复会被拒绝。通过后发布 v2，v1 失效。</a:t>
             </a:r>
             <a:endParaRPr lang="en-US" dirty="0"/>
           </a:p>
@@ -842,7 +846,7 @@
           <a:p>
             <a:r>
               <a:rPr lang="en-US" dirty="0"/>
-              <a:t>把整套系统的合作串起来。三条共享定义——电子品类营业额、门店营业额、退货率——都依赖同一张销售表。数据更正之后：第一个智能体来检索电子品类营业额，MAVRA 发现表版本变了，一验证，106 万行只有 100 万个键，重复了，v1 失效；修复搜索找到唯一可行的谓词，四项检查通过，发布 v2，共 28.7 秒。第二个智能体来检索门店营业额，依赖同一张表、同一个条件、同一个版本，验证结果和修复直接复用，45.8 毫秒。退货率要连接销售表，连接路径现在也要求这个谓词，同样修复。最后相关智能体收到通知，按新修订写 SQL，答案正确。这页的重点不是快，而是一个智能体发现的问题修好后，所有相关智能体得到一致的新知识。</a:t>
+              <a:t>把前面几页串在一张图上。内置智能体求解“3 月门店营业额”，判定正确、准入检查通过，发布 v1。第 3 步是优化：规则改写把期间谓词改为日期键范围，14 个样本期间结果一致、执行时间省 19.8%，发布 v2；新前提“日期键按月连续”成为 v2 的条件，v1 宽限可用。之后一批销售被更正：旧行标记为非当前，插入当前行——“粒度键唯一”不成立，v2 失效，不处理会把新旧版本都算进去。修复搜索在低基数列上枚举等值谓词，只有“ss_is_current = 1”可行；按学习时刻重算 3 月，结果一致，发布 v3。红框是另一种结果：批次重复加载，没有谓词能恢复唯一性，定义失效并通知使用方，等待重新学习。</a:t>
             </a:r>
             <a:endParaRPr lang="en-US" dirty="0"/>
           </a:p>
@@ -930,7 +934,7 @@
           <a:p>
             <a:r>
               <a:rPr lang="en-US" dirty="0"/>
-              <a:t>前面讲的都是“保持正确”。这页讲“变得更省”：常见指标的写法常常有更省的等价形式，比如按期间统计时不连接日期维度，直接按日期键范围过滤。MAVRA 的做法和修复一样严格：候选可以来自规则、模型提议或智能体的成功轨迹；先验证等价——结构合法、新前提成立、学习时快照和当前快照上 14 个样本期间结果全部相同；再验证更省——同一快照内配对做 EXPLAIN ANALYZE，配对差的 95% 区间整体低于 0 且平均省 10% 以上；都通过才作为新修订发布，旧修订宽限可用并通知使用方。右边是百万行端到端实验的真实记录：9 条定义都改为日期键范围过滤，14 个期间全部一致，执行时间省 15.6% 到 36.1%，全部发布为 r1；之后的留出题和 11 种数据变化答对 78/96，和未优化时相同。关键是最后一句：更省的写法同样有前提，日期键按月连续；它被当作条件维护，前提被破坏时该修订失效。</a:t>
+              <a:t>把整套系统的合作串起来。三条共享定义——电子品类营业额、门店营业额、退货率——都依赖同一张销售表。数据更正之后：第一个智能体来检索电子品类营业额，MAVRA 发现表版本变了，一验证，106 万行只有 100 万个键，重复了，v1 失效；修复搜索找到唯一可行的谓词，四项检查通过，发布 v2，共 28.7 秒。第二个智能体来检索门店营业额，依赖同一张表、同一个条件、同一个版本，验证结果和修复直接复用，45.8 毫秒。退货率要连接销售表，连接路径现在也要求这个谓词，同样修复。最后相关智能体收到通知，按新修订写 SQL，答案正确。这页的重点不是快，而是一个智能体发现的问题修好后，所有相关智能体得到一致的新知识。</a:t>
             </a:r>
             <a:endParaRPr lang="en-US" dirty="0"/>
           </a:p>
@@ -1018,7 +1022,7 @@
           <a:p>
             <a:r>
               <a:rPr lang="en-US" dirty="0"/>
-              <a:t>端到端实验：DeepSeek V4.1 Flash 智能体，每种方法独立运行 3 次，15 道留出题，再加 11 种数据更新。共享本身的收益：数据未变时准确率从 49% 到 100%，轮数和 token 都下降——任何共享方法都有这个收益，不是 MAVRA 独有。维护的收益：更新后从 75% 到 81%，5 种破坏性更新下从 59% 到 73%；检索历史示例即使提示它自行验证也只有 63%。MAVRA 与整定义重查答案相同，差异来自各次运行学到的定义不同。两个对照：单位变化不违反任何条件，所有方法同样过期，与命题的范围一致；备份副本下修复有歧义，MAVRA 按规则使定义失效，检索示例碰巧答对，这是如实保留的负结果。这些数字来自我们设定的实验，不是说在所有数据库和模型上都能达到。</a:t>
+              <a:t>这页把前一页的故事换成 MAVRA 真正执行的语句。第 0 步是 ETL 的两条普通 DML：把被更正的销售复制一份标为非当前，再把当前行改成九折；触发器把表版本加一。第 1 步智能体 B 来检索，MAVRA 发现版本变了。第 2 步是粒度条件的实际查询：行数和不同键数，1,065,915 对 1,000,000，不成立，v1 失效。第 3 步修复搜索：从 pg_stats 取低基数列，逐个按值分组数行数和键数；ss_is_current = 1 这一组行数等于键数、也等于全部键数，不丢键；= 0 那组只剩 6.6 万个键，丢键，所以唯一可行。第 4 步四项检查，回归在学习时快照库上执行智能体当初的 SQL 和 v2 的规范 SQL，都是 1357 万，发布 v2，一共 28.7 秒。第 5 步门店营业额复用结论和谓词，45.8 毫秒。第 6 步 B 在下一次工具返回里看到通知，重新检索拿到 v2，SQL 带上过滤并声明 revision 1，答对。</a:t>
             </a:r>
             <a:endParaRPr lang="en-US" dirty="0"/>
           </a:p>
@@ -1106,7 +1110,7 @@
           <a:p>
             <a:r>
               <a:rPr lang="en-US" dirty="0"/>
-              <a:t>系统层实验不用大模型：固定各次运行学到的定义库，只改变维护方式，比较的是机制本身。配对回放：合成数据 1,470 题次，MAVRA 在覆盖的更新下没有错答，99 个错答全部是单位变化这个对照；按模式变更失效有 629 个错答。TPC-DS 上用 99 个查询模板导出的定义，结论一致。同快照验证：并发写入下 11,297 次使用没有一次在违反条件的数据上作答，先检查后执行有 3.8% 到 4.6%。修复的回归基准：按学习时刻比较，修复成功的数量与使用标准答案参照完全相同；按当前数据比较会误拒正确的修复。维护成本：19 条定义时为整定义重查的 14%，因为很多定义依赖同一张表的同一个条件；但按表版本缓存验证查询也能得到同样的节省，所以效率不是本文的贡献，贡献在于检查什么、何时可以依赖检查结果、失败后怎么办。</a:t>
+              <a:t>前面讲的都是“保持正确”。这页讲“变得更省”：常见指标的写法常常有更省的等价形式，比如按期间统计时不连接日期维度，直接按日期键范围过滤。MAVRA 的做法和修复一样严格：候选可以来自规则、模型提议或智能体的成功轨迹；先验证等价——结构合法、新前提成立、学习时快照和当前快照上 14 个样本期间结果全部相同；再验证更省——同一快照内配对做 EXPLAIN ANALYZE，配对差的 95% 区间整体低于 0 且平均省 10% 以上；都通过才作为新修订发布，旧修订宽限可用并通知使用方。右边是百万行端到端实验的真实记录：9 条定义都改为日期键范围过滤，14 个期间全部一致，执行时间省 15.6% 到 36.1%，全部发布为 r1；之后的留出题和 11 种数据变化答对 78/96，和未优化时相同。关键是最后一句：更省的写法同样有前提，日期键按月连续；它被当作条件维护，前提被破坏时该修订失效。</a:t>
             </a:r>
             <a:endParaRPr lang="en-US" dirty="0"/>
           </a:p>
@@ -1194,6 +1198,182 @@
           <a:p>
             <a:r>
               <a:rPr lang="en-US" dirty="0"/>
+              <a:t>端到端实验：DeepSeek V4.1 Flash 智能体，每种方法独立运行 3 次，15 道留出题，再加 11 种数据更新。共享本身的收益：数据未变时准确率从 49% 到 100%，轮数和 token 都下降——任何共享方法都有这个收益，不是 MAVRA 独有。维护的收益：更新后从 75% 到 81%，5 种破坏性更新下从 59% 到 73%；检索历史示例即使提示它自行验证也只有 63%。MAVRA 与整定义重查答案相同，差异来自各次运行学到的定义不同。两个对照：单位变化不违反任何条件，所有方法同样过期，与命题的范围一致；备份副本下修复有歧义，MAVRA 按规则使定义失效，检索示例碰巧答对，这是如实保留的负结果。这些数字来自我们设定的实验，不是说在所有数据库和模型上都能达到。</a:t>
+            </a:r>
+            <a:endParaRPr lang="en-US" dirty="0"/>
+          </a:p>
+        </p:txBody>
+      </p:sp>
+      <p:sp>
+        <p:nvSpPr>
+          <p:cNvPr id="4" name="Slide Number Placeholder 3"/>
+          <p:cNvSpPr>
+            <a:spLocks noGrp="1"/>
+          </p:cNvSpPr>
+          <p:nvPr>
+            <p:ph type="sldNum" sz="quarter" idx="10"/>
+          </p:nvPr>
+        </p:nvSpPr>
+        <p:spPr/>
+        <p:txBody>
+          <a:bodyPr/>
+          <a:lstStyle/>
+          <a:p>
+            <a:fld id="{F7021451-1387-4CA6-816F-3879F97B5CBC}" type="slidenum">
+              <a:rPr lang="en-US"/>
+              <a:t>16</a:t>
+            </a:fld>
+            <a:endParaRPr lang="en-US"/>
+          </a:p>
+        </p:txBody>
+      </p:sp>
+    </p:spTree>
+    <p:extLst>
+      <p:ext uri="{BB962C8B-B14F-4D97-AF65-F5344CB8AC3E}">
+        <p14:creationId xmlns:p14="http://schemas.microsoft.com/office/powerpoint/2010/main" val="1024086991"/>
+      </p:ext>
+    </p:extLst>
+  </p:cSld>
+  <p:clrMapOvr>
+    <a:masterClrMapping/>
+  </p:clrMapOvr>
+</p:notes>
+</file>
+
+<file path=ppt/notesSlides/notesSlide17.xml><?xml version="1.0" encoding="utf-8"?>
+<p:notes xmlns:a="http://schemas.openxmlformats.org/drawingml/2006/main" xmlns:r="http://schemas.openxmlformats.org/officeDocument/2006/relationships" xmlns:p="http://schemas.openxmlformats.org/presentationml/2006/main">
+  <p:cSld>
+    <p:spTree>
+      <p:nvGrpSpPr>
+        <p:cNvPr id="1" name=""/>
+        <p:cNvGrpSpPr/>
+        <p:nvPr/>
+      </p:nvGrpSpPr>
+      <p:grpSpPr>
+        <a:xfrm>
+          <a:off x="0" y="0"/>
+          <a:ext cx="0" cy="0"/>
+          <a:chOff x="0" y="0"/>
+          <a:chExt cx="0" cy="0"/>
+        </a:xfrm>
+      </p:grpSpPr>
+      <p:sp>
+        <p:nvSpPr>
+          <p:cNvPr id="2" name="Slide Image Placeholder 1"/>
+          <p:cNvSpPr>
+            <a:spLocks noGrp="1" noRot="1" noChangeAspect="1"/>
+          </p:cNvSpPr>
+          <p:nvPr>
+            <p:ph type="sldImg"/>
+          </p:nvPr>
+        </p:nvSpPr>
+        <p:spPr/>
+      </p:sp>
+      <p:sp>
+        <p:nvSpPr>
+          <p:cNvPr id="3" name="Notes Placeholder 2"/>
+          <p:cNvSpPr>
+            <a:spLocks noGrp="1"/>
+          </p:cNvSpPr>
+          <p:nvPr>
+            <p:ph type="body" idx="1"/>
+          </p:nvPr>
+        </p:nvSpPr>
+        <p:spPr/>
+        <p:txBody>
+          <a:bodyPr/>
+          <a:lstStyle/>
+          <a:p>
+            <a:r>
+              <a:rPr lang="en-US" dirty="0"/>
+              <a:t>系统层实验不用大模型：固定各次运行学到的定义库，只改变维护方式，比较的是机制本身。配对回放：合成数据 1,470 题次，MAVRA 在覆盖的更新下没有错答，99 个错答全部是单位变化这个对照；按模式变更失效有 629 个错答。TPC-DS 上用 99 个查询模板导出的定义，结论一致。同快照验证：并发写入下 11,297 次使用没有一次在违反条件的数据上作答，先检查后执行有 3.8% 到 4.6%。修复的回归基准：按学习时刻比较，修复成功的数量与使用标准答案参照完全相同；按当前数据比较会误拒正确的修复。维护成本：19 条定义时为整定义重查的 14%，因为很多定义依赖同一张表的同一个条件；但按表版本缓存验证查询也能得到同样的节省，所以效率不是本文的贡献，贡献在于检查什么、何时可以依赖检查结果、失败后怎么办。</a:t>
+            </a:r>
+            <a:endParaRPr lang="en-US" dirty="0"/>
+          </a:p>
+        </p:txBody>
+      </p:sp>
+      <p:sp>
+        <p:nvSpPr>
+          <p:cNvPr id="4" name="Slide Number Placeholder 3"/>
+          <p:cNvSpPr>
+            <a:spLocks noGrp="1"/>
+          </p:cNvSpPr>
+          <p:nvPr>
+            <p:ph type="sldNum" sz="quarter" idx="10"/>
+          </p:nvPr>
+        </p:nvSpPr>
+        <p:spPr/>
+        <p:txBody>
+          <a:bodyPr/>
+          <a:lstStyle/>
+          <a:p>
+            <a:fld id="{F7021451-1387-4CA6-816F-3879F97B5CBC}" type="slidenum">
+              <a:rPr lang="en-US"/>
+              <a:t>17</a:t>
+            </a:fld>
+            <a:endParaRPr lang="en-US"/>
+          </a:p>
+        </p:txBody>
+      </p:sp>
+    </p:spTree>
+    <p:extLst>
+      <p:ext uri="{BB962C8B-B14F-4D97-AF65-F5344CB8AC3E}">
+        <p14:creationId xmlns:p14="http://schemas.microsoft.com/office/powerpoint/2010/main" val="1024086991"/>
+      </p:ext>
+    </p:extLst>
+  </p:cSld>
+  <p:clrMapOvr>
+    <a:masterClrMapping/>
+  </p:clrMapOvr>
+</p:notes>
+</file>
+
+<file path=ppt/notesSlides/notesSlide18.xml><?xml version="1.0" encoding="utf-8"?>
+<p:notes xmlns:a="http://schemas.openxmlformats.org/drawingml/2006/main" xmlns:r="http://schemas.openxmlformats.org/officeDocument/2006/relationships" xmlns:p="http://schemas.openxmlformats.org/presentationml/2006/main">
+  <p:cSld>
+    <p:spTree>
+      <p:nvGrpSpPr>
+        <p:cNvPr id="1" name=""/>
+        <p:cNvGrpSpPr/>
+        <p:nvPr/>
+      </p:nvGrpSpPr>
+      <p:grpSpPr>
+        <a:xfrm>
+          <a:off x="0" y="0"/>
+          <a:ext cx="0" cy="0"/>
+          <a:chOff x="0" y="0"/>
+          <a:chExt cx="0" cy="0"/>
+        </a:xfrm>
+      </p:grpSpPr>
+      <p:sp>
+        <p:nvSpPr>
+          <p:cNvPr id="2" name="Slide Image Placeholder 1"/>
+          <p:cNvSpPr>
+            <a:spLocks noGrp="1" noRot="1" noChangeAspect="1"/>
+          </p:cNvSpPr>
+          <p:nvPr>
+            <p:ph type="sldImg"/>
+          </p:nvPr>
+        </p:nvSpPr>
+        <p:spPr/>
+      </p:sp>
+      <p:sp>
+        <p:nvSpPr>
+          <p:cNvPr id="3" name="Notes Placeholder 2"/>
+          <p:cNvSpPr>
+            <a:spLocks noGrp="1"/>
+          </p:cNvSpPr>
+          <p:nvPr>
+            <p:ph type="body" idx="1"/>
+          </p:nvPr>
+        </p:nvSpPr>
+        <p:spPr/>
+        <p:txBody>
+          <a:bodyPr/>
+          <a:lstStyle/>
+          <a:p>
+            <a:r>
+              <a:rPr lang="en-US" dirty="0"/>
               <a:t>MAVRA 是严谨的管理员，但不是无所不知。能做的：旧记录有唯一的当前标志，检测并修复；整批重复加载，检测但修不了，失效并通知；主表和备份都合理，不擅自选，交给人。做不到的：金额换了单位、日期键指向错误日期，行数和键都没变，四类条件发现不了；智能体没声明用了哪个修订，也不在保证范围内。两点要分清：MAVRA 不判断业务含义对不对，那需要有人给口径；它也不保证每条 SQL 都对，保护的是声明了受管修订的查询。最后三句话：问题——学会的规则会因数据变化而失效，SQL 却不报错；方法——保存规则成立的条件，使用时在实际执行的快照上保证成立；贡献——只有唯一且通过回归测试的修复才发布，否则失效，不让错误知识传播。</a:t>
             </a:r>
             <a:endParaRPr lang="en-US" dirty="0"/>
@@ -1217,7 +1397,7 @@
           <a:p>
             <a:fld id="{F7021451-1387-4CA6-816F-3879F97B5CBC}" type="slidenum">
               <a:rPr lang="en-US"/>
-              <a:t>16</a:t>
+              <a:t>18</a:t>
             </a:fld>
             <a:endParaRPr lang="en-US"/>
           </a:p>
@@ -1634,7 +1814,7 @@
           <a:p>
             <a:r>
               <a:rPr lang="en-US" dirty="0"/>
-              <a:t>一条规则不是学到就直接相信，要走准入流程，像加入竞赛队要审核。内置智能体拿到一道给定业务口径的学习任务，写出 SQL，答案正确。这一步 MAVRA 自己不能凭空知道业务规则对不对：实验里用参考答案，实际公司里由负责这个指标的人确认一次。然后把零散的学习过程整理成一张知识卡，分两部分：给智能体看的“怎么算”，和 MAVRA 自己保管的“什么时候这样算是安全的”——验证条件、学习证据、表版本、使用者。再过七道检查。第七道尤其重要：只凭这张知识卡重新编译出的 SQL 必须得到同样答案，因为别的智能体读到的只有这张卡，原来的智能体心里知道要过滤而卡上没写，后来的智能体就会算错。七道都通过才发布 v1。</a:t>
+              <a:t>这页把“声明”讲清楚。用户智能体先按名称检索，拿到定义的 key 和 revision 以及口径、度量、粒度、注意事项和示例 SQL；它按口径说明选中门店营业额、写出 SQL，然后调用 run_sql，在 metrics 参数里写明这条 SQL 依据的是哪条定义的哪个修订——这就是声明，由智能体自己填，提示词里要求它这样做。MAVRA 据此做三件事：核对这个修订还有效、没被替代；在这条查询自己的快照上验证这个修订的条件；记录溯源，以后这条定义失效时知道通知谁。下面是四种情况的真实回应：修订被修复替代——拒绝并让它重新检索；定义失效——拒绝并给出原因；被更省的修订替代——接受但附通知；没有声明——照常执行，只是不在保证范围内。</a:t>
             </a:r>
             <a:endParaRPr lang="en-US" dirty="0"/>
           </a:p>
@@ -1722,7 +1902,7 @@
           <a:p>
             <a:r>
               <a:rPr lang="en-US" dirty="0"/>
-              <a:t>MAVRA 从定义里推出四类条件。粒度键唯一：每件事情只登记一次，检查行数是否等于不同键的数量，当然要在定义的过滤之下算。连接基数：连接其他表时不能把一行变两行，比如门店表里同一个门店出现两次，一笔 100 元就会被算成 200 元；所以连接“1”那一侧的键必须唯一。日期角色：一个日期键只能连出一个日期，而且要按定义指定的日期，销售日不能和退货日混。日期键完整性：关联不上日期的记录会从按月统计里消失，学习时有 1.03%，允许 0.1 个百分点的容差，突然变成 8% 就不正常。论文的充分性命题说：这四类条件都成立，规范 SQL 就把每笔业务事件恰好计一次。但它不保证一切，比如金额换了单位，行数和键都没变，发现不了——实验里的单位变化就是这个对照。</a:t>
+              <a:t>一条规则不是学到就直接相信，要走准入流程，像加入竞赛队要审核。内置智能体拿到一道给定业务口径的学习任务，写出 SQL，答案正确。这一步 MAVRA 自己不能凭空知道业务规则对不对：实验里用参考答案，实际公司里由负责这个指标的人确认一次。然后把零散的学习过程整理成一张知识卡，分两部分：给智能体看的“怎么算”，和 MAVRA 自己保管的“什么时候这样算是安全的”——验证条件、学习证据、表版本、使用者。再过七道检查。第七道尤其重要：只凭这张知识卡重新编译出的 SQL 必须得到同样答案，因为别的智能体读到的只有这张卡，原来的智能体心里知道要过滤而卡上没写，后来的智能体就会算错。七道都通过才发布 v1。</a:t>
             </a:r>
             <a:endParaRPr lang="en-US" dirty="0"/>
           </a:p>
@@ -1810,7 +1990,7 @@
           <a:p>
             <a:r>
               <a:rPr lang="en-US" dirty="0"/>
-              <a:t>100 个智能体每天都要查营业额，不能每问一次就把几百万行从头检查一遍。两个办法。一是给每张表盖版本章：9 点在版本 10 上验证通过并记下来；10 点另一个智能体来用，版本没变，直接复用；下午 2 点有写入，版本变成 11，旧结论不再适用，等有人用时再重新验证受影响的条件。版本必须可靠：由语句级触发器在写入事务内更新，看到写入就一定看到版本变化；PostgreSQL 自带的修改统计做不到这一点。二是惰性维护：更新后不立即重验所有规则，使用时只验相关的条件。但还有一个最容易被忽视的问题：10:00:00 检查通过，10:00:01 别人插入一条重复记录，10:00:02 执行查询就错了。检查正确不代表使用时还正确。MAVRA 用事务快照解决：在同一个可重复读的只读事务里读版本、验证条件、执行 SQL，相当于给账本拍一张照片，检查和计算都在这张照片上。引理 1 说明什么时候可以复用验证结论。实验里并发写入下 11,297 次使用没有一次在被破坏的数据上作答。</a:t>
+              <a:t>MAVRA 从定义里推出四类条件。粒度键唯一：每件事情只登记一次，检查行数是否等于不同键的数量，当然要在定义的过滤之下算。连接基数：连接其他表时不能把一行变两行，比如门店表里同一个门店出现两次，一笔 100 元就会被算成 200 元；所以连接“1”那一侧的键必须唯一。日期角色：一个日期键只能连出一个日期，而且要按定义指定的日期，销售日不能和退货日混。日期键完整性：关联不上日期的记录会从按月统计里消失，学习时有 1.03%，允许 0.1 个百分点的容差，突然变成 8% 就不正常。论文的充分性命题说：这四类条件都成立，规范 SQL 就把每笔业务事件恰好计一次。但它不保证一切，比如金额换了单位，行数和键都没变，发现不了——实验里的单位变化就是这个对照。</a:t>
             </a:r>
             <a:endParaRPr lang="en-US" dirty="0"/>
           </a:p>
@@ -1898,7 +2078,7 @@
           <a:p>
             <a:r>
               <a:rPr lang="en-US" dirty="0"/>
-              <a:t>上方是检索指标定义：名称匹配到“门店营业额”（电子品类的同名定义一并返回，由智能体按口径选择）；比较 store_sales 的表版本（14 → 15）；逐个条件查缓存：“粒度键唯一”电子品类刚验证过，复用；date_dim 未变，复用；“日期键完整性”在版本 15 上没有结果，执行验证并写入缓存；返回有效修订 v2。中间是验证结果缓存：按（条件，表版本）存储，写入者和复用步骤都标出来了。下方是执行 SQL：先检查声明的 v2 是否有效；再在查询快照上验证——期间又有更新，表版本已是 16，两个条件在快照内重新验证并写入缓存；最后在同一快照上执行，得到 1293.3 万。</a:t>
+              <a:t>100 个智能体每天都要查营业额，不能每问一次就把几百万行从头检查一遍。两个办法。一是给每张表盖版本章：9 点在版本 10 上验证通过并记下来；10 点另一个智能体来用，版本没变，直接复用；下午 2 点有写入，版本变成 11，旧结论不再适用，等有人用时再重新验证受影响的条件。版本必须可靠：由语句级触发器在写入事务内更新，看到写入就一定看到版本变化；PostgreSQL 自带的修改统计做不到这一点。二是惰性维护：更新后不立即重验所有规则，使用时只验相关的条件。但还有一个最容易被忽视的问题：10:00:00 检查通过，10:00:01 别人插入一条重复记录，10:00:02 执行查询就错了。检查正确不代表使用时还正确。MAVRA 用事务快照解决：在同一个可重复读的只读事务里读版本、验证条件、执行 SQL，相当于给账本拍一张照片，检查和计算都在这张照片上。引理 1 说明什么时候可以复用验证结论。实验里并发写入下 11,297 次使用没有一次在被破坏的数据上作答。</a:t>
             </a:r>
             <a:endParaRPr lang="en-US" dirty="0"/>
           </a:p>
@@ -2711,6 +2891,144 @@
                 <a:ea typeface="Microsoft YaHei" pitchFamily="34" charset="-122"/>
                 <a:cs typeface="Microsoft YaHei" pitchFamily="34" charset="-120"/>
               </a:rPr>
+              <a:t>读取与使用：一次请求的处理路径</a:t>
+            </a:r>
+            <a:endParaRPr lang="en-US" sz="2800" dirty="0"/>
+          </a:p>
+        </p:txBody>
+      </p:sp>
+      <p:pic>
+        <p:nvPicPr>
+          <p:cNvPr id="3" name="lookup" descr="/home/zhanhao/mingtai/ppt/agentdb-mid/tools/deck/figures/lookup-zh.png">    </p:cNvPr>
+          <p:cNvPicPr>
+            <a:picLocks noChangeAspect="1"/>
+          </p:cNvPicPr>
+          <p:nvPr/>
+        </p:nvPicPr>
+        <p:blipFill>
+          <a:blip r:embed="rId1"/>
+          <a:stretch>
+            <a:fillRect/>
+          </a:stretch>
+        </p:blipFill>
+        <p:spPr>
+          <a:xfrm>
+            <a:off x="802199" y="1097280"/>
+            <a:ext cx="10587297" cy="5257800"/>
+          </a:xfrm>
+          <a:prstGeom prst="rect">
+            <a:avLst/>
+          </a:prstGeom>
+        </p:spPr>
+      </p:pic>
+      <p:sp>
+        <p:nvSpPr>
+          <p:cNvPr id="25" name="Slide Number Placeholder 0"/>
+          <p:cNvSpPr>
+            <a:spLocks noGrp="1"/>
+          </p:cNvSpPr>
+          <p:nvPr>
+            <p:ph type="sldNum" sz="quarter" idx="4294967295"/>
+          </p:nvPr>
+        </p:nvSpPr>
+        <p:spPr>
+          <a:xfrm>
+            <a:off x="11185855" y="6446520"/>
+            <a:ext cx="457200" cy="274320"/>
+          </a:xfrm>
+          <a:prstGeom prst="rect">
+            <a:avLst/>
+          </a:prstGeom>
+          <a:extLst>
+            <a:ext uri="{C572A759-6A51-4108-AA02-DFA0A04FC94B}">
+              <ma14:wrappingTextBoxFlag xmlns:ma14="http://schemas.microsoft.com/office/mac/drawingml/2011/main" val="0"/>
+            </a:ext>
+          </a:extLst>
+        </p:spPr>
+        <p:txBody>
+          <a:bodyPr/>
+          <a:lstStyle>
+            <a:lvl1pPr>
+              <a:defRPr sz="1000">
+                <a:solidFill>
+                  <a:srgbClr val="5B6573"/>
+                </a:solidFill>
+                <a:latin typeface="Microsoft YaHei"/>
+                <a:ea typeface="Microsoft YaHei"/>
+                <a:cs typeface="Microsoft YaHei"/>
+              </a:defRPr>
+            </a:lvl1pPr>
+          </a:lstStyle>
+          <a:p>
+            <a:pPr algn="r"/>
+            <a:fld id="{F7021451-1387-4CA6-816F-3879F97B5CBC}" type="slidenum">
+              <a:rPr b="0" lang="en-US"/>
+              <a:t>10</a:t>
+            </a:fld>
+            <a:endParaRPr lang="en-US"/>
+          </a:p>
+        </p:txBody>
+      </p:sp>
+    </p:spTree>
+  </p:cSld>
+  <p:clrMapOvr>
+    <a:masterClrMapping/>
+  </p:clrMapOvr>
+</p:sld>
+</file>
+
+<file path=ppt/slides/slide11.xml><?xml version="1.0" encoding="utf-8"?>
+<p:sld xmlns:a="http://schemas.openxmlformats.org/drawingml/2006/main" xmlns:r="http://schemas.openxmlformats.org/officeDocument/2006/relationships" xmlns:p="http://schemas.openxmlformats.org/presentationml/2006/main">
+  <p:cSld name="Slide 11">
+    <p:spTree>
+      <p:nvGrpSpPr>
+        <p:cNvPr id="1" name=""/>
+        <p:cNvGrpSpPr/>
+        <p:nvPr/>
+      </p:nvGrpSpPr>
+      <p:grpSpPr>
+        <a:xfrm>
+          <a:off x="0" y="0"/>
+          <a:ext cx="0" cy="0"/>
+          <a:chOff x="0" y="0"/>
+          <a:chExt cx="0" cy="0"/>
+        </a:xfrm>
+      </p:grpSpPr>
+      <p:sp>
+        <p:nvSpPr>
+          <p:cNvPr id="2" name="Text 0"/>
+          <p:cNvSpPr/>
+          <p:nvPr>
+            <p:ph idx="100" type="title" hasCustomPrompt="1"/>
+          </p:nvPr>
+        </p:nvSpPr>
+        <p:spPr>
+          <a:xfrm>
+            <a:off x="548640" y="274320"/>
+            <a:ext cx="11094415" cy="685800"/>
+          </a:xfrm>
+          <a:prstGeom prst="rect">
+            <a:avLst/>
+          </a:prstGeom>
+          <a:noFill/>
+          <a:ln/>
+        </p:spPr>
+        <p:txBody>
+          <a:bodyPr wrap="square" lIns="0" tIns="0" rIns="0" bIns="0" rtlCol="0" anchor="ctr"/>
+          <a:lstStyle/>
+          <a:p>
+            <a:pPr algn="l" indent="0" marL="0">
+              <a:buNone/>
+            </a:pPr>
+            <a:r>
+              <a:rPr lang="en-US" sz="2800" b="1" dirty="0">
+                <a:solidFill>
+                  <a:srgbClr val="1F2A37"/>
+                </a:solidFill>
+                <a:latin typeface="Microsoft YaHei" pitchFamily="34" charset="0"/>
+                <a:ea typeface="Microsoft YaHei" pitchFamily="34" charset="-122"/>
+                <a:cs typeface="Microsoft YaHei" pitchFamily="34" charset="-120"/>
+              </a:rPr>
               <a:t>检查失败了怎么办：唯一修复，按学习时刻回归，否则失效</a:t>
             </a:r>
             <a:endParaRPr lang="en-US" sz="2800" dirty="0"/>
@@ -2758,7 +3076,7 @@
       </p:sp>
       <p:graphicFrame>
         <p:nvGraphicFramePr>
-          <p:cNvPr id="11" name="Table 0"/>
+          <p:cNvPr id="12" name="Table 0"/>
           <p:cNvGraphicFramePr>
             <a:graphicFrameLocks noGrp="1"/>
           </p:cNvGraphicFramePr>
@@ -3728,7 +4046,7 @@
       </p:sp>
       <p:graphicFrame>
         <p:nvGraphicFramePr>
-          <p:cNvPr id="21" name="Table 1"/>
+          <p:cNvPr id="23" name="Table 1"/>
           <p:cNvGraphicFramePr>
             <a:graphicFrameLocks noGrp="1"/>
           </p:cNvGraphicFramePr>
@@ -4787,7 +5105,7 @@
             <a:pPr algn="r"/>
             <a:fld id="{F7021451-1387-4CA6-816F-3879F97B5CBC}" type="slidenum">
               <a:rPr b="0" lang="en-US"/>
-              <a:t>10</a:t>
+              <a:t>11</a:t>
             </a:fld>
             <a:endParaRPr lang="en-US"/>
           </a:p>
@@ -4801,9 +5119,9 @@
 </p:sld>
 </file>
 
-<file path=ppt/slides/slide11.xml><?xml version="1.0" encoding="utf-8"?>
+<file path=ppt/slides/slide12.xml><?xml version="1.0" encoding="utf-8"?>
 <p:sld xmlns:a="http://schemas.openxmlformats.org/drawingml/2006/main" xmlns:r="http://schemas.openxmlformats.org/officeDocument/2006/relationships" xmlns:p="http://schemas.openxmlformats.org/presentationml/2006/main">
-  <p:cSld name="Slide 11">
+  <p:cSld name="Slide 12">
     <p:spTree>
       <p:nvGrpSpPr>
         <p:cNvPr id="1" name=""/>
@@ -5011,7 +5329,7 @@
             <a:pPr algn="r"/>
             <a:fld id="{F7021451-1387-4CA6-816F-3879F97B5CBC}" type="slidenum">
               <a:rPr b="0" lang="en-US"/>
-              <a:t>11</a:t>
+              <a:t>12</a:t>
             </a:fld>
             <a:endParaRPr lang="en-US"/>
           </a:p>
@@ -5025,9 +5343,9 @@
 </p:sld>
 </file>
 
-<file path=ppt/slides/slide12.xml><?xml version="1.0" encoding="utf-8"?>
+<file path=ppt/slides/slide13.xml><?xml version="1.0" encoding="utf-8"?>
 <p:sld xmlns:a="http://schemas.openxmlformats.org/drawingml/2006/main" xmlns:r="http://schemas.openxmlformats.org/officeDocument/2006/relationships" xmlns:p="http://schemas.openxmlformats.org/presentationml/2006/main">
-  <p:cSld name="Slide 12">
+  <p:cSld name="Slide 13">
     <p:spTree>
       <p:nvGrpSpPr>
         <p:cNvPr id="1" name=""/>
@@ -5085,7 +5403,7 @@
       </p:sp>
       <p:graphicFrame>
         <p:nvGraphicFramePr>
-          <p:cNvPr id="13" name="Table 0"/>
+          <p:cNvPr id="14" name="Table 0"/>
           <p:cNvGraphicFramePr>
             <a:graphicFrameLocks noGrp="1"/>
           </p:cNvGraphicFramePr>
@@ -6582,7 +6900,7 @@
             <a:pPr algn="r"/>
             <a:fld id="{F7021451-1387-4CA6-816F-3879F97B5CBC}" type="slidenum">
               <a:rPr b="0" lang="en-US"/>
-              <a:t>12</a:t>
+              <a:t>13</a:t>
             </a:fld>
             <a:endParaRPr lang="en-US"/>
           </a:p>
@@ -6596,9 +6914,2438 @@
 </p:sld>
 </file>
 
-<file path=ppt/slides/slide13.xml><?xml version="1.0" encoding="utf-8"?>
+<file path=ppt/slides/slide14.xml><?xml version="1.0" encoding="utf-8"?>
 <p:sld xmlns:a="http://schemas.openxmlformats.org/drawingml/2006/main" xmlns:r="http://schemas.openxmlformats.org/officeDocument/2006/relationships" xmlns:p="http://schemas.openxmlformats.org/presentationml/2006/main">
-  <p:cSld name="Slide 13">
+  <p:cSld name="Slide 14">
+    <p:spTree>
+      <p:nvGrpSpPr>
+        <p:cNvPr id="1" name=""/>
+        <p:cNvGrpSpPr/>
+        <p:nvPr/>
+      </p:nvGrpSpPr>
+      <p:grpSpPr>
+        <a:xfrm>
+          <a:off x="0" y="0"/>
+          <a:ext cx="0" cy="0"/>
+          <a:chOff x="0" y="0"/>
+          <a:chExt cx="0" cy="0"/>
+        </a:xfrm>
+      </p:grpSpPr>
+      <p:sp>
+        <p:nvSpPr>
+          <p:cNvPr id="2" name="Text 0"/>
+          <p:cNvSpPr/>
+          <p:nvPr>
+            <p:ph idx="100" type="title" hasCustomPrompt="1"/>
+          </p:nvPr>
+        </p:nvSpPr>
+        <p:spPr>
+          <a:xfrm>
+            <a:off x="548640" y="274320"/>
+            <a:ext cx="11094415" cy="685800"/>
+          </a:xfrm>
+          <a:prstGeom prst="rect">
+            <a:avLst/>
+          </a:prstGeom>
+          <a:noFill/>
+          <a:ln/>
+        </p:spPr>
+        <p:txBody>
+          <a:bodyPr wrap="square" lIns="0" tIns="0" rIns="0" bIns="0" rtlCol="0" anchor="ctr"/>
+          <a:lstStyle/>
+          <a:p>
+            <a:pPr algn="l" indent="0" marL="0">
+              <a:buNone/>
+            </a:pPr>
+            <a:r>
+              <a:rPr lang="en-US" sz="2800" b="1" dirty="0">
+                <a:solidFill>
+                  <a:srgbClr val="1F2A37"/>
+                </a:solidFill>
+                <a:latin typeface="Microsoft YaHei" pitchFamily="34" charset="0"/>
+                <a:ea typeface="Microsoft YaHei" pitchFamily="34" charset="-122"/>
+                <a:cs typeface="Microsoft YaHei" pitchFamily="34" charset="-120"/>
+              </a:rPr>
+              <a:t>数据更正之后，MAVRA 实际执行了什么（真实 SQL 与记录）</a:t>
+            </a:r>
+            <a:endParaRPr lang="en-US" sz="2800" dirty="0"/>
+          </a:p>
+        </p:txBody>
+      </p:sp>
+      <p:graphicFrame>
+        <p:nvGraphicFramePr>
+          <p:cNvPr id="15" name="Table 0"/>
+          <p:cNvGraphicFramePr>
+            <a:graphicFrameLocks noGrp="1"/>
+          </p:cNvGraphicFramePr>
+          <p:nvPr>
+            <p:extLst>
+              <p:ext uri="{D42A27DB-BD31-4B8C-83A1-F6EECF244321}">
+                <p14:modId xmlns:p14="http://schemas.microsoft.com/office/powerpoint/2010/main" val="1579011935"/>
+              </p:ext>
+            </p:extLst>
+          </p:nvPr>
+        </p:nvGraphicFramePr>
+        <p:xfrm>
+          <a:off x="548640" y="1097280"/>
+          <a:ext cx="11094415" cy="914400"/>
+        </p:xfrm>
+        <a:graphic>
+          <a:graphicData uri="http://schemas.openxmlformats.org/drawingml/2006/table">
+            <a:tbl>
+              <a:tblPr/>
+              <a:tblGrid>
+                <a:gridCol w="365760"/>
+                <a:gridCol w="1097280"/>
+                <a:gridCol w="6858000"/>
+                <a:gridCol w="2773375"/>
+              </a:tblGrid>
+              <a:tr h="0">
+                <a:tc>
+                  <a:txBody>
+                    <a:bodyPr/>
+                    <a:lstStyle/>
+                    <a:p>
+                      <a:pPr indent="0" marL="0">
+                        <a:buNone/>
+                      </a:pPr>
+                      <a:endParaRPr lang="en-US" sz="1100" dirty="0">
+                        <a:latin typeface="Microsoft YaHei" charset="0"/>
+                        <a:ea typeface="Microsoft YaHei" charset="0"/>
+                        <a:cs typeface="Microsoft YaHei" charset="0"/>
+                      </a:endParaRPr>
+                    </a:p>
+                  </a:txBody>
+                  <a:tcPr marL="91440" marR="91440" marT="54864" marB="54864" anchor="ctr">
+                    <a:lnL w="12700" cap="flat" cmpd="sng" algn="ctr">
+                      <a:solidFill>
+                        <a:srgbClr val="D5DBE3"/>
+                      </a:solidFill>
+                      <a:prstDash val="solid"/>
+                      <a:round/>
+                      <a:headEnd type="none" w="med" len="med"/>
+                      <a:tailEnd type="none" w="med" len="med"/>
+                    </a:lnL>
+                    <a:lnR w="12700" cap="flat" cmpd="sng" algn="ctr">
+                      <a:solidFill>
+                        <a:srgbClr val="D5DBE3"/>
+                      </a:solidFill>
+                      <a:prstDash val="solid"/>
+                      <a:round/>
+                      <a:headEnd type="none" w="med" len="med"/>
+                      <a:tailEnd type="none" w="med" len="med"/>
+                    </a:lnR>
+                    <a:lnT w="12700" cap="flat" cmpd="sng" algn="ctr">
+                      <a:solidFill>
+                        <a:srgbClr val="D5DBE3"/>
+                      </a:solidFill>
+                      <a:prstDash val="solid"/>
+                      <a:round/>
+                      <a:headEnd type="none" w="med" len="med"/>
+                      <a:tailEnd type="none" w="med" len="med"/>
+                    </a:lnT>
+                    <a:lnB w="12700" cap="flat" cmpd="sng" algn="ctr">
+                      <a:solidFill>
+                        <a:srgbClr val="D5DBE3"/>
+                      </a:solidFill>
+                      <a:prstDash val="solid"/>
+                      <a:round/>
+                      <a:headEnd type="none" w="med" len="med"/>
+                      <a:tailEnd type="none" w="med" len="med"/>
+                    </a:lnB>
+                    <a:solidFill>
+                      <a:srgbClr val="F1F3F6"/>
+                    </a:solidFill>
+                  </a:tcPr>
+                </a:tc>
+                <a:tc>
+                  <a:txBody>
+                    <a:bodyPr/>
+                    <a:lstStyle/>
+                    <a:p>
+                      <a:pPr indent="0" marL="0">
+                        <a:buNone/>
+                      </a:pPr>
+                      <a:r>
+                        <a:rPr lang="en-US" sz="1100" b="1" dirty="0">
+                          <a:solidFill>
+                            <a:srgbClr val="1F2A37"/>
+                          </a:solidFill>
+                          <a:latin typeface="Microsoft YaHei" pitchFamily="34" charset="0"/>
+                          <a:ea typeface="Microsoft YaHei" pitchFamily="34" charset="-122"/>
+                          <a:cs typeface="Microsoft YaHei" pitchFamily="34" charset="-120"/>
+                        </a:rPr>
+                        <a:t>谁</a:t>
+                      </a:r>
+                      <a:endParaRPr lang="en-US" sz="1100" dirty="0">
+                        <a:latin typeface="Microsoft YaHei" charset="0"/>
+                        <a:ea typeface="Microsoft YaHei" charset="0"/>
+                        <a:cs typeface="Microsoft YaHei" charset="0"/>
+                      </a:endParaRPr>
+                    </a:p>
+                  </a:txBody>
+                  <a:tcPr marL="91440" marR="91440" marT="54864" marB="54864" anchor="ctr">
+                    <a:lnL w="12700" cap="flat" cmpd="sng" algn="ctr">
+                      <a:solidFill>
+                        <a:srgbClr val="D5DBE3"/>
+                      </a:solidFill>
+                      <a:prstDash val="solid"/>
+                      <a:round/>
+                      <a:headEnd type="none" w="med" len="med"/>
+                      <a:tailEnd type="none" w="med" len="med"/>
+                    </a:lnL>
+                    <a:lnR w="12700" cap="flat" cmpd="sng" algn="ctr">
+                      <a:solidFill>
+                        <a:srgbClr val="D5DBE3"/>
+                      </a:solidFill>
+                      <a:prstDash val="solid"/>
+                      <a:round/>
+                      <a:headEnd type="none" w="med" len="med"/>
+                      <a:tailEnd type="none" w="med" len="med"/>
+                    </a:lnR>
+                    <a:lnT w="12700" cap="flat" cmpd="sng" algn="ctr">
+                      <a:solidFill>
+                        <a:srgbClr val="D5DBE3"/>
+                      </a:solidFill>
+                      <a:prstDash val="solid"/>
+                      <a:round/>
+                      <a:headEnd type="none" w="med" len="med"/>
+                      <a:tailEnd type="none" w="med" len="med"/>
+                    </a:lnT>
+                    <a:lnB w="12700" cap="flat" cmpd="sng" algn="ctr">
+                      <a:solidFill>
+                        <a:srgbClr val="D5DBE3"/>
+                      </a:solidFill>
+                      <a:prstDash val="solid"/>
+                      <a:round/>
+                      <a:headEnd type="none" w="med" len="med"/>
+                      <a:tailEnd type="none" w="med" len="med"/>
+                    </a:lnB>
+                    <a:solidFill>
+                      <a:srgbClr val="F1F3F6"/>
+                    </a:solidFill>
+                  </a:tcPr>
+                </a:tc>
+                <a:tc>
+                  <a:txBody>
+                    <a:bodyPr/>
+                    <a:lstStyle/>
+                    <a:p>
+                      <a:pPr indent="0" marL="0">
+                        <a:buNone/>
+                      </a:pPr>
+                      <a:r>
+                        <a:rPr lang="en-US" sz="1100" b="1" dirty="0">
+                          <a:solidFill>
+                            <a:srgbClr val="1F2A37"/>
+                          </a:solidFill>
+                          <a:latin typeface="Microsoft YaHei" pitchFamily="34" charset="0"/>
+                          <a:ea typeface="Microsoft YaHei" pitchFamily="34" charset="-122"/>
+                          <a:cs typeface="Microsoft YaHei" pitchFamily="34" charset="-120"/>
+                        </a:rPr>
+                        <a:t>实际执行</a:t>
+                      </a:r>
+                      <a:endParaRPr lang="en-US" sz="1100" dirty="0">
+                        <a:latin typeface="Microsoft YaHei" charset="0"/>
+                        <a:ea typeface="Microsoft YaHei" charset="0"/>
+                        <a:cs typeface="Microsoft YaHei" charset="0"/>
+                      </a:endParaRPr>
+                    </a:p>
+                  </a:txBody>
+                  <a:tcPr marL="91440" marR="91440" marT="54864" marB="54864" anchor="ctr">
+                    <a:lnL w="12700" cap="flat" cmpd="sng" algn="ctr">
+                      <a:solidFill>
+                        <a:srgbClr val="D5DBE3"/>
+                      </a:solidFill>
+                      <a:prstDash val="solid"/>
+                      <a:round/>
+                      <a:headEnd type="none" w="med" len="med"/>
+                      <a:tailEnd type="none" w="med" len="med"/>
+                    </a:lnL>
+                    <a:lnR w="12700" cap="flat" cmpd="sng" algn="ctr">
+                      <a:solidFill>
+                        <a:srgbClr val="D5DBE3"/>
+                      </a:solidFill>
+                      <a:prstDash val="solid"/>
+                      <a:round/>
+                      <a:headEnd type="none" w="med" len="med"/>
+                      <a:tailEnd type="none" w="med" len="med"/>
+                    </a:lnR>
+                    <a:lnT w="12700" cap="flat" cmpd="sng" algn="ctr">
+                      <a:solidFill>
+                        <a:srgbClr val="D5DBE3"/>
+                      </a:solidFill>
+                      <a:prstDash val="solid"/>
+                      <a:round/>
+                      <a:headEnd type="none" w="med" len="med"/>
+                      <a:tailEnd type="none" w="med" len="med"/>
+                    </a:lnT>
+                    <a:lnB w="12700" cap="flat" cmpd="sng" algn="ctr">
+                      <a:solidFill>
+                        <a:srgbClr val="D5DBE3"/>
+                      </a:solidFill>
+                      <a:prstDash val="solid"/>
+                      <a:round/>
+                      <a:headEnd type="none" w="med" len="med"/>
+                      <a:tailEnd type="none" w="med" len="med"/>
+                    </a:lnB>
+                    <a:solidFill>
+                      <a:srgbClr val="F1F3F6"/>
+                    </a:solidFill>
+                  </a:tcPr>
+                </a:tc>
+                <a:tc>
+                  <a:txBody>
+                    <a:bodyPr/>
+                    <a:lstStyle/>
+                    <a:p>
+                      <a:pPr indent="0" marL="0">
+                        <a:buNone/>
+                      </a:pPr>
+                      <a:r>
+                        <a:rPr lang="en-US" sz="1100" b="1" dirty="0">
+                          <a:solidFill>
+                            <a:srgbClr val="1F2A37"/>
+                          </a:solidFill>
+                          <a:latin typeface="Microsoft YaHei" pitchFamily="34" charset="0"/>
+                          <a:ea typeface="Microsoft YaHei" pitchFamily="34" charset="-122"/>
+                          <a:cs typeface="Microsoft YaHei" pitchFamily="34" charset="-120"/>
+                        </a:rPr>
+                        <a:t>结果 / 耗时</a:t>
+                      </a:r>
+                      <a:endParaRPr lang="en-US" sz="1100" dirty="0">
+                        <a:latin typeface="Microsoft YaHei" charset="0"/>
+                        <a:ea typeface="Microsoft YaHei" charset="0"/>
+                        <a:cs typeface="Microsoft YaHei" charset="0"/>
+                      </a:endParaRPr>
+                    </a:p>
+                  </a:txBody>
+                  <a:tcPr marL="91440" marR="91440" marT="54864" marB="54864" anchor="ctr">
+                    <a:lnL w="12700" cap="flat" cmpd="sng" algn="ctr">
+                      <a:solidFill>
+                        <a:srgbClr val="D5DBE3"/>
+                      </a:solidFill>
+                      <a:prstDash val="solid"/>
+                      <a:round/>
+                      <a:headEnd type="none" w="med" len="med"/>
+                      <a:tailEnd type="none" w="med" len="med"/>
+                    </a:lnL>
+                    <a:lnR w="12700" cap="flat" cmpd="sng" algn="ctr">
+                      <a:solidFill>
+                        <a:srgbClr val="D5DBE3"/>
+                      </a:solidFill>
+                      <a:prstDash val="solid"/>
+                      <a:round/>
+                      <a:headEnd type="none" w="med" len="med"/>
+                      <a:tailEnd type="none" w="med" len="med"/>
+                    </a:lnR>
+                    <a:lnT w="12700" cap="flat" cmpd="sng" algn="ctr">
+                      <a:solidFill>
+                        <a:srgbClr val="D5DBE3"/>
+                      </a:solidFill>
+                      <a:prstDash val="solid"/>
+                      <a:round/>
+                      <a:headEnd type="none" w="med" len="med"/>
+                      <a:tailEnd type="none" w="med" len="med"/>
+                    </a:lnT>
+                    <a:lnB w="12700" cap="flat" cmpd="sng" algn="ctr">
+                      <a:solidFill>
+                        <a:srgbClr val="D5DBE3"/>
+                      </a:solidFill>
+                      <a:prstDash val="solid"/>
+                      <a:round/>
+                      <a:headEnd type="none" w="med" len="med"/>
+                      <a:tailEnd type="none" w="med" len="med"/>
+                    </a:lnB>
+                    <a:solidFill>
+                      <a:srgbClr val="F1F3F6"/>
+                    </a:solidFill>
+                  </a:tcPr>
+                </a:tc>
+              </a:tr>
+              <a:tr h="0">
+                <a:tc>
+                  <a:txBody>
+                    <a:bodyPr/>
+                    <a:lstStyle/>
+                    <a:p>
+                      <a:pPr indent="0" marL="0">
+                        <a:buNone/>
+                      </a:pPr>
+                      <a:r>
+                        <a:rPr lang="en-US" sz="1100" dirty="0">
+                          <a:solidFill>
+                            <a:srgbClr val="1F2A37"/>
+                          </a:solidFill>
+                          <a:latin typeface="Microsoft YaHei" pitchFamily="34" charset="0"/>
+                          <a:ea typeface="Microsoft YaHei" pitchFamily="34" charset="-122"/>
+                          <a:cs typeface="Microsoft YaHei" pitchFamily="34" charset="-120"/>
+                        </a:rPr>
+                        <a:t>0</a:t>
+                      </a:r>
+                      <a:endParaRPr lang="en-US" sz="1100" dirty="0">
+                        <a:latin typeface="Microsoft YaHei" charset="0"/>
+                        <a:ea typeface="Microsoft YaHei" charset="0"/>
+                        <a:cs typeface="Microsoft YaHei" charset="0"/>
+                      </a:endParaRPr>
+                    </a:p>
+                  </a:txBody>
+                  <a:tcPr marL="91440" marR="91440" marT="54864" marB="54864" anchor="ctr">
+                    <a:lnL w="12700" cap="flat" cmpd="sng" algn="ctr">
+                      <a:solidFill>
+                        <a:srgbClr val="D5DBE3"/>
+                      </a:solidFill>
+                      <a:prstDash val="solid"/>
+                      <a:round/>
+                      <a:headEnd type="none" w="med" len="med"/>
+                      <a:tailEnd type="none" w="med" len="med"/>
+                    </a:lnL>
+                    <a:lnR w="12700" cap="flat" cmpd="sng" algn="ctr">
+                      <a:solidFill>
+                        <a:srgbClr val="D5DBE3"/>
+                      </a:solidFill>
+                      <a:prstDash val="solid"/>
+                      <a:round/>
+                      <a:headEnd type="none" w="med" len="med"/>
+                      <a:tailEnd type="none" w="med" len="med"/>
+                    </a:lnR>
+                    <a:lnT w="12700" cap="flat" cmpd="sng" algn="ctr">
+                      <a:solidFill>
+                        <a:srgbClr val="D5DBE3"/>
+                      </a:solidFill>
+                      <a:prstDash val="solid"/>
+                      <a:round/>
+                      <a:headEnd type="none" w="med" len="med"/>
+                      <a:tailEnd type="none" w="med" len="med"/>
+                    </a:lnT>
+                    <a:lnB w="12700" cap="flat" cmpd="sng" algn="ctr">
+                      <a:solidFill>
+                        <a:srgbClr val="D5DBE3"/>
+                      </a:solidFill>
+                      <a:prstDash val="solid"/>
+                      <a:round/>
+                      <a:headEnd type="none" w="med" len="med"/>
+                      <a:tailEnd type="none" w="med" len="med"/>
+                    </a:lnB>
+                  </a:tcPr>
+                </a:tc>
+                <a:tc>
+                  <a:txBody>
+                    <a:bodyPr/>
+                    <a:lstStyle/>
+                    <a:p>
+                      <a:pPr indent="0" marL="0">
+                        <a:buNone/>
+                      </a:pPr>
+                      <a:r>
+                        <a:rPr lang="en-US" sz="1100" dirty="0">
+                          <a:solidFill>
+                            <a:srgbClr val="1F2A37"/>
+                          </a:solidFill>
+                          <a:latin typeface="Microsoft YaHei" pitchFamily="34" charset="0"/>
+                          <a:ea typeface="Microsoft YaHei" pitchFamily="34" charset="-122"/>
+                          <a:cs typeface="Microsoft YaHei" pitchFamily="34" charset="-120"/>
+                        </a:rPr>
+                        <a:t>ETL</a:t>
+                      </a:r>
+                      <a:endParaRPr lang="en-US" sz="1100" dirty="0">
+                        <a:latin typeface="Microsoft YaHei" charset="0"/>
+                        <a:ea typeface="Microsoft YaHei" charset="0"/>
+                        <a:cs typeface="Microsoft YaHei" charset="0"/>
+                      </a:endParaRPr>
+                    </a:p>
+                  </a:txBody>
+                  <a:tcPr marL="91440" marR="91440" marT="54864" marB="54864" anchor="ctr">
+                    <a:lnL w="12700" cap="flat" cmpd="sng" algn="ctr">
+                      <a:solidFill>
+                        <a:srgbClr val="D5DBE3"/>
+                      </a:solidFill>
+                      <a:prstDash val="solid"/>
+                      <a:round/>
+                      <a:headEnd type="none" w="med" len="med"/>
+                      <a:tailEnd type="none" w="med" len="med"/>
+                    </a:lnL>
+                    <a:lnR w="12700" cap="flat" cmpd="sng" algn="ctr">
+                      <a:solidFill>
+                        <a:srgbClr val="D5DBE3"/>
+                      </a:solidFill>
+                      <a:prstDash val="solid"/>
+                      <a:round/>
+                      <a:headEnd type="none" w="med" len="med"/>
+                      <a:tailEnd type="none" w="med" len="med"/>
+                    </a:lnR>
+                    <a:lnT w="12700" cap="flat" cmpd="sng" algn="ctr">
+                      <a:solidFill>
+                        <a:srgbClr val="D5DBE3"/>
+                      </a:solidFill>
+                      <a:prstDash val="solid"/>
+                      <a:round/>
+                      <a:headEnd type="none" w="med" len="med"/>
+                      <a:tailEnd type="none" w="med" len="med"/>
+                    </a:lnT>
+                    <a:lnB w="12700" cap="flat" cmpd="sng" algn="ctr">
+                      <a:solidFill>
+                        <a:srgbClr val="D5DBE3"/>
+                      </a:solidFill>
+                      <a:prstDash val="solid"/>
+                      <a:round/>
+                      <a:headEnd type="none" w="med" len="med"/>
+                      <a:tailEnd type="none" w="med" len="med"/>
+                    </a:lnB>
+                  </a:tcPr>
+                </a:tc>
+                <a:tc>
+                  <a:txBody>
+                    <a:bodyPr/>
+                    <a:lstStyle/>
+                    <a:p>
+                      <a:pPr indent="0" marL="0">
+                        <a:buNone/>
+                      </a:pPr>
+                      <a:r>
+                        <a:rPr lang="en-US" sz="1000" dirty="0">
+                          <a:solidFill>
+                            <a:srgbClr val="1F2A37"/>
+                          </a:solidFill>
+                          <a:latin typeface="Courier New" pitchFamily="34" charset="0"/>
+                          <a:ea typeface="Courier New" pitchFamily="34" charset="-122"/>
+                          <a:cs typeface="Courier New" pitchFamily="34" charset="-120"/>
+                        </a:rPr>
+                        <a:t>insert into store_sales (…, ss_is_current) select …, 0 from store_sales where ss_ticket_number % 10 = 7 and ss_sold_date_sk &gt;= 367 and ss_is_current = 1;</a:t>
+                      </a:r>
+                      <a:endParaRPr lang="en-US" sz="1000" dirty="0">
+                        <a:latin typeface="Courier New" charset="0"/>
+                        <a:ea typeface="Courier New" charset="0"/>
+                        <a:cs typeface="Courier New" charset="0"/>
+                      </a:endParaRPr>
+                    </a:p>
+                    <a:p>
+                      <a:pPr indent="0" marL="0">
+                        <a:buNone/>
+                      </a:pPr>
+                      <a:r>
+                        <a:rPr lang="en-US" sz="1000" dirty="0">
+                          <a:solidFill>
+                            <a:srgbClr val="1F2A37"/>
+                          </a:solidFill>
+                          <a:latin typeface="Courier New" pitchFamily="34" charset="0"/>
+                          <a:ea typeface="Courier New" pitchFamily="34" charset="-122"/>
+                          <a:cs typeface="Courier New" pitchFamily="34" charset="-120"/>
+                        </a:rPr>
+                        <a:t>update store_sales set ss_net_paid = round(ss_net_paid * 0.9, 2) … where … and ss_is_current = 1</a:t>
+                      </a:r>
+                      <a:endParaRPr lang="en-US" sz="1000" dirty="0">
+                        <a:latin typeface="Courier New" charset="0"/>
+                        <a:ea typeface="Courier New" charset="0"/>
+                        <a:cs typeface="Courier New" charset="0"/>
+                      </a:endParaRPr>
+                    </a:p>
+                  </a:txBody>
+                  <a:tcPr marL="91440" marR="91440" marT="54864" marB="54864" anchor="ctr">
+                    <a:lnL w="12700" cap="flat" cmpd="sng" algn="ctr">
+                      <a:solidFill>
+                        <a:srgbClr val="D5DBE3"/>
+                      </a:solidFill>
+                      <a:prstDash val="solid"/>
+                      <a:round/>
+                      <a:headEnd type="none" w="med" len="med"/>
+                      <a:tailEnd type="none" w="med" len="med"/>
+                    </a:lnL>
+                    <a:lnR w="12700" cap="flat" cmpd="sng" algn="ctr">
+                      <a:solidFill>
+                        <a:srgbClr val="D5DBE3"/>
+                      </a:solidFill>
+                      <a:prstDash val="solid"/>
+                      <a:round/>
+                      <a:headEnd type="none" w="med" len="med"/>
+                      <a:tailEnd type="none" w="med" len="med"/>
+                    </a:lnR>
+                    <a:lnT w="12700" cap="flat" cmpd="sng" algn="ctr">
+                      <a:solidFill>
+                        <a:srgbClr val="D5DBE3"/>
+                      </a:solidFill>
+                      <a:prstDash val="solid"/>
+                      <a:round/>
+                      <a:headEnd type="none" w="med" len="med"/>
+                      <a:tailEnd type="none" w="med" len="med"/>
+                    </a:lnT>
+                    <a:lnB w="12700" cap="flat" cmpd="sng" algn="ctr">
+                      <a:solidFill>
+                        <a:srgbClr val="D5DBE3"/>
+                      </a:solidFill>
+                      <a:prstDash val="solid"/>
+                      <a:round/>
+                      <a:headEnd type="none" w="med" len="med"/>
+                      <a:tailEnd type="none" w="med" len="med"/>
+                    </a:lnB>
+                  </a:tcPr>
+                </a:tc>
+                <a:tc>
+                  <a:txBody>
+                    <a:bodyPr/>
+                    <a:lstStyle/>
+                    <a:p>
+                      <a:pPr indent="0" marL="0">
+                        <a:buNone/>
+                      </a:pPr>
+                      <a:r>
+                        <a:rPr lang="en-US" sz="1100" dirty="0">
+                          <a:solidFill>
+                            <a:srgbClr val="1F2A37"/>
+                          </a:solidFill>
+                          <a:latin typeface="Microsoft YaHei" pitchFamily="34" charset="0"/>
+                          <a:ea typeface="Microsoft YaHei" pitchFamily="34" charset="-122"/>
+                          <a:cs typeface="Microsoft YaHei" pitchFamily="34" charset="-120"/>
+                        </a:rPr>
+                        <a:t>65,915 行；语句级触发器把 store_sales 的表版本 +1</a:t>
+                      </a:r>
+                      <a:endParaRPr lang="en-US" sz="1100" dirty="0">
+                        <a:latin typeface="Microsoft YaHei" charset="0"/>
+                        <a:ea typeface="Microsoft YaHei" charset="0"/>
+                        <a:cs typeface="Microsoft YaHei" charset="0"/>
+                      </a:endParaRPr>
+                    </a:p>
+                  </a:txBody>
+                  <a:tcPr marL="91440" marR="91440" marT="54864" marB="54864" anchor="ctr">
+                    <a:lnL w="12700" cap="flat" cmpd="sng" algn="ctr">
+                      <a:solidFill>
+                        <a:srgbClr val="D5DBE3"/>
+                      </a:solidFill>
+                      <a:prstDash val="solid"/>
+                      <a:round/>
+                      <a:headEnd type="none" w="med" len="med"/>
+                      <a:tailEnd type="none" w="med" len="med"/>
+                    </a:lnL>
+                    <a:lnR w="12700" cap="flat" cmpd="sng" algn="ctr">
+                      <a:solidFill>
+                        <a:srgbClr val="D5DBE3"/>
+                      </a:solidFill>
+                      <a:prstDash val="solid"/>
+                      <a:round/>
+                      <a:headEnd type="none" w="med" len="med"/>
+                      <a:tailEnd type="none" w="med" len="med"/>
+                    </a:lnR>
+                    <a:lnT w="12700" cap="flat" cmpd="sng" algn="ctr">
+                      <a:solidFill>
+                        <a:srgbClr val="D5DBE3"/>
+                      </a:solidFill>
+                      <a:prstDash val="solid"/>
+                      <a:round/>
+                      <a:headEnd type="none" w="med" len="med"/>
+                      <a:tailEnd type="none" w="med" len="med"/>
+                    </a:lnT>
+                    <a:lnB w="12700" cap="flat" cmpd="sng" algn="ctr">
+                      <a:solidFill>
+                        <a:srgbClr val="D5DBE3"/>
+                      </a:solidFill>
+                      <a:prstDash val="solid"/>
+                      <a:round/>
+                      <a:headEnd type="none" w="med" len="med"/>
+                      <a:tailEnd type="none" w="med" len="med"/>
+                    </a:lnB>
+                  </a:tcPr>
+                </a:tc>
+              </a:tr>
+              <a:tr h="0">
+                <a:tc>
+                  <a:txBody>
+                    <a:bodyPr/>
+                    <a:lstStyle/>
+                    <a:p>
+                      <a:pPr indent="0" marL="0">
+                        <a:buNone/>
+                      </a:pPr>
+                      <a:r>
+                        <a:rPr lang="en-US" sz="1100" dirty="0">
+                          <a:solidFill>
+                            <a:srgbClr val="1F2A37"/>
+                          </a:solidFill>
+                          <a:latin typeface="Microsoft YaHei" pitchFamily="34" charset="0"/>
+                          <a:ea typeface="Microsoft YaHei" pitchFamily="34" charset="-122"/>
+                          <a:cs typeface="Microsoft YaHei" pitchFamily="34" charset="-120"/>
+                        </a:rPr>
+                        <a:t>1</a:t>
+                      </a:r>
+                      <a:endParaRPr lang="en-US" sz="1100" dirty="0">
+                        <a:latin typeface="Microsoft YaHei" charset="0"/>
+                        <a:ea typeface="Microsoft YaHei" charset="0"/>
+                        <a:cs typeface="Microsoft YaHei" charset="0"/>
+                      </a:endParaRPr>
+                    </a:p>
+                  </a:txBody>
+                  <a:tcPr marL="91440" marR="91440" marT="54864" marB="54864" anchor="ctr">
+                    <a:lnL w="12700" cap="flat" cmpd="sng" algn="ctr">
+                      <a:solidFill>
+                        <a:srgbClr val="D5DBE3"/>
+                      </a:solidFill>
+                      <a:prstDash val="solid"/>
+                      <a:round/>
+                      <a:headEnd type="none" w="med" len="med"/>
+                      <a:tailEnd type="none" w="med" len="med"/>
+                    </a:lnL>
+                    <a:lnR w="12700" cap="flat" cmpd="sng" algn="ctr">
+                      <a:solidFill>
+                        <a:srgbClr val="D5DBE3"/>
+                      </a:solidFill>
+                      <a:prstDash val="solid"/>
+                      <a:round/>
+                      <a:headEnd type="none" w="med" len="med"/>
+                      <a:tailEnd type="none" w="med" len="med"/>
+                    </a:lnR>
+                    <a:lnT w="12700" cap="flat" cmpd="sng" algn="ctr">
+                      <a:solidFill>
+                        <a:srgbClr val="D5DBE3"/>
+                      </a:solidFill>
+                      <a:prstDash val="solid"/>
+                      <a:round/>
+                      <a:headEnd type="none" w="med" len="med"/>
+                      <a:tailEnd type="none" w="med" len="med"/>
+                    </a:lnT>
+                    <a:lnB w="12700" cap="flat" cmpd="sng" algn="ctr">
+                      <a:solidFill>
+                        <a:srgbClr val="D5DBE3"/>
+                      </a:solidFill>
+                      <a:prstDash val="solid"/>
+                      <a:round/>
+                      <a:headEnd type="none" w="med" len="med"/>
+                      <a:tailEnd type="none" w="med" len="med"/>
+                    </a:lnB>
+                  </a:tcPr>
+                </a:tc>
+                <a:tc>
+                  <a:txBody>
+                    <a:bodyPr/>
+                    <a:lstStyle/>
+                    <a:p>
+                      <a:pPr indent="0" marL="0">
+                        <a:buNone/>
+                      </a:pPr>
+                      <a:r>
+                        <a:rPr lang="en-US" sz="1100" dirty="0">
+                          <a:solidFill>
+                            <a:srgbClr val="1F2A37"/>
+                          </a:solidFill>
+                          <a:latin typeface="Microsoft YaHei" pitchFamily="34" charset="0"/>
+                          <a:ea typeface="Microsoft YaHei" pitchFamily="34" charset="-122"/>
+                          <a:cs typeface="Microsoft YaHei" pitchFamily="34" charset="-120"/>
+                        </a:rPr>
+                        <a:t>智能体 B</a:t>
+                      </a:r>
+                      <a:endParaRPr lang="en-US" sz="1100" dirty="0">
+                        <a:latin typeface="Microsoft YaHei" charset="0"/>
+                        <a:ea typeface="Microsoft YaHei" charset="0"/>
+                        <a:cs typeface="Microsoft YaHei" charset="0"/>
+                      </a:endParaRPr>
+                    </a:p>
+                  </a:txBody>
+                  <a:tcPr marL="91440" marR="91440" marT="54864" marB="54864" anchor="ctr">
+                    <a:lnL w="12700" cap="flat" cmpd="sng" algn="ctr">
+                      <a:solidFill>
+                        <a:srgbClr val="D5DBE3"/>
+                      </a:solidFill>
+                      <a:prstDash val="solid"/>
+                      <a:round/>
+                      <a:headEnd type="none" w="med" len="med"/>
+                      <a:tailEnd type="none" w="med" len="med"/>
+                    </a:lnL>
+                    <a:lnR w="12700" cap="flat" cmpd="sng" algn="ctr">
+                      <a:solidFill>
+                        <a:srgbClr val="D5DBE3"/>
+                      </a:solidFill>
+                      <a:prstDash val="solid"/>
+                      <a:round/>
+                      <a:headEnd type="none" w="med" len="med"/>
+                      <a:tailEnd type="none" w="med" len="med"/>
+                    </a:lnR>
+                    <a:lnT w="12700" cap="flat" cmpd="sng" algn="ctr">
+                      <a:solidFill>
+                        <a:srgbClr val="D5DBE3"/>
+                      </a:solidFill>
+                      <a:prstDash val="solid"/>
+                      <a:round/>
+                      <a:headEnd type="none" w="med" len="med"/>
+                      <a:tailEnd type="none" w="med" len="med"/>
+                    </a:lnT>
+                    <a:lnB w="12700" cap="flat" cmpd="sng" algn="ctr">
+                      <a:solidFill>
+                        <a:srgbClr val="D5DBE3"/>
+                      </a:solidFill>
+                      <a:prstDash val="solid"/>
+                      <a:round/>
+                      <a:headEnd type="none" w="med" len="med"/>
+                      <a:tailEnd type="none" w="med" len="med"/>
+                    </a:lnB>
+                  </a:tcPr>
+                </a:tc>
+                <a:tc>
+                  <a:txBody>
+                    <a:bodyPr/>
+                    <a:lstStyle/>
+                    <a:p>
+                      <a:pPr indent="0" marL="0">
+                        <a:buNone/>
+                      </a:pPr>
+                      <a:r>
+                        <a:rPr lang="en-US" sz="1000" dirty="0">
+                          <a:solidFill>
+                            <a:srgbClr val="1F2A37"/>
+                          </a:solidFill>
+                          <a:latin typeface="Courier New" pitchFamily="34" charset="0"/>
+                          <a:ea typeface="Courier New" pitchFamily="34" charset="-122"/>
+                          <a:cs typeface="Courier New" pitchFamily="34" charset="-120"/>
+                        </a:rPr>
+                        <a:t>find_metric("电子品类门店营业额")</a:t>
+                      </a:r>
+                      <a:endParaRPr lang="en-US" sz="1000" dirty="0">
+                        <a:latin typeface="Courier New" charset="0"/>
+                        <a:ea typeface="Courier New" charset="0"/>
+                        <a:cs typeface="Courier New" charset="0"/>
+                      </a:endParaRPr>
+                    </a:p>
+                  </a:txBody>
+                  <a:tcPr marL="91440" marR="91440" marT="54864" marB="54864" anchor="ctr">
+                    <a:lnL w="12700" cap="flat" cmpd="sng" algn="ctr">
+                      <a:solidFill>
+                        <a:srgbClr val="D5DBE3"/>
+                      </a:solidFill>
+                      <a:prstDash val="solid"/>
+                      <a:round/>
+                      <a:headEnd type="none" w="med" len="med"/>
+                      <a:tailEnd type="none" w="med" len="med"/>
+                    </a:lnL>
+                    <a:lnR w="12700" cap="flat" cmpd="sng" algn="ctr">
+                      <a:solidFill>
+                        <a:srgbClr val="D5DBE3"/>
+                      </a:solidFill>
+                      <a:prstDash val="solid"/>
+                      <a:round/>
+                      <a:headEnd type="none" w="med" len="med"/>
+                      <a:tailEnd type="none" w="med" len="med"/>
+                    </a:lnR>
+                    <a:lnT w="12700" cap="flat" cmpd="sng" algn="ctr">
+                      <a:solidFill>
+                        <a:srgbClr val="D5DBE3"/>
+                      </a:solidFill>
+                      <a:prstDash val="solid"/>
+                      <a:round/>
+                      <a:headEnd type="none" w="med" len="med"/>
+                      <a:tailEnd type="none" w="med" len="med"/>
+                    </a:lnT>
+                    <a:lnB w="12700" cap="flat" cmpd="sng" algn="ctr">
+                      <a:solidFill>
+                        <a:srgbClr val="D5DBE3"/>
+                      </a:solidFill>
+                      <a:prstDash val="solid"/>
+                      <a:round/>
+                      <a:headEnd type="none" w="med" len="med"/>
+                      <a:tailEnd type="none" w="med" len="med"/>
+                    </a:lnB>
+                  </a:tcPr>
+                </a:tc>
+                <a:tc>
+                  <a:txBody>
+                    <a:bodyPr/>
+                    <a:lstStyle/>
+                    <a:p>
+                      <a:pPr indent="0" marL="0">
+                        <a:buNone/>
+                      </a:pPr>
+                      <a:r>
+                        <a:rPr lang="en-US" sz="1100" dirty="0">
+                          <a:solidFill>
+                            <a:srgbClr val="1F2A37"/>
+                          </a:solidFill>
+                          <a:latin typeface="Microsoft YaHei" pitchFamily="34" charset="0"/>
+                          <a:ea typeface="Microsoft YaHei" pitchFamily="34" charset="-122"/>
+                          <a:cs typeface="Microsoft YaHei" pitchFamily="34" charset="-120"/>
+                        </a:rPr>
+                        <a:t>MAVRA 发现 store_sales 版本已变 → 触发维护</a:t>
+                      </a:r>
+                      <a:endParaRPr lang="en-US" sz="1100" dirty="0">
+                        <a:latin typeface="Microsoft YaHei" charset="0"/>
+                        <a:ea typeface="Microsoft YaHei" charset="0"/>
+                        <a:cs typeface="Microsoft YaHei" charset="0"/>
+                      </a:endParaRPr>
+                    </a:p>
+                  </a:txBody>
+                  <a:tcPr marL="91440" marR="91440" marT="54864" marB="54864" anchor="ctr">
+                    <a:lnL w="12700" cap="flat" cmpd="sng" algn="ctr">
+                      <a:solidFill>
+                        <a:srgbClr val="D5DBE3"/>
+                      </a:solidFill>
+                      <a:prstDash val="solid"/>
+                      <a:round/>
+                      <a:headEnd type="none" w="med" len="med"/>
+                      <a:tailEnd type="none" w="med" len="med"/>
+                    </a:lnL>
+                    <a:lnR w="12700" cap="flat" cmpd="sng" algn="ctr">
+                      <a:solidFill>
+                        <a:srgbClr val="D5DBE3"/>
+                      </a:solidFill>
+                      <a:prstDash val="solid"/>
+                      <a:round/>
+                      <a:headEnd type="none" w="med" len="med"/>
+                      <a:tailEnd type="none" w="med" len="med"/>
+                    </a:lnR>
+                    <a:lnT w="12700" cap="flat" cmpd="sng" algn="ctr">
+                      <a:solidFill>
+                        <a:srgbClr val="D5DBE3"/>
+                      </a:solidFill>
+                      <a:prstDash val="solid"/>
+                      <a:round/>
+                      <a:headEnd type="none" w="med" len="med"/>
+                      <a:tailEnd type="none" w="med" len="med"/>
+                    </a:lnT>
+                    <a:lnB w="12700" cap="flat" cmpd="sng" algn="ctr">
+                      <a:solidFill>
+                        <a:srgbClr val="D5DBE3"/>
+                      </a:solidFill>
+                      <a:prstDash val="solid"/>
+                      <a:round/>
+                      <a:headEnd type="none" w="med" len="med"/>
+                      <a:tailEnd type="none" w="med" len="med"/>
+                    </a:lnB>
+                  </a:tcPr>
+                </a:tc>
+              </a:tr>
+              <a:tr h="0">
+                <a:tc>
+                  <a:txBody>
+                    <a:bodyPr/>
+                    <a:lstStyle/>
+                    <a:p>
+                      <a:pPr indent="0" marL="0">
+                        <a:buNone/>
+                      </a:pPr>
+                      <a:r>
+                        <a:rPr lang="en-US" sz="1100" dirty="0">
+                          <a:solidFill>
+                            <a:srgbClr val="1F2A37"/>
+                          </a:solidFill>
+                          <a:latin typeface="Microsoft YaHei" pitchFamily="34" charset="0"/>
+                          <a:ea typeface="Microsoft YaHei" pitchFamily="34" charset="-122"/>
+                          <a:cs typeface="Microsoft YaHei" pitchFamily="34" charset="-120"/>
+                        </a:rPr>
+                        <a:t>2</a:t>
+                      </a:r>
+                      <a:endParaRPr lang="en-US" sz="1100" dirty="0">
+                        <a:latin typeface="Microsoft YaHei" charset="0"/>
+                        <a:ea typeface="Microsoft YaHei" charset="0"/>
+                        <a:cs typeface="Microsoft YaHei" charset="0"/>
+                      </a:endParaRPr>
+                    </a:p>
+                  </a:txBody>
+                  <a:tcPr marL="91440" marR="91440" marT="54864" marB="54864" anchor="ctr">
+                    <a:lnL w="12700" cap="flat" cmpd="sng" algn="ctr">
+                      <a:solidFill>
+                        <a:srgbClr val="D5DBE3"/>
+                      </a:solidFill>
+                      <a:prstDash val="solid"/>
+                      <a:round/>
+                      <a:headEnd type="none" w="med" len="med"/>
+                      <a:tailEnd type="none" w="med" len="med"/>
+                    </a:lnL>
+                    <a:lnR w="12700" cap="flat" cmpd="sng" algn="ctr">
+                      <a:solidFill>
+                        <a:srgbClr val="D5DBE3"/>
+                      </a:solidFill>
+                      <a:prstDash val="solid"/>
+                      <a:round/>
+                      <a:headEnd type="none" w="med" len="med"/>
+                      <a:tailEnd type="none" w="med" len="med"/>
+                    </a:lnR>
+                    <a:lnT w="12700" cap="flat" cmpd="sng" algn="ctr">
+                      <a:solidFill>
+                        <a:srgbClr val="D5DBE3"/>
+                      </a:solidFill>
+                      <a:prstDash val="solid"/>
+                      <a:round/>
+                      <a:headEnd type="none" w="med" len="med"/>
+                      <a:tailEnd type="none" w="med" len="med"/>
+                    </a:lnT>
+                    <a:lnB w="12700" cap="flat" cmpd="sng" algn="ctr">
+                      <a:solidFill>
+                        <a:srgbClr val="D5DBE3"/>
+                      </a:solidFill>
+                      <a:prstDash val="solid"/>
+                      <a:round/>
+                      <a:headEnd type="none" w="med" len="med"/>
+                      <a:tailEnd type="none" w="med" len="med"/>
+                    </a:lnB>
+                  </a:tcPr>
+                </a:tc>
+                <a:tc>
+                  <a:txBody>
+                    <a:bodyPr/>
+                    <a:lstStyle/>
+                    <a:p>
+                      <a:pPr indent="0" marL="0">
+                        <a:buNone/>
+                      </a:pPr>
+                      <a:r>
+                        <a:rPr lang="en-US" sz="1100" dirty="0">
+                          <a:solidFill>
+                            <a:srgbClr val="1F2A37"/>
+                          </a:solidFill>
+                          <a:latin typeface="Microsoft YaHei" pitchFamily="34" charset="0"/>
+                          <a:ea typeface="Microsoft YaHei" pitchFamily="34" charset="-122"/>
+                          <a:cs typeface="Microsoft YaHei" pitchFamily="34" charset="-120"/>
+                        </a:rPr>
+                        <a:t>MAVRA</a:t>
+                      </a:r>
+                      <a:endParaRPr lang="en-US" sz="1100" dirty="0">
+                        <a:latin typeface="Microsoft YaHei" charset="0"/>
+                        <a:ea typeface="Microsoft YaHei" charset="0"/>
+                        <a:cs typeface="Microsoft YaHei" charset="0"/>
+                      </a:endParaRPr>
+                    </a:p>
+                  </a:txBody>
+                  <a:tcPr marL="91440" marR="91440" marT="54864" marB="54864" anchor="ctr">
+                    <a:lnL w="12700" cap="flat" cmpd="sng" algn="ctr">
+                      <a:solidFill>
+                        <a:srgbClr val="D5DBE3"/>
+                      </a:solidFill>
+                      <a:prstDash val="solid"/>
+                      <a:round/>
+                      <a:headEnd type="none" w="med" len="med"/>
+                      <a:tailEnd type="none" w="med" len="med"/>
+                    </a:lnL>
+                    <a:lnR w="12700" cap="flat" cmpd="sng" algn="ctr">
+                      <a:solidFill>
+                        <a:srgbClr val="D5DBE3"/>
+                      </a:solidFill>
+                      <a:prstDash val="solid"/>
+                      <a:round/>
+                      <a:headEnd type="none" w="med" len="med"/>
+                      <a:tailEnd type="none" w="med" len="med"/>
+                    </a:lnR>
+                    <a:lnT w="12700" cap="flat" cmpd="sng" algn="ctr">
+                      <a:solidFill>
+                        <a:srgbClr val="D5DBE3"/>
+                      </a:solidFill>
+                      <a:prstDash val="solid"/>
+                      <a:round/>
+                      <a:headEnd type="none" w="med" len="med"/>
+                      <a:tailEnd type="none" w="med" len="med"/>
+                    </a:lnT>
+                    <a:lnB w="12700" cap="flat" cmpd="sng" algn="ctr">
+                      <a:solidFill>
+                        <a:srgbClr val="D5DBE3"/>
+                      </a:solidFill>
+                      <a:prstDash val="solid"/>
+                      <a:round/>
+                      <a:headEnd type="none" w="med" len="med"/>
+                      <a:tailEnd type="none" w="med" len="med"/>
+                    </a:lnB>
+                  </a:tcPr>
+                </a:tc>
+                <a:tc>
+                  <a:txBody>
+                    <a:bodyPr/>
+                    <a:lstStyle/>
+                    <a:p>
+                      <a:pPr indent="0" marL="0">
+                        <a:buNone/>
+                      </a:pPr>
+                      <a:r>
+                        <a:rPr lang="en-US" sz="1000" dirty="0">
+                          <a:solidFill>
+                            <a:srgbClr val="1F2A37"/>
+                          </a:solidFill>
+                          <a:latin typeface="Courier New" pitchFamily="34" charset="0"/>
+                          <a:ea typeface="Courier New" pitchFamily="34" charset="-122"/>
+                          <a:cs typeface="Courier New" pitchFamily="34" charset="-120"/>
+                        </a:rPr>
+                        <a:t>select count(*) as n_rows, count(distinct (ss_item_sk, ss_ticket_number)) as n_keys from store_sales where ss_item_sk is not null and ss_ticket_number is not null</a:t>
+                      </a:r>
+                      <a:endParaRPr lang="en-US" sz="1000" dirty="0">
+                        <a:latin typeface="Courier New" charset="0"/>
+                        <a:ea typeface="Courier New" charset="0"/>
+                        <a:cs typeface="Courier New" charset="0"/>
+                      </a:endParaRPr>
+                    </a:p>
+                  </a:txBody>
+                  <a:tcPr marL="91440" marR="91440" marT="54864" marB="54864" anchor="ctr">
+                    <a:lnL w="12700" cap="flat" cmpd="sng" algn="ctr">
+                      <a:solidFill>
+                        <a:srgbClr val="D5DBE3"/>
+                      </a:solidFill>
+                      <a:prstDash val="solid"/>
+                      <a:round/>
+                      <a:headEnd type="none" w="med" len="med"/>
+                      <a:tailEnd type="none" w="med" len="med"/>
+                    </a:lnL>
+                    <a:lnR w="12700" cap="flat" cmpd="sng" algn="ctr">
+                      <a:solidFill>
+                        <a:srgbClr val="D5DBE3"/>
+                      </a:solidFill>
+                      <a:prstDash val="solid"/>
+                      <a:round/>
+                      <a:headEnd type="none" w="med" len="med"/>
+                      <a:tailEnd type="none" w="med" len="med"/>
+                    </a:lnR>
+                    <a:lnT w="12700" cap="flat" cmpd="sng" algn="ctr">
+                      <a:solidFill>
+                        <a:srgbClr val="D5DBE3"/>
+                      </a:solidFill>
+                      <a:prstDash val="solid"/>
+                      <a:round/>
+                      <a:headEnd type="none" w="med" len="med"/>
+                      <a:tailEnd type="none" w="med" len="med"/>
+                    </a:lnT>
+                    <a:lnB w="12700" cap="flat" cmpd="sng" algn="ctr">
+                      <a:solidFill>
+                        <a:srgbClr val="D5DBE3"/>
+                      </a:solidFill>
+                      <a:prstDash val="solid"/>
+                      <a:round/>
+                      <a:headEnd type="none" w="med" len="med"/>
+                      <a:tailEnd type="none" w="med" len="med"/>
+                    </a:lnB>
+                  </a:tcPr>
+                </a:tc>
+                <a:tc>
+                  <a:txBody>
+                    <a:bodyPr/>
+                    <a:lstStyle/>
+                    <a:p>
+                      <a:pPr indent="0" marL="0">
+                        <a:buNone/>
+                      </a:pPr>
+                      <a:r>
+                        <a:rPr lang="en-US" sz="1100" b="1" dirty="0">
+                          <a:solidFill>
+                            <a:srgbClr val="B5392A"/>
+                          </a:solidFill>
+                          <a:latin typeface="Microsoft YaHei" pitchFamily="34" charset="0"/>
+                          <a:ea typeface="Microsoft YaHei" pitchFamily="34" charset="-122"/>
+                          <a:cs typeface="Microsoft YaHei" pitchFamily="34" charset="-120"/>
+                        </a:rPr>
+                        <a:t>1,065,915 行 / 1,000,000 键 → 粒度键唯一不成立</a:t>
+                      </a:r>
+                      <a:endParaRPr lang="en-US" sz="1100" dirty="0">
+                        <a:latin typeface="Microsoft YaHei" charset="0"/>
+                        <a:ea typeface="Microsoft YaHei" charset="0"/>
+                        <a:cs typeface="Microsoft YaHei" charset="0"/>
+                      </a:endParaRPr>
+                    </a:p>
+                    <a:p>
+                      <a:pPr indent="0" marL="0">
+                        <a:buNone/>
+                      </a:pPr>
+                      <a:r>
+                        <a:rPr lang="en-US" sz="1100" dirty="0">
+                          <a:solidFill>
+                            <a:srgbClr val="1F2A37"/>
+                          </a:solidFill>
+                          <a:latin typeface="Microsoft YaHei" pitchFamily="34" charset="0"/>
+                          <a:ea typeface="Microsoft YaHei" pitchFamily="34" charset="-122"/>
+                          <a:cs typeface="Microsoft YaHei" pitchFamily="34" charset="-120"/>
+                        </a:rPr>
+                        <a:t>v1 失效（5.5 秒）</a:t>
+                      </a:r>
+                      <a:endParaRPr lang="en-US" sz="1100" dirty="0">
+                        <a:latin typeface="Microsoft YaHei" charset="0"/>
+                        <a:ea typeface="Microsoft YaHei" charset="0"/>
+                        <a:cs typeface="Microsoft YaHei" charset="0"/>
+                      </a:endParaRPr>
+                    </a:p>
+                  </a:txBody>
+                  <a:tcPr marL="91440" marR="91440" marT="54864" marB="54864" anchor="ctr">
+                    <a:lnL w="12700" cap="flat" cmpd="sng" algn="ctr">
+                      <a:solidFill>
+                        <a:srgbClr val="D5DBE3"/>
+                      </a:solidFill>
+                      <a:prstDash val="solid"/>
+                      <a:round/>
+                      <a:headEnd type="none" w="med" len="med"/>
+                      <a:tailEnd type="none" w="med" len="med"/>
+                    </a:lnL>
+                    <a:lnR w="12700" cap="flat" cmpd="sng" algn="ctr">
+                      <a:solidFill>
+                        <a:srgbClr val="D5DBE3"/>
+                      </a:solidFill>
+                      <a:prstDash val="solid"/>
+                      <a:round/>
+                      <a:headEnd type="none" w="med" len="med"/>
+                      <a:tailEnd type="none" w="med" len="med"/>
+                    </a:lnR>
+                    <a:lnT w="12700" cap="flat" cmpd="sng" algn="ctr">
+                      <a:solidFill>
+                        <a:srgbClr val="D5DBE3"/>
+                      </a:solidFill>
+                      <a:prstDash val="solid"/>
+                      <a:round/>
+                      <a:headEnd type="none" w="med" len="med"/>
+                      <a:tailEnd type="none" w="med" len="med"/>
+                    </a:lnT>
+                    <a:lnB w="12700" cap="flat" cmpd="sng" algn="ctr">
+                      <a:solidFill>
+                        <a:srgbClr val="D5DBE3"/>
+                      </a:solidFill>
+                      <a:prstDash val="solid"/>
+                      <a:round/>
+                      <a:headEnd type="none" w="med" len="med"/>
+                      <a:tailEnd type="none" w="med" len="med"/>
+                    </a:lnB>
+                  </a:tcPr>
+                </a:tc>
+              </a:tr>
+              <a:tr h="0">
+                <a:tc>
+                  <a:txBody>
+                    <a:bodyPr/>
+                    <a:lstStyle/>
+                    <a:p>
+                      <a:pPr indent="0" marL="0">
+                        <a:buNone/>
+                      </a:pPr>
+                      <a:r>
+                        <a:rPr lang="en-US" sz="1100" dirty="0">
+                          <a:solidFill>
+                            <a:srgbClr val="1F2A37"/>
+                          </a:solidFill>
+                          <a:latin typeface="Microsoft YaHei" pitchFamily="34" charset="0"/>
+                          <a:ea typeface="Microsoft YaHei" pitchFamily="34" charset="-122"/>
+                          <a:cs typeface="Microsoft YaHei" pitchFamily="34" charset="-120"/>
+                        </a:rPr>
+                        <a:t>3</a:t>
+                      </a:r>
+                      <a:endParaRPr lang="en-US" sz="1100" dirty="0">
+                        <a:latin typeface="Microsoft YaHei" charset="0"/>
+                        <a:ea typeface="Microsoft YaHei" charset="0"/>
+                        <a:cs typeface="Microsoft YaHei" charset="0"/>
+                      </a:endParaRPr>
+                    </a:p>
+                  </a:txBody>
+                  <a:tcPr marL="91440" marR="91440" marT="54864" marB="54864" anchor="ctr">
+                    <a:lnL w="12700" cap="flat" cmpd="sng" algn="ctr">
+                      <a:solidFill>
+                        <a:srgbClr val="D5DBE3"/>
+                      </a:solidFill>
+                      <a:prstDash val="solid"/>
+                      <a:round/>
+                      <a:headEnd type="none" w="med" len="med"/>
+                      <a:tailEnd type="none" w="med" len="med"/>
+                    </a:lnL>
+                    <a:lnR w="12700" cap="flat" cmpd="sng" algn="ctr">
+                      <a:solidFill>
+                        <a:srgbClr val="D5DBE3"/>
+                      </a:solidFill>
+                      <a:prstDash val="solid"/>
+                      <a:round/>
+                      <a:headEnd type="none" w="med" len="med"/>
+                      <a:tailEnd type="none" w="med" len="med"/>
+                    </a:lnR>
+                    <a:lnT w="12700" cap="flat" cmpd="sng" algn="ctr">
+                      <a:solidFill>
+                        <a:srgbClr val="D5DBE3"/>
+                      </a:solidFill>
+                      <a:prstDash val="solid"/>
+                      <a:round/>
+                      <a:headEnd type="none" w="med" len="med"/>
+                      <a:tailEnd type="none" w="med" len="med"/>
+                    </a:lnT>
+                    <a:lnB w="12700" cap="flat" cmpd="sng" algn="ctr">
+                      <a:solidFill>
+                        <a:srgbClr val="D5DBE3"/>
+                      </a:solidFill>
+                      <a:prstDash val="solid"/>
+                      <a:round/>
+                      <a:headEnd type="none" w="med" len="med"/>
+                      <a:tailEnd type="none" w="med" len="med"/>
+                    </a:lnB>
+                  </a:tcPr>
+                </a:tc>
+                <a:tc>
+                  <a:txBody>
+                    <a:bodyPr/>
+                    <a:lstStyle/>
+                    <a:p>
+                      <a:pPr indent="0" marL="0">
+                        <a:buNone/>
+                      </a:pPr>
+                      <a:r>
+                        <a:rPr lang="en-US" sz="1100" dirty="0">
+                          <a:solidFill>
+                            <a:srgbClr val="1F2A37"/>
+                          </a:solidFill>
+                          <a:latin typeface="Microsoft YaHei" pitchFamily="34" charset="0"/>
+                          <a:ea typeface="Microsoft YaHei" pitchFamily="34" charset="-122"/>
+                          <a:cs typeface="Microsoft YaHei" pitchFamily="34" charset="-120"/>
+                        </a:rPr>
+                        <a:t>MAVRA</a:t>
+                      </a:r>
+                      <a:endParaRPr lang="en-US" sz="1100" dirty="0">
+                        <a:latin typeface="Microsoft YaHei" charset="0"/>
+                        <a:ea typeface="Microsoft YaHei" charset="0"/>
+                        <a:cs typeface="Microsoft YaHei" charset="0"/>
+                      </a:endParaRPr>
+                    </a:p>
+                  </a:txBody>
+                  <a:tcPr marL="91440" marR="91440" marT="54864" marB="54864" anchor="ctr">
+                    <a:lnL w="12700" cap="flat" cmpd="sng" algn="ctr">
+                      <a:solidFill>
+                        <a:srgbClr val="D5DBE3"/>
+                      </a:solidFill>
+                      <a:prstDash val="solid"/>
+                      <a:round/>
+                      <a:headEnd type="none" w="med" len="med"/>
+                      <a:tailEnd type="none" w="med" len="med"/>
+                    </a:lnL>
+                    <a:lnR w="12700" cap="flat" cmpd="sng" algn="ctr">
+                      <a:solidFill>
+                        <a:srgbClr val="D5DBE3"/>
+                      </a:solidFill>
+                      <a:prstDash val="solid"/>
+                      <a:round/>
+                      <a:headEnd type="none" w="med" len="med"/>
+                      <a:tailEnd type="none" w="med" len="med"/>
+                    </a:lnR>
+                    <a:lnT w="12700" cap="flat" cmpd="sng" algn="ctr">
+                      <a:solidFill>
+                        <a:srgbClr val="D5DBE3"/>
+                      </a:solidFill>
+                      <a:prstDash val="solid"/>
+                      <a:round/>
+                      <a:headEnd type="none" w="med" len="med"/>
+                      <a:tailEnd type="none" w="med" len="med"/>
+                    </a:lnT>
+                    <a:lnB w="12700" cap="flat" cmpd="sng" algn="ctr">
+                      <a:solidFill>
+                        <a:srgbClr val="D5DBE3"/>
+                      </a:solidFill>
+                      <a:prstDash val="solid"/>
+                      <a:round/>
+                      <a:headEnd type="none" w="med" len="med"/>
+                      <a:tailEnd type="none" w="med" len="med"/>
+                    </a:lnB>
+                  </a:tcPr>
+                </a:tc>
+                <a:tc>
+                  <a:txBody>
+                    <a:bodyPr/>
+                    <a:lstStyle/>
+                    <a:p>
+                      <a:pPr indent="0" marL="0">
+                        <a:buNone/>
+                      </a:pPr>
+                      <a:r>
+                        <a:rPr lang="en-US" sz="1000" dirty="0">
+                          <a:solidFill>
+                            <a:srgbClr val="1F2A37"/>
+                          </a:solidFill>
+                          <a:latin typeface="Courier New" pitchFamily="34" charset="0"/>
+                          <a:ea typeface="Courier New" pitchFamily="34" charset="-122"/>
+                          <a:cs typeface="Courier New" pitchFamily="34" charset="-120"/>
+                        </a:rPr>
+                        <a:t>从 pg_stats 取低基数列，按不同值数升序逐个试：</a:t>
+                      </a:r>
+                      <a:endParaRPr lang="en-US" sz="1000" dirty="0">
+                        <a:latin typeface="Courier New" charset="0"/>
+                        <a:ea typeface="Courier New" charset="0"/>
+                        <a:cs typeface="Courier New" charset="0"/>
+                      </a:endParaRPr>
+                    </a:p>
+                    <a:p>
+                      <a:pPr indent="0" marL="0">
+                        <a:buNone/>
+                      </a:pPr>
+                      <a:r>
+                        <a:rPr lang="en-US" sz="1000" dirty="0">
+                          <a:solidFill>
+                            <a:srgbClr val="1F2A37"/>
+                          </a:solidFill>
+                          <a:latin typeface="Courier New" pitchFamily="34" charset="0"/>
+                          <a:ea typeface="Courier New" pitchFamily="34" charset="-122"/>
+                          <a:cs typeface="Courier New" pitchFamily="34" charset="-120"/>
+                        </a:rPr>
+                        <a:t>select ss_is_current::text, count(*), count(distinct (ss_item_sk, ss_ticket_number)) from store_sales where … group by ss_is_current</a:t>
+                      </a:r>
+                      <a:endParaRPr lang="en-US" sz="1000" dirty="0">
+                        <a:latin typeface="Courier New" charset="0"/>
+                        <a:ea typeface="Courier New" charset="0"/>
+                        <a:cs typeface="Courier New" charset="0"/>
+                      </a:endParaRPr>
+                    </a:p>
+                  </a:txBody>
+                  <a:tcPr marL="91440" marR="91440" marT="54864" marB="54864" anchor="ctr">
+                    <a:lnL w="12700" cap="flat" cmpd="sng" algn="ctr">
+                      <a:solidFill>
+                        <a:srgbClr val="D5DBE3"/>
+                      </a:solidFill>
+                      <a:prstDash val="solid"/>
+                      <a:round/>
+                      <a:headEnd type="none" w="med" len="med"/>
+                      <a:tailEnd type="none" w="med" len="med"/>
+                    </a:lnL>
+                    <a:lnR w="12700" cap="flat" cmpd="sng" algn="ctr">
+                      <a:solidFill>
+                        <a:srgbClr val="D5DBE3"/>
+                      </a:solidFill>
+                      <a:prstDash val="solid"/>
+                      <a:round/>
+                      <a:headEnd type="none" w="med" len="med"/>
+                      <a:tailEnd type="none" w="med" len="med"/>
+                    </a:lnR>
+                    <a:lnT w="12700" cap="flat" cmpd="sng" algn="ctr">
+                      <a:solidFill>
+                        <a:srgbClr val="D5DBE3"/>
+                      </a:solidFill>
+                      <a:prstDash val="solid"/>
+                      <a:round/>
+                      <a:headEnd type="none" w="med" len="med"/>
+                      <a:tailEnd type="none" w="med" len="med"/>
+                    </a:lnT>
+                    <a:lnB w="12700" cap="flat" cmpd="sng" algn="ctr">
+                      <a:solidFill>
+                        <a:srgbClr val="D5DBE3"/>
+                      </a:solidFill>
+                      <a:prstDash val="solid"/>
+                      <a:round/>
+                      <a:headEnd type="none" w="med" len="med"/>
+                      <a:tailEnd type="none" w="med" len="med"/>
+                    </a:lnB>
+                  </a:tcPr>
+                </a:tc>
+                <a:tc>
+                  <a:txBody>
+                    <a:bodyPr/>
+                    <a:lstStyle/>
+                    <a:p>
+                      <a:pPr indent="0" marL="0">
+                        <a:buNone/>
+                      </a:pPr>
+                      <a:r>
+                        <a:rPr lang="en-US" sz="1100" dirty="0">
+                          <a:solidFill>
+                            <a:srgbClr val="1F2A37"/>
+                          </a:solidFill>
+                          <a:latin typeface="Microsoft YaHei" pitchFamily="34" charset="0"/>
+                          <a:ea typeface="Microsoft YaHei" pitchFamily="34" charset="-122"/>
+                          <a:cs typeface="Microsoft YaHei" pitchFamily="34" charset="-120"/>
+                        </a:rPr>
+                        <a:t>'1'：1,000,000 行 = 1,000,000 键，且等于全部键数 ✓</a:t>
+                      </a:r>
+                      <a:endParaRPr lang="en-US" sz="1100" dirty="0">
+                        <a:latin typeface="Microsoft YaHei" charset="0"/>
+                        <a:ea typeface="Microsoft YaHei" charset="0"/>
+                        <a:cs typeface="Microsoft YaHei" charset="0"/>
+                      </a:endParaRPr>
+                    </a:p>
+                    <a:p>
+                      <a:pPr indent="0" marL="0">
+                        <a:buNone/>
+                      </a:pPr>
+                      <a:r>
+                        <a:rPr lang="en-US" sz="1100" dirty="0">
+                          <a:solidFill>
+                            <a:srgbClr val="1F2A37"/>
+                          </a:solidFill>
+                          <a:latin typeface="Microsoft YaHei" pitchFamily="34" charset="0"/>
+                          <a:ea typeface="Microsoft YaHei" pitchFamily="34" charset="-122"/>
+                          <a:cs typeface="Microsoft YaHei" pitchFamily="34" charset="-120"/>
+                        </a:rPr>
+                        <a:t>'0'：只剩 65,915 个键，丢键 ✗ → 唯一可行</a:t>
+                      </a:r>
+                      <a:endParaRPr lang="en-US" sz="1100" dirty="0">
+                        <a:latin typeface="Microsoft YaHei" charset="0"/>
+                        <a:ea typeface="Microsoft YaHei" charset="0"/>
+                        <a:cs typeface="Microsoft YaHei" charset="0"/>
+                      </a:endParaRPr>
+                    </a:p>
+                  </a:txBody>
+                  <a:tcPr marL="91440" marR="91440" marT="54864" marB="54864" anchor="ctr">
+                    <a:lnL w="12700" cap="flat" cmpd="sng" algn="ctr">
+                      <a:solidFill>
+                        <a:srgbClr val="D5DBE3"/>
+                      </a:solidFill>
+                      <a:prstDash val="solid"/>
+                      <a:round/>
+                      <a:headEnd type="none" w="med" len="med"/>
+                      <a:tailEnd type="none" w="med" len="med"/>
+                    </a:lnL>
+                    <a:lnR w="12700" cap="flat" cmpd="sng" algn="ctr">
+                      <a:solidFill>
+                        <a:srgbClr val="D5DBE3"/>
+                      </a:solidFill>
+                      <a:prstDash val="solid"/>
+                      <a:round/>
+                      <a:headEnd type="none" w="med" len="med"/>
+                      <a:tailEnd type="none" w="med" len="med"/>
+                    </a:lnR>
+                    <a:lnT w="12700" cap="flat" cmpd="sng" algn="ctr">
+                      <a:solidFill>
+                        <a:srgbClr val="D5DBE3"/>
+                      </a:solidFill>
+                      <a:prstDash val="solid"/>
+                      <a:round/>
+                      <a:headEnd type="none" w="med" len="med"/>
+                      <a:tailEnd type="none" w="med" len="med"/>
+                    </a:lnT>
+                    <a:lnB w="12700" cap="flat" cmpd="sng" algn="ctr">
+                      <a:solidFill>
+                        <a:srgbClr val="D5DBE3"/>
+                      </a:solidFill>
+                      <a:prstDash val="solid"/>
+                      <a:round/>
+                      <a:headEnd type="none" w="med" len="med"/>
+                      <a:tailEnd type="none" w="med" len="med"/>
+                    </a:lnB>
+                  </a:tcPr>
+                </a:tc>
+              </a:tr>
+              <a:tr h="0">
+                <a:tc>
+                  <a:txBody>
+                    <a:bodyPr/>
+                    <a:lstStyle/>
+                    <a:p>
+                      <a:pPr indent="0" marL="0">
+                        <a:buNone/>
+                      </a:pPr>
+                      <a:r>
+                        <a:rPr lang="en-US" sz="1100" dirty="0">
+                          <a:solidFill>
+                            <a:srgbClr val="1F2A37"/>
+                          </a:solidFill>
+                          <a:latin typeface="Microsoft YaHei" pitchFamily="34" charset="0"/>
+                          <a:ea typeface="Microsoft YaHei" pitchFamily="34" charset="-122"/>
+                          <a:cs typeface="Microsoft YaHei" pitchFamily="34" charset="-120"/>
+                        </a:rPr>
+                        <a:t>4</a:t>
+                      </a:r>
+                      <a:endParaRPr lang="en-US" sz="1100" dirty="0">
+                        <a:latin typeface="Microsoft YaHei" charset="0"/>
+                        <a:ea typeface="Microsoft YaHei" charset="0"/>
+                        <a:cs typeface="Microsoft YaHei" charset="0"/>
+                      </a:endParaRPr>
+                    </a:p>
+                  </a:txBody>
+                  <a:tcPr marL="91440" marR="91440" marT="54864" marB="54864" anchor="ctr">
+                    <a:lnL w="12700" cap="flat" cmpd="sng" algn="ctr">
+                      <a:solidFill>
+                        <a:srgbClr val="D5DBE3"/>
+                      </a:solidFill>
+                      <a:prstDash val="solid"/>
+                      <a:round/>
+                      <a:headEnd type="none" w="med" len="med"/>
+                      <a:tailEnd type="none" w="med" len="med"/>
+                    </a:lnL>
+                    <a:lnR w="12700" cap="flat" cmpd="sng" algn="ctr">
+                      <a:solidFill>
+                        <a:srgbClr val="D5DBE3"/>
+                      </a:solidFill>
+                      <a:prstDash val="solid"/>
+                      <a:round/>
+                      <a:headEnd type="none" w="med" len="med"/>
+                      <a:tailEnd type="none" w="med" len="med"/>
+                    </a:lnR>
+                    <a:lnT w="12700" cap="flat" cmpd="sng" algn="ctr">
+                      <a:solidFill>
+                        <a:srgbClr val="D5DBE3"/>
+                      </a:solidFill>
+                      <a:prstDash val="solid"/>
+                      <a:round/>
+                      <a:headEnd type="none" w="med" len="med"/>
+                      <a:tailEnd type="none" w="med" len="med"/>
+                    </a:lnT>
+                    <a:lnB w="12700" cap="flat" cmpd="sng" algn="ctr">
+                      <a:solidFill>
+                        <a:srgbClr val="D5DBE3"/>
+                      </a:solidFill>
+                      <a:prstDash val="solid"/>
+                      <a:round/>
+                      <a:headEnd type="none" w="med" len="med"/>
+                      <a:tailEnd type="none" w="med" len="med"/>
+                    </a:lnB>
+                  </a:tcPr>
+                </a:tc>
+                <a:tc>
+                  <a:txBody>
+                    <a:bodyPr/>
+                    <a:lstStyle/>
+                    <a:p>
+                      <a:pPr indent="0" marL="0">
+                        <a:buNone/>
+                      </a:pPr>
+                      <a:r>
+                        <a:rPr lang="en-US" sz="1100" dirty="0">
+                          <a:solidFill>
+                            <a:srgbClr val="1F2A37"/>
+                          </a:solidFill>
+                          <a:latin typeface="Microsoft YaHei" pitchFamily="34" charset="0"/>
+                          <a:ea typeface="Microsoft YaHei" pitchFamily="34" charset="-122"/>
+                          <a:cs typeface="Microsoft YaHei" pitchFamily="34" charset="-120"/>
+                        </a:rPr>
+                        <a:t>MAVRA</a:t>
+                      </a:r>
+                      <a:endParaRPr lang="en-US" sz="1100" dirty="0">
+                        <a:latin typeface="Microsoft YaHei" charset="0"/>
+                        <a:ea typeface="Microsoft YaHei" charset="0"/>
+                        <a:cs typeface="Microsoft YaHei" charset="0"/>
+                      </a:endParaRPr>
+                    </a:p>
+                  </a:txBody>
+                  <a:tcPr marL="91440" marR="91440" marT="54864" marB="54864" anchor="ctr">
+                    <a:lnL w="12700" cap="flat" cmpd="sng" algn="ctr">
+                      <a:solidFill>
+                        <a:srgbClr val="D5DBE3"/>
+                      </a:solidFill>
+                      <a:prstDash val="solid"/>
+                      <a:round/>
+                      <a:headEnd type="none" w="med" len="med"/>
+                      <a:tailEnd type="none" w="med" len="med"/>
+                    </a:lnL>
+                    <a:lnR w="12700" cap="flat" cmpd="sng" algn="ctr">
+                      <a:solidFill>
+                        <a:srgbClr val="D5DBE3"/>
+                      </a:solidFill>
+                      <a:prstDash val="solid"/>
+                      <a:round/>
+                      <a:headEnd type="none" w="med" len="med"/>
+                      <a:tailEnd type="none" w="med" len="med"/>
+                    </a:lnR>
+                    <a:lnT w="12700" cap="flat" cmpd="sng" algn="ctr">
+                      <a:solidFill>
+                        <a:srgbClr val="D5DBE3"/>
+                      </a:solidFill>
+                      <a:prstDash val="solid"/>
+                      <a:round/>
+                      <a:headEnd type="none" w="med" len="med"/>
+                      <a:tailEnd type="none" w="med" len="med"/>
+                    </a:lnT>
+                    <a:lnB w="12700" cap="flat" cmpd="sng" algn="ctr">
+                      <a:solidFill>
+                        <a:srgbClr val="D5DBE3"/>
+                      </a:solidFill>
+                      <a:prstDash val="solid"/>
+                      <a:round/>
+                      <a:headEnd type="none" w="med" len="med"/>
+                      <a:tailEnd type="none" w="med" len="med"/>
+                    </a:lnB>
+                  </a:tcPr>
+                </a:tc>
+                <a:tc>
+                  <a:txBody>
+                    <a:bodyPr/>
+                    <a:lstStyle/>
+                    <a:p>
+                      <a:pPr indent="0" marL="0">
+                        <a:buNone/>
+                      </a:pPr>
+                      <a:r>
+                        <a:rPr lang="en-US" sz="1000" dirty="0">
+                          <a:solidFill>
+                            <a:srgbClr val="1F2A37"/>
+                          </a:solidFill>
+                          <a:latin typeface="Courier New" pitchFamily="34" charset="0"/>
+                          <a:ea typeface="Courier New" pitchFamily="34" charset="-122"/>
+                          <a:cs typeface="Courier New" pitchFamily="34" charset="-120"/>
+                        </a:rPr>
+                        <a:t>G3 静态合法 · G4 带谓词再查粒度 · G5 审查 · G8 回归：在学习时快照库上执行智能体的学习 SQL 与 v2 规范 SQL</a:t>
+                      </a:r>
+                      <a:endParaRPr lang="en-US" sz="1000" dirty="0">
+                        <a:latin typeface="Courier New" charset="0"/>
+                        <a:ea typeface="Courier New" charset="0"/>
+                        <a:cs typeface="Courier New" charset="0"/>
+                      </a:endParaRPr>
+                    </a:p>
+                    <a:p>
+                      <a:pPr indent="0" marL="0">
+                        <a:buNone/>
+                      </a:pPr>
+                      <a:r>
+                        <a:rPr lang="en-US" sz="1000" dirty="0">
+                          <a:solidFill>
+                            <a:srgbClr val="1F2A37"/>
+                          </a:solidFill>
+                          <a:latin typeface="Courier New" pitchFamily="34" charset="0"/>
+                          <a:ea typeface="Courier New" pitchFamily="34" charset="-122"/>
+                          <a:cs typeface="Courier New" pitchFamily="34" charset="-120"/>
+                        </a:rPr>
+                        <a:t>select sum(ss_net_paid) as value from store_sales join date_dim on ss_sold_date_sk = d_date_sk where ss_is_current = '1' and d_year = 2001 and d_moy between 3 and 3</a:t>
+                      </a:r>
+                      <a:endParaRPr lang="en-US" sz="1000" dirty="0">
+                        <a:latin typeface="Courier New" charset="0"/>
+                        <a:ea typeface="Courier New" charset="0"/>
+                        <a:cs typeface="Courier New" charset="0"/>
+                      </a:endParaRPr>
+                    </a:p>
+                  </a:txBody>
+                  <a:tcPr marL="91440" marR="91440" marT="54864" marB="54864" anchor="ctr">
+                    <a:lnL w="12700" cap="flat" cmpd="sng" algn="ctr">
+                      <a:solidFill>
+                        <a:srgbClr val="D5DBE3"/>
+                      </a:solidFill>
+                      <a:prstDash val="solid"/>
+                      <a:round/>
+                      <a:headEnd type="none" w="med" len="med"/>
+                      <a:tailEnd type="none" w="med" len="med"/>
+                    </a:lnL>
+                    <a:lnR w="12700" cap="flat" cmpd="sng" algn="ctr">
+                      <a:solidFill>
+                        <a:srgbClr val="D5DBE3"/>
+                      </a:solidFill>
+                      <a:prstDash val="solid"/>
+                      <a:round/>
+                      <a:headEnd type="none" w="med" len="med"/>
+                      <a:tailEnd type="none" w="med" len="med"/>
+                    </a:lnR>
+                    <a:lnT w="12700" cap="flat" cmpd="sng" algn="ctr">
+                      <a:solidFill>
+                        <a:srgbClr val="D5DBE3"/>
+                      </a:solidFill>
+                      <a:prstDash val="solid"/>
+                      <a:round/>
+                      <a:headEnd type="none" w="med" len="med"/>
+                      <a:tailEnd type="none" w="med" len="med"/>
+                    </a:lnT>
+                    <a:lnB w="12700" cap="flat" cmpd="sng" algn="ctr">
+                      <a:solidFill>
+                        <a:srgbClr val="D5DBE3"/>
+                      </a:solidFill>
+                      <a:prstDash val="solid"/>
+                      <a:round/>
+                      <a:headEnd type="none" w="med" len="med"/>
+                      <a:tailEnd type="none" w="med" len="med"/>
+                    </a:lnB>
+                  </a:tcPr>
+                </a:tc>
+                <a:tc>
+                  <a:txBody>
+                    <a:bodyPr/>
+                    <a:lstStyle/>
+                    <a:p>
+                      <a:pPr indent="0" marL="0">
+                        <a:buNone/>
+                      </a:pPr>
+                      <a:r>
+                        <a:rPr lang="en-US" sz="1100" b="1" dirty="0">
+                          <a:solidFill>
+                            <a:srgbClr val="2E7D4F"/>
+                          </a:solidFill>
+                          <a:latin typeface="Microsoft YaHei" pitchFamily="34" charset="0"/>
+                          <a:ea typeface="Microsoft YaHei" pitchFamily="34" charset="-122"/>
+                          <a:cs typeface="Microsoft YaHei" pitchFamily="34" charset="-120"/>
+                        </a:rPr>
+                        <a:t>两者都是 13,570,368.70 → 发布 v2</a:t>
+                      </a:r>
+                      <a:endParaRPr lang="en-US" sz="1100" dirty="0">
+                        <a:latin typeface="Microsoft YaHei" charset="0"/>
+                        <a:ea typeface="Microsoft YaHei" charset="0"/>
+                        <a:cs typeface="Microsoft YaHei" charset="0"/>
+                      </a:endParaRPr>
+                    </a:p>
+                    <a:p>
+                      <a:pPr indent="0" marL="0">
+                        <a:buNone/>
+                      </a:pPr>
+                      <a:r>
+                        <a:rPr lang="en-US" sz="1100" dirty="0">
+                          <a:solidFill>
+                            <a:srgbClr val="1F2A37"/>
+                          </a:solidFill>
+                          <a:latin typeface="Microsoft YaHei" pitchFamily="34" charset="0"/>
+                          <a:ea typeface="Microsoft YaHei" pitchFamily="34" charset="-122"/>
+                          <a:cs typeface="Microsoft YaHei" pitchFamily="34" charset="-120"/>
+                        </a:rPr>
+                        <a:t>1–4 步共 28.7 秒</a:t>
+                      </a:r>
+                      <a:endParaRPr lang="en-US" sz="1100" dirty="0">
+                        <a:latin typeface="Microsoft YaHei" charset="0"/>
+                        <a:ea typeface="Microsoft YaHei" charset="0"/>
+                        <a:cs typeface="Microsoft YaHei" charset="0"/>
+                      </a:endParaRPr>
+                    </a:p>
+                  </a:txBody>
+                  <a:tcPr marL="91440" marR="91440" marT="54864" marB="54864" anchor="ctr">
+                    <a:lnL w="12700" cap="flat" cmpd="sng" algn="ctr">
+                      <a:solidFill>
+                        <a:srgbClr val="D5DBE3"/>
+                      </a:solidFill>
+                      <a:prstDash val="solid"/>
+                      <a:round/>
+                      <a:headEnd type="none" w="med" len="med"/>
+                      <a:tailEnd type="none" w="med" len="med"/>
+                    </a:lnL>
+                    <a:lnR w="12700" cap="flat" cmpd="sng" algn="ctr">
+                      <a:solidFill>
+                        <a:srgbClr val="D5DBE3"/>
+                      </a:solidFill>
+                      <a:prstDash val="solid"/>
+                      <a:round/>
+                      <a:headEnd type="none" w="med" len="med"/>
+                      <a:tailEnd type="none" w="med" len="med"/>
+                    </a:lnR>
+                    <a:lnT w="12700" cap="flat" cmpd="sng" algn="ctr">
+                      <a:solidFill>
+                        <a:srgbClr val="D5DBE3"/>
+                      </a:solidFill>
+                      <a:prstDash val="solid"/>
+                      <a:round/>
+                      <a:headEnd type="none" w="med" len="med"/>
+                      <a:tailEnd type="none" w="med" len="med"/>
+                    </a:lnT>
+                    <a:lnB w="12700" cap="flat" cmpd="sng" algn="ctr">
+                      <a:solidFill>
+                        <a:srgbClr val="D5DBE3"/>
+                      </a:solidFill>
+                      <a:prstDash val="solid"/>
+                      <a:round/>
+                      <a:headEnd type="none" w="med" len="med"/>
+                      <a:tailEnd type="none" w="med" len="med"/>
+                    </a:lnB>
+                  </a:tcPr>
+                </a:tc>
+              </a:tr>
+              <a:tr h="0">
+                <a:tc>
+                  <a:txBody>
+                    <a:bodyPr/>
+                    <a:lstStyle/>
+                    <a:p>
+                      <a:pPr indent="0" marL="0">
+                        <a:buNone/>
+                      </a:pPr>
+                      <a:r>
+                        <a:rPr lang="en-US" sz="1100" dirty="0">
+                          <a:solidFill>
+                            <a:srgbClr val="1F2A37"/>
+                          </a:solidFill>
+                          <a:latin typeface="Microsoft YaHei" pitchFamily="34" charset="0"/>
+                          <a:ea typeface="Microsoft YaHei" pitchFamily="34" charset="-122"/>
+                          <a:cs typeface="Microsoft YaHei" pitchFamily="34" charset="-120"/>
+                        </a:rPr>
+                        <a:t>5</a:t>
+                      </a:r>
+                      <a:endParaRPr lang="en-US" sz="1100" dirty="0">
+                        <a:latin typeface="Microsoft YaHei" charset="0"/>
+                        <a:ea typeface="Microsoft YaHei" charset="0"/>
+                        <a:cs typeface="Microsoft YaHei" charset="0"/>
+                      </a:endParaRPr>
+                    </a:p>
+                  </a:txBody>
+                  <a:tcPr marL="91440" marR="91440" marT="54864" marB="54864" anchor="ctr">
+                    <a:lnL w="12700" cap="flat" cmpd="sng" algn="ctr">
+                      <a:solidFill>
+                        <a:srgbClr val="D5DBE3"/>
+                      </a:solidFill>
+                      <a:prstDash val="solid"/>
+                      <a:round/>
+                      <a:headEnd type="none" w="med" len="med"/>
+                      <a:tailEnd type="none" w="med" len="med"/>
+                    </a:lnL>
+                    <a:lnR w="12700" cap="flat" cmpd="sng" algn="ctr">
+                      <a:solidFill>
+                        <a:srgbClr val="D5DBE3"/>
+                      </a:solidFill>
+                      <a:prstDash val="solid"/>
+                      <a:round/>
+                      <a:headEnd type="none" w="med" len="med"/>
+                      <a:tailEnd type="none" w="med" len="med"/>
+                    </a:lnR>
+                    <a:lnT w="12700" cap="flat" cmpd="sng" algn="ctr">
+                      <a:solidFill>
+                        <a:srgbClr val="D5DBE3"/>
+                      </a:solidFill>
+                      <a:prstDash val="solid"/>
+                      <a:round/>
+                      <a:headEnd type="none" w="med" len="med"/>
+                      <a:tailEnd type="none" w="med" len="med"/>
+                    </a:lnT>
+                    <a:lnB w="12700" cap="flat" cmpd="sng" algn="ctr">
+                      <a:solidFill>
+                        <a:srgbClr val="D5DBE3"/>
+                      </a:solidFill>
+                      <a:prstDash val="solid"/>
+                      <a:round/>
+                      <a:headEnd type="none" w="med" len="med"/>
+                      <a:tailEnd type="none" w="med" len="med"/>
+                    </a:lnB>
+                  </a:tcPr>
+                </a:tc>
+                <a:tc>
+                  <a:txBody>
+                    <a:bodyPr/>
+                    <a:lstStyle/>
+                    <a:p>
+                      <a:pPr indent="0" marL="0">
+                        <a:buNone/>
+                      </a:pPr>
+                      <a:r>
+                        <a:rPr lang="en-US" sz="1100" dirty="0">
+                          <a:solidFill>
+                            <a:srgbClr val="1F2A37"/>
+                          </a:solidFill>
+                          <a:latin typeface="Microsoft YaHei" pitchFamily="34" charset="0"/>
+                          <a:ea typeface="Microsoft YaHei" pitchFamily="34" charset="-122"/>
+                          <a:cs typeface="Microsoft YaHei" pitchFamily="34" charset="-120"/>
+                        </a:rPr>
+                        <a:t>MAVRA</a:t>
+                      </a:r>
+                      <a:endParaRPr lang="en-US" sz="1100" dirty="0">
+                        <a:latin typeface="Microsoft YaHei" charset="0"/>
+                        <a:ea typeface="Microsoft YaHei" charset="0"/>
+                        <a:cs typeface="Microsoft YaHei" charset="0"/>
+                      </a:endParaRPr>
+                    </a:p>
+                  </a:txBody>
+                  <a:tcPr marL="91440" marR="91440" marT="54864" marB="54864" anchor="ctr">
+                    <a:lnL w="12700" cap="flat" cmpd="sng" algn="ctr">
+                      <a:solidFill>
+                        <a:srgbClr val="D5DBE3"/>
+                      </a:solidFill>
+                      <a:prstDash val="solid"/>
+                      <a:round/>
+                      <a:headEnd type="none" w="med" len="med"/>
+                      <a:tailEnd type="none" w="med" len="med"/>
+                    </a:lnL>
+                    <a:lnR w="12700" cap="flat" cmpd="sng" algn="ctr">
+                      <a:solidFill>
+                        <a:srgbClr val="D5DBE3"/>
+                      </a:solidFill>
+                      <a:prstDash val="solid"/>
+                      <a:round/>
+                      <a:headEnd type="none" w="med" len="med"/>
+                      <a:tailEnd type="none" w="med" len="med"/>
+                    </a:lnR>
+                    <a:lnT w="12700" cap="flat" cmpd="sng" algn="ctr">
+                      <a:solidFill>
+                        <a:srgbClr val="D5DBE3"/>
+                      </a:solidFill>
+                      <a:prstDash val="solid"/>
+                      <a:round/>
+                      <a:headEnd type="none" w="med" len="med"/>
+                      <a:tailEnd type="none" w="med" len="med"/>
+                    </a:lnT>
+                    <a:lnB w="12700" cap="flat" cmpd="sng" algn="ctr">
+                      <a:solidFill>
+                        <a:srgbClr val="D5DBE3"/>
+                      </a:solidFill>
+                      <a:prstDash val="solid"/>
+                      <a:round/>
+                      <a:headEnd type="none" w="med" len="med"/>
+                      <a:tailEnd type="none" w="med" len="med"/>
+                    </a:lnB>
+                  </a:tcPr>
+                </a:tc>
+                <a:tc>
+                  <a:txBody>
+                    <a:bodyPr/>
+                    <a:lstStyle/>
+                    <a:p>
+                      <a:pPr indent="0" marL="0">
+                        <a:buNone/>
+                      </a:pPr>
+                      <a:r>
+                        <a:rPr lang="en-US" sz="1100" dirty="0">
+                          <a:solidFill>
+                            <a:srgbClr val="1F2A37"/>
+                          </a:solidFill>
+                          <a:latin typeface="Microsoft YaHei" pitchFamily="34" charset="0"/>
+                          <a:ea typeface="Microsoft YaHei" pitchFamily="34" charset="-122"/>
+                          <a:cs typeface="Microsoft YaHei" pitchFamily="34" charset="-120"/>
+                        </a:rPr>
+                        <a:t>“门店营业额”依赖同一张表、同一组键：复用第 2、3 步的结论与谓词</a:t>
+                      </a:r>
+                      <a:endParaRPr lang="en-US" sz="1100" dirty="0">
+                        <a:latin typeface="Microsoft YaHei" charset="0"/>
+                        <a:ea typeface="Microsoft YaHei" charset="0"/>
+                        <a:cs typeface="Microsoft YaHei" charset="0"/>
+                      </a:endParaRPr>
+                    </a:p>
+                  </a:txBody>
+                  <a:tcPr marL="91440" marR="91440" marT="54864" marB="54864" anchor="ctr">
+                    <a:lnL w="12700" cap="flat" cmpd="sng" algn="ctr">
+                      <a:solidFill>
+                        <a:srgbClr val="D5DBE3"/>
+                      </a:solidFill>
+                      <a:prstDash val="solid"/>
+                      <a:round/>
+                      <a:headEnd type="none" w="med" len="med"/>
+                      <a:tailEnd type="none" w="med" len="med"/>
+                    </a:lnL>
+                    <a:lnR w="12700" cap="flat" cmpd="sng" algn="ctr">
+                      <a:solidFill>
+                        <a:srgbClr val="D5DBE3"/>
+                      </a:solidFill>
+                      <a:prstDash val="solid"/>
+                      <a:round/>
+                      <a:headEnd type="none" w="med" len="med"/>
+                      <a:tailEnd type="none" w="med" len="med"/>
+                    </a:lnR>
+                    <a:lnT w="12700" cap="flat" cmpd="sng" algn="ctr">
+                      <a:solidFill>
+                        <a:srgbClr val="D5DBE3"/>
+                      </a:solidFill>
+                      <a:prstDash val="solid"/>
+                      <a:round/>
+                      <a:headEnd type="none" w="med" len="med"/>
+                      <a:tailEnd type="none" w="med" len="med"/>
+                    </a:lnT>
+                    <a:lnB w="12700" cap="flat" cmpd="sng" algn="ctr">
+                      <a:solidFill>
+                        <a:srgbClr val="D5DBE3"/>
+                      </a:solidFill>
+                      <a:prstDash val="solid"/>
+                      <a:round/>
+                      <a:headEnd type="none" w="med" len="med"/>
+                      <a:tailEnd type="none" w="med" len="med"/>
+                    </a:lnB>
+                  </a:tcPr>
+                </a:tc>
+                <a:tc>
+                  <a:txBody>
+                    <a:bodyPr/>
+                    <a:lstStyle/>
+                    <a:p>
+                      <a:pPr indent="0" marL="0">
+                        <a:buNone/>
+                      </a:pPr>
+                      <a:r>
+                        <a:rPr lang="en-US" sz="1100" b="1" dirty="0">
+                          <a:solidFill>
+                            <a:srgbClr val="2E7D4F"/>
+                          </a:solidFill>
+                          <a:latin typeface="Microsoft YaHei" pitchFamily="34" charset="0"/>
+                          <a:ea typeface="Microsoft YaHei" pitchFamily="34" charset="-122"/>
+                          <a:cs typeface="Microsoft YaHei" pitchFamily="34" charset="-120"/>
+                        </a:rPr>
+                        <a:t>45.8 毫秒发布 v2</a:t>
+                      </a:r>
+                      <a:endParaRPr lang="en-US" sz="1100" dirty="0">
+                        <a:latin typeface="Microsoft YaHei" charset="0"/>
+                        <a:ea typeface="Microsoft YaHei" charset="0"/>
+                        <a:cs typeface="Microsoft YaHei" charset="0"/>
+                      </a:endParaRPr>
+                    </a:p>
+                  </a:txBody>
+                  <a:tcPr marL="91440" marR="91440" marT="54864" marB="54864" anchor="ctr">
+                    <a:lnL w="12700" cap="flat" cmpd="sng" algn="ctr">
+                      <a:solidFill>
+                        <a:srgbClr val="D5DBE3"/>
+                      </a:solidFill>
+                      <a:prstDash val="solid"/>
+                      <a:round/>
+                      <a:headEnd type="none" w="med" len="med"/>
+                      <a:tailEnd type="none" w="med" len="med"/>
+                    </a:lnL>
+                    <a:lnR w="12700" cap="flat" cmpd="sng" algn="ctr">
+                      <a:solidFill>
+                        <a:srgbClr val="D5DBE3"/>
+                      </a:solidFill>
+                      <a:prstDash val="solid"/>
+                      <a:round/>
+                      <a:headEnd type="none" w="med" len="med"/>
+                      <a:tailEnd type="none" w="med" len="med"/>
+                    </a:lnR>
+                    <a:lnT w="12700" cap="flat" cmpd="sng" algn="ctr">
+                      <a:solidFill>
+                        <a:srgbClr val="D5DBE3"/>
+                      </a:solidFill>
+                      <a:prstDash val="solid"/>
+                      <a:round/>
+                      <a:headEnd type="none" w="med" len="med"/>
+                      <a:tailEnd type="none" w="med" len="med"/>
+                    </a:lnT>
+                    <a:lnB w="12700" cap="flat" cmpd="sng" algn="ctr">
+                      <a:solidFill>
+                        <a:srgbClr val="D5DBE3"/>
+                      </a:solidFill>
+                      <a:prstDash val="solid"/>
+                      <a:round/>
+                      <a:headEnd type="none" w="med" len="med"/>
+                      <a:tailEnd type="none" w="med" len="med"/>
+                    </a:lnB>
+                  </a:tcPr>
+                </a:tc>
+              </a:tr>
+              <a:tr h="0">
+                <a:tc>
+                  <a:txBody>
+                    <a:bodyPr/>
+                    <a:lstStyle/>
+                    <a:p>
+                      <a:pPr indent="0" marL="0">
+                        <a:buNone/>
+                      </a:pPr>
+                      <a:r>
+                        <a:rPr lang="en-US" sz="1100" dirty="0">
+                          <a:solidFill>
+                            <a:srgbClr val="1F2A37"/>
+                          </a:solidFill>
+                          <a:latin typeface="Microsoft YaHei" pitchFamily="34" charset="0"/>
+                          <a:ea typeface="Microsoft YaHei" pitchFamily="34" charset="-122"/>
+                          <a:cs typeface="Microsoft YaHei" pitchFamily="34" charset="-120"/>
+                        </a:rPr>
+                        <a:t>6</a:t>
+                      </a:r>
+                      <a:endParaRPr lang="en-US" sz="1100" dirty="0">
+                        <a:latin typeface="Microsoft YaHei" charset="0"/>
+                        <a:ea typeface="Microsoft YaHei" charset="0"/>
+                        <a:cs typeface="Microsoft YaHei" charset="0"/>
+                      </a:endParaRPr>
+                    </a:p>
+                  </a:txBody>
+                  <a:tcPr marL="91440" marR="91440" marT="54864" marB="54864" anchor="ctr">
+                    <a:lnL w="12700" cap="flat" cmpd="sng" algn="ctr">
+                      <a:solidFill>
+                        <a:srgbClr val="D5DBE3"/>
+                      </a:solidFill>
+                      <a:prstDash val="solid"/>
+                      <a:round/>
+                      <a:headEnd type="none" w="med" len="med"/>
+                      <a:tailEnd type="none" w="med" len="med"/>
+                    </a:lnL>
+                    <a:lnR w="12700" cap="flat" cmpd="sng" algn="ctr">
+                      <a:solidFill>
+                        <a:srgbClr val="D5DBE3"/>
+                      </a:solidFill>
+                      <a:prstDash val="solid"/>
+                      <a:round/>
+                      <a:headEnd type="none" w="med" len="med"/>
+                      <a:tailEnd type="none" w="med" len="med"/>
+                    </a:lnR>
+                    <a:lnT w="12700" cap="flat" cmpd="sng" algn="ctr">
+                      <a:solidFill>
+                        <a:srgbClr val="D5DBE3"/>
+                      </a:solidFill>
+                      <a:prstDash val="solid"/>
+                      <a:round/>
+                      <a:headEnd type="none" w="med" len="med"/>
+                      <a:tailEnd type="none" w="med" len="med"/>
+                    </a:lnT>
+                    <a:lnB w="12700" cap="flat" cmpd="sng" algn="ctr">
+                      <a:solidFill>
+                        <a:srgbClr val="D5DBE3"/>
+                      </a:solidFill>
+                      <a:prstDash val="solid"/>
+                      <a:round/>
+                      <a:headEnd type="none" w="med" len="med"/>
+                      <a:tailEnd type="none" w="med" len="med"/>
+                    </a:lnB>
+                  </a:tcPr>
+                </a:tc>
+                <a:tc>
+                  <a:txBody>
+                    <a:bodyPr/>
+                    <a:lstStyle/>
+                    <a:p>
+                      <a:pPr indent="0" marL="0">
+                        <a:buNone/>
+                      </a:pPr>
+                      <a:r>
+                        <a:rPr lang="en-US" sz="1100" dirty="0">
+                          <a:solidFill>
+                            <a:srgbClr val="1F2A37"/>
+                          </a:solidFill>
+                          <a:latin typeface="Microsoft YaHei" pitchFamily="34" charset="0"/>
+                          <a:ea typeface="Microsoft YaHei" pitchFamily="34" charset="-122"/>
+                          <a:cs typeface="Microsoft YaHei" pitchFamily="34" charset="-120"/>
+                        </a:rPr>
+                        <a:t>B ← MAVRA</a:t>
+                      </a:r>
+                      <a:endParaRPr lang="en-US" sz="1100" dirty="0">
+                        <a:latin typeface="Microsoft YaHei" charset="0"/>
+                        <a:ea typeface="Microsoft YaHei" charset="0"/>
+                        <a:cs typeface="Microsoft YaHei" charset="0"/>
+                      </a:endParaRPr>
+                    </a:p>
+                  </a:txBody>
+                  <a:tcPr marL="91440" marR="91440" marT="54864" marB="54864" anchor="ctr">
+                    <a:lnL w="12700" cap="flat" cmpd="sng" algn="ctr">
+                      <a:solidFill>
+                        <a:srgbClr val="D5DBE3"/>
+                      </a:solidFill>
+                      <a:prstDash val="solid"/>
+                      <a:round/>
+                      <a:headEnd type="none" w="med" len="med"/>
+                      <a:tailEnd type="none" w="med" len="med"/>
+                    </a:lnL>
+                    <a:lnR w="12700" cap="flat" cmpd="sng" algn="ctr">
+                      <a:solidFill>
+                        <a:srgbClr val="D5DBE3"/>
+                      </a:solidFill>
+                      <a:prstDash val="solid"/>
+                      <a:round/>
+                      <a:headEnd type="none" w="med" len="med"/>
+                      <a:tailEnd type="none" w="med" len="med"/>
+                    </a:lnR>
+                    <a:lnT w="12700" cap="flat" cmpd="sng" algn="ctr">
+                      <a:solidFill>
+                        <a:srgbClr val="D5DBE3"/>
+                      </a:solidFill>
+                      <a:prstDash val="solid"/>
+                      <a:round/>
+                      <a:headEnd type="none" w="med" len="med"/>
+                      <a:tailEnd type="none" w="med" len="med"/>
+                    </a:lnT>
+                    <a:lnB w="12700" cap="flat" cmpd="sng" algn="ctr">
+                      <a:solidFill>
+                        <a:srgbClr val="D5DBE3"/>
+                      </a:solidFill>
+                      <a:prstDash val="solid"/>
+                      <a:round/>
+                      <a:headEnd type="none" w="med" len="med"/>
+                      <a:tailEnd type="none" w="med" len="med"/>
+                    </a:lnB>
+                  </a:tcPr>
+                </a:tc>
+                <a:tc>
+                  <a:txBody>
+                    <a:bodyPr/>
+                    <a:lstStyle/>
+                    <a:p>
+                      <a:pPr indent="0" marL="0">
+                        <a:buNone/>
+                      </a:pPr>
+                      <a:r>
+                        <a:rPr lang="en-US" sz="1000" dirty="0">
+                          <a:solidFill>
+                            <a:srgbClr val="1F2A37"/>
+                          </a:solidFill>
+                          <a:latin typeface="Courier New" pitchFamily="34" charset="0"/>
+                          <a:ea typeface="Courier New" pitchFamily="34" charset="-122"/>
+                          <a:cs typeface="Courier New" pitchFamily="34" charset="-120"/>
+                        </a:rPr>
+                        <a:t>notices: ["你用过的经验「metric:门店营业额」已撤销（粒度守卫失败：…）。此前基于它得到的结果建议复核。"]</a:t>
+                      </a:r>
+                      <a:endParaRPr lang="en-US" sz="1000" dirty="0">
+                        <a:latin typeface="Courier New" charset="0"/>
+                        <a:ea typeface="Courier New" charset="0"/>
+                        <a:cs typeface="Courier New" charset="0"/>
+                      </a:endParaRPr>
+                    </a:p>
+                    <a:p>
+                      <a:pPr indent="0" marL="0">
+                        <a:buNone/>
+                      </a:pPr>
+                      <a:r>
+                        <a:rPr lang="en-US" sz="1000" dirty="0">
+                          <a:solidFill>
+                            <a:srgbClr val="1F2A37"/>
+                          </a:solidFill>
+                          <a:latin typeface="Courier New" pitchFamily="34" charset="0"/>
+                          <a:ea typeface="Courier New" pitchFamily="34" charset="-122"/>
+                          <a:cs typeface="Courier New" pitchFamily="34" charset="-120"/>
+                        </a:rPr>
+                        <a:t>find_metric → v2（含 ss_is_current = '1'）；run_sql(…, metrics=[{key, revision: 1}])</a:t>
+                      </a:r>
+                      <a:endParaRPr lang="en-US" sz="1000" dirty="0">
+                        <a:latin typeface="Courier New" charset="0"/>
+                        <a:ea typeface="Courier New" charset="0"/>
+                        <a:cs typeface="Courier New" charset="0"/>
+                      </a:endParaRPr>
+                    </a:p>
+                  </a:txBody>
+                  <a:tcPr marL="91440" marR="91440" marT="54864" marB="54864" anchor="ctr">
+                    <a:lnL w="12700" cap="flat" cmpd="sng" algn="ctr">
+                      <a:solidFill>
+                        <a:srgbClr val="D5DBE3"/>
+                      </a:solidFill>
+                      <a:prstDash val="solid"/>
+                      <a:round/>
+                      <a:headEnd type="none" w="med" len="med"/>
+                      <a:tailEnd type="none" w="med" len="med"/>
+                    </a:lnL>
+                    <a:lnR w="12700" cap="flat" cmpd="sng" algn="ctr">
+                      <a:solidFill>
+                        <a:srgbClr val="D5DBE3"/>
+                      </a:solidFill>
+                      <a:prstDash val="solid"/>
+                      <a:round/>
+                      <a:headEnd type="none" w="med" len="med"/>
+                      <a:tailEnd type="none" w="med" len="med"/>
+                    </a:lnR>
+                    <a:lnT w="12700" cap="flat" cmpd="sng" algn="ctr">
+                      <a:solidFill>
+                        <a:srgbClr val="D5DBE3"/>
+                      </a:solidFill>
+                      <a:prstDash val="solid"/>
+                      <a:round/>
+                      <a:headEnd type="none" w="med" len="med"/>
+                      <a:tailEnd type="none" w="med" len="med"/>
+                    </a:lnT>
+                    <a:lnB w="12700" cap="flat" cmpd="sng" algn="ctr">
+                      <a:solidFill>
+                        <a:srgbClr val="D5DBE3"/>
+                      </a:solidFill>
+                      <a:prstDash val="solid"/>
+                      <a:round/>
+                      <a:headEnd type="none" w="med" len="med"/>
+                      <a:tailEnd type="none" w="med" len="med"/>
+                    </a:lnB>
+                  </a:tcPr>
+                </a:tc>
+                <a:tc>
+                  <a:txBody>
+                    <a:bodyPr/>
+                    <a:lstStyle/>
+                    <a:p>
+                      <a:pPr indent="0" marL="0">
+                        <a:buNone/>
+                      </a:pPr>
+                      <a:r>
+                        <a:rPr lang="en-US" sz="1100" b="1" dirty="0">
+                          <a:solidFill>
+                            <a:srgbClr val="2E7D4F"/>
+                          </a:solidFill>
+                          <a:latin typeface="Microsoft YaHei" pitchFamily="34" charset="0"/>
+                          <a:ea typeface="Microsoft YaHei" pitchFamily="34" charset="-122"/>
+                          <a:cs typeface="Microsoft YaHei" pitchFamily="34" charset="-120"/>
+                        </a:rPr>
+                        <a:t>12,932,888.04 ✓（4 轮，61.7 秒）</a:t>
+                      </a:r>
+                      <a:endParaRPr lang="en-US" sz="1100" dirty="0">
+                        <a:latin typeface="Microsoft YaHei" charset="0"/>
+                        <a:ea typeface="Microsoft YaHei" charset="0"/>
+                        <a:cs typeface="Microsoft YaHei" charset="0"/>
+                      </a:endParaRPr>
+                    </a:p>
+                  </a:txBody>
+                  <a:tcPr marL="91440" marR="91440" marT="54864" marB="54864" anchor="ctr">
+                    <a:lnL w="12700" cap="flat" cmpd="sng" algn="ctr">
+                      <a:solidFill>
+                        <a:srgbClr val="D5DBE3"/>
+                      </a:solidFill>
+                      <a:prstDash val="solid"/>
+                      <a:round/>
+                      <a:headEnd type="none" w="med" len="med"/>
+                      <a:tailEnd type="none" w="med" len="med"/>
+                    </a:lnL>
+                    <a:lnR w="12700" cap="flat" cmpd="sng" algn="ctr">
+                      <a:solidFill>
+                        <a:srgbClr val="D5DBE3"/>
+                      </a:solidFill>
+                      <a:prstDash val="solid"/>
+                      <a:round/>
+                      <a:headEnd type="none" w="med" len="med"/>
+                      <a:tailEnd type="none" w="med" len="med"/>
+                    </a:lnR>
+                    <a:lnT w="12700" cap="flat" cmpd="sng" algn="ctr">
+                      <a:solidFill>
+                        <a:srgbClr val="D5DBE3"/>
+                      </a:solidFill>
+                      <a:prstDash val="solid"/>
+                      <a:round/>
+                      <a:headEnd type="none" w="med" len="med"/>
+                      <a:tailEnd type="none" w="med" len="med"/>
+                    </a:lnT>
+                    <a:lnB w="12700" cap="flat" cmpd="sng" algn="ctr">
+                      <a:solidFill>
+                        <a:srgbClr val="D5DBE3"/>
+                      </a:solidFill>
+                      <a:prstDash val="solid"/>
+                      <a:round/>
+                      <a:headEnd type="none" w="med" len="med"/>
+                      <a:tailEnd type="none" w="med" len="med"/>
+                    </a:lnB>
+                  </a:tcPr>
+                </a:tc>
+              </a:tr>
+            </a:tbl>
+          </a:graphicData>
+        </a:graphic>
+      </p:graphicFrame>
+      <p:sp>
+        <p:nvSpPr>
+          <p:cNvPr id="4" name="Text 1"/>
+          <p:cNvSpPr txBox="1"/>
+          <p:nvPr/>
+        </p:nvSpPr>
+        <p:spPr>
+          <a:xfrm>
+            <a:off x="548640" y="6263640"/>
+            <a:ext cx="10362895" cy="365760"/>
+          </a:xfrm>
+          <a:prstGeom prst="rect">
+            <a:avLst/>
+          </a:prstGeom>
+          <a:noFill/>
+          <a:ln/>
+        </p:spPr>
+        <p:txBody>
+          <a:bodyPr wrap="square" lIns="0" tIns="0" rIns="0" bIns="0" rtlCol="0" anchor="b"/>
+          <a:lstStyle/>
+          <a:p>
+            <a:pPr indent="0" marL="0">
+              <a:buNone/>
+            </a:pPr>
+            <a:r>
+              <a:rPr lang="en-US" sz="1100" dirty="0">
+                <a:solidFill>
+                  <a:srgbClr val="5B6573"/>
+                </a:solidFill>
+                <a:latin typeface="Microsoft YaHei" pitchFamily="34" charset="0"/>
+                <a:ea typeface="Microsoft YaHei" pitchFamily="34" charset="-122"/>
+                <a:cs typeface="Microsoft YaHei" pitchFamily="34" charset="-120"/>
+              </a:rPr>
+              <a:t>记录：noctis results/scen-20261002/dsv41flash-r1-g3fix--snap（端到端实验第 1 次 MAVRA 运行）。数据为仿 TPC-DS 的合成零售数据（store_sales 100 万行），题目中的年份略去。 检查与修复查询为中间件实际使用的语句（checks.rs、repair_grain）；通知文字取自运行记录。</a:t>
+            </a:r>
+            <a:endParaRPr lang="en-US" sz="1100" dirty="0"/>
+          </a:p>
+        </p:txBody>
+      </p:sp>
+      <p:sp>
+        <p:nvSpPr>
+          <p:cNvPr id="25" name="Slide Number Placeholder 0"/>
+          <p:cNvSpPr>
+            <a:spLocks noGrp="1"/>
+          </p:cNvSpPr>
+          <p:nvPr>
+            <p:ph type="sldNum" sz="quarter" idx="4294967295"/>
+          </p:nvPr>
+        </p:nvSpPr>
+        <p:spPr>
+          <a:xfrm>
+            <a:off x="11185855" y="6446520"/>
+            <a:ext cx="457200" cy="274320"/>
+          </a:xfrm>
+          <a:prstGeom prst="rect">
+            <a:avLst/>
+          </a:prstGeom>
+          <a:extLst>
+            <a:ext uri="{C572A759-6A51-4108-AA02-DFA0A04FC94B}">
+              <ma14:wrappingTextBoxFlag xmlns:ma14="http://schemas.microsoft.com/office/mac/drawingml/2011/main" val="0"/>
+            </a:ext>
+          </a:extLst>
+        </p:spPr>
+        <p:txBody>
+          <a:bodyPr/>
+          <a:lstStyle>
+            <a:lvl1pPr>
+              <a:defRPr sz="1000">
+                <a:solidFill>
+                  <a:srgbClr val="5B6573"/>
+                </a:solidFill>
+                <a:latin typeface="Microsoft YaHei"/>
+                <a:ea typeface="Microsoft YaHei"/>
+                <a:cs typeface="Microsoft YaHei"/>
+              </a:defRPr>
+            </a:lvl1pPr>
+          </a:lstStyle>
+          <a:p>
+            <a:pPr algn="r"/>
+            <a:fld id="{F7021451-1387-4CA6-816F-3879F97B5CBC}" type="slidenum">
+              <a:rPr b="0" lang="en-US"/>
+              <a:t>14</a:t>
+            </a:fld>
+            <a:endParaRPr lang="en-US"/>
+          </a:p>
+        </p:txBody>
+      </p:sp>
+    </p:spTree>
+  </p:cSld>
+  <p:clrMapOvr>
+    <a:masterClrMapping/>
+  </p:clrMapOvr>
+</p:sld>
+</file>
+
+<file path=ppt/slides/slide15.xml><?xml version="1.0" encoding="utf-8"?>
+<p:sld xmlns:a="http://schemas.openxmlformats.org/drawingml/2006/main" xmlns:r="http://schemas.openxmlformats.org/officeDocument/2006/relationships" xmlns:p="http://schemas.openxmlformats.org/presentationml/2006/main">
+  <p:cSld name="Slide 15">
     <p:spTree>
       <p:nvGrpSpPr>
         <p:cNvPr id="1" name=""/>
@@ -6695,7 +9442,7 @@
       </p:sp>
       <p:graphicFrame>
         <p:nvGraphicFramePr>
-          <p:cNvPr id="14" name="Table 0"/>
+          <p:cNvPr id="16" name="Table 0"/>
           <p:cNvGraphicFramePr>
             <a:graphicFrameLocks noGrp="1"/>
           </p:cNvGraphicFramePr>
@@ -7430,7 +10177,7 @@
       </p:sp>
       <p:graphicFrame>
         <p:nvGraphicFramePr>
-          <p:cNvPr id="27" name="Table 1"/>
+          <p:cNvPr id="31" name="Table 1"/>
           <p:cNvGraphicFramePr>
             <a:graphicFrameLocks noGrp="1"/>
           </p:cNvGraphicFramePr>
@@ -8502,7 +11249,7 @@
             <a:pPr algn="r"/>
             <a:fld id="{F7021451-1387-4CA6-816F-3879F97B5CBC}" type="slidenum">
               <a:rPr b="0" lang="en-US"/>
-              <a:t>13</a:t>
+              <a:t>15</a:t>
             </a:fld>
             <a:endParaRPr lang="en-US"/>
           </a:p>
@@ -8516,9 +11263,9 @@
 </p:sld>
 </file>
 
-<file path=ppt/slides/slide14.xml><?xml version="1.0" encoding="utf-8"?>
+<file path=ppt/slides/slide16.xml><?xml version="1.0" encoding="utf-8"?>
 <p:sld xmlns:a="http://schemas.openxmlformats.org/drawingml/2006/main" xmlns:r="http://schemas.openxmlformats.org/officeDocument/2006/relationships" xmlns:p="http://schemas.openxmlformats.org/presentationml/2006/main">
-  <p:cSld name="Slide 14">
+  <p:cSld name="Slide 16">
     <p:spTree>
       <p:nvGrpSpPr>
         <p:cNvPr id="1" name=""/>
@@ -8576,7 +11323,7 @@
       </p:sp>
       <p:graphicFrame>
         <p:nvGraphicFramePr>
-          <p:cNvPr id="15" name="Table 0"/>
+          <p:cNvPr id="17" name="Table 0"/>
           <p:cNvGraphicFramePr>
             <a:graphicFrameLocks noGrp="1"/>
           </p:cNvGraphicFramePr>
@@ -11955,7 +14702,7 @@
             <a:pPr algn="r"/>
             <a:fld id="{F7021451-1387-4CA6-816F-3879F97B5CBC}" type="slidenum">
               <a:rPr b="0" lang="en-US"/>
-              <a:t>14</a:t>
+              <a:t>16</a:t>
             </a:fld>
             <a:endParaRPr lang="en-US"/>
           </a:p>
@@ -11969,9 +14716,9 @@
 </p:sld>
 </file>
 
-<file path=ppt/slides/slide15.xml><?xml version="1.0" encoding="utf-8"?>
+<file path=ppt/slides/slide17.xml><?xml version="1.0" encoding="utf-8"?>
 <p:sld xmlns:a="http://schemas.openxmlformats.org/drawingml/2006/main" xmlns:r="http://schemas.openxmlformats.org/officeDocument/2006/relationships" xmlns:p="http://schemas.openxmlformats.org/presentationml/2006/main">
-  <p:cSld name="Slide 15">
+  <p:cSld name="Slide 17">
     <p:spTree>
       <p:nvGrpSpPr>
         <p:cNvPr id="1" name=""/>
@@ -12029,7 +14776,7 @@
       </p:sp>
       <p:graphicFrame>
         <p:nvGraphicFramePr>
-          <p:cNvPr id="16" name="Table 0"/>
+          <p:cNvPr id="18" name="Table 0"/>
           <p:cNvGraphicFramePr>
             <a:graphicFrameLocks noGrp="1"/>
           </p:cNvGraphicFramePr>
@@ -13521,7 +16268,7 @@
             <a:pPr algn="r"/>
             <a:fld id="{F7021451-1387-4CA6-816F-3879F97B5CBC}" type="slidenum">
               <a:rPr b="0" lang="en-US"/>
-              <a:t>15</a:t>
+              <a:t>17</a:t>
             </a:fld>
             <a:endParaRPr lang="en-US"/>
           </a:p>
@@ -13535,9 +16282,9 @@
 </p:sld>
 </file>
 
-<file path=ppt/slides/slide16.xml><?xml version="1.0" encoding="utf-8"?>
+<file path=ppt/slides/slide18.xml><?xml version="1.0" encoding="utf-8"?>
 <p:sld xmlns:a="http://schemas.openxmlformats.org/drawingml/2006/main" xmlns:r="http://schemas.openxmlformats.org/officeDocument/2006/relationships" xmlns:p="http://schemas.openxmlformats.org/presentationml/2006/main">
-  <p:cSld name="Slide 16">
+  <p:cSld name="Slide 18">
     <p:spTree>
       <p:nvGrpSpPr>
         <p:cNvPr id="1" name=""/>
@@ -13595,7 +16342,7 @@
       </p:sp>
       <p:graphicFrame>
         <p:nvGraphicFramePr>
-          <p:cNvPr id="17" name="Table 0"/>
+          <p:cNvPr id="19" name="Table 0"/>
           <p:cNvGraphicFramePr>
             <a:graphicFrameLocks noGrp="1"/>
           </p:cNvGraphicFramePr>
@@ -14477,7 +17224,7 @@
                           <a:ea typeface="Microsoft YaHei" pitchFamily="34" charset="-122"/>
                           <a:cs typeface="Microsoft YaHei" pitchFamily="34" charset="-120"/>
                         </a:rPr>
-                        <a:t>智能体没有声明所依赖的指标修订</a:t>
+                        <a:t>SQL 没有在 run_sql 的 metrics 参数里声明依据的定义</a:t>
                       </a:r>
                       <a:endParaRPr lang="en-US" sz="1300" dirty="0">
                         <a:latin typeface="Microsoft YaHei" charset="0"/>
@@ -14542,7 +17289,7 @@
                           <a:ea typeface="Microsoft YaHei" pitchFamily="34" charset="-122"/>
                           <a:cs typeface="Microsoft YaHei" pitchFamily="34" charset="-120"/>
                         </a:rPr>
-                        <a:t>不在执行保证范围内</a:t>
+                        <a:t>照常执行与审查，但不在条件保证范围内</a:t>
                       </a:r>
                       <a:endParaRPr lang="en-US" sz="1300" dirty="0">
                         <a:latin typeface="Microsoft YaHei" charset="0"/>
@@ -15038,7 +17785,7 @@
             <a:pPr algn="r"/>
             <a:fld id="{F7021451-1387-4CA6-816F-3879F97B5CBC}" type="slidenum">
               <a:rPr b="0" lang="en-US"/>
-              <a:t>16</a:t>
+              <a:t>18</a:t>
             </a:fld>
             <a:endParaRPr lang="en-US"/>
           </a:p>
@@ -21608,8 +24355,8 @@
         </p:blipFill>
         <p:spPr>
           <a:xfrm>
-            <a:off x="1622279" y="1051560"/>
-            <a:ext cx="8947138" cy="4160520"/>
+            <a:off x="1966399" y="1005840"/>
+            <a:ext cx="8258896" cy="3840480"/>
           </a:xfrm>
           <a:prstGeom prst="rect">
             <a:avLst/>
@@ -21624,12 +24371,12 @@
         </p:nvSpPr>
         <p:spPr>
           <a:xfrm>
-            <a:off x="548640" y="5303520"/>
-            <a:ext cx="11094415" cy="822960"/>
+            <a:off x="548640" y="4892040"/>
+            <a:ext cx="11094415" cy="1280160"/>
           </a:xfrm>
           <a:prstGeom prst="roundRect">
             <a:avLst>
-              <a:gd name="adj" fmla="val 8889"/>
+              <a:gd name="adj" fmla="val 5714"/>
             </a:avLst>
           </a:prstGeom>
           <a:solidFill>
@@ -21651,8 +24398,8 @@
         </p:nvSpPr>
         <p:spPr>
           <a:xfrm>
-            <a:off x="822960" y="5394960"/>
-            <a:ext cx="10545775" cy="640080"/>
+            <a:off x="822960" y="4983480"/>
+            <a:ext cx="10545775" cy="1097280"/>
           </a:xfrm>
           <a:prstGeom prst="rect">
             <a:avLst/>
@@ -21671,7 +24418,7 @@
               <a:buNone/>
             </a:pPr>
             <a:r>
-              <a:rPr lang="en-US" sz="1300" b="1" dirty="0">
+              <a:rPr lang="en-US" sz="1200" b="1" dirty="0">
                 <a:solidFill>
                   <a:srgbClr val="1D5BA6"/>
                 </a:solidFill>
@@ -21688,7 +24435,7 @@
               <a:buNone/>
             </a:pPr>
             <a:r>
-              <a:rPr lang="en-US" sz="1300" dirty="0">
+              <a:rPr lang="en-US" sz="1200" dirty="0">
                 <a:solidFill>
                   <a:srgbClr val="1F2A37"/>
                 </a:solidFill>
@@ -21696,9 +24443,9 @@
                 <a:ea typeface="Microsoft YaHei" pitchFamily="34" charset="-122"/>
                 <a:cs typeface="Microsoft YaHei" pitchFamily="34" charset="-120"/>
               </a:rPr>
-              <a:t>list_tables · describe_table · join_path · find_metric · run_sql（声明所依赖的指标修订）。</a:t>
+              <a:t>list_tables · describe_table · join_path · find_metric(名称) · run_sql(sql, metrics=[{key, revision}])——metrics 参数就是“声明”：这条 SQL 依据哪条定义的哪个修订。MAVRA 记四类记忆：表统计信息、连接路径、指标定义、验证结果。</a:t>
             </a:r>
-            <a:endParaRPr lang="en-US" sz="1300" dirty="0"/>
+            <a:endParaRPr lang="en-US" sz="1200" dirty="0"/>
           </a:p>
           <a:p>
             <a:pPr indent="0" marL="0">
@@ -21708,7 +24455,7 @@
               <a:buNone/>
             </a:pPr>
             <a:r>
-              <a:rPr lang="en-US" sz="1300" b="1" dirty="0">
+              <a:rPr lang="en-US" sz="1200" b="1" dirty="0">
                 <a:solidFill>
                   <a:srgbClr val="1D5BA6"/>
                 </a:solidFill>
@@ -21716,7 +24463,7 @@
                 <a:ea typeface="Microsoft YaHei" pitchFamily="34" charset="-122"/>
                 <a:cs typeface="Microsoft YaHei" pitchFamily="34" charset="-120"/>
               </a:rPr>
-              <a:t>MAVRA 记四类记忆：</a:t>
+              <a:t>谁参与：</a:t>
             </a:r>
             <a:pPr indent="0" marL="0">
               <a:spcAft>
@@ -21725,7 +24472,7 @@
               <a:buNone/>
             </a:pPr>
             <a:r>
-              <a:rPr lang="en-US" sz="1300" dirty="0">
+              <a:rPr lang="en-US" sz="1200" dirty="0">
                 <a:solidFill>
                   <a:srgbClr val="1F2A37"/>
                 </a:solidFill>
@@ -21733,9 +24480,9 @@
                 <a:ea typeface="Microsoft YaHei" pitchFamily="34" charset="-122"/>
                 <a:cs typeface="Microsoft YaHei" pitchFamily="34" charset="-120"/>
               </a:rPr>
-              <a:t>表统计信息、连接路径、指标定义、验证结果。最重要的是后两类：不仅记住公式，还记住公式成立的条件和最近一次检查是否通过。</a:t>
+              <a:t>学习——内置智能体（大模型）求解给定口径的任务，抽取模型整理成定义，7 项准入检查自动执行，人只在“答案判定正确”确认一次；使用——用户智能体检索、声明、执行；维护——由数据更新后第一个用到该定义的请求触发，MAVRA 执行，期间到达的请求等待结果；优化——学习之后 MAVRA 自动做一轮；修复有歧义时才交给人。</a:t>
             </a:r>
-            <a:endParaRPr lang="en-US" sz="1300" dirty="0"/>
+            <a:endParaRPr lang="en-US" sz="1200" dirty="0"/>
           </a:p>
         </p:txBody>
       </p:sp>
@@ -21798,6 +24545,2282 @@
 <file path=ppt/slides/slide6.xml><?xml version="1.0" encoding="utf-8"?>
 <p:sld xmlns:a="http://schemas.openxmlformats.org/drawingml/2006/main" xmlns:r="http://schemas.openxmlformats.org/officeDocument/2006/relationships" xmlns:p="http://schemas.openxmlformats.org/presentationml/2006/main">
   <p:cSld name="Slide 6">
+    <p:spTree>
+      <p:nvGrpSpPr>
+        <p:cNvPr id="1" name=""/>
+        <p:cNvGrpSpPr/>
+        <p:nvPr/>
+      </p:nvGrpSpPr>
+      <p:grpSpPr>
+        <a:xfrm>
+          <a:off x="0" y="0"/>
+          <a:ext cx="0" cy="0"/>
+          <a:chOff x="0" y="0"/>
+          <a:chExt cx="0" cy="0"/>
+        </a:xfrm>
+      </p:grpSpPr>
+      <p:sp>
+        <p:nvSpPr>
+          <p:cNvPr id="2" name="Text 0"/>
+          <p:cNvSpPr/>
+          <p:nvPr>
+            <p:ph idx="100" type="title" hasCustomPrompt="1"/>
+          </p:nvPr>
+        </p:nvSpPr>
+        <p:spPr>
+          <a:xfrm>
+            <a:off x="548640" y="274320"/>
+            <a:ext cx="11094415" cy="685800"/>
+          </a:xfrm>
+          <a:prstGeom prst="rect">
+            <a:avLst/>
+          </a:prstGeom>
+          <a:noFill/>
+          <a:ln/>
+        </p:spPr>
+        <p:txBody>
+          <a:bodyPr wrap="square" lIns="0" tIns="0" rIns="0" bIns="0" rtlCol="0" anchor="ctr"/>
+          <a:lstStyle/>
+          <a:p>
+            <a:pPr algn="l" indent="0" marL="0">
+              <a:buNone/>
+            </a:pPr>
+            <a:r>
+              <a:rPr lang="en-US" sz="2800" b="1" dirty="0">
+                <a:solidFill>
+                  <a:srgbClr val="1F2A37"/>
+                </a:solidFill>
+                <a:latin typeface="Microsoft YaHei" pitchFamily="34" charset="0"/>
+                <a:ea typeface="Microsoft YaHei" pitchFamily="34" charset="-122"/>
+                <a:cs typeface="Microsoft YaHei" pitchFamily="34" charset="-120"/>
+              </a:rPr>
+              <a:t>一次使用的完整交互（真实记录）</a:t>
+            </a:r>
+            <a:endParaRPr lang="en-US" sz="2800" dirty="0"/>
+          </a:p>
+        </p:txBody>
+      </p:sp>
+      <p:graphicFrame>
+        <p:nvGraphicFramePr>
+          <p:cNvPr id="7" name="Table 0"/>
+          <p:cNvGraphicFramePr>
+            <a:graphicFrameLocks noGrp="1"/>
+          </p:cNvGraphicFramePr>
+          <p:nvPr>
+            <p:extLst>
+              <p:ext uri="{D42A27DB-BD31-4B8C-83A1-F6EECF244321}">
+                <p14:modId xmlns:p14="http://schemas.microsoft.com/office/powerpoint/2010/main" val="1579011935"/>
+              </p:ext>
+            </p:extLst>
+          </p:nvPr>
+        </p:nvGraphicFramePr>
+        <p:xfrm>
+          <a:off x="548640" y="1097280"/>
+          <a:ext cx="11094415" cy="914400"/>
+        </p:xfrm>
+        <a:graphic>
+          <a:graphicData uri="http://schemas.openxmlformats.org/drawingml/2006/table">
+            <a:tbl>
+              <a:tblPr/>
+              <a:tblGrid>
+                <a:gridCol w="365760"/>
+                <a:gridCol w="3566160"/>
+                <a:gridCol w="4389120"/>
+                <a:gridCol w="2773375"/>
+              </a:tblGrid>
+              <a:tr h="0">
+                <a:tc>
+                  <a:txBody>
+                    <a:bodyPr/>
+                    <a:lstStyle/>
+                    <a:p>
+                      <a:pPr indent="0" marL="0">
+                        <a:buNone/>
+                      </a:pPr>
+                      <a:endParaRPr lang="en-US" sz="1200" dirty="0">
+                        <a:latin typeface="Microsoft YaHei" charset="0"/>
+                        <a:ea typeface="Microsoft YaHei" charset="0"/>
+                        <a:cs typeface="Microsoft YaHei" charset="0"/>
+                      </a:endParaRPr>
+                    </a:p>
+                  </a:txBody>
+                  <a:tcPr marL="91440" marR="91440" marT="54864" marB="54864" anchor="ctr">
+                    <a:lnL w="12700" cap="flat" cmpd="sng" algn="ctr">
+                      <a:solidFill>
+                        <a:srgbClr val="D5DBE3"/>
+                      </a:solidFill>
+                      <a:prstDash val="solid"/>
+                      <a:round/>
+                      <a:headEnd type="none" w="med" len="med"/>
+                      <a:tailEnd type="none" w="med" len="med"/>
+                    </a:lnL>
+                    <a:lnR w="12700" cap="flat" cmpd="sng" algn="ctr">
+                      <a:solidFill>
+                        <a:srgbClr val="D5DBE3"/>
+                      </a:solidFill>
+                      <a:prstDash val="solid"/>
+                      <a:round/>
+                      <a:headEnd type="none" w="med" len="med"/>
+                      <a:tailEnd type="none" w="med" len="med"/>
+                    </a:lnR>
+                    <a:lnT w="12700" cap="flat" cmpd="sng" algn="ctr">
+                      <a:solidFill>
+                        <a:srgbClr val="D5DBE3"/>
+                      </a:solidFill>
+                      <a:prstDash val="solid"/>
+                      <a:round/>
+                      <a:headEnd type="none" w="med" len="med"/>
+                      <a:tailEnd type="none" w="med" len="med"/>
+                    </a:lnT>
+                    <a:lnB w="12700" cap="flat" cmpd="sng" algn="ctr">
+                      <a:solidFill>
+                        <a:srgbClr val="D5DBE3"/>
+                      </a:solidFill>
+                      <a:prstDash val="solid"/>
+                      <a:round/>
+                      <a:headEnd type="none" w="med" len="med"/>
+                      <a:tailEnd type="none" w="med" len="med"/>
+                    </a:lnB>
+                    <a:solidFill>
+                      <a:srgbClr val="F1F3F6"/>
+                    </a:solidFill>
+                  </a:tcPr>
+                </a:tc>
+                <a:tc>
+                  <a:txBody>
+                    <a:bodyPr/>
+                    <a:lstStyle/>
+                    <a:p>
+                      <a:pPr indent="0" marL="0">
+                        <a:buNone/>
+                      </a:pPr>
+                      <a:r>
+                        <a:rPr lang="en-US" sz="1200" b="1" dirty="0">
+                          <a:solidFill>
+                            <a:srgbClr val="1F2A37"/>
+                          </a:solidFill>
+                          <a:latin typeface="Microsoft YaHei" pitchFamily="34" charset="0"/>
+                          <a:ea typeface="Microsoft YaHei" pitchFamily="34" charset="-122"/>
+                          <a:cs typeface="Microsoft YaHei" pitchFamily="34" charset="-120"/>
+                        </a:rPr>
+                        <a:t>用户智能体 B 发出</a:t>
+                      </a:r>
+                      <a:endParaRPr lang="en-US" sz="1200" dirty="0">
+                        <a:latin typeface="Microsoft YaHei" charset="0"/>
+                        <a:ea typeface="Microsoft YaHei" charset="0"/>
+                        <a:cs typeface="Microsoft YaHei" charset="0"/>
+                      </a:endParaRPr>
+                    </a:p>
+                  </a:txBody>
+                  <a:tcPr marL="91440" marR="91440" marT="54864" marB="54864" anchor="ctr">
+                    <a:lnL w="12700" cap="flat" cmpd="sng" algn="ctr">
+                      <a:solidFill>
+                        <a:srgbClr val="D5DBE3"/>
+                      </a:solidFill>
+                      <a:prstDash val="solid"/>
+                      <a:round/>
+                      <a:headEnd type="none" w="med" len="med"/>
+                      <a:tailEnd type="none" w="med" len="med"/>
+                    </a:lnL>
+                    <a:lnR w="12700" cap="flat" cmpd="sng" algn="ctr">
+                      <a:solidFill>
+                        <a:srgbClr val="D5DBE3"/>
+                      </a:solidFill>
+                      <a:prstDash val="solid"/>
+                      <a:round/>
+                      <a:headEnd type="none" w="med" len="med"/>
+                      <a:tailEnd type="none" w="med" len="med"/>
+                    </a:lnR>
+                    <a:lnT w="12700" cap="flat" cmpd="sng" algn="ctr">
+                      <a:solidFill>
+                        <a:srgbClr val="D5DBE3"/>
+                      </a:solidFill>
+                      <a:prstDash val="solid"/>
+                      <a:round/>
+                      <a:headEnd type="none" w="med" len="med"/>
+                      <a:tailEnd type="none" w="med" len="med"/>
+                    </a:lnT>
+                    <a:lnB w="12700" cap="flat" cmpd="sng" algn="ctr">
+                      <a:solidFill>
+                        <a:srgbClr val="D5DBE3"/>
+                      </a:solidFill>
+                      <a:prstDash val="solid"/>
+                      <a:round/>
+                      <a:headEnd type="none" w="med" len="med"/>
+                      <a:tailEnd type="none" w="med" len="med"/>
+                    </a:lnB>
+                    <a:solidFill>
+                      <a:srgbClr val="F1F3F6"/>
+                    </a:solidFill>
+                  </a:tcPr>
+                </a:tc>
+                <a:tc>
+                  <a:txBody>
+                    <a:bodyPr/>
+                    <a:lstStyle/>
+                    <a:p>
+                      <a:pPr indent="0" marL="0">
+                        <a:buNone/>
+                      </a:pPr>
+                      <a:r>
+                        <a:rPr lang="en-US" sz="1200" b="1" dirty="0">
+                          <a:solidFill>
+                            <a:srgbClr val="1F2A37"/>
+                          </a:solidFill>
+                          <a:latin typeface="Microsoft YaHei" pitchFamily="34" charset="0"/>
+                          <a:ea typeface="Microsoft YaHei" pitchFamily="34" charset="-122"/>
+                          <a:cs typeface="Microsoft YaHei" pitchFamily="34" charset="-120"/>
+                        </a:rPr>
+                        <a:t>MAVRA 做什么</a:t>
+                      </a:r>
+                      <a:endParaRPr lang="en-US" sz="1200" dirty="0">
+                        <a:latin typeface="Microsoft YaHei" charset="0"/>
+                        <a:ea typeface="Microsoft YaHei" charset="0"/>
+                        <a:cs typeface="Microsoft YaHei" charset="0"/>
+                      </a:endParaRPr>
+                    </a:p>
+                  </a:txBody>
+                  <a:tcPr marL="91440" marR="91440" marT="54864" marB="54864" anchor="ctr">
+                    <a:lnL w="12700" cap="flat" cmpd="sng" algn="ctr">
+                      <a:solidFill>
+                        <a:srgbClr val="D5DBE3"/>
+                      </a:solidFill>
+                      <a:prstDash val="solid"/>
+                      <a:round/>
+                      <a:headEnd type="none" w="med" len="med"/>
+                      <a:tailEnd type="none" w="med" len="med"/>
+                    </a:lnL>
+                    <a:lnR w="12700" cap="flat" cmpd="sng" algn="ctr">
+                      <a:solidFill>
+                        <a:srgbClr val="D5DBE3"/>
+                      </a:solidFill>
+                      <a:prstDash val="solid"/>
+                      <a:round/>
+                      <a:headEnd type="none" w="med" len="med"/>
+                      <a:tailEnd type="none" w="med" len="med"/>
+                    </a:lnR>
+                    <a:lnT w="12700" cap="flat" cmpd="sng" algn="ctr">
+                      <a:solidFill>
+                        <a:srgbClr val="D5DBE3"/>
+                      </a:solidFill>
+                      <a:prstDash val="solid"/>
+                      <a:round/>
+                      <a:headEnd type="none" w="med" len="med"/>
+                      <a:tailEnd type="none" w="med" len="med"/>
+                    </a:lnT>
+                    <a:lnB w="12700" cap="flat" cmpd="sng" algn="ctr">
+                      <a:solidFill>
+                        <a:srgbClr val="D5DBE3"/>
+                      </a:solidFill>
+                      <a:prstDash val="solid"/>
+                      <a:round/>
+                      <a:headEnd type="none" w="med" len="med"/>
+                      <a:tailEnd type="none" w="med" len="med"/>
+                    </a:lnB>
+                    <a:solidFill>
+                      <a:srgbClr val="F1F3F6"/>
+                    </a:solidFill>
+                  </a:tcPr>
+                </a:tc>
+                <a:tc>
+                  <a:txBody>
+                    <a:bodyPr/>
+                    <a:lstStyle/>
+                    <a:p>
+                      <a:pPr indent="0" marL="0">
+                        <a:buNone/>
+                      </a:pPr>
+                      <a:r>
+                        <a:rPr lang="en-US" sz="1200" b="1" dirty="0">
+                          <a:solidFill>
+                            <a:srgbClr val="1F2A37"/>
+                          </a:solidFill>
+                          <a:latin typeface="Microsoft YaHei" pitchFamily="34" charset="0"/>
+                          <a:ea typeface="Microsoft YaHei" pitchFamily="34" charset="-122"/>
+                          <a:cs typeface="Microsoft YaHei" pitchFamily="34" charset="-120"/>
+                        </a:rPr>
+                        <a:t>返回给智能体</a:t>
+                      </a:r>
+                      <a:endParaRPr lang="en-US" sz="1200" dirty="0">
+                        <a:latin typeface="Microsoft YaHei" charset="0"/>
+                        <a:ea typeface="Microsoft YaHei" charset="0"/>
+                        <a:cs typeface="Microsoft YaHei" charset="0"/>
+                      </a:endParaRPr>
+                    </a:p>
+                  </a:txBody>
+                  <a:tcPr marL="91440" marR="91440" marT="54864" marB="54864" anchor="ctr">
+                    <a:lnL w="12700" cap="flat" cmpd="sng" algn="ctr">
+                      <a:solidFill>
+                        <a:srgbClr val="D5DBE3"/>
+                      </a:solidFill>
+                      <a:prstDash val="solid"/>
+                      <a:round/>
+                      <a:headEnd type="none" w="med" len="med"/>
+                      <a:tailEnd type="none" w="med" len="med"/>
+                    </a:lnL>
+                    <a:lnR w="12700" cap="flat" cmpd="sng" algn="ctr">
+                      <a:solidFill>
+                        <a:srgbClr val="D5DBE3"/>
+                      </a:solidFill>
+                      <a:prstDash val="solid"/>
+                      <a:round/>
+                      <a:headEnd type="none" w="med" len="med"/>
+                      <a:tailEnd type="none" w="med" len="med"/>
+                    </a:lnR>
+                    <a:lnT w="12700" cap="flat" cmpd="sng" algn="ctr">
+                      <a:solidFill>
+                        <a:srgbClr val="D5DBE3"/>
+                      </a:solidFill>
+                      <a:prstDash val="solid"/>
+                      <a:round/>
+                      <a:headEnd type="none" w="med" len="med"/>
+                      <a:tailEnd type="none" w="med" len="med"/>
+                    </a:lnT>
+                    <a:lnB w="12700" cap="flat" cmpd="sng" algn="ctr">
+                      <a:solidFill>
+                        <a:srgbClr val="D5DBE3"/>
+                      </a:solidFill>
+                      <a:prstDash val="solid"/>
+                      <a:round/>
+                      <a:headEnd type="none" w="med" len="med"/>
+                      <a:tailEnd type="none" w="med" len="med"/>
+                    </a:lnB>
+                    <a:solidFill>
+                      <a:srgbClr val="F1F3F6"/>
+                    </a:solidFill>
+                  </a:tcPr>
+                </a:tc>
+              </a:tr>
+              <a:tr h="0">
+                <a:tc>
+                  <a:txBody>
+                    <a:bodyPr/>
+                    <a:lstStyle/>
+                    <a:p>
+                      <a:pPr indent="0" marL="0">
+                        <a:buNone/>
+                      </a:pPr>
+                      <a:r>
+                        <a:rPr lang="en-US" sz="1200" dirty="0">
+                          <a:solidFill>
+                            <a:srgbClr val="1F2A37"/>
+                          </a:solidFill>
+                          <a:latin typeface="Microsoft YaHei" pitchFamily="34" charset="0"/>
+                          <a:ea typeface="Microsoft YaHei" pitchFamily="34" charset="-122"/>
+                          <a:cs typeface="Microsoft YaHei" pitchFamily="34" charset="-120"/>
+                        </a:rPr>
+                        <a:t>1</a:t>
+                      </a:r>
+                      <a:endParaRPr lang="en-US" sz="1200" dirty="0">
+                        <a:latin typeface="Microsoft YaHei" charset="0"/>
+                        <a:ea typeface="Microsoft YaHei" charset="0"/>
+                        <a:cs typeface="Microsoft YaHei" charset="0"/>
+                      </a:endParaRPr>
+                    </a:p>
+                  </a:txBody>
+                  <a:tcPr marL="91440" marR="91440" marT="54864" marB="54864" anchor="ctr">
+                    <a:lnL w="12700" cap="flat" cmpd="sng" algn="ctr">
+                      <a:solidFill>
+                        <a:srgbClr val="D5DBE3"/>
+                      </a:solidFill>
+                      <a:prstDash val="solid"/>
+                      <a:round/>
+                      <a:headEnd type="none" w="med" len="med"/>
+                      <a:tailEnd type="none" w="med" len="med"/>
+                    </a:lnL>
+                    <a:lnR w="12700" cap="flat" cmpd="sng" algn="ctr">
+                      <a:solidFill>
+                        <a:srgbClr val="D5DBE3"/>
+                      </a:solidFill>
+                      <a:prstDash val="solid"/>
+                      <a:round/>
+                      <a:headEnd type="none" w="med" len="med"/>
+                      <a:tailEnd type="none" w="med" len="med"/>
+                    </a:lnR>
+                    <a:lnT w="12700" cap="flat" cmpd="sng" algn="ctr">
+                      <a:solidFill>
+                        <a:srgbClr val="D5DBE3"/>
+                      </a:solidFill>
+                      <a:prstDash val="solid"/>
+                      <a:round/>
+                      <a:headEnd type="none" w="med" len="med"/>
+                      <a:tailEnd type="none" w="med" len="med"/>
+                    </a:lnT>
+                    <a:lnB w="12700" cap="flat" cmpd="sng" algn="ctr">
+                      <a:solidFill>
+                        <a:srgbClr val="D5DBE3"/>
+                      </a:solidFill>
+                      <a:prstDash val="solid"/>
+                      <a:round/>
+                      <a:headEnd type="none" w="med" len="med"/>
+                      <a:tailEnd type="none" w="med" len="med"/>
+                    </a:lnB>
+                  </a:tcPr>
+                </a:tc>
+                <a:tc>
+                  <a:txBody>
+                    <a:bodyPr/>
+                    <a:lstStyle/>
+                    <a:p>
+                      <a:pPr indent="0" marL="0">
+                        <a:buNone/>
+                      </a:pPr>
+                      <a:r>
+                        <a:rPr lang="en-US" sz="1200" dirty="0">
+                          <a:solidFill>
+                            <a:srgbClr val="1F2A37"/>
+                          </a:solidFill>
+                          <a:latin typeface="Microsoft YaHei" pitchFamily="34" charset="0"/>
+                          <a:ea typeface="Microsoft YaHei" pitchFamily="34" charset="-122"/>
+                          <a:cs typeface="Microsoft YaHei" pitchFamily="34" charset="-120"/>
+                        </a:rPr>
+                        <a:t>find_metric("门店营业额")</a:t>
+                      </a:r>
+                      <a:endParaRPr lang="en-US" sz="1200" dirty="0">
+                        <a:latin typeface="Microsoft YaHei" charset="0"/>
+                        <a:ea typeface="Microsoft YaHei" charset="0"/>
+                        <a:cs typeface="Microsoft YaHei" charset="0"/>
+                      </a:endParaRPr>
+                    </a:p>
+                    <a:p>
+                      <a:pPr indent="0" marL="0">
+                        <a:buNone/>
+                      </a:pPr>
+                      <a:r>
+                        <a:rPr lang="en-US" sz="1100" dirty="0">
+                          <a:solidFill>
+                            <a:srgbClr val="5B6573"/>
+                          </a:solidFill>
+                          <a:latin typeface="Microsoft YaHei" pitchFamily="34" charset="0"/>
+                          <a:ea typeface="Microsoft YaHei" pitchFamily="34" charset="-122"/>
+                          <a:cs typeface="Microsoft YaHei" pitchFamily="34" charset="-120"/>
+                        </a:rPr>
+                        <a:t>留出题：9 月的门店营业额是多少？</a:t>
+                      </a:r>
+                      <a:endParaRPr lang="en-US" sz="1200" dirty="0">
+                        <a:latin typeface="Microsoft YaHei" charset="0"/>
+                        <a:ea typeface="Microsoft YaHei" charset="0"/>
+                        <a:cs typeface="Microsoft YaHei" charset="0"/>
+                      </a:endParaRPr>
+                    </a:p>
+                  </a:txBody>
+                  <a:tcPr marL="91440" marR="91440" marT="54864" marB="54864" anchor="ctr">
+                    <a:lnL w="12700" cap="flat" cmpd="sng" algn="ctr">
+                      <a:solidFill>
+                        <a:srgbClr val="D5DBE3"/>
+                      </a:solidFill>
+                      <a:prstDash val="solid"/>
+                      <a:round/>
+                      <a:headEnd type="none" w="med" len="med"/>
+                      <a:tailEnd type="none" w="med" len="med"/>
+                    </a:lnL>
+                    <a:lnR w="12700" cap="flat" cmpd="sng" algn="ctr">
+                      <a:solidFill>
+                        <a:srgbClr val="D5DBE3"/>
+                      </a:solidFill>
+                      <a:prstDash val="solid"/>
+                      <a:round/>
+                      <a:headEnd type="none" w="med" len="med"/>
+                      <a:tailEnd type="none" w="med" len="med"/>
+                    </a:lnR>
+                    <a:lnT w="12700" cap="flat" cmpd="sng" algn="ctr">
+                      <a:solidFill>
+                        <a:srgbClr val="D5DBE3"/>
+                      </a:solidFill>
+                      <a:prstDash val="solid"/>
+                      <a:round/>
+                      <a:headEnd type="none" w="med" len="med"/>
+                      <a:tailEnd type="none" w="med" len="med"/>
+                    </a:lnT>
+                    <a:lnB w="12700" cap="flat" cmpd="sng" algn="ctr">
+                      <a:solidFill>
+                        <a:srgbClr val="D5DBE3"/>
+                      </a:solidFill>
+                      <a:prstDash val="solid"/>
+                      <a:round/>
+                      <a:headEnd type="none" w="med" len="med"/>
+                      <a:tailEnd type="none" w="med" len="med"/>
+                    </a:lnB>
+                  </a:tcPr>
+                </a:tc>
+                <a:tc>
+                  <a:txBody>
+                    <a:bodyPr/>
+                    <a:lstStyle/>
+                    <a:p>
+                      <a:pPr indent="0" marL="0">
+                        <a:buNone/>
+                      </a:pPr>
+                      <a:r>
+                        <a:rPr lang="en-US" sz="1200" dirty="0">
+                          <a:solidFill>
+                            <a:srgbClr val="1F2A37"/>
+                          </a:solidFill>
+                          <a:latin typeface="Microsoft YaHei" pitchFamily="34" charset="0"/>
+                          <a:ea typeface="Microsoft YaHei" pitchFamily="34" charset="-122"/>
+                          <a:cs typeface="Microsoft YaHei" pitchFamily="34" charset="-120"/>
+                        </a:rPr>
+                        <a:t>按名称/别名匹配到 3 条（门店营业额、电子品类门店营业额 ×2，标记 ambiguous）；依赖表版本未变，直接返回</a:t>
+                      </a:r>
+                      <a:endParaRPr lang="en-US" sz="1200" dirty="0">
+                        <a:latin typeface="Microsoft YaHei" charset="0"/>
+                        <a:ea typeface="Microsoft YaHei" charset="0"/>
+                        <a:cs typeface="Microsoft YaHei" charset="0"/>
+                      </a:endParaRPr>
+                    </a:p>
+                  </a:txBody>
+                  <a:tcPr marL="91440" marR="91440" marT="54864" marB="54864" anchor="ctr">
+                    <a:lnL w="12700" cap="flat" cmpd="sng" algn="ctr">
+                      <a:solidFill>
+                        <a:srgbClr val="D5DBE3"/>
+                      </a:solidFill>
+                      <a:prstDash val="solid"/>
+                      <a:round/>
+                      <a:headEnd type="none" w="med" len="med"/>
+                      <a:tailEnd type="none" w="med" len="med"/>
+                    </a:lnL>
+                    <a:lnR w="12700" cap="flat" cmpd="sng" algn="ctr">
+                      <a:solidFill>
+                        <a:srgbClr val="D5DBE3"/>
+                      </a:solidFill>
+                      <a:prstDash val="solid"/>
+                      <a:round/>
+                      <a:headEnd type="none" w="med" len="med"/>
+                      <a:tailEnd type="none" w="med" len="med"/>
+                    </a:lnR>
+                    <a:lnT w="12700" cap="flat" cmpd="sng" algn="ctr">
+                      <a:solidFill>
+                        <a:srgbClr val="D5DBE3"/>
+                      </a:solidFill>
+                      <a:prstDash val="solid"/>
+                      <a:round/>
+                      <a:headEnd type="none" w="med" len="med"/>
+                      <a:tailEnd type="none" w="med" len="med"/>
+                    </a:lnT>
+                    <a:lnB w="12700" cap="flat" cmpd="sng" algn="ctr">
+                      <a:solidFill>
+                        <a:srgbClr val="D5DBE3"/>
+                      </a:solidFill>
+                      <a:prstDash val="solid"/>
+                      <a:round/>
+                      <a:headEnd type="none" w="med" len="med"/>
+                      <a:tailEnd type="none" w="med" len="med"/>
+                    </a:lnB>
+                  </a:tcPr>
+                </a:tc>
+                <a:tc>
+                  <a:txBody>
+                    <a:bodyPr/>
+                    <a:lstStyle/>
+                    <a:p>
+                      <a:pPr indent="0" marL="0">
+                        <a:buNone/>
+                      </a:pPr>
+                      <a:r>
+                        <a:rPr lang="en-US" sz="1200" dirty="0">
+                          <a:solidFill>
+                            <a:srgbClr val="1F2A37"/>
+                          </a:solidFill>
+                          <a:latin typeface="Microsoft YaHei" pitchFamily="34" charset="0"/>
+                          <a:ea typeface="Microsoft YaHei" pitchFamily="34" charset="-122"/>
+                          <a:cs typeface="Microsoft YaHei" pitchFamily="34" charset="-120"/>
+                        </a:rPr>
+                        <a:t>每条的 key、revision、口径、度量 sum(ss_net_paid)、粒度、时间维度、注意事项、示例 SQL</a:t>
+                      </a:r>
+                      <a:endParaRPr lang="en-US" sz="1200" dirty="0">
+                        <a:latin typeface="Microsoft YaHei" charset="0"/>
+                        <a:ea typeface="Microsoft YaHei" charset="0"/>
+                        <a:cs typeface="Microsoft YaHei" charset="0"/>
+                      </a:endParaRPr>
+                    </a:p>
+                  </a:txBody>
+                  <a:tcPr marL="91440" marR="91440" marT="54864" marB="54864" anchor="ctr">
+                    <a:lnL w="12700" cap="flat" cmpd="sng" algn="ctr">
+                      <a:solidFill>
+                        <a:srgbClr val="D5DBE3"/>
+                      </a:solidFill>
+                      <a:prstDash val="solid"/>
+                      <a:round/>
+                      <a:headEnd type="none" w="med" len="med"/>
+                      <a:tailEnd type="none" w="med" len="med"/>
+                    </a:lnL>
+                    <a:lnR w="12700" cap="flat" cmpd="sng" algn="ctr">
+                      <a:solidFill>
+                        <a:srgbClr val="D5DBE3"/>
+                      </a:solidFill>
+                      <a:prstDash val="solid"/>
+                      <a:round/>
+                      <a:headEnd type="none" w="med" len="med"/>
+                      <a:tailEnd type="none" w="med" len="med"/>
+                    </a:lnR>
+                    <a:lnT w="12700" cap="flat" cmpd="sng" algn="ctr">
+                      <a:solidFill>
+                        <a:srgbClr val="D5DBE3"/>
+                      </a:solidFill>
+                      <a:prstDash val="solid"/>
+                      <a:round/>
+                      <a:headEnd type="none" w="med" len="med"/>
+                      <a:tailEnd type="none" w="med" len="med"/>
+                    </a:lnT>
+                    <a:lnB w="12700" cap="flat" cmpd="sng" algn="ctr">
+                      <a:solidFill>
+                        <a:srgbClr val="D5DBE3"/>
+                      </a:solidFill>
+                      <a:prstDash val="solid"/>
+                      <a:round/>
+                      <a:headEnd type="none" w="med" len="med"/>
+                      <a:tailEnd type="none" w="med" len="med"/>
+                    </a:lnB>
+                  </a:tcPr>
+                </a:tc>
+              </a:tr>
+              <a:tr h="0">
+                <a:tc>
+                  <a:txBody>
+                    <a:bodyPr/>
+                    <a:lstStyle/>
+                    <a:p>
+                      <a:pPr indent="0" marL="0">
+                        <a:buNone/>
+                      </a:pPr>
+                      <a:r>
+                        <a:rPr lang="en-US" sz="1200" dirty="0">
+                          <a:solidFill>
+                            <a:srgbClr val="1F2A37"/>
+                          </a:solidFill>
+                          <a:latin typeface="Microsoft YaHei" pitchFamily="34" charset="0"/>
+                          <a:ea typeface="Microsoft YaHei" pitchFamily="34" charset="-122"/>
+                          <a:cs typeface="Microsoft YaHei" pitchFamily="34" charset="-120"/>
+                        </a:rPr>
+                        <a:t>2</a:t>
+                      </a:r>
+                      <a:endParaRPr lang="en-US" sz="1200" dirty="0">
+                        <a:latin typeface="Microsoft YaHei" charset="0"/>
+                        <a:ea typeface="Microsoft YaHei" charset="0"/>
+                        <a:cs typeface="Microsoft YaHei" charset="0"/>
+                      </a:endParaRPr>
+                    </a:p>
+                  </a:txBody>
+                  <a:tcPr marL="91440" marR="91440" marT="54864" marB="54864" anchor="ctr">
+                    <a:lnL w="12700" cap="flat" cmpd="sng" algn="ctr">
+                      <a:solidFill>
+                        <a:srgbClr val="D5DBE3"/>
+                      </a:solidFill>
+                      <a:prstDash val="solid"/>
+                      <a:round/>
+                      <a:headEnd type="none" w="med" len="med"/>
+                      <a:tailEnd type="none" w="med" len="med"/>
+                    </a:lnL>
+                    <a:lnR w="12700" cap="flat" cmpd="sng" algn="ctr">
+                      <a:solidFill>
+                        <a:srgbClr val="D5DBE3"/>
+                      </a:solidFill>
+                      <a:prstDash val="solid"/>
+                      <a:round/>
+                      <a:headEnd type="none" w="med" len="med"/>
+                      <a:tailEnd type="none" w="med" len="med"/>
+                    </a:lnR>
+                    <a:lnT w="12700" cap="flat" cmpd="sng" algn="ctr">
+                      <a:solidFill>
+                        <a:srgbClr val="D5DBE3"/>
+                      </a:solidFill>
+                      <a:prstDash val="solid"/>
+                      <a:round/>
+                      <a:headEnd type="none" w="med" len="med"/>
+                      <a:tailEnd type="none" w="med" len="med"/>
+                    </a:lnT>
+                    <a:lnB w="12700" cap="flat" cmpd="sng" algn="ctr">
+                      <a:solidFill>
+                        <a:srgbClr val="D5DBE3"/>
+                      </a:solidFill>
+                      <a:prstDash val="solid"/>
+                      <a:round/>
+                      <a:headEnd type="none" w="med" len="med"/>
+                      <a:tailEnd type="none" w="med" len="med"/>
+                    </a:lnB>
+                  </a:tcPr>
+                </a:tc>
+                <a:tc>
+                  <a:txBody>
+                    <a:bodyPr/>
+                    <a:lstStyle/>
+                    <a:p>
+                      <a:pPr indent="0" marL="0">
+                        <a:buNone/>
+                      </a:pPr>
+                      <a:r>
+                        <a:rPr lang="en-US" sz="1200" dirty="0">
+                          <a:solidFill>
+                            <a:srgbClr val="1F2A37"/>
+                          </a:solidFill>
+                          <a:latin typeface="Microsoft YaHei" pitchFamily="34" charset="0"/>
+                          <a:ea typeface="Microsoft YaHei" pitchFamily="34" charset="-122"/>
+                          <a:cs typeface="Microsoft YaHei" pitchFamily="34" charset="-120"/>
+                        </a:rPr>
+                        <a:t>按口径说明选中“门店营业额”，写出 SQL</a:t>
+                      </a:r>
+                      <a:endParaRPr lang="en-US" sz="1200" dirty="0">
+                        <a:latin typeface="Microsoft YaHei" charset="0"/>
+                        <a:ea typeface="Microsoft YaHei" charset="0"/>
+                        <a:cs typeface="Microsoft YaHei" charset="0"/>
+                      </a:endParaRPr>
+                    </a:p>
+                  </a:txBody>
+                  <a:tcPr marL="91440" marR="91440" marT="54864" marB="54864" anchor="ctr">
+                    <a:lnL w="12700" cap="flat" cmpd="sng" algn="ctr">
+                      <a:solidFill>
+                        <a:srgbClr val="D5DBE3"/>
+                      </a:solidFill>
+                      <a:prstDash val="solid"/>
+                      <a:round/>
+                      <a:headEnd type="none" w="med" len="med"/>
+                      <a:tailEnd type="none" w="med" len="med"/>
+                    </a:lnL>
+                    <a:lnR w="12700" cap="flat" cmpd="sng" algn="ctr">
+                      <a:solidFill>
+                        <a:srgbClr val="D5DBE3"/>
+                      </a:solidFill>
+                      <a:prstDash val="solid"/>
+                      <a:round/>
+                      <a:headEnd type="none" w="med" len="med"/>
+                      <a:tailEnd type="none" w="med" len="med"/>
+                    </a:lnR>
+                    <a:lnT w="12700" cap="flat" cmpd="sng" algn="ctr">
+                      <a:solidFill>
+                        <a:srgbClr val="D5DBE3"/>
+                      </a:solidFill>
+                      <a:prstDash val="solid"/>
+                      <a:round/>
+                      <a:headEnd type="none" w="med" len="med"/>
+                      <a:tailEnd type="none" w="med" len="med"/>
+                    </a:lnT>
+                    <a:lnB w="12700" cap="flat" cmpd="sng" algn="ctr">
+                      <a:solidFill>
+                        <a:srgbClr val="D5DBE3"/>
+                      </a:solidFill>
+                      <a:prstDash val="solid"/>
+                      <a:round/>
+                      <a:headEnd type="none" w="med" len="med"/>
+                      <a:tailEnd type="none" w="med" len="med"/>
+                    </a:lnB>
+                  </a:tcPr>
+                </a:tc>
+                <a:tc>
+                  <a:txBody>
+                    <a:bodyPr/>
+                    <a:lstStyle/>
+                    <a:p>
+                      <a:pPr indent="0" marL="0">
+                        <a:buNone/>
+                      </a:pPr>
+                      <a:r>
+                        <a:rPr lang="en-US" sz="1200" dirty="0">
+                          <a:solidFill>
+                            <a:srgbClr val="1F2A37"/>
+                          </a:solidFill>
+                          <a:latin typeface="Microsoft YaHei" pitchFamily="34" charset="0"/>
+                          <a:ea typeface="Microsoft YaHei" pitchFamily="34" charset="-122"/>
+                          <a:cs typeface="Microsoft YaHei" pitchFamily="34" charset="-120"/>
+                        </a:rPr>
+                        <a:t>—</a:t>
+                      </a:r>
+                      <a:endParaRPr lang="en-US" sz="1200" dirty="0">
+                        <a:latin typeface="Microsoft YaHei" charset="0"/>
+                        <a:ea typeface="Microsoft YaHei" charset="0"/>
+                        <a:cs typeface="Microsoft YaHei" charset="0"/>
+                      </a:endParaRPr>
+                    </a:p>
+                  </a:txBody>
+                  <a:tcPr marL="91440" marR="91440" marT="54864" marB="54864" anchor="ctr">
+                    <a:lnL w="12700" cap="flat" cmpd="sng" algn="ctr">
+                      <a:solidFill>
+                        <a:srgbClr val="D5DBE3"/>
+                      </a:solidFill>
+                      <a:prstDash val="solid"/>
+                      <a:round/>
+                      <a:headEnd type="none" w="med" len="med"/>
+                      <a:tailEnd type="none" w="med" len="med"/>
+                    </a:lnL>
+                    <a:lnR w="12700" cap="flat" cmpd="sng" algn="ctr">
+                      <a:solidFill>
+                        <a:srgbClr val="D5DBE3"/>
+                      </a:solidFill>
+                      <a:prstDash val="solid"/>
+                      <a:round/>
+                      <a:headEnd type="none" w="med" len="med"/>
+                      <a:tailEnd type="none" w="med" len="med"/>
+                    </a:lnR>
+                    <a:lnT w="12700" cap="flat" cmpd="sng" algn="ctr">
+                      <a:solidFill>
+                        <a:srgbClr val="D5DBE3"/>
+                      </a:solidFill>
+                      <a:prstDash val="solid"/>
+                      <a:round/>
+                      <a:headEnd type="none" w="med" len="med"/>
+                      <a:tailEnd type="none" w="med" len="med"/>
+                    </a:lnT>
+                    <a:lnB w="12700" cap="flat" cmpd="sng" algn="ctr">
+                      <a:solidFill>
+                        <a:srgbClr val="D5DBE3"/>
+                      </a:solidFill>
+                      <a:prstDash val="solid"/>
+                      <a:round/>
+                      <a:headEnd type="none" w="med" len="med"/>
+                      <a:tailEnd type="none" w="med" len="med"/>
+                    </a:lnB>
+                  </a:tcPr>
+                </a:tc>
+                <a:tc>
+                  <a:txBody>
+                    <a:bodyPr/>
+                    <a:lstStyle/>
+                    <a:p>
+                      <a:pPr indent="0" marL="0">
+                        <a:buNone/>
+                      </a:pPr>
+                      <a:r>
+                        <a:rPr lang="en-US" sz="1200" dirty="0">
+                          <a:solidFill>
+                            <a:srgbClr val="1F2A37"/>
+                          </a:solidFill>
+                          <a:latin typeface="Microsoft YaHei" pitchFamily="34" charset="0"/>
+                          <a:ea typeface="Microsoft YaHei" pitchFamily="34" charset="-122"/>
+                          <a:cs typeface="Microsoft YaHei" pitchFamily="34" charset="-120"/>
+                        </a:rPr>
+                        <a:t>—</a:t>
+                      </a:r>
+                      <a:endParaRPr lang="en-US" sz="1200" dirty="0">
+                        <a:latin typeface="Microsoft YaHei" charset="0"/>
+                        <a:ea typeface="Microsoft YaHei" charset="0"/>
+                        <a:cs typeface="Microsoft YaHei" charset="0"/>
+                      </a:endParaRPr>
+                    </a:p>
+                  </a:txBody>
+                  <a:tcPr marL="91440" marR="91440" marT="54864" marB="54864" anchor="ctr">
+                    <a:lnL w="12700" cap="flat" cmpd="sng" algn="ctr">
+                      <a:solidFill>
+                        <a:srgbClr val="D5DBE3"/>
+                      </a:solidFill>
+                      <a:prstDash val="solid"/>
+                      <a:round/>
+                      <a:headEnd type="none" w="med" len="med"/>
+                      <a:tailEnd type="none" w="med" len="med"/>
+                    </a:lnL>
+                    <a:lnR w="12700" cap="flat" cmpd="sng" algn="ctr">
+                      <a:solidFill>
+                        <a:srgbClr val="D5DBE3"/>
+                      </a:solidFill>
+                      <a:prstDash val="solid"/>
+                      <a:round/>
+                      <a:headEnd type="none" w="med" len="med"/>
+                      <a:tailEnd type="none" w="med" len="med"/>
+                    </a:lnR>
+                    <a:lnT w="12700" cap="flat" cmpd="sng" algn="ctr">
+                      <a:solidFill>
+                        <a:srgbClr val="D5DBE3"/>
+                      </a:solidFill>
+                      <a:prstDash val="solid"/>
+                      <a:round/>
+                      <a:headEnd type="none" w="med" len="med"/>
+                      <a:tailEnd type="none" w="med" len="med"/>
+                    </a:lnT>
+                    <a:lnB w="12700" cap="flat" cmpd="sng" algn="ctr">
+                      <a:solidFill>
+                        <a:srgbClr val="D5DBE3"/>
+                      </a:solidFill>
+                      <a:prstDash val="solid"/>
+                      <a:round/>
+                      <a:headEnd type="none" w="med" len="med"/>
+                      <a:tailEnd type="none" w="med" len="med"/>
+                    </a:lnB>
+                  </a:tcPr>
+                </a:tc>
+              </a:tr>
+              <a:tr h="0">
+                <a:tc>
+                  <a:txBody>
+                    <a:bodyPr/>
+                    <a:lstStyle/>
+                    <a:p>
+                      <a:pPr indent="0" marL="0">
+                        <a:buNone/>
+                      </a:pPr>
+                      <a:r>
+                        <a:rPr lang="en-US" sz="1200" dirty="0">
+                          <a:solidFill>
+                            <a:srgbClr val="1F2A37"/>
+                          </a:solidFill>
+                          <a:latin typeface="Microsoft YaHei" pitchFamily="34" charset="0"/>
+                          <a:ea typeface="Microsoft YaHei" pitchFamily="34" charset="-122"/>
+                          <a:cs typeface="Microsoft YaHei" pitchFamily="34" charset="-120"/>
+                        </a:rPr>
+                        <a:t>3</a:t>
+                      </a:r>
+                      <a:endParaRPr lang="en-US" sz="1200" dirty="0">
+                        <a:latin typeface="Microsoft YaHei" charset="0"/>
+                        <a:ea typeface="Microsoft YaHei" charset="0"/>
+                        <a:cs typeface="Microsoft YaHei" charset="0"/>
+                      </a:endParaRPr>
+                    </a:p>
+                  </a:txBody>
+                  <a:tcPr marL="91440" marR="91440" marT="54864" marB="54864" anchor="ctr">
+                    <a:lnL w="12700" cap="flat" cmpd="sng" algn="ctr">
+                      <a:solidFill>
+                        <a:srgbClr val="D5DBE3"/>
+                      </a:solidFill>
+                      <a:prstDash val="solid"/>
+                      <a:round/>
+                      <a:headEnd type="none" w="med" len="med"/>
+                      <a:tailEnd type="none" w="med" len="med"/>
+                    </a:lnL>
+                    <a:lnR w="12700" cap="flat" cmpd="sng" algn="ctr">
+                      <a:solidFill>
+                        <a:srgbClr val="D5DBE3"/>
+                      </a:solidFill>
+                      <a:prstDash val="solid"/>
+                      <a:round/>
+                      <a:headEnd type="none" w="med" len="med"/>
+                      <a:tailEnd type="none" w="med" len="med"/>
+                    </a:lnR>
+                    <a:lnT w="12700" cap="flat" cmpd="sng" algn="ctr">
+                      <a:solidFill>
+                        <a:srgbClr val="D5DBE3"/>
+                      </a:solidFill>
+                      <a:prstDash val="solid"/>
+                      <a:round/>
+                      <a:headEnd type="none" w="med" len="med"/>
+                      <a:tailEnd type="none" w="med" len="med"/>
+                    </a:lnT>
+                    <a:lnB w="12700" cap="flat" cmpd="sng" algn="ctr">
+                      <a:solidFill>
+                        <a:srgbClr val="D5DBE3"/>
+                      </a:solidFill>
+                      <a:prstDash val="solid"/>
+                      <a:round/>
+                      <a:headEnd type="none" w="med" len="med"/>
+                      <a:tailEnd type="none" w="med" len="med"/>
+                    </a:lnB>
+                  </a:tcPr>
+                </a:tc>
+                <a:tc>
+                  <a:txBody>
+                    <a:bodyPr/>
+                    <a:lstStyle/>
+                    <a:p>
+                      <a:pPr indent="0" marL="0">
+                        <a:buNone/>
+                      </a:pPr>
+                      <a:r>
+                        <a:rPr lang="en-US" sz="1200" dirty="0">
+                          <a:solidFill>
+                            <a:srgbClr val="1F2A37"/>
+                          </a:solidFill>
+                          <a:latin typeface="Microsoft YaHei" pitchFamily="34" charset="0"/>
+                          <a:ea typeface="Microsoft YaHei" pitchFamily="34" charset="-122"/>
+                          <a:cs typeface="Microsoft YaHei" pitchFamily="34" charset="-120"/>
+                        </a:rPr>
+                        <a:t>run_sql(sql, metrics=[{key: "metric:门店营业额", revision: 0}])</a:t>
+                      </a:r>
+                      <a:endParaRPr lang="en-US" sz="1200" dirty="0">
+                        <a:latin typeface="Microsoft YaHei" charset="0"/>
+                        <a:ea typeface="Microsoft YaHei" charset="0"/>
+                        <a:cs typeface="Microsoft YaHei" charset="0"/>
+                      </a:endParaRPr>
+                    </a:p>
+                    <a:p>
+                      <a:pPr indent="0" marL="0">
+                        <a:buNone/>
+                      </a:pPr>
+                      <a:r>
+                        <a:rPr lang="en-US" sz="1100" dirty="0">
+                          <a:solidFill>
+                            <a:srgbClr val="5B6573"/>
+                          </a:solidFill>
+                          <a:latin typeface="Microsoft YaHei" pitchFamily="34" charset="0"/>
+                          <a:ea typeface="Microsoft YaHei" pitchFamily="34" charset="-122"/>
+                          <a:cs typeface="Microsoft YaHei" pitchFamily="34" charset="-120"/>
+                        </a:rPr>
+                        <a:t>这就是“声明”：这条 SQL 依据哪条定义的哪个修订</a:t>
+                      </a:r>
+                      <a:endParaRPr lang="en-US" sz="1200" dirty="0">
+                        <a:latin typeface="Microsoft YaHei" charset="0"/>
+                        <a:ea typeface="Microsoft YaHei" charset="0"/>
+                        <a:cs typeface="Microsoft YaHei" charset="0"/>
+                      </a:endParaRPr>
+                    </a:p>
+                  </a:txBody>
+                  <a:tcPr marL="91440" marR="91440" marT="54864" marB="54864" anchor="ctr">
+                    <a:lnL w="12700" cap="flat" cmpd="sng" algn="ctr">
+                      <a:solidFill>
+                        <a:srgbClr val="D5DBE3"/>
+                      </a:solidFill>
+                      <a:prstDash val="solid"/>
+                      <a:round/>
+                      <a:headEnd type="none" w="med" len="med"/>
+                      <a:tailEnd type="none" w="med" len="med"/>
+                    </a:lnL>
+                    <a:lnR w="12700" cap="flat" cmpd="sng" algn="ctr">
+                      <a:solidFill>
+                        <a:srgbClr val="D5DBE3"/>
+                      </a:solidFill>
+                      <a:prstDash val="solid"/>
+                      <a:round/>
+                      <a:headEnd type="none" w="med" len="med"/>
+                      <a:tailEnd type="none" w="med" len="med"/>
+                    </a:lnR>
+                    <a:lnT w="12700" cap="flat" cmpd="sng" algn="ctr">
+                      <a:solidFill>
+                        <a:srgbClr val="D5DBE3"/>
+                      </a:solidFill>
+                      <a:prstDash val="solid"/>
+                      <a:round/>
+                      <a:headEnd type="none" w="med" len="med"/>
+                      <a:tailEnd type="none" w="med" len="med"/>
+                    </a:lnT>
+                    <a:lnB w="12700" cap="flat" cmpd="sng" algn="ctr">
+                      <a:solidFill>
+                        <a:srgbClr val="D5DBE3"/>
+                      </a:solidFill>
+                      <a:prstDash val="solid"/>
+                      <a:round/>
+                      <a:headEnd type="none" w="med" len="med"/>
+                      <a:tailEnd type="none" w="med" len="med"/>
+                    </a:lnB>
+                  </a:tcPr>
+                </a:tc>
+                <a:tc>
+                  <a:txBody>
+                    <a:bodyPr/>
+                    <a:lstStyle/>
+                    <a:p>
+                      <a:pPr indent="0" marL="0">
+                        <a:buNone/>
+                      </a:pPr>
+                      <a:r>
+                        <a:rPr lang="en-US" sz="1200" dirty="0">
+                          <a:solidFill>
+                            <a:srgbClr val="1F2A37"/>
+                          </a:solidFill>
+                          <a:latin typeface="Microsoft YaHei" pitchFamily="34" charset="0"/>
+                          <a:ea typeface="Microsoft YaHei" pitchFamily="34" charset="-122"/>
+                          <a:cs typeface="Microsoft YaHei" pitchFamily="34" charset="-120"/>
+                        </a:rPr>
+                        <a:t>核对 r0 有效且是当前修订；在这条查询的快照上验证该修订的条件（粒度键唯一、日期键唯一、日期键完整性，命中缓存则复用）；同一快照上执行</a:t>
+                      </a:r>
+                      <a:endParaRPr lang="en-US" sz="1200" dirty="0">
+                        <a:latin typeface="Microsoft YaHei" charset="0"/>
+                        <a:ea typeface="Microsoft YaHei" charset="0"/>
+                        <a:cs typeface="Microsoft YaHei" charset="0"/>
+                      </a:endParaRPr>
+                    </a:p>
+                  </a:txBody>
+                  <a:tcPr marL="91440" marR="91440" marT="54864" marB="54864" anchor="ctr">
+                    <a:lnL w="12700" cap="flat" cmpd="sng" algn="ctr">
+                      <a:solidFill>
+                        <a:srgbClr val="D5DBE3"/>
+                      </a:solidFill>
+                      <a:prstDash val="solid"/>
+                      <a:round/>
+                      <a:headEnd type="none" w="med" len="med"/>
+                      <a:tailEnd type="none" w="med" len="med"/>
+                    </a:lnL>
+                    <a:lnR w="12700" cap="flat" cmpd="sng" algn="ctr">
+                      <a:solidFill>
+                        <a:srgbClr val="D5DBE3"/>
+                      </a:solidFill>
+                      <a:prstDash val="solid"/>
+                      <a:round/>
+                      <a:headEnd type="none" w="med" len="med"/>
+                      <a:tailEnd type="none" w="med" len="med"/>
+                    </a:lnR>
+                    <a:lnT w="12700" cap="flat" cmpd="sng" algn="ctr">
+                      <a:solidFill>
+                        <a:srgbClr val="D5DBE3"/>
+                      </a:solidFill>
+                      <a:prstDash val="solid"/>
+                      <a:round/>
+                      <a:headEnd type="none" w="med" len="med"/>
+                      <a:tailEnd type="none" w="med" len="med"/>
+                    </a:lnT>
+                    <a:lnB w="12700" cap="flat" cmpd="sng" algn="ctr">
+                      <a:solidFill>
+                        <a:srgbClr val="D5DBE3"/>
+                      </a:solidFill>
+                      <a:prstDash val="solid"/>
+                      <a:round/>
+                      <a:headEnd type="none" w="med" len="med"/>
+                      <a:tailEnd type="none" w="med" len="med"/>
+                    </a:lnB>
+                  </a:tcPr>
+                </a:tc>
+                <a:tc>
+                  <a:txBody>
+                    <a:bodyPr/>
+                    <a:lstStyle/>
+                    <a:p>
+                      <a:pPr indent="0" marL="0">
+                        <a:buNone/>
+                      </a:pPr>
+                      <a:r>
+                        <a:rPr lang="en-US" sz="1200" dirty="0">
+                          <a:solidFill>
+                            <a:srgbClr val="1F2A37"/>
+                          </a:solidFill>
+                          <a:latin typeface="Microsoft YaHei" pitchFamily="34" charset="0"/>
+                          <a:ea typeface="Microsoft YaHei" pitchFamily="34" charset="-122"/>
+                          <a:cs typeface="Microsoft YaHei" pitchFamily="34" charset="-120"/>
+                        </a:rPr>
+                        <a:t>{result: 13,069,651.80, ref: "r1"}</a:t>
+                      </a:r>
+                      <a:endParaRPr lang="en-US" sz="1200" dirty="0">
+                        <a:latin typeface="Microsoft YaHei" charset="0"/>
+                        <a:ea typeface="Microsoft YaHei" charset="0"/>
+                        <a:cs typeface="Microsoft YaHei" charset="0"/>
+                      </a:endParaRPr>
+                    </a:p>
+                    <a:p>
+                      <a:pPr indent="0" marL="0">
+                        <a:buNone/>
+                      </a:pPr>
+                      <a:r>
+                        <a:rPr lang="en-US" sz="1200" dirty="0">
+                          <a:solidFill>
+                            <a:srgbClr val="1F2A37"/>
+                          </a:solidFill>
+                          <a:latin typeface="Microsoft YaHei" pitchFamily="34" charset="0"/>
+                          <a:ea typeface="Microsoft YaHei" pitchFamily="34" charset="-122"/>
+                          <a:cs typeface="Microsoft YaHei" pitchFamily="34" charset="-120"/>
+                        </a:rPr>
+                        <a:t>以及 notices（本次为空）</a:t>
+                      </a:r>
+                      <a:endParaRPr lang="en-US" sz="1200" dirty="0">
+                        <a:latin typeface="Microsoft YaHei" charset="0"/>
+                        <a:ea typeface="Microsoft YaHei" charset="0"/>
+                        <a:cs typeface="Microsoft YaHei" charset="0"/>
+                      </a:endParaRPr>
+                    </a:p>
+                  </a:txBody>
+                  <a:tcPr marL="91440" marR="91440" marT="54864" marB="54864" anchor="ctr">
+                    <a:lnL w="12700" cap="flat" cmpd="sng" algn="ctr">
+                      <a:solidFill>
+                        <a:srgbClr val="D5DBE3"/>
+                      </a:solidFill>
+                      <a:prstDash val="solid"/>
+                      <a:round/>
+                      <a:headEnd type="none" w="med" len="med"/>
+                      <a:tailEnd type="none" w="med" len="med"/>
+                    </a:lnL>
+                    <a:lnR w="12700" cap="flat" cmpd="sng" algn="ctr">
+                      <a:solidFill>
+                        <a:srgbClr val="D5DBE3"/>
+                      </a:solidFill>
+                      <a:prstDash val="solid"/>
+                      <a:round/>
+                      <a:headEnd type="none" w="med" len="med"/>
+                      <a:tailEnd type="none" w="med" len="med"/>
+                    </a:lnR>
+                    <a:lnT w="12700" cap="flat" cmpd="sng" algn="ctr">
+                      <a:solidFill>
+                        <a:srgbClr val="D5DBE3"/>
+                      </a:solidFill>
+                      <a:prstDash val="solid"/>
+                      <a:round/>
+                      <a:headEnd type="none" w="med" len="med"/>
+                      <a:tailEnd type="none" w="med" len="med"/>
+                    </a:lnT>
+                    <a:lnB w="12700" cap="flat" cmpd="sng" algn="ctr">
+                      <a:solidFill>
+                        <a:srgbClr val="D5DBE3"/>
+                      </a:solidFill>
+                      <a:prstDash val="solid"/>
+                      <a:round/>
+                      <a:headEnd type="none" w="med" len="med"/>
+                      <a:tailEnd type="none" w="med" len="med"/>
+                    </a:lnB>
+                  </a:tcPr>
+                </a:tc>
+              </a:tr>
+              <a:tr h="0">
+                <a:tc>
+                  <a:txBody>
+                    <a:bodyPr/>
+                    <a:lstStyle/>
+                    <a:p>
+                      <a:pPr indent="0" marL="0">
+                        <a:buNone/>
+                      </a:pPr>
+                      <a:r>
+                        <a:rPr lang="en-US" sz="1200" dirty="0">
+                          <a:solidFill>
+                            <a:srgbClr val="1F2A37"/>
+                          </a:solidFill>
+                          <a:latin typeface="Microsoft YaHei" pitchFamily="34" charset="0"/>
+                          <a:ea typeface="Microsoft YaHei" pitchFamily="34" charset="-122"/>
+                          <a:cs typeface="Microsoft YaHei" pitchFamily="34" charset="-120"/>
+                        </a:rPr>
+                        <a:t>4</a:t>
+                      </a:r>
+                      <a:endParaRPr lang="en-US" sz="1200" dirty="0">
+                        <a:latin typeface="Microsoft YaHei" charset="0"/>
+                        <a:ea typeface="Microsoft YaHei" charset="0"/>
+                        <a:cs typeface="Microsoft YaHei" charset="0"/>
+                      </a:endParaRPr>
+                    </a:p>
+                  </a:txBody>
+                  <a:tcPr marL="91440" marR="91440" marT="54864" marB="54864" anchor="ctr">
+                    <a:lnL w="12700" cap="flat" cmpd="sng" algn="ctr">
+                      <a:solidFill>
+                        <a:srgbClr val="D5DBE3"/>
+                      </a:solidFill>
+                      <a:prstDash val="solid"/>
+                      <a:round/>
+                      <a:headEnd type="none" w="med" len="med"/>
+                      <a:tailEnd type="none" w="med" len="med"/>
+                    </a:lnL>
+                    <a:lnR w="12700" cap="flat" cmpd="sng" algn="ctr">
+                      <a:solidFill>
+                        <a:srgbClr val="D5DBE3"/>
+                      </a:solidFill>
+                      <a:prstDash val="solid"/>
+                      <a:round/>
+                      <a:headEnd type="none" w="med" len="med"/>
+                      <a:tailEnd type="none" w="med" len="med"/>
+                    </a:lnR>
+                    <a:lnT w="12700" cap="flat" cmpd="sng" algn="ctr">
+                      <a:solidFill>
+                        <a:srgbClr val="D5DBE3"/>
+                      </a:solidFill>
+                      <a:prstDash val="solid"/>
+                      <a:round/>
+                      <a:headEnd type="none" w="med" len="med"/>
+                      <a:tailEnd type="none" w="med" len="med"/>
+                    </a:lnT>
+                    <a:lnB w="12700" cap="flat" cmpd="sng" algn="ctr">
+                      <a:solidFill>
+                        <a:srgbClr val="D5DBE3"/>
+                      </a:solidFill>
+                      <a:prstDash val="solid"/>
+                      <a:round/>
+                      <a:headEnd type="none" w="med" len="med"/>
+                      <a:tailEnd type="none" w="med" len="med"/>
+                    </a:lnB>
+                  </a:tcPr>
+                </a:tc>
+                <a:tc>
+                  <a:txBody>
+                    <a:bodyPr/>
+                    <a:lstStyle/>
+                    <a:p>
+                      <a:pPr indent="0" marL="0">
+                        <a:buNone/>
+                      </a:pPr>
+                      <a:r>
+                        <a:rPr lang="en-US" sz="1200" dirty="0">
+                          <a:solidFill>
+                            <a:srgbClr val="1F2A37"/>
+                          </a:solidFill>
+                          <a:latin typeface="Microsoft YaHei" pitchFamily="34" charset="0"/>
+                          <a:ea typeface="Microsoft YaHei" pitchFamily="34" charset="-122"/>
+                          <a:cs typeface="Microsoft YaHei" pitchFamily="34" charset="-120"/>
+                        </a:rPr>
+                        <a:t>final_answer(13069651.80, used=["r1"])</a:t>
+                      </a:r>
+                      <a:endParaRPr lang="en-US" sz="1200" dirty="0">
+                        <a:latin typeface="Microsoft YaHei" charset="0"/>
+                        <a:ea typeface="Microsoft YaHei" charset="0"/>
+                        <a:cs typeface="Microsoft YaHei" charset="0"/>
+                      </a:endParaRPr>
+                    </a:p>
+                    <a:p>
+                      <a:pPr indent="0" marL="0">
+                        <a:buNone/>
+                      </a:pPr>
+                      <a:r>
+                        <a:rPr lang="en-US" sz="1100" dirty="0">
+                          <a:solidFill>
+                            <a:srgbClr val="5B6573"/>
+                          </a:solidFill>
+                          <a:latin typeface="Microsoft YaHei" pitchFamily="34" charset="0"/>
+                          <a:ea typeface="Microsoft YaHei" pitchFamily="34" charset="-122"/>
+                          <a:cs typeface="Microsoft YaHei" pitchFamily="34" charset="-120"/>
+                        </a:rPr>
+                        <a:t>答案引用 r1</a:t>
+                      </a:r>
+                      <a:endParaRPr lang="en-US" sz="1200" dirty="0">
+                        <a:latin typeface="Microsoft YaHei" charset="0"/>
+                        <a:ea typeface="Microsoft YaHei" charset="0"/>
+                        <a:cs typeface="Microsoft YaHei" charset="0"/>
+                      </a:endParaRPr>
+                    </a:p>
+                  </a:txBody>
+                  <a:tcPr marL="91440" marR="91440" marT="54864" marB="54864" anchor="ctr">
+                    <a:lnL w="12700" cap="flat" cmpd="sng" algn="ctr">
+                      <a:solidFill>
+                        <a:srgbClr val="D5DBE3"/>
+                      </a:solidFill>
+                      <a:prstDash val="solid"/>
+                      <a:round/>
+                      <a:headEnd type="none" w="med" len="med"/>
+                      <a:tailEnd type="none" w="med" len="med"/>
+                    </a:lnL>
+                    <a:lnR w="12700" cap="flat" cmpd="sng" algn="ctr">
+                      <a:solidFill>
+                        <a:srgbClr val="D5DBE3"/>
+                      </a:solidFill>
+                      <a:prstDash val="solid"/>
+                      <a:round/>
+                      <a:headEnd type="none" w="med" len="med"/>
+                      <a:tailEnd type="none" w="med" len="med"/>
+                    </a:lnR>
+                    <a:lnT w="12700" cap="flat" cmpd="sng" algn="ctr">
+                      <a:solidFill>
+                        <a:srgbClr val="D5DBE3"/>
+                      </a:solidFill>
+                      <a:prstDash val="solid"/>
+                      <a:round/>
+                      <a:headEnd type="none" w="med" len="med"/>
+                      <a:tailEnd type="none" w="med" len="med"/>
+                    </a:lnT>
+                    <a:lnB w="12700" cap="flat" cmpd="sng" algn="ctr">
+                      <a:solidFill>
+                        <a:srgbClr val="D5DBE3"/>
+                      </a:solidFill>
+                      <a:prstDash val="solid"/>
+                      <a:round/>
+                      <a:headEnd type="none" w="med" len="med"/>
+                      <a:tailEnd type="none" w="med" len="med"/>
+                    </a:lnB>
+                  </a:tcPr>
+                </a:tc>
+                <a:tc>
+                  <a:txBody>
+                    <a:bodyPr/>
+                    <a:lstStyle/>
+                    <a:p>
+                      <a:pPr indent="0" marL="0">
+                        <a:buNone/>
+                      </a:pPr>
+                      <a:r>
+                        <a:rPr lang="en-US" sz="1200" dirty="0">
+                          <a:solidFill>
+                            <a:srgbClr val="1F2A37"/>
+                          </a:solidFill>
+                          <a:latin typeface="Microsoft YaHei" pitchFamily="34" charset="0"/>
+                          <a:ea typeface="Microsoft YaHei" pitchFamily="34" charset="-122"/>
+                          <a:cs typeface="Microsoft YaHei" pitchFamily="34" charset="-120"/>
+                        </a:rPr>
+                        <a:t>记录溯源：答案 ← r1 ← 门店营业额 r0；日后该修订失效时据此通知</a:t>
+                      </a:r>
+                      <a:endParaRPr lang="en-US" sz="1200" dirty="0">
+                        <a:latin typeface="Microsoft YaHei" charset="0"/>
+                        <a:ea typeface="Microsoft YaHei" charset="0"/>
+                        <a:cs typeface="Microsoft YaHei" charset="0"/>
+                      </a:endParaRPr>
+                    </a:p>
+                  </a:txBody>
+                  <a:tcPr marL="91440" marR="91440" marT="54864" marB="54864" anchor="ctr">
+                    <a:lnL w="12700" cap="flat" cmpd="sng" algn="ctr">
+                      <a:solidFill>
+                        <a:srgbClr val="D5DBE3"/>
+                      </a:solidFill>
+                      <a:prstDash val="solid"/>
+                      <a:round/>
+                      <a:headEnd type="none" w="med" len="med"/>
+                      <a:tailEnd type="none" w="med" len="med"/>
+                    </a:lnL>
+                    <a:lnR w="12700" cap="flat" cmpd="sng" algn="ctr">
+                      <a:solidFill>
+                        <a:srgbClr val="D5DBE3"/>
+                      </a:solidFill>
+                      <a:prstDash val="solid"/>
+                      <a:round/>
+                      <a:headEnd type="none" w="med" len="med"/>
+                      <a:tailEnd type="none" w="med" len="med"/>
+                    </a:lnR>
+                    <a:lnT w="12700" cap="flat" cmpd="sng" algn="ctr">
+                      <a:solidFill>
+                        <a:srgbClr val="D5DBE3"/>
+                      </a:solidFill>
+                      <a:prstDash val="solid"/>
+                      <a:round/>
+                      <a:headEnd type="none" w="med" len="med"/>
+                      <a:tailEnd type="none" w="med" len="med"/>
+                    </a:lnT>
+                    <a:lnB w="12700" cap="flat" cmpd="sng" algn="ctr">
+                      <a:solidFill>
+                        <a:srgbClr val="D5DBE3"/>
+                      </a:solidFill>
+                      <a:prstDash val="solid"/>
+                      <a:round/>
+                      <a:headEnd type="none" w="med" len="med"/>
+                      <a:tailEnd type="none" w="med" len="med"/>
+                    </a:lnB>
+                  </a:tcPr>
+                </a:tc>
+                <a:tc>
+                  <a:txBody>
+                    <a:bodyPr/>
+                    <a:lstStyle/>
+                    <a:p>
+                      <a:pPr indent="0" marL="0">
+                        <a:buNone/>
+                      </a:pPr>
+                      <a:r>
+                        <a:rPr lang="en-US" sz="1200" dirty="0">
+                          <a:solidFill>
+                            <a:srgbClr val="1F2A37"/>
+                          </a:solidFill>
+                          <a:latin typeface="Microsoft YaHei" pitchFamily="34" charset="0"/>
+                          <a:ea typeface="Microsoft YaHei" pitchFamily="34" charset="-122"/>
+                          <a:cs typeface="Microsoft YaHei" pitchFamily="34" charset="-120"/>
+                        </a:rPr>
+                        <a:t>（判定正确与否在系统之外）</a:t>
+                      </a:r>
+                      <a:endParaRPr lang="en-US" sz="1200" dirty="0">
+                        <a:latin typeface="Microsoft YaHei" charset="0"/>
+                        <a:ea typeface="Microsoft YaHei" charset="0"/>
+                        <a:cs typeface="Microsoft YaHei" charset="0"/>
+                      </a:endParaRPr>
+                    </a:p>
+                  </a:txBody>
+                  <a:tcPr marL="91440" marR="91440" marT="54864" marB="54864" anchor="ctr">
+                    <a:lnL w="12700" cap="flat" cmpd="sng" algn="ctr">
+                      <a:solidFill>
+                        <a:srgbClr val="D5DBE3"/>
+                      </a:solidFill>
+                      <a:prstDash val="solid"/>
+                      <a:round/>
+                      <a:headEnd type="none" w="med" len="med"/>
+                      <a:tailEnd type="none" w="med" len="med"/>
+                    </a:lnL>
+                    <a:lnR w="12700" cap="flat" cmpd="sng" algn="ctr">
+                      <a:solidFill>
+                        <a:srgbClr val="D5DBE3"/>
+                      </a:solidFill>
+                      <a:prstDash val="solid"/>
+                      <a:round/>
+                      <a:headEnd type="none" w="med" len="med"/>
+                      <a:tailEnd type="none" w="med" len="med"/>
+                    </a:lnR>
+                    <a:lnT w="12700" cap="flat" cmpd="sng" algn="ctr">
+                      <a:solidFill>
+                        <a:srgbClr val="D5DBE3"/>
+                      </a:solidFill>
+                      <a:prstDash val="solid"/>
+                      <a:round/>
+                      <a:headEnd type="none" w="med" len="med"/>
+                      <a:tailEnd type="none" w="med" len="med"/>
+                    </a:lnT>
+                    <a:lnB w="12700" cap="flat" cmpd="sng" algn="ctr">
+                      <a:solidFill>
+                        <a:srgbClr val="D5DBE3"/>
+                      </a:solidFill>
+                      <a:prstDash val="solid"/>
+                      <a:round/>
+                      <a:headEnd type="none" w="med" len="med"/>
+                      <a:tailEnd type="none" w="med" len="med"/>
+                    </a:lnB>
+                  </a:tcPr>
+                </a:tc>
+              </a:tr>
+            </a:tbl>
+          </a:graphicData>
+        </a:graphic>
+      </p:graphicFrame>
+      <p:graphicFrame>
+        <p:nvGraphicFramePr>
+          <p:cNvPr id="13" name="Table 1"/>
+          <p:cNvGraphicFramePr>
+            <a:graphicFrameLocks noGrp="1"/>
+          </p:cNvGraphicFramePr>
+          <p:nvPr>
+            <p:extLst>
+              <p:ext uri="{D42A27DB-BD31-4B8C-83A1-F6EECF244321}">
+                <p14:modId xmlns:p14="http://schemas.microsoft.com/office/powerpoint/2010/main" val="1579011935"/>
+              </p:ext>
+            </p:extLst>
+          </p:nvPr>
+        </p:nvGraphicFramePr>
+        <p:xfrm>
+          <a:off x="548640" y="4160520"/>
+          <a:ext cx="11094415" cy="914400"/>
+        </p:xfrm>
+        <a:graphic>
+          <a:graphicData uri="http://schemas.openxmlformats.org/drawingml/2006/table">
+            <a:tbl>
+              <a:tblPr/>
+              <a:tblGrid>
+                <a:gridCol w="2926080"/>
+                <a:gridCol w="8168335"/>
+              </a:tblGrid>
+              <a:tr h="0">
+                <a:tc>
+                  <a:txBody>
+                    <a:bodyPr/>
+                    <a:lstStyle/>
+                    <a:p>
+                      <a:pPr indent="0" marL="0">
+                        <a:buNone/>
+                      </a:pPr>
+                      <a:r>
+                        <a:rPr lang="en-US" sz="1200" b="1" dirty="0">
+                          <a:solidFill>
+                            <a:srgbClr val="1F2A37"/>
+                          </a:solidFill>
+                          <a:latin typeface="Microsoft YaHei" pitchFamily="34" charset="0"/>
+                          <a:ea typeface="Microsoft YaHei" pitchFamily="34" charset="-122"/>
+                          <a:cs typeface="Microsoft YaHei" pitchFamily="34" charset="-120"/>
+                        </a:rPr>
+                        <a:t>声明的修订…</a:t>
+                      </a:r>
+                      <a:endParaRPr lang="en-US" sz="1200" dirty="0">
+                        <a:latin typeface="Microsoft YaHei" charset="0"/>
+                        <a:ea typeface="Microsoft YaHei" charset="0"/>
+                        <a:cs typeface="Microsoft YaHei" charset="0"/>
+                      </a:endParaRPr>
+                    </a:p>
+                  </a:txBody>
+                  <a:tcPr marL="91440" marR="91440" marT="54864" marB="54864" anchor="ctr">
+                    <a:lnL w="12700" cap="flat" cmpd="sng" algn="ctr">
+                      <a:solidFill>
+                        <a:srgbClr val="D5DBE3"/>
+                      </a:solidFill>
+                      <a:prstDash val="solid"/>
+                      <a:round/>
+                      <a:headEnd type="none" w="med" len="med"/>
+                      <a:tailEnd type="none" w="med" len="med"/>
+                    </a:lnL>
+                    <a:lnR w="12700" cap="flat" cmpd="sng" algn="ctr">
+                      <a:solidFill>
+                        <a:srgbClr val="D5DBE3"/>
+                      </a:solidFill>
+                      <a:prstDash val="solid"/>
+                      <a:round/>
+                      <a:headEnd type="none" w="med" len="med"/>
+                      <a:tailEnd type="none" w="med" len="med"/>
+                    </a:lnR>
+                    <a:lnT w="12700" cap="flat" cmpd="sng" algn="ctr">
+                      <a:solidFill>
+                        <a:srgbClr val="D5DBE3"/>
+                      </a:solidFill>
+                      <a:prstDash val="solid"/>
+                      <a:round/>
+                      <a:headEnd type="none" w="med" len="med"/>
+                      <a:tailEnd type="none" w="med" len="med"/>
+                    </a:lnT>
+                    <a:lnB w="12700" cap="flat" cmpd="sng" algn="ctr">
+                      <a:solidFill>
+                        <a:srgbClr val="D5DBE3"/>
+                      </a:solidFill>
+                      <a:prstDash val="solid"/>
+                      <a:round/>
+                      <a:headEnd type="none" w="med" len="med"/>
+                      <a:tailEnd type="none" w="med" len="med"/>
+                    </a:lnB>
+                    <a:solidFill>
+                      <a:srgbClr val="F1F3F6"/>
+                    </a:solidFill>
+                  </a:tcPr>
+                </a:tc>
+                <a:tc>
+                  <a:txBody>
+                    <a:bodyPr/>
+                    <a:lstStyle/>
+                    <a:p>
+                      <a:pPr indent="0" marL="0">
+                        <a:buNone/>
+                      </a:pPr>
+                      <a:r>
+                        <a:rPr lang="en-US" sz="1200" b="1" dirty="0">
+                          <a:solidFill>
+                            <a:srgbClr val="1F2A37"/>
+                          </a:solidFill>
+                          <a:latin typeface="Microsoft YaHei" pitchFamily="34" charset="0"/>
+                          <a:ea typeface="Microsoft YaHei" pitchFamily="34" charset="-122"/>
+                          <a:cs typeface="Microsoft YaHei" pitchFamily="34" charset="-120"/>
+                        </a:rPr>
+                        <a:t>MAVRA 的回应（系统记录原文）</a:t>
+                      </a:r>
+                      <a:endParaRPr lang="en-US" sz="1200" dirty="0">
+                        <a:latin typeface="Microsoft YaHei" charset="0"/>
+                        <a:ea typeface="Microsoft YaHei" charset="0"/>
+                        <a:cs typeface="Microsoft YaHei" charset="0"/>
+                      </a:endParaRPr>
+                    </a:p>
+                  </a:txBody>
+                  <a:tcPr marL="91440" marR="91440" marT="54864" marB="54864" anchor="ctr">
+                    <a:lnL w="12700" cap="flat" cmpd="sng" algn="ctr">
+                      <a:solidFill>
+                        <a:srgbClr val="D5DBE3"/>
+                      </a:solidFill>
+                      <a:prstDash val="solid"/>
+                      <a:round/>
+                      <a:headEnd type="none" w="med" len="med"/>
+                      <a:tailEnd type="none" w="med" len="med"/>
+                    </a:lnL>
+                    <a:lnR w="12700" cap="flat" cmpd="sng" algn="ctr">
+                      <a:solidFill>
+                        <a:srgbClr val="D5DBE3"/>
+                      </a:solidFill>
+                      <a:prstDash val="solid"/>
+                      <a:round/>
+                      <a:headEnd type="none" w="med" len="med"/>
+                      <a:tailEnd type="none" w="med" len="med"/>
+                    </a:lnR>
+                    <a:lnT w="12700" cap="flat" cmpd="sng" algn="ctr">
+                      <a:solidFill>
+                        <a:srgbClr val="D5DBE3"/>
+                      </a:solidFill>
+                      <a:prstDash val="solid"/>
+                      <a:round/>
+                      <a:headEnd type="none" w="med" len="med"/>
+                      <a:tailEnd type="none" w="med" len="med"/>
+                    </a:lnT>
+                    <a:lnB w="12700" cap="flat" cmpd="sng" algn="ctr">
+                      <a:solidFill>
+                        <a:srgbClr val="D5DBE3"/>
+                      </a:solidFill>
+                      <a:prstDash val="solid"/>
+                      <a:round/>
+                      <a:headEnd type="none" w="med" len="med"/>
+                      <a:tailEnd type="none" w="med" len="med"/>
+                    </a:lnB>
+                    <a:solidFill>
+                      <a:srgbClr val="F1F3F6"/>
+                    </a:solidFill>
+                  </a:tcPr>
+                </a:tc>
+              </a:tr>
+              <a:tr h="0">
+                <a:tc>
+                  <a:txBody>
+                    <a:bodyPr/>
+                    <a:lstStyle/>
+                    <a:p>
+                      <a:pPr indent="0" marL="0">
+                        <a:buNone/>
+                      </a:pPr>
+                      <a:r>
+                        <a:rPr lang="en-US" sz="1200" dirty="0">
+                          <a:solidFill>
+                            <a:srgbClr val="1F2A37"/>
+                          </a:solidFill>
+                          <a:latin typeface="Microsoft YaHei" pitchFamily="34" charset="0"/>
+                          <a:ea typeface="Microsoft YaHei" pitchFamily="34" charset="-122"/>
+                          <a:cs typeface="Microsoft YaHei" pitchFamily="34" charset="-120"/>
+                        </a:rPr>
+                        <a:t>已被修复替代（数据更正后仍声明 r0）</a:t>
+                      </a:r>
+                      <a:endParaRPr lang="en-US" sz="1200" dirty="0">
+                        <a:latin typeface="Microsoft YaHei" charset="0"/>
+                        <a:ea typeface="Microsoft YaHei" charset="0"/>
+                        <a:cs typeface="Microsoft YaHei" charset="0"/>
+                      </a:endParaRPr>
+                    </a:p>
+                  </a:txBody>
+                  <a:tcPr marL="91440" marR="91440" marT="54864" marB="54864" anchor="ctr">
+                    <a:lnL w="12700" cap="flat" cmpd="sng" algn="ctr">
+                      <a:solidFill>
+                        <a:srgbClr val="D5DBE3"/>
+                      </a:solidFill>
+                      <a:prstDash val="solid"/>
+                      <a:round/>
+                      <a:headEnd type="none" w="med" len="med"/>
+                      <a:tailEnd type="none" w="med" len="med"/>
+                    </a:lnL>
+                    <a:lnR w="12700" cap="flat" cmpd="sng" algn="ctr">
+                      <a:solidFill>
+                        <a:srgbClr val="D5DBE3"/>
+                      </a:solidFill>
+                      <a:prstDash val="solid"/>
+                      <a:round/>
+                      <a:headEnd type="none" w="med" len="med"/>
+                      <a:tailEnd type="none" w="med" len="med"/>
+                    </a:lnR>
+                    <a:lnT w="12700" cap="flat" cmpd="sng" algn="ctr">
+                      <a:solidFill>
+                        <a:srgbClr val="D5DBE3"/>
+                      </a:solidFill>
+                      <a:prstDash val="solid"/>
+                      <a:round/>
+                      <a:headEnd type="none" w="med" len="med"/>
+                      <a:tailEnd type="none" w="med" len="med"/>
+                    </a:lnT>
+                    <a:lnB w="12700" cap="flat" cmpd="sng" algn="ctr">
+                      <a:solidFill>
+                        <a:srgbClr val="D5DBE3"/>
+                      </a:solidFill>
+                      <a:prstDash val="solid"/>
+                      <a:round/>
+                      <a:headEnd type="none" w="med" len="med"/>
+                      <a:tailEnd type="none" w="med" len="med"/>
+                    </a:lnB>
+                  </a:tcPr>
+                </a:tc>
+                <a:tc>
+                  <a:txBody>
+                    <a:bodyPr/>
+                    <a:lstStyle/>
+                    <a:p>
+                      <a:pPr indent="0" marL="0">
+                        <a:buNone/>
+                      </a:pPr>
+                      <a:r>
+                        <a:rPr lang="en-US" sz="1200" b="1" dirty="0">
+                          <a:solidFill>
+                            <a:srgbClr val="B5392A"/>
+                          </a:solidFill>
+                          <a:latin typeface="Microsoft YaHei" pitchFamily="34" charset="0"/>
+                          <a:ea typeface="Microsoft YaHei" pitchFamily="34" charset="-122"/>
+                          <a:cs typeface="Microsoft YaHei" pitchFamily="34" charset="-120"/>
+                        </a:rPr>
+                        <a:t>拒绝：“指标经验 metric:门店营业额 已修订为 r1（你引用的是 r0），请重新调用 find_metric”</a:t>
+                      </a:r>
+                      <a:endParaRPr lang="en-US" sz="1200" dirty="0">
+                        <a:latin typeface="Microsoft YaHei" charset="0"/>
+                        <a:ea typeface="Microsoft YaHei" charset="0"/>
+                        <a:cs typeface="Microsoft YaHei" charset="0"/>
+                      </a:endParaRPr>
+                    </a:p>
+                  </a:txBody>
+                  <a:tcPr marL="91440" marR="91440" marT="54864" marB="54864" anchor="ctr">
+                    <a:lnL w="12700" cap="flat" cmpd="sng" algn="ctr">
+                      <a:solidFill>
+                        <a:srgbClr val="D5DBE3"/>
+                      </a:solidFill>
+                      <a:prstDash val="solid"/>
+                      <a:round/>
+                      <a:headEnd type="none" w="med" len="med"/>
+                      <a:tailEnd type="none" w="med" len="med"/>
+                    </a:lnL>
+                    <a:lnR w="12700" cap="flat" cmpd="sng" algn="ctr">
+                      <a:solidFill>
+                        <a:srgbClr val="D5DBE3"/>
+                      </a:solidFill>
+                      <a:prstDash val="solid"/>
+                      <a:round/>
+                      <a:headEnd type="none" w="med" len="med"/>
+                      <a:tailEnd type="none" w="med" len="med"/>
+                    </a:lnR>
+                    <a:lnT w="12700" cap="flat" cmpd="sng" algn="ctr">
+                      <a:solidFill>
+                        <a:srgbClr val="D5DBE3"/>
+                      </a:solidFill>
+                      <a:prstDash val="solid"/>
+                      <a:round/>
+                      <a:headEnd type="none" w="med" len="med"/>
+                      <a:tailEnd type="none" w="med" len="med"/>
+                    </a:lnT>
+                    <a:lnB w="12700" cap="flat" cmpd="sng" algn="ctr">
+                      <a:solidFill>
+                        <a:srgbClr val="D5DBE3"/>
+                      </a:solidFill>
+                      <a:prstDash val="solid"/>
+                      <a:round/>
+                      <a:headEnd type="none" w="med" len="med"/>
+                      <a:tailEnd type="none" w="med" len="med"/>
+                    </a:lnB>
+                  </a:tcPr>
+                </a:tc>
+              </a:tr>
+              <a:tr h="0">
+                <a:tc>
+                  <a:txBody>
+                    <a:bodyPr/>
+                    <a:lstStyle/>
+                    <a:p>
+                      <a:pPr indent="0" marL="0">
+                        <a:buNone/>
+                      </a:pPr>
+                      <a:r>
+                        <a:rPr lang="en-US" sz="1200" dirty="0">
+                          <a:solidFill>
+                            <a:srgbClr val="1F2A37"/>
+                          </a:solidFill>
+                          <a:latin typeface="Microsoft YaHei" pitchFamily="34" charset="0"/>
+                          <a:ea typeface="Microsoft YaHei" pitchFamily="34" charset="-122"/>
+                          <a:cs typeface="Microsoft YaHei" pitchFamily="34" charset="-120"/>
+                        </a:rPr>
+                        <a:t>已失效（重复加载后）</a:t>
+                      </a:r>
+                      <a:endParaRPr lang="en-US" sz="1200" dirty="0">
+                        <a:latin typeface="Microsoft YaHei" charset="0"/>
+                        <a:ea typeface="Microsoft YaHei" charset="0"/>
+                        <a:cs typeface="Microsoft YaHei" charset="0"/>
+                      </a:endParaRPr>
+                    </a:p>
+                  </a:txBody>
+                  <a:tcPr marL="91440" marR="91440" marT="54864" marB="54864" anchor="ctr">
+                    <a:lnL w="12700" cap="flat" cmpd="sng" algn="ctr">
+                      <a:solidFill>
+                        <a:srgbClr val="D5DBE3"/>
+                      </a:solidFill>
+                      <a:prstDash val="solid"/>
+                      <a:round/>
+                      <a:headEnd type="none" w="med" len="med"/>
+                      <a:tailEnd type="none" w="med" len="med"/>
+                    </a:lnL>
+                    <a:lnR w="12700" cap="flat" cmpd="sng" algn="ctr">
+                      <a:solidFill>
+                        <a:srgbClr val="D5DBE3"/>
+                      </a:solidFill>
+                      <a:prstDash val="solid"/>
+                      <a:round/>
+                      <a:headEnd type="none" w="med" len="med"/>
+                      <a:tailEnd type="none" w="med" len="med"/>
+                    </a:lnR>
+                    <a:lnT w="12700" cap="flat" cmpd="sng" algn="ctr">
+                      <a:solidFill>
+                        <a:srgbClr val="D5DBE3"/>
+                      </a:solidFill>
+                      <a:prstDash val="solid"/>
+                      <a:round/>
+                      <a:headEnd type="none" w="med" len="med"/>
+                      <a:tailEnd type="none" w="med" len="med"/>
+                    </a:lnT>
+                    <a:lnB w="12700" cap="flat" cmpd="sng" algn="ctr">
+                      <a:solidFill>
+                        <a:srgbClr val="D5DBE3"/>
+                      </a:solidFill>
+                      <a:prstDash val="solid"/>
+                      <a:round/>
+                      <a:headEnd type="none" w="med" len="med"/>
+                      <a:tailEnd type="none" w="med" len="med"/>
+                    </a:lnB>
+                  </a:tcPr>
+                </a:tc>
+                <a:tc>
+                  <a:txBody>
+                    <a:bodyPr/>
+                    <a:lstStyle/>
+                    <a:p>
+                      <a:pPr indent="0" marL="0">
+                        <a:buNone/>
+                      </a:pPr>
+                      <a:r>
+                        <a:rPr lang="en-US" sz="1200" b="1" dirty="0">
+                          <a:solidFill>
+                            <a:srgbClr val="B5392A"/>
+                          </a:solidFill>
+                          <a:latin typeface="Microsoft YaHei" pitchFamily="34" charset="0"/>
+                          <a:ea typeface="Microsoft YaHei" pitchFamily="34" charset="-122"/>
+                          <a:cs typeface="Microsoft YaHei" pitchFamily="34" charset="-120"/>
+                        </a:rPr>
+                        <a:t>拒绝：“当前不可用：已撤销：粒度守卫失败：store_sales(ss_item_sk, ss_ticket_number) 是否唯一，1110165 行只有 1000000 个不同键”</a:t>
+                      </a:r>
+                      <a:endParaRPr lang="en-US" sz="1200" dirty="0">
+                        <a:latin typeface="Microsoft YaHei" charset="0"/>
+                        <a:ea typeface="Microsoft YaHei" charset="0"/>
+                        <a:cs typeface="Microsoft YaHei" charset="0"/>
+                      </a:endParaRPr>
+                    </a:p>
+                  </a:txBody>
+                  <a:tcPr marL="91440" marR="91440" marT="54864" marB="54864" anchor="ctr">
+                    <a:lnL w="12700" cap="flat" cmpd="sng" algn="ctr">
+                      <a:solidFill>
+                        <a:srgbClr val="D5DBE3"/>
+                      </a:solidFill>
+                      <a:prstDash val="solid"/>
+                      <a:round/>
+                      <a:headEnd type="none" w="med" len="med"/>
+                      <a:tailEnd type="none" w="med" len="med"/>
+                    </a:lnL>
+                    <a:lnR w="12700" cap="flat" cmpd="sng" algn="ctr">
+                      <a:solidFill>
+                        <a:srgbClr val="D5DBE3"/>
+                      </a:solidFill>
+                      <a:prstDash val="solid"/>
+                      <a:round/>
+                      <a:headEnd type="none" w="med" len="med"/>
+                      <a:tailEnd type="none" w="med" len="med"/>
+                    </a:lnR>
+                    <a:lnT w="12700" cap="flat" cmpd="sng" algn="ctr">
+                      <a:solidFill>
+                        <a:srgbClr val="D5DBE3"/>
+                      </a:solidFill>
+                      <a:prstDash val="solid"/>
+                      <a:round/>
+                      <a:headEnd type="none" w="med" len="med"/>
+                      <a:tailEnd type="none" w="med" len="med"/>
+                    </a:lnT>
+                    <a:lnB w="12700" cap="flat" cmpd="sng" algn="ctr">
+                      <a:solidFill>
+                        <a:srgbClr val="D5DBE3"/>
+                      </a:solidFill>
+                      <a:prstDash val="solid"/>
+                      <a:round/>
+                      <a:headEnd type="none" w="med" len="med"/>
+                      <a:tailEnd type="none" w="med" len="med"/>
+                    </a:lnB>
+                  </a:tcPr>
+                </a:tc>
+              </a:tr>
+              <a:tr h="0">
+                <a:tc>
+                  <a:txBody>
+                    <a:bodyPr/>
+                    <a:lstStyle/>
+                    <a:p>
+                      <a:pPr indent="0" marL="0">
+                        <a:buNone/>
+                      </a:pPr>
+                      <a:r>
+                        <a:rPr lang="en-US" sz="1200" dirty="0">
+                          <a:solidFill>
+                            <a:srgbClr val="1F2A37"/>
+                          </a:solidFill>
+                          <a:latin typeface="Microsoft YaHei" pitchFamily="34" charset="0"/>
+                          <a:ea typeface="Microsoft YaHei" pitchFamily="34" charset="-122"/>
+                          <a:cs typeface="Microsoft YaHei" pitchFamily="34" charset="-120"/>
+                        </a:rPr>
+                        <a:t>已被等价且更省的修订替代</a:t>
+                      </a:r>
+                      <a:endParaRPr lang="en-US" sz="1200" dirty="0">
+                        <a:latin typeface="Microsoft YaHei" charset="0"/>
+                        <a:ea typeface="Microsoft YaHei" charset="0"/>
+                        <a:cs typeface="Microsoft YaHei" charset="0"/>
+                      </a:endParaRPr>
+                    </a:p>
+                  </a:txBody>
+                  <a:tcPr marL="91440" marR="91440" marT="54864" marB="54864" anchor="ctr">
+                    <a:lnL w="12700" cap="flat" cmpd="sng" algn="ctr">
+                      <a:solidFill>
+                        <a:srgbClr val="D5DBE3"/>
+                      </a:solidFill>
+                      <a:prstDash val="solid"/>
+                      <a:round/>
+                      <a:headEnd type="none" w="med" len="med"/>
+                      <a:tailEnd type="none" w="med" len="med"/>
+                    </a:lnL>
+                    <a:lnR w="12700" cap="flat" cmpd="sng" algn="ctr">
+                      <a:solidFill>
+                        <a:srgbClr val="D5DBE3"/>
+                      </a:solidFill>
+                      <a:prstDash val="solid"/>
+                      <a:round/>
+                      <a:headEnd type="none" w="med" len="med"/>
+                      <a:tailEnd type="none" w="med" len="med"/>
+                    </a:lnR>
+                    <a:lnT w="12700" cap="flat" cmpd="sng" algn="ctr">
+                      <a:solidFill>
+                        <a:srgbClr val="D5DBE3"/>
+                      </a:solidFill>
+                      <a:prstDash val="solid"/>
+                      <a:round/>
+                      <a:headEnd type="none" w="med" len="med"/>
+                      <a:tailEnd type="none" w="med" len="med"/>
+                    </a:lnT>
+                    <a:lnB w="12700" cap="flat" cmpd="sng" algn="ctr">
+                      <a:solidFill>
+                        <a:srgbClr val="D5DBE3"/>
+                      </a:solidFill>
+                      <a:prstDash val="solid"/>
+                      <a:round/>
+                      <a:headEnd type="none" w="med" len="med"/>
+                      <a:tailEnd type="none" w="med" len="med"/>
+                    </a:lnB>
+                  </a:tcPr>
+                </a:tc>
+                <a:tc>
+                  <a:txBody>
+                    <a:bodyPr/>
+                    <a:lstStyle/>
+                    <a:p>
+                      <a:pPr indent="0" marL="0">
+                        <a:buNone/>
+                      </a:pPr>
+                      <a:r>
+                        <a:rPr lang="en-US" sz="1200" b="1" dirty="0">
+                          <a:solidFill>
+                            <a:srgbClr val="2E7D4F"/>
+                          </a:solidFill>
+                          <a:latin typeface="Microsoft YaHei" pitchFamily="34" charset="0"/>
+                          <a:ea typeface="Microsoft YaHei" pitchFamily="34" charset="-122"/>
+                          <a:cs typeface="Microsoft YaHei" pitchFamily="34" charset="-120"/>
+                        </a:rPr>
+                        <a:t>接受，附通知：“已发布等价且更省的修订 r1（你引用的 r0 仍可用），建议重新调用 find_metric”</a:t>
+                      </a:r>
+                      <a:endParaRPr lang="en-US" sz="1200" dirty="0">
+                        <a:latin typeface="Microsoft YaHei" charset="0"/>
+                        <a:ea typeface="Microsoft YaHei" charset="0"/>
+                        <a:cs typeface="Microsoft YaHei" charset="0"/>
+                      </a:endParaRPr>
+                    </a:p>
+                  </a:txBody>
+                  <a:tcPr marL="91440" marR="91440" marT="54864" marB="54864" anchor="ctr">
+                    <a:lnL w="12700" cap="flat" cmpd="sng" algn="ctr">
+                      <a:solidFill>
+                        <a:srgbClr val="D5DBE3"/>
+                      </a:solidFill>
+                      <a:prstDash val="solid"/>
+                      <a:round/>
+                      <a:headEnd type="none" w="med" len="med"/>
+                      <a:tailEnd type="none" w="med" len="med"/>
+                    </a:lnL>
+                    <a:lnR w="12700" cap="flat" cmpd="sng" algn="ctr">
+                      <a:solidFill>
+                        <a:srgbClr val="D5DBE3"/>
+                      </a:solidFill>
+                      <a:prstDash val="solid"/>
+                      <a:round/>
+                      <a:headEnd type="none" w="med" len="med"/>
+                      <a:tailEnd type="none" w="med" len="med"/>
+                    </a:lnR>
+                    <a:lnT w="12700" cap="flat" cmpd="sng" algn="ctr">
+                      <a:solidFill>
+                        <a:srgbClr val="D5DBE3"/>
+                      </a:solidFill>
+                      <a:prstDash val="solid"/>
+                      <a:round/>
+                      <a:headEnd type="none" w="med" len="med"/>
+                      <a:tailEnd type="none" w="med" len="med"/>
+                    </a:lnT>
+                    <a:lnB w="12700" cap="flat" cmpd="sng" algn="ctr">
+                      <a:solidFill>
+                        <a:srgbClr val="D5DBE3"/>
+                      </a:solidFill>
+                      <a:prstDash val="solid"/>
+                      <a:round/>
+                      <a:headEnd type="none" w="med" len="med"/>
+                      <a:tailEnd type="none" w="med" len="med"/>
+                    </a:lnB>
+                  </a:tcPr>
+                </a:tc>
+              </a:tr>
+              <a:tr h="0">
+                <a:tc>
+                  <a:txBody>
+                    <a:bodyPr/>
+                    <a:lstStyle/>
+                    <a:p>
+                      <a:pPr indent="0" marL="0">
+                        <a:buNone/>
+                      </a:pPr>
+                      <a:r>
+                        <a:rPr lang="en-US" sz="1200" dirty="0">
+                          <a:solidFill>
+                            <a:srgbClr val="1F2A37"/>
+                          </a:solidFill>
+                          <a:latin typeface="Microsoft YaHei" pitchFamily="34" charset="0"/>
+                          <a:ea typeface="Microsoft YaHei" pitchFamily="34" charset="-122"/>
+                          <a:cs typeface="Microsoft YaHei" pitchFamily="34" charset="-120"/>
+                        </a:rPr>
+                        <a:t>没有声明</a:t>
+                      </a:r>
+                      <a:endParaRPr lang="en-US" sz="1200" dirty="0">
+                        <a:latin typeface="Microsoft YaHei" charset="0"/>
+                        <a:ea typeface="Microsoft YaHei" charset="0"/>
+                        <a:cs typeface="Microsoft YaHei" charset="0"/>
+                      </a:endParaRPr>
+                    </a:p>
+                  </a:txBody>
+                  <a:tcPr marL="91440" marR="91440" marT="54864" marB="54864" anchor="ctr">
+                    <a:lnL w="12700" cap="flat" cmpd="sng" algn="ctr">
+                      <a:solidFill>
+                        <a:srgbClr val="D5DBE3"/>
+                      </a:solidFill>
+                      <a:prstDash val="solid"/>
+                      <a:round/>
+                      <a:headEnd type="none" w="med" len="med"/>
+                      <a:tailEnd type="none" w="med" len="med"/>
+                    </a:lnL>
+                    <a:lnR w="12700" cap="flat" cmpd="sng" algn="ctr">
+                      <a:solidFill>
+                        <a:srgbClr val="D5DBE3"/>
+                      </a:solidFill>
+                      <a:prstDash val="solid"/>
+                      <a:round/>
+                      <a:headEnd type="none" w="med" len="med"/>
+                      <a:tailEnd type="none" w="med" len="med"/>
+                    </a:lnR>
+                    <a:lnT w="12700" cap="flat" cmpd="sng" algn="ctr">
+                      <a:solidFill>
+                        <a:srgbClr val="D5DBE3"/>
+                      </a:solidFill>
+                      <a:prstDash val="solid"/>
+                      <a:round/>
+                      <a:headEnd type="none" w="med" len="med"/>
+                      <a:tailEnd type="none" w="med" len="med"/>
+                    </a:lnT>
+                    <a:lnB w="12700" cap="flat" cmpd="sng" algn="ctr">
+                      <a:solidFill>
+                        <a:srgbClr val="D5DBE3"/>
+                      </a:solidFill>
+                      <a:prstDash val="solid"/>
+                      <a:round/>
+                      <a:headEnd type="none" w="med" len="med"/>
+                      <a:tailEnd type="none" w="med" len="med"/>
+                    </a:lnB>
+                  </a:tcPr>
+                </a:tc>
+                <a:tc>
+                  <a:txBody>
+                    <a:bodyPr/>
+                    <a:lstStyle/>
+                    <a:p>
+                      <a:pPr indent="0" marL="0">
+                        <a:buNone/>
+                      </a:pPr>
+                      <a:r>
+                        <a:rPr lang="en-US" sz="1200" dirty="0">
+                          <a:solidFill>
+                            <a:srgbClr val="1F2A37"/>
+                          </a:solidFill>
+                          <a:latin typeface="Microsoft YaHei" pitchFamily="34" charset="0"/>
+                          <a:ea typeface="Microsoft YaHei" pitchFamily="34" charset="-122"/>
+                          <a:cs typeface="Microsoft YaHei" pitchFamily="34" charset="-120"/>
+                        </a:rPr>
+                        <a:t>照常执行与审查（连接写法、粒度过滤），但不在“条件成立”的保证范围内</a:t>
+                      </a:r>
+                      <a:endParaRPr lang="en-US" sz="1200" dirty="0">
+                        <a:latin typeface="Microsoft YaHei" charset="0"/>
+                        <a:ea typeface="Microsoft YaHei" charset="0"/>
+                        <a:cs typeface="Microsoft YaHei" charset="0"/>
+                      </a:endParaRPr>
+                    </a:p>
+                  </a:txBody>
+                  <a:tcPr marL="91440" marR="91440" marT="54864" marB="54864" anchor="ctr">
+                    <a:lnL w="12700" cap="flat" cmpd="sng" algn="ctr">
+                      <a:solidFill>
+                        <a:srgbClr val="D5DBE3"/>
+                      </a:solidFill>
+                      <a:prstDash val="solid"/>
+                      <a:round/>
+                      <a:headEnd type="none" w="med" len="med"/>
+                      <a:tailEnd type="none" w="med" len="med"/>
+                    </a:lnL>
+                    <a:lnR w="12700" cap="flat" cmpd="sng" algn="ctr">
+                      <a:solidFill>
+                        <a:srgbClr val="D5DBE3"/>
+                      </a:solidFill>
+                      <a:prstDash val="solid"/>
+                      <a:round/>
+                      <a:headEnd type="none" w="med" len="med"/>
+                      <a:tailEnd type="none" w="med" len="med"/>
+                    </a:lnR>
+                    <a:lnT w="12700" cap="flat" cmpd="sng" algn="ctr">
+                      <a:solidFill>
+                        <a:srgbClr val="D5DBE3"/>
+                      </a:solidFill>
+                      <a:prstDash val="solid"/>
+                      <a:round/>
+                      <a:headEnd type="none" w="med" len="med"/>
+                      <a:tailEnd type="none" w="med" len="med"/>
+                    </a:lnT>
+                    <a:lnB w="12700" cap="flat" cmpd="sng" algn="ctr">
+                      <a:solidFill>
+                        <a:srgbClr val="D5DBE3"/>
+                      </a:solidFill>
+                      <a:prstDash val="solid"/>
+                      <a:round/>
+                      <a:headEnd type="none" w="med" len="med"/>
+                      <a:tailEnd type="none" w="med" len="med"/>
+                    </a:lnB>
+                  </a:tcPr>
+                </a:tc>
+              </a:tr>
+            </a:tbl>
+          </a:graphicData>
+        </a:graphic>
+      </p:graphicFrame>
+      <p:sp>
+        <p:nvSpPr>
+          <p:cNvPr id="5" name="Text 1"/>
+          <p:cNvSpPr txBox="1"/>
+          <p:nvPr/>
+        </p:nvSpPr>
+        <p:spPr>
+          <a:xfrm>
+            <a:off x="548640" y="6263640"/>
+            <a:ext cx="10362895" cy="365760"/>
+          </a:xfrm>
+          <a:prstGeom prst="rect">
+            <a:avLst/>
+          </a:prstGeom>
+          <a:noFill/>
+          <a:ln/>
+        </p:spPr>
+        <p:txBody>
+          <a:bodyPr wrap="square" lIns="0" tIns="0" rIns="0" bIns="0" rtlCol="0" anchor="b"/>
+          <a:lstStyle/>
+          <a:p>
+            <a:pPr indent="0" marL="0">
+              <a:buNone/>
+            </a:pPr>
+            <a:r>
+              <a:rPr lang="en-US" sz="1100" dirty="0">
+                <a:solidFill>
+                  <a:srgbClr val="5B6573"/>
+                </a:solidFill>
+                <a:latin typeface="Microsoft YaHei" pitchFamily="34" charset="0"/>
+                <a:ea typeface="Microsoft YaHei" pitchFamily="34" charset="-122"/>
+                <a:cs typeface="Microsoft YaHei" pitchFamily="34" charset="-120"/>
+              </a:rPr>
+              <a:t>记录：noctis results/scen-20261002/dsv41flash-r1-g3fix--snap，留出题 M1-P1（3 轮、4 次工具调用、5.6 秒）；15 道留出题全部声明了依据的修订。修订号从 0 计起，图中的 v1/v2 即 r0/r1。拒绝与通知文字取自运行记录。</a:t>
+            </a:r>
+            <a:endParaRPr lang="en-US" sz="1100" dirty="0"/>
+          </a:p>
+        </p:txBody>
+      </p:sp>
+      <p:sp>
+        <p:nvSpPr>
+          <p:cNvPr id="25" name="Slide Number Placeholder 0"/>
+          <p:cNvSpPr>
+            <a:spLocks noGrp="1"/>
+          </p:cNvSpPr>
+          <p:nvPr>
+            <p:ph type="sldNum" sz="quarter" idx="4294967295"/>
+          </p:nvPr>
+        </p:nvSpPr>
+        <p:spPr>
+          <a:xfrm>
+            <a:off x="11185855" y="6446520"/>
+            <a:ext cx="457200" cy="274320"/>
+          </a:xfrm>
+          <a:prstGeom prst="rect">
+            <a:avLst/>
+          </a:prstGeom>
+          <a:extLst>
+            <a:ext uri="{C572A759-6A51-4108-AA02-DFA0A04FC94B}">
+              <ma14:wrappingTextBoxFlag xmlns:ma14="http://schemas.microsoft.com/office/mac/drawingml/2011/main" val="0"/>
+            </a:ext>
+          </a:extLst>
+        </p:spPr>
+        <p:txBody>
+          <a:bodyPr/>
+          <a:lstStyle>
+            <a:lvl1pPr>
+              <a:defRPr sz="1000">
+                <a:solidFill>
+                  <a:srgbClr val="5B6573"/>
+                </a:solidFill>
+                <a:latin typeface="Microsoft YaHei"/>
+                <a:ea typeface="Microsoft YaHei"/>
+                <a:cs typeface="Microsoft YaHei"/>
+              </a:defRPr>
+            </a:lvl1pPr>
+          </a:lstStyle>
+          <a:p>
+            <a:pPr algn="r"/>
+            <a:fld id="{F7021451-1387-4CA6-816F-3879F97B5CBC}" type="slidenum">
+              <a:rPr b="0" lang="en-US"/>
+              <a:t>6</a:t>
+            </a:fld>
+            <a:endParaRPr lang="en-US"/>
+          </a:p>
+        </p:txBody>
+      </p:sp>
+    </p:spTree>
+  </p:cSld>
+  <p:clrMapOvr>
+    <a:masterClrMapping/>
+  </p:clrMapOvr>
+</p:sld>
+</file>
+
+<file path=ppt/slides/slide7.xml><?xml version="1.0" encoding="utf-8"?>
+<p:sld xmlns:a="http://schemas.openxmlformats.org/drawingml/2006/main" xmlns:r="http://schemas.openxmlformats.org/officeDocument/2006/relationships" xmlns:p="http://schemas.openxmlformats.org/presentationml/2006/main">
+  <p:cSld name="Slide 7">
     <p:spTree>
       <p:nvGrpSpPr>
         <p:cNvPr id="1" name=""/>
@@ -22055,7 +27078,7 @@
       </p:sp>
       <p:graphicFrame>
         <p:nvGraphicFramePr>
-          <p:cNvPr id="7" name="Table 0"/>
+          <p:cNvPr id="8" name="Table 0"/>
           <p:cNvGraphicFramePr>
             <a:graphicFrameLocks noGrp="1"/>
           </p:cNvGraphicFramePr>
@@ -22433,7 +27456,7 @@
       </p:sp>
       <p:graphicFrame>
         <p:nvGraphicFramePr>
-          <p:cNvPr id="13" name="Table 1"/>
+          <p:cNvPr id="15" name="Table 1"/>
           <p:cNvGraphicFramePr>
             <a:graphicFrameLocks noGrp="1"/>
           </p:cNvGraphicFramePr>
@@ -23727,7 +28750,7 @@
             <a:pPr algn="r"/>
             <a:fld id="{F7021451-1387-4CA6-816F-3879F97B5CBC}" type="slidenum">
               <a:rPr b="0" lang="en-US"/>
-              <a:t>6</a:t>
+              <a:t>7</a:t>
             </a:fld>
             <a:endParaRPr lang="en-US"/>
           </a:p>
@@ -23741,9 +28764,9 @@
 </p:sld>
 </file>
 
-<file path=ppt/slides/slide7.xml><?xml version="1.0" encoding="utf-8"?>
+<file path=ppt/slides/slide8.xml><?xml version="1.0" encoding="utf-8"?>
 <p:sld xmlns:a="http://schemas.openxmlformats.org/drawingml/2006/main" xmlns:r="http://schemas.openxmlformats.org/officeDocument/2006/relationships" xmlns:p="http://schemas.openxmlformats.org/presentationml/2006/main">
-  <p:cSld name="Slide 7">
+  <p:cSld name="Slide 8">
     <p:spTree>
       <p:nvGrpSpPr>
         <p:cNvPr id="1" name=""/>
@@ -23801,7 +28824,7 @@
       </p:sp>
       <p:graphicFrame>
         <p:nvGraphicFramePr>
-          <p:cNvPr id="8" name="Table 0"/>
+          <p:cNvPr id="9" name="Table 0"/>
           <p:cNvGraphicFramePr>
             <a:graphicFrameLocks noGrp="1"/>
           </p:cNvGraphicFramePr>
@@ -25318,7 +30341,7 @@
             <a:pPr algn="r"/>
             <a:fld id="{F7021451-1387-4CA6-816F-3879F97B5CBC}" type="slidenum">
               <a:rPr b="0" lang="en-US"/>
-              <a:t>7</a:t>
+              <a:t>8</a:t>
             </a:fld>
             <a:endParaRPr lang="en-US"/>
           </a:p>
@@ -25332,9 +30355,9 @@
 </p:sld>
 </file>
 
-<file path=ppt/slides/slide8.xml><?xml version="1.0" encoding="utf-8"?>
+<file path=ppt/slides/slide9.xml><?xml version="1.0" encoding="utf-8"?>
 <p:sld xmlns:a="http://schemas.openxmlformats.org/drawingml/2006/main" xmlns:r="http://schemas.openxmlformats.org/officeDocument/2006/relationships" xmlns:p="http://schemas.openxmlformats.org/presentationml/2006/main">
-  <p:cSld name="Slide 8">
+  <p:cSld name="Slide 9">
     <p:spTree>
       <p:nvGrpSpPr>
         <p:cNvPr id="1" name=""/>
@@ -25431,7 +30454,7 @@
       </p:sp>
       <p:graphicFrame>
         <p:nvGraphicFramePr>
-          <p:cNvPr id="9" name="Table 0"/>
+          <p:cNvPr id="10" name="Table 0"/>
           <p:cNvGraphicFramePr>
             <a:graphicFrameLocks noGrp="1"/>
           </p:cNvGraphicFramePr>
@@ -26362,7 +31385,7 @@
       </p:sp>
       <p:graphicFrame>
         <p:nvGraphicFramePr>
-          <p:cNvPr id="17" name="Table 1"/>
+          <p:cNvPr id="19" name="Table 1"/>
           <p:cNvGraphicFramePr>
             <a:graphicFrameLocks noGrp="1"/>
           </p:cNvGraphicFramePr>
@@ -27113,144 +32136,6 @@
           </a:p>
         </p:txBody>
       </p:sp>
-      <p:sp>
-        <p:nvSpPr>
-          <p:cNvPr id="25" name="Slide Number Placeholder 0"/>
-          <p:cNvSpPr>
-            <a:spLocks noGrp="1"/>
-          </p:cNvSpPr>
-          <p:nvPr>
-            <p:ph type="sldNum" sz="quarter" idx="4294967295"/>
-          </p:nvPr>
-        </p:nvSpPr>
-        <p:spPr>
-          <a:xfrm>
-            <a:off x="11185855" y="6446520"/>
-            <a:ext cx="457200" cy="274320"/>
-          </a:xfrm>
-          <a:prstGeom prst="rect">
-            <a:avLst/>
-          </a:prstGeom>
-          <a:extLst>
-            <a:ext uri="{C572A759-6A51-4108-AA02-DFA0A04FC94B}">
-              <ma14:wrappingTextBoxFlag xmlns:ma14="http://schemas.microsoft.com/office/mac/drawingml/2011/main" val="0"/>
-            </a:ext>
-          </a:extLst>
-        </p:spPr>
-        <p:txBody>
-          <a:bodyPr/>
-          <a:lstStyle>
-            <a:lvl1pPr>
-              <a:defRPr sz="1000">
-                <a:solidFill>
-                  <a:srgbClr val="5B6573"/>
-                </a:solidFill>
-                <a:latin typeface="Microsoft YaHei"/>
-                <a:ea typeface="Microsoft YaHei"/>
-                <a:cs typeface="Microsoft YaHei"/>
-              </a:defRPr>
-            </a:lvl1pPr>
-          </a:lstStyle>
-          <a:p>
-            <a:pPr algn="r"/>
-            <a:fld id="{F7021451-1387-4CA6-816F-3879F97B5CBC}" type="slidenum">
-              <a:rPr b="0" lang="en-US"/>
-              <a:t>8</a:t>
-            </a:fld>
-            <a:endParaRPr lang="en-US"/>
-          </a:p>
-        </p:txBody>
-      </p:sp>
-    </p:spTree>
-  </p:cSld>
-  <p:clrMapOvr>
-    <a:masterClrMapping/>
-  </p:clrMapOvr>
-</p:sld>
-</file>
-
-<file path=ppt/slides/slide9.xml><?xml version="1.0" encoding="utf-8"?>
-<p:sld xmlns:a="http://schemas.openxmlformats.org/drawingml/2006/main" xmlns:r="http://schemas.openxmlformats.org/officeDocument/2006/relationships" xmlns:p="http://schemas.openxmlformats.org/presentationml/2006/main">
-  <p:cSld name="Slide 9">
-    <p:spTree>
-      <p:nvGrpSpPr>
-        <p:cNvPr id="1" name=""/>
-        <p:cNvGrpSpPr/>
-        <p:nvPr/>
-      </p:nvGrpSpPr>
-      <p:grpSpPr>
-        <a:xfrm>
-          <a:off x="0" y="0"/>
-          <a:ext cx="0" cy="0"/>
-          <a:chOff x="0" y="0"/>
-          <a:chExt cx="0" cy="0"/>
-        </a:xfrm>
-      </p:grpSpPr>
-      <p:sp>
-        <p:nvSpPr>
-          <p:cNvPr id="2" name="Text 0"/>
-          <p:cNvSpPr/>
-          <p:nvPr>
-            <p:ph idx="100" type="title" hasCustomPrompt="1"/>
-          </p:nvPr>
-        </p:nvSpPr>
-        <p:spPr>
-          <a:xfrm>
-            <a:off x="548640" y="274320"/>
-            <a:ext cx="11094415" cy="685800"/>
-          </a:xfrm>
-          <a:prstGeom prst="rect">
-            <a:avLst/>
-          </a:prstGeom>
-          <a:noFill/>
-          <a:ln/>
-        </p:spPr>
-        <p:txBody>
-          <a:bodyPr wrap="square" lIns="0" tIns="0" rIns="0" bIns="0" rtlCol="0" anchor="ctr"/>
-          <a:lstStyle/>
-          <a:p>
-            <a:pPr algn="l" indent="0" marL="0">
-              <a:buNone/>
-            </a:pPr>
-            <a:r>
-              <a:rPr lang="en-US" sz="2800" b="1" dirty="0">
-                <a:solidFill>
-                  <a:srgbClr val="1F2A37"/>
-                </a:solidFill>
-                <a:latin typeface="Microsoft YaHei" pitchFamily="34" charset="0"/>
-                <a:ea typeface="Microsoft YaHei" pitchFamily="34" charset="-122"/>
-                <a:cs typeface="Microsoft YaHei" pitchFamily="34" charset="-120"/>
-              </a:rPr>
-              <a:t>读取与使用：一次请求的处理路径</a:t>
-            </a:r>
-            <a:endParaRPr lang="en-US" sz="2800" dirty="0"/>
-          </a:p>
-        </p:txBody>
-      </p:sp>
-      <p:pic>
-        <p:nvPicPr>
-          <p:cNvPr id="3" name="lookup" descr="/home/zhanhao/mingtai/ppt/agentdb-mid/tools/deck/figures/lookup-zh.png">    </p:cNvPr>
-          <p:cNvPicPr>
-            <a:picLocks noChangeAspect="1"/>
-          </p:cNvPicPr>
-          <p:nvPr/>
-        </p:nvPicPr>
-        <p:blipFill>
-          <a:blip r:embed="rId1"/>
-          <a:stretch>
-            <a:fillRect/>
-          </a:stretch>
-        </p:blipFill>
-        <p:spPr>
-          <a:xfrm>
-            <a:off x="802199" y="1097280"/>
-            <a:ext cx="10587297" cy="5257800"/>
-          </a:xfrm>
-          <a:prstGeom prst="rect">
-            <a:avLst/>
-          </a:prstGeom>
-        </p:spPr>
-      </p:pic>
       <p:sp>
         <p:nvSpPr>
           <p:cNvPr id="25" name="Slide Number Placeholder 0"/>

--- a/docs/mavra-system.pptx
+++ b/docs/mavra-system.pptx
@@ -125,18 +125,18 @@
   <p:extLst>
     <p:ext uri="{521415D9-36F7-43E2-AB2F-B90AF26B5E84}">
       <p14:sectionLst xmlns:p14="http://schemas.microsoft.com/office/powerpoint/2010/main">
-        <p14:section name="开场" id="{63157dfb-1f3c-6a09-2c31-89ba51223bf0}">
+        <p14:section name="开场" id="{bfa6fb80-c62b-da49-9a77-c6ce9ba56a5f}">
           <p14:sldIdLst>
             <p14:sldId id="256"/>
           </p14:sldIdLst>
         </p14:section>
-        <p14:section name="问题" id="{2ddbdae5-331a-db58-4768-f45d6b1cfca1}">
+        <p14:section name="问题" id="{2f85e30e-1698-416b-2b1d-6beaef6a19a1}">
           <p14:sldIdLst>
             <p14:sldId id="257"/>
             <p14:sldId id="258"/>
           </p14:sldIdLst>
         </p14:section>
-        <p14:section name="MAVRA" id="{69cd4ed1-1a87-735b-3434-741c7bc16c58}">
+        <p14:section name="MAVRA" id="{8824314a-5bb9-1769-0b46-653bb45f7994}">
           <p14:sldIdLst>
             <p14:sldId id="259"/>
             <p14:sldId id="260"/>
@@ -145,37 +145,37 @@
             <p14:sldId id="263"/>
           </p14:sldIdLst>
         </p14:section>
-        <p14:section name="检查什么" id="{fcda4b9b-d11f-30e2-f1ce-a16a1b983c1c}">
+        <p14:section name="发布" id="{3f651dc4-2ebd-2027-fa9b-51f70e550271}">
           <p14:sldIdLst>
             <p14:sldId id="264"/>
             <p14:sldId id="265"/>
           </p14:sldIdLst>
         </p14:section>
-        <p14:section name="何时检查" id="{9276c591-d69c-0f17-2c96-a6d6829e746c}">
+        <p14:section name="依赖" id="{949e6500-0f0a-3fae-eba6-ad46bbfeb065}">
           <p14:sldIdLst>
             <p14:sldId id="266"/>
             <p14:sldId id="267"/>
           </p14:sldIdLst>
         </p14:section>
-        <p14:section name="失败后怎么办" id="{da802fdd-3e8d-8363-1c4f-6e9edefbfbf3}">
+        <p14:section name="维护与改进" id="{4d02f6b6-24bd-6e45-9352-c99348aef056}">
           <p14:sldIdLst>
             <p14:sldId id="268"/>
             <p14:sldId id="269"/>
           </p14:sldIdLst>
         </p14:section>
-        <p14:section name="真实记录" id="{74419dd0-7bc1-4708-2027-7204530175cb}">
+        <p14:section name="真实记录" id="{29db8f28-a1bd-7cea-0076-cb9bf46d062b}">
           <p14:sldIdLst>
             <p14:sldId id="270"/>
             <p14:sldId id="271"/>
           </p14:sldIdLst>
         </p14:section>
-        <p14:section name="实验结果" id="{ab66735a-ba4d-4525-ab89-ab90b7d9f88c}">
+        <p14:section name="实验结果" id="{3191ee22-7cd6-8121-fa9e-02f3d648a5af}">
           <p14:sldIdLst>
             <p14:sldId id="272"/>
             <p14:sldId id="273"/>
           </p14:sldIdLst>
         </p14:section>
-        <p14:section name="边界与总结" id="{a8a48273-6501-0c92-e28a-969b041d0b37}">
+        <p14:section name="边界与总结" id="{45e03bf9-2bd1-3795-dd7f-f43fb87616cb}">
           <p14:sldIdLst>
             <p14:sldId id="274"/>
           </p14:sldIdLst>
@@ -584,7 +584,7 @@
           <a:p>
             <a:r>
               <a:rPr lang="en-US" dirty="0"/>
-              <a:t>很多数据智能体在同一个数据库上工作。一个智能体学会了怎么算“营业额”，别的智能体也想用；但数据库每天都在更新，学到的规则可能在不知不觉中不再适用，而 SQL 照样能执行。MAVRA 是放在智能体与数据库之间的中间件：保存智能体学到的规则，记住规则成立的条件，在规则被使用时保证条件在实际执行的数据上仍然成立，条件被破坏时修复或禁用。顺序：问题 → MAVRA 做的三件事 → 放在哪里 → 规则怎样存进去 → 检查什么 → 何时检查 → 失败后怎么办 → 一个完整的真实例子 → 实验 → 边界。</a:t>
+              <a:t>很多数据智能体在同一个数据库上工作。一个智能体学会了怎么算“营业额”，别的智能体也想用；但数据库每天都在更新，学到的规则可能在不知不觉中不再适用，而 SQL 照样能执行。MAVRA 是放在智能体与数据库之间的中间件：保存智能体学到的规则，记住规则成立的条件，在规则被使用时保证条件在实际执行的数据上仍然成立，条件被破坏时修复或禁用。顺序：问题 → MAVRA 承担的三项职责 → 放在哪里 → 发布 → 依赖 → 维护与改进 → 一个完整的真实例子 → 实验 → 边界。</a:t>
             </a:r>
             <a:endParaRPr lang="en-US" dirty="0"/>
           </a:p>
@@ -1376,7 +1376,7 @@
           <a:p>
             <a:r>
               <a:rPr lang="en-US" dirty="0"/>
-              <a:t>系统层实验不用大模型：固定各次运行学到的定义库，只改变维护方式，比较的是机制本身。配对回放：合成数据 1,470 题次，MAVRA 在覆盖的更新下没有错答，99 个错答全部是单位变化这个对照；按模式变更失效有 629 个错答。TPC-DS 上用 99 个查询模板导出的定义，结论一致。同快照验证：并发写入下 11,297 次使用没有一次在违反条件的数据上作答，先检查后执行有 3.8% 到 4.6%。修复的回归基准：按学习时刻比较，修复成功的数量与使用标准答案参照完全相同；按当前数据比较会误拒正确的修复。维护成本：19 条定义时为整定义重查的 14%，因为很多定义依赖同一张表的同一个条件；但按表版本缓存验证查询也能得到同样的节省，所以效率不是本文的贡献，贡献在于检查什么、何时可以依赖检查结果、失败后怎么办。</a:t>
+              <a:t>系统层实验不用大模型：固定各次运行学到的定义库，只改变维护方式，比较的是机制本身。配对回放：合成数据 1,470 题次，MAVRA 在覆盖的更新下没有错答，99 个错答全部是单位变化这个对照；按模式变更失效有 629 个错答。TPC-DS 上用 99 个查询模板导出的定义，结论一致。同快照验证：并发写入下 11,297 次使用没有一次在违反条件的数据上作答，先检查后执行有 3.8% 到 4.6%。修复的回归基准：按学习时刻比较，修复成功的数量与使用标准答案参照完全相同；按当前数据比较会误拒正确的修复。维护成本：19 条定义时为整定义重查的 14%，因为很多定义依赖同一张表的同一个条件；但按表版本缓存验证查询也能得到同样的节省，所以效率不是本文的贡献，贡献在于什么可以发布、何时可以依赖、维护与改进由这一层替所有使用者承担。</a:t>
             </a:r>
             <a:endParaRPr lang="en-US" dirty="0"/>
           </a:p>
@@ -1728,7 +1728,7 @@
           <a:p>
             <a:r>
               <a:rPr lang="en-US" dirty="0"/>
-              <a:t>把 MAVRA 想成一个很认真的账本管理员，它做三件事。第一，记住规则成立的条件——比如每个订单号只能对应一笔有效销售。这对应论文的第一个问题：检查什么。第二，使用规则前检查条件，而且是在这条查询实际执行的那份数据快照上检查。对应第二个问题：何时检查。第三，条件不成立时，有唯一可靠的修法就修，否则禁止使用并通知。对应第三个问题：检查失败了怎么办。整篇论文可以理解为给这三个问题各设计了一个可靠的答案。下面这条逻辑链是整个汇报的主线。</a:t>
+              <a:t>把 MAVRA 想成一个很认真的账本管理员，它替所有用账本的人做三件事。第一，发布：一个智能体做对了一道题，不等于它的整条轨迹都值得别人相信。MAVRA 只把可复用的部分提取成结构化定义，把题目里的月份这类参数剥掉，再检查别人将要读到的规范 SQL 能不能复现答案。实验里真有一例：提取时丢了“电子”类别过滤，规范 SQL 返回 1352.1 万，正确是 274.1 万，被准入拦下。第二，依赖：别人用这条规则时，要在 run_sql 里声明依据哪个修订；MAVRA 在这条查询实际执行的那份数据快照上确认条件成立，才执行。第三，维护与改进：数据变了，由 MAVRA 检查一次、修复一次，所有使用者共享结果；有唯一可靠的修法就修，否则禁止使用并通知。规则仍然有效时，如果找到等价且更快的写法，也作为新修订发布给所有人，新写法依赖的前提同样受维护。整篇论文就是给这三个问题各设计了一个可靠的答案。下面这条逻辑链是整个汇报的主线。</a:t>
             </a:r>
             <a:endParaRPr lang="en-US" dirty="0"/>
           </a:p>
@@ -2915,7 +2915,7 @@
                 <a:ea typeface="Microsoft YaHei" pitchFamily="34" charset="-122"/>
                 <a:cs typeface="Microsoft YaHei" pitchFamily="34" charset="-120"/>
               </a:rPr>
-              <a:t>共享智能体学到的计算规则 · 记住规则成立的条件 · 数据变化后仍然正确</a:t>
+              <a:t>可维护的共享记忆：发布 · 依赖 · 维护与改进</a:t>
             </a:r>
             <a:endParaRPr lang="en-US" sz="2200" dirty="0"/>
           </a:p>
@@ -2981,7 +2981,7 @@
                 <a:ea typeface="Microsoft YaHei" pitchFamily="34" charset="-122"/>
                 <a:cs typeface="Microsoft YaHei" pitchFamily="34" charset="-120"/>
               </a:rPr>
-              <a:t>检查什么：从定义推出的四类验证条件</a:t>
+              <a:t>发布时一并记下：从定义推出的四类验证条件</a:t>
             </a:r>
             <a:endParaRPr lang="en-US" sz="2800" dirty="0"/>
           </a:p>
@@ -4572,7 +4572,7 @@
                 <a:ea typeface="Microsoft YaHei" pitchFamily="34" charset="-122"/>
                 <a:cs typeface="Microsoft YaHei" pitchFamily="34" charset="-120"/>
               </a:rPr>
-              <a:t>何时检查：表版本、惰性维护，以及为什么要在同一快照内执行</a:t>
+              <a:t>依赖：表版本、惰性维护，以及为什么要在同一快照内执行</a:t>
             </a:r>
             <a:endParaRPr lang="en-US" sz="2800" dirty="0"/>
           </a:p>
@@ -6547,7 +6547,7 @@
                 <a:ea typeface="Microsoft YaHei" pitchFamily="34" charset="-122"/>
                 <a:cs typeface="Microsoft YaHei" pitchFamily="34" charset="-120"/>
               </a:rPr>
-              <a:t>检查失败了怎么办：唯一修复，按学习时刻回归，否则失效</a:t>
+              <a:t>维护：检查失败时唯一修复，按学习时刻回归，否则失效</a:t>
             </a:r>
             <a:endParaRPr lang="en-US" sz="2800" dirty="0"/>
           </a:p>
@@ -25408,7 +25408,7 @@
                 <a:ea typeface="Microsoft YaHei" pitchFamily="34" charset="-122"/>
                 <a:cs typeface="Microsoft YaHei" pitchFamily="34" charset="-120"/>
               </a:rPr>
-              <a:t>MAVRA 做三件事，对应论文的三个问题</a:t>
+              <a:t>MAVRA 承担三项职责，对应论文的三个问题</a:t>
             </a:r>
             <a:endParaRPr lang="en-US" sz="2800" dirty="0"/>
           </a:p>
@@ -25416,7 +25416,7 @@
       </p:sp>
       <p:sp>
         <p:nvSpPr>
-          <p:cNvPr id="3" name="card 记住规则成立的条件"/>
+          <p:cNvPr id="3" name="card 发布"/>
           <p:cNvSpPr/>
           <p:nvPr/>
         </p:nvSpPr>
@@ -25538,7 +25538,7 @@
                 <a:ea typeface="Microsoft YaHei" pitchFamily="34" charset="-122"/>
                 <a:cs typeface="Microsoft YaHei" pitchFamily="34" charset="-120"/>
               </a:rPr>
-              <a:t>记住规则成立的条件</a:t>
+              <a:t>发布</a:t>
             </a:r>
             <a:endParaRPr lang="en-US" sz="1900" dirty="0"/>
           </a:p>
@@ -25577,7 +25577,7 @@
                 <a:ea typeface="Microsoft YaHei" pitchFamily="34" charset="-122"/>
                 <a:cs typeface="Microsoft YaHei" pitchFamily="34" charset="-120"/>
               </a:rPr>
-              <a:t>检查什么</a:t>
+              <a:t>什么可以进入共享记忆</a:t>
             </a:r>
             <a:endParaRPr lang="en-US" sz="1300" dirty="0"/>
           </a:p>
@@ -25619,7 +25619,7 @@
                 <a:ea typeface="Microsoft YaHei" pitchFamily="34" charset="-122"/>
                 <a:cs typeface="Microsoft YaHei" pitchFamily="34" charset="-120"/>
               </a:rPr>
-              <a:t>从定义推出四类验证条件：粒度键唯一、连接基数 N:1、日期角色、日期键完整性。条件与学习证据、表版本一起保存——不仅记住公式，还记住公式为什么成立。</a:t>
+              <a:t>只接收判题成功的任务；提取成结构化定义，剥离题目参数；7 项准入检查，包括重放其他智能体将读到的规范 SQL；连同四类验证条件保存为修订 v1。实验中拦下一例：提取时丢了类别过滤，规范 SQL 返回 1352.1 万，正确值 274.1 万。</a:t>
             </a:r>
             <a:endParaRPr lang="en-US" sz="1400" dirty="0"/>
           </a:p>
@@ -25627,7 +25627,7 @@
       </p:sp>
       <p:sp>
         <p:nvSpPr>
-          <p:cNvPr id="9" name="card 使用前在实际执行的快照上检查"/>
+          <p:cNvPr id="9" name="card 依赖"/>
           <p:cNvSpPr/>
           <p:nvPr/>
         </p:nvSpPr>
@@ -25749,7 +25749,7 @@
                 <a:ea typeface="Microsoft YaHei" pitchFamily="34" charset="-122"/>
                 <a:cs typeface="Microsoft YaHei" pitchFamily="34" charset="-120"/>
               </a:rPr>
-              <a:t>使用前在实际执行的快照上检查</a:t>
+              <a:t>依赖</a:t>
             </a:r>
             <a:endParaRPr lang="en-US" sz="1900" dirty="0"/>
           </a:p>
@@ -25788,7 +25788,7 @@
                 <a:ea typeface="Microsoft YaHei" pitchFamily="34" charset="-122"/>
                 <a:cs typeface="Microsoft YaHei" pitchFamily="34" charset="-120"/>
               </a:rPr>
-              <a:t>何时检查</a:t>
+              <a:t>一次使用何时可以依赖它</a:t>
             </a:r>
             <a:endParaRPr lang="en-US" sz="1300" dirty="0"/>
           </a:p>
@@ -25830,7 +25830,7 @@
                 <a:ea typeface="Microsoft YaHei" pitchFamily="34" charset="-122"/>
                 <a:cs typeface="Microsoft YaHei" pitchFamily="34" charset="-120"/>
               </a:rPr>
-              <a:t>表版本未变：复用已有的验证结果；已变：在这条查询自己的快照内重新验证，通过后在同一快照上执行。检查结果按（条件，表版本）缓存，跨定义、跨智能体共享。</a:t>
+              <a:t>智能体在 run_sql 中声明所依据的修订。表版本未变：复用已有的验证结果；已变：在这条查询自己的快照内重新验证，通过后在同一快照上执行。验证结果按（条件，表版本）缓存，跨定义、跨智能体共享。</a:t>
             </a:r>
             <a:endParaRPr lang="en-US" sz="1400" dirty="0"/>
           </a:p>
@@ -25838,7 +25838,7 @@
       </p:sp>
       <p:sp>
         <p:nvSpPr>
-          <p:cNvPr id="15" name="card 唯一修复，否则失效"/>
+          <p:cNvPr id="15" name="card 维护与改进"/>
           <p:cNvSpPr/>
           <p:nvPr/>
         </p:nvSpPr>
@@ -25960,7 +25960,7 @@
                 <a:ea typeface="Microsoft YaHei" pitchFamily="34" charset="-122"/>
                 <a:cs typeface="Microsoft YaHei" pitchFamily="34" charset="-120"/>
               </a:rPr>
-              <a:t>唯一修复，否则失效</a:t>
+              <a:t>维护与改进</a:t>
             </a:r>
             <a:endParaRPr lang="en-US" sz="1900" dirty="0"/>
           </a:p>
@@ -25999,7 +25999,7 @@
                 <a:ea typeface="Microsoft YaHei" pitchFamily="34" charset="-122"/>
                 <a:cs typeface="Microsoft YaHei" pitchFamily="34" charset="-120"/>
               </a:rPr>
-              <a:t>检查失败了怎么办</a:t>
+              <a:t>为所有使用者只做一次</a:t>
             </a:r>
             <a:endParaRPr lang="en-US" sz="1300" dirty="0"/>
           </a:p>
@@ -26041,7 +26041,7 @@
                 <a:ea typeface="Microsoft YaHei" pitchFamily="34" charset="-122"/>
                 <a:cs typeface="Microsoft YaHei" pitchFamily="34" charset="-120"/>
               </a:rPr>
-              <a:t>恰好一个通过检查的修复：按学习时刻做回归测试，通过后发布新修订。没有或不止一个：定义失效，通知使用方，交给人确认——宁可说“不知道怎么安全地修”，也不猜一个答案。</a:t>
+              <a:t>条件失败：恰好一个修复且按学习时刻回归通过，才发布新修订；否则失效并通知。仍然有效：找到等价且更省的写法，抽样期间结果一致、配对测量更快，才发布新修订；新写法依赖的前提（日期键按月连续）作为条件一并维护。</a:t>
             </a:r>
             <a:endParaRPr lang="en-US" sz="1400" dirty="0"/>
           </a:p>
@@ -26127,7 +26127,7 @@
                 <a:ea typeface="Microsoft YaHei" pitchFamily="34" charset="-122"/>
                 <a:cs typeface="Microsoft YaHei" pitchFamily="34" charset="-120"/>
               </a:rPr>
-              <a:t>学到规则 → 记住它成立的条件 → 数据变化 → 使用前检查 → 安全则继续使用 → 不安全则尝试修复 → 修不好则失效并通知使用方。</a:t>
+              <a:t>学到规则 → 准入后发布（带条件）→ 使用时声明修订 → 在查询快照上验证后执行 → 数据变化后维护：能修则修，修不好则失效并通知 → 有更省的等价写法则发布新修订。</a:t>
             </a:r>
             <a:endParaRPr lang="en-US" sz="1500" dirty="0"/>
           </a:p>
@@ -26147,9 +26147,48 @@
                 <a:ea typeface="Microsoft YaHei" pitchFamily="34" charset="-122"/>
                 <a:cs typeface="Microsoft YaHei" pitchFamily="34" charset="-120"/>
               </a:rPr>
-              <a:t>MAVRA 不生成 SQL，也不判断业务含义；它保护的是“已经学会的规则在当前数据上还能不能用”。</a:t>
+              <a:t>MAVRA 不生成 SQL，也不判断业务含义；它决定共享的知识能否发布、能否被依赖，并替所有使用者维护它。</a:t>
             </a:r>
             <a:endParaRPr lang="en-US" sz="1500" dirty="0"/>
+          </a:p>
+        </p:txBody>
+      </p:sp>
+      <p:sp>
+        <p:nvSpPr>
+          <p:cNvPr id="23" name="Text 21"/>
+          <p:cNvSpPr txBox="1"/>
+          <p:nvPr/>
+        </p:nvSpPr>
+        <p:spPr>
+          <a:xfrm>
+            <a:off x="548640" y="6263640"/>
+            <a:ext cx="10362895" cy="365760"/>
+          </a:xfrm>
+          <a:prstGeom prst="rect">
+            <a:avLst/>
+          </a:prstGeom>
+          <a:noFill/>
+          <a:ln/>
+        </p:spPr>
+        <p:txBody>
+          <a:bodyPr wrap="square" lIns="0" tIns="0" rIns="0" bIns="0" rtlCol="0" anchor="b"/>
+          <a:lstStyle/>
+          <a:p>
+            <a:pPr indent="0" marL="0">
+              <a:buNone/>
+            </a:pPr>
+            <a:r>
+              <a:rPr lang="en-US" sz="1100" dirty="0">
+                <a:solidFill>
+                  <a:srgbClr val="5B6573"/>
+                </a:solidFill>
+                <a:latin typeface="Microsoft YaHei" pitchFamily="34" charset="0"/>
+                <a:ea typeface="Microsoft YaHei" pitchFamily="34" charset="-122"/>
+                <a:cs typeface="Microsoft YaHei" pitchFamily="34" charset="-120"/>
+              </a:rPr>
+              <a:t>被拦下的一例：noctis results/scen-20260930/glm53-r3（M5-L2 电子品类门店营业额，准入第 7 项规范 SQL 重放），与论文宏 \PubEx* 一致。</a:t>
+            </a:r>
+            <a:endParaRPr lang="en-US" sz="1100" dirty="0"/>
           </a:p>
         </p:txBody>
       </p:sp>
@@ -34230,7 +34269,7 @@
                 <a:ea typeface="Microsoft YaHei" pitchFamily="34" charset="-122"/>
                 <a:cs typeface="Microsoft YaHei" pitchFamily="34" charset="-120"/>
               </a:rPr>
-              <a:t>一条规则怎样存进去：准入</a:t>
+              <a:t>发布：一条规则怎样进入共享记忆（准入）</a:t>
             </a:r>
             <a:endParaRPr lang="en-US" sz="2800" dirty="0"/>
           </a:p>

--- a/docs/mavra-system.pptx
+++ b/docs/mavra-system.pptx
@@ -125,18 +125,18 @@
   <p:extLst>
     <p:ext uri="{521415D9-36F7-43E2-AB2F-B90AF26B5E84}">
       <p14:sectionLst xmlns:p14="http://schemas.microsoft.com/office/powerpoint/2010/main">
-        <p14:section name="开场" id="{bfa6fb80-c62b-da49-9a77-c6ce9ba56a5f}">
+        <p14:section name="开场" id="{1b8e12de-f4c1-ea0e-25c3-975ac7e8e5e7}">
           <p14:sldIdLst>
             <p14:sldId id="256"/>
           </p14:sldIdLst>
         </p14:section>
-        <p14:section name="问题" id="{2f85e30e-1698-416b-2b1d-6beaef6a19a1}">
+        <p14:section name="问题" id="{b8bd57a5-4e81-26f1-2496-46737ccb6fe8}">
           <p14:sldIdLst>
             <p14:sldId id="257"/>
             <p14:sldId id="258"/>
           </p14:sldIdLst>
         </p14:section>
-        <p14:section name="MAVRA" id="{8824314a-5bb9-1769-0b46-653bb45f7994}">
+        <p14:section name="MAVRA" id="{8e4cfb52-874f-63fe-ff9c-717409aa6d7c}">
           <p14:sldIdLst>
             <p14:sldId id="259"/>
             <p14:sldId id="260"/>
@@ -145,37 +145,37 @@
             <p14:sldId id="263"/>
           </p14:sldIdLst>
         </p14:section>
-        <p14:section name="发布" id="{3f651dc4-2ebd-2027-fa9b-51f70e550271}">
+        <p14:section name="发布" id="{ced2d1e9-72d9-cc9b-a959-3e61418ee6af}">
           <p14:sldIdLst>
             <p14:sldId id="264"/>
             <p14:sldId id="265"/>
           </p14:sldIdLst>
         </p14:section>
-        <p14:section name="依赖" id="{949e6500-0f0a-3fae-eba6-ad46bbfeb065}">
+        <p14:section name="依赖" id="{9af25ebb-1297-e2ca-7f46-6caf8cfab36d}">
           <p14:sldIdLst>
             <p14:sldId id="266"/>
             <p14:sldId id="267"/>
           </p14:sldIdLst>
         </p14:section>
-        <p14:section name="维护与改进" id="{4d02f6b6-24bd-6e45-9352-c99348aef056}">
+        <p14:section name="维护与改进" id="{4a931bcd-c093-7ecb-9c67-51f772b37d2e}">
           <p14:sldIdLst>
             <p14:sldId id="268"/>
             <p14:sldId id="269"/>
+            <p14:sldId id="270"/>
           </p14:sldIdLst>
         </p14:section>
-        <p14:section name="真实记录" id="{29db8f28-a1bd-7cea-0076-cb9bf46d062b}">
+        <p14:section name="真实记录" id="{88e0a04e-eac9-aa51-6268-eb17bc81e438}">
           <p14:sldIdLst>
-            <p14:sldId id="270"/>
             <p14:sldId id="271"/>
           </p14:sldIdLst>
         </p14:section>
-        <p14:section name="实验结果" id="{3191ee22-7cd6-8121-fa9e-02f3d648a5af}">
+        <p14:section name="实验结果" id="{cdb4bb05-6740-a60f-4208-1796743b01ee}">
           <p14:sldIdLst>
             <p14:sldId id="272"/>
             <p14:sldId id="273"/>
           </p14:sldIdLst>
         </p14:section>
-        <p14:section name="边界与总结" id="{45e03bf9-2bd1-3795-dd7f-f43fb87616cb}">
+        <p14:section name="边界与总结" id="{08d0d6da-4e22-7b2e-3539-c94f88634c80}">
           <p14:sldIdLst>
             <p14:sldId id="274"/>
           </p14:sldIdLst>
@@ -936,7 +936,7 @@
           <a:p>
             <a:r>
               <a:rPr lang="en-US" dirty="0"/>
-              <a:t>回到订单 002。MAVRA 发现订单号重复，一行是旧记录，一行是当前记录。它去找一个过滤谓词：只保留 ss_is_current = 1，过滤后订单不再重复，总额 650 元。但不能看到一个像样的条件就用。候选必须满足两件事：过滤后每个键恰好一行；原来的键一个不丢——“只保留金额大于 200”也能去重，但 100 元的订单没了，这不叫修复。还要唯一：如果 is_current 和 is_backup 两个过滤都通过，表结构说不出哪份是业务事实，MAVRA 不擅自选，定义失效，交给人确认。宁可说不知道怎么安全地修，也不猜。修复通过结构检查之后还要考一次试：像换一种解法重做老师判过的那道题，答案必须一样。必须用当初那份数据，因为今天的数据已经变了，当初的 SQL 在上面同样过期，我们实际跑过：按当前数据比，正确的修复会被拒绝。通过后发布 v2，v1 失效。</a:t>
+              <a:t>回到订单 002。MAVRA 发现订单号重复，一行是旧记录，一行是当前记录。它去找一个过滤谓词：只保留 ss_is_current = 1，过滤后订单不再重复，总额 650 元。但不能看到一个像样的条件就用。候选必须满足两件事：过滤后每个键恰好一行；原来的键一个不丢——“只保留金额大于 200”也能去重，但 100 元的订单没了，这不叫修复。还要唯一：如果 is_current 和 is_backup 两个过滤都通过，表结构说不出哪份是业务事实，MAVRA 不擅自选，定义失效，交给人确认。宁可说不知道怎么安全地修，也不猜。修复通过结构检查之后还要考一次试：像换一种解法重做老师判过的那道题，答案必须一样。必须用当初那份数据，因为今天的数据已经变了，当初的 SQL 在上面同样过期，我们实际跑过：按当前数据比，正确的修复会被拒绝。通过后发布 v3，v2 失效。</a:t>
             </a:r>
             <a:endParaRPr lang="en-US" dirty="0"/>
           </a:p>
@@ -1024,7 +1024,7 @@
           <a:p>
             <a:r>
               <a:rPr lang="en-US" dirty="0"/>
-              <a:t>把前面几页串在一张图上。内置智能体求解“3 月门店营业额”，判定正确、准入检查通过，发布 v1。第 3 步是优化：规则改写把期间谓词改为日期键范围，14 个样本期间结果一致、执行时间省 19.8%，发布 v2；新前提“日期键按月连续”成为 v2 的条件，v1 宽限可用。之后一批销售被更正：旧行标记为非当前，插入当前行——“粒度键唯一”不成立，v2 失效，不处理会把新旧版本都算进去。修复搜索在低基数列上枚举等值谓词，只有“ss_is_current = 1”可行；按学习时刻重算 3 月，结果一致，发布 v3。红框是另一种结果：批次重复加载，没有谓词能恢复唯一性，定义失效并通知使用方，等待重新学习。</a:t>
+              <a:t>前面讲的都是“保持正确”。这页讲“变得更省”：常见指标的写法常常有更省的等价形式，比如按期间统计时不连接日期维度，直接按日期键范围过滤。MAVRA 的做法和修复一样严格：候选可以来自规则、模型提议或智能体的成功轨迹；先验证等价——结构合法、新前提成立、学习时快照和当前快照上 14 个样本期间结果全部相同；再验证更省——同一快照内配对做 EXPLAIN ANALYZE，配对差的 95% 区间整体低于 0 且平均省 10% 以上；都通过才作为新修订发布，旧修订宽限可用并通知使用方。右边是百万行端到端实验的真实记录：9 条定义都改为日期键范围过滤，14 个期间全部一致，执行时间省 15.6% 到 36.1%，全部发布为 v2；之后的留出题和 11 种数据变化答对 78/96，和未优化时相同。关键是最后一句：更省的写法同样有前提，日期键按月连续；它被当作条件维护，前提被破坏时该修订失效。</a:t>
             </a:r>
             <a:endParaRPr lang="en-US" dirty="0"/>
           </a:p>
@@ -1112,7 +1112,7 @@
           <a:p>
             <a:r>
               <a:rPr lang="en-US" dirty="0"/>
-              <a:t>这是数据更正之后用户智能体 B 真实的调用序列。第 1 轮它检索“门店营业额”，这一次 MAVRA 发现 store_sales 的版本变了，就在这次调用里完成了维护：粒度查询发现 105 万行只有 99 万个键，r1 失效；修复搜索在低基数列上按值分组，只有 ss_is_current = 1 能恢复每键一行且不丢键；四项检查包括学习时快照上的回归，发布 r2；另一条同名定义复用结论。所以这次 find_metric 花了 54 秒，返回的是带过滤的新定义和两条通知。第 3 轮 B 自己先探查了没加过滤的 SQL，被执行前审查拦下两次，原因写得很具体：这张表现在每个键多行，统计前要加过滤。第 4 轮加了过滤再查，通过；第 5 轮算出 9 月的值，正确。诚实地说，这一条 run_sql 没有声明 metrics，所以它不在条件保证范围内——但审查仍然拦住了错误写法；同阶段的另一题声明了 revision 2。</a:t>
+              <a:t>把前面几页串在一张图上。内置智能体求解“3 月门店营业额”，判定正确、准入检查通过，发布 v1。第 3 步是优化：规则改写把期间谓词改为日期键范围，14 个样本期间结果一致、执行时间省 19.8%，发布 v2；新前提“日期键按月连续”成为 v2 的条件，v1 宽限可用。之后一批销售被更正：旧行标记为非当前，插入当前行——“粒度键唯一”不成立，v2 失效，不处理会把新旧版本都算进去。修复搜索在低基数列上枚举等值谓词，只有“ss_is_current = 1”可行；按学习时刻重算 3 月，结果一致，发布 v3。红框是另一种结果：批次重复加载，没有谓词能恢复唯一性，定义失效并通知使用方，等待重新学习。</a:t>
             </a:r>
             <a:endParaRPr lang="en-US" dirty="0"/>
           </a:p>
@@ -1200,7 +1200,7 @@
           <a:p>
             <a:r>
               <a:rPr lang="en-US" dirty="0"/>
-              <a:t>前面讲的都是“保持正确”。这页讲“变得更省”：常见指标的写法常常有更省的等价形式，比如按期间统计时不连接日期维度，直接按日期键范围过滤。MAVRA 的做法和修复一样严格：候选可以来自规则、模型提议或智能体的成功轨迹；先验证等价——结构合法、新前提成立、学习时快照和当前快照上 14 个样本期间结果全部相同；再验证更省——同一快照内配对做 EXPLAIN ANALYZE，配对差的 95% 区间整体低于 0 且平均省 10% 以上；都通过才作为新修订发布，旧修订宽限可用并通知使用方。右边是百万行端到端实验的真实记录：9 条定义都改为日期键范围过滤，14 个期间全部一致，执行时间省 15.6% 到 36.1%，全部发布为 r1；之后的留出题和 11 种数据变化答对 78/96，和未优化时相同。关键是最后一句：更省的写法同样有前提，日期键按月连续；它被当作条件维护，前提被破坏时该修订失效。</a:t>
+              <a:t>这是数据更正之后用户智能体 B 真实的调用序列。第 1 轮它检索“门店营业额”，这一次 MAVRA 发现 store_sales 的版本变了，就在这次调用里完成了维护：粒度查询发现 105 万行只有 99 万个键，v2 失效；修复搜索在低基数列上按值分组，只有 ss_is_current = 1 能恢复每键一行且不丢键；四项检查包括学习时快照上的回归，发布 v3；另一条同名定义复用结论。所以这次 find_metric 花了 54 秒，返回的是带过滤的新定义和两条通知。第 3 轮 B 自己先探查了没加过滤的 SQL，被执行前审查拦下两次，原因写得很具体：这张表现在每个键多行，统计前要加过滤。第 4 轮加了过滤再查，通过；第 5 轮算出 9 月的值，正确。诚实地说，这一条 run_sql 没有声明 metrics，所以它不在条件保证范围内——但审查仍然拦住了错误写法；同阶段的另一题声明了 revision 2，即 v3。</a:t>
             </a:r>
             <a:endParaRPr lang="en-US" dirty="0"/>
           </a:p>
@@ -1288,7 +1288,7 @@
           <a:p>
             <a:r>
               <a:rPr lang="en-US" dirty="0"/>
-              <a:t>端到端实验：DeepSeek V4.1 Flash 智能体，每种方法独立运行 3 次，15 道留出题，再加 11 种数据更新。共享本身的收益：数据未变时准确率从 49% 到 100%，轮数和 token 都下降——任何共享方法都有这个收益，不是 MAVRA 独有。维护的收益：更新后从 75% 到 81%，5 种破坏性更新下从 59% 到 73%；检索历史示例即使提示它自行验证也只有 63%。MAVRA 与整定义重查答案相同，差异来自各次运行学到的定义不同。两个对照：单位变化不违反任何条件，所有方法同样过期，与命题的范围一致；备份副本下修复有歧义，MAVRA 按规则使定义失效，检索示例碰巧答对，这是如实保留的负结果。这些数字来自我们设定的实验，不是说在所有数据库和模型上都能达到。</a:t>
+              <a:t>端到端实验：DeepSeek V4.1 Flash 智能体，每种方法独立运行 3 次，15 道留出题，再加 11 种数据更新。共享本身的收益：数据未变时准确率从 49% 到 100%，轮数和 token 都下降——任何共享方法都有这个收益，不是 MAVRA 独有。维护的收益：更新后从 75% 到 81%，5 种破坏性更新下从 59% 到 73%；检索历史示例即使提示它自行验证也只有 63%。MAVRA 与整定义重查答案相同，差异来自各次运行学到的定义不同。代价：建立记忆每轮 18.1 万 token、283 秒；之后每道题使用者省 7 千 token、67 秒，按时间 5 道题、按 token 26 道题就回本，维护每次变化只做一次。两个对照：单位变化不违反任何条件，所有方法同样过期，与命题的范围一致；备份副本下修复有歧义，MAVRA 按规则使定义失效，检索示例碰巧答对，这是如实保留的负结果。还有一个负结果：定义失效又修不好时，工作退回给使用者，它们每题花 9.36 万 token，比独自探索还多，因为通知告诉了它们哪里坏了、它们会自己去修，正确率更高但更费。下一步是把使用者找到的修正经准入共享，只付一次。这些数字来自我们设定的实验，不是说在所有数据库和模型上都能达到。</a:t>
             </a:r>
             <a:endParaRPr lang="en-US" dirty="0"/>
           </a:p>
@@ -1464,7 +1464,7 @@
           <a:p>
             <a:r>
               <a:rPr lang="en-US" dirty="0"/>
-              <a:t>MAVRA 是严谨的管理员，但不是无所不知。能做的：旧记录有唯一的当前标志，检测并修复；整批重复加载，检测但修不了，失效并通知；主表和备份都合理，不擅自选，交给人。做不到的：金额换了单位、日期键指向错误日期，行数和键都没变，四类条件发现不了；智能体没声明用了哪个修订，也不在保证范围内。两点要分清：MAVRA 不判断业务含义对不对，那需要有人给口径；它也不保证每条 SQL 都对，保护的是声明了受管修订的查询。最后三句话：问题——学会的规则会因数据变化而失效，SQL 却不报错；方法——保存规则成立的条件，使用时在实际执行的快照上保证成立；贡献——只有唯一且通过回归测试的修复才发布，否则失效，不让错误知识传播。</a:t>
+              <a:t>MAVRA 是严谨的管理员，但不是无所不知。能做的：旧记录有唯一的当前标志，检测并修复；整批重复加载，检测但修不了，失效并通知；主表和备份都合理，不擅自选，交给人。做不到的：金额换了单位、日期键指向错误日期，行数和键都没变，四类条件发现不了；智能体没声明用了哪个修订，也不在保证范围内。两点要分清：MAVRA 不判断业务含义对不对，那需要有人给口径；它也不保证每条 SQL 都对，保护的是声明了受管修订的查询。最后三句话：问题——学到的知识共享出去后会因数据变化悄悄失效，SQL 却不报错；方法——共享记忆层替使用者把住发布、依赖、维护与改进三关；结果——破坏性更新下 73% 对 57%，覆盖的更新 0 错答，并发下 0 次误答，建立记忆很快回本。</a:t>
             </a:r>
             <a:endParaRPr lang="en-US" dirty="0"/>
           </a:p>
@@ -1992,7 +1992,7 @@
           <a:p>
             <a:r>
               <a:rPr lang="en-US" dirty="0"/>
-              <a:t>这是内置智能体学习时真实的 7 次工具调用，来自带 --trace 的运行记录。第 1 轮它并行调了两个工具：列出表，以及检索“门店营业额”——此时还没人学过，返回空。第 2 轮描述两张表，第 3 轮问两张表怎么连接，MAVRA 现场验证并记下这条连接路径（一侧键唯一，1.03% 关联不上）。第 4 轮执行 SQL 得到 r1，第 5 轮提交答案并说明答案就是 r1。智能体退出后 MAVRA 接着做四件事：判定、抽取、7 项准入检查、发布 r0。</a:t>
+              <a:t>这是内置智能体学习时真实的 7 次工具调用，来自带 --trace 的运行记录。第 1 轮它并行调了两个工具：列出表，以及检索“门店营业额”——此时还没人学过，返回空。第 2 轮描述两张表，第 3 轮问两张表怎么连接，MAVRA 现场验证并记下这条连接路径（一侧键唯一，1.03% 关联不上）。第 4 轮执行 SQL 得到查询 #1，第 5 轮提交答案并说明答案就是查询 #1。智能体退出后 MAVRA 接着做四件事：判定、抽取、7 项准入检查、发布 v1。</a:t>
             </a:r>
             <a:endParaRPr lang="en-US" dirty="0"/>
           </a:p>
@@ -2080,7 +2080,7 @@
           <a:p>
             <a:r>
               <a:rPr lang="en-US" dirty="0"/>
-              <a:t>这是用户智能体做留出题时真实的 6 次调用。第 1 轮并行：列出表，检索“门店营业额”——匹配到两条、都是 r1，MAVRA 看依赖表版本没变，直接返回定义、度量、粒度、注意事项和示例。第 2 轮描述两张表，直接拿到记住的统计信息。第 3 轮执行 SQL，并在 metrics 参数里声明依据 metric:门店营业额 r1——注意它照着示例写出了日期键范围的写法。MAVRA 核对 r1 有效且是当前修订，在这条查询的快照上验证 r1 的四个条件，执行，返回 r1。第 4 轮提交答案，溯源记下答案来自 r1、r1 依据门店营业额 r1。下面是声明的修订处在另外四种状态时 MAVRA 的真实回应。</a:t>
+              <a:t>这是用户智能体做留出题时真实的 6 次调用。第 1 轮并行：列出表，检索“门店营业额”——匹配到两条、都是 v2（优化后的修订），MAVRA 看依赖表版本没变，直接返回定义、度量、粒度、注意事项和示例。第 2 轮描述两张表，直接拿到记住的统计信息。第 3 轮执行 SQL，并在 metrics 参数里声明依据 metric:门店营业额 v2——注意它照着示例写出了日期键范围的写法。MAVRA 核对 v2 有效且是当前修订，在这条查询的快照上验证 v2 的四个条件，执行，返回查询 #1。第 4 轮提交答案，溯源记下答案来自查询 #1、查询 #1 依据门店营业额 v2。下面是声明的修订处在另外四种状态时 MAVRA 的真实回应。</a:t>
             </a:r>
             <a:endParaRPr lang="en-US" dirty="0"/>
           </a:p>
@@ -7744,7 +7744,7 @@
                           <a:ea typeface="Microsoft YaHei" pitchFamily="34" charset="-122"/>
                           <a:cs typeface="Microsoft YaHei" pitchFamily="34" charset="-120"/>
                         </a:rPr>
-                        <a:t>修复后的 v2</a:t>
+                        <a:t>修复后的 v3</a:t>
                       </a:r>
                       <a:endParaRPr lang="en-US" sz="1200" dirty="0">
                         <a:latin typeface="Microsoft YaHei" charset="0"/>
@@ -8077,7 +8077,7 @@
                           <a:ea typeface="Microsoft YaHei" pitchFamily="34" charset="-122"/>
                           <a:cs typeface="Microsoft YaHei" pitchFamily="34" charset="-120"/>
                         </a:rPr>
-                        <a:t>一致 → 发布 v2</a:t>
+                        <a:t>一致 → 发布 v3</a:t>
                       </a:r>
                       <a:endParaRPr lang="en-US" sz="1200" dirty="0">
                         <a:latin typeface="Microsoft YaHei" charset="0"/>
@@ -8519,7 +8519,7 @@
                 <a:ea typeface="Microsoft YaHei" pitchFamily="34" charset="-122"/>
                 <a:cs typeface="Microsoft YaHei" pitchFamily="34" charset="-120"/>
               </a:rPr>
-              <a:t>发布 v2 之后：</a:t>
+              <a:t>发布 v3 之后：</a:t>
             </a:r>
             <a:pPr indent="0" marL="0">
               <a:spcAft>
@@ -8536,7 +8536,7 @@
                 <a:ea typeface="Microsoft YaHei" pitchFamily="34" charset="-122"/>
                 <a:cs typeface="Microsoft YaHei" pitchFamily="34" charset="-120"/>
               </a:rPr>
-              <a:t>v1 失效，声明 v1 的查询被拒绝；修复期间到达的请求等待结果；其他定义遇到相同的条件失败直接复用验证结果与修复；修不好的定义失效并通知使用方，等学到新证据再发布。</a:t>
+              <a:t>v2 失效，声明旧修订的查询被拒绝；修复期间到达的请求等待结果；其他定义遇到相同的条件失败直接复用验证结果与修复；修不好的定义失效并通知使用方，等学到新证据再发布。</a:t>
             </a:r>
             <a:endParaRPr lang="en-US" sz="1300" dirty="0"/>
           </a:p>
@@ -8689,2641 +8689,7 @@
                 <a:ea typeface="Microsoft YaHei" pitchFamily="34" charset="-122"/>
                 <a:cs typeface="Microsoft YaHei" pitchFamily="34" charset="-120"/>
               </a:rPr>
-              <a:t>一条定义的生命周期：学习、优化、维护、修复、失效</a:t>
-            </a:r>
-            <a:endParaRPr lang="en-US" sz="2800" dirty="0"/>
-          </a:p>
-        </p:txBody>
-      </p:sp>
-      <p:pic>
-        <p:nvPicPr>
-          <p:cNvPr id="3" name="lifecycle" descr="/home/zhanhao/mingtai/ppt/agentdb-mid/tools/deck/figures/lifecycle-zh.png">    </p:cNvPr>
-          <p:cNvPicPr>
-            <a:picLocks noChangeAspect="1"/>
-          </p:cNvPicPr>
-          <p:nvPr/>
-        </p:nvPicPr>
-        <p:blipFill>
-          <a:blip r:embed="rId1"/>
-          <a:stretch>
-            <a:fillRect/>
-          </a:stretch>
-        </p:blipFill>
-        <p:spPr>
-          <a:xfrm>
-            <a:off x="548640" y="1074149"/>
-            <a:ext cx="11094415" cy="4069622"/>
-          </a:xfrm>
-          <a:prstGeom prst="rect">
-            <a:avLst/>
-          </a:prstGeom>
-        </p:spPr>
-      </p:pic>
-      <p:sp>
-        <p:nvSpPr>
-          <p:cNvPr id="4" name="Shape 1"/>
-          <p:cNvSpPr/>
-          <p:nvPr/>
-        </p:nvSpPr>
-        <p:spPr>
-          <a:xfrm>
-            <a:off x="548640" y="5257800"/>
-            <a:ext cx="11094415" cy="868680"/>
-          </a:xfrm>
-          <a:prstGeom prst="roundRect">
-            <a:avLst>
-              <a:gd name="adj" fmla="val 8421"/>
-            </a:avLst>
-          </a:prstGeom>
-          <a:solidFill>
-            <a:srgbClr val="F1F3F6"/>
-          </a:solidFill>
-          <a:ln w="12700">
-            <a:solidFill>
-              <a:srgbClr val="F1F3F6"/>
-            </a:solidFill>
-            <a:prstDash val="solid"/>
-          </a:ln>
-        </p:spPr>
-      </p:sp>
-      <p:sp>
-        <p:nvSpPr>
-          <p:cNvPr id="5" name="Text 2"/>
-          <p:cNvSpPr txBox="1"/>
-          <p:nvPr/>
-        </p:nvSpPr>
-        <p:spPr>
-          <a:xfrm>
-            <a:off x="822960" y="5349240"/>
-            <a:ext cx="10545775" cy="685800"/>
-          </a:xfrm>
-          <a:prstGeom prst="rect">
-            <a:avLst/>
-          </a:prstGeom>
-          <a:noFill/>
-          <a:ln/>
-        </p:spPr>
-        <p:txBody>
-          <a:bodyPr wrap="square" lIns="0" tIns="0" rIns="0" bIns="0" rtlCol="0" anchor="ctr"/>
-          <a:lstStyle/>
-          <a:p>
-            <a:pPr indent="0" marL="0">
-              <a:spcAft>
-                <a:spcPts val="400"/>
-              </a:spcAft>
-              <a:buNone/>
-            </a:pPr>
-            <a:r>
-              <a:rPr lang="en-US" sz="1300" b="1" dirty="0">
-                <a:solidFill>
-                  <a:srgbClr val="1D5BA6"/>
-                </a:solidFill>
-                <a:latin typeface="Microsoft YaHei" pitchFamily="34" charset="0"/>
-                <a:ea typeface="Microsoft YaHei" pitchFamily="34" charset="-122"/>
-                <a:cs typeface="Microsoft YaHei" pitchFamily="34" charset="-120"/>
-              </a:rPr>
-              <a:t>修订规则：</a:t>
-            </a:r>
-            <a:pPr indent="0" marL="0">
-              <a:spcAft>
-                <a:spcPts val="400"/>
-              </a:spcAft>
-              <a:buNone/>
-            </a:pPr>
-            <a:r>
-              <a:rPr lang="en-US" sz="1300" dirty="0">
-                <a:solidFill>
-                  <a:srgbClr val="1F2A37"/>
-                </a:solidFill>
-                <a:latin typeface="Microsoft YaHei" pitchFamily="34" charset="0"/>
-                <a:ea typeface="Microsoft YaHei" pitchFamily="34" charset="-122"/>
-                <a:cs typeface="Microsoft YaHei" pitchFamily="34" charset="-120"/>
-              </a:rPr>
-              <a:t>同结构再次学到 → 为原定义记一次佐证；同名不同结构 → 并存，由智能体依据口径选择；其他定义遇到相同的条件失败 → 复用验证结果与修复；失效后 → 重新学习，通过准入检查再作为新修订发布。</a:t>
-            </a:r>
-            <a:endParaRPr lang="en-US" sz="1300" dirty="0"/>
-          </a:p>
-        </p:txBody>
-      </p:sp>
-      <p:sp>
-        <p:nvSpPr>
-          <p:cNvPr id="25" name="Slide Number Placeholder 0"/>
-          <p:cNvSpPr>
-            <a:spLocks noGrp="1"/>
-          </p:cNvSpPr>
-          <p:nvPr>
-            <p:ph type="sldNum" sz="quarter" idx="4294967295"/>
-          </p:nvPr>
-        </p:nvSpPr>
-        <p:spPr>
-          <a:xfrm>
-            <a:off x="11185855" y="6446520"/>
-            <a:ext cx="457200" cy="274320"/>
-          </a:xfrm>
-          <a:prstGeom prst="rect">
-            <a:avLst/>
-          </a:prstGeom>
-          <a:extLst>
-            <a:ext uri="{C572A759-6A51-4108-AA02-DFA0A04FC94B}">
-              <ma14:wrappingTextBoxFlag xmlns:ma14="http://schemas.microsoft.com/office/mac/drawingml/2011/main" val="0"/>
-            </a:ext>
-          </a:extLst>
-        </p:spPr>
-        <p:txBody>
-          <a:bodyPr/>
-          <a:lstStyle>
-            <a:lvl1pPr>
-              <a:defRPr sz="1000">
-                <a:solidFill>
-                  <a:srgbClr val="5B6573"/>
-                </a:solidFill>
-                <a:latin typeface="Microsoft YaHei"/>
-                <a:ea typeface="Microsoft YaHei"/>
-                <a:cs typeface="Microsoft YaHei"/>
-              </a:defRPr>
-            </a:lvl1pPr>
-          </a:lstStyle>
-          <a:p>
-            <a:pPr algn="r"/>
-            <a:fld id="{F7021451-1387-4CA6-816F-3879F97B5CBC}" type="slidenum">
-              <a:rPr b="0" lang="en-US"/>
-              <a:t>14</a:t>
-            </a:fld>
-            <a:endParaRPr lang="en-US"/>
-          </a:p>
-        </p:txBody>
-      </p:sp>
-    </p:spTree>
-  </p:cSld>
-  <p:clrMapOvr>
-    <a:masterClrMapping/>
-  </p:clrMapOvr>
-</p:sld>
-</file>
-
-<file path=ppt/slides/slide15.xml><?xml version="1.0" encoding="utf-8"?>
-<p:sld xmlns:a="http://schemas.openxmlformats.org/drawingml/2006/main" xmlns:r="http://schemas.openxmlformats.org/officeDocument/2006/relationships" xmlns:p="http://schemas.openxmlformats.org/presentationml/2006/main">
-  <p:cSld name="Slide 15">
-    <p:spTree>
-      <p:nvGrpSpPr>
-        <p:cNvPr id="1" name=""/>
-        <p:cNvGrpSpPr/>
-        <p:nvPr/>
-      </p:nvGrpSpPr>
-      <p:grpSpPr>
-        <a:xfrm>
-          <a:off x="0" y="0"/>
-          <a:ext cx="0" cy="0"/>
-          <a:chOff x="0" y="0"/>
-          <a:chExt cx="0" cy="0"/>
-        </a:xfrm>
-      </p:grpSpPr>
-      <p:sp>
-        <p:nvSpPr>
-          <p:cNvPr id="2" name="Text 0"/>
-          <p:cNvSpPr/>
-          <p:nvPr>
-            <p:ph idx="100" type="title" hasCustomPrompt="1"/>
-          </p:nvPr>
-        </p:nvSpPr>
-        <p:spPr>
-          <a:xfrm>
-            <a:off x="548640" y="274320"/>
-            <a:ext cx="11094415" cy="685800"/>
-          </a:xfrm>
-          <a:prstGeom prst="rect">
-            <a:avLst/>
-          </a:prstGeom>
-          <a:noFill/>
-          <a:ln/>
-        </p:spPr>
-        <p:txBody>
-          <a:bodyPr wrap="square" lIns="0" tIns="0" rIns="0" bIns="0" rtlCol="0" anchor="ctr"/>
-          <a:lstStyle/>
-          <a:p>
-            <a:pPr algn="l" indent="0" marL="0">
-              <a:buNone/>
-            </a:pPr>
-            <a:r>
-              <a:rPr lang="en-US" sz="2800" b="1" dirty="0">
-                <a:solidFill>
-                  <a:srgbClr val="1F2A37"/>
-                </a:solidFill>
-                <a:latin typeface="Microsoft YaHei" pitchFamily="34" charset="0"/>
-                <a:ea typeface="Microsoft YaHei" pitchFamily="34" charset="-122"/>
-                <a:cs typeface="Microsoft YaHei" pitchFamily="34" charset="-120"/>
-              </a:rPr>
-              <a:t>数据更正之后：B 的真实调用序列与 MAVRA 背后的查询</a:t>
-            </a:r>
-            <a:endParaRPr lang="en-US" sz="2800" dirty="0"/>
-          </a:p>
-        </p:txBody>
-      </p:sp>
-      <p:graphicFrame>
-        <p:nvGraphicFramePr>
-          <p:cNvPr id="16" name="Table 0"/>
-          <p:cNvGraphicFramePr>
-            <a:graphicFrameLocks noGrp="1"/>
-          </p:cNvGraphicFramePr>
-          <p:nvPr>
-            <p:extLst>
-              <p:ext uri="{D42A27DB-BD31-4B8C-83A1-F6EECF244321}">
-                <p14:modId xmlns:p14="http://schemas.microsoft.com/office/powerpoint/2010/main" val="1579011935"/>
-              </p:ext>
-            </p:extLst>
-          </p:nvPr>
-        </p:nvGraphicFramePr>
-        <p:xfrm>
-          <a:off x="548640" y="1051560"/>
-          <a:ext cx="11094415" cy="914400"/>
-        </p:xfrm>
-        <a:graphic>
-          <a:graphicData uri="http://schemas.openxmlformats.org/drawingml/2006/table">
-            <a:tbl>
-              <a:tblPr/>
-              <a:tblGrid>
-                <a:gridCol w="320040"/>
-                <a:gridCol w="3931920"/>
-                <a:gridCol w="6126480"/>
-                <a:gridCol w="715975"/>
-              </a:tblGrid>
-              <a:tr h="0">
-                <a:tc>
-                  <a:txBody>
-                    <a:bodyPr/>
-                    <a:lstStyle/>
-                    <a:p>
-                      <a:pPr indent="0" marL="0">
-                        <a:buNone/>
-                      </a:pPr>
-                      <a:endParaRPr lang="en-US" sz="1000" dirty="0">
-                        <a:latin typeface="Microsoft YaHei" charset="0"/>
-                        <a:ea typeface="Microsoft YaHei" charset="0"/>
-                        <a:cs typeface="Microsoft YaHei" charset="0"/>
-                      </a:endParaRPr>
-                    </a:p>
-                  </a:txBody>
-                  <a:tcPr marL="91440" marR="91440" marT="54864" marB="54864" anchor="ctr">
-                    <a:lnL w="12700" cap="flat" cmpd="sng" algn="ctr">
-                      <a:solidFill>
-                        <a:srgbClr val="D5DBE3"/>
-                      </a:solidFill>
-                      <a:prstDash val="solid"/>
-                      <a:round/>
-                      <a:headEnd type="none" w="med" len="med"/>
-                      <a:tailEnd type="none" w="med" len="med"/>
-                    </a:lnL>
-                    <a:lnR w="12700" cap="flat" cmpd="sng" algn="ctr">
-                      <a:solidFill>
-                        <a:srgbClr val="D5DBE3"/>
-                      </a:solidFill>
-                      <a:prstDash val="solid"/>
-                      <a:round/>
-                      <a:headEnd type="none" w="med" len="med"/>
-                      <a:tailEnd type="none" w="med" len="med"/>
-                    </a:lnR>
-                    <a:lnT w="12700" cap="flat" cmpd="sng" algn="ctr">
-                      <a:solidFill>
-                        <a:srgbClr val="D5DBE3"/>
-                      </a:solidFill>
-                      <a:prstDash val="solid"/>
-                      <a:round/>
-                      <a:headEnd type="none" w="med" len="med"/>
-                      <a:tailEnd type="none" w="med" len="med"/>
-                    </a:lnT>
-                    <a:lnB w="12700" cap="flat" cmpd="sng" algn="ctr">
-                      <a:solidFill>
-                        <a:srgbClr val="D5DBE3"/>
-                      </a:solidFill>
-                      <a:prstDash val="solid"/>
-                      <a:round/>
-                      <a:headEnd type="none" w="med" len="med"/>
-                      <a:tailEnd type="none" w="med" len="med"/>
-                    </a:lnB>
-                    <a:solidFill>
-                      <a:srgbClr val="F1F3F6"/>
-                    </a:solidFill>
-                  </a:tcPr>
-                </a:tc>
-                <a:tc>
-                  <a:txBody>
-                    <a:bodyPr/>
-                    <a:lstStyle/>
-                    <a:p>
-                      <a:pPr indent="0" marL="0">
-                        <a:buNone/>
-                      </a:pPr>
-                      <a:r>
-                        <a:rPr lang="en-US" sz="1000" b="1" dirty="0">
-                          <a:solidFill>
-                            <a:srgbClr val="1F2A37"/>
-                          </a:solidFill>
-                          <a:latin typeface="Microsoft YaHei" pitchFamily="34" charset="0"/>
-                          <a:ea typeface="Microsoft YaHei" pitchFamily="34" charset="-122"/>
-                          <a:cs typeface="Microsoft YaHei" pitchFamily="34" charset="-120"/>
-                        </a:rPr>
-                        <a:t>调用</a:t>
-                      </a:r>
-                      <a:endParaRPr lang="en-US" sz="1000" dirty="0">
-                        <a:latin typeface="Microsoft YaHei" charset="0"/>
-                        <a:ea typeface="Microsoft YaHei" charset="0"/>
-                        <a:cs typeface="Microsoft YaHei" charset="0"/>
-                      </a:endParaRPr>
-                    </a:p>
-                  </a:txBody>
-                  <a:tcPr marL="91440" marR="91440" marT="54864" marB="54864" anchor="ctr">
-                    <a:lnL w="12700" cap="flat" cmpd="sng" algn="ctr">
-                      <a:solidFill>
-                        <a:srgbClr val="D5DBE3"/>
-                      </a:solidFill>
-                      <a:prstDash val="solid"/>
-                      <a:round/>
-                      <a:headEnd type="none" w="med" len="med"/>
-                      <a:tailEnd type="none" w="med" len="med"/>
-                    </a:lnL>
-                    <a:lnR w="12700" cap="flat" cmpd="sng" algn="ctr">
-                      <a:solidFill>
-                        <a:srgbClr val="D5DBE3"/>
-                      </a:solidFill>
-                      <a:prstDash val="solid"/>
-                      <a:round/>
-                      <a:headEnd type="none" w="med" len="med"/>
-                      <a:tailEnd type="none" w="med" len="med"/>
-                    </a:lnR>
-                    <a:lnT w="12700" cap="flat" cmpd="sng" algn="ctr">
-                      <a:solidFill>
-                        <a:srgbClr val="D5DBE3"/>
-                      </a:solidFill>
-                      <a:prstDash val="solid"/>
-                      <a:round/>
-                      <a:headEnd type="none" w="med" len="med"/>
-                      <a:tailEnd type="none" w="med" len="med"/>
-                    </a:lnT>
-                    <a:lnB w="12700" cap="flat" cmpd="sng" algn="ctr">
-                      <a:solidFill>
-                        <a:srgbClr val="D5DBE3"/>
-                      </a:solidFill>
-                      <a:prstDash val="solid"/>
-                      <a:round/>
-       